--- a/ai-markets-deck.pptx
+++ b/ai-markets-deck.pptx
@@ -217,7 +217,7 @@
                 <c:formatCode>General</c:formatCode>
                 <c:ptCount val="5"/>
                 <c:pt idx="0">
-                  <c:v>390</c:v>
+                  <c:v>302</c:v>
                 </c:pt>
                 <c:pt idx="1">
                   <c:v>295</c:v>
@@ -480,13 +480,13 @@
                   <c:v>16</c:v>
                 </c:pt>
                 <c:pt idx="2">
-                  <c:v>38</c:v>
+                  <c:v>35</c:v>
                 </c:pt>
                 <c:pt idx="3">
-                  <c:v>60</c:v>
+                  <c:v>55</c:v>
                 </c:pt>
                 <c:pt idx="4">
-                  <c:v>82</c:v>
+                  <c:v>80</c:v>
                 </c:pt>
                 <c:pt idx="5">
                   <c:v>100</c:v>
@@ -725,13 +725,13 @@
                 <c:formatCode>General</c:formatCode>
                 <c:ptCount val="3"/>
                 <c:pt idx="0">
-                  <c:v>62</c:v>
+                  <c:v>60</c:v>
                 </c:pt>
                 <c:pt idx="1">
-                  <c:v>21</c:v>
+                  <c:v>22</c:v>
                 </c:pt>
                 <c:pt idx="2">
-                  <c:v>17</c:v>
+                  <c:v>18</c:v>
                 </c:pt>
               </c:numCache>
             </c:numRef>
@@ -965,27 +965,24 @@
           </c:marker>
           <c:cat>
             <c:multiLvlStrRef>
-              <c:f>Sheet1!$A$2:$A$7</c:f>
+              <c:f>Sheet1!$A$2:$A$6</c:f>
               <c:multiLvlStrCache>
-                <c:ptCount val="6"/>
+                <c:ptCount val="5"/>
                 <c:lvl>
                   <c:pt idx="0">
                     <c:v>Jan 1</c:v>
                   </c:pt>
                   <c:pt idx="1">
-                    <c:v>Jan 17</c:v>
+                    <c:v>Jan 31</c:v>
                   </c:pt>
                   <c:pt idx="2">
-                    <c:v>Jan 31</c:v>
+                    <c:v>Feb 28</c:v>
                   </c:pt>
                   <c:pt idx="3">
-                    <c:v>Feb 14</c:v>
+                    <c:v>Mar 31</c:v>
                   </c:pt>
                   <c:pt idx="4">
-                    <c:v>Feb 28</c:v>
-                  </c:pt>
-                  <c:pt idx="5">
-                    <c:v>Mar 14</c:v>
+                    <c:v>Apr 17</c:v>
                   </c:pt>
                 </c:lvl>
               </c:multiLvlStrCache>
@@ -993,27 +990,24 @@
           </c:cat>
           <c:val>
             <c:numRef>
-              <c:f>Sheet1!$B$2:$B$7</c:f>
+              <c:f>Sheet1!$B$2:$B$6</c:f>
               <c:numCache>
                 <c:formatCode>General</c:formatCode>
-                <c:ptCount val="6"/>
+                <c:ptCount val="5"/>
                 <c:pt idx="0">
                   <c:v>100</c:v>
                 </c:pt>
                 <c:pt idx="1">
-                  <c:v>106</c:v>
+                  <c:v>110</c:v>
                 </c:pt>
                 <c:pt idx="2">
-                  <c:v>110</c:v>
+                  <c:v>118</c:v>
                 </c:pt>
                 <c:pt idx="3">
-                  <c:v>112</c:v>
+                  <c:v>128</c:v>
                 </c:pt>
                 <c:pt idx="4">
-                  <c:v>114</c:v>
-                </c:pt>
-                <c:pt idx="5">
-                  <c:v>115</c:v>
+                  <c:v>138</c:v>
                 </c:pt>
               </c:numCache>
             </c:numRef>
@@ -1091,27 +1085,24 @@
           </c:marker>
           <c:cat>
             <c:multiLvlStrRef>
-              <c:f>Sheet1!$A$2:$A$7</c:f>
+              <c:f>Sheet1!$A$2:$A$6</c:f>
               <c:multiLvlStrCache>
-                <c:ptCount val="6"/>
+                <c:ptCount val="5"/>
                 <c:lvl>
                   <c:pt idx="0">
                     <c:v>Jan 1</c:v>
                   </c:pt>
                   <c:pt idx="1">
-                    <c:v>Jan 17</c:v>
+                    <c:v>Jan 31</c:v>
                   </c:pt>
                   <c:pt idx="2">
-                    <c:v>Jan 31</c:v>
+                    <c:v>Feb 28</c:v>
                   </c:pt>
                   <c:pt idx="3">
-                    <c:v>Feb 14</c:v>
+                    <c:v>Mar 31</c:v>
                   </c:pt>
                   <c:pt idx="4">
-                    <c:v>Feb 28</c:v>
-                  </c:pt>
-                  <c:pt idx="5">
-                    <c:v>Mar 14</c:v>
+                    <c:v>Apr 17</c:v>
                   </c:pt>
                 </c:lvl>
               </c:multiLvlStrCache>
@@ -1119,27 +1110,24 @@
           </c:cat>
           <c:val>
             <c:numRef>
-              <c:f>Sheet1!$C$2:$C$7</c:f>
+              <c:f>Sheet1!$C$2:$C$6</c:f>
               <c:numCache>
                 <c:formatCode>General</c:formatCode>
-                <c:ptCount val="6"/>
+                <c:ptCount val="5"/>
                 <c:pt idx="0">
                   <c:v>100</c:v>
                 </c:pt>
                 <c:pt idx="1">
+                  <c:v>98</c:v>
+                </c:pt>
+                <c:pt idx="2">
+                  <c:v>96</c:v>
+                </c:pt>
+                <c:pt idx="3">
                   <c:v>99</c:v>
                 </c:pt>
-                <c:pt idx="2">
-                  <c:v>97</c:v>
-                </c:pt>
-                <c:pt idx="3">
-                  <c:v>96</c:v>
-                </c:pt>
                 <c:pt idx="4">
-                  <c:v>95</c:v>
-                </c:pt>
-                <c:pt idx="5">
-                  <c:v>95</c:v>
+                  <c:v>104</c:v>
                 </c:pt>
               </c:numCache>
             </c:numRef>
@@ -1217,27 +1205,24 @@
           </c:marker>
           <c:cat>
             <c:multiLvlStrRef>
-              <c:f>Sheet1!$A$2:$A$7</c:f>
+              <c:f>Sheet1!$A$2:$A$6</c:f>
               <c:multiLvlStrCache>
-                <c:ptCount val="6"/>
+                <c:ptCount val="5"/>
                 <c:lvl>
                   <c:pt idx="0">
                     <c:v>Jan 1</c:v>
                   </c:pt>
                   <c:pt idx="1">
-                    <c:v>Jan 17</c:v>
+                    <c:v>Jan 31</c:v>
                   </c:pt>
                   <c:pt idx="2">
-                    <c:v>Jan 31</c:v>
+                    <c:v>Feb 28</c:v>
                   </c:pt>
                   <c:pt idx="3">
-                    <c:v>Feb 14</c:v>
+                    <c:v>Mar 31</c:v>
                   </c:pt>
                   <c:pt idx="4">
-                    <c:v>Feb 28</c:v>
-                  </c:pt>
-                  <c:pt idx="5">
-                    <c:v>Mar 14</c:v>
+                    <c:v>Apr 17</c:v>
                   </c:pt>
                 </c:lvl>
               </c:multiLvlStrCache>
@@ -1245,27 +1230,24 @@
           </c:cat>
           <c:val>
             <c:numRef>
-              <c:f>Sheet1!$D$2:$D$7</c:f>
+              <c:f>Sheet1!$D$2:$D$6</c:f>
               <c:numCache>
                 <c:formatCode>General</c:formatCode>
-                <c:ptCount val="6"/>
+                <c:ptCount val="5"/>
                 <c:pt idx="0">
                   <c:v>100</c:v>
                 </c:pt>
                 <c:pt idx="1">
-                  <c:v>93</c:v>
+                  <c:v>88</c:v>
                 </c:pt>
                 <c:pt idx="2">
-                  <c:v>86</c:v>
+                  <c:v>78</c:v>
                 </c:pt>
                 <c:pt idx="3">
-                  <c:v>80</c:v>
+                  <c:v>76</c:v>
                 </c:pt>
                 <c:pt idx="4">
-                  <c:v>78</c:v>
-                </c:pt>
-                <c:pt idx="5">
-                  <c:v>76</c:v>
+                  <c:v>80</c:v>
                 </c:pt>
               </c:numCache>
             </c:numRef>
@@ -4054,7 +4036,71 @@
       </p:grpSpPr>
       <p:sp>
         <p:nvSpPr>
-          <p:cNvPr id="2" name="Text 0"/>
+          <p:cNvPr id="2" name="Shape 0"/>
+          <p:cNvSpPr/>
+          <p:nvPr/>
+        </p:nvSpPr>
+        <p:spPr>
+          <a:xfrm>
+            <a:off x="5989320" y="822960"/>
+            <a:ext cx="2743200" cy="2788920"/>
+          </a:xfrm>
+          <a:prstGeom prst="rect">
+            <a:avLst/>
+          </a:prstGeom>
+          <a:solidFill>
+            <a:srgbClr val="EEEEEE"/>
+          </a:solidFill>
+          <a:ln w="9525">
+            <a:solidFill>
+              <a:srgbClr val="BBBBBB"/>
+            </a:solidFill>
+            <a:prstDash val="dash"/>
+          </a:ln>
+        </p:spPr>
+      </p:sp>
+      <p:sp>
+        <p:nvSpPr>
+          <p:cNvPr id="3" name="Text 1"/>
+          <p:cNvSpPr/>
+          <p:nvPr/>
+        </p:nvSpPr>
+        <p:spPr>
+          <a:xfrm>
+            <a:off x="6080760" y="822960"/>
+            <a:ext cx="2560320" cy="2788920"/>
+          </a:xfrm>
+          <a:prstGeom prst="rect">
+            <a:avLst/>
+          </a:prstGeom>
+          <a:noFill/>
+          <a:ln/>
+        </p:spPr>
+        <p:txBody>
+          <a:bodyPr wrap="square" lIns="0" tIns="0" rIns="0" bIns="0" rtlCol="0" anchor="ctr"/>
+          <a:lstStyle/>
+          <a:p>
+            <a:pPr algn="ctr" indent="0" marL="0">
+              <a:buNone/>
+            </a:pPr>
+            <a:r>
+              <a:rPr lang="en-US" sz="1000" i="1" dirty="0">
+                <a:solidFill>
+                  <a:srgbClr val="888888"/>
+                </a:solidFill>
+                <a:latin typeface="Arial" pitchFamily="34" charset="0"/>
+                <a:ea typeface="Arial" pitchFamily="34" charset="-122"/>
+                <a:cs typeface="Arial" pitchFamily="34" charset="-120"/>
+              </a:rPr>
+              <a:t>IMAGE: Hero — abstract GPU / data-center close-up</a:t>
+            </a:r>
+            <a:endParaRPr lang="en-US" sz="1000" dirty="0"/>
+          </a:p>
+        </p:txBody>
+      </p:sp>
+      <p:sp>
+        <p:nvSpPr>
+          <p:cNvPr id="4" name="Text 2"/>
           <p:cNvSpPr/>
           <p:nvPr/>
         </p:nvSpPr>
@@ -4085,7 +4131,7 @@
                 <a:ea typeface="Arial" pitchFamily="34" charset="-122"/>
                 <a:cs typeface="Arial" pitchFamily="34" charset="-120"/>
               </a:rPr>
-              <a:t>March 2026</a:t>
+              <a:t>May 2026</a:t>
             </a:r>
             <a:endParaRPr lang="en-US" sz="1400" dirty="0"/>
           </a:p>
@@ -4093,7 +4139,7 @@
       </p:sp>
       <p:sp>
         <p:nvSpPr>
-          <p:cNvPr id="3" name="Shape 1"/>
+          <p:cNvPr id="5" name="Shape 3"/>
           <p:cNvSpPr/>
           <p:nvPr/>
         </p:nvSpPr>
@@ -4116,14 +4162,39 @@
       </p:sp>
       <p:sp>
         <p:nvSpPr>
-          <p:cNvPr id="4" name="Text 2"/>
-          <p:cNvSpPr/>
-          <p:nvPr/>
-        </p:nvSpPr>
-        <p:spPr>
-          <a:xfrm>
-            <a:off x="457200" y="1463040"/>
-            <a:ext cx="8229600" cy="1097280"/>
+          <p:cNvPr id="6" name="Shape 4"/>
+          <p:cNvSpPr/>
+          <p:nvPr/>
+        </p:nvSpPr>
+        <p:spPr>
+          <a:xfrm>
+            <a:off x="457200" y="1417320"/>
+            <a:ext cx="731520" cy="91440"/>
+          </a:xfrm>
+          <a:prstGeom prst="rect">
+            <a:avLst/>
+          </a:prstGeom>
+          <a:solidFill>
+            <a:srgbClr val="F6693D"/>
+          </a:solidFill>
+          <a:ln w="12700">
+            <a:solidFill>
+              <a:srgbClr val="F6693D"/>
+            </a:solidFill>
+            <a:prstDash val="solid"/>
+          </a:ln>
+        </p:spPr>
+      </p:sp>
+      <p:sp>
+        <p:nvSpPr>
+          <p:cNvPr id="7" name="Text 5"/>
+          <p:cNvSpPr/>
+          <p:nvPr/>
+        </p:nvSpPr>
+        <p:spPr>
+          <a:xfrm>
+            <a:off x="457200" y="1645920"/>
+            <a:ext cx="5669280" cy="1280160"/>
           </a:xfrm>
           <a:prstGeom prst="rect">
             <a:avLst/>
@@ -4139,7 +4210,7 @@
               <a:buNone/>
             </a:pPr>
             <a:r>
-              <a:rPr lang="en-US" sz="7200" b="1" dirty="0">
+              <a:rPr lang="en-US" sz="6600" b="1" dirty="0">
                 <a:solidFill>
                   <a:srgbClr val="000000"/>
                 </a:solidFill>
@@ -4149,20 +4220,20 @@
               </a:rPr>
               <a:t>AI Markets</a:t>
             </a:r>
-            <a:endParaRPr lang="en-US" sz="7200" dirty="0"/>
-          </a:p>
-        </p:txBody>
-      </p:sp>
-      <p:sp>
-        <p:nvSpPr>
-          <p:cNvPr id="5" name="Text 3"/>
-          <p:cNvSpPr/>
-          <p:nvPr/>
-        </p:nvSpPr>
-        <p:spPr>
-          <a:xfrm>
-            <a:off x="457200" y="2514600"/>
-            <a:ext cx="8229600" cy="548640"/>
+            <a:endParaRPr lang="en-US" sz="6600" dirty="0"/>
+          </a:p>
+        </p:txBody>
+      </p:sp>
+      <p:sp>
+        <p:nvSpPr>
+          <p:cNvPr id="8" name="Text 6"/>
+          <p:cNvSpPr/>
+          <p:nvPr/>
+        </p:nvSpPr>
+        <p:spPr>
+          <a:xfrm>
+            <a:off x="457200" y="2971800"/>
+            <a:ext cx="5486400" cy="457200"/>
           </a:xfrm>
           <a:prstGeom prst="rect">
             <a:avLst/>
@@ -4178,7 +4249,7 @@
               <a:buNone/>
             </a:pPr>
             <a:r>
-              <a:rPr lang="en-US" sz="2200" b="1" dirty="0">
+              <a:rPr lang="en-US" sz="1700" b="1" dirty="0">
                 <a:solidFill>
                   <a:srgbClr val="000000"/>
                 </a:solidFill>
@@ -4186,54 +4257,15 @@
                 <a:ea typeface="Arial Black" pitchFamily="34" charset="-122"/>
                 <a:cs typeface="Arial Black" pitchFamily="34" charset="-120"/>
               </a:rPr>
-              <a:t>The largest capex cycle in history — and the market picking winners inside it.</a:t>
-            </a:r>
-            <a:endParaRPr lang="en-US" sz="2200" dirty="0"/>
-          </a:p>
-        </p:txBody>
-      </p:sp>
-      <p:sp>
-        <p:nvSpPr>
-          <p:cNvPr id="6" name="Text 4"/>
-          <p:cNvSpPr/>
-          <p:nvPr/>
-        </p:nvSpPr>
-        <p:spPr>
-          <a:xfrm>
-            <a:off x="457200" y="3246120"/>
-            <a:ext cx="7680960" cy="822960"/>
-          </a:xfrm>
-          <a:prstGeom prst="rect">
-            <a:avLst/>
-          </a:prstGeom>
-          <a:noFill/>
-          <a:ln/>
-        </p:spPr>
-        <p:txBody>
-          <a:bodyPr wrap="square" lIns="0" tIns="0" rIns="0" bIns="0" rtlCol="0" anchor="t"/>
-          <a:lstStyle/>
-          <a:p>
-            <a:pPr indent="0" marL="0">
-              <a:buNone/>
-            </a:pPr>
-            <a:r>
-              <a:rPr lang="en-US" sz="1300" dirty="0">
-                <a:solidFill>
-                  <a:srgbClr val="333333"/>
-                </a:solidFill>
-                <a:latin typeface="Arial" pitchFamily="34" charset="0"/>
-                <a:ea typeface="Arial" pitchFamily="34" charset="-122"/>
-                <a:cs typeface="Arial" pitchFamily="34" charset="-120"/>
-              </a:rPr>
-              <a:t>$685B in 2026 hyperscaler capex. A 39-point YTD spread between semis and software. A market that has stopped trading AI as a basket.</a:t>
-            </a:r>
-            <a:endParaRPr lang="en-US" sz="1300" dirty="0"/>
-          </a:p>
-        </p:txBody>
-      </p:sp>
-      <p:sp>
-        <p:nvSpPr>
-          <p:cNvPr id="7" name="Text 5"/>
+              <a:t>The capex cycle repricing every layer of tech.</a:t>
+            </a:r>
+            <a:endParaRPr lang="en-US" sz="1700" dirty="0"/>
+          </a:p>
+        </p:txBody>
+      </p:sp>
+      <p:sp>
+        <p:nvSpPr>
+          <p:cNvPr id="9" name="Text 7"/>
           <p:cNvSpPr/>
           <p:nvPr/>
         </p:nvSpPr>
@@ -4272,7 +4304,7 @@
       </p:sp>
       <p:sp>
         <p:nvSpPr>
-          <p:cNvPr id="8" name="Shape 6"/>
+          <p:cNvPr id="10" name="Shape 8"/>
           <p:cNvSpPr/>
           <p:nvPr/>
         </p:nvSpPr>
@@ -4297,7 +4329,7 @@
       </p:sp>
       <p:sp>
         <p:nvSpPr>
-          <p:cNvPr id="9" name="Text 7"/>
+          <p:cNvPr id="11" name="Text 9"/>
           <p:cNvSpPr/>
           <p:nvPr/>
         </p:nvSpPr>
@@ -4505,7 +4537,30 @@
       </p:sp>
       <p:sp>
         <p:nvSpPr>
-          <p:cNvPr id="6" name="Text 4"/>
+          <p:cNvPr id="6" name="Shape 4"/>
+          <p:cNvSpPr/>
+          <p:nvPr/>
+        </p:nvSpPr>
+        <p:spPr>
+          <a:xfrm>
+            <a:off x="457200" y="1325880"/>
+            <a:ext cx="8229600" cy="0"/>
+          </a:xfrm>
+          <a:prstGeom prst="line">
+            <a:avLst/>
+          </a:prstGeom>
+          <a:noFill/>
+          <a:ln w="9525">
+            <a:solidFill>
+              <a:srgbClr val="E5E5E5"/>
+            </a:solidFill>
+            <a:prstDash val="solid"/>
+          </a:ln>
+        </p:spPr>
+      </p:sp>
+      <p:sp>
+        <p:nvSpPr>
+          <p:cNvPr id="7" name="Text 5"/>
           <p:cNvSpPr/>
           <p:nvPr/>
         </p:nvSpPr>
@@ -4544,7 +4599,7 @@
       </p:sp>
       <p:sp>
         <p:nvSpPr>
-          <p:cNvPr id="7" name="Shape 5"/>
+          <p:cNvPr id="8" name="Shape 6"/>
           <p:cNvSpPr/>
           <p:nvPr/>
         </p:nvSpPr>
@@ -4567,7 +4622,7 @@
       </p:sp>
       <p:graphicFrame>
         <p:nvGraphicFramePr>
-          <p:cNvPr id="8" name="Chart 0" descr=""/>
+          <p:cNvPr id="9" name="Chart 0" descr=""/>
           <p:cNvGraphicFramePr/>
           <p:nvPr/>
         </p:nvGraphicFramePr>
@@ -4583,7 +4638,7 @@
       </p:graphicFrame>
       <p:sp>
         <p:nvSpPr>
-          <p:cNvPr id="9" name="Text 6"/>
+          <p:cNvPr id="10" name="Text 7"/>
           <p:cNvSpPr/>
           <p:nvPr/>
         </p:nvSpPr>
@@ -4614,7 +4669,7 @@
                 <a:ea typeface="Arial" pitchFamily="34" charset="-122"/>
                 <a:cs typeface="Arial" pitchFamily="34" charset="-120"/>
               </a:rPr>
-              <a:t>HBM supplier share, 2025</a:t>
+              <a:t>HBM supplier share, Q1 2026</a:t>
             </a:r>
             <a:endParaRPr lang="en-US" sz="1400" dirty="0"/>
           </a:p>
@@ -4622,7 +4677,7 @@
       </p:sp>
       <p:sp>
         <p:nvSpPr>
-          <p:cNvPr id="10" name="Shape 7"/>
+          <p:cNvPr id="11" name="Shape 8"/>
           <p:cNvSpPr/>
           <p:nvPr/>
         </p:nvSpPr>
@@ -4645,7 +4700,7 @@
       </p:sp>
       <p:graphicFrame>
         <p:nvGraphicFramePr>
-          <p:cNvPr id="11" name="Chart 1" descr=""/>
+          <p:cNvPr id="12" name="Chart 1" descr=""/>
           <p:cNvGraphicFramePr/>
           <p:nvPr/>
         </p:nvGraphicFramePr>
@@ -4661,7 +4716,7 @@
       </p:graphicFrame>
       <p:sp>
         <p:nvSpPr>
-          <p:cNvPr id="12" name="Shape 8"/>
+          <p:cNvPr id="13" name="Shape 9"/>
           <p:cNvSpPr/>
           <p:nvPr/>
         </p:nvSpPr>
@@ -4686,7 +4741,7 @@
       </p:sp>
       <p:sp>
         <p:nvSpPr>
-          <p:cNvPr id="13" name="Text 9"/>
+          <p:cNvPr id="14" name="Text 10"/>
           <p:cNvSpPr/>
           <p:nvPr/>
         </p:nvSpPr>
@@ -4709,7 +4764,7 @@
               <a:buNone/>
             </a:pPr>
             <a:r>
-              <a:rPr lang="en-US" sz="1100" b="1" dirty="0">
+              <a:rPr lang="en-US" sz="1050" b="1" dirty="0">
                 <a:solidFill>
                   <a:srgbClr val="FFFFFF"/>
                 </a:solidFill>
@@ -4717,15 +4772,15 @@
                 <a:ea typeface="Arial" pitchFamily="34" charset="-122"/>
                 <a:cs typeface="Arial" pitchFamily="34" charset="-120"/>
               </a:rPr>
-              <a:t>HBM4 = 56× the bandwidth of DDR5 (2.8 TB/s vs 50 GB/s). HBM demand sold out through 2026. SK Hynix targets 70% HBM4 share for NVIDIA Rubin.</a:t>
-            </a:r>
-            <a:endParaRPr lang="en-US" sz="1100" dirty="0"/>
-          </a:p>
-        </p:txBody>
-      </p:sp>
-      <p:sp>
-        <p:nvSpPr>
-          <p:cNvPr id="14" name="Text 10"/>
+              <a:t>HBM4 = 56× the bandwidth of DDR5 (2.8 TB/s vs 50 GB/s). All three suppliers sold out for 2026. SK Hynix targets ~70% HBM4 share for NVIDIA Rubin; Samsung aims to push above 30% as HBM4 ramps.</a:t>
+            </a:r>
+            <a:endParaRPr lang="en-US" sz="1050" dirty="0"/>
+          </a:p>
+        </p:txBody>
+      </p:sp>
+      <p:sp>
+        <p:nvSpPr>
+          <p:cNvPr id="15" name="Text 11"/>
           <p:cNvSpPr/>
           <p:nvPr/>
         </p:nvSpPr>
@@ -4756,7 +4811,7 @@
                 <a:ea typeface="Arial" pitchFamily="34" charset="-122"/>
                 <a:cs typeface="Arial" pitchFamily="34" charset="-120"/>
               </a:rPr>
-              <a:t>Source: TrendForce, Counterpoint Research Q1 2026; SK Hynix, Micron, Samsung Q4 2025 filings.</a:t>
+              <a:t>Sources: Bank of America 2026 HBM TAM forecast; TrendForce; Counterpoint Research; SK Hynix, Micron, Samsung Q4 2025 filings; UBS (HBM4 share est.).</a:t>
             </a:r>
             <a:endParaRPr lang="en-US" sz="700" dirty="0"/>
           </a:p>
@@ -4764,7 +4819,7 @@
       </p:sp>
       <p:sp>
         <p:nvSpPr>
-          <p:cNvPr id="15" name="Shape 11"/>
+          <p:cNvPr id="16" name="Shape 12"/>
           <p:cNvSpPr/>
           <p:nvPr/>
         </p:nvSpPr>
@@ -4789,7 +4844,7 @@
       </p:sp>
       <p:sp>
         <p:nvSpPr>
-          <p:cNvPr id="16" name="Text 12"/>
+          <p:cNvPr id="17" name="Text 13"/>
           <p:cNvSpPr/>
           <p:nvPr/>
         </p:nvSpPr>
@@ -4828,7 +4883,7 @@
       </p:sp>
       <p:sp>
         <p:nvSpPr>
-          <p:cNvPr id="17" name="Text 13"/>
+          <p:cNvPr id="18" name="Text 14"/>
           <p:cNvSpPr/>
           <p:nvPr/>
         </p:nvSpPr>
@@ -5028,11 +5083,34 @@
                 <a:ea typeface="Arial" pitchFamily="34" charset="-122"/>
                 <a:cs typeface="Arial" pitchFamily="34" charset="-120"/>
               </a:rPr>
-              <a:t>Four frontier labs. $1.48T in aggregate private value. Feb 2026 was the largest VC month in history — $189B deployed.</a:t>
+              <a:t>Four frontier labs now worth ~$1.5T in aggregate private value. Q1 2026 doubled all of 2025's foundational-AI VC funding — and VCs are still chasing.</a:t>
             </a:r>
             <a:endParaRPr lang="en-US" sz="1350" dirty="0"/>
           </a:p>
         </p:txBody>
+      </p:sp>
+      <p:sp>
+        <p:nvSpPr>
+          <p:cNvPr id="6" name="Shape 4"/>
+          <p:cNvSpPr/>
+          <p:nvPr/>
+        </p:nvSpPr>
+        <p:spPr>
+          <a:xfrm>
+            <a:off x="457200" y="1325880"/>
+            <a:ext cx="8229600" cy="0"/>
+          </a:xfrm>
+          <a:prstGeom prst="line">
+            <a:avLst/>
+          </a:prstGeom>
+          <a:noFill/>
+          <a:ln w="9525">
+            <a:solidFill>
+              <a:srgbClr val="E5E5E5"/>
+            </a:solidFill>
+            <a:prstDash val="solid"/>
+          </a:ln>
+        </p:spPr>
       </p:sp>
       <p:graphicFrame>
         <p:nvGraphicFramePr>
@@ -5422,7 +5500,7 @@
                           <a:ea typeface="Arial" pitchFamily="34" charset="-122"/>
                           <a:cs typeface="Arial" pitchFamily="34" charset="-120"/>
                         </a:rPr>
-                        <a:t>$840B</a:t>
+                        <a:t>$852B</a:t>
                       </a:r>
                       <a:endParaRPr lang="en-US" sz="1050" dirty="0">
                         <a:latin typeface="Arial" charset="0"/>
@@ -5490,7 +5568,7 @@
                           <a:ea typeface="Arial" pitchFamily="34" charset="-122"/>
                           <a:cs typeface="Arial" pitchFamily="34" charset="-120"/>
                         </a:rPr>
-                        <a:t>~34× ARR</a:t>
+                        <a:t>~35× ARR</a:t>
                       </a:r>
                       <a:endParaRPr lang="en-US" sz="1050" dirty="0">
                         <a:latin typeface="Arial" charset="0"/>
@@ -5558,7 +5636,7 @@
                           <a:ea typeface="Arial" pitchFamily="34" charset="-122"/>
                           <a:cs typeface="Arial" pitchFamily="34" charset="-120"/>
                         </a:rPr>
-                        <a:t>$110B raise, for-profit conversion · Feb 2026</a:t>
+                        <a:t>$122B round led by Amazon / Nvidia / SoftBank · Apr 2026</a:t>
                       </a:r>
                       <a:endParaRPr lang="en-US" sz="950" dirty="0">
                         <a:latin typeface="Arial" charset="0"/>
@@ -5764,7 +5842,7 @@
                           <a:ea typeface="Arial" pitchFamily="34" charset="-122"/>
                           <a:cs typeface="Arial" pitchFamily="34" charset="-120"/>
                         </a:rPr>
-                        <a:t>~20× ARR</a:t>
+                        <a:t>~13× ARR</a:t>
                       </a:r>
                       <a:endParaRPr lang="en-US" sz="1050" dirty="0">
                         <a:latin typeface="Arial" charset="0"/>
@@ -5832,7 +5910,7 @@
                           <a:ea typeface="Arial" pitchFamily="34" charset="-122"/>
                           <a:cs typeface="Arial" pitchFamily="34" charset="-120"/>
                         </a:rPr>
-                        <a:t>$30B Series G · Feb 2026 · projects $70B rev by 2028</a:t>
+                        <a:t>$30B Series G (Feb); $30B ARR end-Mar; VCs now offering $800B+</a:t>
                       </a:r>
                       <a:endParaRPr lang="en-US" sz="950" dirty="0">
                         <a:latin typeface="Arial" charset="0"/>
@@ -5970,7 +6048,7 @@
                           <a:ea typeface="Arial" pitchFamily="34" charset="-122"/>
                           <a:cs typeface="Arial" pitchFamily="34" charset="-120"/>
                         </a:rPr>
-                        <a:t>$250B</a:t>
+                        <a:t>$230B</a:t>
                       </a:r>
                       <a:endParaRPr lang="en-US" sz="1050" dirty="0">
                         <a:latin typeface="Arial" charset="0"/>
@@ -6038,7 +6116,7 @@
                           <a:ea typeface="Arial" pitchFamily="34" charset="-122"/>
                           <a:cs typeface="Arial" pitchFamily="34" charset="-120"/>
                         </a:rPr>
-                        <a:t>~83× ARR*</a:t>
+                        <a:t>~77× ARR*</a:t>
                       </a:r>
                       <a:endParaRPr lang="en-US" sz="1050" dirty="0">
                         <a:latin typeface="Arial" charset="0"/>
@@ -6106,7 +6184,7 @@
                           <a:ea typeface="Arial" pitchFamily="34" charset="-122"/>
                           <a:cs typeface="Arial" pitchFamily="34" charset="-120"/>
                         </a:rPr>
-                        <a:t>Merged with SpaceX · Feb 2026</a:t>
+                        <a:t>$20B Nvidia-led Series E · Q1 2026 · merged w/ SpaceX</a:t>
                       </a:r>
                       <a:endParaRPr lang="en-US" sz="950" dirty="0">
                         <a:latin typeface="Arial" charset="0"/>
@@ -6438,7 +6516,7 @@
       </p:graphicFrame>
       <p:sp>
         <p:nvSpPr>
-          <p:cNvPr id="7" name="Shape 4"/>
+          <p:cNvPr id="8" name="Shape 5"/>
           <p:cNvSpPr/>
           <p:nvPr/>
         </p:nvSpPr>
@@ -6463,7 +6541,7 @@
       </p:sp>
       <p:sp>
         <p:nvSpPr>
-          <p:cNvPr id="8" name="Text 5"/>
+          <p:cNvPr id="9" name="Text 6"/>
           <p:cNvSpPr/>
           <p:nvPr/>
         </p:nvSpPr>
@@ -6494,7 +6572,7 @@
                 <a:ea typeface="Arial" pitchFamily="34" charset="-122"/>
                 <a:cs typeface="Arial" pitchFamily="34" charset="-120"/>
               </a:rPr>
-              <a:t>$189B raised in a single month (OpenAI $110B · Anthropic $30B · Waymo $16B). The labs consume compute at a rate that reprices every cloud P&amp;L.</a:t>
+              <a:t>Q1 2026 funding to foundational AI startups was 2× all of 2025. OpenAI's round alone ($122B) is larger than every AI raise in 2024 combined. The labs are repricing every cloud P&amp;L.</a:t>
             </a:r>
             <a:endParaRPr lang="en-US" sz="1150" dirty="0"/>
           </a:p>
@@ -6502,7 +6580,7 @@
       </p:sp>
       <p:sp>
         <p:nvSpPr>
-          <p:cNvPr id="9" name="Text 6"/>
+          <p:cNvPr id="10" name="Text 7"/>
           <p:cNvSpPr/>
           <p:nvPr/>
         </p:nvSpPr>
@@ -6533,7 +6611,7 @@
                 <a:ea typeface="Arial" pitchFamily="34" charset="-122"/>
                 <a:cs typeface="Arial" pitchFamily="34" charset="-120"/>
               </a:rPr>
-              <a:t>Source: The Information, Sacra (Feb 2026 run-rate), Bloomberg, Morgan Stanley TMT conf. *xAI ARR estimated.</a:t>
+              <a:t>Sources: TechCrunch, CNBC, Tech-Insider (Apr 2026); Crunchbase Q1 2026 VC data; Sacra ARR run-rates; Bloomberg. *xAI ARR estimated.</a:t>
             </a:r>
             <a:endParaRPr lang="en-US" sz="700" dirty="0"/>
           </a:p>
@@ -6541,7 +6619,7 @@
       </p:sp>
       <p:sp>
         <p:nvSpPr>
-          <p:cNvPr id="10" name="Shape 7"/>
+          <p:cNvPr id="11" name="Shape 8"/>
           <p:cNvSpPr/>
           <p:nvPr/>
         </p:nvSpPr>
@@ -6566,7 +6644,7 @@
       </p:sp>
       <p:sp>
         <p:nvSpPr>
-          <p:cNvPr id="11" name="Text 8"/>
+          <p:cNvPr id="12" name="Text 9"/>
           <p:cNvSpPr/>
           <p:nvPr/>
         </p:nvSpPr>
@@ -6605,7 +6683,7 @@
       </p:sp>
       <p:sp>
         <p:nvSpPr>
-          <p:cNvPr id="12" name="Text 9"/>
+          <p:cNvPr id="13" name="Text 10"/>
           <p:cNvSpPr/>
           <p:nvPr/>
         </p:nvSpPr>
@@ -6810,6 +6888,29 @@
             <a:endParaRPr lang="en-US" sz="1350" dirty="0"/>
           </a:p>
         </p:txBody>
+      </p:sp>
+      <p:sp>
+        <p:nvSpPr>
+          <p:cNvPr id="6" name="Shape 4"/>
+          <p:cNvSpPr/>
+          <p:nvPr/>
+        </p:nvSpPr>
+        <p:spPr>
+          <a:xfrm>
+            <a:off x="457200" y="1325880"/>
+            <a:ext cx="8229600" cy="0"/>
+          </a:xfrm>
+          <a:prstGeom prst="line">
+            <a:avLst/>
+          </a:prstGeom>
+          <a:noFill/>
+          <a:ln w="9525">
+            <a:solidFill>
+              <a:srgbClr val="E5E5E5"/>
+            </a:solidFill>
+            <a:prstDash val="solid"/>
+          </a:ln>
+        </p:spPr>
       </p:sp>
       <p:graphicFrame>
         <p:nvGraphicFramePr>
@@ -7856,7 +7957,7 @@
       </p:graphicFrame>
       <p:sp>
         <p:nvSpPr>
-          <p:cNvPr id="7" name="Shape 4"/>
+          <p:cNvPr id="8" name="Shape 5"/>
           <p:cNvSpPr/>
           <p:nvPr/>
         </p:nvSpPr>
@@ -7881,7 +7982,7 @@
       </p:sp>
       <p:sp>
         <p:nvSpPr>
-          <p:cNvPr id="8" name="Text 5"/>
+          <p:cNvPr id="9" name="Text 6"/>
           <p:cNvSpPr/>
           <p:nvPr/>
         </p:nvSpPr>
@@ -7920,7 +8021,7 @@
       </p:sp>
       <p:sp>
         <p:nvSpPr>
-          <p:cNvPr id="9" name="Text 6"/>
+          <p:cNvPr id="10" name="Text 7"/>
           <p:cNvSpPr/>
           <p:nvPr/>
         </p:nvSpPr>
@@ -7959,7 +8060,7 @@
       </p:sp>
       <p:sp>
         <p:nvSpPr>
-          <p:cNvPr id="10" name="Shape 7"/>
+          <p:cNvPr id="11" name="Shape 8"/>
           <p:cNvSpPr/>
           <p:nvPr/>
         </p:nvSpPr>
@@ -7984,7 +8085,7 @@
       </p:sp>
       <p:sp>
         <p:nvSpPr>
-          <p:cNvPr id="11" name="Text 8"/>
+          <p:cNvPr id="12" name="Text 9"/>
           <p:cNvSpPr/>
           <p:nvPr/>
         </p:nvSpPr>
@@ -8023,7 +8124,7 @@
       </p:sp>
       <p:sp>
         <p:nvSpPr>
-          <p:cNvPr id="12" name="Text 9"/>
+          <p:cNvPr id="13" name="Text 10"/>
           <p:cNvSpPr/>
           <p:nvPr/>
         </p:nvSpPr>
@@ -8223,7 +8324,7 @@
                 <a:ea typeface="Arial" pitchFamily="34" charset="-122"/>
                 <a:cs typeface="Arial" pitchFamily="34" charset="-120"/>
               </a:rPr>
-              <a:t>AI stock correlation collapsed from ~80% to ~20%. Semis are up, software is down — a 39-point YTD spread inside one theme.</a:t>
+              <a:t>AI stock correlation collapsed from ~80% to ~20%. Semis are up, software is down — a ~58-point YTD spread inside one theme.</a:t>
             </a:r>
             <a:endParaRPr lang="en-US" sz="1350" dirty="0"/>
           </a:p>
@@ -8231,7 +8332,30 @@
       </p:sp>
       <p:sp>
         <p:nvSpPr>
-          <p:cNvPr id="6" name="Text 4"/>
+          <p:cNvPr id="6" name="Shape 4"/>
+          <p:cNvSpPr/>
+          <p:nvPr/>
+        </p:nvSpPr>
+        <p:spPr>
+          <a:xfrm>
+            <a:off x="457200" y="1325880"/>
+            <a:ext cx="8229600" cy="0"/>
+          </a:xfrm>
+          <a:prstGeom prst="line">
+            <a:avLst/>
+          </a:prstGeom>
+          <a:noFill/>
+          <a:ln w="9525">
+            <a:solidFill>
+              <a:srgbClr val="E5E5E5"/>
+            </a:solidFill>
+            <a:prstDash val="solid"/>
+          </a:ln>
+        </p:spPr>
+      </p:sp>
+      <p:sp>
+        <p:nvSpPr>
+          <p:cNvPr id="7" name="Text 5"/>
           <p:cNvSpPr/>
           <p:nvPr/>
         </p:nvSpPr>
@@ -8270,7 +8394,7 @@
       </p:sp>
       <p:sp>
         <p:nvSpPr>
-          <p:cNvPr id="7" name="Shape 5"/>
+          <p:cNvPr id="8" name="Shape 6"/>
           <p:cNvSpPr/>
           <p:nvPr/>
         </p:nvSpPr>
@@ -8293,7 +8417,7 @@
       </p:sp>
       <p:graphicFrame>
         <p:nvGraphicFramePr>
-          <p:cNvPr id="8" name="Chart 0" descr=""/>
+          <p:cNvPr id="9" name="Chart 0" descr=""/>
           <p:cNvGraphicFramePr/>
           <p:nvPr/>
         </p:nvGraphicFramePr>
@@ -8309,7 +8433,7 @@
       </p:graphicFrame>
       <p:sp>
         <p:nvSpPr>
-          <p:cNvPr id="9" name="Shape 6"/>
+          <p:cNvPr id="10" name="Shape 7"/>
           <p:cNvSpPr/>
           <p:nvPr/>
         </p:nvSpPr>
@@ -8334,7 +8458,7 @@
       </p:sp>
       <p:sp>
         <p:nvSpPr>
-          <p:cNvPr id="10" name="Text 7"/>
+          <p:cNvPr id="11" name="Text 8"/>
           <p:cNvSpPr/>
           <p:nvPr/>
         </p:nvSpPr>
@@ -8365,7 +8489,7 @@
                 <a:ea typeface="Arial" pitchFamily="34" charset="-122"/>
                 <a:cs typeface="Arial" pitchFamily="34" charset="-120"/>
               </a:rPr>
-              <a:t>MEMORY SUPERCYCLE — DRAM +40% Q2</a:t>
+              <a:t>MEMORY SUPERCYCLE — DRAM PRICES +40% Q2</a:t>
             </a:r>
             <a:endParaRPr lang="en-US" sz="1000" dirty="0"/>
           </a:p>
@@ -8373,7 +8497,7 @@
       </p:sp>
       <p:sp>
         <p:nvSpPr>
-          <p:cNvPr id="11" name="Text 8"/>
+          <p:cNvPr id="12" name="Text 9"/>
           <p:cNvSpPr/>
           <p:nvPr/>
         </p:nvSpPr>
@@ -8412,7 +8536,7 @@
       </p:sp>
       <p:sp>
         <p:nvSpPr>
-          <p:cNvPr id="12" name="Text 9"/>
+          <p:cNvPr id="13" name="Text 10"/>
           <p:cNvSpPr/>
           <p:nvPr/>
         </p:nvSpPr>
@@ -8443,7 +8567,7 @@
                 <a:ea typeface="Arial Black" pitchFamily="34" charset="-122"/>
                 <a:cs typeface="Arial Black" pitchFamily="34" charset="-120"/>
               </a:rPr>
-              <a:t>+57%</a:t>
+              <a:t>+72%</a:t>
             </a:r>
             <a:endParaRPr lang="en-US" sz="1200" dirty="0"/>
           </a:p>
@@ -8451,7 +8575,7 @@
       </p:sp>
       <p:sp>
         <p:nvSpPr>
-          <p:cNvPr id="13" name="Text 10"/>
+          <p:cNvPr id="14" name="Text 11"/>
           <p:cNvSpPr/>
           <p:nvPr/>
         </p:nvSpPr>
@@ -8482,7 +8606,7 @@
                 <a:ea typeface="Arial" pitchFamily="34" charset="-122"/>
                 <a:cs typeface="Arial" pitchFamily="34" charset="-120"/>
               </a:rPr>
-              <a:t>HBM production doubling</a:t>
+              <a:t>HBM capacity +50% in 2026</a:t>
             </a:r>
             <a:endParaRPr lang="en-US" sz="850" dirty="0"/>
           </a:p>
@@ -8490,7 +8614,7 @@
       </p:sp>
       <p:sp>
         <p:nvSpPr>
-          <p:cNvPr id="14" name="Text 11"/>
+          <p:cNvPr id="15" name="Text 12"/>
           <p:cNvSpPr/>
           <p:nvPr/>
         </p:nvSpPr>
@@ -8529,7 +8653,7 @@
       </p:sp>
       <p:sp>
         <p:nvSpPr>
-          <p:cNvPr id="15" name="Text 12"/>
+          <p:cNvPr id="16" name="Text 13"/>
           <p:cNvSpPr/>
           <p:nvPr/>
         </p:nvSpPr>
@@ -8560,7 +8684,7 @@
                 <a:ea typeface="Arial Black" pitchFamily="34" charset="-122"/>
                 <a:cs typeface="Arial Black" pitchFamily="34" charset="-120"/>
               </a:rPr>
-              <a:t>+54%</a:t>
+              <a:t>+68%</a:t>
             </a:r>
             <a:endParaRPr lang="en-US" sz="1200" dirty="0"/>
           </a:p>
@@ -8568,7 +8692,7 @@
       </p:sp>
       <p:sp>
         <p:nvSpPr>
-          <p:cNvPr id="16" name="Text 13"/>
+          <p:cNvPr id="17" name="Text 14"/>
           <p:cNvSpPr/>
           <p:nvPr/>
         </p:nvSpPr>
@@ -8599,7 +8723,7 @@
                 <a:ea typeface="Arial" pitchFamily="34" charset="-122"/>
                 <a:cs typeface="Arial" pitchFamily="34" charset="-120"/>
               </a:rPr>
-              <a:t>HBM3E ramp, NY megafab</a:t>
+              <a:t>HBM sold out; $8B run-rate</a:t>
             </a:r>
             <a:endParaRPr lang="en-US" sz="850" dirty="0"/>
           </a:p>
@@ -8607,7 +8731,7 @@
       </p:sp>
       <p:sp>
         <p:nvSpPr>
-          <p:cNvPr id="17" name="Text 14"/>
+          <p:cNvPr id="18" name="Text 15"/>
           <p:cNvSpPr/>
           <p:nvPr/>
         </p:nvSpPr>
@@ -8646,7 +8770,7 @@
       </p:sp>
       <p:sp>
         <p:nvSpPr>
-          <p:cNvPr id="18" name="Text 15"/>
+          <p:cNvPr id="19" name="Text 16"/>
           <p:cNvSpPr/>
           <p:nvPr/>
         </p:nvSpPr>
@@ -8677,7 +8801,7 @@
                 <a:ea typeface="Arial Black" pitchFamily="34" charset="-122"/>
                 <a:cs typeface="Arial Black" pitchFamily="34" charset="-120"/>
               </a:rPr>
-              <a:t>+49%</a:t>
+              <a:t>+62%</a:t>
             </a:r>
             <a:endParaRPr lang="en-US" sz="1200" dirty="0"/>
           </a:p>
@@ -8685,7 +8809,7 @@
       </p:sp>
       <p:sp>
         <p:nvSpPr>
-          <p:cNvPr id="19" name="Text 16"/>
+          <p:cNvPr id="20" name="Text 17"/>
           <p:cNvSpPr/>
           <p:nvPr/>
         </p:nvSpPr>
@@ -8716,7 +8840,7 @@
                 <a:ea typeface="Arial" pitchFamily="34" charset="-122"/>
                 <a:cs typeface="Arial" pitchFamily="34" charset="-120"/>
               </a:rPr>
-              <a:t>62% HBM share; HBM4 Q4</a:t>
+              <a:t>60% HBM share; HBM4 ramp</a:t>
             </a:r>
             <a:endParaRPr lang="en-US" sz="850" dirty="0"/>
           </a:p>
@@ -8724,7 +8848,7 @@
       </p:sp>
       <p:sp>
         <p:nvSpPr>
-          <p:cNvPr id="20" name="Shape 17"/>
+          <p:cNvPr id="21" name="Shape 18"/>
           <p:cNvSpPr/>
           <p:nvPr/>
         </p:nvSpPr>
@@ -8749,7 +8873,7 @@
       </p:sp>
       <p:sp>
         <p:nvSpPr>
-          <p:cNvPr id="21" name="Text 18"/>
+          <p:cNvPr id="22" name="Text 19"/>
           <p:cNvSpPr/>
           <p:nvPr/>
         </p:nvSpPr>
@@ -8780,7 +8904,7 @@
                 <a:ea typeface="Arial" pitchFamily="34" charset="-122"/>
                 <a:cs typeface="Arial" pitchFamily="34" charset="-120"/>
               </a:rPr>
-              <a:t>THE diSAASter — $1T WIPED IN A MONTH</a:t>
+              <a:t>THE diSAASter — SEAT-MODEL SaaS IS RE-RATING DOWN</a:t>
             </a:r>
             <a:endParaRPr lang="en-US" sz="1000" dirty="0"/>
           </a:p>
@@ -8788,7 +8912,7 @@
       </p:sp>
       <p:sp>
         <p:nvSpPr>
-          <p:cNvPr id="22" name="Text 19"/>
+          <p:cNvPr id="23" name="Text 20"/>
           <p:cNvSpPr/>
           <p:nvPr/>
         </p:nvSpPr>
@@ -8827,7 +8951,7 @@
       </p:sp>
       <p:sp>
         <p:nvSpPr>
-          <p:cNvPr id="23" name="Text 20"/>
+          <p:cNvPr id="24" name="Text 21"/>
           <p:cNvSpPr/>
           <p:nvPr/>
         </p:nvSpPr>
@@ -8858,7 +8982,7 @@
                 <a:ea typeface="Arial Black" pitchFamily="34" charset="-122"/>
                 <a:cs typeface="Arial Black" pitchFamily="34" charset="-120"/>
               </a:rPr>
-              <a:t>–26%</a:t>
+              <a:t>–22%</a:t>
             </a:r>
             <a:endParaRPr lang="en-US" sz="1100" dirty="0"/>
           </a:p>
@@ -8866,7 +8990,7 @@
       </p:sp>
       <p:sp>
         <p:nvSpPr>
-          <p:cNvPr id="24" name="Text 21"/>
+          <p:cNvPr id="25" name="Text 22"/>
           <p:cNvSpPr/>
           <p:nvPr/>
         </p:nvSpPr>
@@ -8905,7 +9029,7 @@
       </p:sp>
       <p:sp>
         <p:nvSpPr>
-          <p:cNvPr id="25" name="Text 22"/>
+          <p:cNvPr id="26" name="Text 23"/>
           <p:cNvSpPr/>
           <p:nvPr/>
         </p:nvSpPr>
@@ -8944,7 +9068,7 @@
       </p:sp>
       <p:sp>
         <p:nvSpPr>
-          <p:cNvPr id="26" name="Text 23"/>
+          <p:cNvPr id="27" name="Text 24"/>
           <p:cNvSpPr/>
           <p:nvPr/>
         </p:nvSpPr>
@@ -8975,7 +9099,7 @@
                 <a:ea typeface="Arial Black" pitchFamily="34" charset="-122"/>
                 <a:cs typeface="Arial Black" pitchFamily="34" charset="-120"/>
               </a:rPr>
-              <a:t>–28%</a:t>
+              <a:t>–24%</a:t>
             </a:r>
             <a:endParaRPr lang="en-US" sz="1100" dirty="0"/>
           </a:p>
@@ -8983,7 +9107,7 @@
       </p:sp>
       <p:sp>
         <p:nvSpPr>
-          <p:cNvPr id="27" name="Text 24"/>
+          <p:cNvPr id="28" name="Text 25"/>
           <p:cNvSpPr/>
           <p:nvPr/>
         </p:nvSpPr>
@@ -9022,7 +9146,7 @@
       </p:sp>
       <p:sp>
         <p:nvSpPr>
-          <p:cNvPr id="28" name="Text 25"/>
+          <p:cNvPr id="29" name="Text 26"/>
           <p:cNvSpPr/>
           <p:nvPr/>
         </p:nvSpPr>
@@ -9061,7 +9185,7 @@
       </p:sp>
       <p:sp>
         <p:nvSpPr>
-          <p:cNvPr id="29" name="Text 26"/>
+          <p:cNvPr id="30" name="Text 27"/>
           <p:cNvSpPr/>
           <p:nvPr/>
         </p:nvSpPr>
@@ -9092,7 +9216,7 @@
                 <a:ea typeface="Arial Black" pitchFamily="34" charset="-122"/>
                 <a:cs typeface="Arial Black" pitchFamily="34" charset="-120"/>
               </a:rPr>
-              <a:t>–23%</a:t>
+              <a:t>–19%</a:t>
             </a:r>
             <a:endParaRPr lang="en-US" sz="1100" dirty="0"/>
           </a:p>
@@ -9100,7 +9224,7 @@
       </p:sp>
       <p:sp>
         <p:nvSpPr>
-          <p:cNvPr id="30" name="Text 27"/>
+          <p:cNvPr id="31" name="Text 28"/>
           <p:cNvSpPr/>
           <p:nvPr/>
         </p:nvSpPr>
@@ -9139,7 +9263,7 @@
       </p:sp>
       <p:sp>
         <p:nvSpPr>
-          <p:cNvPr id="31" name="Text 28"/>
+          <p:cNvPr id="32" name="Text 29"/>
           <p:cNvSpPr/>
           <p:nvPr/>
         </p:nvSpPr>
@@ -9170,7 +9294,7 @@
                 <a:ea typeface="Arial" pitchFamily="34" charset="-122"/>
                 <a:cs typeface="Arial" pitchFamily="34" charset="-120"/>
               </a:rPr>
-              <a:t>Source: Bloomberg YTD through Mar 25, 2026; Yahoo Finance; Counterpoint Research; Morgan Stanley CIO Survey.</a:t>
+              <a:t>Sources: iShares SOXX / IGV and QQQ YTD total return as of Apr 17, 2026; Yahoo Finance; Counterpoint Research; Morgan Stanley CIO Survey. Single-stock YTD figures TODO: verify.</a:t>
             </a:r>
             <a:endParaRPr lang="en-US" sz="700" dirty="0"/>
           </a:p>
@@ -9178,7 +9302,7 @@
       </p:sp>
       <p:sp>
         <p:nvSpPr>
-          <p:cNvPr id="32" name="Shape 29"/>
+          <p:cNvPr id="33" name="Shape 30"/>
           <p:cNvSpPr/>
           <p:nvPr/>
         </p:nvSpPr>
@@ -9203,7 +9327,7 @@
       </p:sp>
       <p:sp>
         <p:nvSpPr>
-          <p:cNvPr id="33" name="Text 30"/>
+          <p:cNvPr id="34" name="Text 31"/>
           <p:cNvSpPr/>
           <p:nvPr/>
         </p:nvSpPr>
@@ -9242,7 +9366,7 @@
       </p:sp>
       <p:sp>
         <p:nvSpPr>
-          <p:cNvPr id="34" name="Text 31"/>
+          <p:cNvPr id="35" name="Text 32"/>
           <p:cNvSpPr/>
           <p:nvPr/>
         </p:nvSpPr>
@@ -9456,6 +9580,29 @@
         </p:nvSpPr>
         <p:spPr>
           <a:xfrm>
+            <a:off x="457200" y="1325880"/>
+            <a:ext cx="8229600" cy="0"/>
+          </a:xfrm>
+          <a:prstGeom prst="line">
+            <a:avLst/>
+          </a:prstGeom>
+          <a:noFill/>
+          <a:ln w="9525">
+            <a:solidFill>
+              <a:srgbClr val="E5E5E5"/>
+            </a:solidFill>
+            <a:prstDash val="solid"/>
+          </a:ln>
+        </p:spPr>
+      </p:sp>
+      <p:sp>
+        <p:nvSpPr>
+          <p:cNvPr id="7" name="Shape 5"/>
+          <p:cNvSpPr/>
+          <p:nvPr/>
+        </p:nvSpPr>
+        <p:spPr>
+          <a:xfrm>
             <a:off x="457200" y="1691640"/>
             <a:ext cx="3108960" cy="274320"/>
           </a:xfrm>
@@ -9475,7 +9622,7 @@
       </p:sp>
       <p:sp>
         <p:nvSpPr>
-          <p:cNvPr id="7" name="Text 5"/>
+          <p:cNvPr id="8" name="Text 6"/>
           <p:cNvSpPr/>
           <p:nvPr/>
         </p:nvSpPr>
@@ -9514,7 +9661,7 @@
       </p:sp>
       <p:sp>
         <p:nvSpPr>
-          <p:cNvPr id="8" name="Shape 6"/>
+          <p:cNvPr id="9" name="Shape 7"/>
           <p:cNvSpPr/>
           <p:nvPr/>
         </p:nvSpPr>
@@ -9539,7 +9686,7 @@
       </p:sp>
       <p:sp>
         <p:nvSpPr>
-          <p:cNvPr id="9" name="Text 7"/>
+          <p:cNvPr id="10" name="Text 8"/>
           <p:cNvSpPr/>
           <p:nvPr/>
         </p:nvSpPr>
@@ -9578,7 +9725,7 @@
       </p:sp>
       <p:sp>
         <p:nvSpPr>
-          <p:cNvPr id="10" name="Shape 8"/>
+          <p:cNvPr id="11" name="Shape 9"/>
           <p:cNvSpPr/>
           <p:nvPr/>
         </p:nvSpPr>
@@ -9603,7 +9750,7 @@
       </p:sp>
       <p:sp>
         <p:nvSpPr>
-          <p:cNvPr id="11" name="Text 9"/>
+          <p:cNvPr id="12" name="Text 10"/>
           <p:cNvSpPr/>
           <p:nvPr/>
         </p:nvSpPr>
@@ -9642,7 +9789,7 @@
       </p:sp>
       <p:sp>
         <p:nvSpPr>
-          <p:cNvPr id="12" name="Text 10"/>
+          <p:cNvPr id="13" name="Text 11"/>
           <p:cNvSpPr/>
           <p:nvPr/>
         </p:nvSpPr>
@@ -9681,7 +9828,7 @@
       </p:sp>
       <p:sp>
         <p:nvSpPr>
-          <p:cNvPr id="13" name="Text 11"/>
+          <p:cNvPr id="14" name="Text 12"/>
           <p:cNvSpPr/>
           <p:nvPr/>
         </p:nvSpPr>
@@ -9734,7 +9881,7 @@
       </p:sp>
       <p:sp>
         <p:nvSpPr>
-          <p:cNvPr id="14" name="Text 12"/>
+          <p:cNvPr id="15" name="Text 13"/>
           <p:cNvSpPr/>
           <p:nvPr/>
         </p:nvSpPr>
@@ -9765,7 +9912,7 @@
                 <a:ea typeface="Arial" pitchFamily="34" charset="-122"/>
                 <a:cs typeface="Arial" pitchFamily="34" charset="-120"/>
               </a:rPr>
-              <a:t>~21×  </a:t>
+              <a:t>~24×  </a:t>
             </a:r>
             <a:pPr indent="0" marL="0">
               <a:buNone/>
@@ -9779,7 +9926,7 @@
                 <a:ea typeface="Arial" pitchFamily="34" charset="-122"/>
                 <a:cs typeface="Arial" pitchFamily="34" charset="-120"/>
               </a:rPr>
-              <a:t>NVIDIA fwd P/E, Mar 2026</a:t>
+              <a:t>NVIDIA fwd P/E, Apr 17, 2026</a:t>
             </a:r>
             <a:endParaRPr lang="en-US" sz="1400" dirty="0"/>
           </a:p>
@@ -9787,7 +9934,7 @@
       </p:sp>
       <p:sp>
         <p:nvSpPr>
-          <p:cNvPr id="15" name="Text 13"/>
+          <p:cNvPr id="16" name="Text 14"/>
           <p:cNvSpPr/>
           <p:nvPr/>
         </p:nvSpPr>
@@ -9826,7 +9973,7 @@
       </p:sp>
       <p:sp>
         <p:nvSpPr>
-          <p:cNvPr id="16" name="Text 14"/>
+          <p:cNvPr id="17" name="Text 15"/>
           <p:cNvSpPr/>
           <p:nvPr/>
         </p:nvSpPr>
@@ -9879,7 +10026,7 @@
       </p:sp>
       <p:sp>
         <p:nvSpPr>
-          <p:cNvPr id="17" name="Text 15"/>
+          <p:cNvPr id="18" name="Text 16"/>
           <p:cNvSpPr/>
           <p:nvPr/>
         </p:nvSpPr>
@@ -9932,7 +10079,7 @@
       </p:sp>
       <p:sp>
         <p:nvSpPr>
-          <p:cNvPr id="18" name="Text 16"/>
+          <p:cNvPr id="19" name="Text 17"/>
           <p:cNvSpPr/>
           <p:nvPr/>
         </p:nvSpPr>
@@ -9971,7 +10118,7 @@
       </p:sp>
       <p:sp>
         <p:nvSpPr>
-          <p:cNvPr id="19" name="Text 17"/>
+          <p:cNvPr id="20" name="Text 18"/>
           <p:cNvSpPr/>
           <p:nvPr/>
         </p:nvSpPr>
@@ -10024,7 +10171,7 @@
       </p:sp>
       <p:sp>
         <p:nvSpPr>
-          <p:cNvPr id="20" name="Text 18"/>
+          <p:cNvPr id="21" name="Text 19"/>
           <p:cNvSpPr/>
           <p:nvPr/>
         </p:nvSpPr>
@@ -10077,7 +10224,7 @@
       </p:sp>
       <p:sp>
         <p:nvSpPr>
-          <p:cNvPr id="21" name="Text 19"/>
+          <p:cNvPr id="22" name="Text 20"/>
           <p:cNvSpPr/>
           <p:nvPr/>
         </p:nvSpPr>
@@ -10116,7 +10263,7 @@
       </p:sp>
       <p:sp>
         <p:nvSpPr>
-          <p:cNvPr id="22" name="Text 20"/>
+          <p:cNvPr id="23" name="Text 21"/>
           <p:cNvSpPr/>
           <p:nvPr/>
         </p:nvSpPr>
@@ -10169,7 +10316,7 @@
       </p:sp>
       <p:sp>
         <p:nvSpPr>
-          <p:cNvPr id="23" name="Text 21"/>
+          <p:cNvPr id="24" name="Text 22"/>
           <p:cNvSpPr/>
           <p:nvPr/>
         </p:nvSpPr>
@@ -10222,7 +10369,7 @@
       </p:sp>
       <p:sp>
         <p:nvSpPr>
-          <p:cNvPr id="24" name="Shape 22"/>
+          <p:cNvPr id="25" name="Shape 23"/>
           <p:cNvSpPr/>
           <p:nvPr/>
         </p:nvSpPr>
@@ -10247,7 +10394,7 @@
       </p:sp>
       <p:sp>
         <p:nvSpPr>
-          <p:cNvPr id="25" name="Text 23"/>
+          <p:cNvPr id="26" name="Text 24"/>
           <p:cNvSpPr/>
           <p:nvPr/>
         </p:nvSpPr>
@@ -10286,7 +10433,7 @@
       </p:sp>
       <p:sp>
         <p:nvSpPr>
-          <p:cNvPr id="26" name="Text 24"/>
+          <p:cNvPr id="27" name="Text 25"/>
           <p:cNvSpPr/>
           <p:nvPr/>
         </p:nvSpPr>
@@ -10317,7 +10464,7 @@
                 <a:ea typeface="Arial" pitchFamily="34" charset="-122"/>
                 <a:cs typeface="Arial" pitchFamily="34" charset="-120"/>
               </a:rPr>
-              <a:t>Sources: Harding Loevner (Cisco); GuruFocus (NVDA); Jay Ritter / UF; Bloomberg; CoreWeave 2nd market; FCC dark fiber data.</a:t>
+              <a:t>Sources: Harding Loevner (Cisco); GuruFocus (NVDA fwd P/E Apr 17, 2026); Jay Ritter / UF; Bloomberg; CoreWeave 2nd market; FCC dark fiber data.</a:t>
             </a:r>
             <a:endParaRPr lang="en-US" sz="700" dirty="0"/>
           </a:p>
@@ -10325,7 +10472,7 @@
       </p:sp>
       <p:sp>
         <p:nvSpPr>
-          <p:cNvPr id="27" name="Shape 25"/>
+          <p:cNvPr id="28" name="Shape 26"/>
           <p:cNvSpPr/>
           <p:nvPr/>
         </p:nvSpPr>
@@ -10350,7 +10497,7 @@
       </p:sp>
       <p:sp>
         <p:nvSpPr>
-          <p:cNvPr id="28" name="Text 26"/>
+          <p:cNvPr id="29" name="Text 27"/>
           <p:cNvSpPr/>
           <p:nvPr/>
         </p:nvSpPr>
@@ -10389,7 +10536,7 @@
       </p:sp>
       <p:sp>
         <p:nvSpPr>
-          <p:cNvPr id="29" name="Text 27"/>
+          <p:cNvPr id="30" name="Text 28"/>
           <p:cNvSpPr/>
           <p:nvPr/>
         </p:nvSpPr>
@@ -10550,7 +10697,7 @@
                 <a:ea typeface="Arial Black" pitchFamily="34" charset="-122"/>
                 <a:cs typeface="Arial Black" pitchFamily="34" charset="-120"/>
               </a:rPr>
-              <a:t>Concentrated supply chain, systemic risk.</a:t>
+              <a:t>The chip supply chain is fragile.</a:t>
             </a:r>
             <a:endParaRPr lang="en-US" sz="2700" dirty="0"/>
           </a:p>
@@ -10589,7 +10736,7 @@
                 <a:ea typeface="Arial" pitchFamily="34" charset="-122"/>
                 <a:cs typeface="Arial" pitchFamily="34" charset="-120"/>
               </a:rPr>
-              <a:t>Four countries control the advanced semiconductor stack. US reshoring is real but slow — most fabs come online after 2028.</a:t>
+              <a:t>Four countries control the advanced semiconductor stack. US reshoring is real but slow — most leading-edge fabs come online 2027+.</a:t>
             </a:r>
             <a:endParaRPr lang="en-US" sz="1350" dirty="0"/>
           </a:p>
@@ -10597,7 +10744,30 @@
       </p:sp>
       <p:sp>
         <p:nvSpPr>
-          <p:cNvPr id="6" name="Text 4"/>
+          <p:cNvPr id="6" name="Shape 4"/>
+          <p:cNvSpPr/>
+          <p:nvPr/>
+        </p:nvSpPr>
+        <p:spPr>
+          <a:xfrm>
+            <a:off x="457200" y="1325880"/>
+            <a:ext cx="8229600" cy="0"/>
+          </a:xfrm>
+          <a:prstGeom prst="line">
+            <a:avLst/>
+          </a:prstGeom>
+          <a:noFill/>
+          <a:ln w="9525">
+            <a:solidFill>
+              <a:srgbClr val="E5E5E5"/>
+            </a:solidFill>
+            <a:prstDash val="solid"/>
+          </a:ln>
+        </p:spPr>
+      </p:sp>
+      <p:sp>
+        <p:nvSpPr>
+          <p:cNvPr id="7" name="Text 5"/>
           <p:cNvSpPr/>
           <p:nvPr/>
         </p:nvSpPr>
@@ -10636,7 +10806,7 @@
       </p:sp>
       <p:sp>
         <p:nvSpPr>
-          <p:cNvPr id="7" name="Text 5"/>
+          <p:cNvPr id="8" name="Text 6"/>
           <p:cNvSpPr/>
           <p:nvPr/>
         </p:nvSpPr>
@@ -10675,7 +10845,7 @@
       </p:sp>
       <p:sp>
         <p:nvSpPr>
-          <p:cNvPr id="8" name="Text 6"/>
+          <p:cNvPr id="9" name="Text 7"/>
           <p:cNvSpPr/>
           <p:nvPr/>
         </p:nvSpPr>
@@ -10714,7 +10884,7 @@
       </p:sp>
       <p:sp>
         <p:nvSpPr>
-          <p:cNvPr id="9" name="Text 7"/>
+          <p:cNvPr id="10" name="Text 8"/>
           <p:cNvSpPr/>
           <p:nvPr/>
         </p:nvSpPr>
@@ -10753,7 +10923,7 @@
       </p:sp>
       <p:sp>
         <p:nvSpPr>
-          <p:cNvPr id="10" name="Text 8"/>
+          <p:cNvPr id="11" name="Text 9"/>
           <p:cNvSpPr/>
           <p:nvPr/>
         </p:nvSpPr>
@@ -10792,7 +10962,7 @@
       </p:sp>
       <p:sp>
         <p:nvSpPr>
-          <p:cNvPr id="11" name="Text 9"/>
+          <p:cNvPr id="12" name="Text 10"/>
           <p:cNvSpPr/>
           <p:nvPr/>
         </p:nvSpPr>
@@ -10831,7 +11001,7 @@
       </p:sp>
       <p:sp>
         <p:nvSpPr>
-          <p:cNvPr id="12" name="Text 10"/>
+          <p:cNvPr id="13" name="Text 11"/>
           <p:cNvSpPr/>
           <p:nvPr/>
         </p:nvSpPr>
@@ -10862,7 +11032,7 @@
                 <a:ea typeface="Arial Black" pitchFamily="34" charset="-122"/>
                 <a:cs typeface="Arial Black" pitchFamily="34" charset="-120"/>
               </a:rPr>
-              <a:t>$52.7B</a:t>
+              <a:t>~$36B</a:t>
             </a:r>
             <a:endParaRPr lang="en-US" sz="4000" dirty="0"/>
           </a:p>
@@ -10870,7 +11040,7 @@
       </p:sp>
       <p:sp>
         <p:nvSpPr>
-          <p:cNvPr id="13" name="Text 11"/>
+          <p:cNvPr id="14" name="Text 12"/>
           <p:cNvSpPr/>
           <p:nvPr/>
         </p:nvSpPr>
@@ -10901,7 +11071,7 @@
                 <a:ea typeface="Arial" pitchFamily="34" charset="-122"/>
                 <a:cs typeface="Arial" pitchFamily="34" charset="-120"/>
               </a:rPr>
-              <a:t>CHIPS Act authorized; ~$33.7B committed</a:t>
+              <a:t>CHIPS Act committed (of $52.7B authorized)</a:t>
             </a:r>
             <a:endParaRPr lang="en-US" sz="1100" dirty="0"/>
           </a:p>
@@ -10909,7 +11079,7 @@
       </p:sp>
       <p:sp>
         <p:nvSpPr>
-          <p:cNvPr id="14" name="Shape 12"/>
+          <p:cNvPr id="15" name="Shape 13"/>
           <p:cNvSpPr/>
           <p:nvPr/>
         </p:nvSpPr>
@@ -10934,7 +11104,7 @@
       </p:sp>
       <p:sp>
         <p:nvSpPr>
-          <p:cNvPr id="15" name="Text 13"/>
+          <p:cNvPr id="16" name="Text 14"/>
           <p:cNvSpPr/>
           <p:nvPr/>
         </p:nvSpPr>
@@ -10973,7 +11143,7 @@
       </p:sp>
       <p:sp>
         <p:nvSpPr>
-          <p:cNvPr id="16" name="Shape 14"/>
+          <p:cNvPr id="17" name="Shape 15"/>
           <p:cNvSpPr/>
           <p:nvPr/>
         </p:nvSpPr>
@@ -10998,7 +11168,7 @@
       </p:sp>
       <p:sp>
         <p:nvSpPr>
-          <p:cNvPr id="17" name="Text 15"/>
+          <p:cNvPr id="18" name="Text 16"/>
           <p:cNvSpPr/>
           <p:nvPr/>
         </p:nvSpPr>
@@ -11037,7 +11207,7 @@
       </p:sp>
       <p:sp>
         <p:nvSpPr>
-          <p:cNvPr id="18" name="Text 16"/>
+          <p:cNvPr id="19" name="Text 17"/>
           <p:cNvSpPr/>
           <p:nvPr/>
         </p:nvSpPr>
@@ -11068,7 +11238,7 @@
                 <a:ea typeface="Arial" pitchFamily="34" charset="-122"/>
                 <a:cs typeface="Arial" pitchFamily="34" charset="-120"/>
               </a:rPr>
-              <a:t>Fab 1 producing; Fab 2 under construction</a:t>
+              <a:t>Fab 1 producing 4nm; Fab 2 online ~2026–27; Fab 3 late decade</a:t>
             </a:r>
             <a:endParaRPr lang="en-US" sz="800" dirty="0"/>
           </a:p>
@@ -11076,7 +11246,7 @@
       </p:sp>
       <p:sp>
         <p:nvSpPr>
-          <p:cNvPr id="19" name="Shape 17"/>
+          <p:cNvPr id="20" name="Shape 18"/>
           <p:cNvSpPr/>
           <p:nvPr/>
         </p:nvSpPr>
@@ -11101,7 +11271,7 @@
       </p:sp>
       <p:sp>
         <p:nvSpPr>
-          <p:cNvPr id="20" name="Text 18"/>
+          <p:cNvPr id="21" name="Text 19"/>
           <p:cNvSpPr/>
           <p:nvPr/>
         </p:nvSpPr>
@@ -11140,7 +11310,7 @@
       </p:sp>
       <p:sp>
         <p:nvSpPr>
-          <p:cNvPr id="21" name="Text 19"/>
+          <p:cNvPr id="22" name="Text 20"/>
           <p:cNvSpPr/>
           <p:nvPr/>
         </p:nvSpPr>
@@ -11171,7 +11341,7 @@
                 <a:ea typeface="Arial" pitchFamily="34" charset="-122"/>
                 <a:cs typeface="Arial" pitchFamily="34" charset="-120"/>
               </a:rPr>
-              <a:t>$17B Texas fab, delayed to 2026</a:t>
+              <a:t>$17B fab, 2nm; production pushed to 2026</a:t>
             </a:r>
             <a:endParaRPr lang="en-US" sz="800" dirty="0"/>
           </a:p>
@@ -11179,7 +11349,7 @@
       </p:sp>
       <p:sp>
         <p:nvSpPr>
-          <p:cNvPr id="22" name="Shape 20"/>
+          <p:cNvPr id="23" name="Shape 21"/>
           <p:cNvSpPr/>
           <p:nvPr/>
         </p:nvSpPr>
@@ -11204,7 +11374,7 @@
       </p:sp>
       <p:sp>
         <p:nvSpPr>
-          <p:cNvPr id="23" name="Text 21"/>
+          <p:cNvPr id="24" name="Text 22"/>
           <p:cNvSpPr/>
           <p:nvPr/>
         </p:nvSpPr>
@@ -11243,7 +11413,7 @@
       </p:sp>
       <p:sp>
         <p:nvSpPr>
-          <p:cNvPr id="24" name="Text 22"/>
+          <p:cNvPr id="25" name="Text 23"/>
           <p:cNvSpPr/>
           <p:nvPr/>
         </p:nvSpPr>
@@ -11274,7 +11444,7 @@
                 <a:ea typeface="Arial" pitchFamily="34" charset="-122"/>
                 <a:cs typeface="Arial" pitchFamily="34" charset="-120"/>
               </a:rPr>
-              <a:t>Broke ground; online ~2028–2030</a:t>
+              <a:t>Broke ground; first fab online ~2028–2030</a:t>
             </a:r>
             <a:endParaRPr lang="en-US" sz="800" dirty="0"/>
           </a:p>
@@ -11282,7 +11452,7 @@
       </p:sp>
       <p:sp>
         <p:nvSpPr>
-          <p:cNvPr id="25" name="Shape 23"/>
+          <p:cNvPr id="26" name="Shape 24"/>
           <p:cNvSpPr/>
           <p:nvPr/>
         </p:nvSpPr>
@@ -11307,7 +11477,7 @@
       </p:sp>
       <p:sp>
         <p:nvSpPr>
-          <p:cNvPr id="26" name="Text 24"/>
+          <p:cNvPr id="27" name="Text 25"/>
           <p:cNvSpPr/>
           <p:nvPr/>
         </p:nvSpPr>
@@ -11346,7 +11516,7 @@
       </p:sp>
       <p:sp>
         <p:nvSpPr>
-          <p:cNvPr id="27" name="Text 25"/>
+          <p:cNvPr id="28" name="Text 26"/>
           <p:cNvSpPr/>
           <p:nvPr/>
         </p:nvSpPr>
@@ -11377,7 +11547,7 @@
                 <a:ea typeface="Arial" pitchFamily="34" charset="-122"/>
                 <a:cs typeface="Arial" pitchFamily="34" charset="-120"/>
               </a:rPr>
-              <a:t>Two fabs under construction</a:t>
+              <a:t>Two fabs under construction; operations ~2027–28</a:t>
             </a:r>
             <a:endParaRPr lang="en-US" sz="800" dirty="0"/>
           </a:p>
@@ -11385,7 +11555,7 @@
       </p:sp>
       <p:sp>
         <p:nvSpPr>
-          <p:cNvPr id="28" name="Text 26"/>
+          <p:cNvPr id="29" name="Text 27"/>
           <p:cNvSpPr/>
           <p:nvPr/>
         </p:nvSpPr>
@@ -11416,7 +11586,7 @@
                 <a:ea typeface="Arial" pitchFamily="34" charset="-122"/>
                 <a:cs typeface="Arial" pitchFamily="34" charset="-120"/>
               </a:rPr>
-              <a:t>Source: TSMC, Samsung, Micron, Intel filings; US Commerce Dept CHIPS Program Office; SIA.</a:t>
+              <a:t>Sources: TSMC, Samsung, Micron, Intel filings; US Commerce Dept CHIPS Program Office (Nov 2025 — $36B+ committed of $52.7B); SIA.</a:t>
             </a:r>
             <a:endParaRPr lang="en-US" sz="700" dirty="0"/>
           </a:p>
@@ -11424,7 +11594,7 @@
       </p:sp>
       <p:sp>
         <p:nvSpPr>
-          <p:cNvPr id="29" name="Shape 27"/>
+          <p:cNvPr id="30" name="Shape 28"/>
           <p:cNvSpPr/>
           <p:nvPr/>
         </p:nvSpPr>
@@ -11449,7 +11619,7 @@
       </p:sp>
       <p:sp>
         <p:nvSpPr>
-          <p:cNvPr id="30" name="Text 28"/>
+          <p:cNvPr id="31" name="Text 29"/>
           <p:cNvSpPr/>
           <p:nvPr/>
         </p:nvSpPr>
@@ -11488,7 +11658,7 @@
       </p:sp>
       <p:sp>
         <p:nvSpPr>
-          <p:cNvPr id="31" name="Text 29"/>
+          <p:cNvPr id="32" name="Text 30"/>
           <p:cNvSpPr/>
           <p:nvPr/>
         </p:nvSpPr>
@@ -11702,6 +11872,29 @@
         </p:nvSpPr>
         <p:spPr>
           <a:xfrm>
+            <a:off x="457200" y="1325880"/>
+            <a:ext cx="8229600" cy="0"/>
+          </a:xfrm>
+          <a:prstGeom prst="line">
+            <a:avLst/>
+          </a:prstGeom>
+          <a:noFill/>
+          <a:ln w="9525">
+            <a:solidFill>
+              <a:srgbClr val="E5E5E5"/>
+            </a:solidFill>
+            <a:prstDash val="solid"/>
+          </a:ln>
+        </p:spPr>
+      </p:sp>
+      <p:sp>
+        <p:nvSpPr>
+          <p:cNvPr id="7" name="Shape 5"/>
+          <p:cNvSpPr/>
+          <p:nvPr/>
+        </p:nvSpPr>
+        <p:spPr>
+          <a:xfrm>
             <a:off x="457200" y="1691640"/>
             <a:ext cx="2560320" cy="365760"/>
           </a:xfrm>
@@ -11721,7 +11914,7 @@
       </p:sp>
       <p:sp>
         <p:nvSpPr>
-          <p:cNvPr id="7" name="Text 5"/>
+          <p:cNvPr id="8" name="Text 6"/>
           <p:cNvSpPr/>
           <p:nvPr/>
         </p:nvSpPr>
@@ -11760,7 +11953,7 @@
       </p:sp>
       <p:sp>
         <p:nvSpPr>
-          <p:cNvPr id="8" name="Shape 6"/>
+          <p:cNvPr id="9" name="Shape 7"/>
           <p:cNvSpPr/>
           <p:nvPr/>
         </p:nvSpPr>
@@ -11785,7 +11978,7 @@
       </p:sp>
       <p:sp>
         <p:nvSpPr>
-          <p:cNvPr id="9" name="Text 7"/>
+          <p:cNvPr id="10" name="Text 8"/>
           <p:cNvSpPr/>
           <p:nvPr/>
         </p:nvSpPr>
@@ -11824,7 +12017,7 @@
       </p:sp>
       <p:sp>
         <p:nvSpPr>
-          <p:cNvPr id="10" name="Text 8"/>
+          <p:cNvPr id="11" name="Text 9"/>
           <p:cNvSpPr/>
           <p:nvPr/>
         </p:nvSpPr>
@@ -11863,7 +12056,7 @@
       </p:sp>
       <p:sp>
         <p:nvSpPr>
-          <p:cNvPr id="11" name="Shape 9"/>
+          <p:cNvPr id="12" name="Shape 10"/>
           <p:cNvSpPr/>
           <p:nvPr/>
         </p:nvSpPr>
@@ -11886,7 +12079,7 @@
       </p:sp>
       <p:sp>
         <p:nvSpPr>
-          <p:cNvPr id="12" name="Text 10"/>
+          <p:cNvPr id="13" name="Text 11"/>
           <p:cNvSpPr/>
           <p:nvPr/>
         </p:nvSpPr>
@@ -11963,7 +12156,7 @@
                 <a:ea typeface="Arial" pitchFamily="34" charset="-122"/>
                 <a:cs typeface="Arial" pitchFamily="34" charset="-120"/>
               </a:rPr>
-              <a:t>ASML advanced DUV banned Sept 2024; China fell from 49% → ~20% of ASML sales.</a:t>
+              <a:t>ASML DUV banned Sept '24; China share ~20% (from 49%).</a:t>
             </a:r>
             <a:endParaRPr lang="en-US" sz="900" dirty="0"/>
           </a:p>
@@ -11971,7 +12164,7 @@
       </p:sp>
       <p:sp>
         <p:nvSpPr>
-          <p:cNvPr id="13" name="Shape 11"/>
+          <p:cNvPr id="14" name="Shape 12"/>
           <p:cNvSpPr/>
           <p:nvPr/>
         </p:nvSpPr>
@@ -11996,7 +12189,7 @@
       </p:sp>
       <p:sp>
         <p:nvSpPr>
-          <p:cNvPr id="14" name="Text 12"/>
+          <p:cNvPr id="15" name="Text 13"/>
           <p:cNvSpPr/>
           <p:nvPr/>
         </p:nvSpPr>
@@ -12035,7 +12228,7 @@
       </p:sp>
       <p:sp>
         <p:nvSpPr>
-          <p:cNvPr id="15" name="Shape 13"/>
+          <p:cNvPr id="16" name="Shape 14"/>
           <p:cNvSpPr/>
           <p:nvPr/>
         </p:nvSpPr>
@@ -12060,7 +12253,7 @@
       </p:sp>
       <p:sp>
         <p:nvSpPr>
-          <p:cNvPr id="16" name="Text 14"/>
+          <p:cNvPr id="17" name="Text 15"/>
           <p:cNvSpPr/>
           <p:nvPr/>
         </p:nvSpPr>
@@ -12099,7 +12292,7 @@
       </p:sp>
       <p:sp>
         <p:nvSpPr>
-          <p:cNvPr id="17" name="Text 15"/>
+          <p:cNvPr id="18" name="Text 16"/>
           <p:cNvSpPr/>
           <p:nvPr/>
         </p:nvSpPr>
@@ -12130,7 +12323,7 @@
                 <a:ea typeface="Arial" pitchFamily="34" charset="-122"/>
                 <a:cs typeface="Arial" pitchFamily="34" charset="-120"/>
               </a:rPr>
-              <a:t>EU AI Act high-risk enforcement</a:t>
+              <a:t>EU AI Act high-risk enforcement (Aug 2)</a:t>
             </a:r>
             <a:endParaRPr lang="en-US" sz="900" dirty="0"/>
           </a:p>
@@ -12138,7 +12331,7 @@
       </p:sp>
       <p:sp>
         <p:nvSpPr>
-          <p:cNvPr id="18" name="Shape 16"/>
+          <p:cNvPr id="19" name="Shape 17"/>
           <p:cNvSpPr/>
           <p:nvPr/>
         </p:nvSpPr>
@@ -12161,7 +12354,7 @@
       </p:sp>
       <p:sp>
         <p:nvSpPr>
-          <p:cNvPr id="19" name="Text 17"/>
+          <p:cNvPr id="20" name="Text 18"/>
           <p:cNvSpPr/>
           <p:nvPr/>
         </p:nvSpPr>
@@ -12246,7 +12439,7 @@
       </p:sp>
       <p:sp>
         <p:nvSpPr>
-          <p:cNvPr id="20" name="Shape 18"/>
+          <p:cNvPr id="21" name="Shape 19"/>
           <p:cNvSpPr/>
           <p:nvPr/>
         </p:nvSpPr>
@@ -12271,7 +12464,7 @@
       </p:sp>
       <p:sp>
         <p:nvSpPr>
-          <p:cNvPr id="21" name="Text 19"/>
+          <p:cNvPr id="22" name="Text 20"/>
           <p:cNvSpPr/>
           <p:nvPr/>
         </p:nvSpPr>
@@ -12310,7 +12503,7 @@
       </p:sp>
       <p:sp>
         <p:nvSpPr>
-          <p:cNvPr id="22" name="Shape 20"/>
+          <p:cNvPr id="23" name="Shape 21"/>
           <p:cNvSpPr/>
           <p:nvPr/>
         </p:nvSpPr>
@@ -12335,7 +12528,7 @@
       </p:sp>
       <p:sp>
         <p:nvSpPr>
-          <p:cNvPr id="23" name="Text 21"/>
+          <p:cNvPr id="24" name="Text 22"/>
           <p:cNvSpPr/>
           <p:nvPr/>
         </p:nvSpPr>
@@ -12366,7 +12559,7 @@
                 <a:ea typeface="Arial Black" pitchFamily="34" charset="-122"/>
                 <a:cs typeface="Arial Black" pitchFamily="34" charset="-120"/>
               </a:rPr>
-              <a:t>~20%</a:t>
+              <a:t>~$36B</a:t>
             </a:r>
             <a:endParaRPr lang="en-US" sz="2200" dirty="0"/>
           </a:p>
@@ -12374,7 +12567,7 @@
       </p:sp>
       <p:sp>
         <p:nvSpPr>
-          <p:cNvPr id="24" name="Text 22"/>
+          <p:cNvPr id="25" name="Text 23"/>
           <p:cNvSpPr/>
           <p:nvPr/>
         </p:nvSpPr>
@@ -12405,7 +12598,7 @@
                 <a:ea typeface="Arial" pitchFamily="34" charset="-122"/>
                 <a:cs typeface="Arial" pitchFamily="34" charset="-120"/>
               </a:rPr>
-              <a:t>SMIC 5nm yield vs &gt;70% threshold</a:t>
+              <a:t>CHIPS Act committed (of $52.7B authorized)</a:t>
             </a:r>
             <a:endParaRPr lang="en-US" sz="900" dirty="0"/>
           </a:p>
@@ -12413,7 +12606,7 @@
       </p:sp>
       <p:sp>
         <p:nvSpPr>
-          <p:cNvPr id="25" name="Shape 23"/>
+          <p:cNvPr id="26" name="Shape 24"/>
           <p:cNvSpPr/>
           <p:nvPr/>
         </p:nvSpPr>
@@ -12436,7 +12629,7 @@
       </p:sp>
       <p:sp>
         <p:nvSpPr>
-          <p:cNvPr id="26" name="Text 24"/>
+          <p:cNvPr id="27" name="Text 25"/>
           <p:cNvSpPr/>
           <p:nvPr/>
         </p:nvSpPr>
@@ -12471,7 +12664,7 @@
                 <a:ea typeface="Arial" pitchFamily="34" charset="-122"/>
                 <a:cs typeface="Arial" pitchFamily="34" charset="-120"/>
               </a:rPr>
-              <a:t>China controls ~90% of rare earth processing.</a:t>
+              <a:t>China controls ~90% of rare-earth processing.</a:t>
             </a:r>
             <a:endParaRPr lang="en-US" sz="900" dirty="0"/>
           </a:p>
@@ -12492,7 +12685,7 @@
                 <a:ea typeface="Arial" pitchFamily="34" charset="-122"/>
                 <a:cs typeface="Arial" pitchFamily="34" charset="-120"/>
               </a:rPr>
-              <a:t>Gallium/germanium controls since July 2023.</a:t>
+              <a:t>Gallium / germanium controls since Jul 2023.</a:t>
             </a:r>
             <a:endParaRPr lang="en-US" sz="900" dirty="0"/>
           </a:p>
@@ -12513,7 +12706,7 @@
                 <a:ea typeface="Arial" pitchFamily="34" charset="-122"/>
                 <a:cs typeface="Arial" pitchFamily="34" charset="-120"/>
               </a:rPr>
-              <a:t>CHIPS Act: $52.7B authorized, ~$33.7B committed.</a:t>
+              <a:t>SMIC 5nm yield ~20% vs &gt;70% threshold.</a:t>
             </a:r>
             <a:endParaRPr lang="en-US" sz="900" dirty="0"/>
           </a:p>
@@ -12521,7 +12714,7 @@
       </p:sp>
       <p:sp>
         <p:nvSpPr>
-          <p:cNvPr id="27" name="Text 25"/>
+          <p:cNvPr id="28" name="Text 26"/>
           <p:cNvSpPr/>
           <p:nvPr/>
         </p:nvSpPr>
@@ -12552,7 +12745,7 @@
                 <a:ea typeface="Arial" pitchFamily="34" charset="-122"/>
                 <a:cs typeface="Arial" pitchFamily="34" charset="-120"/>
               </a:rPr>
-              <a:t>Source: NVIDIA 10-Q; ASML filings; EU AI Act text; US Bureau of Industry and Security; Commerce Dept.</a:t>
+              <a:t>Sources: NVIDIA 10-Q; ASML filings; EU AI Act Article 99 / Chapter V (Aug 2, 2026 enforcement); US Bureau of Industry and Security; Commerce Dept (Nov 2025).</a:t>
             </a:r>
             <a:endParaRPr lang="en-US" sz="700" dirty="0"/>
           </a:p>
@@ -12560,7 +12753,7 @@
       </p:sp>
       <p:sp>
         <p:nvSpPr>
-          <p:cNvPr id="28" name="Shape 26"/>
+          <p:cNvPr id="29" name="Shape 27"/>
           <p:cNvSpPr/>
           <p:nvPr/>
         </p:nvSpPr>
@@ -12585,7 +12778,7 @@
       </p:sp>
       <p:sp>
         <p:nvSpPr>
-          <p:cNvPr id="29" name="Text 27"/>
+          <p:cNvPr id="30" name="Text 28"/>
           <p:cNvSpPr/>
           <p:nvPr/>
         </p:nvSpPr>
@@ -12624,7 +12817,7 @@
       </p:sp>
       <p:sp>
         <p:nvSpPr>
-          <p:cNvPr id="30" name="Text 28"/>
+          <p:cNvPr id="31" name="Text 29"/>
           <p:cNvSpPr/>
           <p:nvPr/>
         </p:nvSpPr>
@@ -12832,7 +13025,30 @@
       </p:sp>
       <p:sp>
         <p:nvSpPr>
-          <p:cNvPr id="6" name="Text 4"/>
+          <p:cNvPr id="6" name="Shape 4"/>
+          <p:cNvSpPr/>
+          <p:nvPr/>
+        </p:nvSpPr>
+        <p:spPr>
+          <a:xfrm>
+            <a:off x="457200" y="1325880"/>
+            <a:ext cx="8229600" cy="0"/>
+          </a:xfrm>
+          <a:prstGeom prst="line">
+            <a:avLst/>
+          </a:prstGeom>
+          <a:noFill/>
+          <a:ln w="9525">
+            <a:solidFill>
+              <a:srgbClr val="E5E5E5"/>
+            </a:solidFill>
+            <a:prstDash val="solid"/>
+          </a:ln>
+        </p:spPr>
+      </p:sp>
+      <p:sp>
+        <p:nvSpPr>
+          <p:cNvPr id="7" name="Text 5"/>
           <p:cNvSpPr/>
           <p:nvPr/>
         </p:nvSpPr>
@@ -12863,7 +13079,7 @@
                 <a:ea typeface="Arial Black" pitchFamily="34" charset="-122"/>
                 <a:cs typeface="Arial Black" pitchFamily="34" charset="-120"/>
               </a:rPr>
-              <a:t>$98B</a:t>
+              <a:t>$64B</a:t>
             </a:r>
             <a:endParaRPr lang="en-US" sz="4000" dirty="0"/>
           </a:p>
@@ -12871,7 +13087,7 @@
       </p:sp>
       <p:sp>
         <p:nvSpPr>
-          <p:cNvPr id="7" name="Text 5"/>
+          <p:cNvPr id="8" name="Text 6"/>
           <p:cNvSpPr/>
           <p:nvPr/>
         </p:nvSpPr>
@@ -12902,7 +13118,7 @@
                 <a:ea typeface="Arial" pitchFamily="34" charset="-122"/>
                 <a:cs typeface="Arial" pitchFamily="34" charset="-120"/>
               </a:rPr>
-              <a:t>in data-center projects stalled</a:t>
+              <a:t>in data-center projects blocked or delayed</a:t>
             </a:r>
             <a:endParaRPr lang="en-US" sz="1100" dirty="0"/>
           </a:p>
@@ -12910,7 +13126,7 @@
       </p:sp>
       <p:sp>
         <p:nvSpPr>
-          <p:cNvPr id="8" name="Text 6"/>
+          <p:cNvPr id="9" name="Text 7"/>
           <p:cNvSpPr/>
           <p:nvPr/>
         </p:nvSpPr>
@@ -12949,7 +13165,7 @@
       </p:sp>
       <p:sp>
         <p:nvSpPr>
-          <p:cNvPr id="9" name="Text 7"/>
+          <p:cNvPr id="10" name="Text 8"/>
           <p:cNvSpPr/>
           <p:nvPr/>
         </p:nvSpPr>
@@ -12988,7 +13204,7 @@
       </p:sp>
       <p:sp>
         <p:nvSpPr>
-          <p:cNvPr id="10" name="Text 8"/>
+          <p:cNvPr id="11" name="Text 9"/>
           <p:cNvSpPr/>
           <p:nvPr/>
         </p:nvSpPr>
@@ -13019,7 +13235,7 @@
                 <a:ea typeface="Arial Black" pitchFamily="34" charset="-122"/>
                 <a:cs typeface="Arial Black" pitchFamily="34" charset="-120"/>
               </a:rPr>
-              <a:t>439,000</a:t>
+              <a:t>~480K</a:t>
             </a:r>
             <a:endParaRPr lang="en-US" sz="4000" dirty="0"/>
           </a:p>
@@ -13027,7 +13243,7 @@
       </p:sp>
       <p:sp>
         <p:nvSpPr>
-          <p:cNvPr id="11" name="Text 9"/>
+          <p:cNvPr id="12" name="Text 10"/>
           <p:cNvSpPr/>
           <p:nvPr/>
         </p:nvSpPr>
@@ -13058,7 +13274,7 @@
                 <a:ea typeface="Arial" pitchFamily="34" charset="-122"/>
                 <a:cs typeface="Arial" pitchFamily="34" charset="-120"/>
               </a:rPr>
-              <a:t>electrician shortage (US)</a:t>
+              <a:t>data-center workforce gap (US)</a:t>
             </a:r>
             <a:endParaRPr lang="en-US" sz="1100" dirty="0"/>
           </a:p>
@@ -13066,7 +13282,7 @@
       </p:sp>
       <p:sp>
         <p:nvSpPr>
-          <p:cNvPr id="12" name="Shape 10"/>
+          <p:cNvPr id="13" name="Shape 11"/>
           <p:cNvSpPr/>
           <p:nvPr/>
         </p:nvSpPr>
@@ -13091,7 +13307,7 @@
       </p:sp>
       <p:sp>
         <p:nvSpPr>
-          <p:cNvPr id="13" name="Text 11"/>
+          <p:cNvPr id="14" name="Text 12"/>
           <p:cNvSpPr/>
           <p:nvPr/>
         </p:nvSpPr>
@@ -13130,7 +13346,7 @@
       </p:sp>
       <p:sp>
         <p:nvSpPr>
-          <p:cNvPr id="14" name="Text 12"/>
+          <p:cNvPr id="15" name="Text 13"/>
           <p:cNvSpPr/>
           <p:nvPr/>
         </p:nvSpPr>
@@ -13161,7 +13377,7 @@
                 <a:ea typeface="Arial" pitchFamily="34" charset="-122"/>
                 <a:cs typeface="Arial" pitchFamily="34" charset="-120"/>
               </a:rPr>
-              <a:t>142 activist groups across 24 states are blocking data-center builds. Data-center delays are "the defining theme of 2026."</a:t>
+              <a:t>$18B halted, $46B delayed. 142 activist groups across 24 states — Virginia is the epicenter, with 42 groups alone.</a:t>
             </a:r>
             <a:endParaRPr lang="en-US" sz="850" dirty="0"/>
           </a:p>
@@ -13169,7 +13385,7 @@
       </p:sp>
       <p:sp>
         <p:nvSpPr>
-          <p:cNvPr id="15" name="Shape 13"/>
+          <p:cNvPr id="16" name="Shape 14"/>
           <p:cNvSpPr/>
           <p:nvPr/>
         </p:nvSpPr>
@@ -13194,7 +13410,7 @@
       </p:sp>
       <p:sp>
         <p:nvSpPr>
-          <p:cNvPr id="16" name="Text 14"/>
+          <p:cNvPr id="17" name="Text 15"/>
           <p:cNvSpPr/>
           <p:nvPr/>
         </p:nvSpPr>
@@ -13233,7 +13449,7 @@
       </p:sp>
       <p:sp>
         <p:nvSpPr>
-          <p:cNvPr id="17" name="Text 15"/>
+          <p:cNvPr id="18" name="Text 16"/>
           <p:cNvSpPr/>
           <p:nvPr/>
         </p:nvSpPr>
@@ -13264,7 +13480,7 @@
                 <a:ea typeface="Arial" pitchFamily="34" charset="-122"/>
                 <a:cs typeface="Arial" pitchFamily="34" charset="-120"/>
               </a:rPr>
-              <a:t>March 21, 2026: "Stop the AI Race" protests target Anthropic, OpenAI, and xAI HQs. Anthropic dropped its safety-pause commitment in Feb. 56% of Americans are anxious about AI.</a:t>
+              <a:t>Mar 21, 2026: "Stop the AI Race" protests targeted Anthropic, OpenAI, and xAI HQs. Anthropic dropped its safety-pause commitment in Feb. 56% of Americans are anxious about AI.</a:t>
             </a:r>
             <a:endParaRPr lang="en-US" sz="850" dirty="0"/>
           </a:p>
@@ -13272,7 +13488,7 @@
       </p:sp>
       <p:sp>
         <p:nvSpPr>
-          <p:cNvPr id="18" name="Shape 16"/>
+          <p:cNvPr id="19" name="Shape 17"/>
           <p:cNvSpPr/>
           <p:nvPr/>
         </p:nvSpPr>
@@ -13297,7 +13513,7 @@
       </p:sp>
       <p:sp>
         <p:nvSpPr>
-          <p:cNvPr id="19" name="Text 17"/>
+          <p:cNvPr id="20" name="Text 18"/>
           <p:cNvSpPr/>
           <p:nvPr/>
         </p:nvSpPr>
@@ -13336,7 +13552,7 @@
       </p:sp>
       <p:sp>
         <p:nvSpPr>
-          <p:cNvPr id="20" name="Text 18"/>
+          <p:cNvPr id="21" name="Text 19"/>
           <p:cNvSpPr/>
           <p:nvPr/>
         </p:nvSpPr>
@@ -13367,7 +13583,7 @@
                 <a:ea typeface="Arial" pitchFamily="34" charset="-122"/>
                 <a:cs typeface="Arial" pitchFamily="34" charset="-120"/>
               </a:rPr>
-              <a:t>Electricians are 45–70% of data-center build cost — and critically scarce. 400+ data centers under construction; talent, not capital, is the binding constraint.</a:t>
+              <a:t>Core ops roles — electricians, facilities, generator techs — short 467K–498K workers. 400+ data centers under construction; talent, not capital, is the binding constraint.</a:t>
             </a:r>
             <a:endParaRPr lang="en-US" sz="850" dirty="0"/>
           </a:p>
@@ -13375,7 +13591,7 @@
       </p:sp>
       <p:sp>
         <p:nvSpPr>
-          <p:cNvPr id="21" name="Text 19"/>
+          <p:cNvPr id="22" name="Text 20"/>
           <p:cNvSpPr/>
           <p:nvPr/>
         </p:nvSpPr>
@@ -13406,7 +13622,7 @@
                 <a:ea typeface="Arial" pitchFamily="34" charset="-122"/>
                 <a:cs typeface="Arial" pitchFamily="34" charset="-120"/>
               </a:rPr>
-              <a:t>Source: The Information, TIME, CNN, NBC News, Echelon Insights, Stop The AI Race, Fortune, Data Center Watch.</a:t>
+              <a:t>Sources: Data Center Watch ($18B halted, $46B delayed, 142 groups); Echelon Insights; Stop the AI Race; Fortune; TIME; CNN; NBC News; Data Center Frontier.</a:t>
             </a:r>
             <a:endParaRPr lang="en-US" sz="700" dirty="0"/>
           </a:p>
@@ -13414,7 +13630,7 @@
       </p:sp>
       <p:sp>
         <p:nvSpPr>
-          <p:cNvPr id="22" name="Shape 20"/>
+          <p:cNvPr id="23" name="Shape 21"/>
           <p:cNvSpPr/>
           <p:nvPr/>
         </p:nvSpPr>
@@ -13439,7 +13655,7 @@
       </p:sp>
       <p:sp>
         <p:nvSpPr>
-          <p:cNvPr id="23" name="Text 21"/>
+          <p:cNvPr id="24" name="Text 22"/>
           <p:cNvSpPr/>
           <p:nvPr/>
         </p:nvSpPr>
@@ -13478,7 +13694,7 @@
       </p:sp>
       <p:sp>
         <p:nvSpPr>
-          <p:cNvPr id="24" name="Text 22"/>
+          <p:cNvPr id="25" name="Text 23"/>
           <p:cNvSpPr/>
           <p:nvPr/>
         </p:nvSpPr>
@@ -13692,8 +13908,95 @@
         </p:nvSpPr>
         <p:spPr>
           <a:xfrm>
-            <a:off x="457200" y="1691640"/>
-            <a:ext cx="2697480" cy="365760"/>
+            <a:off x="457200" y="1325880"/>
+            <a:ext cx="8229600" cy="0"/>
+          </a:xfrm>
+          <a:prstGeom prst="line">
+            <a:avLst/>
+          </a:prstGeom>
+          <a:noFill/>
+          <a:ln w="9525">
+            <a:solidFill>
+              <a:srgbClr val="E5E5E5"/>
+            </a:solidFill>
+            <a:prstDash val="solid"/>
+          </a:ln>
+        </p:spPr>
+      </p:sp>
+      <p:sp>
+        <p:nvSpPr>
+          <p:cNvPr id="7" name="Shape 5"/>
+          <p:cNvSpPr/>
+          <p:nvPr/>
+        </p:nvSpPr>
+        <p:spPr>
+          <a:xfrm>
+            <a:off x="457200" y="1417320"/>
+            <a:ext cx="8229600" cy="457200"/>
+          </a:xfrm>
+          <a:prstGeom prst="rect">
+            <a:avLst/>
+          </a:prstGeom>
+          <a:solidFill>
+            <a:srgbClr val="EEEEEE"/>
+          </a:solidFill>
+          <a:ln w="9525">
+            <a:solidFill>
+              <a:srgbClr val="BBBBBB"/>
+            </a:solidFill>
+            <a:prstDash val="dash"/>
+          </a:ln>
+        </p:spPr>
+      </p:sp>
+      <p:sp>
+        <p:nvSpPr>
+          <p:cNvPr id="8" name="Text 6"/>
+          <p:cNvSpPr/>
+          <p:nvPr/>
+        </p:nvSpPr>
+        <p:spPr>
+          <a:xfrm>
+            <a:off x="548640" y="1417320"/>
+            <a:ext cx="8046720" cy="457200"/>
+          </a:xfrm>
+          <a:prstGeom prst="rect">
+            <a:avLst/>
+          </a:prstGeom>
+          <a:noFill/>
+          <a:ln/>
+        </p:spPr>
+        <p:txBody>
+          <a:bodyPr wrap="square" lIns="0" tIns="0" rIns="0" bIns="0" rtlCol="0" anchor="ctr"/>
+          <a:lstStyle/>
+          <a:p>
+            <a:pPr algn="ctr" indent="0" marL="0">
+              <a:buNone/>
+            </a:pPr>
+            <a:r>
+              <a:rPr lang="en-US" sz="1000" i="1" dirty="0">
+                <a:solidFill>
+                  <a:srgbClr val="888888"/>
+                </a:solidFill>
+                <a:latin typeface="Arial" pitchFamily="34" charset="0"/>
+                <a:ea typeface="Arial" pitchFamily="34" charset="-122"/>
+                <a:cs typeface="Arial" pitchFamily="34" charset="-120"/>
+              </a:rPr>
+              <a:t>IMAGE: Render — orbital data-center satellite (solar wings, Earth below)</a:t>
+            </a:r>
+            <a:endParaRPr lang="en-US" sz="1000" dirty="0"/>
+          </a:p>
+        </p:txBody>
+      </p:sp>
+      <p:sp>
+        <p:nvSpPr>
+          <p:cNvPr id="9" name="Shape 7"/>
+          <p:cNvSpPr/>
+          <p:nvPr/>
+        </p:nvSpPr>
+        <p:spPr>
+          <a:xfrm>
+            <a:off x="457200" y="2057400"/>
+            <a:ext cx="2697480" cy="320040"/>
           </a:xfrm>
           <a:prstGeom prst="rect">
             <a:avLst/>
@@ -13711,14 +14014,14 @@
       </p:sp>
       <p:sp>
         <p:nvSpPr>
-          <p:cNvPr id="7" name="Text 5"/>
-          <p:cNvSpPr/>
-          <p:nvPr/>
-        </p:nvSpPr>
-        <p:spPr>
-          <a:xfrm>
-            <a:off x="457200" y="1691640"/>
-            <a:ext cx="2697480" cy="365760"/>
+          <p:cNvPr id="10" name="Text 8"/>
+          <p:cNvSpPr/>
+          <p:nvPr/>
+        </p:nvSpPr>
+        <p:spPr>
+          <a:xfrm>
+            <a:off x="457200" y="2057400"/>
+            <a:ext cx="2697480" cy="320040"/>
           </a:xfrm>
           <a:prstGeom prst="rect">
             <a:avLst/>
@@ -13750,14 +14053,14 @@
       </p:sp>
       <p:sp>
         <p:nvSpPr>
-          <p:cNvPr id="8" name="Shape 6"/>
-          <p:cNvSpPr/>
-          <p:nvPr/>
-        </p:nvSpPr>
-        <p:spPr>
-          <a:xfrm>
-            <a:off x="457200" y="2057400"/>
-            <a:ext cx="2697480" cy="1188720"/>
+          <p:cNvPr id="11" name="Shape 9"/>
+          <p:cNvSpPr/>
+          <p:nvPr/>
+        </p:nvSpPr>
+        <p:spPr>
+          <a:xfrm>
+            <a:off x="457200" y="2377440"/>
+            <a:ext cx="2697480" cy="1005840"/>
           </a:xfrm>
           <a:prstGeom prst="rect">
             <a:avLst/>
@@ -13775,14 +14078,14 @@
       </p:sp>
       <p:sp>
         <p:nvSpPr>
-          <p:cNvPr id="9" name="Text 7"/>
-          <p:cNvSpPr/>
-          <p:nvPr/>
-        </p:nvSpPr>
-        <p:spPr>
-          <a:xfrm>
-            <a:off x="594360" y="2148840"/>
-            <a:ext cx="2423160" cy="1005840"/>
+          <p:cNvPr id="12" name="Text 10"/>
+          <p:cNvSpPr/>
+          <p:nvPr/>
+        </p:nvSpPr>
+        <p:spPr>
+          <a:xfrm>
+            <a:off x="594360" y="2468880"/>
+            <a:ext cx="2423160" cy="822960"/>
           </a:xfrm>
           <a:prstGeom prst="rect">
             <a:avLst/>
@@ -13798,7 +14101,7 @@
               <a:buNone/>
             </a:pPr>
             <a:r>
-              <a:rPr lang="en-US" sz="1050" dirty="0">
+              <a:rPr lang="en-US" sz="950" dirty="0">
                 <a:solidFill>
                   <a:srgbClr val="333333"/>
                 </a:solidFill>
@@ -13808,20 +14111,20 @@
               </a:rPr>
               <a:t>Earth's interconnection backlogs, zoning battles, and cooling constraints don't exist in orbit.</a:t>
             </a:r>
-            <a:endParaRPr lang="en-US" sz="1050" dirty="0"/>
-          </a:p>
-        </p:txBody>
-      </p:sp>
-      <p:sp>
-        <p:nvSpPr>
-          <p:cNvPr id="10" name="Shape 8"/>
-          <p:cNvSpPr/>
-          <p:nvPr/>
-        </p:nvSpPr>
-        <p:spPr>
-          <a:xfrm>
-            <a:off x="3291840" y="1691640"/>
-            <a:ext cx="2697480" cy="365760"/>
+            <a:endParaRPr lang="en-US" sz="950" dirty="0"/>
+          </a:p>
+        </p:txBody>
+      </p:sp>
+      <p:sp>
+        <p:nvSpPr>
+          <p:cNvPr id="13" name="Shape 11"/>
+          <p:cNvSpPr/>
+          <p:nvPr/>
+        </p:nvSpPr>
+        <p:spPr>
+          <a:xfrm>
+            <a:off x="3291840" y="2057400"/>
+            <a:ext cx="2697480" cy="320040"/>
           </a:xfrm>
           <a:prstGeom prst="rect">
             <a:avLst/>
@@ -13839,14 +14142,14 @@
       </p:sp>
       <p:sp>
         <p:nvSpPr>
-          <p:cNvPr id="11" name="Text 9"/>
-          <p:cNvSpPr/>
-          <p:nvPr/>
-        </p:nvSpPr>
-        <p:spPr>
-          <a:xfrm>
-            <a:off x="3291840" y="1691640"/>
-            <a:ext cx="2697480" cy="365760"/>
+          <p:cNvPr id="14" name="Text 12"/>
+          <p:cNvSpPr/>
+          <p:nvPr/>
+        </p:nvSpPr>
+        <p:spPr>
+          <a:xfrm>
+            <a:off x="3291840" y="2057400"/>
+            <a:ext cx="2697480" cy="320040"/>
           </a:xfrm>
           <a:prstGeom prst="rect">
             <a:avLst/>
@@ -13878,14 +14181,14 @@
       </p:sp>
       <p:sp>
         <p:nvSpPr>
-          <p:cNvPr id="12" name="Shape 10"/>
-          <p:cNvSpPr/>
-          <p:nvPr/>
-        </p:nvSpPr>
-        <p:spPr>
-          <a:xfrm>
-            <a:off x="3291840" y="2057400"/>
-            <a:ext cx="2697480" cy="1188720"/>
+          <p:cNvPr id="15" name="Shape 13"/>
+          <p:cNvSpPr/>
+          <p:nvPr/>
+        </p:nvSpPr>
+        <p:spPr>
+          <a:xfrm>
+            <a:off x="3291840" y="2377440"/>
+            <a:ext cx="2697480" cy="1005840"/>
           </a:xfrm>
           <a:prstGeom prst="rect">
             <a:avLst/>
@@ -13903,14 +14206,14 @@
       </p:sp>
       <p:sp>
         <p:nvSpPr>
-          <p:cNvPr id="13" name="Text 11"/>
-          <p:cNvSpPr/>
-          <p:nvPr/>
-        </p:nvSpPr>
-        <p:spPr>
-          <a:xfrm>
-            <a:off x="3429000" y="2148840"/>
-            <a:ext cx="2423160" cy="1005840"/>
+          <p:cNvPr id="16" name="Text 14"/>
+          <p:cNvSpPr/>
+          <p:nvPr/>
+        </p:nvSpPr>
+        <p:spPr>
+          <a:xfrm>
+            <a:off x="3429000" y="2468880"/>
+            <a:ext cx="2423160" cy="822960"/>
           </a:xfrm>
           <a:prstGeom prst="rect">
             <a:avLst/>
@@ -13926,7 +14229,7 @@
               <a:buNone/>
             </a:pPr>
             <a:r>
-              <a:rPr lang="en-US" sz="1050" dirty="0">
+              <a:rPr lang="en-US" sz="950" dirty="0">
                 <a:solidFill>
                   <a:srgbClr val="333333"/>
                 </a:solidFill>
@@ -13936,20 +14239,20 @@
               </a:rPr>
               <a:t>1,361 W/m² of unfiltered sunlight, 24/7, with no intermittency and no capacity-factor limits.</a:t>
             </a:r>
-            <a:endParaRPr lang="en-US" sz="1050" dirty="0"/>
-          </a:p>
-        </p:txBody>
-      </p:sp>
-      <p:sp>
-        <p:nvSpPr>
-          <p:cNvPr id="14" name="Shape 12"/>
-          <p:cNvSpPr/>
-          <p:nvPr/>
-        </p:nvSpPr>
-        <p:spPr>
-          <a:xfrm>
-            <a:off x="6126480" y="1691640"/>
-            <a:ext cx="2697480" cy="365760"/>
+            <a:endParaRPr lang="en-US" sz="950" dirty="0"/>
+          </a:p>
+        </p:txBody>
+      </p:sp>
+      <p:sp>
+        <p:nvSpPr>
+          <p:cNvPr id="17" name="Shape 15"/>
+          <p:cNvSpPr/>
+          <p:nvPr/>
+        </p:nvSpPr>
+        <p:spPr>
+          <a:xfrm>
+            <a:off x="6126480" y="2057400"/>
+            <a:ext cx="2697480" cy="320040"/>
           </a:xfrm>
           <a:prstGeom prst="rect">
             <a:avLst/>
@@ -13967,14 +14270,14 @@
       </p:sp>
       <p:sp>
         <p:nvSpPr>
-          <p:cNvPr id="15" name="Text 13"/>
-          <p:cNvSpPr/>
-          <p:nvPr/>
-        </p:nvSpPr>
-        <p:spPr>
-          <a:xfrm>
-            <a:off x="6126480" y="1691640"/>
-            <a:ext cx="2697480" cy="365760"/>
+          <p:cNvPr id="18" name="Text 16"/>
+          <p:cNvSpPr/>
+          <p:nvPr/>
+        </p:nvSpPr>
+        <p:spPr>
+          <a:xfrm>
+            <a:off x="6126480" y="2057400"/>
+            <a:ext cx="2697480" cy="320040"/>
           </a:xfrm>
           <a:prstGeom prst="rect">
             <a:avLst/>
@@ -14006,14 +14309,14 @@
       </p:sp>
       <p:sp>
         <p:nvSpPr>
-          <p:cNvPr id="16" name="Shape 14"/>
-          <p:cNvSpPr/>
-          <p:nvPr/>
-        </p:nvSpPr>
-        <p:spPr>
-          <a:xfrm>
-            <a:off x="6126480" y="2057400"/>
-            <a:ext cx="2697480" cy="1188720"/>
+          <p:cNvPr id="19" name="Shape 17"/>
+          <p:cNvSpPr/>
+          <p:nvPr/>
+        </p:nvSpPr>
+        <p:spPr>
+          <a:xfrm>
+            <a:off x="6126480" y="2377440"/>
+            <a:ext cx="2697480" cy="1005840"/>
           </a:xfrm>
           <a:prstGeom prst="rect">
             <a:avLst/>
@@ -14031,14 +14334,14 @@
       </p:sp>
       <p:sp>
         <p:nvSpPr>
-          <p:cNvPr id="17" name="Text 15"/>
-          <p:cNvSpPr/>
-          <p:nvPr/>
-        </p:nvSpPr>
-        <p:spPr>
-          <a:xfrm>
-            <a:off x="6263640" y="2148840"/>
-            <a:ext cx="2423160" cy="1005840"/>
+          <p:cNvPr id="20" name="Text 18"/>
+          <p:cNvSpPr/>
+          <p:nvPr/>
+        </p:nvSpPr>
+        <p:spPr>
+          <a:xfrm>
+            <a:off x="6263640" y="2468880"/>
+            <a:ext cx="2423160" cy="822960"/>
           </a:xfrm>
           <a:prstGeom prst="rect">
             <a:avLst/>
@@ -14054,7 +14357,7 @@
               <a:buNone/>
             </a:pPr>
             <a:r>
-              <a:rPr lang="en-US" sz="1050" dirty="0">
+              <a:rPr lang="en-US" sz="950" dirty="0">
                 <a:solidFill>
                   <a:srgbClr val="333333"/>
                 </a:solidFill>
@@ -14064,20 +14367,20 @@
               </a:rPr>
               <a:t>Sidesteps data-localization laws, export controls, and the jurisdictional patchwork that slows terrestrial deployment.</a:t>
             </a:r>
-            <a:endParaRPr lang="en-US" sz="1050" dirty="0"/>
-          </a:p>
-        </p:txBody>
-      </p:sp>
-      <p:sp>
-        <p:nvSpPr>
-          <p:cNvPr id="18" name="Shape 16"/>
-          <p:cNvSpPr/>
-          <p:nvPr/>
-        </p:nvSpPr>
-        <p:spPr>
-          <a:xfrm>
-            <a:off x="457200" y="3429000"/>
-            <a:ext cx="8229600" cy="502920"/>
+            <a:endParaRPr lang="en-US" sz="950" dirty="0"/>
+          </a:p>
+        </p:txBody>
+      </p:sp>
+      <p:sp>
+        <p:nvSpPr>
+          <p:cNvPr id="21" name="Shape 19"/>
+          <p:cNvSpPr/>
+          <p:nvPr/>
+        </p:nvSpPr>
+        <p:spPr>
+          <a:xfrm>
+            <a:off x="457200" y="3520440"/>
+            <a:ext cx="8229600" cy="411480"/>
           </a:xfrm>
           <a:prstGeom prst="rect">
             <a:avLst/>
@@ -14095,14 +14398,14 @@
       </p:sp>
       <p:sp>
         <p:nvSpPr>
-          <p:cNvPr id="19" name="Text 17"/>
-          <p:cNvSpPr/>
-          <p:nvPr/>
-        </p:nvSpPr>
-        <p:spPr>
-          <a:xfrm>
-            <a:off x="640080" y="3429000"/>
-            <a:ext cx="7863840" cy="502920"/>
+          <p:cNvPr id="22" name="Text 20"/>
+          <p:cNvSpPr/>
+          <p:nvPr/>
+        </p:nvSpPr>
+        <p:spPr>
+          <a:xfrm>
+            <a:off x="640080" y="3520440"/>
+            <a:ext cx="7863840" cy="411480"/>
           </a:xfrm>
           <a:prstGeom prst="rect">
             <a:avLst/>
@@ -14148,7 +14451,7 @@
       </p:sp>
       <p:sp>
         <p:nvSpPr>
-          <p:cNvPr id="20" name="Text 18"/>
+          <p:cNvPr id="23" name="Text 21"/>
           <p:cNvSpPr/>
           <p:nvPr/>
         </p:nvSpPr>
@@ -14187,7 +14490,7 @@
       </p:sp>
       <p:sp>
         <p:nvSpPr>
-          <p:cNvPr id="21" name="Shape 19"/>
+          <p:cNvPr id="24" name="Shape 22"/>
           <p:cNvSpPr/>
           <p:nvPr/>
         </p:nvSpPr>
@@ -14212,7 +14515,7 @@
       </p:sp>
       <p:sp>
         <p:nvSpPr>
-          <p:cNvPr id="22" name="Text 20"/>
+          <p:cNvPr id="25" name="Text 23"/>
           <p:cNvSpPr/>
           <p:nvPr/>
         </p:nvSpPr>
@@ -14251,7 +14554,7 @@
       </p:sp>
       <p:sp>
         <p:nvSpPr>
-          <p:cNvPr id="23" name="Text 21"/>
+          <p:cNvPr id="26" name="Text 24"/>
           <p:cNvSpPr/>
           <p:nvPr/>
         </p:nvSpPr>
@@ -14465,8 +14768,95 @@
         </p:nvSpPr>
         <p:spPr>
           <a:xfrm>
-            <a:off x="457200" y="1691640"/>
-            <a:ext cx="2697480" cy="365760"/>
+            <a:off x="457200" y="1325880"/>
+            <a:ext cx="8229600" cy="0"/>
+          </a:xfrm>
+          <a:prstGeom prst="line">
+            <a:avLst/>
+          </a:prstGeom>
+          <a:noFill/>
+          <a:ln w="9525">
+            <a:solidFill>
+              <a:srgbClr val="E5E5E5"/>
+            </a:solidFill>
+            <a:prstDash val="solid"/>
+          </a:ln>
+        </p:spPr>
+      </p:sp>
+      <p:sp>
+        <p:nvSpPr>
+          <p:cNvPr id="7" name="Shape 5"/>
+          <p:cNvSpPr/>
+          <p:nvPr/>
+        </p:nvSpPr>
+        <p:spPr>
+          <a:xfrm>
+            <a:off x="457200" y="1417320"/>
+            <a:ext cx="8229600" cy="457200"/>
+          </a:xfrm>
+          <a:prstGeom prst="rect">
+            <a:avLst/>
+          </a:prstGeom>
+          <a:solidFill>
+            <a:srgbClr val="EEEEEE"/>
+          </a:solidFill>
+          <a:ln w="9525">
+            <a:solidFill>
+              <a:srgbClr val="BBBBBB"/>
+            </a:solidFill>
+            <a:prstDash val="dash"/>
+          </a:ln>
+        </p:spPr>
+      </p:sp>
+      <p:sp>
+        <p:nvSpPr>
+          <p:cNvPr id="8" name="Text 6"/>
+          <p:cNvSpPr/>
+          <p:nvPr/>
+        </p:nvSpPr>
+        <p:spPr>
+          <a:xfrm>
+            <a:off x="548640" y="1417320"/>
+            <a:ext cx="8046720" cy="457200"/>
+          </a:xfrm>
+          <a:prstGeom prst="rect">
+            <a:avLst/>
+          </a:prstGeom>
+          <a:noFill/>
+          <a:ln/>
+        </p:spPr>
+        <p:txBody>
+          <a:bodyPr wrap="square" lIns="0" tIns="0" rIns="0" bIns="0" rtlCol="0" anchor="ctr"/>
+          <a:lstStyle/>
+          <a:p>
+            <a:pPr algn="ctr" indent="0" marL="0">
+              <a:buNone/>
+            </a:pPr>
+            <a:r>
+              <a:rPr lang="en-US" sz="1000" i="1" dirty="0">
+                <a:solidFill>
+                  <a:srgbClr val="888888"/>
+                </a:solidFill>
+                <a:latin typeface="Arial" pitchFamily="34" charset="0"/>
+                <a:ea typeface="Arial" pitchFamily="34" charset="-122"/>
+                <a:cs typeface="Arial" pitchFamily="34" charset="-120"/>
+              </a:rPr>
+              <a:t>IMAGE: Photo — humanoid robot on a factory / warehouse floor</a:t>
+            </a:r>
+            <a:endParaRPr lang="en-US" sz="1000" dirty="0"/>
+          </a:p>
+        </p:txBody>
+      </p:sp>
+      <p:sp>
+        <p:nvSpPr>
+          <p:cNvPr id="9" name="Shape 7"/>
+          <p:cNvSpPr/>
+          <p:nvPr/>
+        </p:nvSpPr>
+        <p:spPr>
+          <a:xfrm>
+            <a:off x="457200" y="2057400"/>
+            <a:ext cx="2697480" cy="320040"/>
           </a:xfrm>
           <a:prstGeom prst="rect">
             <a:avLst/>
@@ -14484,14 +14874,14 @@
       </p:sp>
       <p:sp>
         <p:nvSpPr>
-          <p:cNvPr id="7" name="Text 5"/>
-          <p:cNvSpPr/>
-          <p:nvPr/>
-        </p:nvSpPr>
-        <p:spPr>
-          <a:xfrm>
-            <a:off x="457200" y="1691640"/>
-            <a:ext cx="2697480" cy="365760"/>
+          <p:cNvPr id="10" name="Text 8"/>
+          <p:cNvSpPr/>
+          <p:nvPr/>
+        </p:nvSpPr>
+        <p:spPr>
+          <a:xfrm>
+            <a:off x="457200" y="2057400"/>
+            <a:ext cx="2697480" cy="320040"/>
           </a:xfrm>
           <a:prstGeom prst="rect">
             <a:avLst/>
@@ -14523,14 +14913,14 @@
       </p:sp>
       <p:sp>
         <p:nvSpPr>
-          <p:cNvPr id="8" name="Shape 6"/>
-          <p:cNvSpPr/>
-          <p:nvPr/>
-        </p:nvSpPr>
-        <p:spPr>
-          <a:xfrm>
-            <a:off x="457200" y="2057400"/>
-            <a:ext cx="2697480" cy="1188720"/>
+          <p:cNvPr id="11" name="Shape 9"/>
+          <p:cNvSpPr/>
+          <p:nvPr/>
+        </p:nvSpPr>
+        <p:spPr>
+          <a:xfrm>
+            <a:off x="457200" y="2377440"/>
+            <a:ext cx="2697480" cy="1005840"/>
           </a:xfrm>
           <a:prstGeom prst="rect">
             <a:avLst/>
@@ -14548,14 +14938,14 @@
       </p:sp>
       <p:sp>
         <p:nvSpPr>
-          <p:cNvPr id="9" name="Text 7"/>
-          <p:cNvSpPr/>
-          <p:nvPr/>
-        </p:nvSpPr>
-        <p:spPr>
-          <a:xfrm>
-            <a:off x="594360" y="2148840"/>
-            <a:ext cx="2423160" cy="1005840"/>
+          <p:cNvPr id="12" name="Text 10"/>
+          <p:cNvSpPr/>
+          <p:nvPr/>
+        </p:nvSpPr>
+        <p:spPr>
+          <a:xfrm>
+            <a:off x="594360" y="2468880"/>
+            <a:ext cx="2423160" cy="822960"/>
           </a:xfrm>
           <a:prstGeom prst="rect">
             <a:avLst/>
@@ -14571,7 +14961,7 @@
               <a:buNone/>
             </a:pPr>
             <a:r>
-              <a:rPr lang="en-US" sz="1050" dirty="0">
+              <a:rPr lang="en-US" sz="950" dirty="0">
                 <a:solidFill>
                   <a:srgbClr val="333333"/>
                 </a:solidFill>
@@ -14581,20 +14971,20 @@
               </a:rPr>
               <a:t>Manufacturing, logistics, warehousing, agriculture, healthcare — anywhere repetitive or dangerous labor exists, pilots are underway.</a:t>
             </a:r>
-            <a:endParaRPr lang="en-US" sz="1050" dirty="0"/>
-          </a:p>
-        </p:txBody>
-      </p:sp>
-      <p:sp>
-        <p:nvSpPr>
-          <p:cNvPr id="10" name="Shape 8"/>
-          <p:cNvSpPr/>
-          <p:nvPr/>
-        </p:nvSpPr>
-        <p:spPr>
-          <a:xfrm>
-            <a:off x="3291840" y="1691640"/>
-            <a:ext cx="2697480" cy="365760"/>
+            <a:endParaRPr lang="en-US" sz="950" dirty="0"/>
+          </a:p>
+        </p:txBody>
+      </p:sp>
+      <p:sp>
+        <p:nvSpPr>
+          <p:cNvPr id="13" name="Shape 11"/>
+          <p:cNvSpPr/>
+          <p:nvPr/>
+        </p:nvSpPr>
+        <p:spPr>
+          <a:xfrm>
+            <a:off x="3291840" y="2057400"/>
+            <a:ext cx="2697480" cy="320040"/>
           </a:xfrm>
           <a:prstGeom prst="rect">
             <a:avLst/>
@@ -14612,14 +15002,14 @@
       </p:sp>
       <p:sp>
         <p:nvSpPr>
-          <p:cNvPr id="11" name="Text 9"/>
-          <p:cNvSpPr/>
-          <p:nvPr/>
-        </p:nvSpPr>
-        <p:spPr>
-          <a:xfrm>
-            <a:off x="3291840" y="1691640"/>
-            <a:ext cx="2697480" cy="365760"/>
+          <p:cNvPr id="14" name="Text 12"/>
+          <p:cNvSpPr/>
+          <p:nvPr/>
+        </p:nvSpPr>
+        <p:spPr>
+          <a:xfrm>
+            <a:off x="3291840" y="2057400"/>
+            <a:ext cx="2697480" cy="320040"/>
           </a:xfrm>
           <a:prstGeom prst="rect">
             <a:avLst/>
@@ -14651,14 +15041,14 @@
       </p:sp>
       <p:sp>
         <p:nvSpPr>
-          <p:cNvPr id="12" name="Shape 10"/>
-          <p:cNvSpPr/>
-          <p:nvPr/>
-        </p:nvSpPr>
-        <p:spPr>
-          <a:xfrm>
-            <a:off x="3291840" y="2057400"/>
-            <a:ext cx="2697480" cy="1188720"/>
+          <p:cNvPr id="15" name="Shape 13"/>
+          <p:cNvSpPr/>
+          <p:nvPr/>
+        </p:nvSpPr>
+        <p:spPr>
+          <a:xfrm>
+            <a:off x="3291840" y="2377440"/>
+            <a:ext cx="2697480" cy="1005840"/>
           </a:xfrm>
           <a:prstGeom prst="rect">
             <a:avLst/>
@@ -14676,14 +15066,14 @@
       </p:sp>
       <p:sp>
         <p:nvSpPr>
-          <p:cNvPr id="13" name="Text 11"/>
-          <p:cNvSpPr/>
-          <p:nvPr/>
-        </p:nvSpPr>
-        <p:spPr>
-          <a:xfrm>
-            <a:off x="3429000" y="2148840"/>
-            <a:ext cx="2423160" cy="1005840"/>
+          <p:cNvPr id="16" name="Text 14"/>
+          <p:cNvSpPr/>
+          <p:nvPr/>
+        </p:nvSpPr>
+        <p:spPr>
+          <a:xfrm>
+            <a:off x="3429000" y="2468880"/>
+            <a:ext cx="2423160" cy="822960"/>
           </a:xfrm>
           <a:prstGeom prst="rect">
             <a:avLst/>
@@ -14699,7 +15089,7 @@
               <a:buNone/>
             </a:pPr>
             <a:r>
-              <a:rPr lang="en-US" sz="1050" dirty="0">
+              <a:rPr lang="en-US" sz="950" dirty="0">
                 <a:solidFill>
                   <a:srgbClr val="333333"/>
                 </a:solidFill>
@@ -14709,20 +15099,20 @@
               </a:rPr>
               <a:t>Humanoids handle hazardous and ergonomically punishing tasks. Humans keep judgment, creativity, and coordination.</a:t>
             </a:r>
-            <a:endParaRPr lang="en-US" sz="1050" dirty="0"/>
-          </a:p>
-        </p:txBody>
-      </p:sp>
-      <p:sp>
-        <p:nvSpPr>
-          <p:cNvPr id="14" name="Shape 12"/>
-          <p:cNvSpPr/>
-          <p:nvPr/>
-        </p:nvSpPr>
-        <p:spPr>
-          <a:xfrm>
-            <a:off x="6126480" y="1691640"/>
-            <a:ext cx="2697480" cy="365760"/>
+            <a:endParaRPr lang="en-US" sz="950" dirty="0"/>
+          </a:p>
+        </p:txBody>
+      </p:sp>
+      <p:sp>
+        <p:nvSpPr>
+          <p:cNvPr id="17" name="Shape 15"/>
+          <p:cNvSpPr/>
+          <p:nvPr/>
+        </p:nvSpPr>
+        <p:spPr>
+          <a:xfrm>
+            <a:off x="6126480" y="2057400"/>
+            <a:ext cx="2697480" cy="320040"/>
           </a:xfrm>
           <a:prstGeom prst="rect">
             <a:avLst/>
@@ -14740,14 +15130,14 @@
       </p:sp>
       <p:sp>
         <p:nvSpPr>
-          <p:cNvPr id="15" name="Text 13"/>
-          <p:cNvSpPr/>
-          <p:nvPr/>
-        </p:nvSpPr>
-        <p:spPr>
-          <a:xfrm>
-            <a:off x="6126480" y="1691640"/>
-            <a:ext cx="2697480" cy="365760"/>
+          <p:cNvPr id="18" name="Text 16"/>
+          <p:cNvSpPr/>
+          <p:nvPr/>
+        </p:nvSpPr>
+        <p:spPr>
+          <a:xfrm>
+            <a:off x="6126480" y="2057400"/>
+            <a:ext cx="2697480" cy="320040"/>
           </a:xfrm>
           <a:prstGeom prst="rect">
             <a:avLst/>
@@ -14779,14 +15169,14 @@
       </p:sp>
       <p:sp>
         <p:nvSpPr>
-          <p:cNvPr id="16" name="Shape 14"/>
-          <p:cNvSpPr/>
-          <p:nvPr/>
-        </p:nvSpPr>
-        <p:spPr>
-          <a:xfrm>
-            <a:off x="6126480" y="2057400"/>
-            <a:ext cx="2697480" cy="1188720"/>
+          <p:cNvPr id="19" name="Shape 17"/>
+          <p:cNvSpPr/>
+          <p:nvPr/>
+        </p:nvSpPr>
+        <p:spPr>
+          <a:xfrm>
+            <a:off x="6126480" y="2377440"/>
+            <a:ext cx="2697480" cy="1005840"/>
           </a:xfrm>
           <a:prstGeom prst="rect">
             <a:avLst/>
@@ -14804,14 +15194,14 @@
       </p:sp>
       <p:sp>
         <p:nvSpPr>
-          <p:cNvPr id="17" name="Text 15"/>
-          <p:cNvSpPr/>
-          <p:nvPr/>
-        </p:nvSpPr>
-        <p:spPr>
-          <a:xfrm>
-            <a:off x="6263640" y="2148840"/>
-            <a:ext cx="2423160" cy="1005840"/>
+          <p:cNvPr id="20" name="Text 18"/>
+          <p:cNvSpPr/>
+          <p:nvPr/>
+        </p:nvSpPr>
+        <p:spPr>
+          <a:xfrm>
+            <a:off x="6263640" y="2468880"/>
+            <a:ext cx="2423160" cy="822960"/>
           </a:xfrm>
           <a:prstGeom prst="rect">
             <a:avLst/>
@@ -14827,7 +15217,7 @@
               <a:buNone/>
             </a:pPr>
             <a:r>
-              <a:rPr lang="en-US" sz="1050" dirty="0">
+              <a:rPr lang="en-US" sz="950" dirty="0">
                 <a:solidFill>
                   <a:srgbClr val="333333"/>
                 </a:solidFill>
@@ -14837,20 +15227,20 @@
               </a:rPr>
               <a:t>Every humanoid runs foundation models for perception, planning, and manipulation in real time. At scale, rivals LLM compute.</a:t>
             </a:r>
-            <a:endParaRPr lang="en-US" sz="1050" dirty="0"/>
-          </a:p>
-        </p:txBody>
-      </p:sp>
-      <p:sp>
-        <p:nvSpPr>
-          <p:cNvPr id="18" name="Shape 16"/>
-          <p:cNvSpPr/>
-          <p:nvPr/>
-        </p:nvSpPr>
-        <p:spPr>
-          <a:xfrm>
-            <a:off x="457200" y="3429000"/>
-            <a:ext cx="8229600" cy="502920"/>
+            <a:endParaRPr lang="en-US" sz="950" dirty="0"/>
+          </a:p>
+        </p:txBody>
+      </p:sp>
+      <p:sp>
+        <p:nvSpPr>
+          <p:cNvPr id="21" name="Shape 19"/>
+          <p:cNvSpPr/>
+          <p:nvPr/>
+        </p:nvSpPr>
+        <p:spPr>
+          <a:xfrm>
+            <a:off x="457200" y="3520440"/>
+            <a:ext cx="8229600" cy="411480"/>
           </a:xfrm>
           <a:prstGeom prst="rect">
             <a:avLst/>
@@ -14868,14 +15258,14 @@
       </p:sp>
       <p:sp>
         <p:nvSpPr>
-          <p:cNvPr id="19" name="Text 17"/>
-          <p:cNvSpPr/>
-          <p:nvPr/>
-        </p:nvSpPr>
-        <p:spPr>
-          <a:xfrm>
-            <a:off x="640080" y="3429000"/>
-            <a:ext cx="7863840" cy="502920"/>
+          <p:cNvPr id="22" name="Text 20"/>
+          <p:cNvSpPr/>
+          <p:nvPr/>
+        </p:nvSpPr>
+        <p:spPr>
+          <a:xfrm>
+            <a:off x="640080" y="3520440"/>
+            <a:ext cx="7863840" cy="411480"/>
           </a:xfrm>
           <a:prstGeom prst="rect">
             <a:avLst/>
@@ -14921,7 +15311,7 @@
       </p:sp>
       <p:sp>
         <p:nvSpPr>
-          <p:cNvPr id="20" name="Text 18"/>
+          <p:cNvPr id="23" name="Text 21"/>
           <p:cNvSpPr/>
           <p:nvPr/>
         </p:nvSpPr>
@@ -14960,7 +15350,7 @@
       </p:sp>
       <p:sp>
         <p:nvSpPr>
-          <p:cNvPr id="21" name="Shape 19"/>
+          <p:cNvPr id="24" name="Shape 22"/>
           <p:cNvSpPr/>
           <p:nvPr/>
         </p:nvSpPr>
@@ -14985,7 +15375,7 @@
       </p:sp>
       <p:sp>
         <p:nvSpPr>
-          <p:cNvPr id="22" name="Text 20"/>
+          <p:cNvPr id="25" name="Text 23"/>
           <p:cNvSpPr/>
           <p:nvPr/>
         </p:nvSpPr>
@@ -15024,7 +15414,7 @@
       </p:sp>
       <p:sp>
         <p:nvSpPr>
-          <p:cNvPr id="23" name="Text 21"/>
+          <p:cNvPr id="26" name="Text 24"/>
           <p:cNvSpPr/>
           <p:nvPr/>
         </p:nvSpPr>
@@ -15158,7 +15548,7 @@
                 <a:ea typeface="Arial" pitchFamily="34" charset="-122"/>
                 <a:cs typeface="Arial" pitchFamily="34" charset="-120"/>
               </a:rPr>
-              <a:t>Landscape, Market, Shifts, Risks, Frontier. Each answers a different question about the same $685B capex cycle.</a:t>
+              <a:t>Landscape, Market, Shifts, Risks, Frontier. Each answers a different question about the same ~$750B capex cycle.</a:t>
             </a:r>
             <a:endParaRPr lang="en-US" sz="1350" dirty="0"/>
           </a:p>
@@ -15167,6 +15557,29 @@
       <p:sp>
         <p:nvSpPr>
           <p:cNvPr id="4" name="Shape 2"/>
+          <p:cNvSpPr/>
+          <p:nvPr/>
+        </p:nvSpPr>
+        <p:spPr>
+          <a:xfrm>
+            <a:off x="457200" y="1325880"/>
+            <a:ext cx="8229600" cy="0"/>
+          </a:xfrm>
+          <a:prstGeom prst="line">
+            <a:avLst/>
+          </a:prstGeom>
+          <a:noFill/>
+          <a:ln w="9525">
+            <a:solidFill>
+              <a:srgbClr val="E5E5E5"/>
+            </a:solidFill>
+            <a:prstDash val="solid"/>
+          </a:ln>
+        </p:spPr>
+      </p:sp>
+      <p:sp>
+        <p:nvSpPr>
+          <p:cNvPr id="5" name="Shape 3"/>
           <p:cNvSpPr/>
           <p:nvPr/>
         </p:nvSpPr>
@@ -15191,14 +15604,14 @@
       </p:sp>
       <p:sp>
         <p:nvSpPr>
-          <p:cNvPr id="5" name="Text 3"/>
-          <p:cNvSpPr/>
-          <p:nvPr/>
-        </p:nvSpPr>
-        <p:spPr>
-          <a:xfrm>
-            <a:off x="457200" y="2011680"/>
-            <a:ext cx="8229600" cy="274320"/>
+          <p:cNvPr id="6" name="Text 4"/>
+          <p:cNvSpPr/>
+          <p:nvPr/>
+        </p:nvSpPr>
+        <p:spPr>
+          <a:xfrm>
+            <a:off x="457200" y="1993392"/>
+            <a:ext cx="8229600" cy="256032"/>
           </a:xfrm>
           <a:prstGeom prst="rect">
             <a:avLst/>
@@ -15230,14 +15643,14 @@
       </p:sp>
       <p:sp>
         <p:nvSpPr>
-          <p:cNvPr id="6" name="Shape 4"/>
-          <p:cNvSpPr/>
-          <p:nvPr/>
-        </p:nvSpPr>
-        <p:spPr>
-          <a:xfrm>
-            <a:off x="283464" y="2423160"/>
-            <a:ext cx="1627632" cy="1417320"/>
+          <p:cNvPr id="7" name="Shape 5"/>
+          <p:cNvSpPr/>
+          <p:nvPr/>
+        </p:nvSpPr>
+        <p:spPr>
+          <a:xfrm>
+            <a:off x="356616" y="2359152"/>
+            <a:ext cx="1554480" cy="1508760"/>
           </a:xfrm>
           <a:prstGeom prst="rect">
             <a:avLst/>
@@ -15255,14 +15668,14 @@
       </p:sp>
       <p:sp>
         <p:nvSpPr>
-          <p:cNvPr id="7" name="Shape 5"/>
-          <p:cNvSpPr/>
-          <p:nvPr/>
-        </p:nvSpPr>
-        <p:spPr>
-          <a:xfrm>
-            <a:off x="283464" y="2423160"/>
-            <a:ext cx="1627632" cy="54864"/>
+          <p:cNvPr id="8" name="Shape 6"/>
+          <p:cNvSpPr/>
+          <p:nvPr/>
+        </p:nvSpPr>
+        <p:spPr>
+          <a:xfrm>
+            <a:off x="356616" y="2359152"/>
+            <a:ext cx="1554480" cy="54864"/>
           </a:xfrm>
           <a:prstGeom prst="rect">
             <a:avLst/>
@@ -15280,14 +15693,14 @@
       </p:sp>
       <p:sp>
         <p:nvSpPr>
-          <p:cNvPr id="8" name="Text 6"/>
-          <p:cNvSpPr/>
-          <p:nvPr/>
-        </p:nvSpPr>
-        <p:spPr>
-          <a:xfrm>
-            <a:off x="283464" y="2560320"/>
-            <a:ext cx="1627632" cy="457200"/>
+          <p:cNvPr id="9" name="Text 7"/>
+          <p:cNvSpPr/>
+          <p:nvPr/>
+        </p:nvSpPr>
+        <p:spPr>
+          <a:xfrm>
+            <a:off x="356616" y="2523744"/>
+            <a:ext cx="1554480" cy="457200"/>
           </a:xfrm>
           <a:prstGeom prst="rect">
             <a:avLst/>
@@ -15319,14 +15732,14 @@
       </p:sp>
       <p:sp>
         <p:nvSpPr>
-          <p:cNvPr id="9" name="Text 7"/>
-          <p:cNvSpPr/>
-          <p:nvPr/>
-        </p:nvSpPr>
-        <p:spPr>
-          <a:xfrm>
-            <a:off x="283464" y="2990088"/>
-            <a:ext cx="1627632" cy="274320"/>
+          <p:cNvPr id="10" name="Text 8"/>
+          <p:cNvSpPr/>
+          <p:nvPr/>
+        </p:nvSpPr>
+        <p:spPr>
+          <a:xfrm>
+            <a:off x="356616" y="2980944"/>
+            <a:ext cx="1554480" cy="274320"/>
           </a:xfrm>
           <a:prstGeom prst="rect">
             <a:avLst/>
@@ -15358,14 +15771,14 @@
       </p:sp>
       <p:sp>
         <p:nvSpPr>
-          <p:cNvPr id="10" name="Text 8"/>
-          <p:cNvSpPr/>
-          <p:nvPr/>
-        </p:nvSpPr>
-        <p:spPr>
-          <a:xfrm>
-            <a:off x="356616" y="3273552"/>
-            <a:ext cx="1481328" cy="457200"/>
+          <p:cNvPr id="11" name="Text 9"/>
+          <p:cNvSpPr/>
+          <p:nvPr/>
+        </p:nvSpPr>
+        <p:spPr>
+          <a:xfrm>
+            <a:off x="448056" y="3291840"/>
+            <a:ext cx="1371600" cy="411480"/>
           </a:xfrm>
           <a:prstGeom prst="rect">
             <a:avLst/>
@@ -15381,7 +15794,7 @@
               <a:buNone/>
             </a:pPr>
             <a:r>
-              <a:rPr lang="en-US" sz="800" dirty="0">
+              <a:rPr lang="en-US" sz="850" dirty="0">
                 <a:solidFill>
                   <a:srgbClr val="CCCCCC"/>
                 </a:solidFill>
@@ -15391,20 +15804,20 @@
               </a:rPr>
               <a:t>What AI is, where it runs, who fabs it.</a:t>
             </a:r>
-            <a:endParaRPr lang="en-US" sz="800" dirty="0"/>
-          </a:p>
-        </p:txBody>
-      </p:sp>
-      <p:sp>
-        <p:nvSpPr>
-          <p:cNvPr id="11" name="Text 9"/>
-          <p:cNvSpPr/>
-          <p:nvPr/>
-        </p:nvSpPr>
-        <p:spPr>
-          <a:xfrm>
-            <a:off x="283464" y="3648456"/>
-            <a:ext cx="1627632" cy="182880"/>
+            <a:endParaRPr lang="en-US" sz="850" dirty="0"/>
+          </a:p>
+        </p:txBody>
+      </p:sp>
+      <p:sp>
+        <p:nvSpPr>
+          <p:cNvPr id="12" name="Text 10"/>
+          <p:cNvSpPr/>
+          <p:nvPr/>
+        </p:nvSpPr>
+        <p:spPr>
+          <a:xfrm>
+            <a:off x="356616" y="3639312"/>
+            <a:ext cx="1554480" cy="201168"/>
           </a:xfrm>
           <a:prstGeom prst="rect">
             <a:avLst/>
@@ -15436,14 +15849,14 @@
       </p:sp>
       <p:sp>
         <p:nvSpPr>
-          <p:cNvPr id="12" name="Shape 10"/>
-          <p:cNvSpPr/>
-          <p:nvPr/>
-        </p:nvSpPr>
-        <p:spPr>
-          <a:xfrm>
-            <a:off x="2020824" y="2423160"/>
-            <a:ext cx="1627632" cy="1417320"/>
+          <p:cNvPr id="13" name="Shape 11"/>
+          <p:cNvSpPr/>
+          <p:nvPr/>
+        </p:nvSpPr>
+        <p:spPr>
+          <a:xfrm>
+            <a:off x="2075688" y="2359152"/>
+            <a:ext cx="1554480" cy="1508760"/>
           </a:xfrm>
           <a:prstGeom prst="rect">
             <a:avLst/>
@@ -15461,14 +15874,14 @@
       </p:sp>
       <p:sp>
         <p:nvSpPr>
-          <p:cNvPr id="13" name="Shape 11"/>
-          <p:cNvSpPr/>
-          <p:nvPr/>
-        </p:nvSpPr>
-        <p:spPr>
-          <a:xfrm>
-            <a:off x="2020824" y="2423160"/>
-            <a:ext cx="1627632" cy="54864"/>
+          <p:cNvPr id="14" name="Shape 12"/>
+          <p:cNvSpPr/>
+          <p:nvPr/>
+        </p:nvSpPr>
+        <p:spPr>
+          <a:xfrm>
+            <a:off x="2075688" y="2359152"/>
+            <a:ext cx="1554480" cy="54864"/>
           </a:xfrm>
           <a:prstGeom prst="rect">
             <a:avLst/>
@@ -15486,14 +15899,14 @@
       </p:sp>
       <p:sp>
         <p:nvSpPr>
-          <p:cNvPr id="14" name="Text 12"/>
-          <p:cNvSpPr/>
-          <p:nvPr/>
-        </p:nvSpPr>
-        <p:spPr>
-          <a:xfrm>
-            <a:off x="2020824" y="2560320"/>
-            <a:ext cx="1627632" cy="457200"/>
+          <p:cNvPr id="15" name="Text 13"/>
+          <p:cNvSpPr/>
+          <p:nvPr/>
+        </p:nvSpPr>
+        <p:spPr>
+          <a:xfrm>
+            <a:off x="2075688" y="2523744"/>
+            <a:ext cx="1554480" cy="457200"/>
           </a:xfrm>
           <a:prstGeom prst="rect">
             <a:avLst/>
@@ -15525,14 +15938,14 @@
       </p:sp>
       <p:sp>
         <p:nvSpPr>
-          <p:cNvPr id="15" name="Text 13"/>
-          <p:cNvSpPr/>
-          <p:nvPr/>
-        </p:nvSpPr>
-        <p:spPr>
-          <a:xfrm>
-            <a:off x="2020824" y="2990088"/>
-            <a:ext cx="1627632" cy="274320"/>
+          <p:cNvPr id="16" name="Text 14"/>
+          <p:cNvSpPr/>
+          <p:nvPr/>
+        </p:nvSpPr>
+        <p:spPr>
+          <a:xfrm>
+            <a:off x="2075688" y="2980944"/>
+            <a:ext cx="1554480" cy="274320"/>
           </a:xfrm>
           <a:prstGeom prst="rect">
             <a:avLst/>
@@ -15564,14 +15977,14 @@
       </p:sp>
       <p:sp>
         <p:nvSpPr>
-          <p:cNvPr id="16" name="Text 14"/>
-          <p:cNvSpPr/>
-          <p:nvPr/>
-        </p:nvSpPr>
-        <p:spPr>
-          <a:xfrm>
-            <a:off x="2093976" y="3273552"/>
-            <a:ext cx="1481328" cy="457200"/>
+          <p:cNvPr id="17" name="Text 15"/>
+          <p:cNvSpPr/>
+          <p:nvPr/>
+        </p:nvSpPr>
+        <p:spPr>
+          <a:xfrm>
+            <a:off x="2167128" y="3291840"/>
+            <a:ext cx="1371600" cy="411480"/>
           </a:xfrm>
           <a:prstGeom prst="rect">
             <a:avLst/>
@@ -15587,7 +16000,7 @@
               <a:buNone/>
             </a:pPr>
             <a:r>
-              <a:rPr lang="en-US" sz="800" dirty="0">
+              <a:rPr lang="en-US" sz="850" dirty="0">
                 <a:solidFill>
                   <a:srgbClr val="CCCCCC"/>
                 </a:solidFill>
@@ -15597,20 +16010,20 @@
               </a:rPr>
               <a:t>Who buys the chips and who builds the models.</a:t>
             </a:r>
-            <a:endParaRPr lang="en-US" sz="800" dirty="0"/>
-          </a:p>
-        </p:txBody>
-      </p:sp>
-      <p:sp>
-        <p:nvSpPr>
-          <p:cNvPr id="17" name="Text 15"/>
-          <p:cNvSpPr/>
-          <p:nvPr/>
-        </p:nvSpPr>
-        <p:spPr>
-          <a:xfrm>
-            <a:off x="2020824" y="3648456"/>
-            <a:ext cx="1627632" cy="182880"/>
+            <a:endParaRPr lang="en-US" sz="850" dirty="0"/>
+          </a:p>
+        </p:txBody>
+      </p:sp>
+      <p:sp>
+        <p:nvSpPr>
+          <p:cNvPr id="18" name="Text 16"/>
+          <p:cNvSpPr/>
+          <p:nvPr/>
+        </p:nvSpPr>
+        <p:spPr>
+          <a:xfrm>
+            <a:off x="2075688" y="3639312"/>
+            <a:ext cx="1554480" cy="201168"/>
           </a:xfrm>
           <a:prstGeom prst="rect">
             <a:avLst/>
@@ -15642,14 +16055,14 @@
       </p:sp>
       <p:sp>
         <p:nvSpPr>
-          <p:cNvPr id="18" name="Shape 16"/>
-          <p:cNvSpPr/>
-          <p:nvPr/>
-        </p:nvSpPr>
-        <p:spPr>
-          <a:xfrm>
-            <a:off x="3758184" y="2423160"/>
-            <a:ext cx="1627632" cy="1417320"/>
+          <p:cNvPr id="19" name="Shape 17"/>
+          <p:cNvSpPr/>
+          <p:nvPr/>
+        </p:nvSpPr>
+        <p:spPr>
+          <a:xfrm>
+            <a:off x="3794760" y="2359152"/>
+            <a:ext cx="1554480" cy="1508760"/>
           </a:xfrm>
           <a:prstGeom prst="rect">
             <a:avLst/>
@@ -15667,14 +16080,14 @@
       </p:sp>
       <p:sp>
         <p:nvSpPr>
-          <p:cNvPr id="19" name="Shape 17"/>
-          <p:cNvSpPr/>
-          <p:nvPr/>
-        </p:nvSpPr>
-        <p:spPr>
-          <a:xfrm>
-            <a:off x="3758184" y="2423160"/>
-            <a:ext cx="1627632" cy="54864"/>
+          <p:cNvPr id="20" name="Shape 18"/>
+          <p:cNvSpPr/>
+          <p:nvPr/>
+        </p:nvSpPr>
+        <p:spPr>
+          <a:xfrm>
+            <a:off x="3794760" y="2359152"/>
+            <a:ext cx="1554480" cy="54864"/>
           </a:xfrm>
           <a:prstGeom prst="rect">
             <a:avLst/>
@@ -15692,14 +16105,14 @@
       </p:sp>
       <p:sp>
         <p:nvSpPr>
-          <p:cNvPr id="20" name="Text 18"/>
-          <p:cNvSpPr/>
-          <p:nvPr/>
-        </p:nvSpPr>
-        <p:spPr>
-          <a:xfrm>
-            <a:off x="3758184" y="2560320"/>
-            <a:ext cx="1627632" cy="457200"/>
+          <p:cNvPr id="21" name="Text 19"/>
+          <p:cNvSpPr/>
+          <p:nvPr/>
+        </p:nvSpPr>
+        <p:spPr>
+          <a:xfrm>
+            <a:off x="3794760" y="2523744"/>
+            <a:ext cx="1554480" cy="457200"/>
           </a:xfrm>
           <a:prstGeom prst="rect">
             <a:avLst/>
@@ -15731,14 +16144,14 @@
       </p:sp>
       <p:sp>
         <p:nvSpPr>
-          <p:cNvPr id="21" name="Text 19"/>
-          <p:cNvSpPr/>
-          <p:nvPr/>
-        </p:nvSpPr>
-        <p:spPr>
-          <a:xfrm>
-            <a:off x="3758184" y="2990088"/>
-            <a:ext cx="1627632" cy="274320"/>
+          <p:cNvPr id="22" name="Text 20"/>
+          <p:cNvSpPr/>
+          <p:nvPr/>
+        </p:nvSpPr>
+        <p:spPr>
+          <a:xfrm>
+            <a:off x="3794760" y="2980944"/>
+            <a:ext cx="1554480" cy="274320"/>
           </a:xfrm>
           <a:prstGeom prst="rect">
             <a:avLst/>
@@ -15770,14 +16183,14 @@
       </p:sp>
       <p:sp>
         <p:nvSpPr>
-          <p:cNvPr id="22" name="Text 20"/>
-          <p:cNvSpPr/>
-          <p:nvPr/>
-        </p:nvSpPr>
-        <p:spPr>
-          <a:xfrm>
-            <a:off x="3831336" y="3273552"/>
-            <a:ext cx="1481328" cy="457200"/>
+          <p:cNvPr id="23" name="Text 21"/>
+          <p:cNvSpPr/>
+          <p:nvPr/>
+        </p:nvSpPr>
+        <p:spPr>
+          <a:xfrm>
+            <a:off x="3886200" y="3291840"/>
+            <a:ext cx="1371600" cy="411480"/>
           </a:xfrm>
           <a:prstGeom prst="rect">
             <a:avLst/>
@@ -15793,7 +16206,7 @@
               <a:buNone/>
             </a:pPr>
             <a:r>
-              <a:rPr lang="en-US" sz="800" dirty="0">
+              <a:rPr lang="en-US" sz="850" dirty="0">
                 <a:solidFill>
                   <a:srgbClr val="CCCCCC"/>
                 </a:solidFill>
@@ -15803,20 +16216,20 @@
               </a:rPr>
               <a:t>The agent era and the great divergence in tech.</a:t>
             </a:r>
-            <a:endParaRPr lang="en-US" sz="800" dirty="0"/>
-          </a:p>
-        </p:txBody>
-      </p:sp>
-      <p:sp>
-        <p:nvSpPr>
-          <p:cNvPr id="23" name="Text 21"/>
-          <p:cNvSpPr/>
-          <p:nvPr/>
-        </p:nvSpPr>
-        <p:spPr>
-          <a:xfrm>
-            <a:off x="3758184" y="3648456"/>
-            <a:ext cx="1627632" cy="182880"/>
+            <a:endParaRPr lang="en-US" sz="850" dirty="0"/>
+          </a:p>
+        </p:txBody>
+      </p:sp>
+      <p:sp>
+        <p:nvSpPr>
+          <p:cNvPr id="24" name="Text 22"/>
+          <p:cNvSpPr/>
+          <p:nvPr/>
+        </p:nvSpPr>
+        <p:spPr>
+          <a:xfrm>
+            <a:off x="3794760" y="3639312"/>
+            <a:ext cx="1554480" cy="201168"/>
           </a:xfrm>
           <a:prstGeom prst="rect">
             <a:avLst/>
@@ -15848,14 +16261,14 @@
       </p:sp>
       <p:sp>
         <p:nvSpPr>
-          <p:cNvPr id="24" name="Shape 22"/>
-          <p:cNvSpPr/>
-          <p:nvPr/>
-        </p:nvSpPr>
-        <p:spPr>
-          <a:xfrm>
-            <a:off x="5495544" y="2423160"/>
-            <a:ext cx="1627632" cy="1417320"/>
+          <p:cNvPr id="25" name="Shape 23"/>
+          <p:cNvSpPr/>
+          <p:nvPr/>
+        </p:nvSpPr>
+        <p:spPr>
+          <a:xfrm>
+            <a:off x="5513832" y="2359152"/>
+            <a:ext cx="1554480" cy="1508760"/>
           </a:xfrm>
           <a:prstGeom prst="rect">
             <a:avLst/>
@@ -15873,14 +16286,14 @@
       </p:sp>
       <p:sp>
         <p:nvSpPr>
-          <p:cNvPr id="25" name="Shape 23"/>
-          <p:cNvSpPr/>
-          <p:nvPr/>
-        </p:nvSpPr>
-        <p:spPr>
-          <a:xfrm>
-            <a:off x="5495544" y="2423160"/>
-            <a:ext cx="1627632" cy="54864"/>
+          <p:cNvPr id="26" name="Shape 24"/>
+          <p:cNvSpPr/>
+          <p:nvPr/>
+        </p:nvSpPr>
+        <p:spPr>
+          <a:xfrm>
+            <a:off x="5513832" y="2359152"/>
+            <a:ext cx="1554480" cy="54864"/>
           </a:xfrm>
           <a:prstGeom prst="rect">
             <a:avLst/>
@@ -15898,14 +16311,14 @@
       </p:sp>
       <p:sp>
         <p:nvSpPr>
-          <p:cNvPr id="26" name="Text 24"/>
-          <p:cNvSpPr/>
-          <p:nvPr/>
-        </p:nvSpPr>
-        <p:spPr>
-          <a:xfrm>
-            <a:off x="5495544" y="2560320"/>
-            <a:ext cx="1627632" cy="457200"/>
+          <p:cNvPr id="27" name="Text 25"/>
+          <p:cNvSpPr/>
+          <p:nvPr/>
+        </p:nvSpPr>
+        <p:spPr>
+          <a:xfrm>
+            <a:off x="5513832" y="2523744"/>
+            <a:ext cx="1554480" cy="457200"/>
           </a:xfrm>
           <a:prstGeom prst="rect">
             <a:avLst/>
@@ -15937,14 +16350,14 @@
       </p:sp>
       <p:sp>
         <p:nvSpPr>
-          <p:cNvPr id="27" name="Text 25"/>
-          <p:cNvSpPr/>
-          <p:nvPr/>
-        </p:nvSpPr>
-        <p:spPr>
-          <a:xfrm>
-            <a:off x="5495544" y="2990088"/>
-            <a:ext cx="1627632" cy="274320"/>
+          <p:cNvPr id="28" name="Text 26"/>
+          <p:cNvSpPr/>
+          <p:nvPr/>
+        </p:nvSpPr>
+        <p:spPr>
+          <a:xfrm>
+            <a:off x="5513832" y="2980944"/>
+            <a:ext cx="1554480" cy="274320"/>
           </a:xfrm>
           <a:prstGeom prst="rect">
             <a:avLst/>
@@ -15976,14 +16389,14 @@
       </p:sp>
       <p:sp>
         <p:nvSpPr>
-          <p:cNvPr id="28" name="Text 26"/>
-          <p:cNvSpPr/>
-          <p:nvPr/>
-        </p:nvSpPr>
-        <p:spPr>
-          <a:xfrm>
-            <a:off x="5568696" y="3273552"/>
-            <a:ext cx="1481328" cy="457200"/>
+          <p:cNvPr id="29" name="Text 27"/>
+          <p:cNvSpPr/>
+          <p:nvPr/>
+        </p:nvSpPr>
+        <p:spPr>
+          <a:xfrm>
+            <a:off x="5605272" y="3291840"/>
+            <a:ext cx="1371600" cy="411480"/>
           </a:xfrm>
           <a:prstGeom prst="rect">
             <a:avLst/>
@@ -15999,7 +16412,7 @@
               <a:buNone/>
             </a:pPr>
             <a:r>
-              <a:rPr lang="en-US" sz="800" dirty="0">
+              <a:rPr lang="en-US" sz="850" dirty="0">
                 <a:solidFill>
                   <a:srgbClr val="CCCCCC"/>
                 </a:solidFill>
@@ -16009,20 +16422,20 @@
               </a:rPr>
               <a:t>Bubble, supply chain, policy, backlash.</a:t>
             </a:r>
-            <a:endParaRPr lang="en-US" sz="800" dirty="0"/>
-          </a:p>
-        </p:txBody>
-      </p:sp>
-      <p:sp>
-        <p:nvSpPr>
-          <p:cNvPr id="29" name="Text 27"/>
-          <p:cNvSpPr/>
-          <p:nvPr/>
-        </p:nvSpPr>
-        <p:spPr>
-          <a:xfrm>
-            <a:off x="5495544" y="3648456"/>
-            <a:ext cx="1627632" cy="182880"/>
+            <a:endParaRPr lang="en-US" sz="850" dirty="0"/>
+          </a:p>
+        </p:txBody>
+      </p:sp>
+      <p:sp>
+        <p:nvSpPr>
+          <p:cNvPr id="30" name="Text 28"/>
+          <p:cNvSpPr/>
+          <p:nvPr/>
+        </p:nvSpPr>
+        <p:spPr>
+          <a:xfrm>
+            <a:off x="5513832" y="3639312"/>
+            <a:ext cx="1554480" cy="201168"/>
           </a:xfrm>
           <a:prstGeom prst="rect">
             <a:avLst/>
@@ -16054,14 +16467,14 @@
       </p:sp>
       <p:sp>
         <p:nvSpPr>
-          <p:cNvPr id="30" name="Shape 28"/>
-          <p:cNvSpPr/>
-          <p:nvPr/>
-        </p:nvSpPr>
-        <p:spPr>
-          <a:xfrm>
-            <a:off x="7232904" y="2423160"/>
-            <a:ext cx="1627632" cy="1417320"/>
+          <p:cNvPr id="31" name="Shape 29"/>
+          <p:cNvSpPr/>
+          <p:nvPr/>
+        </p:nvSpPr>
+        <p:spPr>
+          <a:xfrm>
+            <a:off x="7232904" y="2359152"/>
+            <a:ext cx="1554480" cy="1508760"/>
           </a:xfrm>
           <a:prstGeom prst="rect">
             <a:avLst/>
@@ -16079,14 +16492,14 @@
       </p:sp>
       <p:sp>
         <p:nvSpPr>
-          <p:cNvPr id="31" name="Shape 29"/>
-          <p:cNvSpPr/>
-          <p:nvPr/>
-        </p:nvSpPr>
-        <p:spPr>
-          <a:xfrm>
-            <a:off x="7232904" y="2423160"/>
-            <a:ext cx="1627632" cy="54864"/>
+          <p:cNvPr id="32" name="Shape 30"/>
+          <p:cNvSpPr/>
+          <p:nvPr/>
+        </p:nvSpPr>
+        <p:spPr>
+          <a:xfrm>
+            <a:off x="7232904" y="2359152"/>
+            <a:ext cx="1554480" cy="54864"/>
           </a:xfrm>
           <a:prstGeom prst="rect">
             <a:avLst/>
@@ -16104,14 +16517,14 @@
       </p:sp>
       <p:sp>
         <p:nvSpPr>
-          <p:cNvPr id="32" name="Text 30"/>
-          <p:cNvSpPr/>
-          <p:nvPr/>
-        </p:nvSpPr>
-        <p:spPr>
-          <a:xfrm>
-            <a:off x="7232904" y="2560320"/>
-            <a:ext cx="1627632" cy="457200"/>
+          <p:cNvPr id="33" name="Text 31"/>
+          <p:cNvSpPr/>
+          <p:nvPr/>
+        </p:nvSpPr>
+        <p:spPr>
+          <a:xfrm>
+            <a:off x="7232904" y="2523744"/>
+            <a:ext cx="1554480" cy="457200"/>
           </a:xfrm>
           <a:prstGeom prst="rect">
             <a:avLst/>
@@ -16143,14 +16556,14 @@
       </p:sp>
       <p:sp>
         <p:nvSpPr>
-          <p:cNvPr id="33" name="Text 31"/>
-          <p:cNvSpPr/>
-          <p:nvPr/>
-        </p:nvSpPr>
-        <p:spPr>
-          <a:xfrm>
-            <a:off x="7232904" y="2990088"/>
-            <a:ext cx="1627632" cy="274320"/>
+          <p:cNvPr id="34" name="Text 32"/>
+          <p:cNvSpPr/>
+          <p:nvPr/>
+        </p:nvSpPr>
+        <p:spPr>
+          <a:xfrm>
+            <a:off x="7232904" y="2980944"/>
+            <a:ext cx="1554480" cy="274320"/>
           </a:xfrm>
           <a:prstGeom prst="rect">
             <a:avLst/>
@@ -16182,14 +16595,14 @@
       </p:sp>
       <p:sp>
         <p:nvSpPr>
-          <p:cNvPr id="34" name="Text 32"/>
-          <p:cNvSpPr/>
-          <p:nvPr/>
-        </p:nvSpPr>
-        <p:spPr>
-          <a:xfrm>
-            <a:off x="7306056" y="3273552"/>
-            <a:ext cx="1481328" cy="457200"/>
+          <p:cNvPr id="35" name="Text 33"/>
+          <p:cNvSpPr/>
+          <p:nvPr/>
+        </p:nvSpPr>
+        <p:spPr>
+          <a:xfrm>
+            <a:off x="7324344" y="3291840"/>
+            <a:ext cx="1371600" cy="411480"/>
           </a:xfrm>
           <a:prstGeom prst="rect">
             <a:avLst/>
@@ -16205,7 +16618,7 @@
               <a:buNone/>
             </a:pPr>
             <a:r>
-              <a:rPr lang="en-US" sz="800" dirty="0">
+              <a:rPr lang="en-US" sz="850" dirty="0">
                 <a:solidFill>
                   <a:srgbClr val="CCCCCC"/>
                 </a:solidFill>
@@ -16213,22 +16626,22 @@
                 <a:ea typeface="Arial" pitchFamily="34" charset="-122"/>
                 <a:cs typeface="Arial" pitchFamily="34" charset="-120"/>
               </a:rPr>
-              <a:t>Orbital, physical, autonomous, biology.</a:t>
-            </a:r>
-            <a:endParaRPr lang="en-US" sz="800" dirty="0"/>
-          </a:p>
-        </p:txBody>
-      </p:sp>
-      <p:sp>
-        <p:nvSpPr>
-          <p:cNvPr id="35" name="Text 33"/>
-          <p:cNvSpPr/>
-          <p:nvPr/>
-        </p:nvSpPr>
-        <p:spPr>
-          <a:xfrm>
-            <a:off x="7232904" y="3648456"/>
-            <a:ext cx="1627632" cy="182880"/>
+              <a:t>Orbital, physical, autonomous vehicles.</a:t>
+            </a:r>
+            <a:endParaRPr lang="en-US" sz="850" dirty="0"/>
+          </a:p>
+        </p:txBody>
+      </p:sp>
+      <p:sp>
+        <p:nvSpPr>
+          <p:cNvPr id="36" name="Text 34"/>
+          <p:cNvSpPr/>
+          <p:nvPr/>
+        </p:nvSpPr>
+        <p:spPr>
+          <a:xfrm>
+            <a:off x="7232904" y="3639312"/>
+            <a:ext cx="1554480" cy="201168"/>
           </a:xfrm>
           <a:prstGeom prst="rect">
             <a:avLst/>
@@ -16252,7 +16665,7 @@
                 <a:ea typeface="Arial" pitchFamily="34" charset="-122"/>
                 <a:cs typeface="Arial" pitchFamily="34" charset="-120"/>
               </a:rPr>
-              <a:t>Slides 18–21</a:t>
+              <a:t>Slides 18–20</a:t>
             </a:r>
             <a:endParaRPr lang="en-US" sz="750" dirty="0"/>
           </a:p>
@@ -16260,7 +16673,7 @@
       </p:sp>
       <p:sp>
         <p:nvSpPr>
-          <p:cNvPr id="36" name="Text 34"/>
+          <p:cNvPr id="37" name="Text 35"/>
           <p:cNvSpPr/>
           <p:nvPr/>
         </p:nvSpPr>
@@ -16299,7 +16712,7 @@
       </p:sp>
       <p:sp>
         <p:nvSpPr>
-          <p:cNvPr id="37" name="Shape 35"/>
+          <p:cNvPr id="38" name="Shape 36"/>
           <p:cNvSpPr/>
           <p:nvPr/>
         </p:nvSpPr>
@@ -16324,7 +16737,7 @@
       </p:sp>
       <p:sp>
         <p:nvSpPr>
-          <p:cNvPr id="38" name="Text 36"/>
+          <p:cNvPr id="39" name="Text 37"/>
           <p:cNvSpPr/>
           <p:nvPr/>
         </p:nvSpPr>
@@ -16363,7 +16776,7 @@
       </p:sp>
       <p:sp>
         <p:nvSpPr>
-          <p:cNvPr id="39" name="Text 37"/>
+          <p:cNvPr id="40" name="Text 38"/>
           <p:cNvSpPr/>
           <p:nvPr/>
         </p:nvSpPr>
@@ -16577,8 +16990,95 @@
         </p:nvSpPr>
         <p:spPr>
           <a:xfrm>
-            <a:off x="457200" y="1691640"/>
-            <a:ext cx="2697480" cy="365760"/>
+            <a:off x="457200" y="1325880"/>
+            <a:ext cx="8229600" cy="0"/>
+          </a:xfrm>
+          <a:prstGeom prst="line">
+            <a:avLst/>
+          </a:prstGeom>
+          <a:noFill/>
+          <a:ln w="9525">
+            <a:solidFill>
+              <a:srgbClr val="E5E5E5"/>
+            </a:solidFill>
+            <a:prstDash val="solid"/>
+          </a:ln>
+        </p:spPr>
+      </p:sp>
+      <p:sp>
+        <p:nvSpPr>
+          <p:cNvPr id="7" name="Shape 5"/>
+          <p:cNvSpPr/>
+          <p:nvPr/>
+        </p:nvSpPr>
+        <p:spPr>
+          <a:xfrm>
+            <a:off x="457200" y="1417320"/>
+            <a:ext cx="8229600" cy="457200"/>
+          </a:xfrm>
+          <a:prstGeom prst="rect">
+            <a:avLst/>
+          </a:prstGeom>
+          <a:solidFill>
+            <a:srgbClr val="EEEEEE"/>
+          </a:solidFill>
+          <a:ln w="9525">
+            <a:solidFill>
+              <a:srgbClr val="BBBBBB"/>
+            </a:solidFill>
+            <a:prstDash val="dash"/>
+          </a:ln>
+        </p:spPr>
+      </p:sp>
+      <p:sp>
+        <p:nvSpPr>
+          <p:cNvPr id="8" name="Text 6"/>
+          <p:cNvSpPr/>
+          <p:nvPr/>
+        </p:nvSpPr>
+        <p:spPr>
+          <a:xfrm>
+            <a:off x="548640" y="1417320"/>
+            <a:ext cx="8046720" cy="457200"/>
+          </a:xfrm>
+          <a:prstGeom prst="rect">
+            <a:avLst/>
+          </a:prstGeom>
+          <a:noFill/>
+          <a:ln/>
+        </p:spPr>
+        <p:txBody>
+          <a:bodyPr wrap="square" lIns="0" tIns="0" rIns="0" bIns="0" rtlCol="0" anchor="ctr"/>
+          <a:lstStyle/>
+          <a:p>
+            <a:pPr algn="ctr" indent="0" marL="0">
+              <a:buNone/>
+            </a:pPr>
+            <a:r>
+              <a:rPr lang="en-US" sz="1000" i="1" dirty="0">
+                <a:solidFill>
+                  <a:srgbClr val="888888"/>
+                </a:solidFill>
+                <a:latin typeface="Arial" pitchFamily="34" charset="0"/>
+                <a:ea typeface="Arial" pitchFamily="34" charset="-122"/>
+                <a:cs typeface="Arial" pitchFamily="34" charset="-120"/>
+              </a:rPr>
+              <a:t>IMAGE: AV sensor-visualization or fleet photo (Waymo / Tesla FSD)</a:t>
+            </a:r>
+            <a:endParaRPr lang="en-US" sz="1000" dirty="0"/>
+          </a:p>
+        </p:txBody>
+      </p:sp>
+      <p:sp>
+        <p:nvSpPr>
+          <p:cNvPr id="9" name="Shape 7"/>
+          <p:cNvSpPr/>
+          <p:nvPr/>
+        </p:nvSpPr>
+        <p:spPr>
+          <a:xfrm>
+            <a:off x="457200" y="2057400"/>
+            <a:ext cx="2697480" cy="320040"/>
           </a:xfrm>
           <a:prstGeom prst="rect">
             <a:avLst/>
@@ -16596,14 +17096,14 @@
       </p:sp>
       <p:sp>
         <p:nvSpPr>
-          <p:cNvPr id="7" name="Text 5"/>
-          <p:cNvSpPr/>
-          <p:nvPr/>
-        </p:nvSpPr>
-        <p:spPr>
-          <a:xfrm>
-            <a:off x="457200" y="1691640"/>
-            <a:ext cx="2697480" cy="365760"/>
+          <p:cNvPr id="10" name="Text 8"/>
+          <p:cNvSpPr/>
+          <p:nvPr/>
+        </p:nvSpPr>
+        <p:spPr>
+          <a:xfrm>
+            <a:off x="457200" y="2057400"/>
+            <a:ext cx="2697480" cy="320040"/>
           </a:xfrm>
           <a:prstGeom prst="rect">
             <a:avLst/>
@@ -16635,14 +17135,14 @@
       </p:sp>
       <p:sp>
         <p:nvSpPr>
-          <p:cNvPr id="8" name="Shape 6"/>
-          <p:cNvSpPr/>
-          <p:nvPr/>
-        </p:nvSpPr>
-        <p:spPr>
-          <a:xfrm>
-            <a:off x="457200" y="2057400"/>
-            <a:ext cx="2697480" cy="1188720"/>
+          <p:cNvPr id="11" name="Shape 9"/>
+          <p:cNvSpPr/>
+          <p:nvPr/>
+        </p:nvSpPr>
+        <p:spPr>
+          <a:xfrm>
+            <a:off x="457200" y="2377440"/>
+            <a:ext cx="2697480" cy="1005840"/>
           </a:xfrm>
           <a:prstGeom prst="rect">
             <a:avLst/>
@@ -16660,14 +17160,14 @@
       </p:sp>
       <p:sp>
         <p:nvSpPr>
-          <p:cNvPr id="9" name="Text 7"/>
-          <p:cNvSpPr/>
-          <p:nvPr/>
-        </p:nvSpPr>
-        <p:spPr>
-          <a:xfrm>
-            <a:off x="594360" y="2148840"/>
-            <a:ext cx="2423160" cy="1005840"/>
+          <p:cNvPr id="12" name="Text 10"/>
+          <p:cNvSpPr/>
+          <p:nvPr/>
+        </p:nvSpPr>
+        <p:spPr>
+          <a:xfrm>
+            <a:off x="594360" y="2468880"/>
+            <a:ext cx="2423160" cy="822960"/>
           </a:xfrm>
           <a:prstGeom prst="rect">
             <a:avLst/>
@@ -16683,7 +17183,7 @@
               <a:buNone/>
             </a:pPr>
             <a:r>
-              <a:rPr lang="en-US" sz="1050" dirty="0">
+              <a:rPr lang="en-US" sz="950" dirty="0">
                 <a:solidFill>
                   <a:srgbClr val="333333"/>
                 </a:solidFill>
@@ -16693,20 +17193,20 @@
               </a:rPr>
               <a:t>Human drivers cause ~1.35M deaths per year globally. Autonomous systems don't tire or lose focus — and regulators are beginning to recognize the math.</a:t>
             </a:r>
-            <a:endParaRPr lang="en-US" sz="1050" dirty="0"/>
-          </a:p>
-        </p:txBody>
-      </p:sp>
-      <p:sp>
-        <p:nvSpPr>
-          <p:cNvPr id="10" name="Shape 8"/>
-          <p:cNvSpPr/>
-          <p:nvPr/>
-        </p:nvSpPr>
-        <p:spPr>
-          <a:xfrm>
-            <a:off x="3291840" y="1691640"/>
-            <a:ext cx="2697480" cy="365760"/>
+            <a:endParaRPr lang="en-US" sz="950" dirty="0"/>
+          </a:p>
+        </p:txBody>
+      </p:sp>
+      <p:sp>
+        <p:nvSpPr>
+          <p:cNvPr id="13" name="Shape 11"/>
+          <p:cNvSpPr/>
+          <p:nvPr/>
+        </p:nvSpPr>
+        <p:spPr>
+          <a:xfrm>
+            <a:off x="3291840" y="2057400"/>
+            <a:ext cx="2697480" cy="320040"/>
           </a:xfrm>
           <a:prstGeom prst="rect">
             <a:avLst/>
@@ -16724,14 +17224,14 @@
       </p:sp>
       <p:sp>
         <p:nvSpPr>
-          <p:cNvPr id="11" name="Text 9"/>
-          <p:cNvSpPr/>
-          <p:nvPr/>
-        </p:nvSpPr>
-        <p:spPr>
-          <a:xfrm>
-            <a:off x="3291840" y="1691640"/>
-            <a:ext cx="2697480" cy="365760"/>
+          <p:cNvPr id="14" name="Text 12"/>
+          <p:cNvSpPr/>
+          <p:nvPr/>
+        </p:nvSpPr>
+        <p:spPr>
+          <a:xfrm>
+            <a:off x="3291840" y="2057400"/>
+            <a:ext cx="2697480" cy="320040"/>
           </a:xfrm>
           <a:prstGeom prst="rect">
             <a:avLst/>
@@ -16763,14 +17263,14 @@
       </p:sp>
       <p:sp>
         <p:nvSpPr>
-          <p:cNvPr id="12" name="Shape 10"/>
-          <p:cNvSpPr/>
-          <p:nvPr/>
-        </p:nvSpPr>
-        <p:spPr>
-          <a:xfrm>
-            <a:off x="3291840" y="2057400"/>
-            <a:ext cx="2697480" cy="1188720"/>
+          <p:cNvPr id="15" name="Shape 13"/>
+          <p:cNvSpPr/>
+          <p:nvPr/>
+        </p:nvSpPr>
+        <p:spPr>
+          <a:xfrm>
+            <a:off x="3291840" y="2377440"/>
+            <a:ext cx="2697480" cy="1005840"/>
           </a:xfrm>
           <a:prstGeom prst="rect">
             <a:avLst/>
@@ -16788,14 +17288,14 @@
       </p:sp>
       <p:sp>
         <p:nvSpPr>
-          <p:cNvPr id="13" name="Text 11"/>
-          <p:cNvSpPr/>
-          <p:nvPr/>
-        </p:nvSpPr>
-        <p:spPr>
-          <a:xfrm>
-            <a:off x="3429000" y="2148840"/>
-            <a:ext cx="2423160" cy="1005840"/>
+          <p:cNvPr id="16" name="Text 14"/>
+          <p:cNvSpPr/>
+          <p:nvPr/>
+        </p:nvSpPr>
+        <p:spPr>
+          <a:xfrm>
+            <a:off x="3429000" y="2468880"/>
+            <a:ext cx="2423160" cy="822960"/>
           </a:xfrm>
           <a:prstGeom prst="rect">
             <a:avLst/>
@@ -16811,7 +17311,7 @@
               <a:buNone/>
             </a:pPr>
             <a:r>
-              <a:rPr lang="en-US" sz="1050" dirty="0">
+              <a:rPr lang="en-US" sz="950" dirty="0">
                 <a:solidFill>
                   <a:srgbClr val="333333"/>
                 </a:solidFill>
@@ -16821,20 +17321,20 @@
               </a:rPr>
               <a:t>Every mile generates training data. Better models unlock more cities. More cities generate more miles. The flywheel self-reinforces.</a:t>
             </a:r>
-            <a:endParaRPr lang="en-US" sz="1050" dirty="0"/>
-          </a:p>
-        </p:txBody>
-      </p:sp>
-      <p:sp>
-        <p:nvSpPr>
-          <p:cNvPr id="14" name="Shape 12"/>
-          <p:cNvSpPr/>
-          <p:nvPr/>
-        </p:nvSpPr>
-        <p:spPr>
-          <a:xfrm>
-            <a:off x="6126480" y="1691640"/>
-            <a:ext cx="2697480" cy="365760"/>
+            <a:endParaRPr lang="en-US" sz="950" dirty="0"/>
+          </a:p>
+        </p:txBody>
+      </p:sp>
+      <p:sp>
+        <p:nvSpPr>
+          <p:cNvPr id="17" name="Shape 15"/>
+          <p:cNvSpPr/>
+          <p:nvPr/>
+        </p:nvSpPr>
+        <p:spPr>
+          <a:xfrm>
+            <a:off x="6126480" y="2057400"/>
+            <a:ext cx="2697480" cy="320040"/>
           </a:xfrm>
           <a:prstGeom prst="rect">
             <a:avLst/>
@@ -16852,14 +17352,14 @@
       </p:sp>
       <p:sp>
         <p:nvSpPr>
-          <p:cNvPr id="15" name="Text 13"/>
-          <p:cNvSpPr/>
-          <p:nvPr/>
-        </p:nvSpPr>
-        <p:spPr>
-          <a:xfrm>
-            <a:off x="6126480" y="1691640"/>
-            <a:ext cx="2697480" cy="365760"/>
+          <p:cNvPr id="18" name="Text 16"/>
+          <p:cNvSpPr/>
+          <p:nvPr/>
+        </p:nvSpPr>
+        <p:spPr>
+          <a:xfrm>
+            <a:off x="6126480" y="2057400"/>
+            <a:ext cx="2697480" cy="320040"/>
           </a:xfrm>
           <a:prstGeom prst="rect">
             <a:avLst/>
@@ -16891,14 +17391,14 @@
       </p:sp>
       <p:sp>
         <p:nvSpPr>
-          <p:cNvPr id="16" name="Shape 14"/>
-          <p:cNvSpPr/>
-          <p:nvPr/>
-        </p:nvSpPr>
-        <p:spPr>
-          <a:xfrm>
-            <a:off x="6126480" y="2057400"/>
-            <a:ext cx="2697480" cy="1188720"/>
+          <p:cNvPr id="19" name="Shape 17"/>
+          <p:cNvSpPr/>
+          <p:nvPr/>
+        </p:nvSpPr>
+        <p:spPr>
+          <a:xfrm>
+            <a:off x="6126480" y="2377440"/>
+            <a:ext cx="2697480" cy="1005840"/>
           </a:xfrm>
           <a:prstGeom prst="rect">
             <a:avLst/>
@@ -16916,14 +17416,14 @@
       </p:sp>
       <p:sp>
         <p:nvSpPr>
-          <p:cNvPr id="17" name="Text 15"/>
-          <p:cNvSpPr/>
-          <p:nvPr/>
-        </p:nvSpPr>
-        <p:spPr>
-          <a:xfrm>
-            <a:off x="6263640" y="2148840"/>
-            <a:ext cx="2423160" cy="1005840"/>
+          <p:cNvPr id="20" name="Text 18"/>
+          <p:cNvSpPr/>
+          <p:nvPr/>
+        </p:nvSpPr>
+        <p:spPr>
+          <a:xfrm>
+            <a:off x="6263640" y="2468880"/>
+            <a:ext cx="2423160" cy="822960"/>
           </a:xfrm>
           <a:prstGeom prst="rect">
             <a:avLst/>
@@ -16939,7 +17439,7 @@
               <a:buNone/>
             </a:pPr>
             <a:r>
-              <a:rPr lang="en-US" sz="1050" dirty="0">
+              <a:rPr lang="en-US" sz="950" dirty="0">
                 <a:solidFill>
                   <a:srgbClr val="333333"/>
                 </a:solidFill>
@@ -16949,20 +17449,20 @@
               </a:rPr>
               <a:t>Each AV runs thousands of AI ops per second across cameras, lidar, and radar — 24/7, at the edge, consuming frontier-scale compute.</a:t>
             </a:r>
-            <a:endParaRPr lang="en-US" sz="1050" dirty="0"/>
-          </a:p>
-        </p:txBody>
-      </p:sp>
-      <p:sp>
-        <p:nvSpPr>
-          <p:cNvPr id="18" name="Shape 16"/>
-          <p:cNvSpPr/>
-          <p:nvPr/>
-        </p:nvSpPr>
-        <p:spPr>
-          <a:xfrm>
-            <a:off x="457200" y="3429000"/>
-            <a:ext cx="8229600" cy="502920"/>
+            <a:endParaRPr lang="en-US" sz="950" dirty="0"/>
+          </a:p>
+        </p:txBody>
+      </p:sp>
+      <p:sp>
+        <p:nvSpPr>
+          <p:cNvPr id="21" name="Shape 19"/>
+          <p:cNvSpPr/>
+          <p:nvPr/>
+        </p:nvSpPr>
+        <p:spPr>
+          <a:xfrm>
+            <a:off x="457200" y="3520440"/>
+            <a:ext cx="8229600" cy="411480"/>
           </a:xfrm>
           <a:prstGeom prst="rect">
             <a:avLst/>
@@ -16980,14 +17480,14 @@
       </p:sp>
       <p:sp>
         <p:nvSpPr>
-          <p:cNvPr id="19" name="Text 17"/>
-          <p:cNvSpPr/>
-          <p:nvPr/>
-        </p:nvSpPr>
-        <p:spPr>
-          <a:xfrm>
-            <a:off x="640080" y="3429000"/>
-            <a:ext cx="7863840" cy="502920"/>
+          <p:cNvPr id="22" name="Text 20"/>
+          <p:cNvSpPr/>
+          <p:nvPr/>
+        </p:nvSpPr>
+        <p:spPr>
+          <a:xfrm>
+            <a:off x="640080" y="3520440"/>
+            <a:ext cx="7863840" cy="411480"/>
           </a:xfrm>
           <a:prstGeom prst="rect">
             <a:avLst/>
@@ -17033,7 +17533,7 @@
       </p:sp>
       <p:sp>
         <p:nvSpPr>
-          <p:cNvPr id="20" name="Text 18"/>
+          <p:cNvPr id="23" name="Text 21"/>
           <p:cNvSpPr/>
           <p:nvPr/>
         </p:nvSpPr>
@@ -17072,7 +17572,7 @@
       </p:sp>
       <p:sp>
         <p:nvSpPr>
-          <p:cNvPr id="21" name="Shape 19"/>
+          <p:cNvPr id="24" name="Shape 22"/>
           <p:cNvSpPr/>
           <p:nvPr/>
         </p:nvSpPr>
@@ -17097,7 +17597,7 @@
       </p:sp>
       <p:sp>
         <p:nvSpPr>
-          <p:cNvPr id="22" name="Text 20"/>
+          <p:cNvPr id="25" name="Text 23"/>
           <p:cNvSpPr/>
           <p:nvPr/>
         </p:nvSpPr>
@@ -17136,7 +17636,7 @@
       </p:sp>
       <p:sp>
         <p:nvSpPr>
-          <p:cNvPr id="23" name="Text 21"/>
+          <p:cNvPr id="26" name="Text 24"/>
           <p:cNvSpPr/>
           <p:nvPr/>
         </p:nvSpPr>
@@ -17284,8 +17784,31 @@
         </p:nvSpPr>
         <p:spPr>
           <a:xfrm>
-            <a:off x="457200" y="1600200"/>
-            <a:ext cx="548640" cy="493776"/>
+            <a:off x="457200" y="1325880"/>
+            <a:ext cx="8229600" cy="0"/>
+          </a:xfrm>
+          <a:prstGeom prst="line">
+            <a:avLst/>
+          </a:prstGeom>
+          <a:noFill/>
+          <a:ln w="9525">
+            <a:solidFill>
+              <a:srgbClr val="E5E5E5"/>
+            </a:solidFill>
+            <a:prstDash val="solid"/>
+          </a:ln>
+        </p:spPr>
+      </p:sp>
+      <p:sp>
+        <p:nvSpPr>
+          <p:cNvPr id="5" name="Shape 3"/>
+          <p:cNvSpPr/>
+          <p:nvPr/>
+        </p:nvSpPr>
+        <p:spPr>
+          <a:xfrm>
+            <a:off x="457200" y="1417320"/>
+            <a:ext cx="548640" cy="548640"/>
           </a:xfrm>
           <a:prstGeom prst="rect">
             <a:avLst/>
@@ -17303,14 +17826,14 @@
       </p:sp>
       <p:sp>
         <p:nvSpPr>
-          <p:cNvPr id="5" name="Text 3"/>
-          <p:cNvSpPr/>
-          <p:nvPr/>
-        </p:nvSpPr>
-        <p:spPr>
-          <a:xfrm>
-            <a:off x="457200" y="1600200"/>
-            <a:ext cx="548640" cy="493776"/>
+          <p:cNvPr id="6" name="Text 4"/>
+          <p:cNvSpPr/>
+          <p:nvPr/>
+        </p:nvSpPr>
+        <p:spPr>
+          <a:xfrm>
+            <a:off x="457200" y="1417320"/>
+            <a:ext cx="548640" cy="548640"/>
           </a:xfrm>
           <a:prstGeom prst="rect">
             <a:avLst/>
@@ -17342,14 +17865,14 @@
       </p:sp>
       <p:sp>
         <p:nvSpPr>
-          <p:cNvPr id="6" name="Text 4"/>
-          <p:cNvSpPr/>
-          <p:nvPr/>
-        </p:nvSpPr>
-        <p:spPr>
-          <a:xfrm>
-            <a:off x="1097280" y="1600200"/>
-            <a:ext cx="7589520" cy="219456"/>
+          <p:cNvPr id="7" name="Text 5"/>
+          <p:cNvSpPr/>
+          <p:nvPr/>
+        </p:nvSpPr>
+        <p:spPr>
+          <a:xfrm>
+            <a:off x="1097280" y="1417320"/>
+            <a:ext cx="7589520" cy="228600"/>
           </a:xfrm>
           <a:prstGeom prst="rect">
             <a:avLst/>
@@ -17373,7 +17896,7 @@
                 <a:ea typeface="Arial" pitchFamily="34" charset="-122"/>
                 <a:cs typeface="Arial" pitchFamily="34" charset="-120"/>
               </a:rPr>
-              <a:t>The largest capex cycle in history — financed differently than you think.</a:t>
+              <a:t>The largest capex cycle in history — and it's going on credit.</a:t>
             </a:r>
             <a:endParaRPr lang="en-US" sz="1200" dirty="0"/>
           </a:p>
@@ -17381,14 +17904,14 @@
       </p:sp>
       <p:sp>
         <p:nvSpPr>
-          <p:cNvPr id="7" name="Text 5"/>
-          <p:cNvSpPr/>
-          <p:nvPr/>
-        </p:nvSpPr>
-        <p:spPr>
-          <a:xfrm>
-            <a:off x="1097280" y="1819656"/>
-            <a:ext cx="7589520" cy="274320"/>
+          <p:cNvPr id="8" name="Text 6"/>
+          <p:cNvSpPr/>
+          <p:nvPr/>
+        </p:nvSpPr>
+        <p:spPr>
+          <a:xfrm>
+            <a:off x="1097280" y="1645920"/>
+            <a:ext cx="7589520" cy="347472"/>
           </a:xfrm>
           <a:prstGeom prst="rect">
             <a:avLst/>
@@ -17412,7 +17935,7 @@
                 <a:ea typeface="Arial" pitchFamily="34" charset="-122"/>
                 <a:cs typeface="Arial" pitchFamily="34" charset="-120"/>
               </a:rPr>
-              <a:t>$685B hyperscaler capex in 2026. Morgan Stanley projects $400B+ in borrowing — 2× 2025. Companies spending ~90% of operating cash flow on capex, up from ~65%. This is no longer a cash-flow story — it's a credit story.</a:t>
+              <a:t>~$750B hyperscaler capex in 2026, up ~$300B YoY. Amazon FCF turns negative; Meta FCF down ~90%. ~75% of that capex is AI-specific. The story has shifted from cash flow to balance sheet.</a:t>
             </a:r>
             <a:endParaRPr lang="en-US" sz="950" dirty="0"/>
           </a:p>
@@ -17420,14 +17943,14 @@
       </p:sp>
       <p:sp>
         <p:nvSpPr>
-          <p:cNvPr id="8" name="Shape 6"/>
-          <p:cNvSpPr/>
-          <p:nvPr/>
-        </p:nvSpPr>
-        <p:spPr>
-          <a:xfrm>
-            <a:off x="457200" y="2167128"/>
-            <a:ext cx="548640" cy="493776"/>
+          <p:cNvPr id="9" name="Shape 7"/>
+          <p:cNvSpPr/>
+          <p:nvPr/>
+        </p:nvSpPr>
+        <p:spPr>
+          <a:xfrm>
+            <a:off x="457200" y="2057400"/>
+            <a:ext cx="548640" cy="548640"/>
           </a:xfrm>
           <a:prstGeom prst="rect">
             <a:avLst/>
@@ -17445,14 +17968,14 @@
       </p:sp>
       <p:sp>
         <p:nvSpPr>
-          <p:cNvPr id="9" name="Text 7"/>
-          <p:cNvSpPr/>
-          <p:nvPr/>
-        </p:nvSpPr>
-        <p:spPr>
-          <a:xfrm>
-            <a:off x="457200" y="2167128"/>
-            <a:ext cx="548640" cy="493776"/>
+          <p:cNvPr id="10" name="Text 8"/>
+          <p:cNvSpPr/>
+          <p:nvPr/>
+        </p:nvSpPr>
+        <p:spPr>
+          <a:xfrm>
+            <a:off x="457200" y="2057400"/>
+            <a:ext cx="548640" cy="548640"/>
           </a:xfrm>
           <a:prstGeom prst="rect">
             <a:avLst/>
@@ -17484,14 +18007,14 @@
       </p:sp>
       <p:sp>
         <p:nvSpPr>
-          <p:cNvPr id="10" name="Text 8"/>
-          <p:cNvSpPr/>
-          <p:nvPr/>
-        </p:nvSpPr>
-        <p:spPr>
-          <a:xfrm>
-            <a:off x="1097280" y="2167128"/>
-            <a:ext cx="7589520" cy="219456"/>
+          <p:cNvPr id="11" name="Text 9"/>
+          <p:cNvSpPr/>
+          <p:nvPr/>
+        </p:nvSpPr>
+        <p:spPr>
+          <a:xfrm>
+            <a:off x="1097280" y="2057400"/>
+            <a:ext cx="7589520" cy="228600"/>
           </a:xfrm>
           <a:prstGeom prst="rect">
             <a:avLst/>
@@ -17523,14 +18046,14 @@
       </p:sp>
       <p:sp>
         <p:nvSpPr>
-          <p:cNvPr id="11" name="Text 9"/>
-          <p:cNvSpPr/>
-          <p:nvPr/>
-        </p:nvSpPr>
-        <p:spPr>
-          <a:xfrm>
-            <a:off x="1097280" y="2386584"/>
-            <a:ext cx="7589520" cy="274320"/>
+          <p:cNvPr id="12" name="Text 10"/>
+          <p:cNvSpPr/>
+          <p:nvPr/>
+        </p:nvSpPr>
+        <p:spPr>
+          <a:xfrm>
+            <a:off x="1097280" y="2286000"/>
+            <a:ext cx="7589520" cy="347472"/>
           </a:xfrm>
           <a:prstGeom prst="rect">
             <a:avLst/>
@@ -17554,7 +18077,7 @@
                 <a:ea typeface="Arial" pitchFamily="34" charset="-122"/>
                 <a:cs typeface="Arial" pitchFamily="34" charset="-120"/>
               </a:rPr>
-              <a:t>AI stock correlation collapsed from ~80% to ~20%. Semis (SOXX) +15% YTD, software (IGV) –24% YTD. Memory oligopolies with pricing power outperform cloud providers burning cash.</a:t>
+              <a:t>AI stock correlation collapsed from ~80% to ~20%. Semis (SOXX) +38% YTD, software (IGV) –20% YTD — a 58-point spread. Memory oligopolies with pricing power outperform cloud providers burning cash.</a:t>
             </a:r>
             <a:endParaRPr lang="en-US" sz="950" dirty="0"/>
           </a:p>
@@ -17562,14 +18085,14 @@
       </p:sp>
       <p:sp>
         <p:nvSpPr>
-          <p:cNvPr id="12" name="Shape 10"/>
-          <p:cNvSpPr/>
-          <p:nvPr/>
-        </p:nvSpPr>
-        <p:spPr>
-          <a:xfrm>
-            <a:off x="457200" y="2734056"/>
-            <a:ext cx="548640" cy="493776"/>
+          <p:cNvPr id="13" name="Shape 11"/>
+          <p:cNvSpPr/>
+          <p:nvPr/>
+        </p:nvSpPr>
+        <p:spPr>
+          <a:xfrm>
+            <a:off x="457200" y="2697480"/>
+            <a:ext cx="548640" cy="548640"/>
           </a:xfrm>
           <a:prstGeom prst="rect">
             <a:avLst/>
@@ -17587,14 +18110,14 @@
       </p:sp>
       <p:sp>
         <p:nvSpPr>
-          <p:cNvPr id="13" name="Text 11"/>
-          <p:cNvSpPr/>
-          <p:nvPr/>
-        </p:nvSpPr>
-        <p:spPr>
-          <a:xfrm>
-            <a:off x="457200" y="2734056"/>
-            <a:ext cx="548640" cy="493776"/>
+          <p:cNvPr id="14" name="Text 12"/>
+          <p:cNvSpPr/>
+          <p:nvPr/>
+        </p:nvSpPr>
+        <p:spPr>
+          <a:xfrm>
+            <a:off x="457200" y="2697480"/>
+            <a:ext cx="548640" cy="548640"/>
           </a:xfrm>
           <a:prstGeom prst="rect">
             <a:avLst/>
@@ -17626,14 +18149,14 @@
       </p:sp>
       <p:sp>
         <p:nvSpPr>
-          <p:cNvPr id="14" name="Text 12"/>
-          <p:cNvSpPr/>
-          <p:nvPr/>
-        </p:nvSpPr>
-        <p:spPr>
-          <a:xfrm>
-            <a:off x="1097280" y="2734056"/>
-            <a:ext cx="7589520" cy="219456"/>
+          <p:cNvPr id="15" name="Text 13"/>
+          <p:cNvSpPr/>
+          <p:nvPr/>
+        </p:nvSpPr>
+        <p:spPr>
+          <a:xfrm>
+            <a:off x="1097280" y="2697480"/>
+            <a:ext cx="7589520" cy="228600"/>
           </a:xfrm>
           <a:prstGeom prst="rect">
             <a:avLst/>
@@ -17665,14 +18188,14 @@
       </p:sp>
       <p:sp>
         <p:nvSpPr>
-          <p:cNvPr id="15" name="Text 13"/>
-          <p:cNvSpPr/>
-          <p:nvPr/>
-        </p:nvSpPr>
-        <p:spPr>
-          <a:xfrm>
-            <a:off x="1097280" y="2953512"/>
-            <a:ext cx="7589520" cy="274320"/>
+          <p:cNvPr id="16" name="Text 14"/>
+          <p:cNvSpPr/>
+          <p:nvPr/>
+        </p:nvSpPr>
+        <p:spPr>
+          <a:xfrm>
+            <a:off x="1097280" y="2926080"/>
+            <a:ext cx="7589520" cy="347472"/>
           </a:xfrm>
           <a:prstGeom prst="rect">
             <a:avLst/>
@@ -17696,7 +18219,7 @@
                 <a:ea typeface="Arial" pitchFamily="34" charset="-122"/>
                 <a:cs typeface="Arial" pitchFamily="34" charset="-120"/>
               </a:rPr>
-              <a:t>CoWoS packaging (2023–24) → silicon wafer supply (now) → EUV lithography (&lt;100 machines/yr) by 2028. Each shift reprices a different part of the stack. DRAM prices +30–50% QoQ.</a:t>
+              <a:t>CoWoS packaging (2023–24) → HBM / silicon wafer supply (now) → EUV lithography (&lt;100 machines/yr) by 2028. Each shift reprices a different part of the stack. HBM TAM on a path from $35B (2025) to $100B (2028).</a:t>
             </a:r>
             <a:endParaRPr lang="en-US" sz="950" dirty="0"/>
           </a:p>
@@ -17704,14 +18227,14 @@
       </p:sp>
       <p:sp>
         <p:nvSpPr>
-          <p:cNvPr id="16" name="Shape 14"/>
-          <p:cNvSpPr/>
-          <p:nvPr/>
-        </p:nvSpPr>
-        <p:spPr>
-          <a:xfrm>
-            <a:off x="457200" y="3300984"/>
-            <a:ext cx="548640" cy="493776"/>
+          <p:cNvPr id="17" name="Shape 15"/>
+          <p:cNvSpPr/>
+          <p:nvPr/>
+        </p:nvSpPr>
+        <p:spPr>
+          <a:xfrm>
+            <a:off x="457200" y="3337560"/>
+            <a:ext cx="548640" cy="548640"/>
           </a:xfrm>
           <a:prstGeom prst="rect">
             <a:avLst/>
@@ -17729,14 +18252,14 @@
       </p:sp>
       <p:sp>
         <p:nvSpPr>
-          <p:cNvPr id="17" name="Text 15"/>
-          <p:cNvSpPr/>
-          <p:nvPr/>
-        </p:nvSpPr>
-        <p:spPr>
-          <a:xfrm>
-            <a:off x="457200" y="3300984"/>
-            <a:ext cx="548640" cy="493776"/>
+          <p:cNvPr id="18" name="Text 16"/>
+          <p:cNvSpPr/>
+          <p:nvPr/>
+        </p:nvSpPr>
+        <p:spPr>
+          <a:xfrm>
+            <a:off x="457200" y="3337560"/>
+            <a:ext cx="548640" cy="548640"/>
           </a:xfrm>
           <a:prstGeom prst="rect">
             <a:avLst/>
@@ -17768,14 +18291,14 @@
       </p:sp>
       <p:sp>
         <p:nvSpPr>
-          <p:cNvPr id="18" name="Text 16"/>
-          <p:cNvSpPr/>
-          <p:nvPr/>
-        </p:nvSpPr>
-        <p:spPr>
-          <a:xfrm>
-            <a:off x="1097280" y="3300984"/>
-            <a:ext cx="7589520" cy="219456"/>
+          <p:cNvPr id="19" name="Text 17"/>
+          <p:cNvSpPr/>
+          <p:nvPr/>
+        </p:nvSpPr>
+        <p:spPr>
+          <a:xfrm>
+            <a:off x="1097280" y="3337560"/>
+            <a:ext cx="7589520" cy="228600"/>
           </a:xfrm>
           <a:prstGeom prst="rect">
             <a:avLst/>
@@ -17807,14 +18330,14 @@
       </p:sp>
       <p:sp>
         <p:nvSpPr>
-          <p:cNvPr id="19" name="Text 17"/>
-          <p:cNvSpPr/>
-          <p:nvPr/>
-        </p:nvSpPr>
-        <p:spPr>
-          <a:xfrm>
-            <a:off x="1097280" y="3520440"/>
-            <a:ext cx="7589520" cy="274320"/>
+          <p:cNvPr id="20" name="Text 18"/>
+          <p:cNvSpPr/>
+          <p:nvPr/>
+        </p:nvSpPr>
+        <p:spPr>
+          <a:xfrm>
+            <a:off x="1097280" y="3566160"/>
+            <a:ext cx="7589520" cy="347472"/>
           </a:xfrm>
           <a:prstGeom prst="rect">
             <a:avLst/>
@@ -17838,7 +18361,7 @@
                 <a:ea typeface="Arial" pitchFamily="34" charset="-122"/>
                 <a:cs typeface="Arial" pitchFamily="34" charset="-120"/>
               </a:rPr>
-              <a:t>AI-linked stocks are now 30%+ of US large-cap benchmarks. Passive exposure to a $685B capex cycle is not neutral — it's a thesis. Own the layer with pricing power for today's bottleneck.</a:t>
+              <a:t>AI-linked stocks are ~30%+ of US large-cap benchmarks. Passive exposure to a ~$750B capex cycle is not neutral — it's a thesis. Own the layer with pricing power for today's bottleneck.</a:t>
             </a:r>
             <a:endParaRPr lang="en-US" sz="950" dirty="0"/>
           </a:p>
@@ -17846,13 +18369,13 @@
       </p:sp>
       <p:sp>
         <p:nvSpPr>
-          <p:cNvPr id="20" name="Text 18"/>
-          <p:cNvSpPr/>
-          <p:nvPr/>
-        </p:nvSpPr>
-        <p:spPr>
-          <a:xfrm>
-            <a:off x="457200" y="4069080"/>
+          <p:cNvPr id="21" name="Text 19"/>
+          <p:cNvSpPr/>
+          <p:nvPr/>
+        </p:nvSpPr>
+        <p:spPr>
+          <a:xfrm>
+            <a:off x="457200" y="4023360"/>
             <a:ext cx="8229600" cy="365760"/>
           </a:xfrm>
           <a:prstGeom prst="rect">
@@ -17877,7 +18400,7 @@
                 <a:ea typeface="Arial" pitchFamily="34" charset="-122"/>
                 <a:cs typeface="Arial" pitchFamily="34" charset="-120"/>
               </a:rPr>
-              <a:t>Sources: company filings; Morgan Stanley (Feb 2026); Goldman Sachs correlation data (Jan 2026); Bloomberg YTD; SemiAnalysis; Morningstar / S&amp;P Dow Jones; TrendForce.</a:t>
+              <a:t>Sources: company filings; CreditSights / MUFG hyperscaler capex 2026 (Apr 2026); Goldman Sachs correlation data; iShares SOXX / IGV YTD (Apr 17, 2026); SemiAnalysis; BofA HBM TAM; TrendForce.</a:t>
             </a:r>
             <a:endParaRPr lang="en-US" sz="700" dirty="0"/>
           </a:p>
@@ -17885,7 +18408,7 @@
       </p:sp>
       <p:sp>
         <p:nvSpPr>
-          <p:cNvPr id="21" name="Shape 19"/>
+          <p:cNvPr id="22" name="Shape 20"/>
           <p:cNvSpPr/>
           <p:nvPr/>
         </p:nvSpPr>
@@ -17910,7 +18433,7 @@
       </p:sp>
       <p:sp>
         <p:nvSpPr>
-          <p:cNvPr id="22" name="Text 20"/>
+          <p:cNvPr id="23" name="Text 21"/>
           <p:cNvSpPr/>
           <p:nvPr/>
         </p:nvSpPr>
@@ -17949,7 +18472,7 @@
       </p:sp>
       <p:sp>
         <p:nvSpPr>
-          <p:cNvPr id="23" name="Text 21"/>
+          <p:cNvPr id="24" name="Text 22"/>
           <p:cNvSpPr/>
           <p:nvPr/>
         </p:nvSpPr>
@@ -18526,7 +19049,30 @@
       </p:sp>
       <p:sp>
         <p:nvSpPr>
-          <p:cNvPr id="6" name="Text 4"/>
+          <p:cNvPr id="6" name="Shape 4"/>
+          <p:cNvSpPr/>
+          <p:nvPr/>
+        </p:nvSpPr>
+        <p:spPr>
+          <a:xfrm>
+            <a:off x="457200" y="1325880"/>
+            <a:ext cx="8229600" cy="0"/>
+          </a:xfrm>
+          <a:prstGeom prst="line">
+            <a:avLst/>
+          </a:prstGeom>
+          <a:noFill/>
+          <a:ln w="9525">
+            <a:solidFill>
+              <a:srgbClr val="E5E5E5"/>
+            </a:solidFill>
+            <a:prstDash val="solid"/>
+          </a:ln>
+        </p:spPr>
+      </p:sp>
+      <p:sp>
+        <p:nvSpPr>
+          <p:cNvPr id="7" name="Text 5"/>
           <p:cNvSpPr/>
           <p:nvPr/>
         </p:nvSpPr>
@@ -18557,7 +19103,7 @@
                 <a:ea typeface="Arial Black" pitchFamily="34" charset="-122"/>
                 <a:cs typeface="Arial Black" pitchFamily="34" charset="-120"/>
               </a:rPr>
-              <a:t>$685B</a:t>
+              <a:t>$750B</a:t>
             </a:r>
             <a:endParaRPr lang="en-US" sz="4000" dirty="0"/>
           </a:p>
@@ -18565,7 +19111,7 @@
       </p:sp>
       <p:sp>
         <p:nvSpPr>
-          <p:cNvPr id="7" name="Text 5"/>
+          <p:cNvPr id="8" name="Text 6"/>
           <p:cNvSpPr/>
           <p:nvPr/>
         </p:nvSpPr>
@@ -18596,7 +19142,7 @@
                 <a:ea typeface="Arial" pitchFamily="34" charset="-122"/>
                 <a:cs typeface="Arial" pitchFamily="34" charset="-120"/>
               </a:rPr>
-              <a:t>2026 hyperscaler capex (Amazon, Alphabet, Microsoft, Meta, Oracle)</a:t>
+              <a:t>2026E hyperscaler capex (Amazon, Alphabet, Microsoft, Meta, Oracle)</a:t>
             </a:r>
             <a:endParaRPr lang="en-US" sz="1100" dirty="0"/>
           </a:p>
@@ -18604,7 +19150,7 @@
       </p:sp>
       <p:sp>
         <p:nvSpPr>
-          <p:cNvPr id="8" name="Text 6"/>
+          <p:cNvPr id="9" name="Text 7"/>
           <p:cNvSpPr/>
           <p:nvPr/>
         </p:nvSpPr>
@@ -18643,7 +19189,7 @@
       </p:sp>
       <p:sp>
         <p:nvSpPr>
-          <p:cNvPr id="9" name="Text 7"/>
+          <p:cNvPr id="10" name="Text 8"/>
           <p:cNvSpPr/>
           <p:nvPr/>
         </p:nvSpPr>
@@ -18682,7 +19228,7 @@
       </p:sp>
       <p:sp>
         <p:nvSpPr>
-          <p:cNvPr id="10" name="Text 8"/>
+          <p:cNvPr id="11" name="Text 9"/>
           <p:cNvSpPr/>
           <p:nvPr/>
         </p:nvSpPr>
@@ -18713,7 +19259,7 @@
                 <a:ea typeface="Arial Black" pitchFamily="34" charset="-122"/>
                 <a:cs typeface="Arial Black" pitchFamily="34" charset="-120"/>
               </a:rPr>
-              <a:t>+15%</a:t>
+              <a:t>+38%</a:t>
             </a:r>
             <a:endParaRPr lang="en-US" sz="4000" dirty="0"/>
           </a:p>
@@ -18721,7 +19267,7 @@
       </p:sp>
       <p:sp>
         <p:nvSpPr>
-          <p:cNvPr id="11" name="Text 9"/>
+          <p:cNvPr id="12" name="Text 10"/>
           <p:cNvSpPr/>
           <p:nvPr/>
         </p:nvSpPr>
@@ -18760,7 +19306,7 @@
       </p:sp>
       <p:sp>
         <p:nvSpPr>
-          <p:cNvPr id="12" name="Text 10"/>
+          <p:cNvPr id="13" name="Text 11"/>
           <p:cNvSpPr/>
           <p:nvPr/>
         </p:nvSpPr>
@@ -18791,7 +19337,7 @@
                 <a:ea typeface="Arial Black" pitchFamily="34" charset="-122"/>
                 <a:cs typeface="Arial Black" pitchFamily="34" charset="-120"/>
               </a:rPr>
-              <a:t>–24%</a:t>
+              <a:t>–20%</a:t>
             </a:r>
             <a:endParaRPr lang="en-US" sz="4000" dirty="0"/>
           </a:p>
@@ -18799,7 +19345,7 @@
       </p:sp>
       <p:sp>
         <p:nvSpPr>
-          <p:cNvPr id="13" name="Text 11"/>
+          <p:cNvPr id="14" name="Text 12"/>
           <p:cNvSpPr/>
           <p:nvPr/>
         </p:nvSpPr>
@@ -18838,7 +19384,7 @@
       </p:sp>
       <p:sp>
         <p:nvSpPr>
-          <p:cNvPr id="14" name="Shape 12"/>
+          <p:cNvPr id="15" name="Shape 13"/>
           <p:cNvSpPr/>
           <p:nvPr/>
         </p:nvSpPr>
@@ -18863,7 +19409,7 @@
       </p:sp>
       <p:sp>
         <p:nvSpPr>
-          <p:cNvPr id="15" name="Text 13"/>
+          <p:cNvPr id="16" name="Text 14"/>
           <p:cNvSpPr/>
           <p:nvPr/>
         </p:nvSpPr>
@@ -18894,7 +19440,7 @@
                 <a:ea typeface="Arial" pitchFamily="34" charset="-122"/>
                 <a:cs typeface="Arial" pitchFamily="34" charset="-120"/>
               </a:rPr>
-              <a:t>A 39-point spread between semis and software. The same AI wave is creating winners and losers simultaneously.</a:t>
+              <a:t>A ~58-point spread between semis and software. The same AI wave is creating winners and losers simultaneously.</a:t>
             </a:r>
             <a:endParaRPr lang="en-US" sz="1250" dirty="0"/>
           </a:p>
@@ -18902,7 +19448,7 @@
       </p:sp>
       <p:sp>
         <p:nvSpPr>
-          <p:cNvPr id="16" name="Text 14"/>
+          <p:cNvPr id="17" name="Text 15"/>
           <p:cNvSpPr/>
           <p:nvPr/>
         </p:nvSpPr>
@@ -18933,7 +19479,7 @@
                 <a:ea typeface="Arial" pitchFamily="34" charset="-122"/>
                 <a:cs typeface="Arial" pitchFamily="34" charset="-120"/>
               </a:rPr>
-              <a:t>Sources: Amazon, Alphabet, Microsoft, Meta, Oracle Q4 2025 guidance; Jensen Huang (Sept 2025); Deutsche Bank; Bloomberg YTD as of Mar 25, 2026.</a:t>
+              <a:t>Sources: CreditSights / MUFG hyperscaler capex 2026 estimates; Jensen Huang (Sept 2025); Deutsche Bank; iShares SOXX &amp; IGV YTD total return as of Apr 17, 2026.</a:t>
             </a:r>
             <a:endParaRPr lang="en-US" sz="700" dirty="0"/>
           </a:p>
@@ -18941,7 +19487,7 @@
       </p:sp>
       <p:sp>
         <p:nvSpPr>
-          <p:cNvPr id="17" name="Shape 15"/>
+          <p:cNvPr id="18" name="Shape 16"/>
           <p:cNvSpPr/>
           <p:nvPr/>
         </p:nvSpPr>
@@ -18966,7 +19512,7 @@
       </p:sp>
       <p:sp>
         <p:nvSpPr>
-          <p:cNvPr id="18" name="Text 16"/>
+          <p:cNvPr id="19" name="Text 17"/>
           <p:cNvSpPr/>
           <p:nvPr/>
         </p:nvSpPr>
@@ -19005,7 +19551,7 @@
       </p:sp>
       <p:sp>
         <p:nvSpPr>
-          <p:cNvPr id="19" name="Text 17"/>
+          <p:cNvPr id="20" name="Text 18"/>
           <p:cNvSpPr/>
           <p:nvPr/>
         </p:nvSpPr>
@@ -19219,6 +19765,29 @@
         </p:nvSpPr>
         <p:spPr>
           <a:xfrm>
+            <a:off x="457200" y="1325880"/>
+            <a:ext cx="8229600" cy="0"/>
+          </a:xfrm>
+          <a:prstGeom prst="line">
+            <a:avLst/>
+          </a:prstGeom>
+          <a:noFill/>
+          <a:ln w="9525">
+            <a:solidFill>
+              <a:srgbClr val="E5E5E5"/>
+            </a:solidFill>
+            <a:prstDash val="solid"/>
+          </a:ln>
+        </p:spPr>
+      </p:sp>
+      <p:sp>
+        <p:nvSpPr>
+          <p:cNvPr id="7" name="Shape 5"/>
+          <p:cNvSpPr/>
+          <p:nvPr/>
+        </p:nvSpPr>
+        <p:spPr>
+          <a:xfrm>
             <a:off x="640080" y="2286000"/>
             <a:ext cx="7863840" cy="0"/>
           </a:xfrm>
@@ -19236,7 +19805,7 @@
       </p:sp>
       <p:sp>
         <p:nvSpPr>
-          <p:cNvPr id="7" name="Shape 5"/>
+          <p:cNvPr id="8" name="Shape 6"/>
           <p:cNvSpPr/>
           <p:nvPr/>
         </p:nvSpPr>
@@ -19261,7 +19830,7 @@
       </p:sp>
       <p:sp>
         <p:nvSpPr>
-          <p:cNvPr id="8" name="Shape 6"/>
+          <p:cNvPr id="9" name="Shape 7"/>
           <p:cNvSpPr/>
           <p:nvPr/>
         </p:nvSpPr>
@@ -19286,7 +19855,7 @@
       </p:sp>
       <p:sp>
         <p:nvSpPr>
-          <p:cNvPr id="9" name="Shape 7"/>
+          <p:cNvPr id="10" name="Shape 8"/>
           <p:cNvSpPr/>
           <p:nvPr/>
         </p:nvSpPr>
@@ -19311,7 +19880,7 @@
       </p:sp>
       <p:sp>
         <p:nvSpPr>
-          <p:cNvPr id="10" name="Text 8"/>
+          <p:cNvPr id="11" name="Text 9"/>
           <p:cNvSpPr/>
           <p:nvPr/>
         </p:nvSpPr>
@@ -19350,7 +19919,7 @@
       </p:sp>
       <p:sp>
         <p:nvSpPr>
-          <p:cNvPr id="11" name="Text 9"/>
+          <p:cNvPr id="12" name="Text 10"/>
           <p:cNvSpPr/>
           <p:nvPr/>
         </p:nvSpPr>
@@ -19389,7 +19958,7 @@
       </p:sp>
       <p:sp>
         <p:nvSpPr>
-          <p:cNvPr id="12" name="Text 10"/>
+          <p:cNvPr id="13" name="Text 11"/>
           <p:cNvSpPr/>
           <p:nvPr/>
         </p:nvSpPr>
@@ -19428,7 +19997,7 @@
       </p:sp>
       <p:sp>
         <p:nvSpPr>
-          <p:cNvPr id="13" name="Shape 11"/>
+          <p:cNvPr id="14" name="Shape 12"/>
           <p:cNvSpPr/>
           <p:nvPr/>
         </p:nvSpPr>
@@ -19453,7 +20022,7 @@
       </p:sp>
       <p:sp>
         <p:nvSpPr>
-          <p:cNvPr id="14" name="Shape 12"/>
+          <p:cNvPr id="15" name="Shape 13"/>
           <p:cNvSpPr/>
           <p:nvPr/>
         </p:nvSpPr>
@@ -19478,7 +20047,7 @@
       </p:sp>
       <p:sp>
         <p:nvSpPr>
-          <p:cNvPr id="15" name="Shape 13"/>
+          <p:cNvPr id="16" name="Shape 14"/>
           <p:cNvSpPr/>
           <p:nvPr/>
         </p:nvSpPr>
@@ -19503,7 +20072,7 @@
       </p:sp>
       <p:sp>
         <p:nvSpPr>
-          <p:cNvPr id="16" name="Text 14"/>
+          <p:cNvPr id="17" name="Text 15"/>
           <p:cNvSpPr/>
           <p:nvPr/>
         </p:nvSpPr>
@@ -19542,7 +20111,7 @@
       </p:sp>
       <p:sp>
         <p:nvSpPr>
-          <p:cNvPr id="17" name="Text 15"/>
+          <p:cNvPr id="18" name="Text 16"/>
           <p:cNvSpPr/>
           <p:nvPr/>
         </p:nvSpPr>
@@ -19581,7 +20150,7 @@
       </p:sp>
       <p:sp>
         <p:nvSpPr>
-          <p:cNvPr id="18" name="Text 16"/>
+          <p:cNvPr id="19" name="Text 17"/>
           <p:cNvSpPr/>
           <p:nvPr/>
         </p:nvSpPr>
@@ -19620,7 +20189,7 @@
       </p:sp>
       <p:sp>
         <p:nvSpPr>
-          <p:cNvPr id="19" name="Shape 17"/>
+          <p:cNvPr id="20" name="Shape 18"/>
           <p:cNvSpPr/>
           <p:nvPr/>
         </p:nvSpPr>
@@ -19645,7 +20214,7 @@
       </p:sp>
       <p:sp>
         <p:nvSpPr>
-          <p:cNvPr id="20" name="Shape 18"/>
+          <p:cNvPr id="21" name="Shape 19"/>
           <p:cNvSpPr/>
           <p:nvPr/>
         </p:nvSpPr>
@@ -19670,7 +20239,7 @@
       </p:sp>
       <p:sp>
         <p:nvSpPr>
-          <p:cNvPr id="21" name="Shape 19"/>
+          <p:cNvPr id="22" name="Shape 20"/>
           <p:cNvSpPr/>
           <p:nvPr/>
         </p:nvSpPr>
@@ -19695,7 +20264,7 @@
       </p:sp>
       <p:sp>
         <p:nvSpPr>
-          <p:cNvPr id="22" name="Text 20"/>
+          <p:cNvPr id="23" name="Text 21"/>
           <p:cNvSpPr/>
           <p:nvPr/>
         </p:nvSpPr>
@@ -19734,7 +20303,7 @@
       </p:sp>
       <p:sp>
         <p:nvSpPr>
-          <p:cNvPr id="23" name="Text 21"/>
+          <p:cNvPr id="24" name="Text 22"/>
           <p:cNvSpPr/>
           <p:nvPr/>
         </p:nvSpPr>
@@ -19773,7 +20342,7 @@
       </p:sp>
       <p:sp>
         <p:nvSpPr>
-          <p:cNvPr id="24" name="Text 22"/>
+          <p:cNvPr id="25" name="Text 23"/>
           <p:cNvSpPr/>
           <p:nvPr/>
         </p:nvSpPr>
@@ -19812,7 +20381,7 @@
       </p:sp>
       <p:sp>
         <p:nvSpPr>
-          <p:cNvPr id="25" name="Shape 23"/>
+          <p:cNvPr id="26" name="Shape 24"/>
           <p:cNvSpPr/>
           <p:nvPr/>
         </p:nvSpPr>
@@ -19837,7 +20406,7 @@
       </p:sp>
       <p:sp>
         <p:nvSpPr>
-          <p:cNvPr id="26" name="Shape 24"/>
+          <p:cNvPr id="27" name="Shape 25"/>
           <p:cNvSpPr/>
           <p:nvPr/>
         </p:nvSpPr>
@@ -19862,7 +20431,7 @@
       </p:sp>
       <p:sp>
         <p:nvSpPr>
-          <p:cNvPr id="27" name="Shape 25"/>
+          <p:cNvPr id="28" name="Shape 26"/>
           <p:cNvSpPr/>
           <p:nvPr/>
         </p:nvSpPr>
@@ -19887,7 +20456,7 @@
       </p:sp>
       <p:sp>
         <p:nvSpPr>
-          <p:cNvPr id="28" name="Text 26"/>
+          <p:cNvPr id="29" name="Text 27"/>
           <p:cNvSpPr/>
           <p:nvPr/>
         </p:nvSpPr>
@@ -19926,7 +20495,7 @@
       </p:sp>
       <p:sp>
         <p:nvSpPr>
-          <p:cNvPr id="29" name="Text 27"/>
+          <p:cNvPr id="30" name="Text 28"/>
           <p:cNvSpPr/>
           <p:nvPr/>
         </p:nvSpPr>
@@ -19965,7 +20534,7 @@
       </p:sp>
       <p:sp>
         <p:nvSpPr>
-          <p:cNvPr id="30" name="Text 28"/>
+          <p:cNvPr id="31" name="Text 29"/>
           <p:cNvSpPr/>
           <p:nvPr/>
         </p:nvSpPr>
@@ -20004,7 +20573,7 @@
       </p:sp>
       <p:sp>
         <p:nvSpPr>
-          <p:cNvPr id="31" name="Shape 29"/>
+          <p:cNvPr id="32" name="Shape 30"/>
           <p:cNvSpPr/>
           <p:nvPr/>
         </p:nvSpPr>
@@ -20029,7 +20598,7 @@
       </p:sp>
       <p:sp>
         <p:nvSpPr>
-          <p:cNvPr id="32" name="Shape 30"/>
+          <p:cNvPr id="33" name="Shape 31"/>
           <p:cNvSpPr/>
           <p:nvPr/>
         </p:nvSpPr>
@@ -20054,7 +20623,7 @@
       </p:sp>
       <p:sp>
         <p:nvSpPr>
-          <p:cNvPr id="33" name="Shape 31"/>
+          <p:cNvPr id="34" name="Shape 32"/>
           <p:cNvSpPr/>
           <p:nvPr/>
         </p:nvSpPr>
@@ -20079,7 +20648,7 @@
       </p:sp>
       <p:sp>
         <p:nvSpPr>
-          <p:cNvPr id="34" name="Text 32"/>
+          <p:cNvPr id="35" name="Text 33"/>
           <p:cNvSpPr/>
           <p:nvPr/>
         </p:nvSpPr>
@@ -20118,7 +20687,7 @@
       </p:sp>
       <p:sp>
         <p:nvSpPr>
-          <p:cNvPr id="35" name="Text 33"/>
+          <p:cNvPr id="36" name="Text 34"/>
           <p:cNvSpPr/>
           <p:nvPr/>
         </p:nvSpPr>
@@ -20157,7 +20726,7 @@
       </p:sp>
       <p:sp>
         <p:nvSpPr>
-          <p:cNvPr id="36" name="Text 34"/>
+          <p:cNvPr id="37" name="Text 35"/>
           <p:cNvSpPr/>
           <p:nvPr/>
         </p:nvSpPr>
@@ -20196,7 +20765,7 @@
       </p:sp>
       <p:sp>
         <p:nvSpPr>
-          <p:cNvPr id="37" name="Shape 35"/>
+          <p:cNvPr id="38" name="Shape 36"/>
           <p:cNvSpPr/>
           <p:nvPr/>
         </p:nvSpPr>
@@ -20221,7 +20790,7 @@
       </p:sp>
       <p:sp>
         <p:nvSpPr>
-          <p:cNvPr id="38" name="Shape 36"/>
+          <p:cNvPr id="39" name="Shape 37"/>
           <p:cNvSpPr/>
           <p:nvPr/>
         </p:nvSpPr>
@@ -20246,7 +20815,7 @@
       </p:sp>
       <p:sp>
         <p:nvSpPr>
-          <p:cNvPr id="39" name="Shape 37"/>
+          <p:cNvPr id="40" name="Shape 38"/>
           <p:cNvSpPr/>
           <p:nvPr/>
         </p:nvSpPr>
@@ -20271,7 +20840,7 @@
       </p:sp>
       <p:sp>
         <p:nvSpPr>
-          <p:cNvPr id="40" name="Text 38"/>
+          <p:cNvPr id="41" name="Text 39"/>
           <p:cNvSpPr/>
           <p:nvPr/>
         </p:nvSpPr>
@@ -20310,7 +20879,7 @@
       </p:sp>
       <p:sp>
         <p:nvSpPr>
-          <p:cNvPr id="41" name="Text 39"/>
+          <p:cNvPr id="42" name="Text 40"/>
           <p:cNvSpPr/>
           <p:nvPr/>
         </p:nvSpPr>
@@ -20349,7 +20918,7 @@
       </p:sp>
       <p:sp>
         <p:nvSpPr>
-          <p:cNvPr id="42" name="Text 40"/>
+          <p:cNvPr id="43" name="Text 41"/>
           <p:cNvSpPr/>
           <p:nvPr/>
         </p:nvSpPr>
@@ -20388,7 +20957,7 @@
       </p:sp>
       <p:sp>
         <p:nvSpPr>
-          <p:cNvPr id="43" name="Text 41"/>
+          <p:cNvPr id="44" name="Text 42"/>
           <p:cNvSpPr/>
           <p:nvPr/>
         </p:nvSpPr>
@@ -20427,7 +20996,7 @@
       </p:sp>
       <p:sp>
         <p:nvSpPr>
-          <p:cNvPr id="44" name="Shape 42"/>
+          <p:cNvPr id="45" name="Shape 43"/>
           <p:cNvSpPr/>
           <p:nvPr/>
         </p:nvSpPr>
@@ -20452,7 +21021,7 @@
       </p:sp>
       <p:sp>
         <p:nvSpPr>
-          <p:cNvPr id="45" name="Text 43"/>
+          <p:cNvPr id="46" name="Text 44"/>
           <p:cNvSpPr/>
           <p:nvPr/>
         </p:nvSpPr>
@@ -20491,7 +21060,7 @@
       </p:sp>
       <p:sp>
         <p:nvSpPr>
-          <p:cNvPr id="46" name="Text 44"/>
+          <p:cNvPr id="47" name="Text 45"/>
           <p:cNvSpPr/>
           <p:nvPr/>
         </p:nvSpPr>
@@ -20705,8 +21274,31 @@
         </p:nvSpPr>
         <p:spPr>
           <a:xfrm>
+            <a:off x="457200" y="1325880"/>
+            <a:ext cx="8229600" cy="0"/>
+          </a:xfrm>
+          <a:prstGeom prst="line">
+            <a:avLst/>
+          </a:prstGeom>
+          <a:noFill/>
+          <a:ln w="9525">
+            <a:solidFill>
+              <a:srgbClr val="E5E5E5"/>
+            </a:solidFill>
+            <a:prstDash val="solid"/>
+          </a:ln>
+        </p:spPr>
+      </p:sp>
+      <p:sp>
+        <p:nvSpPr>
+          <p:cNvPr id="7" name="Shape 5"/>
+          <p:cNvSpPr/>
+          <p:nvPr/>
+        </p:nvSpPr>
+        <p:spPr>
+          <a:xfrm>
             <a:off x="457200" y="1417320"/>
-            <a:ext cx="137160" cy="210312"/>
+            <a:ext cx="137160" cy="205740"/>
           </a:xfrm>
           <a:prstGeom prst="rect">
             <a:avLst/>
@@ -20724,14 +21316,14 @@
       </p:sp>
       <p:sp>
         <p:nvSpPr>
-          <p:cNvPr id="7" name="Text 5"/>
+          <p:cNvPr id="8" name="Text 6"/>
           <p:cNvSpPr/>
           <p:nvPr/>
         </p:nvSpPr>
         <p:spPr>
           <a:xfrm>
             <a:off x="685800" y="1417320"/>
-            <a:ext cx="2011680" cy="210312"/>
+            <a:ext cx="2011680" cy="205740"/>
           </a:xfrm>
           <a:prstGeom prst="rect">
             <a:avLst/>
@@ -20763,14 +21355,14 @@
       </p:sp>
       <p:sp>
         <p:nvSpPr>
-          <p:cNvPr id="8" name="Text 6"/>
+          <p:cNvPr id="9" name="Text 7"/>
           <p:cNvSpPr/>
           <p:nvPr/>
         </p:nvSpPr>
         <p:spPr>
           <a:xfrm>
             <a:off x="2697480" y="1417320"/>
-            <a:ext cx="3840480" cy="210312"/>
+            <a:ext cx="3840480" cy="205740"/>
           </a:xfrm>
           <a:prstGeom prst="rect">
             <a:avLst/>
@@ -20802,18 +21394,18 @@
       </p:sp>
       <p:sp>
         <p:nvSpPr>
-          <p:cNvPr id="9" name="Shape 7"/>
+          <p:cNvPr id="10" name="Shape 8"/>
           <p:cNvSpPr/>
           <p:nvPr/>
         </p:nvSpPr>
         <p:spPr>
           <a:xfrm>
             <a:off x="6583680" y="1435608"/>
-            <a:ext cx="2057400" cy="173736"/>
+            <a:ext cx="2057400" cy="169164"/>
           </a:xfrm>
           <a:prstGeom prst="roundRect">
             <a:avLst>
-              <a:gd name="adj" fmla="val 15789"/>
+              <a:gd name="adj" fmla="val 16216"/>
             </a:avLst>
           </a:prstGeom>
           <a:solidFill>
@@ -20829,14 +21421,14 @@
       </p:sp>
       <p:sp>
         <p:nvSpPr>
-          <p:cNvPr id="10" name="Text 8"/>
+          <p:cNvPr id="11" name="Text 9"/>
           <p:cNvSpPr/>
           <p:nvPr/>
         </p:nvSpPr>
         <p:spPr>
           <a:xfrm>
             <a:off x="6583680" y="1435608"/>
-            <a:ext cx="2057400" cy="173736"/>
+            <a:ext cx="2057400" cy="169164"/>
           </a:xfrm>
           <a:prstGeom prst="rect">
             <a:avLst/>
@@ -20868,14 +21460,14 @@
       </p:sp>
       <p:sp>
         <p:nvSpPr>
-          <p:cNvPr id="11" name="Shape 9"/>
-          <p:cNvSpPr/>
-          <p:nvPr/>
-        </p:nvSpPr>
-        <p:spPr>
-          <a:xfrm>
-            <a:off x="457200" y="1664208"/>
-            <a:ext cx="137160" cy="210312"/>
+          <p:cNvPr id="12" name="Shape 10"/>
+          <p:cNvSpPr/>
+          <p:nvPr/>
+        </p:nvSpPr>
+        <p:spPr>
+          <a:xfrm>
+            <a:off x="457200" y="1659636"/>
+            <a:ext cx="137160" cy="205740"/>
           </a:xfrm>
           <a:prstGeom prst="rect">
             <a:avLst/>
@@ -20893,14 +21485,14 @@
       </p:sp>
       <p:sp>
         <p:nvSpPr>
-          <p:cNvPr id="12" name="Text 10"/>
-          <p:cNvSpPr/>
-          <p:nvPr/>
-        </p:nvSpPr>
-        <p:spPr>
-          <a:xfrm>
-            <a:off x="685800" y="1664208"/>
-            <a:ext cx="2011680" cy="210312"/>
+          <p:cNvPr id="13" name="Text 11"/>
+          <p:cNvSpPr/>
+          <p:nvPr/>
+        </p:nvSpPr>
+        <p:spPr>
+          <a:xfrm>
+            <a:off x="685800" y="1659636"/>
+            <a:ext cx="2011680" cy="205740"/>
           </a:xfrm>
           <a:prstGeom prst="rect">
             <a:avLst/>
@@ -20932,14 +21524,14 @@
       </p:sp>
       <p:sp>
         <p:nvSpPr>
-          <p:cNvPr id="13" name="Text 11"/>
-          <p:cNvSpPr/>
-          <p:nvPr/>
-        </p:nvSpPr>
-        <p:spPr>
-          <a:xfrm>
-            <a:off x="2697480" y="1664208"/>
-            <a:ext cx="3840480" cy="210312"/>
+          <p:cNvPr id="14" name="Text 12"/>
+          <p:cNvSpPr/>
+          <p:nvPr/>
+        </p:nvSpPr>
+        <p:spPr>
+          <a:xfrm>
+            <a:off x="2697480" y="1659636"/>
+            <a:ext cx="3840480" cy="205740"/>
           </a:xfrm>
           <a:prstGeom prst="rect">
             <a:avLst/>
@@ -20971,14 +21563,14 @@
       </p:sp>
       <p:sp>
         <p:nvSpPr>
-          <p:cNvPr id="14" name="Shape 12"/>
-          <p:cNvSpPr/>
-          <p:nvPr/>
-        </p:nvSpPr>
-        <p:spPr>
-          <a:xfrm>
-            <a:off x="457200" y="1911096"/>
-            <a:ext cx="137160" cy="210312"/>
+          <p:cNvPr id="15" name="Shape 13"/>
+          <p:cNvSpPr/>
+          <p:nvPr/>
+        </p:nvSpPr>
+        <p:spPr>
+          <a:xfrm>
+            <a:off x="457200" y="1901952"/>
+            <a:ext cx="137160" cy="205740"/>
           </a:xfrm>
           <a:prstGeom prst="rect">
             <a:avLst/>
@@ -20996,14 +21588,14 @@
       </p:sp>
       <p:sp>
         <p:nvSpPr>
-          <p:cNvPr id="15" name="Text 13"/>
-          <p:cNvSpPr/>
-          <p:nvPr/>
-        </p:nvSpPr>
-        <p:spPr>
-          <a:xfrm>
-            <a:off x="685800" y="1911096"/>
-            <a:ext cx="2011680" cy="210312"/>
+          <p:cNvPr id="16" name="Text 14"/>
+          <p:cNvSpPr/>
+          <p:nvPr/>
+        </p:nvSpPr>
+        <p:spPr>
+          <a:xfrm>
+            <a:off x="685800" y="1901952"/>
+            <a:ext cx="2011680" cy="205740"/>
           </a:xfrm>
           <a:prstGeom prst="rect">
             <a:avLst/>
@@ -21035,14 +21627,14 @@
       </p:sp>
       <p:sp>
         <p:nvSpPr>
-          <p:cNvPr id="16" name="Text 14"/>
-          <p:cNvSpPr/>
-          <p:nvPr/>
-        </p:nvSpPr>
-        <p:spPr>
-          <a:xfrm>
-            <a:off x="2697480" y="1911096"/>
-            <a:ext cx="3840480" cy="210312"/>
+          <p:cNvPr id="17" name="Text 15"/>
+          <p:cNvSpPr/>
+          <p:nvPr/>
+        </p:nvSpPr>
+        <p:spPr>
+          <a:xfrm>
+            <a:off x="2697480" y="1901952"/>
+            <a:ext cx="3840480" cy="205740"/>
           </a:xfrm>
           <a:prstGeom prst="rect">
             <a:avLst/>
@@ -21074,14 +21666,14 @@
       </p:sp>
       <p:sp>
         <p:nvSpPr>
-          <p:cNvPr id="17" name="Shape 15"/>
-          <p:cNvSpPr/>
-          <p:nvPr/>
-        </p:nvSpPr>
-        <p:spPr>
-          <a:xfrm>
-            <a:off x="457200" y="2157984"/>
-            <a:ext cx="137160" cy="210312"/>
+          <p:cNvPr id="18" name="Shape 16"/>
+          <p:cNvSpPr/>
+          <p:nvPr/>
+        </p:nvSpPr>
+        <p:spPr>
+          <a:xfrm>
+            <a:off x="457200" y="2144268"/>
+            <a:ext cx="137160" cy="205740"/>
           </a:xfrm>
           <a:prstGeom prst="rect">
             <a:avLst/>
@@ -21099,14 +21691,14 @@
       </p:sp>
       <p:sp>
         <p:nvSpPr>
-          <p:cNvPr id="18" name="Text 16"/>
-          <p:cNvSpPr/>
-          <p:nvPr/>
-        </p:nvSpPr>
-        <p:spPr>
-          <a:xfrm>
-            <a:off x="685800" y="2157984"/>
-            <a:ext cx="2011680" cy="210312"/>
+          <p:cNvPr id="19" name="Text 17"/>
+          <p:cNvSpPr/>
+          <p:nvPr/>
+        </p:nvSpPr>
+        <p:spPr>
+          <a:xfrm>
+            <a:off x="685800" y="2144268"/>
+            <a:ext cx="2011680" cy="205740"/>
           </a:xfrm>
           <a:prstGeom prst="rect">
             <a:avLst/>
@@ -21138,14 +21730,14 @@
       </p:sp>
       <p:sp>
         <p:nvSpPr>
-          <p:cNvPr id="19" name="Text 17"/>
-          <p:cNvSpPr/>
-          <p:nvPr/>
-        </p:nvSpPr>
-        <p:spPr>
-          <a:xfrm>
-            <a:off x="2697480" y="2157984"/>
-            <a:ext cx="3840480" cy="210312"/>
+          <p:cNvPr id="20" name="Text 18"/>
+          <p:cNvSpPr/>
+          <p:nvPr/>
+        </p:nvSpPr>
+        <p:spPr>
+          <a:xfrm>
+            <a:off x="2697480" y="2144268"/>
+            <a:ext cx="3840480" cy="205740"/>
           </a:xfrm>
           <a:prstGeom prst="rect">
             <a:avLst/>
@@ -21177,14 +21769,14 @@
       </p:sp>
       <p:sp>
         <p:nvSpPr>
-          <p:cNvPr id="20" name="Shape 18"/>
-          <p:cNvSpPr/>
-          <p:nvPr/>
-        </p:nvSpPr>
-        <p:spPr>
-          <a:xfrm>
-            <a:off x="457200" y="2404872"/>
-            <a:ext cx="137160" cy="210312"/>
+          <p:cNvPr id="21" name="Shape 19"/>
+          <p:cNvSpPr/>
+          <p:nvPr/>
+        </p:nvSpPr>
+        <p:spPr>
+          <a:xfrm>
+            <a:off x="457200" y="2386584"/>
+            <a:ext cx="137160" cy="205740"/>
           </a:xfrm>
           <a:prstGeom prst="rect">
             <a:avLst/>
@@ -21202,14 +21794,14 @@
       </p:sp>
       <p:sp>
         <p:nvSpPr>
-          <p:cNvPr id="21" name="Text 19"/>
-          <p:cNvSpPr/>
-          <p:nvPr/>
-        </p:nvSpPr>
-        <p:spPr>
-          <a:xfrm>
-            <a:off x="685800" y="2404872"/>
-            <a:ext cx="2011680" cy="210312"/>
+          <p:cNvPr id="22" name="Text 20"/>
+          <p:cNvSpPr/>
+          <p:nvPr/>
+        </p:nvSpPr>
+        <p:spPr>
+          <a:xfrm>
+            <a:off x="685800" y="2386584"/>
+            <a:ext cx="2011680" cy="205740"/>
           </a:xfrm>
           <a:prstGeom prst="rect">
             <a:avLst/>
@@ -21241,14 +21833,14 @@
       </p:sp>
       <p:sp>
         <p:nvSpPr>
-          <p:cNvPr id="22" name="Text 20"/>
-          <p:cNvSpPr/>
-          <p:nvPr/>
-        </p:nvSpPr>
-        <p:spPr>
-          <a:xfrm>
-            <a:off x="2697480" y="2404872"/>
-            <a:ext cx="3840480" cy="210312"/>
+          <p:cNvPr id="23" name="Text 21"/>
+          <p:cNvSpPr/>
+          <p:nvPr/>
+        </p:nvSpPr>
+        <p:spPr>
+          <a:xfrm>
+            <a:off x="2697480" y="2386584"/>
+            <a:ext cx="3840480" cy="205740"/>
           </a:xfrm>
           <a:prstGeom prst="rect">
             <a:avLst/>
@@ -21280,14 +21872,14 @@
       </p:sp>
       <p:sp>
         <p:nvSpPr>
-          <p:cNvPr id="23" name="Shape 21"/>
-          <p:cNvSpPr/>
-          <p:nvPr/>
-        </p:nvSpPr>
-        <p:spPr>
-          <a:xfrm>
-            <a:off x="457200" y="2651760"/>
-            <a:ext cx="137160" cy="210312"/>
+          <p:cNvPr id="24" name="Shape 22"/>
+          <p:cNvSpPr/>
+          <p:nvPr/>
+        </p:nvSpPr>
+        <p:spPr>
+          <a:xfrm>
+            <a:off x="457200" y="2628900"/>
+            <a:ext cx="137160" cy="205740"/>
           </a:xfrm>
           <a:prstGeom prst="rect">
             <a:avLst/>
@@ -21305,14 +21897,14 @@
       </p:sp>
       <p:sp>
         <p:nvSpPr>
-          <p:cNvPr id="24" name="Text 22"/>
-          <p:cNvSpPr/>
-          <p:nvPr/>
-        </p:nvSpPr>
-        <p:spPr>
-          <a:xfrm>
-            <a:off x="685800" y="2651760"/>
-            <a:ext cx="2011680" cy="210312"/>
+          <p:cNvPr id="25" name="Text 23"/>
+          <p:cNvSpPr/>
+          <p:nvPr/>
+        </p:nvSpPr>
+        <p:spPr>
+          <a:xfrm>
+            <a:off x="685800" y="2628900"/>
+            <a:ext cx="2011680" cy="205740"/>
           </a:xfrm>
           <a:prstGeom prst="rect">
             <a:avLst/>
@@ -21344,14 +21936,14 @@
       </p:sp>
       <p:sp>
         <p:nvSpPr>
-          <p:cNvPr id="25" name="Text 23"/>
-          <p:cNvSpPr/>
-          <p:nvPr/>
-        </p:nvSpPr>
-        <p:spPr>
-          <a:xfrm>
-            <a:off x="2697480" y="2651760"/>
-            <a:ext cx="3840480" cy="210312"/>
+          <p:cNvPr id="26" name="Text 24"/>
+          <p:cNvSpPr/>
+          <p:nvPr/>
+        </p:nvSpPr>
+        <p:spPr>
+          <a:xfrm>
+            <a:off x="2697480" y="2628900"/>
+            <a:ext cx="3840480" cy="205740"/>
           </a:xfrm>
           <a:prstGeom prst="rect">
             <a:avLst/>
@@ -21383,14 +21975,14 @@
       </p:sp>
       <p:sp>
         <p:nvSpPr>
-          <p:cNvPr id="26" name="Shape 24"/>
-          <p:cNvSpPr/>
-          <p:nvPr/>
-        </p:nvSpPr>
-        <p:spPr>
-          <a:xfrm>
-            <a:off x="457200" y="2898648"/>
-            <a:ext cx="137160" cy="210312"/>
+          <p:cNvPr id="27" name="Shape 25"/>
+          <p:cNvSpPr/>
+          <p:nvPr/>
+        </p:nvSpPr>
+        <p:spPr>
+          <a:xfrm>
+            <a:off x="457200" y="2871216"/>
+            <a:ext cx="137160" cy="205740"/>
           </a:xfrm>
           <a:prstGeom prst="rect">
             <a:avLst/>
@@ -21408,14 +22000,14 @@
       </p:sp>
       <p:sp>
         <p:nvSpPr>
-          <p:cNvPr id="27" name="Text 25"/>
-          <p:cNvSpPr/>
-          <p:nvPr/>
-        </p:nvSpPr>
-        <p:spPr>
-          <a:xfrm>
-            <a:off x="685800" y="2898648"/>
-            <a:ext cx="2011680" cy="210312"/>
+          <p:cNvPr id="28" name="Text 26"/>
+          <p:cNvSpPr/>
+          <p:nvPr/>
+        </p:nvSpPr>
+        <p:spPr>
+          <a:xfrm>
+            <a:off x="685800" y="2871216"/>
+            <a:ext cx="2011680" cy="205740"/>
           </a:xfrm>
           <a:prstGeom prst="rect">
             <a:avLst/>
@@ -21447,14 +22039,14 @@
       </p:sp>
       <p:sp>
         <p:nvSpPr>
-          <p:cNvPr id="28" name="Text 26"/>
-          <p:cNvSpPr/>
-          <p:nvPr/>
-        </p:nvSpPr>
-        <p:spPr>
-          <a:xfrm>
-            <a:off x="2697480" y="2898648"/>
-            <a:ext cx="3840480" cy="210312"/>
+          <p:cNvPr id="29" name="Text 27"/>
+          <p:cNvSpPr/>
+          <p:nvPr/>
+        </p:nvSpPr>
+        <p:spPr>
+          <a:xfrm>
+            <a:off x="2697480" y="2871216"/>
+            <a:ext cx="3840480" cy="205740"/>
           </a:xfrm>
           <a:prstGeom prst="rect">
             <a:avLst/>
@@ -21486,18 +22078,18 @@
       </p:sp>
       <p:sp>
         <p:nvSpPr>
-          <p:cNvPr id="29" name="Shape 27"/>
-          <p:cNvSpPr/>
-          <p:nvPr/>
-        </p:nvSpPr>
-        <p:spPr>
-          <a:xfrm>
-            <a:off x="6583680" y="2916936"/>
-            <a:ext cx="2057400" cy="173736"/>
+          <p:cNvPr id="30" name="Shape 28"/>
+          <p:cNvSpPr/>
+          <p:nvPr/>
+        </p:nvSpPr>
+        <p:spPr>
+          <a:xfrm>
+            <a:off x="6583680" y="2889504"/>
+            <a:ext cx="2057400" cy="169164"/>
           </a:xfrm>
           <a:prstGeom prst="roundRect">
             <a:avLst>
-              <a:gd name="adj" fmla="val 15789"/>
+              <a:gd name="adj" fmla="val 16216"/>
             </a:avLst>
           </a:prstGeom>
           <a:solidFill>
@@ -21513,14 +22105,14 @@
       </p:sp>
       <p:sp>
         <p:nvSpPr>
-          <p:cNvPr id="30" name="Text 28"/>
-          <p:cNvSpPr/>
-          <p:nvPr/>
-        </p:nvSpPr>
-        <p:spPr>
-          <a:xfrm>
-            <a:off x="6583680" y="2916936"/>
-            <a:ext cx="2057400" cy="173736"/>
+          <p:cNvPr id="31" name="Text 29"/>
+          <p:cNvSpPr/>
+          <p:nvPr/>
+        </p:nvSpPr>
+        <p:spPr>
+          <a:xfrm>
+            <a:off x="6583680" y="2889504"/>
+            <a:ext cx="2057400" cy="169164"/>
           </a:xfrm>
           <a:prstGeom prst="rect">
             <a:avLst/>
@@ -21552,14 +22144,14 @@
       </p:sp>
       <p:sp>
         <p:nvSpPr>
-          <p:cNvPr id="31" name="Shape 29"/>
-          <p:cNvSpPr/>
-          <p:nvPr/>
-        </p:nvSpPr>
-        <p:spPr>
-          <a:xfrm>
-            <a:off x="457200" y="3145536"/>
-            <a:ext cx="137160" cy="210312"/>
+          <p:cNvPr id="32" name="Shape 30"/>
+          <p:cNvSpPr/>
+          <p:nvPr/>
+        </p:nvSpPr>
+        <p:spPr>
+          <a:xfrm>
+            <a:off x="457200" y="3113532"/>
+            <a:ext cx="137160" cy="205740"/>
           </a:xfrm>
           <a:prstGeom prst="rect">
             <a:avLst/>
@@ -21577,14 +22169,14 @@
       </p:sp>
       <p:sp>
         <p:nvSpPr>
-          <p:cNvPr id="32" name="Text 30"/>
-          <p:cNvSpPr/>
-          <p:nvPr/>
-        </p:nvSpPr>
-        <p:spPr>
-          <a:xfrm>
-            <a:off x="685800" y="3145536"/>
-            <a:ext cx="2011680" cy="210312"/>
+          <p:cNvPr id="33" name="Text 31"/>
+          <p:cNvSpPr/>
+          <p:nvPr/>
+        </p:nvSpPr>
+        <p:spPr>
+          <a:xfrm>
+            <a:off x="685800" y="3113532"/>
+            <a:ext cx="2011680" cy="205740"/>
           </a:xfrm>
           <a:prstGeom prst="rect">
             <a:avLst/>
@@ -21616,14 +22208,14 @@
       </p:sp>
       <p:sp>
         <p:nvSpPr>
-          <p:cNvPr id="33" name="Text 31"/>
-          <p:cNvSpPr/>
-          <p:nvPr/>
-        </p:nvSpPr>
-        <p:spPr>
-          <a:xfrm>
-            <a:off x="2697480" y="3145536"/>
-            <a:ext cx="3840480" cy="210312"/>
+          <p:cNvPr id="34" name="Text 32"/>
+          <p:cNvSpPr/>
+          <p:nvPr/>
+        </p:nvSpPr>
+        <p:spPr>
+          <a:xfrm>
+            <a:off x="2697480" y="3113532"/>
+            <a:ext cx="3840480" cy="205740"/>
           </a:xfrm>
           <a:prstGeom prst="rect">
             <a:avLst/>
@@ -21655,14 +22247,14 @@
       </p:sp>
       <p:sp>
         <p:nvSpPr>
-          <p:cNvPr id="34" name="Shape 32"/>
-          <p:cNvSpPr/>
-          <p:nvPr/>
-        </p:nvSpPr>
-        <p:spPr>
-          <a:xfrm>
-            <a:off x="457200" y="3392424"/>
-            <a:ext cx="137160" cy="210312"/>
+          <p:cNvPr id="35" name="Shape 33"/>
+          <p:cNvSpPr/>
+          <p:nvPr/>
+        </p:nvSpPr>
+        <p:spPr>
+          <a:xfrm>
+            <a:off x="457200" y="3355848"/>
+            <a:ext cx="137160" cy="205740"/>
           </a:xfrm>
           <a:prstGeom prst="rect">
             <a:avLst/>
@@ -21680,14 +22272,14 @@
       </p:sp>
       <p:sp>
         <p:nvSpPr>
-          <p:cNvPr id="35" name="Text 33"/>
-          <p:cNvSpPr/>
-          <p:nvPr/>
-        </p:nvSpPr>
-        <p:spPr>
-          <a:xfrm>
-            <a:off x="685800" y="3392424"/>
-            <a:ext cx="2011680" cy="210312"/>
+          <p:cNvPr id="36" name="Text 34"/>
+          <p:cNvSpPr/>
+          <p:nvPr/>
+        </p:nvSpPr>
+        <p:spPr>
+          <a:xfrm>
+            <a:off x="685800" y="3355848"/>
+            <a:ext cx="2011680" cy="205740"/>
           </a:xfrm>
           <a:prstGeom prst="rect">
             <a:avLst/>
@@ -21719,14 +22311,14 @@
       </p:sp>
       <p:sp>
         <p:nvSpPr>
-          <p:cNvPr id="36" name="Text 34"/>
-          <p:cNvSpPr/>
-          <p:nvPr/>
-        </p:nvSpPr>
-        <p:spPr>
-          <a:xfrm>
-            <a:off x="2697480" y="3392424"/>
-            <a:ext cx="3840480" cy="210312"/>
+          <p:cNvPr id="37" name="Text 35"/>
+          <p:cNvSpPr/>
+          <p:nvPr/>
+        </p:nvSpPr>
+        <p:spPr>
+          <a:xfrm>
+            <a:off x="2697480" y="3355848"/>
+            <a:ext cx="3840480" cy="205740"/>
           </a:xfrm>
           <a:prstGeom prst="rect">
             <a:avLst/>
@@ -21758,14 +22350,14 @@
       </p:sp>
       <p:sp>
         <p:nvSpPr>
-          <p:cNvPr id="37" name="Shape 35"/>
-          <p:cNvSpPr/>
-          <p:nvPr/>
-        </p:nvSpPr>
-        <p:spPr>
-          <a:xfrm>
-            <a:off x="457200" y="3639312"/>
-            <a:ext cx="137160" cy="210312"/>
+          <p:cNvPr id="38" name="Shape 36"/>
+          <p:cNvSpPr/>
+          <p:nvPr/>
+        </p:nvSpPr>
+        <p:spPr>
+          <a:xfrm>
+            <a:off x="457200" y="3598164"/>
+            <a:ext cx="137160" cy="205740"/>
           </a:xfrm>
           <a:prstGeom prst="rect">
             <a:avLst/>
@@ -21783,14 +22375,14 @@
       </p:sp>
       <p:sp>
         <p:nvSpPr>
-          <p:cNvPr id="38" name="Text 36"/>
-          <p:cNvSpPr/>
-          <p:nvPr/>
-        </p:nvSpPr>
-        <p:spPr>
-          <a:xfrm>
-            <a:off x="685800" y="3639312"/>
-            <a:ext cx="2011680" cy="210312"/>
+          <p:cNvPr id="39" name="Text 37"/>
+          <p:cNvSpPr/>
+          <p:nvPr/>
+        </p:nvSpPr>
+        <p:spPr>
+          <a:xfrm>
+            <a:off x="685800" y="3598164"/>
+            <a:ext cx="2011680" cy="205740"/>
           </a:xfrm>
           <a:prstGeom prst="rect">
             <a:avLst/>
@@ -21822,14 +22414,14 @@
       </p:sp>
       <p:sp>
         <p:nvSpPr>
-          <p:cNvPr id="39" name="Text 37"/>
-          <p:cNvSpPr/>
-          <p:nvPr/>
-        </p:nvSpPr>
-        <p:spPr>
-          <a:xfrm>
-            <a:off x="2697480" y="3639312"/>
-            <a:ext cx="3840480" cy="210312"/>
+          <p:cNvPr id="40" name="Text 38"/>
+          <p:cNvSpPr/>
+          <p:nvPr/>
+        </p:nvSpPr>
+        <p:spPr>
+          <a:xfrm>
+            <a:off x="2697480" y="3598164"/>
+            <a:ext cx="3840480" cy="205740"/>
           </a:xfrm>
           <a:prstGeom prst="rect">
             <a:avLst/>
@@ -21861,14 +22453,14 @@
       </p:sp>
       <p:sp>
         <p:nvSpPr>
-          <p:cNvPr id="40" name="Shape 38"/>
-          <p:cNvSpPr/>
-          <p:nvPr/>
-        </p:nvSpPr>
-        <p:spPr>
-          <a:xfrm>
-            <a:off x="457200" y="3886200"/>
-            <a:ext cx="137160" cy="210312"/>
+          <p:cNvPr id="41" name="Shape 39"/>
+          <p:cNvSpPr/>
+          <p:nvPr/>
+        </p:nvSpPr>
+        <p:spPr>
+          <a:xfrm>
+            <a:off x="457200" y="3840480"/>
+            <a:ext cx="137160" cy="205740"/>
           </a:xfrm>
           <a:prstGeom prst="rect">
             <a:avLst/>
@@ -21886,14 +22478,14 @@
       </p:sp>
       <p:sp>
         <p:nvSpPr>
-          <p:cNvPr id="41" name="Text 39"/>
-          <p:cNvSpPr/>
-          <p:nvPr/>
-        </p:nvSpPr>
-        <p:spPr>
-          <a:xfrm>
-            <a:off x="685800" y="3886200"/>
-            <a:ext cx="2011680" cy="210312"/>
+          <p:cNvPr id="42" name="Text 40"/>
+          <p:cNvSpPr/>
+          <p:nvPr/>
+        </p:nvSpPr>
+        <p:spPr>
+          <a:xfrm>
+            <a:off x="685800" y="3840480"/>
+            <a:ext cx="2011680" cy="205740"/>
           </a:xfrm>
           <a:prstGeom prst="rect">
             <a:avLst/>
@@ -21925,14 +22517,14 @@
       </p:sp>
       <p:sp>
         <p:nvSpPr>
-          <p:cNvPr id="42" name="Text 40"/>
-          <p:cNvSpPr/>
-          <p:nvPr/>
-        </p:nvSpPr>
-        <p:spPr>
-          <a:xfrm>
-            <a:off x="2697480" y="3886200"/>
-            <a:ext cx="3840480" cy="210312"/>
+          <p:cNvPr id="43" name="Text 41"/>
+          <p:cNvSpPr/>
+          <p:nvPr/>
+        </p:nvSpPr>
+        <p:spPr>
+          <a:xfrm>
+            <a:off x="2697480" y="3840480"/>
+            <a:ext cx="3840480" cy="205740"/>
           </a:xfrm>
           <a:prstGeom prst="rect">
             <a:avLst/>
@@ -21964,7 +22556,7 @@
       </p:sp>
       <p:sp>
         <p:nvSpPr>
-          <p:cNvPr id="43" name="Text 41"/>
+          <p:cNvPr id="44" name="Text 42"/>
           <p:cNvSpPr/>
           <p:nvPr/>
         </p:nvSpPr>
@@ -22003,7 +22595,7 @@
       </p:sp>
       <p:sp>
         <p:nvSpPr>
-          <p:cNvPr id="44" name="Shape 42"/>
+          <p:cNvPr id="45" name="Shape 43"/>
           <p:cNvSpPr/>
           <p:nvPr/>
         </p:nvSpPr>
@@ -22028,7 +22620,7 @@
       </p:sp>
       <p:sp>
         <p:nvSpPr>
-          <p:cNvPr id="45" name="Text 43"/>
+          <p:cNvPr id="46" name="Text 44"/>
           <p:cNvSpPr/>
           <p:nvPr/>
         </p:nvSpPr>
@@ -22067,7 +22659,7 @@
       </p:sp>
       <p:sp>
         <p:nvSpPr>
-          <p:cNvPr id="46" name="Text 44"/>
+          <p:cNvPr id="47" name="Text 45"/>
           <p:cNvSpPr/>
           <p:nvPr/>
         </p:nvSpPr>
@@ -22228,7 +22820,7 @@
                 <a:ea typeface="Arial Black" pitchFamily="34" charset="-122"/>
                 <a:cs typeface="Arial Black" pitchFamily="34" charset="-120"/>
               </a:rPr>
-              <a:t>No single country makes an advanced chip.</a:t>
+              <a:t>No one makes an AI chip alone.</a:t>
             </a:r>
             <a:endParaRPr lang="en-US" sz="2700" dirty="0"/>
           </a:p>
@@ -22281,8 +22873,95 @@
         </p:nvSpPr>
         <p:spPr>
           <a:xfrm>
-            <a:off x="457200" y="1691640"/>
-            <a:ext cx="2606040" cy="960120"/>
+            <a:off x="457200" y="1325880"/>
+            <a:ext cx="8229600" cy="0"/>
+          </a:xfrm>
+          <a:prstGeom prst="line">
+            <a:avLst/>
+          </a:prstGeom>
+          <a:noFill/>
+          <a:ln w="9525">
+            <a:solidFill>
+              <a:srgbClr val="E5E5E5"/>
+            </a:solidFill>
+            <a:prstDash val="solid"/>
+          </a:ln>
+        </p:spPr>
+      </p:sp>
+      <p:sp>
+        <p:nvSpPr>
+          <p:cNvPr id="7" name="Shape 5"/>
+          <p:cNvSpPr/>
+          <p:nvPr/>
+        </p:nvSpPr>
+        <p:spPr>
+          <a:xfrm>
+            <a:off x="457200" y="1463040"/>
+            <a:ext cx="8229600" cy="777240"/>
+          </a:xfrm>
+          <a:prstGeom prst="rect">
+            <a:avLst/>
+          </a:prstGeom>
+          <a:solidFill>
+            <a:srgbClr val="EEEEEE"/>
+          </a:solidFill>
+          <a:ln w="9525">
+            <a:solidFill>
+              <a:srgbClr val="BBBBBB"/>
+            </a:solidFill>
+            <a:prstDash val="dash"/>
+          </a:ln>
+        </p:spPr>
+      </p:sp>
+      <p:sp>
+        <p:nvSpPr>
+          <p:cNvPr id="8" name="Text 6"/>
+          <p:cNvSpPr/>
+          <p:nvPr/>
+        </p:nvSpPr>
+        <p:spPr>
+          <a:xfrm>
+            <a:off x="548640" y="1463040"/>
+            <a:ext cx="8046720" cy="777240"/>
+          </a:xfrm>
+          <a:prstGeom prst="rect">
+            <a:avLst/>
+          </a:prstGeom>
+          <a:noFill/>
+          <a:ln/>
+        </p:spPr>
+        <p:txBody>
+          <a:bodyPr wrap="square" lIns="0" tIns="0" rIns="0" bIns="0" rtlCol="0" anchor="ctr"/>
+          <a:lstStyle/>
+          <a:p>
+            <a:pPr algn="ctr" indent="0" marL="0">
+              <a:buNone/>
+            </a:pPr>
+            <a:r>
+              <a:rPr lang="en-US" sz="1000" i="1" dirty="0">
+                <a:solidFill>
+                  <a:srgbClr val="888888"/>
+                </a:solidFill>
+                <a:latin typeface="Arial" pitchFamily="34" charset="0"/>
+                <a:ea typeface="Arial" pitchFamily="34" charset="-122"/>
+                <a:cs typeface="Arial" pitchFamily="34" charset="-120"/>
+              </a:rPr>
+              <a:t>IMAGE: World map — chip supply-chain flows between US / Taiwan / Korea / NL / Japan / China</a:t>
+            </a:r>
+            <a:endParaRPr lang="en-US" sz="1000" dirty="0"/>
+          </a:p>
+        </p:txBody>
+      </p:sp>
+      <p:sp>
+        <p:nvSpPr>
+          <p:cNvPr id="9" name="Shape 7"/>
+          <p:cNvSpPr/>
+          <p:nvPr/>
+        </p:nvSpPr>
+        <p:spPr>
+          <a:xfrm>
+            <a:off x="457200" y="2377440"/>
+            <a:ext cx="2606040" cy="731520"/>
           </a:xfrm>
           <a:prstGeom prst="rect">
             <a:avLst/>
@@ -22300,13 +22979,13 @@
       </p:sp>
       <p:sp>
         <p:nvSpPr>
-          <p:cNvPr id="7" name="Shape 5"/>
-          <p:cNvSpPr/>
-          <p:nvPr/>
-        </p:nvSpPr>
-        <p:spPr>
-          <a:xfrm>
-            <a:off x="457200" y="1691640"/>
+          <p:cNvPr id="10" name="Shape 8"/>
+          <p:cNvSpPr/>
+          <p:nvPr/>
+        </p:nvSpPr>
+        <p:spPr>
+          <a:xfrm>
+            <a:off x="457200" y="2377440"/>
             <a:ext cx="2606040" cy="54864"/>
           </a:xfrm>
           <a:prstGeom prst="rect">
@@ -22325,14 +23004,14 @@
       </p:sp>
       <p:sp>
         <p:nvSpPr>
-          <p:cNvPr id="8" name="Text 6"/>
-          <p:cNvSpPr/>
-          <p:nvPr/>
-        </p:nvSpPr>
-        <p:spPr>
-          <a:xfrm>
-            <a:off x="594360" y="1801368"/>
-            <a:ext cx="2331720" cy="292608"/>
+          <p:cNvPr id="11" name="Text 9"/>
+          <p:cNvSpPr/>
+          <p:nvPr/>
+        </p:nvSpPr>
+        <p:spPr>
+          <a:xfrm>
+            <a:off x="594360" y="2450592"/>
+            <a:ext cx="2331720" cy="219456"/>
           </a:xfrm>
           <a:prstGeom prst="rect">
             <a:avLst/>
@@ -22348,7 +23027,7 @@
               <a:buNone/>
             </a:pPr>
             <a:r>
-              <a:rPr lang="en-US" sz="1400" b="1" dirty="0">
+              <a:rPr lang="en-US" sz="1300" b="1" dirty="0">
                 <a:solidFill>
                   <a:srgbClr val="000000"/>
                 </a:solidFill>
@@ -22358,20 +23037,20 @@
               </a:rPr>
               <a:t>USA</a:t>
             </a:r>
-            <a:endParaRPr lang="en-US" sz="1400" dirty="0"/>
-          </a:p>
-        </p:txBody>
-      </p:sp>
-      <p:sp>
-        <p:nvSpPr>
-          <p:cNvPr id="9" name="Text 7"/>
-          <p:cNvSpPr/>
-          <p:nvPr/>
-        </p:nvSpPr>
-        <p:spPr>
-          <a:xfrm>
-            <a:off x="594360" y="2103120"/>
-            <a:ext cx="2331720" cy="274320"/>
+            <a:endParaRPr lang="en-US" sz="1300" dirty="0"/>
+          </a:p>
+        </p:txBody>
+      </p:sp>
+      <p:sp>
+        <p:nvSpPr>
+          <p:cNvPr id="12" name="Text 10"/>
+          <p:cNvSpPr/>
+          <p:nvPr/>
+        </p:nvSpPr>
+        <p:spPr>
+          <a:xfrm>
+            <a:off x="594360" y="2679192"/>
+            <a:ext cx="2331720" cy="201168"/>
           </a:xfrm>
           <a:prstGeom prst="rect">
             <a:avLst/>
@@ -22387,7 +23066,7 @@
               <a:buNone/>
             </a:pPr>
             <a:r>
-              <a:rPr lang="en-US" sz="1000" b="1" dirty="0">
+              <a:rPr lang="en-US" sz="950" b="1" dirty="0">
                 <a:solidFill>
                   <a:srgbClr val="008B8B"/>
                 </a:solidFill>
@@ -22397,20 +23076,20 @@
               </a:rPr>
               <a:t>Design &amp; software</a:t>
             </a:r>
-            <a:endParaRPr lang="en-US" sz="1000" dirty="0"/>
-          </a:p>
-        </p:txBody>
-      </p:sp>
-      <p:sp>
-        <p:nvSpPr>
-          <p:cNvPr id="10" name="Text 8"/>
-          <p:cNvSpPr/>
-          <p:nvPr/>
-        </p:nvSpPr>
-        <p:spPr>
-          <a:xfrm>
-            <a:off x="594360" y="2350008"/>
-            <a:ext cx="2331720" cy="274320"/>
+            <a:endParaRPr lang="en-US" sz="950" dirty="0"/>
+          </a:p>
+        </p:txBody>
+      </p:sp>
+      <p:sp>
+        <p:nvSpPr>
+          <p:cNvPr id="13" name="Text 11"/>
+          <p:cNvSpPr/>
+          <p:nvPr/>
+        </p:nvSpPr>
+        <p:spPr>
+          <a:xfrm>
+            <a:off x="594360" y="2871216"/>
+            <a:ext cx="2331720" cy="201168"/>
           </a:xfrm>
           <a:prstGeom prst="rect">
             <a:avLst/>
@@ -22426,7 +23105,7 @@
               <a:buNone/>
             </a:pPr>
             <a:r>
-              <a:rPr lang="en-US" sz="900" dirty="0">
+              <a:rPr lang="en-US" sz="850" dirty="0">
                 <a:solidFill>
                   <a:srgbClr val="333333"/>
                 </a:solidFill>
@@ -22436,20 +23115,20 @@
               </a:rPr>
               <a:t>NVDA, AMD, AVGO</a:t>
             </a:r>
-            <a:endParaRPr lang="en-US" sz="900" dirty="0"/>
-          </a:p>
-        </p:txBody>
-      </p:sp>
-      <p:sp>
-        <p:nvSpPr>
-          <p:cNvPr id="11" name="Shape 9"/>
-          <p:cNvSpPr/>
-          <p:nvPr/>
-        </p:nvSpPr>
-        <p:spPr>
-          <a:xfrm>
-            <a:off x="3154680" y="1691640"/>
-            <a:ext cx="2606040" cy="960120"/>
+            <a:endParaRPr lang="en-US" sz="850" dirty="0"/>
+          </a:p>
+        </p:txBody>
+      </p:sp>
+      <p:sp>
+        <p:nvSpPr>
+          <p:cNvPr id="14" name="Shape 12"/>
+          <p:cNvSpPr/>
+          <p:nvPr/>
+        </p:nvSpPr>
+        <p:spPr>
+          <a:xfrm>
+            <a:off x="3154680" y="2377440"/>
+            <a:ext cx="2606040" cy="731520"/>
           </a:xfrm>
           <a:prstGeom prst="rect">
             <a:avLst/>
@@ -22467,13 +23146,13 @@
       </p:sp>
       <p:sp>
         <p:nvSpPr>
-          <p:cNvPr id="12" name="Shape 10"/>
-          <p:cNvSpPr/>
-          <p:nvPr/>
-        </p:nvSpPr>
-        <p:spPr>
-          <a:xfrm>
-            <a:off x="3154680" y="1691640"/>
+          <p:cNvPr id="15" name="Shape 13"/>
+          <p:cNvSpPr/>
+          <p:nvPr/>
+        </p:nvSpPr>
+        <p:spPr>
+          <a:xfrm>
+            <a:off x="3154680" y="2377440"/>
             <a:ext cx="2606040" cy="54864"/>
           </a:xfrm>
           <a:prstGeom prst="rect">
@@ -22492,14 +23171,14 @@
       </p:sp>
       <p:sp>
         <p:nvSpPr>
-          <p:cNvPr id="13" name="Text 11"/>
-          <p:cNvSpPr/>
-          <p:nvPr/>
-        </p:nvSpPr>
-        <p:spPr>
-          <a:xfrm>
-            <a:off x="3291840" y="1801368"/>
-            <a:ext cx="2331720" cy="292608"/>
+          <p:cNvPr id="16" name="Text 14"/>
+          <p:cNvSpPr/>
+          <p:nvPr/>
+        </p:nvSpPr>
+        <p:spPr>
+          <a:xfrm>
+            <a:off x="3291840" y="2450592"/>
+            <a:ext cx="2331720" cy="219456"/>
           </a:xfrm>
           <a:prstGeom prst="rect">
             <a:avLst/>
@@ -22515,7 +23194,7 @@
               <a:buNone/>
             </a:pPr>
             <a:r>
-              <a:rPr lang="en-US" sz="1400" b="1" dirty="0">
+              <a:rPr lang="en-US" sz="1300" b="1" dirty="0">
                 <a:solidFill>
                   <a:srgbClr val="000000"/>
                 </a:solidFill>
@@ -22525,20 +23204,20 @@
               </a:rPr>
               <a:t>Taiwan</a:t>
             </a:r>
-            <a:endParaRPr lang="en-US" sz="1400" dirty="0"/>
-          </a:p>
-        </p:txBody>
-      </p:sp>
-      <p:sp>
-        <p:nvSpPr>
-          <p:cNvPr id="14" name="Text 12"/>
-          <p:cNvSpPr/>
-          <p:nvPr/>
-        </p:nvSpPr>
-        <p:spPr>
-          <a:xfrm>
-            <a:off x="3291840" y="2103120"/>
-            <a:ext cx="2331720" cy="274320"/>
+            <a:endParaRPr lang="en-US" sz="1300" dirty="0"/>
+          </a:p>
+        </p:txBody>
+      </p:sp>
+      <p:sp>
+        <p:nvSpPr>
+          <p:cNvPr id="17" name="Text 15"/>
+          <p:cNvSpPr/>
+          <p:nvPr/>
+        </p:nvSpPr>
+        <p:spPr>
+          <a:xfrm>
+            <a:off x="3291840" y="2679192"/>
+            <a:ext cx="2331720" cy="201168"/>
           </a:xfrm>
           <a:prstGeom prst="rect">
             <a:avLst/>
@@ -22554,7 +23233,7 @@
               <a:buNone/>
             </a:pPr>
             <a:r>
-              <a:rPr lang="en-US" sz="1000" b="1" dirty="0">
+              <a:rPr lang="en-US" sz="950" b="1" dirty="0">
                 <a:solidFill>
                   <a:srgbClr val="CC0000"/>
                 </a:solidFill>
@@ -22564,20 +23243,20 @@
               </a:rPr>
               <a:t>Leading-edge fabs</a:t>
             </a:r>
-            <a:endParaRPr lang="en-US" sz="1000" dirty="0"/>
-          </a:p>
-        </p:txBody>
-      </p:sp>
-      <p:sp>
-        <p:nvSpPr>
-          <p:cNvPr id="15" name="Text 13"/>
-          <p:cNvSpPr/>
-          <p:nvPr/>
-        </p:nvSpPr>
-        <p:spPr>
-          <a:xfrm>
-            <a:off x="3291840" y="2350008"/>
-            <a:ext cx="2331720" cy="274320"/>
+            <a:endParaRPr lang="en-US" sz="950" dirty="0"/>
+          </a:p>
+        </p:txBody>
+      </p:sp>
+      <p:sp>
+        <p:nvSpPr>
+          <p:cNvPr id="18" name="Text 16"/>
+          <p:cNvSpPr/>
+          <p:nvPr/>
+        </p:nvSpPr>
+        <p:spPr>
+          <a:xfrm>
+            <a:off x="3291840" y="2871216"/>
+            <a:ext cx="2331720" cy="201168"/>
           </a:xfrm>
           <a:prstGeom prst="rect">
             <a:avLst/>
@@ -22593,7 +23272,7 @@
               <a:buNone/>
             </a:pPr>
             <a:r>
-              <a:rPr lang="en-US" sz="900" dirty="0">
+              <a:rPr lang="en-US" sz="850" dirty="0">
                 <a:solidFill>
                   <a:srgbClr val="333333"/>
                 </a:solidFill>
@@ -22603,20 +23282,20 @@
               </a:rPr>
               <a:t>TSMC (~90% advanced)</a:t>
             </a:r>
-            <a:endParaRPr lang="en-US" sz="900" dirty="0"/>
-          </a:p>
-        </p:txBody>
-      </p:sp>
-      <p:sp>
-        <p:nvSpPr>
-          <p:cNvPr id="16" name="Shape 14"/>
-          <p:cNvSpPr/>
-          <p:nvPr/>
-        </p:nvSpPr>
-        <p:spPr>
-          <a:xfrm>
-            <a:off x="5852160" y="1691640"/>
-            <a:ext cx="2606040" cy="960120"/>
+            <a:endParaRPr lang="en-US" sz="850" dirty="0"/>
+          </a:p>
+        </p:txBody>
+      </p:sp>
+      <p:sp>
+        <p:nvSpPr>
+          <p:cNvPr id="19" name="Shape 17"/>
+          <p:cNvSpPr/>
+          <p:nvPr/>
+        </p:nvSpPr>
+        <p:spPr>
+          <a:xfrm>
+            <a:off x="5852160" y="2377440"/>
+            <a:ext cx="2606040" cy="731520"/>
           </a:xfrm>
           <a:prstGeom prst="rect">
             <a:avLst/>
@@ -22634,13 +23313,13 @@
       </p:sp>
       <p:sp>
         <p:nvSpPr>
-          <p:cNvPr id="17" name="Shape 15"/>
-          <p:cNvSpPr/>
-          <p:nvPr/>
-        </p:nvSpPr>
-        <p:spPr>
-          <a:xfrm>
-            <a:off x="5852160" y="1691640"/>
+          <p:cNvPr id="20" name="Shape 18"/>
+          <p:cNvSpPr/>
+          <p:nvPr/>
+        </p:nvSpPr>
+        <p:spPr>
+          <a:xfrm>
+            <a:off x="5852160" y="2377440"/>
             <a:ext cx="2606040" cy="54864"/>
           </a:xfrm>
           <a:prstGeom prst="rect">
@@ -22659,14 +23338,14 @@
       </p:sp>
       <p:sp>
         <p:nvSpPr>
-          <p:cNvPr id="18" name="Text 16"/>
-          <p:cNvSpPr/>
-          <p:nvPr/>
-        </p:nvSpPr>
-        <p:spPr>
-          <a:xfrm>
-            <a:off x="5989320" y="1801368"/>
-            <a:ext cx="2331720" cy="292608"/>
+          <p:cNvPr id="21" name="Text 19"/>
+          <p:cNvSpPr/>
+          <p:nvPr/>
+        </p:nvSpPr>
+        <p:spPr>
+          <a:xfrm>
+            <a:off x="5989320" y="2450592"/>
+            <a:ext cx="2331720" cy="219456"/>
           </a:xfrm>
           <a:prstGeom prst="rect">
             <a:avLst/>
@@ -22682,7 +23361,7 @@
               <a:buNone/>
             </a:pPr>
             <a:r>
-              <a:rPr lang="en-US" sz="1400" b="1" dirty="0">
+              <a:rPr lang="en-US" sz="1300" b="1" dirty="0">
                 <a:solidFill>
                   <a:srgbClr val="000000"/>
                 </a:solidFill>
@@ -22692,20 +23371,20 @@
               </a:rPr>
               <a:t>S. Korea</a:t>
             </a:r>
-            <a:endParaRPr lang="en-US" sz="1400" dirty="0"/>
-          </a:p>
-        </p:txBody>
-      </p:sp>
-      <p:sp>
-        <p:nvSpPr>
-          <p:cNvPr id="19" name="Text 17"/>
-          <p:cNvSpPr/>
-          <p:nvPr/>
-        </p:nvSpPr>
-        <p:spPr>
-          <a:xfrm>
-            <a:off x="5989320" y="2103120"/>
-            <a:ext cx="2331720" cy="274320"/>
+            <a:endParaRPr lang="en-US" sz="1300" dirty="0"/>
+          </a:p>
+        </p:txBody>
+      </p:sp>
+      <p:sp>
+        <p:nvSpPr>
+          <p:cNvPr id="22" name="Text 20"/>
+          <p:cNvSpPr/>
+          <p:nvPr/>
+        </p:nvSpPr>
+        <p:spPr>
+          <a:xfrm>
+            <a:off x="5989320" y="2679192"/>
+            <a:ext cx="2331720" cy="201168"/>
           </a:xfrm>
           <a:prstGeom prst="rect">
             <a:avLst/>
@@ -22721,7 +23400,7 @@
               <a:buNone/>
             </a:pPr>
             <a:r>
-              <a:rPr lang="en-US" sz="1000" b="1" dirty="0">
+              <a:rPr lang="en-US" sz="950" b="1" dirty="0">
                 <a:solidFill>
                   <a:srgbClr val="FFB800"/>
                 </a:solidFill>
@@ -22731,20 +23410,20 @@
               </a:rPr>
               <a:t>DRAM &amp; HBM</a:t>
             </a:r>
-            <a:endParaRPr lang="en-US" sz="1000" dirty="0"/>
-          </a:p>
-        </p:txBody>
-      </p:sp>
-      <p:sp>
-        <p:nvSpPr>
-          <p:cNvPr id="20" name="Text 18"/>
-          <p:cNvSpPr/>
-          <p:nvPr/>
-        </p:nvSpPr>
-        <p:spPr>
-          <a:xfrm>
-            <a:off x="5989320" y="2350008"/>
-            <a:ext cx="2331720" cy="274320"/>
+            <a:endParaRPr lang="en-US" sz="950" dirty="0"/>
+          </a:p>
+        </p:txBody>
+      </p:sp>
+      <p:sp>
+        <p:nvSpPr>
+          <p:cNvPr id="23" name="Text 21"/>
+          <p:cNvSpPr/>
+          <p:nvPr/>
+        </p:nvSpPr>
+        <p:spPr>
+          <a:xfrm>
+            <a:off x="5989320" y="2871216"/>
+            <a:ext cx="2331720" cy="201168"/>
           </a:xfrm>
           <a:prstGeom prst="rect">
             <a:avLst/>
@@ -22760,7 +23439,7 @@
               <a:buNone/>
             </a:pPr>
             <a:r>
-              <a:rPr lang="en-US" sz="900" dirty="0">
+              <a:rPr lang="en-US" sz="850" dirty="0">
                 <a:solidFill>
                   <a:srgbClr val="333333"/>
                 </a:solidFill>
@@ -22770,20 +23449,20 @@
               </a:rPr>
               <a:t>SK Hynix, Samsung</a:t>
             </a:r>
-            <a:endParaRPr lang="en-US" sz="900" dirty="0"/>
-          </a:p>
-        </p:txBody>
-      </p:sp>
-      <p:sp>
-        <p:nvSpPr>
-          <p:cNvPr id="21" name="Shape 19"/>
-          <p:cNvSpPr/>
-          <p:nvPr/>
-        </p:nvSpPr>
-        <p:spPr>
-          <a:xfrm>
-            <a:off x="457200" y="2788920"/>
-            <a:ext cx="2606040" cy="960120"/>
+            <a:endParaRPr lang="en-US" sz="850" dirty="0"/>
+          </a:p>
+        </p:txBody>
+      </p:sp>
+      <p:sp>
+        <p:nvSpPr>
+          <p:cNvPr id="24" name="Shape 22"/>
+          <p:cNvSpPr/>
+          <p:nvPr/>
+        </p:nvSpPr>
+        <p:spPr>
+          <a:xfrm>
+            <a:off x="457200" y="3218688"/>
+            <a:ext cx="2606040" cy="731520"/>
           </a:xfrm>
           <a:prstGeom prst="rect">
             <a:avLst/>
@@ -22801,13 +23480,13 @@
       </p:sp>
       <p:sp>
         <p:nvSpPr>
-          <p:cNvPr id="22" name="Shape 20"/>
-          <p:cNvSpPr/>
-          <p:nvPr/>
-        </p:nvSpPr>
-        <p:spPr>
-          <a:xfrm>
-            <a:off x="457200" y="2788920"/>
+          <p:cNvPr id="25" name="Shape 23"/>
+          <p:cNvSpPr/>
+          <p:nvPr/>
+        </p:nvSpPr>
+        <p:spPr>
+          <a:xfrm>
+            <a:off x="457200" y="3218688"/>
             <a:ext cx="2606040" cy="54864"/>
           </a:xfrm>
           <a:prstGeom prst="rect">
@@ -22826,14 +23505,14 @@
       </p:sp>
       <p:sp>
         <p:nvSpPr>
-          <p:cNvPr id="23" name="Text 21"/>
-          <p:cNvSpPr/>
-          <p:nvPr/>
-        </p:nvSpPr>
-        <p:spPr>
-          <a:xfrm>
-            <a:off x="594360" y="2898648"/>
-            <a:ext cx="2331720" cy="292608"/>
+          <p:cNvPr id="26" name="Text 24"/>
+          <p:cNvSpPr/>
+          <p:nvPr/>
+        </p:nvSpPr>
+        <p:spPr>
+          <a:xfrm>
+            <a:off x="594360" y="3291840"/>
+            <a:ext cx="2331720" cy="219456"/>
           </a:xfrm>
           <a:prstGeom prst="rect">
             <a:avLst/>
@@ -22849,7 +23528,7 @@
               <a:buNone/>
             </a:pPr>
             <a:r>
-              <a:rPr lang="en-US" sz="1400" b="1" dirty="0">
+              <a:rPr lang="en-US" sz="1300" b="1" dirty="0">
                 <a:solidFill>
                   <a:srgbClr val="000000"/>
                 </a:solidFill>
@@ -22859,20 +23538,20 @@
               </a:rPr>
               <a:t>Netherlands</a:t>
             </a:r>
-            <a:endParaRPr lang="en-US" sz="1400" dirty="0"/>
-          </a:p>
-        </p:txBody>
-      </p:sp>
-      <p:sp>
-        <p:nvSpPr>
-          <p:cNvPr id="24" name="Text 22"/>
-          <p:cNvSpPr/>
-          <p:nvPr/>
-        </p:nvSpPr>
-        <p:spPr>
-          <a:xfrm>
-            <a:off x="594360" y="3200400"/>
-            <a:ext cx="2331720" cy="274320"/>
+            <a:endParaRPr lang="en-US" sz="1300" dirty="0"/>
+          </a:p>
+        </p:txBody>
+      </p:sp>
+      <p:sp>
+        <p:nvSpPr>
+          <p:cNvPr id="27" name="Text 25"/>
+          <p:cNvSpPr/>
+          <p:nvPr/>
+        </p:nvSpPr>
+        <p:spPr>
+          <a:xfrm>
+            <a:off x="594360" y="3520440"/>
+            <a:ext cx="2331720" cy="201168"/>
           </a:xfrm>
           <a:prstGeom prst="rect">
             <a:avLst/>
@@ -22888,7 +23567,7 @@
               <a:buNone/>
             </a:pPr>
             <a:r>
-              <a:rPr lang="en-US" sz="1000" b="1" dirty="0">
+              <a:rPr lang="en-US" sz="950" b="1" dirty="0">
                 <a:solidFill>
                   <a:srgbClr val="E8478D"/>
                 </a:solidFill>
@@ -22898,20 +23577,20 @@
               </a:rPr>
               <a:t>EUV lithography</a:t>
             </a:r>
-            <a:endParaRPr lang="en-US" sz="1000" dirty="0"/>
-          </a:p>
-        </p:txBody>
-      </p:sp>
-      <p:sp>
-        <p:nvSpPr>
-          <p:cNvPr id="25" name="Text 23"/>
-          <p:cNvSpPr/>
-          <p:nvPr/>
-        </p:nvSpPr>
-        <p:spPr>
-          <a:xfrm>
-            <a:off x="594360" y="3447288"/>
-            <a:ext cx="2331720" cy="274320"/>
+            <a:endParaRPr lang="en-US" sz="950" dirty="0"/>
+          </a:p>
+        </p:txBody>
+      </p:sp>
+      <p:sp>
+        <p:nvSpPr>
+          <p:cNvPr id="28" name="Text 26"/>
+          <p:cNvSpPr/>
+          <p:nvPr/>
+        </p:nvSpPr>
+        <p:spPr>
+          <a:xfrm>
+            <a:off x="594360" y="3712464"/>
+            <a:ext cx="2331720" cy="201168"/>
           </a:xfrm>
           <a:prstGeom prst="rect">
             <a:avLst/>
@@ -22927,7 +23606,7 @@
               <a:buNone/>
             </a:pPr>
             <a:r>
-              <a:rPr lang="en-US" sz="900" dirty="0">
+              <a:rPr lang="en-US" sz="850" dirty="0">
                 <a:solidFill>
                   <a:srgbClr val="333333"/>
                 </a:solidFill>
@@ -22937,20 +23616,20 @@
               </a:rPr>
               <a:t>ASML (&lt;100/yr)</a:t>
             </a:r>
-            <a:endParaRPr lang="en-US" sz="900" dirty="0"/>
-          </a:p>
-        </p:txBody>
-      </p:sp>
-      <p:sp>
-        <p:nvSpPr>
-          <p:cNvPr id="26" name="Shape 24"/>
-          <p:cNvSpPr/>
-          <p:nvPr/>
-        </p:nvSpPr>
-        <p:spPr>
-          <a:xfrm>
-            <a:off x="3154680" y="2788920"/>
-            <a:ext cx="2606040" cy="960120"/>
+            <a:endParaRPr lang="en-US" sz="850" dirty="0"/>
+          </a:p>
+        </p:txBody>
+      </p:sp>
+      <p:sp>
+        <p:nvSpPr>
+          <p:cNvPr id="29" name="Shape 27"/>
+          <p:cNvSpPr/>
+          <p:nvPr/>
+        </p:nvSpPr>
+        <p:spPr>
+          <a:xfrm>
+            <a:off x="3154680" y="3218688"/>
+            <a:ext cx="2606040" cy="731520"/>
           </a:xfrm>
           <a:prstGeom prst="rect">
             <a:avLst/>
@@ -22968,13 +23647,13 @@
       </p:sp>
       <p:sp>
         <p:nvSpPr>
-          <p:cNvPr id="27" name="Shape 25"/>
-          <p:cNvSpPr/>
-          <p:nvPr/>
-        </p:nvSpPr>
-        <p:spPr>
-          <a:xfrm>
-            <a:off x="3154680" y="2788920"/>
+          <p:cNvPr id="30" name="Shape 28"/>
+          <p:cNvSpPr/>
+          <p:nvPr/>
+        </p:nvSpPr>
+        <p:spPr>
+          <a:xfrm>
+            <a:off x="3154680" y="3218688"/>
             <a:ext cx="2606040" cy="54864"/>
           </a:xfrm>
           <a:prstGeom prst="rect">
@@ -22993,14 +23672,14 @@
       </p:sp>
       <p:sp>
         <p:nvSpPr>
-          <p:cNvPr id="28" name="Text 26"/>
-          <p:cNvSpPr/>
-          <p:nvPr/>
-        </p:nvSpPr>
-        <p:spPr>
-          <a:xfrm>
-            <a:off x="3291840" y="2898648"/>
-            <a:ext cx="2331720" cy="292608"/>
+          <p:cNvPr id="31" name="Text 29"/>
+          <p:cNvSpPr/>
+          <p:nvPr/>
+        </p:nvSpPr>
+        <p:spPr>
+          <a:xfrm>
+            <a:off x="3291840" y="3291840"/>
+            <a:ext cx="2331720" cy="219456"/>
           </a:xfrm>
           <a:prstGeom prst="rect">
             <a:avLst/>
@@ -23016,7 +23695,7 @@
               <a:buNone/>
             </a:pPr>
             <a:r>
-              <a:rPr lang="en-US" sz="1400" b="1" dirty="0">
+              <a:rPr lang="en-US" sz="1300" b="1" dirty="0">
                 <a:solidFill>
                   <a:srgbClr val="000000"/>
                 </a:solidFill>
@@ -23026,20 +23705,20 @@
               </a:rPr>
               <a:t>Japan</a:t>
             </a:r>
-            <a:endParaRPr lang="en-US" sz="1400" dirty="0"/>
-          </a:p>
-        </p:txBody>
-      </p:sp>
-      <p:sp>
-        <p:nvSpPr>
-          <p:cNvPr id="29" name="Text 27"/>
-          <p:cNvSpPr/>
-          <p:nvPr/>
-        </p:nvSpPr>
-        <p:spPr>
-          <a:xfrm>
-            <a:off x="3291840" y="3200400"/>
-            <a:ext cx="2331720" cy="274320"/>
+            <a:endParaRPr lang="en-US" sz="1300" dirty="0"/>
+          </a:p>
+        </p:txBody>
+      </p:sp>
+      <p:sp>
+        <p:nvSpPr>
+          <p:cNvPr id="32" name="Text 30"/>
+          <p:cNvSpPr/>
+          <p:nvPr/>
+        </p:nvSpPr>
+        <p:spPr>
+          <a:xfrm>
+            <a:off x="3291840" y="3520440"/>
+            <a:ext cx="2331720" cy="201168"/>
           </a:xfrm>
           <a:prstGeom prst="rect">
             <a:avLst/>
@@ -23055,7 +23734,7 @@
               <a:buNone/>
             </a:pPr>
             <a:r>
-              <a:rPr lang="en-US" sz="1000" b="1" dirty="0">
+              <a:rPr lang="en-US" sz="950" b="1" dirty="0">
                 <a:solidFill>
                   <a:srgbClr val="F6693D"/>
                 </a:solidFill>
@@ -23065,20 +23744,20 @@
               </a:rPr>
               <a:t>Materials &amp; equipment</a:t>
             </a:r>
-            <a:endParaRPr lang="en-US" sz="1000" dirty="0"/>
-          </a:p>
-        </p:txBody>
-      </p:sp>
-      <p:sp>
-        <p:nvSpPr>
-          <p:cNvPr id="30" name="Text 28"/>
-          <p:cNvSpPr/>
-          <p:nvPr/>
-        </p:nvSpPr>
-        <p:spPr>
-          <a:xfrm>
-            <a:off x="3291840" y="3447288"/>
-            <a:ext cx="2331720" cy="274320"/>
+            <a:endParaRPr lang="en-US" sz="950" dirty="0"/>
+          </a:p>
+        </p:txBody>
+      </p:sp>
+      <p:sp>
+        <p:nvSpPr>
+          <p:cNvPr id="33" name="Text 31"/>
+          <p:cNvSpPr/>
+          <p:nvPr/>
+        </p:nvSpPr>
+        <p:spPr>
+          <a:xfrm>
+            <a:off x="3291840" y="3712464"/>
+            <a:ext cx="2331720" cy="201168"/>
           </a:xfrm>
           <a:prstGeom prst="rect">
             <a:avLst/>
@@ -23094,7 +23773,7 @@
               <a:buNone/>
             </a:pPr>
             <a:r>
-              <a:rPr lang="en-US" sz="900" dirty="0">
+              <a:rPr lang="en-US" sz="850" dirty="0">
                 <a:solidFill>
                   <a:srgbClr val="333333"/>
                 </a:solidFill>
@@ -23104,20 +23783,20 @@
               </a:rPr>
               <a:t>Tokyo Electron, Shin-Etsu</a:t>
             </a:r>
-            <a:endParaRPr lang="en-US" sz="900" dirty="0"/>
-          </a:p>
-        </p:txBody>
-      </p:sp>
-      <p:sp>
-        <p:nvSpPr>
-          <p:cNvPr id="31" name="Shape 29"/>
-          <p:cNvSpPr/>
-          <p:nvPr/>
-        </p:nvSpPr>
-        <p:spPr>
-          <a:xfrm>
-            <a:off x="5852160" y="2788920"/>
-            <a:ext cx="2606040" cy="960120"/>
+            <a:endParaRPr lang="en-US" sz="850" dirty="0"/>
+          </a:p>
+        </p:txBody>
+      </p:sp>
+      <p:sp>
+        <p:nvSpPr>
+          <p:cNvPr id="34" name="Shape 32"/>
+          <p:cNvSpPr/>
+          <p:nvPr/>
+        </p:nvSpPr>
+        <p:spPr>
+          <a:xfrm>
+            <a:off x="5852160" y="3218688"/>
+            <a:ext cx="2606040" cy="731520"/>
           </a:xfrm>
           <a:prstGeom prst="rect">
             <a:avLst/>
@@ -23135,13 +23814,13 @@
       </p:sp>
       <p:sp>
         <p:nvSpPr>
-          <p:cNvPr id="32" name="Shape 30"/>
-          <p:cNvSpPr/>
-          <p:nvPr/>
-        </p:nvSpPr>
-        <p:spPr>
-          <a:xfrm>
-            <a:off x="5852160" y="2788920"/>
+          <p:cNvPr id="35" name="Shape 33"/>
+          <p:cNvSpPr/>
+          <p:nvPr/>
+        </p:nvSpPr>
+        <p:spPr>
+          <a:xfrm>
+            <a:off x="5852160" y="3218688"/>
             <a:ext cx="2606040" cy="54864"/>
           </a:xfrm>
           <a:prstGeom prst="rect">
@@ -23160,14 +23839,14 @@
       </p:sp>
       <p:sp>
         <p:nvSpPr>
-          <p:cNvPr id="33" name="Text 31"/>
-          <p:cNvSpPr/>
-          <p:nvPr/>
-        </p:nvSpPr>
-        <p:spPr>
-          <a:xfrm>
-            <a:off x="5989320" y="2898648"/>
-            <a:ext cx="2331720" cy="292608"/>
+          <p:cNvPr id="36" name="Text 34"/>
+          <p:cNvSpPr/>
+          <p:nvPr/>
+        </p:nvSpPr>
+        <p:spPr>
+          <a:xfrm>
+            <a:off x="5989320" y="3291840"/>
+            <a:ext cx="2331720" cy="219456"/>
           </a:xfrm>
           <a:prstGeom prst="rect">
             <a:avLst/>
@@ -23183,7 +23862,7 @@
               <a:buNone/>
             </a:pPr>
             <a:r>
-              <a:rPr lang="en-US" sz="1400" b="1" dirty="0">
+              <a:rPr lang="en-US" sz="1300" b="1" dirty="0">
                 <a:solidFill>
                   <a:srgbClr val="000000"/>
                 </a:solidFill>
@@ -23193,20 +23872,20 @@
               </a:rPr>
               <a:t>China</a:t>
             </a:r>
-            <a:endParaRPr lang="en-US" sz="1400" dirty="0"/>
-          </a:p>
-        </p:txBody>
-      </p:sp>
-      <p:sp>
-        <p:nvSpPr>
-          <p:cNvPr id="34" name="Text 32"/>
-          <p:cNvSpPr/>
-          <p:nvPr/>
-        </p:nvSpPr>
-        <p:spPr>
-          <a:xfrm>
-            <a:off x="5989320" y="3200400"/>
-            <a:ext cx="2331720" cy="274320"/>
+            <a:endParaRPr lang="en-US" sz="1300" dirty="0"/>
+          </a:p>
+        </p:txBody>
+      </p:sp>
+      <p:sp>
+        <p:nvSpPr>
+          <p:cNvPr id="37" name="Text 35"/>
+          <p:cNvSpPr/>
+          <p:nvPr/>
+        </p:nvSpPr>
+        <p:spPr>
+          <a:xfrm>
+            <a:off x="5989320" y="3520440"/>
+            <a:ext cx="2331720" cy="201168"/>
           </a:xfrm>
           <a:prstGeom prst="rect">
             <a:avLst/>
@@ -23222,7 +23901,7 @@
               <a:buNone/>
             </a:pPr>
             <a:r>
-              <a:rPr lang="en-US" sz="1000" b="1" dirty="0">
+              <a:rPr lang="en-US" sz="950" b="1" dirty="0">
                 <a:solidFill>
                   <a:srgbClr val="333333"/>
                 </a:solidFill>
@@ -23232,20 +23911,20 @@
               </a:rPr>
               <a:t>Mature-node fabs, rare earths</a:t>
             </a:r>
-            <a:endParaRPr lang="en-US" sz="1000" dirty="0"/>
-          </a:p>
-        </p:txBody>
-      </p:sp>
-      <p:sp>
-        <p:nvSpPr>
-          <p:cNvPr id="35" name="Text 33"/>
-          <p:cNvSpPr/>
-          <p:nvPr/>
-        </p:nvSpPr>
-        <p:spPr>
-          <a:xfrm>
-            <a:off x="5989320" y="3447288"/>
-            <a:ext cx="2331720" cy="274320"/>
+            <a:endParaRPr lang="en-US" sz="950" dirty="0"/>
+          </a:p>
+        </p:txBody>
+      </p:sp>
+      <p:sp>
+        <p:nvSpPr>
+          <p:cNvPr id="38" name="Text 36"/>
+          <p:cNvSpPr/>
+          <p:nvPr/>
+        </p:nvSpPr>
+        <p:spPr>
+          <a:xfrm>
+            <a:off x="5989320" y="3712464"/>
+            <a:ext cx="2331720" cy="201168"/>
           </a:xfrm>
           <a:prstGeom prst="rect">
             <a:avLst/>
@@ -23261,7 +23940,7 @@
               <a:buNone/>
             </a:pPr>
             <a:r>
-              <a:rPr lang="en-US" sz="900" dirty="0">
+              <a:rPr lang="en-US" sz="850" dirty="0">
                 <a:solidFill>
                   <a:srgbClr val="333333"/>
                 </a:solidFill>
@@ -23271,13 +23950,13 @@
               </a:rPr>
               <a:t>SMIC, Huawei</a:t>
             </a:r>
-            <a:endParaRPr lang="en-US" sz="900" dirty="0"/>
-          </a:p>
-        </p:txBody>
-      </p:sp>
-      <p:sp>
-        <p:nvSpPr>
-          <p:cNvPr id="36" name="Text 34"/>
+            <a:endParaRPr lang="en-US" sz="850" dirty="0"/>
+          </a:p>
+        </p:txBody>
+      </p:sp>
+      <p:sp>
+        <p:nvSpPr>
+          <p:cNvPr id="39" name="Text 37"/>
           <p:cNvSpPr/>
           <p:nvPr/>
         </p:nvSpPr>
@@ -23316,7 +23995,7 @@
       </p:sp>
       <p:sp>
         <p:nvSpPr>
-          <p:cNvPr id="37" name="Shape 35"/>
+          <p:cNvPr id="40" name="Shape 38"/>
           <p:cNvSpPr/>
           <p:nvPr/>
         </p:nvSpPr>
@@ -23341,7 +24020,7 @@
       </p:sp>
       <p:sp>
         <p:nvSpPr>
-          <p:cNvPr id="38" name="Text 36"/>
+          <p:cNvPr id="41" name="Text 39"/>
           <p:cNvSpPr/>
           <p:nvPr/>
         </p:nvSpPr>
@@ -23380,7 +24059,7 @@
       </p:sp>
       <p:sp>
         <p:nvSpPr>
-          <p:cNvPr id="39" name="Text 37"/>
+          <p:cNvPr id="42" name="Text 40"/>
           <p:cNvSpPr/>
           <p:nvPr/>
         </p:nvSpPr>
@@ -23594,8 +24273,95 @@
         </p:nvSpPr>
         <p:spPr>
           <a:xfrm>
-            <a:off x="457200" y="1691640"/>
-            <a:ext cx="2560320" cy="365760"/>
+            <a:off x="457200" y="1325880"/>
+            <a:ext cx="8229600" cy="0"/>
+          </a:xfrm>
+          <a:prstGeom prst="line">
+            <a:avLst/>
+          </a:prstGeom>
+          <a:noFill/>
+          <a:ln w="9525">
+            <a:solidFill>
+              <a:srgbClr val="E5E5E5"/>
+            </a:solidFill>
+            <a:prstDash val="solid"/>
+          </a:ln>
+        </p:spPr>
+      </p:sp>
+      <p:sp>
+        <p:nvSpPr>
+          <p:cNvPr id="7" name="Shape 5"/>
+          <p:cNvSpPr/>
+          <p:nvPr/>
+        </p:nvSpPr>
+        <p:spPr>
+          <a:xfrm>
+            <a:off x="457200" y="1417320"/>
+            <a:ext cx="8229600" cy="594360"/>
+          </a:xfrm>
+          <a:prstGeom prst="rect">
+            <a:avLst/>
+          </a:prstGeom>
+          <a:solidFill>
+            <a:srgbClr val="EEEEEE"/>
+          </a:solidFill>
+          <a:ln w="9525">
+            <a:solidFill>
+              <a:srgbClr val="BBBBBB"/>
+            </a:solidFill>
+            <a:prstDash val="dash"/>
+          </a:ln>
+        </p:spPr>
+      </p:sp>
+      <p:sp>
+        <p:nvSpPr>
+          <p:cNvPr id="8" name="Text 6"/>
+          <p:cNvSpPr/>
+          <p:nvPr/>
+        </p:nvSpPr>
+        <p:spPr>
+          <a:xfrm>
+            <a:off x="548640" y="1417320"/>
+            <a:ext cx="8046720" cy="594360"/>
+          </a:xfrm>
+          <a:prstGeom prst="rect">
+            <a:avLst/>
+          </a:prstGeom>
+          <a:noFill/>
+          <a:ln/>
+        </p:spPr>
+        <p:txBody>
+          <a:bodyPr wrap="square" lIns="0" tIns="0" rIns="0" bIns="0" rtlCol="0" anchor="ctr"/>
+          <a:lstStyle/>
+          <a:p>
+            <a:pPr algn="ctr" indent="0" marL="0">
+              <a:buNone/>
+            </a:pPr>
+            <a:r>
+              <a:rPr lang="en-US" sz="1000" i="1" dirty="0">
+                <a:solidFill>
+                  <a:srgbClr val="888888"/>
+                </a:solidFill>
+                <a:latin typeface="Arial" pitchFamily="34" charset="0"/>
+                <a:ea typeface="Arial" pitchFamily="34" charset="-122"/>
+                <a:cs typeface="Arial" pitchFamily="34" charset="-120"/>
+              </a:rPr>
+              <a:t>IMAGE: Data-center with turbines / solar array / transmission lines</a:t>
+            </a:r>
+            <a:endParaRPr lang="en-US" sz="1000" dirty="0"/>
+          </a:p>
+        </p:txBody>
+      </p:sp>
+      <p:sp>
+        <p:nvSpPr>
+          <p:cNvPr id="9" name="Shape 7"/>
+          <p:cNvSpPr/>
+          <p:nvPr/>
+        </p:nvSpPr>
+        <p:spPr>
+          <a:xfrm>
+            <a:off x="457200" y="2194560"/>
+            <a:ext cx="2560320" cy="320040"/>
           </a:xfrm>
           <a:prstGeom prst="rect">
             <a:avLst/>
@@ -23613,14 +24379,14 @@
       </p:sp>
       <p:sp>
         <p:nvSpPr>
-          <p:cNvPr id="7" name="Text 5"/>
-          <p:cNvSpPr/>
-          <p:nvPr/>
-        </p:nvSpPr>
-        <p:spPr>
-          <a:xfrm>
-            <a:off x="457200" y="1691640"/>
-            <a:ext cx="2560320" cy="365760"/>
+          <p:cNvPr id="10" name="Text 8"/>
+          <p:cNvSpPr/>
+          <p:nvPr/>
+        </p:nvSpPr>
+        <p:spPr>
+          <a:xfrm>
+            <a:off x="457200" y="2194560"/>
+            <a:ext cx="2560320" cy="320040"/>
           </a:xfrm>
           <a:prstGeom prst="rect">
             <a:avLst/>
@@ -23636,7 +24402,7 @@
               <a:buNone/>
             </a:pPr>
             <a:r>
-              <a:rPr lang="en-US" sz="1200" b="1" spc="200" kern="0" dirty="0">
+              <a:rPr lang="en-US" sz="1150" b="1" spc="200" kern="0" dirty="0">
                 <a:solidFill>
                   <a:srgbClr val="FFFFFF"/>
                 </a:solidFill>
@@ -23646,20 +24412,20 @@
               </a:rPr>
               <a:t>NATURAL GAS</a:t>
             </a:r>
-            <a:endParaRPr lang="en-US" sz="1200" dirty="0"/>
-          </a:p>
-        </p:txBody>
-      </p:sp>
-      <p:sp>
-        <p:nvSpPr>
-          <p:cNvPr id="8" name="Shape 6"/>
-          <p:cNvSpPr/>
-          <p:nvPr/>
-        </p:nvSpPr>
-        <p:spPr>
-          <a:xfrm>
-            <a:off x="457200" y="2057400"/>
-            <a:ext cx="2560320" cy="1234440"/>
+            <a:endParaRPr lang="en-US" sz="1150" dirty="0"/>
+          </a:p>
+        </p:txBody>
+      </p:sp>
+      <p:sp>
+        <p:nvSpPr>
+          <p:cNvPr id="11" name="Shape 9"/>
+          <p:cNvSpPr/>
+          <p:nvPr/>
+        </p:nvSpPr>
+        <p:spPr>
+          <a:xfrm>
+            <a:off x="457200" y="2514600"/>
+            <a:ext cx="2560320" cy="1051560"/>
           </a:xfrm>
           <a:prstGeom prst="rect">
             <a:avLst/>
@@ -23677,14 +24443,14 @@
       </p:sp>
       <p:sp>
         <p:nvSpPr>
-          <p:cNvPr id="9" name="Text 7"/>
-          <p:cNvSpPr/>
-          <p:nvPr/>
-        </p:nvSpPr>
-        <p:spPr>
-          <a:xfrm>
-            <a:off x="594360" y="2121408"/>
-            <a:ext cx="2331720" cy="228600"/>
+          <p:cNvPr id="12" name="Text 10"/>
+          <p:cNvSpPr/>
+          <p:nvPr/>
+        </p:nvSpPr>
+        <p:spPr>
+          <a:xfrm>
+            <a:off x="594360" y="2560320"/>
+            <a:ext cx="2331720" cy="201168"/>
           </a:xfrm>
           <a:prstGeom prst="rect">
             <a:avLst/>
@@ -23716,14 +24482,14 @@
       </p:sp>
       <p:sp>
         <p:nvSpPr>
-          <p:cNvPr id="10" name="Text 8"/>
-          <p:cNvSpPr/>
-          <p:nvPr/>
-        </p:nvSpPr>
-        <p:spPr>
-          <a:xfrm>
-            <a:off x="594360" y="2359152"/>
-            <a:ext cx="2331720" cy="868680"/>
+          <p:cNvPr id="13" name="Text 11"/>
+          <p:cNvSpPr/>
+          <p:nvPr/>
+        </p:nvSpPr>
+        <p:spPr>
+          <a:xfrm>
+            <a:off x="594360" y="2761488"/>
+            <a:ext cx="2331720" cy="777240"/>
           </a:xfrm>
           <a:prstGeom prst="rect">
             <a:avLst/>
@@ -23739,7 +24505,7 @@
               <a:buNone/>
             </a:pPr>
             <a:r>
-              <a:rPr lang="en-US" sz="1000" dirty="0">
+              <a:rPr lang="en-US" sz="950" dirty="0">
                 <a:solidFill>
                   <a:srgbClr val="333333"/>
                 </a:solidFill>
@@ -23749,20 +24515,20 @@
               </a:rPr>
               <a:t>Turbines can power a data center in under a year — the near-term backbone of the buildout.</a:t>
             </a:r>
-            <a:endParaRPr lang="en-US" sz="1000" dirty="0"/>
-          </a:p>
-        </p:txBody>
-      </p:sp>
-      <p:sp>
-        <p:nvSpPr>
-          <p:cNvPr id="11" name="Shape 9"/>
-          <p:cNvSpPr/>
-          <p:nvPr/>
-        </p:nvSpPr>
-        <p:spPr>
-          <a:xfrm>
-            <a:off x="3291840" y="1691640"/>
-            <a:ext cx="2560320" cy="365760"/>
+            <a:endParaRPr lang="en-US" sz="950" dirty="0"/>
+          </a:p>
+        </p:txBody>
+      </p:sp>
+      <p:sp>
+        <p:nvSpPr>
+          <p:cNvPr id="14" name="Shape 12"/>
+          <p:cNvSpPr/>
+          <p:nvPr/>
+        </p:nvSpPr>
+        <p:spPr>
+          <a:xfrm>
+            <a:off x="3291840" y="2194560"/>
+            <a:ext cx="2560320" cy="320040"/>
           </a:xfrm>
           <a:prstGeom prst="rect">
             <a:avLst/>
@@ -23780,14 +24546,14 @@
       </p:sp>
       <p:sp>
         <p:nvSpPr>
-          <p:cNvPr id="12" name="Text 10"/>
-          <p:cNvSpPr/>
-          <p:nvPr/>
-        </p:nvSpPr>
-        <p:spPr>
-          <a:xfrm>
-            <a:off x="3291840" y="1691640"/>
-            <a:ext cx="2560320" cy="365760"/>
+          <p:cNvPr id="15" name="Text 13"/>
+          <p:cNvSpPr/>
+          <p:nvPr/>
+        </p:nvSpPr>
+        <p:spPr>
+          <a:xfrm>
+            <a:off x="3291840" y="2194560"/>
+            <a:ext cx="2560320" cy="320040"/>
           </a:xfrm>
           <a:prstGeom prst="rect">
             <a:avLst/>
@@ -23803,7 +24569,7 @@
               <a:buNone/>
             </a:pPr>
             <a:r>
-              <a:rPr lang="en-US" sz="1200" b="1" spc="200" kern="0" dirty="0">
+              <a:rPr lang="en-US" sz="1150" b="1" spc="200" kern="0" dirty="0">
                 <a:solidFill>
                   <a:srgbClr val="FFFFFF"/>
                 </a:solidFill>
@@ -23813,20 +24579,20 @@
               </a:rPr>
               <a:t>SOLAR &amp; PPAs</a:t>
             </a:r>
-            <a:endParaRPr lang="en-US" sz="1200" dirty="0"/>
-          </a:p>
-        </p:txBody>
-      </p:sp>
-      <p:sp>
-        <p:nvSpPr>
-          <p:cNvPr id="13" name="Shape 11"/>
-          <p:cNvSpPr/>
-          <p:nvPr/>
-        </p:nvSpPr>
-        <p:spPr>
-          <a:xfrm>
-            <a:off x="3291840" y="2057400"/>
-            <a:ext cx="2560320" cy="1234440"/>
+            <a:endParaRPr lang="en-US" sz="1150" dirty="0"/>
+          </a:p>
+        </p:txBody>
+      </p:sp>
+      <p:sp>
+        <p:nvSpPr>
+          <p:cNvPr id="16" name="Shape 14"/>
+          <p:cNvSpPr/>
+          <p:nvPr/>
+        </p:nvSpPr>
+        <p:spPr>
+          <a:xfrm>
+            <a:off x="3291840" y="2514600"/>
+            <a:ext cx="2560320" cy="1051560"/>
           </a:xfrm>
           <a:prstGeom prst="rect">
             <a:avLst/>
@@ -23844,14 +24610,14 @@
       </p:sp>
       <p:sp>
         <p:nvSpPr>
-          <p:cNvPr id="14" name="Text 12"/>
-          <p:cNvSpPr/>
-          <p:nvPr/>
-        </p:nvSpPr>
-        <p:spPr>
-          <a:xfrm>
-            <a:off x="3429000" y="2121408"/>
-            <a:ext cx="2331720" cy="228600"/>
+          <p:cNvPr id="17" name="Text 15"/>
+          <p:cNvSpPr/>
+          <p:nvPr/>
+        </p:nvSpPr>
+        <p:spPr>
+          <a:xfrm>
+            <a:off x="3429000" y="2560320"/>
+            <a:ext cx="2331720" cy="201168"/>
           </a:xfrm>
           <a:prstGeom prst="rect">
             <a:avLst/>
@@ -23883,14 +24649,14 @@
       </p:sp>
       <p:sp>
         <p:nvSpPr>
-          <p:cNvPr id="15" name="Text 13"/>
-          <p:cNvSpPr/>
-          <p:nvPr/>
-        </p:nvSpPr>
-        <p:spPr>
-          <a:xfrm>
-            <a:off x="3429000" y="2359152"/>
-            <a:ext cx="2331720" cy="868680"/>
+          <p:cNvPr id="18" name="Text 16"/>
+          <p:cNvSpPr/>
+          <p:nvPr/>
+        </p:nvSpPr>
+        <p:spPr>
+          <a:xfrm>
+            <a:off x="3429000" y="2761488"/>
+            <a:ext cx="2331720" cy="777240"/>
           </a:xfrm>
           <a:prstGeom prst="rect">
             <a:avLst/>
@@ -23906,7 +24672,7 @@
               <a:buNone/>
             </a:pPr>
             <a:r>
-              <a:rPr lang="en-US" sz="1000" dirty="0">
+              <a:rPr lang="en-US" sz="950" dirty="0">
                 <a:solidFill>
                   <a:srgbClr val="333333"/>
                 </a:solidFill>
@@ -23916,20 +24682,20 @@
               </a:rPr>
               <a:t>Hyperscalers are the largest corporate buyers of renewable energy. Long-term PPAs lock in clean power.</a:t>
             </a:r>
-            <a:endParaRPr lang="en-US" sz="1000" dirty="0"/>
-          </a:p>
-        </p:txBody>
-      </p:sp>
-      <p:sp>
-        <p:nvSpPr>
-          <p:cNvPr id="16" name="Shape 14"/>
-          <p:cNvSpPr/>
-          <p:nvPr/>
-        </p:nvSpPr>
-        <p:spPr>
-          <a:xfrm>
-            <a:off x="6126480" y="1691640"/>
-            <a:ext cx="2560320" cy="365760"/>
+            <a:endParaRPr lang="en-US" sz="950" dirty="0"/>
+          </a:p>
+        </p:txBody>
+      </p:sp>
+      <p:sp>
+        <p:nvSpPr>
+          <p:cNvPr id="19" name="Shape 17"/>
+          <p:cNvSpPr/>
+          <p:nvPr/>
+        </p:nvSpPr>
+        <p:spPr>
+          <a:xfrm>
+            <a:off x="6126480" y="2194560"/>
+            <a:ext cx="2560320" cy="320040"/>
           </a:xfrm>
           <a:prstGeom prst="rect">
             <a:avLst/>
@@ -23947,14 +24713,14 @@
       </p:sp>
       <p:sp>
         <p:nvSpPr>
-          <p:cNvPr id="17" name="Text 15"/>
-          <p:cNvSpPr/>
-          <p:nvPr/>
-        </p:nvSpPr>
-        <p:spPr>
-          <a:xfrm>
-            <a:off x="6126480" y="1691640"/>
-            <a:ext cx="2560320" cy="365760"/>
+          <p:cNvPr id="20" name="Text 18"/>
+          <p:cNvSpPr/>
+          <p:nvPr/>
+        </p:nvSpPr>
+        <p:spPr>
+          <a:xfrm>
+            <a:off x="6126480" y="2194560"/>
+            <a:ext cx="2560320" cy="320040"/>
           </a:xfrm>
           <a:prstGeom prst="rect">
             <a:avLst/>
@@ -23970,7 +24736,7 @@
               <a:buNone/>
             </a:pPr>
             <a:r>
-              <a:rPr lang="en-US" sz="1200" b="1" spc="200" kern="0" dirty="0">
+              <a:rPr lang="en-US" sz="1150" b="1" spc="200" kern="0" dirty="0">
                 <a:solidFill>
                   <a:srgbClr val="FFFFFF"/>
                 </a:solidFill>
@@ -23980,20 +24746,20 @@
               </a:rPr>
               <a:t>GRID &amp; INTERCONNECT</a:t>
             </a:r>
-            <a:endParaRPr lang="en-US" sz="1200" dirty="0"/>
-          </a:p>
-        </p:txBody>
-      </p:sp>
-      <p:sp>
-        <p:nvSpPr>
-          <p:cNvPr id="18" name="Shape 16"/>
-          <p:cNvSpPr/>
-          <p:nvPr/>
-        </p:nvSpPr>
-        <p:spPr>
-          <a:xfrm>
-            <a:off x="6126480" y="2057400"/>
-            <a:ext cx="2560320" cy="1234440"/>
+            <a:endParaRPr lang="en-US" sz="1150" dirty="0"/>
+          </a:p>
+        </p:txBody>
+      </p:sp>
+      <p:sp>
+        <p:nvSpPr>
+          <p:cNvPr id="21" name="Shape 19"/>
+          <p:cNvSpPr/>
+          <p:nvPr/>
+        </p:nvSpPr>
+        <p:spPr>
+          <a:xfrm>
+            <a:off x="6126480" y="2514600"/>
+            <a:ext cx="2560320" cy="1051560"/>
           </a:xfrm>
           <a:prstGeom prst="rect">
             <a:avLst/>
@@ -24011,14 +24777,14 @@
       </p:sp>
       <p:sp>
         <p:nvSpPr>
-          <p:cNvPr id="19" name="Text 17"/>
-          <p:cNvSpPr/>
-          <p:nvPr/>
-        </p:nvSpPr>
-        <p:spPr>
-          <a:xfrm>
-            <a:off x="6263640" y="2121408"/>
-            <a:ext cx="2331720" cy="228600"/>
+          <p:cNvPr id="22" name="Text 20"/>
+          <p:cNvSpPr/>
+          <p:nvPr/>
+        </p:nvSpPr>
+        <p:spPr>
+          <a:xfrm>
+            <a:off x="6263640" y="2560320"/>
+            <a:ext cx="2331720" cy="201168"/>
           </a:xfrm>
           <a:prstGeom prst="rect">
             <a:avLst/>
@@ -24050,14 +24816,14 @@
       </p:sp>
       <p:sp>
         <p:nvSpPr>
-          <p:cNvPr id="20" name="Text 18"/>
-          <p:cNvSpPr/>
-          <p:nvPr/>
-        </p:nvSpPr>
-        <p:spPr>
-          <a:xfrm>
-            <a:off x="6263640" y="2359152"/>
-            <a:ext cx="2331720" cy="868680"/>
+          <p:cNvPr id="23" name="Text 21"/>
+          <p:cNvSpPr/>
+          <p:nvPr/>
+        </p:nvSpPr>
+        <p:spPr>
+          <a:xfrm>
+            <a:off x="6263640" y="2761488"/>
+            <a:ext cx="2331720" cy="777240"/>
           </a:xfrm>
           <a:prstGeom prst="rect">
             <a:avLst/>
@@ -24073,7 +24839,7 @@
               <a:buNone/>
             </a:pPr>
             <a:r>
-              <a:rPr lang="en-US" sz="1000" dirty="0">
+              <a:rPr lang="en-US" sz="950" dirty="0">
                 <a:solidFill>
                   <a:srgbClr val="333333"/>
                 </a:solidFill>
@@ -24083,20 +24849,20 @@
               </a:rPr>
               <a:t>Interconnection queues take years. Grid build is the binding constraint on deployment speed.</a:t>
             </a:r>
-            <a:endParaRPr lang="en-US" sz="1000" dirty="0"/>
-          </a:p>
-        </p:txBody>
-      </p:sp>
-      <p:sp>
-        <p:nvSpPr>
-          <p:cNvPr id="21" name="Shape 19"/>
-          <p:cNvSpPr/>
-          <p:nvPr/>
-        </p:nvSpPr>
-        <p:spPr>
-          <a:xfrm>
-            <a:off x="457200" y="3429000"/>
-            <a:ext cx="8229600" cy="502920"/>
+            <a:endParaRPr lang="en-US" sz="950" dirty="0"/>
+          </a:p>
+        </p:txBody>
+      </p:sp>
+      <p:sp>
+        <p:nvSpPr>
+          <p:cNvPr id="24" name="Shape 22"/>
+          <p:cNvSpPr/>
+          <p:nvPr/>
+        </p:nvSpPr>
+        <p:spPr>
+          <a:xfrm>
+            <a:off x="457200" y="3657600"/>
+            <a:ext cx="8229600" cy="320040"/>
           </a:xfrm>
           <a:prstGeom prst="rect">
             <a:avLst/>
@@ -24114,14 +24880,14 @@
       </p:sp>
       <p:sp>
         <p:nvSpPr>
-          <p:cNvPr id="22" name="Text 20"/>
-          <p:cNvSpPr/>
-          <p:nvPr/>
-        </p:nvSpPr>
-        <p:spPr>
-          <a:xfrm>
-            <a:off x="640080" y="3429000"/>
-            <a:ext cx="7863840" cy="502920"/>
+          <p:cNvPr id="25" name="Text 23"/>
+          <p:cNvSpPr/>
+          <p:nvPr/>
+        </p:nvSpPr>
+        <p:spPr>
+          <a:xfrm>
+            <a:off x="640080" y="3657600"/>
+            <a:ext cx="7863840" cy="320040"/>
           </a:xfrm>
           <a:prstGeom prst="rect">
             <a:avLst/>
@@ -24137,7 +24903,7 @@
               <a:buNone/>
             </a:pPr>
             <a:r>
-              <a:rPr lang="en-US" sz="1050" b="1" dirty="0">
+              <a:rPr lang="en-US" sz="1000" b="1" dirty="0">
                 <a:solidFill>
                   <a:srgbClr val="FFFFFF"/>
                 </a:solidFill>
@@ -24145,15 +24911,15 @@
                 <a:ea typeface="Arial" pitchFamily="34" charset="-122"/>
                 <a:cs typeface="Arial" pitchFamily="34" charset="-120"/>
               </a:rPr>
-              <a:t>EMERGING: Small modular reactors (SMR pipeline) and geothermal sit behind gas and solar — but they are the only sources that credibly scale past 2030 without constraining grid reliability.</a:t>
-            </a:r>
-            <a:endParaRPr lang="en-US" sz="1050" dirty="0"/>
-          </a:p>
-        </p:txBody>
-      </p:sp>
-      <p:sp>
-        <p:nvSpPr>
-          <p:cNvPr id="23" name="Text 21"/>
+              <a:t>EMERGING: Small modular reactors (SMR pipeline) and geothermal sit behind gas and solar — the only sources credibly scaling past 2030 without straining grid reliability.</a:t>
+            </a:r>
+            <a:endParaRPr lang="en-US" sz="1000" dirty="0"/>
+          </a:p>
+        </p:txBody>
+      </p:sp>
+      <p:sp>
+        <p:nvSpPr>
+          <p:cNvPr id="26" name="Text 24"/>
           <p:cNvSpPr/>
           <p:nvPr/>
         </p:nvSpPr>
@@ -24192,7 +24958,7 @@
       </p:sp>
       <p:sp>
         <p:nvSpPr>
-          <p:cNvPr id="24" name="Shape 22"/>
+          <p:cNvPr id="27" name="Shape 25"/>
           <p:cNvSpPr/>
           <p:nvPr/>
         </p:nvSpPr>
@@ -24217,7 +24983,7 @@
       </p:sp>
       <p:sp>
         <p:nvSpPr>
-          <p:cNvPr id="25" name="Text 23"/>
+          <p:cNvPr id="28" name="Text 26"/>
           <p:cNvSpPr/>
           <p:nvPr/>
         </p:nvSpPr>
@@ -24256,7 +25022,7 @@
       </p:sp>
       <p:sp>
         <p:nvSpPr>
-          <p:cNvPr id="26" name="Text 24"/>
+          <p:cNvPr id="29" name="Text 27"/>
           <p:cNvSpPr/>
           <p:nvPr/>
         </p:nvSpPr>
@@ -24456,7 +25222,7 @@
                 <a:ea typeface="Arial" pitchFamily="34" charset="-122"/>
                 <a:cs typeface="Arial" pitchFamily="34" charset="-120"/>
               </a:rPr>
-              <a:t>The Big 5 hyperscalers drive $685B. But neoclouds, sovereigns, labs, and enterprises are now material — not just the original four.</a:t>
+              <a:t>The Big 5 hyperscalers drive ~$750B. But neoclouds, sovereigns, labs, and enterprises are now material — not just the original four.</a:t>
             </a:r>
             <a:endParaRPr lang="en-US" sz="1350" dirty="0"/>
           </a:p>
@@ -24465,6 +25231,29 @@
       <p:sp>
         <p:nvSpPr>
           <p:cNvPr id="6" name="Shape 4"/>
+          <p:cNvSpPr/>
+          <p:nvPr/>
+        </p:nvSpPr>
+        <p:spPr>
+          <a:xfrm>
+            <a:off x="457200" y="1325880"/>
+            <a:ext cx="8229600" cy="0"/>
+          </a:xfrm>
+          <a:prstGeom prst="line">
+            <a:avLst/>
+          </a:prstGeom>
+          <a:noFill/>
+          <a:ln w="9525">
+            <a:solidFill>
+              <a:srgbClr val="E5E5E5"/>
+            </a:solidFill>
+            <a:prstDash val="solid"/>
+          </a:ln>
+        </p:spPr>
+      </p:sp>
+      <p:sp>
+        <p:nvSpPr>
+          <p:cNvPr id="7" name="Shape 5"/>
           <p:cNvSpPr/>
           <p:nvPr/>
         </p:nvSpPr>
@@ -24489,7 +25278,7 @@
       </p:sp>
       <p:sp>
         <p:nvSpPr>
-          <p:cNvPr id="7" name="Shape 5"/>
+          <p:cNvPr id="8" name="Shape 6"/>
           <p:cNvSpPr/>
           <p:nvPr/>
         </p:nvSpPr>
@@ -24514,7 +25303,7 @@
       </p:sp>
       <p:sp>
         <p:nvSpPr>
-          <p:cNvPr id="8" name="Text 6"/>
+          <p:cNvPr id="9" name="Text 7"/>
           <p:cNvSpPr/>
           <p:nvPr/>
         </p:nvSpPr>
@@ -24553,7 +25342,7 @@
       </p:sp>
       <p:sp>
         <p:nvSpPr>
-          <p:cNvPr id="9" name="Text 7"/>
+          <p:cNvPr id="10" name="Text 8"/>
           <p:cNvSpPr/>
           <p:nvPr/>
         </p:nvSpPr>
@@ -24584,7 +25373,7 @@
                 <a:ea typeface="Arial Black" pitchFamily="34" charset="-122"/>
                 <a:cs typeface="Arial Black" pitchFamily="34" charset="-120"/>
               </a:rPr>
-              <a:t>$685B</a:t>
+              <a:t>~$750B</a:t>
             </a:r>
             <a:endParaRPr lang="en-US" sz="2200" dirty="0"/>
           </a:p>
@@ -24592,7 +25381,7 @@
       </p:sp>
       <p:sp>
         <p:nvSpPr>
-          <p:cNvPr id="10" name="Text 8"/>
+          <p:cNvPr id="11" name="Text 9"/>
           <p:cNvSpPr/>
           <p:nvPr/>
         </p:nvSpPr>
@@ -24631,7 +25420,7 @@
       </p:sp>
       <p:sp>
         <p:nvSpPr>
-          <p:cNvPr id="11" name="Shape 9"/>
+          <p:cNvPr id="12" name="Shape 10"/>
           <p:cNvSpPr/>
           <p:nvPr/>
         </p:nvSpPr>
@@ -24654,7 +25443,7 @@
       </p:sp>
       <p:sp>
         <p:nvSpPr>
-          <p:cNvPr id="12" name="Text 10"/>
+          <p:cNvPr id="13" name="Text 11"/>
           <p:cNvSpPr/>
           <p:nvPr/>
         </p:nvSpPr>
@@ -24685,7 +25474,7 @@
                 <a:ea typeface="Arial" pitchFamily="34" charset="-122"/>
                 <a:cs typeface="Arial" pitchFamily="34" charset="-120"/>
               </a:rPr>
-              <a:t>AMZN $200B · GOOGL $175–185B · MSFT $120–145B · META $115–135B · ORCL ~$50B</a:t>
+              <a:t>AMZN ~$200B · GOOGL ~$200B · MSFT ~$150B · META ~$120B · ORCL ~$80B</a:t>
             </a:r>
             <a:endParaRPr lang="en-US" sz="800" dirty="0"/>
           </a:p>
@@ -24693,7 +25482,7 @@
       </p:sp>
       <p:sp>
         <p:nvSpPr>
-          <p:cNvPr id="13" name="Shape 11"/>
+          <p:cNvPr id="14" name="Shape 12"/>
           <p:cNvSpPr/>
           <p:nvPr/>
         </p:nvSpPr>
@@ -24718,7 +25507,7 @@
       </p:sp>
       <p:sp>
         <p:nvSpPr>
-          <p:cNvPr id="14" name="Shape 12"/>
+          <p:cNvPr id="15" name="Shape 13"/>
           <p:cNvSpPr/>
           <p:nvPr/>
         </p:nvSpPr>
@@ -24743,7 +25532,7 @@
       </p:sp>
       <p:sp>
         <p:nvSpPr>
-          <p:cNvPr id="15" name="Text 13"/>
+          <p:cNvPr id="16" name="Text 14"/>
           <p:cNvSpPr/>
           <p:nvPr/>
         </p:nvSpPr>
@@ -24782,7 +25571,7 @@
       </p:sp>
       <p:sp>
         <p:nvSpPr>
-          <p:cNvPr id="16" name="Text 14"/>
+          <p:cNvPr id="17" name="Text 15"/>
           <p:cNvSpPr/>
           <p:nvPr/>
         </p:nvSpPr>
@@ -24821,7 +25610,7 @@
       </p:sp>
       <p:sp>
         <p:nvSpPr>
-          <p:cNvPr id="17" name="Text 15"/>
+          <p:cNvPr id="18" name="Text 16"/>
           <p:cNvSpPr/>
           <p:nvPr/>
         </p:nvSpPr>
@@ -24860,7 +25649,7 @@
       </p:sp>
       <p:sp>
         <p:nvSpPr>
-          <p:cNvPr id="18" name="Shape 16"/>
+          <p:cNvPr id="19" name="Shape 17"/>
           <p:cNvSpPr/>
           <p:nvPr/>
         </p:nvSpPr>
@@ -24883,7 +25672,7 @@
       </p:sp>
       <p:sp>
         <p:nvSpPr>
-          <p:cNvPr id="19" name="Text 17"/>
+          <p:cNvPr id="20" name="Text 18"/>
           <p:cNvSpPr/>
           <p:nvPr/>
         </p:nvSpPr>
@@ -24922,7 +25711,7 @@
       </p:sp>
       <p:sp>
         <p:nvSpPr>
-          <p:cNvPr id="20" name="Shape 18"/>
+          <p:cNvPr id="21" name="Shape 19"/>
           <p:cNvSpPr/>
           <p:nvPr/>
         </p:nvSpPr>
@@ -24947,7 +25736,7 @@
       </p:sp>
       <p:sp>
         <p:nvSpPr>
-          <p:cNvPr id="21" name="Shape 19"/>
+          <p:cNvPr id="22" name="Shape 20"/>
           <p:cNvSpPr/>
           <p:nvPr/>
         </p:nvSpPr>
@@ -24972,7 +25761,7 @@
       </p:sp>
       <p:sp>
         <p:nvSpPr>
-          <p:cNvPr id="22" name="Text 20"/>
+          <p:cNvPr id="23" name="Text 21"/>
           <p:cNvSpPr/>
           <p:nvPr/>
         </p:nvSpPr>
@@ -25011,7 +25800,7 @@
       </p:sp>
       <p:sp>
         <p:nvSpPr>
-          <p:cNvPr id="23" name="Text 21"/>
+          <p:cNvPr id="24" name="Text 22"/>
           <p:cNvSpPr/>
           <p:nvPr/>
         </p:nvSpPr>
@@ -25050,7 +25839,7 @@
       </p:sp>
       <p:sp>
         <p:nvSpPr>
-          <p:cNvPr id="24" name="Text 22"/>
+          <p:cNvPr id="25" name="Text 23"/>
           <p:cNvSpPr/>
           <p:nvPr/>
         </p:nvSpPr>
@@ -25089,7 +25878,7 @@
       </p:sp>
       <p:sp>
         <p:nvSpPr>
-          <p:cNvPr id="25" name="Shape 23"/>
+          <p:cNvPr id="26" name="Shape 24"/>
           <p:cNvSpPr/>
           <p:nvPr/>
         </p:nvSpPr>
@@ -25112,7 +25901,7 @@
       </p:sp>
       <p:sp>
         <p:nvSpPr>
-          <p:cNvPr id="26" name="Text 24"/>
+          <p:cNvPr id="27" name="Text 25"/>
           <p:cNvSpPr/>
           <p:nvPr/>
         </p:nvSpPr>
@@ -25151,7 +25940,7 @@
       </p:sp>
       <p:sp>
         <p:nvSpPr>
-          <p:cNvPr id="27" name="Shape 25"/>
+          <p:cNvPr id="28" name="Shape 26"/>
           <p:cNvSpPr/>
           <p:nvPr/>
         </p:nvSpPr>
@@ -25176,7 +25965,7 @@
       </p:sp>
       <p:sp>
         <p:nvSpPr>
-          <p:cNvPr id="28" name="Shape 26"/>
+          <p:cNvPr id="29" name="Shape 27"/>
           <p:cNvSpPr/>
           <p:nvPr/>
         </p:nvSpPr>
@@ -25201,7 +25990,7 @@
       </p:sp>
       <p:sp>
         <p:nvSpPr>
-          <p:cNvPr id="29" name="Text 27"/>
+          <p:cNvPr id="30" name="Text 28"/>
           <p:cNvSpPr/>
           <p:nvPr/>
         </p:nvSpPr>
@@ -25240,7 +26029,7 @@
       </p:sp>
       <p:sp>
         <p:nvSpPr>
-          <p:cNvPr id="30" name="Text 28"/>
+          <p:cNvPr id="31" name="Text 29"/>
           <p:cNvSpPr/>
           <p:nvPr/>
         </p:nvSpPr>
@@ -25279,7 +26068,7 @@
       </p:sp>
       <p:sp>
         <p:nvSpPr>
-          <p:cNvPr id="31" name="Text 29"/>
+          <p:cNvPr id="32" name="Text 30"/>
           <p:cNvSpPr/>
           <p:nvPr/>
         </p:nvSpPr>
@@ -25318,7 +26107,7 @@
       </p:sp>
       <p:sp>
         <p:nvSpPr>
-          <p:cNvPr id="32" name="Shape 30"/>
+          <p:cNvPr id="33" name="Shape 31"/>
           <p:cNvSpPr/>
           <p:nvPr/>
         </p:nvSpPr>
@@ -25341,7 +26130,7 @@
       </p:sp>
       <p:sp>
         <p:nvSpPr>
-          <p:cNvPr id="33" name="Text 31"/>
+          <p:cNvPr id="34" name="Text 32"/>
           <p:cNvSpPr/>
           <p:nvPr/>
         </p:nvSpPr>
@@ -25380,7 +26169,7 @@
       </p:sp>
       <p:sp>
         <p:nvSpPr>
-          <p:cNvPr id="34" name="Shape 32"/>
+          <p:cNvPr id="35" name="Shape 33"/>
           <p:cNvSpPr/>
           <p:nvPr/>
         </p:nvSpPr>
@@ -25405,7 +26194,7 @@
       </p:sp>
       <p:sp>
         <p:nvSpPr>
-          <p:cNvPr id="35" name="Shape 33"/>
+          <p:cNvPr id="36" name="Shape 34"/>
           <p:cNvSpPr/>
           <p:nvPr/>
         </p:nvSpPr>
@@ -25430,7 +26219,7 @@
       </p:sp>
       <p:sp>
         <p:nvSpPr>
-          <p:cNvPr id="36" name="Text 34"/>
+          <p:cNvPr id="37" name="Text 35"/>
           <p:cNvSpPr/>
           <p:nvPr/>
         </p:nvSpPr>
@@ -25469,7 +26258,7 @@
       </p:sp>
       <p:sp>
         <p:nvSpPr>
-          <p:cNvPr id="37" name="Text 35"/>
+          <p:cNvPr id="38" name="Text 36"/>
           <p:cNvSpPr/>
           <p:nvPr/>
         </p:nvSpPr>
@@ -25508,7 +26297,7 @@
       </p:sp>
       <p:sp>
         <p:nvSpPr>
-          <p:cNvPr id="38" name="Text 36"/>
+          <p:cNvPr id="39" name="Text 37"/>
           <p:cNvSpPr/>
           <p:nvPr/>
         </p:nvSpPr>
@@ -25547,7 +26336,7 @@
       </p:sp>
       <p:sp>
         <p:nvSpPr>
-          <p:cNvPr id="39" name="Shape 37"/>
+          <p:cNvPr id="40" name="Shape 38"/>
           <p:cNvSpPr/>
           <p:nvPr/>
         </p:nvSpPr>
@@ -25570,7 +26359,7 @@
       </p:sp>
       <p:sp>
         <p:nvSpPr>
-          <p:cNvPr id="40" name="Text 38"/>
+          <p:cNvPr id="41" name="Text 39"/>
           <p:cNvSpPr/>
           <p:nvPr/>
         </p:nvSpPr>
@@ -25609,7 +26398,7 @@
       </p:sp>
       <p:sp>
         <p:nvSpPr>
-          <p:cNvPr id="41" name="Text 39"/>
+          <p:cNvPr id="42" name="Text 40"/>
           <p:cNvSpPr/>
           <p:nvPr/>
         </p:nvSpPr>
@@ -25640,7 +26429,7 @@
                 <a:ea typeface="Arial" pitchFamily="34" charset="-122"/>
                 <a:cs typeface="Arial" pitchFamily="34" charset="-120"/>
               </a:rPr>
-              <a:t>Source: Q4 2025 company earnings calls; sovereign AI announcements; CoreWeave, Lambda, Crusoe, Vultr filings.</a:t>
+              <a:t>Sources: CreditSights / MUFG hyperscaler capex 2026 estimates (Apr 2026 consensus); sovereign AI announcements; CoreWeave, Lambda, Crusoe, Vultr filings.</a:t>
             </a:r>
             <a:endParaRPr lang="en-US" sz="700" dirty="0"/>
           </a:p>
@@ -25648,7 +26437,7 @@
       </p:sp>
       <p:sp>
         <p:nvSpPr>
-          <p:cNvPr id="42" name="Shape 40"/>
+          <p:cNvPr id="43" name="Shape 41"/>
           <p:cNvSpPr/>
           <p:nvPr/>
         </p:nvSpPr>
@@ -25673,7 +26462,7 @@
       </p:sp>
       <p:sp>
         <p:nvSpPr>
-          <p:cNvPr id="43" name="Text 41"/>
+          <p:cNvPr id="44" name="Text 42"/>
           <p:cNvSpPr/>
           <p:nvPr/>
         </p:nvSpPr>
@@ -25712,7 +26501,7 @@
       </p:sp>
       <p:sp>
         <p:nvSpPr>
-          <p:cNvPr id="44" name="Text 42"/>
+          <p:cNvPr id="45" name="Text 43"/>
           <p:cNvSpPr/>
           <p:nvPr/>
         </p:nvSpPr>
@@ -25873,7 +26662,7 @@
                 <a:ea typeface="Arial Black" pitchFamily="34" charset="-122"/>
                 <a:cs typeface="Arial Black" pitchFamily="34" charset="-120"/>
               </a:rPr>
-              <a:t>Anatomy of a $975B market.</a:t>
+              <a:t>Anatomy of a ~$975B market.</a:t>
             </a:r>
             <a:endParaRPr lang="en-US" sz="2700" dirty="0"/>
           </a:p>
@@ -25912,7 +26701,7 @@
                 <a:ea typeface="Arial" pitchFamily="34" charset="-122"/>
                 <a:cs typeface="Arial" pitchFamily="34" charset="-120"/>
               </a:rPr>
-              <a:t>AI has flipped the engine. Logic and memory — 70% of the industry — now drive the whole thing. Analog and micros are along for the ride.</a:t>
+              <a:t>AI has flipped the engine. Logic and memory — ~60% of the industry — now drive the whole thing. Analog and micros are along for the ride.</a:t>
             </a:r>
             <a:endParaRPr lang="en-US" sz="1350" dirty="0"/>
           </a:p>
@@ -25920,7 +26709,30 @@
       </p:sp>
       <p:sp>
         <p:nvSpPr>
-          <p:cNvPr id="6" name="Text 4"/>
+          <p:cNvPr id="6" name="Shape 4"/>
+          <p:cNvSpPr/>
+          <p:nvPr/>
+        </p:nvSpPr>
+        <p:spPr>
+          <a:xfrm>
+            <a:off x="457200" y="1325880"/>
+            <a:ext cx="8229600" cy="0"/>
+          </a:xfrm>
+          <a:prstGeom prst="line">
+            <a:avLst/>
+          </a:prstGeom>
+          <a:noFill/>
+          <a:ln w="9525">
+            <a:solidFill>
+              <a:srgbClr val="E5E5E5"/>
+            </a:solidFill>
+            <a:prstDash val="solid"/>
+          </a:ln>
+        </p:spPr>
+      </p:sp>
+      <p:sp>
+        <p:nvSpPr>
+          <p:cNvPr id="7" name="Text 5"/>
           <p:cNvSpPr/>
           <p:nvPr/>
         </p:nvSpPr>
@@ -25959,7 +26771,7 @@
       </p:sp>
       <p:sp>
         <p:nvSpPr>
-          <p:cNvPr id="7" name="Shape 5"/>
+          <p:cNvPr id="8" name="Shape 6"/>
           <p:cNvSpPr/>
           <p:nvPr/>
         </p:nvSpPr>
@@ -25982,7 +26794,7 @@
       </p:sp>
       <p:graphicFrame>
         <p:nvGraphicFramePr>
-          <p:cNvPr id="8" name="Chart 0" descr=""/>
+          <p:cNvPr id="9" name="Chart 0" descr=""/>
           <p:cNvGraphicFramePr/>
           <p:nvPr/>
         </p:nvGraphicFramePr>
@@ -25998,7 +26810,7 @@
       </p:graphicFrame>
       <p:sp>
         <p:nvSpPr>
-          <p:cNvPr id="9" name="Text 6"/>
+          <p:cNvPr id="10" name="Text 7"/>
           <p:cNvSpPr/>
           <p:nvPr/>
         </p:nvSpPr>
@@ -26037,7 +26849,7 @@
       </p:sp>
       <p:sp>
         <p:nvSpPr>
-          <p:cNvPr id="10" name="Shape 7"/>
+          <p:cNvPr id="11" name="Shape 8"/>
           <p:cNvSpPr/>
           <p:nvPr/>
         </p:nvSpPr>
@@ -26445,7 +27257,7 @@
                           <a:ea typeface="Arial" pitchFamily="34" charset="-122"/>
                           <a:cs typeface="Arial" pitchFamily="34" charset="-120"/>
                         </a:rPr>
-                        <a:t>FY26 rev, +65% YoY</a:t>
+                        <a:t>FY26 rev, +65% YoY (actual)</a:t>
                       </a:r>
                       <a:endParaRPr lang="en-US" sz="950" dirty="0">
                         <a:latin typeface="Arial" charset="0"/>
@@ -26515,7 +27327,7 @@
                           <a:ea typeface="Arial" pitchFamily="34" charset="-122"/>
                           <a:cs typeface="Arial" pitchFamily="34" charset="-120"/>
                         </a:rPr>
-                        <a:t>TSMC</a:t>
+                        <a:t>NVIDIA</a:t>
                       </a:r>
                       <a:endParaRPr lang="en-US" sz="950" dirty="0">
                         <a:latin typeface="Arial" charset="0"/>
@@ -26583,7 +27395,7 @@
                           <a:ea typeface="Arial" pitchFamily="34" charset="-122"/>
                           <a:cs typeface="Arial" pitchFamily="34" charset="-120"/>
                         </a:rPr>
-                        <a:t>~$122B</a:t>
+                        <a:t>$78B</a:t>
                       </a:r>
                       <a:endParaRPr lang="en-US" sz="950" dirty="0">
                         <a:latin typeface="Arial" charset="0"/>
@@ -26651,7 +27463,7 @@
                           <a:ea typeface="Arial" pitchFamily="34" charset="-122"/>
                           <a:cs typeface="Arial" pitchFamily="34" charset="-120"/>
                         </a:rPr>
-                        <a:t>~90% of advanced-node supply</a:t>
+                        <a:t>Q1 FY27 rev guide (Feb)</a:t>
                       </a:r>
                       <a:endParaRPr lang="en-US" sz="950" dirty="0">
                         <a:latin typeface="Arial" charset="0"/>
@@ -26721,7 +27533,7 @@
                           <a:ea typeface="Arial" pitchFamily="34" charset="-122"/>
                           <a:cs typeface="Arial" pitchFamily="34" charset="-120"/>
                         </a:rPr>
-                        <a:t>SK Hynix</a:t>
+                        <a:t>TSMC</a:t>
                       </a:r>
                       <a:endParaRPr lang="en-US" sz="950" dirty="0">
                         <a:latin typeface="Arial" charset="0"/>
@@ -26789,7 +27601,7 @@
                           <a:ea typeface="Arial" pitchFamily="34" charset="-122"/>
                           <a:cs typeface="Arial" pitchFamily="34" charset="-120"/>
                         </a:rPr>
-                        <a:t>58%</a:t>
+                        <a:t>~90%</a:t>
                       </a:r>
                       <a:endParaRPr lang="en-US" sz="950" dirty="0">
                         <a:latin typeface="Arial" charset="0"/>
@@ -26857,7 +27669,7 @@
                           <a:ea typeface="Arial" pitchFamily="34" charset="-122"/>
                           <a:cs typeface="Arial" pitchFamily="34" charset="-120"/>
                         </a:rPr>
-                        <a:t>Q4'25 op margin; HBM leader</a:t>
+                        <a:t>of advanced-node supply</a:t>
                       </a:r>
                       <a:endParaRPr lang="en-US" sz="950" dirty="0">
                         <a:latin typeface="Arial" charset="0"/>
@@ -26927,7 +27739,7 @@
                           <a:ea typeface="Arial" pitchFamily="34" charset="-122"/>
                           <a:cs typeface="Arial" pitchFamily="34" charset="-120"/>
                         </a:rPr>
-                        <a:t>ASML</a:t>
+                        <a:t>SK Hynix</a:t>
                       </a:r>
                       <a:endParaRPr lang="en-US" sz="950" dirty="0">
                         <a:latin typeface="Arial" charset="0"/>
@@ -26995,7 +27807,7 @@
                           <a:ea typeface="Arial" pitchFamily="34" charset="-122"/>
                           <a:cs typeface="Arial" pitchFamily="34" charset="-120"/>
                         </a:rPr>
-                        <a:t>&lt;100/yr</a:t>
+                        <a:t>62%</a:t>
                       </a:r>
                       <a:endParaRPr lang="en-US" sz="950" dirty="0">
                         <a:latin typeface="Arial" charset="0"/>
@@ -27063,7 +27875,7 @@
                           <a:ea typeface="Arial" pitchFamily="34" charset="-122"/>
                           <a:cs typeface="Arial" pitchFamily="34" charset="-120"/>
                         </a:rPr>
-                        <a:t>EUV machines built per year</a:t>
+                        <a:t>HBM share; HBM4 to 70% for Rubin</a:t>
                       </a:r>
                       <a:endParaRPr lang="en-US" sz="950" dirty="0">
                         <a:latin typeface="Arial" charset="0"/>
@@ -27133,7 +27945,7 @@
                           <a:ea typeface="Arial" pitchFamily="34" charset="-122"/>
                           <a:cs typeface="Arial" pitchFamily="34" charset="-120"/>
                         </a:rPr>
-                        <a:t>Broadcom</a:t>
+                        <a:t>ASML</a:t>
                       </a:r>
                       <a:endParaRPr lang="en-US" sz="950" dirty="0">
                         <a:latin typeface="Arial" charset="0"/>
@@ -27201,7 +28013,7 @@
                           <a:ea typeface="Arial" pitchFamily="34" charset="-122"/>
                           <a:cs typeface="Arial" pitchFamily="34" charset="-120"/>
                         </a:rPr>
-                        <a:t>Leader</a:t>
+                        <a:t>&lt;100/yr</a:t>
                       </a:r>
                       <a:endParaRPr lang="en-US" sz="950" dirty="0">
                         <a:latin typeface="Arial" charset="0"/>
@@ -27269,7 +28081,7 @@
                           <a:ea typeface="Arial" pitchFamily="34" charset="-122"/>
                           <a:cs typeface="Arial" pitchFamily="34" charset="-120"/>
                         </a:rPr>
-                        <a:t>Custom ASIC for hyperscalers</a:t>
+                        <a:t>EUV machines built per year</a:t>
                       </a:r>
                       <a:endParaRPr lang="en-US" sz="950" dirty="0">
                         <a:latin typeface="Arial" charset="0"/>
@@ -27327,7 +28139,7 @@
       </p:graphicFrame>
       <p:sp>
         <p:nvSpPr>
-          <p:cNvPr id="12" name="Shape 8"/>
+          <p:cNvPr id="13" name="Shape 9"/>
           <p:cNvSpPr/>
           <p:nvPr/>
         </p:nvSpPr>
@@ -27352,7 +28164,7 @@
       </p:sp>
       <p:sp>
         <p:nvSpPr>
-          <p:cNvPr id="13" name="Text 9"/>
+          <p:cNvPr id="14" name="Text 10"/>
           <p:cNvSpPr/>
           <p:nvPr/>
         </p:nvSpPr>
@@ -27383,7 +28195,7 @@
                 <a:ea typeface="Arial" pitchFamily="34" charset="-122"/>
                 <a:cs typeface="Arial" pitchFamily="34" charset="-120"/>
               </a:rPr>
-              <a:t>$975B total revenue, +25% YoY. Logic + memory = $685B — the same number as hyperscaler capex. Not a coincidence.</a:t>
+              <a:t>$975B total revenue, +26% YoY. Logic + memory = ~$600B — tracking hyperscaler capex almost dollar-for-dollar. Not a coincidence.</a:t>
             </a:r>
             <a:endParaRPr lang="en-US" sz="1250" dirty="0"/>
           </a:p>
@@ -27391,7 +28203,7 @@
       </p:sp>
       <p:sp>
         <p:nvSpPr>
-          <p:cNvPr id="14" name="Text 10"/>
+          <p:cNvPr id="15" name="Text 11"/>
           <p:cNvSpPr/>
           <p:nvPr/>
         </p:nvSpPr>
@@ -27422,7 +28234,7 @@
                 <a:ea typeface="Arial" pitchFamily="34" charset="-122"/>
                 <a:cs typeface="Arial" pitchFamily="34" charset="-120"/>
               </a:rPr>
-              <a:t>Source: NVIDIA FY2026 10-K; TSMC, SK Hynix filings; TrendForce; ASML annual capacity guidance.</a:t>
+              <a:t>Sources: WSTS Fall 2025 forecast; SIA; NVIDIA FY2026 10-K (Jan 2026); TSMC, SK Hynix filings; TrendForce; ASML annual capacity guidance.</a:t>
             </a:r>
             <a:endParaRPr lang="en-US" sz="700" dirty="0"/>
           </a:p>
@@ -27430,7 +28242,7 @@
       </p:sp>
       <p:sp>
         <p:nvSpPr>
-          <p:cNvPr id="15" name="Shape 11"/>
+          <p:cNvPr id="16" name="Shape 12"/>
           <p:cNvSpPr/>
           <p:nvPr/>
         </p:nvSpPr>
@@ -27455,7 +28267,7 @@
       </p:sp>
       <p:sp>
         <p:nvSpPr>
-          <p:cNvPr id="16" name="Text 12"/>
+          <p:cNvPr id="17" name="Text 13"/>
           <p:cNvSpPr/>
           <p:nvPr/>
         </p:nvSpPr>
@@ -27494,7 +28306,7 @@
       </p:sp>
       <p:sp>
         <p:nvSpPr>
-          <p:cNvPr id="17" name="Text 13"/>
+          <p:cNvPr id="18" name="Text 14"/>
           <p:cNvSpPr/>
           <p:nvPr/>
         </p:nvSpPr>

--- a/ai-markets-deck.pptx
+++ b/ai-markets-deck.pptx
@@ -5282,8 +5282,8 @@
         </p:nvSpPr>
         <p:spPr>
           <a:xfrm>
-            <a:off x="5852160" y="822960"/>
-            <a:ext cx="2926080" cy="4389120"/>
+            <a:off x="5760720" y="1463040"/>
+            <a:ext cx="3017520" cy="3017520"/>
           </a:xfrm>
           <a:prstGeom prst="rect">
             <a:avLst/>
@@ -5307,8 +5307,8 @@
         </p:nvSpPr>
         <p:spPr>
           <a:xfrm>
-            <a:off x="5943600" y="822960"/>
-            <a:ext cx="2743200" cy="4389120"/>
+            <a:off x="5852160" y="1463040"/>
+            <a:ext cx="2834640" cy="3017520"/>
           </a:xfrm>
           <a:prstGeom prst="rect">
             <a:avLst/>
@@ -5346,7 +5346,7 @@
         </p:nvSpPr>
         <p:spPr>
           <a:xfrm>
-            <a:off x="7223760" y="320040"/>
+            <a:off x="7223760" y="548640"/>
             <a:ext cx="1554480" cy="320040"/>
           </a:xfrm>
           <a:prstGeom prst="rect">
@@ -5385,7 +5385,7 @@
         </p:nvSpPr>
         <p:spPr>
           <a:xfrm>
-            <a:off x="7223760" y="685800"/>
+            <a:off x="7223760" y="914400"/>
             <a:ext cx="1554480" cy="0"/>
           </a:xfrm>
           <a:prstGeom prst="line">
@@ -5434,7 +5434,7 @@
         <p:spPr>
           <a:xfrm>
             <a:off x="457200" y="2194560"/>
-            <a:ext cx="5303520" cy="1463040"/>
+            <a:ext cx="5303520" cy="1097280"/>
           </a:xfrm>
           <a:prstGeom prst="rect">
             <a:avLst/>
@@ -5450,7 +5450,7 @@
               <a:buNone/>
             </a:pPr>
             <a:r>
-              <a:rPr lang="en-US" sz="7200" b="1" dirty="0">
+              <a:rPr lang="en-US" sz="6000" b="1" dirty="0">
                 <a:solidFill>
                   <a:srgbClr val="000000"/>
                 </a:solidFill>
@@ -5460,7 +5460,7 @@
               </a:rPr>
               <a:t>AI Markets</a:t>
             </a:r>
-            <a:endParaRPr lang="en-US" sz="7200" dirty="0"/>
+            <a:endParaRPr lang="en-US" sz="6000" dirty="0"/>
           </a:p>
         </p:txBody>
       </p:sp>
@@ -5472,7 +5472,7 @@
         </p:nvSpPr>
         <p:spPr>
           <a:xfrm>
-            <a:off x="457200" y="3931920"/>
+            <a:off x="457200" y="3429000"/>
             <a:ext cx="5303520" cy="548640"/>
           </a:xfrm>
           <a:prstGeom prst="rect">
@@ -5706,7 +5706,7 @@
         <p:spPr>
           <a:xfrm>
             <a:off x="457200" y="182880"/>
-            <a:ext cx="6583680" cy="640080"/>
+            <a:ext cx="6583680" cy="685800"/>
           </a:xfrm>
           <a:prstGeom prst="rect">
             <a:avLst/>
@@ -5722,7 +5722,7 @@
               <a:buNone/>
             </a:pPr>
             <a:r>
-              <a:rPr lang="en-US" sz="2700" b="1" dirty="0">
+              <a:rPr lang="en-US" sz="2400" b="1" dirty="0">
                 <a:solidFill>
                   <a:srgbClr val="000000"/>
                 </a:solidFill>
@@ -5732,7 +5732,7 @@
               </a:rPr>
               <a:t>What is agentic AI?</a:t>
             </a:r>
-            <a:endParaRPr lang="en-US" sz="2700" dirty="0"/>
+            <a:endParaRPr lang="en-US" sz="2400" dirty="0"/>
           </a:p>
         </p:txBody>
       </p:sp>
@@ -5744,7 +5744,7 @@
         </p:nvSpPr>
         <p:spPr>
           <a:xfrm>
-            <a:off x="457200" y="868680"/>
+            <a:off x="457200" y="914400"/>
             <a:ext cx="8229600" cy="457200"/>
           </a:xfrm>
           <a:prstGeom prst="rect">
@@ -7211,7 +7211,7 @@
         <p:spPr>
           <a:xfrm>
             <a:off x="457200" y="182880"/>
-            <a:ext cx="6583680" cy="640080"/>
+            <a:ext cx="6583680" cy="685800"/>
           </a:xfrm>
           <a:prstGeom prst="rect">
             <a:avLst/>
@@ -7227,7 +7227,7 @@
               <a:buNone/>
             </a:pPr>
             <a:r>
-              <a:rPr lang="en-US" sz="2700" b="1" dirty="0">
+              <a:rPr lang="en-US" sz="2400" b="1" dirty="0">
                 <a:solidFill>
                   <a:srgbClr val="000000"/>
                 </a:solidFill>
@@ -7237,7 +7237,7 @@
               </a:rPr>
               <a:t>The divergence.</a:t>
             </a:r>
-            <a:endParaRPr lang="en-US" sz="2700" dirty="0"/>
+            <a:endParaRPr lang="en-US" sz="2400" dirty="0"/>
           </a:p>
         </p:txBody>
       </p:sp>
@@ -7249,7 +7249,7 @@
         </p:nvSpPr>
         <p:spPr>
           <a:xfrm>
-            <a:off x="457200" y="868680"/>
+            <a:off x="457200" y="914400"/>
             <a:ext cx="8229600" cy="457200"/>
           </a:xfrm>
           <a:prstGeom prst="rect">
@@ -8453,7 +8453,7 @@
         <p:spPr>
           <a:xfrm>
             <a:off x="457200" y="182880"/>
-            <a:ext cx="6583680" cy="640080"/>
+            <a:ext cx="6583680" cy="685800"/>
           </a:xfrm>
           <a:prstGeom prst="rect">
             <a:avLst/>
@@ -8469,7 +8469,7 @@
               <a:buNone/>
             </a:pPr>
             <a:r>
-              <a:rPr lang="en-US" sz="2700" b="1" dirty="0">
+              <a:rPr lang="en-US" sz="2400" b="1" dirty="0">
                 <a:solidFill>
                   <a:srgbClr val="000000"/>
                 </a:solidFill>
@@ -8479,7 +8479,7 @@
               </a:rPr>
               <a:t>The bubble question.</a:t>
             </a:r>
-            <a:endParaRPr lang="en-US" sz="2700" dirty="0"/>
+            <a:endParaRPr lang="en-US" sz="2400" dirty="0"/>
           </a:p>
         </p:txBody>
       </p:sp>
@@ -8491,7 +8491,7 @@
         </p:nvSpPr>
         <p:spPr>
           <a:xfrm>
-            <a:off x="457200" y="868680"/>
+            <a:off x="457200" y="914400"/>
             <a:ext cx="8229600" cy="457200"/>
           </a:xfrm>
           <a:prstGeom prst="rect">
@@ -9687,7 +9687,7 @@
         <p:spPr>
           <a:xfrm>
             <a:off x="457200" y="182880"/>
-            <a:ext cx="6583680" cy="640080"/>
+            <a:ext cx="6583680" cy="685800"/>
           </a:xfrm>
           <a:prstGeom prst="rect">
             <a:avLst/>
@@ -9703,7 +9703,7 @@
               <a:buNone/>
             </a:pPr>
             <a:r>
-              <a:rPr lang="en-US" sz="2700" b="1" dirty="0">
+              <a:rPr lang="en-US" sz="2400" b="1" dirty="0">
                 <a:solidFill>
                   <a:srgbClr val="000000"/>
                 </a:solidFill>
@@ -9713,7 +9713,7 @@
               </a:rPr>
               <a:t>Supply chain fragility.</a:t>
             </a:r>
-            <a:endParaRPr lang="en-US" sz="2700" dirty="0"/>
+            <a:endParaRPr lang="en-US" sz="2400" dirty="0"/>
           </a:p>
         </p:txBody>
       </p:sp>
@@ -9725,7 +9725,7 @@
         </p:nvSpPr>
         <p:spPr>
           <a:xfrm>
-            <a:off x="457200" y="868680"/>
+            <a:off x="457200" y="914400"/>
             <a:ext cx="8229600" cy="457200"/>
           </a:xfrm>
           <a:prstGeom prst="rect">
@@ -10873,7 +10873,7 @@
         <p:spPr>
           <a:xfrm>
             <a:off x="457200" y="182880"/>
-            <a:ext cx="6583680" cy="640080"/>
+            <a:ext cx="6583680" cy="685800"/>
           </a:xfrm>
           <a:prstGeom prst="rect">
             <a:avLst/>
@@ -10889,7 +10889,7 @@
               <a:buNone/>
             </a:pPr>
             <a:r>
-              <a:rPr lang="en-US" sz="2700" b="1" dirty="0">
+              <a:rPr lang="en-US" sz="2400" b="1" dirty="0">
                 <a:solidFill>
                   <a:srgbClr val="000000"/>
                 </a:solidFill>
@@ -10899,7 +10899,7 @@
               </a:rPr>
               <a:t>Policy &amp; regulation.</a:t>
             </a:r>
-            <a:endParaRPr lang="en-US" sz="2700" dirty="0"/>
+            <a:endParaRPr lang="en-US" sz="2400" dirty="0"/>
           </a:p>
         </p:txBody>
       </p:sp>
@@ -10911,7 +10911,7 @@
         </p:nvSpPr>
         <p:spPr>
           <a:xfrm>
-            <a:off x="457200" y="868680"/>
+            <a:off x="457200" y="914400"/>
             <a:ext cx="8229600" cy="457200"/>
           </a:xfrm>
           <a:prstGeom prst="rect">
@@ -12032,7 +12032,7 @@
         <p:spPr>
           <a:xfrm>
             <a:off x="457200" y="182880"/>
-            <a:ext cx="6583680" cy="640080"/>
+            <a:ext cx="6583680" cy="685800"/>
           </a:xfrm>
           <a:prstGeom prst="rect">
             <a:avLst/>
@@ -12048,7 +12048,7 @@
               <a:buNone/>
             </a:pPr>
             <a:r>
-              <a:rPr lang="en-US" sz="2700" b="1" dirty="0">
+              <a:rPr lang="en-US" sz="2400" b="1" dirty="0">
                 <a:solidFill>
                   <a:srgbClr val="000000"/>
                 </a:solidFill>
@@ -12058,7 +12058,7 @@
               </a:rPr>
               <a:t>AI backlash.</a:t>
             </a:r>
-            <a:endParaRPr lang="en-US" sz="2700" dirty="0"/>
+            <a:endParaRPr lang="en-US" sz="2400" dirty="0"/>
           </a:p>
         </p:txBody>
       </p:sp>
@@ -12070,7 +12070,7 @@
         </p:nvSpPr>
         <p:spPr>
           <a:xfrm>
-            <a:off x="457200" y="868680"/>
+            <a:off x="457200" y="914400"/>
             <a:ext cx="8229600" cy="457200"/>
           </a:xfrm>
           <a:prstGeom prst="rect">
@@ -12909,7 +12909,7 @@
         <p:spPr>
           <a:xfrm>
             <a:off x="457200" y="182880"/>
-            <a:ext cx="6583680" cy="640080"/>
+            <a:ext cx="6583680" cy="685800"/>
           </a:xfrm>
           <a:prstGeom prst="rect">
             <a:avLst/>
@@ -12925,7 +12925,7 @@
               <a:buNone/>
             </a:pPr>
             <a:r>
-              <a:rPr lang="en-US" sz="2700" b="1" dirty="0">
+              <a:rPr lang="en-US" sz="2400" b="1" dirty="0">
                 <a:solidFill>
                   <a:srgbClr val="000000"/>
                 </a:solidFill>
@@ -12935,7 +12935,7 @@
               </a:rPr>
               <a:t>Beyond the grid.</a:t>
             </a:r>
-            <a:endParaRPr lang="en-US" sz="2700" dirty="0"/>
+            <a:endParaRPr lang="en-US" sz="2400" dirty="0"/>
           </a:p>
         </p:txBody>
       </p:sp>
@@ -12947,7 +12947,7 @@
         </p:nvSpPr>
         <p:spPr>
           <a:xfrm>
-            <a:off x="457200" y="868680"/>
+            <a:off x="457200" y="914400"/>
             <a:ext cx="8229600" cy="457200"/>
           </a:xfrm>
           <a:prstGeom prst="rect">
@@ -13769,7 +13769,7 @@
         <p:spPr>
           <a:xfrm>
             <a:off x="457200" y="182880"/>
-            <a:ext cx="6583680" cy="640080"/>
+            <a:ext cx="6583680" cy="685800"/>
           </a:xfrm>
           <a:prstGeom prst="rect">
             <a:avLst/>
@@ -13785,7 +13785,7 @@
               <a:buNone/>
             </a:pPr>
             <a:r>
-              <a:rPr lang="en-US" sz="2700" b="1" dirty="0">
+              <a:rPr lang="en-US" sz="2400" b="1" dirty="0">
                 <a:solidFill>
                   <a:srgbClr val="000000"/>
                 </a:solidFill>
@@ -13795,7 +13795,7 @@
               </a:rPr>
               <a:t>Physical AI.</a:t>
             </a:r>
-            <a:endParaRPr lang="en-US" sz="2700" dirty="0"/>
+            <a:endParaRPr lang="en-US" sz="2400" dirty="0"/>
           </a:p>
         </p:txBody>
       </p:sp>
@@ -13807,7 +13807,7 @@
         </p:nvSpPr>
         <p:spPr>
           <a:xfrm>
-            <a:off x="457200" y="868680"/>
+            <a:off x="457200" y="914400"/>
             <a:ext cx="8229600" cy="457200"/>
           </a:xfrm>
           <a:prstGeom prst="rect">
@@ -14629,7 +14629,7 @@
         <p:spPr>
           <a:xfrm>
             <a:off x="457200" y="182880"/>
-            <a:ext cx="6583680" cy="640080"/>
+            <a:ext cx="6583680" cy="685800"/>
           </a:xfrm>
           <a:prstGeom prst="rect">
             <a:avLst/>
@@ -14645,7 +14645,7 @@
               <a:buNone/>
             </a:pPr>
             <a:r>
-              <a:rPr lang="en-US" sz="2700" b="1" dirty="0">
+              <a:rPr lang="en-US" sz="2400" b="1" dirty="0">
                 <a:solidFill>
                   <a:srgbClr val="000000"/>
                 </a:solidFill>
@@ -14655,7 +14655,7 @@
               </a:rPr>
               <a:t>Autonomous mobility.</a:t>
             </a:r>
-            <a:endParaRPr lang="en-US" sz="2700" dirty="0"/>
+            <a:endParaRPr lang="en-US" sz="2400" dirty="0"/>
           </a:p>
         </p:txBody>
       </p:sp>
@@ -14667,7 +14667,7 @@
         </p:nvSpPr>
         <p:spPr>
           <a:xfrm>
-            <a:off x="457200" y="868680"/>
+            <a:off x="457200" y="914400"/>
             <a:ext cx="8229600" cy="457200"/>
           </a:xfrm>
           <a:prstGeom prst="rect">
@@ -15489,7 +15489,7 @@
         <p:spPr>
           <a:xfrm>
             <a:off x="457200" y="182880"/>
-            <a:ext cx="6583680" cy="640080"/>
+            <a:ext cx="6583680" cy="685800"/>
           </a:xfrm>
           <a:prstGeom prst="rect">
             <a:avLst/>
@@ -15505,7 +15505,7 @@
               <a:buNone/>
             </a:pPr>
             <a:r>
-              <a:rPr lang="en-US" sz="2700" b="1" dirty="0">
+              <a:rPr lang="en-US" sz="2400" b="1" dirty="0">
                 <a:solidFill>
                   <a:srgbClr val="000000"/>
                 </a:solidFill>
@@ -15515,7 +15515,7 @@
               </a:rPr>
               <a:t>AI is rewriting drug discovery.</a:t>
             </a:r>
-            <a:endParaRPr lang="en-US" sz="2700" dirty="0"/>
+            <a:endParaRPr lang="en-US" sz="2400" dirty="0"/>
           </a:p>
         </p:txBody>
       </p:sp>
@@ -15527,7 +15527,7 @@
         </p:nvSpPr>
         <p:spPr>
           <a:xfrm>
-            <a:off x="457200" y="868680"/>
+            <a:off x="457200" y="914400"/>
             <a:ext cx="8229600" cy="457200"/>
           </a:xfrm>
           <a:prstGeom prst="rect">
@@ -16517,7 +16517,7 @@
         <p:spPr>
           <a:xfrm>
             <a:off x="457200" y="182880"/>
-            <a:ext cx="6583680" cy="640080"/>
+            <a:ext cx="6583680" cy="685800"/>
           </a:xfrm>
           <a:prstGeom prst="rect">
             <a:avLst/>
@@ -16533,7 +16533,7 @@
               <a:buNone/>
             </a:pPr>
             <a:r>
-              <a:rPr lang="en-US" sz="2700" b="1" dirty="0">
+              <a:rPr lang="en-US" sz="2400" b="1" dirty="0">
                 <a:solidFill>
                   <a:srgbClr val="000000"/>
                 </a:solidFill>
@@ -16543,7 +16543,7 @@
               </a:rPr>
               <a:t>The argument, in five parts.</a:t>
             </a:r>
-            <a:endParaRPr lang="en-US" sz="2700" dirty="0"/>
+            <a:endParaRPr lang="en-US" sz="2400" dirty="0"/>
           </a:p>
         </p:txBody>
       </p:sp>
@@ -16555,7 +16555,7 @@
         </p:nvSpPr>
         <p:spPr>
           <a:xfrm>
-            <a:off x="457200" y="868680"/>
+            <a:off x="457200" y="914400"/>
             <a:ext cx="8229600" cy="457200"/>
           </a:xfrm>
           <a:prstGeom prst="rect">
@@ -16617,8 +16617,8 @@
         </p:nvSpPr>
         <p:spPr>
           <a:xfrm>
-            <a:off x="0" y="2103120"/>
-            <a:ext cx="9144000" cy="3291840"/>
+            <a:off x="0" y="1691640"/>
+            <a:ext cx="9144000" cy="3749040"/>
           </a:xfrm>
           <a:prstGeom prst="rect">
             <a:avLst/>
@@ -16642,7 +16642,7 @@
         </p:nvSpPr>
         <p:spPr>
           <a:xfrm>
-            <a:off x="457200" y="2240280"/>
+            <a:off x="457200" y="1828800"/>
             <a:ext cx="8229600" cy="256032"/>
           </a:xfrm>
           <a:prstGeom prst="rect">
@@ -16681,8 +16681,8 @@
         </p:nvSpPr>
         <p:spPr>
           <a:xfrm>
-            <a:off x="356616" y="2651760"/>
-            <a:ext cx="1554480" cy="2423160"/>
+            <a:off x="356616" y="2240280"/>
+            <a:ext cx="1554480" cy="2926080"/>
           </a:xfrm>
           <a:prstGeom prst="rect">
             <a:avLst/>
@@ -16706,7 +16706,7 @@
         </p:nvSpPr>
         <p:spPr>
           <a:xfrm>
-            <a:off x="356616" y="2651760"/>
+            <a:off x="356616" y="2240280"/>
             <a:ext cx="1554480" cy="54864"/>
           </a:xfrm>
           <a:prstGeom prst="rect">
@@ -16731,7 +16731,7 @@
         </p:nvSpPr>
         <p:spPr>
           <a:xfrm>
-            <a:off x="356616" y="2926080"/>
+            <a:off x="356616" y="2514600"/>
             <a:ext cx="1554480" cy="640080"/>
           </a:xfrm>
           <a:prstGeom prst="rect">
@@ -16770,7 +16770,7 @@
         </p:nvSpPr>
         <p:spPr>
           <a:xfrm>
-            <a:off x="356616" y="3657600"/>
+            <a:off x="356616" y="3246120"/>
             <a:ext cx="1554480" cy="274320"/>
           </a:xfrm>
           <a:prstGeom prst="rect">
@@ -16809,7 +16809,7 @@
         </p:nvSpPr>
         <p:spPr>
           <a:xfrm>
-            <a:off x="466344" y="4069080"/>
+            <a:off x="466344" y="3657600"/>
             <a:ext cx="1335024" cy="731520"/>
           </a:xfrm>
           <a:prstGeom prst="rect">
@@ -16887,8 +16887,8 @@
         </p:nvSpPr>
         <p:spPr>
           <a:xfrm>
-            <a:off x="2075688" y="2651760"/>
-            <a:ext cx="1554480" cy="2423160"/>
+            <a:off x="2075688" y="2240280"/>
+            <a:ext cx="1554480" cy="2926080"/>
           </a:xfrm>
           <a:prstGeom prst="rect">
             <a:avLst/>
@@ -16912,7 +16912,7 @@
         </p:nvSpPr>
         <p:spPr>
           <a:xfrm>
-            <a:off x="2075688" y="2651760"/>
+            <a:off x="2075688" y="2240280"/>
             <a:ext cx="1554480" cy="54864"/>
           </a:xfrm>
           <a:prstGeom prst="rect">
@@ -16937,7 +16937,7 @@
         </p:nvSpPr>
         <p:spPr>
           <a:xfrm>
-            <a:off x="2075688" y="2926080"/>
+            <a:off x="2075688" y="2514600"/>
             <a:ext cx="1554480" cy="640080"/>
           </a:xfrm>
           <a:prstGeom prst="rect">
@@ -16976,7 +16976,7 @@
         </p:nvSpPr>
         <p:spPr>
           <a:xfrm>
-            <a:off x="2075688" y="3657600"/>
+            <a:off x="2075688" y="3246120"/>
             <a:ext cx="1554480" cy="274320"/>
           </a:xfrm>
           <a:prstGeom prst="rect">
@@ -17015,7 +17015,7 @@
         </p:nvSpPr>
         <p:spPr>
           <a:xfrm>
-            <a:off x="2185416" y="4069080"/>
+            <a:off x="2185416" y="3657600"/>
             <a:ext cx="1335024" cy="731520"/>
           </a:xfrm>
           <a:prstGeom prst="rect">
@@ -17093,8 +17093,8 @@
         </p:nvSpPr>
         <p:spPr>
           <a:xfrm>
-            <a:off x="3794760" y="2651760"/>
-            <a:ext cx="1554480" cy="2423160"/>
+            <a:off x="3794760" y="2240280"/>
+            <a:ext cx="1554480" cy="2926080"/>
           </a:xfrm>
           <a:prstGeom prst="rect">
             <a:avLst/>
@@ -17118,7 +17118,7 @@
         </p:nvSpPr>
         <p:spPr>
           <a:xfrm>
-            <a:off x="3794760" y="2651760"/>
+            <a:off x="3794760" y="2240280"/>
             <a:ext cx="1554480" cy="54864"/>
           </a:xfrm>
           <a:prstGeom prst="rect">
@@ -17143,7 +17143,7 @@
         </p:nvSpPr>
         <p:spPr>
           <a:xfrm>
-            <a:off x="3794760" y="2926080"/>
+            <a:off x="3794760" y="2514600"/>
             <a:ext cx="1554480" cy="640080"/>
           </a:xfrm>
           <a:prstGeom prst="rect">
@@ -17182,7 +17182,7 @@
         </p:nvSpPr>
         <p:spPr>
           <a:xfrm>
-            <a:off x="3794760" y="3657600"/>
+            <a:off x="3794760" y="3246120"/>
             <a:ext cx="1554480" cy="274320"/>
           </a:xfrm>
           <a:prstGeom prst="rect">
@@ -17221,7 +17221,7 @@
         </p:nvSpPr>
         <p:spPr>
           <a:xfrm>
-            <a:off x="3904488" y="4069080"/>
+            <a:off x="3904488" y="3657600"/>
             <a:ext cx="1335024" cy="731520"/>
           </a:xfrm>
           <a:prstGeom prst="rect">
@@ -17299,8 +17299,8 @@
         </p:nvSpPr>
         <p:spPr>
           <a:xfrm>
-            <a:off x="5513832" y="2651760"/>
-            <a:ext cx="1554480" cy="2423160"/>
+            <a:off x="5513832" y="2240280"/>
+            <a:ext cx="1554480" cy="2926080"/>
           </a:xfrm>
           <a:prstGeom prst="rect">
             <a:avLst/>
@@ -17324,7 +17324,7 @@
         </p:nvSpPr>
         <p:spPr>
           <a:xfrm>
-            <a:off x="5513832" y="2651760"/>
+            <a:off x="5513832" y="2240280"/>
             <a:ext cx="1554480" cy="54864"/>
           </a:xfrm>
           <a:prstGeom prst="rect">
@@ -17349,7 +17349,7 @@
         </p:nvSpPr>
         <p:spPr>
           <a:xfrm>
-            <a:off x="5513832" y="2926080"/>
+            <a:off x="5513832" y="2514600"/>
             <a:ext cx="1554480" cy="640080"/>
           </a:xfrm>
           <a:prstGeom prst="rect">
@@ -17388,7 +17388,7 @@
         </p:nvSpPr>
         <p:spPr>
           <a:xfrm>
-            <a:off x="5513832" y="3657600"/>
+            <a:off x="5513832" y="3246120"/>
             <a:ext cx="1554480" cy="274320"/>
           </a:xfrm>
           <a:prstGeom prst="rect">
@@ -17427,7 +17427,7 @@
         </p:nvSpPr>
         <p:spPr>
           <a:xfrm>
-            <a:off x="5623560" y="4069080"/>
+            <a:off x="5623560" y="3657600"/>
             <a:ext cx="1335024" cy="731520"/>
           </a:xfrm>
           <a:prstGeom prst="rect">
@@ -17505,8 +17505,8 @@
         </p:nvSpPr>
         <p:spPr>
           <a:xfrm>
-            <a:off x="7232904" y="2651760"/>
-            <a:ext cx="1554480" cy="2423160"/>
+            <a:off x="7232904" y="2240280"/>
+            <a:ext cx="1554480" cy="2926080"/>
           </a:xfrm>
           <a:prstGeom prst="rect">
             <a:avLst/>
@@ -17530,7 +17530,7 @@
         </p:nvSpPr>
         <p:spPr>
           <a:xfrm>
-            <a:off x="7232904" y="2651760"/>
+            <a:off x="7232904" y="2240280"/>
             <a:ext cx="1554480" cy="54864"/>
           </a:xfrm>
           <a:prstGeom prst="rect">
@@ -17555,7 +17555,7 @@
         </p:nvSpPr>
         <p:spPr>
           <a:xfrm>
-            <a:off x="7232904" y="2926080"/>
+            <a:off x="7232904" y="2514600"/>
             <a:ext cx="1554480" cy="640080"/>
           </a:xfrm>
           <a:prstGeom prst="rect">
@@ -17594,7 +17594,7 @@
         </p:nvSpPr>
         <p:spPr>
           <a:xfrm>
-            <a:off x="7232904" y="3657600"/>
+            <a:off x="7232904" y="3246120"/>
             <a:ext cx="1554480" cy="274320"/>
           </a:xfrm>
           <a:prstGeom prst="rect">
@@ -17633,7 +17633,7 @@
         </p:nvSpPr>
         <p:spPr>
           <a:xfrm>
-            <a:off x="7342632" y="4069080"/>
+            <a:off x="7342632" y="3657600"/>
             <a:ext cx="1335024" cy="731520"/>
           </a:xfrm>
           <a:prstGeom prst="rect">
@@ -17879,7 +17879,7 @@
         <p:spPr>
           <a:xfrm>
             <a:off x="457200" y="182880"/>
-            <a:ext cx="6583680" cy="640080"/>
+            <a:ext cx="6583680" cy="685800"/>
           </a:xfrm>
           <a:prstGeom prst="rect">
             <a:avLst/>
@@ -17895,7 +17895,7 @@
               <a:buNone/>
             </a:pPr>
             <a:r>
-              <a:rPr lang="en-US" sz="2700" b="1" dirty="0">
+              <a:rPr lang="en-US" sz="2400" b="1" dirty="0">
                 <a:solidFill>
                   <a:srgbClr val="000000"/>
                 </a:solidFill>
@@ -17905,7 +17905,7 @@
               </a:rPr>
               <a:t>Key takeaways.</a:t>
             </a:r>
-            <a:endParaRPr lang="en-US" sz="2700" dirty="0"/>
+            <a:endParaRPr lang="en-US" sz="2400" dirty="0"/>
           </a:p>
         </p:txBody>
       </p:sp>
@@ -17917,7 +17917,7 @@
         </p:nvSpPr>
         <p:spPr>
           <a:xfrm>
-            <a:off x="457200" y="868680"/>
+            <a:off x="457200" y="914400"/>
             <a:ext cx="8229600" cy="457200"/>
           </a:xfrm>
           <a:prstGeom prst="rect">
@@ -18781,7 +18781,7 @@
         <p:spPr>
           <a:xfrm>
             <a:off x="457200" y="182880"/>
-            <a:ext cx="6583680" cy="640080"/>
+            <a:ext cx="6583680" cy="685800"/>
           </a:xfrm>
           <a:prstGeom prst="rect">
             <a:avLst/>
@@ -18797,7 +18797,7 @@
               <a:buNone/>
             </a:pPr>
             <a:r>
-              <a:rPr lang="en-US" sz="2700" b="1" dirty="0">
+              <a:rPr lang="en-US" sz="2400" b="1" dirty="0">
                 <a:solidFill>
                   <a:srgbClr val="000000"/>
                 </a:solidFill>
@@ -18807,7 +18807,7 @@
               </a:rPr>
               <a:t>Why AI matters to markets.</a:t>
             </a:r>
-            <a:endParaRPr lang="en-US" sz="2700" dirty="0"/>
+            <a:endParaRPr lang="en-US" sz="2400" dirty="0"/>
           </a:p>
         </p:txBody>
       </p:sp>
@@ -18819,7 +18819,7 @@
         </p:nvSpPr>
         <p:spPr>
           <a:xfrm>
-            <a:off x="457200" y="868680"/>
+            <a:off x="457200" y="914400"/>
             <a:ext cx="8229600" cy="457200"/>
           </a:xfrm>
           <a:prstGeom prst="rect">
@@ -19491,7 +19491,7 @@
         <p:spPr>
           <a:xfrm>
             <a:off x="457200" y="182880"/>
-            <a:ext cx="6583680" cy="640080"/>
+            <a:ext cx="6583680" cy="685800"/>
           </a:xfrm>
           <a:prstGeom prst="rect">
             <a:avLst/>
@@ -19507,7 +19507,7 @@
               <a:buNone/>
             </a:pPr>
             <a:r>
-              <a:rPr lang="en-US" sz="2700" b="1" dirty="0">
+              <a:rPr lang="en-US" sz="2400" b="1" dirty="0">
                 <a:solidFill>
                   <a:srgbClr val="000000"/>
                 </a:solidFill>
@@ -19517,7 +19517,7 @@
               </a:rPr>
               <a:t>AI evolution from chatbots to agents.</a:t>
             </a:r>
-            <a:endParaRPr lang="en-US" sz="2700" dirty="0"/>
+            <a:endParaRPr lang="en-US" sz="2400" dirty="0"/>
           </a:p>
         </p:txBody>
       </p:sp>
@@ -19529,7 +19529,7 @@
         </p:nvSpPr>
         <p:spPr>
           <a:xfrm>
-            <a:off x="457200" y="868680"/>
+            <a:off x="457200" y="914400"/>
             <a:ext cx="8229600" cy="457200"/>
           </a:xfrm>
           <a:prstGeom prst="rect">
@@ -21000,7 +21000,7 @@
         <p:spPr>
           <a:xfrm>
             <a:off x="457200" y="182880"/>
-            <a:ext cx="6583680" cy="640080"/>
+            <a:ext cx="6583680" cy="685800"/>
           </a:xfrm>
           <a:prstGeom prst="rect">
             <a:avLst/>
@@ -21016,7 +21016,7 @@
               <a:buNone/>
             </a:pPr>
             <a:r>
-              <a:rPr lang="en-US" sz="2700" b="1" dirty="0">
+              <a:rPr lang="en-US" sz="2400" b="1" dirty="0">
                 <a:solidFill>
                   <a:srgbClr val="000000"/>
                 </a:solidFill>
@@ -21026,7 +21026,7 @@
               </a:rPr>
               <a:t>The AI stack.</a:t>
             </a:r>
-            <a:endParaRPr lang="en-US" sz="2700" dirty="0"/>
+            <a:endParaRPr lang="en-US" sz="2400" dirty="0"/>
           </a:p>
         </p:txBody>
       </p:sp>
@@ -21038,7 +21038,7 @@
         </p:nvSpPr>
         <p:spPr>
           <a:xfrm>
-            <a:off x="457200" y="868680"/>
+            <a:off x="457200" y="914400"/>
             <a:ext cx="8229600" cy="457200"/>
           </a:xfrm>
           <a:prstGeom prst="rect">
@@ -22599,7 +22599,7 @@
         <p:spPr>
           <a:xfrm>
             <a:off x="457200" y="182880"/>
-            <a:ext cx="6583680" cy="640080"/>
+            <a:ext cx="6583680" cy="685800"/>
           </a:xfrm>
           <a:prstGeom prst="rect">
             <a:avLst/>
@@ -22615,7 +22615,7 @@
               <a:buNone/>
             </a:pPr>
             <a:r>
-              <a:rPr lang="en-US" sz="2700" b="1" dirty="0">
+              <a:rPr lang="en-US" sz="2400" b="1" dirty="0">
                 <a:solidFill>
                   <a:srgbClr val="000000"/>
                 </a:solidFill>
@@ -22625,7 +22625,7 @@
               </a:rPr>
               <a:t>AI growth rates are unprecedented.</a:t>
             </a:r>
-            <a:endParaRPr lang="en-US" sz="2700" dirty="0"/>
+            <a:endParaRPr lang="en-US" sz="2400" dirty="0"/>
           </a:p>
         </p:txBody>
       </p:sp>
@@ -22637,7 +22637,7 @@
         </p:nvSpPr>
         <p:spPr>
           <a:xfrm>
-            <a:off x="457200" y="868680"/>
+            <a:off x="457200" y="914400"/>
             <a:ext cx="8229600" cy="457200"/>
           </a:xfrm>
           <a:prstGeom prst="rect">
@@ -23365,7 +23365,7 @@
         <p:spPr>
           <a:xfrm>
             <a:off x="457200" y="182880"/>
-            <a:ext cx="6583680" cy="640080"/>
+            <a:ext cx="6583680" cy="685800"/>
           </a:xfrm>
           <a:prstGeom prst="rect">
             <a:avLst/>
@@ -23381,7 +23381,7 @@
               <a:buNone/>
             </a:pPr>
             <a:r>
-              <a:rPr lang="en-US" sz="2700" b="1" dirty="0">
+              <a:rPr lang="en-US" sz="2400" b="1" dirty="0">
                 <a:solidFill>
                   <a:srgbClr val="000000"/>
                 </a:solidFill>
@@ -23391,7 +23391,7 @@
               </a:rPr>
               <a:t>The semiconductor market.</a:t>
             </a:r>
-            <a:endParaRPr lang="en-US" sz="2700" dirty="0"/>
+            <a:endParaRPr lang="en-US" sz="2400" dirty="0"/>
           </a:p>
         </p:txBody>
       </p:sp>
@@ -23403,7 +23403,7 @@
         </p:nvSpPr>
         <p:spPr>
           <a:xfrm>
-            <a:off x="457200" y="868680"/>
+            <a:off x="457200" y="914400"/>
             <a:ext cx="8229600" cy="457200"/>
           </a:xfrm>
           <a:prstGeom prst="rect">
@@ -24064,7 +24064,7 @@
         <p:spPr>
           <a:xfrm>
             <a:off x="457200" y="182880"/>
-            <a:ext cx="6583680" cy="640080"/>
+            <a:ext cx="6583680" cy="685800"/>
           </a:xfrm>
           <a:prstGeom prst="rect">
             <a:avLst/>
@@ -24080,7 +24080,7 @@
               <a:buNone/>
             </a:pPr>
             <a:r>
-              <a:rPr lang="en-US" sz="2700" b="1" dirty="0">
+              <a:rPr lang="en-US" sz="2400" b="1" dirty="0">
                 <a:solidFill>
                   <a:srgbClr val="000000"/>
                 </a:solidFill>
@@ -24090,7 +24090,7 @@
               </a:rPr>
               <a:t>The labs.</a:t>
             </a:r>
-            <a:endParaRPr lang="en-US" sz="2700" dirty="0"/>
+            <a:endParaRPr lang="en-US" sz="2400" dirty="0"/>
           </a:p>
         </p:txBody>
       </p:sp>
@@ -24102,7 +24102,7 @@
         </p:nvSpPr>
         <p:spPr>
           <a:xfrm>
-            <a:off x="457200" y="868680"/>
+            <a:off x="457200" y="914400"/>
             <a:ext cx="8229600" cy="457200"/>
           </a:xfrm>
           <a:prstGeom prst="rect">
@@ -25864,7 +25864,7 @@
         <p:spPr>
           <a:xfrm>
             <a:off x="457200" y="182880"/>
-            <a:ext cx="6583680" cy="640080"/>
+            <a:ext cx="6583680" cy="685800"/>
           </a:xfrm>
           <a:prstGeom prst="rect">
             <a:avLst/>
@@ -25880,7 +25880,7 @@
               <a:buNone/>
             </a:pPr>
             <a:r>
-              <a:rPr lang="en-US" sz="2700" b="1" dirty="0">
+              <a:rPr lang="en-US" sz="2400" b="1" dirty="0">
                 <a:solidFill>
                   <a:srgbClr val="000000"/>
                 </a:solidFill>
@@ -25890,7 +25890,7 @@
               </a:rPr>
               <a:t>Earnings &amp; valuations.</a:t>
             </a:r>
-            <a:endParaRPr lang="en-US" sz="2700" dirty="0"/>
+            <a:endParaRPr lang="en-US" sz="2400" dirty="0"/>
           </a:p>
         </p:txBody>
       </p:sp>
@@ -25902,7 +25902,7 @@
         </p:nvSpPr>
         <p:spPr>
           <a:xfrm>
-            <a:off x="457200" y="868680"/>
+            <a:off x="457200" y="914400"/>
             <a:ext cx="8229600" cy="457200"/>
           </a:xfrm>
           <a:prstGeom prst="rect">

--- a/ai-markets-deck.pptx
+++ b/ai-markets-deck.pptx
@@ -24127,7 +24127,7 @@
                 <a:ea typeface="Arial" pitchFamily="34" charset="-122"/>
                 <a:cs typeface="Arial" pitchFamily="34" charset="-120"/>
               </a:rPr>
-              <a:t>Four frontier labs now worth ~$1.5T in aggregate private value. Q1 2026 doubled all of 2025's foundational-AI VC funding — and VCs are still chasing.</a:t>
+              <a:t>Three private labs worth ~$1.5T combined, plus Google inside Alphabet's $2.3T public market cap. Q1 2026 doubled all of 2025's foundational-AI VC funding.</a:t>
             </a:r>
             <a:endParaRPr lang="en-US" sz="1350" dirty="0"/>
           </a:p>
@@ -24179,12 +24179,70 @@
             <a:tbl>
               <a:tblPr/>
               <a:tblGrid>
+                <a:gridCol w="640080"/>
+                <a:gridCol w="1097280"/>
                 <a:gridCol w="1188720"/>
                 <a:gridCol w="1280160"/>
-                <a:gridCol w="1371600"/>
-                <a:gridCol w="4389120"/>
+                <a:gridCol w="4023360"/>
               </a:tblGrid>
               <a:tr h="502920">
+                <a:tc>
+                  <a:txBody>
+                    <a:bodyPr/>
+                    <a:lstStyle/>
+                    <a:p>
+                      <a:pPr algn="ctr" indent="0" marL="0">
+                        <a:buNone/>
+                      </a:pPr>
+                      <a:endParaRPr lang="en-US" sz="1100" dirty="0">
+                        <a:latin typeface="Arial" charset="0"/>
+                        <a:ea typeface="Arial" charset="0"/>
+                        <a:cs typeface="Arial" charset="0"/>
+                      </a:endParaRPr>
+                    </a:p>
+                  </a:txBody>
+                  <a:tcPr marL="91440" marR="91440" marT="45720" marB="45720" anchor="ctr">
+                    <a:lnL w="6350" cap="flat" cmpd="sng" algn="ctr">
+                      <a:solidFill>
+                        <a:srgbClr val="E5E5E5"/>
+                      </a:solidFill>
+                      <a:prstDash val="solid"/>
+                      <a:round/>
+                      <a:headEnd type="none" w="med" len="med"/>
+                      <a:tailEnd type="none" w="med" len="med"/>
+                    </a:lnL>
+                    <a:lnR w="6350" cap="flat" cmpd="sng" algn="ctr">
+                      <a:solidFill>
+                        <a:srgbClr val="E5E5E5"/>
+                      </a:solidFill>
+                      <a:prstDash val="solid"/>
+                      <a:round/>
+                      <a:headEnd type="none" w="med" len="med"/>
+                      <a:tailEnd type="none" w="med" len="med"/>
+                    </a:lnR>
+                    <a:lnT w="6350" cap="flat" cmpd="sng" algn="ctr">
+                      <a:solidFill>
+                        <a:srgbClr val="E5E5E5"/>
+                      </a:solidFill>
+                      <a:prstDash val="solid"/>
+                      <a:round/>
+                      <a:headEnd type="none" w="med" len="med"/>
+                      <a:tailEnd type="none" w="med" len="med"/>
+                    </a:lnT>
+                    <a:lnB w="6350" cap="flat" cmpd="sng" algn="ctr">
+                      <a:solidFill>
+                        <a:srgbClr val="E5E5E5"/>
+                      </a:solidFill>
+                      <a:prstDash val="solid"/>
+                      <a:round/>
+                      <a:headEnd type="none" w="med" len="med"/>
+                      <a:tailEnd type="none" w="med" len="med"/>
+                    </a:lnB>
+                    <a:solidFill>
+                      <a:srgbClr val="000000"/>
+                    </a:solidFill>
+                  </a:tcPr>
+                </a:tc>
                 <a:tc>
                   <a:txBody>
                     <a:bodyPr/>
@@ -24464,6 +24522,63 @@
                     <a:bodyPr/>
                     <a:lstStyle/>
                     <a:p>
+                      <a:pPr algn="ctr" indent="0" marL="0">
+                        <a:buNone/>
+                      </a:pPr>
+                      <a:endParaRPr lang="en-US" sz="1150" dirty="0">
+                        <a:latin typeface="Arial" charset="0"/>
+                        <a:ea typeface="Arial" charset="0"/>
+                        <a:cs typeface="Arial" charset="0"/>
+                      </a:endParaRPr>
+                    </a:p>
+                  </a:txBody>
+                  <a:tcPr marL="91440" marR="91440" marT="45720" marB="45720" anchor="ctr">
+                    <a:lnL w="6350" cap="flat" cmpd="sng" algn="ctr">
+                      <a:solidFill>
+                        <a:srgbClr val="E5E5E5"/>
+                      </a:solidFill>
+                      <a:prstDash val="solid"/>
+                      <a:round/>
+                      <a:headEnd type="none" w="med" len="med"/>
+                      <a:tailEnd type="none" w="med" len="med"/>
+                    </a:lnL>
+                    <a:lnR w="6350" cap="flat" cmpd="sng" algn="ctr">
+                      <a:solidFill>
+                        <a:srgbClr val="E5E5E5"/>
+                      </a:solidFill>
+                      <a:prstDash val="solid"/>
+                      <a:round/>
+                      <a:headEnd type="none" w="med" len="med"/>
+                      <a:tailEnd type="none" w="med" len="med"/>
+                    </a:lnR>
+                    <a:lnT w="6350" cap="flat" cmpd="sng" algn="ctr">
+                      <a:solidFill>
+                        <a:srgbClr val="E5E5E5"/>
+                      </a:solidFill>
+                      <a:prstDash val="solid"/>
+                      <a:round/>
+                      <a:headEnd type="none" w="med" len="med"/>
+                      <a:tailEnd type="none" w="med" len="med"/>
+                    </a:lnT>
+                    <a:lnB w="6350" cap="flat" cmpd="sng" algn="ctr">
+                      <a:solidFill>
+                        <a:srgbClr val="E5E5E5"/>
+                      </a:solidFill>
+                      <a:prstDash val="solid"/>
+                      <a:round/>
+                      <a:headEnd type="none" w="med" len="med"/>
+                      <a:tailEnd type="none" w="med" len="med"/>
+                    </a:lnB>
+                    <a:solidFill>
+                      <a:srgbClr val="FFFFFF"/>
+                    </a:solidFill>
+                  </a:tcPr>
+                </a:tc>
+                <a:tc>
+                  <a:txBody>
+                    <a:bodyPr/>
+                    <a:lstStyle/>
+                    <a:p>
                       <a:pPr algn="l" indent="0" marL="0">
                         <a:buNone/>
                       </a:pPr>
@@ -24733,6 +24848,63 @@
                 </a:tc>
               </a:tr>
               <a:tr h="502920">
+                <a:tc>
+                  <a:txBody>
+                    <a:bodyPr/>
+                    <a:lstStyle/>
+                    <a:p>
+                      <a:pPr algn="ctr" indent="0" marL="0">
+                        <a:buNone/>
+                      </a:pPr>
+                      <a:endParaRPr lang="en-US" sz="1150" dirty="0">
+                        <a:latin typeface="Arial" charset="0"/>
+                        <a:ea typeface="Arial" charset="0"/>
+                        <a:cs typeface="Arial" charset="0"/>
+                      </a:endParaRPr>
+                    </a:p>
+                  </a:txBody>
+                  <a:tcPr marL="91440" marR="91440" marT="45720" marB="45720" anchor="ctr">
+                    <a:lnL w="6350" cap="flat" cmpd="sng" algn="ctr">
+                      <a:solidFill>
+                        <a:srgbClr val="E5E5E5"/>
+                      </a:solidFill>
+                      <a:prstDash val="solid"/>
+                      <a:round/>
+                      <a:headEnd type="none" w="med" len="med"/>
+                      <a:tailEnd type="none" w="med" len="med"/>
+                    </a:lnL>
+                    <a:lnR w="6350" cap="flat" cmpd="sng" algn="ctr">
+                      <a:solidFill>
+                        <a:srgbClr val="E5E5E5"/>
+                      </a:solidFill>
+                      <a:prstDash val="solid"/>
+                      <a:round/>
+                      <a:headEnd type="none" w="med" len="med"/>
+                      <a:tailEnd type="none" w="med" len="med"/>
+                    </a:lnR>
+                    <a:lnT w="6350" cap="flat" cmpd="sng" algn="ctr">
+                      <a:solidFill>
+                        <a:srgbClr val="E5E5E5"/>
+                      </a:solidFill>
+                      <a:prstDash val="solid"/>
+                      <a:round/>
+                      <a:headEnd type="none" w="med" len="med"/>
+                      <a:tailEnd type="none" w="med" len="med"/>
+                    </a:lnT>
+                    <a:lnB w="6350" cap="flat" cmpd="sng" algn="ctr">
+                      <a:solidFill>
+                        <a:srgbClr val="E5E5E5"/>
+                      </a:solidFill>
+                      <a:prstDash val="solid"/>
+                      <a:round/>
+                      <a:headEnd type="none" w="med" len="med"/>
+                      <a:tailEnd type="none" w="med" len="med"/>
+                    </a:lnB>
+                    <a:solidFill>
+                      <a:srgbClr val="F9F9F9"/>
+                    </a:solidFill>
+                  </a:tcPr>
+                </a:tc>
                 <a:tc>
                   <a:txBody>
                     <a:bodyPr/>
@@ -25012,6 +25184,63 @@
                     <a:bodyPr/>
                     <a:lstStyle/>
                     <a:p>
+                      <a:pPr algn="ctr" indent="0" marL="0">
+                        <a:buNone/>
+                      </a:pPr>
+                      <a:endParaRPr lang="en-US" sz="1150" dirty="0">
+                        <a:latin typeface="Arial" charset="0"/>
+                        <a:ea typeface="Arial" charset="0"/>
+                        <a:cs typeface="Arial" charset="0"/>
+                      </a:endParaRPr>
+                    </a:p>
+                  </a:txBody>
+                  <a:tcPr marL="91440" marR="91440" marT="45720" marB="45720" anchor="ctr">
+                    <a:lnL w="6350" cap="flat" cmpd="sng" algn="ctr">
+                      <a:solidFill>
+                        <a:srgbClr val="E5E5E5"/>
+                      </a:solidFill>
+                      <a:prstDash val="solid"/>
+                      <a:round/>
+                      <a:headEnd type="none" w="med" len="med"/>
+                      <a:tailEnd type="none" w="med" len="med"/>
+                    </a:lnL>
+                    <a:lnR w="6350" cap="flat" cmpd="sng" algn="ctr">
+                      <a:solidFill>
+                        <a:srgbClr val="E5E5E5"/>
+                      </a:solidFill>
+                      <a:prstDash val="solid"/>
+                      <a:round/>
+                      <a:headEnd type="none" w="med" len="med"/>
+                      <a:tailEnd type="none" w="med" len="med"/>
+                    </a:lnR>
+                    <a:lnT w="6350" cap="flat" cmpd="sng" algn="ctr">
+                      <a:solidFill>
+                        <a:srgbClr val="E5E5E5"/>
+                      </a:solidFill>
+                      <a:prstDash val="solid"/>
+                      <a:round/>
+                      <a:headEnd type="none" w="med" len="med"/>
+                      <a:tailEnd type="none" w="med" len="med"/>
+                    </a:lnT>
+                    <a:lnB w="6350" cap="flat" cmpd="sng" algn="ctr">
+                      <a:solidFill>
+                        <a:srgbClr val="E5E5E5"/>
+                      </a:solidFill>
+                      <a:prstDash val="solid"/>
+                      <a:round/>
+                      <a:headEnd type="none" w="med" len="med"/>
+                      <a:tailEnd type="none" w="med" len="med"/>
+                    </a:lnB>
+                    <a:solidFill>
+                      <a:srgbClr val="FFFFFF"/>
+                    </a:solidFill>
+                  </a:tcPr>
+                </a:tc>
+                <a:tc>
+                  <a:txBody>
+                    <a:bodyPr/>
+                    <a:lstStyle/>
+                    <a:p>
                       <a:pPr algn="l" indent="0" marL="0">
                         <a:buNone/>
                       </a:pPr>
@@ -25024,7 +25253,7 @@
                           <a:ea typeface="Arial" pitchFamily="34" charset="-122"/>
                           <a:cs typeface="Arial" pitchFamily="34" charset="-120"/>
                         </a:rPr>
-                        <a:t>xAI</a:t>
+                        <a:t>Google</a:t>
                       </a:r>
                       <a:endParaRPr lang="en-US" sz="1150" dirty="0">
                         <a:latin typeface="Arial" charset="0"/>
@@ -25092,7 +25321,7 @@
                           <a:ea typeface="Arial" pitchFamily="34" charset="-122"/>
                           <a:cs typeface="Arial" pitchFamily="34" charset="-120"/>
                         </a:rPr>
-                        <a:t>$230B</a:t>
+                        <a:t>$2.3T</a:t>
                       </a:r>
                       <a:endParaRPr lang="en-US" sz="1150" dirty="0">
                         <a:latin typeface="Arial" charset="0"/>
@@ -25160,7 +25389,7 @@
                           <a:ea typeface="Arial" pitchFamily="34" charset="-122"/>
                           <a:cs typeface="Arial" pitchFamily="34" charset="-120"/>
                         </a:rPr>
-                        <a:t>~77× ARR*</a:t>
+                        <a:t>~20× P/E</a:t>
                       </a:r>
                       <a:endParaRPr lang="en-US" sz="1150" dirty="0">
                         <a:latin typeface="Arial" charset="0"/>
@@ -25228,7 +25457,7 @@
                           <a:ea typeface="Arial" pitchFamily="34" charset="-122"/>
                           <a:cs typeface="Arial" pitchFamily="34" charset="-120"/>
                         </a:rPr>
-                        <a:t>$20B Nvidia-led Series E · Q1 2026</a:t>
+                        <a:t>Alphabet (public) · Gemini 3 / DeepMind · ~$85B 2026 capex</a:t>
                       </a:r>
                       <a:endParaRPr lang="en-US" sz="1050" dirty="0">
                         <a:latin typeface="Arial" charset="0"/>
@@ -25286,6 +25515,63 @@
                     <a:bodyPr/>
                     <a:lstStyle/>
                     <a:p>
+                      <a:pPr algn="ctr" indent="0" marL="0">
+                        <a:buNone/>
+                      </a:pPr>
+                      <a:endParaRPr lang="en-US" sz="1150" dirty="0">
+                        <a:latin typeface="Arial" charset="0"/>
+                        <a:ea typeface="Arial" charset="0"/>
+                        <a:cs typeface="Arial" charset="0"/>
+                      </a:endParaRPr>
+                    </a:p>
+                  </a:txBody>
+                  <a:tcPr marL="91440" marR="91440" marT="45720" marB="45720" anchor="ctr">
+                    <a:lnL w="6350" cap="flat" cmpd="sng" algn="ctr">
+                      <a:solidFill>
+                        <a:srgbClr val="E5E5E5"/>
+                      </a:solidFill>
+                      <a:prstDash val="solid"/>
+                      <a:round/>
+                      <a:headEnd type="none" w="med" len="med"/>
+                      <a:tailEnd type="none" w="med" len="med"/>
+                    </a:lnL>
+                    <a:lnR w="6350" cap="flat" cmpd="sng" algn="ctr">
+                      <a:solidFill>
+                        <a:srgbClr val="E5E5E5"/>
+                      </a:solidFill>
+                      <a:prstDash val="solid"/>
+                      <a:round/>
+                      <a:headEnd type="none" w="med" len="med"/>
+                      <a:tailEnd type="none" w="med" len="med"/>
+                    </a:lnR>
+                    <a:lnT w="6350" cap="flat" cmpd="sng" algn="ctr">
+                      <a:solidFill>
+                        <a:srgbClr val="E5E5E5"/>
+                      </a:solidFill>
+                      <a:prstDash val="solid"/>
+                      <a:round/>
+                      <a:headEnd type="none" w="med" len="med"/>
+                      <a:tailEnd type="none" w="med" len="med"/>
+                    </a:lnT>
+                    <a:lnB w="6350" cap="flat" cmpd="sng" algn="ctr">
+                      <a:solidFill>
+                        <a:srgbClr val="E5E5E5"/>
+                      </a:solidFill>
+                      <a:prstDash val="solid"/>
+                      <a:round/>
+                      <a:headEnd type="none" w="med" len="med"/>
+                      <a:tailEnd type="none" w="med" len="med"/>
+                    </a:lnB>
+                    <a:solidFill>
+                      <a:srgbClr val="F9F9F9"/>
+                    </a:solidFill>
+                  </a:tcPr>
+                </a:tc>
+                <a:tc>
+                  <a:txBody>
+                    <a:bodyPr/>
+                    <a:lstStyle/>
+                    <a:p>
                       <a:pPr algn="l" indent="0" marL="0">
                         <a:buNone/>
                       </a:pPr>
@@ -25298,7 +25584,7 @@
                           <a:ea typeface="Arial" pitchFamily="34" charset="-122"/>
                           <a:cs typeface="Arial" pitchFamily="34" charset="-120"/>
                         </a:rPr>
-                        <a:t>Mistral</a:t>
+                        <a:t>xAI</a:t>
                       </a:r>
                       <a:endParaRPr lang="en-US" sz="1150" dirty="0">
                         <a:latin typeface="Arial" charset="0"/>
@@ -25366,7 +25652,7 @@
                           <a:ea typeface="Arial" pitchFamily="34" charset="-122"/>
                           <a:cs typeface="Arial" pitchFamily="34" charset="-120"/>
                         </a:rPr>
-                        <a:t>$14B</a:t>
+                        <a:t>$230B</a:t>
                       </a:r>
                       <a:endParaRPr lang="en-US" sz="1150" dirty="0">
                         <a:latin typeface="Arial" charset="0"/>
@@ -25434,7 +25720,7 @@
                           <a:ea typeface="Arial" pitchFamily="34" charset="-122"/>
                           <a:cs typeface="Arial" pitchFamily="34" charset="-120"/>
                         </a:rPr>
-                        <a:t>~14× ARR</a:t>
+                        <a:t>~77× ARR*</a:t>
                       </a:r>
                       <a:endParaRPr lang="en-US" sz="1150" dirty="0">
                         <a:latin typeface="Arial" charset="0"/>
@@ -25502,7 +25788,7 @@
                           <a:ea typeface="Arial" pitchFamily="34" charset="-122"/>
                           <a:cs typeface="Arial" pitchFamily="34" charset="-120"/>
                         </a:rPr>
-                        <a:t>€1.7B Series C · Jun 2024</a:t>
+                        <a:t>$20B Nvidia-led Series E · Q1 2026</a:t>
                       </a:r>
                       <a:endParaRPr lang="en-US" sz="1050" dirty="0">
                         <a:latin typeface="Arial" charset="0"/>
@@ -25558,9 +25844,101 @@
           </a:graphicData>
         </a:graphic>
       </p:graphicFrame>
-      <p:sp>
-        <p:nvSpPr>
-          <p:cNvPr id="8" name="Shape 5"/>
+      <p:pic>
+        <p:nvPicPr>
+          <p:cNvPr id="8" name="Image 0" descr="logos/openai.png">    </p:cNvPr>
+          <p:cNvPicPr>
+            <a:picLocks noChangeAspect="1"/>
+          </p:cNvPicPr>
+          <p:nvPr/>
+        </p:nvPicPr>
+        <p:blipFill>
+          <a:blip r:embed="rId1"/>
+          <a:srcRect l="0" r="0" t="0" b="0"/>
+          <a:stretch/>
+        </p:blipFill>
+        <p:spPr>
+          <a:xfrm>
+            <a:off x="594360" y="2308860"/>
+            <a:ext cx="365760" cy="365760"/>
+          </a:xfrm>
+          <a:prstGeom prst="rect">
+            <a:avLst/>
+          </a:prstGeom>
+        </p:spPr>
+      </p:pic>
+      <p:pic>
+        <p:nvPicPr>
+          <p:cNvPr id="9" name="Image 1" descr="logos/anthropic.png">    </p:cNvPr>
+          <p:cNvPicPr>
+            <a:picLocks noChangeAspect="1"/>
+          </p:cNvPicPr>
+          <p:nvPr/>
+        </p:nvPicPr>
+        <p:blipFill>
+          <a:blip r:embed="rId2"/>
+          <a:srcRect l="0" r="0" t="0" b="0"/>
+          <a:stretch/>
+        </p:blipFill>
+        <p:spPr>
+          <a:xfrm>
+            <a:off x="594360" y="2811780"/>
+            <a:ext cx="365760" cy="365760"/>
+          </a:xfrm>
+          <a:prstGeom prst="rect">
+            <a:avLst/>
+          </a:prstGeom>
+        </p:spPr>
+      </p:pic>
+      <p:pic>
+        <p:nvPicPr>
+          <p:cNvPr id="10" name="Image 2" descr="logos/google.png">    </p:cNvPr>
+          <p:cNvPicPr>
+            <a:picLocks noChangeAspect="1"/>
+          </p:cNvPicPr>
+          <p:nvPr/>
+        </p:nvPicPr>
+        <p:blipFill>
+          <a:blip r:embed="rId3"/>
+          <a:srcRect l="0" r="0" t="0" b="0"/>
+          <a:stretch/>
+        </p:blipFill>
+        <p:spPr>
+          <a:xfrm>
+            <a:off x="594360" y="3314700"/>
+            <a:ext cx="365760" cy="365760"/>
+          </a:xfrm>
+          <a:prstGeom prst="rect">
+            <a:avLst/>
+          </a:prstGeom>
+        </p:spPr>
+      </p:pic>
+      <p:pic>
+        <p:nvPicPr>
+          <p:cNvPr id="11" name="Image 3" descr="logos/xai.png">    </p:cNvPr>
+          <p:cNvPicPr>
+            <a:picLocks noChangeAspect="1"/>
+          </p:cNvPicPr>
+          <p:nvPr/>
+        </p:nvPicPr>
+        <p:blipFill>
+          <a:blip r:embed="rId4"/>
+          <a:srcRect l="0" r="0" t="0" b="0"/>
+          <a:stretch/>
+        </p:blipFill>
+        <p:spPr>
+          <a:xfrm>
+            <a:off x="594360" y="3817620"/>
+            <a:ext cx="365760" cy="365760"/>
+          </a:xfrm>
+          <a:prstGeom prst="rect">
+            <a:avLst/>
+          </a:prstGeom>
+        </p:spPr>
+      </p:pic>
+      <p:sp>
+        <p:nvSpPr>
+          <p:cNvPr id="12" name="Shape 5"/>
           <p:cNvSpPr/>
           <p:nvPr/>
         </p:nvSpPr>
@@ -25585,7 +25963,7 @@
       </p:sp>
       <p:sp>
         <p:nvSpPr>
-          <p:cNvPr id="9" name="Text 6"/>
+          <p:cNvPr id="13" name="Text 6"/>
           <p:cNvSpPr/>
           <p:nvPr/>
         </p:nvSpPr>
@@ -25624,7 +26002,7 @@
       </p:sp>
       <p:sp>
         <p:nvSpPr>
-          <p:cNvPr id="10" name="Text 7"/>
+          <p:cNvPr id="14" name="Text 7"/>
           <p:cNvSpPr/>
           <p:nvPr/>
         </p:nvSpPr>
@@ -25655,7 +26033,7 @@
                 <a:ea typeface="Arial" pitchFamily="34" charset="-122"/>
                 <a:cs typeface="Arial" pitchFamily="34" charset="-120"/>
               </a:rPr>
-              <a:t>Sources: TechCrunch, CNBC, Tech-Insider (Apr 2026); Crunchbase Q1 2026 VC data; Sacra ARR run-rates; Bloomberg. *xAI ARR estimated.</a:t>
+              <a:t>Sources: TechCrunch, CNBC, Tech-Insider (Apr 2026); Crunchbase Q1 2026 VC data; Sacra ARR run-rates; Bloomberg; Alphabet 10-K &amp; 2026 capex guide. *xAI ARR estimated.</a:t>
             </a:r>
             <a:endParaRPr lang="en-US" sz="700" dirty="0"/>
           </a:p>
@@ -25663,7 +26041,7 @@
       </p:sp>
       <p:sp>
         <p:nvSpPr>
-          <p:cNvPr id="11" name="Shape 8"/>
+          <p:cNvPr id="15" name="Shape 8"/>
           <p:cNvSpPr/>
           <p:nvPr/>
         </p:nvSpPr>
@@ -25688,7 +26066,7 @@
       </p:sp>
       <p:sp>
         <p:nvSpPr>
-          <p:cNvPr id="12" name="Text 9"/>
+          <p:cNvPr id="16" name="Text 9"/>
           <p:cNvSpPr/>
           <p:nvPr/>
         </p:nvSpPr>
@@ -25727,7 +26105,7 @@
       </p:sp>
       <p:sp>
         <p:nvSpPr>
-          <p:cNvPr id="13" name="Text 10"/>
+          <p:cNvPr id="17" name="Text 10"/>
           <p:cNvSpPr/>
           <p:nvPr/>
         </p:nvSpPr>

--- a/ai-markets-deck.pptx
+++ b/ai-markets-deck.pptx
@@ -1848,466 +1848,6 @@
     <c:autoTitleDeleted val="1"/>
     <c:plotArea>
       <c:layout/>
-      <c:scatterChart>
-        <c:scatterStyle val="lineMarker"/>
-        <c:varyColors val="0"/>
-        <c:ser>
-          <c:idx val="0"/>
-          <c:order val="0"/>
-          <c:tx>
-            <c:strRef>
-              <c:f>Sheet1!$B$1</c:f>
-              <c:strCache>
-                <c:ptCount val="1"/>
-                <c:pt idx="0">
-                  <c:v>Top 10 Tech</c:v>
-                </c:pt>
-              </c:strCache>
-            </c:strRef>
-          </c:tx>
-          <c:spPr>
-            <a:solidFill>
-              <a:srgbClr val="FFFFFF"/>
-            </a:solidFill>
-            <a:ln>
-              <a:noFill/>
-            </a:ln>
-            <a:effectLst/>
-          </c:spPr>
-          <c:marker>
-            <c:symbol val="circle"/>
-            <c:size val="9"/>
-            <c:spPr>
-              <a:solidFill>
-                <a:srgbClr val="FFFFFF"/>
-              </a:solidFill>
-              <a:ln w="9525" cap="flat">
-                <a:solidFill>
-                  <a:srgbClr val="FFFFFF"/>
-                </a:solidFill>
-                <a:prstDash val="solid"/>
-                <a:round/>
-              </a:ln>
-              <a:effectLst/>
-            </c:spPr>
-          </c:marker>
-          <c:xVal>
-            <c:numRef>
-              <c:f>Sheet1!$A$2:$A$10</c:f>
-              <c:numCache>
-                <c:formatCode>General</c:formatCode>
-                <c:ptCount val="9"/>
-                <c:pt idx="0">
-                  <c:v>-5</c:v>
-                </c:pt>
-                <c:pt idx="1">
-                  <c:v>0</c:v>
-                </c:pt>
-                <c:pt idx="2">
-                  <c:v>10</c:v>
-                </c:pt>
-                <c:pt idx="3">
-                  <c:v>20</c:v>
-                </c:pt>
-                <c:pt idx="4">
-                  <c:v>30</c:v>
-                </c:pt>
-                <c:pt idx="5">
-                  <c:v>40</c:v>
-                </c:pt>
-                <c:pt idx="6">
-                  <c:v>50</c:v>
-                </c:pt>
-                <c:pt idx="7">
-                  <c:v>60</c:v>
-                </c:pt>
-                <c:pt idx="8">
-                  <c:v>70</c:v>
-                </c:pt>
-              </c:numCache>
-            </c:numRef>
-          </c:xVal>
-          <c:yVal>
-            <c:numRef>
-              <c:f>Sheet1!$B$2:$B$10</c:f>
-              <c:numCache>
-                <c:formatCode>General</c:formatCode>
-                <c:ptCount val="9"/>
-                <c:pt idx="0">
-                  <c:v>28</c:v>
-                </c:pt>
-                <c:pt idx="1">
-                  <c:v>22</c:v>
-                </c:pt>
-                <c:pt idx="2">
-                  <c:v>28</c:v>
-                </c:pt>
-                <c:pt idx="3">
-                  <c:v>20</c:v>
-                </c:pt>
-                <c:pt idx="4">
-                  <c:v>28</c:v>
-                </c:pt>
-                <c:pt idx="5">
-                  <c:v>24</c:v>
-                </c:pt>
-                <c:pt idx="6">
-                  <c:v>19</c:v>
-                </c:pt>
-                <c:pt idx="7">
-                  <c:v>22</c:v>
-                </c:pt>
-                <c:pt idx="8">
-                  <c:v>10</c:v>
-                </c:pt>
-              </c:numCache>
-            </c:numRef>
-          </c:yVal>
-          <c:smooth val="0"/>
-        </c:ser>
-        <c:ser>
-          <c:idx val="1"/>
-          <c:order val="1"/>
-          <c:tx>
-            <c:strRef>
-              <c:f>Sheet1!$C$1</c:f>
-              <c:strCache>
-                <c:ptCount val="1"/>
-                <c:pt idx="0">
-                  <c:v>Top 10 Non-Tech</c:v>
-                </c:pt>
-              </c:strCache>
-            </c:strRef>
-          </c:tx>
-          <c:spPr>
-            <a:solidFill>
-              <a:srgbClr val="FFB800"/>
-            </a:solidFill>
-            <a:ln>
-              <a:noFill/>
-            </a:ln>
-            <a:effectLst/>
-          </c:spPr>
-          <c:marker>
-            <c:symbol val="circle"/>
-            <c:size val="9"/>
-            <c:spPr>
-              <a:solidFill>
-                <a:srgbClr val="FFB800"/>
-              </a:solidFill>
-              <a:ln w="9525" cap="flat">
-                <a:solidFill>
-                  <a:srgbClr val="FFB800"/>
-                </a:solidFill>
-                <a:prstDash val="solid"/>
-                <a:round/>
-              </a:ln>
-              <a:effectLst/>
-            </c:spPr>
-          </c:marker>
-          <c:xVal>
-            <c:numRef>
-              <c:f>Sheet1!$A$2:$A$10</c:f>
-              <c:numCache>
-                <c:formatCode>General</c:formatCode>
-                <c:ptCount val="9"/>
-                <c:pt idx="0">
-                  <c:v>-5</c:v>
-                </c:pt>
-                <c:pt idx="1">
-                  <c:v>0</c:v>
-                </c:pt>
-                <c:pt idx="2">
-                  <c:v>10</c:v>
-                </c:pt>
-                <c:pt idx="3">
-                  <c:v>20</c:v>
-                </c:pt>
-                <c:pt idx="4">
-                  <c:v>30</c:v>
-                </c:pt>
-                <c:pt idx="5">
-                  <c:v>40</c:v>
-                </c:pt>
-                <c:pt idx="6">
-                  <c:v>50</c:v>
-                </c:pt>
-                <c:pt idx="7">
-                  <c:v>60</c:v>
-                </c:pt>
-                <c:pt idx="8">
-                  <c:v>70</c:v>
-                </c:pt>
-              </c:numCache>
-            </c:numRef>
-          </c:xVal>
-          <c:yVal>
-            <c:numRef>
-              <c:f>Sheet1!$C$2:$C$10</c:f>
-              <c:numCache>
-                <c:formatCode>General</c:formatCode>
-                <c:ptCount val="9"/>
-                <c:pt idx="0">
-                  <c:v>34</c:v>
-                </c:pt>
-                <c:pt idx="1">
-                  <c:v>48</c:v>
-                </c:pt>
-                <c:pt idx="2">
-                  <c:v>32</c:v>
-                </c:pt>
-                <c:pt idx="3">
-                  <c:v>24</c:v>
-                </c:pt>
-                <c:pt idx="4">
-                  <c:v>15</c:v>
-                </c:pt>
-                <c:pt idx="5">
-                  <c:v>22</c:v>
-                </c:pt>
-                <c:pt idx="6">
-                  <c:v>18</c:v>
-                </c:pt>
-                <c:pt idx="7">
-                  <c:v>14</c:v>
-                </c:pt>
-                <c:pt idx="8">
-                  <c:v/>
-                </c:pt>
-              </c:numCache>
-            </c:numRef>
-          </c:yVal>
-          <c:smooth val="0"/>
-        </c:ser>
-        <c:dLbls>
-          <c:numFmt formatCode="General" sourceLinked="0"/>
-          <c:txPr>
-            <a:bodyPr/>
-            <a:lstStyle/>
-            <a:p>
-              <a:pPr>
-                <a:defRPr b="0" i="0" strike="noStrike" sz="1200" u="none">
-                  <a:solidFill>
-                    <a:srgbClr val="000000"/>
-                  </a:solidFill>
-                  <a:latin typeface="Arial"/>
-                </a:defRPr>
-              </a:pPr>
-            </a:p>
-          </c:txPr>
-          <c:showLegendKey val="0"/>
-          <c:showVal val="0"/>
-          <c:showCatName val="0"/>
-          <c:showSerName val="0"/>
-          <c:showPercent val="0"/>
-          <c:showBubbleSize val="0"/>
-        </c:dLbls>
-        <c:axId val="2094734554"/>
-        <c:axId val="2094734552"/>
-      </c:scatterChart>
-      <c:valAx>
-        <c:axId val="2094734554"/>
-        <c:scaling>
-          <c:orientation val="minMax"/>
-        </c:scaling>
-        <c:delete val="0"/>
-        <c:axPos val="b"/>
-        <c:title>
-          <c:tx>
-            <c:rich>
-              <a:bodyPr/>
-              <a:lstStyle/>
-              <a:p>
-                <a:pPr>
-                  <a:defRPr sz="800" b="0" i="0" u="none" strike="noStrike">
-                    <a:solidFill>
-                      <a:srgbClr val="666666"/>
-                    </a:solidFill>
-                    <a:latin typeface="Arial"/>
-                  </a:defRPr>
-                </a:pPr>
-                <a:r>
-                  <a:rPr sz="800" b="0" i="0" u="none" strike="noStrike">
-                    <a:solidFill>
-                      <a:srgbClr val="666666"/>
-                    </a:solidFill>
-                    <a:latin typeface="Arial"/>
-                  </a:rPr>
-                  <a:t>Revenue growth, 2026E</a:t>
-                </a:r>
-              </a:p>
-            </c:rich>
-          </c:tx>
-          <c:layout/>
-          <c:overlay val="0"/>
-        </c:title>
-        <c:numFmt formatCode="General" sourceLinked="1"/>
-        <c:majorTickMark val="none"/>
-        <c:minorTickMark val="none"/>
-        <c:tickLblPos val="nextTo"/>
-        <c:spPr>
-          <a:ln w="12700" cap="flat">
-            <a:solidFill>
-              <a:srgbClr val="888888"/>
-            </a:solidFill>
-            <a:prstDash val="solid"/>
-            <a:round/>
-          </a:ln>
-        </c:spPr>
-        <c:txPr>
-          <a:bodyPr/>
-          <a:lstStyle/>
-          <a:p>
-            <a:pPr>
-              <a:defRPr sz="800" b="0" i="0" u="none" strike="noStrike">
-                <a:solidFill>
-                  <a:srgbClr val="999999"/>
-                </a:solidFill>
-                <a:latin typeface="Arial"/>
-              </a:defRPr>
-            </a:pPr>
-            <a:endParaRPr lang="en-US"/>
-          </a:p>
-        </c:txPr>
-        <c:crossAx val="2094734552"/>
-        <c:crosses val="autoZero"/>
-        <c:auto val="1"/>
-        <c:lblAlgn val="ctr"/>
-        <c:noMultiLvlLbl val="1"/>
-      </c:valAx>
-      <c:valAx>
-        <c:axId val="2094734552"/>
-        <c:scaling>
-          <c:orientation val="minMax"/>
-          <c:max val="55"/>
-          <c:min val="0"/>
-        </c:scaling>
-        <c:delete val="0"/>
-        <c:axPos val="l"/>
-        <c:majorGridlines>
-          <c:spPr>
-            <a:ln w="6350" cap="flat">
-              <a:solidFill>
-                <a:srgbClr val="EEEEEE"/>
-              </a:solidFill>
-              <a:prstDash val="solid"/>
-              <a:round/>
-            </a:ln>
-          </c:spPr>
-        </c:majorGridlines>
-        <c:title>
-          <c:tx>
-            <c:rich>
-              <a:bodyPr/>
-              <a:lstStyle/>
-              <a:p>
-                <a:pPr>
-                  <a:defRPr sz="800" b="0" i="0" u="none" strike="noStrike">
-                    <a:solidFill>
-                      <a:srgbClr val="666666"/>
-                    </a:solidFill>
-                    <a:latin typeface="Arial"/>
-                  </a:defRPr>
-                </a:pPr>
-                <a:r>
-                  <a:rPr sz="800" b="0" i="0" u="none" strike="noStrike">
-                    <a:solidFill>
-                      <a:srgbClr val="666666"/>
-                    </a:solidFill>
-                    <a:latin typeface="Arial"/>
-                  </a:rPr>
-                  <a:t>P/E, 2026E</a:t>
-                </a:r>
-              </a:p>
-            </c:rich>
-          </c:tx>
-          <c:layout/>
-          <c:overlay val="0"/>
-        </c:title>
-        <c:numFmt formatCode="General" sourceLinked="0"/>
-        <c:majorTickMark val="none"/>
-        <c:minorTickMark val="none"/>
-        <c:tickLblPos val="nextTo"/>
-        <c:spPr>
-          <a:ln w="12700" cap="flat">
-            <a:solidFill>
-              <a:srgbClr val="888888"/>
-            </a:solidFill>
-            <a:prstDash val="solid"/>
-            <a:round/>
-          </a:ln>
-        </c:spPr>
-        <c:txPr>
-          <a:bodyPr/>
-          <a:lstStyle/>
-          <a:p>
-            <a:pPr>
-              <a:defRPr sz="800" b="0" i="0" u="none" strike="noStrike">
-                <a:solidFill>
-                  <a:srgbClr val="999999"/>
-                </a:solidFill>
-                <a:latin typeface="Arial"/>
-              </a:defRPr>
-            </a:pPr>
-            <a:endParaRPr lang="en-US"/>
-          </a:p>
-        </c:txPr>
-        <c:crossAx val="2094734554"/>
-        <c:crosses val="autoZero"/>
-        <c:crossBetween val="midCat"/>
-        <c:majorUnit val="10"/>
-      </c:valAx>
-      <c:spPr>
-        <a:noFill/>
-        <a:ln>
-          <a:noFill/>
-        </a:ln>
-        <a:effectLst/>
-      </c:spPr>
-    </c:plotArea>
-    <c:legend>
-      <c:legendPos val="b"/>
-      <c:overlay val="0"/>
-      <c:txPr>
-        <a:bodyPr/>
-        <a:lstStyle/>
-        <a:p>
-          <a:pPr>
-            <a:defRPr sz="800">
-              <a:solidFill>
-                <a:srgbClr val="666666"/>
-              </a:solidFill>
-            </a:defRPr>
-          </a:pPr>
-          <a:endParaRPr lang="en-US"/>
-        </a:p>
-      </c:txPr>
-    </c:legend>
-    <c:plotVisOnly val="1"/>
-    <c:dispBlanksAs val="span"/>
-    <c:showDLblsOverMax val="1"/>
-  </c:chart>
-  <c:spPr>
-    <a:noFill/>
-    <a:ln>
-      <a:noFill/>
-    </a:ln>
-    <a:effectLst/>
-  </c:spPr>
-  <c:externalData r:id="rId1">
-    <c:autoUpdate val="0"/>
-  </c:externalData>
-</c:chartSpace>
-</file>
-
-<file path=ppt/charts/chart6.xml><?xml version="1.0" encoding="utf-8"?>
-<c:chartSpace xmlns:c="http://schemas.openxmlformats.org/drawingml/2006/chart" xmlns:a="http://schemas.openxmlformats.org/drawingml/2006/main" xmlns:r="http://schemas.openxmlformats.org/officeDocument/2006/relationships">
-  <c:date1904 val="0"/>
-  <c:roundedCorners val="1"/>
-  <c:chart>
-    <c:autoTitleDeleted val="1"/>
-    <c:plotArea>
-      <c:layout/>
       <c:lineChart>
         <c:varyColors val="0"/>
         <c:ser>
@@ -5332,7 +4872,7 @@
                 <a:ea typeface="Arial" pitchFamily="34" charset="-122"/>
                 <a:cs typeface="Arial" pitchFamily="34" charset="-120"/>
               </a:rPr>
-              <a:t>IMAGE: Hero — abstract GPU / data-center close-up</a:t>
+              <a:t>IMAGE: Hero — macro GPU silicon die, warm orange rim light on graphite black</a:t>
             </a:r>
             <a:endParaRPr lang="en-US" sz="1000" dirty="0"/>
           </a:p>
@@ -6899,7 +6439,7 @@
                 <a:ea typeface="Arial" pitchFamily="34" charset="-122"/>
                 <a:cs typeface="Arial" pitchFamily="34" charset="-120"/>
               </a:rPr>
-              <a:t>IMAGE: Agent UI — terminal / IDE with an AI coworker session (e.g. Claude Code)</a:t>
+              <a:t>IMAGE: Screenshot — dark-themed IDE with AI coworker editing code, orange accents</a:t>
             </a:r>
             <a:endParaRPr lang="en-US" sz="1000" dirty="0"/>
           </a:p>
@@ -10099,6 +9639,70 @@
         </p:nvSpPr>
         <p:spPr>
           <a:xfrm>
+            <a:off x="457200" y="3337560"/>
+            <a:ext cx="8229600" cy="502920"/>
+          </a:xfrm>
+          <a:prstGeom prst="rect">
+            <a:avLst/>
+          </a:prstGeom>
+          <a:solidFill>
+            <a:srgbClr val="EEEEEE"/>
+          </a:solidFill>
+          <a:ln w="9525">
+            <a:solidFill>
+              <a:srgbClr val="BBBBBB"/>
+            </a:solidFill>
+            <a:prstDash val="dash"/>
+          </a:ln>
+        </p:spPr>
+      </p:sp>
+      <p:sp>
+        <p:nvSpPr>
+          <p:cNvPr id="16" name="Text 14"/>
+          <p:cNvSpPr/>
+          <p:nvPr/>
+        </p:nvSpPr>
+        <p:spPr>
+          <a:xfrm>
+            <a:off x="548640" y="3337560"/>
+            <a:ext cx="8046720" cy="502920"/>
+          </a:xfrm>
+          <a:prstGeom prst="rect">
+            <a:avLst/>
+          </a:prstGeom>
+          <a:noFill/>
+          <a:ln/>
+        </p:spPr>
+        <p:txBody>
+          <a:bodyPr wrap="square" lIns="0" tIns="0" rIns="0" bIns="0" rtlCol="0" anchor="ctr"/>
+          <a:lstStyle/>
+          <a:p>
+            <a:pPr algn="ctr" indent="0" marL="0">
+              <a:buNone/>
+            </a:pPr>
+            <a:r>
+              <a:rPr lang="en-US" sz="1000" i="1" dirty="0">
+                <a:solidFill>
+                  <a:srgbClr val="888888"/>
+                </a:solidFill>
+                <a:latin typeface="Arial" pitchFamily="34" charset="0"/>
+                <a:ea typeface="Arial" pitchFamily="34" charset="-122"/>
+                <a:cs typeface="Arial" pitchFamily="34" charset="-120"/>
+              </a:rPr>
+              <a:t>IMAGE: Cinematic — wide fab cleanroom panorama, bunny-suited techs, orange photolith glow</a:t>
+            </a:r>
+            <a:endParaRPr lang="en-US" sz="1000" dirty="0"/>
+          </a:p>
+        </p:txBody>
+      </p:sp>
+      <p:sp>
+        <p:nvSpPr>
+          <p:cNvPr id="17" name="Shape 15"/>
+          <p:cNvSpPr/>
+          <p:nvPr/>
+        </p:nvSpPr>
+        <p:spPr>
+          <a:xfrm>
             <a:off x="457200" y="3931920"/>
             <a:ext cx="8229600" cy="320040"/>
           </a:xfrm>
@@ -10118,7 +9722,7 @@
       </p:sp>
       <p:sp>
         <p:nvSpPr>
-          <p:cNvPr id="16" name="Text 14"/>
+          <p:cNvPr id="18" name="Text 16"/>
           <p:cNvSpPr/>
           <p:nvPr/>
         </p:nvSpPr>
@@ -10157,7 +9761,7 @@
       </p:sp>
       <p:sp>
         <p:nvSpPr>
-          <p:cNvPr id="17" name="Shape 15"/>
+          <p:cNvPr id="19" name="Shape 17"/>
           <p:cNvSpPr/>
           <p:nvPr/>
         </p:nvSpPr>
@@ -10182,7 +9786,7 @@
       </p:sp>
       <p:sp>
         <p:nvSpPr>
-          <p:cNvPr id="18" name="Text 16"/>
+          <p:cNvPr id="20" name="Text 18"/>
           <p:cNvSpPr/>
           <p:nvPr/>
         </p:nvSpPr>
@@ -10221,7 +9825,7 @@
       </p:sp>
       <p:sp>
         <p:nvSpPr>
-          <p:cNvPr id="19" name="Text 17"/>
+          <p:cNvPr id="21" name="Text 19"/>
           <p:cNvSpPr/>
           <p:nvPr/>
         </p:nvSpPr>
@@ -10260,7 +9864,7 @@
       </p:sp>
       <p:sp>
         <p:nvSpPr>
-          <p:cNvPr id="20" name="Shape 18"/>
+          <p:cNvPr id="22" name="Shape 20"/>
           <p:cNvSpPr/>
           <p:nvPr/>
         </p:nvSpPr>
@@ -10285,7 +9889,7 @@
       </p:sp>
       <p:sp>
         <p:nvSpPr>
-          <p:cNvPr id="21" name="Text 19"/>
+          <p:cNvPr id="23" name="Text 21"/>
           <p:cNvSpPr/>
           <p:nvPr/>
         </p:nvSpPr>
@@ -10324,7 +9928,7 @@
       </p:sp>
       <p:sp>
         <p:nvSpPr>
-          <p:cNvPr id="22" name="Text 20"/>
+          <p:cNvPr id="24" name="Text 22"/>
           <p:cNvSpPr/>
           <p:nvPr/>
         </p:nvSpPr>
@@ -10363,7 +9967,7 @@
       </p:sp>
       <p:sp>
         <p:nvSpPr>
-          <p:cNvPr id="23" name="Shape 21"/>
+          <p:cNvPr id="25" name="Shape 23"/>
           <p:cNvSpPr/>
           <p:nvPr/>
         </p:nvSpPr>
@@ -10388,7 +9992,7 @@
       </p:sp>
       <p:sp>
         <p:nvSpPr>
-          <p:cNvPr id="24" name="Text 22"/>
+          <p:cNvPr id="26" name="Text 24"/>
           <p:cNvSpPr/>
           <p:nvPr/>
         </p:nvSpPr>
@@ -10427,7 +10031,7 @@
       </p:sp>
       <p:sp>
         <p:nvSpPr>
-          <p:cNvPr id="25" name="Text 23"/>
+          <p:cNvPr id="27" name="Text 25"/>
           <p:cNvSpPr/>
           <p:nvPr/>
         </p:nvSpPr>
@@ -10466,7 +10070,7 @@
       </p:sp>
       <p:sp>
         <p:nvSpPr>
-          <p:cNvPr id="26" name="Shape 24"/>
+          <p:cNvPr id="28" name="Shape 26"/>
           <p:cNvSpPr/>
           <p:nvPr/>
         </p:nvSpPr>
@@ -10491,7 +10095,7 @@
       </p:sp>
       <p:sp>
         <p:nvSpPr>
-          <p:cNvPr id="27" name="Text 25"/>
+          <p:cNvPr id="29" name="Text 27"/>
           <p:cNvSpPr/>
           <p:nvPr/>
         </p:nvSpPr>
@@ -10530,7 +10134,7 @@
       </p:sp>
       <p:sp>
         <p:nvSpPr>
-          <p:cNvPr id="28" name="Text 26"/>
+          <p:cNvPr id="30" name="Text 28"/>
           <p:cNvSpPr/>
           <p:nvPr/>
         </p:nvSpPr>
@@ -10569,7 +10173,7 @@
       </p:sp>
       <p:sp>
         <p:nvSpPr>
-          <p:cNvPr id="29" name="Shape 27"/>
+          <p:cNvPr id="31" name="Shape 29"/>
           <p:cNvSpPr/>
           <p:nvPr/>
         </p:nvSpPr>
@@ -10594,7 +10198,7 @@
       </p:sp>
       <p:sp>
         <p:nvSpPr>
-          <p:cNvPr id="30" name="Text 28"/>
+          <p:cNvPr id="32" name="Text 30"/>
           <p:cNvSpPr/>
           <p:nvPr/>
         </p:nvSpPr>
@@ -10633,7 +10237,7 @@
       </p:sp>
       <p:sp>
         <p:nvSpPr>
-          <p:cNvPr id="31" name="Text 29"/>
+          <p:cNvPr id="33" name="Text 31"/>
           <p:cNvSpPr/>
           <p:nvPr/>
         </p:nvSpPr>
@@ -10672,7 +10276,7 @@
       </p:sp>
       <p:sp>
         <p:nvSpPr>
-          <p:cNvPr id="32" name="Shape 30"/>
+          <p:cNvPr id="34" name="Shape 32"/>
           <p:cNvSpPr/>
           <p:nvPr/>
         </p:nvSpPr>
@@ -10697,7 +10301,7 @@
       </p:sp>
       <p:sp>
         <p:nvSpPr>
-          <p:cNvPr id="33" name="Text 31"/>
+          <p:cNvPr id="35" name="Text 33"/>
           <p:cNvSpPr/>
           <p:nvPr/>
         </p:nvSpPr>
@@ -10736,7 +10340,7 @@
       </p:sp>
       <p:sp>
         <p:nvSpPr>
-          <p:cNvPr id="34" name="Text 32"/>
+          <p:cNvPr id="36" name="Text 34"/>
           <p:cNvSpPr/>
           <p:nvPr/>
         </p:nvSpPr>
@@ -12366,6 +11970,70 @@
         </p:nvSpPr>
         <p:spPr>
           <a:xfrm>
+            <a:off x="457200" y="3291840"/>
+            <a:ext cx="8229600" cy="502920"/>
+          </a:xfrm>
+          <a:prstGeom prst="rect">
+            <a:avLst/>
+          </a:prstGeom>
+          <a:solidFill>
+            <a:srgbClr val="EEEEEE"/>
+          </a:solidFill>
+          <a:ln w="9525">
+            <a:solidFill>
+              <a:srgbClr val="BBBBBB"/>
+            </a:solidFill>
+            <a:prstDash val="dash"/>
+          </a:ln>
+        </p:spPr>
+      </p:sp>
+      <p:sp>
+        <p:nvSpPr>
+          <p:cNvPr id="14" name="Text 12"/>
+          <p:cNvSpPr/>
+          <p:nvPr/>
+        </p:nvSpPr>
+        <p:spPr>
+          <a:xfrm>
+            <a:off x="548640" y="3291840"/>
+            <a:ext cx="8046720" cy="502920"/>
+          </a:xfrm>
+          <a:prstGeom prst="rect">
+            <a:avLst/>
+          </a:prstGeom>
+          <a:noFill/>
+          <a:ln/>
+        </p:spPr>
+        <p:txBody>
+          <a:bodyPr wrap="square" lIns="0" tIns="0" rIns="0" bIns="0" rtlCol="0" anchor="ctr"/>
+          <a:lstStyle/>
+          <a:p>
+            <a:pPr algn="ctr" indent="0" marL="0">
+              <a:buNone/>
+            </a:pPr>
+            <a:r>
+              <a:rPr lang="en-US" sz="1000" i="1" dirty="0">
+                <a:solidFill>
+                  <a:srgbClr val="888888"/>
+                </a:solidFill>
+                <a:latin typeface="Arial" pitchFamily="34" charset="0"/>
+                <a:ea typeface="Arial" pitchFamily="34" charset="-122"/>
+                <a:cs typeface="Arial" pitchFamily="34" charset="-120"/>
+              </a:rPr>
+              <a:t>IMAGE: Photojournalism — hand-lettered 'STOP THE AI RACE' signs at a dusk rally</a:t>
+            </a:r>
+            <a:endParaRPr lang="en-US" sz="1000" dirty="0"/>
+          </a:p>
+        </p:txBody>
+      </p:sp>
+      <p:sp>
+        <p:nvSpPr>
+          <p:cNvPr id="15" name="Shape 13"/>
+          <p:cNvSpPr/>
+          <p:nvPr/>
+        </p:nvSpPr>
+        <p:spPr>
+          <a:xfrm>
             <a:off x="457200" y="3840480"/>
             <a:ext cx="2697480" cy="320040"/>
           </a:xfrm>
@@ -12385,7 +12053,7 @@
       </p:sp>
       <p:sp>
         <p:nvSpPr>
-          <p:cNvPr id="14" name="Text 12"/>
+          <p:cNvPr id="16" name="Text 14"/>
           <p:cNvSpPr/>
           <p:nvPr/>
         </p:nvSpPr>
@@ -12424,7 +12092,7 @@
       </p:sp>
       <p:sp>
         <p:nvSpPr>
-          <p:cNvPr id="15" name="Text 13"/>
+          <p:cNvPr id="17" name="Text 15"/>
           <p:cNvSpPr/>
           <p:nvPr/>
         </p:nvSpPr>
@@ -12463,7 +12131,7 @@
       </p:sp>
       <p:sp>
         <p:nvSpPr>
-          <p:cNvPr id="16" name="Shape 14"/>
+          <p:cNvPr id="18" name="Shape 16"/>
           <p:cNvSpPr/>
           <p:nvPr/>
         </p:nvSpPr>
@@ -12488,7 +12156,7 @@
       </p:sp>
       <p:sp>
         <p:nvSpPr>
-          <p:cNvPr id="17" name="Text 15"/>
+          <p:cNvPr id="19" name="Text 17"/>
           <p:cNvSpPr/>
           <p:nvPr/>
         </p:nvSpPr>
@@ -12527,7 +12195,7 @@
       </p:sp>
       <p:sp>
         <p:nvSpPr>
-          <p:cNvPr id="18" name="Text 16"/>
+          <p:cNvPr id="20" name="Text 18"/>
           <p:cNvSpPr/>
           <p:nvPr/>
         </p:nvSpPr>
@@ -12566,7 +12234,7 @@
       </p:sp>
       <p:sp>
         <p:nvSpPr>
-          <p:cNvPr id="19" name="Shape 17"/>
+          <p:cNvPr id="21" name="Shape 19"/>
           <p:cNvSpPr/>
           <p:nvPr/>
         </p:nvSpPr>
@@ -12591,7 +12259,7 @@
       </p:sp>
       <p:sp>
         <p:nvSpPr>
-          <p:cNvPr id="20" name="Text 18"/>
+          <p:cNvPr id="22" name="Text 20"/>
           <p:cNvSpPr/>
           <p:nvPr/>
         </p:nvSpPr>
@@ -12630,7 +12298,7 @@
       </p:sp>
       <p:sp>
         <p:nvSpPr>
-          <p:cNvPr id="21" name="Text 19"/>
+          <p:cNvPr id="23" name="Text 21"/>
           <p:cNvSpPr/>
           <p:nvPr/>
         </p:nvSpPr>
@@ -12669,7 +12337,7 @@
       </p:sp>
       <p:sp>
         <p:nvSpPr>
-          <p:cNvPr id="22" name="Text 20"/>
+          <p:cNvPr id="24" name="Text 22"/>
           <p:cNvSpPr/>
           <p:nvPr/>
         </p:nvSpPr>
@@ -12708,7 +12376,7 @@
       </p:sp>
       <p:sp>
         <p:nvSpPr>
-          <p:cNvPr id="23" name="Shape 21"/>
+          <p:cNvPr id="25" name="Shape 23"/>
           <p:cNvSpPr/>
           <p:nvPr/>
         </p:nvSpPr>
@@ -12733,7 +12401,7 @@
       </p:sp>
       <p:sp>
         <p:nvSpPr>
-          <p:cNvPr id="24" name="Text 22"/>
+          <p:cNvPr id="26" name="Text 24"/>
           <p:cNvSpPr/>
           <p:nvPr/>
         </p:nvSpPr>
@@ -12772,7 +12440,7 @@
       </p:sp>
       <p:sp>
         <p:nvSpPr>
-          <p:cNvPr id="25" name="Text 23"/>
+          <p:cNvPr id="27" name="Text 25"/>
           <p:cNvSpPr/>
           <p:nvPr/>
         </p:nvSpPr>
@@ -13059,7 +12727,7 @@
                 <a:ea typeface="Arial" pitchFamily="34" charset="-122"/>
                 <a:cs typeface="Arial" pitchFamily="34" charset="-120"/>
               </a:rPr>
-              <a:t>IMAGE: Render — orbital data-center satellite (solar wings, Earth below)</a:t>
+              <a:t>IMAGE: Render — orbital data-center satellite with solar wings above Earth's limb at dawn</a:t>
             </a:r>
             <a:endParaRPr lang="en-US" sz="1000" dirty="0"/>
           </a:p>
@@ -13919,7 +13587,7 @@
                 <a:ea typeface="Arial" pitchFamily="34" charset="-122"/>
                 <a:cs typeface="Arial" pitchFamily="34" charset="-120"/>
               </a:rPr>
-              <a:t>IMAGE: Photo — humanoid robot on a factory / warehouse floor</a:t>
+              <a:t>IMAGE: Photo — humanoid robot mid-stride on a factory floor, warm work-light, motion blur</a:t>
             </a:r>
             <a:endParaRPr lang="en-US" sz="1000" dirty="0"/>
           </a:p>
@@ -14779,7 +14447,7 @@
                 <a:ea typeface="Arial" pitchFamily="34" charset="-122"/>
                 <a:cs typeface="Arial" pitchFamily="34" charset="-120"/>
               </a:rPr>
-              <a:t>IMAGE: AV sensor-visualization or fleet photo (Waymo / Tesla FSD)</a:t>
+              <a:t>IMAGE: Photo — Waymo robotaxi on a rainy city street at dusk, sensor pod lit, long exposure</a:t>
             </a:r>
             <a:endParaRPr lang="en-US" sz="1000" dirty="0"/>
           </a:p>
@@ -15639,7 +15307,7 @@
                 <a:ea typeface="Arial" pitchFamily="34" charset="-122"/>
                 <a:cs typeface="Arial" pitchFamily="34" charset="-120"/>
               </a:rPr>
-              <a:t>IMAGE: Protein structure render / AI drug-design visual (AlphaFold-style ribbon diagram)</a:t>
+              <a:t>IMAGE: Render — ribbon-diagram protein structure in orange against graphite black, shallow DOF</a:t>
             </a:r>
             <a:endParaRPr lang="en-US" sz="1000" dirty="0"/>
           </a:p>
@@ -16731,8 +16399,8 @@
         </p:nvSpPr>
         <p:spPr>
           <a:xfrm>
-            <a:off x="356616" y="2514600"/>
-            <a:ext cx="1554480" cy="640080"/>
+            <a:off x="356616" y="2468880"/>
+            <a:ext cx="1554480" cy="548640"/>
           </a:xfrm>
           <a:prstGeom prst="rect">
             <a:avLst/>
@@ -16748,7 +16416,7 @@
               <a:buNone/>
             </a:pPr>
             <a:r>
-              <a:rPr lang="en-US" sz="3000" b="1" dirty="0">
+              <a:rPr lang="en-US" sz="2600" b="1" dirty="0">
                 <a:solidFill>
                   <a:srgbClr val="008B8B"/>
                 </a:solidFill>
@@ -16758,7 +16426,7 @@
               </a:rPr>
               <a:t>01</a:t>
             </a:r>
-            <a:endParaRPr lang="en-US" sz="3000" dirty="0"/>
+            <a:endParaRPr lang="en-US" sz="2600" dirty="0"/>
           </a:p>
         </p:txBody>
       </p:sp>
@@ -16770,8 +16438,8 @@
         </p:nvSpPr>
         <p:spPr>
           <a:xfrm>
-            <a:off x="356616" y="3246120"/>
-            <a:ext cx="1554480" cy="274320"/>
+            <a:off x="356616" y="3063240"/>
+            <a:ext cx="1554480" cy="256032"/>
           </a:xfrm>
           <a:prstGeom prst="rect">
             <a:avLst/>
@@ -16809,8 +16477,8 @@
         </p:nvSpPr>
         <p:spPr>
           <a:xfrm>
-            <a:off x="466344" y="3657600"/>
-            <a:ext cx="1335024" cy="731520"/>
+            <a:off x="466344" y="3383280"/>
+            <a:ext cx="1335024" cy="640080"/>
           </a:xfrm>
           <a:prstGeom prst="rect">
             <a:avLst/>
@@ -16842,7 +16510,71 @@
       </p:sp>
       <p:sp>
         <p:nvSpPr>
-          <p:cNvPr id="12" name="Text 10"/>
+          <p:cNvPr id="12" name="Shape 10"/>
+          <p:cNvSpPr/>
+          <p:nvPr/>
+        </p:nvSpPr>
+        <p:spPr>
+          <a:xfrm>
+            <a:off x="448056" y="4160520"/>
+            <a:ext cx="1371600" cy="502920"/>
+          </a:xfrm>
+          <a:prstGeom prst="rect">
+            <a:avLst/>
+          </a:prstGeom>
+          <a:solidFill>
+            <a:srgbClr val="555555"/>
+          </a:solidFill>
+          <a:ln w="6350">
+            <a:solidFill>
+              <a:srgbClr val="666666"/>
+            </a:solidFill>
+            <a:prstDash val="dash"/>
+          </a:ln>
+        </p:spPr>
+      </p:sp>
+      <p:sp>
+        <p:nvSpPr>
+          <p:cNvPr id="13" name="Text 11"/>
+          <p:cNvSpPr/>
+          <p:nvPr/>
+        </p:nvSpPr>
+        <p:spPr>
+          <a:xfrm>
+            <a:off x="448056" y="4160520"/>
+            <a:ext cx="1371600" cy="502920"/>
+          </a:xfrm>
+          <a:prstGeom prst="rect">
+            <a:avLst/>
+          </a:prstGeom>
+          <a:noFill/>
+          <a:ln/>
+        </p:spPr>
+        <p:txBody>
+          <a:bodyPr wrap="square" lIns="0" tIns="0" rIns="0" bIns="0" rtlCol="0" anchor="ctr"/>
+          <a:lstStyle/>
+          <a:p>
+            <a:pPr algn="ctr" indent="0" marL="0">
+              <a:buNone/>
+            </a:pPr>
+            <a:r>
+              <a:rPr lang="en-US" sz="700" i="1" dirty="0">
+                <a:solidFill>
+                  <a:srgbClr val="AAAAAA"/>
+                </a:solidFill>
+                <a:latin typeface="Arial" pitchFamily="34" charset="0"/>
+                <a:ea typeface="Arial" pitchFamily="34" charset="-122"/>
+                <a:cs typeface="Arial" pitchFamily="34" charset="-120"/>
+              </a:rPr>
+              <a:t>IMG: server rack glow, teal tint</a:t>
+            </a:r>
+            <a:endParaRPr lang="en-US" sz="700" dirty="0"/>
+          </a:p>
+        </p:txBody>
+      </p:sp>
+      <p:sp>
+        <p:nvSpPr>
+          <p:cNvPr id="14" name="Text 12"/>
           <p:cNvSpPr/>
           <p:nvPr/>
         </p:nvSpPr>
@@ -16881,7 +16613,7 @@
       </p:sp>
       <p:sp>
         <p:nvSpPr>
-          <p:cNvPr id="13" name="Shape 11"/>
+          <p:cNvPr id="15" name="Shape 13"/>
           <p:cNvSpPr/>
           <p:nvPr/>
         </p:nvSpPr>
@@ -16906,7 +16638,7 @@
       </p:sp>
       <p:sp>
         <p:nvSpPr>
-          <p:cNvPr id="14" name="Shape 12"/>
+          <p:cNvPr id="16" name="Shape 14"/>
           <p:cNvSpPr/>
           <p:nvPr/>
         </p:nvSpPr>
@@ -16931,14 +16663,14 @@
       </p:sp>
       <p:sp>
         <p:nvSpPr>
-          <p:cNvPr id="15" name="Text 13"/>
-          <p:cNvSpPr/>
-          <p:nvPr/>
-        </p:nvSpPr>
-        <p:spPr>
-          <a:xfrm>
-            <a:off x="2075688" y="2514600"/>
-            <a:ext cx="1554480" cy="640080"/>
+          <p:cNvPr id="17" name="Text 15"/>
+          <p:cNvSpPr/>
+          <p:nvPr/>
+        </p:nvSpPr>
+        <p:spPr>
+          <a:xfrm>
+            <a:off x="2075688" y="2468880"/>
+            <a:ext cx="1554480" cy="548640"/>
           </a:xfrm>
           <a:prstGeom prst="rect">
             <a:avLst/>
@@ -16954,7 +16686,7 @@
               <a:buNone/>
             </a:pPr>
             <a:r>
-              <a:rPr lang="en-US" sz="3000" b="1" dirty="0">
+              <a:rPr lang="en-US" sz="2600" b="1" dirty="0">
                 <a:solidFill>
                   <a:srgbClr val="FFB800"/>
                 </a:solidFill>
@@ -16964,20 +16696,20 @@
               </a:rPr>
               <a:t>02</a:t>
             </a:r>
-            <a:endParaRPr lang="en-US" sz="3000" dirty="0"/>
-          </a:p>
-        </p:txBody>
-      </p:sp>
-      <p:sp>
-        <p:nvSpPr>
-          <p:cNvPr id="16" name="Text 14"/>
-          <p:cNvSpPr/>
-          <p:nvPr/>
-        </p:nvSpPr>
-        <p:spPr>
-          <a:xfrm>
-            <a:off x="2075688" y="3246120"/>
-            <a:ext cx="1554480" cy="274320"/>
+            <a:endParaRPr lang="en-US" sz="2600" dirty="0"/>
+          </a:p>
+        </p:txBody>
+      </p:sp>
+      <p:sp>
+        <p:nvSpPr>
+          <p:cNvPr id="18" name="Text 16"/>
+          <p:cNvSpPr/>
+          <p:nvPr/>
+        </p:nvSpPr>
+        <p:spPr>
+          <a:xfrm>
+            <a:off x="2075688" y="3063240"/>
+            <a:ext cx="1554480" cy="256032"/>
           </a:xfrm>
           <a:prstGeom prst="rect">
             <a:avLst/>
@@ -17009,14 +16741,14 @@
       </p:sp>
       <p:sp>
         <p:nvSpPr>
-          <p:cNvPr id="17" name="Text 15"/>
-          <p:cNvSpPr/>
-          <p:nvPr/>
-        </p:nvSpPr>
-        <p:spPr>
-          <a:xfrm>
-            <a:off x="2185416" y="3657600"/>
-            <a:ext cx="1335024" cy="731520"/>
+          <p:cNvPr id="19" name="Text 17"/>
+          <p:cNvSpPr/>
+          <p:nvPr/>
+        </p:nvSpPr>
+        <p:spPr>
+          <a:xfrm>
+            <a:off x="2185416" y="3383280"/>
+            <a:ext cx="1335024" cy="640080"/>
           </a:xfrm>
           <a:prstGeom prst="rect">
             <a:avLst/>
@@ -17048,7 +16780,71 @@
       </p:sp>
       <p:sp>
         <p:nvSpPr>
-          <p:cNvPr id="18" name="Text 16"/>
+          <p:cNvPr id="20" name="Shape 18"/>
+          <p:cNvSpPr/>
+          <p:nvPr/>
+        </p:nvSpPr>
+        <p:spPr>
+          <a:xfrm>
+            <a:off x="2167128" y="4160520"/>
+            <a:ext cx="1371600" cy="502920"/>
+          </a:xfrm>
+          <a:prstGeom prst="rect">
+            <a:avLst/>
+          </a:prstGeom>
+          <a:solidFill>
+            <a:srgbClr val="555555"/>
+          </a:solidFill>
+          <a:ln w="6350">
+            <a:solidFill>
+              <a:srgbClr val="666666"/>
+            </a:solidFill>
+            <a:prstDash val="dash"/>
+          </a:ln>
+        </p:spPr>
+      </p:sp>
+      <p:sp>
+        <p:nvSpPr>
+          <p:cNvPr id="21" name="Text 19"/>
+          <p:cNvSpPr/>
+          <p:nvPr/>
+        </p:nvSpPr>
+        <p:spPr>
+          <a:xfrm>
+            <a:off x="2167128" y="4160520"/>
+            <a:ext cx="1371600" cy="502920"/>
+          </a:xfrm>
+          <a:prstGeom prst="rect">
+            <a:avLst/>
+          </a:prstGeom>
+          <a:noFill/>
+          <a:ln/>
+        </p:spPr>
+        <p:txBody>
+          <a:bodyPr wrap="square" lIns="0" tIns="0" rIns="0" bIns="0" rtlCol="0" anchor="ctr"/>
+          <a:lstStyle/>
+          <a:p>
+            <a:pPr algn="ctr" indent="0" marL="0">
+              <a:buNone/>
+            </a:pPr>
+            <a:r>
+              <a:rPr lang="en-US" sz="700" i="1" dirty="0">
+                <a:solidFill>
+                  <a:srgbClr val="AAAAAA"/>
+                </a:solidFill>
+                <a:latin typeface="Arial" pitchFamily="34" charset="0"/>
+                <a:ea typeface="Arial" pitchFamily="34" charset="-122"/>
+                <a:cs typeface="Arial" pitchFamily="34" charset="-120"/>
+              </a:rPr>
+              <a:t>IMG: ticker wall at dusk, gold tint</a:t>
+            </a:r>
+            <a:endParaRPr lang="en-US" sz="700" dirty="0"/>
+          </a:p>
+        </p:txBody>
+      </p:sp>
+      <p:sp>
+        <p:nvSpPr>
+          <p:cNvPr id="22" name="Text 20"/>
           <p:cNvSpPr/>
           <p:nvPr/>
         </p:nvSpPr>
@@ -17087,7 +16883,7 @@
       </p:sp>
       <p:sp>
         <p:nvSpPr>
-          <p:cNvPr id="19" name="Shape 17"/>
+          <p:cNvPr id="23" name="Shape 21"/>
           <p:cNvSpPr/>
           <p:nvPr/>
         </p:nvSpPr>
@@ -17112,7 +16908,7 @@
       </p:sp>
       <p:sp>
         <p:nvSpPr>
-          <p:cNvPr id="20" name="Shape 18"/>
+          <p:cNvPr id="24" name="Shape 22"/>
           <p:cNvSpPr/>
           <p:nvPr/>
         </p:nvSpPr>
@@ -17137,14 +16933,14 @@
       </p:sp>
       <p:sp>
         <p:nvSpPr>
-          <p:cNvPr id="21" name="Text 19"/>
-          <p:cNvSpPr/>
-          <p:nvPr/>
-        </p:nvSpPr>
-        <p:spPr>
-          <a:xfrm>
-            <a:off x="3794760" y="2514600"/>
-            <a:ext cx="1554480" cy="640080"/>
+          <p:cNvPr id="25" name="Text 23"/>
+          <p:cNvSpPr/>
+          <p:nvPr/>
+        </p:nvSpPr>
+        <p:spPr>
+          <a:xfrm>
+            <a:off x="3794760" y="2468880"/>
+            <a:ext cx="1554480" cy="548640"/>
           </a:xfrm>
           <a:prstGeom prst="rect">
             <a:avLst/>
@@ -17160,7 +16956,7 @@
               <a:buNone/>
             </a:pPr>
             <a:r>
-              <a:rPr lang="en-US" sz="3000" b="1" dirty="0">
+              <a:rPr lang="en-US" sz="2600" b="1" dirty="0">
                 <a:solidFill>
                   <a:srgbClr val="F6693D"/>
                 </a:solidFill>
@@ -17170,20 +16966,20 @@
               </a:rPr>
               <a:t>03</a:t>
             </a:r>
-            <a:endParaRPr lang="en-US" sz="3000" dirty="0"/>
-          </a:p>
-        </p:txBody>
-      </p:sp>
-      <p:sp>
-        <p:nvSpPr>
-          <p:cNvPr id="22" name="Text 20"/>
-          <p:cNvSpPr/>
-          <p:nvPr/>
-        </p:nvSpPr>
-        <p:spPr>
-          <a:xfrm>
-            <a:off x="3794760" y="3246120"/>
-            <a:ext cx="1554480" cy="274320"/>
+            <a:endParaRPr lang="en-US" sz="2600" dirty="0"/>
+          </a:p>
+        </p:txBody>
+      </p:sp>
+      <p:sp>
+        <p:nvSpPr>
+          <p:cNvPr id="26" name="Text 24"/>
+          <p:cNvSpPr/>
+          <p:nvPr/>
+        </p:nvSpPr>
+        <p:spPr>
+          <a:xfrm>
+            <a:off x="3794760" y="3063240"/>
+            <a:ext cx="1554480" cy="256032"/>
           </a:xfrm>
           <a:prstGeom prst="rect">
             <a:avLst/>
@@ -17215,14 +17011,14 @@
       </p:sp>
       <p:sp>
         <p:nvSpPr>
-          <p:cNvPr id="23" name="Text 21"/>
-          <p:cNvSpPr/>
-          <p:nvPr/>
-        </p:nvSpPr>
-        <p:spPr>
-          <a:xfrm>
-            <a:off x="3904488" y="3657600"/>
-            <a:ext cx="1335024" cy="731520"/>
+          <p:cNvPr id="27" name="Text 25"/>
+          <p:cNvSpPr/>
+          <p:nvPr/>
+        </p:nvSpPr>
+        <p:spPr>
+          <a:xfrm>
+            <a:off x="3904488" y="3383280"/>
+            <a:ext cx="1335024" cy="640080"/>
           </a:xfrm>
           <a:prstGeom prst="rect">
             <a:avLst/>
@@ -17254,7 +17050,71 @@
       </p:sp>
       <p:sp>
         <p:nvSpPr>
-          <p:cNvPr id="24" name="Text 22"/>
+          <p:cNvPr id="28" name="Shape 26"/>
+          <p:cNvSpPr/>
+          <p:nvPr/>
+        </p:nvSpPr>
+        <p:spPr>
+          <a:xfrm>
+            <a:off x="3886200" y="4160520"/>
+            <a:ext cx="1371600" cy="502920"/>
+          </a:xfrm>
+          <a:prstGeom prst="rect">
+            <a:avLst/>
+          </a:prstGeom>
+          <a:solidFill>
+            <a:srgbClr val="555555"/>
+          </a:solidFill>
+          <a:ln w="6350">
+            <a:solidFill>
+              <a:srgbClr val="666666"/>
+            </a:solidFill>
+            <a:prstDash val="dash"/>
+          </a:ln>
+        </p:spPr>
+      </p:sp>
+      <p:sp>
+        <p:nvSpPr>
+          <p:cNvPr id="29" name="Text 27"/>
+          <p:cNvSpPr/>
+          <p:nvPr/>
+        </p:nvSpPr>
+        <p:spPr>
+          <a:xfrm>
+            <a:off x="3886200" y="4160520"/>
+            <a:ext cx="1371600" cy="502920"/>
+          </a:xfrm>
+          <a:prstGeom prst="rect">
+            <a:avLst/>
+          </a:prstGeom>
+          <a:noFill/>
+          <a:ln/>
+        </p:spPr>
+        <p:txBody>
+          <a:bodyPr wrap="square" lIns="0" tIns="0" rIns="0" bIns="0" rtlCol="0" anchor="ctr"/>
+          <a:lstStyle/>
+          <a:p>
+            <a:pPr algn="ctr" indent="0" marL="0">
+              <a:buNone/>
+            </a:pPr>
+            <a:r>
+              <a:rPr lang="en-US" sz="700" i="1" dirty="0">
+                <a:solidFill>
+                  <a:srgbClr val="AAAAAA"/>
+                </a:solidFill>
+                <a:latin typeface="Arial" pitchFamily="34" charset="0"/>
+                <a:ea typeface="Arial" pitchFamily="34" charset="-122"/>
+                <a:cs typeface="Arial" pitchFamily="34" charset="-120"/>
+              </a:rPr>
+              <a:t>IMG: cursor on dark IDE, orange tint</a:t>
+            </a:r>
+            <a:endParaRPr lang="en-US" sz="700" dirty="0"/>
+          </a:p>
+        </p:txBody>
+      </p:sp>
+      <p:sp>
+        <p:nvSpPr>
+          <p:cNvPr id="30" name="Text 28"/>
           <p:cNvSpPr/>
           <p:nvPr/>
         </p:nvSpPr>
@@ -17293,7 +17153,7 @@
       </p:sp>
       <p:sp>
         <p:nvSpPr>
-          <p:cNvPr id="25" name="Shape 23"/>
+          <p:cNvPr id="31" name="Shape 29"/>
           <p:cNvSpPr/>
           <p:nvPr/>
         </p:nvSpPr>
@@ -17318,7 +17178,7 @@
       </p:sp>
       <p:sp>
         <p:nvSpPr>
-          <p:cNvPr id="26" name="Shape 24"/>
+          <p:cNvPr id="32" name="Shape 30"/>
           <p:cNvSpPr/>
           <p:nvPr/>
         </p:nvSpPr>
@@ -17343,14 +17203,14 @@
       </p:sp>
       <p:sp>
         <p:nvSpPr>
-          <p:cNvPr id="27" name="Text 25"/>
-          <p:cNvSpPr/>
-          <p:nvPr/>
-        </p:nvSpPr>
-        <p:spPr>
-          <a:xfrm>
-            <a:off x="5513832" y="2514600"/>
-            <a:ext cx="1554480" cy="640080"/>
+          <p:cNvPr id="33" name="Text 31"/>
+          <p:cNvSpPr/>
+          <p:nvPr/>
+        </p:nvSpPr>
+        <p:spPr>
+          <a:xfrm>
+            <a:off x="5513832" y="2468880"/>
+            <a:ext cx="1554480" cy="548640"/>
           </a:xfrm>
           <a:prstGeom prst="rect">
             <a:avLst/>
@@ -17366,7 +17226,7 @@
               <a:buNone/>
             </a:pPr>
             <a:r>
-              <a:rPr lang="en-US" sz="3000" b="1" dirty="0">
+              <a:rPr lang="en-US" sz="2600" b="1" dirty="0">
                 <a:solidFill>
                   <a:srgbClr val="CC0000"/>
                 </a:solidFill>
@@ -17376,20 +17236,20 @@
               </a:rPr>
               <a:t>04</a:t>
             </a:r>
-            <a:endParaRPr lang="en-US" sz="3000" dirty="0"/>
-          </a:p>
-        </p:txBody>
-      </p:sp>
-      <p:sp>
-        <p:nvSpPr>
-          <p:cNvPr id="28" name="Text 26"/>
-          <p:cNvSpPr/>
-          <p:nvPr/>
-        </p:nvSpPr>
-        <p:spPr>
-          <a:xfrm>
-            <a:off x="5513832" y="3246120"/>
-            <a:ext cx="1554480" cy="274320"/>
+            <a:endParaRPr lang="en-US" sz="2600" dirty="0"/>
+          </a:p>
+        </p:txBody>
+      </p:sp>
+      <p:sp>
+        <p:nvSpPr>
+          <p:cNvPr id="34" name="Text 32"/>
+          <p:cNvSpPr/>
+          <p:nvPr/>
+        </p:nvSpPr>
+        <p:spPr>
+          <a:xfrm>
+            <a:off x="5513832" y="3063240"/>
+            <a:ext cx="1554480" cy="256032"/>
           </a:xfrm>
           <a:prstGeom prst="rect">
             <a:avLst/>
@@ -17421,14 +17281,14 @@
       </p:sp>
       <p:sp>
         <p:nvSpPr>
-          <p:cNvPr id="29" name="Text 27"/>
-          <p:cNvSpPr/>
-          <p:nvPr/>
-        </p:nvSpPr>
-        <p:spPr>
-          <a:xfrm>
-            <a:off x="5623560" y="3657600"/>
-            <a:ext cx="1335024" cy="731520"/>
+          <p:cNvPr id="35" name="Text 33"/>
+          <p:cNvSpPr/>
+          <p:nvPr/>
+        </p:nvSpPr>
+        <p:spPr>
+          <a:xfrm>
+            <a:off x="5623560" y="3383280"/>
+            <a:ext cx="1335024" cy="640080"/>
           </a:xfrm>
           <a:prstGeom prst="rect">
             <a:avLst/>
@@ -17460,7 +17320,71 @@
       </p:sp>
       <p:sp>
         <p:nvSpPr>
-          <p:cNvPr id="30" name="Text 28"/>
+          <p:cNvPr id="36" name="Shape 34"/>
+          <p:cNvSpPr/>
+          <p:nvPr/>
+        </p:nvSpPr>
+        <p:spPr>
+          <a:xfrm>
+            <a:off x="5605272" y="4160520"/>
+            <a:ext cx="1371600" cy="502920"/>
+          </a:xfrm>
+          <a:prstGeom prst="rect">
+            <a:avLst/>
+          </a:prstGeom>
+          <a:solidFill>
+            <a:srgbClr val="555555"/>
+          </a:solidFill>
+          <a:ln w="6350">
+            <a:solidFill>
+              <a:srgbClr val="666666"/>
+            </a:solidFill>
+            <a:prstDash val="dash"/>
+          </a:ln>
+        </p:spPr>
+      </p:sp>
+      <p:sp>
+        <p:nvSpPr>
+          <p:cNvPr id="37" name="Text 35"/>
+          <p:cNvSpPr/>
+          <p:nvPr/>
+        </p:nvSpPr>
+        <p:spPr>
+          <a:xfrm>
+            <a:off x="5605272" y="4160520"/>
+            <a:ext cx="1371600" cy="502920"/>
+          </a:xfrm>
+          <a:prstGeom prst="rect">
+            <a:avLst/>
+          </a:prstGeom>
+          <a:noFill/>
+          <a:ln/>
+        </p:spPr>
+        <p:txBody>
+          <a:bodyPr wrap="square" lIns="0" tIns="0" rIns="0" bIns="0" rtlCol="0" anchor="ctr"/>
+          <a:lstStyle/>
+          <a:p>
+            <a:pPr algn="ctr" indent="0" marL="0">
+              <a:buNone/>
+            </a:pPr>
+            <a:r>
+              <a:rPr lang="en-US" sz="700" i="1" dirty="0">
+                <a:solidFill>
+                  <a:srgbClr val="AAAAAA"/>
+                </a:solidFill>
+                <a:latin typeface="Arial" pitchFamily="34" charset="0"/>
+                <a:ea typeface="Arial" pitchFamily="34" charset="-122"/>
+                <a:cs typeface="Arial" pitchFamily="34" charset="-120"/>
+              </a:rPr>
+              <a:t>IMG: cracked circuit macro, red tint</a:t>
+            </a:r>
+            <a:endParaRPr lang="en-US" sz="700" dirty="0"/>
+          </a:p>
+        </p:txBody>
+      </p:sp>
+      <p:sp>
+        <p:nvSpPr>
+          <p:cNvPr id="38" name="Text 36"/>
           <p:cNvSpPr/>
           <p:nvPr/>
         </p:nvSpPr>
@@ -17499,7 +17423,7 @@
       </p:sp>
       <p:sp>
         <p:nvSpPr>
-          <p:cNvPr id="31" name="Shape 29"/>
+          <p:cNvPr id="39" name="Shape 37"/>
           <p:cNvSpPr/>
           <p:nvPr/>
         </p:nvSpPr>
@@ -17524,7 +17448,7 @@
       </p:sp>
       <p:sp>
         <p:nvSpPr>
-          <p:cNvPr id="32" name="Shape 30"/>
+          <p:cNvPr id="40" name="Shape 38"/>
           <p:cNvSpPr/>
           <p:nvPr/>
         </p:nvSpPr>
@@ -17549,14 +17473,14 @@
       </p:sp>
       <p:sp>
         <p:nvSpPr>
-          <p:cNvPr id="33" name="Text 31"/>
-          <p:cNvSpPr/>
-          <p:nvPr/>
-        </p:nvSpPr>
-        <p:spPr>
-          <a:xfrm>
-            <a:off x="7232904" y="2514600"/>
-            <a:ext cx="1554480" cy="640080"/>
+          <p:cNvPr id="41" name="Text 39"/>
+          <p:cNvSpPr/>
+          <p:nvPr/>
+        </p:nvSpPr>
+        <p:spPr>
+          <a:xfrm>
+            <a:off x="7232904" y="2468880"/>
+            <a:ext cx="1554480" cy="548640"/>
           </a:xfrm>
           <a:prstGeom prst="rect">
             <a:avLst/>
@@ -17572,7 +17496,7 @@
               <a:buNone/>
             </a:pPr>
             <a:r>
-              <a:rPr lang="en-US" sz="3000" b="1" dirty="0">
+              <a:rPr lang="en-US" sz="2600" b="1" dirty="0">
                 <a:solidFill>
                   <a:srgbClr val="E8478D"/>
                 </a:solidFill>
@@ -17582,20 +17506,20 @@
               </a:rPr>
               <a:t>05</a:t>
             </a:r>
-            <a:endParaRPr lang="en-US" sz="3000" dirty="0"/>
-          </a:p>
-        </p:txBody>
-      </p:sp>
-      <p:sp>
-        <p:nvSpPr>
-          <p:cNvPr id="34" name="Text 32"/>
-          <p:cNvSpPr/>
-          <p:nvPr/>
-        </p:nvSpPr>
-        <p:spPr>
-          <a:xfrm>
-            <a:off x="7232904" y="3246120"/>
-            <a:ext cx="1554480" cy="274320"/>
+            <a:endParaRPr lang="en-US" sz="2600" dirty="0"/>
+          </a:p>
+        </p:txBody>
+      </p:sp>
+      <p:sp>
+        <p:nvSpPr>
+          <p:cNvPr id="42" name="Text 40"/>
+          <p:cNvSpPr/>
+          <p:nvPr/>
+        </p:nvSpPr>
+        <p:spPr>
+          <a:xfrm>
+            <a:off x="7232904" y="3063240"/>
+            <a:ext cx="1554480" cy="256032"/>
           </a:xfrm>
           <a:prstGeom prst="rect">
             <a:avLst/>
@@ -17627,14 +17551,14 @@
       </p:sp>
       <p:sp>
         <p:nvSpPr>
-          <p:cNvPr id="35" name="Text 33"/>
-          <p:cNvSpPr/>
-          <p:nvPr/>
-        </p:nvSpPr>
-        <p:spPr>
-          <a:xfrm>
-            <a:off x="7342632" y="3657600"/>
-            <a:ext cx="1335024" cy="731520"/>
+          <p:cNvPr id="43" name="Text 41"/>
+          <p:cNvSpPr/>
+          <p:nvPr/>
+        </p:nvSpPr>
+        <p:spPr>
+          <a:xfrm>
+            <a:off x="7342632" y="3383280"/>
+            <a:ext cx="1335024" cy="640080"/>
           </a:xfrm>
           <a:prstGeom prst="rect">
             <a:avLst/>
@@ -17666,7 +17590,71 @@
       </p:sp>
       <p:sp>
         <p:nvSpPr>
-          <p:cNvPr id="36" name="Text 34"/>
+          <p:cNvPr id="44" name="Shape 42"/>
+          <p:cNvSpPr/>
+          <p:nvPr/>
+        </p:nvSpPr>
+        <p:spPr>
+          <a:xfrm>
+            <a:off x="7324344" y="4160520"/>
+            <a:ext cx="1371600" cy="502920"/>
+          </a:xfrm>
+          <a:prstGeom prst="rect">
+            <a:avLst/>
+          </a:prstGeom>
+          <a:solidFill>
+            <a:srgbClr val="555555"/>
+          </a:solidFill>
+          <a:ln w="6350">
+            <a:solidFill>
+              <a:srgbClr val="666666"/>
+            </a:solidFill>
+            <a:prstDash val="dash"/>
+          </a:ln>
+        </p:spPr>
+      </p:sp>
+      <p:sp>
+        <p:nvSpPr>
+          <p:cNvPr id="45" name="Text 43"/>
+          <p:cNvSpPr/>
+          <p:nvPr/>
+        </p:nvSpPr>
+        <p:spPr>
+          <a:xfrm>
+            <a:off x="7324344" y="4160520"/>
+            <a:ext cx="1371600" cy="502920"/>
+          </a:xfrm>
+          <a:prstGeom prst="rect">
+            <a:avLst/>
+          </a:prstGeom>
+          <a:noFill/>
+          <a:ln/>
+        </p:spPr>
+        <p:txBody>
+          <a:bodyPr wrap="square" lIns="0" tIns="0" rIns="0" bIns="0" rtlCol="0" anchor="ctr"/>
+          <a:lstStyle/>
+          <a:p>
+            <a:pPr algn="ctr" indent="0" marL="0">
+              <a:buNone/>
+            </a:pPr>
+            <a:r>
+              <a:rPr lang="en-US" sz="700" i="1" dirty="0">
+                <a:solidFill>
+                  <a:srgbClr val="AAAAAA"/>
+                </a:solidFill>
+                <a:latin typeface="Arial" pitchFamily="34" charset="0"/>
+                <a:ea typeface="Arial" pitchFamily="34" charset="-122"/>
+                <a:cs typeface="Arial" pitchFamily="34" charset="-120"/>
+              </a:rPr>
+              <a:t>IMG: satellite over Earth's limb, pink tint</a:t>
+            </a:r>
+            <a:endParaRPr lang="en-US" sz="700" dirty="0"/>
+          </a:p>
+        </p:txBody>
+      </p:sp>
+      <p:sp>
+        <p:nvSpPr>
+          <p:cNvPr id="46" name="Text 44"/>
           <p:cNvSpPr/>
           <p:nvPr/>
         </p:nvSpPr>
@@ -17705,7 +17693,7 @@
       </p:sp>
       <p:sp>
         <p:nvSpPr>
-          <p:cNvPr id="37" name="Text 35"/>
+          <p:cNvPr id="47" name="Text 45"/>
           <p:cNvSpPr/>
           <p:nvPr/>
         </p:nvSpPr>
@@ -17744,7 +17732,7 @@
       </p:sp>
       <p:sp>
         <p:nvSpPr>
-          <p:cNvPr id="38" name="Shape 36"/>
+          <p:cNvPr id="48" name="Shape 46"/>
           <p:cNvSpPr/>
           <p:nvPr/>
         </p:nvSpPr>
@@ -17769,7 +17757,7 @@
       </p:sp>
       <p:sp>
         <p:nvSpPr>
-          <p:cNvPr id="39" name="Text 37"/>
+          <p:cNvPr id="49" name="Text 47"/>
           <p:cNvSpPr/>
           <p:nvPr/>
         </p:nvSpPr>
@@ -17808,7 +17796,7 @@
       </p:sp>
       <p:sp>
         <p:nvSpPr>
-          <p:cNvPr id="40" name="Text 38"/>
+          <p:cNvPr id="50" name="Text 48"/>
           <p:cNvSpPr/>
           <p:nvPr/>
         </p:nvSpPr>
@@ -27152,7 +27140,7 @@
                 <a:ea typeface="Arial" pitchFamily="34" charset="-122"/>
                 <a:cs typeface="Arial" pitchFamily="34" charset="-120"/>
               </a:rPr>
-              <a:t>2026E P/E vs 2026E Revenue Growth</a:t>
+              <a:t>Top 20 global — P/E vs revenue growth</a:t>
             </a:r>
             <a:endParaRPr lang="en-US" sz="1400" dirty="0"/>
           </a:p>
@@ -27214,8 +27202,8 @@
         </p:nvSpPr>
         <p:spPr>
           <a:xfrm>
-            <a:off x="4754880" y="3474720"/>
-            <a:ext cx="1965960" cy="1463040"/>
+            <a:off x="5074920" y="2103120"/>
+            <a:ext cx="1280160" cy="1280160"/>
           </a:xfrm>
           <a:prstGeom prst="rect">
             <a:avLst/>
@@ -27233,24 +27221,61 @@
       </p:sp>
       <p:sp>
         <p:nvSpPr>
-          <p:cNvPr id="36" name="Shape 34"/>
-          <p:cNvSpPr/>
-          <p:nvPr/>
-        </p:nvSpPr>
-        <p:spPr>
-          <a:xfrm>
-            <a:off x="6720840" y="2011680"/>
-            <a:ext cx="1965960" cy="1463040"/>
-          </a:xfrm>
-          <a:prstGeom prst="rect">
-            <a:avLst/>
-          </a:prstGeom>
-          <a:solidFill>
-            <a:srgbClr val="FFF6D6"/>
-          </a:solidFill>
-          <a:ln w="12700">
+          <p:cNvPr id="36" name="Text 34"/>
+          <p:cNvSpPr/>
+          <p:nvPr/>
+        </p:nvSpPr>
+        <p:spPr>
+          <a:xfrm>
+            <a:off x="5111496" y="2139696"/>
+            <a:ext cx="1207008" cy="164592"/>
+          </a:xfrm>
+          <a:prstGeom prst="rect">
+            <a:avLst/>
+          </a:prstGeom>
+          <a:noFill/>
+          <a:ln/>
+        </p:spPr>
+        <p:txBody>
+          <a:bodyPr wrap="square" lIns="0" tIns="0" rIns="0" bIns="0" rtlCol="0" anchor="ctr"/>
+          <a:lstStyle/>
+          <a:p>
+            <a:pPr indent="0" marL="0">
+              <a:buNone/>
+            </a:pPr>
+            <a:r>
+              <a:rPr lang="en-US" sz="750" b="1" i="1" dirty="0">
+                <a:solidFill>
+                  <a:srgbClr val="CC0000"/>
+                </a:solidFill>
+                <a:latin typeface="Arial" pitchFamily="34" charset="0"/>
+                <a:ea typeface="Arial" pitchFamily="34" charset="-122"/>
+                <a:cs typeface="Arial" pitchFamily="34" charset="-120"/>
+              </a:rPr>
+              <a:t>Expensive for low growth</a:t>
+            </a:r>
+            <a:endParaRPr lang="en-US" sz="750" dirty="0"/>
+          </a:p>
+        </p:txBody>
+      </p:sp>
+      <p:sp>
+        <p:nvSpPr>
+          <p:cNvPr id="37" name="Shape 35"/>
+          <p:cNvSpPr/>
+          <p:nvPr/>
+        </p:nvSpPr>
+        <p:spPr>
+          <a:xfrm>
+            <a:off x="5074920" y="4151376"/>
+            <a:ext cx="3520440" cy="0"/>
+          </a:xfrm>
+          <a:prstGeom prst="line">
+            <a:avLst/>
+          </a:prstGeom>
+          <a:noFill/>
+          <a:ln w="6350">
             <a:solidFill>
-              <a:srgbClr val="FFF6D6"/>
+              <a:srgbClr val="EEEEEE"/>
             </a:solidFill>
             <a:prstDash val="solid"/>
           </a:ln>
@@ -27258,14 +27283,129 @@
       </p:sp>
       <p:sp>
         <p:nvSpPr>
-          <p:cNvPr id="37" name="Text 35"/>
-          <p:cNvSpPr/>
-          <p:nvPr/>
-        </p:nvSpPr>
-        <p:spPr>
-          <a:xfrm>
-            <a:off x="4800600" y="4709160"/>
-            <a:ext cx="1874520" cy="201168"/>
+          <p:cNvPr id="38" name="Shape 36"/>
+          <p:cNvSpPr/>
+          <p:nvPr/>
+        </p:nvSpPr>
+        <p:spPr>
+          <a:xfrm>
+            <a:off x="5074920" y="3639312"/>
+            <a:ext cx="3520440" cy="0"/>
+          </a:xfrm>
+          <a:prstGeom prst="line">
+            <a:avLst/>
+          </a:prstGeom>
+          <a:noFill/>
+          <a:ln w="6350">
+            <a:solidFill>
+              <a:srgbClr val="EEEEEE"/>
+            </a:solidFill>
+            <a:prstDash val="solid"/>
+          </a:ln>
+        </p:spPr>
+      </p:sp>
+      <p:sp>
+        <p:nvSpPr>
+          <p:cNvPr id="39" name="Shape 37"/>
+          <p:cNvSpPr/>
+          <p:nvPr/>
+        </p:nvSpPr>
+        <p:spPr>
+          <a:xfrm>
+            <a:off x="5074920" y="3127248"/>
+            <a:ext cx="3520440" cy="0"/>
+          </a:xfrm>
+          <a:prstGeom prst="line">
+            <a:avLst/>
+          </a:prstGeom>
+          <a:noFill/>
+          <a:ln w="6350">
+            <a:solidFill>
+              <a:srgbClr val="EEEEEE"/>
+            </a:solidFill>
+            <a:prstDash val="solid"/>
+          </a:ln>
+        </p:spPr>
+      </p:sp>
+      <p:sp>
+        <p:nvSpPr>
+          <p:cNvPr id="40" name="Shape 38"/>
+          <p:cNvSpPr/>
+          <p:nvPr/>
+        </p:nvSpPr>
+        <p:spPr>
+          <a:xfrm>
+            <a:off x="5074920" y="2615184"/>
+            <a:ext cx="3520440" cy="0"/>
+          </a:xfrm>
+          <a:prstGeom prst="line">
+            <a:avLst/>
+          </a:prstGeom>
+          <a:noFill/>
+          <a:ln w="6350">
+            <a:solidFill>
+              <a:srgbClr val="EEEEEE"/>
+            </a:solidFill>
+            <a:prstDash val="solid"/>
+          </a:ln>
+        </p:spPr>
+      </p:sp>
+      <p:sp>
+        <p:nvSpPr>
+          <p:cNvPr id="41" name="Shape 39"/>
+          <p:cNvSpPr/>
+          <p:nvPr/>
+        </p:nvSpPr>
+        <p:spPr>
+          <a:xfrm>
+            <a:off x="5074920" y="4663440"/>
+            <a:ext cx="3520440" cy="0"/>
+          </a:xfrm>
+          <a:prstGeom prst="line">
+            <a:avLst/>
+          </a:prstGeom>
+          <a:noFill/>
+          <a:ln w="9525">
+            <a:solidFill>
+              <a:srgbClr val="666666"/>
+            </a:solidFill>
+            <a:prstDash val="solid"/>
+          </a:ln>
+        </p:spPr>
+      </p:sp>
+      <p:sp>
+        <p:nvSpPr>
+          <p:cNvPr id="42" name="Shape 40"/>
+          <p:cNvSpPr/>
+          <p:nvPr/>
+        </p:nvSpPr>
+        <p:spPr>
+          <a:xfrm>
+            <a:off x="5074920" y="2103120"/>
+            <a:ext cx="0" cy="2560320"/>
+          </a:xfrm>
+          <a:prstGeom prst="line">
+            <a:avLst/>
+          </a:prstGeom>
+          <a:noFill/>
+          <a:ln w="9525">
+            <a:solidFill>
+              <a:srgbClr val="666666"/>
+            </a:solidFill>
+            <a:prstDash val="solid"/>
+          </a:ln>
+        </p:spPr>
+      </p:sp>
+      <p:sp>
+        <p:nvSpPr>
+          <p:cNvPr id="43" name="Text 41"/>
+          <p:cNvSpPr/>
+          <p:nvPr/>
+        </p:nvSpPr>
+        <p:spPr>
+          <a:xfrm>
+            <a:off x="4873752" y="4690872"/>
+            <a:ext cx="402336" cy="146304"/>
           </a:xfrm>
           <a:prstGeom prst="rect">
             <a:avLst/>
@@ -27277,34 +27417,1080 @@
           <a:bodyPr wrap="square" lIns="0" tIns="0" rIns="0" bIns="0" rtlCol="0" anchor="ctr"/>
           <a:lstStyle/>
           <a:p>
+            <a:pPr algn="ctr" indent="0" marL="0">
+              <a:buNone/>
+            </a:pPr>
+            <a:r>
+              <a:rPr lang="en-US" sz="700" dirty="0">
+                <a:solidFill>
+                  <a:srgbClr val="999999"/>
+                </a:solidFill>
+                <a:latin typeface="Arial" pitchFamily="34" charset="0"/>
+                <a:ea typeface="Arial" pitchFamily="34" charset="-122"/>
+                <a:cs typeface="Arial" pitchFamily="34" charset="-120"/>
+              </a:rPr>
+              <a:t>-5%</a:t>
+            </a:r>
+            <a:endParaRPr lang="en-US" sz="700" dirty="0"/>
+          </a:p>
+        </p:txBody>
+      </p:sp>
+      <p:sp>
+        <p:nvSpPr>
+          <p:cNvPr id="44" name="Text 42"/>
+          <p:cNvSpPr/>
+          <p:nvPr/>
+        </p:nvSpPr>
+        <p:spPr>
+          <a:xfrm>
+            <a:off x="5193792" y="4690872"/>
+            <a:ext cx="402336" cy="146304"/>
+          </a:xfrm>
+          <a:prstGeom prst="rect">
+            <a:avLst/>
+          </a:prstGeom>
+          <a:noFill/>
+          <a:ln/>
+        </p:spPr>
+        <p:txBody>
+          <a:bodyPr wrap="square" lIns="0" tIns="0" rIns="0" bIns="0" rtlCol="0" anchor="ctr"/>
+          <a:lstStyle/>
+          <a:p>
+            <a:pPr algn="ctr" indent="0" marL="0">
+              <a:buNone/>
+            </a:pPr>
+            <a:r>
+              <a:rPr lang="en-US" sz="700" dirty="0">
+                <a:solidFill>
+                  <a:srgbClr val="999999"/>
+                </a:solidFill>
+                <a:latin typeface="Arial" pitchFamily="34" charset="0"/>
+                <a:ea typeface="Arial" pitchFamily="34" charset="-122"/>
+                <a:cs typeface="Arial" pitchFamily="34" charset="-120"/>
+              </a:rPr>
+              <a:t>0%</a:t>
+            </a:r>
+            <a:endParaRPr lang="en-US" sz="700" dirty="0"/>
+          </a:p>
+        </p:txBody>
+      </p:sp>
+      <p:sp>
+        <p:nvSpPr>
+          <p:cNvPr id="45" name="Text 43"/>
+          <p:cNvSpPr/>
+          <p:nvPr/>
+        </p:nvSpPr>
+        <p:spPr>
+          <a:xfrm>
+            <a:off x="5833872" y="4690872"/>
+            <a:ext cx="402336" cy="146304"/>
+          </a:xfrm>
+          <a:prstGeom prst="rect">
+            <a:avLst/>
+          </a:prstGeom>
+          <a:noFill/>
+          <a:ln/>
+        </p:spPr>
+        <p:txBody>
+          <a:bodyPr wrap="square" lIns="0" tIns="0" rIns="0" bIns="0" rtlCol="0" anchor="ctr"/>
+          <a:lstStyle/>
+          <a:p>
+            <a:pPr algn="ctr" indent="0" marL="0">
+              <a:buNone/>
+            </a:pPr>
+            <a:r>
+              <a:rPr lang="en-US" sz="700" dirty="0">
+                <a:solidFill>
+                  <a:srgbClr val="999999"/>
+                </a:solidFill>
+                <a:latin typeface="Arial" pitchFamily="34" charset="0"/>
+                <a:ea typeface="Arial" pitchFamily="34" charset="-122"/>
+                <a:cs typeface="Arial" pitchFamily="34" charset="-120"/>
+              </a:rPr>
+              <a:t>+10%</a:t>
+            </a:r>
+            <a:endParaRPr lang="en-US" sz="700" dirty="0"/>
+          </a:p>
+        </p:txBody>
+      </p:sp>
+      <p:sp>
+        <p:nvSpPr>
+          <p:cNvPr id="46" name="Text 44"/>
+          <p:cNvSpPr/>
+          <p:nvPr/>
+        </p:nvSpPr>
+        <p:spPr>
+          <a:xfrm>
+            <a:off x="6473952" y="4690872"/>
+            <a:ext cx="402336" cy="146304"/>
+          </a:xfrm>
+          <a:prstGeom prst="rect">
+            <a:avLst/>
+          </a:prstGeom>
+          <a:noFill/>
+          <a:ln/>
+        </p:spPr>
+        <p:txBody>
+          <a:bodyPr wrap="square" lIns="0" tIns="0" rIns="0" bIns="0" rtlCol="0" anchor="ctr"/>
+          <a:lstStyle/>
+          <a:p>
+            <a:pPr algn="ctr" indent="0" marL="0">
+              <a:buNone/>
+            </a:pPr>
+            <a:r>
+              <a:rPr lang="en-US" sz="700" dirty="0">
+                <a:solidFill>
+                  <a:srgbClr val="999999"/>
+                </a:solidFill>
+                <a:latin typeface="Arial" pitchFamily="34" charset="0"/>
+                <a:ea typeface="Arial" pitchFamily="34" charset="-122"/>
+                <a:cs typeface="Arial" pitchFamily="34" charset="-120"/>
+              </a:rPr>
+              <a:t>+20%</a:t>
+            </a:r>
+            <a:endParaRPr lang="en-US" sz="700" dirty="0"/>
+          </a:p>
+        </p:txBody>
+      </p:sp>
+      <p:sp>
+        <p:nvSpPr>
+          <p:cNvPr id="47" name="Text 45"/>
+          <p:cNvSpPr/>
+          <p:nvPr/>
+        </p:nvSpPr>
+        <p:spPr>
+          <a:xfrm>
+            <a:off x="7114032" y="4690872"/>
+            <a:ext cx="402336" cy="146304"/>
+          </a:xfrm>
+          <a:prstGeom prst="rect">
+            <a:avLst/>
+          </a:prstGeom>
+          <a:noFill/>
+          <a:ln/>
+        </p:spPr>
+        <p:txBody>
+          <a:bodyPr wrap="square" lIns="0" tIns="0" rIns="0" bIns="0" rtlCol="0" anchor="ctr"/>
+          <a:lstStyle/>
+          <a:p>
+            <a:pPr algn="ctr" indent="0" marL="0">
+              <a:buNone/>
+            </a:pPr>
+            <a:r>
+              <a:rPr lang="en-US" sz="700" dirty="0">
+                <a:solidFill>
+                  <a:srgbClr val="999999"/>
+                </a:solidFill>
+                <a:latin typeface="Arial" pitchFamily="34" charset="0"/>
+                <a:ea typeface="Arial" pitchFamily="34" charset="-122"/>
+                <a:cs typeface="Arial" pitchFamily="34" charset="-120"/>
+              </a:rPr>
+              <a:t>+30%</a:t>
+            </a:r>
+            <a:endParaRPr lang="en-US" sz="700" dirty="0"/>
+          </a:p>
+        </p:txBody>
+      </p:sp>
+      <p:sp>
+        <p:nvSpPr>
+          <p:cNvPr id="48" name="Text 46"/>
+          <p:cNvSpPr/>
+          <p:nvPr/>
+        </p:nvSpPr>
+        <p:spPr>
+          <a:xfrm>
+            <a:off x="7754112" y="4690872"/>
+            <a:ext cx="402336" cy="146304"/>
+          </a:xfrm>
+          <a:prstGeom prst="rect">
+            <a:avLst/>
+          </a:prstGeom>
+          <a:noFill/>
+          <a:ln/>
+        </p:spPr>
+        <p:txBody>
+          <a:bodyPr wrap="square" lIns="0" tIns="0" rIns="0" bIns="0" rtlCol="0" anchor="ctr"/>
+          <a:lstStyle/>
+          <a:p>
+            <a:pPr algn="ctr" indent="0" marL="0">
+              <a:buNone/>
+            </a:pPr>
+            <a:r>
+              <a:rPr lang="en-US" sz="700" dirty="0">
+                <a:solidFill>
+                  <a:srgbClr val="999999"/>
+                </a:solidFill>
+                <a:latin typeface="Arial" pitchFamily="34" charset="0"/>
+                <a:ea typeface="Arial" pitchFamily="34" charset="-122"/>
+                <a:cs typeface="Arial" pitchFamily="34" charset="-120"/>
+              </a:rPr>
+              <a:t>+40%</a:t>
+            </a:r>
+            <a:endParaRPr lang="en-US" sz="700" dirty="0"/>
+          </a:p>
+        </p:txBody>
+      </p:sp>
+      <p:sp>
+        <p:nvSpPr>
+          <p:cNvPr id="49" name="Text 47"/>
+          <p:cNvSpPr/>
+          <p:nvPr/>
+        </p:nvSpPr>
+        <p:spPr>
+          <a:xfrm>
+            <a:off x="8394192" y="4690872"/>
+            <a:ext cx="402336" cy="146304"/>
+          </a:xfrm>
+          <a:prstGeom prst="rect">
+            <a:avLst/>
+          </a:prstGeom>
+          <a:noFill/>
+          <a:ln/>
+        </p:spPr>
+        <p:txBody>
+          <a:bodyPr wrap="square" lIns="0" tIns="0" rIns="0" bIns="0" rtlCol="0" anchor="ctr"/>
+          <a:lstStyle/>
+          <a:p>
+            <a:pPr algn="ctr" indent="0" marL="0">
+              <a:buNone/>
+            </a:pPr>
+            <a:r>
+              <a:rPr lang="en-US" sz="700" dirty="0">
+                <a:solidFill>
+                  <a:srgbClr val="999999"/>
+                </a:solidFill>
+                <a:latin typeface="Arial" pitchFamily="34" charset="0"/>
+                <a:ea typeface="Arial" pitchFamily="34" charset="-122"/>
+                <a:cs typeface="Arial" pitchFamily="34" charset="-120"/>
+              </a:rPr>
+              <a:t>+50%</a:t>
+            </a:r>
+            <a:endParaRPr lang="en-US" sz="700" dirty="0"/>
+          </a:p>
+        </p:txBody>
+      </p:sp>
+      <p:sp>
+        <p:nvSpPr>
+          <p:cNvPr id="50" name="Text 48"/>
+          <p:cNvSpPr/>
+          <p:nvPr/>
+        </p:nvSpPr>
+        <p:spPr>
+          <a:xfrm>
+            <a:off x="4727448" y="4599432"/>
+            <a:ext cx="301752" cy="128016"/>
+          </a:xfrm>
+          <a:prstGeom prst="rect">
+            <a:avLst/>
+          </a:prstGeom>
+          <a:noFill/>
+          <a:ln/>
+        </p:spPr>
+        <p:txBody>
+          <a:bodyPr wrap="square" lIns="0" tIns="0" rIns="0" bIns="0" rtlCol="0" anchor="ctr"/>
+          <a:lstStyle/>
+          <a:p>
+            <a:pPr algn="r" indent="0" marL="0">
+              <a:buNone/>
+            </a:pPr>
+            <a:r>
+              <a:rPr lang="en-US" sz="700" dirty="0">
+                <a:solidFill>
+                  <a:srgbClr val="999999"/>
+                </a:solidFill>
+                <a:latin typeface="Arial" pitchFamily="34" charset="0"/>
+                <a:ea typeface="Arial" pitchFamily="34" charset="-122"/>
+                <a:cs typeface="Arial" pitchFamily="34" charset="-120"/>
+              </a:rPr>
+              <a:t>0×</a:t>
+            </a:r>
+            <a:endParaRPr lang="en-US" sz="700" dirty="0"/>
+          </a:p>
+        </p:txBody>
+      </p:sp>
+      <p:sp>
+        <p:nvSpPr>
+          <p:cNvPr id="51" name="Text 49"/>
+          <p:cNvSpPr/>
+          <p:nvPr/>
+        </p:nvSpPr>
+        <p:spPr>
+          <a:xfrm>
+            <a:off x="4727448" y="4087368"/>
+            <a:ext cx="301752" cy="128016"/>
+          </a:xfrm>
+          <a:prstGeom prst="rect">
+            <a:avLst/>
+          </a:prstGeom>
+          <a:noFill/>
+          <a:ln/>
+        </p:spPr>
+        <p:txBody>
+          <a:bodyPr wrap="square" lIns="0" tIns="0" rIns="0" bIns="0" rtlCol="0" anchor="ctr"/>
+          <a:lstStyle/>
+          <a:p>
+            <a:pPr algn="r" indent="0" marL="0">
+              <a:buNone/>
+            </a:pPr>
+            <a:r>
+              <a:rPr lang="en-US" sz="700" dirty="0">
+                <a:solidFill>
+                  <a:srgbClr val="999999"/>
+                </a:solidFill>
+                <a:latin typeface="Arial" pitchFamily="34" charset="0"/>
+                <a:ea typeface="Arial" pitchFamily="34" charset="-122"/>
+                <a:cs typeface="Arial" pitchFamily="34" charset="-120"/>
+              </a:rPr>
+              <a:t>10×</a:t>
+            </a:r>
+            <a:endParaRPr lang="en-US" sz="700" dirty="0"/>
+          </a:p>
+        </p:txBody>
+      </p:sp>
+      <p:sp>
+        <p:nvSpPr>
+          <p:cNvPr id="52" name="Text 50"/>
+          <p:cNvSpPr/>
+          <p:nvPr/>
+        </p:nvSpPr>
+        <p:spPr>
+          <a:xfrm>
+            <a:off x="4727448" y="3575304"/>
+            <a:ext cx="301752" cy="128016"/>
+          </a:xfrm>
+          <a:prstGeom prst="rect">
+            <a:avLst/>
+          </a:prstGeom>
+          <a:noFill/>
+          <a:ln/>
+        </p:spPr>
+        <p:txBody>
+          <a:bodyPr wrap="square" lIns="0" tIns="0" rIns="0" bIns="0" rtlCol="0" anchor="ctr"/>
+          <a:lstStyle/>
+          <a:p>
+            <a:pPr algn="r" indent="0" marL="0">
+              <a:buNone/>
+            </a:pPr>
+            <a:r>
+              <a:rPr lang="en-US" sz="700" dirty="0">
+                <a:solidFill>
+                  <a:srgbClr val="999999"/>
+                </a:solidFill>
+                <a:latin typeface="Arial" pitchFamily="34" charset="0"/>
+                <a:ea typeface="Arial" pitchFamily="34" charset="-122"/>
+                <a:cs typeface="Arial" pitchFamily="34" charset="-120"/>
+              </a:rPr>
+              <a:t>20×</a:t>
+            </a:r>
+            <a:endParaRPr lang="en-US" sz="700" dirty="0"/>
+          </a:p>
+        </p:txBody>
+      </p:sp>
+      <p:sp>
+        <p:nvSpPr>
+          <p:cNvPr id="53" name="Text 51"/>
+          <p:cNvSpPr/>
+          <p:nvPr/>
+        </p:nvSpPr>
+        <p:spPr>
+          <a:xfrm>
+            <a:off x="4727448" y="3063240"/>
+            <a:ext cx="301752" cy="128016"/>
+          </a:xfrm>
+          <a:prstGeom prst="rect">
+            <a:avLst/>
+          </a:prstGeom>
+          <a:noFill/>
+          <a:ln/>
+        </p:spPr>
+        <p:txBody>
+          <a:bodyPr wrap="square" lIns="0" tIns="0" rIns="0" bIns="0" rtlCol="0" anchor="ctr"/>
+          <a:lstStyle/>
+          <a:p>
+            <a:pPr algn="r" indent="0" marL="0">
+              <a:buNone/>
+            </a:pPr>
+            <a:r>
+              <a:rPr lang="en-US" sz="700" dirty="0">
+                <a:solidFill>
+                  <a:srgbClr val="999999"/>
+                </a:solidFill>
+                <a:latin typeface="Arial" pitchFamily="34" charset="0"/>
+                <a:ea typeface="Arial" pitchFamily="34" charset="-122"/>
+                <a:cs typeface="Arial" pitchFamily="34" charset="-120"/>
+              </a:rPr>
+              <a:t>30×</a:t>
+            </a:r>
+            <a:endParaRPr lang="en-US" sz="700" dirty="0"/>
+          </a:p>
+        </p:txBody>
+      </p:sp>
+      <p:sp>
+        <p:nvSpPr>
+          <p:cNvPr id="54" name="Text 52"/>
+          <p:cNvSpPr/>
+          <p:nvPr/>
+        </p:nvSpPr>
+        <p:spPr>
+          <a:xfrm>
+            <a:off x="4727448" y="2551176"/>
+            <a:ext cx="301752" cy="128016"/>
+          </a:xfrm>
+          <a:prstGeom prst="rect">
+            <a:avLst/>
+          </a:prstGeom>
+          <a:noFill/>
+          <a:ln/>
+        </p:spPr>
+        <p:txBody>
+          <a:bodyPr wrap="square" lIns="0" tIns="0" rIns="0" bIns="0" rtlCol="0" anchor="ctr"/>
+          <a:lstStyle/>
+          <a:p>
+            <a:pPr algn="r" indent="0" marL="0">
+              <a:buNone/>
+            </a:pPr>
+            <a:r>
+              <a:rPr lang="en-US" sz="700" dirty="0">
+                <a:solidFill>
+                  <a:srgbClr val="999999"/>
+                </a:solidFill>
+                <a:latin typeface="Arial" pitchFamily="34" charset="0"/>
+                <a:ea typeface="Arial" pitchFamily="34" charset="-122"/>
+                <a:cs typeface="Arial" pitchFamily="34" charset="-120"/>
+              </a:rPr>
+              <a:t>40×</a:t>
+            </a:r>
+            <a:endParaRPr lang="en-US" sz="700" dirty="0"/>
+          </a:p>
+        </p:txBody>
+      </p:sp>
+      <p:sp>
+        <p:nvSpPr>
+          <p:cNvPr id="55" name="Text 53"/>
+          <p:cNvSpPr/>
+          <p:nvPr/>
+        </p:nvSpPr>
+        <p:spPr>
+          <a:xfrm>
+            <a:off x="4727448" y="2039112"/>
+            <a:ext cx="301752" cy="128016"/>
+          </a:xfrm>
+          <a:prstGeom prst="rect">
+            <a:avLst/>
+          </a:prstGeom>
+          <a:noFill/>
+          <a:ln/>
+        </p:spPr>
+        <p:txBody>
+          <a:bodyPr wrap="square" lIns="0" tIns="0" rIns="0" bIns="0" rtlCol="0" anchor="ctr"/>
+          <a:lstStyle/>
+          <a:p>
+            <a:pPr algn="r" indent="0" marL="0">
+              <a:buNone/>
+            </a:pPr>
+            <a:r>
+              <a:rPr lang="en-US" sz="700" dirty="0">
+                <a:solidFill>
+                  <a:srgbClr val="999999"/>
+                </a:solidFill>
+                <a:latin typeface="Arial" pitchFamily="34" charset="0"/>
+                <a:ea typeface="Arial" pitchFamily="34" charset="-122"/>
+                <a:cs typeface="Arial" pitchFamily="34" charset="-120"/>
+              </a:rPr>
+              <a:t>50×</a:t>
+            </a:r>
+            <a:endParaRPr lang="en-US" sz="700" dirty="0"/>
+          </a:p>
+        </p:txBody>
+      </p:sp>
+      <p:sp>
+        <p:nvSpPr>
+          <p:cNvPr id="56" name="Text 54"/>
+          <p:cNvSpPr/>
+          <p:nvPr/>
+        </p:nvSpPr>
+        <p:spPr>
+          <a:xfrm>
+            <a:off x="5074920" y="4791456"/>
+            <a:ext cx="3520440" cy="146304"/>
+          </a:xfrm>
+          <a:prstGeom prst="rect">
+            <a:avLst/>
+          </a:prstGeom>
+          <a:noFill/>
+          <a:ln/>
+        </p:spPr>
+        <p:txBody>
+          <a:bodyPr wrap="square" lIns="0" tIns="0" rIns="0" bIns="0" rtlCol="0" anchor="ctr"/>
+          <a:lstStyle/>
+          <a:p>
+            <a:pPr algn="ctr" indent="0" marL="0">
+              <a:buNone/>
+            </a:pPr>
+            <a:r>
+              <a:rPr lang="en-US" sz="800" i="1" dirty="0">
+                <a:solidFill>
+                  <a:srgbClr val="666666"/>
+                </a:solidFill>
+                <a:latin typeface="Arial" pitchFamily="34" charset="0"/>
+                <a:ea typeface="Arial" pitchFamily="34" charset="-122"/>
+                <a:cs typeface="Arial" pitchFamily="34" charset="-120"/>
+              </a:rPr>
+              <a:t>Forward revenue growth, 2026E → 2027E</a:t>
+            </a:r>
+            <a:endParaRPr lang="en-US" sz="800" dirty="0"/>
+          </a:p>
+        </p:txBody>
+      </p:sp>
+      <p:sp>
+        <p:nvSpPr>
+          <p:cNvPr id="57" name="Text 55"/>
+          <p:cNvSpPr/>
+          <p:nvPr/>
+        </p:nvSpPr>
+        <p:spPr>
+          <a:xfrm>
+            <a:off x="4754880" y="1801368"/>
+            <a:ext cx="3931920" cy="128016"/>
+          </a:xfrm>
+          <a:prstGeom prst="rect">
+            <a:avLst/>
+          </a:prstGeom>
+          <a:noFill/>
+          <a:ln/>
+        </p:spPr>
+        <p:txBody>
+          <a:bodyPr wrap="square" lIns="0" tIns="0" rIns="0" bIns="0" rtlCol="0" anchor="ctr"/>
+          <a:lstStyle/>
+          <a:p>
             <a:pPr indent="0" marL="0">
               <a:buNone/>
             </a:pPr>
             <a:r>
-              <a:rPr lang="en-US" sz="850" b="1" i="1" dirty="0">
-                <a:solidFill>
-                  <a:srgbClr val="CC0000"/>
-                </a:solidFill>
-                <a:latin typeface="Arial" pitchFamily="34" charset="0"/>
-                <a:ea typeface="Arial" pitchFamily="34" charset="-122"/>
-                <a:cs typeface="Arial" pitchFamily="34" charset="-120"/>
-              </a:rPr>
-              <a:t>Expensive for low growth</a:t>
-            </a:r>
-            <a:endParaRPr lang="en-US" sz="850" dirty="0"/>
-          </a:p>
-        </p:txBody>
-      </p:sp>
-      <p:sp>
-        <p:nvSpPr>
-          <p:cNvPr id="38" name="Text 36"/>
-          <p:cNvSpPr/>
-          <p:nvPr/>
-        </p:nvSpPr>
-        <p:spPr>
-          <a:xfrm>
-            <a:off x="6766560" y="2057400"/>
-            <a:ext cx="1874520" cy="201168"/>
+              <a:rPr lang="en-US" sz="800" i="1" dirty="0">
+                <a:solidFill>
+                  <a:srgbClr val="666666"/>
+                </a:solidFill>
+                <a:latin typeface="Arial" pitchFamily="34" charset="0"/>
+                <a:ea typeface="Arial" pitchFamily="34" charset="-122"/>
+                <a:cs typeface="Arial" pitchFamily="34" charset="-120"/>
+              </a:rPr>
+              <a:t>Forward P/E (2026E)</a:t>
+            </a:r>
+            <a:endParaRPr lang="en-US" sz="800" dirty="0"/>
+          </a:p>
+        </p:txBody>
+      </p:sp>
+      <p:sp>
+        <p:nvSpPr>
+          <p:cNvPr id="58" name="Shape 56"/>
+          <p:cNvSpPr/>
+          <p:nvPr/>
+        </p:nvSpPr>
+        <p:spPr>
+          <a:xfrm>
+            <a:off x="8506663" y="3345790"/>
+            <a:ext cx="177394" cy="177394"/>
+          </a:xfrm>
+          <a:prstGeom prst="ellipse">
+            <a:avLst/>
+          </a:prstGeom>
+          <a:solidFill>
+            <a:srgbClr val="F6693D"/>
+          </a:solidFill>
+          <a:ln w="6350">
+            <a:solidFill>
+              <a:srgbClr val="FFFFFF"/>
+            </a:solidFill>
+            <a:prstDash val="solid"/>
+          </a:ln>
+        </p:spPr>
+      </p:sp>
+      <p:sp>
+        <p:nvSpPr>
+          <p:cNvPr id="59" name="Shape 57"/>
+          <p:cNvSpPr/>
+          <p:nvPr/>
+        </p:nvSpPr>
+        <p:spPr>
+          <a:xfrm>
+            <a:off x="6288614" y="3114864"/>
+            <a:ext cx="157905" cy="157905"/>
+          </a:xfrm>
+          <a:prstGeom prst="ellipse">
+            <a:avLst/>
+          </a:prstGeom>
+          <a:solidFill>
+            <a:srgbClr val="F6693D"/>
+          </a:solidFill>
+          <a:ln w="6350">
+            <a:solidFill>
+              <a:srgbClr val="FFFFFF"/>
+            </a:solidFill>
+            <a:prstDash val="solid"/>
+          </a:ln>
+        </p:spPr>
+      </p:sp>
+      <p:sp>
+        <p:nvSpPr>
+          <p:cNvPr id="60" name="Shape 58"/>
+          <p:cNvSpPr/>
+          <p:nvPr/>
+        </p:nvSpPr>
+        <p:spPr>
+          <a:xfrm>
+            <a:off x="5761510" y="2972302"/>
+            <a:ext cx="156273" cy="156273"/>
+          </a:xfrm>
+          <a:prstGeom prst="ellipse">
+            <a:avLst/>
+          </a:prstGeom>
+          <a:solidFill>
+            <a:srgbClr val="F6693D"/>
+          </a:solidFill>
+          <a:ln w="6350">
+            <a:solidFill>
+              <a:srgbClr val="FFFFFF"/>
+            </a:solidFill>
+            <a:prstDash val="solid"/>
+          </a:ln>
+        </p:spPr>
+      </p:sp>
+      <p:sp>
+        <p:nvSpPr>
+          <p:cNvPr id="61" name="Shape 59"/>
+          <p:cNvSpPr/>
+          <p:nvPr/>
+        </p:nvSpPr>
+        <p:spPr>
+          <a:xfrm>
+            <a:off x="6319682" y="3283721"/>
+            <a:ext cx="137671" cy="137671"/>
+          </a:xfrm>
+          <a:prstGeom prst="ellipse">
+            <a:avLst/>
+          </a:prstGeom>
+          <a:solidFill>
+            <a:srgbClr val="F6693D"/>
+          </a:solidFill>
+          <a:ln w="6350">
+            <a:solidFill>
+              <a:srgbClr val="FFFFFF"/>
+            </a:solidFill>
+            <a:prstDash val="solid"/>
+          </a:ln>
+        </p:spPr>
+      </p:sp>
+      <p:sp>
+        <p:nvSpPr>
+          <p:cNvPr id="62" name="Shape 60"/>
+          <p:cNvSpPr/>
+          <p:nvPr/>
+        </p:nvSpPr>
+        <p:spPr>
+          <a:xfrm>
+            <a:off x="6086940" y="2956369"/>
+            <a:ext cx="126691" cy="126691"/>
+          </a:xfrm>
+          <a:prstGeom prst="ellipse">
+            <a:avLst/>
+          </a:prstGeom>
+          <a:solidFill>
+            <a:srgbClr val="F6693D"/>
+          </a:solidFill>
+          <a:ln w="6350">
+            <a:solidFill>
+              <a:srgbClr val="FFFFFF"/>
+            </a:solidFill>
+            <a:prstDash val="solid"/>
+          </a:ln>
+        </p:spPr>
+      </p:sp>
+      <p:sp>
+        <p:nvSpPr>
+          <p:cNvPr id="63" name="Shape 61"/>
+          <p:cNvSpPr/>
+          <p:nvPr/>
+        </p:nvSpPr>
+        <p:spPr>
+          <a:xfrm>
+            <a:off x="6731683" y="3251715"/>
+            <a:ext cx="109510" cy="109510"/>
+          </a:xfrm>
+          <a:prstGeom prst="ellipse">
+            <a:avLst/>
+          </a:prstGeom>
+          <a:solidFill>
+            <a:srgbClr val="F6693D"/>
+          </a:solidFill>
+          <a:ln w="6350">
+            <a:solidFill>
+              <a:srgbClr val="FFFFFF"/>
+            </a:solidFill>
+            <a:prstDash val="solid"/>
+          </a:ln>
+        </p:spPr>
+      </p:sp>
+      <p:sp>
+        <p:nvSpPr>
+          <p:cNvPr id="64" name="Shape 62"/>
+          <p:cNvSpPr/>
+          <p:nvPr/>
+        </p:nvSpPr>
+        <p:spPr>
+          <a:xfrm>
+            <a:off x="8540675" y="2729480"/>
+            <a:ext cx="109371" cy="109371"/>
+          </a:xfrm>
+          <a:prstGeom prst="ellipse">
+            <a:avLst/>
+          </a:prstGeom>
+          <a:solidFill>
+            <a:srgbClr val="F6693D"/>
+          </a:solidFill>
+          <a:ln w="6350">
+            <a:solidFill>
+              <a:srgbClr val="FFFFFF"/>
+            </a:solidFill>
+            <a:prstDash val="solid"/>
+          </a:ln>
+        </p:spPr>
+      </p:sp>
+      <p:sp>
+        <p:nvSpPr>
+          <p:cNvPr id="65" name="Shape 63"/>
+          <p:cNvSpPr/>
+          <p:nvPr/>
+        </p:nvSpPr>
+        <p:spPr>
+          <a:xfrm>
+            <a:off x="5381767" y="3741102"/>
+            <a:ext cx="103659" cy="103659"/>
+          </a:xfrm>
+          <a:prstGeom prst="ellipse">
+            <a:avLst/>
+          </a:prstGeom>
+          <a:solidFill>
+            <a:srgbClr val="333333"/>
+          </a:solidFill>
+          <a:ln w="6350">
+            <a:solidFill>
+              <a:srgbClr val="FFFFFF"/>
+            </a:solidFill>
+            <a:prstDash val="solid"/>
+          </a:ln>
+        </p:spPr>
+      </p:sp>
+      <p:sp>
+        <p:nvSpPr>
+          <p:cNvPr id="66" name="Shape 64"/>
+          <p:cNvSpPr/>
+          <p:nvPr/>
+        </p:nvSpPr>
+        <p:spPr>
+          <a:xfrm>
+            <a:off x="6523422" y="3475364"/>
+            <a:ext cx="102587" cy="102587"/>
+          </a:xfrm>
+          <a:prstGeom prst="ellipse">
+            <a:avLst/>
+          </a:prstGeom>
+          <a:solidFill>
+            <a:srgbClr val="F6693D"/>
+          </a:solidFill>
+          <a:ln w="6350">
+            <a:solidFill>
+              <a:srgbClr val="FFFFFF"/>
+            </a:solidFill>
+            <a:prstDash val="solid"/>
+          </a:ln>
+        </p:spPr>
+      </p:sp>
+      <p:sp>
+        <p:nvSpPr>
+          <p:cNvPr id="67" name="Shape 65"/>
+          <p:cNvSpPr/>
+          <p:nvPr/>
+        </p:nvSpPr>
+        <p:spPr>
+          <a:xfrm>
+            <a:off x="6382994" y="2054834"/>
+            <a:ext cx="96573" cy="96573"/>
+          </a:xfrm>
+          <a:prstGeom prst="ellipse">
+            <a:avLst/>
+          </a:prstGeom>
+          <a:solidFill>
+            <a:srgbClr val="333333"/>
+          </a:solidFill>
+          <a:ln w="6350">
+            <a:solidFill>
+              <a:srgbClr val="FFFFFF"/>
+            </a:solidFill>
+            <a:prstDash val="solid"/>
+          </a:ln>
+        </p:spPr>
+      </p:sp>
+      <p:sp>
+        <p:nvSpPr>
+          <p:cNvPr id="68" name="Shape 66"/>
+          <p:cNvSpPr/>
+          <p:nvPr/>
+        </p:nvSpPr>
+        <p:spPr>
+          <a:xfrm>
+            <a:off x="5737569" y="2356703"/>
+            <a:ext cx="86828" cy="86828"/>
+          </a:xfrm>
+          <a:prstGeom prst="ellipse">
+            <a:avLst/>
+          </a:prstGeom>
+          <a:solidFill>
+            <a:srgbClr val="333333"/>
+          </a:solidFill>
+          <a:ln w="6350">
+            <a:solidFill>
+              <a:srgbClr val="FFFFFF"/>
+            </a:solidFill>
+            <a:prstDash val="solid"/>
+          </a:ln>
+        </p:spPr>
+      </p:sp>
+      <p:sp>
+        <p:nvSpPr>
+          <p:cNvPr id="69" name="Shape 67"/>
+          <p:cNvSpPr/>
+          <p:nvPr/>
+        </p:nvSpPr>
+        <p:spPr>
+          <a:xfrm>
+            <a:off x="5560652" y="3514352"/>
+            <a:ext cx="86059" cy="86059"/>
+          </a:xfrm>
+          <a:prstGeom prst="ellipse">
+            <a:avLst/>
+          </a:prstGeom>
+          <a:solidFill>
+            <a:srgbClr val="333333"/>
+          </a:solidFill>
+          <a:ln w="6350">
+            <a:solidFill>
+              <a:srgbClr val="FFFFFF"/>
+            </a:solidFill>
+            <a:prstDash val="solid"/>
+          </a:ln>
+        </p:spPr>
+      </p:sp>
+      <p:sp>
+        <p:nvSpPr>
+          <p:cNvPr id="70" name="Shape 68"/>
+          <p:cNvSpPr/>
+          <p:nvPr/>
+        </p:nvSpPr>
+        <p:spPr>
+          <a:xfrm>
+            <a:off x="5852296" y="3596586"/>
+            <a:ext cx="85453" cy="85453"/>
+          </a:xfrm>
+          <a:prstGeom prst="ellipse">
+            <a:avLst/>
+          </a:prstGeom>
+          <a:solidFill>
+            <a:srgbClr val="F6693D"/>
+          </a:solidFill>
+          <a:ln w="6350">
+            <a:solidFill>
+              <a:srgbClr val="FFFFFF"/>
+            </a:solidFill>
+            <a:prstDash val="solid"/>
+          </a:ln>
+        </p:spPr>
+      </p:sp>
+      <p:sp>
+        <p:nvSpPr>
+          <p:cNvPr id="71" name="Shape 69"/>
+          <p:cNvSpPr/>
+          <p:nvPr/>
+        </p:nvSpPr>
+        <p:spPr>
+          <a:xfrm>
+            <a:off x="5643267" y="3890012"/>
+            <a:ext cx="82352" cy="82352"/>
+          </a:xfrm>
+          <a:prstGeom prst="ellipse">
+            <a:avLst/>
+          </a:prstGeom>
+          <a:solidFill>
+            <a:srgbClr val="333333"/>
+          </a:solidFill>
+          <a:ln w="6350">
+            <a:solidFill>
+              <a:srgbClr val="FFFFFF"/>
+            </a:solidFill>
+            <a:prstDash val="solid"/>
+          </a:ln>
+        </p:spPr>
+      </p:sp>
+      <p:sp>
+        <p:nvSpPr>
+          <p:cNvPr id="72" name="Shape 70"/>
+          <p:cNvSpPr/>
+          <p:nvPr/>
+        </p:nvSpPr>
+        <p:spPr>
+          <a:xfrm>
+            <a:off x="6356540" y="3270636"/>
+            <a:ext cx="81910" cy="81910"/>
+          </a:xfrm>
+          <a:prstGeom prst="ellipse">
+            <a:avLst/>
+          </a:prstGeom>
+          <a:solidFill>
+            <a:srgbClr val="333333"/>
+          </a:solidFill>
+          <a:ln w="6350">
+            <a:solidFill>
+              <a:srgbClr val="FFFFFF"/>
+            </a:solidFill>
+            <a:prstDash val="solid"/>
+          </a:ln>
+        </p:spPr>
+      </p:sp>
+      <p:sp>
+        <p:nvSpPr>
+          <p:cNvPr id="73" name="Shape 71"/>
+          <p:cNvSpPr/>
+          <p:nvPr/>
+        </p:nvSpPr>
+        <p:spPr>
+          <a:xfrm>
+            <a:off x="5152644" y="3662183"/>
+            <a:ext cx="77154" cy="77154"/>
+          </a:xfrm>
+          <a:prstGeom prst="ellipse">
+            <a:avLst/>
+          </a:prstGeom>
+          <a:solidFill>
+            <a:srgbClr val="333333"/>
+          </a:solidFill>
+          <a:ln w="6350">
+            <a:solidFill>
+              <a:srgbClr val="FFFFFF"/>
+            </a:solidFill>
+            <a:prstDash val="solid"/>
+          </a:ln>
+        </p:spPr>
+      </p:sp>
+      <p:sp>
+        <p:nvSpPr>
+          <p:cNvPr id="74" name="Shape 72"/>
+          <p:cNvSpPr/>
+          <p:nvPr/>
+        </p:nvSpPr>
+        <p:spPr>
+          <a:xfrm>
+            <a:off x="5913219" y="3411516"/>
+            <a:ext cx="76664" cy="76664"/>
+          </a:xfrm>
+          <a:prstGeom prst="ellipse">
+            <a:avLst/>
+          </a:prstGeom>
+          <a:solidFill>
+            <a:srgbClr val="333333"/>
+          </a:solidFill>
+          <a:ln w="6350">
+            <a:solidFill>
+              <a:srgbClr val="FFFFFF"/>
+            </a:solidFill>
+            <a:prstDash val="solid"/>
+          </a:ln>
+        </p:spPr>
+      </p:sp>
+      <p:sp>
+        <p:nvSpPr>
+          <p:cNvPr id="75" name="Shape 73"/>
+          <p:cNvSpPr/>
+          <p:nvPr/>
+        </p:nvSpPr>
+        <p:spPr>
+          <a:xfrm>
+            <a:off x="6024735" y="3898175"/>
+            <a:ext cx="76268" cy="76268"/>
+          </a:xfrm>
+          <a:prstGeom prst="ellipse">
+            <a:avLst/>
+          </a:prstGeom>
+          <a:solidFill>
+            <a:srgbClr val="F6693D"/>
+          </a:solidFill>
+          <a:ln w="6350">
+            <a:solidFill>
+              <a:srgbClr val="FFFFFF"/>
+            </a:solidFill>
+            <a:prstDash val="solid"/>
+          </a:ln>
+        </p:spPr>
+      </p:sp>
+      <p:sp>
+        <p:nvSpPr>
+          <p:cNvPr id="76" name="Shape 74"/>
+          <p:cNvSpPr/>
+          <p:nvPr/>
+        </p:nvSpPr>
+        <p:spPr>
+          <a:xfrm>
+            <a:off x="6957131" y="4369379"/>
+            <a:ext cx="76058" cy="76058"/>
+          </a:xfrm>
+          <a:prstGeom prst="ellipse">
+            <a:avLst/>
+          </a:prstGeom>
+          <a:solidFill>
+            <a:srgbClr val="F6693D"/>
+          </a:solidFill>
+          <a:ln w="6350">
+            <a:solidFill>
+              <a:srgbClr val="FFFFFF"/>
+            </a:solidFill>
+            <a:prstDash val="solid"/>
+          </a:ln>
+        </p:spPr>
+      </p:sp>
+      <p:sp>
+        <p:nvSpPr>
+          <p:cNvPr id="77" name="Shape 75"/>
+          <p:cNvSpPr/>
+          <p:nvPr/>
+        </p:nvSpPr>
+        <p:spPr>
+          <a:xfrm>
+            <a:off x="6605949" y="2536271"/>
+            <a:ext cx="75895" cy="75895"/>
+          </a:xfrm>
+          <a:prstGeom prst="ellipse">
+            <a:avLst/>
+          </a:prstGeom>
+          <a:solidFill>
+            <a:srgbClr val="F6693D"/>
+          </a:solidFill>
+          <a:ln w="6350">
+            <a:solidFill>
+              <a:srgbClr val="FFFFFF"/>
+            </a:solidFill>
+            <a:prstDash val="solid"/>
+          </a:ln>
+        </p:spPr>
+      </p:sp>
+      <p:sp>
+        <p:nvSpPr>
+          <p:cNvPr id="78" name="Text 76"/>
+          <p:cNvSpPr/>
+          <p:nvPr/>
+        </p:nvSpPr>
+        <p:spPr>
+          <a:xfrm>
+            <a:off x="8046720" y="3370478"/>
+            <a:ext cx="548640" cy="118872"/>
           </a:xfrm>
           <a:prstGeom prst="rect">
             <a:avLst/>
@@ -27316,43 +28502,935 @@
           <a:bodyPr wrap="square" lIns="0" tIns="0" rIns="0" bIns="0" rtlCol="0" anchor="ctr"/>
           <a:lstStyle/>
           <a:p>
+            <a:pPr indent="0" marL="0">
+              <a:buNone/>
+            </a:pPr>
+            <a:r>
+              <a:rPr lang="en-US" sz="700" b="1" dirty="0">
+                <a:solidFill>
+                  <a:srgbClr val="F6693D"/>
+                </a:solidFill>
+                <a:latin typeface="Arial" pitchFamily="34" charset="0"/>
+                <a:ea typeface="Arial" pitchFamily="34" charset="-122"/>
+                <a:cs typeface="Arial" pitchFamily="34" charset="-120"/>
+              </a:rPr>
+              <a:t>NVDA +73%</a:t>
+            </a:r>
+            <a:endParaRPr lang="en-US" sz="700" dirty="0"/>
+          </a:p>
+        </p:txBody>
+      </p:sp>
+      <p:sp>
+        <p:nvSpPr>
+          <p:cNvPr id="79" name="Text 77"/>
+          <p:cNvSpPr/>
+          <p:nvPr/>
+        </p:nvSpPr>
+        <p:spPr>
+          <a:xfrm>
+            <a:off x="6431574" y="3056656"/>
+            <a:ext cx="548640" cy="118872"/>
+          </a:xfrm>
+          <a:prstGeom prst="rect">
+            <a:avLst/>
+          </a:prstGeom>
+          <a:noFill/>
+          <a:ln/>
+        </p:spPr>
+        <p:txBody>
+          <a:bodyPr wrap="square" lIns="0" tIns="0" rIns="0" bIns="0" rtlCol="0" anchor="ctr"/>
+          <a:lstStyle/>
+          <a:p>
+            <a:pPr indent="0" marL="0">
+              <a:buNone/>
+            </a:pPr>
+            <a:r>
+              <a:rPr lang="en-US" sz="700" b="1" dirty="0">
+                <a:solidFill>
+                  <a:srgbClr val="F6693D"/>
+                </a:solidFill>
+                <a:latin typeface="Arial" pitchFamily="34" charset="0"/>
+                <a:ea typeface="Arial" pitchFamily="34" charset="-122"/>
+                <a:cs typeface="Arial" pitchFamily="34" charset="-120"/>
+              </a:rPr>
+              <a:t>GOOGL</a:t>
+            </a:r>
+            <a:endParaRPr lang="en-US" sz="700" dirty="0"/>
+          </a:p>
+        </p:txBody>
+      </p:sp>
+      <p:sp>
+        <p:nvSpPr>
+          <p:cNvPr id="80" name="Text 78"/>
+          <p:cNvSpPr/>
+          <p:nvPr/>
+        </p:nvSpPr>
+        <p:spPr>
+          <a:xfrm>
+            <a:off x="5537895" y="2986430"/>
+            <a:ext cx="548640" cy="118872"/>
+          </a:xfrm>
+          <a:prstGeom prst="rect">
+            <a:avLst/>
+          </a:prstGeom>
+          <a:noFill/>
+          <a:ln/>
+        </p:spPr>
+        <p:txBody>
+          <a:bodyPr wrap="square" lIns="0" tIns="0" rIns="0" bIns="0" rtlCol="0" anchor="ctr"/>
+          <a:lstStyle/>
+          <a:p>
+            <a:pPr indent="0" marL="0">
+              <a:buNone/>
+            </a:pPr>
+            <a:r>
+              <a:rPr lang="en-US" sz="700" b="1" dirty="0">
+                <a:solidFill>
+                  <a:srgbClr val="F6693D"/>
+                </a:solidFill>
+                <a:latin typeface="Arial" pitchFamily="34" charset="0"/>
+                <a:ea typeface="Arial" pitchFamily="34" charset="-122"/>
+                <a:cs typeface="Arial" pitchFamily="34" charset="-120"/>
+              </a:rPr>
+              <a:t>AAPL</a:t>
+            </a:r>
+            <a:endParaRPr lang="en-US" sz="700" dirty="0"/>
+          </a:p>
+        </p:txBody>
+      </p:sp>
+      <p:sp>
+        <p:nvSpPr>
+          <p:cNvPr id="81" name="Text 79"/>
+          <p:cNvSpPr/>
+          <p:nvPr/>
+        </p:nvSpPr>
+        <p:spPr>
+          <a:xfrm>
+            <a:off x="6452525" y="3416564"/>
+            <a:ext cx="548640" cy="118872"/>
+          </a:xfrm>
+          <a:prstGeom prst="rect">
+            <a:avLst/>
+          </a:prstGeom>
+          <a:noFill/>
+          <a:ln/>
+        </p:spPr>
+        <p:txBody>
+          <a:bodyPr wrap="square" lIns="0" tIns="0" rIns="0" bIns="0" rtlCol="0" anchor="ctr"/>
+          <a:lstStyle/>
+          <a:p>
+            <a:pPr indent="0" marL="0">
+              <a:buNone/>
+            </a:pPr>
+            <a:r>
+              <a:rPr lang="en-US" sz="700" b="1" dirty="0">
+                <a:solidFill>
+                  <a:srgbClr val="F6693D"/>
+                </a:solidFill>
+                <a:latin typeface="Arial" pitchFamily="34" charset="0"/>
+                <a:ea typeface="Arial" pitchFamily="34" charset="-122"/>
+                <a:cs typeface="Arial" pitchFamily="34" charset="-120"/>
+              </a:rPr>
+              <a:t>MSFT</a:t>
+            </a:r>
+            <a:endParaRPr lang="en-US" sz="700" dirty="0"/>
+          </a:p>
+        </p:txBody>
+      </p:sp>
+      <p:sp>
+        <p:nvSpPr>
+          <p:cNvPr id="82" name="Text 80"/>
+          <p:cNvSpPr/>
+          <p:nvPr/>
+        </p:nvSpPr>
+        <p:spPr>
+          <a:xfrm>
+            <a:off x="6214294" y="2955707"/>
+            <a:ext cx="548640" cy="118872"/>
+          </a:xfrm>
+          <a:prstGeom prst="rect">
+            <a:avLst/>
+          </a:prstGeom>
+          <a:noFill/>
+          <a:ln/>
+        </p:spPr>
+        <p:txBody>
+          <a:bodyPr wrap="square" lIns="0" tIns="0" rIns="0" bIns="0" rtlCol="0" anchor="ctr"/>
+          <a:lstStyle/>
+          <a:p>
+            <a:pPr indent="0" marL="0">
+              <a:buNone/>
+            </a:pPr>
+            <a:r>
+              <a:rPr lang="en-US" sz="700" b="1" dirty="0">
+                <a:solidFill>
+                  <a:srgbClr val="F6693D"/>
+                </a:solidFill>
+                <a:latin typeface="Arial" pitchFamily="34" charset="0"/>
+                <a:ea typeface="Arial" pitchFamily="34" charset="-122"/>
+                <a:cs typeface="Arial" pitchFamily="34" charset="-120"/>
+              </a:rPr>
+              <a:t>AMZN</a:t>
+            </a:r>
+            <a:endParaRPr lang="en-US" sz="700" dirty="0"/>
+          </a:p>
+        </p:txBody>
+      </p:sp>
+      <p:sp>
+        <p:nvSpPr>
+          <p:cNvPr id="83" name="Text 81"/>
+          <p:cNvSpPr/>
+          <p:nvPr/>
+        </p:nvSpPr>
+        <p:spPr>
+          <a:xfrm>
+            <a:off x="6850446" y="3242462"/>
+            <a:ext cx="548640" cy="118872"/>
+          </a:xfrm>
+          <a:prstGeom prst="rect">
+            <a:avLst/>
+          </a:prstGeom>
+          <a:noFill/>
+          <a:ln/>
+        </p:spPr>
+        <p:txBody>
+          <a:bodyPr wrap="square" lIns="0" tIns="0" rIns="0" bIns="0" rtlCol="0" anchor="ctr"/>
+          <a:lstStyle/>
+          <a:p>
+            <a:pPr indent="0" marL="0">
+              <a:buNone/>
+            </a:pPr>
+            <a:r>
+              <a:rPr lang="en-US" sz="700" b="1" dirty="0">
+                <a:solidFill>
+                  <a:srgbClr val="F6693D"/>
+                </a:solidFill>
+                <a:latin typeface="Arial" pitchFamily="34" charset="0"/>
+                <a:ea typeface="Arial" pitchFamily="34" charset="-122"/>
+                <a:cs typeface="Arial" pitchFamily="34" charset="-120"/>
+              </a:rPr>
+              <a:t>TSM</a:t>
+            </a:r>
+            <a:endParaRPr lang="en-US" sz="700" dirty="0"/>
+          </a:p>
+        </p:txBody>
+      </p:sp>
+      <p:sp>
+        <p:nvSpPr>
+          <p:cNvPr id="84" name="Text 82"/>
+          <p:cNvSpPr/>
+          <p:nvPr/>
+        </p:nvSpPr>
+        <p:spPr>
+          <a:xfrm>
+            <a:off x="8046720" y="2720157"/>
+            <a:ext cx="548640" cy="118872"/>
+          </a:xfrm>
+          <a:prstGeom prst="rect">
+            <a:avLst/>
+          </a:prstGeom>
+          <a:noFill/>
+          <a:ln/>
+        </p:spPr>
+        <p:txBody>
+          <a:bodyPr wrap="square" lIns="0" tIns="0" rIns="0" bIns="0" rtlCol="0" anchor="ctr"/>
+          <a:lstStyle/>
+          <a:p>
+            <a:pPr indent="0" marL="0">
+              <a:buNone/>
+            </a:pPr>
+            <a:r>
+              <a:rPr lang="en-US" sz="700" b="1" dirty="0">
+                <a:solidFill>
+                  <a:srgbClr val="F6693D"/>
+                </a:solidFill>
+                <a:latin typeface="Arial" pitchFamily="34" charset="0"/>
+                <a:ea typeface="Arial" pitchFamily="34" charset="-122"/>
+                <a:cs typeface="Arial" pitchFamily="34" charset="-120"/>
+              </a:rPr>
+              <a:t>AVGO +54%</a:t>
+            </a:r>
+            <a:endParaRPr lang="en-US" sz="700" dirty="0"/>
+          </a:p>
+        </p:txBody>
+      </p:sp>
+      <p:sp>
+        <p:nvSpPr>
+          <p:cNvPr id="85" name="Text 83"/>
+          <p:cNvSpPr/>
+          <p:nvPr/>
+        </p:nvSpPr>
+        <p:spPr>
+          <a:xfrm>
+            <a:off x="5497605" y="3728923"/>
+            <a:ext cx="548640" cy="118872"/>
+          </a:xfrm>
+          <a:prstGeom prst="rect">
+            <a:avLst/>
+          </a:prstGeom>
+          <a:noFill/>
+          <a:ln/>
+        </p:spPr>
+        <p:txBody>
+          <a:bodyPr wrap="square" lIns="0" tIns="0" rIns="0" bIns="0" rtlCol="0" anchor="ctr"/>
+          <a:lstStyle/>
+          <a:p>
+            <a:pPr indent="0" marL="0">
+              <a:buNone/>
+            </a:pPr>
+            <a:r>
+              <a:rPr lang="en-US" sz="700" b="1" dirty="0">
+                <a:solidFill>
+                  <a:srgbClr val="333333"/>
+                </a:solidFill>
+                <a:latin typeface="Arial" pitchFamily="34" charset="0"/>
+                <a:ea typeface="Arial" pitchFamily="34" charset="-122"/>
+                <a:cs typeface="Arial" pitchFamily="34" charset="-120"/>
+              </a:rPr>
+              <a:t>ARAMCO</a:t>
+            </a:r>
+            <a:endParaRPr lang="en-US" sz="700" dirty="0"/>
+          </a:p>
+        </p:txBody>
+      </p:sp>
+      <p:sp>
+        <p:nvSpPr>
+          <p:cNvPr id="86" name="Text 84"/>
+          <p:cNvSpPr/>
+          <p:nvPr/>
+        </p:nvSpPr>
+        <p:spPr>
+          <a:xfrm>
+            <a:off x="6254675" y="3462650"/>
+            <a:ext cx="548640" cy="118872"/>
+          </a:xfrm>
+          <a:prstGeom prst="rect">
+            <a:avLst/>
+          </a:prstGeom>
+          <a:noFill/>
+          <a:ln/>
+        </p:spPr>
+        <p:txBody>
+          <a:bodyPr wrap="square" lIns="0" tIns="0" rIns="0" bIns="0" rtlCol="0" anchor="ctr"/>
+          <a:lstStyle/>
+          <a:p>
+            <a:pPr indent="0" marL="0">
+              <a:buNone/>
+            </a:pPr>
+            <a:r>
+              <a:rPr lang="en-US" sz="700" b="1" dirty="0">
+                <a:solidFill>
+                  <a:srgbClr val="F6693D"/>
+                </a:solidFill>
+                <a:latin typeface="Arial" pitchFamily="34" charset="0"/>
+                <a:ea typeface="Arial" pitchFamily="34" charset="-122"/>
+                <a:cs typeface="Arial" pitchFamily="34" charset="-120"/>
+              </a:rPr>
+              <a:t>META</a:t>
+            </a:r>
+            <a:endParaRPr lang="en-US" sz="700" dirty="0"/>
+          </a:p>
+        </p:txBody>
+      </p:sp>
+      <p:sp>
+        <p:nvSpPr>
+          <p:cNvPr id="87" name="Text 85"/>
+          <p:cNvSpPr/>
+          <p:nvPr/>
+        </p:nvSpPr>
+        <p:spPr>
+          <a:xfrm>
+            <a:off x="6495288" y="2176272"/>
+            <a:ext cx="548640" cy="118872"/>
+          </a:xfrm>
+          <a:prstGeom prst="rect">
+            <a:avLst/>
+          </a:prstGeom>
+          <a:noFill/>
+          <a:ln/>
+        </p:spPr>
+        <p:txBody>
+          <a:bodyPr wrap="square" lIns="0" tIns="0" rIns="0" bIns="0" rtlCol="0" anchor="ctr"/>
+          <a:lstStyle/>
+          <a:p>
+            <a:pPr indent="0" marL="0">
+              <a:buNone/>
+            </a:pPr>
+            <a:r>
+              <a:rPr lang="en-US" sz="700" b="1" dirty="0">
+                <a:solidFill>
+                  <a:srgbClr val="333333"/>
+                </a:solidFill>
+                <a:latin typeface="Arial" pitchFamily="34" charset="0"/>
+                <a:ea typeface="Arial" pitchFamily="34" charset="-122"/>
+                <a:cs typeface="Arial" pitchFamily="34" charset="-120"/>
+              </a:rPr>
+              <a:t>TSLA 190×</a:t>
+            </a:r>
+            <a:endParaRPr lang="en-US" sz="700" dirty="0"/>
+          </a:p>
+        </p:txBody>
+      </p:sp>
+      <p:sp>
+        <p:nvSpPr>
+          <p:cNvPr id="88" name="Text 86"/>
+          <p:cNvSpPr/>
+          <p:nvPr/>
+        </p:nvSpPr>
+        <p:spPr>
+          <a:xfrm>
+            <a:off x="5844991" y="2464125"/>
+            <a:ext cx="548640" cy="118872"/>
+          </a:xfrm>
+          <a:prstGeom prst="rect">
+            <a:avLst/>
+          </a:prstGeom>
+          <a:noFill/>
+          <a:ln/>
+        </p:spPr>
+        <p:txBody>
+          <a:bodyPr wrap="square" lIns="0" tIns="0" rIns="0" bIns="0" rtlCol="0" anchor="ctr"/>
+          <a:lstStyle/>
+          <a:p>
+            <a:pPr indent="0" marL="0">
+              <a:buNone/>
+            </a:pPr>
+            <a:r>
+              <a:rPr lang="en-US" sz="700" b="1" dirty="0">
+                <a:solidFill>
+                  <a:srgbClr val="333333"/>
+                </a:solidFill>
+                <a:latin typeface="Arial" pitchFamily="34" charset="0"/>
+                <a:ea typeface="Arial" pitchFamily="34" charset="-122"/>
+                <a:cs typeface="Arial" pitchFamily="34" charset="-120"/>
+              </a:rPr>
+              <a:t>WMT</a:t>
+            </a:r>
+            <a:endParaRPr lang="en-US" sz="700" dirty="0"/>
+          </a:p>
+        </p:txBody>
+      </p:sp>
+      <p:sp>
+        <p:nvSpPr>
+          <p:cNvPr id="89" name="Text 87"/>
+          <p:cNvSpPr/>
+          <p:nvPr/>
+        </p:nvSpPr>
+        <p:spPr>
+          <a:xfrm>
+            <a:off x="5667690" y="3621390"/>
+            <a:ext cx="548640" cy="118872"/>
+          </a:xfrm>
+          <a:prstGeom prst="rect">
+            <a:avLst/>
+          </a:prstGeom>
+          <a:noFill/>
+          <a:ln/>
+        </p:spPr>
+        <p:txBody>
+          <a:bodyPr wrap="square" lIns="0" tIns="0" rIns="0" bIns="0" rtlCol="0" anchor="ctr"/>
+          <a:lstStyle/>
+          <a:p>
+            <a:pPr indent="0" marL="0">
+              <a:buNone/>
+            </a:pPr>
+            <a:r>
+              <a:rPr lang="en-US" sz="700" b="1" dirty="0">
+                <a:solidFill>
+                  <a:srgbClr val="333333"/>
+                </a:solidFill>
+                <a:latin typeface="Arial" pitchFamily="34" charset="0"/>
+                <a:ea typeface="Arial" pitchFamily="34" charset="-122"/>
+                <a:cs typeface="Arial" pitchFamily="34" charset="-120"/>
+              </a:rPr>
+              <a:t>BRK.B</a:t>
+            </a:r>
+            <a:endParaRPr lang="en-US" sz="700" dirty="0"/>
+          </a:p>
+        </p:txBody>
+      </p:sp>
+      <p:sp>
+        <p:nvSpPr>
+          <p:cNvPr id="90" name="Text 88"/>
+          <p:cNvSpPr/>
+          <p:nvPr/>
+        </p:nvSpPr>
+        <p:spPr>
+          <a:xfrm>
+            <a:off x="5437822" y="3675888"/>
+            <a:ext cx="548640" cy="118872"/>
+          </a:xfrm>
+          <a:prstGeom prst="rect">
+            <a:avLst/>
+          </a:prstGeom>
+          <a:noFill/>
+          <a:ln/>
+        </p:spPr>
+        <p:txBody>
+          <a:bodyPr wrap="square" lIns="0" tIns="0" rIns="0" bIns="0" rtlCol="0" anchor="ctr"/>
+          <a:lstStyle/>
+          <a:p>
+            <a:pPr indent="0" marL="0">
+              <a:buNone/>
+            </a:pPr>
+            <a:r>
+              <a:rPr lang="en-US" sz="700" b="1" dirty="0">
+                <a:solidFill>
+                  <a:srgbClr val="F6693D"/>
+                </a:solidFill>
+                <a:latin typeface="Arial" pitchFamily="34" charset="0"/>
+                <a:ea typeface="Arial" pitchFamily="34" charset="-122"/>
+                <a:cs typeface="Arial" pitchFamily="34" charset="-120"/>
+              </a:rPr>
+              <a:t>SMSNG</a:t>
+            </a:r>
+            <a:endParaRPr lang="en-US" sz="700" dirty="0"/>
+          </a:p>
+        </p:txBody>
+      </p:sp>
+      <p:sp>
+        <p:nvSpPr>
+          <p:cNvPr id="91" name="Text 89"/>
+          <p:cNvSpPr/>
+          <p:nvPr/>
+        </p:nvSpPr>
+        <p:spPr>
+          <a:xfrm>
+            <a:off x="5748451" y="3995196"/>
+            <a:ext cx="548640" cy="118872"/>
+          </a:xfrm>
+          <a:prstGeom prst="rect">
+            <a:avLst/>
+          </a:prstGeom>
+          <a:noFill/>
+          <a:ln/>
+        </p:spPr>
+        <p:txBody>
+          <a:bodyPr wrap="square" lIns="0" tIns="0" rIns="0" bIns="0" rtlCol="0" anchor="ctr"/>
+          <a:lstStyle/>
+          <a:p>
+            <a:pPr indent="0" marL="0">
+              <a:buNone/>
+            </a:pPr>
+            <a:r>
+              <a:rPr lang="en-US" sz="700" b="1" dirty="0">
+                <a:solidFill>
+                  <a:srgbClr val="333333"/>
+                </a:solidFill>
+                <a:latin typeface="Arial" pitchFamily="34" charset="0"/>
+                <a:ea typeface="Arial" pitchFamily="34" charset="-122"/>
+                <a:cs typeface="Arial" pitchFamily="34" charset="-120"/>
+              </a:rPr>
+              <a:t>JPM</a:t>
+            </a:r>
+            <a:endParaRPr lang="en-US" sz="700" dirty="0"/>
+          </a:p>
+        </p:txBody>
+      </p:sp>
+      <p:sp>
+        <p:nvSpPr>
+          <p:cNvPr id="92" name="Text 90"/>
+          <p:cNvSpPr/>
+          <p:nvPr/>
+        </p:nvSpPr>
+        <p:spPr>
+          <a:xfrm>
+            <a:off x="6104887" y="3375599"/>
+            <a:ext cx="548640" cy="118872"/>
+          </a:xfrm>
+          <a:prstGeom prst="rect">
+            <a:avLst/>
+          </a:prstGeom>
+          <a:noFill/>
+          <a:ln/>
+        </p:spPr>
+        <p:txBody>
+          <a:bodyPr wrap="square" lIns="0" tIns="0" rIns="0" bIns="0" rtlCol="0" anchor="ctr"/>
+          <a:lstStyle/>
+          <a:p>
+            <a:pPr indent="0" marL="0">
+              <a:buNone/>
+            </a:pPr>
+            <a:r>
+              <a:rPr lang="en-US" sz="700" b="1" dirty="0">
+                <a:solidFill>
+                  <a:srgbClr val="333333"/>
+                </a:solidFill>
+                <a:latin typeface="Arial" pitchFamily="34" charset="0"/>
+                <a:ea typeface="Arial" pitchFamily="34" charset="-122"/>
+                <a:cs typeface="Arial" pitchFamily="34" charset="-120"/>
+              </a:rPr>
+              <a:t>LLY</a:t>
+            </a:r>
+            <a:endParaRPr lang="en-US" sz="700" dirty="0"/>
+          </a:p>
+        </p:txBody>
+      </p:sp>
+      <p:sp>
+        <p:nvSpPr>
+          <p:cNvPr id="93" name="Text 91"/>
+          <p:cNvSpPr/>
+          <p:nvPr/>
+        </p:nvSpPr>
+        <p:spPr>
+          <a:xfrm>
+            <a:off x="4862037" y="3636752"/>
+            <a:ext cx="548640" cy="118872"/>
+          </a:xfrm>
+          <a:prstGeom prst="rect">
+            <a:avLst/>
+          </a:prstGeom>
+          <a:noFill/>
+          <a:ln/>
+        </p:spPr>
+        <p:txBody>
+          <a:bodyPr wrap="square" lIns="0" tIns="0" rIns="0" bIns="0" rtlCol="0" anchor="ctr"/>
+          <a:lstStyle/>
+          <a:p>
+            <a:pPr indent="0" marL="0">
+              <a:buNone/>
+            </a:pPr>
+            <a:r>
+              <a:rPr lang="en-US" sz="700" b="1" dirty="0">
+                <a:solidFill>
+                  <a:srgbClr val="333333"/>
+                </a:solidFill>
+                <a:latin typeface="Arial" pitchFamily="34" charset="0"/>
+                <a:ea typeface="Arial" pitchFamily="34" charset="-122"/>
+                <a:cs typeface="Arial" pitchFamily="34" charset="-120"/>
+              </a:rPr>
+              <a:t>XOM</a:t>
+            </a:r>
+            <a:endParaRPr lang="en-US" sz="700" dirty="0"/>
+          </a:p>
+        </p:txBody>
+      </p:sp>
+      <p:sp>
+        <p:nvSpPr>
+          <p:cNvPr id="94" name="Text 92"/>
+          <p:cNvSpPr/>
+          <p:nvPr/>
+        </p:nvSpPr>
+        <p:spPr>
+          <a:xfrm>
+            <a:off x="6015559" y="3513856"/>
+            <a:ext cx="548640" cy="118872"/>
+          </a:xfrm>
+          <a:prstGeom prst="rect">
+            <a:avLst/>
+          </a:prstGeom>
+          <a:noFill/>
+          <a:ln/>
+        </p:spPr>
+        <p:txBody>
+          <a:bodyPr wrap="square" lIns="0" tIns="0" rIns="0" bIns="0" rtlCol="0" anchor="ctr"/>
+          <a:lstStyle/>
+          <a:p>
+            <a:pPr indent="0" marL="0">
+              <a:buNone/>
+            </a:pPr>
+            <a:r>
+              <a:rPr lang="en-US" sz="700" b="1" dirty="0">
+                <a:solidFill>
+                  <a:srgbClr val="333333"/>
+                </a:solidFill>
+                <a:latin typeface="Arial" pitchFamily="34" charset="0"/>
+                <a:ea typeface="Arial" pitchFamily="34" charset="-122"/>
+                <a:cs typeface="Arial" pitchFamily="34" charset="-120"/>
+              </a:rPr>
+              <a:t>V</a:t>
+            </a:r>
+            <a:endParaRPr lang="en-US" sz="700" dirty="0"/>
+          </a:p>
+        </p:txBody>
+      </p:sp>
+      <p:sp>
+        <p:nvSpPr>
+          <p:cNvPr id="95" name="Text 93"/>
+          <p:cNvSpPr/>
+          <p:nvPr/>
+        </p:nvSpPr>
+        <p:spPr>
+          <a:xfrm>
+            <a:off x="6126878" y="3808293"/>
+            <a:ext cx="548640" cy="118872"/>
+          </a:xfrm>
+          <a:prstGeom prst="rect">
+            <a:avLst/>
+          </a:prstGeom>
+          <a:noFill/>
+          <a:ln/>
+        </p:spPr>
+        <p:txBody>
+          <a:bodyPr wrap="square" lIns="0" tIns="0" rIns="0" bIns="0" rtlCol="0" anchor="ctr"/>
+          <a:lstStyle/>
+          <a:p>
+            <a:pPr indent="0" marL="0">
+              <a:buNone/>
+            </a:pPr>
+            <a:r>
+              <a:rPr lang="en-US" sz="700" b="1" dirty="0">
+                <a:solidFill>
+                  <a:srgbClr val="F6693D"/>
+                </a:solidFill>
+                <a:latin typeface="Arial" pitchFamily="34" charset="0"/>
+                <a:ea typeface="Arial" pitchFamily="34" charset="-122"/>
+                <a:cs typeface="Arial" pitchFamily="34" charset="-120"/>
+              </a:rPr>
+              <a:t>TCNT</a:t>
+            </a:r>
+            <a:endParaRPr lang="en-US" sz="700" dirty="0"/>
+          </a:p>
+        </p:txBody>
+      </p:sp>
+      <p:sp>
+        <p:nvSpPr>
+          <p:cNvPr id="96" name="Text 94"/>
+          <p:cNvSpPr/>
+          <p:nvPr/>
+        </p:nvSpPr>
+        <p:spPr>
+          <a:xfrm>
+            <a:off x="7059168" y="4343400"/>
+            <a:ext cx="548640" cy="118872"/>
+          </a:xfrm>
+          <a:prstGeom prst="rect">
+            <a:avLst/>
+          </a:prstGeom>
+          <a:noFill/>
+          <a:ln/>
+        </p:spPr>
+        <p:txBody>
+          <a:bodyPr wrap="square" lIns="0" tIns="0" rIns="0" bIns="0" rtlCol="0" anchor="ctr"/>
+          <a:lstStyle/>
+          <a:p>
+            <a:pPr indent="0" marL="0">
+              <a:buNone/>
+            </a:pPr>
+            <a:r>
+              <a:rPr lang="en-US" sz="700" b="1" dirty="0">
+                <a:solidFill>
+                  <a:srgbClr val="F6693D"/>
+                </a:solidFill>
+                <a:latin typeface="Arial" pitchFamily="34" charset="0"/>
+                <a:ea typeface="Arial" pitchFamily="34" charset="-122"/>
+                <a:cs typeface="Arial" pitchFamily="34" charset="-120"/>
+              </a:rPr>
+              <a:t>HYNIX</a:t>
+            </a:r>
+            <a:endParaRPr lang="en-US" sz="700" dirty="0"/>
+          </a:p>
+        </p:txBody>
+      </p:sp>
+      <p:sp>
+        <p:nvSpPr>
+          <p:cNvPr id="97" name="Text 95"/>
+          <p:cNvSpPr/>
+          <p:nvPr/>
+        </p:nvSpPr>
+        <p:spPr>
+          <a:xfrm>
+            <a:off x="6707905" y="2510211"/>
+            <a:ext cx="548640" cy="118872"/>
+          </a:xfrm>
+          <a:prstGeom prst="rect">
+            <a:avLst/>
+          </a:prstGeom>
+          <a:noFill/>
+          <a:ln/>
+        </p:spPr>
+        <p:txBody>
+          <a:bodyPr wrap="square" lIns="0" tIns="0" rIns="0" bIns="0" rtlCol="0" anchor="ctr"/>
+          <a:lstStyle/>
+          <a:p>
+            <a:pPr indent="0" marL="0">
+              <a:buNone/>
+            </a:pPr>
+            <a:r>
+              <a:rPr lang="en-US" sz="700" b="1" dirty="0">
+                <a:solidFill>
+                  <a:srgbClr val="F6693D"/>
+                </a:solidFill>
+                <a:latin typeface="Arial" pitchFamily="34" charset="0"/>
+                <a:ea typeface="Arial" pitchFamily="34" charset="-122"/>
+                <a:cs typeface="Arial" pitchFamily="34" charset="-120"/>
+              </a:rPr>
+              <a:t>ASML</a:t>
+            </a:r>
+            <a:endParaRPr lang="en-US" sz="700" dirty="0"/>
+          </a:p>
+        </p:txBody>
+      </p:sp>
+      <p:sp>
+        <p:nvSpPr>
+          <p:cNvPr id="98" name="Shape 96"/>
+          <p:cNvSpPr/>
+          <p:nvPr/>
+        </p:nvSpPr>
+        <p:spPr>
+          <a:xfrm>
+            <a:off x="7818120" y="2157984"/>
+            <a:ext cx="91440" cy="91440"/>
+          </a:xfrm>
+          <a:prstGeom prst="ellipse">
+            <a:avLst/>
+          </a:prstGeom>
+          <a:solidFill>
+            <a:srgbClr val="F6693D"/>
+          </a:solidFill>
+          <a:ln w="6350">
+            <a:solidFill>
+              <a:srgbClr val="FFFFFF"/>
+            </a:solidFill>
+            <a:prstDash val="solid"/>
+          </a:ln>
+        </p:spPr>
+      </p:sp>
+      <p:sp>
+        <p:nvSpPr>
+          <p:cNvPr id="99" name="Text 97"/>
+          <p:cNvSpPr/>
+          <p:nvPr/>
+        </p:nvSpPr>
+        <p:spPr>
+          <a:xfrm>
+            <a:off x="7936992" y="2130552"/>
+            <a:ext cx="548640" cy="146304"/>
+          </a:xfrm>
+          <a:prstGeom prst="rect">
+            <a:avLst/>
+          </a:prstGeom>
+          <a:noFill/>
+          <a:ln/>
+        </p:spPr>
+        <p:txBody>
+          <a:bodyPr wrap="square" lIns="0" tIns="0" rIns="0" bIns="0" rtlCol="0" anchor="ctr"/>
+          <a:lstStyle/>
+          <a:p>
+            <a:pPr indent="0" marL="0">
+              <a:buNone/>
+            </a:pPr>
+            <a:r>
+              <a:rPr lang="en-US" sz="750" b="1" dirty="0">
+                <a:solidFill>
+                  <a:srgbClr val="333333"/>
+                </a:solidFill>
+                <a:latin typeface="Arial" pitchFamily="34" charset="0"/>
+                <a:ea typeface="Arial" pitchFamily="34" charset="-122"/>
+                <a:cs typeface="Arial" pitchFamily="34" charset="-120"/>
+              </a:rPr>
+              <a:t>Tech</a:t>
+            </a:r>
+            <a:endParaRPr lang="en-US" sz="750" dirty="0"/>
+          </a:p>
+        </p:txBody>
+      </p:sp>
+      <p:sp>
+        <p:nvSpPr>
+          <p:cNvPr id="100" name="Shape 98"/>
+          <p:cNvSpPr/>
+          <p:nvPr/>
+        </p:nvSpPr>
+        <p:spPr>
+          <a:xfrm>
+            <a:off x="7818120" y="2322576"/>
+            <a:ext cx="91440" cy="91440"/>
+          </a:xfrm>
+          <a:prstGeom prst="ellipse">
+            <a:avLst/>
+          </a:prstGeom>
+          <a:solidFill>
+            <a:srgbClr val="333333"/>
+          </a:solidFill>
+          <a:ln w="6350">
+            <a:solidFill>
+              <a:srgbClr val="FFFFFF"/>
+            </a:solidFill>
+            <a:prstDash val="solid"/>
+          </a:ln>
+        </p:spPr>
+      </p:sp>
+      <p:sp>
+        <p:nvSpPr>
+          <p:cNvPr id="101" name="Text 99"/>
+          <p:cNvSpPr/>
+          <p:nvPr/>
+        </p:nvSpPr>
+        <p:spPr>
+          <a:xfrm>
+            <a:off x="7936992" y="2295144"/>
+            <a:ext cx="777240" cy="146304"/>
+          </a:xfrm>
+          <a:prstGeom prst="rect">
+            <a:avLst/>
+          </a:prstGeom>
+          <a:noFill/>
+          <a:ln/>
+        </p:spPr>
+        <p:txBody>
+          <a:bodyPr wrap="square" lIns="0" tIns="0" rIns="0" bIns="0" rtlCol="0" anchor="ctr"/>
+          <a:lstStyle/>
+          <a:p>
+            <a:pPr indent="0" marL="0">
+              <a:buNone/>
+            </a:pPr>
+            <a:r>
+              <a:rPr lang="en-US" sz="750" b="1" dirty="0">
+                <a:solidFill>
+                  <a:srgbClr val="333333"/>
+                </a:solidFill>
+                <a:latin typeface="Arial" pitchFamily="34" charset="0"/>
+                <a:ea typeface="Arial" pitchFamily="34" charset="-122"/>
+                <a:cs typeface="Arial" pitchFamily="34" charset="-120"/>
+              </a:rPr>
+              <a:t>Non-Tech</a:t>
+            </a:r>
+            <a:endParaRPr lang="en-US" sz="750" dirty="0"/>
+          </a:p>
+        </p:txBody>
+      </p:sp>
+      <p:sp>
+        <p:nvSpPr>
+          <p:cNvPr id="102" name="Text 100"/>
+          <p:cNvSpPr/>
+          <p:nvPr/>
+        </p:nvSpPr>
+        <p:spPr>
+          <a:xfrm>
+            <a:off x="7269480" y="4498848"/>
+            <a:ext cx="1325880" cy="146304"/>
+          </a:xfrm>
+          <a:prstGeom prst="rect">
+            <a:avLst/>
+          </a:prstGeom>
+          <a:noFill/>
+          <a:ln/>
+        </p:spPr>
+        <p:txBody>
+          <a:bodyPr wrap="square" lIns="0" tIns="0" rIns="0" bIns="0" rtlCol="0" anchor="ctr"/>
+          <a:lstStyle/>
+          <a:p>
             <a:pPr algn="r" indent="0" marL="0">
               <a:buNone/>
             </a:pPr>
             <a:r>
-              <a:rPr lang="en-US" sz="850" b="1" i="1" dirty="0">
-                <a:solidFill>
-                  <a:srgbClr val="333333"/>
-                </a:solidFill>
-                <a:latin typeface="Arial" pitchFamily="34" charset="0"/>
-                <a:ea typeface="Arial" pitchFamily="34" charset="-122"/>
-                <a:cs typeface="Arial" pitchFamily="34" charset="-120"/>
-              </a:rPr>
-              <a:t>Inexpensive for high growth</a:t>
-            </a:r>
-            <a:endParaRPr lang="en-US" sz="850" dirty="0"/>
-          </a:p>
-        </p:txBody>
-      </p:sp>
-      <p:graphicFrame>
-        <p:nvGraphicFramePr>
-          <p:cNvPr id="39" name="Chart 0" descr=""/>
-          <p:cNvGraphicFramePr/>
-          <p:nvPr/>
-        </p:nvGraphicFramePr>
-        <p:xfrm>
-          <a:off x="4754880" y="2011680"/>
-          <a:ext cx="3931920" cy="2926080"/>
-        </p:xfrm>
-        <a:graphic xmlns:a="http://schemas.openxmlformats.org/drawingml/2006/main">
-          <a:graphicData uri="http://schemas.openxmlformats.org/drawingml/2006/chart">
-            <c:chart xmlns:c="http://schemas.openxmlformats.org/drawingml/2006/chart" r:id="rId1"/>
-          </a:graphicData>
-        </a:graphic>
-      </p:graphicFrame>
-      <p:sp>
-        <p:nvSpPr>
-          <p:cNvPr id="40" name="Shape 37"/>
+              <a:rPr lang="en-US" sz="650" i="1" dirty="0">
+                <a:solidFill>
+                  <a:srgbClr val="999999"/>
+                </a:solidFill>
+                <a:latin typeface="Arial" pitchFamily="34" charset="0"/>
+                <a:ea typeface="Arial" pitchFamily="34" charset="-122"/>
+                <a:cs typeface="Arial" pitchFamily="34" charset="-120"/>
+              </a:rPr>
+              <a:t>Bubble size ∝ market cap</a:t>
+            </a:r>
+            <a:endParaRPr lang="en-US" sz="650" dirty="0"/>
+          </a:p>
+        </p:txBody>
+      </p:sp>
+      <p:sp>
+        <p:nvSpPr>
+          <p:cNvPr id="103" name="Shape 101"/>
           <p:cNvSpPr/>
           <p:nvPr/>
         </p:nvSpPr>
@@ -27377,7 +29455,7 @@
       </p:sp>
       <p:sp>
         <p:nvSpPr>
-          <p:cNvPr id="41" name="Text 38"/>
+          <p:cNvPr id="104" name="Text 102"/>
           <p:cNvSpPr/>
           <p:nvPr/>
         </p:nvSpPr>
@@ -27400,7 +29478,7 @@
               <a:buNone/>
             </a:pPr>
             <a:r>
-              <a:rPr lang="en-US" sz="1150" b="1" dirty="0">
+              <a:rPr lang="en-US" sz="1100" b="1" dirty="0">
                 <a:solidFill>
                   <a:srgbClr val="FFFFFF"/>
                 </a:solidFill>
@@ -27408,15 +29486,15 @@
                 <a:ea typeface="Arial" pitchFamily="34" charset="-122"/>
                 <a:cs typeface="Arial" pitchFamily="34" charset="-120"/>
               </a:rPr>
-              <a:t>Top 10 Tech growing ~4× faster than top 10 Non-Tech — at a cheaper multiple.</a:t>
-            </a:r>
-            <a:endParaRPr lang="en-US" sz="1150" dirty="0"/>
-          </a:p>
-        </p:txBody>
-      </p:sp>
-      <p:sp>
-        <p:nvSpPr>
-          <p:cNvPr id="42" name="Text 39"/>
+              <a:t>Tech median: ~26× fwd P/E on ~17% forward revenue growth. Non-Tech: ~23× on ~5%. The divergence is in the engine, not the multiple.</a:t>
+            </a:r>
+            <a:endParaRPr lang="en-US" sz="1100" dirty="0"/>
+          </a:p>
+        </p:txBody>
+      </p:sp>
+      <p:sp>
+        <p:nvSpPr>
+          <p:cNvPr id="105" name="Text 103"/>
           <p:cNvSpPr/>
           <p:nvPr/>
         </p:nvSpPr>
@@ -27447,7 +29525,7 @@
                 <a:ea typeface="Arial" pitchFamily="34" charset="-122"/>
                 <a:cs typeface="Arial" pitchFamily="34" charset="-120"/>
               </a:rPr>
-              <a:t>Sources: Bloomberg consensus estimates (2026E); company filings. Top 10 defined by 2026E revenue within each group. Individual P/E / growth points are indicative.</a:t>
+              <a:t>Sources: stockanalysis.com analyst consensus (AAPL/MSFT/GOOGL/AMZN/NVDA/META/AVGO/TSM/TSLA/LLY/JPM/V/XOM/BRK.B/WMT/ASML, as of Apr 22, 2026); companiesmarketcap.com (mkt caps, Apr 22, 2026); Zacks Research (TSM); Simply Wall St + gurufocus (SK Hynix, Samsung, Tencent); Saudi Aramco 2026 company guidance. Non-USD figures converted at Apr 2026 spot rates. NVDA, AVGO clipped at +50% growth; TSLA at 50× fwd P/E.</a:t>
             </a:r>
             <a:endParaRPr lang="en-US" sz="700" dirty="0"/>
           </a:p>
@@ -27455,7 +29533,7 @@
       </p:sp>
       <p:sp>
         <p:nvSpPr>
-          <p:cNvPr id="43" name="Shape 40"/>
+          <p:cNvPr id="106" name="Shape 104"/>
           <p:cNvSpPr/>
           <p:nvPr/>
         </p:nvSpPr>
@@ -27480,7 +29558,7 @@
       </p:sp>
       <p:sp>
         <p:nvSpPr>
-          <p:cNvPr id="44" name="Text 41"/>
+          <p:cNvPr id="107" name="Text 105"/>
           <p:cNvSpPr/>
           <p:nvPr/>
         </p:nvSpPr>
@@ -27519,7 +29597,7 @@
       </p:sp>
       <p:sp>
         <p:nvSpPr>
-          <p:cNvPr id="45" name="Text 42"/>
+          <p:cNvPr id="108" name="Text 106"/>
           <p:cNvSpPr/>
           <p:nvPr/>
         </p:nvSpPr>

--- a/ai-markets-deck.pptx
+++ b/ai-markets-deck.pptx
@@ -7763,6 +7763,70 @@
           </a:ln>
         </p:spPr>
       </p:sp>
+      <p:sp>
+        <p:nvSpPr>
+          <p:cNvPr id="7" name="Shape 5"/>
+          <p:cNvSpPr/>
+          <p:nvPr/>
+        </p:nvSpPr>
+        <p:spPr>
+          <a:xfrm>
+            <a:off x="457200" y="1691640"/>
+            <a:ext cx="3017520" cy="2971800"/>
+          </a:xfrm>
+          <a:prstGeom prst="rect">
+            <a:avLst/>
+          </a:prstGeom>
+          <a:solidFill>
+            <a:srgbClr val="EEEEEE"/>
+          </a:solidFill>
+          <a:ln w="9525">
+            <a:solidFill>
+              <a:srgbClr val="BBBBBB"/>
+            </a:solidFill>
+            <a:prstDash val="dash"/>
+          </a:ln>
+        </p:spPr>
+      </p:sp>
+      <p:sp>
+        <p:nvSpPr>
+          <p:cNvPr id="8" name="Text 6"/>
+          <p:cNvSpPr/>
+          <p:nvPr/>
+        </p:nvSpPr>
+        <p:spPr>
+          <a:xfrm>
+            <a:off x="548640" y="1691640"/>
+            <a:ext cx="2834640" cy="2971800"/>
+          </a:xfrm>
+          <a:prstGeom prst="rect">
+            <a:avLst/>
+          </a:prstGeom>
+          <a:noFill/>
+          <a:ln/>
+        </p:spPr>
+        <p:txBody>
+          <a:bodyPr wrap="square" lIns="0" tIns="0" rIns="0" bIns="0" rtlCol="0" anchor="ctr"/>
+          <a:lstStyle/>
+          <a:p>
+            <a:pPr algn="ctr" indent="0" marL="0">
+              <a:buNone/>
+            </a:pPr>
+            <a:r>
+              <a:rPr lang="en-US" sz="1000" i="1" dirty="0">
+                <a:solidFill>
+                  <a:srgbClr val="888888"/>
+                </a:solidFill>
+                <a:latin typeface="Arial" pitchFamily="34" charset="0"/>
+                <a:ea typeface="Arial" pitchFamily="34" charset="-122"/>
+                <a:cs typeface="Arial" pitchFamily="34" charset="-120"/>
+              </a:rPr>
+              <a:t>IMAGE: Screenshot — dark-themed IDE with AI coworker editing code, orange accents</a:t>
+            </a:r>
+            <a:endParaRPr lang="en-US" sz="1000" dirty="0"/>
+          </a:p>
+        </p:txBody>
+      </p:sp>
       <p:graphicFrame>
         <p:nvGraphicFramePr>
           <p:cNvPr id="12" name="Table 0"/>
@@ -7778,17 +7842,17 @@
           </p:nvPr>
         </p:nvGraphicFramePr>
         <p:xfrm>
-          <a:off x="457200" y="1691640"/>
-          <a:ext cx="5029200" cy="914400"/>
+          <a:off x="3611880" y="1691640"/>
+          <a:ext cx="5074920" cy="914400"/>
         </p:xfrm>
         <a:graphic>
           <a:graphicData uri="http://schemas.openxmlformats.org/drawingml/2006/table">
             <a:tbl>
               <a:tblPr/>
               <a:tblGrid>
-                <a:gridCol w="1280160"/>
-                <a:gridCol w="1828800"/>
-                <a:gridCol w="1920240"/>
+                <a:gridCol w="1325880"/>
+                <a:gridCol w="1874520"/>
+                <a:gridCol w="1874520"/>
               </a:tblGrid>
               <a:tr h="594360">
                 <a:tc>
@@ -8808,70 +8872,6 @@
       </p:graphicFrame>
       <p:sp>
         <p:nvSpPr>
-          <p:cNvPr id="8" name="Shape 5"/>
-          <p:cNvSpPr/>
-          <p:nvPr/>
-        </p:nvSpPr>
-        <p:spPr>
-          <a:xfrm>
-            <a:off x="5669280" y="1691640"/>
-            <a:ext cx="3017520" cy="2971800"/>
-          </a:xfrm>
-          <a:prstGeom prst="rect">
-            <a:avLst/>
-          </a:prstGeom>
-          <a:solidFill>
-            <a:srgbClr val="EEEEEE"/>
-          </a:solidFill>
-          <a:ln w="9525">
-            <a:solidFill>
-              <a:srgbClr val="BBBBBB"/>
-            </a:solidFill>
-            <a:prstDash val="dash"/>
-          </a:ln>
-        </p:spPr>
-      </p:sp>
-      <p:sp>
-        <p:nvSpPr>
-          <p:cNvPr id="9" name="Text 6"/>
-          <p:cNvSpPr/>
-          <p:nvPr/>
-        </p:nvSpPr>
-        <p:spPr>
-          <a:xfrm>
-            <a:off x="5760720" y="1691640"/>
-            <a:ext cx="2834640" cy="2971800"/>
-          </a:xfrm>
-          <a:prstGeom prst="rect">
-            <a:avLst/>
-          </a:prstGeom>
-          <a:noFill/>
-          <a:ln/>
-        </p:spPr>
-        <p:txBody>
-          <a:bodyPr wrap="square" lIns="0" tIns="0" rIns="0" bIns="0" rtlCol="0" anchor="ctr"/>
-          <a:lstStyle/>
-          <a:p>
-            <a:pPr algn="ctr" indent="0" marL="0">
-              <a:buNone/>
-            </a:pPr>
-            <a:r>
-              <a:rPr lang="en-US" sz="1000" i="1" dirty="0">
-                <a:solidFill>
-                  <a:srgbClr val="888888"/>
-                </a:solidFill>
-                <a:latin typeface="Arial" pitchFamily="34" charset="0"/>
-                <a:ea typeface="Arial" pitchFamily="34" charset="-122"/>
-                <a:cs typeface="Arial" pitchFamily="34" charset="-120"/>
-              </a:rPr>
-              <a:t>IMAGE: Screenshot — dark-themed IDE with AI coworker editing code, orange accents</a:t>
-            </a:r>
-            <a:endParaRPr lang="en-US" sz="1000" dirty="0"/>
-          </a:p>
-        </p:txBody>
-      </p:sp>
-      <p:sp>
-        <p:nvSpPr>
           <p:cNvPr id="10" name="Shape 7"/>
           <p:cNvSpPr/>
           <p:nvPr/>
@@ -8928,7 +8928,7 @@
                 <a:ea typeface="Arial" pitchFamily="34" charset="-122"/>
                 <a:cs typeface="Arial" pitchFamily="34" charset="-120"/>
               </a:rPr>
-              <a:t>Labs are buying dev-tool companies (Bun, Astral) to lock the coding stack.</a:t>
+              <a:t>The 10–100× compute step-up per session is what every AI capex forecast is pricing in.</a:t>
             </a:r>
             <a:endParaRPr lang="en-US" sz="1300" dirty="0"/>
           </a:p>
@@ -8967,7 +8967,7 @@
                 <a:ea typeface="Arial" pitchFamily="34" charset="-122"/>
                 <a:cs typeface="Arial" pitchFamily="34" charset="-120"/>
               </a:rPr>
-              <a:t>Source: Anthropic, OpenAI, GitHub Trending; company announcements; TechCrunch acquisition reporting.</a:t>
+              <a:t>Source: Anthropic, OpenAI, GitHub Trending; Morgan Stanley CIO Survey; Strategy Research.</a:t>
             </a:r>
             <a:endParaRPr lang="en-US" sz="700" dirty="0"/>
           </a:p>
@@ -9337,8 +9337,8 @@
           <p:nvPr/>
         </p:nvGraphicFramePr>
         <p:xfrm>
-          <a:off x="457200" y="2011680"/>
-          <a:ext cx="3931920" cy="3291840"/>
+          <a:off x="457200" y="1737360"/>
+          <a:ext cx="3931920" cy="3429000"/>
         </p:xfrm>
         <a:graphic xmlns:a="http://schemas.openxmlformats.org/drawingml/2006/main">
           <a:graphicData uri="http://schemas.openxmlformats.org/drawingml/2006/chart">
@@ -9354,7 +9354,32 @@
         </p:nvSpPr>
         <p:spPr>
           <a:xfrm>
-            <a:off x="4754880" y="2011680"/>
+            <a:off x="4754880" y="1737360"/>
+            <a:ext cx="3931920" cy="1143000"/>
+          </a:xfrm>
+          <a:prstGeom prst="rect">
+            <a:avLst/>
+          </a:prstGeom>
+          <a:solidFill>
+            <a:srgbClr val="FFFFFF"/>
+          </a:solidFill>
+          <a:ln w="6350">
+            <a:solidFill>
+              <a:srgbClr val="E5E5E5"/>
+            </a:solidFill>
+            <a:prstDash val="solid"/>
+          </a:ln>
+        </p:spPr>
+      </p:sp>
+      <p:sp>
+        <p:nvSpPr>
+          <p:cNvPr id="11" name="Shape 8"/>
+          <p:cNvSpPr/>
+          <p:nvPr/>
+        </p:nvSpPr>
+        <p:spPr>
+          <a:xfrm>
+            <a:off x="4754880" y="1737360"/>
             <a:ext cx="3931920" cy="274320"/>
           </a:xfrm>
           <a:prstGeom prst="rect">
@@ -9373,13 +9398,13 @@
       </p:sp>
       <p:sp>
         <p:nvSpPr>
-          <p:cNvPr id="11" name="Text 8"/>
-          <p:cNvSpPr/>
-          <p:nvPr/>
-        </p:nvSpPr>
-        <p:spPr>
-          <a:xfrm>
-            <a:off x="4754880" y="2011680"/>
+          <p:cNvPr id="12" name="Text 9"/>
+          <p:cNvSpPr/>
+          <p:nvPr/>
+        </p:nvSpPr>
+        <p:spPr>
+          <a:xfrm>
+            <a:off x="4754880" y="1737360"/>
             <a:ext cx="3931920" cy="274320"/>
           </a:xfrm>
           <a:prstGeom prst="rect">
@@ -9396,7 +9421,7 @@
               <a:buNone/>
             </a:pPr>
             <a:r>
-              <a:rPr lang="en-US" sz="1000" b="1" spc="200" kern="0" dirty="0">
+              <a:rPr lang="en-US" sz="950" b="1" spc="200" kern="0" dirty="0">
                 <a:solidFill>
                   <a:srgbClr val="FFFFFF"/>
                 </a:solidFill>
@@ -9406,59 +9431,59 @@
               </a:rPr>
               <a:t>MEMORY SUPERCYCLE</a:t>
             </a:r>
+            <a:endParaRPr lang="en-US" sz="950" dirty="0"/>
+          </a:p>
+        </p:txBody>
+      </p:sp>
+      <p:sp>
+        <p:nvSpPr>
+          <p:cNvPr id="13" name="Text 10"/>
+          <p:cNvSpPr/>
+          <p:nvPr/>
+        </p:nvSpPr>
+        <p:spPr>
+          <a:xfrm>
+            <a:off x="4919472" y="2048256"/>
+            <a:ext cx="1188720" cy="274320"/>
+          </a:xfrm>
+          <a:prstGeom prst="rect">
+            <a:avLst/>
+          </a:prstGeom>
+          <a:noFill/>
+          <a:ln/>
+        </p:spPr>
+        <p:txBody>
+          <a:bodyPr wrap="square" lIns="0" tIns="0" rIns="0" bIns="0" rtlCol="0" anchor="ctr"/>
+          <a:lstStyle/>
+          <a:p>
+            <a:pPr indent="0" marL="0">
+              <a:buNone/>
+            </a:pPr>
+            <a:r>
+              <a:rPr lang="en-US" sz="1000" b="1" dirty="0">
+                <a:solidFill>
+                  <a:srgbClr val="000000"/>
+                </a:solidFill>
+                <a:latin typeface="Arial" pitchFamily="34" charset="0"/>
+                <a:ea typeface="Arial" pitchFamily="34" charset="-122"/>
+                <a:cs typeface="Arial" pitchFamily="34" charset="-120"/>
+              </a:rPr>
+              <a:t>Samsung</a:t>
+            </a:r>
             <a:endParaRPr lang="en-US" sz="1000" dirty="0"/>
           </a:p>
         </p:txBody>
       </p:sp>
       <p:sp>
         <p:nvSpPr>
-          <p:cNvPr id="12" name="Text 9"/>
-          <p:cNvSpPr/>
-          <p:nvPr/>
-        </p:nvSpPr>
-        <p:spPr>
-          <a:xfrm>
-            <a:off x="4754880" y="2331720"/>
-            <a:ext cx="914400" cy="347472"/>
-          </a:xfrm>
-          <a:prstGeom prst="rect">
-            <a:avLst/>
-          </a:prstGeom>
-          <a:noFill/>
-          <a:ln/>
-        </p:spPr>
-        <p:txBody>
-          <a:bodyPr wrap="square" lIns="635" tIns="635" rIns="635" bIns="635" rtlCol="0" anchor="ctr"/>
-          <a:lstStyle/>
-          <a:p>
-            <a:pPr indent="0" marL="0">
-              <a:buNone/>
-            </a:pPr>
-            <a:r>
-              <a:rPr lang="en-US" sz="1050" b="1" dirty="0">
-                <a:solidFill>
-                  <a:srgbClr val="000000"/>
-                </a:solidFill>
-                <a:latin typeface="Arial" pitchFamily="34" charset="0"/>
-                <a:ea typeface="Arial" pitchFamily="34" charset="-122"/>
-                <a:cs typeface="Arial" pitchFamily="34" charset="-120"/>
-              </a:rPr>
-              <a:t>Samsung</a:t>
-            </a:r>
-            <a:endParaRPr lang="en-US" sz="1050" dirty="0"/>
-          </a:p>
-        </p:txBody>
-      </p:sp>
-      <p:sp>
-        <p:nvSpPr>
-          <p:cNvPr id="13" name="Text 10"/>
-          <p:cNvSpPr/>
-          <p:nvPr/>
-        </p:nvSpPr>
-        <p:spPr>
-          <a:xfrm>
-            <a:off x="5669280" y="2331720"/>
-            <a:ext cx="822960" cy="347472"/>
+          <p:cNvPr id="14" name="Text 11"/>
+          <p:cNvSpPr/>
+          <p:nvPr/>
+        </p:nvSpPr>
+        <p:spPr>
+          <a:xfrm>
+            <a:off x="6108192" y="2048256"/>
+            <a:ext cx="749808" cy="274320"/>
           </a:xfrm>
           <a:prstGeom prst="rect">
             <a:avLst/>
@@ -9470,11 +9495,11 @@
           <a:bodyPr wrap="square" lIns="0" tIns="0" rIns="0" bIns="0" rtlCol="0" anchor="ctr"/>
           <a:lstStyle/>
           <a:p>
-            <a:pPr indent="0" marL="0">
-              <a:buNone/>
-            </a:pPr>
-            <a:r>
-              <a:rPr lang="en-US" sz="1250" b="1" dirty="0">
+            <a:pPr algn="r" indent="0" marL="0">
+              <a:buNone/>
+            </a:pPr>
+            <a:r>
+              <a:rPr lang="en-US" sz="1200" b="1" dirty="0">
                 <a:solidFill>
                   <a:srgbClr val="00A854"/>
                 </a:solidFill>
@@ -9484,20 +9509,20 @@
               </a:rPr>
               <a:t>+72%</a:t>
             </a:r>
-            <a:endParaRPr lang="en-US" sz="1250" dirty="0"/>
-          </a:p>
-        </p:txBody>
-      </p:sp>
-      <p:sp>
-        <p:nvSpPr>
-          <p:cNvPr id="14" name="Text 11"/>
-          <p:cNvSpPr/>
-          <p:nvPr/>
-        </p:nvSpPr>
-        <p:spPr>
-          <a:xfrm>
-            <a:off x="6492240" y="2331720"/>
-            <a:ext cx="2194560" cy="347472"/>
+            <a:endParaRPr lang="en-US" sz="1200" dirty="0"/>
+          </a:p>
+        </p:txBody>
+      </p:sp>
+      <p:sp>
+        <p:nvSpPr>
+          <p:cNvPr id="15" name="Text 12"/>
+          <p:cNvSpPr/>
+          <p:nvPr/>
+        </p:nvSpPr>
+        <p:spPr>
+          <a:xfrm>
+            <a:off x="6967728" y="2048256"/>
+            <a:ext cx="1572768" cy="274320"/>
           </a:xfrm>
           <a:prstGeom prst="rect">
             <a:avLst/>
@@ -9515,7 +9540,7 @@
             <a:r>
               <a:rPr lang="en-US" sz="850" dirty="0">
                 <a:solidFill>
-                  <a:srgbClr val="333333"/>
+                  <a:srgbClr val="666666"/>
                 </a:solidFill>
                 <a:latin typeface="Arial" pitchFamily="34" charset="0"/>
                 <a:ea typeface="Arial" pitchFamily="34" charset="-122"/>
@@ -9529,30 +9554,53 @@
       </p:sp>
       <p:sp>
         <p:nvSpPr>
-          <p:cNvPr id="15" name="Text 12"/>
-          <p:cNvSpPr/>
-          <p:nvPr/>
-        </p:nvSpPr>
-        <p:spPr>
-          <a:xfrm>
-            <a:off x="4754880" y="2679192"/>
-            <a:ext cx="914400" cy="347472"/>
-          </a:xfrm>
-          <a:prstGeom prst="rect">
-            <a:avLst/>
-          </a:prstGeom>
-          <a:noFill/>
-          <a:ln/>
-        </p:spPr>
-        <p:txBody>
-          <a:bodyPr wrap="square" lIns="635" tIns="635" rIns="635" bIns="635" rtlCol="0" anchor="ctr"/>
+          <p:cNvPr id="16" name="Shape 13"/>
+          <p:cNvSpPr/>
+          <p:nvPr/>
+        </p:nvSpPr>
+        <p:spPr>
+          <a:xfrm>
+            <a:off x="4919472" y="2318004"/>
+            <a:ext cx="3602736" cy="0"/>
+          </a:xfrm>
+          <a:prstGeom prst="line">
+            <a:avLst/>
+          </a:prstGeom>
+          <a:noFill/>
+          <a:ln w="5080">
+            <a:solidFill>
+              <a:srgbClr val="E5E5E5"/>
+            </a:solidFill>
+            <a:prstDash val="solid"/>
+          </a:ln>
+        </p:spPr>
+      </p:sp>
+      <p:sp>
+        <p:nvSpPr>
+          <p:cNvPr id="17" name="Text 14"/>
+          <p:cNvSpPr/>
+          <p:nvPr/>
+        </p:nvSpPr>
+        <p:spPr>
+          <a:xfrm>
+            <a:off x="4919472" y="2322576"/>
+            <a:ext cx="1188720" cy="274320"/>
+          </a:xfrm>
+          <a:prstGeom prst="rect">
+            <a:avLst/>
+          </a:prstGeom>
+          <a:noFill/>
+          <a:ln/>
+        </p:spPr>
+        <p:txBody>
+          <a:bodyPr wrap="square" lIns="0" tIns="0" rIns="0" bIns="0" rtlCol="0" anchor="ctr"/>
           <a:lstStyle/>
           <a:p>
             <a:pPr indent="0" marL="0">
               <a:buNone/>
             </a:pPr>
             <a:r>
-              <a:rPr lang="en-US" sz="1050" b="1" dirty="0">
+              <a:rPr lang="en-US" sz="1000" b="1" dirty="0">
                 <a:solidFill>
                   <a:srgbClr val="000000"/>
                 </a:solidFill>
@@ -9562,20 +9610,20 @@
               </a:rPr>
               <a:t>Micron</a:t>
             </a:r>
-            <a:endParaRPr lang="en-US" sz="1050" dirty="0"/>
-          </a:p>
-        </p:txBody>
-      </p:sp>
-      <p:sp>
-        <p:nvSpPr>
-          <p:cNvPr id="16" name="Text 13"/>
-          <p:cNvSpPr/>
-          <p:nvPr/>
-        </p:nvSpPr>
-        <p:spPr>
-          <a:xfrm>
-            <a:off x="5669280" y="2679192"/>
-            <a:ext cx="822960" cy="347472"/>
+            <a:endParaRPr lang="en-US" sz="1000" dirty="0"/>
+          </a:p>
+        </p:txBody>
+      </p:sp>
+      <p:sp>
+        <p:nvSpPr>
+          <p:cNvPr id="18" name="Text 15"/>
+          <p:cNvSpPr/>
+          <p:nvPr/>
+        </p:nvSpPr>
+        <p:spPr>
+          <a:xfrm>
+            <a:off x="6108192" y="2322576"/>
+            <a:ext cx="749808" cy="274320"/>
           </a:xfrm>
           <a:prstGeom prst="rect">
             <a:avLst/>
@@ -9587,11 +9635,11 @@
           <a:bodyPr wrap="square" lIns="0" tIns="0" rIns="0" bIns="0" rtlCol="0" anchor="ctr"/>
           <a:lstStyle/>
           <a:p>
-            <a:pPr indent="0" marL="0">
-              <a:buNone/>
-            </a:pPr>
-            <a:r>
-              <a:rPr lang="en-US" sz="1250" b="1" dirty="0">
+            <a:pPr algn="r" indent="0" marL="0">
+              <a:buNone/>
+            </a:pPr>
+            <a:r>
+              <a:rPr lang="en-US" sz="1200" b="1" dirty="0">
                 <a:solidFill>
                   <a:srgbClr val="00A854"/>
                 </a:solidFill>
@@ -9601,20 +9649,20 @@
               </a:rPr>
               <a:t>+68%</a:t>
             </a:r>
-            <a:endParaRPr lang="en-US" sz="1250" dirty="0"/>
-          </a:p>
-        </p:txBody>
-      </p:sp>
-      <p:sp>
-        <p:nvSpPr>
-          <p:cNvPr id="17" name="Text 14"/>
-          <p:cNvSpPr/>
-          <p:nvPr/>
-        </p:nvSpPr>
-        <p:spPr>
-          <a:xfrm>
-            <a:off x="6492240" y="2679192"/>
-            <a:ext cx="2194560" cy="347472"/>
+            <a:endParaRPr lang="en-US" sz="1200" dirty="0"/>
+          </a:p>
+        </p:txBody>
+      </p:sp>
+      <p:sp>
+        <p:nvSpPr>
+          <p:cNvPr id="19" name="Text 16"/>
+          <p:cNvSpPr/>
+          <p:nvPr/>
+        </p:nvSpPr>
+        <p:spPr>
+          <a:xfrm>
+            <a:off x="6967728" y="2322576"/>
+            <a:ext cx="1572768" cy="274320"/>
           </a:xfrm>
           <a:prstGeom prst="rect">
             <a:avLst/>
@@ -9632,7 +9680,7 @@
             <a:r>
               <a:rPr lang="en-US" sz="850" dirty="0">
                 <a:solidFill>
-                  <a:srgbClr val="333333"/>
+                  <a:srgbClr val="666666"/>
                 </a:solidFill>
                 <a:latin typeface="Arial" pitchFamily="34" charset="0"/>
                 <a:ea typeface="Arial" pitchFamily="34" charset="-122"/>
@@ -9646,30 +9694,53 @@
       </p:sp>
       <p:sp>
         <p:nvSpPr>
-          <p:cNvPr id="18" name="Text 15"/>
-          <p:cNvSpPr/>
-          <p:nvPr/>
-        </p:nvSpPr>
-        <p:spPr>
-          <a:xfrm>
-            <a:off x="4754880" y="3026664"/>
-            <a:ext cx="914400" cy="347472"/>
-          </a:xfrm>
-          <a:prstGeom prst="rect">
-            <a:avLst/>
-          </a:prstGeom>
-          <a:noFill/>
-          <a:ln/>
-        </p:spPr>
-        <p:txBody>
-          <a:bodyPr wrap="square" lIns="635" tIns="635" rIns="635" bIns="635" rtlCol="0" anchor="ctr"/>
+          <p:cNvPr id="20" name="Shape 17"/>
+          <p:cNvSpPr/>
+          <p:nvPr/>
+        </p:nvSpPr>
+        <p:spPr>
+          <a:xfrm>
+            <a:off x="4919472" y="2592324"/>
+            <a:ext cx="3602736" cy="0"/>
+          </a:xfrm>
+          <a:prstGeom prst="line">
+            <a:avLst/>
+          </a:prstGeom>
+          <a:noFill/>
+          <a:ln w="5080">
+            <a:solidFill>
+              <a:srgbClr val="E5E5E5"/>
+            </a:solidFill>
+            <a:prstDash val="solid"/>
+          </a:ln>
+        </p:spPr>
+      </p:sp>
+      <p:sp>
+        <p:nvSpPr>
+          <p:cNvPr id="21" name="Text 18"/>
+          <p:cNvSpPr/>
+          <p:nvPr/>
+        </p:nvSpPr>
+        <p:spPr>
+          <a:xfrm>
+            <a:off x="4919472" y="2596896"/>
+            <a:ext cx="1188720" cy="274320"/>
+          </a:xfrm>
+          <a:prstGeom prst="rect">
+            <a:avLst/>
+          </a:prstGeom>
+          <a:noFill/>
+          <a:ln/>
+        </p:spPr>
+        <p:txBody>
+          <a:bodyPr wrap="square" lIns="0" tIns="0" rIns="0" bIns="0" rtlCol="0" anchor="ctr"/>
           <a:lstStyle/>
           <a:p>
             <a:pPr indent="0" marL="0">
               <a:buNone/>
             </a:pPr>
             <a:r>
-              <a:rPr lang="en-US" sz="1050" b="1" dirty="0">
+              <a:rPr lang="en-US" sz="1000" b="1" dirty="0">
                 <a:solidFill>
                   <a:srgbClr val="000000"/>
                 </a:solidFill>
@@ -9679,20 +9750,20 @@
               </a:rPr>
               <a:t>SK Hynix</a:t>
             </a:r>
-            <a:endParaRPr lang="en-US" sz="1050" dirty="0"/>
-          </a:p>
-        </p:txBody>
-      </p:sp>
-      <p:sp>
-        <p:nvSpPr>
-          <p:cNvPr id="19" name="Text 16"/>
-          <p:cNvSpPr/>
-          <p:nvPr/>
-        </p:nvSpPr>
-        <p:spPr>
-          <a:xfrm>
-            <a:off x="5669280" y="3026664"/>
-            <a:ext cx="822960" cy="347472"/>
+            <a:endParaRPr lang="en-US" sz="1000" dirty="0"/>
+          </a:p>
+        </p:txBody>
+      </p:sp>
+      <p:sp>
+        <p:nvSpPr>
+          <p:cNvPr id="22" name="Text 19"/>
+          <p:cNvSpPr/>
+          <p:nvPr/>
+        </p:nvSpPr>
+        <p:spPr>
+          <a:xfrm>
+            <a:off x="6108192" y="2596896"/>
+            <a:ext cx="749808" cy="274320"/>
           </a:xfrm>
           <a:prstGeom prst="rect">
             <a:avLst/>
@@ -9704,11 +9775,11 @@
           <a:bodyPr wrap="square" lIns="0" tIns="0" rIns="0" bIns="0" rtlCol="0" anchor="ctr"/>
           <a:lstStyle/>
           <a:p>
-            <a:pPr indent="0" marL="0">
-              <a:buNone/>
-            </a:pPr>
-            <a:r>
-              <a:rPr lang="en-US" sz="1250" b="1" dirty="0">
+            <a:pPr algn="r" indent="0" marL="0">
+              <a:buNone/>
+            </a:pPr>
+            <a:r>
+              <a:rPr lang="en-US" sz="1200" b="1" dirty="0">
                 <a:solidFill>
                   <a:srgbClr val="00A854"/>
                 </a:solidFill>
@@ -9718,20 +9789,20 @@
               </a:rPr>
               <a:t>+62%</a:t>
             </a:r>
-            <a:endParaRPr lang="en-US" sz="1250" dirty="0"/>
-          </a:p>
-        </p:txBody>
-      </p:sp>
-      <p:sp>
-        <p:nvSpPr>
-          <p:cNvPr id="20" name="Text 17"/>
-          <p:cNvSpPr/>
-          <p:nvPr/>
-        </p:nvSpPr>
-        <p:spPr>
-          <a:xfrm>
-            <a:off x="6492240" y="3026664"/>
-            <a:ext cx="2194560" cy="347472"/>
+            <a:endParaRPr lang="en-US" sz="1200" dirty="0"/>
+          </a:p>
+        </p:txBody>
+      </p:sp>
+      <p:sp>
+        <p:nvSpPr>
+          <p:cNvPr id="23" name="Text 20"/>
+          <p:cNvSpPr/>
+          <p:nvPr/>
+        </p:nvSpPr>
+        <p:spPr>
+          <a:xfrm>
+            <a:off x="6967728" y="2596896"/>
+            <a:ext cx="1572768" cy="274320"/>
           </a:xfrm>
           <a:prstGeom prst="rect">
             <a:avLst/>
@@ -9749,7 +9820,7 @@
             <a:r>
               <a:rPr lang="en-US" sz="850" dirty="0">
                 <a:solidFill>
-                  <a:srgbClr val="333333"/>
+                  <a:srgbClr val="666666"/>
                 </a:solidFill>
                 <a:latin typeface="Arial" pitchFamily="34" charset="0"/>
                 <a:ea typeface="Arial" pitchFamily="34" charset="-122"/>
@@ -9763,13 +9834,38 @@
       </p:sp>
       <p:sp>
         <p:nvSpPr>
-          <p:cNvPr id="21" name="Shape 18"/>
-          <p:cNvSpPr/>
-          <p:nvPr/>
-        </p:nvSpPr>
-        <p:spPr>
-          <a:xfrm>
-            <a:off x="4754880" y="3246120"/>
+          <p:cNvPr id="24" name="Shape 21"/>
+          <p:cNvSpPr/>
+          <p:nvPr/>
+        </p:nvSpPr>
+        <p:spPr>
+          <a:xfrm>
+            <a:off x="4754880" y="2971800"/>
+            <a:ext cx="3931920" cy="1143000"/>
+          </a:xfrm>
+          <a:prstGeom prst="rect">
+            <a:avLst/>
+          </a:prstGeom>
+          <a:solidFill>
+            <a:srgbClr val="FFFFFF"/>
+          </a:solidFill>
+          <a:ln w="6350">
+            <a:solidFill>
+              <a:srgbClr val="E5E5E5"/>
+            </a:solidFill>
+            <a:prstDash val="solid"/>
+          </a:ln>
+        </p:spPr>
+      </p:sp>
+      <p:sp>
+        <p:nvSpPr>
+          <p:cNvPr id="25" name="Shape 22"/>
+          <p:cNvSpPr/>
+          <p:nvPr/>
+        </p:nvSpPr>
+        <p:spPr>
+          <a:xfrm>
+            <a:off x="4754880" y="2971800"/>
             <a:ext cx="3931920" cy="274320"/>
           </a:xfrm>
           <a:prstGeom prst="rect">
@@ -9788,13 +9884,13 @@
       </p:sp>
       <p:sp>
         <p:nvSpPr>
-          <p:cNvPr id="22" name="Text 19"/>
-          <p:cNvSpPr/>
-          <p:nvPr/>
-        </p:nvSpPr>
-        <p:spPr>
-          <a:xfrm>
-            <a:off x="4754880" y="3246120"/>
+          <p:cNvPr id="26" name="Text 23"/>
+          <p:cNvSpPr/>
+          <p:nvPr/>
+        </p:nvSpPr>
+        <p:spPr>
+          <a:xfrm>
+            <a:off x="4754880" y="2971800"/>
             <a:ext cx="3931920" cy="274320"/>
           </a:xfrm>
           <a:prstGeom prst="rect">
@@ -9811,7 +9907,7 @@
               <a:buNone/>
             </a:pPr>
             <a:r>
-              <a:rPr lang="en-US" sz="1000" b="1" spc="200" kern="0" dirty="0">
+              <a:rPr lang="en-US" sz="950" b="1" spc="200" kern="0" dirty="0">
                 <a:solidFill>
                   <a:srgbClr val="FFFFFF"/>
                 </a:solidFill>
@@ -9821,59 +9917,59 @@
               </a:rPr>
               <a:t>SOFTWARE UNDER PRESSURE</a:t>
             </a:r>
+            <a:endParaRPr lang="en-US" sz="950" dirty="0"/>
+          </a:p>
+        </p:txBody>
+      </p:sp>
+      <p:sp>
+        <p:nvSpPr>
+          <p:cNvPr id="27" name="Text 24"/>
+          <p:cNvSpPr/>
+          <p:nvPr/>
+        </p:nvSpPr>
+        <p:spPr>
+          <a:xfrm>
+            <a:off x="4919472" y="3282696"/>
+            <a:ext cx="1188720" cy="274320"/>
+          </a:xfrm>
+          <a:prstGeom prst="rect">
+            <a:avLst/>
+          </a:prstGeom>
+          <a:noFill/>
+          <a:ln/>
+        </p:spPr>
+        <p:txBody>
+          <a:bodyPr wrap="square" lIns="0" tIns="0" rIns="0" bIns="0" rtlCol="0" anchor="ctr"/>
+          <a:lstStyle/>
+          <a:p>
+            <a:pPr indent="0" marL="0">
+              <a:buNone/>
+            </a:pPr>
+            <a:r>
+              <a:rPr lang="en-US" sz="1000" b="1" dirty="0">
+                <a:solidFill>
+                  <a:srgbClr val="000000"/>
+                </a:solidFill>
+                <a:latin typeface="Arial" pitchFamily="34" charset="0"/>
+                <a:ea typeface="Arial" pitchFamily="34" charset="-122"/>
+                <a:cs typeface="Arial" pitchFamily="34" charset="-120"/>
+              </a:rPr>
+              <a:t>Salesforce</a:t>
+            </a:r>
             <a:endParaRPr lang="en-US" sz="1000" dirty="0"/>
           </a:p>
         </p:txBody>
       </p:sp>
       <p:sp>
         <p:nvSpPr>
-          <p:cNvPr id="23" name="Text 20"/>
-          <p:cNvSpPr/>
-          <p:nvPr/>
-        </p:nvSpPr>
-        <p:spPr>
-          <a:xfrm>
-            <a:off x="4754880" y="3566160"/>
-            <a:ext cx="914400" cy="347472"/>
-          </a:xfrm>
-          <a:prstGeom prst="rect">
-            <a:avLst/>
-          </a:prstGeom>
-          <a:noFill/>
-          <a:ln/>
-        </p:spPr>
-        <p:txBody>
-          <a:bodyPr wrap="square" lIns="635" tIns="635" rIns="635" bIns="635" rtlCol="0" anchor="ctr"/>
-          <a:lstStyle/>
-          <a:p>
-            <a:pPr indent="0" marL="0">
-              <a:buNone/>
-            </a:pPr>
-            <a:r>
-              <a:rPr lang="en-US" sz="1050" b="1" dirty="0">
-                <a:solidFill>
-                  <a:srgbClr val="000000"/>
-                </a:solidFill>
-                <a:latin typeface="Arial" pitchFamily="34" charset="0"/>
-                <a:ea typeface="Arial" pitchFamily="34" charset="-122"/>
-                <a:cs typeface="Arial" pitchFamily="34" charset="-120"/>
-              </a:rPr>
-              <a:t>Salesforce</a:t>
-            </a:r>
-            <a:endParaRPr lang="en-US" sz="1050" dirty="0"/>
-          </a:p>
-        </p:txBody>
-      </p:sp>
-      <p:sp>
-        <p:nvSpPr>
-          <p:cNvPr id="24" name="Text 21"/>
-          <p:cNvSpPr/>
-          <p:nvPr/>
-        </p:nvSpPr>
-        <p:spPr>
-          <a:xfrm>
-            <a:off x="5669280" y="3566160"/>
-            <a:ext cx="822960" cy="347472"/>
+          <p:cNvPr id="28" name="Text 25"/>
+          <p:cNvSpPr/>
+          <p:nvPr/>
+        </p:nvSpPr>
+        <p:spPr>
+          <a:xfrm>
+            <a:off x="6108192" y="3282696"/>
+            <a:ext cx="749808" cy="274320"/>
           </a:xfrm>
           <a:prstGeom prst="rect">
             <a:avLst/>
@@ -9885,11 +9981,11 @@
           <a:bodyPr wrap="square" lIns="0" tIns="0" rIns="0" bIns="0" rtlCol="0" anchor="ctr"/>
           <a:lstStyle/>
           <a:p>
-            <a:pPr indent="0" marL="0">
-              <a:buNone/>
-            </a:pPr>
-            <a:r>
-              <a:rPr lang="en-US" sz="1250" b="1" dirty="0">
+            <a:pPr algn="r" indent="0" marL="0">
+              <a:buNone/>
+            </a:pPr>
+            <a:r>
+              <a:rPr lang="en-US" sz="1200" b="1" dirty="0">
                 <a:solidFill>
                   <a:srgbClr val="CC0000"/>
                 </a:solidFill>
@@ -9899,20 +9995,20 @@
               </a:rPr>
               <a:t>–22%</a:t>
             </a:r>
-            <a:endParaRPr lang="en-US" sz="1250" dirty="0"/>
-          </a:p>
-        </p:txBody>
-      </p:sp>
-      <p:sp>
-        <p:nvSpPr>
-          <p:cNvPr id="25" name="Text 22"/>
-          <p:cNvSpPr/>
-          <p:nvPr/>
-        </p:nvSpPr>
-        <p:spPr>
-          <a:xfrm>
-            <a:off x="6492240" y="3566160"/>
-            <a:ext cx="2194560" cy="347472"/>
+            <a:endParaRPr lang="en-US" sz="1200" dirty="0"/>
+          </a:p>
+        </p:txBody>
+      </p:sp>
+      <p:sp>
+        <p:nvSpPr>
+          <p:cNvPr id="29" name="Text 26"/>
+          <p:cNvSpPr/>
+          <p:nvPr/>
+        </p:nvSpPr>
+        <p:spPr>
+          <a:xfrm>
+            <a:off x="6967728" y="3282696"/>
+            <a:ext cx="1572768" cy="274320"/>
           </a:xfrm>
           <a:prstGeom prst="rect">
             <a:avLst/>
@@ -9930,7 +10026,7 @@
             <a:r>
               <a:rPr lang="en-US" sz="850" dirty="0">
                 <a:solidFill>
-                  <a:srgbClr val="333333"/>
+                  <a:srgbClr val="666666"/>
                 </a:solidFill>
                 <a:latin typeface="Arial" pitchFamily="34" charset="0"/>
                 <a:ea typeface="Arial" pitchFamily="34" charset="-122"/>
@@ -9944,30 +10040,53 @@
       </p:sp>
       <p:sp>
         <p:nvSpPr>
-          <p:cNvPr id="26" name="Text 23"/>
-          <p:cNvSpPr/>
-          <p:nvPr/>
-        </p:nvSpPr>
-        <p:spPr>
-          <a:xfrm>
-            <a:off x="4754880" y="3913632"/>
-            <a:ext cx="914400" cy="347472"/>
-          </a:xfrm>
-          <a:prstGeom prst="rect">
-            <a:avLst/>
-          </a:prstGeom>
-          <a:noFill/>
-          <a:ln/>
-        </p:spPr>
-        <p:txBody>
-          <a:bodyPr wrap="square" lIns="635" tIns="635" rIns="635" bIns="635" rtlCol="0" anchor="ctr"/>
+          <p:cNvPr id="30" name="Shape 27"/>
+          <p:cNvSpPr/>
+          <p:nvPr/>
+        </p:nvSpPr>
+        <p:spPr>
+          <a:xfrm>
+            <a:off x="4919472" y="3552444"/>
+            <a:ext cx="3602736" cy="0"/>
+          </a:xfrm>
+          <a:prstGeom prst="line">
+            <a:avLst/>
+          </a:prstGeom>
+          <a:noFill/>
+          <a:ln w="5080">
+            <a:solidFill>
+              <a:srgbClr val="E5E5E5"/>
+            </a:solidFill>
+            <a:prstDash val="solid"/>
+          </a:ln>
+        </p:spPr>
+      </p:sp>
+      <p:sp>
+        <p:nvSpPr>
+          <p:cNvPr id="31" name="Text 28"/>
+          <p:cNvSpPr/>
+          <p:nvPr/>
+        </p:nvSpPr>
+        <p:spPr>
+          <a:xfrm>
+            <a:off x="4919472" y="3557016"/>
+            <a:ext cx="1188720" cy="274320"/>
+          </a:xfrm>
+          <a:prstGeom prst="rect">
+            <a:avLst/>
+          </a:prstGeom>
+          <a:noFill/>
+          <a:ln/>
+        </p:spPr>
+        <p:txBody>
+          <a:bodyPr wrap="square" lIns="0" tIns="0" rIns="0" bIns="0" rtlCol="0" anchor="ctr"/>
           <a:lstStyle/>
           <a:p>
             <a:pPr indent="0" marL="0">
               <a:buNone/>
             </a:pPr>
             <a:r>
-              <a:rPr lang="en-US" sz="1050" b="1" dirty="0">
+              <a:rPr lang="en-US" sz="1000" b="1" dirty="0">
                 <a:solidFill>
                   <a:srgbClr val="000000"/>
                 </a:solidFill>
@@ -9977,20 +10096,20 @@
               </a:rPr>
               <a:t>Adobe</a:t>
             </a:r>
-            <a:endParaRPr lang="en-US" sz="1050" dirty="0"/>
-          </a:p>
-        </p:txBody>
-      </p:sp>
-      <p:sp>
-        <p:nvSpPr>
-          <p:cNvPr id="27" name="Text 24"/>
-          <p:cNvSpPr/>
-          <p:nvPr/>
-        </p:nvSpPr>
-        <p:spPr>
-          <a:xfrm>
-            <a:off x="5669280" y="3913632"/>
-            <a:ext cx="822960" cy="347472"/>
+            <a:endParaRPr lang="en-US" sz="1000" dirty="0"/>
+          </a:p>
+        </p:txBody>
+      </p:sp>
+      <p:sp>
+        <p:nvSpPr>
+          <p:cNvPr id="32" name="Text 29"/>
+          <p:cNvSpPr/>
+          <p:nvPr/>
+        </p:nvSpPr>
+        <p:spPr>
+          <a:xfrm>
+            <a:off x="6108192" y="3557016"/>
+            <a:ext cx="749808" cy="274320"/>
           </a:xfrm>
           <a:prstGeom prst="rect">
             <a:avLst/>
@@ -10002,11 +10121,11 @@
           <a:bodyPr wrap="square" lIns="0" tIns="0" rIns="0" bIns="0" rtlCol="0" anchor="ctr"/>
           <a:lstStyle/>
           <a:p>
-            <a:pPr indent="0" marL="0">
-              <a:buNone/>
-            </a:pPr>
-            <a:r>
-              <a:rPr lang="en-US" sz="1250" b="1" dirty="0">
+            <a:pPr algn="r" indent="0" marL="0">
+              <a:buNone/>
+            </a:pPr>
+            <a:r>
+              <a:rPr lang="en-US" sz="1200" b="1" dirty="0">
                 <a:solidFill>
                   <a:srgbClr val="CC0000"/>
                 </a:solidFill>
@@ -10016,20 +10135,20 @@
               </a:rPr>
               <a:t>–24%</a:t>
             </a:r>
-            <a:endParaRPr lang="en-US" sz="1250" dirty="0"/>
-          </a:p>
-        </p:txBody>
-      </p:sp>
-      <p:sp>
-        <p:nvSpPr>
-          <p:cNvPr id="28" name="Text 25"/>
-          <p:cNvSpPr/>
-          <p:nvPr/>
-        </p:nvSpPr>
-        <p:spPr>
-          <a:xfrm>
-            <a:off x="6492240" y="3913632"/>
-            <a:ext cx="2194560" cy="347472"/>
+            <a:endParaRPr lang="en-US" sz="1200" dirty="0"/>
+          </a:p>
+        </p:txBody>
+      </p:sp>
+      <p:sp>
+        <p:nvSpPr>
+          <p:cNvPr id="33" name="Text 30"/>
+          <p:cNvSpPr/>
+          <p:nvPr/>
+        </p:nvSpPr>
+        <p:spPr>
+          <a:xfrm>
+            <a:off x="6967728" y="3557016"/>
+            <a:ext cx="1572768" cy="274320"/>
           </a:xfrm>
           <a:prstGeom prst="rect">
             <a:avLst/>
@@ -10047,7 +10166,7 @@
             <a:r>
               <a:rPr lang="en-US" sz="850" dirty="0">
                 <a:solidFill>
-                  <a:srgbClr val="333333"/>
+                  <a:srgbClr val="666666"/>
                 </a:solidFill>
                 <a:latin typeface="Arial" pitchFamily="34" charset="0"/>
                 <a:ea typeface="Arial" pitchFamily="34" charset="-122"/>
@@ -10061,30 +10180,53 @@
       </p:sp>
       <p:sp>
         <p:nvSpPr>
-          <p:cNvPr id="29" name="Text 26"/>
-          <p:cNvSpPr/>
-          <p:nvPr/>
-        </p:nvSpPr>
-        <p:spPr>
-          <a:xfrm>
-            <a:off x="4754880" y="4261104"/>
-            <a:ext cx="914400" cy="347472"/>
-          </a:xfrm>
-          <a:prstGeom prst="rect">
-            <a:avLst/>
-          </a:prstGeom>
-          <a:noFill/>
-          <a:ln/>
-        </p:spPr>
-        <p:txBody>
-          <a:bodyPr wrap="square" lIns="635" tIns="635" rIns="635" bIns="635" rtlCol="0" anchor="ctr"/>
+          <p:cNvPr id="34" name="Shape 31"/>
+          <p:cNvSpPr/>
+          <p:nvPr/>
+        </p:nvSpPr>
+        <p:spPr>
+          <a:xfrm>
+            <a:off x="4919472" y="3826764"/>
+            <a:ext cx="3602736" cy="0"/>
+          </a:xfrm>
+          <a:prstGeom prst="line">
+            <a:avLst/>
+          </a:prstGeom>
+          <a:noFill/>
+          <a:ln w="5080">
+            <a:solidFill>
+              <a:srgbClr val="E5E5E5"/>
+            </a:solidFill>
+            <a:prstDash val="solid"/>
+          </a:ln>
+        </p:spPr>
+      </p:sp>
+      <p:sp>
+        <p:nvSpPr>
+          <p:cNvPr id="35" name="Text 32"/>
+          <p:cNvSpPr/>
+          <p:nvPr/>
+        </p:nvSpPr>
+        <p:spPr>
+          <a:xfrm>
+            <a:off x="4919472" y="3831336"/>
+            <a:ext cx="1188720" cy="274320"/>
+          </a:xfrm>
+          <a:prstGeom prst="rect">
+            <a:avLst/>
+          </a:prstGeom>
+          <a:noFill/>
+          <a:ln/>
+        </p:spPr>
+        <p:txBody>
+          <a:bodyPr wrap="square" lIns="0" tIns="0" rIns="0" bIns="0" rtlCol="0" anchor="ctr"/>
           <a:lstStyle/>
           <a:p>
             <a:pPr indent="0" marL="0">
               <a:buNone/>
             </a:pPr>
             <a:r>
-              <a:rPr lang="en-US" sz="1050" b="1" dirty="0">
+              <a:rPr lang="en-US" sz="1000" b="1" dirty="0">
                 <a:solidFill>
                   <a:srgbClr val="000000"/>
                 </a:solidFill>
@@ -10094,20 +10236,20 @@
               </a:rPr>
               <a:t>ServiceNow</a:t>
             </a:r>
-            <a:endParaRPr lang="en-US" sz="1050" dirty="0"/>
-          </a:p>
-        </p:txBody>
-      </p:sp>
-      <p:sp>
-        <p:nvSpPr>
-          <p:cNvPr id="30" name="Text 27"/>
-          <p:cNvSpPr/>
-          <p:nvPr/>
-        </p:nvSpPr>
-        <p:spPr>
-          <a:xfrm>
-            <a:off x="5669280" y="4261104"/>
-            <a:ext cx="822960" cy="347472"/>
+            <a:endParaRPr lang="en-US" sz="1000" dirty="0"/>
+          </a:p>
+        </p:txBody>
+      </p:sp>
+      <p:sp>
+        <p:nvSpPr>
+          <p:cNvPr id="36" name="Text 33"/>
+          <p:cNvSpPr/>
+          <p:nvPr/>
+        </p:nvSpPr>
+        <p:spPr>
+          <a:xfrm>
+            <a:off x="6108192" y="3831336"/>
+            <a:ext cx="749808" cy="274320"/>
           </a:xfrm>
           <a:prstGeom prst="rect">
             <a:avLst/>
@@ -10119,11 +10261,11 @@
           <a:bodyPr wrap="square" lIns="0" tIns="0" rIns="0" bIns="0" rtlCol="0" anchor="ctr"/>
           <a:lstStyle/>
           <a:p>
-            <a:pPr indent="0" marL="0">
-              <a:buNone/>
-            </a:pPr>
-            <a:r>
-              <a:rPr lang="en-US" sz="1250" b="1" dirty="0">
+            <a:pPr algn="r" indent="0" marL="0">
+              <a:buNone/>
+            </a:pPr>
+            <a:r>
+              <a:rPr lang="en-US" sz="1200" b="1" dirty="0">
                 <a:solidFill>
                   <a:srgbClr val="CC0000"/>
                 </a:solidFill>
@@ -10133,20 +10275,20 @@
               </a:rPr>
               <a:t>–19%</a:t>
             </a:r>
-            <a:endParaRPr lang="en-US" sz="1250" dirty="0"/>
-          </a:p>
-        </p:txBody>
-      </p:sp>
-      <p:sp>
-        <p:nvSpPr>
-          <p:cNvPr id="31" name="Text 28"/>
-          <p:cNvSpPr/>
-          <p:nvPr/>
-        </p:nvSpPr>
-        <p:spPr>
-          <a:xfrm>
-            <a:off x="6492240" y="4261104"/>
-            <a:ext cx="2194560" cy="347472"/>
+            <a:endParaRPr lang="en-US" sz="1200" dirty="0"/>
+          </a:p>
+        </p:txBody>
+      </p:sp>
+      <p:sp>
+        <p:nvSpPr>
+          <p:cNvPr id="37" name="Text 34"/>
+          <p:cNvSpPr/>
+          <p:nvPr/>
+        </p:nvSpPr>
+        <p:spPr>
+          <a:xfrm>
+            <a:off x="6967728" y="3831336"/>
+            <a:ext cx="1572768" cy="274320"/>
           </a:xfrm>
           <a:prstGeom prst="rect">
             <a:avLst/>
@@ -10164,7 +10306,7 @@
             <a:r>
               <a:rPr lang="en-US" sz="850" dirty="0">
                 <a:solidFill>
-                  <a:srgbClr val="333333"/>
+                  <a:srgbClr val="666666"/>
                 </a:solidFill>
                 <a:latin typeface="Arial" pitchFamily="34" charset="0"/>
                 <a:ea typeface="Arial" pitchFamily="34" charset="-122"/>
@@ -10178,13 +10320,38 @@
       </p:sp>
       <p:sp>
         <p:nvSpPr>
-          <p:cNvPr id="32" name="Shape 29"/>
-          <p:cNvSpPr/>
-          <p:nvPr/>
-        </p:nvSpPr>
-        <p:spPr>
-          <a:xfrm>
-            <a:off x="4754880" y="4480560"/>
+          <p:cNvPr id="38" name="Shape 35"/>
+          <p:cNvSpPr/>
+          <p:nvPr/>
+        </p:nvSpPr>
+        <p:spPr>
+          <a:xfrm>
+            <a:off x="4754880" y="4206240"/>
+            <a:ext cx="3931920" cy="868680"/>
+          </a:xfrm>
+          <a:prstGeom prst="rect">
+            <a:avLst/>
+          </a:prstGeom>
+          <a:solidFill>
+            <a:srgbClr val="FFFFFF"/>
+          </a:solidFill>
+          <a:ln w="6350">
+            <a:solidFill>
+              <a:srgbClr val="E5E5E5"/>
+            </a:solidFill>
+            <a:prstDash val="solid"/>
+          </a:ln>
+        </p:spPr>
+      </p:sp>
+      <p:sp>
+        <p:nvSpPr>
+          <p:cNvPr id="39" name="Shape 36"/>
+          <p:cNvSpPr/>
+          <p:nvPr/>
+        </p:nvSpPr>
+        <p:spPr>
+          <a:xfrm>
+            <a:off x="4754880" y="4206240"/>
             <a:ext cx="3931920" cy="274320"/>
           </a:xfrm>
           <a:prstGeom prst="rect">
@@ -10203,13 +10370,13 @@
       </p:sp>
       <p:sp>
         <p:nvSpPr>
-          <p:cNvPr id="33" name="Text 30"/>
-          <p:cNvSpPr/>
-          <p:nvPr/>
-        </p:nvSpPr>
-        <p:spPr>
-          <a:xfrm>
-            <a:off x="4754880" y="4480560"/>
+          <p:cNvPr id="40" name="Text 37"/>
+          <p:cNvSpPr/>
+          <p:nvPr/>
+        </p:nvSpPr>
+        <p:spPr>
+          <a:xfrm>
+            <a:off x="4754880" y="4206240"/>
             <a:ext cx="3931920" cy="274320"/>
           </a:xfrm>
           <a:prstGeom prst="rect">
@@ -10226,7 +10393,7 @@
               <a:buNone/>
             </a:pPr>
             <a:r>
-              <a:rPr lang="en-US" sz="1000" b="1" spc="200" kern="0" dirty="0">
+              <a:rPr lang="en-US" sz="950" b="1" spc="200" kern="0" dirty="0">
                 <a:solidFill>
                   <a:srgbClr val="FFFFFF"/>
                 </a:solidFill>
@@ -10236,59 +10403,59 @@
               </a:rPr>
               <a:t>PRIVATE CREDIT &amp; PE</a:t>
             </a:r>
+            <a:endParaRPr lang="en-US" sz="950" dirty="0"/>
+          </a:p>
+        </p:txBody>
+      </p:sp>
+      <p:sp>
+        <p:nvSpPr>
+          <p:cNvPr id="41" name="Text 38"/>
+          <p:cNvSpPr/>
+          <p:nvPr/>
+        </p:nvSpPr>
+        <p:spPr>
+          <a:xfrm>
+            <a:off x="4919472" y="4517136"/>
+            <a:ext cx="1188720" cy="274320"/>
+          </a:xfrm>
+          <a:prstGeom prst="rect">
+            <a:avLst/>
+          </a:prstGeom>
+          <a:noFill/>
+          <a:ln/>
+        </p:spPr>
+        <p:txBody>
+          <a:bodyPr wrap="square" lIns="0" tIns="0" rIns="0" bIns="0" rtlCol="0" anchor="ctr"/>
+          <a:lstStyle/>
+          <a:p>
+            <a:pPr indent="0" marL="0">
+              <a:buNone/>
+            </a:pPr>
+            <a:r>
+              <a:rPr lang="en-US" sz="1000" b="1" dirty="0">
+                <a:solidFill>
+                  <a:srgbClr val="000000"/>
+                </a:solidFill>
+                <a:latin typeface="Arial" pitchFamily="34" charset="0"/>
+                <a:ea typeface="Arial" pitchFamily="34" charset="-122"/>
+                <a:cs typeface="Arial" pitchFamily="34" charset="-120"/>
+              </a:rPr>
+              <a:t>BDC index</a:t>
+            </a:r>
             <a:endParaRPr lang="en-US" sz="1000" dirty="0"/>
           </a:p>
         </p:txBody>
       </p:sp>
       <p:sp>
         <p:nvSpPr>
-          <p:cNvPr id="34" name="Text 31"/>
-          <p:cNvSpPr/>
-          <p:nvPr/>
-        </p:nvSpPr>
-        <p:spPr>
-          <a:xfrm>
-            <a:off x="4754880" y="4800600"/>
-            <a:ext cx="914400" cy="347472"/>
-          </a:xfrm>
-          <a:prstGeom prst="rect">
-            <a:avLst/>
-          </a:prstGeom>
-          <a:noFill/>
-          <a:ln/>
-        </p:spPr>
-        <p:txBody>
-          <a:bodyPr wrap="square" lIns="635" tIns="635" rIns="635" bIns="635" rtlCol="0" anchor="ctr"/>
-          <a:lstStyle/>
-          <a:p>
-            <a:pPr indent="0" marL="0">
-              <a:buNone/>
-            </a:pPr>
-            <a:r>
-              <a:rPr lang="en-US" sz="1050" b="1" dirty="0">
-                <a:solidFill>
-                  <a:srgbClr val="000000"/>
-                </a:solidFill>
-                <a:latin typeface="Arial" pitchFamily="34" charset="0"/>
-                <a:ea typeface="Arial" pitchFamily="34" charset="-122"/>
-                <a:cs typeface="Arial" pitchFamily="34" charset="-120"/>
-              </a:rPr>
-              <a:t>BDC index</a:t>
-            </a:r>
-            <a:endParaRPr lang="en-US" sz="1050" dirty="0"/>
-          </a:p>
-        </p:txBody>
-      </p:sp>
-      <p:sp>
-        <p:nvSpPr>
-          <p:cNvPr id="35" name="Text 32"/>
-          <p:cNvSpPr/>
-          <p:nvPr/>
-        </p:nvSpPr>
-        <p:spPr>
-          <a:xfrm>
-            <a:off x="5669280" y="4800600"/>
-            <a:ext cx="822960" cy="347472"/>
+          <p:cNvPr id="42" name="Text 39"/>
+          <p:cNvSpPr/>
+          <p:nvPr/>
+        </p:nvSpPr>
+        <p:spPr>
+          <a:xfrm>
+            <a:off x="6108192" y="4517136"/>
+            <a:ext cx="749808" cy="274320"/>
           </a:xfrm>
           <a:prstGeom prst="rect">
             <a:avLst/>
@@ -10300,11 +10467,11 @@
           <a:bodyPr wrap="square" lIns="0" tIns="0" rIns="0" bIns="0" rtlCol="0" anchor="ctr"/>
           <a:lstStyle/>
           <a:p>
-            <a:pPr indent="0" marL="0">
-              <a:buNone/>
-            </a:pPr>
-            <a:r>
-              <a:rPr lang="en-US" sz="1250" b="1" dirty="0">
+            <a:pPr algn="r" indent="0" marL="0">
+              <a:buNone/>
+            </a:pPr>
+            <a:r>
+              <a:rPr lang="en-US" sz="1200" b="1" dirty="0">
                 <a:solidFill>
                   <a:srgbClr val="CC0000"/>
                 </a:solidFill>
@@ -10314,20 +10481,20 @@
               </a:rPr>
               <a:t>–11%</a:t>
             </a:r>
-            <a:endParaRPr lang="en-US" sz="1250" dirty="0"/>
-          </a:p>
-        </p:txBody>
-      </p:sp>
-      <p:sp>
-        <p:nvSpPr>
-          <p:cNvPr id="36" name="Text 33"/>
-          <p:cNvSpPr/>
-          <p:nvPr/>
-        </p:nvSpPr>
-        <p:spPr>
-          <a:xfrm>
-            <a:off x="6492240" y="4800600"/>
-            <a:ext cx="2194560" cy="347472"/>
+            <a:endParaRPr lang="en-US" sz="1200" dirty="0"/>
+          </a:p>
+        </p:txBody>
+      </p:sp>
+      <p:sp>
+        <p:nvSpPr>
+          <p:cNvPr id="43" name="Text 40"/>
+          <p:cNvSpPr/>
+          <p:nvPr/>
+        </p:nvSpPr>
+        <p:spPr>
+          <a:xfrm>
+            <a:off x="6967728" y="4517136"/>
+            <a:ext cx="1572768" cy="274320"/>
           </a:xfrm>
           <a:prstGeom prst="rect">
             <a:avLst/>
@@ -10345,7 +10512,7 @@
             <a:r>
               <a:rPr lang="en-US" sz="850" dirty="0">
                 <a:solidFill>
-                  <a:srgbClr val="333333"/>
+                  <a:srgbClr val="666666"/>
                 </a:solidFill>
                 <a:latin typeface="Arial" pitchFamily="34" charset="0"/>
                 <a:ea typeface="Arial" pitchFamily="34" charset="-122"/>
@@ -10359,30 +10526,53 @@
       </p:sp>
       <p:sp>
         <p:nvSpPr>
-          <p:cNvPr id="37" name="Text 34"/>
-          <p:cNvSpPr/>
-          <p:nvPr/>
-        </p:nvSpPr>
-        <p:spPr>
-          <a:xfrm>
-            <a:off x="4754880" y="5148072"/>
-            <a:ext cx="914400" cy="347472"/>
-          </a:xfrm>
-          <a:prstGeom prst="rect">
-            <a:avLst/>
-          </a:prstGeom>
-          <a:noFill/>
-          <a:ln/>
-        </p:spPr>
-        <p:txBody>
-          <a:bodyPr wrap="square" lIns="635" tIns="635" rIns="635" bIns="635" rtlCol="0" anchor="ctr"/>
+          <p:cNvPr id="44" name="Shape 41"/>
+          <p:cNvSpPr/>
+          <p:nvPr/>
+        </p:nvSpPr>
+        <p:spPr>
+          <a:xfrm>
+            <a:off x="4919472" y="4786884"/>
+            <a:ext cx="3602736" cy="0"/>
+          </a:xfrm>
+          <a:prstGeom prst="line">
+            <a:avLst/>
+          </a:prstGeom>
+          <a:noFill/>
+          <a:ln w="5080">
+            <a:solidFill>
+              <a:srgbClr val="E5E5E5"/>
+            </a:solidFill>
+            <a:prstDash val="solid"/>
+          </a:ln>
+        </p:spPr>
+      </p:sp>
+      <p:sp>
+        <p:nvSpPr>
+          <p:cNvPr id="45" name="Text 42"/>
+          <p:cNvSpPr/>
+          <p:nvPr/>
+        </p:nvSpPr>
+        <p:spPr>
+          <a:xfrm>
+            <a:off x="4919472" y="4791456"/>
+            <a:ext cx="1188720" cy="274320"/>
+          </a:xfrm>
+          <a:prstGeom prst="rect">
+            <a:avLst/>
+          </a:prstGeom>
+          <a:noFill/>
+          <a:ln/>
+        </p:spPr>
+        <p:txBody>
+          <a:bodyPr wrap="square" lIns="0" tIns="0" rIns="0" bIns="0" rtlCol="0" anchor="ctr"/>
           <a:lstStyle/>
           <a:p>
             <a:pPr indent="0" marL="0">
               <a:buNone/>
             </a:pPr>
             <a:r>
-              <a:rPr lang="en-US" sz="1050" b="1" dirty="0">
+              <a:rPr lang="en-US" sz="1000" b="1" dirty="0">
                 <a:solidFill>
                   <a:srgbClr val="000000"/>
                 </a:solidFill>
@@ -10392,20 +10582,20 @@
               </a:rPr>
               <a:t>PE SaaS</a:t>
             </a:r>
-            <a:endParaRPr lang="en-US" sz="1050" dirty="0"/>
-          </a:p>
-        </p:txBody>
-      </p:sp>
-      <p:sp>
-        <p:nvSpPr>
-          <p:cNvPr id="38" name="Text 35"/>
-          <p:cNvSpPr/>
-          <p:nvPr/>
-        </p:nvSpPr>
-        <p:spPr>
-          <a:xfrm>
-            <a:off x="5669280" y="5148072"/>
-            <a:ext cx="822960" cy="347472"/>
+            <a:endParaRPr lang="en-US" sz="1000" dirty="0"/>
+          </a:p>
+        </p:txBody>
+      </p:sp>
+      <p:sp>
+        <p:nvSpPr>
+          <p:cNvPr id="46" name="Text 43"/>
+          <p:cNvSpPr/>
+          <p:nvPr/>
+        </p:nvSpPr>
+        <p:spPr>
+          <a:xfrm>
+            <a:off x="6108192" y="4791456"/>
+            <a:ext cx="749808" cy="274320"/>
           </a:xfrm>
           <a:prstGeom prst="rect">
             <a:avLst/>
@@ -10417,11 +10607,11 @@
           <a:bodyPr wrap="square" lIns="0" tIns="0" rIns="0" bIns="0" rtlCol="0" anchor="ctr"/>
           <a:lstStyle/>
           <a:p>
-            <a:pPr indent="0" marL="0">
-              <a:buNone/>
-            </a:pPr>
-            <a:r>
-              <a:rPr lang="en-US" sz="1250" b="1" dirty="0">
+            <a:pPr algn="r" indent="0" marL="0">
+              <a:buNone/>
+            </a:pPr>
+            <a:r>
+              <a:rPr lang="en-US" sz="1200" b="1" dirty="0">
                 <a:solidFill>
                   <a:srgbClr val="CC0000"/>
                 </a:solidFill>
@@ -10431,20 +10621,20 @@
               </a:rPr>
               <a:t>–15%</a:t>
             </a:r>
-            <a:endParaRPr lang="en-US" sz="1250" dirty="0"/>
-          </a:p>
-        </p:txBody>
-      </p:sp>
-      <p:sp>
-        <p:nvSpPr>
-          <p:cNvPr id="39" name="Text 36"/>
-          <p:cNvSpPr/>
-          <p:nvPr/>
-        </p:nvSpPr>
-        <p:spPr>
-          <a:xfrm>
-            <a:off x="6492240" y="5148072"/>
-            <a:ext cx="2194560" cy="347472"/>
+            <a:endParaRPr lang="en-US" sz="1200" dirty="0"/>
+          </a:p>
+        </p:txBody>
+      </p:sp>
+      <p:sp>
+        <p:nvSpPr>
+          <p:cNvPr id="47" name="Text 44"/>
+          <p:cNvSpPr/>
+          <p:nvPr/>
+        </p:nvSpPr>
+        <p:spPr>
+          <a:xfrm>
+            <a:off x="6967728" y="4791456"/>
+            <a:ext cx="1572768" cy="274320"/>
           </a:xfrm>
           <a:prstGeom prst="rect">
             <a:avLst/>
@@ -10462,13 +10652,13 @@
             <a:r>
               <a:rPr lang="en-US" sz="850" dirty="0">
                 <a:solidFill>
-                  <a:srgbClr val="333333"/>
-                </a:solidFill>
-                <a:latin typeface="Arial" pitchFamily="34" charset="0"/>
-                <a:ea typeface="Arial" pitchFamily="34" charset="-122"/>
-                <a:cs typeface="Arial" pitchFamily="34" charset="-120"/>
-              </a:rPr>
-              <a:t>TBoss, Vista portcos written down</a:t>
+                  <a:srgbClr val="666666"/>
+                </a:solidFill>
+                <a:latin typeface="Arial" pitchFamily="34" charset="0"/>
+                <a:ea typeface="Arial" pitchFamily="34" charset="-122"/>
+                <a:cs typeface="Arial" pitchFamily="34" charset="-120"/>
+              </a:rPr>
+              <a:t>2021 marks written down in Q1</a:t>
             </a:r>
             <a:endParaRPr lang="en-US" sz="850" dirty="0"/>
           </a:p>
@@ -10476,14 +10666,14 @@
       </p:sp>
       <p:sp>
         <p:nvSpPr>
-          <p:cNvPr id="40" name="Shape 37"/>
-          <p:cNvSpPr/>
-          <p:nvPr/>
-        </p:nvSpPr>
-        <p:spPr>
-          <a:xfrm>
-            <a:off x="457200" y="5394960"/>
-            <a:ext cx="8229600" cy="365760"/>
+          <p:cNvPr id="48" name="Shape 45"/>
+          <p:cNvSpPr/>
+          <p:nvPr/>
+        </p:nvSpPr>
+        <p:spPr>
+          <a:xfrm>
+            <a:off x="457200" y="5285232"/>
+            <a:ext cx="8229600" cy="384048"/>
           </a:xfrm>
           <a:prstGeom prst="rect">
             <a:avLst/>
@@ -10501,14 +10691,14 @@
       </p:sp>
       <p:sp>
         <p:nvSpPr>
-          <p:cNvPr id="41" name="Text 38"/>
-          <p:cNvSpPr/>
-          <p:nvPr/>
-        </p:nvSpPr>
-        <p:spPr>
-          <a:xfrm>
-            <a:off x="640080" y="5394960"/>
-            <a:ext cx="7863840" cy="365760"/>
+          <p:cNvPr id="49" name="Text 46"/>
+          <p:cNvSpPr/>
+          <p:nvPr/>
+        </p:nvSpPr>
+        <p:spPr>
+          <a:xfrm>
+            <a:off x="640080" y="5285232"/>
+            <a:ext cx="7863840" cy="384048"/>
           </a:xfrm>
           <a:prstGeom prst="rect">
             <a:avLst/>
@@ -10524,7 +10714,7 @@
               <a:buNone/>
             </a:pPr>
             <a:r>
-              <a:rPr lang="en-US" sz="1050" b="1" dirty="0">
+              <a:rPr lang="en-US" sz="1100" b="1" dirty="0">
                 <a:solidFill>
                   <a:srgbClr val="000000"/>
                 </a:solidFill>
@@ -10532,15 +10722,15 @@
                 <a:ea typeface="Arial" pitchFamily="34" charset="-122"/>
                 <a:cs typeface="Arial" pitchFamily="34" charset="-120"/>
               </a:rPr>
-              <a:t>The software sell-off is now a private-credit problem. PE shops holding SaaS at 2021 marks are taking the writedowns in Q1 reports.</a:t>
-            </a:r>
-            <a:endParaRPr lang="en-US" sz="1050" dirty="0"/>
-          </a:p>
-        </p:txBody>
-      </p:sp>
-      <p:sp>
-        <p:nvSpPr>
-          <p:cNvPr id="42" name="Text 39"/>
+              <a:t>The software sell-off is now a private-credit problem — PE shops are writing down 2021-marked SaaS.</a:t>
+            </a:r>
+            <a:endParaRPr lang="en-US" sz="1100" dirty="0"/>
+          </a:p>
+        </p:txBody>
+      </p:sp>
+      <p:sp>
+        <p:nvSpPr>
+          <p:cNvPr id="50" name="Text 47"/>
           <p:cNvSpPr/>
           <p:nvPr/>
         </p:nvSpPr>
@@ -10579,7 +10769,7 @@
       </p:sp>
       <p:sp>
         <p:nvSpPr>
-          <p:cNvPr id="43" name="Shape 40"/>
+          <p:cNvPr id="51" name="Shape 48"/>
           <p:cNvSpPr/>
           <p:nvPr/>
         </p:nvSpPr>
@@ -10604,7 +10794,7 @@
       </p:sp>
       <p:sp>
         <p:nvSpPr>
-          <p:cNvPr id="44" name="Text 41"/>
+          <p:cNvPr id="52" name="Text 49"/>
           <p:cNvSpPr/>
           <p:nvPr/>
         </p:nvSpPr>
@@ -10643,7 +10833,7 @@
       </p:sp>
       <p:sp>
         <p:nvSpPr>
-          <p:cNvPr id="45" name="Text 42"/>
+          <p:cNvPr id="53" name="Text 50"/>
           <p:cNvSpPr/>
           <p:nvPr/>
         </p:nvSpPr>
@@ -15464,11 +15654,11 @@
             <a:avLst/>
           </a:prstGeom>
           <a:solidFill>
-            <a:srgbClr val="6B46C1"/>
+            <a:srgbClr val="333333"/>
           </a:solidFill>
           <a:ln w="12700">
             <a:solidFill>
-              <a:srgbClr val="6B46C1"/>
+              <a:srgbClr val="333333"/>
             </a:solidFill>
             <a:prstDash val="solid"/>
           </a:ln>
@@ -15592,11 +15782,11 @@
             <a:avLst/>
           </a:prstGeom>
           <a:solidFill>
-            <a:srgbClr val="6B46C1"/>
+            <a:srgbClr val="333333"/>
           </a:solidFill>
           <a:ln w="12700">
             <a:solidFill>
-              <a:srgbClr val="6B46C1"/>
+              <a:srgbClr val="333333"/>
             </a:solidFill>
             <a:prstDash val="solid"/>
           </a:ln>
@@ -15720,11 +15910,11 @@
             <a:avLst/>
           </a:prstGeom>
           <a:solidFill>
-            <a:srgbClr val="6B46C1"/>
+            <a:srgbClr val="333333"/>
           </a:solidFill>
           <a:ln w="12700">
             <a:solidFill>
-              <a:srgbClr val="6B46C1"/>
+              <a:srgbClr val="333333"/>
             </a:solidFill>
             <a:prstDash val="solid"/>
           </a:ln>
@@ -15885,7 +16075,7 @@
             <a:r>
               <a:rPr lang="en-US" sz="950" b="1" spc="300" kern="0" dirty="0">
                 <a:solidFill>
-                  <a:srgbClr val="6B46C1"/>
+                  <a:srgbClr val="FFB800"/>
                 </a:solidFill>
                 <a:latin typeface="Arial" pitchFamily="34" charset="0"/>
                 <a:ea typeface="Arial" pitchFamily="34" charset="-122"/>
@@ -16324,11 +16514,11 @@
             <a:avLst/>
           </a:prstGeom>
           <a:solidFill>
-            <a:srgbClr val="6B46C1"/>
+            <a:srgbClr val="333333"/>
           </a:solidFill>
           <a:ln w="12700">
             <a:solidFill>
-              <a:srgbClr val="6B46C1"/>
+              <a:srgbClr val="333333"/>
             </a:solidFill>
             <a:prstDash val="solid"/>
           </a:ln>
@@ -16452,11 +16642,11 @@
             <a:avLst/>
           </a:prstGeom>
           <a:solidFill>
-            <a:srgbClr val="6B46C1"/>
+            <a:srgbClr val="333333"/>
           </a:solidFill>
           <a:ln w="12700">
             <a:solidFill>
-              <a:srgbClr val="6B46C1"/>
+              <a:srgbClr val="333333"/>
             </a:solidFill>
             <a:prstDash val="solid"/>
           </a:ln>
@@ -16580,11 +16770,11 @@
             <a:avLst/>
           </a:prstGeom>
           <a:solidFill>
-            <a:srgbClr val="6B46C1"/>
+            <a:srgbClr val="333333"/>
           </a:solidFill>
           <a:ln w="12700">
             <a:solidFill>
-              <a:srgbClr val="6B46C1"/>
+              <a:srgbClr val="333333"/>
             </a:solidFill>
             <a:prstDash val="solid"/>
           </a:ln>
@@ -16745,7 +16935,7 @@
             <a:r>
               <a:rPr lang="en-US" sz="950" b="1" spc="300" kern="0" dirty="0">
                 <a:solidFill>
-                  <a:srgbClr val="6B46C1"/>
+                  <a:srgbClr val="FFB800"/>
                 </a:solidFill>
                 <a:latin typeface="Arial" pitchFamily="34" charset="0"/>
                 <a:ea typeface="Arial" pitchFamily="34" charset="-122"/>
@@ -17184,11 +17374,11 @@
             <a:avLst/>
           </a:prstGeom>
           <a:solidFill>
-            <a:srgbClr val="6B46C1"/>
+            <a:srgbClr val="333333"/>
           </a:solidFill>
           <a:ln w="12700">
             <a:solidFill>
-              <a:srgbClr val="6B46C1"/>
+              <a:srgbClr val="333333"/>
             </a:solidFill>
             <a:prstDash val="solid"/>
           </a:ln>
@@ -17312,11 +17502,11 @@
             <a:avLst/>
           </a:prstGeom>
           <a:solidFill>
-            <a:srgbClr val="6B46C1"/>
+            <a:srgbClr val="333333"/>
           </a:solidFill>
           <a:ln w="12700">
             <a:solidFill>
-              <a:srgbClr val="6B46C1"/>
+              <a:srgbClr val="333333"/>
             </a:solidFill>
             <a:prstDash val="solid"/>
           </a:ln>
@@ -17440,11 +17630,11 @@
             <a:avLst/>
           </a:prstGeom>
           <a:solidFill>
-            <a:srgbClr val="6B46C1"/>
+            <a:srgbClr val="333333"/>
           </a:solidFill>
           <a:ln w="12700">
             <a:solidFill>
-              <a:srgbClr val="6B46C1"/>
+              <a:srgbClr val="333333"/>
             </a:solidFill>
             <a:prstDash val="solid"/>
           </a:ln>
@@ -17605,7 +17795,7 @@
             <a:r>
               <a:rPr lang="en-US" sz="950" b="1" spc="300" kern="0" dirty="0">
                 <a:solidFill>
-                  <a:srgbClr val="6B46C1"/>
+                  <a:srgbClr val="FFB800"/>
                 </a:solidFill>
                 <a:latin typeface="Arial" pitchFamily="34" charset="0"/>
                 <a:ea typeface="Arial" pitchFamily="34" charset="-122"/>
@@ -19132,7 +19322,7 @@
                 <a:ea typeface="Arial" pitchFamily="34" charset="-122"/>
                 <a:cs typeface="Arial" pitchFamily="34" charset="-120"/>
               </a:rPr>
-              <a:t>AlphaFold solved protein folding. AI-designed drugs are in Phase 1/2 trials. The pharma R&amp;D cycle is compressing from a decade to under two years.</a:t>
+              <a:t>Three mechanisms compress the R&amp;D cycle's earliest stages from years to hours. Clinical trials still take years — AI collapses the design stage, not the regulatory one.</a:t>
             </a:r>
             <a:endParaRPr lang="en-US" sz="1350" dirty="0"/>
           </a:p>
@@ -19170,7 +19360,7 @@
         <p:spPr>
           <a:xfrm>
             <a:off x="457200" y="1691640"/>
-            <a:ext cx="3931920" cy="3017520"/>
+            <a:ext cx="3017520" cy="3355848"/>
           </a:xfrm>
           <a:prstGeom prst="rect">
             <a:avLst/>
@@ -19195,7 +19385,7 @@
         <p:spPr>
           <a:xfrm>
             <a:off x="548640" y="1691640"/>
-            <a:ext cx="3749040" cy="3017520"/>
+            <a:ext cx="2834640" cy="3355848"/>
           </a:xfrm>
           <a:prstGeom prst="rect">
             <a:avLst/>
@@ -19219,7 +19409,7 @@
                 <a:ea typeface="Arial" pitchFamily="34" charset="-122"/>
                 <a:cs typeface="Arial" pitchFamily="34" charset="-120"/>
               </a:rPr>
-              <a:t>IMAGE: Render — ribbon-diagram protein structure in purple against graphite black, shallow DOF</a:t>
+              <a:t>IMAGE: Render — ribbon-diagram protein structure against graphite black, shallow DOF</a:t>
             </a:r>
             <a:endParaRPr lang="en-US" sz="1000" dirty="0"/>
           </a:p>
@@ -19227,102 +19417,24 @@
       </p:sp>
       <p:sp>
         <p:nvSpPr>
-          <p:cNvPr id="9" name="Text 7"/>
-          <p:cNvSpPr/>
-          <p:nvPr/>
-        </p:nvSpPr>
-        <p:spPr>
-          <a:xfrm>
-            <a:off x="4572000" y="1828800"/>
-            <a:ext cx="4114800" cy="685800"/>
-          </a:xfrm>
-          <a:prstGeom prst="rect">
-            <a:avLst/>
-          </a:prstGeom>
-          <a:noFill/>
-          <a:ln/>
-        </p:spPr>
-        <p:txBody>
-          <a:bodyPr wrap="square" lIns="0" tIns="0" rIns="0" bIns="0" rtlCol="0" anchor="ctr"/>
-          <a:lstStyle/>
-          <a:p>
-            <a:pPr algn="ctr" indent="0" marL="0">
-              <a:buNone/>
-            </a:pPr>
-            <a:r>
-              <a:rPr lang="en-US" sz="4000" b="1" dirty="0">
-                <a:solidFill>
-                  <a:srgbClr val="6B46C1"/>
-                </a:solidFill>
-                <a:latin typeface="Arial Black" pitchFamily="34" charset="0"/>
-                <a:ea typeface="Arial Black" pitchFamily="34" charset="-122"/>
-                <a:cs typeface="Arial Black" pitchFamily="34" charset="-120"/>
-              </a:rPr>
-              <a:t>240M</a:t>
-            </a:r>
-            <a:endParaRPr lang="en-US" sz="4000" dirty="0"/>
-          </a:p>
-        </p:txBody>
-      </p:sp>
-      <p:sp>
-        <p:nvSpPr>
-          <p:cNvPr id="10" name="Text 8"/>
-          <p:cNvSpPr/>
-          <p:nvPr/>
-        </p:nvSpPr>
-        <p:spPr>
-          <a:xfrm>
-            <a:off x="4572000" y="2560320"/>
-            <a:ext cx="4114800" cy="502920"/>
-          </a:xfrm>
-          <a:prstGeom prst="rect">
-            <a:avLst/>
-          </a:prstGeom>
-          <a:noFill/>
-          <a:ln/>
-        </p:spPr>
-        <p:txBody>
-          <a:bodyPr wrap="square" lIns="0" tIns="0" rIns="0" bIns="0" rtlCol="0" anchor="t"/>
-          <a:lstStyle/>
-          <a:p>
-            <a:pPr algn="ctr" indent="0" marL="0">
-              <a:buNone/>
-            </a:pPr>
-            <a:r>
-              <a:rPr lang="en-US" sz="1100" dirty="0">
-                <a:solidFill>
-                  <a:srgbClr val="666666"/>
-                </a:solidFill>
-                <a:latin typeface="Arial" pitchFamily="34" charset="0"/>
-                <a:ea typeface="Arial" pitchFamily="34" charset="-122"/>
-                <a:cs typeface="Arial" pitchFamily="34" charset="-120"/>
-              </a:rPr>
-              <a:t>protein structures in AlphaFold DB — nearly every known protein, solved</a:t>
-            </a:r>
-            <a:endParaRPr lang="en-US" sz="1100" dirty="0"/>
-          </a:p>
-        </p:txBody>
-      </p:sp>
-      <p:sp>
-        <p:nvSpPr>
-          <p:cNvPr id="11" name="Shape 9"/>
-          <p:cNvSpPr/>
-          <p:nvPr/>
-        </p:nvSpPr>
-        <p:spPr>
-          <a:xfrm>
-            <a:off x="4572000" y="3291840"/>
-            <a:ext cx="4114800" cy="274320"/>
+          <p:cNvPr id="9" name="Shape 7"/>
+          <p:cNvSpPr/>
+          <p:nvPr/>
+        </p:nvSpPr>
+        <p:spPr>
+          <a:xfrm>
+            <a:off x="3657600" y="1691640"/>
+            <a:ext cx="5029200" cy="1069848"/>
           </a:xfrm>
           <a:prstGeom prst="rect">
             <a:avLst/>
           </a:prstGeom>
           <a:solidFill>
-            <a:srgbClr val="6B46C1"/>
+            <a:srgbClr val="F9F9F9"/>
           </a:solidFill>
-          <a:ln w="12700">
+          <a:ln w="6350">
             <a:solidFill>
-              <a:srgbClr val="6B46C1"/>
+              <a:srgbClr val="E5E5E5"/>
             </a:solidFill>
             <a:prstDash val="solid"/>
           </a:ln>
@@ -19330,298 +19442,14 @@
       </p:sp>
       <p:sp>
         <p:nvSpPr>
-          <p:cNvPr id="12" name="Text 10"/>
-          <p:cNvSpPr/>
-          <p:nvPr/>
-        </p:nvSpPr>
-        <p:spPr>
-          <a:xfrm>
-            <a:off x="4572000" y="3291840"/>
-            <a:ext cx="4114800" cy="274320"/>
-          </a:xfrm>
-          <a:prstGeom prst="rect">
-            <a:avLst/>
-          </a:prstGeom>
-          <a:noFill/>
-          <a:ln/>
-        </p:spPr>
-        <p:txBody>
-          <a:bodyPr wrap="square" lIns="1524" tIns="1524" rIns="1524" bIns="1524" rtlCol="0" anchor="ctr"/>
-          <a:lstStyle/>
-          <a:p>
-            <a:pPr algn="l" indent="0" marL="0">
-              <a:buNone/>
-            </a:pPr>
-            <a:r>
-              <a:rPr lang="en-US" sz="1000" b="1" spc="200" kern="0" dirty="0">
-                <a:solidFill>
-                  <a:srgbClr val="FFFFFF"/>
-                </a:solidFill>
-                <a:latin typeface="Arial" pitchFamily="34" charset="0"/>
-                <a:ea typeface="Arial" pitchFamily="34" charset="-122"/>
-                <a:cs typeface="Arial" pitchFamily="34" charset="-120"/>
-              </a:rPr>
-              <a:t>PROTEIN FOLDING</a:t>
-            </a:r>
-            <a:endParaRPr lang="en-US" sz="1000" dirty="0"/>
-          </a:p>
-        </p:txBody>
-      </p:sp>
-      <p:sp>
-        <p:nvSpPr>
-          <p:cNvPr id="13" name="Text 11"/>
-          <p:cNvSpPr/>
-          <p:nvPr/>
-        </p:nvSpPr>
-        <p:spPr>
-          <a:xfrm>
-            <a:off x="4617720" y="3584448"/>
-            <a:ext cx="4023360" cy="320040"/>
-          </a:xfrm>
-          <a:prstGeom prst="rect">
-            <a:avLst/>
-          </a:prstGeom>
-          <a:noFill/>
-          <a:ln/>
-        </p:spPr>
-        <p:txBody>
-          <a:bodyPr wrap="square" lIns="0" tIns="0" rIns="0" bIns="0" rtlCol="0" anchor="t"/>
-          <a:lstStyle/>
-          <a:p>
-            <a:pPr indent="0" marL="0">
-              <a:buNone/>
-            </a:pPr>
-            <a:r>
-              <a:rPr lang="en-US" sz="950" dirty="0">
-                <a:solidFill>
-                  <a:srgbClr val="333333"/>
-                </a:solidFill>
-                <a:latin typeface="Arial" pitchFamily="34" charset="0"/>
-                <a:ea typeface="Arial" pitchFamily="34" charset="-122"/>
-                <a:cs typeface="Arial" pitchFamily="34" charset="-120"/>
-              </a:rPr>
-              <a:t>A 50-year structure-prediction problem, solved. 3M+ researchers across 190 countries use the DB.</a:t>
-            </a:r>
-            <a:endParaRPr lang="en-US" sz="950" dirty="0"/>
-          </a:p>
-        </p:txBody>
-      </p:sp>
-      <p:sp>
-        <p:nvSpPr>
-          <p:cNvPr id="14" name="Shape 12"/>
-          <p:cNvSpPr/>
-          <p:nvPr/>
-        </p:nvSpPr>
-        <p:spPr>
-          <a:xfrm>
-            <a:off x="4572000" y="3950208"/>
-            <a:ext cx="4114800" cy="274320"/>
-          </a:xfrm>
-          <a:prstGeom prst="rect">
-            <a:avLst/>
-          </a:prstGeom>
-          <a:solidFill>
-            <a:srgbClr val="6B46C1"/>
-          </a:solidFill>
-          <a:ln w="12700">
-            <a:solidFill>
-              <a:srgbClr val="6B46C1"/>
-            </a:solidFill>
-            <a:prstDash val="solid"/>
-          </a:ln>
-        </p:spPr>
-      </p:sp>
-      <p:sp>
-        <p:nvSpPr>
-          <p:cNvPr id="15" name="Text 13"/>
-          <p:cNvSpPr/>
-          <p:nvPr/>
-        </p:nvSpPr>
-        <p:spPr>
-          <a:xfrm>
-            <a:off x="4572000" y="3950208"/>
-            <a:ext cx="4114800" cy="274320"/>
-          </a:xfrm>
-          <a:prstGeom prst="rect">
-            <a:avLst/>
-          </a:prstGeom>
-          <a:noFill/>
-          <a:ln/>
-        </p:spPr>
-        <p:txBody>
-          <a:bodyPr wrap="square" lIns="1524" tIns="1524" rIns="1524" bIns="1524" rtlCol="0" anchor="ctr"/>
-          <a:lstStyle/>
-          <a:p>
-            <a:pPr algn="l" indent="0" marL="0">
-              <a:buNone/>
-            </a:pPr>
-            <a:r>
-              <a:rPr lang="en-US" sz="1000" b="1" spc="200" kern="0" dirty="0">
-                <a:solidFill>
-                  <a:srgbClr val="FFFFFF"/>
-                </a:solidFill>
-                <a:latin typeface="Arial" pitchFamily="34" charset="0"/>
-                <a:ea typeface="Arial" pitchFamily="34" charset="-122"/>
-                <a:cs typeface="Arial" pitchFamily="34" charset="-120"/>
-              </a:rPr>
-              <a:t>AI-NATIVE PHARMA</a:t>
-            </a:r>
-            <a:endParaRPr lang="en-US" sz="1000" dirty="0"/>
-          </a:p>
-        </p:txBody>
-      </p:sp>
-      <p:sp>
-        <p:nvSpPr>
-          <p:cNvPr id="16" name="Text 14"/>
-          <p:cNvSpPr/>
-          <p:nvPr/>
-        </p:nvSpPr>
-        <p:spPr>
-          <a:xfrm>
-            <a:off x="4617720" y="4242816"/>
-            <a:ext cx="4023360" cy="320040"/>
-          </a:xfrm>
-          <a:prstGeom prst="rect">
-            <a:avLst/>
-          </a:prstGeom>
-          <a:noFill/>
-          <a:ln/>
-        </p:spPr>
-        <p:txBody>
-          <a:bodyPr wrap="square" lIns="0" tIns="0" rIns="0" bIns="0" rtlCol="0" anchor="t"/>
-          <a:lstStyle/>
-          <a:p>
-            <a:pPr indent="0" marL="0">
-              <a:buNone/>
-            </a:pPr>
-            <a:r>
-              <a:rPr lang="en-US" sz="950" dirty="0">
-                <a:solidFill>
-                  <a:srgbClr val="333333"/>
-                </a:solidFill>
-                <a:latin typeface="Arial" pitchFamily="34" charset="0"/>
-                <a:ea typeface="Arial" pitchFamily="34" charset="-122"/>
-                <a:cs typeface="Arial" pitchFamily="34" charset="-120"/>
-              </a:rPr>
-              <a:t>Isomorphic Labs' $3B deals with Lilly + Novartis. AI-designed small molecules now in Phase 1/2 trials.</a:t>
-            </a:r>
-            <a:endParaRPr lang="en-US" sz="950" dirty="0"/>
-          </a:p>
-        </p:txBody>
-      </p:sp>
-      <p:sp>
-        <p:nvSpPr>
-          <p:cNvPr id="17" name="Shape 15"/>
-          <p:cNvSpPr/>
-          <p:nvPr/>
-        </p:nvSpPr>
-        <p:spPr>
-          <a:xfrm>
-            <a:off x="4572000" y="4608576"/>
-            <a:ext cx="4114800" cy="274320"/>
-          </a:xfrm>
-          <a:prstGeom prst="rect">
-            <a:avLst/>
-          </a:prstGeom>
-          <a:solidFill>
-            <a:srgbClr val="6B46C1"/>
-          </a:solidFill>
-          <a:ln w="12700">
-            <a:solidFill>
-              <a:srgbClr val="6B46C1"/>
-            </a:solidFill>
-            <a:prstDash val="solid"/>
-          </a:ln>
-        </p:spPr>
-      </p:sp>
-      <p:sp>
-        <p:nvSpPr>
-          <p:cNvPr id="18" name="Text 16"/>
-          <p:cNvSpPr/>
-          <p:nvPr/>
-        </p:nvSpPr>
-        <p:spPr>
-          <a:xfrm>
-            <a:off x="4572000" y="4608576"/>
-            <a:ext cx="4114800" cy="274320"/>
-          </a:xfrm>
-          <a:prstGeom prst="rect">
-            <a:avLst/>
-          </a:prstGeom>
-          <a:noFill/>
-          <a:ln/>
-        </p:spPr>
-        <p:txBody>
-          <a:bodyPr wrap="square" lIns="1524" tIns="1524" rIns="1524" bIns="1524" rtlCol="0" anchor="ctr"/>
-          <a:lstStyle/>
-          <a:p>
-            <a:pPr algn="l" indent="0" marL="0">
-              <a:buNone/>
-            </a:pPr>
-            <a:r>
-              <a:rPr lang="en-US" sz="1000" b="1" spc="200" kern="0" dirty="0">
-                <a:solidFill>
-                  <a:srgbClr val="FFFFFF"/>
-                </a:solidFill>
-                <a:latin typeface="Arial" pitchFamily="34" charset="0"/>
-                <a:ea typeface="Arial" pitchFamily="34" charset="-122"/>
-                <a:cs typeface="Arial" pitchFamily="34" charset="-120"/>
-              </a:rPr>
-              <a:t>R&amp;D COMPRESSION</a:t>
-            </a:r>
-            <a:endParaRPr lang="en-US" sz="1000" dirty="0"/>
-          </a:p>
-        </p:txBody>
-      </p:sp>
-      <p:sp>
-        <p:nvSpPr>
-          <p:cNvPr id="19" name="Text 17"/>
-          <p:cNvSpPr/>
-          <p:nvPr/>
-        </p:nvSpPr>
-        <p:spPr>
-          <a:xfrm>
-            <a:off x="4617720" y="4901184"/>
-            <a:ext cx="4023360" cy="320040"/>
-          </a:xfrm>
-          <a:prstGeom prst="rect">
-            <a:avLst/>
-          </a:prstGeom>
-          <a:noFill/>
-          <a:ln/>
-        </p:spPr>
-        <p:txBody>
-          <a:bodyPr wrap="square" lIns="0" tIns="0" rIns="0" bIns="0" rtlCol="0" anchor="t"/>
-          <a:lstStyle/>
-          <a:p>
-            <a:pPr indent="0" marL="0">
-              <a:buNone/>
-            </a:pPr>
-            <a:r>
-              <a:rPr lang="en-US" sz="950" dirty="0">
-                <a:solidFill>
-                  <a:srgbClr val="333333"/>
-                </a:solidFill>
-                <a:latin typeface="Arial" pitchFamily="34" charset="0"/>
-                <a:ea typeface="Arial" pitchFamily="34" charset="-122"/>
-                <a:cs typeface="Arial" pitchFamily="34" charset="-120"/>
-              </a:rPr>
-              <a:t>Discovery → IND shrinking from ~10 years to ~18 months on the fastest platforms.</a:t>
-            </a:r>
-            <a:endParaRPr lang="en-US" sz="950" dirty="0"/>
-          </a:p>
-        </p:txBody>
-      </p:sp>
-      <p:sp>
-        <p:nvSpPr>
-          <p:cNvPr id="20" name="Shape 18"/>
-          <p:cNvSpPr/>
-          <p:nvPr/>
-        </p:nvSpPr>
-        <p:spPr>
-          <a:xfrm>
-            <a:off x="457200" y="5349240"/>
-            <a:ext cx="8229600" cy="365760"/>
+          <p:cNvPr id="10" name="Shape 8"/>
+          <p:cNvSpPr/>
+          <p:nvPr/>
+        </p:nvSpPr>
+        <p:spPr>
+          <a:xfrm>
+            <a:off x="3657600" y="1691640"/>
+            <a:ext cx="5029200" cy="292608"/>
           </a:xfrm>
           <a:prstGeom prst="rect">
             <a:avLst/>
@@ -19639,14 +19467,14 @@
       </p:sp>
       <p:sp>
         <p:nvSpPr>
-          <p:cNvPr id="21" name="Text 19"/>
-          <p:cNvSpPr/>
-          <p:nvPr/>
-        </p:nvSpPr>
-        <p:spPr>
-          <a:xfrm>
-            <a:off x="640080" y="5349240"/>
-            <a:ext cx="7863840" cy="365760"/>
+          <p:cNvPr id="11" name="Text 9"/>
+          <p:cNvSpPr/>
+          <p:nvPr/>
+        </p:nvSpPr>
+        <p:spPr>
+          <a:xfrm>
+            <a:off x="3822192" y="1691640"/>
+            <a:ext cx="4754880" cy="292608"/>
           </a:xfrm>
           <a:prstGeom prst="rect">
             <a:avLst/>
@@ -19662,21 +19490,21 @@
               <a:buNone/>
             </a:pPr>
             <a:r>
-              <a:rPr lang="en-US" sz="950" b="1" spc="300" kern="0" dirty="0">
-                <a:solidFill>
-                  <a:srgbClr val="6B46C1"/>
-                </a:solidFill>
-                <a:latin typeface="Arial" pitchFamily="34" charset="0"/>
-                <a:ea typeface="Arial" pitchFamily="34" charset="-122"/>
-                <a:cs typeface="Arial" pitchFamily="34" charset="-120"/>
-              </a:rPr>
-              <a:t>PLAYERS   </a:t>
+              <a:rPr lang="en-US" sz="1050" b="1" spc="200" kern="0" dirty="0">
+                <a:solidFill>
+                  <a:srgbClr val="FFB800"/>
+                </a:solidFill>
+                <a:latin typeface="Arial" pitchFamily="34" charset="0"/>
+                <a:ea typeface="Arial" pitchFamily="34" charset="-122"/>
+                <a:cs typeface="Arial" pitchFamily="34" charset="-120"/>
+              </a:rPr>
+              <a:t>01   </a:t>
             </a:r>
             <a:pPr indent="0" marL="0">
               <a:buNone/>
             </a:pPr>
             <a:r>
-              <a:rPr lang="en-US" sz="1050" b="1" dirty="0">
+              <a:rPr lang="en-US" sz="1050" b="1" spc="200" kern="0" dirty="0">
                 <a:solidFill>
                   <a:srgbClr val="FFFFFF"/>
                 </a:solidFill>
@@ -19684,7 +19512,46 @@
                 <a:ea typeface="Arial" pitchFamily="34" charset="-122"/>
                 <a:cs typeface="Arial" pitchFamily="34" charset="-120"/>
               </a:rPr>
-              <a:t>DeepMind / Isomorphic · Recursion + Exscientia · Insitro · Generate Biomedicines · Moderna</a:t>
+              <a:t>STRUCTURE PREDICTION</a:t>
+            </a:r>
+            <a:endParaRPr lang="en-US" sz="1050" dirty="0"/>
+          </a:p>
+        </p:txBody>
+      </p:sp>
+      <p:sp>
+        <p:nvSpPr>
+          <p:cNvPr id="12" name="Text 10"/>
+          <p:cNvSpPr/>
+          <p:nvPr/>
+        </p:nvSpPr>
+        <p:spPr>
+          <a:xfrm>
+            <a:off x="3840480" y="2029968"/>
+            <a:ext cx="4663440" cy="685800"/>
+          </a:xfrm>
+          <a:prstGeom prst="rect">
+            <a:avLst/>
+          </a:prstGeom>
+          <a:noFill/>
+          <a:ln/>
+        </p:spPr>
+        <p:txBody>
+          <a:bodyPr wrap="square" lIns="0" tIns="0" rIns="0" bIns="0" rtlCol="0" anchor="t"/>
+          <a:lstStyle/>
+          <a:p>
+            <a:pPr indent="0" marL="0">
+              <a:buNone/>
+            </a:pPr>
+            <a:r>
+              <a:rPr lang="en-US" sz="950" dirty="0">
+                <a:solidFill>
+                  <a:srgbClr val="333333"/>
+                </a:solidFill>
+                <a:latin typeface="Arial" pitchFamily="34" charset="0"/>
+                <a:ea typeface="Arial" pitchFamily="34" charset="-122"/>
+                <a:cs typeface="Arial" pitchFamily="34" charset="-120"/>
+              </a:rPr>
+              <a:t>Predicting a protein's 3D shape from its amino-acid sequence was a 50-year unsolved problem. Crystallography took months per protein. Deep learning now infers structure in seconds — unlocking every drug target at once.</a:t>
             </a:r>
             <a:endParaRPr lang="en-US" sz="950" dirty="0"/>
           </a:p>
@@ -19692,7 +19559,355 @@
       </p:sp>
       <p:sp>
         <p:nvSpPr>
+          <p:cNvPr id="13" name="Shape 11"/>
+          <p:cNvSpPr/>
+          <p:nvPr/>
+        </p:nvSpPr>
+        <p:spPr>
+          <a:xfrm>
+            <a:off x="3657600" y="2834640"/>
+            <a:ext cx="5029200" cy="1069848"/>
+          </a:xfrm>
+          <a:prstGeom prst="rect">
+            <a:avLst/>
+          </a:prstGeom>
+          <a:solidFill>
+            <a:srgbClr val="F9F9F9"/>
+          </a:solidFill>
+          <a:ln w="6350">
+            <a:solidFill>
+              <a:srgbClr val="E5E5E5"/>
+            </a:solidFill>
+            <a:prstDash val="solid"/>
+          </a:ln>
+        </p:spPr>
+      </p:sp>
+      <p:sp>
+        <p:nvSpPr>
+          <p:cNvPr id="14" name="Shape 12"/>
+          <p:cNvSpPr/>
+          <p:nvPr/>
+        </p:nvSpPr>
+        <p:spPr>
+          <a:xfrm>
+            <a:off x="3657600" y="2834640"/>
+            <a:ext cx="5029200" cy="292608"/>
+          </a:xfrm>
+          <a:prstGeom prst="rect">
+            <a:avLst/>
+          </a:prstGeom>
+          <a:solidFill>
+            <a:srgbClr val="333333"/>
+          </a:solidFill>
+          <a:ln w="12700">
+            <a:solidFill>
+              <a:srgbClr val="333333"/>
+            </a:solidFill>
+            <a:prstDash val="solid"/>
+          </a:ln>
+        </p:spPr>
+      </p:sp>
+      <p:sp>
+        <p:nvSpPr>
+          <p:cNvPr id="15" name="Text 13"/>
+          <p:cNvSpPr/>
+          <p:nvPr/>
+        </p:nvSpPr>
+        <p:spPr>
+          <a:xfrm>
+            <a:off x="3822192" y="2834640"/>
+            <a:ext cx="4754880" cy="292608"/>
+          </a:xfrm>
+          <a:prstGeom prst="rect">
+            <a:avLst/>
+          </a:prstGeom>
+          <a:noFill/>
+          <a:ln/>
+        </p:spPr>
+        <p:txBody>
+          <a:bodyPr wrap="square" lIns="0" tIns="0" rIns="0" bIns="0" rtlCol="0" anchor="ctr"/>
+          <a:lstStyle/>
+          <a:p>
+            <a:pPr indent="0" marL="0">
+              <a:buNone/>
+            </a:pPr>
+            <a:r>
+              <a:rPr lang="en-US" sz="1050" b="1" spc="200" kern="0" dirty="0">
+                <a:solidFill>
+                  <a:srgbClr val="FFB800"/>
+                </a:solidFill>
+                <a:latin typeface="Arial" pitchFamily="34" charset="0"/>
+                <a:ea typeface="Arial" pitchFamily="34" charset="-122"/>
+                <a:cs typeface="Arial" pitchFamily="34" charset="-120"/>
+              </a:rPr>
+              <a:t>02   </a:t>
+            </a:r>
+            <a:pPr indent="0" marL="0">
+              <a:buNone/>
+            </a:pPr>
+            <a:r>
+              <a:rPr lang="en-US" sz="1050" b="1" spc="200" kern="0" dirty="0">
+                <a:solidFill>
+                  <a:srgbClr val="FFFFFF"/>
+                </a:solidFill>
+                <a:latin typeface="Arial" pitchFamily="34" charset="0"/>
+                <a:ea typeface="Arial" pitchFamily="34" charset="-122"/>
+                <a:cs typeface="Arial" pitchFamily="34" charset="-120"/>
+              </a:rPr>
+              <a:t>GENERATIVE MOLECULE DESIGN</a:t>
+            </a:r>
+            <a:endParaRPr lang="en-US" sz="1050" dirty="0"/>
+          </a:p>
+        </p:txBody>
+      </p:sp>
+      <p:sp>
+        <p:nvSpPr>
+          <p:cNvPr id="16" name="Text 14"/>
+          <p:cNvSpPr/>
+          <p:nvPr/>
+        </p:nvSpPr>
+        <p:spPr>
+          <a:xfrm>
+            <a:off x="3840480" y="3172968"/>
+            <a:ext cx="4663440" cy="685800"/>
+          </a:xfrm>
+          <a:prstGeom prst="rect">
+            <a:avLst/>
+          </a:prstGeom>
+          <a:noFill/>
+          <a:ln/>
+        </p:spPr>
+        <p:txBody>
+          <a:bodyPr wrap="square" lIns="0" tIns="0" rIns="0" bIns="0" rtlCol="0" anchor="t"/>
+          <a:lstStyle/>
+          <a:p>
+            <a:pPr indent="0" marL="0">
+              <a:buNone/>
+            </a:pPr>
+            <a:r>
+              <a:rPr lang="en-US" sz="950" dirty="0">
+                <a:solidFill>
+                  <a:srgbClr val="333333"/>
+                </a:solidFill>
+                <a:latin typeface="Arial" pitchFamily="34" charset="0"/>
+                <a:ea typeface="Arial" pitchFamily="34" charset="-122"/>
+                <a:cs typeface="Arial" pitchFamily="34" charset="-120"/>
+              </a:rPr>
+              <a:t>There are ~10⁶⁰ drug-like small molecules. Wet labs can screen millions. Generative models search the rest — proposing novel binders optimized for selectivity, potency, and drug-like properties.</a:t>
+            </a:r>
+            <a:endParaRPr lang="en-US" sz="950" dirty="0"/>
+          </a:p>
+        </p:txBody>
+      </p:sp>
+      <p:sp>
+        <p:nvSpPr>
+          <p:cNvPr id="17" name="Shape 15"/>
+          <p:cNvSpPr/>
+          <p:nvPr/>
+        </p:nvSpPr>
+        <p:spPr>
+          <a:xfrm>
+            <a:off x="3657600" y="3977640"/>
+            <a:ext cx="5029200" cy="1069848"/>
+          </a:xfrm>
+          <a:prstGeom prst="rect">
+            <a:avLst/>
+          </a:prstGeom>
+          <a:solidFill>
+            <a:srgbClr val="F9F9F9"/>
+          </a:solidFill>
+          <a:ln w="6350">
+            <a:solidFill>
+              <a:srgbClr val="E5E5E5"/>
+            </a:solidFill>
+            <a:prstDash val="solid"/>
+          </a:ln>
+        </p:spPr>
+      </p:sp>
+      <p:sp>
+        <p:nvSpPr>
+          <p:cNvPr id="18" name="Shape 16"/>
+          <p:cNvSpPr/>
+          <p:nvPr/>
+        </p:nvSpPr>
+        <p:spPr>
+          <a:xfrm>
+            <a:off x="3657600" y="3977640"/>
+            <a:ext cx="5029200" cy="292608"/>
+          </a:xfrm>
+          <a:prstGeom prst="rect">
+            <a:avLst/>
+          </a:prstGeom>
+          <a:solidFill>
+            <a:srgbClr val="333333"/>
+          </a:solidFill>
+          <a:ln w="12700">
+            <a:solidFill>
+              <a:srgbClr val="333333"/>
+            </a:solidFill>
+            <a:prstDash val="solid"/>
+          </a:ln>
+        </p:spPr>
+      </p:sp>
+      <p:sp>
+        <p:nvSpPr>
+          <p:cNvPr id="19" name="Text 17"/>
+          <p:cNvSpPr/>
+          <p:nvPr/>
+        </p:nvSpPr>
+        <p:spPr>
+          <a:xfrm>
+            <a:off x="3822192" y="3977640"/>
+            <a:ext cx="4754880" cy="292608"/>
+          </a:xfrm>
+          <a:prstGeom prst="rect">
+            <a:avLst/>
+          </a:prstGeom>
+          <a:noFill/>
+          <a:ln/>
+        </p:spPr>
+        <p:txBody>
+          <a:bodyPr wrap="square" lIns="0" tIns="0" rIns="0" bIns="0" rtlCol="0" anchor="ctr"/>
+          <a:lstStyle/>
+          <a:p>
+            <a:pPr indent="0" marL="0">
+              <a:buNone/>
+            </a:pPr>
+            <a:r>
+              <a:rPr lang="en-US" sz="1050" b="1" spc="200" kern="0" dirty="0">
+                <a:solidFill>
+                  <a:srgbClr val="FFB800"/>
+                </a:solidFill>
+                <a:latin typeface="Arial" pitchFamily="34" charset="0"/>
+                <a:ea typeface="Arial" pitchFamily="34" charset="-122"/>
+                <a:cs typeface="Arial" pitchFamily="34" charset="-120"/>
+              </a:rPr>
+              <a:t>03   </a:t>
+            </a:r>
+            <a:pPr indent="0" marL="0">
+              <a:buNone/>
+            </a:pPr>
+            <a:r>
+              <a:rPr lang="en-US" sz="1050" b="1" spc="200" kern="0" dirty="0">
+                <a:solidFill>
+                  <a:srgbClr val="FFFFFF"/>
+                </a:solidFill>
+                <a:latin typeface="Arial" pitchFamily="34" charset="0"/>
+                <a:ea typeface="Arial" pitchFamily="34" charset="-122"/>
+                <a:cs typeface="Arial" pitchFamily="34" charset="-120"/>
+              </a:rPr>
+              <a:t>IN SILICO VALIDATION</a:t>
+            </a:r>
+            <a:endParaRPr lang="en-US" sz="1050" dirty="0"/>
+          </a:p>
+        </p:txBody>
+      </p:sp>
+      <p:sp>
+        <p:nvSpPr>
+          <p:cNvPr id="20" name="Text 18"/>
+          <p:cNvSpPr/>
+          <p:nvPr/>
+        </p:nvSpPr>
+        <p:spPr>
+          <a:xfrm>
+            <a:off x="3840480" y="4315968"/>
+            <a:ext cx="4663440" cy="685800"/>
+          </a:xfrm>
+          <a:prstGeom prst="rect">
+            <a:avLst/>
+          </a:prstGeom>
+          <a:noFill/>
+          <a:ln/>
+        </p:spPr>
+        <p:txBody>
+          <a:bodyPr wrap="square" lIns="0" tIns="0" rIns="0" bIns="0" rtlCol="0" anchor="t"/>
+          <a:lstStyle/>
+          <a:p>
+            <a:pPr indent="0" marL="0">
+              <a:buNone/>
+            </a:pPr>
+            <a:r>
+              <a:rPr lang="en-US" sz="950" dirty="0">
+                <a:solidFill>
+                  <a:srgbClr val="333333"/>
+                </a:solidFill>
+                <a:latin typeface="Arial" pitchFamily="34" charset="0"/>
+                <a:ea typeface="Arial" pitchFamily="34" charset="-122"/>
+                <a:cs typeface="Arial" pitchFamily="34" charset="-120"/>
+              </a:rPr>
+              <a:t>Molecular dynamics and binding-affinity prediction filter candidates before synthesis. Weeks of bench work become hours of GPU compute. Far fewer molecules reach animal testing.</a:t>
+            </a:r>
+            <a:endParaRPr lang="en-US" sz="950" dirty="0"/>
+          </a:p>
+        </p:txBody>
+      </p:sp>
+      <p:sp>
+        <p:nvSpPr>
+          <p:cNvPr id="21" name="Shape 19"/>
+          <p:cNvSpPr/>
+          <p:nvPr/>
+        </p:nvSpPr>
+        <p:spPr>
+          <a:xfrm>
+            <a:off x="457200" y="5193792"/>
+            <a:ext cx="8229600" cy="384048"/>
+          </a:xfrm>
+          <a:prstGeom prst="rect">
+            <a:avLst/>
+          </a:prstGeom>
+          <a:solidFill>
+            <a:srgbClr val="FFD100"/>
+          </a:solidFill>
+          <a:ln w="12700">
+            <a:solidFill>
+              <a:srgbClr val="FFD100"/>
+            </a:solidFill>
+            <a:prstDash val="solid"/>
+          </a:ln>
+        </p:spPr>
+      </p:sp>
+      <p:sp>
+        <p:nvSpPr>
           <p:cNvPr id="22" name="Text 20"/>
+          <p:cNvSpPr/>
+          <p:nvPr/>
+        </p:nvSpPr>
+        <p:spPr>
+          <a:xfrm>
+            <a:off x="640080" y="5193792"/>
+            <a:ext cx="7863840" cy="384048"/>
+          </a:xfrm>
+          <a:prstGeom prst="rect">
+            <a:avLst/>
+          </a:prstGeom>
+          <a:noFill/>
+          <a:ln/>
+        </p:spPr>
+        <p:txBody>
+          <a:bodyPr wrap="square" lIns="0" tIns="0" rIns="0" bIns="0" rtlCol="0" anchor="ctr"/>
+          <a:lstStyle/>
+          <a:p>
+            <a:pPr indent="0" marL="0">
+              <a:buNone/>
+            </a:pPr>
+            <a:r>
+              <a:rPr lang="en-US" sz="1000" b="1" dirty="0">
+                <a:solidFill>
+                  <a:srgbClr val="000000"/>
+                </a:solidFill>
+                <a:latin typeface="Arial" pitchFamily="34" charset="0"/>
+                <a:ea typeface="Arial" pitchFamily="34" charset="-122"/>
+                <a:cs typeface="Arial" pitchFamily="34" charset="-120"/>
+              </a:rPr>
+              <a:t>Traditional pharma: 10–15 years, ~$2.6B per approved drug, &lt;10% Phase I success. AI collapses the design stage — clinical trials are still bound by biology and the FDA.</a:t>
+            </a:r>
+            <a:endParaRPr lang="en-US" sz="1000" dirty="0"/>
+          </a:p>
+        </p:txBody>
+      </p:sp>
+      <p:sp>
+        <p:nvSpPr>
+          <p:cNvPr id="23" name="Text 21"/>
           <p:cNvSpPr/>
           <p:nvPr/>
         </p:nvSpPr>
@@ -19723,7 +19938,7 @@
                 <a:ea typeface="Arial" pitchFamily="34" charset="-122"/>
                 <a:cs typeface="Arial" pitchFamily="34" charset="-120"/>
               </a:rPr>
-              <a:t>Sources: DeepMind AlphaFold DB (Feb 2026 — 240M structures, 3M researchers); Isomorphic Labs / Fierce Biotech (Jan 2024, Feb 2025 partnerships); Recursion FY25 filings (Exscientia merger Jul 2025); CNBC; Nature.</a:t>
+              <a:t>Sources: Jumper et al. (AlphaFold, Nature 2020); Tufts CSDD drug-development cost and timeline studies; Hughes et al., Br. J. Pharmacol. on screening scale; Strategy Research.</a:t>
             </a:r>
             <a:endParaRPr lang="en-US" sz="700" dirty="0"/>
           </a:p>
@@ -19731,7 +19946,7 @@
       </p:sp>
       <p:sp>
         <p:nvSpPr>
-          <p:cNvPr id="23" name="Shape 21"/>
+          <p:cNvPr id="24" name="Shape 22"/>
           <p:cNvSpPr/>
           <p:nvPr/>
         </p:nvSpPr>
@@ -19756,7 +19971,7 @@
       </p:sp>
       <p:sp>
         <p:nvSpPr>
-          <p:cNvPr id="24" name="Text 22"/>
+          <p:cNvPr id="25" name="Text 23"/>
           <p:cNvSpPr/>
           <p:nvPr/>
         </p:nvSpPr>
@@ -19795,7 +20010,7 @@
       </p:sp>
       <p:sp>
         <p:nvSpPr>
-          <p:cNvPr id="25" name="Text 23"/>
+          <p:cNvPr id="26" name="Text 24"/>
           <p:cNvSpPr/>
           <p:nvPr/>
         </p:nvSpPr>
@@ -25747,7 +25962,7 @@
                 <a:ea typeface="Arial Black" pitchFamily="34" charset="-122"/>
                 <a:cs typeface="Arial Black" pitchFamily="34" charset="-120"/>
               </a:rPr>
-              <a:t>Semiconductors, in one slide.</a:t>
+              <a:t>Inside the $975B chip market.</a:t>
             </a:r>
             <a:endParaRPr lang="en-US" sz="2400" dirty="0"/>
           </a:p>
@@ -25786,7 +26001,7 @@
                 <a:ea typeface="Arial" pitchFamily="34" charset="-122"/>
                 <a:cs typeface="Arial" pitchFamily="34" charset="-120"/>
               </a:rPr>
-              <a:t>A ~$975B market that turns sand into intelligence. Four kinds of chips, each doing a different job inside every phone, car, and data center.</a:t>
+              <a:t>Six categories of silicon. Memory and logic take 68% of the market — and virtually all of the AI capex. Logic isn't just CPUs: GPUs, AI accelerators, ASICs, FPGAs, and networking chips all live here.</a:t>
             </a:r>
             <a:endParaRPr lang="en-US" sz="1350" dirty="0"/>
           </a:p>
@@ -25824,17 +26039,17 @@
         <p:spPr>
           <a:xfrm>
             <a:off x="457200" y="1691640"/>
-            <a:ext cx="8229600" cy="731520"/>
+            <a:ext cx="3127248" cy="411480"/>
           </a:xfrm>
           <a:prstGeom prst="rect">
             <a:avLst/>
           </a:prstGeom>
           <a:solidFill>
-            <a:srgbClr val="333333"/>
+            <a:srgbClr val="FFB800"/>
           </a:solidFill>
           <a:ln w="12700">
             <a:solidFill>
-              <a:srgbClr val="333333"/>
+              <a:srgbClr val="FFB800"/>
             </a:solidFill>
             <a:prstDash val="solid"/>
           </a:ln>
@@ -25848,8 +26063,8 @@
         </p:nvSpPr>
         <p:spPr>
           <a:xfrm>
-            <a:off x="640080" y="1737360"/>
-            <a:ext cx="7863840" cy="228600"/>
+            <a:off x="457200" y="1691640"/>
+            <a:ext cx="3127248" cy="411480"/>
           </a:xfrm>
           <a:prstGeom prst="rect">
             <a:avLst/>
@@ -25861,34 +26076,59 @@
           <a:bodyPr wrap="square" lIns="0" tIns="0" rIns="0" bIns="0" rtlCol="0" anchor="ctr"/>
           <a:lstStyle/>
           <a:p>
-            <a:pPr indent="0" marL="0">
-              <a:buNone/>
-            </a:pPr>
-            <a:r>
-              <a:rPr lang="en-US" sz="900" b="1" spc="300" kern="0" dirty="0">
-                <a:solidFill>
-                  <a:srgbClr val="FFB800"/>
-                </a:solidFill>
-                <a:latin typeface="Arial" pitchFamily="34" charset="0"/>
-                <a:ea typeface="Arial" pitchFamily="34" charset="-122"/>
-                <a:cs typeface="Arial" pitchFamily="34" charset="-120"/>
-              </a:rPr>
-              <a:t>WHAT IS A SEMICONDUCTOR?</a:t>
-            </a:r>
-            <a:endParaRPr lang="en-US" sz="900" dirty="0"/>
-          </a:p>
-        </p:txBody>
-      </p:sp>
-      <p:sp>
-        <p:nvSpPr>
-          <p:cNvPr id="9" name="Text 7"/>
-          <p:cNvSpPr/>
-          <p:nvPr/>
-        </p:nvSpPr>
-        <p:spPr>
-          <a:xfrm>
-            <a:off x="640080" y="2011680"/>
-            <a:ext cx="7863840" cy="411480"/>
+            <a:pPr algn="ctr" indent="0" marL="0">
+              <a:buNone/>
+            </a:pPr>
+            <a:r>
+              <a:rPr lang="en-US" sz="1000" b="1" spc="100" kern="0" dirty="0">
+                <a:solidFill>
+                  <a:srgbClr val="000000"/>
+                </a:solidFill>
+                <a:latin typeface="Arial" pitchFamily="34" charset="0"/>
+                <a:ea typeface="Arial" pitchFamily="34" charset="-122"/>
+                <a:cs typeface="Arial" pitchFamily="34" charset="-120"/>
+              </a:rPr>
+              <a:t>MEMORY 38%</a:t>
+            </a:r>
+            <a:endParaRPr lang="en-US" sz="1000" dirty="0"/>
+          </a:p>
+        </p:txBody>
+      </p:sp>
+      <p:sp>
+        <p:nvSpPr>
+          <p:cNvPr id="9" name="Shape 7"/>
+          <p:cNvSpPr/>
+          <p:nvPr/>
+        </p:nvSpPr>
+        <p:spPr>
+          <a:xfrm>
+            <a:off x="3584448" y="1691640"/>
+            <a:ext cx="2468880" cy="411480"/>
+          </a:xfrm>
+          <a:prstGeom prst="rect">
+            <a:avLst/>
+          </a:prstGeom>
+          <a:solidFill>
+            <a:srgbClr val="F6693D"/>
+          </a:solidFill>
+          <a:ln w="12700">
+            <a:solidFill>
+              <a:srgbClr val="F6693D"/>
+            </a:solidFill>
+            <a:prstDash val="solid"/>
+          </a:ln>
+        </p:spPr>
+      </p:sp>
+      <p:sp>
+        <p:nvSpPr>
+          <p:cNvPr id="10" name="Text 8"/>
+          <p:cNvSpPr/>
+          <p:nvPr/>
+        </p:nvSpPr>
+        <p:spPr>
+          <a:xfrm>
+            <a:off x="3584448" y="1691640"/>
+            <a:ext cx="2468880" cy="411480"/>
           </a:xfrm>
           <a:prstGeom prst="rect">
             <a:avLst/>
@@ -25900,11 +26140,11 @@
           <a:bodyPr wrap="square" lIns="0" tIns="0" rIns="0" bIns="0" rtlCol="0" anchor="ctr"/>
           <a:lstStyle/>
           <a:p>
-            <a:pPr indent="0" marL="0">
-              <a:buNone/>
-            </a:pPr>
-            <a:r>
-              <a:rPr lang="en-US" sz="1150" dirty="0">
+            <a:pPr algn="ctr" indent="0" marL="0">
+              <a:buNone/>
+            </a:pPr>
+            <a:r>
+              <a:rPr lang="en-US" sz="1000" b="1" spc="100" kern="0" dirty="0">
                 <a:solidFill>
                   <a:srgbClr val="FFFFFF"/>
                 </a:solidFill>
@@ -25912,22 +26152,239 @@
                 <a:ea typeface="Arial" pitchFamily="34" charset="-122"/>
                 <a:cs typeface="Arial" pitchFamily="34" charset="-120"/>
               </a:rPr>
-              <a:t>A tiny switch — billions of them etched onto a silicon wafer — that turns electricity into computation, memory, and signal. Every modern device runs on them.</a:t>
-            </a:r>
-            <a:endParaRPr lang="en-US" sz="1150" dirty="0"/>
-          </a:p>
-        </p:txBody>
-      </p:sp>
-      <p:sp>
-        <p:nvSpPr>
-          <p:cNvPr id="10" name="Shape 8"/>
-          <p:cNvSpPr/>
-          <p:nvPr/>
-        </p:nvSpPr>
-        <p:spPr>
-          <a:xfrm>
-            <a:off x="457200" y="2560320"/>
-            <a:ext cx="1947672" cy="2423160"/>
+              <a:t>LOGIC 30%</a:t>
+            </a:r>
+            <a:endParaRPr lang="en-US" sz="1000" dirty="0"/>
+          </a:p>
+        </p:txBody>
+      </p:sp>
+      <p:sp>
+        <p:nvSpPr>
+          <p:cNvPr id="11" name="Shape 9"/>
+          <p:cNvSpPr/>
+          <p:nvPr/>
+        </p:nvSpPr>
+        <p:spPr>
+          <a:xfrm>
+            <a:off x="6053328" y="1691640"/>
+            <a:ext cx="905256" cy="411480"/>
+          </a:xfrm>
+          <a:prstGeom prst="rect">
+            <a:avLst/>
+          </a:prstGeom>
+          <a:solidFill>
+            <a:srgbClr val="008B8B"/>
+          </a:solidFill>
+          <a:ln w="12700">
+            <a:solidFill>
+              <a:srgbClr val="008B8B"/>
+            </a:solidFill>
+            <a:prstDash val="solid"/>
+          </a:ln>
+        </p:spPr>
+      </p:sp>
+      <p:sp>
+        <p:nvSpPr>
+          <p:cNvPr id="12" name="Text 10"/>
+          <p:cNvSpPr/>
+          <p:nvPr/>
+        </p:nvSpPr>
+        <p:spPr>
+          <a:xfrm>
+            <a:off x="6053328" y="1691640"/>
+            <a:ext cx="905256" cy="411480"/>
+          </a:xfrm>
+          <a:prstGeom prst="rect">
+            <a:avLst/>
+          </a:prstGeom>
+          <a:noFill/>
+          <a:ln/>
+        </p:spPr>
+        <p:txBody>
+          <a:bodyPr wrap="square" lIns="0" tIns="0" rIns="0" bIns="0" rtlCol="0" anchor="ctr"/>
+          <a:lstStyle/>
+          <a:p>
+            <a:pPr algn="ctr" indent="0" marL="0">
+              <a:buNone/>
+            </a:pPr>
+            <a:r>
+              <a:rPr lang="en-US" sz="1000" b="1" spc="100" kern="0" dirty="0">
+                <a:solidFill>
+                  <a:srgbClr val="FFFFFF"/>
+                </a:solidFill>
+                <a:latin typeface="Arial" pitchFamily="34" charset="0"/>
+                <a:ea typeface="Arial" pitchFamily="34" charset="-122"/>
+                <a:cs typeface="Arial" pitchFamily="34" charset="-120"/>
+              </a:rPr>
+              <a:t>MPU/MCU 11%</a:t>
+            </a:r>
+            <a:endParaRPr lang="en-US" sz="1000" dirty="0"/>
+          </a:p>
+        </p:txBody>
+      </p:sp>
+      <p:sp>
+        <p:nvSpPr>
+          <p:cNvPr id="13" name="Shape 11"/>
+          <p:cNvSpPr/>
+          <p:nvPr/>
+        </p:nvSpPr>
+        <p:spPr>
+          <a:xfrm>
+            <a:off x="6958584" y="1691640"/>
+            <a:ext cx="822960" cy="411480"/>
+          </a:xfrm>
+          <a:prstGeom prst="rect">
+            <a:avLst/>
+          </a:prstGeom>
+          <a:solidFill>
+            <a:srgbClr val="051A3D"/>
+          </a:solidFill>
+          <a:ln w="12700">
+            <a:solidFill>
+              <a:srgbClr val="051A3D"/>
+            </a:solidFill>
+            <a:prstDash val="solid"/>
+          </a:ln>
+        </p:spPr>
+      </p:sp>
+      <p:sp>
+        <p:nvSpPr>
+          <p:cNvPr id="14" name="Text 12"/>
+          <p:cNvSpPr/>
+          <p:nvPr/>
+        </p:nvSpPr>
+        <p:spPr>
+          <a:xfrm>
+            <a:off x="6958584" y="1691640"/>
+            <a:ext cx="822960" cy="411480"/>
+          </a:xfrm>
+          <a:prstGeom prst="rect">
+            <a:avLst/>
+          </a:prstGeom>
+          <a:noFill/>
+          <a:ln/>
+        </p:spPr>
+        <p:txBody>
+          <a:bodyPr wrap="square" lIns="0" tIns="0" rIns="0" bIns="0" rtlCol="0" anchor="ctr"/>
+          <a:lstStyle/>
+          <a:p>
+            <a:pPr algn="ctr" indent="0" marL="0">
+              <a:buNone/>
+            </a:pPr>
+            <a:r>
+              <a:rPr lang="en-US" sz="1000" b="1" spc="100" kern="0" dirty="0">
+                <a:solidFill>
+                  <a:srgbClr val="FFFFFF"/>
+                </a:solidFill>
+                <a:latin typeface="Arial" pitchFamily="34" charset="0"/>
+                <a:ea typeface="Arial" pitchFamily="34" charset="-122"/>
+                <a:cs typeface="Arial" pitchFamily="34" charset="-120"/>
+              </a:rPr>
+              <a:t>ANALOG 10%</a:t>
+            </a:r>
+            <a:endParaRPr lang="en-US" sz="1000" dirty="0"/>
+          </a:p>
+        </p:txBody>
+      </p:sp>
+      <p:sp>
+        <p:nvSpPr>
+          <p:cNvPr id="15" name="Shape 13"/>
+          <p:cNvSpPr/>
+          <p:nvPr/>
+        </p:nvSpPr>
+        <p:spPr>
+          <a:xfrm>
+            <a:off x="7781544" y="1691640"/>
+            <a:ext cx="493776" cy="411480"/>
+          </a:xfrm>
+          <a:prstGeom prst="rect">
+            <a:avLst/>
+          </a:prstGeom>
+          <a:solidFill>
+            <a:srgbClr val="00A854"/>
+          </a:solidFill>
+          <a:ln w="12700">
+            <a:solidFill>
+              <a:srgbClr val="00A854"/>
+            </a:solidFill>
+            <a:prstDash val="solid"/>
+          </a:ln>
+        </p:spPr>
+      </p:sp>
+      <p:sp>
+        <p:nvSpPr>
+          <p:cNvPr id="16" name="Shape 14"/>
+          <p:cNvSpPr/>
+          <p:nvPr/>
+        </p:nvSpPr>
+        <p:spPr>
+          <a:xfrm>
+            <a:off x="8275320" y="1691640"/>
+            <a:ext cx="411480" cy="411480"/>
+          </a:xfrm>
+          <a:prstGeom prst="rect">
+            <a:avLst/>
+          </a:prstGeom>
+          <a:solidFill>
+            <a:srgbClr val="666666"/>
+          </a:solidFill>
+          <a:ln w="12700">
+            <a:solidFill>
+              <a:srgbClr val="666666"/>
+            </a:solidFill>
+            <a:prstDash val="solid"/>
+          </a:ln>
+        </p:spPr>
+      </p:sp>
+      <p:sp>
+        <p:nvSpPr>
+          <p:cNvPr id="17" name="Text 15"/>
+          <p:cNvSpPr/>
+          <p:nvPr/>
+        </p:nvSpPr>
+        <p:spPr>
+          <a:xfrm>
+            <a:off x="457200" y="2121408"/>
+            <a:ext cx="8229600" cy="201168"/>
+          </a:xfrm>
+          <a:prstGeom prst="rect">
+            <a:avLst/>
+          </a:prstGeom>
+          <a:noFill/>
+          <a:ln/>
+        </p:spPr>
+        <p:txBody>
+          <a:bodyPr wrap="square" lIns="0" tIns="0" rIns="0" bIns="0" rtlCol="0" anchor="ctr"/>
+          <a:lstStyle/>
+          <a:p>
+            <a:pPr algn="r" indent="0" marL="0">
+              <a:buNone/>
+            </a:pPr>
+            <a:r>
+              <a:rPr lang="en-US" sz="850" i="1" dirty="0">
+                <a:solidFill>
+                  <a:srgbClr val="666666"/>
+                </a:solidFill>
+                <a:latin typeface="Arial" pitchFamily="34" charset="0"/>
+                <a:ea typeface="Arial" pitchFamily="34" charset="-122"/>
+                <a:cs typeface="Arial" pitchFamily="34" charset="-120"/>
+              </a:rPr>
+              <a:t>$975B total semiconductor market, 2026E</a:t>
+            </a:r>
+            <a:endParaRPr lang="en-US" sz="850" dirty="0"/>
+          </a:p>
+        </p:txBody>
+      </p:sp>
+      <p:sp>
+        <p:nvSpPr>
+          <p:cNvPr id="18" name="Shape 16"/>
+          <p:cNvSpPr/>
+          <p:nvPr/>
+        </p:nvSpPr>
+        <p:spPr>
+          <a:xfrm>
+            <a:off x="457200" y="2423160"/>
+            <a:ext cx="2651760" cy="1316736"/>
           </a:xfrm>
           <a:prstGeom prst="rect">
             <a:avLst/>
@@ -25945,14 +26402,14 @@
       </p:sp>
       <p:sp>
         <p:nvSpPr>
-          <p:cNvPr id="11" name="Shape 9"/>
-          <p:cNvSpPr/>
-          <p:nvPr/>
-        </p:nvSpPr>
-        <p:spPr>
-          <a:xfrm>
-            <a:off x="457200" y="2560320"/>
-            <a:ext cx="1947672" cy="365760"/>
+          <p:cNvPr id="19" name="Shape 17"/>
+          <p:cNvSpPr/>
+          <p:nvPr/>
+        </p:nvSpPr>
+        <p:spPr>
+          <a:xfrm>
+            <a:off x="457200" y="2423160"/>
+            <a:ext cx="2651760" cy="274320"/>
           </a:xfrm>
           <a:prstGeom prst="rect">
             <a:avLst/>
@@ -25970,14 +26427,14 @@
       </p:sp>
       <p:sp>
         <p:nvSpPr>
-          <p:cNvPr id="12" name="Text 10"/>
-          <p:cNvSpPr/>
-          <p:nvPr/>
-        </p:nvSpPr>
-        <p:spPr>
-          <a:xfrm>
-            <a:off x="457200" y="2560320"/>
-            <a:ext cx="1947672" cy="365760"/>
+          <p:cNvPr id="20" name="Text 18"/>
+          <p:cNvSpPr/>
+          <p:nvPr/>
+        </p:nvSpPr>
+        <p:spPr>
+          <a:xfrm>
+            <a:off x="457200" y="2423160"/>
+            <a:ext cx="2651760" cy="274320"/>
           </a:xfrm>
           <a:prstGeom prst="rect">
             <a:avLst/>
@@ -25993,7 +26450,7 @@
               <a:buNone/>
             </a:pPr>
             <a:r>
-              <a:rPr lang="en-US" sz="1100" b="1" spc="300" kern="0" dirty="0">
+              <a:rPr lang="en-US" sz="1000" b="1" spc="200" kern="0" dirty="0">
                 <a:solidFill>
                   <a:srgbClr val="FFFFFF"/>
                 </a:solidFill>
@@ -26003,20 +26460,20 @@
               </a:rPr>
               <a:t>LOGIC</a:t>
             </a:r>
-            <a:endParaRPr lang="en-US" sz="1100" dirty="0"/>
-          </a:p>
-        </p:txBody>
-      </p:sp>
-      <p:sp>
-        <p:nvSpPr>
-          <p:cNvPr id="13" name="Text 11"/>
-          <p:cNvSpPr/>
-          <p:nvPr/>
-        </p:nvSpPr>
-        <p:spPr>
-          <a:xfrm>
-            <a:off x="457200" y="3017520"/>
-            <a:ext cx="1947672" cy="502920"/>
+            <a:endParaRPr lang="en-US" sz="1000" dirty="0"/>
+          </a:p>
+        </p:txBody>
+      </p:sp>
+      <p:sp>
+        <p:nvSpPr>
+          <p:cNvPr id="21" name="Text 19"/>
+          <p:cNvSpPr/>
+          <p:nvPr/>
+        </p:nvSpPr>
+        <p:spPr>
+          <a:xfrm>
+            <a:off x="457200" y="2770632"/>
+            <a:ext cx="2651760" cy="292608"/>
           </a:xfrm>
           <a:prstGeom prst="rect">
             <a:avLst/>
@@ -26032,124 +26489,60 @@
               <a:buNone/>
             </a:pPr>
             <a:r>
-              <a:rPr lang="en-US" sz="2400" b="1" dirty="0">
-                <a:solidFill>
-                  <a:srgbClr val="F6693D"/>
+              <a:rPr lang="en-US" sz="1700" b="1" dirty="0">
+                <a:solidFill>
+                  <a:srgbClr val="000000"/>
                 </a:solidFill>
                 <a:latin typeface="Arial Black" pitchFamily="34" charset="0"/>
                 <a:ea typeface="Arial Black" pitchFamily="34" charset="-122"/>
                 <a:cs typeface="Arial Black" pitchFamily="34" charset="-120"/>
               </a:rPr>
-              <a:t>CPU</a:t>
-            </a:r>
-            <a:endParaRPr lang="en-US" sz="2400" dirty="0"/>
-          </a:p>
-        </p:txBody>
-      </p:sp>
-      <p:sp>
-        <p:nvSpPr>
-          <p:cNvPr id="14" name="Text 12"/>
-          <p:cNvSpPr/>
-          <p:nvPr/>
-        </p:nvSpPr>
-        <p:spPr>
-          <a:xfrm>
-            <a:off x="457200" y="3566160"/>
-            <a:ext cx="1947672" cy="320040"/>
-          </a:xfrm>
-          <a:prstGeom prst="rect">
-            <a:avLst/>
-          </a:prstGeom>
-          <a:noFill/>
-          <a:ln/>
-        </p:spPr>
-        <p:txBody>
-          <a:bodyPr wrap="square" lIns="0" tIns="0" rIns="0" bIns="0" rtlCol="0" anchor="ctr"/>
-          <a:lstStyle/>
-          <a:p>
+              <a:t>$295B</a:t>
+            </a:r>
             <a:pPr algn="ctr" indent="0" marL="0">
               <a:buNone/>
             </a:pPr>
             <a:r>
-              <a:rPr lang="en-US" sz="1800" b="1" dirty="0">
-                <a:solidFill>
-                  <a:srgbClr val="000000"/>
-                </a:solidFill>
-                <a:latin typeface="Arial Black" pitchFamily="34" charset="0"/>
-                <a:ea typeface="Arial Black" pitchFamily="34" charset="-122"/>
-                <a:cs typeface="Arial Black" pitchFamily="34" charset="-120"/>
-              </a:rPr>
-              <a:t>$302B</a:t>
-            </a:r>
-            <a:endParaRPr lang="en-US" sz="1800" dirty="0"/>
-          </a:p>
-        </p:txBody>
-      </p:sp>
-      <p:sp>
-        <p:nvSpPr>
-          <p:cNvPr id="15" name="Text 13"/>
-          <p:cNvSpPr/>
-          <p:nvPr/>
-        </p:nvSpPr>
-        <p:spPr>
-          <a:xfrm>
-            <a:off x="457200" y="3858768"/>
-            <a:ext cx="1947672" cy="182880"/>
-          </a:xfrm>
-          <a:prstGeom prst="rect">
-            <a:avLst/>
-          </a:prstGeom>
-          <a:noFill/>
-          <a:ln/>
-        </p:spPr>
-        <p:txBody>
-          <a:bodyPr wrap="square" lIns="0" tIns="0" rIns="0" bIns="0" rtlCol="0" anchor="ctr"/>
+              <a:rPr lang="en-US" sz="1100" dirty="0">
+                <a:solidFill>
+                  <a:srgbClr val="666666"/>
+                </a:solidFill>
+                <a:latin typeface="Arial" pitchFamily="34" charset="0"/>
+                <a:ea typeface="Arial" pitchFamily="34" charset="-122"/>
+                <a:cs typeface="Arial" pitchFamily="34" charset="-120"/>
+              </a:rPr>
+              <a:t>   30%</a:t>
+            </a:r>
+            <a:endParaRPr lang="en-US" sz="1700" dirty="0"/>
+          </a:p>
+        </p:txBody>
+      </p:sp>
+      <p:sp>
+        <p:nvSpPr>
+          <p:cNvPr id="22" name="Text 20"/>
+          <p:cNvSpPr/>
+          <p:nvPr/>
+        </p:nvSpPr>
+        <p:spPr>
+          <a:xfrm>
+            <a:off x="585216" y="3136392"/>
+            <a:ext cx="2395728" cy="384048"/>
+          </a:xfrm>
+          <a:prstGeom prst="rect">
+            <a:avLst/>
+          </a:prstGeom>
+          <a:noFill/>
+          <a:ln/>
+        </p:spPr>
+        <p:txBody>
+          <a:bodyPr wrap="square" lIns="0" tIns="0" rIns="0" bIns="0" rtlCol="0" anchor="t"/>
           <a:lstStyle/>
           <a:p>
             <a:pPr algn="ctr" indent="0" marL="0">
               <a:buNone/>
             </a:pPr>
             <a:r>
-              <a:rPr lang="en-US" sz="850" dirty="0">
-                <a:solidFill>
-                  <a:srgbClr val="666666"/>
-                </a:solidFill>
-                <a:latin typeface="Arial" pitchFamily="34" charset="0"/>
-                <a:ea typeface="Arial" pitchFamily="34" charset="-122"/>
-                <a:cs typeface="Arial" pitchFamily="34" charset="-120"/>
-              </a:rPr>
-              <a:t>31% of market</a:t>
-            </a:r>
-            <a:endParaRPr lang="en-US" sz="850" dirty="0"/>
-          </a:p>
-        </p:txBody>
-      </p:sp>
-      <p:sp>
-        <p:nvSpPr>
-          <p:cNvPr id="16" name="Text 14"/>
-          <p:cNvSpPr/>
-          <p:nvPr/>
-        </p:nvSpPr>
-        <p:spPr>
-          <a:xfrm>
-            <a:off x="548640" y="4114800"/>
-            <a:ext cx="1764792" cy="457200"/>
-          </a:xfrm>
-          <a:prstGeom prst="rect">
-            <a:avLst/>
-          </a:prstGeom>
-          <a:noFill/>
-          <a:ln/>
-        </p:spPr>
-        <p:txBody>
-          <a:bodyPr wrap="square" lIns="0" tIns="0" rIns="0" bIns="0" rtlCol="0" anchor="t"/>
-          <a:lstStyle/>
-          <a:p>
-            <a:pPr algn="ctr" indent="0" marL="0">
-              <a:buNone/>
-            </a:pPr>
-            <a:r>
-              <a:rPr lang="en-US" sz="950" dirty="0">
+              <a:rPr lang="en-US" sz="900" dirty="0">
                 <a:solidFill>
                   <a:srgbClr val="333333"/>
                 </a:solidFill>
@@ -26157,22 +26550,22 @@
                 <a:ea typeface="Arial" pitchFamily="34" charset="-122"/>
                 <a:cs typeface="Arial" pitchFamily="34" charset="-120"/>
               </a:rPr>
-              <a:t>Does the thinking. GPUs, CPUs, TPUs.</a:t>
-            </a:r>
-            <a:endParaRPr lang="en-US" sz="950" dirty="0"/>
-          </a:p>
-        </p:txBody>
-      </p:sp>
-      <p:sp>
-        <p:nvSpPr>
-          <p:cNvPr id="17" name="Shape 15"/>
-          <p:cNvSpPr/>
-          <p:nvPr/>
-        </p:nvSpPr>
-        <p:spPr>
-          <a:xfrm>
-            <a:off x="640080" y="4590288"/>
-            <a:ext cx="1581912" cy="0"/>
+              <a:t>GPUs, AI accelerators, ASICs, FPGAs, networking ICs — where computation happens</a:t>
+            </a:r>
+            <a:endParaRPr lang="en-US" sz="900" dirty="0"/>
+          </a:p>
+        </p:txBody>
+      </p:sp>
+      <p:sp>
+        <p:nvSpPr>
+          <p:cNvPr id="23" name="Shape 21"/>
+          <p:cNvSpPr/>
+          <p:nvPr/>
+        </p:nvSpPr>
+        <p:spPr>
+          <a:xfrm>
+            <a:off x="640080" y="3483864"/>
+            <a:ext cx="2286000" cy="0"/>
           </a:xfrm>
           <a:prstGeom prst="line">
             <a:avLst/>
@@ -26188,30 +26581,30 @@
       </p:sp>
       <p:sp>
         <p:nvSpPr>
-          <p:cNvPr id="18" name="Text 16"/>
-          <p:cNvSpPr/>
-          <p:nvPr/>
-        </p:nvSpPr>
-        <p:spPr>
-          <a:xfrm>
-            <a:off x="548640" y="4663440"/>
-            <a:ext cx="1764792" cy="274320"/>
-          </a:xfrm>
-          <a:prstGeom prst="rect">
-            <a:avLst/>
-          </a:prstGeom>
-          <a:noFill/>
-          <a:ln/>
-        </p:spPr>
-        <p:txBody>
-          <a:bodyPr wrap="square" lIns="0" tIns="0" rIns="0" bIns="0" rtlCol="0" anchor="t"/>
+          <p:cNvPr id="24" name="Text 22"/>
+          <p:cNvSpPr/>
+          <p:nvPr/>
+        </p:nvSpPr>
+        <p:spPr>
+          <a:xfrm>
+            <a:off x="457200" y="3502152"/>
+            <a:ext cx="2651760" cy="201168"/>
+          </a:xfrm>
+          <a:prstGeom prst="rect">
+            <a:avLst/>
+          </a:prstGeom>
+          <a:noFill/>
+          <a:ln/>
+        </p:spPr>
+        <p:txBody>
+          <a:bodyPr wrap="square" lIns="0" tIns="0" rIns="0" bIns="0" rtlCol="0" anchor="ctr"/>
           <a:lstStyle/>
           <a:p>
             <a:pPr algn="ctr" indent="0" marL="0">
               <a:buNone/>
             </a:pPr>
             <a:r>
-              <a:rPr lang="en-US" sz="800" i="1" dirty="0">
+              <a:rPr lang="en-US" sz="750" i="1" dirty="0">
                 <a:solidFill>
                   <a:srgbClr val="666666"/>
                 </a:solidFill>
@@ -26219,22 +26612,22 @@
                 <a:ea typeface="Arial" pitchFamily="34" charset="-122"/>
                 <a:cs typeface="Arial" pitchFamily="34" charset="-120"/>
               </a:rPr>
-              <a:t>NVIDIA · AMD · Intel · TSMC</a:t>
-            </a:r>
-            <a:endParaRPr lang="en-US" sz="800" dirty="0"/>
-          </a:p>
-        </p:txBody>
-      </p:sp>
-      <p:sp>
-        <p:nvSpPr>
-          <p:cNvPr id="19" name="Shape 17"/>
-          <p:cNvSpPr/>
-          <p:nvPr/>
-        </p:nvSpPr>
-        <p:spPr>
-          <a:xfrm>
-            <a:off x="2551176" y="2560320"/>
-            <a:ext cx="1947672" cy="2423160"/>
+              <a:t>NVIDIA · AMD · Broadcom · TSMC</a:t>
+            </a:r>
+            <a:endParaRPr lang="en-US" sz="750" dirty="0"/>
+          </a:p>
+        </p:txBody>
+      </p:sp>
+      <p:sp>
+        <p:nvSpPr>
+          <p:cNvPr id="25" name="Shape 23"/>
+          <p:cNvSpPr/>
+          <p:nvPr/>
+        </p:nvSpPr>
+        <p:spPr>
+          <a:xfrm>
+            <a:off x="3246120" y="2423160"/>
+            <a:ext cx="2651760" cy="1316736"/>
           </a:xfrm>
           <a:prstGeom prst="rect">
             <a:avLst/>
@@ -26252,14 +26645,14 @@
       </p:sp>
       <p:sp>
         <p:nvSpPr>
-          <p:cNvPr id="20" name="Shape 18"/>
-          <p:cNvSpPr/>
-          <p:nvPr/>
-        </p:nvSpPr>
-        <p:spPr>
-          <a:xfrm>
-            <a:off x="2551176" y="2560320"/>
-            <a:ext cx="1947672" cy="365760"/>
+          <p:cNvPr id="26" name="Shape 24"/>
+          <p:cNvSpPr/>
+          <p:nvPr/>
+        </p:nvSpPr>
+        <p:spPr>
+          <a:xfrm>
+            <a:off x="3246120" y="2423160"/>
+            <a:ext cx="2651760" cy="274320"/>
           </a:xfrm>
           <a:prstGeom prst="rect">
             <a:avLst/>
@@ -26277,14 +26670,14 @@
       </p:sp>
       <p:sp>
         <p:nvSpPr>
-          <p:cNvPr id="21" name="Text 19"/>
-          <p:cNvSpPr/>
-          <p:nvPr/>
-        </p:nvSpPr>
-        <p:spPr>
-          <a:xfrm>
-            <a:off x="2551176" y="2560320"/>
-            <a:ext cx="1947672" cy="365760"/>
+          <p:cNvPr id="27" name="Text 25"/>
+          <p:cNvSpPr/>
+          <p:nvPr/>
+        </p:nvSpPr>
+        <p:spPr>
+          <a:xfrm>
+            <a:off x="3246120" y="2423160"/>
+            <a:ext cx="2651760" cy="274320"/>
           </a:xfrm>
           <a:prstGeom prst="rect">
             <a:avLst/>
@@ -26300,9 +26693,9 @@
               <a:buNone/>
             </a:pPr>
             <a:r>
-              <a:rPr lang="en-US" sz="1100" b="1" spc="300" kern="0" dirty="0">
-                <a:solidFill>
-                  <a:srgbClr val="FFFFFF"/>
+              <a:rPr lang="en-US" sz="1000" b="1" spc="200" kern="0" dirty="0">
+                <a:solidFill>
+                  <a:srgbClr val="000000"/>
                 </a:solidFill>
                 <a:latin typeface="Arial" pitchFamily="34" charset="0"/>
                 <a:ea typeface="Arial" pitchFamily="34" charset="-122"/>
@@ -26310,20 +26703,20 @@
               </a:rPr>
               <a:t>MEMORY</a:t>
             </a:r>
-            <a:endParaRPr lang="en-US" sz="1100" dirty="0"/>
-          </a:p>
-        </p:txBody>
-      </p:sp>
-      <p:sp>
-        <p:nvSpPr>
-          <p:cNvPr id="22" name="Text 20"/>
-          <p:cNvSpPr/>
-          <p:nvPr/>
-        </p:nvSpPr>
-        <p:spPr>
-          <a:xfrm>
-            <a:off x="2551176" y="3017520"/>
-            <a:ext cx="1947672" cy="502920"/>
+            <a:endParaRPr lang="en-US" sz="1000" dirty="0"/>
+          </a:p>
+        </p:txBody>
+      </p:sp>
+      <p:sp>
+        <p:nvSpPr>
+          <p:cNvPr id="28" name="Text 26"/>
+          <p:cNvSpPr/>
+          <p:nvPr/>
+        </p:nvSpPr>
+        <p:spPr>
+          <a:xfrm>
+            <a:off x="3246120" y="2770632"/>
+            <a:ext cx="2651760" cy="292608"/>
           </a:xfrm>
           <a:prstGeom prst="rect">
             <a:avLst/>
@@ -26339,124 +26732,60 @@
               <a:buNone/>
             </a:pPr>
             <a:r>
-              <a:rPr lang="en-US" sz="2400" b="1" dirty="0">
-                <a:solidFill>
-                  <a:srgbClr val="FFB800"/>
+              <a:rPr lang="en-US" sz="1700" b="1" dirty="0">
+                <a:solidFill>
+                  <a:srgbClr val="000000"/>
                 </a:solidFill>
                 <a:latin typeface="Arial Black" pitchFamily="34" charset="0"/>
                 <a:ea typeface="Arial Black" pitchFamily="34" charset="-122"/>
                 <a:cs typeface="Arial Black" pitchFamily="34" charset="-120"/>
               </a:rPr>
-              <a:t>MEM</a:t>
-            </a:r>
-            <a:endParaRPr lang="en-US" sz="2400" dirty="0"/>
-          </a:p>
-        </p:txBody>
-      </p:sp>
-      <p:sp>
-        <p:nvSpPr>
-          <p:cNvPr id="23" name="Text 21"/>
-          <p:cNvSpPr/>
-          <p:nvPr/>
-        </p:nvSpPr>
-        <p:spPr>
-          <a:xfrm>
-            <a:off x="2551176" y="3566160"/>
-            <a:ext cx="1947672" cy="320040"/>
-          </a:xfrm>
-          <a:prstGeom prst="rect">
-            <a:avLst/>
-          </a:prstGeom>
-          <a:noFill/>
-          <a:ln/>
-        </p:spPr>
-        <p:txBody>
-          <a:bodyPr wrap="square" lIns="0" tIns="0" rIns="0" bIns="0" rtlCol="0" anchor="ctr"/>
-          <a:lstStyle/>
-          <a:p>
+              <a:t>$371B</a:t>
+            </a:r>
             <a:pPr algn="ctr" indent="0" marL="0">
               <a:buNone/>
             </a:pPr>
             <a:r>
-              <a:rPr lang="en-US" sz="1800" b="1" dirty="0">
-                <a:solidFill>
-                  <a:srgbClr val="000000"/>
-                </a:solidFill>
-                <a:latin typeface="Arial Black" pitchFamily="34" charset="0"/>
-                <a:ea typeface="Arial Black" pitchFamily="34" charset="-122"/>
-                <a:cs typeface="Arial Black" pitchFamily="34" charset="-120"/>
-              </a:rPr>
-              <a:t>$295B</a:t>
-            </a:r>
-            <a:endParaRPr lang="en-US" sz="1800" dirty="0"/>
-          </a:p>
-        </p:txBody>
-      </p:sp>
-      <p:sp>
-        <p:nvSpPr>
-          <p:cNvPr id="24" name="Text 22"/>
-          <p:cNvSpPr/>
-          <p:nvPr/>
-        </p:nvSpPr>
-        <p:spPr>
-          <a:xfrm>
-            <a:off x="2551176" y="3858768"/>
-            <a:ext cx="1947672" cy="182880"/>
-          </a:xfrm>
-          <a:prstGeom prst="rect">
-            <a:avLst/>
-          </a:prstGeom>
-          <a:noFill/>
-          <a:ln/>
-        </p:spPr>
-        <p:txBody>
-          <a:bodyPr wrap="square" lIns="0" tIns="0" rIns="0" bIns="0" rtlCol="0" anchor="ctr"/>
+              <a:rPr lang="en-US" sz="1100" dirty="0">
+                <a:solidFill>
+                  <a:srgbClr val="666666"/>
+                </a:solidFill>
+                <a:latin typeface="Arial" pitchFamily="34" charset="0"/>
+                <a:ea typeface="Arial" pitchFamily="34" charset="-122"/>
+                <a:cs typeface="Arial" pitchFamily="34" charset="-120"/>
+              </a:rPr>
+              <a:t>   38%</a:t>
+            </a:r>
+            <a:endParaRPr lang="en-US" sz="1700" dirty="0"/>
+          </a:p>
+        </p:txBody>
+      </p:sp>
+      <p:sp>
+        <p:nvSpPr>
+          <p:cNvPr id="29" name="Text 27"/>
+          <p:cNvSpPr/>
+          <p:nvPr/>
+        </p:nvSpPr>
+        <p:spPr>
+          <a:xfrm>
+            <a:off x="3374136" y="3136392"/>
+            <a:ext cx="2395728" cy="384048"/>
+          </a:xfrm>
+          <a:prstGeom prst="rect">
+            <a:avLst/>
+          </a:prstGeom>
+          <a:noFill/>
+          <a:ln/>
+        </p:spPr>
+        <p:txBody>
+          <a:bodyPr wrap="square" lIns="0" tIns="0" rIns="0" bIns="0" rtlCol="0" anchor="t"/>
           <a:lstStyle/>
           <a:p>
             <a:pPr algn="ctr" indent="0" marL="0">
               <a:buNone/>
             </a:pPr>
             <a:r>
-              <a:rPr lang="en-US" sz="850" dirty="0">
-                <a:solidFill>
-                  <a:srgbClr val="666666"/>
-                </a:solidFill>
-                <a:latin typeface="Arial" pitchFamily="34" charset="0"/>
-                <a:ea typeface="Arial" pitchFamily="34" charset="-122"/>
-                <a:cs typeface="Arial" pitchFamily="34" charset="-120"/>
-              </a:rPr>
-              <a:t>30% of market</a:t>
-            </a:r>
-            <a:endParaRPr lang="en-US" sz="850" dirty="0"/>
-          </a:p>
-        </p:txBody>
-      </p:sp>
-      <p:sp>
-        <p:nvSpPr>
-          <p:cNvPr id="25" name="Text 23"/>
-          <p:cNvSpPr/>
-          <p:nvPr/>
-        </p:nvSpPr>
-        <p:spPr>
-          <a:xfrm>
-            <a:off x="2642616" y="4114800"/>
-            <a:ext cx="1764792" cy="457200"/>
-          </a:xfrm>
-          <a:prstGeom prst="rect">
-            <a:avLst/>
-          </a:prstGeom>
-          <a:noFill/>
-          <a:ln/>
-        </p:spPr>
-        <p:txBody>
-          <a:bodyPr wrap="square" lIns="0" tIns="0" rIns="0" bIns="0" rtlCol="0" anchor="t"/>
-          <a:lstStyle/>
-          <a:p>
-            <a:pPr algn="ctr" indent="0" marL="0">
-              <a:buNone/>
-            </a:pPr>
-            <a:r>
-              <a:rPr lang="en-US" sz="950" dirty="0">
+              <a:rPr lang="en-US" sz="900" dirty="0">
                 <a:solidFill>
                   <a:srgbClr val="333333"/>
                 </a:solidFill>
@@ -26464,22 +26793,22 @@
                 <a:ea typeface="Arial" pitchFamily="34" charset="-122"/>
                 <a:cs typeface="Arial" pitchFamily="34" charset="-120"/>
               </a:rPr>
-              <a:t>Stores the data. DRAM, HBM, NAND.</a:t>
-            </a:r>
-            <a:endParaRPr lang="en-US" sz="950" dirty="0"/>
-          </a:p>
-        </p:txBody>
-      </p:sp>
-      <p:sp>
-        <p:nvSpPr>
-          <p:cNvPr id="26" name="Shape 24"/>
-          <p:cNvSpPr/>
-          <p:nvPr/>
-        </p:nvSpPr>
-        <p:spPr>
-          <a:xfrm>
-            <a:off x="2734056" y="4590288"/>
-            <a:ext cx="1581912" cy="0"/>
+              <a:t>DRAM, HBM, NAND, NOR — stores data and feeds logic at terabit speeds</a:t>
+            </a:r>
+            <a:endParaRPr lang="en-US" sz="900" dirty="0"/>
+          </a:p>
+        </p:txBody>
+      </p:sp>
+      <p:sp>
+        <p:nvSpPr>
+          <p:cNvPr id="30" name="Shape 28"/>
+          <p:cNvSpPr/>
+          <p:nvPr/>
+        </p:nvSpPr>
+        <p:spPr>
+          <a:xfrm>
+            <a:off x="3429000" y="3483864"/>
+            <a:ext cx="2286000" cy="0"/>
           </a:xfrm>
           <a:prstGeom prst="line">
             <a:avLst/>
@@ -26495,30 +26824,30 @@
       </p:sp>
       <p:sp>
         <p:nvSpPr>
-          <p:cNvPr id="27" name="Text 25"/>
-          <p:cNvSpPr/>
-          <p:nvPr/>
-        </p:nvSpPr>
-        <p:spPr>
-          <a:xfrm>
-            <a:off x="2642616" y="4663440"/>
-            <a:ext cx="1764792" cy="274320"/>
-          </a:xfrm>
-          <a:prstGeom prst="rect">
-            <a:avLst/>
-          </a:prstGeom>
-          <a:noFill/>
-          <a:ln/>
-        </p:spPr>
-        <p:txBody>
-          <a:bodyPr wrap="square" lIns="0" tIns="0" rIns="0" bIns="0" rtlCol="0" anchor="t"/>
+          <p:cNvPr id="31" name="Text 29"/>
+          <p:cNvSpPr/>
+          <p:nvPr/>
+        </p:nvSpPr>
+        <p:spPr>
+          <a:xfrm>
+            <a:off x="3246120" y="3502152"/>
+            <a:ext cx="2651760" cy="201168"/>
+          </a:xfrm>
+          <a:prstGeom prst="rect">
+            <a:avLst/>
+          </a:prstGeom>
+          <a:noFill/>
+          <a:ln/>
+        </p:spPr>
+        <p:txBody>
+          <a:bodyPr wrap="square" lIns="0" tIns="0" rIns="0" bIns="0" rtlCol="0" anchor="ctr"/>
           <a:lstStyle/>
           <a:p>
             <a:pPr algn="ctr" indent="0" marL="0">
               <a:buNone/>
             </a:pPr>
             <a:r>
-              <a:rPr lang="en-US" sz="800" i="1" dirty="0">
+              <a:rPr lang="en-US" sz="750" i="1" dirty="0">
                 <a:solidFill>
                   <a:srgbClr val="666666"/>
                 </a:solidFill>
@@ -26528,20 +26857,20 @@
               </a:rPr>
               <a:t>SK Hynix · Samsung · Micron</a:t>
             </a:r>
-            <a:endParaRPr lang="en-US" sz="800" dirty="0"/>
-          </a:p>
-        </p:txBody>
-      </p:sp>
-      <p:sp>
-        <p:nvSpPr>
-          <p:cNvPr id="28" name="Shape 26"/>
-          <p:cNvSpPr/>
-          <p:nvPr/>
-        </p:nvSpPr>
-        <p:spPr>
-          <a:xfrm>
-            <a:off x="4645152" y="2560320"/>
-            <a:ext cx="1947672" cy="2423160"/>
+            <a:endParaRPr lang="en-US" sz="750" dirty="0"/>
+          </a:p>
+        </p:txBody>
+      </p:sp>
+      <p:sp>
+        <p:nvSpPr>
+          <p:cNvPr id="32" name="Shape 30"/>
+          <p:cNvSpPr/>
+          <p:nvPr/>
+        </p:nvSpPr>
+        <p:spPr>
+          <a:xfrm>
+            <a:off x="6035040" y="2423160"/>
+            <a:ext cx="2651760" cy="1316736"/>
           </a:xfrm>
           <a:prstGeom prst="rect">
             <a:avLst/>
@@ -26559,14 +26888,14 @@
       </p:sp>
       <p:sp>
         <p:nvSpPr>
-          <p:cNvPr id="29" name="Shape 27"/>
-          <p:cNvSpPr/>
-          <p:nvPr/>
-        </p:nvSpPr>
-        <p:spPr>
-          <a:xfrm>
-            <a:off x="4645152" y="2560320"/>
-            <a:ext cx="1947672" cy="365760"/>
+          <p:cNvPr id="33" name="Shape 31"/>
+          <p:cNvSpPr/>
+          <p:nvPr/>
+        </p:nvSpPr>
+        <p:spPr>
+          <a:xfrm>
+            <a:off x="6035040" y="2423160"/>
+            <a:ext cx="2651760" cy="274320"/>
           </a:xfrm>
           <a:prstGeom prst="rect">
             <a:avLst/>
@@ -26584,14 +26913,14 @@
       </p:sp>
       <p:sp>
         <p:nvSpPr>
-          <p:cNvPr id="30" name="Text 28"/>
-          <p:cNvSpPr/>
-          <p:nvPr/>
-        </p:nvSpPr>
-        <p:spPr>
-          <a:xfrm>
-            <a:off x="4645152" y="2560320"/>
-            <a:ext cx="1947672" cy="365760"/>
+          <p:cNvPr id="34" name="Text 32"/>
+          <p:cNvSpPr/>
+          <p:nvPr/>
+        </p:nvSpPr>
+        <p:spPr>
+          <a:xfrm>
+            <a:off x="6035040" y="2423160"/>
+            <a:ext cx="2651760" cy="274320"/>
           </a:xfrm>
           <a:prstGeom prst="rect">
             <a:avLst/>
@@ -26607,7 +26936,7 @@
               <a:buNone/>
             </a:pPr>
             <a:r>
-              <a:rPr lang="en-US" sz="1100" b="1" spc="300" kern="0" dirty="0">
+              <a:rPr lang="en-US" sz="1000" b="1" spc="200" kern="0" dirty="0">
                 <a:solidFill>
                   <a:srgbClr val="FFFFFF"/>
                 </a:solidFill>
@@ -26615,22 +26944,22 @@
                 <a:ea typeface="Arial" pitchFamily="34" charset="-122"/>
                 <a:cs typeface="Arial" pitchFamily="34" charset="-120"/>
               </a:rPr>
-              <a:t>ANALOG</a:t>
-            </a:r>
-            <a:endParaRPr lang="en-US" sz="1100" dirty="0"/>
-          </a:p>
-        </p:txBody>
-      </p:sp>
-      <p:sp>
-        <p:nvSpPr>
-          <p:cNvPr id="31" name="Text 29"/>
-          <p:cNvSpPr/>
-          <p:nvPr/>
-        </p:nvSpPr>
-        <p:spPr>
-          <a:xfrm>
-            <a:off x="4645152" y="3017520"/>
-            <a:ext cx="1947672" cy="502920"/>
+              <a:t>PROCESSORS</a:t>
+            </a:r>
+            <a:endParaRPr lang="en-US" sz="1000" dirty="0"/>
+          </a:p>
+        </p:txBody>
+      </p:sp>
+      <p:sp>
+        <p:nvSpPr>
+          <p:cNvPr id="35" name="Text 33"/>
+          <p:cNvSpPr/>
+          <p:nvPr/>
+        </p:nvSpPr>
+        <p:spPr>
+          <a:xfrm>
+            <a:off x="6035040" y="2770632"/>
+            <a:ext cx="2651760" cy="292608"/>
           </a:xfrm>
           <a:prstGeom prst="rect">
             <a:avLst/>
@@ -26646,124 +26975,60 @@
               <a:buNone/>
             </a:pPr>
             <a:r>
-              <a:rPr lang="en-US" sz="2400" b="1" dirty="0">
-                <a:solidFill>
-                  <a:srgbClr val="008B8B"/>
+              <a:rPr lang="en-US" sz="1700" b="1" dirty="0">
+                <a:solidFill>
+                  <a:srgbClr val="000000"/>
                 </a:solidFill>
                 <a:latin typeface="Arial Black" pitchFamily="34" charset="0"/>
                 <a:ea typeface="Arial Black" pitchFamily="34" charset="-122"/>
                 <a:cs typeface="Arial Black" pitchFamily="34" charset="-120"/>
               </a:rPr>
-              <a:t>≈</a:t>
-            </a:r>
-            <a:endParaRPr lang="en-US" sz="2400" dirty="0"/>
-          </a:p>
-        </p:txBody>
-      </p:sp>
-      <p:sp>
-        <p:nvSpPr>
-          <p:cNvPr id="32" name="Text 30"/>
-          <p:cNvSpPr/>
-          <p:nvPr/>
-        </p:nvSpPr>
-        <p:spPr>
-          <a:xfrm>
-            <a:off x="4645152" y="3566160"/>
-            <a:ext cx="1947672" cy="320040"/>
-          </a:xfrm>
-          <a:prstGeom prst="rect">
-            <a:avLst/>
-          </a:prstGeom>
-          <a:noFill/>
-          <a:ln/>
-        </p:spPr>
-        <p:txBody>
-          <a:bodyPr wrap="square" lIns="0" tIns="0" rIns="0" bIns="0" rtlCol="0" anchor="ctr"/>
-          <a:lstStyle/>
-          <a:p>
+              <a:t>$107B</a:t>
+            </a:r>
             <a:pPr algn="ctr" indent="0" marL="0">
               <a:buNone/>
             </a:pPr>
             <a:r>
-              <a:rPr lang="en-US" sz="1800" b="1" dirty="0">
-                <a:solidFill>
-                  <a:srgbClr val="000000"/>
-                </a:solidFill>
-                <a:latin typeface="Arial Black" pitchFamily="34" charset="0"/>
-                <a:ea typeface="Arial Black" pitchFamily="34" charset="-122"/>
-                <a:cs typeface="Arial Black" pitchFamily="34" charset="-120"/>
-              </a:rPr>
-              <a:t>$95B</a:t>
-            </a:r>
-            <a:endParaRPr lang="en-US" sz="1800" dirty="0"/>
-          </a:p>
-        </p:txBody>
-      </p:sp>
-      <p:sp>
-        <p:nvSpPr>
-          <p:cNvPr id="33" name="Text 31"/>
-          <p:cNvSpPr/>
-          <p:nvPr/>
-        </p:nvSpPr>
-        <p:spPr>
-          <a:xfrm>
-            <a:off x="4645152" y="3858768"/>
-            <a:ext cx="1947672" cy="182880"/>
-          </a:xfrm>
-          <a:prstGeom prst="rect">
-            <a:avLst/>
-          </a:prstGeom>
-          <a:noFill/>
-          <a:ln/>
-        </p:spPr>
-        <p:txBody>
-          <a:bodyPr wrap="square" lIns="0" tIns="0" rIns="0" bIns="0" rtlCol="0" anchor="ctr"/>
+              <a:rPr lang="en-US" sz="1100" dirty="0">
+                <a:solidFill>
+                  <a:srgbClr val="666666"/>
+                </a:solidFill>
+                <a:latin typeface="Arial" pitchFamily="34" charset="0"/>
+                <a:ea typeface="Arial" pitchFamily="34" charset="-122"/>
+                <a:cs typeface="Arial" pitchFamily="34" charset="-120"/>
+              </a:rPr>
+              <a:t>   11%</a:t>
+            </a:r>
+            <a:endParaRPr lang="en-US" sz="1700" dirty="0"/>
+          </a:p>
+        </p:txBody>
+      </p:sp>
+      <p:sp>
+        <p:nvSpPr>
+          <p:cNvPr id="36" name="Text 34"/>
+          <p:cNvSpPr/>
+          <p:nvPr/>
+        </p:nvSpPr>
+        <p:spPr>
+          <a:xfrm>
+            <a:off x="6163056" y="3136392"/>
+            <a:ext cx="2395728" cy="384048"/>
+          </a:xfrm>
+          <a:prstGeom prst="rect">
+            <a:avLst/>
+          </a:prstGeom>
+          <a:noFill/>
+          <a:ln/>
+        </p:spPr>
+        <p:txBody>
+          <a:bodyPr wrap="square" lIns="0" tIns="0" rIns="0" bIns="0" rtlCol="0" anchor="t"/>
           <a:lstStyle/>
           <a:p>
             <a:pPr algn="ctr" indent="0" marL="0">
               <a:buNone/>
             </a:pPr>
             <a:r>
-              <a:rPr lang="en-US" sz="850" dirty="0">
-                <a:solidFill>
-                  <a:srgbClr val="666666"/>
-                </a:solidFill>
-                <a:latin typeface="Arial" pitchFamily="34" charset="0"/>
-                <a:ea typeface="Arial" pitchFamily="34" charset="-122"/>
-                <a:cs typeface="Arial" pitchFamily="34" charset="-120"/>
-              </a:rPr>
-              <a:t>10% of market</a:t>
-            </a:r>
-            <a:endParaRPr lang="en-US" sz="850" dirty="0"/>
-          </a:p>
-        </p:txBody>
-      </p:sp>
-      <p:sp>
-        <p:nvSpPr>
-          <p:cNvPr id="34" name="Text 32"/>
-          <p:cNvSpPr/>
-          <p:nvPr/>
-        </p:nvSpPr>
-        <p:spPr>
-          <a:xfrm>
-            <a:off x="4736592" y="4114800"/>
-            <a:ext cx="1764792" cy="457200"/>
-          </a:xfrm>
-          <a:prstGeom prst="rect">
-            <a:avLst/>
-          </a:prstGeom>
-          <a:noFill/>
-          <a:ln/>
-        </p:spPr>
-        <p:txBody>
-          <a:bodyPr wrap="square" lIns="0" tIns="0" rIns="0" bIns="0" rtlCol="0" anchor="t"/>
-          <a:lstStyle/>
-          <a:p>
-            <a:pPr algn="ctr" indent="0" marL="0">
-              <a:buNone/>
-            </a:pPr>
-            <a:r>
-              <a:rPr lang="en-US" sz="950" dirty="0">
+              <a:rPr lang="en-US" sz="900" dirty="0">
                 <a:solidFill>
                   <a:srgbClr val="333333"/>
                 </a:solidFill>
@@ -26771,22 +27036,22 @@
                 <a:ea typeface="Arial" pitchFamily="34" charset="-122"/>
                 <a:cs typeface="Arial" pitchFamily="34" charset="-120"/>
               </a:rPr>
-              <a:t>Connects to the real world. Power, RF.</a:t>
-            </a:r>
-            <a:endParaRPr lang="en-US" sz="950" dirty="0"/>
-          </a:p>
-        </p:txBody>
-      </p:sp>
-      <p:sp>
-        <p:nvSpPr>
-          <p:cNvPr id="35" name="Shape 33"/>
-          <p:cNvSpPr/>
-          <p:nvPr/>
-        </p:nvSpPr>
-        <p:spPr>
-          <a:xfrm>
-            <a:off x="4828032" y="4590288"/>
-            <a:ext cx="1581912" cy="0"/>
+              <a:t>CPUs and application processors — general-purpose silicon in phones and PCs</a:t>
+            </a:r>
+            <a:endParaRPr lang="en-US" sz="900" dirty="0"/>
+          </a:p>
+        </p:txBody>
+      </p:sp>
+      <p:sp>
+        <p:nvSpPr>
+          <p:cNvPr id="37" name="Shape 35"/>
+          <p:cNvSpPr/>
+          <p:nvPr/>
+        </p:nvSpPr>
+        <p:spPr>
+          <a:xfrm>
+            <a:off x="6217920" y="3483864"/>
+            <a:ext cx="2286000" cy="0"/>
           </a:xfrm>
           <a:prstGeom prst="line">
             <a:avLst/>
@@ -26802,30 +27067,30 @@
       </p:sp>
       <p:sp>
         <p:nvSpPr>
-          <p:cNvPr id="36" name="Text 34"/>
-          <p:cNvSpPr/>
-          <p:nvPr/>
-        </p:nvSpPr>
-        <p:spPr>
-          <a:xfrm>
-            <a:off x="4736592" y="4663440"/>
-            <a:ext cx="1764792" cy="274320"/>
-          </a:xfrm>
-          <a:prstGeom prst="rect">
-            <a:avLst/>
-          </a:prstGeom>
-          <a:noFill/>
-          <a:ln/>
-        </p:spPr>
-        <p:txBody>
-          <a:bodyPr wrap="square" lIns="0" tIns="0" rIns="0" bIns="0" rtlCol="0" anchor="t"/>
+          <p:cNvPr id="38" name="Text 36"/>
+          <p:cNvSpPr/>
+          <p:nvPr/>
+        </p:nvSpPr>
+        <p:spPr>
+          <a:xfrm>
+            <a:off x="6035040" y="3502152"/>
+            <a:ext cx="2651760" cy="201168"/>
+          </a:xfrm>
+          <a:prstGeom prst="rect">
+            <a:avLst/>
+          </a:prstGeom>
+          <a:noFill/>
+          <a:ln/>
+        </p:spPr>
+        <p:txBody>
+          <a:bodyPr wrap="square" lIns="0" tIns="0" rIns="0" bIns="0" rtlCol="0" anchor="ctr"/>
           <a:lstStyle/>
           <a:p>
             <a:pPr algn="ctr" indent="0" marL="0">
               <a:buNone/>
             </a:pPr>
             <a:r>
-              <a:rPr lang="en-US" sz="800" i="1" dirty="0">
+              <a:rPr lang="en-US" sz="750" i="1" dirty="0">
                 <a:solidFill>
                   <a:srgbClr val="666666"/>
                 </a:solidFill>
@@ -26833,22 +27098,22 @@
                 <a:ea typeface="Arial" pitchFamily="34" charset="-122"/>
                 <a:cs typeface="Arial" pitchFamily="34" charset="-120"/>
               </a:rPr>
-              <a:t>TI · Analog Devices · Infineon</a:t>
-            </a:r>
-            <a:endParaRPr lang="en-US" sz="800" dirty="0"/>
-          </a:p>
-        </p:txBody>
-      </p:sp>
-      <p:sp>
-        <p:nvSpPr>
-          <p:cNvPr id="37" name="Shape 35"/>
-          <p:cNvSpPr/>
-          <p:nvPr/>
-        </p:nvSpPr>
-        <p:spPr>
-          <a:xfrm>
-            <a:off x="6739128" y="2560320"/>
-            <a:ext cx="1947672" cy="2423160"/>
+              <a:t>Intel · AMD · Apple · Qualcomm</a:t>
+            </a:r>
+            <a:endParaRPr lang="en-US" sz="750" dirty="0"/>
+          </a:p>
+        </p:txBody>
+      </p:sp>
+      <p:sp>
+        <p:nvSpPr>
+          <p:cNvPr id="39" name="Shape 37"/>
+          <p:cNvSpPr/>
+          <p:nvPr/>
+        </p:nvSpPr>
+        <p:spPr>
+          <a:xfrm>
+            <a:off x="457200" y="3831336"/>
+            <a:ext cx="2651760" cy="1316736"/>
           </a:xfrm>
           <a:prstGeom prst="rect">
             <a:avLst/>
@@ -26866,14 +27131,500 @@
       </p:sp>
       <p:sp>
         <p:nvSpPr>
-          <p:cNvPr id="38" name="Shape 36"/>
-          <p:cNvSpPr/>
-          <p:nvPr/>
-        </p:nvSpPr>
-        <p:spPr>
-          <a:xfrm>
-            <a:off x="6739128" y="2560320"/>
-            <a:ext cx="1947672" cy="365760"/>
+          <p:cNvPr id="40" name="Shape 38"/>
+          <p:cNvSpPr/>
+          <p:nvPr/>
+        </p:nvSpPr>
+        <p:spPr>
+          <a:xfrm>
+            <a:off x="457200" y="3831336"/>
+            <a:ext cx="2651760" cy="274320"/>
+          </a:xfrm>
+          <a:prstGeom prst="rect">
+            <a:avLst/>
+          </a:prstGeom>
+          <a:solidFill>
+            <a:srgbClr val="051A3D"/>
+          </a:solidFill>
+          <a:ln w="12700">
+            <a:solidFill>
+              <a:srgbClr val="051A3D"/>
+            </a:solidFill>
+            <a:prstDash val="solid"/>
+          </a:ln>
+        </p:spPr>
+      </p:sp>
+      <p:sp>
+        <p:nvSpPr>
+          <p:cNvPr id="41" name="Text 39"/>
+          <p:cNvSpPr/>
+          <p:nvPr/>
+        </p:nvSpPr>
+        <p:spPr>
+          <a:xfrm>
+            <a:off x="457200" y="3831336"/>
+            <a:ext cx="2651760" cy="274320"/>
+          </a:xfrm>
+          <a:prstGeom prst="rect">
+            <a:avLst/>
+          </a:prstGeom>
+          <a:noFill/>
+          <a:ln/>
+        </p:spPr>
+        <p:txBody>
+          <a:bodyPr wrap="square" lIns="0" tIns="0" rIns="0" bIns="0" rtlCol="0" anchor="ctr"/>
+          <a:lstStyle/>
+          <a:p>
+            <a:pPr algn="ctr" indent="0" marL="0">
+              <a:buNone/>
+            </a:pPr>
+            <a:r>
+              <a:rPr lang="en-US" sz="1000" b="1" spc="200" kern="0" dirty="0">
+                <a:solidFill>
+                  <a:srgbClr val="FFFFFF"/>
+                </a:solidFill>
+                <a:latin typeface="Arial" pitchFamily="34" charset="0"/>
+                <a:ea typeface="Arial" pitchFamily="34" charset="-122"/>
+                <a:cs typeface="Arial" pitchFamily="34" charset="-120"/>
+              </a:rPr>
+              <a:t>ANALOG</a:t>
+            </a:r>
+            <a:endParaRPr lang="en-US" sz="1000" dirty="0"/>
+          </a:p>
+        </p:txBody>
+      </p:sp>
+      <p:sp>
+        <p:nvSpPr>
+          <p:cNvPr id="42" name="Text 40"/>
+          <p:cNvSpPr/>
+          <p:nvPr/>
+        </p:nvSpPr>
+        <p:spPr>
+          <a:xfrm>
+            <a:off x="457200" y="4178808"/>
+            <a:ext cx="2651760" cy="292608"/>
+          </a:xfrm>
+          <a:prstGeom prst="rect">
+            <a:avLst/>
+          </a:prstGeom>
+          <a:noFill/>
+          <a:ln/>
+        </p:spPr>
+        <p:txBody>
+          <a:bodyPr wrap="square" lIns="0" tIns="0" rIns="0" bIns="0" rtlCol="0" anchor="ctr"/>
+          <a:lstStyle/>
+          <a:p>
+            <a:pPr algn="ctr" indent="0" marL="0">
+              <a:buNone/>
+            </a:pPr>
+            <a:r>
+              <a:rPr lang="en-US" sz="1700" b="1" dirty="0">
+                <a:solidFill>
+                  <a:srgbClr val="000000"/>
+                </a:solidFill>
+                <a:latin typeface="Arial Black" pitchFamily="34" charset="0"/>
+                <a:ea typeface="Arial Black" pitchFamily="34" charset="-122"/>
+                <a:cs typeface="Arial Black" pitchFamily="34" charset="-120"/>
+              </a:rPr>
+              <a:t>$98B</a:t>
+            </a:r>
+            <a:pPr algn="ctr" indent="0" marL="0">
+              <a:buNone/>
+            </a:pPr>
+            <a:r>
+              <a:rPr lang="en-US" sz="1100" dirty="0">
+                <a:solidFill>
+                  <a:srgbClr val="666666"/>
+                </a:solidFill>
+                <a:latin typeface="Arial" pitchFamily="34" charset="0"/>
+                <a:ea typeface="Arial" pitchFamily="34" charset="-122"/>
+                <a:cs typeface="Arial" pitchFamily="34" charset="-120"/>
+              </a:rPr>
+              <a:t>   10%</a:t>
+            </a:r>
+            <a:endParaRPr lang="en-US" sz="1700" dirty="0"/>
+          </a:p>
+        </p:txBody>
+      </p:sp>
+      <p:sp>
+        <p:nvSpPr>
+          <p:cNvPr id="43" name="Text 41"/>
+          <p:cNvSpPr/>
+          <p:nvPr/>
+        </p:nvSpPr>
+        <p:spPr>
+          <a:xfrm>
+            <a:off x="585216" y="4544568"/>
+            <a:ext cx="2395728" cy="384048"/>
+          </a:xfrm>
+          <a:prstGeom prst="rect">
+            <a:avLst/>
+          </a:prstGeom>
+          <a:noFill/>
+          <a:ln/>
+        </p:spPr>
+        <p:txBody>
+          <a:bodyPr wrap="square" lIns="0" tIns="0" rIns="0" bIns="0" rtlCol="0" anchor="t"/>
+          <a:lstStyle/>
+          <a:p>
+            <a:pPr algn="ctr" indent="0" marL="0">
+              <a:buNone/>
+            </a:pPr>
+            <a:r>
+              <a:rPr lang="en-US" sz="900" dirty="0">
+                <a:solidFill>
+                  <a:srgbClr val="333333"/>
+                </a:solidFill>
+                <a:latin typeface="Arial" pitchFamily="34" charset="0"/>
+                <a:ea typeface="Arial" pitchFamily="34" charset="-122"/>
+                <a:cs typeface="Arial" pitchFamily="34" charset="-120"/>
+              </a:rPr>
+              <a:t>Power management, RF, data converters — the bridge between silicon and the real world</a:t>
+            </a:r>
+            <a:endParaRPr lang="en-US" sz="900" dirty="0"/>
+          </a:p>
+        </p:txBody>
+      </p:sp>
+      <p:sp>
+        <p:nvSpPr>
+          <p:cNvPr id="44" name="Shape 42"/>
+          <p:cNvSpPr/>
+          <p:nvPr/>
+        </p:nvSpPr>
+        <p:spPr>
+          <a:xfrm>
+            <a:off x="640080" y="4892040"/>
+            <a:ext cx="2286000" cy="0"/>
+          </a:xfrm>
+          <a:prstGeom prst="line">
+            <a:avLst/>
+          </a:prstGeom>
+          <a:noFill/>
+          <a:ln w="6350">
+            <a:solidFill>
+              <a:srgbClr val="E5E5E5"/>
+            </a:solidFill>
+            <a:prstDash val="solid"/>
+          </a:ln>
+        </p:spPr>
+      </p:sp>
+      <p:sp>
+        <p:nvSpPr>
+          <p:cNvPr id="45" name="Text 43"/>
+          <p:cNvSpPr/>
+          <p:nvPr/>
+        </p:nvSpPr>
+        <p:spPr>
+          <a:xfrm>
+            <a:off x="457200" y="4910328"/>
+            <a:ext cx="2651760" cy="201168"/>
+          </a:xfrm>
+          <a:prstGeom prst="rect">
+            <a:avLst/>
+          </a:prstGeom>
+          <a:noFill/>
+          <a:ln/>
+        </p:spPr>
+        <p:txBody>
+          <a:bodyPr wrap="square" lIns="0" tIns="0" rIns="0" bIns="0" rtlCol="0" anchor="ctr"/>
+          <a:lstStyle/>
+          <a:p>
+            <a:pPr algn="ctr" indent="0" marL="0">
+              <a:buNone/>
+            </a:pPr>
+            <a:r>
+              <a:rPr lang="en-US" sz="750" i="1" dirty="0">
+                <a:solidFill>
+                  <a:srgbClr val="666666"/>
+                </a:solidFill>
+                <a:latin typeface="Arial" pitchFamily="34" charset="0"/>
+                <a:ea typeface="Arial" pitchFamily="34" charset="-122"/>
+                <a:cs typeface="Arial" pitchFamily="34" charset="-120"/>
+              </a:rPr>
+              <a:t>TI · Analog Devices · Infineon</a:t>
+            </a:r>
+            <a:endParaRPr lang="en-US" sz="750" dirty="0"/>
+          </a:p>
+        </p:txBody>
+      </p:sp>
+      <p:sp>
+        <p:nvSpPr>
+          <p:cNvPr id="46" name="Shape 44"/>
+          <p:cNvSpPr/>
+          <p:nvPr/>
+        </p:nvSpPr>
+        <p:spPr>
+          <a:xfrm>
+            <a:off x="3246120" y="3831336"/>
+            <a:ext cx="2651760" cy="1316736"/>
+          </a:xfrm>
+          <a:prstGeom prst="rect">
+            <a:avLst/>
+          </a:prstGeom>
+          <a:solidFill>
+            <a:srgbClr val="F9F9F9"/>
+          </a:solidFill>
+          <a:ln w="6350">
+            <a:solidFill>
+              <a:srgbClr val="E5E5E5"/>
+            </a:solidFill>
+            <a:prstDash val="solid"/>
+          </a:ln>
+        </p:spPr>
+      </p:sp>
+      <p:sp>
+        <p:nvSpPr>
+          <p:cNvPr id="47" name="Shape 45"/>
+          <p:cNvSpPr/>
+          <p:nvPr/>
+        </p:nvSpPr>
+        <p:spPr>
+          <a:xfrm>
+            <a:off x="3246120" y="3831336"/>
+            <a:ext cx="2651760" cy="274320"/>
+          </a:xfrm>
+          <a:prstGeom prst="rect">
+            <a:avLst/>
+          </a:prstGeom>
+          <a:solidFill>
+            <a:srgbClr val="00A854"/>
+          </a:solidFill>
+          <a:ln w="12700">
+            <a:solidFill>
+              <a:srgbClr val="00A854"/>
+            </a:solidFill>
+            <a:prstDash val="solid"/>
+          </a:ln>
+        </p:spPr>
+      </p:sp>
+      <p:sp>
+        <p:nvSpPr>
+          <p:cNvPr id="48" name="Text 46"/>
+          <p:cNvSpPr/>
+          <p:nvPr/>
+        </p:nvSpPr>
+        <p:spPr>
+          <a:xfrm>
+            <a:off x="3246120" y="3831336"/>
+            <a:ext cx="2651760" cy="274320"/>
+          </a:xfrm>
+          <a:prstGeom prst="rect">
+            <a:avLst/>
+          </a:prstGeom>
+          <a:noFill/>
+          <a:ln/>
+        </p:spPr>
+        <p:txBody>
+          <a:bodyPr wrap="square" lIns="0" tIns="0" rIns="0" bIns="0" rtlCol="0" anchor="ctr"/>
+          <a:lstStyle/>
+          <a:p>
+            <a:pPr algn="ctr" indent="0" marL="0">
+              <a:buNone/>
+            </a:pPr>
+            <a:r>
+              <a:rPr lang="en-US" sz="1000" b="1" spc="200" kern="0" dirty="0">
+                <a:solidFill>
+                  <a:srgbClr val="FFFFFF"/>
+                </a:solidFill>
+                <a:latin typeface="Arial" pitchFamily="34" charset="0"/>
+                <a:ea typeface="Arial" pitchFamily="34" charset="-122"/>
+                <a:cs typeface="Arial" pitchFamily="34" charset="-120"/>
+              </a:rPr>
+              <a:t>SENSORS + OPTO</a:t>
+            </a:r>
+            <a:endParaRPr lang="en-US" sz="1000" dirty="0"/>
+          </a:p>
+        </p:txBody>
+      </p:sp>
+      <p:sp>
+        <p:nvSpPr>
+          <p:cNvPr id="49" name="Text 47"/>
+          <p:cNvSpPr/>
+          <p:nvPr/>
+        </p:nvSpPr>
+        <p:spPr>
+          <a:xfrm>
+            <a:off x="3246120" y="4178808"/>
+            <a:ext cx="2651760" cy="292608"/>
+          </a:xfrm>
+          <a:prstGeom prst="rect">
+            <a:avLst/>
+          </a:prstGeom>
+          <a:noFill/>
+          <a:ln/>
+        </p:spPr>
+        <p:txBody>
+          <a:bodyPr wrap="square" lIns="0" tIns="0" rIns="0" bIns="0" rtlCol="0" anchor="ctr"/>
+          <a:lstStyle/>
+          <a:p>
+            <a:pPr algn="ctr" indent="0" marL="0">
+              <a:buNone/>
+            </a:pPr>
+            <a:r>
+              <a:rPr lang="en-US" sz="1700" b="1" dirty="0">
+                <a:solidFill>
+                  <a:srgbClr val="000000"/>
+                </a:solidFill>
+                <a:latin typeface="Arial Black" pitchFamily="34" charset="0"/>
+                <a:ea typeface="Arial Black" pitchFamily="34" charset="-122"/>
+                <a:cs typeface="Arial Black" pitchFamily="34" charset="-120"/>
+              </a:rPr>
+              <a:t>$58B</a:t>
+            </a:r>
+            <a:pPr algn="ctr" indent="0" marL="0">
+              <a:buNone/>
+            </a:pPr>
+            <a:r>
+              <a:rPr lang="en-US" sz="1100" dirty="0">
+                <a:solidFill>
+                  <a:srgbClr val="666666"/>
+                </a:solidFill>
+                <a:latin typeface="Arial" pitchFamily="34" charset="0"/>
+                <a:ea typeface="Arial" pitchFamily="34" charset="-122"/>
+                <a:cs typeface="Arial" pitchFamily="34" charset="-120"/>
+              </a:rPr>
+              <a:t>   6%</a:t>
+            </a:r>
+            <a:endParaRPr lang="en-US" sz="1700" dirty="0"/>
+          </a:p>
+        </p:txBody>
+      </p:sp>
+      <p:sp>
+        <p:nvSpPr>
+          <p:cNvPr id="50" name="Text 48"/>
+          <p:cNvSpPr/>
+          <p:nvPr/>
+        </p:nvSpPr>
+        <p:spPr>
+          <a:xfrm>
+            <a:off x="3374136" y="4544568"/>
+            <a:ext cx="2395728" cy="384048"/>
+          </a:xfrm>
+          <a:prstGeom prst="rect">
+            <a:avLst/>
+          </a:prstGeom>
+          <a:noFill/>
+          <a:ln/>
+        </p:spPr>
+        <p:txBody>
+          <a:bodyPr wrap="square" lIns="0" tIns="0" rIns="0" bIns="0" rtlCol="0" anchor="t"/>
+          <a:lstStyle/>
+          <a:p>
+            <a:pPr algn="ctr" indent="0" marL="0">
+              <a:buNone/>
+            </a:pPr>
+            <a:r>
+              <a:rPr lang="en-US" sz="900" dirty="0">
+                <a:solidFill>
+                  <a:srgbClr val="333333"/>
+                </a:solidFill>
+                <a:latin typeface="Arial" pitchFamily="34" charset="0"/>
+                <a:ea typeface="Arial" pitchFamily="34" charset="-122"/>
+                <a:cs typeface="Arial" pitchFamily="34" charset="-120"/>
+              </a:rPr>
+              <a:t>CMOS image sensors, MEMS, LEDs, photonics — how chips see, hear, and communicate</a:t>
+            </a:r>
+            <a:endParaRPr lang="en-US" sz="900" dirty="0"/>
+          </a:p>
+        </p:txBody>
+      </p:sp>
+      <p:sp>
+        <p:nvSpPr>
+          <p:cNvPr id="51" name="Shape 49"/>
+          <p:cNvSpPr/>
+          <p:nvPr/>
+        </p:nvSpPr>
+        <p:spPr>
+          <a:xfrm>
+            <a:off x="3429000" y="4892040"/>
+            <a:ext cx="2286000" cy="0"/>
+          </a:xfrm>
+          <a:prstGeom prst="line">
+            <a:avLst/>
+          </a:prstGeom>
+          <a:noFill/>
+          <a:ln w="6350">
+            <a:solidFill>
+              <a:srgbClr val="E5E5E5"/>
+            </a:solidFill>
+            <a:prstDash val="solid"/>
+          </a:ln>
+        </p:spPr>
+      </p:sp>
+      <p:sp>
+        <p:nvSpPr>
+          <p:cNvPr id="52" name="Text 50"/>
+          <p:cNvSpPr/>
+          <p:nvPr/>
+        </p:nvSpPr>
+        <p:spPr>
+          <a:xfrm>
+            <a:off x="3246120" y="4910328"/>
+            <a:ext cx="2651760" cy="201168"/>
+          </a:xfrm>
+          <a:prstGeom prst="rect">
+            <a:avLst/>
+          </a:prstGeom>
+          <a:noFill/>
+          <a:ln/>
+        </p:spPr>
+        <p:txBody>
+          <a:bodyPr wrap="square" lIns="0" tIns="0" rIns="0" bIns="0" rtlCol="0" anchor="ctr"/>
+          <a:lstStyle/>
+          <a:p>
+            <a:pPr algn="ctr" indent="0" marL="0">
+              <a:buNone/>
+            </a:pPr>
+            <a:r>
+              <a:rPr lang="en-US" sz="750" i="1" dirty="0">
+                <a:solidFill>
+                  <a:srgbClr val="666666"/>
+                </a:solidFill>
+                <a:latin typeface="Arial" pitchFamily="34" charset="0"/>
+                <a:ea typeface="Arial" pitchFamily="34" charset="-122"/>
+                <a:cs typeface="Arial" pitchFamily="34" charset="-120"/>
+              </a:rPr>
+              <a:t>Sony · Samsung · STMicro</a:t>
+            </a:r>
+            <a:endParaRPr lang="en-US" sz="750" dirty="0"/>
+          </a:p>
+        </p:txBody>
+      </p:sp>
+      <p:sp>
+        <p:nvSpPr>
+          <p:cNvPr id="53" name="Shape 51"/>
+          <p:cNvSpPr/>
+          <p:nvPr/>
+        </p:nvSpPr>
+        <p:spPr>
+          <a:xfrm>
+            <a:off x="6035040" y="3831336"/>
+            <a:ext cx="2651760" cy="1316736"/>
+          </a:xfrm>
+          <a:prstGeom prst="rect">
+            <a:avLst/>
+          </a:prstGeom>
+          <a:solidFill>
+            <a:srgbClr val="F9F9F9"/>
+          </a:solidFill>
+          <a:ln w="6350">
+            <a:solidFill>
+              <a:srgbClr val="E5E5E5"/>
+            </a:solidFill>
+            <a:prstDash val="solid"/>
+          </a:ln>
+        </p:spPr>
+      </p:sp>
+      <p:sp>
+        <p:nvSpPr>
+          <p:cNvPr id="54" name="Shape 52"/>
+          <p:cNvSpPr/>
+          <p:nvPr/>
+        </p:nvSpPr>
+        <p:spPr>
+          <a:xfrm>
+            <a:off x="6035040" y="3831336"/>
+            <a:ext cx="2651760" cy="274320"/>
           </a:xfrm>
           <a:prstGeom prst="rect">
             <a:avLst/>
@@ -26891,14 +27642,14 @@
       </p:sp>
       <p:sp>
         <p:nvSpPr>
-          <p:cNvPr id="39" name="Text 37"/>
-          <p:cNvSpPr/>
-          <p:nvPr/>
-        </p:nvSpPr>
-        <p:spPr>
-          <a:xfrm>
-            <a:off x="6739128" y="2560320"/>
-            <a:ext cx="1947672" cy="365760"/>
+          <p:cNvPr id="55" name="Text 53"/>
+          <p:cNvSpPr/>
+          <p:nvPr/>
+        </p:nvSpPr>
+        <p:spPr>
+          <a:xfrm>
+            <a:off x="6035040" y="3831336"/>
+            <a:ext cx="2651760" cy="274320"/>
           </a:xfrm>
           <a:prstGeom prst="rect">
             <a:avLst/>
@@ -26914,7 +27665,7 @@
               <a:buNone/>
             </a:pPr>
             <a:r>
-              <a:rPr lang="en-US" sz="1100" b="1" spc="300" kern="0" dirty="0">
+              <a:rPr lang="en-US" sz="1000" b="1" spc="200" kern="0" dirty="0">
                 <a:solidFill>
                   <a:srgbClr val="FFFFFF"/>
                 </a:solidFill>
@@ -26922,22 +27673,22 @@
                 <a:ea typeface="Arial" pitchFamily="34" charset="-122"/>
                 <a:cs typeface="Arial" pitchFamily="34" charset="-120"/>
               </a:rPr>
-              <a:t>OTHER</a:t>
-            </a:r>
-            <a:endParaRPr lang="en-US" sz="1100" dirty="0"/>
-          </a:p>
-        </p:txBody>
-      </p:sp>
-      <p:sp>
-        <p:nvSpPr>
-          <p:cNvPr id="40" name="Text 38"/>
-          <p:cNvSpPr/>
-          <p:nvPr/>
-        </p:nvSpPr>
-        <p:spPr>
-          <a:xfrm>
-            <a:off x="6739128" y="3017520"/>
-            <a:ext cx="1947672" cy="502920"/>
+              <a:t>DISCRETE + POWER</a:t>
+            </a:r>
+            <a:endParaRPr lang="en-US" sz="1000" dirty="0"/>
+          </a:p>
+        </p:txBody>
+      </p:sp>
+      <p:sp>
+        <p:nvSpPr>
+          <p:cNvPr id="56" name="Text 54"/>
+          <p:cNvSpPr/>
+          <p:nvPr/>
+        </p:nvSpPr>
+        <p:spPr>
+          <a:xfrm>
+            <a:off x="6035040" y="4178808"/>
+            <a:ext cx="2651760" cy="292608"/>
           </a:xfrm>
           <a:prstGeom prst="rect">
             <a:avLst/>
@@ -26953,124 +27704,60 @@
               <a:buNone/>
             </a:pPr>
             <a:r>
-              <a:rPr lang="en-US" sz="2400" b="1" dirty="0">
-                <a:solidFill>
-                  <a:srgbClr val="666666"/>
+              <a:rPr lang="en-US" sz="1700" b="1" dirty="0">
+                <a:solidFill>
+                  <a:srgbClr val="000000"/>
                 </a:solidFill>
                 <a:latin typeface="Arial Black" pitchFamily="34" charset="0"/>
                 <a:ea typeface="Arial Black" pitchFamily="34" charset="-122"/>
                 <a:cs typeface="Arial Black" pitchFamily="34" charset="-120"/>
               </a:rPr>
-              <a:t>•••</a:t>
-            </a:r>
-            <a:endParaRPr lang="en-US" sz="2400" dirty="0"/>
-          </a:p>
-        </p:txBody>
-      </p:sp>
-      <p:sp>
-        <p:nvSpPr>
-          <p:cNvPr id="41" name="Text 39"/>
-          <p:cNvSpPr/>
-          <p:nvPr/>
-        </p:nvSpPr>
-        <p:spPr>
-          <a:xfrm>
-            <a:off x="6739128" y="3566160"/>
-            <a:ext cx="1947672" cy="320040"/>
-          </a:xfrm>
-          <a:prstGeom prst="rect">
-            <a:avLst/>
-          </a:prstGeom>
-          <a:noFill/>
-          <a:ln/>
-        </p:spPr>
-        <p:txBody>
-          <a:bodyPr wrap="square" lIns="0" tIns="0" rIns="0" bIns="0" rtlCol="0" anchor="ctr"/>
-          <a:lstStyle/>
-          <a:p>
+              <a:t>$48B</a:t>
+            </a:r>
             <a:pPr algn="ctr" indent="0" marL="0">
               <a:buNone/>
             </a:pPr>
             <a:r>
-              <a:rPr lang="en-US" sz="1800" b="1" dirty="0">
-                <a:solidFill>
-                  <a:srgbClr val="000000"/>
-                </a:solidFill>
-                <a:latin typeface="Arial Black" pitchFamily="34" charset="0"/>
-                <a:ea typeface="Arial Black" pitchFamily="34" charset="-122"/>
-                <a:cs typeface="Arial Black" pitchFamily="34" charset="-120"/>
-              </a:rPr>
-              <a:t>$283B</a:t>
-            </a:r>
-            <a:endParaRPr lang="en-US" sz="1800" dirty="0"/>
-          </a:p>
-        </p:txBody>
-      </p:sp>
-      <p:sp>
-        <p:nvSpPr>
-          <p:cNvPr id="42" name="Text 40"/>
-          <p:cNvSpPr/>
-          <p:nvPr/>
-        </p:nvSpPr>
-        <p:spPr>
-          <a:xfrm>
-            <a:off x="6739128" y="3858768"/>
-            <a:ext cx="1947672" cy="182880"/>
-          </a:xfrm>
-          <a:prstGeom prst="rect">
-            <a:avLst/>
-          </a:prstGeom>
-          <a:noFill/>
-          <a:ln/>
-        </p:spPr>
-        <p:txBody>
-          <a:bodyPr wrap="square" lIns="0" tIns="0" rIns="0" bIns="0" rtlCol="0" anchor="ctr"/>
+              <a:rPr lang="en-US" sz="1100" dirty="0">
+                <a:solidFill>
+                  <a:srgbClr val="666666"/>
+                </a:solidFill>
+                <a:latin typeface="Arial" pitchFamily="34" charset="0"/>
+                <a:ea typeface="Arial" pitchFamily="34" charset="-122"/>
+                <a:cs typeface="Arial" pitchFamily="34" charset="-120"/>
+              </a:rPr>
+              <a:t>   5%</a:t>
+            </a:r>
+            <a:endParaRPr lang="en-US" sz="1700" dirty="0"/>
+          </a:p>
+        </p:txBody>
+      </p:sp>
+      <p:sp>
+        <p:nvSpPr>
+          <p:cNvPr id="57" name="Text 55"/>
+          <p:cNvSpPr/>
+          <p:nvPr/>
+        </p:nvSpPr>
+        <p:spPr>
+          <a:xfrm>
+            <a:off x="6163056" y="4544568"/>
+            <a:ext cx="2395728" cy="384048"/>
+          </a:xfrm>
+          <a:prstGeom prst="rect">
+            <a:avLst/>
+          </a:prstGeom>
+          <a:noFill/>
+          <a:ln/>
+        </p:spPr>
+        <p:txBody>
+          <a:bodyPr wrap="square" lIns="0" tIns="0" rIns="0" bIns="0" rtlCol="0" anchor="t"/>
           <a:lstStyle/>
           <a:p>
             <a:pPr algn="ctr" indent="0" marL="0">
               <a:buNone/>
             </a:pPr>
             <a:r>
-              <a:rPr lang="en-US" sz="850" dirty="0">
-                <a:solidFill>
-                  <a:srgbClr val="666666"/>
-                </a:solidFill>
-                <a:latin typeface="Arial" pitchFamily="34" charset="0"/>
-                <a:ea typeface="Arial" pitchFamily="34" charset="-122"/>
-                <a:cs typeface="Arial" pitchFamily="34" charset="-120"/>
-              </a:rPr>
-              <a:t>29% of market</a:t>
-            </a:r>
-            <a:endParaRPr lang="en-US" sz="850" dirty="0"/>
-          </a:p>
-        </p:txBody>
-      </p:sp>
-      <p:sp>
-        <p:nvSpPr>
-          <p:cNvPr id="43" name="Text 41"/>
-          <p:cNvSpPr/>
-          <p:nvPr/>
-        </p:nvSpPr>
-        <p:spPr>
-          <a:xfrm>
-            <a:off x="6830568" y="4114800"/>
-            <a:ext cx="1764792" cy="457200"/>
-          </a:xfrm>
-          <a:prstGeom prst="rect">
-            <a:avLst/>
-          </a:prstGeom>
-          <a:noFill/>
-          <a:ln/>
-        </p:spPr>
-        <p:txBody>
-          <a:bodyPr wrap="square" lIns="0" tIns="0" rIns="0" bIns="0" rtlCol="0" anchor="t"/>
-          <a:lstStyle/>
-          <a:p>
-            <a:pPr algn="ctr" indent="0" marL="0">
-              <a:buNone/>
-            </a:pPr>
-            <a:r>
-              <a:rPr lang="en-US" sz="950" dirty="0">
+              <a:rPr lang="en-US" sz="900" dirty="0">
                 <a:solidFill>
                   <a:srgbClr val="333333"/>
                 </a:solidFill>
@@ -27078,22 +27765,22 @@
                 <a:ea typeface="Arial" pitchFamily="34" charset="-122"/>
                 <a:cs typeface="Arial" pitchFamily="34" charset="-120"/>
               </a:rPr>
-              <a:t>Microcontrollers, sensors, discretes.</a:t>
-            </a:r>
-            <a:endParaRPr lang="en-US" sz="950" dirty="0"/>
-          </a:p>
-        </p:txBody>
-      </p:sp>
-      <p:sp>
-        <p:nvSpPr>
-          <p:cNvPr id="44" name="Shape 42"/>
-          <p:cNvSpPr/>
-          <p:nvPr/>
-        </p:nvSpPr>
-        <p:spPr>
-          <a:xfrm>
-            <a:off x="6922008" y="4590288"/>
-            <a:ext cx="1581912" cy="0"/>
+              <a:t>SiC, GaN, power transistors — heavy-current switching for EVs, grids, and industrial</a:t>
+            </a:r>
+            <a:endParaRPr lang="en-US" sz="900" dirty="0"/>
+          </a:p>
+        </p:txBody>
+      </p:sp>
+      <p:sp>
+        <p:nvSpPr>
+          <p:cNvPr id="58" name="Shape 56"/>
+          <p:cNvSpPr/>
+          <p:nvPr/>
+        </p:nvSpPr>
+        <p:spPr>
+          <a:xfrm>
+            <a:off x="6217920" y="4892040"/>
+            <a:ext cx="2286000" cy="0"/>
           </a:xfrm>
           <a:prstGeom prst="line">
             <a:avLst/>
@@ -27109,30 +27796,30 @@
       </p:sp>
       <p:sp>
         <p:nvSpPr>
-          <p:cNvPr id="45" name="Text 43"/>
-          <p:cNvSpPr/>
-          <p:nvPr/>
-        </p:nvSpPr>
-        <p:spPr>
-          <a:xfrm>
-            <a:off x="6830568" y="4663440"/>
-            <a:ext cx="1764792" cy="274320"/>
-          </a:xfrm>
-          <a:prstGeom prst="rect">
-            <a:avLst/>
-          </a:prstGeom>
-          <a:noFill/>
-          <a:ln/>
-        </p:spPr>
-        <p:txBody>
-          <a:bodyPr wrap="square" lIns="0" tIns="0" rIns="0" bIns="0" rtlCol="0" anchor="t"/>
+          <p:cNvPr id="59" name="Text 57"/>
+          <p:cNvSpPr/>
+          <p:nvPr/>
+        </p:nvSpPr>
+        <p:spPr>
+          <a:xfrm>
+            <a:off x="6035040" y="4910328"/>
+            <a:ext cx="2651760" cy="201168"/>
+          </a:xfrm>
+          <a:prstGeom prst="rect">
+            <a:avLst/>
+          </a:prstGeom>
+          <a:noFill/>
+          <a:ln/>
+        </p:spPr>
+        <p:txBody>
+          <a:bodyPr wrap="square" lIns="0" tIns="0" rIns="0" bIns="0" rtlCol="0" anchor="ctr"/>
           <a:lstStyle/>
           <a:p>
             <a:pPr algn="ctr" indent="0" marL="0">
               <a:buNone/>
             </a:pPr>
             <a:r>
-              <a:rPr lang="en-US" sz="800" i="1" dirty="0">
+              <a:rPr lang="en-US" sz="750" i="1" dirty="0">
                 <a:solidFill>
                   <a:srgbClr val="666666"/>
                 </a:solidFill>
@@ -27140,22 +27827,22 @@
                 <a:ea typeface="Arial" pitchFamily="34" charset="-122"/>
                 <a:cs typeface="Arial" pitchFamily="34" charset="-120"/>
               </a:rPr>
-              <a:t>Broadcom · Qualcomm · NXP</a:t>
-            </a:r>
-            <a:endParaRPr lang="en-US" sz="800" dirty="0"/>
-          </a:p>
-        </p:txBody>
-      </p:sp>
-      <p:sp>
-        <p:nvSpPr>
-          <p:cNvPr id="46" name="Shape 44"/>
-          <p:cNvSpPr/>
-          <p:nvPr/>
-        </p:nvSpPr>
-        <p:spPr>
-          <a:xfrm>
-            <a:off x="457200" y="5120640"/>
-            <a:ext cx="8229600" cy="548640"/>
+              <a:t>Infineon · ON Semi · Wolfspeed</a:t>
+            </a:r>
+            <a:endParaRPr lang="en-US" sz="750" dirty="0"/>
+          </a:p>
+        </p:txBody>
+      </p:sp>
+      <p:sp>
+        <p:nvSpPr>
+          <p:cNvPr id="60" name="Shape 58"/>
+          <p:cNvSpPr/>
+          <p:nvPr/>
+        </p:nvSpPr>
+        <p:spPr>
+          <a:xfrm>
+            <a:off x="457200" y="5257800"/>
+            <a:ext cx="8229600" cy="411480"/>
           </a:xfrm>
           <a:prstGeom prst="rect">
             <a:avLst/>
@@ -27173,14 +27860,14 @@
       </p:sp>
       <p:sp>
         <p:nvSpPr>
-          <p:cNvPr id="47" name="Text 45"/>
-          <p:cNvSpPr/>
-          <p:nvPr/>
-        </p:nvSpPr>
-        <p:spPr>
-          <a:xfrm>
-            <a:off x="640080" y="5120640"/>
-            <a:ext cx="7863840" cy="548640"/>
+          <p:cNvPr id="61" name="Text 59"/>
+          <p:cNvSpPr/>
+          <p:nvPr/>
+        </p:nvSpPr>
+        <p:spPr>
+          <a:xfrm>
+            <a:off x="640080" y="5257800"/>
+            <a:ext cx="7863840" cy="411480"/>
           </a:xfrm>
           <a:prstGeom prst="rect">
             <a:avLst/>
@@ -27196,7 +27883,7 @@
               <a:buNone/>
             </a:pPr>
             <a:r>
-              <a:rPr lang="en-US" sz="1250" b="1" dirty="0">
+              <a:rPr lang="en-US" sz="1200" b="1" dirty="0">
                 <a:solidFill>
                   <a:srgbClr val="000000"/>
                 </a:solidFill>
@@ -27204,15 +27891,15 @@
                 <a:ea typeface="Arial" pitchFamily="34" charset="-122"/>
                 <a:cs typeface="Arial" pitchFamily="34" charset="-120"/>
               </a:rPr>
-              <a:t>$975B total, +26% YoY. Logic + memory = ~$600B — tracking hyperscaler capex almost dollar-for-dollar.</a:t>
-            </a:r>
-            <a:endParaRPr lang="en-US" sz="1250" dirty="0"/>
-          </a:p>
-        </p:txBody>
-      </p:sp>
-      <p:sp>
-        <p:nvSpPr>
-          <p:cNvPr id="48" name="Text 46"/>
+              <a:t>Memory + logic = ~$666B, or 68% of the market — and where virtually every dollar of AI capex lands.</a:t>
+            </a:r>
+            <a:endParaRPr lang="en-US" sz="1200" dirty="0"/>
+          </a:p>
+        </p:txBody>
+      </p:sp>
+      <p:sp>
+        <p:nvSpPr>
+          <p:cNvPr id="62" name="Text 60"/>
           <p:cNvSpPr/>
           <p:nvPr/>
         </p:nvSpPr>
@@ -27243,7 +27930,7 @@
                 <a:ea typeface="Arial" pitchFamily="34" charset="-122"/>
                 <a:cs typeface="Arial" pitchFamily="34" charset="-120"/>
               </a:rPr>
-              <a:t>Sources: WSTS Fall 2025 forecast; SIA; company 10-Ks; TrendForce. Segment totals rounded; 'Other' combines micro + discrete + sensors.</a:t>
+              <a:t>Sources: WSTS Fall 2025 forecast ($975B 2026E); SIA market-structure breakdown; company 10-Ks; TrendForce memory data. Segment shares rounded.</a:t>
             </a:r>
             <a:endParaRPr lang="en-US" sz="700" dirty="0"/>
           </a:p>
@@ -27251,7 +27938,7 @@
       </p:sp>
       <p:sp>
         <p:nvSpPr>
-          <p:cNvPr id="49" name="Shape 47"/>
+          <p:cNvPr id="63" name="Shape 61"/>
           <p:cNvSpPr/>
           <p:nvPr/>
         </p:nvSpPr>
@@ -27276,7 +27963,7 @@
       </p:sp>
       <p:sp>
         <p:nvSpPr>
-          <p:cNvPr id="50" name="Text 48"/>
+          <p:cNvPr id="64" name="Text 62"/>
           <p:cNvSpPr/>
           <p:nvPr/>
         </p:nvSpPr>
@@ -27315,7 +28002,7 @@
       </p:sp>
       <p:sp>
         <p:nvSpPr>
-          <p:cNvPr id="51" name="Text 49"/>
+          <p:cNvPr id="65" name="Text 63"/>
           <p:cNvSpPr/>
           <p:nvPr/>
         </p:nvSpPr>

--- a/ai-markets-deck.pptx
+++ b/ai-markets-deck.pptx
@@ -9302,7 +9302,7 @@
                 <a:ea typeface="Arial" pitchFamily="34" charset="-122"/>
                 <a:cs typeface="Arial" pitchFamily="34" charset="-120"/>
               </a:rPr>
-              <a:t>IMAGE: Screenshot — dark-themed IDE with AI coworker editing code, orange accents</a:t>
+              <a:t>IMAGE: Screenshot — dark-mode IDE, AI agent editing Python code live, glowing orange cursor, 'Claude is editing' pill, streaming test output in a terminal pane, square framing</a:t>
             </a:r>
             <a:endParaRPr lang="en-US" sz="1000" dirty="0"/>
           </a:p>
@@ -14091,7 +14091,7 @@
                 <a:ea typeface="Arial" pitchFamily="34" charset="-122"/>
                 <a:cs typeface="Arial" pitchFamily="34" charset="-120"/>
               </a:rPr>
-              <a:t>IMAGE: Cinematic — bunny-suited techs on fab floor, orange photolith glow, tall aspect</a:t>
+              <a:t>IMAGE: Cinematic — two bunny-suited technicians in front of an EUV lithography tool, warm amber photolith glow, shallow DOF on a gloved hand at a control, stainless-steel cleanroom, near-square</a:t>
             </a:r>
             <a:endParaRPr lang="en-US" sz="1000" dirty="0"/>
           </a:p>
@@ -16265,7 +16265,7 @@
                 <a:ea typeface="Arial" pitchFamily="34" charset="-122"/>
                 <a:cs typeface="Arial" pitchFamily="34" charset="-120"/>
               </a:rPr>
-              <a:t>IMAGE: Photojournalism — 'STOP THE AI RACE' hand-lettered signs at a dusk rally, tall aspect</a:t>
+              <a:t>IMAGE: Photojournalism — 'STOP THE AI RACE' hand-lettered protest signs at a dusk rally, shoulder-height crowd POV, warm golden-hour sky, faces in shadow, signs in sharp focus, square</a:t>
             </a:r>
             <a:endParaRPr lang="en-US" sz="1000" dirty="0"/>
           </a:p>
@@ -17150,7 +17150,7 @@
                 <a:ea typeface="Arial" pitchFamily="34" charset="-122"/>
                 <a:cs typeface="Arial" pitchFamily="34" charset="-120"/>
               </a:rPr>
-              <a:t>IMAGE: Render — orbital data-center satellite with solar wings above Earth's limb at dawn</a:t>
+              <a:t>IMAGE: Render — modular orbital data-center satellite with 50-meter solar wings catching a violet tint, above Earth's dawn limb with atmospheric glow, deep indigo space, hyperrealistic Octane quality, slightly portrait</a:t>
             </a:r>
             <a:endParaRPr lang="en-US" sz="1000" dirty="0"/>
           </a:p>
@@ -18010,7 +18010,7 @@
                 <a:ea typeface="Arial" pitchFamily="34" charset="-122"/>
                 <a:cs typeface="Arial" pitchFamily="34" charset="-120"/>
               </a:rPr>
-              <a:t>IMAGE: Photo — humanoid robot mid-stride on a factory floor, warm work-light, motion blur</a:t>
+              <a:t>IMAGE: Panoramic photo — humanoid robot mid-stride on a factory floor, matte-white body with violet joint accents, motion blur on limbs, amber work-lights, a blurred human worker in a safety vest in the background</a:t>
             </a:r>
             <a:endParaRPr lang="en-US" sz="1000" dirty="0"/>
           </a:p>
@@ -20066,7 +20066,7 @@
                 <a:ea typeface="Arial" pitchFamily="34" charset="-122"/>
                 <a:cs typeface="Arial" pitchFamily="34" charset="-120"/>
               </a:rPr>
-              <a:t>IMAGE: Photo — Waymo robotaxi on a rainy city street at dusk, sensor pod lit, long exposure</a:t>
+              <a:t>IMAGE: Long-exposure photo — white minivan robotaxi with a violet-glowing roof lidar on a rainy dusk city street, red and white traffic light trails, wet asphalt reflecting neon storefronts, tall portrait</a:t>
             </a:r>
             <a:endParaRPr lang="en-US" sz="1000" dirty="0"/>
           </a:p>
@@ -20926,7 +20926,7 @@
                 <a:ea typeface="Arial" pitchFamily="34" charset="-122"/>
                 <a:cs typeface="Arial" pitchFamily="34" charset="-120"/>
               </a:rPr>
-              <a:t>IMAGE: Render — ribbon-diagram protein structure against graphite black, shallow DOF</a:t>
+              <a:t>IMAGE: Render — protein ribbon diagram in a violet-to-magenta-to-gold gradient on graphite black, razor-sharp front with softly-blurred back, faint electron-density mesh around the structure, no labels or annotations</a:t>
             </a:r>
             <a:endParaRPr lang="en-US" sz="1000" dirty="0"/>
           </a:p>
@@ -33171,7 +33171,7 @@
                 <a:ea typeface="Arial" pitchFamily="34" charset="-122"/>
                 <a:cs typeface="Arial" pitchFamily="34" charset="-120"/>
               </a:rPr>
-              <a:t>Silicon wafers etched with billions of microscopic switches. A handful of categories do very different jobs — and AI demand concentrates in just two.</a:t>
+              <a:t>Chips pass through four making stages before reaching six product markets. AI capex piles into just two categories — but flows through bottlenecks at every stage.</a:t>
             </a:r>
             <a:endParaRPr lang="en-US" sz="1350" dirty="0"/>
           </a:p>
@@ -33209,7 +33209,7 @@
         <p:spPr>
           <a:xfrm>
             <a:off x="457200" y="1691640"/>
-            <a:ext cx="8229600" cy="457200"/>
+            <a:ext cx="8229600" cy="777240"/>
           </a:xfrm>
           <a:prstGeom prst="rect">
             <a:avLst/>
@@ -33233,10 +33233,812 @@
         </p:nvSpPr>
         <p:spPr>
           <a:xfrm>
-            <a:off x="658368" y="1847088"/>
-            <a:ext cx="146304" cy="146304"/>
+            <a:off x="640080" y="1792224"/>
+            <a:ext cx="128016" cy="128016"/>
           </a:xfrm>
           <a:prstGeom prst="ellipse">
+            <a:avLst/>
+          </a:prstGeom>
+          <a:solidFill>
+            <a:srgbClr val="6B46C1"/>
+          </a:solidFill>
+          <a:ln w="12700">
+            <a:solidFill>
+              <a:srgbClr val="6B46C1"/>
+            </a:solidFill>
+            <a:prstDash val="solid"/>
+          </a:ln>
+        </p:spPr>
+      </p:sp>
+      <p:sp>
+        <p:nvSpPr>
+          <p:cNvPr id="9" name="Text 7"/>
+          <p:cNvSpPr/>
+          <p:nvPr/>
+        </p:nvSpPr>
+        <p:spPr>
+          <a:xfrm>
+            <a:off x="822960" y="1709928"/>
+            <a:ext cx="1600200" cy="237744"/>
+          </a:xfrm>
+          <a:prstGeom prst="rect">
+            <a:avLst/>
+          </a:prstGeom>
+          <a:noFill/>
+          <a:ln/>
+        </p:spPr>
+        <p:txBody>
+          <a:bodyPr wrap="square" lIns="0" tIns="0" rIns="0" bIns="0" rtlCol="0" anchor="ctr"/>
+          <a:lstStyle/>
+          <a:p>
+            <a:pPr indent="0" marL="0">
+              <a:buNone/>
+            </a:pPr>
+            <a:r>
+              <a:rPr lang="en-US" sz="1100" b="1" spc="200" kern="0" dirty="0">
+                <a:solidFill>
+                  <a:srgbClr val="000000"/>
+                </a:solidFill>
+                <a:latin typeface="Arial" pitchFamily="34" charset="0"/>
+                <a:ea typeface="Arial" pitchFamily="34" charset="-122"/>
+                <a:cs typeface="Arial" pitchFamily="34" charset="-120"/>
+              </a:rPr>
+              <a:t>DESIGN</a:t>
+            </a:r>
+            <a:endParaRPr lang="en-US" sz="1100" dirty="0"/>
+          </a:p>
+        </p:txBody>
+      </p:sp>
+      <p:sp>
+        <p:nvSpPr>
+          <p:cNvPr id="10" name="Text 8"/>
+          <p:cNvSpPr/>
+          <p:nvPr/>
+        </p:nvSpPr>
+        <p:spPr>
+          <a:xfrm>
+            <a:off x="640080" y="1947672"/>
+            <a:ext cx="1783080" cy="182880"/>
+          </a:xfrm>
+          <a:prstGeom prst="rect">
+            <a:avLst/>
+          </a:prstGeom>
+          <a:noFill/>
+          <a:ln/>
+        </p:spPr>
+        <p:txBody>
+          <a:bodyPr wrap="square" lIns="0" tIns="0" rIns="0" bIns="0" rtlCol="0" anchor="ctr"/>
+          <a:lstStyle/>
+          <a:p>
+            <a:pPr indent="0" marL="0">
+              <a:buNone/>
+            </a:pPr>
+            <a:r>
+              <a:rPr lang="en-US" sz="950" i="1" dirty="0">
+                <a:solidFill>
+                  <a:srgbClr val="666666"/>
+                </a:solidFill>
+                <a:latin typeface="Arial" pitchFamily="34" charset="0"/>
+                <a:ea typeface="Arial" pitchFamily="34" charset="-122"/>
+                <a:cs typeface="Arial" pitchFamily="34" charset="-120"/>
+              </a:rPr>
+              <a:t>architects the chip</a:t>
+            </a:r>
+            <a:endParaRPr lang="en-US" sz="950" dirty="0"/>
+          </a:p>
+        </p:txBody>
+      </p:sp>
+      <p:sp>
+        <p:nvSpPr>
+          <p:cNvPr id="11" name="Shape 9"/>
+          <p:cNvSpPr/>
+          <p:nvPr/>
+        </p:nvSpPr>
+        <p:spPr>
+          <a:xfrm>
+            <a:off x="658368" y="2148840"/>
+            <a:ext cx="1600200" cy="0"/>
+          </a:xfrm>
+          <a:prstGeom prst="line">
+            <a:avLst/>
+          </a:prstGeom>
+          <a:noFill/>
+          <a:ln w="6350">
+            <a:solidFill>
+              <a:srgbClr val="E5E5E5"/>
+            </a:solidFill>
+            <a:prstDash val="solid"/>
+          </a:ln>
+        </p:spPr>
+      </p:sp>
+      <p:sp>
+        <p:nvSpPr>
+          <p:cNvPr id="12" name="Text 10"/>
+          <p:cNvSpPr/>
+          <p:nvPr/>
+        </p:nvSpPr>
+        <p:spPr>
+          <a:xfrm>
+            <a:off x="640080" y="2167128"/>
+            <a:ext cx="1783080" cy="292608"/>
+          </a:xfrm>
+          <a:prstGeom prst="rect">
+            <a:avLst/>
+          </a:prstGeom>
+          <a:noFill/>
+          <a:ln/>
+        </p:spPr>
+        <p:txBody>
+          <a:bodyPr wrap="square" lIns="0" tIns="0" rIns="0" bIns="0" rtlCol="0" anchor="t"/>
+          <a:lstStyle/>
+          <a:p>
+            <a:pPr indent="0" marL="0">
+              <a:buNone/>
+            </a:pPr>
+            <a:r>
+              <a:rPr lang="en-US" sz="850" dirty="0">
+                <a:solidFill>
+                  <a:srgbClr val="333333"/>
+                </a:solidFill>
+                <a:latin typeface="Arial" pitchFamily="34" charset="0"/>
+                <a:ea typeface="Arial" pitchFamily="34" charset="-122"/>
+                <a:cs typeface="Arial" pitchFamily="34" charset="-120"/>
+              </a:rPr>
+              <a:t>NVIDIA · Apple · AMD · Broadcom</a:t>
+            </a:r>
+            <a:endParaRPr lang="en-US" sz="850" dirty="0"/>
+          </a:p>
+        </p:txBody>
+      </p:sp>
+      <p:sp>
+        <p:nvSpPr>
+          <p:cNvPr id="13" name="Text 11"/>
+          <p:cNvSpPr/>
+          <p:nvPr/>
+        </p:nvSpPr>
+        <p:spPr>
+          <a:xfrm>
+            <a:off x="2359152" y="1897380"/>
+            <a:ext cx="219456" cy="365760"/>
+          </a:xfrm>
+          <a:prstGeom prst="rect">
+            <a:avLst/>
+          </a:prstGeom>
+          <a:noFill/>
+          <a:ln/>
+        </p:spPr>
+        <p:txBody>
+          <a:bodyPr wrap="square" lIns="0" tIns="0" rIns="0" bIns="0" rtlCol="0" anchor="ctr"/>
+          <a:lstStyle/>
+          <a:p>
+            <a:pPr algn="ctr" indent="0" marL="0">
+              <a:buNone/>
+            </a:pPr>
+            <a:r>
+              <a:rPr lang="en-US" sz="2400" b="1" dirty="0">
+                <a:solidFill>
+                  <a:srgbClr val="666666"/>
+                </a:solidFill>
+                <a:latin typeface="Arial" pitchFamily="34" charset="0"/>
+                <a:ea typeface="Arial" pitchFamily="34" charset="-122"/>
+                <a:cs typeface="Arial" pitchFamily="34" charset="-120"/>
+              </a:rPr>
+              <a:t>›</a:t>
+            </a:r>
+            <a:endParaRPr lang="en-US" sz="2400" dirty="0"/>
+          </a:p>
+        </p:txBody>
+      </p:sp>
+      <p:sp>
+        <p:nvSpPr>
+          <p:cNvPr id="14" name="Shape 12"/>
+          <p:cNvSpPr/>
+          <p:nvPr/>
+        </p:nvSpPr>
+        <p:spPr>
+          <a:xfrm>
+            <a:off x="2697480" y="1792224"/>
+            <a:ext cx="128016" cy="128016"/>
+          </a:xfrm>
+          <a:prstGeom prst="ellipse">
+            <a:avLst/>
+          </a:prstGeom>
+          <a:solidFill>
+            <a:srgbClr val="E8478D"/>
+          </a:solidFill>
+          <a:ln w="12700">
+            <a:solidFill>
+              <a:srgbClr val="E8478D"/>
+            </a:solidFill>
+            <a:prstDash val="solid"/>
+          </a:ln>
+        </p:spPr>
+      </p:sp>
+      <p:sp>
+        <p:nvSpPr>
+          <p:cNvPr id="15" name="Text 13"/>
+          <p:cNvSpPr/>
+          <p:nvPr/>
+        </p:nvSpPr>
+        <p:spPr>
+          <a:xfrm>
+            <a:off x="2880360" y="1709928"/>
+            <a:ext cx="1600200" cy="237744"/>
+          </a:xfrm>
+          <a:prstGeom prst="rect">
+            <a:avLst/>
+          </a:prstGeom>
+          <a:noFill/>
+          <a:ln/>
+        </p:spPr>
+        <p:txBody>
+          <a:bodyPr wrap="square" lIns="0" tIns="0" rIns="0" bIns="0" rtlCol="0" anchor="ctr"/>
+          <a:lstStyle/>
+          <a:p>
+            <a:pPr indent="0" marL="0">
+              <a:buNone/>
+            </a:pPr>
+            <a:r>
+              <a:rPr lang="en-US" sz="1100" b="1" spc="200" kern="0" dirty="0">
+                <a:solidFill>
+                  <a:srgbClr val="000000"/>
+                </a:solidFill>
+                <a:latin typeface="Arial" pitchFamily="34" charset="0"/>
+                <a:ea typeface="Arial" pitchFamily="34" charset="-122"/>
+                <a:cs typeface="Arial" pitchFamily="34" charset="-120"/>
+              </a:rPr>
+              <a:t>EQUIPMENT</a:t>
+            </a:r>
+            <a:endParaRPr lang="en-US" sz="1100" dirty="0"/>
+          </a:p>
+        </p:txBody>
+      </p:sp>
+      <p:sp>
+        <p:nvSpPr>
+          <p:cNvPr id="16" name="Text 14"/>
+          <p:cNvSpPr/>
+          <p:nvPr/>
+        </p:nvSpPr>
+        <p:spPr>
+          <a:xfrm>
+            <a:off x="2697480" y="1947672"/>
+            <a:ext cx="1783080" cy="182880"/>
+          </a:xfrm>
+          <a:prstGeom prst="rect">
+            <a:avLst/>
+          </a:prstGeom>
+          <a:noFill/>
+          <a:ln/>
+        </p:spPr>
+        <p:txBody>
+          <a:bodyPr wrap="square" lIns="0" tIns="0" rIns="0" bIns="0" rtlCol="0" anchor="ctr"/>
+          <a:lstStyle/>
+          <a:p>
+            <a:pPr indent="0" marL="0">
+              <a:buNone/>
+            </a:pPr>
+            <a:r>
+              <a:rPr lang="en-US" sz="950" i="1" dirty="0">
+                <a:solidFill>
+                  <a:srgbClr val="666666"/>
+                </a:solidFill>
+                <a:latin typeface="Arial" pitchFamily="34" charset="0"/>
+                <a:ea typeface="Arial" pitchFamily="34" charset="-122"/>
+                <a:cs typeface="Arial" pitchFamily="34" charset="-120"/>
+              </a:rPr>
+              <a:t>builds the tools</a:t>
+            </a:r>
+            <a:endParaRPr lang="en-US" sz="950" dirty="0"/>
+          </a:p>
+        </p:txBody>
+      </p:sp>
+      <p:sp>
+        <p:nvSpPr>
+          <p:cNvPr id="17" name="Shape 15"/>
+          <p:cNvSpPr/>
+          <p:nvPr/>
+        </p:nvSpPr>
+        <p:spPr>
+          <a:xfrm>
+            <a:off x="2715768" y="2148840"/>
+            <a:ext cx="1600200" cy="0"/>
+          </a:xfrm>
+          <a:prstGeom prst="line">
+            <a:avLst/>
+          </a:prstGeom>
+          <a:noFill/>
+          <a:ln w="6350">
+            <a:solidFill>
+              <a:srgbClr val="E5E5E5"/>
+            </a:solidFill>
+            <a:prstDash val="solid"/>
+          </a:ln>
+        </p:spPr>
+      </p:sp>
+      <p:sp>
+        <p:nvSpPr>
+          <p:cNvPr id="18" name="Text 16"/>
+          <p:cNvSpPr/>
+          <p:nvPr/>
+        </p:nvSpPr>
+        <p:spPr>
+          <a:xfrm>
+            <a:off x="2697480" y="2167128"/>
+            <a:ext cx="1783080" cy="292608"/>
+          </a:xfrm>
+          <a:prstGeom prst="rect">
+            <a:avLst/>
+          </a:prstGeom>
+          <a:noFill/>
+          <a:ln/>
+        </p:spPr>
+        <p:txBody>
+          <a:bodyPr wrap="square" lIns="0" tIns="0" rIns="0" bIns="0" rtlCol="0" anchor="t"/>
+          <a:lstStyle/>
+          <a:p>
+            <a:pPr indent="0" marL="0">
+              <a:buNone/>
+            </a:pPr>
+            <a:r>
+              <a:rPr lang="en-US" sz="850" dirty="0">
+                <a:solidFill>
+                  <a:srgbClr val="333333"/>
+                </a:solidFill>
+                <a:latin typeface="Arial" pitchFamily="34" charset="0"/>
+                <a:ea typeface="Arial" pitchFamily="34" charset="-122"/>
+                <a:cs typeface="Arial" pitchFamily="34" charset="-120"/>
+              </a:rPr>
+              <a:t>ASML · Applied Materials · Lam · KLA</a:t>
+            </a:r>
+            <a:endParaRPr lang="en-US" sz="850" dirty="0"/>
+          </a:p>
+        </p:txBody>
+      </p:sp>
+      <p:sp>
+        <p:nvSpPr>
+          <p:cNvPr id="19" name="Text 17"/>
+          <p:cNvSpPr/>
+          <p:nvPr/>
+        </p:nvSpPr>
+        <p:spPr>
+          <a:xfrm>
+            <a:off x="4416552" y="1897380"/>
+            <a:ext cx="219456" cy="365760"/>
+          </a:xfrm>
+          <a:prstGeom prst="rect">
+            <a:avLst/>
+          </a:prstGeom>
+          <a:noFill/>
+          <a:ln/>
+        </p:spPr>
+        <p:txBody>
+          <a:bodyPr wrap="square" lIns="0" tIns="0" rIns="0" bIns="0" rtlCol="0" anchor="ctr"/>
+          <a:lstStyle/>
+          <a:p>
+            <a:pPr algn="ctr" indent="0" marL="0">
+              <a:buNone/>
+            </a:pPr>
+            <a:r>
+              <a:rPr lang="en-US" sz="2400" b="1" dirty="0">
+                <a:solidFill>
+                  <a:srgbClr val="666666"/>
+                </a:solidFill>
+                <a:latin typeface="Arial" pitchFamily="34" charset="0"/>
+                <a:ea typeface="Arial" pitchFamily="34" charset="-122"/>
+                <a:cs typeface="Arial" pitchFamily="34" charset="-120"/>
+              </a:rPr>
+              <a:t>›</a:t>
+            </a:r>
+            <a:endParaRPr lang="en-US" sz="2400" dirty="0"/>
+          </a:p>
+        </p:txBody>
+      </p:sp>
+      <p:sp>
+        <p:nvSpPr>
+          <p:cNvPr id="20" name="Shape 18"/>
+          <p:cNvSpPr/>
+          <p:nvPr/>
+        </p:nvSpPr>
+        <p:spPr>
+          <a:xfrm>
+            <a:off x="4754880" y="1792224"/>
+            <a:ext cx="128016" cy="128016"/>
+          </a:xfrm>
+          <a:prstGeom prst="ellipse">
+            <a:avLst/>
+          </a:prstGeom>
+          <a:solidFill>
+            <a:srgbClr val="333333"/>
+          </a:solidFill>
+          <a:ln w="12700">
+            <a:solidFill>
+              <a:srgbClr val="333333"/>
+            </a:solidFill>
+            <a:prstDash val="solid"/>
+          </a:ln>
+        </p:spPr>
+      </p:sp>
+      <p:sp>
+        <p:nvSpPr>
+          <p:cNvPr id="21" name="Text 19"/>
+          <p:cNvSpPr/>
+          <p:nvPr/>
+        </p:nvSpPr>
+        <p:spPr>
+          <a:xfrm>
+            <a:off x="4937760" y="1709928"/>
+            <a:ext cx="1600200" cy="237744"/>
+          </a:xfrm>
+          <a:prstGeom prst="rect">
+            <a:avLst/>
+          </a:prstGeom>
+          <a:noFill/>
+          <a:ln/>
+        </p:spPr>
+        <p:txBody>
+          <a:bodyPr wrap="square" lIns="0" tIns="0" rIns="0" bIns="0" rtlCol="0" anchor="ctr"/>
+          <a:lstStyle/>
+          <a:p>
+            <a:pPr indent="0" marL="0">
+              <a:buNone/>
+            </a:pPr>
+            <a:r>
+              <a:rPr lang="en-US" sz="1100" b="1" spc="200" kern="0" dirty="0">
+                <a:solidFill>
+                  <a:srgbClr val="000000"/>
+                </a:solidFill>
+                <a:latin typeface="Arial" pitchFamily="34" charset="0"/>
+                <a:ea typeface="Arial" pitchFamily="34" charset="-122"/>
+                <a:cs typeface="Arial" pitchFamily="34" charset="-120"/>
+              </a:rPr>
+              <a:t>FOUNDRY</a:t>
+            </a:r>
+            <a:endParaRPr lang="en-US" sz="1100" dirty="0"/>
+          </a:p>
+        </p:txBody>
+      </p:sp>
+      <p:sp>
+        <p:nvSpPr>
+          <p:cNvPr id="22" name="Text 20"/>
+          <p:cNvSpPr/>
+          <p:nvPr/>
+        </p:nvSpPr>
+        <p:spPr>
+          <a:xfrm>
+            <a:off x="4754880" y="1947672"/>
+            <a:ext cx="1783080" cy="182880"/>
+          </a:xfrm>
+          <a:prstGeom prst="rect">
+            <a:avLst/>
+          </a:prstGeom>
+          <a:noFill/>
+          <a:ln/>
+        </p:spPr>
+        <p:txBody>
+          <a:bodyPr wrap="square" lIns="0" tIns="0" rIns="0" bIns="0" rtlCol="0" anchor="ctr"/>
+          <a:lstStyle/>
+          <a:p>
+            <a:pPr indent="0" marL="0">
+              <a:buNone/>
+            </a:pPr>
+            <a:r>
+              <a:rPr lang="en-US" sz="950" i="1" dirty="0">
+                <a:solidFill>
+                  <a:srgbClr val="666666"/>
+                </a:solidFill>
+                <a:latin typeface="Arial" pitchFamily="34" charset="0"/>
+                <a:ea typeface="Arial" pitchFamily="34" charset="-122"/>
+                <a:cs typeface="Arial" pitchFamily="34" charset="-120"/>
+              </a:rPr>
+              <a:t>prints the wafer</a:t>
+            </a:r>
+            <a:endParaRPr lang="en-US" sz="950" dirty="0"/>
+          </a:p>
+        </p:txBody>
+      </p:sp>
+      <p:sp>
+        <p:nvSpPr>
+          <p:cNvPr id="23" name="Shape 21"/>
+          <p:cNvSpPr/>
+          <p:nvPr/>
+        </p:nvSpPr>
+        <p:spPr>
+          <a:xfrm>
+            <a:off x="4773168" y="2148840"/>
+            <a:ext cx="1600200" cy="0"/>
+          </a:xfrm>
+          <a:prstGeom prst="line">
+            <a:avLst/>
+          </a:prstGeom>
+          <a:noFill/>
+          <a:ln w="6350">
+            <a:solidFill>
+              <a:srgbClr val="E5E5E5"/>
+            </a:solidFill>
+            <a:prstDash val="solid"/>
+          </a:ln>
+        </p:spPr>
+      </p:sp>
+      <p:sp>
+        <p:nvSpPr>
+          <p:cNvPr id="24" name="Text 22"/>
+          <p:cNvSpPr/>
+          <p:nvPr/>
+        </p:nvSpPr>
+        <p:spPr>
+          <a:xfrm>
+            <a:off x="4754880" y="2167128"/>
+            <a:ext cx="1783080" cy="292608"/>
+          </a:xfrm>
+          <a:prstGeom prst="rect">
+            <a:avLst/>
+          </a:prstGeom>
+          <a:noFill/>
+          <a:ln/>
+        </p:spPr>
+        <p:txBody>
+          <a:bodyPr wrap="square" lIns="0" tIns="0" rIns="0" bIns="0" rtlCol="0" anchor="t"/>
+          <a:lstStyle/>
+          <a:p>
+            <a:pPr indent="0" marL="0">
+              <a:buNone/>
+            </a:pPr>
+            <a:r>
+              <a:rPr lang="en-US" sz="850" dirty="0">
+                <a:solidFill>
+                  <a:srgbClr val="333333"/>
+                </a:solidFill>
+                <a:latin typeface="Arial" pitchFamily="34" charset="0"/>
+                <a:ea typeface="Arial" pitchFamily="34" charset="-122"/>
+                <a:cs typeface="Arial" pitchFamily="34" charset="-120"/>
+              </a:rPr>
+              <a:t>TSMC · Samsung · Intel Foundry</a:t>
+            </a:r>
+            <a:endParaRPr lang="en-US" sz="850" dirty="0"/>
+          </a:p>
+        </p:txBody>
+      </p:sp>
+      <p:sp>
+        <p:nvSpPr>
+          <p:cNvPr id="25" name="Text 23"/>
+          <p:cNvSpPr/>
+          <p:nvPr/>
+        </p:nvSpPr>
+        <p:spPr>
+          <a:xfrm>
+            <a:off x="6473952" y="1897380"/>
+            <a:ext cx="219456" cy="365760"/>
+          </a:xfrm>
+          <a:prstGeom prst="rect">
+            <a:avLst/>
+          </a:prstGeom>
+          <a:noFill/>
+          <a:ln/>
+        </p:spPr>
+        <p:txBody>
+          <a:bodyPr wrap="square" lIns="0" tIns="0" rIns="0" bIns="0" rtlCol="0" anchor="ctr"/>
+          <a:lstStyle/>
+          <a:p>
+            <a:pPr algn="ctr" indent="0" marL="0">
+              <a:buNone/>
+            </a:pPr>
+            <a:r>
+              <a:rPr lang="en-US" sz="2400" b="1" dirty="0">
+                <a:solidFill>
+                  <a:srgbClr val="666666"/>
+                </a:solidFill>
+                <a:latin typeface="Arial" pitchFamily="34" charset="0"/>
+                <a:ea typeface="Arial" pitchFamily="34" charset="-122"/>
+                <a:cs typeface="Arial" pitchFamily="34" charset="-120"/>
+              </a:rPr>
+              <a:t>›</a:t>
+            </a:r>
+            <a:endParaRPr lang="en-US" sz="2400" dirty="0"/>
+          </a:p>
+        </p:txBody>
+      </p:sp>
+      <p:sp>
+        <p:nvSpPr>
+          <p:cNvPr id="26" name="Shape 24"/>
+          <p:cNvSpPr/>
+          <p:nvPr/>
+        </p:nvSpPr>
+        <p:spPr>
+          <a:xfrm>
+            <a:off x="6812280" y="1792224"/>
+            <a:ext cx="128016" cy="128016"/>
+          </a:xfrm>
+          <a:prstGeom prst="ellipse">
+            <a:avLst/>
+          </a:prstGeom>
+          <a:solidFill>
+            <a:srgbClr val="000000"/>
+          </a:solidFill>
+          <a:ln w="12700">
+            <a:solidFill>
+              <a:srgbClr val="000000"/>
+            </a:solidFill>
+            <a:prstDash val="solid"/>
+          </a:ln>
+        </p:spPr>
+      </p:sp>
+      <p:sp>
+        <p:nvSpPr>
+          <p:cNvPr id="27" name="Text 25"/>
+          <p:cNvSpPr/>
+          <p:nvPr/>
+        </p:nvSpPr>
+        <p:spPr>
+          <a:xfrm>
+            <a:off x="6995160" y="1709928"/>
+            <a:ext cx="1600200" cy="237744"/>
+          </a:xfrm>
+          <a:prstGeom prst="rect">
+            <a:avLst/>
+          </a:prstGeom>
+          <a:noFill/>
+          <a:ln/>
+        </p:spPr>
+        <p:txBody>
+          <a:bodyPr wrap="square" lIns="0" tIns="0" rIns="0" bIns="0" rtlCol="0" anchor="ctr"/>
+          <a:lstStyle/>
+          <a:p>
+            <a:pPr indent="0" marL="0">
+              <a:buNone/>
+            </a:pPr>
+            <a:r>
+              <a:rPr lang="en-US" sz="1100" b="1" spc="200" kern="0" dirty="0">
+                <a:solidFill>
+                  <a:srgbClr val="000000"/>
+                </a:solidFill>
+                <a:latin typeface="Arial" pitchFamily="34" charset="0"/>
+                <a:ea typeface="Arial" pitchFamily="34" charset="-122"/>
+                <a:cs typeface="Arial" pitchFamily="34" charset="-120"/>
+              </a:rPr>
+              <a:t>PACKAGING</a:t>
+            </a:r>
+            <a:endParaRPr lang="en-US" sz="1100" dirty="0"/>
+          </a:p>
+        </p:txBody>
+      </p:sp>
+      <p:sp>
+        <p:nvSpPr>
+          <p:cNvPr id="28" name="Text 26"/>
+          <p:cNvSpPr/>
+          <p:nvPr/>
+        </p:nvSpPr>
+        <p:spPr>
+          <a:xfrm>
+            <a:off x="6812280" y="1947672"/>
+            <a:ext cx="1783080" cy="182880"/>
+          </a:xfrm>
+          <a:prstGeom prst="rect">
+            <a:avLst/>
+          </a:prstGeom>
+          <a:noFill/>
+          <a:ln/>
+        </p:spPr>
+        <p:txBody>
+          <a:bodyPr wrap="square" lIns="0" tIns="0" rIns="0" bIns="0" rtlCol="0" anchor="ctr"/>
+          <a:lstStyle/>
+          <a:p>
+            <a:pPr indent="0" marL="0">
+              <a:buNone/>
+            </a:pPr>
+            <a:r>
+              <a:rPr lang="en-US" sz="950" i="1" dirty="0">
+                <a:solidFill>
+                  <a:srgbClr val="666666"/>
+                </a:solidFill>
+                <a:latin typeface="Arial" pitchFamily="34" charset="0"/>
+                <a:ea typeface="Arial" pitchFamily="34" charset="-122"/>
+                <a:cs typeface="Arial" pitchFamily="34" charset="-120"/>
+              </a:rPr>
+              <a:t>stacks the dies</a:t>
+            </a:r>
+            <a:endParaRPr lang="en-US" sz="950" dirty="0"/>
+          </a:p>
+        </p:txBody>
+      </p:sp>
+      <p:sp>
+        <p:nvSpPr>
+          <p:cNvPr id="29" name="Shape 27"/>
+          <p:cNvSpPr/>
+          <p:nvPr/>
+        </p:nvSpPr>
+        <p:spPr>
+          <a:xfrm>
+            <a:off x="6830568" y="2148840"/>
+            <a:ext cx="1600200" cy="0"/>
+          </a:xfrm>
+          <a:prstGeom prst="line">
+            <a:avLst/>
+          </a:prstGeom>
+          <a:noFill/>
+          <a:ln w="6350">
+            <a:solidFill>
+              <a:srgbClr val="E5E5E5"/>
+            </a:solidFill>
+            <a:prstDash val="solid"/>
+          </a:ln>
+        </p:spPr>
+      </p:sp>
+      <p:sp>
+        <p:nvSpPr>
+          <p:cNvPr id="30" name="Text 28"/>
+          <p:cNvSpPr/>
+          <p:nvPr/>
+        </p:nvSpPr>
+        <p:spPr>
+          <a:xfrm>
+            <a:off x="6812280" y="2167128"/>
+            <a:ext cx="1783080" cy="292608"/>
+          </a:xfrm>
+          <a:prstGeom prst="rect">
+            <a:avLst/>
+          </a:prstGeom>
+          <a:noFill/>
+          <a:ln/>
+        </p:spPr>
+        <p:txBody>
+          <a:bodyPr wrap="square" lIns="0" tIns="0" rIns="0" bIns="0" rtlCol="0" anchor="t"/>
+          <a:lstStyle/>
+          <a:p>
+            <a:pPr indent="0" marL="0">
+              <a:buNone/>
+            </a:pPr>
+            <a:r>
+              <a:rPr lang="en-US" sz="850" dirty="0">
+                <a:solidFill>
+                  <a:srgbClr val="333333"/>
+                </a:solidFill>
+                <a:latin typeface="Arial" pitchFamily="34" charset="0"/>
+                <a:ea typeface="Arial" pitchFamily="34" charset="-122"/>
+                <a:cs typeface="Arial" pitchFamily="34" charset="-120"/>
+              </a:rPr>
+              <a:t>TSMC CoWoS · ASE · Amkor</a:t>
+            </a:r>
+            <a:endParaRPr lang="en-US" sz="850" dirty="0"/>
+          </a:p>
+        </p:txBody>
+      </p:sp>
+      <p:sp>
+        <p:nvSpPr>
+          <p:cNvPr id="31" name="Shape 29"/>
+          <p:cNvSpPr/>
+          <p:nvPr/>
+        </p:nvSpPr>
+        <p:spPr>
+          <a:xfrm>
+            <a:off x="457200" y="2606040"/>
+            <a:ext cx="2651760" cy="1280160"/>
+          </a:xfrm>
+          <a:prstGeom prst="rect">
+            <a:avLst/>
+          </a:prstGeom>
+          <a:solidFill>
+            <a:srgbClr val="F9F9F9"/>
+          </a:solidFill>
+          <a:ln w="6350">
+            <a:solidFill>
+              <a:srgbClr val="E5E5E5"/>
+            </a:solidFill>
+            <a:prstDash val="solid"/>
+          </a:ln>
+        </p:spPr>
+      </p:sp>
+      <p:sp>
+        <p:nvSpPr>
+          <p:cNvPr id="32" name="Shape 30"/>
+          <p:cNvSpPr/>
+          <p:nvPr/>
+        </p:nvSpPr>
+        <p:spPr>
+          <a:xfrm>
+            <a:off x="457200" y="2606040"/>
+            <a:ext cx="2651760" cy="256032"/>
+          </a:xfrm>
+          <a:prstGeom prst="rect">
             <a:avLst/>
           </a:prstGeom>
           <a:solidFill>
@@ -33252,14 +34054,14 @@
       </p:sp>
       <p:sp>
         <p:nvSpPr>
-          <p:cNvPr id="9" name="Text 7"/>
-          <p:cNvSpPr/>
-          <p:nvPr/>
-        </p:nvSpPr>
-        <p:spPr>
-          <a:xfrm>
-            <a:off x="859536" y="1691640"/>
-            <a:ext cx="1600200" cy="457200"/>
+          <p:cNvPr id="33" name="Text 31"/>
+          <p:cNvSpPr/>
+          <p:nvPr/>
+        </p:nvSpPr>
+        <p:spPr>
+          <a:xfrm>
+            <a:off x="457200" y="2606040"/>
+            <a:ext cx="2651760" cy="256032"/>
           </a:xfrm>
           <a:prstGeom prst="rect">
             <a:avLst/>
@@ -33271,25 +34073,89 @@
           <a:bodyPr wrap="square" lIns="0" tIns="0" rIns="0" bIns="0" rtlCol="0" anchor="ctr"/>
           <a:lstStyle/>
           <a:p>
-            <a:pPr indent="0" marL="0">
-              <a:buNone/>
-            </a:pPr>
-            <a:r>
-              <a:rPr lang="en-US" sz="1050" b="1" spc="200" kern="0" dirty="0">
-                <a:solidFill>
-                  <a:srgbClr val="000000"/>
-                </a:solidFill>
-                <a:latin typeface="Arial" pitchFamily="34" charset="0"/>
-                <a:ea typeface="Arial" pitchFamily="34" charset="-122"/>
-                <a:cs typeface="Arial" pitchFamily="34" charset="-120"/>
-              </a:rPr>
-              <a:t>LOGIC  </a:t>
-            </a:r>
-            <a:pPr indent="0" marL="0">
-              <a:buNone/>
-            </a:pPr>
-            <a:r>
-              <a:rPr lang="en-US" sz="1050" i="1" dirty="0">
+            <a:pPr algn="ctr" indent="0" marL="0">
+              <a:buNone/>
+            </a:pPr>
+            <a:r>
+              <a:rPr lang="en-US" sz="1000" b="1" spc="200" kern="0" dirty="0">
+                <a:solidFill>
+                  <a:srgbClr val="FFFFFF"/>
+                </a:solidFill>
+                <a:latin typeface="Arial" pitchFamily="34" charset="0"/>
+                <a:ea typeface="Arial" pitchFamily="34" charset="-122"/>
+                <a:cs typeface="Arial" pitchFamily="34" charset="-120"/>
+              </a:rPr>
+              <a:t>LOGIC</a:t>
+            </a:r>
+            <a:endParaRPr lang="en-US" sz="1000" dirty="0"/>
+          </a:p>
+        </p:txBody>
+      </p:sp>
+      <p:sp>
+        <p:nvSpPr>
+          <p:cNvPr id="34" name="Text 32"/>
+          <p:cNvSpPr/>
+          <p:nvPr/>
+        </p:nvSpPr>
+        <p:spPr>
+          <a:xfrm>
+            <a:off x="594360" y="2916936"/>
+            <a:ext cx="2377440" cy="457200"/>
+          </a:xfrm>
+          <a:prstGeom prst="rect">
+            <a:avLst/>
+          </a:prstGeom>
+          <a:noFill/>
+          <a:ln/>
+        </p:spPr>
+        <p:txBody>
+          <a:bodyPr wrap="square" lIns="0" tIns="0" rIns="0" bIns="0" rtlCol="0" anchor="t"/>
+          <a:lstStyle/>
+          <a:p>
+            <a:pPr indent="0" marL="0">
+              <a:buNone/>
+            </a:pPr>
+            <a:r>
+              <a:rPr lang="en-US" sz="950" dirty="0">
+                <a:solidFill>
+                  <a:srgbClr val="333333"/>
+                </a:solidFill>
+                <a:latin typeface="Arial" pitchFamily="34" charset="0"/>
+                <a:ea typeface="Arial" pitchFamily="34" charset="-122"/>
+                <a:cs typeface="Arial" pitchFamily="34" charset="-120"/>
+              </a:rPr>
+              <a:t>Where computation happens — the chips that run code and move data.</a:t>
+            </a:r>
+            <a:endParaRPr lang="en-US" sz="950" dirty="0"/>
+          </a:p>
+        </p:txBody>
+      </p:sp>
+      <p:sp>
+        <p:nvSpPr>
+          <p:cNvPr id="35" name="Text 33"/>
+          <p:cNvSpPr/>
+          <p:nvPr/>
+        </p:nvSpPr>
+        <p:spPr>
+          <a:xfrm>
+            <a:off x="594360" y="3392424"/>
+            <a:ext cx="2377440" cy="237744"/>
+          </a:xfrm>
+          <a:prstGeom prst="rect">
+            <a:avLst/>
+          </a:prstGeom>
+          <a:noFill/>
+          <a:ln/>
+        </p:spPr>
+        <p:txBody>
+          <a:bodyPr wrap="square" lIns="0" tIns="0" rIns="0" bIns="0" rtlCol="0" anchor="t"/>
+          <a:lstStyle/>
+          <a:p>
+            <a:pPr indent="0" marL="0">
+              <a:buNone/>
+            </a:pPr>
+            <a:r>
+              <a:rPr lang="en-US" sz="850" i="1" dirty="0">
                 <a:solidFill>
                   <a:srgbClr val="666666"/>
                 </a:solidFill>
@@ -33297,22 +34163,22 @@
                 <a:ea typeface="Arial" pitchFamily="34" charset="-122"/>
                 <a:cs typeface="Arial" pitchFamily="34" charset="-120"/>
               </a:rPr>
-              <a:t>computes</a:t>
-            </a:r>
-            <a:endParaRPr lang="en-US" sz="1050" dirty="0"/>
-          </a:p>
-        </p:txBody>
-      </p:sp>
-      <p:sp>
-        <p:nvSpPr>
-          <p:cNvPr id="10" name="Shape 8"/>
-          <p:cNvSpPr/>
-          <p:nvPr/>
-        </p:nvSpPr>
-        <p:spPr>
-          <a:xfrm>
-            <a:off x="2514600" y="1764792"/>
-            <a:ext cx="0" cy="310896"/>
+              <a:t>GPUs, AI accelerators, ASICs, FPGAs</a:t>
+            </a:r>
+            <a:endParaRPr lang="en-US" sz="850" dirty="0"/>
+          </a:p>
+        </p:txBody>
+      </p:sp>
+      <p:sp>
+        <p:nvSpPr>
+          <p:cNvPr id="36" name="Shape 34"/>
+          <p:cNvSpPr/>
+          <p:nvPr/>
+        </p:nvSpPr>
+        <p:spPr>
+          <a:xfrm>
+            <a:off x="640080" y="3648456"/>
+            <a:ext cx="2286000" cy="0"/>
           </a:xfrm>
           <a:prstGeom prst="line">
             <a:avLst/>
@@ -33328,16 +34194,80 @@
       </p:sp>
       <p:sp>
         <p:nvSpPr>
-          <p:cNvPr id="11" name="Shape 9"/>
-          <p:cNvSpPr/>
-          <p:nvPr/>
-        </p:nvSpPr>
-        <p:spPr>
-          <a:xfrm>
-            <a:off x="2715768" y="1847088"/>
-            <a:ext cx="146304" cy="146304"/>
-          </a:xfrm>
-          <a:prstGeom prst="ellipse">
+          <p:cNvPr id="37" name="Text 35"/>
+          <p:cNvSpPr/>
+          <p:nvPr/>
+        </p:nvSpPr>
+        <p:spPr>
+          <a:xfrm>
+            <a:off x="457200" y="3666744"/>
+            <a:ext cx="2651760" cy="201168"/>
+          </a:xfrm>
+          <a:prstGeom prst="rect">
+            <a:avLst/>
+          </a:prstGeom>
+          <a:noFill/>
+          <a:ln/>
+        </p:spPr>
+        <p:txBody>
+          <a:bodyPr wrap="square" lIns="0" tIns="0" rIns="0" bIns="0" rtlCol="0" anchor="ctr"/>
+          <a:lstStyle/>
+          <a:p>
+            <a:pPr algn="ctr" indent="0" marL="0">
+              <a:buNone/>
+            </a:pPr>
+            <a:r>
+              <a:rPr lang="en-US" sz="750" i="1" dirty="0">
+                <a:solidFill>
+                  <a:srgbClr val="666666"/>
+                </a:solidFill>
+                <a:latin typeface="Arial" pitchFamily="34" charset="0"/>
+                <a:ea typeface="Arial" pitchFamily="34" charset="-122"/>
+                <a:cs typeface="Arial" pitchFamily="34" charset="-120"/>
+              </a:rPr>
+              <a:t>NVIDIA · AMD · Broadcom · TSMC</a:t>
+            </a:r>
+            <a:endParaRPr lang="en-US" sz="750" dirty="0"/>
+          </a:p>
+        </p:txBody>
+      </p:sp>
+      <p:sp>
+        <p:nvSpPr>
+          <p:cNvPr id="38" name="Shape 36"/>
+          <p:cNvSpPr/>
+          <p:nvPr/>
+        </p:nvSpPr>
+        <p:spPr>
+          <a:xfrm>
+            <a:off x="3246120" y="2606040"/>
+            <a:ext cx="2651760" cy="1280160"/>
+          </a:xfrm>
+          <a:prstGeom prst="rect">
+            <a:avLst/>
+          </a:prstGeom>
+          <a:solidFill>
+            <a:srgbClr val="F9F9F9"/>
+          </a:solidFill>
+          <a:ln w="6350">
+            <a:solidFill>
+              <a:srgbClr val="E5E5E5"/>
+            </a:solidFill>
+            <a:prstDash val="solid"/>
+          </a:ln>
+        </p:spPr>
+      </p:sp>
+      <p:sp>
+        <p:nvSpPr>
+          <p:cNvPr id="39" name="Shape 37"/>
+          <p:cNvSpPr/>
+          <p:nvPr/>
+        </p:nvSpPr>
+        <p:spPr>
+          <a:xfrm>
+            <a:off x="3246120" y="2606040"/>
+            <a:ext cx="2651760" cy="256032"/>
+          </a:xfrm>
+          <a:prstGeom prst="rect">
             <a:avLst/>
           </a:prstGeom>
           <a:solidFill>
@@ -33353,14 +34283,14 @@
       </p:sp>
       <p:sp>
         <p:nvSpPr>
-          <p:cNvPr id="12" name="Text 10"/>
-          <p:cNvSpPr/>
-          <p:nvPr/>
-        </p:nvSpPr>
-        <p:spPr>
-          <a:xfrm>
-            <a:off x="2916936" y="1691640"/>
-            <a:ext cx="1600200" cy="457200"/>
+          <p:cNvPr id="40" name="Text 38"/>
+          <p:cNvSpPr/>
+          <p:nvPr/>
+        </p:nvSpPr>
+        <p:spPr>
+          <a:xfrm>
+            <a:off x="3246120" y="2606040"/>
+            <a:ext cx="2651760" cy="256032"/>
           </a:xfrm>
           <a:prstGeom prst="rect">
             <a:avLst/>
@@ -33372,11 +34302,11 @@
           <a:bodyPr wrap="square" lIns="0" tIns="0" rIns="0" bIns="0" rtlCol="0" anchor="ctr"/>
           <a:lstStyle/>
           <a:p>
-            <a:pPr indent="0" marL="0">
-              <a:buNone/>
-            </a:pPr>
-            <a:r>
-              <a:rPr lang="en-US" sz="1050" b="1" spc="200" kern="0" dirty="0">
+            <a:pPr algn="ctr" indent="0" marL="0">
+              <a:buNone/>
+            </a:pPr>
+            <a:r>
+              <a:rPr lang="en-US" sz="1000" b="1" spc="200" kern="0" dirty="0">
                 <a:solidFill>
                   <a:srgbClr val="000000"/>
                 </a:solidFill>
@@ -33384,13 +34314,77 @@
                 <a:ea typeface="Arial" pitchFamily="34" charset="-122"/>
                 <a:cs typeface="Arial" pitchFamily="34" charset="-120"/>
               </a:rPr>
-              <a:t>MEMORY  </a:t>
-            </a:r>
-            <a:pPr indent="0" marL="0">
-              <a:buNone/>
-            </a:pPr>
-            <a:r>
-              <a:rPr lang="en-US" sz="1050" i="1" dirty="0">
+              <a:t>MEMORY</a:t>
+            </a:r>
+            <a:endParaRPr lang="en-US" sz="1000" dirty="0"/>
+          </a:p>
+        </p:txBody>
+      </p:sp>
+      <p:sp>
+        <p:nvSpPr>
+          <p:cNvPr id="41" name="Text 39"/>
+          <p:cNvSpPr/>
+          <p:nvPr/>
+        </p:nvSpPr>
+        <p:spPr>
+          <a:xfrm>
+            <a:off x="3383280" y="2916936"/>
+            <a:ext cx="2377440" cy="457200"/>
+          </a:xfrm>
+          <a:prstGeom prst="rect">
+            <a:avLst/>
+          </a:prstGeom>
+          <a:noFill/>
+          <a:ln/>
+        </p:spPr>
+        <p:txBody>
+          <a:bodyPr wrap="square" lIns="0" tIns="0" rIns="0" bIns="0" rtlCol="0" anchor="t"/>
+          <a:lstStyle/>
+          <a:p>
+            <a:pPr indent="0" marL="0">
+              <a:buNone/>
+            </a:pPr>
+            <a:r>
+              <a:rPr lang="en-US" sz="950" dirty="0">
+                <a:solidFill>
+                  <a:srgbClr val="333333"/>
+                </a:solidFill>
+                <a:latin typeface="Arial" pitchFamily="34" charset="0"/>
+                <a:ea typeface="Arial" pitchFamily="34" charset="-122"/>
+                <a:cs typeface="Arial" pitchFamily="34" charset="-120"/>
+              </a:rPr>
+              <a:t>Stores data so logic can read it at terabit speeds.</a:t>
+            </a:r>
+            <a:endParaRPr lang="en-US" sz="950" dirty="0"/>
+          </a:p>
+        </p:txBody>
+      </p:sp>
+      <p:sp>
+        <p:nvSpPr>
+          <p:cNvPr id="42" name="Text 40"/>
+          <p:cNvSpPr/>
+          <p:nvPr/>
+        </p:nvSpPr>
+        <p:spPr>
+          <a:xfrm>
+            <a:off x="3383280" y="3392424"/>
+            <a:ext cx="2377440" cy="237744"/>
+          </a:xfrm>
+          <a:prstGeom prst="rect">
+            <a:avLst/>
+          </a:prstGeom>
+          <a:noFill/>
+          <a:ln/>
+        </p:spPr>
+        <p:txBody>
+          <a:bodyPr wrap="square" lIns="0" tIns="0" rIns="0" bIns="0" rtlCol="0" anchor="t"/>
+          <a:lstStyle/>
+          <a:p>
+            <a:pPr indent="0" marL="0">
+              <a:buNone/>
+            </a:pPr>
+            <a:r>
+              <a:rPr lang="en-US" sz="850" i="1" dirty="0">
                 <a:solidFill>
                   <a:srgbClr val="666666"/>
                 </a:solidFill>
@@ -33398,22 +34392,22 @@
                 <a:ea typeface="Arial" pitchFamily="34" charset="-122"/>
                 <a:cs typeface="Arial" pitchFamily="34" charset="-120"/>
               </a:rPr>
-              <a:t>stores</a:t>
-            </a:r>
-            <a:endParaRPr lang="en-US" sz="1050" dirty="0"/>
-          </a:p>
-        </p:txBody>
-      </p:sp>
-      <p:sp>
-        <p:nvSpPr>
-          <p:cNvPr id="13" name="Shape 11"/>
-          <p:cNvSpPr/>
-          <p:nvPr/>
-        </p:nvSpPr>
-        <p:spPr>
-          <a:xfrm>
-            <a:off x="4572000" y="1764792"/>
-            <a:ext cx="0" cy="310896"/>
+              <a:t>DRAM, HBM, NAND — every AI server</a:t>
+            </a:r>
+            <a:endParaRPr lang="en-US" sz="850" dirty="0"/>
+          </a:p>
+        </p:txBody>
+      </p:sp>
+      <p:sp>
+        <p:nvSpPr>
+          <p:cNvPr id="43" name="Shape 41"/>
+          <p:cNvSpPr/>
+          <p:nvPr/>
+        </p:nvSpPr>
+        <p:spPr>
+          <a:xfrm>
+            <a:off x="3429000" y="3648456"/>
+            <a:ext cx="2286000" cy="0"/>
           </a:xfrm>
           <a:prstGeom prst="line">
             <a:avLst/>
@@ -33429,16 +34423,309 @@
       </p:sp>
       <p:sp>
         <p:nvSpPr>
-          <p:cNvPr id="14" name="Shape 12"/>
-          <p:cNvSpPr/>
-          <p:nvPr/>
-        </p:nvSpPr>
-        <p:spPr>
-          <a:xfrm>
-            <a:off x="4773168" y="1847088"/>
-            <a:ext cx="146304" cy="146304"/>
-          </a:xfrm>
-          <a:prstGeom prst="ellipse">
+          <p:cNvPr id="44" name="Text 42"/>
+          <p:cNvSpPr/>
+          <p:nvPr/>
+        </p:nvSpPr>
+        <p:spPr>
+          <a:xfrm>
+            <a:off x="3246120" y="3666744"/>
+            <a:ext cx="2651760" cy="201168"/>
+          </a:xfrm>
+          <a:prstGeom prst="rect">
+            <a:avLst/>
+          </a:prstGeom>
+          <a:noFill/>
+          <a:ln/>
+        </p:spPr>
+        <p:txBody>
+          <a:bodyPr wrap="square" lIns="0" tIns="0" rIns="0" bIns="0" rtlCol="0" anchor="ctr"/>
+          <a:lstStyle/>
+          <a:p>
+            <a:pPr algn="ctr" indent="0" marL="0">
+              <a:buNone/>
+            </a:pPr>
+            <a:r>
+              <a:rPr lang="en-US" sz="750" i="1" dirty="0">
+                <a:solidFill>
+                  <a:srgbClr val="666666"/>
+                </a:solidFill>
+                <a:latin typeface="Arial" pitchFamily="34" charset="0"/>
+                <a:ea typeface="Arial" pitchFamily="34" charset="-122"/>
+                <a:cs typeface="Arial" pitchFamily="34" charset="-120"/>
+              </a:rPr>
+              <a:t>SK Hynix · Samsung · Micron</a:t>
+            </a:r>
+            <a:endParaRPr lang="en-US" sz="750" dirty="0"/>
+          </a:p>
+        </p:txBody>
+      </p:sp>
+      <p:sp>
+        <p:nvSpPr>
+          <p:cNvPr id="45" name="Shape 43"/>
+          <p:cNvSpPr/>
+          <p:nvPr/>
+        </p:nvSpPr>
+        <p:spPr>
+          <a:xfrm>
+            <a:off x="6035040" y="2606040"/>
+            <a:ext cx="2651760" cy="1280160"/>
+          </a:xfrm>
+          <a:prstGeom prst="rect">
+            <a:avLst/>
+          </a:prstGeom>
+          <a:solidFill>
+            <a:srgbClr val="F9F9F9"/>
+          </a:solidFill>
+          <a:ln w="6350">
+            <a:solidFill>
+              <a:srgbClr val="E5E5E5"/>
+            </a:solidFill>
+            <a:prstDash val="solid"/>
+          </a:ln>
+        </p:spPr>
+      </p:sp>
+      <p:sp>
+        <p:nvSpPr>
+          <p:cNvPr id="46" name="Shape 44"/>
+          <p:cNvSpPr/>
+          <p:nvPr/>
+        </p:nvSpPr>
+        <p:spPr>
+          <a:xfrm>
+            <a:off x="6035040" y="2606040"/>
+            <a:ext cx="2651760" cy="256032"/>
+          </a:xfrm>
+          <a:prstGeom prst="rect">
+            <a:avLst/>
+          </a:prstGeom>
+          <a:solidFill>
+            <a:srgbClr val="008B8B"/>
+          </a:solidFill>
+          <a:ln w="12700">
+            <a:solidFill>
+              <a:srgbClr val="008B8B"/>
+            </a:solidFill>
+            <a:prstDash val="solid"/>
+          </a:ln>
+        </p:spPr>
+      </p:sp>
+      <p:sp>
+        <p:nvSpPr>
+          <p:cNvPr id="47" name="Text 45"/>
+          <p:cNvSpPr/>
+          <p:nvPr/>
+        </p:nvSpPr>
+        <p:spPr>
+          <a:xfrm>
+            <a:off x="6035040" y="2606040"/>
+            <a:ext cx="2651760" cy="256032"/>
+          </a:xfrm>
+          <a:prstGeom prst="rect">
+            <a:avLst/>
+          </a:prstGeom>
+          <a:noFill/>
+          <a:ln/>
+        </p:spPr>
+        <p:txBody>
+          <a:bodyPr wrap="square" lIns="0" tIns="0" rIns="0" bIns="0" rtlCol="0" anchor="ctr"/>
+          <a:lstStyle/>
+          <a:p>
+            <a:pPr algn="ctr" indent="0" marL="0">
+              <a:buNone/>
+            </a:pPr>
+            <a:r>
+              <a:rPr lang="en-US" sz="1000" b="1" spc="200" kern="0" dirty="0">
+                <a:solidFill>
+                  <a:srgbClr val="FFFFFF"/>
+                </a:solidFill>
+                <a:latin typeface="Arial" pitchFamily="34" charset="0"/>
+                <a:ea typeface="Arial" pitchFamily="34" charset="-122"/>
+                <a:cs typeface="Arial" pitchFamily="34" charset="-120"/>
+              </a:rPr>
+              <a:t>PROCESSORS</a:t>
+            </a:r>
+            <a:endParaRPr lang="en-US" sz="1000" dirty="0"/>
+          </a:p>
+        </p:txBody>
+      </p:sp>
+      <p:sp>
+        <p:nvSpPr>
+          <p:cNvPr id="48" name="Text 46"/>
+          <p:cNvSpPr/>
+          <p:nvPr/>
+        </p:nvSpPr>
+        <p:spPr>
+          <a:xfrm>
+            <a:off x="6172200" y="2916936"/>
+            <a:ext cx="2377440" cy="457200"/>
+          </a:xfrm>
+          <a:prstGeom prst="rect">
+            <a:avLst/>
+          </a:prstGeom>
+          <a:noFill/>
+          <a:ln/>
+        </p:spPr>
+        <p:txBody>
+          <a:bodyPr wrap="square" lIns="0" tIns="0" rIns="0" bIns="0" rtlCol="0" anchor="t"/>
+          <a:lstStyle/>
+          <a:p>
+            <a:pPr indent="0" marL="0">
+              <a:buNone/>
+            </a:pPr>
+            <a:r>
+              <a:rPr lang="en-US" sz="950" dirty="0">
+                <a:solidFill>
+                  <a:srgbClr val="333333"/>
+                </a:solidFill>
+                <a:latin typeface="Arial" pitchFamily="34" charset="0"/>
+                <a:ea typeface="Arial" pitchFamily="34" charset="-122"/>
+                <a:cs typeface="Arial" pitchFamily="34" charset="-120"/>
+              </a:rPr>
+              <a:t>General-purpose silicon that runs your operating system.</a:t>
+            </a:r>
+            <a:endParaRPr lang="en-US" sz="950" dirty="0"/>
+          </a:p>
+        </p:txBody>
+      </p:sp>
+      <p:sp>
+        <p:nvSpPr>
+          <p:cNvPr id="49" name="Text 47"/>
+          <p:cNvSpPr/>
+          <p:nvPr/>
+        </p:nvSpPr>
+        <p:spPr>
+          <a:xfrm>
+            <a:off x="6172200" y="3392424"/>
+            <a:ext cx="2377440" cy="237744"/>
+          </a:xfrm>
+          <a:prstGeom prst="rect">
+            <a:avLst/>
+          </a:prstGeom>
+          <a:noFill/>
+          <a:ln/>
+        </p:spPr>
+        <p:txBody>
+          <a:bodyPr wrap="square" lIns="0" tIns="0" rIns="0" bIns="0" rtlCol="0" anchor="t"/>
+          <a:lstStyle/>
+          <a:p>
+            <a:pPr indent="0" marL="0">
+              <a:buNone/>
+            </a:pPr>
+            <a:r>
+              <a:rPr lang="en-US" sz="850" i="1" dirty="0">
+                <a:solidFill>
+                  <a:srgbClr val="666666"/>
+                </a:solidFill>
+                <a:latin typeface="Arial" pitchFamily="34" charset="0"/>
+                <a:ea typeface="Arial" pitchFamily="34" charset="-122"/>
+                <a:cs typeface="Arial" pitchFamily="34" charset="-120"/>
+              </a:rPr>
+              <a:t>CPUs in every phone and PC</a:t>
+            </a:r>
+            <a:endParaRPr lang="en-US" sz="850" dirty="0"/>
+          </a:p>
+        </p:txBody>
+      </p:sp>
+      <p:sp>
+        <p:nvSpPr>
+          <p:cNvPr id="50" name="Shape 48"/>
+          <p:cNvSpPr/>
+          <p:nvPr/>
+        </p:nvSpPr>
+        <p:spPr>
+          <a:xfrm>
+            <a:off x="6217920" y="3648456"/>
+            <a:ext cx="2286000" cy="0"/>
+          </a:xfrm>
+          <a:prstGeom prst="line">
+            <a:avLst/>
+          </a:prstGeom>
+          <a:noFill/>
+          <a:ln w="6350">
+            <a:solidFill>
+              <a:srgbClr val="E5E5E5"/>
+            </a:solidFill>
+            <a:prstDash val="solid"/>
+          </a:ln>
+        </p:spPr>
+      </p:sp>
+      <p:sp>
+        <p:nvSpPr>
+          <p:cNvPr id="51" name="Text 49"/>
+          <p:cNvSpPr/>
+          <p:nvPr/>
+        </p:nvSpPr>
+        <p:spPr>
+          <a:xfrm>
+            <a:off x="6035040" y="3666744"/>
+            <a:ext cx="2651760" cy="201168"/>
+          </a:xfrm>
+          <a:prstGeom prst="rect">
+            <a:avLst/>
+          </a:prstGeom>
+          <a:noFill/>
+          <a:ln/>
+        </p:spPr>
+        <p:txBody>
+          <a:bodyPr wrap="square" lIns="0" tIns="0" rIns="0" bIns="0" rtlCol="0" anchor="ctr"/>
+          <a:lstStyle/>
+          <a:p>
+            <a:pPr algn="ctr" indent="0" marL="0">
+              <a:buNone/>
+            </a:pPr>
+            <a:r>
+              <a:rPr lang="en-US" sz="750" i="1" dirty="0">
+                <a:solidFill>
+                  <a:srgbClr val="666666"/>
+                </a:solidFill>
+                <a:latin typeface="Arial" pitchFamily="34" charset="0"/>
+                <a:ea typeface="Arial" pitchFamily="34" charset="-122"/>
+                <a:cs typeface="Arial" pitchFamily="34" charset="-120"/>
+              </a:rPr>
+              <a:t>Intel · AMD · Apple · Qualcomm</a:t>
+            </a:r>
+            <a:endParaRPr lang="en-US" sz="750" dirty="0"/>
+          </a:p>
+        </p:txBody>
+      </p:sp>
+      <p:sp>
+        <p:nvSpPr>
+          <p:cNvPr id="52" name="Shape 50"/>
+          <p:cNvSpPr/>
+          <p:nvPr/>
+        </p:nvSpPr>
+        <p:spPr>
+          <a:xfrm>
+            <a:off x="457200" y="3977640"/>
+            <a:ext cx="2651760" cy="1280160"/>
+          </a:xfrm>
+          <a:prstGeom prst="rect">
+            <a:avLst/>
+          </a:prstGeom>
+          <a:solidFill>
+            <a:srgbClr val="F9F9F9"/>
+          </a:solidFill>
+          <a:ln w="6350">
+            <a:solidFill>
+              <a:srgbClr val="E5E5E5"/>
+            </a:solidFill>
+            <a:prstDash val="solid"/>
+          </a:ln>
+        </p:spPr>
+      </p:sp>
+      <p:sp>
+        <p:nvSpPr>
+          <p:cNvPr id="53" name="Shape 51"/>
+          <p:cNvSpPr/>
+          <p:nvPr/>
+        </p:nvSpPr>
+        <p:spPr>
+          <a:xfrm>
+            <a:off x="457200" y="3977640"/>
+            <a:ext cx="2651760" cy="256032"/>
+          </a:xfrm>
+          <a:prstGeom prst="rect">
             <a:avLst/>
           </a:prstGeom>
           <a:solidFill>
@@ -33454,14 +34741,14 @@
       </p:sp>
       <p:sp>
         <p:nvSpPr>
-          <p:cNvPr id="15" name="Text 13"/>
-          <p:cNvSpPr/>
-          <p:nvPr/>
-        </p:nvSpPr>
-        <p:spPr>
-          <a:xfrm>
-            <a:off x="4974336" y="1691640"/>
-            <a:ext cx="1600200" cy="457200"/>
+          <p:cNvPr id="54" name="Text 52"/>
+          <p:cNvSpPr/>
+          <p:nvPr/>
+        </p:nvSpPr>
+        <p:spPr>
+          <a:xfrm>
+            <a:off x="457200" y="3977640"/>
+            <a:ext cx="2651760" cy="256032"/>
           </a:xfrm>
           <a:prstGeom prst="rect">
             <a:avLst/>
@@ -33473,25 +34760,89 @@
           <a:bodyPr wrap="square" lIns="0" tIns="0" rIns="0" bIns="0" rtlCol="0" anchor="ctr"/>
           <a:lstStyle/>
           <a:p>
-            <a:pPr indent="0" marL="0">
-              <a:buNone/>
-            </a:pPr>
-            <a:r>
-              <a:rPr lang="en-US" sz="1050" b="1" spc="200" kern="0" dirty="0">
-                <a:solidFill>
-                  <a:srgbClr val="000000"/>
-                </a:solidFill>
-                <a:latin typeface="Arial" pitchFamily="34" charset="0"/>
-                <a:ea typeface="Arial" pitchFamily="34" charset="-122"/>
-                <a:cs typeface="Arial" pitchFamily="34" charset="-120"/>
-              </a:rPr>
-              <a:t>ANALOG  </a:t>
-            </a:r>
-            <a:pPr indent="0" marL="0">
-              <a:buNone/>
-            </a:pPr>
-            <a:r>
-              <a:rPr lang="en-US" sz="1050" i="1" dirty="0">
+            <a:pPr algn="ctr" indent="0" marL="0">
+              <a:buNone/>
+            </a:pPr>
+            <a:r>
+              <a:rPr lang="en-US" sz="1000" b="1" spc="200" kern="0" dirty="0">
+                <a:solidFill>
+                  <a:srgbClr val="FFFFFF"/>
+                </a:solidFill>
+                <a:latin typeface="Arial" pitchFamily="34" charset="0"/>
+                <a:ea typeface="Arial" pitchFamily="34" charset="-122"/>
+                <a:cs typeface="Arial" pitchFamily="34" charset="-120"/>
+              </a:rPr>
+              <a:t>ANALOG</a:t>
+            </a:r>
+            <a:endParaRPr lang="en-US" sz="1000" dirty="0"/>
+          </a:p>
+        </p:txBody>
+      </p:sp>
+      <p:sp>
+        <p:nvSpPr>
+          <p:cNvPr id="55" name="Text 53"/>
+          <p:cNvSpPr/>
+          <p:nvPr/>
+        </p:nvSpPr>
+        <p:spPr>
+          <a:xfrm>
+            <a:off x="594360" y="4288536"/>
+            <a:ext cx="2377440" cy="457200"/>
+          </a:xfrm>
+          <a:prstGeom prst="rect">
+            <a:avLst/>
+          </a:prstGeom>
+          <a:noFill/>
+          <a:ln/>
+        </p:spPr>
+        <p:txBody>
+          <a:bodyPr wrap="square" lIns="0" tIns="0" rIns="0" bIns="0" rtlCol="0" anchor="t"/>
+          <a:lstStyle/>
+          <a:p>
+            <a:pPr indent="0" marL="0">
+              <a:buNone/>
+            </a:pPr>
+            <a:r>
+              <a:rPr lang="en-US" sz="950" dirty="0">
+                <a:solidFill>
+                  <a:srgbClr val="333333"/>
+                </a:solidFill>
+                <a:latin typeface="Arial" pitchFamily="34" charset="0"/>
+                <a:ea typeface="Arial" pitchFamily="34" charset="-122"/>
+                <a:cs typeface="Arial" pitchFamily="34" charset="-120"/>
+              </a:rPr>
+              <a:t>The bridge between silicon and the real world — voltages, signals, RF.</a:t>
+            </a:r>
+            <a:endParaRPr lang="en-US" sz="950" dirty="0"/>
+          </a:p>
+        </p:txBody>
+      </p:sp>
+      <p:sp>
+        <p:nvSpPr>
+          <p:cNvPr id="56" name="Text 54"/>
+          <p:cNvSpPr/>
+          <p:nvPr/>
+        </p:nvSpPr>
+        <p:spPr>
+          <a:xfrm>
+            <a:off x="594360" y="4764024"/>
+            <a:ext cx="2377440" cy="237744"/>
+          </a:xfrm>
+          <a:prstGeom prst="rect">
+            <a:avLst/>
+          </a:prstGeom>
+          <a:noFill/>
+          <a:ln/>
+        </p:spPr>
+        <p:txBody>
+          <a:bodyPr wrap="square" lIns="0" tIns="0" rIns="0" bIns="0" rtlCol="0" anchor="t"/>
+          <a:lstStyle/>
+          <a:p>
+            <a:pPr indent="0" marL="0">
+              <a:buNone/>
+            </a:pPr>
+            <a:r>
+              <a:rPr lang="en-US" sz="850" i="1" dirty="0">
                 <a:solidFill>
                   <a:srgbClr val="666666"/>
                 </a:solidFill>
@@ -33499,22 +34850,22 @@
                 <a:ea typeface="Arial" pitchFamily="34" charset="-122"/>
                 <a:cs typeface="Arial" pitchFamily="34" charset="-120"/>
               </a:rPr>
-              <a:t>senses</a:t>
-            </a:r>
-            <a:endParaRPr lang="en-US" sz="1050" dirty="0"/>
-          </a:p>
-        </p:txBody>
-      </p:sp>
-      <p:sp>
-        <p:nvSpPr>
-          <p:cNvPr id="16" name="Shape 14"/>
-          <p:cNvSpPr/>
-          <p:nvPr/>
-        </p:nvSpPr>
-        <p:spPr>
-          <a:xfrm>
-            <a:off x="6629400" y="1764792"/>
-            <a:ext cx="0" cy="310896"/>
+              <a:t>Power management, radio, audio</a:t>
+            </a:r>
+            <a:endParaRPr lang="en-US" sz="850" dirty="0"/>
+          </a:p>
+        </p:txBody>
+      </p:sp>
+      <p:sp>
+        <p:nvSpPr>
+          <p:cNvPr id="57" name="Shape 55"/>
+          <p:cNvSpPr/>
+          <p:nvPr/>
+        </p:nvSpPr>
+        <p:spPr>
+          <a:xfrm>
+            <a:off x="640080" y="5020056"/>
+            <a:ext cx="2286000" cy="0"/>
           </a:xfrm>
           <a:prstGeom prst="line">
             <a:avLst/>
@@ -33530,16 +34881,309 @@
       </p:sp>
       <p:sp>
         <p:nvSpPr>
-          <p:cNvPr id="17" name="Shape 15"/>
-          <p:cNvSpPr/>
-          <p:nvPr/>
-        </p:nvSpPr>
-        <p:spPr>
-          <a:xfrm>
-            <a:off x="6830568" y="1847088"/>
-            <a:ext cx="146304" cy="146304"/>
-          </a:xfrm>
-          <a:prstGeom prst="ellipse">
+          <p:cNvPr id="58" name="Text 56"/>
+          <p:cNvSpPr/>
+          <p:nvPr/>
+        </p:nvSpPr>
+        <p:spPr>
+          <a:xfrm>
+            <a:off x="457200" y="5038344"/>
+            <a:ext cx="2651760" cy="201168"/>
+          </a:xfrm>
+          <a:prstGeom prst="rect">
+            <a:avLst/>
+          </a:prstGeom>
+          <a:noFill/>
+          <a:ln/>
+        </p:spPr>
+        <p:txBody>
+          <a:bodyPr wrap="square" lIns="0" tIns="0" rIns="0" bIns="0" rtlCol="0" anchor="ctr"/>
+          <a:lstStyle/>
+          <a:p>
+            <a:pPr algn="ctr" indent="0" marL="0">
+              <a:buNone/>
+            </a:pPr>
+            <a:r>
+              <a:rPr lang="en-US" sz="750" i="1" dirty="0">
+                <a:solidFill>
+                  <a:srgbClr val="666666"/>
+                </a:solidFill>
+                <a:latin typeface="Arial" pitchFamily="34" charset="0"/>
+                <a:ea typeface="Arial" pitchFamily="34" charset="-122"/>
+                <a:cs typeface="Arial" pitchFamily="34" charset="-120"/>
+              </a:rPr>
+              <a:t>TI · Analog Devices · Infineon</a:t>
+            </a:r>
+            <a:endParaRPr lang="en-US" sz="750" dirty="0"/>
+          </a:p>
+        </p:txBody>
+      </p:sp>
+      <p:sp>
+        <p:nvSpPr>
+          <p:cNvPr id="59" name="Shape 57"/>
+          <p:cNvSpPr/>
+          <p:nvPr/>
+        </p:nvSpPr>
+        <p:spPr>
+          <a:xfrm>
+            <a:off x="3246120" y="3977640"/>
+            <a:ext cx="2651760" cy="1280160"/>
+          </a:xfrm>
+          <a:prstGeom prst="rect">
+            <a:avLst/>
+          </a:prstGeom>
+          <a:solidFill>
+            <a:srgbClr val="F9F9F9"/>
+          </a:solidFill>
+          <a:ln w="6350">
+            <a:solidFill>
+              <a:srgbClr val="E5E5E5"/>
+            </a:solidFill>
+            <a:prstDash val="solid"/>
+          </a:ln>
+        </p:spPr>
+      </p:sp>
+      <p:sp>
+        <p:nvSpPr>
+          <p:cNvPr id="60" name="Shape 58"/>
+          <p:cNvSpPr/>
+          <p:nvPr/>
+        </p:nvSpPr>
+        <p:spPr>
+          <a:xfrm>
+            <a:off x="3246120" y="3977640"/>
+            <a:ext cx="2651760" cy="256032"/>
+          </a:xfrm>
+          <a:prstGeom prst="rect">
+            <a:avLst/>
+          </a:prstGeom>
+          <a:solidFill>
+            <a:srgbClr val="00A854"/>
+          </a:solidFill>
+          <a:ln w="12700">
+            <a:solidFill>
+              <a:srgbClr val="00A854"/>
+            </a:solidFill>
+            <a:prstDash val="solid"/>
+          </a:ln>
+        </p:spPr>
+      </p:sp>
+      <p:sp>
+        <p:nvSpPr>
+          <p:cNvPr id="61" name="Text 59"/>
+          <p:cNvSpPr/>
+          <p:nvPr/>
+        </p:nvSpPr>
+        <p:spPr>
+          <a:xfrm>
+            <a:off x="3246120" y="3977640"/>
+            <a:ext cx="2651760" cy="256032"/>
+          </a:xfrm>
+          <a:prstGeom prst="rect">
+            <a:avLst/>
+          </a:prstGeom>
+          <a:noFill/>
+          <a:ln/>
+        </p:spPr>
+        <p:txBody>
+          <a:bodyPr wrap="square" lIns="0" tIns="0" rIns="0" bIns="0" rtlCol="0" anchor="ctr"/>
+          <a:lstStyle/>
+          <a:p>
+            <a:pPr algn="ctr" indent="0" marL="0">
+              <a:buNone/>
+            </a:pPr>
+            <a:r>
+              <a:rPr lang="en-US" sz="1000" b="1" spc="200" kern="0" dirty="0">
+                <a:solidFill>
+                  <a:srgbClr val="FFFFFF"/>
+                </a:solidFill>
+                <a:latin typeface="Arial" pitchFamily="34" charset="0"/>
+                <a:ea typeface="Arial" pitchFamily="34" charset="-122"/>
+                <a:cs typeface="Arial" pitchFamily="34" charset="-120"/>
+              </a:rPr>
+              <a:t>SENSORS + OPTO</a:t>
+            </a:r>
+            <a:endParaRPr lang="en-US" sz="1000" dirty="0"/>
+          </a:p>
+        </p:txBody>
+      </p:sp>
+      <p:sp>
+        <p:nvSpPr>
+          <p:cNvPr id="62" name="Text 60"/>
+          <p:cNvSpPr/>
+          <p:nvPr/>
+        </p:nvSpPr>
+        <p:spPr>
+          <a:xfrm>
+            <a:off x="3383280" y="4288536"/>
+            <a:ext cx="2377440" cy="457200"/>
+          </a:xfrm>
+          <a:prstGeom prst="rect">
+            <a:avLst/>
+          </a:prstGeom>
+          <a:noFill/>
+          <a:ln/>
+        </p:spPr>
+        <p:txBody>
+          <a:bodyPr wrap="square" lIns="0" tIns="0" rIns="0" bIns="0" rtlCol="0" anchor="t"/>
+          <a:lstStyle/>
+          <a:p>
+            <a:pPr indent="0" marL="0">
+              <a:buNone/>
+            </a:pPr>
+            <a:r>
+              <a:rPr lang="en-US" sz="950" dirty="0">
+                <a:solidFill>
+                  <a:srgbClr val="333333"/>
+                </a:solidFill>
+                <a:latin typeface="Arial" pitchFamily="34" charset="0"/>
+                <a:ea typeface="Arial" pitchFamily="34" charset="-122"/>
+                <a:cs typeface="Arial" pitchFamily="34" charset="-120"/>
+              </a:rPr>
+              <a:t>How chips see, hear, and communicate with photons.</a:t>
+            </a:r>
+            <a:endParaRPr lang="en-US" sz="950" dirty="0"/>
+          </a:p>
+        </p:txBody>
+      </p:sp>
+      <p:sp>
+        <p:nvSpPr>
+          <p:cNvPr id="63" name="Text 61"/>
+          <p:cNvSpPr/>
+          <p:nvPr/>
+        </p:nvSpPr>
+        <p:spPr>
+          <a:xfrm>
+            <a:off x="3383280" y="4764024"/>
+            <a:ext cx="2377440" cy="237744"/>
+          </a:xfrm>
+          <a:prstGeom prst="rect">
+            <a:avLst/>
+          </a:prstGeom>
+          <a:noFill/>
+          <a:ln/>
+        </p:spPr>
+        <p:txBody>
+          <a:bodyPr wrap="square" lIns="0" tIns="0" rIns="0" bIns="0" rtlCol="0" anchor="t"/>
+          <a:lstStyle/>
+          <a:p>
+            <a:pPr indent="0" marL="0">
+              <a:buNone/>
+            </a:pPr>
+            <a:r>
+              <a:rPr lang="en-US" sz="850" i="1" dirty="0">
+                <a:solidFill>
+                  <a:srgbClr val="666666"/>
+                </a:solidFill>
+                <a:latin typeface="Arial" pitchFamily="34" charset="0"/>
+                <a:ea typeface="Arial" pitchFamily="34" charset="-122"/>
+                <a:cs typeface="Arial" pitchFamily="34" charset="-120"/>
+              </a:rPr>
+              <a:t>Phone cameras, lidar, fiber optics</a:t>
+            </a:r>
+            <a:endParaRPr lang="en-US" sz="850" dirty="0"/>
+          </a:p>
+        </p:txBody>
+      </p:sp>
+      <p:sp>
+        <p:nvSpPr>
+          <p:cNvPr id="64" name="Shape 62"/>
+          <p:cNvSpPr/>
+          <p:nvPr/>
+        </p:nvSpPr>
+        <p:spPr>
+          <a:xfrm>
+            <a:off x="3429000" y="5020056"/>
+            <a:ext cx="2286000" cy="0"/>
+          </a:xfrm>
+          <a:prstGeom prst="line">
+            <a:avLst/>
+          </a:prstGeom>
+          <a:noFill/>
+          <a:ln w="6350">
+            <a:solidFill>
+              <a:srgbClr val="E5E5E5"/>
+            </a:solidFill>
+            <a:prstDash val="solid"/>
+          </a:ln>
+        </p:spPr>
+      </p:sp>
+      <p:sp>
+        <p:nvSpPr>
+          <p:cNvPr id="65" name="Text 63"/>
+          <p:cNvSpPr/>
+          <p:nvPr/>
+        </p:nvSpPr>
+        <p:spPr>
+          <a:xfrm>
+            <a:off x="3246120" y="5038344"/>
+            <a:ext cx="2651760" cy="201168"/>
+          </a:xfrm>
+          <a:prstGeom prst="rect">
+            <a:avLst/>
+          </a:prstGeom>
+          <a:noFill/>
+          <a:ln/>
+        </p:spPr>
+        <p:txBody>
+          <a:bodyPr wrap="square" lIns="0" tIns="0" rIns="0" bIns="0" rtlCol="0" anchor="ctr"/>
+          <a:lstStyle/>
+          <a:p>
+            <a:pPr algn="ctr" indent="0" marL="0">
+              <a:buNone/>
+            </a:pPr>
+            <a:r>
+              <a:rPr lang="en-US" sz="750" i="1" dirty="0">
+                <a:solidFill>
+                  <a:srgbClr val="666666"/>
+                </a:solidFill>
+                <a:latin typeface="Arial" pitchFamily="34" charset="0"/>
+                <a:ea typeface="Arial" pitchFamily="34" charset="-122"/>
+                <a:cs typeface="Arial" pitchFamily="34" charset="-120"/>
+              </a:rPr>
+              <a:t>Sony · Samsung · STMicro</a:t>
+            </a:r>
+            <a:endParaRPr lang="en-US" sz="750" dirty="0"/>
+          </a:p>
+        </p:txBody>
+      </p:sp>
+      <p:sp>
+        <p:nvSpPr>
+          <p:cNvPr id="66" name="Shape 64"/>
+          <p:cNvSpPr/>
+          <p:nvPr/>
+        </p:nvSpPr>
+        <p:spPr>
+          <a:xfrm>
+            <a:off x="6035040" y="3977640"/>
+            <a:ext cx="2651760" cy="1280160"/>
+          </a:xfrm>
+          <a:prstGeom prst="rect">
+            <a:avLst/>
+          </a:prstGeom>
+          <a:solidFill>
+            <a:srgbClr val="F9F9F9"/>
+          </a:solidFill>
+          <a:ln w="6350">
+            <a:solidFill>
+              <a:srgbClr val="E5E5E5"/>
+            </a:solidFill>
+            <a:prstDash val="solid"/>
+          </a:ln>
+        </p:spPr>
+      </p:sp>
+      <p:sp>
+        <p:nvSpPr>
+          <p:cNvPr id="67" name="Shape 65"/>
+          <p:cNvSpPr/>
+          <p:nvPr/>
+        </p:nvSpPr>
+        <p:spPr>
+          <a:xfrm>
+            <a:off x="6035040" y="3977640"/>
+            <a:ext cx="2651760" cy="256032"/>
+          </a:xfrm>
+          <a:prstGeom prst="rect">
             <a:avLst/>
           </a:prstGeom>
           <a:solidFill>
@@ -33555,14 +35199,14 @@
       </p:sp>
       <p:sp>
         <p:nvSpPr>
-          <p:cNvPr id="18" name="Text 16"/>
-          <p:cNvSpPr/>
-          <p:nvPr/>
-        </p:nvSpPr>
-        <p:spPr>
-          <a:xfrm>
-            <a:off x="7031736" y="1691640"/>
-            <a:ext cx="1600200" cy="457200"/>
+          <p:cNvPr id="68" name="Text 66"/>
+          <p:cNvSpPr/>
+          <p:nvPr/>
+        </p:nvSpPr>
+        <p:spPr>
+          <a:xfrm>
+            <a:off x="6035040" y="3977640"/>
+            <a:ext cx="2651760" cy="256032"/>
           </a:xfrm>
           <a:prstGeom prst="rect">
             <a:avLst/>
@@ -33574,25 +35218,89 @@
           <a:bodyPr wrap="square" lIns="0" tIns="0" rIns="0" bIns="0" rtlCol="0" anchor="ctr"/>
           <a:lstStyle/>
           <a:p>
-            <a:pPr indent="0" marL="0">
-              <a:buNone/>
-            </a:pPr>
-            <a:r>
-              <a:rPr lang="en-US" sz="1050" b="1" spc="200" kern="0" dirty="0">
-                <a:solidFill>
-                  <a:srgbClr val="000000"/>
-                </a:solidFill>
-                <a:latin typeface="Arial" pitchFamily="34" charset="0"/>
-                <a:ea typeface="Arial" pitchFamily="34" charset="-122"/>
-                <a:cs typeface="Arial" pitchFamily="34" charset="-120"/>
-              </a:rPr>
-              <a:t>POWER  </a:t>
-            </a:r>
-            <a:pPr indent="0" marL="0">
-              <a:buNone/>
-            </a:pPr>
-            <a:r>
-              <a:rPr lang="en-US" sz="1050" i="1" dirty="0">
+            <a:pPr algn="ctr" indent="0" marL="0">
+              <a:buNone/>
+            </a:pPr>
+            <a:r>
+              <a:rPr lang="en-US" sz="1000" b="1" spc="200" kern="0" dirty="0">
+                <a:solidFill>
+                  <a:srgbClr val="FFFFFF"/>
+                </a:solidFill>
+                <a:latin typeface="Arial" pitchFamily="34" charset="0"/>
+                <a:ea typeface="Arial" pitchFamily="34" charset="-122"/>
+                <a:cs typeface="Arial" pitchFamily="34" charset="-120"/>
+              </a:rPr>
+              <a:t>DISCRETE + POWER</a:t>
+            </a:r>
+            <a:endParaRPr lang="en-US" sz="1000" dirty="0"/>
+          </a:p>
+        </p:txBody>
+      </p:sp>
+      <p:sp>
+        <p:nvSpPr>
+          <p:cNvPr id="69" name="Text 67"/>
+          <p:cNvSpPr/>
+          <p:nvPr/>
+        </p:nvSpPr>
+        <p:spPr>
+          <a:xfrm>
+            <a:off x="6172200" y="4288536"/>
+            <a:ext cx="2377440" cy="457200"/>
+          </a:xfrm>
+          <a:prstGeom prst="rect">
+            <a:avLst/>
+          </a:prstGeom>
+          <a:noFill/>
+          <a:ln/>
+        </p:spPr>
+        <p:txBody>
+          <a:bodyPr wrap="square" lIns="0" tIns="0" rIns="0" bIns="0" rtlCol="0" anchor="t"/>
+          <a:lstStyle/>
+          <a:p>
+            <a:pPr indent="0" marL="0">
+              <a:buNone/>
+            </a:pPr>
+            <a:r>
+              <a:rPr lang="en-US" sz="950" dirty="0">
+                <a:solidFill>
+                  <a:srgbClr val="333333"/>
+                </a:solidFill>
+                <a:latin typeface="Arial" pitchFamily="34" charset="0"/>
+                <a:ea typeface="Arial" pitchFamily="34" charset="-122"/>
+                <a:cs typeface="Arial" pitchFamily="34" charset="-120"/>
+              </a:rPr>
+              <a:t>Heavy-current switching for machines, grids, and vehicles.</a:t>
+            </a:r>
+            <a:endParaRPr lang="en-US" sz="950" dirty="0"/>
+          </a:p>
+        </p:txBody>
+      </p:sp>
+      <p:sp>
+        <p:nvSpPr>
+          <p:cNvPr id="70" name="Text 68"/>
+          <p:cNvSpPr/>
+          <p:nvPr/>
+        </p:nvSpPr>
+        <p:spPr>
+          <a:xfrm>
+            <a:off x="6172200" y="4764024"/>
+            <a:ext cx="2377440" cy="237744"/>
+          </a:xfrm>
+          <a:prstGeom prst="rect">
+            <a:avLst/>
+          </a:prstGeom>
+          <a:noFill/>
+          <a:ln/>
+        </p:spPr>
+        <p:txBody>
+          <a:bodyPr wrap="square" lIns="0" tIns="0" rIns="0" bIns="0" rtlCol="0" anchor="t"/>
+          <a:lstStyle/>
+          <a:p>
+            <a:pPr indent="0" marL="0">
+              <a:buNone/>
+            </a:pPr>
+            <a:r>
+              <a:rPr lang="en-US" sz="850" i="1" dirty="0">
                 <a:solidFill>
                   <a:srgbClr val="666666"/>
                 </a:solidFill>
@@ -33600,29 +35308,27 @@
                 <a:ea typeface="Arial" pitchFamily="34" charset="-122"/>
                 <a:cs typeface="Arial" pitchFamily="34" charset="-120"/>
               </a:rPr>
-              <a:t>switches</a:t>
-            </a:r>
-            <a:endParaRPr lang="en-US" sz="1050" dirty="0"/>
-          </a:p>
-        </p:txBody>
-      </p:sp>
-      <p:sp>
-        <p:nvSpPr>
-          <p:cNvPr id="19" name="Shape 17"/>
-          <p:cNvSpPr/>
-          <p:nvPr/>
-        </p:nvSpPr>
-        <p:spPr>
-          <a:xfrm>
-            <a:off x="457200" y="2331720"/>
-            <a:ext cx="2651760" cy="1371600"/>
-          </a:xfrm>
-          <a:prstGeom prst="rect">
-            <a:avLst/>
-          </a:prstGeom>
-          <a:solidFill>
-            <a:srgbClr val="F9F9F9"/>
-          </a:solidFill>
+              <a:t>EVs, industrial motors, chargers</a:t>
+            </a:r>
+            <a:endParaRPr lang="en-US" sz="850" dirty="0"/>
+          </a:p>
+        </p:txBody>
+      </p:sp>
+      <p:sp>
+        <p:nvSpPr>
+          <p:cNvPr id="71" name="Shape 69"/>
+          <p:cNvSpPr/>
+          <p:nvPr/>
+        </p:nvSpPr>
+        <p:spPr>
+          <a:xfrm>
+            <a:off x="6217920" y="5020056"/>
+            <a:ext cx="2286000" cy="0"/>
+          </a:xfrm>
+          <a:prstGeom prst="line">
+            <a:avLst/>
+          </a:prstGeom>
+          <a:noFill/>
           <a:ln w="6350">
             <a:solidFill>
               <a:srgbClr val="E5E5E5"/>
@@ -33633,39 +35339,14 @@
       </p:sp>
       <p:sp>
         <p:nvSpPr>
-          <p:cNvPr id="20" name="Shape 18"/>
-          <p:cNvSpPr/>
-          <p:nvPr/>
-        </p:nvSpPr>
-        <p:spPr>
-          <a:xfrm>
-            <a:off x="457200" y="2331720"/>
-            <a:ext cx="2651760" cy="274320"/>
-          </a:xfrm>
-          <a:prstGeom prst="rect">
-            <a:avLst/>
-          </a:prstGeom>
-          <a:solidFill>
-            <a:srgbClr val="F6693D"/>
-          </a:solidFill>
-          <a:ln w="12700">
-            <a:solidFill>
-              <a:srgbClr val="F6693D"/>
-            </a:solidFill>
-            <a:prstDash val="solid"/>
-          </a:ln>
-        </p:spPr>
-      </p:sp>
-      <p:sp>
-        <p:nvSpPr>
-          <p:cNvPr id="21" name="Text 19"/>
-          <p:cNvSpPr/>
-          <p:nvPr/>
-        </p:nvSpPr>
-        <p:spPr>
-          <a:xfrm>
-            <a:off x="457200" y="2331720"/>
-            <a:ext cx="2651760" cy="274320"/>
+          <p:cNvPr id="72" name="Text 70"/>
+          <p:cNvSpPr/>
+          <p:nvPr/>
+        </p:nvSpPr>
+        <p:spPr>
+          <a:xfrm>
+            <a:off x="6035040" y="5038344"/>
+            <a:ext cx="2651760" cy="201168"/>
           </a:xfrm>
           <a:prstGeom prst="rect">
             <a:avLst/>
@@ -33681,85 +35362,7 @@
               <a:buNone/>
             </a:pPr>
             <a:r>
-              <a:rPr lang="en-US" sz="1000" b="1" spc="200" kern="0" dirty="0">
-                <a:solidFill>
-                  <a:srgbClr val="FFFFFF"/>
-                </a:solidFill>
-                <a:latin typeface="Arial" pitchFamily="34" charset="0"/>
-                <a:ea typeface="Arial" pitchFamily="34" charset="-122"/>
-                <a:cs typeface="Arial" pitchFamily="34" charset="-120"/>
-              </a:rPr>
-              <a:t>LOGIC</a:t>
-            </a:r>
-            <a:endParaRPr lang="en-US" sz="1000" dirty="0"/>
-          </a:p>
-        </p:txBody>
-      </p:sp>
-      <p:sp>
-        <p:nvSpPr>
-          <p:cNvPr id="22" name="Text 20"/>
-          <p:cNvSpPr/>
-          <p:nvPr/>
-        </p:nvSpPr>
-        <p:spPr>
-          <a:xfrm>
-            <a:off x="594360" y="2679192"/>
-            <a:ext cx="2377440" cy="475488"/>
-          </a:xfrm>
-          <a:prstGeom prst="rect">
-            <a:avLst/>
-          </a:prstGeom>
-          <a:noFill/>
-          <a:ln/>
-        </p:spPr>
-        <p:txBody>
-          <a:bodyPr wrap="square" lIns="0" tIns="0" rIns="0" bIns="0" rtlCol="0" anchor="t"/>
-          <a:lstStyle/>
-          <a:p>
-            <a:pPr indent="0" marL="0">
-              <a:buNone/>
-            </a:pPr>
-            <a:r>
-              <a:rPr lang="en-US" sz="1000" dirty="0">
-                <a:solidFill>
-                  <a:srgbClr val="333333"/>
-                </a:solidFill>
-                <a:latin typeface="Arial" pitchFamily="34" charset="0"/>
-                <a:ea typeface="Arial" pitchFamily="34" charset="-122"/>
-                <a:cs typeface="Arial" pitchFamily="34" charset="-120"/>
-              </a:rPr>
-              <a:t>Where computation happens — the chips that run code and move data.</a:t>
-            </a:r>
-            <a:endParaRPr lang="en-US" sz="1000" dirty="0"/>
-          </a:p>
-        </p:txBody>
-      </p:sp>
-      <p:sp>
-        <p:nvSpPr>
-          <p:cNvPr id="23" name="Text 21"/>
-          <p:cNvSpPr/>
-          <p:nvPr/>
-        </p:nvSpPr>
-        <p:spPr>
-          <a:xfrm>
-            <a:off x="594360" y="3172968"/>
-            <a:ext cx="2377440" cy="256032"/>
-          </a:xfrm>
-          <a:prstGeom prst="rect">
-            <a:avLst/>
-          </a:prstGeom>
-          <a:noFill/>
-          <a:ln/>
-        </p:spPr>
-        <p:txBody>
-          <a:bodyPr wrap="square" lIns="0" tIns="0" rIns="0" bIns="0" rtlCol="0" anchor="t"/>
-          <a:lstStyle/>
-          <a:p>
-            <a:pPr indent="0" marL="0">
-              <a:buNone/>
-            </a:pPr>
-            <a:r>
-              <a:rPr lang="en-US" sz="900" i="1" dirty="0">
+              <a:rPr lang="en-US" sz="750" i="1" dirty="0">
                 <a:solidFill>
                   <a:srgbClr val="666666"/>
                 </a:solidFill>
@@ -33767,69 +35370,7 @@
                 <a:ea typeface="Arial" pitchFamily="34" charset="-122"/>
                 <a:cs typeface="Arial" pitchFamily="34" charset="-120"/>
               </a:rPr>
-              <a:t>GPUs, AI accelerators, ASICs, FPGAs</a:t>
-            </a:r>
-            <a:endParaRPr lang="en-US" sz="900" dirty="0"/>
-          </a:p>
-        </p:txBody>
-      </p:sp>
-      <p:sp>
-        <p:nvSpPr>
-          <p:cNvPr id="24" name="Shape 22"/>
-          <p:cNvSpPr/>
-          <p:nvPr/>
-        </p:nvSpPr>
-        <p:spPr>
-          <a:xfrm>
-            <a:off x="640080" y="3447288"/>
-            <a:ext cx="2286000" cy="0"/>
-          </a:xfrm>
-          <a:prstGeom prst="line">
-            <a:avLst/>
-          </a:prstGeom>
-          <a:noFill/>
-          <a:ln w="6350">
-            <a:solidFill>
-              <a:srgbClr val="E5E5E5"/>
-            </a:solidFill>
-            <a:prstDash val="solid"/>
-          </a:ln>
-        </p:spPr>
-      </p:sp>
-      <p:sp>
-        <p:nvSpPr>
-          <p:cNvPr id="25" name="Text 23"/>
-          <p:cNvSpPr/>
-          <p:nvPr/>
-        </p:nvSpPr>
-        <p:spPr>
-          <a:xfrm>
-            <a:off x="457200" y="3465576"/>
-            <a:ext cx="2651760" cy="201168"/>
-          </a:xfrm>
-          <a:prstGeom prst="rect">
-            <a:avLst/>
-          </a:prstGeom>
-          <a:noFill/>
-          <a:ln/>
-        </p:spPr>
-        <p:txBody>
-          <a:bodyPr wrap="square" lIns="0" tIns="0" rIns="0" bIns="0" rtlCol="0" anchor="ctr"/>
-          <a:lstStyle/>
-          <a:p>
-            <a:pPr algn="ctr" indent="0" marL="0">
-              <a:buNone/>
-            </a:pPr>
-            <a:r>
-              <a:rPr lang="en-US" sz="750" i="1" dirty="0">
-                <a:solidFill>
-                  <a:srgbClr val="666666"/>
-                </a:solidFill>
-                <a:latin typeface="Arial" pitchFamily="34" charset="0"/>
-                <a:ea typeface="Arial" pitchFamily="34" charset="-122"/>
-                <a:cs typeface="Arial" pitchFamily="34" charset="-120"/>
-              </a:rPr>
-              <a:t>NVIDIA · AMD · Broadcom · TSMC</a:t>
+              <a:t>Infineon · ON Semi · Wolfspeed</a:t>
             </a:r>
             <a:endParaRPr lang="en-US" sz="750" dirty="0"/>
           </a:p>
@@ -33837,1159 +35378,14 @@
       </p:sp>
       <p:sp>
         <p:nvSpPr>
-          <p:cNvPr id="26" name="Shape 24"/>
-          <p:cNvSpPr/>
-          <p:nvPr/>
-        </p:nvSpPr>
-        <p:spPr>
-          <a:xfrm>
-            <a:off x="3246120" y="2331720"/>
-            <a:ext cx="2651760" cy="1371600"/>
-          </a:xfrm>
-          <a:prstGeom prst="rect">
-            <a:avLst/>
-          </a:prstGeom>
-          <a:solidFill>
-            <a:srgbClr val="F9F9F9"/>
-          </a:solidFill>
-          <a:ln w="6350">
-            <a:solidFill>
-              <a:srgbClr val="E5E5E5"/>
-            </a:solidFill>
-            <a:prstDash val="solid"/>
-          </a:ln>
-        </p:spPr>
-      </p:sp>
-      <p:sp>
-        <p:nvSpPr>
-          <p:cNvPr id="27" name="Shape 25"/>
-          <p:cNvSpPr/>
-          <p:nvPr/>
-        </p:nvSpPr>
-        <p:spPr>
-          <a:xfrm>
-            <a:off x="3246120" y="2331720"/>
-            <a:ext cx="2651760" cy="274320"/>
-          </a:xfrm>
-          <a:prstGeom prst="rect">
-            <a:avLst/>
-          </a:prstGeom>
-          <a:solidFill>
-            <a:srgbClr val="FFB800"/>
-          </a:solidFill>
-          <a:ln w="12700">
-            <a:solidFill>
-              <a:srgbClr val="FFB800"/>
-            </a:solidFill>
-            <a:prstDash val="solid"/>
-          </a:ln>
-        </p:spPr>
-      </p:sp>
-      <p:sp>
-        <p:nvSpPr>
-          <p:cNvPr id="28" name="Text 26"/>
-          <p:cNvSpPr/>
-          <p:nvPr/>
-        </p:nvSpPr>
-        <p:spPr>
-          <a:xfrm>
-            <a:off x="3246120" y="2331720"/>
-            <a:ext cx="2651760" cy="274320"/>
-          </a:xfrm>
-          <a:prstGeom prst="rect">
-            <a:avLst/>
-          </a:prstGeom>
-          <a:noFill/>
-          <a:ln/>
-        </p:spPr>
-        <p:txBody>
-          <a:bodyPr wrap="square" lIns="0" tIns="0" rIns="0" bIns="0" rtlCol="0" anchor="ctr"/>
-          <a:lstStyle/>
-          <a:p>
-            <a:pPr algn="ctr" indent="0" marL="0">
-              <a:buNone/>
-            </a:pPr>
-            <a:r>
-              <a:rPr lang="en-US" sz="1000" b="1" spc="200" kern="0" dirty="0">
-                <a:solidFill>
-                  <a:srgbClr val="000000"/>
-                </a:solidFill>
-                <a:latin typeface="Arial" pitchFamily="34" charset="0"/>
-                <a:ea typeface="Arial" pitchFamily="34" charset="-122"/>
-                <a:cs typeface="Arial" pitchFamily="34" charset="-120"/>
-              </a:rPr>
-              <a:t>MEMORY</a:t>
-            </a:r>
-            <a:endParaRPr lang="en-US" sz="1000" dirty="0"/>
-          </a:p>
-        </p:txBody>
-      </p:sp>
-      <p:sp>
-        <p:nvSpPr>
-          <p:cNvPr id="29" name="Text 27"/>
-          <p:cNvSpPr/>
-          <p:nvPr/>
-        </p:nvSpPr>
-        <p:spPr>
-          <a:xfrm>
-            <a:off x="3383280" y="2679192"/>
-            <a:ext cx="2377440" cy="475488"/>
-          </a:xfrm>
-          <a:prstGeom prst="rect">
-            <a:avLst/>
-          </a:prstGeom>
-          <a:noFill/>
-          <a:ln/>
-        </p:spPr>
-        <p:txBody>
-          <a:bodyPr wrap="square" lIns="0" tIns="0" rIns="0" bIns="0" rtlCol="0" anchor="t"/>
-          <a:lstStyle/>
-          <a:p>
-            <a:pPr indent="0" marL="0">
-              <a:buNone/>
-            </a:pPr>
-            <a:r>
-              <a:rPr lang="en-US" sz="1000" dirty="0">
-                <a:solidFill>
-                  <a:srgbClr val="333333"/>
-                </a:solidFill>
-                <a:latin typeface="Arial" pitchFamily="34" charset="0"/>
-                <a:ea typeface="Arial" pitchFamily="34" charset="-122"/>
-                <a:cs typeface="Arial" pitchFamily="34" charset="-120"/>
-              </a:rPr>
-              <a:t>Stores data so logic can read it at terabit speeds.</a:t>
-            </a:r>
-            <a:endParaRPr lang="en-US" sz="1000" dirty="0"/>
-          </a:p>
-        </p:txBody>
-      </p:sp>
-      <p:sp>
-        <p:nvSpPr>
-          <p:cNvPr id="30" name="Text 28"/>
-          <p:cNvSpPr/>
-          <p:nvPr/>
-        </p:nvSpPr>
-        <p:spPr>
-          <a:xfrm>
-            <a:off x="3383280" y="3172968"/>
-            <a:ext cx="2377440" cy="256032"/>
-          </a:xfrm>
-          <a:prstGeom prst="rect">
-            <a:avLst/>
-          </a:prstGeom>
-          <a:noFill/>
-          <a:ln/>
-        </p:spPr>
-        <p:txBody>
-          <a:bodyPr wrap="square" lIns="0" tIns="0" rIns="0" bIns="0" rtlCol="0" anchor="t"/>
-          <a:lstStyle/>
-          <a:p>
-            <a:pPr indent="0" marL="0">
-              <a:buNone/>
-            </a:pPr>
-            <a:r>
-              <a:rPr lang="en-US" sz="900" i="1" dirty="0">
-                <a:solidFill>
-                  <a:srgbClr val="666666"/>
-                </a:solidFill>
-                <a:latin typeface="Arial" pitchFamily="34" charset="0"/>
-                <a:ea typeface="Arial" pitchFamily="34" charset="-122"/>
-                <a:cs typeface="Arial" pitchFamily="34" charset="-120"/>
-              </a:rPr>
-              <a:t>DRAM, HBM, NAND — every AI server</a:t>
-            </a:r>
-            <a:endParaRPr lang="en-US" sz="900" dirty="0"/>
-          </a:p>
-        </p:txBody>
-      </p:sp>
-      <p:sp>
-        <p:nvSpPr>
-          <p:cNvPr id="31" name="Shape 29"/>
-          <p:cNvSpPr/>
-          <p:nvPr/>
-        </p:nvSpPr>
-        <p:spPr>
-          <a:xfrm>
-            <a:off x="3429000" y="3447288"/>
-            <a:ext cx="2286000" cy="0"/>
-          </a:xfrm>
-          <a:prstGeom prst="line">
-            <a:avLst/>
-          </a:prstGeom>
-          <a:noFill/>
-          <a:ln w="6350">
-            <a:solidFill>
-              <a:srgbClr val="E5E5E5"/>
-            </a:solidFill>
-            <a:prstDash val="solid"/>
-          </a:ln>
-        </p:spPr>
-      </p:sp>
-      <p:sp>
-        <p:nvSpPr>
-          <p:cNvPr id="32" name="Text 30"/>
-          <p:cNvSpPr/>
-          <p:nvPr/>
-        </p:nvSpPr>
-        <p:spPr>
-          <a:xfrm>
-            <a:off x="3246120" y="3465576"/>
-            <a:ext cx="2651760" cy="201168"/>
-          </a:xfrm>
-          <a:prstGeom prst="rect">
-            <a:avLst/>
-          </a:prstGeom>
-          <a:noFill/>
-          <a:ln/>
-        </p:spPr>
-        <p:txBody>
-          <a:bodyPr wrap="square" lIns="0" tIns="0" rIns="0" bIns="0" rtlCol="0" anchor="ctr"/>
-          <a:lstStyle/>
-          <a:p>
-            <a:pPr algn="ctr" indent="0" marL="0">
-              <a:buNone/>
-            </a:pPr>
-            <a:r>
-              <a:rPr lang="en-US" sz="750" i="1" dirty="0">
-                <a:solidFill>
-                  <a:srgbClr val="666666"/>
-                </a:solidFill>
-                <a:latin typeface="Arial" pitchFamily="34" charset="0"/>
-                <a:ea typeface="Arial" pitchFamily="34" charset="-122"/>
-                <a:cs typeface="Arial" pitchFamily="34" charset="-120"/>
-              </a:rPr>
-              <a:t>SK Hynix · Samsung · Micron</a:t>
-            </a:r>
-            <a:endParaRPr lang="en-US" sz="750" dirty="0"/>
-          </a:p>
-        </p:txBody>
-      </p:sp>
-      <p:sp>
-        <p:nvSpPr>
-          <p:cNvPr id="33" name="Shape 31"/>
-          <p:cNvSpPr/>
-          <p:nvPr/>
-        </p:nvSpPr>
-        <p:spPr>
-          <a:xfrm>
-            <a:off x="6035040" y="2331720"/>
-            <a:ext cx="2651760" cy="1371600"/>
-          </a:xfrm>
-          <a:prstGeom prst="rect">
-            <a:avLst/>
-          </a:prstGeom>
-          <a:solidFill>
-            <a:srgbClr val="F9F9F9"/>
-          </a:solidFill>
-          <a:ln w="6350">
-            <a:solidFill>
-              <a:srgbClr val="E5E5E5"/>
-            </a:solidFill>
-            <a:prstDash val="solid"/>
-          </a:ln>
-        </p:spPr>
-      </p:sp>
-      <p:sp>
-        <p:nvSpPr>
-          <p:cNvPr id="34" name="Shape 32"/>
-          <p:cNvSpPr/>
-          <p:nvPr/>
-        </p:nvSpPr>
-        <p:spPr>
-          <a:xfrm>
-            <a:off x="6035040" y="2331720"/>
-            <a:ext cx="2651760" cy="274320"/>
-          </a:xfrm>
-          <a:prstGeom prst="rect">
-            <a:avLst/>
-          </a:prstGeom>
-          <a:solidFill>
-            <a:srgbClr val="008B8B"/>
-          </a:solidFill>
-          <a:ln w="12700">
-            <a:solidFill>
-              <a:srgbClr val="008B8B"/>
-            </a:solidFill>
-            <a:prstDash val="solid"/>
-          </a:ln>
-        </p:spPr>
-      </p:sp>
-      <p:sp>
-        <p:nvSpPr>
-          <p:cNvPr id="35" name="Text 33"/>
-          <p:cNvSpPr/>
-          <p:nvPr/>
-        </p:nvSpPr>
-        <p:spPr>
-          <a:xfrm>
-            <a:off x="6035040" y="2331720"/>
-            <a:ext cx="2651760" cy="274320"/>
-          </a:xfrm>
-          <a:prstGeom prst="rect">
-            <a:avLst/>
-          </a:prstGeom>
-          <a:noFill/>
-          <a:ln/>
-        </p:spPr>
-        <p:txBody>
-          <a:bodyPr wrap="square" lIns="0" tIns="0" rIns="0" bIns="0" rtlCol="0" anchor="ctr"/>
-          <a:lstStyle/>
-          <a:p>
-            <a:pPr algn="ctr" indent="0" marL="0">
-              <a:buNone/>
-            </a:pPr>
-            <a:r>
-              <a:rPr lang="en-US" sz="1000" b="1" spc="200" kern="0" dirty="0">
-                <a:solidFill>
-                  <a:srgbClr val="FFFFFF"/>
-                </a:solidFill>
-                <a:latin typeface="Arial" pitchFamily="34" charset="0"/>
-                <a:ea typeface="Arial" pitchFamily="34" charset="-122"/>
-                <a:cs typeface="Arial" pitchFamily="34" charset="-120"/>
-              </a:rPr>
-              <a:t>PROCESSORS</a:t>
-            </a:r>
-            <a:endParaRPr lang="en-US" sz="1000" dirty="0"/>
-          </a:p>
-        </p:txBody>
-      </p:sp>
-      <p:sp>
-        <p:nvSpPr>
-          <p:cNvPr id="36" name="Text 34"/>
-          <p:cNvSpPr/>
-          <p:nvPr/>
-        </p:nvSpPr>
-        <p:spPr>
-          <a:xfrm>
-            <a:off x="6172200" y="2679192"/>
-            <a:ext cx="2377440" cy="475488"/>
-          </a:xfrm>
-          <a:prstGeom prst="rect">
-            <a:avLst/>
-          </a:prstGeom>
-          <a:noFill/>
-          <a:ln/>
-        </p:spPr>
-        <p:txBody>
-          <a:bodyPr wrap="square" lIns="0" tIns="0" rIns="0" bIns="0" rtlCol="0" anchor="t"/>
-          <a:lstStyle/>
-          <a:p>
-            <a:pPr indent="0" marL="0">
-              <a:buNone/>
-            </a:pPr>
-            <a:r>
-              <a:rPr lang="en-US" sz="1000" dirty="0">
-                <a:solidFill>
-                  <a:srgbClr val="333333"/>
-                </a:solidFill>
-                <a:latin typeface="Arial" pitchFamily="34" charset="0"/>
-                <a:ea typeface="Arial" pitchFamily="34" charset="-122"/>
-                <a:cs typeface="Arial" pitchFamily="34" charset="-120"/>
-              </a:rPr>
-              <a:t>General-purpose silicon that runs your operating system.</a:t>
-            </a:r>
-            <a:endParaRPr lang="en-US" sz="1000" dirty="0"/>
-          </a:p>
-        </p:txBody>
-      </p:sp>
-      <p:sp>
-        <p:nvSpPr>
-          <p:cNvPr id="37" name="Text 35"/>
-          <p:cNvSpPr/>
-          <p:nvPr/>
-        </p:nvSpPr>
-        <p:spPr>
-          <a:xfrm>
-            <a:off x="6172200" y="3172968"/>
-            <a:ext cx="2377440" cy="256032"/>
-          </a:xfrm>
-          <a:prstGeom prst="rect">
-            <a:avLst/>
-          </a:prstGeom>
-          <a:noFill/>
-          <a:ln/>
-        </p:spPr>
-        <p:txBody>
-          <a:bodyPr wrap="square" lIns="0" tIns="0" rIns="0" bIns="0" rtlCol="0" anchor="t"/>
-          <a:lstStyle/>
-          <a:p>
-            <a:pPr indent="0" marL="0">
-              <a:buNone/>
-            </a:pPr>
-            <a:r>
-              <a:rPr lang="en-US" sz="900" i="1" dirty="0">
-                <a:solidFill>
-                  <a:srgbClr val="666666"/>
-                </a:solidFill>
-                <a:latin typeface="Arial" pitchFamily="34" charset="0"/>
-                <a:ea typeface="Arial" pitchFamily="34" charset="-122"/>
-                <a:cs typeface="Arial" pitchFamily="34" charset="-120"/>
-              </a:rPr>
-              <a:t>CPUs in every phone and PC</a:t>
-            </a:r>
-            <a:endParaRPr lang="en-US" sz="900" dirty="0"/>
-          </a:p>
-        </p:txBody>
-      </p:sp>
-      <p:sp>
-        <p:nvSpPr>
-          <p:cNvPr id="38" name="Shape 36"/>
-          <p:cNvSpPr/>
-          <p:nvPr/>
-        </p:nvSpPr>
-        <p:spPr>
-          <a:xfrm>
-            <a:off x="6217920" y="3447288"/>
-            <a:ext cx="2286000" cy="0"/>
-          </a:xfrm>
-          <a:prstGeom prst="line">
-            <a:avLst/>
-          </a:prstGeom>
-          <a:noFill/>
-          <a:ln w="6350">
-            <a:solidFill>
-              <a:srgbClr val="E5E5E5"/>
-            </a:solidFill>
-            <a:prstDash val="solid"/>
-          </a:ln>
-        </p:spPr>
-      </p:sp>
-      <p:sp>
-        <p:nvSpPr>
-          <p:cNvPr id="39" name="Text 37"/>
-          <p:cNvSpPr/>
-          <p:nvPr/>
-        </p:nvSpPr>
-        <p:spPr>
-          <a:xfrm>
-            <a:off x="6035040" y="3465576"/>
-            <a:ext cx="2651760" cy="201168"/>
-          </a:xfrm>
-          <a:prstGeom prst="rect">
-            <a:avLst/>
-          </a:prstGeom>
-          <a:noFill/>
-          <a:ln/>
-        </p:spPr>
-        <p:txBody>
-          <a:bodyPr wrap="square" lIns="0" tIns="0" rIns="0" bIns="0" rtlCol="0" anchor="ctr"/>
-          <a:lstStyle/>
-          <a:p>
-            <a:pPr algn="ctr" indent="0" marL="0">
-              <a:buNone/>
-            </a:pPr>
-            <a:r>
-              <a:rPr lang="en-US" sz="750" i="1" dirty="0">
-                <a:solidFill>
-                  <a:srgbClr val="666666"/>
-                </a:solidFill>
-                <a:latin typeface="Arial" pitchFamily="34" charset="0"/>
-                <a:ea typeface="Arial" pitchFamily="34" charset="-122"/>
-                <a:cs typeface="Arial" pitchFamily="34" charset="-120"/>
-              </a:rPr>
-              <a:t>Intel · AMD · Apple · Qualcomm</a:t>
-            </a:r>
-            <a:endParaRPr lang="en-US" sz="750" dirty="0"/>
-          </a:p>
-        </p:txBody>
-      </p:sp>
-      <p:sp>
-        <p:nvSpPr>
-          <p:cNvPr id="40" name="Shape 38"/>
-          <p:cNvSpPr/>
-          <p:nvPr/>
-        </p:nvSpPr>
-        <p:spPr>
-          <a:xfrm>
-            <a:off x="457200" y="3813048"/>
-            <a:ext cx="2651760" cy="1371600"/>
-          </a:xfrm>
-          <a:prstGeom prst="rect">
-            <a:avLst/>
-          </a:prstGeom>
-          <a:solidFill>
-            <a:srgbClr val="F9F9F9"/>
-          </a:solidFill>
-          <a:ln w="6350">
-            <a:solidFill>
-              <a:srgbClr val="E5E5E5"/>
-            </a:solidFill>
-            <a:prstDash val="solid"/>
-          </a:ln>
-        </p:spPr>
-      </p:sp>
-      <p:sp>
-        <p:nvSpPr>
-          <p:cNvPr id="41" name="Shape 39"/>
-          <p:cNvSpPr/>
-          <p:nvPr/>
-        </p:nvSpPr>
-        <p:spPr>
-          <a:xfrm>
-            <a:off x="457200" y="3813048"/>
-            <a:ext cx="2651760" cy="274320"/>
-          </a:xfrm>
-          <a:prstGeom prst="rect">
-            <a:avLst/>
-          </a:prstGeom>
-          <a:solidFill>
-            <a:srgbClr val="051A3D"/>
-          </a:solidFill>
-          <a:ln w="12700">
-            <a:solidFill>
-              <a:srgbClr val="051A3D"/>
-            </a:solidFill>
-            <a:prstDash val="solid"/>
-          </a:ln>
-        </p:spPr>
-      </p:sp>
-      <p:sp>
-        <p:nvSpPr>
-          <p:cNvPr id="42" name="Text 40"/>
-          <p:cNvSpPr/>
-          <p:nvPr/>
-        </p:nvSpPr>
-        <p:spPr>
-          <a:xfrm>
-            <a:off x="457200" y="3813048"/>
-            <a:ext cx="2651760" cy="274320"/>
-          </a:xfrm>
-          <a:prstGeom prst="rect">
-            <a:avLst/>
-          </a:prstGeom>
-          <a:noFill/>
-          <a:ln/>
-        </p:spPr>
-        <p:txBody>
-          <a:bodyPr wrap="square" lIns="0" tIns="0" rIns="0" bIns="0" rtlCol="0" anchor="ctr"/>
-          <a:lstStyle/>
-          <a:p>
-            <a:pPr algn="ctr" indent="0" marL="0">
-              <a:buNone/>
-            </a:pPr>
-            <a:r>
-              <a:rPr lang="en-US" sz="1000" b="1" spc="200" kern="0" dirty="0">
-                <a:solidFill>
-                  <a:srgbClr val="FFFFFF"/>
-                </a:solidFill>
-                <a:latin typeface="Arial" pitchFamily="34" charset="0"/>
-                <a:ea typeface="Arial" pitchFamily="34" charset="-122"/>
-                <a:cs typeface="Arial" pitchFamily="34" charset="-120"/>
-              </a:rPr>
-              <a:t>ANALOG</a:t>
-            </a:r>
-            <a:endParaRPr lang="en-US" sz="1000" dirty="0"/>
-          </a:p>
-        </p:txBody>
-      </p:sp>
-      <p:sp>
-        <p:nvSpPr>
-          <p:cNvPr id="43" name="Text 41"/>
-          <p:cNvSpPr/>
-          <p:nvPr/>
-        </p:nvSpPr>
-        <p:spPr>
-          <a:xfrm>
-            <a:off x="594360" y="4160520"/>
-            <a:ext cx="2377440" cy="475488"/>
-          </a:xfrm>
-          <a:prstGeom prst="rect">
-            <a:avLst/>
-          </a:prstGeom>
-          <a:noFill/>
-          <a:ln/>
-        </p:spPr>
-        <p:txBody>
-          <a:bodyPr wrap="square" lIns="0" tIns="0" rIns="0" bIns="0" rtlCol="0" anchor="t"/>
-          <a:lstStyle/>
-          <a:p>
-            <a:pPr indent="0" marL="0">
-              <a:buNone/>
-            </a:pPr>
-            <a:r>
-              <a:rPr lang="en-US" sz="1000" dirty="0">
-                <a:solidFill>
-                  <a:srgbClr val="333333"/>
-                </a:solidFill>
-                <a:latin typeface="Arial" pitchFamily="34" charset="0"/>
-                <a:ea typeface="Arial" pitchFamily="34" charset="-122"/>
-                <a:cs typeface="Arial" pitchFamily="34" charset="-120"/>
-              </a:rPr>
-              <a:t>The bridge between silicon and the real world — voltages, signals, RF.</a:t>
-            </a:r>
-            <a:endParaRPr lang="en-US" sz="1000" dirty="0"/>
-          </a:p>
-        </p:txBody>
-      </p:sp>
-      <p:sp>
-        <p:nvSpPr>
-          <p:cNvPr id="44" name="Text 42"/>
-          <p:cNvSpPr/>
-          <p:nvPr/>
-        </p:nvSpPr>
-        <p:spPr>
-          <a:xfrm>
-            <a:off x="594360" y="4654296"/>
-            <a:ext cx="2377440" cy="256032"/>
-          </a:xfrm>
-          <a:prstGeom prst="rect">
-            <a:avLst/>
-          </a:prstGeom>
-          <a:noFill/>
-          <a:ln/>
-        </p:spPr>
-        <p:txBody>
-          <a:bodyPr wrap="square" lIns="0" tIns="0" rIns="0" bIns="0" rtlCol="0" anchor="t"/>
-          <a:lstStyle/>
-          <a:p>
-            <a:pPr indent="0" marL="0">
-              <a:buNone/>
-            </a:pPr>
-            <a:r>
-              <a:rPr lang="en-US" sz="900" i="1" dirty="0">
-                <a:solidFill>
-                  <a:srgbClr val="666666"/>
-                </a:solidFill>
-                <a:latin typeface="Arial" pitchFamily="34" charset="0"/>
-                <a:ea typeface="Arial" pitchFamily="34" charset="-122"/>
-                <a:cs typeface="Arial" pitchFamily="34" charset="-120"/>
-              </a:rPr>
-              <a:t>Power management, radio, audio</a:t>
-            </a:r>
-            <a:endParaRPr lang="en-US" sz="900" dirty="0"/>
-          </a:p>
-        </p:txBody>
-      </p:sp>
-      <p:sp>
-        <p:nvSpPr>
-          <p:cNvPr id="45" name="Shape 43"/>
-          <p:cNvSpPr/>
-          <p:nvPr/>
-        </p:nvSpPr>
-        <p:spPr>
-          <a:xfrm>
-            <a:off x="640080" y="4928616"/>
-            <a:ext cx="2286000" cy="0"/>
-          </a:xfrm>
-          <a:prstGeom prst="line">
-            <a:avLst/>
-          </a:prstGeom>
-          <a:noFill/>
-          <a:ln w="6350">
-            <a:solidFill>
-              <a:srgbClr val="E5E5E5"/>
-            </a:solidFill>
-            <a:prstDash val="solid"/>
-          </a:ln>
-        </p:spPr>
-      </p:sp>
-      <p:sp>
-        <p:nvSpPr>
-          <p:cNvPr id="46" name="Text 44"/>
-          <p:cNvSpPr/>
-          <p:nvPr/>
-        </p:nvSpPr>
-        <p:spPr>
-          <a:xfrm>
-            <a:off x="457200" y="4946904"/>
-            <a:ext cx="2651760" cy="201168"/>
-          </a:xfrm>
-          <a:prstGeom prst="rect">
-            <a:avLst/>
-          </a:prstGeom>
-          <a:noFill/>
-          <a:ln/>
-        </p:spPr>
-        <p:txBody>
-          <a:bodyPr wrap="square" lIns="0" tIns="0" rIns="0" bIns="0" rtlCol="0" anchor="ctr"/>
-          <a:lstStyle/>
-          <a:p>
-            <a:pPr algn="ctr" indent="0" marL="0">
-              <a:buNone/>
-            </a:pPr>
-            <a:r>
-              <a:rPr lang="en-US" sz="750" i="1" dirty="0">
-                <a:solidFill>
-                  <a:srgbClr val="666666"/>
-                </a:solidFill>
-                <a:latin typeface="Arial" pitchFamily="34" charset="0"/>
-                <a:ea typeface="Arial" pitchFamily="34" charset="-122"/>
-                <a:cs typeface="Arial" pitchFamily="34" charset="-120"/>
-              </a:rPr>
-              <a:t>TI · Analog Devices · Infineon</a:t>
-            </a:r>
-            <a:endParaRPr lang="en-US" sz="750" dirty="0"/>
-          </a:p>
-        </p:txBody>
-      </p:sp>
-      <p:sp>
-        <p:nvSpPr>
-          <p:cNvPr id="47" name="Shape 45"/>
-          <p:cNvSpPr/>
-          <p:nvPr/>
-        </p:nvSpPr>
-        <p:spPr>
-          <a:xfrm>
-            <a:off x="3246120" y="3813048"/>
-            <a:ext cx="2651760" cy="1371600"/>
-          </a:xfrm>
-          <a:prstGeom prst="rect">
-            <a:avLst/>
-          </a:prstGeom>
-          <a:solidFill>
-            <a:srgbClr val="F9F9F9"/>
-          </a:solidFill>
-          <a:ln w="6350">
-            <a:solidFill>
-              <a:srgbClr val="E5E5E5"/>
-            </a:solidFill>
-            <a:prstDash val="solid"/>
-          </a:ln>
-        </p:spPr>
-      </p:sp>
-      <p:sp>
-        <p:nvSpPr>
-          <p:cNvPr id="48" name="Shape 46"/>
-          <p:cNvSpPr/>
-          <p:nvPr/>
-        </p:nvSpPr>
-        <p:spPr>
-          <a:xfrm>
-            <a:off x="3246120" y="3813048"/>
-            <a:ext cx="2651760" cy="274320"/>
-          </a:xfrm>
-          <a:prstGeom prst="rect">
-            <a:avLst/>
-          </a:prstGeom>
-          <a:solidFill>
-            <a:srgbClr val="00A854"/>
-          </a:solidFill>
-          <a:ln w="12700">
-            <a:solidFill>
-              <a:srgbClr val="00A854"/>
-            </a:solidFill>
-            <a:prstDash val="solid"/>
-          </a:ln>
-        </p:spPr>
-      </p:sp>
-      <p:sp>
-        <p:nvSpPr>
-          <p:cNvPr id="49" name="Text 47"/>
-          <p:cNvSpPr/>
-          <p:nvPr/>
-        </p:nvSpPr>
-        <p:spPr>
-          <a:xfrm>
-            <a:off x="3246120" y="3813048"/>
-            <a:ext cx="2651760" cy="274320"/>
-          </a:xfrm>
-          <a:prstGeom prst="rect">
-            <a:avLst/>
-          </a:prstGeom>
-          <a:noFill/>
-          <a:ln/>
-        </p:spPr>
-        <p:txBody>
-          <a:bodyPr wrap="square" lIns="0" tIns="0" rIns="0" bIns="0" rtlCol="0" anchor="ctr"/>
-          <a:lstStyle/>
-          <a:p>
-            <a:pPr algn="ctr" indent="0" marL="0">
-              <a:buNone/>
-            </a:pPr>
-            <a:r>
-              <a:rPr lang="en-US" sz="1000" b="1" spc="200" kern="0" dirty="0">
-                <a:solidFill>
-                  <a:srgbClr val="FFFFFF"/>
-                </a:solidFill>
-                <a:latin typeface="Arial" pitchFamily="34" charset="0"/>
-                <a:ea typeface="Arial" pitchFamily="34" charset="-122"/>
-                <a:cs typeface="Arial" pitchFamily="34" charset="-120"/>
-              </a:rPr>
-              <a:t>SENSORS + OPTO</a:t>
-            </a:r>
-            <a:endParaRPr lang="en-US" sz="1000" dirty="0"/>
-          </a:p>
-        </p:txBody>
-      </p:sp>
-      <p:sp>
-        <p:nvSpPr>
-          <p:cNvPr id="50" name="Text 48"/>
-          <p:cNvSpPr/>
-          <p:nvPr/>
-        </p:nvSpPr>
-        <p:spPr>
-          <a:xfrm>
-            <a:off x="3383280" y="4160520"/>
-            <a:ext cx="2377440" cy="475488"/>
-          </a:xfrm>
-          <a:prstGeom prst="rect">
-            <a:avLst/>
-          </a:prstGeom>
-          <a:noFill/>
-          <a:ln/>
-        </p:spPr>
-        <p:txBody>
-          <a:bodyPr wrap="square" lIns="0" tIns="0" rIns="0" bIns="0" rtlCol="0" anchor="t"/>
-          <a:lstStyle/>
-          <a:p>
-            <a:pPr indent="0" marL="0">
-              <a:buNone/>
-            </a:pPr>
-            <a:r>
-              <a:rPr lang="en-US" sz="1000" dirty="0">
-                <a:solidFill>
-                  <a:srgbClr val="333333"/>
-                </a:solidFill>
-                <a:latin typeface="Arial" pitchFamily="34" charset="0"/>
-                <a:ea typeface="Arial" pitchFamily="34" charset="-122"/>
-                <a:cs typeface="Arial" pitchFamily="34" charset="-120"/>
-              </a:rPr>
-              <a:t>How chips see, hear, and communicate with photons.</a:t>
-            </a:r>
-            <a:endParaRPr lang="en-US" sz="1000" dirty="0"/>
-          </a:p>
-        </p:txBody>
-      </p:sp>
-      <p:sp>
-        <p:nvSpPr>
-          <p:cNvPr id="51" name="Text 49"/>
-          <p:cNvSpPr/>
-          <p:nvPr/>
-        </p:nvSpPr>
-        <p:spPr>
-          <a:xfrm>
-            <a:off x="3383280" y="4654296"/>
-            <a:ext cx="2377440" cy="256032"/>
-          </a:xfrm>
-          <a:prstGeom prst="rect">
-            <a:avLst/>
-          </a:prstGeom>
-          <a:noFill/>
-          <a:ln/>
-        </p:spPr>
-        <p:txBody>
-          <a:bodyPr wrap="square" lIns="0" tIns="0" rIns="0" bIns="0" rtlCol="0" anchor="t"/>
-          <a:lstStyle/>
-          <a:p>
-            <a:pPr indent="0" marL="0">
-              <a:buNone/>
-            </a:pPr>
-            <a:r>
-              <a:rPr lang="en-US" sz="900" i="1" dirty="0">
-                <a:solidFill>
-                  <a:srgbClr val="666666"/>
-                </a:solidFill>
-                <a:latin typeface="Arial" pitchFamily="34" charset="0"/>
-                <a:ea typeface="Arial" pitchFamily="34" charset="-122"/>
-                <a:cs typeface="Arial" pitchFamily="34" charset="-120"/>
-              </a:rPr>
-              <a:t>Phone cameras, lidar, fiber optics</a:t>
-            </a:r>
-            <a:endParaRPr lang="en-US" sz="900" dirty="0"/>
-          </a:p>
-        </p:txBody>
-      </p:sp>
-      <p:sp>
-        <p:nvSpPr>
-          <p:cNvPr id="52" name="Shape 50"/>
-          <p:cNvSpPr/>
-          <p:nvPr/>
-        </p:nvSpPr>
-        <p:spPr>
-          <a:xfrm>
-            <a:off x="3429000" y="4928616"/>
-            <a:ext cx="2286000" cy="0"/>
-          </a:xfrm>
-          <a:prstGeom prst="line">
-            <a:avLst/>
-          </a:prstGeom>
-          <a:noFill/>
-          <a:ln w="6350">
-            <a:solidFill>
-              <a:srgbClr val="E5E5E5"/>
-            </a:solidFill>
-            <a:prstDash val="solid"/>
-          </a:ln>
-        </p:spPr>
-      </p:sp>
-      <p:sp>
-        <p:nvSpPr>
-          <p:cNvPr id="53" name="Text 51"/>
-          <p:cNvSpPr/>
-          <p:nvPr/>
-        </p:nvSpPr>
-        <p:spPr>
-          <a:xfrm>
-            <a:off x="3246120" y="4946904"/>
-            <a:ext cx="2651760" cy="201168"/>
-          </a:xfrm>
-          <a:prstGeom prst="rect">
-            <a:avLst/>
-          </a:prstGeom>
-          <a:noFill/>
-          <a:ln/>
-        </p:spPr>
-        <p:txBody>
-          <a:bodyPr wrap="square" lIns="0" tIns="0" rIns="0" bIns="0" rtlCol="0" anchor="ctr"/>
-          <a:lstStyle/>
-          <a:p>
-            <a:pPr algn="ctr" indent="0" marL="0">
-              <a:buNone/>
-            </a:pPr>
-            <a:r>
-              <a:rPr lang="en-US" sz="750" i="1" dirty="0">
-                <a:solidFill>
-                  <a:srgbClr val="666666"/>
-                </a:solidFill>
-                <a:latin typeface="Arial" pitchFamily="34" charset="0"/>
-                <a:ea typeface="Arial" pitchFamily="34" charset="-122"/>
-                <a:cs typeface="Arial" pitchFamily="34" charset="-120"/>
-              </a:rPr>
-              <a:t>Sony · Samsung · STMicro</a:t>
-            </a:r>
-            <a:endParaRPr lang="en-US" sz="750" dirty="0"/>
-          </a:p>
-        </p:txBody>
-      </p:sp>
-      <p:sp>
-        <p:nvSpPr>
-          <p:cNvPr id="54" name="Shape 52"/>
-          <p:cNvSpPr/>
-          <p:nvPr/>
-        </p:nvSpPr>
-        <p:spPr>
-          <a:xfrm>
-            <a:off x="6035040" y="3813048"/>
-            <a:ext cx="2651760" cy="1371600"/>
-          </a:xfrm>
-          <a:prstGeom prst="rect">
-            <a:avLst/>
-          </a:prstGeom>
-          <a:solidFill>
-            <a:srgbClr val="F9F9F9"/>
-          </a:solidFill>
-          <a:ln w="6350">
-            <a:solidFill>
-              <a:srgbClr val="E5E5E5"/>
-            </a:solidFill>
-            <a:prstDash val="solid"/>
-          </a:ln>
-        </p:spPr>
-      </p:sp>
-      <p:sp>
-        <p:nvSpPr>
-          <p:cNvPr id="55" name="Shape 53"/>
-          <p:cNvSpPr/>
-          <p:nvPr/>
-        </p:nvSpPr>
-        <p:spPr>
-          <a:xfrm>
-            <a:off x="6035040" y="3813048"/>
-            <a:ext cx="2651760" cy="274320"/>
-          </a:xfrm>
-          <a:prstGeom prst="rect">
-            <a:avLst/>
-          </a:prstGeom>
-          <a:solidFill>
-            <a:srgbClr val="666666"/>
-          </a:solidFill>
-          <a:ln w="12700">
-            <a:solidFill>
-              <a:srgbClr val="666666"/>
-            </a:solidFill>
-            <a:prstDash val="solid"/>
-          </a:ln>
-        </p:spPr>
-      </p:sp>
-      <p:sp>
-        <p:nvSpPr>
-          <p:cNvPr id="56" name="Text 54"/>
-          <p:cNvSpPr/>
-          <p:nvPr/>
-        </p:nvSpPr>
-        <p:spPr>
-          <a:xfrm>
-            <a:off x="6035040" y="3813048"/>
-            <a:ext cx="2651760" cy="274320"/>
-          </a:xfrm>
-          <a:prstGeom prst="rect">
-            <a:avLst/>
-          </a:prstGeom>
-          <a:noFill/>
-          <a:ln/>
-        </p:spPr>
-        <p:txBody>
-          <a:bodyPr wrap="square" lIns="0" tIns="0" rIns="0" bIns="0" rtlCol="0" anchor="ctr"/>
-          <a:lstStyle/>
-          <a:p>
-            <a:pPr algn="ctr" indent="0" marL="0">
-              <a:buNone/>
-            </a:pPr>
-            <a:r>
-              <a:rPr lang="en-US" sz="1000" b="1" spc="200" kern="0" dirty="0">
-                <a:solidFill>
-                  <a:srgbClr val="FFFFFF"/>
-                </a:solidFill>
-                <a:latin typeface="Arial" pitchFamily="34" charset="0"/>
-                <a:ea typeface="Arial" pitchFamily="34" charset="-122"/>
-                <a:cs typeface="Arial" pitchFamily="34" charset="-120"/>
-              </a:rPr>
-              <a:t>DISCRETE + POWER</a:t>
-            </a:r>
-            <a:endParaRPr lang="en-US" sz="1000" dirty="0"/>
-          </a:p>
-        </p:txBody>
-      </p:sp>
-      <p:sp>
-        <p:nvSpPr>
-          <p:cNvPr id="57" name="Text 55"/>
-          <p:cNvSpPr/>
-          <p:nvPr/>
-        </p:nvSpPr>
-        <p:spPr>
-          <a:xfrm>
-            <a:off x="6172200" y="4160520"/>
-            <a:ext cx="2377440" cy="475488"/>
-          </a:xfrm>
-          <a:prstGeom prst="rect">
-            <a:avLst/>
-          </a:prstGeom>
-          <a:noFill/>
-          <a:ln/>
-        </p:spPr>
-        <p:txBody>
-          <a:bodyPr wrap="square" lIns="0" tIns="0" rIns="0" bIns="0" rtlCol="0" anchor="t"/>
-          <a:lstStyle/>
-          <a:p>
-            <a:pPr indent="0" marL="0">
-              <a:buNone/>
-            </a:pPr>
-            <a:r>
-              <a:rPr lang="en-US" sz="1000" dirty="0">
-                <a:solidFill>
-                  <a:srgbClr val="333333"/>
-                </a:solidFill>
-                <a:latin typeface="Arial" pitchFamily="34" charset="0"/>
-                <a:ea typeface="Arial" pitchFamily="34" charset="-122"/>
-                <a:cs typeface="Arial" pitchFamily="34" charset="-120"/>
-              </a:rPr>
-              <a:t>Heavy-current switching for machines, grids, and vehicles.</a:t>
-            </a:r>
-            <a:endParaRPr lang="en-US" sz="1000" dirty="0"/>
-          </a:p>
-        </p:txBody>
-      </p:sp>
-      <p:sp>
-        <p:nvSpPr>
-          <p:cNvPr id="58" name="Text 56"/>
-          <p:cNvSpPr/>
-          <p:nvPr/>
-        </p:nvSpPr>
-        <p:spPr>
-          <a:xfrm>
-            <a:off x="6172200" y="4654296"/>
-            <a:ext cx="2377440" cy="256032"/>
-          </a:xfrm>
-          <a:prstGeom prst="rect">
-            <a:avLst/>
-          </a:prstGeom>
-          <a:noFill/>
-          <a:ln/>
-        </p:spPr>
-        <p:txBody>
-          <a:bodyPr wrap="square" lIns="0" tIns="0" rIns="0" bIns="0" rtlCol="0" anchor="t"/>
-          <a:lstStyle/>
-          <a:p>
-            <a:pPr indent="0" marL="0">
-              <a:buNone/>
-            </a:pPr>
-            <a:r>
-              <a:rPr lang="en-US" sz="900" i="1" dirty="0">
-                <a:solidFill>
-                  <a:srgbClr val="666666"/>
-                </a:solidFill>
-                <a:latin typeface="Arial" pitchFamily="34" charset="0"/>
-                <a:ea typeface="Arial" pitchFamily="34" charset="-122"/>
-                <a:cs typeface="Arial" pitchFamily="34" charset="-120"/>
-              </a:rPr>
-              <a:t>EVs, industrial motors, chargers</a:t>
-            </a:r>
-            <a:endParaRPr lang="en-US" sz="900" dirty="0"/>
-          </a:p>
-        </p:txBody>
-      </p:sp>
-      <p:sp>
-        <p:nvSpPr>
-          <p:cNvPr id="59" name="Shape 57"/>
-          <p:cNvSpPr/>
-          <p:nvPr/>
-        </p:nvSpPr>
-        <p:spPr>
-          <a:xfrm>
-            <a:off x="6217920" y="4928616"/>
-            <a:ext cx="2286000" cy="0"/>
-          </a:xfrm>
-          <a:prstGeom prst="line">
-            <a:avLst/>
-          </a:prstGeom>
-          <a:noFill/>
-          <a:ln w="6350">
-            <a:solidFill>
-              <a:srgbClr val="E5E5E5"/>
-            </a:solidFill>
-            <a:prstDash val="solid"/>
-          </a:ln>
-        </p:spPr>
-      </p:sp>
-      <p:sp>
-        <p:nvSpPr>
-          <p:cNvPr id="60" name="Text 58"/>
-          <p:cNvSpPr/>
-          <p:nvPr/>
-        </p:nvSpPr>
-        <p:spPr>
-          <a:xfrm>
-            <a:off x="6035040" y="4946904"/>
-            <a:ext cx="2651760" cy="201168"/>
-          </a:xfrm>
-          <a:prstGeom prst="rect">
-            <a:avLst/>
-          </a:prstGeom>
-          <a:noFill/>
-          <a:ln/>
-        </p:spPr>
-        <p:txBody>
-          <a:bodyPr wrap="square" lIns="0" tIns="0" rIns="0" bIns="0" rtlCol="0" anchor="ctr"/>
-          <a:lstStyle/>
-          <a:p>
-            <a:pPr algn="ctr" indent="0" marL="0">
-              <a:buNone/>
-            </a:pPr>
-            <a:r>
-              <a:rPr lang="en-US" sz="750" i="1" dirty="0">
-                <a:solidFill>
-                  <a:srgbClr val="666666"/>
-                </a:solidFill>
-                <a:latin typeface="Arial" pitchFamily="34" charset="0"/>
-                <a:ea typeface="Arial" pitchFamily="34" charset="-122"/>
-                <a:cs typeface="Arial" pitchFamily="34" charset="-120"/>
-              </a:rPr>
-              <a:t>Infineon · ON Semi · Wolfspeed</a:t>
-            </a:r>
-            <a:endParaRPr lang="en-US" sz="750" dirty="0"/>
-          </a:p>
-        </p:txBody>
-      </p:sp>
-      <p:sp>
-        <p:nvSpPr>
-          <p:cNvPr id="61" name="Shape 59"/>
-          <p:cNvSpPr/>
-          <p:nvPr/>
-        </p:nvSpPr>
-        <p:spPr>
-          <a:xfrm>
-            <a:off x="457200" y="5257800"/>
-            <a:ext cx="8229600" cy="411480"/>
+          <p:cNvPr id="73" name="Shape 71"/>
+          <p:cNvSpPr/>
+          <p:nvPr/>
+        </p:nvSpPr>
+        <p:spPr>
+          <a:xfrm>
+            <a:off x="457200" y="5285232"/>
+            <a:ext cx="8229600" cy="402336"/>
           </a:xfrm>
           <a:prstGeom prst="rect">
             <a:avLst/>
@@ -35007,14 +35403,14 @@
       </p:sp>
       <p:sp>
         <p:nvSpPr>
-          <p:cNvPr id="62" name="Text 60"/>
-          <p:cNvSpPr/>
-          <p:nvPr/>
-        </p:nvSpPr>
-        <p:spPr>
-          <a:xfrm>
-            <a:off x="640080" y="5257800"/>
-            <a:ext cx="7863840" cy="411480"/>
+          <p:cNvPr id="74" name="Text 72"/>
+          <p:cNvSpPr/>
+          <p:nvPr/>
+        </p:nvSpPr>
+        <p:spPr>
+          <a:xfrm>
+            <a:off x="640080" y="5285232"/>
+            <a:ext cx="7863840" cy="402336"/>
           </a:xfrm>
           <a:prstGeom prst="rect">
             <a:avLst/>
@@ -35030,7 +35426,7 @@
               <a:buNone/>
             </a:pPr>
             <a:r>
-              <a:rPr lang="en-US" sz="1200" b="1" dirty="0">
+              <a:rPr lang="en-US" sz="1150" b="1" dirty="0">
                 <a:solidFill>
                   <a:srgbClr val="000000"/>
                 </a:solidFill>
@@ -35038,15 +35434,15 @@
                 <a:ea typeface="Arial" pitchFamily="34" charset="-122"/>
                 <a:cs typeface="Arial" pitchFamily="34" charset="-120"/>
               </a:rPr>
-              <a:t>Logic and memory are the only two categories where AI capex concentrates — the rest of silicon serves the rest of the economy.</a:t>
-            </a:r>
-            <a:endParaRPr lang="en-US" sz="1200" dirty="0"/>
-          </a:p>
-        </p:txBody>
-      </p:sp>
-      <p:sp>
-        <p:nvSpPr>
-          <p:cNvPr id="63" name="Text 61"/>
+              <a:t>Logic and memory absorb the AI capex — but every chip flows through ASML tools, TSMC fabs, and advanced packaging, where bottlenecks decide who ships.</a:t>
+            </a:r>
+            <a:endParaRPr lang="en-US" sz="1150" dirty="0"/>
+          </a:p>
+        </p:txBody>
+      </p:sp>
+      <p:sp>
+        <p:nvSpPr>
+          <p:cNvPr id="75" name="Text 73"/>
           <p:cNvSpPr/>
           <p:nvPr/>
         </p:nvSpPr>
@@ -35077,7 +35473,7 @@
                 <a:ea typeface="Arial" pitchFamily="34" charset="-122"/>
                 <a:cs typeface="Arial" pitchFamily="34" charset="-120"/>
               </a:rPr>
-              <a:t>Sources: SIA category taxonomy; WSTS Fall 2025 forecast for market-size context. Category descriptions are plain-English simplifications.</a:t>
+              <a:t>Sources: SIA category taxonomy; WSTS Fall 2025; SEMI World Fab Forecast; TrendForce; company disclosures. Category descriptions are plain-English simplifications.</a:t>
             </a:r>
             <a:endParaRPr lang="en-US" sz="700" dirty="0"/>
           </a:p>
@@ -35085,7 +35481,7 @@
       </p:sp>
       <p:sp>
         <p:nvSpPr>
-          <p:cNvPr id="64" name="Shape 62"/>
+          <p:cNvPr id="76" name="Shape 74"/>
           <p:cNvSpPr/>
           <p:nvPr/>
         </p:nvSpPr>
@@ -35110,7 +35506,7 @@
       </p:sp>
       <p:sp>
         <p:nvSpPr>
-          <p:cNvPr id="65" name="Text 63"/>
+          <p:cNvPr id="77" name="Text 75"/>
           <p:cNvSpPr/>
           <p:nvPr/>
         </p:nvSpPr>
@@ -35149,7 +35545,7 @@
       </p:sp>
       <p:sp>
         <p:nvSpPr>
-          <p:cNvPr id="66" name="Text 64"/>
+          <p:cNvPr id="78" name="Text 76"/>
           <p:cNvSpPr/>
           <p:nvPr/>
         </p:nvSpPr>

--- a/ai-markets-deck.pptx
+++ b/ai-markets-deck.pptx
@@ -10757,7 +10757,7 @@
         </p:nvSpPr>
         <p:spPr>
           <a:xfrm>
-            <a:off x="457200" y="1554480"/>
+            <a:off x="457200" y="1417320"/>
             <a:ext cx="3931920" cy="274320"/>
           </a:xfrm>
           <a:prstGeom prst="rect">
@@ -10796,7 +10796,7 @@
         </p:nvSpPr>
         <p:spPr>
           <a:xfrm>
-            <a:off x="457200" y="1828800"/>
+            <a:off x="457200" y="1691640"/>
             <a:ext cx="3931920" cy="0"/>
           </a:xfrm>
           <a:prstGeom prst="line">
@@ -10818,7 +10818,7 @@
           <p:nvPr/>
         </p:nvGraphicFramePr>
         <p:xfrm>
-          <a:off x="457200" y="1737360"/>
+          <a:off x="457200" y="1783080"/>
           <a:ext cx="3931920" cy="3429000"/>
         </p:xfrm>
         <a:graphic xmlns:a="http://schemas.openxmlformats.org/drawingml/2006/main">
@@ -17199,14 +17199,14 @@
           <a:ln/>
         </p:spPr>
         <p:txBody>
-          <a:bodyPr wrap="square" lIns="1905" tIns="1905" rIns="1905" bIns="1905" rtlCol="0" anchor="ctr"/>
+          <a:bodyPr wrap="square" lIns="3810" tIns="3810" rIns="3810" bIns="3810" rtlCol="0" anchor="ctr"/>
           <a:lstStyle/>
           <a:p>
             <a:pPr algn="l" indent="0" marL="0">
               <a:buNone/>
             </a:pPr>
             <a:r>
-              <a:rPr lang="en-US" sz="1100" b="1" spc="200" kern="0" dirty="0">
+              <a:rPr lang="en-US" sz="1100" b="1" spc="300" kern="0" dirty="0">
                 <a:solidFill>
                   <a:srgbClr val="FFFFFF"/>
                 </a:solidFill>
@@ -17253,8 +17253,8 @@
         </p:nvSpPr>
         <p:spPr>
           <a:xfrm>
-            <a:off x="594360" y="1828800"/>
-            <a:ext cx="4434840" cy="658368"/>
+            <a:off x="685800" y="1828800"/>
+            <a:ext cx="4343400" cy="658368"/>
           </a:xfrm>
           <a:prstGeom prst="rect">
             <a:avLst/>
@@ -17327,14 +17327,14 @@
           <a:ln/>
         </p:spPr>
         <p:txBody>
-          <a:bodyPr wrap="square" lIns="1905" tIns="1905" rIns="1905" bIns="1905" rtlCol="0" anchor="ctr"/>
+          <a:bodyPr wrap="square" lIns="3810" tIns="3810" rIns="3810" bIns="3810" rtlCol="0" anchor="ctr"/>
           <a:lstStyle/>
           <a:p>
             <a:pPr algn="l" indent="0" marL="0">
               <a:buNone/>
             </a:pPr>
             <a:r>
-              <a:rPr lang="en-US" sz="1100" b="1" spc="200" kern="0" dirty="0">
+              <a:rPr lang="en-US" sz="1100" b="1" spc="300" kern="0" dirty="0">
                 <a:solidFill>
                   <a:srgbClr val="FFFFFF"/>
                 </a:solidFill>
@@ -17381,8 +17381,8 @@
         </p:nvSpPr>
         <p:spPr>
           <a:xfrm>
-            <a:off x="594360" y="3017520"/>
-            <a:ext cx="4434840" cy="658368"/>
+            <a:off x="685800" y="3017520"/>
+            <a:ext cx="4343400" cy="658368"/>
           </a:xfrm>
           <a:prstGeom prst="rect">
             <a:avLst/>
@@ -17455,14 +17455,14 @@
           <a:ln/>
         </p:spPr>
         <p:txBody>
-          <a:bodyPr wrap="square" lIns="1905" tIns="1905" rIns="1905" bIns="1905" rtlCol="0" anchor="ctr"/>
+          <a:bodyPr wrap="square" lIns="3810" tIns="3810" rIns="3810" bIns="3810" rtlCol="0" anchor="ctr"/>
           <a:lstStyle/>
           <a:p>
             <a:pPr algn="l" indent="0" marL="0">
               <a:buNone/>
             </a:pPr>
             <a:r>
-              <a:rPr lang="en-US" sz="1100" b="1" spc="200" kern="0" dirty="0">
+              <a:rPr lang="en-US" sz="1100" b="1" spc="300" kern="0" dirty="0">
                 <a:solidFill>
                   <a:srgbClr val="FFFFFF"/>
                 </a:solidFill>
@@ -17509,8 +17509,8 @@
         </p:nvSpPr>
         <p:spPr>
           <a:xfrm>
-            <a:off x="594360" y="4206240"/>
-            <a:ext cx="4434840" cy="658368"/>
+            <a:off x="685800" y="4206240"/>
+            <a:ext cx="4343400" cy="658368"/>
           </a:xfrm>
           <a:prstGeom prst="rect">
             <a:avLst/>

--- a/ai-markets-deck.pptx
+++ b/ai-markets-deck.pptx
@@ -10720,7 +10720,7 @@
                 <a:ea typeface="Arial" pitchFamily="34" charset="-122"/>
                 <a:cs typeface="Arial" pitchFamily="34" charset="-120"/>
               </a:rPr>
-              <a:t>Semis are up, software is down — a ~58-point spread inside one theme. Private credit and PE-owned software names are now selling off in sympathy.</a:t>
+              <a:t>Semis are up, software is down — a wide spread inside one theme. The sell-off is starting to bleed into private credit and PE-held SaaS.</a:t>
             </a:r>
             <a:endParaRPr lang="en-US" sz="1350" dirty="0"/>
           </a:p>
@@ -10835,8 +10835,150 @@
         </p:nvSpPr>
         <p:spPr>
           <a:xfrm>
-            <a:off x="4754880" y="1737360"/>
-            <a:ext cx="3931920" cy="1143000"/>
+            <a:off x="4754880" y="1783080"/>
+            <a:ext cx="3931920" cy="1280160"/>
+          </a:xfrm>
+          <a:prstGeom prst="rect">
+            <a:avLst/>
+          </a:prstGeom>
+          <a:solidFill>
+            <a:srgbClr val="F9F9F9"/>
+          </a:solidFill>
+          <a:ln w="6350">
+            <a:solidFill>
+              <a:srgbClr val="E5E5E5"/>
+            </a:solidFill>
+            <a:prstDash val="solid"/>
+          </a:ln>
+        </p:spPr>
+      </p:sp>
+      <p:sp>
+        <p:nvSpPr>
+          <p:cNvPr id="11" name="Text 8"/>
+          <p:cNvSpPr/>
+          <p:nvPr/>
+        </p:nvSpPr>
+        <p:spPr>
+          <a:xfrm>
+            <a:off x="4754880" y="1874520"/>
+            <a:ext cx="3931920" cy="228600"/>
+          </a:xfrm>
+          <a:prstGeom prst="rect">
+            <a:avLst/>
+          </a:prstGeom>
+          <a:noFill/>
+          <a:ln/>
+        </p:spPr>
+        <p:txBody>
+          <a:bodyPr wrap="square" lIns="0" tIns="0" rIns="0" bIns="0" rtlCol="0" anchor="ctr"/>
+          <a:lstStyle/>
+          <a:p>
+            <a:pPr algn="ctr" indent="0" marL="0">
+              <a:buNone/>
+            </a:pPr>
+            <a:r>
+              <a:rPr lang="en-US" sz="1000" b="1" spc="300" kern="0" dirty="0">
+                <a:solidFill>
+                  <a:srgbClr val="666666"/>
+                </a:solidFill>
+                <a:latin typeface="Arial" pitchFamily="34" charset="0"/>
+                <a:ea typeface="Arial" pitchFamily="34" charset="-122"/>
+                <a:cs typeface="Arial" pitchFamily="34" charset="-120"/>
+              </a:rPr>
+              <a:t>YTD SPREAD — SOX vs IGV</a:t>
+            </a:r>
+            <a:endParaRPr lang="en-US" sz="1000" dirty="0"/>
+          </a:p>
+        </p:txBody>
+      </p:sp>
+      <p:sp>
+        <p:nvSpPr>
+          <p:cNvPr id="12" name="Text 9"/>
+          <p:cNvSpPr/>
+          <p:nvPr/>
+        </p:nvSpPr>
+        <p:spPr>
+          <a:xfrm>
+            <a:off x="4754880" y="2103120"/>
+            <a:ext cx="3931920" cy="640080"/>
+          </a:xfrm>
+          <a:prstGeom prst="rect">
+            <a:avLst/>
+          </a:prstGeom>
+          <a:noFill/>
+          <a:ln/>
+        </p:spPr>
+        <p:txBody>
+          <a:bodyPr wrap="square" lIns="0" tIns="0" rIns="0" bIns="0" rtlCol="0" anchor="ctr"/>
+          <a:lstStyle/>
+          <a:p>
+            <a:pPr algn="ctr" indent="0" marL="0">
+              <a:buNone/>
+            </a:pPr>
+            <a:r>
+              <a:rPr lang="en-US" sz="5200" b="1" dirty="0">
+                <a:solidFill>
+                  <a:srgbClr val="F6693D"/>
+                </a:solidFill>
+                <a:latin typeface="Arial Black" pitchFamily="34" charset="0"/>
+                <a:ea typeface="Arial Black" pitchFamily="34" charset="-122"/>
+                <a:cs typeface="Arial Black" pitchFamily="34" charset="-120"/>
+              </a:rPr>
+              <a:t>+58 pts</a:t>
+            </a:r>
+            <a:endParaRPr lang="en-US" sz="5200" dirty="0"/>
+          </a:p>
+        </p:txBody>
+      </p:sp>
+      <p:sp>
+        <p:nvSpPr>
+          <p:cNvPr id="13" name="Text 10"/>
+          <p:cNvSpPr/>
+          <p:nvPr/>
+        </p:nvSpPr>
+        <p:spPr>
+          <a:xfrm>
+            <a:off x="4754880" y="2761488"/>
+            <a:ext cx="3931920" cy="256032"/>
+          </a:xfrm>
+          <a:prstGeom prst="rect">
+            <a:avLst/>
+          </a:prstGeom>
+          <a:noFill/>
+          <a:ln/>
+        </p:spPr>
+        <p:txBody>
+          <a:bodyPr wrap="square" lIns="0" tIns="0" rIns="0" bIns="0" rtlCol="0" anchor="t"/>
+          <a:lstStyle/>
+          <a:p>
+            <a:pPr algn="ctr" indent="0" marL="0">
+              <a:buNone/>
+            </a:pPr>
+            <a:r>
+              <a:rPr lang="en-US" sz="1050" dirty="0">
+                <a:solidFill>
+                  <a:srgbClr val="333333"/>
+                </a:solidFill>
+                <a:latin typeface="Arial" pitchFamily="34" charset="0"/>
+                <a:ea typeface="Arial" pitchFamily="34" charset="-122"/>
+                <a:cs typeface="Arial" pitchFamily="34" charset="-120"/>
+              </a:rPr>
+              <a:t>Semis +38% vs software −20%, through Apr 17, 2026</a:t>
+            </a:r>
+            <a:endParaRPr lang="en-US" sz="1050" dirty="0"/>
+          </a:p>
+        </p:txBody>
+      </p:sp>
+      <p:sp>
+        <p:nvSpPr>
+          <p:cNvPr id="14" name="Shape 11"/>
+          <p:cNvSpPr/>
+          <p:nvPr/>
+        </p:nvSpPr>
+        <p:spPr>
+          <a:xfrm>
+            <a:off x="4754880" y="3200400"/>
+            <a:ext cx="1920240" cy="2011680"/>
           </a:xfrm>
           <a:prstGeom prst="rect">
             <a:avLst/>
@@ -10854,24 +10996,24 @@
       </p:sp>
       <p:sp>
         <p:nvSpPr>
-          <p:cNvPr id="11" name="Shape 8"/>
-          <p:cNvSpPr/>
-          <p:nvPr/>
-        </p:nvSpPr>
-        <p:spPr>
-          <a:xfrm>
-            <a:off x="4754880" y="1737360"/>
-            <a:ext cx="3931920" cy="274320"/>
+          <p:cNvPr id="15" name="Shape 12"/>
+          <p:cNvSpPr/>
+          <p:nvPr/>
+        </p:nvSpPr>
+        <p:spPr>
+          <a:xfrm>
+            <a:off x="4754880" y="3200400"/>
+            <a:ext cx="1920240" cy="54864"/>
           </a:xfrm>
           <a:prstGeom prst="rect">
             <a:avLst/>
           </a:prstGeom>
           <a:solidFill>
-            <a:srgbClr val="00A854"/>
+            <a:srgbClr val="F6693D"/>
           </a:solidFill>
           <a:ln w="12700">
             <a:solidFill>
-              <a:srgbClr val="00A854"/>
+              <a:srgbClr val="F6693D"/>
             </a:solidFill>
             <a:prstDash val="solid"/>
           </a:ln>
@@ -10879,14 +11021,14 @@
       </p:sp>
       <p:sp>
         <p:nvSpPr>
-          <p:cNvPr id="12" name="Text 9"/>
-          <p:cNvSpPr/>
-          <p:nvPr/>
-        </p:nvSpPr>
-        <p:spPr>
-          <a:xfrm>
-            <a:off x="4754880" y="1737360"/>
-            <a:ext cx="3931920" cy="274320"/>
+          <p:cNvPr id="16" name="Text 13"/>
+          <p:cNvSpPr/>
+          <p:nvPr/>
+        </p:nvSpPr>
+        <p:spPr>
+          <a:xfrm>
+            <a:off x="4754880" y="3328416"/>
+            <a:ext cx="1920240" cy="237744"/>
           </a:xfrm>
           <a:prstGeom prst="rect">
             <a:avLst/>
@@ -10902,30 +11044,30 @@
               <a:buNone/>
             </a:pPr>
             <a:r>
-              <a:rPr lang="en-US" sz="950" b="1" spc="200" kern="0" dirty="0">
-                <a:solidFill>
-                  <a:srgbClr val="FFFFFF"/>
-                </a:solidFill>
-                <a:latin typeface="Arial" pitchFamily="34" charset="0"/>
-                <a:ea typeface="Arial" pitchFamily="34" charset="-122"/>
-                <a:cs typeface="Arial" pitchFamily="34" charset="-120"/>
-              </a:rPr>
-              <a:t>MEMORY SUPERCYCLE</a:t>
-            </a:r>
-            <a:endParaRPr lang="en-US" sz="950" dirty="0"/>
-          </a:p>
-        </p:txBody>
-      </p:sp>
-      <p:sp>
-        <p:nvSpPr>
-          <p:cNvPr id="13" name="Text 10"/>
-          <p:cNvSpPr/>
-          <p:nvPr/>
-        </p:nvSpPr>
-        <p:spPr>
-          <a:xfrm>
-            <a:off x="4919472" y="2048256"/>
-            <a:ext cx="1188720" cy="274320"/>
+              <a:rPr lang="en-US" sz="850" b="1" spc="200" kern="0" dirty="0">
+                <a:solidFill>
+                  <a:srgbClr val="333333"/>
+                </a:solidFill>
+                <a:latin typeface="Arial" pitchFamily="34" charset="0"/>
+                <a:ea typeface="Arial" pitchFamily="34" charset="-122"/>
+                <a:cs typeface="Arial" pitchFamily="34" charset="-120"/>
+              </a:rPr>
+              <a:t>WHY SEMIS ARE UP</a:t>
+            </a:r>
+            <a:endParaRPr lang="en-US" sz="850" dirty="0"/>
+          </a:p>
+        </p:txBody>
+      </p:sp>
+      <p:sp>
+        <p:nvSpPr>
+          <p:cNvPr id="17" name="Text 14"/>
+          <p:cNvSpPr/>
+          <p:nvPr/>
+        </p:nvSpPr>
+        <p:spPr>
+          <a:xfrm>
+            <a:off x="4754880" y="3602736"/>
+            <a:ext cx="1920240" cy="548640"/>
           </a:xfrm>
           <a:prstGeom prst="rect">
             <a:avLst/>
@@ -10937,85 +11079,46 @@
           <a:bodyPr wrap="square" lIns="0" tIns="0" rIns="0" bIns="0" rtlCol="0" anchor="ctr"/>
           <a:lstStyle/>
           <a:p>
-            <a:pPr indent="0" marL="0">
-              <a:buNone/>
-            </a:pPr>
-            <a:r>
-              <a:rPr lang="en-US" sz="1000" b="1" dirty="0">
-                <a:solidFill>
-                  <a:srgbClr val="000000"/>
-                </a:solidFill>
-                <a:latin typeface="Arial" pitchFamily="34" charset="0"/>
-                <a:ea typeface="Arial" pitchFamily="34" charset="-122"/>
-                <a:cs typeface="Arial" pitchFamily="34" charset="-120"/>
-              </a:rPr>
-              <a:t>Samsung</a:t>
-            </a:r>
-            <a:endParaRPr lang="en-US" sz="1000" dirty="0"/>
-          </a:p>
-        </p:txBody>
-      </p:sp>
-      <p:sp>
-        <p:nvSpPr>
-          <p:cNvPr id="14" name="Text 11"/>
-          <p:cNvSpPr/>
-          <p:nvPr/>
-        </p:nvSpPr>
-        <p:spPr>
-          <a:xfrm>
-            <a:off x="6108192" y="2048256"/>
-            <a:ext cx="749808" cy="274320"/>
-          </a:xfrm>
-          <a:prstGeom prst="rect">
-            <a:avLst/>
-          </a:prstGeom>
-          <a:noFill/>
-          <a:ln/>
-        </p:spPr>
-        <p:txBody>
-          <a:bodyPr wrap="square" lIns="0" tIns="0" rIns="0" bIns="0" rtlCol="0" anchor="ctr"/>
-          <a:lstStyle/>
-          <a:p>
-            <a:pPr algn="r" indent="0" marL="0">
-              <a:buNone/>
-            </a:pPr>
-            <a:r>
-              <a:rPr lang="en-US" sz="1200" b="1" dirty="0">
-                <a:solidFill>
-                  <a:srgbClr val="00A854"/>
+            <a:pPr algn="ctr" indent="0" marL="0">
+              <a:buNone/>
+            </a:pPr>
+            <a:r>
+              <a:rPr lang="en-US" sz="2800" b="1" dirty="0">
+                <a:solidFill>
+                  <a:srgbClr val="F6693D"/>
                 </a:solidFill>
                 <a:latin typeface="Arial Black" pitchFamily="34" charset="0"/>
                 <a:ea typeface="Arial Black" pitchFamily="34" charset="-122"/>
                 <a:cs typeface="Arial Black" pitchFamily="34" charset="-120"/>
               </a:rPr>
-              <a:t>+72%</a:t>
-            </a:r>
-            <a:endParaRPr lang="en-US" sz="1200" dirty="0"/>
-          </a:p>
-        </p:txBody>
-      </p:sp>
-      <p:sp>
-        <p:nvSpPr>
-          <p:cNvPr id="15" name="Text 12"/>
-          <p:cNvSpPr/>
-          <p:nvPr/>
-        </p:nvSpPr>
-        <p:spPr>
-          <a:xfrm>
-            <a:off x="6967728" y="2048256"/>
-            <a:ext cx="1572768" cy="274320"/>
-          </a:xfrm>
-          <a:prstGeom prst="rect">
-            <a:avLst/>
-          </a:prstGeom>
-          <a:noFill/>
-          <a:ln/>
-        </p:spPr>
-        <p:txBody>
-          <a:bodyPr wrap="square" lIns="0" tIns="0" rIns="0" bIns="0" rtlCol="0" anchor="ctr"/>
-          <a:lstStyle/>
-          <a:p>
-            <a:pPr indent="0" marL="0">
+              <a:t>+47%</a:t>
+            </a:r>
+            <a:endParaRPr lang="en-US" sz="2800" dirty="0"/>
+          </a:p>
+        </p:txBody>
+      </p:sp>
+      <p:sp>
+        <p:nvSpPr>
+          <p:cNvPr id="18" name="Text 15"/>
+          <p:cNvSpPr/>
+          <p:nvPr/>
+        </p:nvSpPr>
+        <p:spPr>
+          <a:xfrm>
+            <a:off x="4846320" y="4187952"/>
+            <a:ext cx="1737360" cy="310896"/>
+          </a:xfrm>
+          <a:prstGeom prst="rect">
+            <a:avLst/>
+          </a:prstGeom>
+          <a:noFill/>
+          <a:ln/>
+        </p:spPr>
+        <p:txBody>
+          <a:bodyPr wrap="square" lIns="0" tIns="0" rIns="0" bIns="0" rtlCol="0" anchor="t"/>
+          <a:lstStyle/>
+          <a:p>
+            <a:pPr algn="ctr" indent="0" marL="0">
               <a:buNone/>
             </a:pPr>
             <a:r>
@@ -11027,7 +11130,7 @@
                 <a:ea typeface="Arial" pitchFamily="34" charset="-122"/>
                 <a:cs typeface="Arial" pitchFamily="34" charset="-120"/>
               </a:rPr>
-              <a:t>HBM capacity +50% in 2026</a:t>
+              <a:t>Samsung HBM capacity lift in 2026</a:t>
             </a:r>
             <a:endParaRPr lang="en-US" sz="850" dirty="0"/>
           </a:p>
@@ -11035,141 +11138,40 @@
       </p:sp>
       <p:sp>
         <p:nvSpPr>
-          <p:cNvPr id="16" name="Shape 13"/>
-          <p:cNvSpPr/>
-          <p:nvPr/>
-        </p:nvSpPr>
-        <p:spPr>
-          <a:xfrm>
-            <a:off x="4919472" y="2318004"/>
-            <a:ext cx="3602736" cy="0"/>
-          </a:xfrm>
-          <a:prstGeom prst="line">
-            <a:avLst/>
-          </a:prstGeom>
-          <a:noFill/>
-          <a:ln w="5080">
-            <a:solidFill>
-              <a:srgbClr val="E5E5E5"/>
-            </a:solidFill>
-            <a:prstDash val="solid"/>
-          </a:ln>
-        </p:spPr>
-      </p:sp>
-      <p:sp>
-        <p:nvSpPr>
-          <p:cNvPr id="17" name="Text 14"/>
-          <p:cNvSpPr/>
-          <p:nvPr/>
-        </p:nvSpPr>
-        <p:spPr>
-          <a:xfrm>
-            <a:off x="4919472" y="2322576"/>
-            <a:ext cx="1188720" cy="274320"/>
-          </a:xfrm>
-          <a:prstGeom prst="rect">
-            <a:avLst/>
-          </a:prstGeom>
-          <a:noFill/>
-          <a:ln/>
-        </p:spPr>
-        <p:txBody>
-          <a:bodyPr wrap="square" lIns="0" tIns="0" rIns="0" bIns="0" rtlCol="0" anchor="ctr"/>
-          <a:lstStyle/>
-          <a:p>
-            <a:pPr indent="0" marL="0">
-              <a:buNone/>
-            </a:pPr>
-            <a:r>
-              <a:rPr lang="en-US" sz="1000" b="1" dirty="0">
-                <a:solidFill>
-                  <a:srgbClr val="000000"/>
-                </a:solidFill>
-                <a:latin typeface="Arial" pitchFamily="34" charset="0"/>
-                <a:ea typeface="Arial" pitchFamily="34" charset="-122"/>
-                <a:cs typeface="Arial" pitchFamily="34" charset="-120"/>
-              </a:rPr>
-              <a:t>Micron</a:t>
-            </a:r>
-            <a:endParaRPr lang="en-US" sz="1000" dirty="0"/>
-          </a:p>
-        </p:txBody>
-      </p:sp>
-      <p:sp>
-        <p:nvSpPr>
-          <p:cNvPr id="18" name="Text 15"/>
-          <p:cNvSpPr/>
-          <p:nvPr/>
-        </p:nvSpPr>
-        <p:spPr>
-          <a:xfrm>
-            <a:off x="6108192" y="2322576"/>
-            <a:ext cx="749808" cy="274320"/>
-          </a:xfrm>
-          <a:prstGeom prst="rect">
-            <a:avLst/>
-          </a:prstGeom>
-          <a:noFill/>
-          <a:ln/>
-        </p:spPr>
-        <p:txBody>
-          <a:bodyPr wrap="square" lIns="0" tIns="0" rIns="0" bIns="0" rtlCol="0" anchor="ctr"/>
-          <a:lstStyle/>
-          <a:p>
-            <a:pPr algn="r" indent="0" marL="0">
-              <a:buNone/>
-            </a:pPr>
-            <a:r>
-              <a:rPr lang="en-US" sz="1200" b="1" dirty="0">
-                <a:solidFill>
-                  <a:srgbClr val="00A854"/>
-                </a:solidFill>
-                <a:latin typeface="Arial Black" pitchFamily="34" charset="0"/>
-                <a:ea typeface="Arial Black" pitchFamily="34" charset="-122"/>
-                <a:cs typeface="Arial Black" pitchFamily="34" charset="-120"/>
-              </a:rPr>
-              <a:t>+68%</a:t>
-            </a:r>
-            <a:endParaRPr lang="en-US" sz="1200" dirty="0"/>
-          </a:p>
-        </p:txBody>
-      </p:sp>
-      <p:sp>
-        <p:nvSpPr>
           <p:cNvPr id="19" name="Text 16"/>
           <p:cNvSpPr/>
           <p:nvPr/>
         </p:nvSpPr>
         <p:spPr>
           <a:xfrm>
-            <a:off x="6967728" y="2322576"/>
-            <a:ext cx="1572768" cy="274320"/>
-          </a:xfrm>
-          <a:prstGeom prst="rect">
-            <a:avLst/>
-          </a:prstGeom>
-          <a:noFill/>
-          <a:ln/>
-        </p:spPr>
-        <p:txBody>
-          <a:bodyPr wrap="square" lIns="0" tIns="0" rIns="0" bIns="0" rtlCol="0" anchor="ctr"/>
-          <a:lstStyle/>
-          <a:p>
-            <a:pPr indent="0" marL="0">
-              <a:buNone/>
-            </a:pPr>
-            <a:r>
-              <a:rPr lang="en-US" sz="850" dirty="0">
-                <a:solidFill>
-                  <a:srgbClr val="666666"/>
-                </a:solidFill>
-                <a:latin typeface="Arial" pitchFamily="34" charset="0"/>
-                <a:ea typeface="Arial" pitchFamily="34" charset="-122"/>
-                <a:cs typeface="Arial" pitchFamily="34" charset="-120"/>
-              </a:rPr>
-              <a:t>HBM sold out; $8B run-rate</a:t>
-            </a:r>
-            <a:endParaRPr lang="en-US" sz="850" dirty="0"/>
+            <a:off x="4864608" y="4517136"/>
+            <a:ext cx="1700784" cy="658368"/>
+          </a:xfrm>
+          <a:prstGeom prst="rect">
+            <a:avLst/>
+          </a:prstGeom>
+          <a:noFill/>
+          <a:ln/>
+        </p:spPr>
+        <p:txBody>
+          <a:bodyPr wrap="square" lIns="0" tIns="0" rIns="0" bIns="0" rtlCol="0" anchor="t"/>
+          <a:lstStyle/>
+          <a:p>
+            <a:pPr algn="ctr" indent="0" marL="0">
+              <a:buNone/>
+            </a:pPr>
+            <a:r>
+              <a:rPr lang="en-US" sz="900" dirty="0">
+                <a:solidFill>
+                  <a:srgbClr val="333333"/>
+                </a:solidFill>
+                <a:latin typeface="Arial" pitchFamily="34" charset="0"/>
+                <a:ea typeface="Arial" pitchFamily="34" charset="-122"/>
+                <a:cs typeface="Arial" pitchFamily="34" charset="-120"/>
+              </a:rPr>
+              <a:t>HBM sold out through 2026 as hyperscalers lock in every GB of AI memory.</a:t>
+            </a:r>
+            <a:endParaRPr lang="en-US" sz="900" dirty="0"/>
           </a:p>
         </p:txBody>
       </p:sp>
@@ -11181,148 +11183,8 @@
         </p:nvSpPr>
         <p:spPr>
           <a:xfrm>
-            <a:off x="4919472" y="2592324"/>
-            <a:ext cx="3602736" cy="0"/>
-          </a:xfrm>
-          <a:prstGeom prst="line">
-            <a:avLst/>
-          </a:prstGeom>
-          <a:noFill/>
-          <a:ln w="5080">
-            <a:solidFill>
-              <a:srgbClr val="E5E5E5"/>
-            </a:solidFill>
-            <a:prstDash val="solid"/>
-          </a:ln>
-        </p:spPr>
-      </p:sp>
-      <p:sp>
-        <p:nvSpPr>
-          <p:cNvPr id="21" name="Text 18"/>
-          <p:cNvSpPr/>
-          <p:nvPr/>
-        </p:nvSpPr>
-        <p:spPr>
-          <a:xfrm>
-            <a:off x="4919472" y="2596896"/>
-            <a:ext cx="1188720" cy="274320"/>
-          </a:xfrm>
-          <a:prstGeom prst="rect">
-            <a:avLst/>
-          </a:prstGeom>
-          <a:noFill/>
-          <a:ln/>
-        </p:spPr>
-        <p:txBody>
-          <a:bodyPr wrap="square" lIns="0" tIns="0" rIns="0" bIns="0" rtlCol="0" anchor="ctr"/>
-          <a:lstStyle/>
-          <a:p>
-            <a:pPr indent="0" marL="0">
-              <a:buNone/>
-            </a:pPr>
-            <a:r>
-              <a:rPr lang="en-US" sz="1000" b="1" dirty="0">
-                <a:solidFill>
-                  <a:srgbClr val="000000"/>
-                </a:solidFill>
-                <a:latin typeface="Arial" pitchFamily="34" charset="0"/>
-                <a:ea typeface="Arial" pitchFamily="34" charset="-122"/>
-                <a:cs typeface="Arial" pitchFamily="34" charset="-120"/>
-              </a:rPr>
-              <a:t>SK Hynix</a:t>
-            </a:r>
-            <a:endParaRPr lang="en-US" sz="1000" dirty="0"/>
-          </a:p>
-        </p:txBody>
-      </p:sp>
-      <p:sp>
-        <p:nvSpPr>
-          <p:cNvPr id="22" name="Text 19"/>
-          <p:cNvSpPr/>
-          <p:nvPr/>
-        </p:nvSpPr>
-        <p:spPr>
-          <a:xfrm>
-            <a:off x="6108192" y="2596896"/>
-            <a:ext cx="749808" cy="274320"/>
-          </a:xfrm>
-          <a:prstGeom prst="rect">
-            <a:avLst/>
-          </a:prstGeom>
-          <a:noFill/>
-          <a:ln/>
-        </p:spPr>
-        <p:txBody>
-          <a:bodyPr wrap="square" lIns="0" tIns="0" rIns="0" bIns="0" rtlCol="0" anchor="ctr"/>
-          <a:lstStyle/>
-          <a:p>
-            <a:pPr algn="r" indent="0" marL="0">
-              <a:buNone/>
-            </a:pPr>
-            <a:r>
-              <a:rPr lang="en-US" sz="1200" b="1" dirty="0">
-                <a:solidFill>
-                  <a:srgbClr val="00A854"/>
-                </a:solidFill>
-                <a:latin typeface="Arial Black" pitchFamily="34" charset="0"/>
-                <a:ea typeface="Arial Black" pitchFamily="34" charset="-122"/>
-                <a:cs typeface="Arial Black" pitchFamily="34" charset="-120"/>
-              </a:rPr>
-              <a:t>+62%</a:t>
-            </a:r>
-            <a:endParaRPr lang="en-US" sz="1200" dirty="0"/>
-          </a:p>
-        </p:txBody>
-      </p:sp>
-      <p:sp>
-        <p:nvSpPr>
-          <p:cNvPr id="23" name="Text 20"/>
-          <p:cNvSpPr/>
-          <p:nvPr/>
-        </p:nvSpPr>
-        <p:spPr>
-          <a:xfrm>
-            <a:off x="6967728" y="2596896"/>
-            <a:ext cx="1572768" cy="274320"/>
-          </a:xfrm>
-          <a:prstGeom prst="rect">
-            <a:avLst/>
-          </a:prstGeom>
-          <a:noFill/>
-          <a:ln/>
-        </p:spPr>
-        <p:txBody>
-          <a:bodyPr wrap="square" lIns="0" tIns="0" rIns="0" bIns="0" rtlCol="0" anchor="ctr"/>
-          <a:lstStyle/>
-          <a:p>
-            <a:pPr indent="0" marL="0">
-              <a:buNone/>
-            </a:pPr>
-            <a:r>
-              <a:rPr lang="en-US" sz="850" dirty="0">
-                <a:solidFill>
-                  <a:srgbClr val="666666"/>
-                </a:solidFill>
-                <a:latin typeface="Arial" pitchFamily="34" charset="0"/>
-                <a:ea typeface="Arial" pitchFamily="34" charset="-122"/>
-                <a:cs typeface="Arial" pitchFamily="34" charset="-120"/>
-              </a:rPr>
-              <a:t>60% HBM share; HBM4 ramp</a:t>
-            </a:r>
-            <a:endParaRPr lang="en-US" sz="850" dirty="0"/>
-          </a:p>
-        </p:txBody>
-      </p:sp>
-      <p:sp>
-        <p:nvSpPr>
-          <p:cNvPr id="24" name="Shape 21"/>
-          <p:cNvSpPr/>
-          <p:nvPr/>
-        </p:nvSpPr>
-        <p:spPr>
-          <a:xfrm>
-            <a:off x="4754880" y="2971800"/>
-            <a:ext cx="3931920" cy="1143000"/>
+            <a:off x="6766560" y="3200400"/>
+            <a:ext cx="1920240" cy="2011680"/>
           </a:xfrm>
           <a:prstGeom prst="rect">
             <a:avLst/>
@@ -11340,14 +11202,14 @@
       </p:sp>
       <p:sp>
         <p:nvSpPr>
-          <p:cNvPr id="25" name="Shape 22"/>
-          <p:cNvSpPr/>
-          <p:nvPr/>
-        </p:nvSpPr>
-        <p:spPr>
-          <a:xfrm>
-            <a:off x="4754880" y="2971800"/>
-            <a:ext cx="3931920" cy="274320"/>
+          <p:cNvPr id="21" name="Shape 18"/>
+          <p:cNvSpPr/>
+          <p:nvPr/>
+        </p:nvSpPr>
+        <p:spPr>
+          <a:xfrm>
+            <a:off x="6766560" y="3200400"/>
+            <a:ext cx="1920240" cy="54864"/>
           </a:xfrm>
           <a:prstGeom prst="rect">
             <a:avLst/>
@@ -11365,14 +11227,14 @@
       </p:sp>
       <p:sp>
         <p:nvSpPr>
-          <p:cNvPr id="26" name="Text 23"/>
-          <p:cNvSpPr/>
-          <p:nvPr/>
-        </p:nvSpPr>
-        <p:spPr>
-          <a:xfrm>
-            <a:off x="4754880" y="2971800"/>
-            <a:ext cx="3931920" cy="274320"/>
+          <p:cNvPr id="22" name="Text 19"/>
+          <p:cNvSpPr/>
+          <p:nvPr/>
+        </p:nvSpPr>
+        <p:spPr>
+          <a:xfrm>
+            <a:off x="6766560" y="3328416"/>
+            <a:ext cx="1920240" cy="237744"/>
           </a:xfrm>
           <a:prstGeom prst="rect">
             <a:avLst/>
@@ -11388,30 +11250,30 @@
               <a:buNone/>
             </a:pPr>
             <a:r>
-              <a:rPr lang="en-US" sz="950" b="1" spc="200" kern="0" dirty="0">
-                <a:solidFill>
-                  <a:srgbClr val="FFFFFF"/>
-                </a:solidFill>
-                <a:latin typeface="Arial" pitchFamily="34" charset="0"/>
-                <a:ea typeface="Arial" pitchFamily="34" charset="-122"/>
-                <a:cs typeface="Arial" pitchFamily="34" charset="-120"/>
-              </a:rPr>
-              <a:t>SOFTWARE UNDER PRESSURE</a:t>
-            </a:r>
-            <a:endParaRPr lang="en-US" sz="950" dirty="0"/>
-          </a:p>
-        </p:txBody>
-      </p:sp>
-      <p:sp>
-        <p:nvSpPr>
-          <p:cNvPr id="27" name="Text 24"/>
-          <p:cNvSpPr/>
-          <p:nvPr/>
-        </p:nvSpPr>
-        <p:spPr>
-          <a:xfrm>
-            <a:off x="4919472" y="3282696"/>
-            <a:ext cx="1188720" cy="274320"/>
+              <a:rPr lang="en-US" sz="850" b="1" spc="200" kern="0" dirty="0">
+                <a:solidFill>
+                  <a:srgbClr val="333333"/>
+                </a:solidFill>
+                <a:latin typeface="Arial" pitchFamily="34" charset="0"/>
+                <a:ea typeface="Arial" pitchFamily="34" charset="-122"/>
+                <a:cs typeface="Arial" pitchFamily="34" charset="-120"/>
+              </a:rPr>
+              <a:t>WHY SOFTWARE IS DOWN</a:t>
+            </a:r>
+            <a:endParaRPr lang="en-US" sz="850" dirty="0"/>
+          </a:p>
+        </p:txBody>
+      </p:sp>
+      <p:sp>
+        <p:nvSpPr>
+          <p:cNvPr id="23" name="Text 20"/>
+          <p:cNvSpPr/>
+          <p:nvPr/>
+        </p:nvSpPr>
+        <p:spPr>
+          <a:xfrm>
+            <a:off x="6766560" y="3602736"/>
+            <a:ext cx="1920240" cy="548640"/>
           </a:xfrm>
           <a:prstGeom prst="rect">
             <a:avLst/>
@@ -11423,50 +11285,11 @@
           <a:bodyPr wrap="square" lIns="0" tIns="0" rIns="0" bIns="0" rtlCol="0" anchor="ctr"/>
           <a:lstStyle/>
           <a:p>
-            <a:pPr indent="0" marL="0">
-              <a:buNone/>
-            </a:pPr>
-            <a:r>
-              <a:rPr lang="en-US" sz="1000" b="1" dirty="0">
-                <a:solidFill>
-                  <a:srgbClr val="000000"/>
-                </a:solidFill>
-                <a:latin typeface="Arial" pitchFamily="34" charset="0"/>
-                <a:ea typeface="Arial" pitchFamily="34" charset="-122"/>
-                <a:cs typeface="Arial" pitchFamily="34" charset="-120"/>
-              </a:rPr>
-              <a:t>Salesforce</a:t>
-            </a:r>
-            <a:endParaRPr lang="en-US" sz="1000" dirty="0"/>
-          </a:p>
-        </p:txBody>
-      </p:sp>
-      <p:sp>
-        <p:nvSpPr>
-          <p:cNvPr id="28" name="Text 25"/>
-          <p:cNvSpPr/>
-          <p:nvPr/>
-        </p:nvSpPr>
-        <p:spPr>
-          <a:xfrm>
-            <a:off x="6108192" y="3282696"/>
-            <a:ext cx="749808" cy="274320"/>
-          </a:xfrm>
-          <a:prstGeom prst="rect">
-            <a:avLst/>
-          </a:prstGeom>
-          <a:noFill/>
-          <a:ln/>
-        </p:spPr>
-        <p:txBody>
-          <a:bodyPr wrap="square" lIns="0" tIns="0" rIns="0" bIns="0" rtlCol="0" anchor="ctr"/>
-          <a:lstStyle/>
-          <a:p>
-            <a:pPr algn="r" indent="0" marL="0">
-              <a:buNone/>
-            </a:pPr>
-            <a:r>
-              <a:rPr lang="en-US" sz="1200" b="1" dirty="0">
+            <a:pPr algn="ctr" indent="0" marL="0">
+              <a:buNone/>
+            </a:pPr>
+            <a:r>
+              <a:rPr lang="en-US" sz="2800" b="1" dirty="0">
                 <a:solidFill>
                   <a:srgbClr val="CC0000"/>
                 </a:solidFill>
@@ -11474,22 +11297,100 @@
                 <a:ea typeface="Arial Black" pitchFamily="34" charset="-122"/>
                 <a:cs typeface="Arial Black" pitchFamily="34" charset="-120"/>
               </a:rPr>
-              <a:t>–22%</a:t>
-            </a:r>
-            <a:endParaRPr lang="en-US" sz="1200" dirty="0"/>
-          </a:p>
-        </p:txBody>
-      </p:sp>
-      <p:sp>
-        <p:nvSpPr>
-          <p:cNvPr id="29" name="Text 26"/>
-          <p:cNvSpPr/>
-          <p:nvPr/>
-        </p:nvSpPr>
-        <p:spPr>
-          <a:xfrm>
-            <a:off x="6967728" y="3282696"/>
-            <a:ext cx="1572768" cy="274320"/>
+              <a:t>−21%</a:t>
+            </a:r>
+            <a:endParaRPr lang="en-US" sz="2800" dirty="0"/>
+          </a:p>
+        </p:txBody>
+      </p:sp>
+      <p:sp>
+        <p:nvSpPr>
+          <p:cNvPr id="24" name="Text 21"/>
+          <p:cNvSpPr/>
+          <p:nvPr/>
+        </p:nvSpPr>
+        <p:spPr>
+          <a:xfrm>
+            <a:off x="6858000" y="4187952"/>
+            <a:ext cx="1737360" cy="310896"/>
+          </a:xfrm>
+          <a:prstGeom prst="rect">
+            <a:avLst/>
+          </a:prstGeom>
+          <a:noFill/>
+          <a:ln/>
+        </p:spPr>
+        <p:txBody>
+          <a:bodyPr wrap="square" lIns="0" tIns="0" rIns="0" bIns="0" rtlCol="0" anchor="t"/>
+          <a:lstStyle/>
+          <a:p>
+            <a:pPr algn="ctr" indent="0" marL="0">
+              <a:buNone/>
+            </a:pPr>
+            <a:r>
+              <a:rPr lang="en-US" sz="850" dirty="0">
+                <a:solidFill>
+                  <a:srgbClr val="666666"/>
+                </a:solidFill>
+                <a:latin typeface="Arial" pitchFamily="34" charset="0"/>
+                <a:ea typeface="Arial" pitchFamily="34" charset="-122"/>
+                <a:cs typeface="Arial" pitchFamily="34" charset="-120"/>
+              </a:rPr>
+              <a:t>Public SaaS EV/Revenue, Q4'25 → Q1'26</a:t>
+            </a:r>
+            <a:endParaRPr lang="en-US" sz="850" dirty="0"/>
+          </a:p>
+        </p:txBody>
+      </p:sp>
+      <p:sp>
+        <p:nvSpPr>
+          <p:cNvPr id="25" name="Text 22"/>
+          <p:cNvSpPr/>
+          <p:nvPr/>
+        </p:nvSpPr>
+        <p:spPr>
+          <a:xfrm>
+            <a:off x="6876288" y="4517136"/>
+            <a:ext cx="1700784" cy="658368"/>
+          </a:xfrm>
+          <a:prstGeom prst="rect">
+            <a:avLst/>
+          </a:prstGeom>
+          <a:noFill/>
+          <a:ln/>
+        </p:spPr>
+        <p:txBody>
+          <a:bodyPr wrap="square" lIns="0" tIns="0" rIns="0" bIns="0" rtlCol="0" anchor="t"/>
+          <a:lstStyle/>
+          <a:p>
+            <a:pPr algn="ctr" indent="0" marL="0">
+              <a:buNone/>
+            </a:pPr>
+            <a:r>
+              <a:rPr lang="en-US" sz="900" dirty="0">
+                <a:solidFill>
+                  <a:srgbClr val="333333"/>
+                </a:solidFill>
+                <a:latin typeface="Arial" pitchFamily="34" charset="0"/>
+                <a:ea typeface="Arial" pitchFamily="34" charset="-122"/>
+                <a:cs typeface="Arial" pitchFamily="34" charset="-120"/>
+              </a:rPr>
+              <a:t>Agentic AI threatens seat pricing; 2026 CIO surveys flag displacement risk.</a:t>
+            </a:r>
+            <a:endParaRPr lang="en-US" sz="900" dirty="0"/>
+          </a:p>
+        </p:txBody>
+      </p:sp>
+      <p:sp>
+        <p:nvSpPr>
+          <p:cNvPr id="26" name="Text 23"/>
+          <p:cNvSpPr/>
+          <p:nvPr/>
+        </p:nvSpPr>
+        <p:spPr>
+          <a:xfrm>
+            <a:off x="457200" y="5349240"/>
+            <a:ext cx="8229600" cy="320040"/>
           </a:xfrm>
           <a:prstGeom prst="rect">
             <a:avLst/>
@@ -11501,11 +11402,11 @@
           <a:bodyPr wrap="square" lIns="0" tIns="0" rIns="0" bIns="0" rtlCol="0" anchor="ctr"/>
           <a:lstStyle/>
           <a:p>
-            <a:pPr indent="0" marL="0">
-              <a:buNone/>
-            </a:pPr>
-            <a:r>
-              <a:rPr lang="en-US" sz="850" dirty="0">
+            <a:pPr algn="ctr" indent="0" marL="0">
+              <a:buNone/>
+            </a:pPr>
+            <a:r>
+              <a:rPr lang="en-US" sz="950" i="1" dirty="0">
                 <a:solidFill>
                   <a:srgbClr val="666666"/>
                 </a:solidFill>
@@ -11513,376 +11414,7 @@
                 <a:ea typeface="Arial" pitchFamily="34" charset="-122"/>
                 <a:cs typeface="Arial" pitchFamily="34" charset="-120"/>
               </a:rPr>
-              <a:t>Seat model under agent threat</a:t>
-            </a:r>
-            <a:endParaRPr lang="en-US" sz="850" dirty="0"/>
-          </a:p>
-        </p:txBody>
-      </p:sp>
-      <p:sp>
-        <p:nvSpPr>
-          <p:cNvPr id="30" name="Shape 27"/>
-          <p:cNvSpPr/>
-          <p:nvPr/>
-        </p:nvSpPr>
-        <p:spPr>
-          <a:xfrm>
-            <a:off x="4919472" y="3552444"/>
-            <a:ext cx="3602736" cy="0"/>
-          </a:xfrm>
-          <a:prstGeom prst="line">
-            <a:avLst/>
-          </a:prstGeom>
-          <a:noFill/>
-          <a:ln w="5080">
-            <a:solidFill>
-              <a:srgbClr val="E5E5E5"/>
-            </a:solidFill>
-            <a:prstDash val="solid"/>
-          </a:ln>
-        </p:spPr>
-      </p:sp>
-      <p:sp>
-        <p:nvSpPr>
-          <p:cNvPr id="31" name="Text 28"/>
-          <p:cNvSpPr/>
-          <p:nvPr/>
-        </p:nvSpPr>
-        <p:spPr>
-          <a:xfrm>
-            <a:off x="4919472" y="3557016"/>
-            <a:ext cx="1188720" cy="274320"/>
-          </a:xfrm>
-          <a:prstGeom prst="rect">
-            <a:avLst/>
-          </a:prstGeom>
-          <a:noFill/>
-          <a:ln/>
-        </p:spPr>
-        <p:txBody>
-          <a:bodyPr wrap="square" lIns="0" tIns="0" rIns="0" bIns="0" rtlCol="0" anchor="ctr"/>
-          <a:lstStyle/>
-          <a:p>
-            <a:pPr indent="0" marL="0">
-              <a:buNone/>
-            </a:pPr>
-            <a:r>
-              <a:rPr lang="en-US" sz="1000" b="1" dirty="0">
-                <a:solidFill>
-                  <a:srgbClr val="000000"/>
-                </a:solidFill>
-                <a:latin typeface="Arial" pitchFamily="34" charset="0"/>
-                <a:ea typeface="Arial" pitchFamily="34" charset="-122"/>
-                <a:cs typeface="Arial" pitchFamily="34" charset="-120"/>
-              </a:rPr>
-              <a:t>Adobe</a:t>
-            </a:r>
-            <a:endParaRPr lang="en-US" sz="1000" dirty="0"/>
-          </a:p>
-        </p:txBody>
-      </p:sp>
-      <p:sp>
-        <p:nvSpPr>
-          <p:cNvPr id="32" name="Text 29"/>
-          <p:cNvSpPr/>
-          <p:nvPr/>
-        </p:nvSpPr>
-        <p:spPr>
-          <a:xfrm>
-            <a:off x="6108192" y="3557016"/>
-            <a:ext cx="749808" cy="274320"/>
-          </a:xfrm>
-          <a:prstGeom prst="rect">
-            <a:avLst/>
-          </a:prstGeom>
-          <a:noFill/>
-          <a:ln/>
-        </p:spPr>
-        <p:txBody>
-          <a:bodyPr wrap="square" lIns="0" tIns="0" rIns="0" bIns="0" rtlCol="0" anchor="ctr"/>
-          <a:lstStyle/>
-          <a:p>
-            <a:pPr algn="r" indent="0" marL="0">
-              <a:buNone/>
-            </a:pPr>
-            <a:r>
-              <a:rPr lang="en-US" sz="1200" b="1" dirty="0">
-                <a:solidFill>
-                  <a:srgbClr val="CC0000"/>
-                </a:solidFill>
-                <a:latin typeface="Arial Black" pitchFamily="34" charset="0"/>
-                <a:ea typeface="Arial Black" pitchFamily="34" charset="-122"/>
-                <a:cs typeface="Arial Black" pitchFamily="34" charset="-120"/>
-              </a:rPr>
-              <a:t>–24%</a:t>
-            </a:r>
-            <a:endParaRPr lang="en-US" sz="1200" dirty="0"/>
-          </a:p>
-        </p:txBody>
-      </p:sp>
-      <p:sp>
-        <p:nvSpPr>
-          <p:cNvPr id="33" name="Text 30"/>
-          <p:cNvSpPr/>
-          <p:nvPr/>
-        </p:nvSpPr>
-        <p:spPr>
-          <a:xfrm>
-            <a:off x="6967728" y="3557016"/>
-            <a:ext cx="1572768" cy="274320"/>
-          </a:xfrm>
-          <a:prstGeom prst="rect">
-            <a:avLst/>
-          </a:prstGeom>
-          <a:noFill/>
-          <a:ln/>
-        </p:spPr>
-        <p:txBody>
-          <a:bodyPr wrap="square" lIns="0" tIns="0" rIns="0" bIns="0" rtlCol="0" anchor="ctr"/>
-          <a:lstStyle/>
-          <a:p>
-            <a:pPr indent="0" marL="0">
-              <a:buNone/>
-            </a:pPr>
-            <a:r>
-              <a:rPr lang="en-US" sz="850" dirty="0">
-                <a:solidFill>
-                  <a:srgbClr val="666666"/>
-                </a:solidFill>
-                <a:latin typeface="Arial" pitchFamily="34" charset="0"/>
-                <a:ea typeface="Arial" pitchFamily="34" charset="-122"/>
-                <a:cs typeface="Arial" pitchFamily="34" charset="-120"/>
-              </a:rPr>
-              <a:t>Gen-AI erodes content moat</a:t>
-            </a:r>
-            <a:endParaRPr lang="en-US" sz="850" dirty="0"/>
-          </a:p>
-        </p:txBody>
-      </p:sp>
-      <p:sp>
-        <p:nvSpPr>
-          <p:cNvPr id="34" name="Shape 31"/>
-          <p:cNvSpPr/>
-          <p:nvPr/>
-        </p:nvSpPr>
-        <p:spPr>
-          <a:xfrm>
-            <a:off x="4919472" y="3826764"/>
-            <a:ext cx="3602736" cy="0"/>
-          </a:xfrm>
-          <a:prstGeom prst="line">
-            <a:avLst/>
-          </a:prstGeom>
-          <a:noFill/>
-          <a:ln w="5080">
-            <a:solidFill>
-              <a:srgbClr val="E5E5E5"/>
-            </a:solidFill>
-            <a:prstDash val="solid"/>
-          </a:ln>
-        </p:spPr>
-      </p:sp>
-      <p:sp>
-        <p:nvSpPr>
-          <p:cNvPr id="35" name="Text 32"/>
-          <p:cNvSpPr/>
-          <p:nvPr/>
-        </p:nvSpPr>
-        <p:spPr>
-          <a:xfrm>
-            <a:off x="4919472" y="3831336"/>
-            <a:ext cx="1188720" cy="274320"/>
-          </a:xfrm>
-          <a:prstGeom prst="rect">
-            <a:avLst/>
-          </a:prstGeom>
-          <a:noFill/>
-          <a:ln/>
-        </p:spPr>
-        <p:txBody>
-          <a:bodyPr wrap="square" lIns="0" tIns="0" rIns="0" bIns="0" rtlCol="0" anchor="ctr"/>
-          <a:lstStyle/>
-          <a:p>
-            <a:pPr indent="0" marL="0">
-              <a:buNone/>
-            </a:pPr>
-            <a:r>
-              <a:rPr lang="en-US" sz="1000" b="1" dirty="0">
-                <a:solidFill>
-                  <a:srgbClr val="000000"/>
-                </a:solidFill>
-                <a:latin typeface="Arial" pitchFamily="34" charset="0"/>
-                <a:ea typeface="Arial" pitchFamily="34" charset="-122"/>
-                <a:cs typeface="Arial" pitchFamily="34" charset="-120"/>
-              </a:rPr>
-              <a:t>ServiceNow</a:t>
-            </a:r>
-            <a:endParaRPr lang="en-US" sz="1000" dirty="0"/>
-          </a:p>
-        </p:txBody>
-      </p:sp>
-      <p:sp>
-        <p:nvSpPr>
-          <p:cNvPr id="36" name="Text 33"/>
-          <p:cNvSpPr/>
-          <p:nvPr/>
-        </p:nvSpPr>
-        <p:spPr>
-          <a:xfrm>
-            <a:off x="6108192" y="3831336"/>
-            <a:ext cx="749808" cy="274320"/>
-          </a:xfrm>
-          <a:prstGeom prst="rect">
-            <a:avLst/>
-          </a:prstGeom>
-          <a:noFill/>
-          <a:ln/>
-        </p:spPr>
-        <p:txBody>
-          <a:bodyPr wrap="square" lIns="0" tIns="0" rIns="0" bIns="0" rtlCol="0" anchor="ctr"/>
-          <a:lstStyle/>
-          <a:p>
-            <a:pPr algn="r" indent="0" marL="0">
-              <a:buNone/>
-            </a:pPr>
-            <a:r>
-              <a:rPr lang="en-US" sz="1200" b="1" dirty="0">
-                <a:solidFill>
-                  <a:srgbClr val="CC0000"/>
-                </a:solidFill>
-                <a:latin typeface="Arial Black" pitchFamily="34" charset="0"/>
-                <a:ea typeface="Arial Black" pitchFamily="34" charset="-122"/>
-                <a:cs typeface="Arial Black" pitchFamily="34" charset="-120"/>
-              </a:rPr>
-              <a:t>–19%</a:t>
-            </a:r>
-            <a:endParaRPr lang="en-US" sz="1200" dirty="0"/>
-          </a:p>
-        </p:txBody>
-      </p:sp>
-      <p:sp>
-        <p:nvSpPr>
-          <p:cNvPr id="37" name="Text 34"/>
-          <p:cNvSpPr/>
-          <p:nvPr/>
-        </p:nvSpPr>
-        <p:spPr>
-          <a:xfrm>
-            <a:off x="6967728" y="3831336"/>
-            <a:ext cx="1572768" cy="274320"/>
-          </a:xfrm>
-          <a:prstGeom prst="rect">
-            <a:avLst/>
-          </a:prstGeom>
-          <a:noFill/>
-          <a:ln/>
-        </p:spPr>
-        <p:txBody>
-          <a:bodyPr wrap="square" lIns="0" tIns="0" rIns="0" bIns="0" rtlCol="0" anchor="ctr"/>
-          <a:lstStyle/>
-          <a:p>
-            <a:pPr indent="0" marL="0">
-              <a:buNone/>
-            </a:pPr>
-            <a:r>
-              <a:rPr lang="en-US" sz="850" dirty="0">
-                <a:solidFill>
-                  <a:srgbClr val="666666"/>
-                </a:solidFill>
-                <a:latin typeface="Arial" pitchFamily="34" charset="0"/>
-                <a:ea typeface="Arial" pitchFamily="34" charset="-122"/>
-                <a:cs typeface="Arial" pitchFamily="34" charset="-120"/>
-              </a:rPr>
-              <a:t>Workflows disrupted by agents</a:t>
-            </a:r>
-            <a:endParaRPr lang="en-US" sz="850" dirty="0"/>
-          </a:p>
-        </p:txBody>
-      </p:sp>
-      <p:sp>
-        <p:nvSpPr>
-          <p:cNvPr id="38" name="Shape 35"/>
-          <p:cNvSpPr/>
-          <p:nvPr/>
-        </p:nvSpPr>
-        <p:spPr>
-          <a:xfrm>
-            <a:off x="4754880" y="4206240"/>
-            <a:ext cx="3931920" cy="868680"/>
-          </a:xfrm>
-          <a:prstGeom prst="rect">
-            <a:avLst/>
-          </a:prstGeom>
-          <a:solidFill>
-            <a:srgbClr val="FFFFFF"/>
-          </a:solidFill>
-          <a:ln w="6350">
-            <a:solidFill>
-              <a:srgbClr val="E5E5E5"/>
-            </a:solidFill>
-            <a:prstDash val="solid"/>
-          </a:ln>
-        </p:spPr>
-      </p:sp>
-      <p:sp>
-        <p:nvSpPr>
-          <p:cNvPr id="39" name="Shape 36"/>
-          <p:cNvSpPr/>
-          <p:nvPr/>
-        </p:nvSpPr>
-        <p:spPr>
-          <a:xfrm>
-            <a:off x="4754880" y="4206240"/>
-            <a:ext cx="3931920" cy="274320"/>
-          </a:xfrm>
-          <a:prstGeom prst="rect">
-            <a:avLst/>
-          </a:prstGeom>
-          <a:solidFill>
-            <a:srgbClr val="333333"/>
-          </a:solidFill>
-          <a:ln w="12700">
-            <a:solidFill>
-              <a:srgbClr val="333333"/>
-            </a:solidFill>
-            <a:prstDash val="solid"/>
-          </a:ln>
-        </p:spPr>
-      </p:sp>
-      <p:sp>
-        <p:nvSpPr>
-          <p:cNvPr id="40" name="Text 37"/>
-          <p:cNvSpPr/>
-          <p:nvPr/>
-        </p:nvSpPr>
-        <p:spPr>
-          <a:xfrm>
-            <a:off x="4754880" y="4206240"/>
-            <a:ext cx="3931920" cy="274320"/>
-          </a:xfrm>
-          <a:prstGeom prst="rect">
-            <a:avLst/>
-          </a:prstGeom>
-          <a:noFill/>
-          <a:ln/>
-        </p:spPr>
-        <p:txBody>
-          <a:bodyPr wrap="square" lIns="0" tIns="0" rIns="0" bIns="0" rtlCol="0" anchor="ctr"/>
-          <a:lstStyle/>
-          <a:p>
-            <a:pPr algn="ctr" indent="0" marL="0">
-              <a:buNone/>
-            </a:pPr>
-            <a:r>
-              <a:rPr lang="en-US" sz="950" b="1" spc="200" kern="0" dirty="0">
-                <a:solidFill>
-                  <a:srgbClr val="FFFFFF"/>
-                </a:solidFill>
-                <a:latin typeface="Arial" pitchFamily="34" charset="0"/>
-                <a:ea typeface="Arial" pitchFamily="34" charset="-122"/>
-                <a:cs typeface="Arial" pitchFamily="34" charset="-120"/>
-              </a:rPr>
-              <a:t>PRIVATE CREDIT &amp; PE</a:t>
+              <a:t>BDC credit indices down ~5% YTD — early signs the sell-off is bleeding into private credit and PE-held SaaS.</a:t>
             </a:r>
             <a:endParaRPr lang="en-US" sz="950" dirty="0"/>
           </a:p>
@@ -11890,328 +11422,7 @@
       </p:sp>
       <p:sp>
         <p:nvSpPr>
-          <p:cNvPr id="41" name="Text 38"/>
-          <p:cNvSpPr/>
-          <p:nvPr/>
-        </p:nvSpPr>
-        <p:spPr>
-          <a:xfrm>
-            <a:off x="4919472" y="4517136"/>
-            <a:ext cx="1188720" cy="274320"/>
-          </a:xfrm>
-          <a:prstGeom prst="rect">
-            <a:avLst/>
-          </a:prstGeom>
-          <a:noFill/>
-          <a:ln/>
-        </p:spPr>
-        <p:txBody>
-          <a:bodyPr wrap="square" lIns="0" tIns="0" rIns="0" bIns="0" rtlCol="0" anchor="ctr"/>
-          <a:lstStyle/>
-          <a:p>
-            <a:pPr indent="0" marL="0">
-              <a:buNone/>
-            </a:pPr>
-            <a:r>
-              <a:rPr lang="en-US" sz="1000" b="1" dirty="0">
-                <a:solidFill>
-                  <a:srgbClr val="000000"/>
-                </a:solidFill>
-                <a:latin typeface="Arial" pitchFamily="34" charset="0"/>
-                <a:ea typeface="Arial" pitchFamily="34" charset="-122"/>
-                <a:cs typeface="Arial" pitchFamily="34" charset="-120"/>
-              </a:rPr>
-              <a:t>BDC index</a:t>
-            </a:r>
-            <a:endParaRPr lang="en-US" sz="1000" dirty="0"/>
-          </a:p>
-        </p:txBody>
-      </p:sp>
-      <p:sp>
-        <p:nvSpPr>
-          <p:cNvPr id="42" name="Text 39"/>
-          <p:cNvSpPr/>
-          <p:nvPr/>
-        </p:nvSpPr>
-        <p:spPr>
-          <a:xfrm>
-            <a:off x="6108192" y="4517136"/>
-            <a:ext cx="749808" cy="274320"/>
-          </a:xfrm>
-          <a:prstGeom prst="rect">
-            <a:avLst/>
-          </a:prstGeom>
-          <a:noFill/>
-          <a:ln/>
-        </p:spPr>
-        <p:txBody>
-          <a:bodyPr wrap="square" lIns="0" tIns="0" rIns="0" bIns="0" rtlCol="0" anchor="ctr"/>
-          <a:lstStyle/>
-          <a:p>
-            <a:pPr algn="r" indent="0" marL="0">
-              <a:buNone/>
-            </a:pPr>
-            <a:r>
-              <a:rPr lang="en-US" sz="1200" b="1" dirty="0">
-                <a:solidFill>
-                  <a:srgbClr val="CC0000"/>
-                </a:solidFill>
-                <a:latin typeface="Arial Black" pitchFamily="34" charset="0"/>
-                <a:ea typeface="Arial Black" pitchFamily="34" charset="-122"/>
-                <a:cs typeface="Arial Black" pitchFamily="34" charset="-120"/>
-              </a:rPr>
-              <a:t>–11%</a:t>
-            </a:r>
-            <a:endParaRPr lang="en-US" sz="1200" dirty="0"/>
-          </a:p>
-        </p:txBody>
-      </p:sp>
-      <p:sp>
-        <p:nvSpPr>
-          <p:cNvPr id="43" name="Text 40"/>
-          <p:cNvSpPr/>
-          <p:nvPr/>
-        </p:nvSpPr>
-        <p:spPr>
-          <a:xfrm>
-            <a:off x="6967728" y="4517136"/>
-            <a:ext cx="1572768" cy="274320"/>
-          </a:xfrm>
-          <a:prstGeom prst="rect">
-            <a:avLst/>
-          </a:prstGeom>
-          <a:noFill/>
-          <a:ln/>
-        </p:spPr>
-        <p:txBody>
-          <a:bodyPr wrap="square" lIns="0" tIns="0" rIns="0" bIns="0" rtlCol="0" anchor="ctr"/>
-          <a:lstStyle/>
-          <a:p>
-            <a:pPr indent="0" marL="0">
-              <a:buNone/>
-            </a:pPr>
-            <a:r>
-              <a:rPr lang="en-US" sz="850" dirty="0">
-                <a:solidFill>
-                  <a:srgbClr val="666666"/>
-                </a:solidFill>
-                <a:latin typeface="Arial" pitchFamily="34" charset="0"/>
-                <a:ea typeface="Arial" pitchFamily="34" charset="-122"/>
-                <a:cs typeface="Arial" pitchFamily="34" charset="-120"/>
-              </a:rPr>
-              <a:t>Software loan books re-marked</a:t>
-            </a:r>
-            <a:endParaRPr lang="en-US" sz="850" dirty="0"/>
-          </a:p>
-        </p:txBody>
-      </p:sp>
-      <p:sp>
-        <p:nvSpPr>
-          <p:cNvPr id="44" name="Shape 41"/>
-          <p:cNvSpPr/>
-          <p:nvPr/>
-        </p:nvSpPr>
-        <p:spPr>
-          <a:xfrm>
-            <a:off x="4919472" y="4786884"/>
-            <a:ext cx="3602736" cy="0"/>
-          </a:xfrm>
-          <a:prstGeom prst="line">
-            <a:avLst/>
-          </a:prstGeom>
-          <a:noFill/>
-          <a:ln w="5080">
-            <a:solidFill>
-              <a:srgbClr val="E5E5E5"/>
-            </a:solidFill>
-            <a:prstDash val="solid"/>
-          </a:ln>
-        </p:spPr>
-      </p:sp>
-      <p:sp>
-        <p:nvSpPr>
-          <p:cNvPr id="45" name="Text 42"/>
-          <p:cNvSpPr/>
-          <p:nvPr/>
-        </p:nvSpPr>
-        <p:spPr>
-          <a:xfrm>
-            <a:off x="4919472" y="4791456"/>
-            <a:ext cx="1188720" cy="274320"/>
-          </a:xfrm>
-          <a:prstGeom prst="rect">
-            <a:avLst/>
-          </a:prstGeom>
-          <a:noFill/>
-          <a:ln/>
-        </p:spPr>
-        <p:txBody>
-          <a:bodyPr wrap="square" lIns="0" tIns="0" rIns="0" bIns="0" rtlCol="0" anchor="ctr"/>
-          <a:lstStyle/>
-          <a:p>
-            <a:pPr indent="0" marL="0">
-              <a:buNone/>
-            </a:pPr>
-            <a:r>
-              <a:rPr lang="en-US" sz="1000" b="1" dirty="0">
-                <a:solidFill>
-                  <a:srgbClr val="000000"/>
-                </a:solidFill>
-                <a:latin typeface="Arial" pitchFamily="34" charset="0"/>
-                <a:ea typeface="Arial" pitchFamily="34" charset="-122"/>
-                <a:cs typeface="Arial" pitchFamily="34" charset="-120"/>
-              </a:rPr>
-              <a:t>PE SaaS</a:t>
-            </a:r>
-            <a:endParaRPr lang="en-US" sz="1000" dirty="0"/>
-          </a:p>
-        </p:txBody>
-      </p:sp>
-      <p:sp>
-        <p:nvSpPr>
-          <p:cNvPr id="46" name="Text 43"/>
-          <p:cNvSpPr/>
-          <p:nvPr/>
-        </p:nvSpPr>
-        <p:spPr>
-          <a:xfrm>
-            <a:off x="6108192" y="4791456"/>
-            <a:ext cx="749808" cy="274320"/>
-          </a:xfrm>
-          <a:prstGeom prst="rect">
-            <a:avLst/>
-          </a:prstGeom>
-          <a:noFill/>
-          <a:ln/>
-        </p:spPr>
-        <p:txBody>
-          <a:bodyPr wrap="square" lIns="0" tIns="0" rIns="0" bIns="0" rtlCol="0" anchor="ctr"/>
-          <a:lstStyle/>
-          <a:p>
-            <a:pPr algn="r" indent="0" marL="0">
-              <a:buNone/>
-            </a:pPr>
-            <a:r>
-              <a:rPr lang="en-US" sz="1200" b="1" dirty="0">
-                <a:solidFill>
-                  <a:srgbClr val="CC0000"/>
-                </a:solidFill>
-                <a:latin typeface="Arial Black" pitchFamily="34" charset="0"/>
-                <a:ea typeface="Arial Black" pitchFamily="34" charset="-122"/>
-                <a:cs typeface="Arial Black" pitchFamily="34" charset="-120"/>
-              </a:rPr>
-              <a:t>–15%</a:t>
-            </a:r>
-            <a:endParaRPr lang="en-US" sz="1200" dirty="0"/>
-          </a:p>
-        </p:txBody>
-      </p:sp>
-      <p:sp>
-        <p:nvSpPr>
-          <p:cNvPr id="47" name="Text 44"/>
-          <p:cNvSpPr/>
-          <p:nvPr/>
-        </p:nvSpPr>
-        <p:spPr>
-          <a:xfrm>
-            <a:off x="6967728" y="4791456"/>
-            <a:ext cx="1572768" cy="274320"/>
-          </a:xfrm>
-          <a:prstGeom prst="rect">
-            <a:avLst/>
-          </a:prstGeom>
-          <a:noFill/>
-          <a:ln/>
-        </p:spPr>
-        <p:txBody>
-          <a:bodyPr wrap="square" lIns="0" tIns="0" rIns="0" bIns="0" rtlCol="0" anchor="ctr"/>
-          <a:lstStyle/>
-          <a:p>
-            <a:pPr indent="0" marL="0">
-              <a:buNone/>
-            </a:pPr>
-            <a:r>
-              <a:rPr lang="en-US" sz="850" dirty="0">
-                <a:solidFill>
-                  <a:srgbClr val="666666"/>
-                </a:solidFill>
-                <a:latin typeface="Arial" pitchFamily="34" charset="0"/>
-                <a:ea typeface="Arial" pitchFamily="34" charset="-122"/>
-                <a:cs typeface="Arial" pitchFamily="34" charset="-120"/>
-              </a:rPr>
-              <a:t>2021 marks written down in Q1</a:t>
-            </a:r>
-            <a:endParaRPr lang="en-US" sz="850" dirty="0"/>
-          </a:p>
-        </p:txBody>
-      </p:sp>
-      <p:sp>
-        <p:nvSpPr>
-          <p:cNvPr id="48" name="Shape 45"/>
-          <p:cNvSpPr/>
-          <p:nvPr/>
-        </p:nvSpPr>
-        <p:spPr>
-          <a:xfrm>
-            <a:off x="457200" y="5285232"/>
-            <a:ext cx="8229600" cy="384048"/>
-          </a:xfrm>
-          <a:prstGeom prst="rect">
-            <a:avLst/>
-          </a:prstGeom>
-          <a:solidFill>
-            <a:srgbClr val="FFD100"/>
-          </a:solidFill>
-          <a:ln w="12700">
-            <a:solidFill>
-              <a:srgbClr val="FFD100"/>
-            </a:solidFill>
-            <a:prstDash val="solid"/>
-          </a:ln>
-        </p:spPr>
-      </p:sp>
-      <p:sp>
-        <p:nvSpPr>
-          <p:cNvPr id="49" name="Text 46"/>
-          <p:cNvSpPr/>
-          <p:nvPr/>
-        </p:nvSpPr>
-        <p:spPr>
-          <a:xfrm>
-            <a:off x="640080" y="5285232"/>
-            <a:ext cx="7863840" cy="384048"/>
-          </a:xfrm>
-          <a:prstGeom prst="rect">
-            <a:avLst/>
-          </a:prstGeom>
-          <a:noFill/>
-          <a:ln/>
-        </p:spPr>
-        <p:txBody>
-          <a:bodyPr wrap="square" lIns="0" tIns="0" rIns="0" bIns="0" rtlCol="0" anchor="ctr"/>
-          <a:lstStyle/>
-          <a:p>
-            <a:pPr indent="0" marL="0">
-              <a:buNone/>
-            </a:pPr>
-            <a:r>
-              <a:rPr lang="en-US" sz="1100" b="1" dirty="0">
-                <a:solidFill>
-                  <a:srgbClr val="000000"/>
-                </a:solidFill>
-                <a:latin typeface="Arial" pitchFamily="34" charset="0"/>
-                <a:ea typeface="Arial" pitchFamily="34" charset="-122"/>
-                <a:cs typeface="Arial" pitchFamily="34" charset="-120"/>
-              </a:rPr>
-              <a:t>The software sell-off is now a private-credit problem — PE shops are writing down 2021-marked SaaS.</a:t>
-            </a:r>
-            <a:endParaRPr lang="en-US" sz="1100" dirty="0"/>
-          </a:p>
-        </p:txBody>
-      </p:sp>
-      <p:sp>
-        <p:nvSpPr>
-          <p:cNvPr id="50" name="Text 47"/>
+          <p:cNvPr id="27" name="Text 24"/>
           <p:cNvSpPr/>
           <p:nvPr/>
         </p:nvSpPr>
@@ -12242,7 +11453,7 @@
                 <a:ea typeface="Arial" pitchFamily="34" charset="-122"/>
                 <a:cs typeface="Arial" pitchFamily="34" charset="-120"/>
               </a:rPr>
-              <a:t>Sources: Yahoo Finance YTD total returns (Apr 17, 2026); Counterpoint Research; Morgan Stanley CIO Survey; Bloomberg BDC and PE secondary marks; PitchBook. Single-stock YTDs indicative.</a:t>
+              <a:t>Sources: Yahoo Finance YTD returns (Apr 17, 2026); TrendForce / DCD on HBM capacity; multiples.vc public software multiples (Apr 2026); VanEck BIZD; Morgan Stanley CIO Survey; PitchBook PE marks.</a:t>
             </a:r>
             <a:endParaRPr lang="en-US" sz="700" dirty="0"/>
           </a:p>
@@ -12250,7 +11461,7 @@
       </p:sp>
       <p:sp>
         <p:nvSpPr>
-          <p:cNvPr id="51" name="Shape 48"/>
+          <p:cNvPr id="28" name="Shape 25"/>
           <p:cNvSpPr/>
           <p:nvPr/>
         </p:nvSpPr>
@@ -12275,7 +11486,7 @@
       </p:sp>
       <p:sp>
         <p:nvSpPr>
-          <p:cNvPr id="52" name="Text 49"/>
+          <p:cNvPr id="29" name="Text 26"/>
           <p:cNvSpPr/>
           <p:nvPr/>
         </p:nvSpPr>
@@ -12314,7 +11525,7 @@
       </p:sp>
       <p:sp>
         <p:nvSpPr>
-          <p:cNvPr id="53" name="Text 50"/>
+          <p:cNvPr id="30" name="Text 27"/>
           <p:cNvSpPr/>
           <p:nvPr/>
         </p:nvSpPr>
@@ -12871,7 +12082,21 @@
                 <a:ea typeface="Arial" pitchFamily="34" charset="-122"/>
                 <a:cs typeface="Arial" pitchFamily="34" charset="-120"/>
               </a:rPr>
-              <a:t>131×  </a:t>
+              <a:t>131×</a:t>
+            </a:r>
+            <a:pPr indent="0" marL="0">
+              <a:buNone/>
+            </a:pPr>
+            <a:r>
+              <a:rPr lang="en-US" sz="900" baseline="30000" dirty="0">
+                <a:solidFill>
+                  <a:srgbClr val="CC0000"/>
+                </a:solidFill>
+                <a:latin typeface="Arial" pitchFamily="34" charset="0"/>
+                <a:ea typeface="Arial" pitchFamily="34" charset="-122"/>
+                <a:cs typeface="Arial" pitchFamily="34" charset="-120"/>
+              </a:rPr>
+              <a:t> 1</a:t>
             </a:r>
             <a:pPr indent="0" marL="0">
               <a:buNone/>
@@ -12885,7 +12110,7 @@
                 <a:ea typeface="Arial" pitchFamily="34" charset="-122"/>
                 <a:cs typeface="Arial" pitchFamily="34" charset="-120"/>
               </a:rPr>
-              <a:t>Cisco fwd P/E, Mar 2000</a:t>
+              <a:t>  Cisco fwd P/E, Mar 2000</a:t>
             </a:r>
             <a:endParaRPr lang="en-US" sz="1600" dirty="0"/>
           </a:p>
@@ -12924,7 +12149,21 @@
                 <a:ea typeface="Arial" pitchFamily="34" charset="-122"/>
                 <a:cs typeface="Arial" pitchFamily="34" charset="-120"/>
               </a:rPr>
-              <a:t>~24×  </a:t>
+              <a:t>~24×</a:t>
+            </a:r>
+            <a:pPr indent="0" marL="0">
+              <a:buNone/>
+            </a:pPr>
+            <a:r>
+              <a:rPr lang="en-US" sz="900" baseline="30000" dirty="0">
+                <a:solidFill>
+                  <a:srgbClr val="00A854"/>
+                </a:solidFill>
+                <a:latin typeface="Arial" pitchFamily="34" charset="0"/>
+                <a:ea typeface="Arial" pitchFamily="34" charset="-122"/>
+                <a:cs typeface="Arial" pitchFamily="34" charset="-120"/>
+              </a:rPr>
+              <a:t> 2</a:t>
             </a:r>
             <a:pPr indent="0" marL="0">
               <a:buNone/>
@@ -12938,7 +12177,7 @@
                 <a:ea typeface="Arial" pitchFamily="34" charset="-122"/>
                 <a:cs typeface="Arial" pitchFamily="34" charset="-120"/>
               </a:rPr>
-              <a:t>NVIDIA fwd P/E, Apr 17, 2026</a:t>
+              <a:t>  NVIDIA fwd P/E, Apr 17, 2026</a:t>
             </a:r>
             <a:endParaRPr lang="en-US" sz="1600" dirty="0"/>
           </a:p>
@@ -13105,7 +12344,21 @@
                 <a:ea typeface="Arial" pitchFamily="34" charset="-122"/>
                 <a:cs typeface="Arial" pitchFamily="34" charset="-120"/>
               </a:rPr>
-              <a:t>14%  </a:t>
+              <a:t>14%</a:t>
+            </a:r>
+            <a:pPr indent="0" marL="0">
+              <a:buNone/>
+            </a:pPr>
+            <a:r>
+              <a:rPr lang="en-US" sz="900" baseline="30000" dirty="0">
+                <a:solidFill>
+                  <a:srgbClr val="CC0000"/>
+                </a:solidFill>
+                <a:latin typeface="Arial" pitchFamily="34" charset="0"/>
+                <a:ea typeface="Arial" pitchFamily="34" charset="-122"/>
+                <a:cs typeface="Arial" pitchFamily="34" charset="-120"/>
+              </a:rPr>
+              <a:t> 3</a:t>
             </a:r>
             <a:pPr indent="0" marL="0">
               <a:buNone/>
@@ -13119,7 +12372,7 @@
                 <a:ea typeface="Arial" pitchFamily="34" charset="-122"/>
                 <a:cs typeface="Arial" pitchFamily="34" charset="-120"/>
               </a:rPr>
-              <a:t>of tech IPOs were profitable</a:t>
+              <a:t>  of tech IPOs were profitable</a:t>
             </a:r>
             <a:endParaRPr lang="en-US" sz="1600" dirty="0"/>
           </a:p>
@@ -13158,7 +12411,21 @@
                 <a:ea typeface="Arial" pitchFamily="34" charset="-122"/>
                 <a:cs typeface="Arial" pitchFamily="34" charset="-120"/>
               </a:rPr>
-              <a:t>26%  </a:t>
+              <a:t>26%</a:t>
+            </a:r>
+            <a:pPr indent="0" marL="0">
+              <a:buNone/>
+            </a:pPr>
+            <a:r>
+              <a:rPr lang="en-US" sz="900" baseline="30000" dirty="0">
+                <a:solidFill>
+                  <a:srgbClr val="00A854"/>
+                </a:solidFill>
+                <a:latin typeface="Arial" pitchFamily="34" charset="0"/>
+                <a:ea typeface="Arial" pitchFamily="34" charset="-122"/>
+                <a:cs typeface="Arial" pitchFamily="34" charset="-120"/>
+              </a:rPr>
+              <a:t> 4</a:t>
             </a:r>
             <a:pPr indent="0" marL="0">
               <a:buNone/>
@@ -13172,7 +12439,7 @@
                 <a:ea typeface="Arial" pitchFamily="34" charset="-122"/>
                 <a:cs typeface="Arial" pitchFamily="34" charset="-120"/>
               </a:rPr>
-              <a:t>Mag 7 avg net margin (2× S&amp;P)</a:t>
+              <a:t>  Mag 7 avg net margin (2× S&amp;P)</a:t>
             </a:r>
             <a:endParaRPr lang="en-US" sz="1600" dirty="0"/>
           </a:p>
@@ -13314,7 +12581,21 @@
                 <a:ea typeface="Arial" pitchFamily="34" charset="-122"/>
                 <a:cs typeface="Arial" pitchFamily="34" charset="-120"/>
               </a:rPr>
-              <a:t>Oversupply  </a:t>
+              <a:t>Oversupply</a:t>
+            </a:r>
+            <a:pPr indent="0" marL="0">
+              <a:buNone/>
+            </a:pPr>
+            <a:r>
+              <a:rPr lang="en-US" sz="900" baseline="30000" dirty="0">
+                <a:solidFill>
+                  <a:srgbClr val="CC0000"/>
+                </a:solidFill>
+                <a:latin typeface="Arial" pitchFamily="34" charset="0"/>
+                <a:ea typeface="Arial" pitchFamily="34" charset="-122"/>
+                <a:cs typeface="Arial" pitchFamily="34" charset="-120"/>
+              </a:rPr>
+              <a:t> 5</a:t>
             </a:r>
             <a:pPr indent="0" marL="0">
               <a:buNone/>
@@ -13328,7 +12609,7 @@
                 <a:ea typeface="Arial" pitchFamily="34" charset="-122"/>
                 <a:cs typeface="Arial" pitchFamily="34" charset="-120"/>
               </a:rPr>
-              <a:t>$500B dark fiber unused</a:t>
+              <a:t>  $500B dark fiber unused</a:t>
             </a:r>
             <a:endParaRPr lang="en-US" sz="1600" dirty="0"/>
           </a:p>
@@ -13367,7 +12648,21 @@
                 <a:ea typeface="Arial" pitchFamily="34" charset="-122"/>
                 <a:cs typeface="Arial" pitchFamily="34" charset="-120"/>
               </a:rPr>
-              <a:t>Sold out  </a:t>
+              <a:t>Sold out</a:t>
+            </a:r>
+            <a:pPr indent="0" marL="0">
+              <a:buNone/>
+            </a:pPr>
+            <a:r>
+              <a:rPr lang="en-US" sz="900" baseline="30000" dirty="0">
+                <a:solidFill>
+                  <a:srgbClr val="00A854"/>
+                </a:solidFill>
+                <a:latin typeface="Arial" pitchFamily="34" charset="0"/>
+                <a:ea typeface="Arial" pitchFamily="34" charset="-122"/>
+                <a:cs typeface="Arial" pitchFamily="34" charset="-120"/>
+              </a:rPr>
+              <a:t> 6</a:t>
             </a:r>
             <a:pPr indent="0" marL="0">
               <a:buNone/>
@@ -13381,7 +12676,7 @@
                 <a:ea typeface="Arial" pitchFamily="34" charset="-122"/>
                 <a:cs typeface="Arial" pitchFamily="34" charset="-120"/>
               </a:rPr>
-              <a:t>GPU 2nd market 90–95% of list</a:t>
+              <a:t>  GPU 2nd market 90–95% of list</a:t>
             </a:r>
             <a:endParaRPr lang="en-US" sz="1600" dirty="0"/>
           </a:p>
@@ -13548,7 +12843,21 @@
                 <a:ea typeface="Arial" pitchFamily="34" charset="-122"/>
                 <a:cs typeface="Arial" pitchFamily="34" charset="-120"/>
               </a:rPr>
-              <a:t>20+  </a:t>
+              <a:t>20+</a:t>
+            </a:r>
+            <a:pPr indent="0" marL="0">
+              <a:buNone/>
+            </a:pPr>
+            <a:r>
+              <a:rPr lang="en-US" sz="900" baseline="30000" dirty="0">
+                <a:solidFill>
+                  <a:srgbClr val="CC0000"/>
+                </a:solidFill>
+                <a:latin typeface="Arial" pitchFamily="34" charset="0"/>
+                <a:ea typeface="Arial" pitchFamily="34" charset="-122"/>
+                <a:cs typeface="Arial" pitchFamily="34" charset="-120"/>
+              </a:rPr>
+              <a:t> 7</a:t>
             </a:r>
             <a:pPr indent="0" marL="0">
               <a:buNone/>
@@ -13562,7 +12871,7 @@
                 <a:ea typeface="Arial" pitchFamily="34" charset="-122"/>
                 <a:cs typeface="Arial" pitchFamily="34" charset="-120"/>
               </a:rPr>
-              <a:t>major telcos went bankrupt</a:t>
+              <a:t>  major telcos went bankrupt</a:t>
             </a:r>
             <a:endParaRPr lang="en-US" sz="1600" dirty="0"/>
           </a:p>
@@ -13601,7 +12910,21 @@
                 <a:ea typeface="Arial" pitchFamily="34" charset="-122"/>
                 <a:cs typeface="Arial" pitchFamily="34" charset="-120"/>
               </a:rPr>
-              <a:t>~48%  </a:t>
+              <a:t>~48%</a:t>
+            </a:r>
+            <a:pPr indent="0" marL="0">
+              <a:buNone/>
+            </a:pPr>
+            <a:r>
+              <a:rPr lang="en-US" sz="900" baseline="30000" dirty="0">
+                <a:solidFill>
+                  <a:srgbClr val="00A854"/>
+                </a:solidFill>
+                <a:latin typeface="Arial" pitchFamily="34" charset="0"/>
+                <a:ea typeface="Arial" pitchFamily="34" charset="-122"/>
+                <a:cs typeface="Arial" pitchFamily="34" charset="-120"/>
+              </a:rPr>
+              <a:t> 8</a:t>
             </a:r>
             <a:pPr indent="0" marL="0">
               <a:buNone/>
@@ -13615,7 +12938,7 @@
                 <a:ea typeface="Arial" pitchFamily="34" charset="-122"/>
                 <a:cs typeface="Arial" pitchFamily="34" charset="-120"/>
               </a:rPr>
-              <a:t>hyperscaler net debt/EBITDA (vs ~80% S&amp;P)</a:t>
+              <a:t>  hyperscaler net debt/EBITDA (vs ~80% S&amp;P)</a:t>
             </a:r>
             <a:endParaRPr lang="en-US" sz="1600" dirty="0"/>
           </a:p>
@@ -13629,8 +12952,8 @@
         </p:nvSpPr>
         <p:spPr>
           <a:xfrm>
-            <a:off x="457200" y="5349240"/>
-            <a:ext cx="8229600" cy="457200"/>
+            <a:off x="457200" y="5074920"/>
+            <a:ext cx="8229600" cy="365760"/>
           </a:xfrm>
           <a:prstGeom prst="rect">
             <a:avLst/>
@@ -13654,8 +12977,8 @@
         </p:nvSpPr>
         <p:spPr>
           <a:xfrm>
-            <a:off x="640080" y="5349240"/>
-            <a:ext cx="7863840" cy="457200"/>
+            <a:off x="640080" y="5074920"/>
+            <a:ext cx="7863840" cy="365760"/>
           </a:xfrm>
           <a:prstGeom prst="rect">
             <a:avLst/>
@@ -13671,22 +12994,22 @@
               <a:buNone/>
             </a:pPr>
             <a:r>
+              <a:rPr lang="en-US" sz="1100" b="1" dirty="0">
+                <a:solidFill>
+                  <a:srgbClr val="000000"/>
+                </a:solidFill>
+                <a:latin typeface="Arial" pitchFamily="34" charset="0"/>
+                <a:ea typeface="Arial" pitchFamily="34" charset="-122"/>
+                <a:cs typeface="Arial" pitchFamily="34" charset="-120"/>
+              </a:rPr>
+              <a:t>Corrections happen. Bubbles require stretched valuations AND supply exceeding demand. </a:t>
+            </a:r>
+            <a:pPr indent="0" marL="0">
+              <a:buNone/>
+            </a:pPr>
+            <a:r>
               <a:rPr lang="en-US" sz="1150" b="1" dirty="0">
                 <a:solidFill>
-                  <a:srgbClr val="000000"/>
-                </a:solidFill>
-                <a:latin typeface="Arial" pitchFamily="34" charset="0"/>
-                <a:ea typeface="Arial" pitchFamily="34" charset="-122"/>
-                <a:cs typeface="Arial" pitchFamily="34" charset="-120"/>
-              </a:rPr>
-              <a:t>Corrections happen. Bubbles require stretched valuations AND supply exceeding demand. </a:t>
-            </a:r>
-            <a:pPr indent="0" marL="0">
-              <a:buNone/>
-            </a:pPr>
-            <a:r>
-              <a:rPr lang="en-US" sz="1200" b="1" dirty="0">
-                <a:solidFill>
                   <a:srgbClr val="CC0000"/>
                 </a:solidFill>
                 <a:latin typeface="Arial" pitchFamily="34" charset="0"/>
@@ -13695,7 +13018,7 @@
               </a:rPr>
               <a:t>Neither condition holds today.</a:t>
             </a:r>
-            <a:endParaRPr lang="en-US" sz="1150" dirty="0"/>
+            <a:endParaRPr lang="en-US" sz="1100" dirty="0"/>
           </a:p>
         </p:txBody>
       </p:sp>
@@ -13707,8 +13030,8 @@
         </p:nvSpPr>
         <p:spPr>
           <a:xfrm>
-            <a:off x="457200" y="5875020"/>
-            <a:ext cx="8229600" cy="320040"/>
+            <a:off x="457200" y="5532120"/>
+            <a:ext cx="4023360" cy="731520"/>
           </a:xfrm>
           <a:prstGeom prst="rect">
             <a:avLst/>
@@ -13721,6 +13044,26 @@
           <a:lstStyle/>
           <a:p>
             <a:pPr indent="0" marL="0">
+              <a:spcAft>
+                <a:spcPts val="100"/>
+              </a:spcAft>
+              <a:buNone/>
+            </a:pPr>
+            <a:r>
+              <a:rPr lang="en-US" sz="700" b="1" dirty="0">
+                <a:solidFill>
+                  <a:srgbClr val="F6693D"/>
+                </a:solidFill>
+                <a:latin typeface="Arial" pitchFamily="34" charset="0"/>
+                <a:ea typeface="Arial" pitchFamily="34" charset="-122"/>
+                <a:cs typeface="Arial" pitchFamily="34" charset="-120"/>
+              </a:rPr>
+              <a:t>1  </a:t>
+            </a:r>
+            <a:pPr indent="0" marL="0">
+              <a:spcAft>
+                <a:spcPts val="100"/>
+              </a:spcAft>
               <a:buNone/>
             </a:pPr>
             <a:r>
@@ -13732,15 +13075,296 @@
                 <a:ea typeface="Arial" pitchFamily="34" charset="-122"/>
                 <a:cs typeface="Arial" pitchFamily="34" charset="-120"/>
               </a:rPr>
-              <a:t>Sources: Harding Loevner (Cisco); GuruFocus (NVDA fwd P/E Apr 17, 2026); Jay Ritter / UF; Bloomberg; CoreWeave 2nd market; FCC dark fiber data.</a:t>
+              <a:t>Cisco fwd P/E 131× (Mar 2000) — Harding Loevner retrospective.</a:t>
             </a:r>
             <a:endParaRPr lang="en-US" sz="700" dirty="0"/>
           </a:p>
-        </p:txBody>
-      </p:sp>
-      <p:sp>
-        <p:nvSpPr>
-          <p:cNvPr id="38" name="Shape 36"/>
+          <a:p>
+            <a:pPr indent="0" marL="0">
+              <a:spcAft>
+                <a:spcPts val="100"/>
+              </a:spcAft>
+              <a:buNone/>
+            </a:pPr>
+            <a:r>
+              <a:rPr lang="en-US" sz="700" b="1" dirty="0">
+                <a:solidFill>
+                  <a:srgbClr val="F6693D"/>
+                </a:solidFill>
+                <a:latin typeface="Arial" pitchFamily="34" charset="0"/>
+                <a:ea typeface="Arial" pitchFamily="34" charset="-122"/>
+                <a:cs typeface="Arial" pitchFamily="34" charset="-120"/>
+              </a:rPr>
+              <a:t>2  </a:t>
+            </a:r>
+            <a:pPr indent="0" marL="0">
+              <a:spcAft>
+                <a:spcPts val="100"/>
+              </a:spcAft>
+              <a:buNone/>
+            </a:pPr>
+            <a:r>
+              <a:rPr lang="en-US" sz="700" dirty="0">
+                <a:solidFill>
+                  <a:srgbClr val="999999"/>
+                </a:solidFill>
+                <a:latin typeface="Arial" pitchFamily="34" charset="0"/>
+                <a:ea typeface="Arial" pitchFamily="34" charset="-122"/>
+                <a:cs typeface="Arial" pitchFamily="34" charset="-120"/>
+              </a:rPr>
+              <a:t>NVDA fwd P/E ~24× (Apr 17, 2026) — GuruFocus.</a:t>
+            </a:r>
+            <a:endParaRPr lang="en-US" sz="700" dirty="0"/>
+          </a:p>
+          <a:p>
+            <a:pPr indent="0" marL="0">
+              <a:spcAft>
+                <a:spcPts val="100"/>
+              </a:spcAft>
+              <a:buNone/>
+            </a:pPr>
+            <a:r>
+              <a:rPr lang="en-US" sz="700" b="1" dirty="0">
+                <a:solidFill>
+                  <a:srgbClr val="F6693D"/>
+                </a:solidFill>
+                <a:latin typeface="Arial" pitchFamily="34" charset="0"/>
+                <a:ea typeface="Arial" pitchFamily="34" charset="-122"/>
+                <a:cs typeface="Arial" pitchFamily="34" charset="-120"/>
+              </a:rPr>
+              <a:t>3  </a:t>
+            </a:r>
+            <a:pPr indent="0" marL="0">
+              <a:spcAft>
+                <a:spcPts val="100"/>
+              </a:spcAft>
+              <a:buNone/>
+            </a:pPr>
+            <a:r>
+              <a:rPr lang="en-US" sz="700" dirty="0">
+                <a:solidFill>
+                  <a:srgbClr val="999999"/>
+                </a:solidFill>
+                <a:latin typeface="Arial" pitchFamily="34" charset="0"/>
+                <a:ea typeface="Arial" pitchFamily="34" charset="-122"/>
+                <a:cs typeface="Arial" pitchFamily="34" charset="-120"/>
+              </a:rPr>
+              <a:t>14% of tech IPOs profitable (2000) — Jay Ritter, Univ. of Florida IPO data.</a:t>
+            </a:r>
+            <a:endParaRPr lang="en-US" sz="700" dirty="0"/>
+          </a:p>
+          <a:p>
+            <a:pPr indent="0" marL="0">
+              <a:spcAft>
+                <a:spcPts val="100"/>
+              </a:spcAft>
+              <a:buNone/>
+            </a:pPr>
+            <a:r>
+              <a:rPr lang="en-US" sz="700" b="1" dirty="0">
+                <a:solidFill>
+                  <a:srgbClr val="F6693D"/>
+                </a:solidFill>
+                <a:latin typeface="Arial" pitchFamily="34" charset="0"/>
+                <a:ea typeface="Arial" pitchFamily="34" charset="-122"/>
+                <a:cs typeface="Arial" pitchFamily="34" charset="-120"/>
+              </a:rPr>
+              <a:t>4  </a:t>
+            </a:r>
+            <a:pPr indent="0" marL="0">
+              <a:spcAft>
+                <a:spcPts val="100"/>
+              </a:spcAft>
+              <a:buNone/>
+            </a:pPr>
+            <a:r>
+              <a:rPr lang="en-US" sz="700" dirty="0">
+                <a:solidFill>
+                  <a:srgbClr val="999999"/>
+                </a:solidFill>
+                <a:latin typeface="Arial" pitchFamily="34" charset="0"/>
+                <a:ea typeface="Arial" pitchFamily="34" charset="-122"/>
+                <a:cs typeface="Arial" pitchFamily="34" charset="-120"/>
+              </a:rPr>
+              <a:t>Mag 7 avg net margin 26% (2× S&amp;P) — Bloomberg / company filings, 2025 TTM.</a:t>
+            </a:r>
+            <a:endParaRPr lang="en-US" sz="700" dirty="0"/>
+          </a:p>
+        </p:txBody>
+      </p:sp>
+      <p:sp>
+        <p:nvSpPr>
+          <p:cNvPr id="38" name="Text 36"/>
+          <p:cNvSpPr/>
+          <p:nvPr/>
+        </p:nvSpPr>
+        <p:spPr>
+          <a:xfrm>
+            <a:off x="4663440" y="5532120"/>
+            <a:ext cx="4023360" cy="731520"/>
+          </a:xfrm>
+          <a:prstGeom prst="rect">
+            <a:avLst/>
+          </a:prstGeom>
+          <a:noFill/>
+          <a:ln/>
+        </p:spPr>
+        <p:txBody>
+          <a:bodyPr wrap="square" lIns="0" tIns="0" rIns="0" bIns="0" rtlCol="0" anchor="t"/>
+          <a:lstStyle/>
+          <a:p>
+            <a:pPr indent="0" marL="0">
+              <a:spcAft>
+                <a:spcPts val="100"/>
+              </a:spcAft>
+              <a:buNone/>
+            </a:pPr>
+            <a:r>
+              <a:rPr lang="en-US" sz="700" b="1" dirty="0">
+                <a:solidFill>
+                  <a:srgbClr val="F6693D"/>
+                </a:solidFill>
+                <a:latin typeface="Arial" pitchFamily="34" charset="0"/>
+                <a:ea typeface="Arial" pitchFamily="34" charset="-122"/>
+                <a:cs typeface="Arial" pitchFamily="34" charset="-120"/>
+              </a:rPr>
+              <a:t>5  </a:t>
+            </a:r>
+            <a:pPr indent="0" marL="0">
+              <a:spcAft>
+                <a:spcPts val="100"/>
+              </a:spcAft>
+              <a:buNone/>
+            </a:pPr>
+            <a:r>
+              <a:rPr lang="en-US" sz="700" dirty="0">
+                <a:solidFill>
+                  <a:srgbClr val="999999"/>
+                </a:solidFill>
+                <a:latin typeface="Arial" pitchFamily="34" charset="0"/>
+                <a:ea typeface="Arial" pitchFamily="34" charset="-122"/>
+                <a:cs typeface="Arial" pitchFamily="34" charset="-120"/>
+              </a:rPr>
+              <a:t>$500B dark fiber unused (2000 era) — FCC / industry retrospectives.</a:t>
+            </a:r>
+            <a:endParaRPr lang="en-US" sz="700" dirty="0"/>
+          </a:p>
+          <a:p>
+            <a:pPr indent="0" marL="0">
+              <a:spcAft>
+                <a:spcPts val="100"/>
+              </a:spcAft>
+              <a:buNone/>
+            </a:pPr>
+            <a:r>
+              <a:rPr lang="en-US" sz="700" b="1" dirty="0">
+                <a:solidFill>
+                  <a:srgbClr val="F6693D"/>
+                </a:solidFill>
+                <a:latin typeface="Arial" pitchFamily="34" charset="0"/>
+                <a:ea typeface="Arial" pitchFamily="34" charset="-122"/>
+                <a:cs typeface="Arial" pitchFamily="34" charset="-120"/>
+              </a:rPr>
+              <a:t>6  </a:t>
+            </a:r>
+            <a:pPr indent="0" marL="0">
+              <a:spcAft>
+                <a:spcPts val="100"/>
+              </a:spcAft>
+              <a:buNone/>
+            </a:pPr>
+            <a:r>
+              <a:rPr lang="en-US" sz="700" dirty="0">
+                <a:solidFill>
+                  <a:srgbClr val="999999"/>
+                </a:solidFill>
+                <a:latin typeface="Arial" pitchFamily="34" charset="0"/>
+                <a:ea typeface="Arial" pitchFamily="34" charset="-122"/>
+                <a:cs typeface="Arial" pitchFamily="34" charset="-120"/>
+              </a:rPr>
+              <a:t>GPU 2nd-market 90–95% of list — CoreWeave / 2nd-market trackers, 2026.</a:t>
+            </a:r>
+            <a:endParaRPr lang="en-US" sz="700" dirty="0"/>
+          </a:p>
+          <a:p>
+            <a:pPr indent="0" marL="0">
+              <a:spcAft>
+                <a:spcPts val="100"/>
+              </a:spcAft>
+              <a:buNone/>
+            </a:pPr>
+            <a:r>
+              <a:rPr lang="en-US" sz="700" b="1" dirty="0">
+                <a:solidFill>
+                  <a:srgbClr val="F6693D"/>
+                </a:solidFill>
+                <a:latin typeface="Arial" pitchFamily="34" charset="0"/>
+                <a:ea typeface="Arial" pitchFamily="34" charset="-122"/>
+                <a:cs typeface="Arial" pitchFamily="34" charset="-120"/>
+              </a:rPr>
+              <a:t>7  </a:t>
+            </a:r>
+            <a:pPr indent="0" marL="0">
+              <a:spcAft>
+                <a:spcPts val="100"/>
+              </a:spcAft>
+              <a:buNone/>
+            </a:pPr>
+            <a:r>
+              <a:rPr lang="en-US" sz="700" dirty="0">
+                <a:solidFill>
+                  <a:srgbClr val="999999"/>
+                </a:solidFill>
+                <a:latin typeface="Arial" pitchFamily="34" charset="0"/>
+                <a:ea typeface="Arial" pitchFamily="34" charset="-122"/>
+                <a:cs typeface="Arial" pitchFamily="34" charset="-120"/>
+              </a:rPr>
+              <a:t>20+ major telcos bankrupt (2001–02) — public filings / press retrospectives.</a:t>
+            </a:r>
+            <a:endParaRPr lang="en-US" sz="700" dirty="0"/>
+          </a:p>
+          <a:p>
+            <a:pPr indent="0" marL="0">
+              <a:spcAft>
+                <a:spcPts val="100"/>
+              </a:spcAft>
+              <a:buNone/>
+            </a:pPr>
+            <a:r>
+              <a:rPr lang="en-US" sz="700" b="1" dirty="0">
+                <a:solidFill>
+                  <a:srgbClr val="F6693D"/>
+                </a:solidFill>
+                <a:latin typeface="Arial" pitchFamily="34" charset="0"/>
+                <a:ea typeface="Arial" pitchFamily="34" charset="-122"/>
+                <a:cs typeface="Arial" pitchFamily="34" charset="-120"/>
+              </a:rPr>
+              <a:t>8  </a:t>
+            </a:r>
+            <a:pPr indent="0" marL="0">
+              <a:spcAft>
+                <a:spcPts val="100"/>
+              </a:spcAft>
+              <a:buNone/>
+            </a:pPr>
+            <a:r>
+              <a:rPr lang="en-US" sz="700" dirty="0">
+                <a:solidFill>
+                  <a:srgbClr val="999999"/>
+                </a:solidFill>
+                <a:latin typeface="Arial" pitchFamily="34" charset="0"/>
+                <a:ea typeface="Arial" pitchFamily="34" charset="-122"/>
+                <a:cs typeface="Arial" pitchFamily="34" charset="-120"/>
+              </a:rPr>
+              <a:t>Hyperscaler net debt/EBITDA ~48% vs ~80% S&amp;P — Bloomberg, 2025 YE.</a:t>
+            </a:r>
+            <a:endParaRPr lang="en-US" sz="700" dirty="0"/>
+          </a:p>
+        </p:txBody>
+      </p:sp>
+      <p:sp>
+        <p:nvSpPr>
+          <p:cNvPr id="39" name="Shape 37"/>
           <p:cNvSpPr/>
           <p:nvPr/>
         </p:nvSpPr>
@@ -13765,7 +13389,7 @@
       </p:sp>
       <p:sp>
         <p:nvSpPr>
-          <p:cNvPr id="39" name="Text 37"/>
+          <p:cNvPr id="40" name="Text 38"/>
           <p:cNvSpPr/>
           <p:nvPr/>
         </p:nvSpPr>
@@ -13804,7 +13428,7 @@
       </p:sp>
       <p:sp>
         <p:nvSpPr>
-          <p:cNvPr id="40" name="Text 38"/>
+          <p:cNvPr id="41" name="Text 39"/>
           <p:cNvSpPr/>
           <p:nvPr/>
         </p:nvSpPr>

--- a/ai-markets-deck.pptx
+++ b/ai-markets-deck.pptx
@@ -13052,7 +13052,7 @@
             <a:r>
               <a:rPr lang="en-US" sz="700" b="1" dirty="0">
                 <a:solidFill>
-                  <a:srgbClr val="F6693D"/>
+                  <a:srgbClr val="999999"/>
                 </a:solidFill>
                 <a:latin typeface="Arial" pitchFamily="34" charset="0"/>
                 <a:ea typeface="Arial" pitchFamily="34" charset="-122"/>
@@ -13075,7 +13075,7 @@
                 <a:ea typeface="Arial" pitchFamily="34" charset="-122"/>
                 <a:cs typeface="Arial" pitchFamily="34" charset="-120"/>
               </a:rPr>
-              <a:t>Cisco fwd P/E 131× (Mar 2000) — Harding Loevner retrospective.</a:t>
+              <a:t>Harding Loevner retrospective.</a:t>
             </a:r>
             <a:endParaRPr lang="en-US" sz="700" dirty="0"/>
           </a:p>
@@ -13089,7 +13089,7 @@
             <a:r>
               <a:rPr lang="en-US" sz="700" b="1" dirty="0">
                 <a:solidFill>
-                  <a:srgbClr val="F6693D"/>
+                  <a:srgbClr val="999999"/>
                 </a:solidFill>
                 <a:latin typeface="Arial" pitchFamily="34" charset="0"/>
                 <a:ea typeface="Arial" pitchFamily="34" charset="-122"/>
@@ -13112,7 +13112,7 @@
                 <a:ea typeface="Arial" pitchFamily="34" charset="-122"/>
                 <a:cs typeface="Arial" pitchFamily="34" charset="-120"/>
               </a:rPr>
-              <a:t>NVDA fwd P/E ~24× (Apr 17, 2026) — GuruFocus.</a:t>
+              <a:t>GuruFocus (Apr 17, 2026).</a:t>
             </a:r>
             <a:endParaRPr lang="en-US" sz="700" dirty="0"/>
           </a:p>
@@ -13126,7 +13126,7 @@
             <a:r>
               <a:rPr lang="en-US" sz="700" b="1" dirty="0">
                 <a:solidFill>
-                  <a:srgbClr val="F6693D"/>
+                  <a:srgbClr val="999999"/>
                 </a:solidFill>
                 <a:latin typeface="Arial" pitchFamily="34" charset="0"/>
                 <a:ea typeface="Arial" pitchFamily="34" charset="-122"/>
@@ -13149,7 +13149,7 @@
                 <a:ea typeface="Arial" pitchFamily="34" charset="-122"/>
                 <a:cs typeface="Arial" pitchFamily="34" charset="-120"/>
               </a:rPr>
-              <a:t>14% of tech IPOs profitable (2000) — Jay Ritter, Univ. of Florida IPO data.</a:t>
+              <a:t>Jay Ritter, Univ. of Florida IPO data.</a:t>
             </a:r>
             <a:endParaRPr lang="en-US" sz="700" dirty="0"/>
           </a:p>
@@ -13163,7 +13163,7 @@
             <a:r>
               <a:rPr lang="en-US" sz="700" b="1" dirty="0">
                 <a:solidFill>
-                  <a:srgbClr val="F6693D"/>
+                  <a:srgbClr val="999999"/>
                 </a:solidFill>
                 <a:latin typeface="Arial" pitchFamily="34" charset="0"/>
                 <a:ea typeface="Arial" pitchFamily="34" charset="-122"/>
@@ -13186,7 +13186,7 @@
                 <a:ea typeface="Arial" pitchFamily="34" charset="-122"/>
                 <a:cs typeface="Arial" pitchFamily="34" charset="-120"/>
               </a:rPr>
-              <a:t>Mag 7 avg net margin 26% (2× S&amp;P) — Bloomberg / company filings, 2025 TTM.</a:t>
+              <a:t>Bloomberg / company filings, 2025 TTM.</a:t>
             </a:r>
             <a:endParaRPr lang="en-US" sz="700" dirty="0"/>
           </a:p>
@@ -13222,7 +13222,7 @@
             <a:r>
               <a:rPr lang="en-US" sz="700" b="1" dirty="0">
                 <a:solidFill>
-                  <a:srgbClr val="F6693D"/>
+                  <a:srgbClr val="999999"/>
                 </a:solidFill>
                 <a:latin typeface="Arial" pitchFamily="34" charset="0"/>
                 <a:ea typeface="Arial" pitchFamily="34" charset="-122"/>
@@ -13245,7 +13245,7 @@
                 <a:ea typeface="Arial" pitchFamily="34" charset="-122"/>
                 <a:cs typeface="Arial" pitchFamily="34" charset="-120"/>
               </a:rPr>
-              <a:t>$500B dark fiber unused (2000 era) — FCC / industry retrospectives.</a:t>
+              <a:t>FCC / industry retrospectives.</a:t>
             </a:r>
             <a:endParaRPr lang="en-US" sz="700" dirty="0"/>
           </a:p>
@@ -13259,7 +13259,7 @@
             <a:r>
               <a:rPr lang="en-US" sz="700" b="1" dirty="0">
                 <a:solidFill>
-                  <a:srgbClr val="F6693D"/>
+                  <a:srgbClr val="999999"/>
                 </a:solidFill>
                 <a:latin typeface="Arial" pitchFamily="34" charset="0"/>
                 <a:ea typeface="Arial" pitchFamily="34" charset="-122"/>
@@ -13282,7 +13282,7 @@
                 <a:ea typeface="Arial" pitchFamily="34" charset="-122"/>
                 <a:cs typeface="Arial" pitchFamily="34" charset="-120"/>
               </a:rPr>
-              <a:t>GPU 2nd-market 90–95% of list — CoreWeave / 2nd-market trackers, 2026.</a:t>
+              <a:t>CoreWeave / 2nd-market trackers, 2026.</a:t>
             </a:r>
             <a:endParaRPr lang="en-US" sz="700" dirty="0"/>
           </a:p>
@@ -13296,7 +13296,7 @@
             <a:r>
               <a:rPr lang="en-US" sz="700" b="1" dirty="0">
                 <a:solidFill>
-                  <a:srgbClr val="F6693D"/>
+                  <a:srgbClr val="999999"/>
                 </a:solidFill>
                 <a:latin typeface="Arial" pitchFamily="34" charset="0"/>
                 <a:ea typeface="Arial" pitchFamily="34" charset="-122"/>
@@ -13319,7 +13319,7 @@
                 <a:ea typeface="Arial" pitchFamily="34" charset="-122"/>
                 <a:cs typeface="Arial" pitchFamily="34" charset="-120"/>
               </a:rPr>
-              <a:t>20+ major telcos bankrupt (2001–02) — public filings / press retrospectives.</a:t>
+              <a:t>Public filings / press retrospectives, 2001–02.</a:t>
             </a:r>
             <a:endParaRPr lang="en-US" sz="700" dirty="0"/>
           </a:p>
@@ -13333,7 +13333,7 @@
             <a:r>
               <a:rPr lang="en-US" sz="700" b="1" dirty="0">
                 <a:solidFill>
-                  <a:srgbClr val="F6693D"/>
+                  <a:srgbClr val="999999"/>
                 </a:solidFill>
                 <a:latin typeface="Arial" pitchFamily="34" charset="0"/>
                 <a:ea typeface="Arial" pitchFamily="34" charset="-122"/>
@@ -13356,7 +13356,7 @@
                 <a:ea typeface="Arial" pitchFamily="34" charset="-122"/>
                 <a:cs typeface="Arial" pitchFamily="34" charset="-120"/>
               </a:rPr>
-              <a:t>Hyperscaler net debt/EBITDA ~48% vs ~80% S&amp;P — Bloomberg, 2025 YE.</a:t>
+              <a:t>Bloomberg, 2025 YE.</a:t>
             </a:r>
             <a:endParaRPr lang="en-US" sz="700" dirty="0"/>
           </a:p>

--- a/ai-markets-deck.pptx
+++ b/ai-markets-deck.pptx
@@ -10926,6 +10926,20 @@
               </a:rPr>
               <a:t>+58 pts</a:t>
             </a:r>
+            <a:pPr algn="ctr" indent="0" marL="0">
+              <a:buNone/>
+            </a:pPr>
+            <a:r>
+              <a:rPr lang="en-US" sz="1800" baseline="30000" dirty="0">
+                <a:solidFill>
+                  <a:srgbClr val="F6693D"/>
+                </a:solidFill>
+                <a:latin typeface="Arial Black" pitchFamily="34" charset="0"/>
+                <a:ea typeface="Arial Black" pitchFamily="34" charset="-122"/>
+                <a:cs typeface="Arial Black" pitchFamily="34" charset="-120"/>
+              </a:rPr>
+              <a:t> 1</a:t>
+            </a:r>
             <a:endParaRPr lang="en-US" sz="5200" dirty="0"/>
           </a:p>
         </p:txBody>
@@ -11093,6 +11107,20 @@
               </a:rPr>
               <a:t>+47%</a:t>
             </a:r>
+            <a:pPr algn="ctr" indent="0" marL="0">
+              <a:buNone/>
+            </a:pPr>
+            <a:r>
+              <a:rPr lang="en-US" sz="1000" baseline="30000" dirty="0">
+                <a:solidFill>
+                  <a:srgbClr val="F6693D"/>
+                </a:solidFill>
+                <a:latin typeface="Arial Black" pitchFamily="34" charset="0"/>
+                <a:ea typeface="Arial Black" pitchFamily="34" charset="-122"/>
+                <a:cs typeface="Arial Black" pitchFamily="34" charset="-120"/>
+              </a:rPr>
+              <a:t> 2</a:t>
+            </a:r>
             <a:endParaRPr lang="en-US" sz="2800" dirty="0"/>
           </a:p>
         </p:txBody>
@@ -11299,6 +11327,20 @@
               </a:rPr>
               <a:t>−21%</a:t>
             </a:r>
+            <a:pPr algn="ctr" indent="0" marL="0">
+              <a:buNone/>
+            </a:pPr>
+            <a:r>
+              <a:rPr lang="en-US" sz="1000" baseline="30000" dirty="0">
+                <a:solidFill>
+                  <a:srgbClr val="CC0000"/>
+                </a:solidFill>
+                <a:latin typeface="Arial Black" pitchFamily="34" charset="0"/>
+                <a:ea typeface="Arial Black" pitchFamily="34" charset="-122"/>
+                <a:cs typeface="Arial Black" pitchFamily="34" charset="-120"/>
+              </a:rPr>
+              <a:t> 3</a:t>
+            </a:r>
             <a:endParaRPr lang="en-US" sz="2800" dirty="0"/>
           </a:p>
         </p:txBody>
@@ -11390,7 +11432,7 @@
         <p:spPr>
           <a:xfrm>
             <a:off x="457200" y="5349240"/>
-            <a:ext cx="8229600" cy="320040"/>
+            <a:ext cx="8229600" cy="274320"/>
           </a:xfrm>
           <a:prstGeom prst="rect">
             <a:avLst/>
@@ -11414,7 +11456,35 @@
                 <a:ea typeface="Arial" pitchFamily="34" charset="-122"/>
                 <a:cs typeface="Arial" pitchFamily="34" charset="-120"/>
               </a:rPr>
-              <a:t>BDC credit indices down ~5% YTD — early signs the sell-off is bleeding into private credit and PE-held SaaS.</a:t>
+              <a:t>BDC credit indices down ~5%</a:t>
+            </a:r>
+            <a:pPr algn="ctr" indent="0" marL="0">
+              <a:buNone/>
+            </a:pPr>
+            <a:r>
+              <a:rPr lang="en-US" sz="700" i="1" baseline="30000" dirty="0">
+                <a:solidFill>
+                  <a:srgbClr val="666666"/>
+                </a:solidFill>
+                <a:latin typeface="Arial" pitchFamily="34" charset="0"/>
+                <a:ea typeface="Arial" pitchFamily="34" charset="-122"/>
+                <a:cs typeface="Arial" pitchFamily="34" charset="-120"/>
+              </a:rPr>
+              <a:t> 4</a:t>
+            </a:r>
+            <a:pPr algn="ctr" indent="0" marL="0">
+              <a:buNone/>
+            </a:pPr>
+            <a:r>
+              <a:rPr lang="en-US" sz="950" i="1" dirty="0">
+                <a:solidFill>
+                  <a:srgbClr val="666666"/>
+                </a:solidFill>
+                <a:latin typeface="Arial" pitchFamily="34" charset="0"/>
+                <a:ea typeface="Arial" pitchFamily="34" charset="-122"/>
+                <a:cs typeface="Arial" pitchFamily="34" charset="-120"/>
+              </a:rPr>
+              <a:t> YTD — early signs the sell-off is bleeding into private credit and PE-held SaaS.</a:t>
             </a:r>
             <a:endParaRPr lang="en-US" sz="950" dirty="0"/>
           </a:p>
@@ -11429,7 +11499,7 @@
         <p:spPr>
           <a:xfrm>
             <a:off x="457200" y="5875020"/>
-            <a:ext cx="8229600" cy="320040"/>
+            <a:ext cx="8229600" cy="457200"/>
           </a:xfrm>
           <a:prstGeom prst="rect">
             <a:avLst/>
@@ -11445,6 +11515,20 @@
               <a:buNone/>
             </a:pPr>
             <a:r>
+              <a:rPr lang="en-US" sz="700" b="1" dirty="0">
+                <a:solidFill>
+                  <a:srgbClr val="999999"/>
+                </a:solidFill>
+                <a:latin typeface="Arial" pitchFamily="34" charset="0"/>
+                <a:ea typeface="Arial" pitchFamily="34" charset="-122"/>
+                <a:cs typeface="Arial" pitchFamily="34" charset="-120"/>
+              </a:rPr>
+              <a:t>(1) </a:t>
+            </a:r>
+            <a:pPr indent="0" marL="0">
+              <a:buNone/>
+            </a:pPr>
+            <a:r>
               <a:rPr lang="en-US" sz="700" dirty="0">
                 <a:solidFill>
                   <a:srgbClr val="999999"/>
@@ -11453,7 +11537,91 @@
                 <a:ea typeface="Arial" pitchFamily="34" charset="-122"/>
                 <a:cs typeface="Arial" pitchFamily="34" charset="-120"/>
               </a:rPr>
-              <a:t>Sources: Yahoo Finance YTD returns (Apr 17, 2026); TrendForce / DCD on HBM capacity; multiples.vc public software multiples (Apr 2026); VanEck BIZD; Morgan Stanley CIO Survey; PitchBook PE marks.</a:t>
+              <a:t>Yahoo Finance, Apr 17, 2026 (SOX, IGV), </a:t>
+            </a:r>
+            <a:pPr indent="0" marL="0">
+              <a:buNone/>
+            </a:pPr>
+            <a:r>
+              <a:rPr lang="en-US" sz="700" b="1" dirty="0">
+                <a:solidFill>
+                  <a:srgbClr val="999999"/>
+                </a:solidFill>
+                <a:latin typeface="Arial" pitchFamily="34" charset="0"/>
+                <a:ea typeface="Arial" pitchFamily="34" charset="-122"/>
+                <a:cs typeface="Arial" pitchFamily="34" charset="-120"/>
+              </a:rPr>
+              <a:t>(2) </a:t>
+            </a:r>
+            <a:pPr indent="0" marL="0">
+              <a:buNone/>
+            </a:pPr>
+            <a:r>
+              <a:rPr lang="en-US" sz="700" dirty="0">
+                <a:solidFill>
+                  <a:srgbClr val="999999"/>
+                </a:solidFill>
+                <a:latin typeface="Arial" pitchFamily="34" charset="0"/>
+                <a:ea typeface="Arial" pitchFamily="34" charset="-122"/>
+                <a:cs typeface="Arial" pitchFamily="34" charset="-120"/>
+              </a:rPr>
+              <a:t>TrendForce via Data Center Dynamics, 2026, </a:t>
+            </a:r>
+            <a:pPr indent="0" marL="0">
+              <a:buNone/>
+            </a:pPr>
+            <a:r>
+              <a:rPr lang="en-US" sz="700" b="1" dirty="0">
+                <a:solidFill>
+                  <a:srgbClr val="999999"/>
+                </a:solidFill>
+                <a:latin typeface="Arial" pitchFamily="34" charset="0"/>
+                <a:ea typeface="Arial" pitchFamily="34" charset="-122"/>
+                <a:cs typeface="Arial" pitchFamily="34" charset="-120"/>
+              </a:rPr>
+              <a:t>(3) </a:t>
+            </a:r>
+            <a:pPr indent="0" marL="0">
+              <a:buNone/>
+            </a:pPr>
+            <a:r>
+              <a:rPr lang="en-US" sz="700" dirty="0">
+                <a:solidFill>
+                  <a:srgbClr val="999999"/>
+                </a:solidFill>
+                <a:latin typeface="Arial" pitchFamily="34" charset="0"/>
+                <a:ea typeface="Arial" pitchFamily="34" charset="-122"/>
+                <a:cs typeface="Arial" pitchFamily="34" charset="-120"/>
+              </a:rPr>
+              <a:t>multiples.vc public software multiples, Apr 2026, </a:t>
+            </a:r>
+            <a:pPr indent="0" marL="0">
+              <a:buNone/>
+            </a:pPr>
+            <a:r>
+              <a:rPr lang="en-US" sz="700" b="1" dirty="0">
+                <a:solidFill>
+                  <a:srgbClr val="999999"/>
+                </a:solidFill>
+                <a:latin typeface="Arial" pitchFamily="34" charset="0"/>
+                <a:ea typeface="Arial" pitchFamily="34" charset="-122"/>
+                <a:cs typeface="Arial" pitchFamily="34" charset="-120"/>
+              </a:rPr>
+              <a:t>(4) </a:t>
+            </a:r>
+            <a:pPr indent="0" marL="0">
+              <a:buNone/>
+            </a:pPr>
+            <a:r>
+              <a:rPr lang="en-US" sz="700" dirty="0">
+                <a:solidFill>
+                  <a:srgbClr val="999999"/>
+                </a:solidFill>
+                <a:latin typeface="Arial" pitchFamily="34" charset="0"/>
+                <a:ea typeface="Arial" pitchFamily="34" charset="-122"/>
+                <a:cs typeface="Arial" pitchFamily="34" charset="-120"/>
+              </a:rPr>
+              <a:t>VanEck BIZD / Yahoo Finance.</a:t>
             </a:r>
             <a:endParaRPr lang="en-US" sz="700" dirty="0"/>
           </a:p>
@@ -13030,8 +13198,8 @@
         </p:nvSpPr>
         <p:spPr>
           <a:xfrm>
-            <a:off x="457200" y="5532120"/>
-            <a:ext cx="4023360" cy="731520"/>
+            <a:off x="457200" y="5875020"/>
+            <a:ext cx="8229600" cy="457200"/>
           </a:xfrm>
           <a:prstGeom prst="rect">
             <a:avLst/>
@@ -13044,9 +13212,6 @@
           <a:lstStyle/>
           <a:p>
             <a:pPr indent="0" marL="0">
-              <a:spcAft>
-                <a:spcPts val="100"/>
-              </a:spcAft>
               <a:buNone/>
             </a:pPr>
             <a:r>
@@ -13058,12 +13223,9 @@
                 <a:ea typeface="Arial" pitchFamily="34" charset="-122"/>
                 <a:cs typeface="Arial" pitchFamily="34" charset="-120"/>
               </a:rPr>
-              <a:t>1  </a:t>
-            </a:r>
-            <a:pPr indent="0" marL="0">
-              <a:spcAft>
-                <a:spcPts val="100"/>
-              </a:spcAft>
+              <a:t>(1) </a:t>
+            </a:r>
+            <a:pPr indent="0" marL="0">
               <a:buNone/>
             </a:pPr>
             <a:r>
@@ -13075,296 +13237,211 @@
                 <a:ea typeface="Arial" pitchFamily="34" charset="-122"/>
                 <a:cs typeface="Arial" pitchFamily="34" charset="-120"/>
               </a:rPr>
-              <a:t>Harding Loevner retrospective.</a:t>
+              <a:t>Harding Loevner retrospective, </a:t>
+            </a:r>
+            <a:pPr indent="0" marL="0">
+              <a:buNone/>
+            </a:pPr>
+            <a:r>
+              <a:rPr lang="en-US" sz="700" b="1" dirty="0">
+                <a:solidFill>
+                  <a:srgbClr val="999999"/>
+                </a:solidFill>
+                <a:latin typeface="Arial" pitchFamily="34" charset="0"/>
+                <a:ea typeface="Arial" pitchFamily="34" charset="-122"/>
+                <a:cs typeface="Arial" pitchFamily="34" charset="-120"/>
+              </a:rPr>
+              <a:t>(2) </a:t>
+            </a:r>
+            <a:pPr indent="0" marL="0">
+              <a:buNone/>
+            </a:pPr>
+            <a:r>
+              <a:rPr lang="en-US" sz="700" dirty="0">
+                <a:solidFill>
+                  <a:srgbClr val="999999"/>
+                </a:solidFill>
+                <a:latin typeface="Arial" pitchFamily="34" charset="0"/>
+                <a:ea typeface="Arial" pitchFamily="34" charset="-122"/>
+                <a:cs typeface="Arial" pitchFamily="34" charset="-120"/>
+              </a:rPr>
+              <a:t>GuruFocus (Apr 17, 2026), </a:t>
+            </a:r>
+            <a:pPr indent="0" marL="0">
+              <a:buNone/>
+            </a:pPr>
+            <a:r>
+              <a:rPr lang="en-US" sz="700" b="1" dirty="0">
+                <a:solidFill>
+                  <a:srgbClr val="999999"/>
+                </a:solidFill>
+                <a:latin typeface="Arial" pitchFamily="34" charset="0"/>
+                <a:ea typeface="Arial" pitchFamily="34" charset="-122"/>
+                <a:cs typeface="Arial" pitchFamily="34" charset="-120"/>
+              </a:rPr>
+              <a:t>(3) </a:t>
+            </a:r>
+            <a:pPr indent="0" marL="0">
+              <a:buNone/>
+            </a:pPr>
+            <a:r>
+              <a:rPr lang="en-US" sz="700" dirty="0">
+                <a:solidFill>
+                  <a:srgbClr val="999999"/>
+                </a:solidFill>
+                <a:latin typeface="Arial" pitchFamily="34" charset="0"/>
+                <a:ea typeface="Arial" pitchFamily="34" charset="-122"/>
+                <a:cs typeface="Arial" pitchFamily="34" charset="-120"/>
+              </a:rPr>
+              <a:t>Jay Ritter, Univ. of Florida IPO data, </a:t>
+            </a:r>
+            <a:pPr indent="0" marL="0">
+              <a:buNone/>
+            </a:pPr>
+            <a:r>
+              <a:rPr lang="en-US" sz="700" b="1" dirty="0">
+                <a:solidFill>
+                  <a:srgbClr val="999999"/>
+                </a:solidFill>
+                <a:latin typeface="Arial" pitchFamily="34" charset="0"/>
+                <a:ea typeface="Arial" pitchFamily="34" charset="-122"/>
+                <a:cs typeface="Arial" pitchFamily="34" charset="-120"/>
+              </a:rPr>
+              <a:t>(4) </a:t>
+            </a:r>
+            <a:pPr indent="0" marL="0">
+              <a:buNone/>
+            </a:pPr>
+            <a:r>
+              <a:rPr lang="en-US" sz="700" dirty="0">
+                <a:solidFill>
+                  <a:srgbClr val="999999"/>
+                </a:solidFill>
+                <a:latin typeface="Arial" pitchFamily="34" charset="0"/>
+                <a:ea typeface="Arial" pitchFamily="34" charset="-122"/>
+                <a:cs typeface="Arial" pitchFamily="34" charset="-120"/>
+              </a:rPr>
+              <a:t>Bloomberg / company filings, 2025 TTM, </a:t>
+            </a:r>
+            <a:pPr indent="0" marL="0">
+              <a:buNone/>
+            </a:pPr>
+            <a:r>
+              <a:rPr lang="en-US" sz="700" b="1" dirty="0">
+                <a:solidFill>
+                  <a:srgbClr val="999999"/>
+                </a:solidFill>
+                <a:latin typeface="Arial" pitchFamily="34" charset="0"/>
+                <a:ea typeface="Arial" pitchFamily="34" charset="-122"/>
+                <a:cs typeface="Arial" pitchFamily="34" charset="-120"/>
+              </a:rPr>
+              <a:t>(5) </a:t>
+            </a:r>
+            <a:pPr indent="0" marL="0">
+              <a:buNone/>
+            </a:pPr>
+            <a:r>
+              <a:rPr lang="en-US" sz="700" dirty="0">
+                <a:solidFill>
+                  <a:srgbClr val="999999"/>
+                </a:solidFill>
+                <a:latin typeface="Arial" pitchFamily="34" charset="0"/>
+                <a:ea typeface="Arial" pitchFamily="34" charset="-122"/>
+                <a:cs typeface="Arial" pitchFamily="34" charset="-120"/>
+              </a:rPr>
+              <a:t>FCC / industry retrospectives, </a:t>
+            </a:r>
+            <a:pPr indent="0" marL="0">
+              <a:buNone/>
+            </a:pPr>
+            <a:r>
+              <a:rPr lang="en-US" sz="700" b="1" dirty="0">
+                <a:solidFill>
+                  <a:srgbClr val="999999"/>
+                </a:solidFill>
+                <a:latin typeface="Arial" pitchFamily="34" charset="0"/>
+                <a:ea typeface="Arial" pitchFamily="34" charset="-122"/>
+                <a:cs typeface="Arial" pitchFamily="34" charset="-120"/>
+              </a:rPr>
+              <a:t>(6) </a:t>
+            </a:r>
+            <a:pPr indent="0" marL="0">
+              <a:buNone/>
+            </a:pPr>
+            <a:r>
+              <a:rPr lang="en-US" sz="700" dirty="0">
+                <a:solidFill>
+                  <a:srgbClr val="999999"/>
+                </a:solidFill>
+                <a:latin typeface="Arial" pitchFamily="34" charset="0"/>
+                <a:ea typeface="Arial" pitchFamily="34" charset="-122"/>
+                <a:cs typeface="Arial" pitchFamily="34" charset="-120"/>
+              </a:rPr>
+              <a:t>CoreWeave / 2nd-market trackers, 2026, </a:t>
+            </a:r>
+            <a:pPr indent="0" marL="0">
+              <a:buNone/>
+            </a:pPr>
+            <a:r>
+              <a:rPr lang="en-US" sz="700" b="1" dirty="0">
+                <a:solidFill>
+                  <a:srgbClr val="999999"/>
+                </a:solidFill>
+                <a:latin typeface="Arial" pitchFamily="34" charset="0"/>
+                <a:ea typeface="Arial" pitchFamily="34" charset="-122"/>
+                <a:cs typeface="Arial" pitchFamily="34" charset="-120"/>
+              </a:rPr>
+              <a:t>(7) </a:t>
+            </a:r>
+            <a:pPr indent="0" marL="0">
+              <a:buNone/>
+            </a:pPr>
+            <a:r>
+              <a:rPr lang="en-US" sz="700" dirty="0">
+                <a:solidFill>
+                  <a:srgbClr val="999999"/>
+                </a:solidFill>
+                <a:latin typeface="Arial" pitchFamily="34" charset="0"/>
+                <a:ea typeface="Arial" pitchFamily="34" charset="-122"/>
+                <a:cs typeface="Arial" pitchFamily="34" charset="-120"/>
+              </a:rPr>
+              <a:t>Public filings / press retrospectives, 2001–02, </a:t>
+            </a:r>
+            <a:pPr indent="0" marL="0">
+              <a:buNone/>
+            </a:pPr>
+            <a:r>
+              <a:rPr lang="en-US" sz="700" b="1" dirty="0">
+                <a:solidFill>
+                  <a:srgbClr val="999999"/>
+                </a:solidFill>
+                <a:latin typeface="Arial" pitchFamily="34" charset="0"/>
+                <a:ea typeface="Arial" pitchFamily="34" charset="-122"/>
+                <a:cs typeface="Arial" pitchFamily="34" charset="-120"/>
+              </a:rPr>
+              <a:t>(8) </a:t>
+            </a:r>
+            <a:pPr indent="0" marL="0">
+              <a:buNone/>
+            </a:pPr>
+            <a:r>
+              <a:rPr lang="en-US" sz="700" dirty="0">
+                <a:solidFill>
+                  <a:srgbClr val="999999"/>
+                </a:solidFill>
+                <a:latin typeface="Arial" pitchFamily="34" charset="0"/>
+                <a:ea typeface="Arial" pitchFamily="34" charset="-122"/>
+                <a:cs typeface="Arial" pitchFamily="34" charset="-120"/>
+              </a:rPr>
+              <a:t>Bloomberg, 2025 YE.</a:t>
             </a:r>
             <a:endParaRPr lang="en-US" sz="700" dirty="0"/>
           </a:p>
-          <a:p>
-            <a:pPr indent="0" marL="0">
-              <a:spcAft>
-                <a:spcPts val="100"/>
-              </a:spcAft>
-              <a:buNone/>
-            </a:pPr>
-            <a:r>
-              <a:rPr lang="en-US" sz="700" b="1" dirty="0">
-                <a:solidFill>
-                  <a:srgbClr val="999999"/>
-                </a:solidFill>
-                <a:latin typeface="Arial" pitchFamily="34" charset="0"/>
-                <a:ea typeface="Arial" pitchFamily="34" charset="-122"/>
-                <a:cs typeface="Arial" pitchFamily="34" charset="-120"/>
-              </a:rPr>
-              <a:t>2  </a:t>
-            </a:r>
-            <a:pPr indent="0" marL="0">
-              <a:spcAft>
-                <a:spcPts val="100"/>
-              </a:spcAft>
-              <a:buNone/>
-            </a:pPr>
-            <a:r>
-              <a:rPr lang="en-US" sz="700" dirty="0">
-                <a:solidFill>
-                  <a:srgbClr val="999999"/>
-                </a:solidFill>
-                <a:latin typeface="Arial" pitchFamily="34" charset="0"/>
-                <a:ea typeface="Arial" pitchFamily="34" charset="-122"/>
-                <a:cs typeface="Arial" pitchFamily="34" charset="-120"/>
-              </a:rPr>
-              <a:t>GuruFocus (Apr 17, 2026).</a:t>
-            </a:r>
-            <a:endParaRPr lang="en-US" sz="700" dirty="0"/>
-          </a:p>
-          <a:p>
-            <a:pPr indent="0" marL="0">
-              <a:spcAft>
-                <a:spcPts val="100"/>
-              </a:spcAft>
-              <a:buNone/>
-            </a:pPr>
-            <a:r>
-              <a:rPr lang="en-US" sz="700" b="1" dirty="0">
-                <a:solidFill>
-                  <a:srgbClr val="999999"/>
-                </a:solidFill>
-                <a:latin typeface="Arial" pitchFamily="34" charset="0"/>
-                <a:ea typeface="Arial" pitchFamily="34" charset="-122"/>
-                <a:cs typeface="Arial" pitchFamily="34" charset="-120"/>
-              </a:rPr>
-              <a:t>3  </a:t>
-            </a:r>
-            <a:pPr indent="0" marL="0">
-              <a:spcAft>
-                <a:spcPts val="100"/>
-              </a:spcAft>
-              <a:buNone/>
-            </a:pPr>
-            <a:r>
-              <a:rPr lang="en-US" sz="700" dirty="0">
-                <a:solidFill>
-                  <a:srgbClr val="999999"/>
-                </a:solidFill>
-                <a:latin typeface="Arial" pitchFamily="34" charset="0"/>
-                <a:ea typeface="Arial" pitchFamily="34" charset="-122"/>
-                <a:cs typeface="Arial" pitchFamily="34" charset="-120"/>
-              </a:rPr>
-              <a:t>Jay Ritter, Univ. of Florida IPO data.</a:t>
-            </a:r>
-            <a:endParaRPr lang="en-US" sz="700" dirty="0"/>
-          </a:p>
-          <a:p>
-            <a:pPr indent="0" marL="0">
-              <a:spcAft>
-                <a:spcPts val="100"/>
-              </a:spcAft>
-              <a:buNone/>
-            </a:pPr>
-            <a:r>
-              <a:rPr lang="en-US" sz="700" b="1" dirty="0">
-                <a:solidFill>
-                  <a:srgbClr val="999999"/>
-                </a:solidFill>
-                <a:latin typeface="Arial" pitchFamily="34" charset="0"/>
-                <a:ea typeface="Arial" pitchFamily="34" charset="-122"/>
-                <a:cs typeface="Arial" pitchFamily="34" charset="-120"/>
-              </a:rPr>
-              <a:t>4  </a:t>
-            </a:r>
-            <a:pPr indent="0" marL="0">
-              <a:spcAft>
-                <a:spcPts val="100"/>
-              </a:spcAft>
-              <a:buNone/>
-            </a:pPr>
-            <a:r>
-              <a:rPr lang="en-US" sz="700" dirty="0">
-                <a:solidFill>
-                  <a:srgbClr val="999999"/>
-                </a:solidFill>
-                <a:latin typeface="Arial" pitchFamily="34" charset="0"/>
-                <a:ea typeface="Arial" pitchFamily="34" charset="-122"/>
-                <a:cs typeface="Arial" pitchFamily="34" charset="-120"/>
-              </a:rPr>
-              <a:t>Bloomberg / company filings, 2025 TTM.</a:t>
-            </a:r>
-            <a:endParaRPr lang="en-US" sz="700" dirty="0"/>
-          </a:p>
-        </p:txBody>
-      </p:sp>
-      <p:sp>
-        <p:nvSpPr>
-          <p:cNvPr id="38" name="Text 36"/>
-          <p:cNvSpPr/>
-          <p:nvPr/>
-        </p:nvSpPr>
-        <p:spPr>
-          <a:xfrm>
-            <a:off x="4663440" y="5532120"/>
-            <a:ext cx="4023360" cy="731520"/>
-          </a:xfrm>
-          <a:prstGeom prst="rect">
-            <a:avLst/>
-          </a:prstGeom>
-          <a:noFill/>
-          <a:ln/>
-        </p:spPr>
-        <p:txBody>
-          <a:bodyPr wrap="square" lIns="0" tIns="0" rIns="0" bIns="0" rtlCol="0" anchor="t"/>
-          <a:lstStyle/>
-          <a:p>
-            <a:pPr indent="0" marL="0">
-              <a:spcAft>
-                <a:spcPts val="100"/>
-              </a:spcAft>
-              <a:buNone/>
-            </a:pPr>
-            <a:r>
-              <a:rPr lang="en-US" sz="700" b="1" dirty="0">
-                <a:solidFill>
-                  <a:srgbClr val="999999"/>
-                </a:solidFill>
-                <a:latin typeface="Arial" pitchFamily="34" charset="0"/>
-                <a:ea typeface="Arial" pitchFamily="34" charset="-122"/>
-                <a:cs typeface="Arial" pitchFamily="34" charset="-120"/>
-              </a:rPr>
-              <a:t>5  </a:t>
-            </a:r>
-            <a:pPr indent="0" marL="0">
-              <a:spcAft>
-                <a:spcPts val="100"/>
-              </a:spcAft>
-              <a:buNone/>
-            </a:pPr>
-            <a:r>
-              <a:rPr lang="en-US" sz="700" dirty="0">
-                <a:solidFill>
-                  <a:srgbClr val="999999"/>
-                </a:solidFill>
-                <a:latin typeface="Arial" pitchFamily="34" charset="0"/>
-                <a:ea typeface="Arial" pitchFamily="34" charset="-122"/>
-                <a:cs typeface="Arial" pitchFamily="34" charset="-120"/>
-              </a:rPr>
-              <a:t>FCC / industry retrospectives.</a:t>
-            </a:r>
-            <a:endParaRPr lang="en-US" sz="700" dirty="0"/>
-          </a:p>
-          <a:p>
-            <a:pPr indent="0" marL="0">
-              <a:spcAft>
-                <a:spcPts val="100"/>
-              </a:spcAft>
-              <a:buNone/>
-            </a:pPr>
-            <a:r>
-              <a:rPr lang="en-US" sz="700" b="1" dirty="0">
-                <a:solidFill>
-                  <a:srgbClr val="999999"/>
-                </a:solidFill>
-                <a:latin typeface="Arial" pitchFamily="34" charset="0"/>
-                <a:ea typeface="Arial" pitchFamily="34" charset="-122"/>
-                <a:cs typeface="Arial" pitchFamily="34" charset="-120"/>
-              </a:rPr>
-              <a:t>6  </a:t>
-            </a:r>
-            <a:pPr indent="0" marL="0">
-              <a:spcAft>
-                <a:spcPts val="100"/>
-              </a:spcAft>
-              <a:buNone/>
-            </a:pPr>
-            <a:r>
-              <a:rPr lang="en-US" sz="700" dirty="0">
-                <a:solidFill>
-                  <a:srgbClr val="999999"/>
-                </a:solidFill>
-                <a:latin typeface="Arial" pitchFamily="34" charset="0"/>
-                <a:ea typeface="Arial" pitchFamily="34" charset="-122"/>
-                <a:cs typeface="Arial" pitchFamily="34" charset="-120"/>
-              </a:rPr>
-              <a:t>CoreWeave / 2nd-market trackers, 2026.</a:t>
-            </a:r>
-            <a:endParaRPr lang="en-US" sz="700" dirty="0"/>
-          </a:p>
-          <a:p>
-            <a:pPr indent="0" marL="0">
-              <a:spcAft>
-                <a:spcPts val="100"/>
-              </a:spcAft>
-              <a:buNone/>
-            </a:pPr>
-            <a:r>
-              <a:rPr lang="en-US" sz="700" b="1" dirty="0">
-                <a:solidFill>
-                  <a:srgbClr val="999999"/>
-                </a:solidFill>
-                <a:latin typeface="Arial" pitchFamily="34" charset="0"/>
-                <a:ea typeface="Arial" pitchFamily="34" charset="-122"/>
-                <a:cs typeface="Arial" pitchFamily="34" charset="-120"/>
-              </a:rPr>
-              <a:t>7  </a:t>
-            </a:r>
-            <a:pPr indent="0" marL="0">
-              <a:spcAft>
-                <a:spcPts val="100"/>
-              </a:spcAft>
-              <a:buNone/>
-            </a:pPr>
-            <a:r>
-              <a:rPr lang="en-US" sz="700" dirty="0">
-                <a:solidFill>
-                  <a:srgbClr val="999999"/>
-                </a:solidFill>
-                <a:latin typeface="Arial" pitchFamily="34" charset="0"/>
-                <a:ea typeface="Arial" pitchFamily="34" charset="-122"/>
-                <a:cs typeface="Arial" pitchFamily="34" charset="-120"/>
-              </a:rPr>
-              <a:t>Public filings / press retrospectives, 2001–02.</a:t>
-            </a:r>
-            <a:endParaRPr lang="en-US" sz="700" dirty="0"/>
-          </a:p>
-          <a:p>
-            <a:pPr indent="0" marL="0">
-              <a:spcAft>
-                <a:spcPts val="100"/>
-              </a:spcAft>
-              <a:buNone/>
-            </a:pPr>
-            <a:r>
-              <a:rPr lang="en-US" sz="700" b="1" dirty="0">
-                <a:solidFill>
-                  <a:srgbClr val="999999"/>
-                </a:solidFill>
-                <a:latin typeface="Arial" pitchFamily="34" charset="0"/>
-                <a:ea typeface="Arial" pitchFamily="34" charset="-122"/>
-                <a:cs typeface="Arial" pitchFamily="34" charset="-120"/>
-              </a:rPr>
-              <a:t>8  </a:t>
-            </a:r>
-            <a:pPr indent="0" marL="0">
-              <a:spcAft>
-                <a:spcPts val="100"/>
-              </a:spcAft>
-              <a:buNone/>
-            </a:pPr>
-            <a:r>
-              <a:rPr lang="en-US" sz="700" dirty="0">
-                <a:solidFill>
-                  <a:srgbClr val="999999"/>
-                </a:solidFill>
-                <a:latin typeface="Arial" pitchFamily="34" charset="0"/>
-                <a:ea typeface="Arial" pitchFamily="34" charset="-122"/>
-                <a:cs typeface="Arial" pitchFamily="34" charset="-120"/>
-              </a:rPr>
-              <a:t>Bloomberg, 2025 YE.</a:t>
-            </a:r>
-            <a:endParaRPr lang="en-US" sz="700" dirty="0"/>
-          </a:p>
-        </p:txBody>
-      </p:sp>
-      <p:sp>
-        <p:nvSpPr>
-          <p:cNvPr id="39" name="Shape 37"/>
+        </p:txBody>
+      </p:sp>
+      <p:sp>
+        <p:nvSpPr>
+          <p:cNvPr id="38" name="Shape 36"/>
           <p:cNvSpPr/>
           <p:nvPr/>
         </p:nvSpPr>
@@ -13389,7 +13466,7 @@
       </p:sp>
       <p:sp>
         <p:nvSpPr>
-          <p:cNvPr id="40" name="Text 38"/>
+          <p:cNvPr id="39" name="Text 37"/>
           <p:cNvSpPr/>
           <p:nvPr/>
         </p:nvSpPr>
@@ -13428,7 +13505,7 @@
       </p:sp>
       <p:sp>
         <p:nvSpPr>
-          <p:cNvPr id="41" name="Text 39"/>
+          <p:cNvPr id="40" name="Text 38"/>
           <p:cNvSpPr/>
           <p:nvPr/>
         </p:nvSpPr>
@@ -13756,75 +13833,11 @@
               </a:rPr>
               <a:t>~90%</a:t>
             </a:r>
-            <a:endParaRPr lang="en-US" sz="4000" dirty="0"/>
-          </a:p>
-        </p:txBody>
-      </p:sp>
-      <p:sp>
-        <p:nvSpPr>
-          <p:cNvPr id="10" name="Text 8"/>
-          <p:cNvSpPr/>
-          <p:nvPr/>
-        </p:nvSpPr>
-        <p:spPr>
-          <a:xfrm>
-            <a:off x="3886200" y="2514600"/>
-            <a:ext cx="2377440" cy="502920"/>
-          </a:xfrm>
-          <a:prstGeom prst="rect">
-            <a:avLst/>
-          </a:prstGeom>
-          <a:noFill/>
-          <a:ln/>
-        </p:spPr>
-        <p:txBody>
-          <a:bodyPr wrap="square" lIns="0" tIns="0" rIns="0" bIns="0" rtlCol="0" anchor="t"/>
-          <a:lstStyle/>
-          <a:p>
             <a:pPr algn="ctr" indent="0" marL="0">
               <a:buNone/>
             </a:pPr>
             <a:r>
-              <a:rPr lang="en-US" sz="1100" dirty="0">
-                <a:solidFill>
-                  <a:srgbClr val="666666"/>
-                </a:solidFill>
-                <a:latin typeface="Arial" pitchFamily="34" charset="0"/>
-                <a:ea typeface="Arial" pitchFamily="34" charset="-122"/>
-                <a:cs typeface="Arial" pitchFamily="34" charset="-120"/>
-              </a:rPr>
-              <a:t>TSMC share of advanced-node chips</a:t>
-            </a:r>
-            <a:endParaRPr lang="en-US" sz="1100" dirty="0"/>
-          </a:p>
-        </p:txBody>
-      </p:sp>
-      <p:sp>
-        <p:nvSpPr>
-          <p:cNvPr id="11" name="Text 9"/>
-          <p:cNvSpPr/>
-          <p:nvPr/>
-        </p:nvSpPr>
-        <p:spPr>
-          <a:xfrm>
-            <a:off x="6446520" y="1783080"/>
-            <a:ext cx="2377440" cy="685800"/>
-          </a:xfrm>
-          <a:prstGeom prst="rect">
-            <a:avLst/>
-          </a:prstGeom>
-          <a:noFill/>
-          <a:ln/>
-        </p:spPr>
-        <p:txBody>
-          <a:bodyPr wrap="square" lIns="0" tIns="0" rIns="0" bIns="0" rtlCol="0" anchor="ctr"/>
-          <a:lstStyle/>
-          <a:p>
-            <a:pPr algn="ctr" indent="0" marL="0">
-              <a:buNone/>
-            </a:pPr>
-            <a:r>
-              <a:rPr lang="en-US" sz="4000" b="1" dirty="0">
+              <a:rPr lang="en-US" sz="1400" baseline="30000" dirty="0">
                 <a:solidFill>
                   <a:srgbClr val="CC0000"/>
                 </a:solidFill>
@@ -13832,7 +13845,99 @@
                 <a:ea typeface="Arial Black" pitchFamily="34" charset="-122"/>
                 <a:cs typeface="Arial Black" pitchFamily="34" charset="-120"/>
               </a:rPr>
+              <a:t> 1</a:t>
+            </a:r>
+            <a:endParaRPr lang="en-US" sz="4000" dirty="0"/>
+          </a:p>
+        </p:txBody>
+      </p:sp>
+      <p:sp>
+        <p:nvSpPr>
+          <p:cNvPr id="10" name="Text 8"/>
+          <p:cNvSpPr/>
+          <p:nvPr/>
+        </p:nvSpPr>
+        <p:spPr>
+          <a:xfrm>
+            <a:off x="3886200" y="2514600"/>
+            <a:ext cx="2377440" cy="502920"/>
+          </a:xfrm>
+          <a:prstGeom prst="rect">
+            <a:avLst/>
+          </a:prstGeom>
+          <a:noFill/>
+          <a:ln/>
+        </p:spPr>
+        <p:txBody>
+          <a:bodyPr wrap="square" lIns="0" tIns="0" rIns="0" bIns="0" rtlCol="0" anchor="t"/>
+          <a:lstStyle/>
+          <a:p>
+            <a:pPr algn="ctr" indent="0" marL="0">
+              <a:buNone/>
+            </a:pPr>
+            <a:r>
+              <a:rPr lang="en-US" sz="1100" dirty="0">
+                <a:solidFill>
+                  <a:srgbClr val="666666"/>
+                </a:solidFill>
+                <a:latin typeface="Arial" pitchFamily="34" charset="0"/>
+                <a:ea typeface="Arial" pitchFamily="34" charset="-122"/>
+                <a:cs typeface="Arial" pitchFamily="34" charset="-120"/>
+              </a:rPr>
+              <a:t>TSMC share of advanced-node chips</a:t>
+            </a:r>
+            <a:endParaRPr lang="en-US" sz="1100" dirty="0"/>
+          </a:p>
+        </p:txBody>
+      </p:sp>
+      <p:sp>
+        <p:nvSpPr>
+          <p:cNvPr id="11" name="Text 9"/>
+          <p:cNvSpPr/>
+          <p:nvPr/>
+        </p:nvSpPr>
+        <p:spPr>
+          <a:xfrm>
+            <a:off x="6446520" y="1783080"/>
+            <a:ext cx="2377440" cy="685800"/>
+          </a:xfrm>
+          <a:prstGeom prst="rect">
+            <a:avLst/>
+          </a:prstGeom>
+          <a:noFill/>
+          <a:ln/>
+        </p:spPr>
+        <p:txBody>
+          <a:bodyPr wrap="square" lIns="0" tIns="0" rIns="0" bIns="0" rtlCol="0" anchor="ctr"/>
+          <a:lstStyle/>
+          <a:p>
+            <a:pPr algn="ctr" indent="0" marL="0">
+              <a:buNone/>
+            </a:pPr>
+            <a:r>
+              <a:rPr lang="en-US" sz="4000" b="1" dirty="0">
+                <a:solidFill>
+                  <a:srgbClr val="CC0000"/>
+                </a:solidFill>
+                <a:latin typeface="Arial Black" pitchFamily="34" charset="0"/>
+                <a:ea typeface="Arial Black" pitchFamily="34" charset="-122"/>
+                <a:cs typeface="Arial Black" pitchFamily="34" charset="-120"/>
+              </a:rPr>
               <a:t>76%</a:t>
+            </a:r>
+            <a:pPr algn="ctr" indent="0" marL="0">
+              <a:buNone/>
+            </a:pPr>
+            <a:r>
+              <a:rPr lang="en-US" sz="1400" baseline="30000" dirty="0">
+                <a:solidFill>
+                  <a:srgbClr val="CC0000"/>
+                </a:solidFill>
+                <a:latin typeface="Arial Black" pitchFamily="34" charset="0"/>
+                <a:ea typeface="Arial Black" pitchFamily="34" charset="-122"/>
+                <a:cs typeface="Arial Black" pitchFamily="34" charset="-120"/>
+              </a:rPr>
+              <a:t> 2</a:t>
             </a:r>
             <a:endParaRPr lang="en-US" sz="4000" dirty="0"/>
           </a:p>
@@ -13910,7 +14015,63 @@
                 <a:ea typeface="Arial" pitchFamily="34" charset="-122"/>
                 <a:cs typeface="Arial" pitchFamily="34" charset="-120"/>
               </a:rPr>
-              <a:t>A single leading-edge chip crosses 70+ borders and six countries before reaching a data center. ASML builds fewer than 100 EUV machines a year.</a:t>
+              <a:t>A single leading-edge chip crosses 70+ borders and six countries</a:t>
+            </a:r>
+            <a:pPr indent="0" marL="0">
+              <a:buNone/>
+            </a:pPr>
+            <a:r>
+              <a:rPr lang="en-US" sz="800" baseline="30000" dirty="0">
+                <a:solidFill>
+                  <a:srgbClr val="333333"/>
+                </a:solidFill>
+                <a:latin typeface="Arial" pitchFamily="34" charset="0"/>
+                <a:ea typeface="Arial" pitchFamily="34" charset="-122"/>
+                <a:cs typeface="Arial" pitchFamily="34" charset="-120"/>
+              </a:rPr>
+              <a:t> 3</a:t>
+            </a:r>
+            <a:pPr indent="0" marL="0">
+              <a:buNone/>
+            </a:pPr>
+            <a:r>
+              <a:rPr lang="en-US" sz="1200" dirty="0">
+                <a:solidFill>
+                  <a:srgbClr val="333333"/>
+                </a:solidFill>
+                <a:latin typeface="Arial" pitchFamily="34" charset="0"/>
+                <a:ea typeface="Arial" pitchFamily="34" charset="-122"/>
+                <a:cs typeface="Arial" pitchFamily="34" charset="-120"/>
+              </a:rPr>
+              <a:t> before reaching a data center. ASML builds fewer than 100 EUV machines a year</a:t>
+            </a:r>
+            <a:pPr indent="0" marL="0">
+              <a:buNone/>
+            </a:pPr>
+            <a:r>
+              <a:rPr lang="en-US" sz="800" baseline="30000" dirty="0">
+                <a:solidFill>
+                  <a:srgbClr val="333333"/>
+                </a:solidFill>
+                <a:latin typeface="Arial" pitchFamily="34" charset="0"/>
+                <a:ea typeface="Arial" pitchFamily="34" charset="-122"/>
+                <a:cs typeface="Arial" pitchFamily="34" charset="-120"/>
+              </a:rPr>
+              <a:t> 4</a:t>
+            </a:r>
+            <a:pPr indent="0" marL="0">
+              <a:buNone/>
+            </a:pPr>
+            <a:r>
+              <a:rPr lang="en-US" sz="1200" dirty="0">
+                <a:solidFill>
+                  <a:srgbClr val="333333"/>
+                </a:solidFill>
+                <a:latin typeface="Arial" pitchFamily="34" charset="0"/>
+                <a:ea typeface="Arial" pitchFamily="34" charset="-122"/>
+                <a:cs typeface="Arial" pitchFamily="34" charset="-120"/>
+              </a:rPr>
+              <a:t>.</a:t>
             </a:r>
             <a:endParaRPr lang="en-US" sz="1200" dirty="0"/>
           </a:p>
@@ -14401,7 +14562,7 @@
         <p:spPr>
           <a:xfrm>
             <a:off x="457200" y="5875020"/>
-            <a:ext cx="8229600" cy="320040"/>
+            <a:ext cx="8229600" cy="457200"/>
           </a:xfrm>
           <a:prstGeom prst="rect">
             <a:avLst/>
@@ -14417,6 +14578,20 @@
               <a:buNone/>
             </a:pPr>
             <a:r>
+              <a:rPr lang="en-US" sz="700" b="1" dirty="0">
+                <a:solidFill>
+                  <a:srgbClr val="999999"/>
+                </a:solidFill>
+                <a:latin typeface="Arial" pitchFamily="34" charset="0"/>
+                <a:ea typeface="Arial" pitchFamily="34" charset="-122"/>
+                <a:cs typeface="Arial" pitchFamily="34" charset="-120"/>
+              </a:rPr>
+              <a:t>(1) </a:t>
+            </a:r>
+            <a:pPr indent="0" marL="0">
+              <a:buNone/>
+            </a:pPr>
+            <a:r>
               <a:rPr lang="en-US" sz="700" dirty="0">
                 <a:solidFill>
                   <a:srgbClr val="999999"/>
@@ -14425,7 +14600,91 @@
                 <a:ea typeface="Arial" pitchFamily="34" charset="-122"/>
                 <a:cs typeface="Arial" pitchFamily="34" charset="-120"/>
               </a:rPr>
-              <a:t>Sources: TSMC, Samsung, Micron, Intel filings; US Commerce Dept CHIPS Program Office (Nov 2025 — $36B+ committed of $52.7B); SIA.</a:t>
+              <a:t>TrendForce / Counterpoint, 2025, </a:t>
+            </a:r>
+            <a:pPr indent="0" marL="0">
+              <a:buNone/>
+            </a:pPr>
+            <a:r>
+              <a:rPr lang="en-US" sz="700" b="1" dirty="0">
+                <a:solidFill>
+                  <a:srgbClr val="999999"/>
+                </a:solidFill>
+                <a:latin typeface="Arial" pitchFamily="34" charset="0"/>
+                <a:ea typeface="Arial" pitchFamily="34" charset="-122"/>
+                <a:cs typeface="Arial" pitchFamily="34" charset="-120"/>
+              </a:rPr>
+              <a:t>(2) </a:t>
+            </a:r>
+            <a:pPr indent="0" marL="0">
+              <a:buNone/>
+            </a:pPr>
+            <a:r>
+              <a:rPr lang="en-US" sz="700" dirty="0">
+                <a:solidFill>
+                  <a:srgbClr val="999999"/>
+                </a:solidFill>
+                <a:latin typeface="Arial" pitchFamily="34" charset="0"/>
+                <a:ea typeface="Arial" pitchFamily="34" charset="-122"/>
+                <a:cs typeface="Arial" pitchFamily="34" charset="-120"/>
+              </a:rPr>
+              <a:t>TrendForce, 2025, </a:t>
+            </a:r>
+            <a:pPr indent="0" marL="0">
+              <a:buNone/>
+            </a:pPr>
+            <a:r>
+              <a:rPr lang="en-US" sz="700" b="1" dirty="0">
+                <a:solidFill>
+                  <a:srgbClr val="999999"/>
+                </a:solidFill>
+                <a:latin typeface="Arial" pitchFamily="34" charset="0"/>
+                <a:ea typeface="Arial" pitchFamily="34" charset="-122"/>
+                <a:cs typeface="Arial" pitchFamily="34" charset="-120"/>
+              </a:rPr>
+              <a:t>(3) </a:t>
+            </a:r>
+            <a:pPr indent="0" marL="0">
+              <a:buNone/>
+            </a:pPr>
+            <a:r>
+              <a:rPr lang="en-US" sz="700" dirty="0">
+                <a:solidFill>
+                  <a:srgbClr val="999999"/>
+                </a:solidFill>
+                <a:latin typeface="Arial" pitchFamily="34" charset="0"/>
+                <a:ea typeface="Arial" pitchFamily="34" charset="-122"/>
+                <a:cs typeface="Arial" pitchFamily="34" charset="-120"/>
+              </a:rPr>
+              <a:t>SIA semiconductor supply-chain report, </a:t>
+            </a:r>
+            <a:pPr indent="0" marL="0">
+              <a:buNone/>
+            </a:pPr>
+            <a:r>
+              <a:rPr lang="en-US" sz="700" b="1" dirty="0">
+                <a:solidFill>
+                  <a:srgbClr val="999999"/>
+                </a:solidFill>
+                <a:latin typeface="Arial" pitchFamily="34" charset="0"/>
+                <a:ea typeface="Arial" pitchFamily="34" charset="-122"/>
+                <a:cs typeface="Arial" pitchFamily="34" charset="-120"/>
+              </a:rPr>
+              <a:t>(4) </a:t>
+            </a:r>
+            <a:pPr indent="0" marL="0">
+              <a:buNone/>
+            </a:pPr>
+            <a:r>
+              <a:rPr lang="en-US" sz="700" dirty="0">
+                <a:solidFill>
+                  <a:srgbClr val="999999"/>
+                </a:solidFill>
+                <a:latin typeface="Arial" pitchFamily="34" charset="0"/>
+                <a:ea typeface="Arial" pitchFamily="34" charset="-122"/>
+                <a:cs typeface="Arial" pitchFamily="34" charset="-120"/>
+              </a:rPr>
+              <a:t>ASML 2025 annual report.</a:t>
             </a:r>
             <a:endParaRPr lang="en-US" sz="700" dirty="0"/>
           </a:p>
@@ -14886,7 +15145,7 @@
         <p:spPr>
           <a:xfrm>
             <a:off x="640080" y="3429000"/>
-            <a:ext cx="2240280" cy="2148840"/>
+            <a:ext cx="2240280" cy="1874520"/>
           </a:xfrm>
           <a:prstGeom prst="rect">
             <a:avLst/>
@@ -14916,6 +15175,23 @@
               </a:rPr>
               <a:t>H100 / H200 / Blackwell banned from China.</a:t>
             </a:r>
+            <a:pPr indent="0" marL="0">
+              <a:spcAft>
+                <a:spcPts val="500"/>
+              </a:spcAft>
+              <a:buNone/>
+            </a:pPr>
+            <a:r>
+              <a:rPr lang="en-US" sz="700" baseline="30000" dirty="0">
+                <a:solidFill>
+                  <a:srgbClr val="333333"/>
+                </a:solidFill>
+                <a:latin typeface="Arial" pitchFamily="34" charset="0"/>
+                <a:ea typeface="Arial" pitchFamily="34" charset="-122"/>
+                <a:cs typeface="Arial" pitchFamily="34" charset="-120"/>
+              </a:rPr>
+              <a:t> 1</a:t>
+            </a:r>
             <a:endParaRPr lang="en-US" sz="1000" dirty="0"/>
           </a:p>
           <a:p>
@@ -14937,6 +15213,23 @@
               </a:rPr>
               <a:t>H20 reinstated with a 15% Treasury fee.</a:t>
             </a:r>
+            <a:pPr indent="0" marL="0">
+              <a:spcAft>
+                <a:spcPts val="500"/>
+              </a:spcAft>
+              <a:buNone/>
+            </a:pPr>
+            <a:r>
+              <a:rPr lang="en-US" sz="700" baseline="30000" dirty="0">
+                <a:solidFill>
+                  <a:srgbClr val="333333"/>
+                </a:solidFill>
+                <a:latin typeface="Arial" pitchFamily="34" charset="0"/>
+                <a:ea typeface="Arial" pitchFamily="34" charset="-122"/>
+                <a:cs typeface="Arial" pitchFamily="34" charset="-120"/>
+              </a:rPr>
+              <a:t> 2</a:t>
+            </a:r>
             <a:endParaRPr lang="en-US" sz="1000" dirty="0"/>
           </a:p>
           <a:p>
@@ -14958,6 +15251,23 @@
               </a:rPr>
               <a:t>$5.5B NVIDIA H20 writedown.</a:t>
             </a:r>
+            <a:pPr indent="0" marL="0">
+              <a:spcAft>
+                <a:spcPts val="500"/>
+              </a:spcAft>
+              <a:buNone/>
+            </a:pPr>
+            <a:r>
+              <a:rPr lang="en-US" sz="700" baseline="30000" dirty="0">
+                <a:solidFill>
+                  <a:srgbClr val="333333"/>
+                </a:solidFill>
+                <a:latin typeface="Arial" pitchFamily="34" charset="0"/>
+                <a:ea typeface="Arial" pitchFamily="34" charset="-122"/>
+                <a:cs typeface="Arial" pitchFamily="34" charset="-120"/>
+              </a:rPr>
+              <a:t> 3</a:t>
+            </a:r>
             <a:endParaRPr lang="en-US" sz="1000" dirty="0"/>
           </a:p>
           <a:p>
@@ -14978,6 +15288,23 @@
                 <a:cs typeface="Arial" pitchFamily="34" charset="-120"/>
               </a:rPr>
               <a:t>ASML DUV banned; China ~20% of revenue.</a:t>
+            </a:r>
+            <a:pPr indent="0" marL="0">
+              <a:spcAft>
+                <a:spcPts val="500"/>
+              </a:spcAft>
+              <a:buNone/>
+            </a:pPr>
+            <a:r>
+              <a:rPr lang="en-US" sz="700" baseline="30000" dirty="0">
+                <a:solidFill>
+                  <a:srgbClr val="333333"/>
+                </a:solidFill>
+                <a:latin typeface="Arial" pitchFamily="34" charset="0"/>
+                <a:ea typeface="Arial" pitchFamily="34" charset="-122"/>
+                <a:cs typeface="Arial" pitchFamily="34" charset="-120"/>
+              </a:rPr>
+              <a:t> 4</a:t>
             </a:r>
             <a:endParaRPr lang="en-US" sz="1000" dirty="0"/>
           </a:p>
@@ -15143,7 +15470,7 @@
         <p:spPr>
           <a:xfrm>
             <a:off x="3474720" y="3429000"/>
-            <a:ext cx="2240280" cy="2148840"/>
+            <a:ext cx="2240280" cy="1874520"/>
           </a:xfrm>
           <a:prstGeom prst="rect">
             <a:avLst/>
@@ -15173,6 +15500,23 @@
               </a:rPr>
               <a:t>EU AI Act enforcement: Aug 2, 2026.</a:t>
             </a:r>
+            <a:pPr indent="0" marL="0">
+              <a:spcAft>
+                <a:spcPts val="500"/>
+              </a:spcAft>
+              <a:buNone/>
+            </a:pPr>
+            <a:r>
+              <a:rPr lang="en-US" sz="700" baseline="30000" dirty="0">
+                <a:solidFill>
+                  <a:srgbClr val="333333"/>
+                </a:solidFill>
+                <a:latin typeface="Arial" pitchFamily="34" charset="0"/>
+                <a:ea typeface="Arial" pitchFamily="34" charset="-122"/>
+                <a:cs typeface="Arial" pitchFamily="34" charset="-120"/>
+              </a:rPr>
+              <a:t> 5</a:t>
+            </a:r>
             <a:endParaRPr lang="en-US" sz="1000" dirty="0"/>
           </a:p>
           <a:p>
@@ -15194,6 +15538,23 @@
               </a:rPr>
               <a:t>Fines up to €35M or 7% of global revenue.</a:t>
             </a:r>
+            <a:pPr indent="0" marL="0">
+              <a:spcAft>
+                <a:spcPts val="500"/>
+              </a:spcAft>
+              <a:buNone/>
+            </a:pPr>
+            <a:r>
+              <a:rPr lang="en-US" sz="700" baseline="30000" dirty="0">
+                <a:solidFill>
+                  <a:srgbClr val="333333"/>
+                </a:solidFill>
+                <a:latin typeface="Arial" pitchFamily="34" charset="0"/>
+                <a:ea typeface="Arial" pitchFamily="34" charset="-122"/>
+                <a:cs typeface="Arial" pitchFamily="34" charset="-120"/>
+              </a:rPr>
+              <a:t> 6</a:t>
+            </a:r>
             <a:endParaRPr lang="en-US" sz="1000" dirty="0"/>
           </a:p>
           <a:p>
@@ -15215,6 +15576,23 @@
               </a:rPr>
               <a:t>Initial compliance: $8–15M per system.</a:t>
             </a:r>
+            <a:pPr indent="0" marL="0">
+              <a:spcAft>
+                <a:spcPts val="500"/>
+              </a:spcAft>
+              <a:buNone/>
+            </a:pPr>
+            <a:r>
+              <a:rPr lang="en-US" sz="700" baseline="30000" dirty="0">
+                <a:solidFill>
+                  <a:srgbClr val="333333"/>
+                </a:solidFill>
+                <a:latin typeface="Arial" pitchFamily="34" charset="0"/>
+                <a:ea typeface="Arial" pitchFamily="34" charset="-122"/>
+                <a:cs typeface="Arial" pitchFamily="34" charset="-120"/>
+              </a:rPr>
+              <a:t> 7</a:t>
+            </a:r>
             <a:endParaRPr lang="en-US" sz="1000" dirty="0"/>
           </a:p>
           <a:p>
@@ -15235,6 +15613,23 @@
                 <a:cs typeface="Arial" pitchFamily="34" charset="-120"/>
               </a:rPr>
               <a:t>Only 36% of enterprises feel prepared.</a:t>
+            </a:r>
+            <a:pPr indent="0" marL="0">
+              <a:spcAft>
+                <a:spcPts val="500"/>
+              </a:spcAft>
+              <a:buNone/>
+            </a:pPr>
+            <a:r>
+              <a:rPr lang="en-US" sz="700" baseline="30000" dirty="0">
+                <a:solidFill>
+                  <a:srgbClr val="333333"/>
+                </a:solidFill>
+                <a:latin typeface="Arial" pitchFamily="34" charset="0"/>
+                <a:ea typeface="Arial" pitchFamily="34" charset="-122"/>
+                <a:cs typeface="Arial" pitchFamily="34" charset="-120"/>
+              </a:rPr>
+              <a:t> 8</a:t>
             </a:r>
             <a:endParaRPr lang="en-US" sz="1000" dirty="0"/>
           </a:p>
@@ -15400,7 +15795,7 @@
         <p:spPr>
           <a:xfrm>
             <a:off x="6309360" y="3429000"/>
-            <a:ext cx="2240280" cy="2148840"/>
+            <a:ext cx="2240280" cy="1874520"/>
           </a:xfrm>
           <a:prstGeom prst="rect">
             <a:avLst/>
@@ -15430,6 +15825,23 @@
               </a:rPr>
               <a:t>CHIPS Act: ~$36B committed of $52.7B.</a:t>
             </a:r>
+            <a:pPr indent="0" marL="0">
+              <a:spcAft>
+                <a:spcPts val="500"/>
+              </a:spcAft>
+              <a:buNone/>
+            </a:pPr>
+            <a:r>
+              <a:rPr lang="en-US" sz="700" baseline="30000" dirty="0">
+                <a:solidFill>
+                  <a:srgbClr val="333333"/>
+                </a:solidFill>
+                <a:latin typeface="Arial" pitchFamily="34" charset="0"/>
+                <a:ea typeface="Arial" pitchFamily="34" charset="-122"/>
+                <a:cs typeface="Arial" pitchFamily="34" charset="-120"/>
+              </a:rPr>
+              <a:t> 9</a:t>
+            </a:r>
             <a:endParaRPr lang="en-US" sz="1000" dirty="0"/>
           </a:p>
           <a:p>
@@ -15451,6 +15863,23 @@
               </a:rPr>
               <a:t>China controls ~90% of rare-earth processing.</a:t>
             </a:r>
+            <a:pPr indent="0" marL="0">
+              <a:spcAft>
+                <a:spcPts val="500"/>
+              </a:spcAft>
+              <a:buNone/>
+            </a:pPr>
+            <a:r>
+              <a:rPr lang="en-US" sz="700" baseline="30000" dirty="0">
+                <a:solidFill>
+                  <a:srgbClr val="333333"/>
+                </a:solidFill>
+                <a:latin typeface="Arial" pitchFamily="34" charset="0"/>
+                <a:ea typeface="Arial" pitchFamily="34" charset="-122"/>
+                <a:cs typeface="Arial" pitchFamily="34" charset="-120"/>
+              </a:rPr>
+              <a:t> 10</a:t>
+            </a:r>
             <a:endParaRPr lang="en-US" sz="1000" dirty="0"/>
           </a:p>
           <a:p>
@@ -15472,6 +15901,23 @@
               </a:rPr>
               <a:t>Gallium / germanium controls since Jul 2023.</a:t>
             </a:r>
+            <a:pPr indent="0" marL="0">
+              <a:spcAft>
+                <a:spcPts val="500"/>
+              </a:spcAft>
+              <a:buNone/>
+            </a:pPr>
+            <a:r>
+              <a:rPr lang="en-US" sz="700" baseline="30000" dirty="0">
+                <a:solidFill>
+                  <a:srgbClr val="333333"/>
+                </a:solidFill>
+                <a:latin typeface="Arial" pitchFamily="34" charset="0"/>
+                <a:ea typeface="Arial" pitchFamily="34" charset="-122"/>
+                <a:cs typeface="Arial" pitchFamily="34" charset="-120"/>
+              </a:rPr>
+              <a:t> 11</a:t>
+            </a:r>
             <a:endParaRPr lang="en-US" sz="1000" dirty="0"/>
           </a:p>
           <a:p>
@@ -15493,6 +15939,23 @@
               </a:rPr>
               <a:t>SMIC 5nm yield ~20% vs &gt;70% threshold.</a:t>
             </a:r>
+            <a:pPr indent="0" marL="0">
+              <a:spcAft>
+                <a:spcPts val="500"/>
+              </a:spcAft>
+              <a:buNone/>
+            </a:pPr>
+            <a:r>
+              <a:rPr lang="en-US" sz="700" baseline="30000" dirty="0">
+                <a:solidFill>
+                  <a:srgbClr val="333333"/>
+                </a:solidFill>
+                <a:latin typeface="Arial" pitchFamily="34" charset="0"/>
+                <a:ea typeface="Arial" pitchFamily="34" charset="-122"/>
+                <a:cs typeface="Arial" pitchFamily="34" charset="-120"/>
+              </a:rPr>
+              <a:t> 12</a:t>
+            </a:r>
             <a:endParaRPr lang="en-US" sz="1000" dirty="0"/>
           </a:p>
         </p:txBody>
@@ -15506,7 +15969,7 @@
         <p:spPr>
           <a:xfrm>
             <a:off x="457200" y="5875020"/>
-            <a:ext cx="8229600" cy="320040"/>
+            <a:ext cx="8229600" cy="457200"/>
           </a:xfrm>
           <a:prstGeom prst="rect">
             <a:avLst/>
@@ -15522,6 +15985,20 @@
               <a:buNone/>
             </a:pPr>
             <a:r>
+              <a:rPr lang="en-US" sz="700" b="1" dirty="0">
+                <a:solidFill>
+                  <a:srgbClr val="999999"/>
+                </a:solidFill>
+                <a:latin typeface="Arial" pitchFamily="34" charset="0"/>
+                <a:ea typeface="Arial" pitchFamily="34" charset="-122"/>
+                <a:cs typeface="Arial" pitchFamily="34" charset="-120"/>
+              </a:rPr>
+              <a:t>(1) </a:t>
+            </a:r>
+            <a:pPr indent="0" marL="0">
+              <a:buNone/>
+            </a:pPr>
+            <a:r>
               <a:rPr lang="en-US" sz="700" dirty="0">
                 <a:solidFill>
                   <a:srgbClr val="999999"/>
@@ -15530,7 +16007,315 @@
                 <a:ea typeface="Arial" pitchFamily="34" charset="-122"/>
                 <a:cs typeface="Arial" pitchFamily="34" charset="-120"/>
               </a:rPr>
-              <a:t>Sources: NVIDIA 10-Q; ASML filings; EU AI Act Article 99 / Chapter V (Aug 2, 2026 enforcement); US Bureau of Industry and Security; Commerce Dept (Nov 2025).</a:t>
+              <a:t>US BIS export rules, 2023–25, </a:t>
+            </a:r>
+            <a:pPr indent="0" marL="0">
+              <a:buNone/>
+            </a:pPr>
+            <a:r>
+              <a:rPr lang="en-US" sz="700" b="1" dirty="0">
+                <a:solidFill>
+                  <a:srgbClr val="999999"/>
+                </a:solidFill>
+                <a:latin typeface="Arial" pitchFamily="34" charset="0"/>
+                <a:ea typeface="Arial" pitchFamily="34" charset="-122"/>
+                <a:cs typeface="Arial" pitchFamily="34" charset="-120"/>
+              </a:rPr>
+              <a:t>(2) </a:t>
+            </a:r>
+            <a:pPr indent="0" marL="0">
+              <a:buNone/>
+            </a:pPr>
+            <a:r>
+              <a:rPr lang="en-US" sz="700" dirty="0">
+                <a:solidFill>
+                  <a:srgbClr val="999999"/>
+                </a:solidFill>
+                <a:latin typeface="Arial" pitchFamily="34" charset="0"/>
+                <a:ea typeface="Arial" pitchFamily="34" charset="-122"/>
+                <a:cs typeface="Arial" pitchFamily="34" charset="-120"/>
+              </a:rPr>
+              <a:t>US Treasury / NVIDIA, Jul 2025, </a:t>
+            </a:r>
+            <a:pPr indent="0" marL="0">
+              <a:buNone/>
+            </a:pPr>
+            <a:r>
+              <a:rPr lang="en-US" sz="700" b="1" dirty="0">
+                <a:solidFill>
+                  <a:srgbClr val="999999"/>
+                </a:solidFill>
+                <a:latin typeface="Arial" pitchFamily="34" charset="0"/>
+                <a:ea typeface="Arial" pitchFamily="34" charset="-122"/>
+                <a:cs typeface="Arial" pitchFamily="34" charset="-120"/>
+              </a:rPr>
+              <a:t>(3) </a:t>
+            </a:r>
+            <a:pPr indent="0" marL="0">
+              <a:buNone/>
+            </a:pPr>
+            <a:r>
+              <a:rPr lang="en-US" sz="700" dirty="0">
+                <a:solidFill>
+                  <a:srgbClr val="999999"/>
+                </a:solidFill>
+                <a:latin typeface="Arial" pitchFamily="34" charset="0"/>
+                <a:ea typeface="Arial" pitchFamily="34" charset="-122"/>
+                <a:cs typeface="Arial" pitchFamily="34" charset="-120"/>
+              </a:rPr>
+              <a:t>NVIDIA 10-Q, FY26 Q1, </a:t>
+            </a:r>
+            <a:pPr indent="0" marL="0">
+              <a:buNone/>
+            </a:pPr>
+            <a:r>
+              <a:rPr lang="en-US" sz="700" b="1" dirty="0">
+                <a:solidFill>
+                  <a:srgbClr val="999999"/>
+                </a:solidFill>
+                <a:latin typeface="Arial" pitchFamily="34" charset="0"/>
+                <a:ea typeface="Arial" pitchFamily="34" charset="-122"/>
+                <a:cs typeface="Arial" pitchFamily="34" charset="-120"/>
+              </a:rPr>
+              <a:t>(4) </a:t>
+            </a:r>
+            <a:pPr indent="0" marL="0">
+              <a:buNone/>
+            </a:pPr>
+            <a:r>
+              <a:rPr lang="en-US" sz="700" dirty="0">
+                <a:solidFill>
+                  <a:srgbClr val="999999"/>
+                </a:solidFill>
+                <a:latin typeface="Arial" pitchFamily="34" charset="0"/>
+                <a:ea typeface="Arial" pitchFamily="34" charset="-122"/>
+                <a:cs typeface="Arial" pitchFamily="34" charset="-120"/>
+              </a:rPr>
+              <a:t>ASML 2025 annual report, </a:t>
+            </a:r>
+            <a:pPr indent="0" marL="0">
+              <a:buNone/>
+            </a:pPr>
+            <a:r>
+              <a:rPr lang="en-US" sz="700" b="1" dirty="0">
+                <a:solidFill>
+                  <a:srgbClr val="999999"/>
+                </a:solidFill>
+                <a:latin typeface="Arial" pitchFamily="34" charset="0"/>
+                <a:ea typeface="Arial" pitchFamily="34" charset="-122"/>
+                <a:cs typeface="Arial" pitchFamily="34" charset="-120"/>
+              </a:rPr>
+              <a:t>(5) </a:t>
+            </a:r>
+            <a:pPr indent="0" marL="0">
+              <a:buNone/>
+            </a:pPr>
+            <a:r>
+              <a:rPr lang="en-US" sz="700" dirty="0">
+                <a:solidFill>
+                  <a:srgbClr val="999999"/>
+                </a:solidFill>
+                <a:latin typeface="Arial" pitchFamily="34" charset="0"/>
+                <a:ea typeface="Arial" pitchFamily="34" charset="-122"/>
+                <a:cs typeface="Arial" pitchFamily="34" charset="-120"/>
+              </a:rPr>
+              <a:t>EU AI Act, Article 99, </a:t>
+            </a:r>
+            <a:pPr indent="0" marL="0">
+              <a:buNone/>
+            </a:pPr>
+            <a:r>
+              <a:rPr lang="en-US" sz="700" b="1" dirty="0">
+                <a:solidFill>
+                  <a:srgbClr val="999999"/>
+                </a:solidFill>
+                <a:latin typeface="Arial" pitchFamily="34" charset="0"/>
+                <a:ea typeface="Arial" pitchFamily="34" charset="-122"/>
+                <a:cs typeface="Arial" pitchFamily="34" charset="-120"/>
+              </a:rPr>
+              <a:t>(6) </a:t>
+            </a:r>
+            <a:pPr indent="0" marL="0">
+              <a:buNone/>
+            </a:pPr>
+            <a:r>
+              <a:rPr lang="en-US" sz="700" dirty="0">
+                <a:solidFill>
+                  <a:srgbClr val="999999"/>
+                </a:solidFill>
+                <a:latin typeface="Arial" pitchFamily="34" charset="0"/>
+                <a:ea typeface="Arial" pitchFamily="34" charset="-122"/>
+                <a:cs typeface="Arial" pitchFamily="34" charset="-120"/>
+              </a:rPr>
+              <a:t>EU AI Act, Article 99, </a:t>
+            </a:r>
+            <a:pPr indent="0" marL="0">
+              <a:buNone/>
+            </a:pPr>
+            <a:r>
+              <a:rPr lang="en-US" sz="700" b="1" dirty="0">
+                <a:solidFill>
+                  <a:srgbClr val="999999"/>
+                </a:solidFill>
+                <a:latin typeface="Arial" pitchFamily="34" charset="0"/>
+                <a:ea typeface="Arial" pitchFamily="34" charset="-122"/>
+                <a:cs typeface="Arial" pitchFamily="34" charset="-120"/>
+              </a:rPr>
+              <a:t>(7) </a:t>
+            </a:r>
+            <a:pPr indent="0" marL="0">
+              <a:buNone/>
+            </a:pPr>
+            <a:r>
+              <a:rPr lang="en-US" sz="700" dirty="0">
+                <a:solidFill>
+                  <a:srgbClr val="999999"/>
+                </a:solidFill>
+                <a:latin typeface="Arial" pitchFamily="34" charset="0"/>
+                <a:ea typeface="Arial" pitchFamily="34" charset="-122"/>
+                <a:cs typeface="Arial" pitchFamily="34" charset="-120"/>
+              </a:rPr>
+              <a:t>EU Commission / law firm analyses, 2025, </a:t>
+            </a:r>
+            <a:pPr indent="0" marL="0">
+              <a:buNone/>
+            </a:pPr>
+            <a:r>
+              <a:rPr lang="en-US" sz="700" b="1" dirty="0">
+                <a:solidFill>
+                  <a:srgbClr val="999999"/>
+                </a:solidFill>
+                <a:latin typeface="Arial" pitchFamily="34" charset="0"/>
+                <a:ea typeface="Arial" pitchFamily="34" charset="-122"/>
+                <a:cs typeface="Arial" pitchFamily="34" charset="-120"/>
+              </a:rPr>
+              <a:t>(8) </a:t>
+            </a:r>
+            <a:pPr indent="0" marL="0">
+              <a:buNone/>
+            </a:pPr>
+            <a:r>
+              <a:rPr lang="en-US" sz="700" dirty="0">
+                <a:solidFill>
+                  <a:srgbClr val="999999"/>
+                </a:solidFill>
+                <a:latin typeface="Arial" pitchFamily="34" charset="0"/>
+                <a:ea typeface="Arial" pitchFamily="34" charset="-122"/>
+                <a:cs typeface="Arial" pitchFamily="34" charset="-120"/>
+              </a:rPr>
+              <a:t>Gartner enterprise AI readiness, 2026, </a:t>
+            </a:r>
+            <a:pPr indent="0" marL="0">
+              <a:buNone/>
+            </a:pPr>
+            <a:r>
+              <a:rPr lang="en-US" sz="700" b="1" dirty="0">
+                <a:solidFill>
+                  <a:srgbClr val="999999"/>
+                </a:solidFill>
+                <a:latin typeface="Arial" pitchFamily="34" charset="0"/>
+                <a:ea typeface="Arial" pitchFamily="34" charset="-122"/>
+                <a:cs typeface="Arial" pitchFamily="34" charset="-120"/>
+              </a:rPr>
+              <a:t>(9) </a:t>
+            </a:r>
+            <a:pPr indent="0" marL="0">
+              <a:buNone/>
+            </a:pPr>
+            <a:r>
+              <a:rPr lang="en-US" sz="700" dirty="0">
+                <a:solidFill>
+                  <a:srgbClr val="999999"/>
+                </a:solidFill>
+                <a:latin typeface="Arial" pitchFamily="34" charset="0"/>
+                <a:ea typeface="Arial" pitchFamily="34" charset="-122"/>
+                <a:cs typeface="Arial" pitchFamily="34" charset="-120"/>
+              </a:rPr>
+              <a:t>US Commerce Dept CHIPS Office, Nov 2025, </a:t>
+            </a:r>
+            <a:pPr indent="0" marL="0">
+              <a:buNone/>
+            </a:pPr>
+            <a:r>
+              <a:rPr lang="en-US" sz="700" b="1" dirty="0">
+                <a:solidFill>
+                  <a:srgbClr val="999999"/>
+                </a:solidFill>
+                <a:latin typeface="Arial" pitchFamily="34" charset="0"/>
+                <a:ea typeface="Arial" pitchFamily="34" charset="-122"/>
+                <a:cs typeface="Arial" pitchFamily="34" charset="-120"/>
+              </a:rPr>
+              <a:t>(10) </a:t>
+            </a:r>
+            <a:pPr indent="0" marL="0">
+              <a:buNone/>
+            </a:pPr>
+            <a:r>
+              <a:rPr lang="en-US" sz="700" dirty="0">
+                <a:solidFill>
+                  <a:srgbClr val="999999"/>
+                </a:solidFill>
+                <a:latin typeface="Arial" pitchFamily="34" charset="0"/>
+                <a:ea typeface="Arial" pitchFamily="34" charset="-122"/>
+                <a:cs typeface="Arial" pitchFamily="34" charset="-120"/>
+              </a:rPr>
+              <a:t>IEA / USGS rare-earth reports, 2025, </a:t>
+            </a:r>
+            <a:pPr indent="0" marL="0">
+              <a:buNone/>
+            </a:pPr>
+            <a:r>
+              <a:rPr lang="en-US" sz="700" b="1" dirty="0">
+                <a:solidFill>
+                  <a:srgbClr val="999999"/>
+                </a:solidFill>
+                <a:latin typeface="Arial" pitchFamily="34" charset="0"/>
+                <a:ea typeface="Arial" pitchFamily="34" charset="-122"/>
+                <a:cs typeface="Arial" pitchFamily="34" charset="-120"/>
+              </a:rPr>
+              <a:t>(11) </a:t>
+            </a:r>
+            <a:pPr indent="0" marL="0">
+              <a:buNone/>
+            </a:pPr>
+            <a:r>
+              <a:rPr lang="en-US" sz="700" dirty="0">
+                <a:solidFill>
+                  <a:srgbClr val="999999"/>
+                </a:solidFill>
+                <a:latin typeface="Arial" pitchFamily="34" charset="0"/>
+                <a:ea typeface="Arial" pitchFamily="34" charset="-122"/>
+                <a:cs typeface="Arial" pitchFamily="34" charset="-120"/>
+              </a:rPr>
+              <a:t>China MOFCOM, Jul 2023, </a:t>
+            </a:r>
+            <a:pPr indent="0" marL="0">
+              <a:buNone/>
+            </a:pPr>
+            <a:r>
+              <a:rPr lang="en-US" sz="700" b="1" dirty="0">
+                <a:solidFill>
+                  <a:srgbClr val="999999"/>
+                </a:solidFill>
+                <a:latin typeface="Arial" pitchFamily="34" charset="0"/>
+                <a:ea typeface="Arial" pitchFamily="34" charset="-122"/>
+                <a:cs typeface="Arial" pitchFamily="34" charset="-120"/>
+              </a:rPr>
+              <a:t>(12) </a:t>
+            </a:r>
+            <a:pPr indent="0" marL="0">
+              <a:buNone/>
+            </a:pPr>
+            <a:r>
+              <a:rPr lang="en-US" sz="700" dirty="0">
+                <a:solidFill>
+                  <a:srgbClr val="999999"/>
+                </a:solidFill>
+                <a:latin typeface="Arial" pitchFamily="34" charset="0"/>
+                <a:ea typeface="Arial" pitchFamily="34" charset="-122"/>
+                <a:cs typeface="Arial" pitchFamily="34" charset="-120"/>
+              </a:rPr>
+              <a:t>TechInsights / trade press, 2025–26.</a:t>
             </a:r>
             <a:endParaRPr lang="en-US" sz="700" dirty="0"/>
           </a:p>

--- a/ai-markets-deck.pptx
+++ b/ai-markets-deck.pptx
@@ -5135,6 +5135,20 @@
               </a:rPr>
               <a:t>$852B</a:t>
             </a:r>
+            <a:pPr algn="ctr" indent="0" marL="0">
+              <a:buNone/>
+            </a:pPr>
+            <a:r>
+              <a:rPr lang="en-US" sz="1000" b="1" baseline="30000" dirty="0">
+                <a:solidFill>
+                  <a:srgbClr val="F6693D"/>
+                </a:solidFill>
+                <a:latin typeface="Arial Black" pitchFamily="34" charset="0"/>
+                <a:ea typeface="Arial Black" pitchFamily="34" charset="-122"/>
+                <a:cs typeface="Arial Black" pitchFamily="34" charset="-120"/>
+              </a:rPr>
+              <a:t> 1</a:t>
+            </a:r>
             <a:endParaRPr lang="en-US" sz="2000" dirty="0"/>
           </a:p>
         </p:txBody>
@@ -5339,6 +5353,20 @@
               </a:rPr>
               <a:t>$380B</a:t>
             </a:r>
+            <a:pPr algn="ctr" indent="0" marL="0">
+              <a:buNone/>
+            </a:pPr>
+            <a:r>
+              <a:rPr lang="en-US" sz="1000" b="1" baseline="30000" dirty="0">
+                <a:solidFill>
+                  <a:srgbClr val="F6693D"/>
+                </a:solidFill>
+                <a:latin typeface="Arial Black" pitchFamily="34" charset="0"/>
+                <a:ea typeface="Arial Black" pitchFamily="34" charset="-122"/>
+                <a:cs typeface="Arial Black" pitchFamily="34" charset="-120"/>
+              </a:rPr>
+              <a:t> 2</a:t>
+            </a:r>
             <a:endParaRPr lang="en-US" sz="2000" dirty="0"/>
           </a:p>
         </p:txBody>
@@ -5543,6 +5571,20 @@
               </a:rPr>
               <a:t>$2.3T</a:t>
             </a:r>
+            <a:pPr algn="ctr" indent="0" marL="0">
+              <a:buNone/>
+            </a:pPr>
+            <a:r>
+              <a:rPr lang="en-US" sz="1000" b="1" baseline="30000" dirty="0">
+                <a:solidFill>
+                  <a:srgbClr val="F6693D"/>
+                </a:solidFill>
+                <a:latin typeface="Arial Black" pitchFamily="34" charset="0"/>
+                <a:ea typeface="Arial Black" pitchFamily="34" charset="-122"/>
+                <a:cs typeface="Arial Black" pitchFamily="34" charset="-120"/>
+              </a:rPr>
+              <a:t> 3</a:t>
+            </a:r>
             <a:endParaRPr lang="en-US" sz="2000" dirty="0"/>
           </a:p>
         </p:txBody>
@@ -5747,6 +5789,20 @@
               </a:rPr>
               <a:t>$1.25T</a:t>
             </a:r>
+            <a:pPr algn="ctr" indent="0" marL="0">
+              <a:buNone/>
+            </a:pPr>
+            <a:r>
+              <a:rPr lang="en-US" sz="1000" b="1" baseline="30000" dirty="0">
+                <a:solidFill>
+                  <a:srgbClr val="F6693D"/>
+                </a:solidFill>
+                <a:latin typeface="Arial Black" pitchFamily="34" charset="0"/>
+                <a:ea typeface="Arial Black" pitchFamily="34" charset="-122"/>
+                <a:cs typeface="Arial Black" pitchFamily="34" charset="-120"/>
+              </a:rPr>
+              <a:t> 4</a:t>
+            </a:r>
             <a:endParaRPr lang="en-US" sz="2000" dirty="0"/>
           </a:p>
         </p:txBody>
@@ -5838,7 +5894,7 @@
         <p:spPr>
           <a:xfrm>
             <a:off x="457200" y="5166360"/>
-            <a:ext cx="8229600" cy="548640"/>
+            <a:ext cx="8229600" cy="502920"/>
           </a:xfrm>
           <a:prstGeom prst="rect">
             <a:avLst/>
@@ -5863,7 +5919,7 @@
         <p:spPr>
           <a:xfrm>
             <a:off x="640080" y="5166360"/>
-            <a:ext cx="7863840" cy="548640"/>
+            <a:ext cx="7863840" cy="502920"/>
           </a:xfrm>
           <a:prstGeom prst="rect">
             <a:avLst/>
@@ -5889,6 +5945,20 @@
               </a:rPr>
               <a:t>Q1 2026 funding to foundational AI startups was 2× all of 2025.</a:t>
             </a:r>
+            <a:pPr indent="0" marL="0">
+              <a:buNone/>
+            </a:pPr>
+            <a:r>
+              <a:rPr lang="en-US" sz="800" b="1" baseline="30000" dirty="0">
+                <a:solidFill>
+                  <a:srgbClr val="000000"/>
+                </a:solidFill>
+                <a:latin typeface="Arial" pitchFamily="34" charset="0"/>
+                <a:ea typeface="Arial" pitchFamily="34" charset="-122"/>
+                <a:cs typeface="Arial" pitchFamily="34" charset="-120"/>
+              </a:rPr>
+              <a:t> 5</a:t>
+            </a:r>
             <a:endParaRPr lang="en-US" sz="1400" dirty="0"/>
           </a:p>
         </p:txBody>
@@ -5902,7 +5972,7 @@
         <p:spPr>
           <a:xfrm>
             <a:off x="457200" y="5875020"/>
-            <a:ext cx="8229600" cy="320040"/>
+            <a:ext cx="8229600" cy="457200"/>
           </a:xfrm>
           <a:prstGeom prst="rect">
             <a:avLst/>
@@ -5918,6 +5988,20 @@
               <a:buNone/>
             </a:pPr>
             <a:r>
+              <a:rPr lang="en-US" sz="700" b="1" dirty="0">
+                <a:solidFill>
+                  <a:srgbClr val="999999"/>
+                </a:solidFill>
+                <a:latin typeface="Arial" pitchFamily="34" charset="0"/>
+                <a:ea typeface="Arial" pitchFamily="34" charset="-122"/>
+                <a:cs typeface="Arial" pitchFamily="34" charset="-120"/>
+              </a:rPr>
+              <a:t>(1) </a:t>
+            </a:r>
+            <a:pPr indent="0" marL="0">
+              <a:buNone/>
+            </a:pPr>
+            <a:r>
               <a:rPr lang="en-US" sz="700" dirty="0">
                 <a:solidFill>
                   <a:srgbClr val="999999"/>
@@ -5926,7 +6010,119 @@
                 <a:ea typeface="Arial" pitchFamily="34" charset="-122"/>
                 <a:cs typeface="Arial" pitchFamily="34" charset="-120"/>
               </a:rPr>
-              <a:t>Sources: TechCrunch, CNBC (Feb 2, 2026 xAI/SpaceX merger); Crunchbase Q1 2026 VC data; Sacra ARR run-rates; Bloomberg; Alphabet 10-K &amp; 2026 capex guide.</a:t>
+              <a:t>Bloomberg / CNBC — OpenAI $122B round, Apr 2026, </a:t>
+            </a:r>
+            <a:pPr indent="0" marL="0">
+              <a:buNone/>
+            </a:pPr>
+            <a:r>
+              <a:rPr lang="en-US" sz="700" b="1" dirty="0">
+                <a:solidFill>
+                  <a:srgbClr val="999999"/>
+                </a:solidFill>
+                <a:latin typeface="Arial" pitchFamily="34" charset="0"/>
+                <a:ea typeface="Arial" pitchFamily="34" charset="-122"/>
+                <a:cs typeface="Arial" pitchFamily="34" charset="-120"/>
+              </a:rPr>
+              <a:t>(2) </a:t>
+            </a:r>
+            <a:pPr indent="0" marL="0">
+              <a:buNone/>
+            </a:pPr>
+            <a:r>
+              <a:rPr lang="en-US" sz="700" dirty="0">
+                <a:solidFill>
+                  <a:srgbClr val="999999"/>
+                </a:solidFill>
+                <a:latin typeface="Arial" pitchFamily="34" charset="0"/>
+                <a:ea typeface="Arial" pitchFamily="34" charset="-122"/>
+                <a:cs typeface="Arial" pitchFamily="34" charset="-120"/>
+              </a:rPr>
+              <a:t>Sacra / Bloomberg — Anthropic Series G, Feb 2026, </a:t>
+            </a:r>
+            <a:pPr indent="0" marL="0">
+              <a:buNone/>
+            </a:pPr>
+            <a:r>
+              <a:rPr lang="en-US" sz="700" b="1" dirty="0">
+                <a:solidFill>
+                  <a:srgbClr val="999999"/>
+                </a:solidFill>
+                <a:latin typeface="Arial" pitchFamily="34" charset="0"/>
+                <a:ea typeface="Arial" pitchFamily="34" charset="-122"/>
+                <a:cs typeface="Arial" pitchFamily="34" charset="-120"/>
+              </a:rPr>
+              <a:t>(3) </a:t>
+            </a:r>
+            <a:pPr indent="0" marL="0">
+              <a:buNone/>
+            </a:pPr>
+            <a:r>
+              <a:rPr lang="en-US" sz="700" dirty="0">
+                <a:solidFill>
+                  <a:srgbClr val="999999"/>
+                </a:solidFill>
+                <a:latin typeface="Arial" pitchFamily="34" charset="0"/>
+                <a:ea typeface="Arial" pitchFamily="34" charset="-122"/>
+                <a:cs typeface="Arial" pitchFamily="34" charset="-120"/>
+              </a:rPr>
+              <a:t>Alphabet 10-K + 2026 capex guide, </a:t>
+            </a:r>
+            <a:pPr indent="0" marL="0">
+              <a:buNone/>
+            </a:pPr>
+            <a:r>
+              <a:rPr lang="en-US" sz="700" b="1" dirty="0">
+                <a:solidFill>
+                  <a:srgbClr val="999999"/>
+                </a:solidFill>
+                <a:latin typeface="Arial" pitchFamily="34" charset="0"/>
+                <a:ea typeface="Arial" pitchFamily="34" charset="-122"/>
+                <a:cs typeface="Arial" pitchFamily="34" charset="-120"/>
+              </a:rPr>
+              <a:t>(4) </a:t>
+            </a:r>
+            <a:pPr indent="0" marL="0">
+              <a:buNone/>
+            </a:pPr>
+            <a:r>
+              <a:rPr lang="en-US" sz="700" dirty="0">
+                <a:solidFill>
+                  <a:srgbClr val="999999"/>
+                </a:solidFill>
+                <a:latin typeface="Arial" pitchFamily="34" charset="0"/>
+                <a:ea typeface="Arial" pitchFamily="34" charset="-122"/>
+                <a:cs typeface="Arial" pitchFamily="34" charset="-120"/>
+              </a:rPr>
+              <a:t>TechCrunch / CNBC — xAI-SpaceX merger, Feb 2, 2026, </a:t>
+            </a:r>
+            <a:pPr indent="0" marL="0">
+              <a:buNone/>
+            </a:pPr>
+            <a:r>
+              <a:rPr lang="en-US" sz="700" b="1" dirty="0">
+                <a:solidFill>
+                  <a:srgbClr val="999999"/>
+                </a:solidFill>
+                <a:latin typeface="Arial" pitchFamily="34" charset="0"/>
+                <a:ea typeface="Arial" pitchFamily="34" charset="-122"/>
+                <a:cs typeface="Arial" pitchFamily="34" charset="-120"/>
+              </a:rPr>
+              <a:t>(5) </a:t>
+            </a:r>
+            <a:pPr indent="0" marL="0">
+              <a:buNone/>
+            </a:pPr>
+            <a:r>
+              <a:rPr lang="en-US" sz="700" dirty="0">
+                <a:solidFill>
+                  <a:srgbClr val="999999"/>
+                </a:solidFill>
+                <a:latin typeface="Arial" pitchFamily="34" charset="0"/>
+                <a:ea typeface="Arial" pitchFamily="34" charset="-122"/>
+                <a:cs typeface="Arial" pitchFamily="34" charset="-120"/>
+              </a:rPr>
+              <a:t>Crunchbase Q1 2026 VC data.</a:t>
             </a:r>
             <a:endParaRPr lang="en-US" sz="700" dirty="0"/>
           </a:p>
@@ -16843,6 +17039,20 @@
               </a:rPr>
               <a:t>$18B halted, $46B delayed. 142 activist groups across 24 states — Virginia leads with 42 chapters.</a:t>
             </a:r>
+            <a:pPr indent="0" marL="0">
+              <a:buNone/>
+            </a:pPr>
+            <a:r>
+              <a:rPr lang="en-US" sz="700" baseline="30000" dirty="0">
+                <a:solidFill>
+                  <a:srgbClr val="333333"/>
+                </a:solidFill>
+                <a:latin typeface="Arial" pitchFamily="34" charset="0"/>
+                <a:ea typeface="Arial" pitchFamily="34" charset="-122"/>
+                <a:cs typeface="Arial" pitchFamily="34" charset="-120"/>
+              </a:rPr>
+              <a:t> 1</a:t>
+            </a:r>
             <a:endParaRPr lang="en-US" sz="1050" dirty="0"/>
           </a:p>
         </p:txBody>
@@ -16969,7 +17179,63 @@
                 <a:ea typeface="Arial" pitchFamily="34" charset="-122"/>
                 <a:cs typeface="Arial" pitchFamily="34" charset="-120"/>
               </a:rPr>
-              <a:t>Only 26% of Americans view AI positively. March 2026 "Stop the AI Race" protests hit lab HQs in SF and DC.</a:t>
+              <a:t>Only 26%</a:t>
+            </a:r>
+            <a:pPr indent="0" marL="0">
+              <a:buNone/>
+            </a:pPr>
+            <a:r>
+              <a:rPr lang="en-US" sz="700" baseline="30000" dirty="0">
+                <a:solidFill>
+                  <a:srgbClr val="333333"/>
+                </a:solidFill>
+                <a:latin typeface="Arial" pitchFamily="34" charset="0"/>
+                <a:ea typeface="Arial" pitchFamily="34" charset="-122"/>
+                <a:cs typeface="Arial" pitchFamily="34" charset="-120"/>
+              </a:rPr>
+              <a:t> 2</a:t>
+            </a:r>
+            <a:pPr indent="0" marL="0">
+              <a:buNone/>
+            </a:pPr>
+            <a:r>
+              <a:rPr lang="en-US" sz="1050" dirty="0">
+                <a:solidFill>
+                  <a:srgbClr val="333333"/>
+                </a:solidFill>
+                <a:latin typeface="Arial" pitchFamily="34" charset="0"/>
+                <a:ea typeface="Arial" pitchFamily="34" charset="-122"/>
+                <a:cs typeface="Arial" pitchFamily="34" charset="-120"/>
+              </a:rPr>
+              <a:t> of Americans view AI positively. March 2026 "Stop the AI Race" protests</a:t>
+            </a:r>
+            <a:pPr indent="0" marL="0">
+              <a:buNone/>
+            </a:pPr>
+            <a:r>
+              <a:rPr lang="en-US" sz="700" baseline="30000" dirty="0">
+                <a:solidFill>
+                  <a:srgbClr val="333333"/>
+                </a:solidFill>
+                <a:latin typeface="Arial" pitchFamily="34" charset="0"/>
+                <a:ea typeface="Arial" pitchFamily="34" charset="-122"/>
+                <a:cs typeface="Arial" pitchFamily="34" charset="-120"/>
+              </a:rPr>
+              <a:t> 3</a:t>
+            </a:r>
+            <a:pPr indent="0" marL="0">
+              <a:buNone/>
+            </a:pPr>
+            <a:r>
+              <a:rPr lang="en-US" sz="1050" dirty="0">
+                <a:solidFill>
+                  <a:srgbClr val="333333"/>
+                </a:solidFill>
+                <a:latin typeface="Arial" pitchFamily="34" charset="0"/>
+                <a:ea typeface="Arial" pitchFamily="34" charset="-122"/>
+                <a:cs typeface="Arial" pitchFamily="34" charset="-120"/>
+              </a:rPr>
+              <a:t> hit lab HQs in SF and DC.</a:t>
             </a:r>
             <a:endParaRPr lang="en-US" sz="1050" dirty="0"/>
           </a:p>
@@ -17097,7 +17363,35 @@
                 <a:ea typeface="Arial" pitchFamily="34" charset="-122"/>
                 <a:cs typeface="Arial" pitchFamily="34" charset="-120"/>
               </a:rPr>
-              <a:t>A ~480K data-center workforce gap against 400+ sites under construction. Talent, not capital, is binding.</a:t>
+              <a:t>A ~480K data-center workforce gap against 400+ sites under construction.</a:t>
+            </a:r>
+            <a:pPr indent="0" marL="0">
+              <a:buNone/>
+            </a:pPr>
+            <a:r>
+              <a:rPr lang="en-US" sz="700" baseline="30000" dirty="0">
+                <a:solidFill>
+                  <a:srgbClr val="333333"/>
+                </a:solidFill>
+                <a:latin typeface="Arial" pitchFamily="34" charset="0"/>
+                <a:ea typeface="Arial" pitchFamily="34" charset="-122"/>
+                <a:cs typeface="Arial" pitchFamily="34" charset="-120"/>
+              </a:rPr>
+              <a:t> 4</a:t>
+            </a:r>
+            <a:pPr indent="0" marL="0">
+              <a:buNone/>
+            </a:pPr>
+            <a:r>
+              <a:rPr lang="en-US" sz="1050" dirty="0">
+                <a:solidFill>
+                  <a:srgbClr val="333333"/>
+                </a:solidFill>
+                <a:latin typeface="Arial" pitchFamily="34" charset="0"/>
+                <a:ea typeface="Arial" pitchFamily="34" charset="-122"/>
+                <a:cs typeface="Arial" pitchFamily="34" charset="-120"/>
+              </a:rPr>
+              <a:t> Talent, not capital, is binding.</a:t>
             </a:r>
             <a:endParaRPr lang="en-US" sz="1050" dirty="0"/>
           </a:p>
@@ -17176,7 +17470,7 @@
         <p:spPr>
           <a:xfrm>
             <a:off x="457200" y="5875020"/>
-            <a:ext cx="8229600" cy="320040"/>
+            <a:ext cx="8229600" cy="457200"/>
           </a:xfrm>
           <a:prstGeom prst="rect">
             <a:avLst/>
@@ -17192,6 +17486,20 @@
               <a:buNone/>
             </a:pPr>
             <a:r>
+              <a:rPr lang="en-US" sz="700" b="1" dirty="0">
+                <a:solidFill>
+                  <a:srgbClr val="999999"/>
+                </a:solidFill>
+                <a:latin typeface="Arial" pitchFamily="34" charset="0"/>
+                <a:ea typeface="Arial" pitchFamily="34" charset="-122"/>
+                <a:cs typeface="Arial" pitchFamily="34" charset="-120"/>
+              </a:rPr>
+              <a:t>(1) </a:t>
+            </a:r>
+            <a:pPr indent="0" marL="0">
+              <a:buNone/>
+            </a:pPr>
+            <a:r>
               <a:rPr lang="en-US" sz="700" dirty="0">
                 <a:solidFill>
                   <a:srgbClr val="999999"/>
@@ -17200,7 +17508,91 @@
                 <a:ea typeface="Arial" pitchFamily="34" charset="-122"/>
                 <a:cs typeface="Arial" pitchFamily="34" charset="-120"/>
               </a:rPr>
-              <a:t>Sources: Data Center Watch ($18B halted, $46B delayed, 142 groups); Echelon Insights; Stop the AI Race; Fortune; TIME; CNN; NBC News; Data Center Frontier.</a:t>
+              <a:t>Data Center Watch, 2026 NIMBY tracker, </a:t>
+            </a:r>
+            <a:pPr indent="0" marL="0">
+              <a:buNone/>
+            </a:pPr>
+            <a:r>
+              <a:rPr lang="en-US" sz="700" b="1" dirty="0">
+                <a:solidFill>
+                  <a:srgbClr val="999999"/>
+                </a:solidFill>
+                <a:latin typeface="Arial" pitchFamily="34" charset="0"/>
+                <a:ea typeface="Arial" pitchFamily="34" charset="-122"/>
+                <a:cs typeface="Arial" pitchFamily="34" charset="-120"/>
+              </a:rPr>
+              <a:t>(2) </a:t>
+            </a:r>
+            <a:pPr indent="0" marL="0">
+              <a:buNone/>
+            </a:pPr>
+            <a:r>
+              <a:rPr lang="en-US" sz="700" dirty="0">
+                <a:solidFill>
+                  <a:srgbClr val="999999"/>
+                </a:solidFill>
+                <a:latin typeface="Arial" pitchFamily="34" charset="0"/>
+                <a:ea typeface="Arial" pitchFamily="34" charset="-122"/>
+                <a:cs typeface="Arial" pitchFamily="34" charset="-120"/>
+              </a:rPr>
+              <a:t>Echelon Insights, Mar 2026 AI sentiment poll, </a:t>
+            </a:r>
+            <a:pPr indent="0" marL="0">
+              <a:buNone/>
+            </a:pPr>
+            <a:r>
+              <a:rPr lang="en-US" sz="700" b="1" dirty="0">
+                <a:solidFill>
+                  <a:srgbClr val="999999"/>
+                </a:solidFill>
+                <a:latin typeface="Arial" pitchFamily="34" charset="0"/>
+                <a:ea typeface="Arial" pitchFamily="34" charset="-122"/>
+                <a:cs typeface="Arial" pitchFamily="34" charset="-120"/>
+              </a:rPr>
+              <a:t>(3) </a:t>
+            </a:r>
+            <a:pPr indent="0" marL="0">
+              <a:buNone/>
+            </a:pPr>
+            <a:r>
+              <a:rPr lang="en-US" sz="700" dirty="0">
+                <a:solidFill>
+                  <a:srgbClr val="999999"/>
+                </a:solidFill>
+                <a:latin typeface="Arial" pitchFamily="34" charset="0"/>
+                <a:ea typeface="Arial" pitchFamily="34" charset="-122"/>
+                <a:cs typeface="Arial" pitchFamily="34" charset="-120"/>
+              </a:rPr>
+              <a:t>Fortune / TIME / CNN / NBC News — Stop the AI Race coverage, </a:t>
+            </a:r>
+            <a:pPr indent="0" marL="0">
+              <a:buNone/>
+            </a:pPr>
+            <a:r>
+              <a:rPr lang="en-US" sz="700" b="1" dirty="0">
+                <a:solidFill>
+                  <a:srgbClr val="999999"/>
+                </a:solidFill>
+                <a:latin typeface="Arial" pitchFamily="34" charset="0"/>
+                <a:ea typeface="Arial" pitchFamily="34" charset="-122"/>
+                <a:cs typeface="Arial" pitchFamily="34" charset="-120"/>
+              </a:rPr>
+              <a:t>(4) </a:t>
+            </a:r>
+            <a:pPr indent="0" marL="0">
+              <a:buNone/>
+            </a:pPr>
+            <a:r>
+              <a:rPr lang="en-US" sz="700" dirty="0">
+                <a:solidFill>
+                  <a:srgbClr val="999999"/>
+                </a:solidFill>
+                <a:latin typeface="Arial" pitchFamily="34" charset="0"/>
+                <a:ea typeface="Arial" pitchFamily="34" charset="-122"/>
+                <a:cs typeface="Arial" pitchFamily="34" charset="-120"/>
+              </a:rPr>
+              <a:t>Data Center Frontier — workforce gap analysis.</a:t>
             </a:r>
             <a:endParaRPr lang="en-US" sz="700" dirty="0"/>
           </a:p>
@@ -17472,7 +17864,35 @@
                 <a:ea typeface="Arial" pitchFamily="34" charset="-122"/>
                 <a:cs typeface="Arial" pitchFamily="34" charset="-120"/>
               </a:rPr>
-              <a:t>No interconnection queue. No permits. No water. 1,361 W/m² of unfiltered solar, 24/7. Orbital compute sidesteps Earth's bottlenecks.</a:t>
+              <a:t>No interconnection queue. No permits. No water. 1,361 W/m²</a:t>
+            </a:r>
+            <a:pPr indent="0" marL="0">
+              <a:buNone/>
+            </a:pPr>
+            <a:r>
+              <a:rPr lang="en-US" sz="700" baseline="30000" dirty="0">
+                <a:solidFill>
+                  <a:srgbClr val="666666"/>
+                </a:solidFill>
+                <a:latin typeface="Arial" pitchFamily="34" charset="0"/>
+                <a:ea typeface="Arial" pitchFamily="34" charset="-122"/>
+                <a:cs typeface="Arial" pitchFamily="34" charset="-120"/>
+              </a:rPr>
+              <a:t> 1</a:t>
+            </a:r>
+            <a:pPr indent="0" marL="0">
+              <a:buNone/>
+            </a:pPr>
+            <a:r>
+              <a:rPr lang="en-US" sz="1350" dirty="0">
+                <a:solidFill>
+                  <a:srgbClr val="666666"/>
+                </a:solidFill>
+                <a:latin typeface="Arial" pitchFamily="34" charset="0"/>
+                <a:ea typeface="Arial" pitchFamily="34" charset="-122"/>
+                <a:cs typeface="Arial" pitchFamily="34" charset="-120"/>
+              </a:rPr>
+              <a:t> of unfiltered solar, 24/7. Orbital compute sidesteps Earth's bottlenecks.</a:t>
             </a:r>
             <a:endParaRPr lang="en-US" sz="1350" dirty="0"/>
           </a:p>
@@ -18023,6 +18443,20 @@
               </a:rPr>
               <a:t>Starcloud · SpaceX · Google Suncatcher · Aetherflux</a:t>
             </a:r>
+            <a:pPr indent="0" marL="0">
+              <a:buNone/>
+            </a:pPr>
+            <a:r>
+              <a:rPr lang="en-US" sz="800" baseline="30000" dirty="0">
+                <a:solidFill>
+                  <a:srgbClr val="FFFFFF"/>
+                </a:solidFill>
+                <a:latin typeface="Arial" pitchFamily="34" charset="0"/>
+                <a:ea typeface="Arial" pitchFamily="34" charset="-122"/>
+                <a:cs typeface="Arial" pitchFamily="34" charset="-120"/>
+              </a:rPr>
+              <a:t> 2</a:t>
+            </a:r>
             <a:endParaRPr lang="en-US" sz="950" dirty="0"/>
           </a:p>
         </p:txBody>
@@ -18036,7 +18470,7 @@
         <p:spPr>
           <a:xfrm>
             <a:off x="457200" y="5875020"/>
-            <a:ext cx="8229600" cy="320040"/>
+            <a:ext cx="8229600" cy="457200"/>
           </a:xfrm>
           <a:prstGeom prst="rect">
             <a:avLst/>
@@ -18052,6 +18486,20 @@
               <a:buNone/>
             </a:pPr>
             <a:r>
+              <a:rPr lang="en-US" sz="700" b="1" dirty="0">
+                <a:solidFill>
+                  <a:srgbClr val="999999"/>
+                </a:solidFill>
+                <a:latin typeface="Arial" pitchFamily="34" charset="0"/>
+                <a:ea typeface="Arial" pitchFamily="34" charset="-122"/>
+                <a:cs typeface="Arial" pitchFamily="34" charset="-120"/>
+              </a:rPr>
+              <a:t>(1) </a:t>
+            </a:r>
+            <a:pPr indent="0" marL="0">
+              <a:buNone/>
+            </a:pPr>
+            <a:r>
               <a:rPr lang="en-US" sz="700" dirty="0">
                 <a:solidFill>
                   <a:srgbClr val="999999"/>
@@ -18060,7 +18508,35 @@
                 <a:ea typeface="Arial" pitchFamily="34" charset="-122"/>
                 <a:cs typeface="Arial" pitchFamily="34" charset="-120"/>
               </a:rPr>
-              <a:t>Source: FCC filings; Starcloud, Google, SpaceX announcements; CNBC.</a:t>
+              <a:t>NASA solar constant, 1,361 W/m² at 1 AU, </a:t>
+            </a:r>
+            <a:pPr indent="0" marL="0">
+              <a:buNone/>
+            </a:pPr>
+            <a:r>
+              <a:rPr lang="en-US" sz="700" b="1" dirty="0">
+                <a:solidFill>
+                  <a:srgbClr val="999999"/>
+                </a:solidFill>
+                <a:latin typeface="Arial" pitchFamily="34" charset="0"/>
+                <a:ea typeface="Arial" pitchFamily="34" charset="-122"/>
+                <a:cs typeface="Arial" pitchFamily="34" charset="-120"/>
+              </a:rPr>
+              <a:t>(2) </a:t>
+            </a:r>
+            <a:pPr indent="0" marL="0">
+              <a:buNone/>
+            </a:pPr>
+            <a:r>
+              <a:rPr lang="en-US" sz="700" dirty="0">
+                <a:solidFill>
+                  <a:srgbClr val="999999"/>
+                </a:solidFill>
+                <a:latin typeface="Arial" pitchFamily="34" charset="0"/>
+                <a:ea typeface="Arial" pitchFamily="34" charset="-122"/>
+                <a:cs typeface="Arial" pitchFamily="34" charset="-120"/>
+              </a:rPr>
+              <a:t>FCC filings; Starcloud, SpaceX, Google Suncatcher, Aetherflux announcements; CNBC.</a:t>
             </a:r>
             <a:endParaRPr lang="en-US" sz="700" dirty="0"/>
           </a:p>
@@ -18549,6 +19025,20 @@
               </a:rPr>
               <a:t>Manufacturing, logistics, warehousing, agriculture, healthcare — pilots are underway.</a:t>
             </a:r>
+            <a:pPr indent="0" marL="0">
+              <a:buNone/>
+            </a:pPr>
+            <a:r>
+              <a:rPr lang="en-US" sz="650" baseline="30000" dirty="0">
+                <a:solidFill>
+                  <a:srgbClr val="333333"/>
+                </a:solidFill>
+                <a:latin typeface="Arial" pitchFamily="34" charset="0"/>
+                <a:ea typeface="Arial" pitchFamily="34" charset="-122"/>
+                <a:cs typeface="Arial" pitchFamily="34" charset="-120"/>
+              </a:rPr>
+              <a:t> 1</a:t>
+            </a:r>
             <a:endParaRPr lang="en-US" sz="1000" dirty="0"/>
           </a:p>
         </p:txBody>
@@ -18805,6 +19295,20 @@
               </a:rPr>
               <a:t>Every robot runs foundation models in real time. At scale, rivals LLM compute.</a:t>
             </a:r>
+            <a:pPr indent="0" marL="0">
+              <a:buNone/>
+            </a:pPr>
+            <a:r>
+              <a:rPr lang="en-US" sz="650" baseline="30000" dirty="0">
+                <a:solidFill>
+                  <a:srgbClr val="333333"/>
+                </a:solidFill>
+                <a:latin typeface="Arial" pitchFamily="34" charset="0"/>
+                <a:ea typeface="Arial" pitchFamily="34" charset="-122"/>
+                <a:cs typeface="Arial" pitchFamily="34" charset="-120"/>
+              </a:rPr>
+              <a:t> 2</a:t>
+            </a:r>
             <a:endParaRPr lang="en-US" sz="1000" dirty="0"/>
           </a:p>
         </p:txBody>
@@ -18883,6 +19387,20 @@
               </a:rPr>
               <a:t>Tesla Optimus · Figure · Boston Dynamics · Unitree · Agility</a:t>
             </a:r>
+            <a:pPr indent="0" marL="0">
+              <a:buNone/>
+            </a:pPr>
+            <a:r>
+              <a:rPr lang="en-US" sz="800" baseline="30000" dirty="0">
+                <a:solidFill>
+                  <a:srgbClr val="FFFFFF"/>
+                </a:solidFill>
+                <a:latin typeface="Arial" pitchFamily="34" charset="0"/>
+                <a:ea typeface="Arial" pitchFamily="34" charset="-122"/>
+                <a:cs typeface="Arial" pitchFamily="34" charset="-120"/>
+              </a:rPr>
+              <a:t> 3</a:t>
+            </a:r>
             <a:endParaRPr lang="en-US" sz="950" dirty="0"/>
           </a:p>
         </p:txBody>
@@ -18896,7 +19414,7 @@
         <p:spPr>
           <a:xfrm>
             <a:off x="457200" y="5875020"/>
-            <a:ext cx="8229600" cy="320040"/>
+            <a:ext cx="8229600" cy="457200"/>
           </a:xfrm>
           <a:prstGeom prst="rect">
             <a:avLst/>
@@ -18912,6 +19430,20 @@
               <a:buNone/>
             </a:pPr>
             <a:r>
+              <a:rPr lang="en-US" sz="700" b="1" dirty="0">
+                <a:solidFill>
+                  <a:srgbClr val="999999"/>
+                </a:solidFill>
+                <a:latin typeface="Arial" pitchFamily="34" charset="0"/>
+                <a:ea typeface="Arial" pitchFamily="34" charset="-122"/>
+                <a:cs typeface="Arial" pitchFamily="34" charset="-120"/>
+              </a:rPr>
+              <a:t>(1) </a:t>
+            </a:r>
+            <a:pPr indent="0" marL="0">
+              <a:buNone/>
+            </a:pPr>
+            <a:r>
               <a:rPr lang="en-US" sz="700" dirty="0">
                 <a:solidFill>
                   <a:srgbClr val="999999"/>
@@ -18920,7 +19452,63 @@
                 <a:ea typeface="Arial" pitchFamily="34" charset="-122"/>
                 <a:cs typeface="Arial" pitchFamily="34" charset="-120"/>
               </a:rPr>
-              <a:t>Source: Goldman Sachs; Figure AI, Tesla, Hyundai, NVIDIA; company announcements.</a:t>
+              <a:t>Goldman Sachs — humanoid robotics market outlook, </a:t>
+            </a:r>
+            <a:pPr indent="0" marL="0">
+              <a:buNone/>
+            </a:pPr>
+            <a:r>
+              <a:rPr lang="en-US" sz="700" b="1" dirty="0">
+                <a:solidFill>
+                  <a:srgbClr val="999999"/>
+                </a:solidFill>
+                <a:latin typeface="Arial" pitchFamily="34" charset="0"/>
+                <a:ea typeface="Arial" pitchFamily="34" charset="-122"/>
+                <a:cs typeface="Arial" pitchFamily="34" charset="-120"/>
+              </a:rPr>
+              <a:t>(2) </a:t>
+            </a:r>
+            <a:pPr indent="0" marL="0">
+              <a:buNone/>
+            </a:pPr>
+            <a:r>
+              <a:rPr lang="en-US" sz="700" dirty="0">
+                <a:solidFill>
+                  <a:srgbClr val="999999"/>
+                </a:solidFill>
+                <a:latin typeface="Arial" pitchFamily="34" charset="0"/>
+                <a:ea typeface="Arial" pitchFamily="34" charset="-122"/>
+                <a:cs typeface="Arial" pitchFamily="34" charset="-120"/>
+              </a:rPr>
+              <a:t>NVIDIA FY2026 — robotics compute keynotes, </a:t>
+            </a:r>
+            <a:pPr indent="0" marL="0">
+              <a:buNone/>
+            </a:pPr>
+            <a:r>
+              <a:rPr lang="en-US" sz="700" b="1" dirty="0">
+                <a:solidFill>
+                  <a:srgbClr val="999999"/>
+                </a:solidFill>
+                <a:latin typeface="Arial" pitchFamily="34" charset="0"/>
+                <a:ea typeface="Arial" pitchFamily="34" charset="-122"/>
+                <a:cs typeface="Arial" pitchFamily="34" charset="-120"/>
+              </a:rPr>
+              <a:t>(3) </a:t>
+            </a:r>
+            <a:pPr indent="0" marL="0">
+              <a:buNone/>
+            </a:pPr>
+            <a:r>
+              <a:rPr lang="en-US" sz="700" dirty="0">
+                <a:solidFill>
+                  <a:srgbClr val="999999"/>
+                </a:solidFill>
+                <a:latin typeface="Arial" pitchFamily="34" charset="0"/>
+                <a:ea typeface="Arial" pitchFamily="34" charset="-122"/>
+                <a:cs typeface="Arial" pitchFamily="34" charset="-120"/>
+              </a:rPr>
+              <a:t>Tesla, Figure AI, Hyundai/Boston Dynamics, Unitree, Agility — company announcements.</a:t>
             </a:r>
             <a:endParaRPr lang="en-US" sz="700" dirty="0"/>
           </a:p>
@@ -20603,7 +21191,35 @@
                 <a:ea typeface="Arial" pitchFamily="34" charset="-122"/>
                 <a:cs typeface="Arial" pitchFamily="34" charset="-120"/>
               </a:rPr>
-              <a:t>Human drivers cause ~1.35M deaths a year. Autonomous systems don't tire or lose focus.</a:t>
+              <a:t>Human drivers cause ~1.35M deaths a year.</a:t>
+            </a:r>
+            <a:pPr indent="0" marL="0">
+              <a:buNone/>
+            </a:pPr>
+            <a:r>
+              <a:rPr lang="en-US" sz="700" baseline="30000" dirty="0">
+                <a:solidFill>
+                  <a:srgbClr val="333333"/>
+                </a:solidFill>
+                <a:latin typeface="Arial" pitchFamily="34" charset="0"/>
+                <a:ea typeface="Arial" pitchFamily="34" charset="-122"/>
+                <a:cs typeface="Arial" pitchFamily="34" charset="-120"/>
+              </a:rPr>
+              <a:t> 1</a:t>
+            </a:r>
+            <a:pPr indent="0" marL="0">
+              <a:buNone/>
+            </a:pPr>
+            <a:r>
+              <a:rPr lang="en-US" sz="1050" dirty="0">
+                <a:solidFill>
+                  <a:srgbClr val="333333"/>
+                </a:solidFill>
+                <a:latin typeface="Arial" pitchFamily="34" charset="0"/>
+                <a:ea typeface="Arial" pitchFamily="34" charset="-122"/>
+                <a:cs typeface="Arial" pitchFamily="34" charset="-120"/>
+              </a:rPr>
+              <a:t> Autonomous systems don't tire or lose focus.</a:t>
             </a:r>
             <a:endParaRPr lang="en-US" sz="1050" dirty="0"/>
           </a:p>
@@ -20861,6 +21477,20 @@
               </a:rPr>
               <a:t>Each AV runs thousands of AI ops / second across cameras, lidar, radar — frontier-scale compute.</a:t>
             </a:r>
+            <a:pPr indent="0" marL="0">
+              <a:buNone/>
+            </a:pPr>
+            <a:r>
+              <a:rPr lang="en-US" sz="700" baseline="30000" dirty="0">
+                <a:solidFill>
+                  <a:srgbClr val="333333"/>
+                </a:solidFill>
+                <a:latin typeface="Arial" pitchFamily="34" charset="0"/>
+                <a:ea typeface="Arial" pitchFamily="34" charset="-122"/>
+                <a:cs typeface="Arial" pitchFamily="34" charset="-120"/>
+              </a:rPr>
+              <a:t> 2</a:t>
+            </a:r>
             <a:endParaRPr lang="en-US" sz="1050" dirty="0"/>
           </a:p>
         </p:txBody>
@@ -20939,6 +21569,20 @@
               </a:rPr>
               <a:t>Waymo · Tesla FSD · Baidu Apollo · Aurora</a:t>
             </a:r>
+            <a:pPr indent="0" marL="0">
+              <a:buNone/>
+            </a:pPr>
+            <a:r>
+              <a:rPr lang="en-US" sz="800" baseline="30000" dirty="0">
+                <a:solidFill>
+                  <a:srgbClr val="FFFFFF"/>
+                </a:solidFill>
+                <a:latin typeface="Arial" pitchFamily="34" charset="0"/>
+                <a:ea typeface="Arial" pitchFamily="34" charset="-122"/>
+                <a:cs typeface="Arial" pitchFamily="34" charset="-120"/>
+              </a:rPr>
+              <a:t> 3</a:t>
+            </a:r>
             <a:endParaRPr lang="en-US" sz="950" dirty="0"/>
           </a:p>
         </p:txBody>
@@ -20952,7 +21596,7 @@
         <p:spPr>
           <a:xfrm>
             <a:off x="457200" y="5875020"/>
-            <a:ext cx="8229600" cy="320040"/>
+            <a:ext cx="8229600" cy="457200"/>
           </a:xfrm>
           <a:prstGeom prst="rect">
             <a:avLst/>
@@ -20968,6 +21612,20 @@
               <a:buNone/>
             </a:pPr>
             <a:r>
+              <a:rPr lang="en-US" sz="700" b="1" dirty="0">
+                <a:solidFill>
+                  <a:srgbClr val="999999"/>
+                </a:solidFill>
+                <a:latin typeface="Arial" pitchFamily="34" charset="0"/>
+                <a:ea typeface="Arial" pitchFamily="34" charset="-122"/>
+                <a:cs typeface="Arial" pitchFamily="34" charset="-120"/>
+              </a:rPr>
+              <a:t>(1) </a:t>
+            </a:r>
+            <a:pPr indent="0" marL="0">
+              <a:buNone/>
+            </a:pPr>
+            <a:r>
               <a:rPr lang="en-US" sz="700" dirty="0">
                 <a:solidFill>
                   <a:srgbClr val="999999"/>
@@ -20976,7 +21634,63 @@
                 <a:ea typeface="Arial" pitchFamily="34" charset="-122"/>
                 <a:cs typeface="Arial" pitchFamily="34" charset="-120"/>
               </a:rPr>
-              <a:t>Source: Waymo, Tesla, Baidu, Aurora; WHO Global Road Safety; NVIDIA FY2026.</a:t>
+              <a:t>WHO Global Road Safety report, </a:t>
+            </a:r>
+            <a:pPr indent="0" marL="0">
+              <a:buNone/>
+            </a:pPr>
+            <a:r>
+              <a:rPr lang="en-US" sz="700" b="1" dirty="0">
+                <a:solidFill>
+                  <a:srgbClr val="999999"/>
+                </a:solidFill>
+                <a:latin typeface="Arial" pitchFamily="34" charset="0"/>
+                <a:ea typeface="Arial" pitchFamily="34" charset="-122"/>
+                <a:cs typeface="Arial" pitchFamily="34" charset="-120"/>
+              </a:rPr>
+              <a:t>(2) </a:t>
+            </a:r>
+            <a:pPr indent="0" marL="0">
+              <a:buNone/>
+            </a:pPr>
+            <a:r>
+              <a:rPr lang="en-US" sz="700" dirty="0">
+                <a:solidFill>
+                  <a:srgbClr val="999999"/>
+                </a:solidFill>
+                <a:latin typeface="Arial" pitchFamily="34" charset="0"/>
+                <a:ea typeface="Arial" pitchFamily="34" charset="-122"/>
+                <a:cs typeface="Arial" pitchFamily="34" charset="-120"/>
+              </a:rPr>
+              <a:t>NVIDIA FY2026 — automotive/DRIVE platform, </a:t>
+            </a:r>
+            <a:pPr indent="0" marL="0">
+              <a:buNone/>
+            </a:pPr>
+            <a:r>
+              <a:rPr lang="en-US" sz="700" b="1" dirty="0">
+                <a:solidFill>
+                  <a:srgbClr val="999999"/>
+                </a:solidFill>
+                <a:latin typeface="Arial" pitchFamily="34" charset="0"/>
+                <a:ea typeface="Arial" pitchFamily="34" charset="-122"/>
+                <a:cs typeface="Arial" pitchFamily="34" charset="-120"/>
+              </a:rPr>
+              <a:t>(3) </a:t>
+            </a:r>
+            <a:pPr indent="0" marL="0">
+              <a:buNone/>
+            </a:pPr>
+            <a:r>
+              <a:rPr lang="en-US" sz="700" dirty="0">
+                <a:solidFill>
+                  <a:srgbClr val="999999"/>
+                </a:solidFill>
+                <a:latin typeface="Arial" pitchFamily="34" charset="0"/>
+                <a:ea typeface="Arial" pitchFamily="34" charset="-122"/>
+                <a:cs typeface="Arial" pitchFamily="34" charset="-120"/>
+              </a:rPr>
+              <a:t>Waymo, Tesla, Baidu Apollo, Aurora — company disclosures.</a:t>
             </a:r>
             <a:endParaRPr lang="en-US" sz="700" dirty="0"/>
           </a:p>
@@ -21477,7 +22191,35 @@
                 <a:ea typeface="Arial" pitchFamily="34" charset="-122"/>
                 <a:cs typeface="Arial" pitchFamily="34" charset="-120"/>
               </a:rPr>
-              <a:t>Predicting a protein's 3D shape from its amino-acid sequence was a 50-year unsolved problem. Crystallography took months per protein. Deep learning now infers structure in seconds — unlocking every drug target at once.</a:t>
+              <a:t>Predicting a protein's 3D shape from its amino-acid sequence was a 50-year unsolved problem. Crystallography took months per protein. Deep learning now infers structure in seconds</a:t>
+            </a:r>
+            <a:pPr indent="0" marL="0">
+              <a:buNone/>
+            </a:pPr>
+            <a:r>
+              <a:rPr lang="en-US" sz="650" baseline="30000" dirty="0">
+                <a:solidFill>
+                  <a:srgbClr val="333333"/>
+                </a:solidFill>
+                <a:latin typeface="Arial" pitchFamily="34" charset="0"/>
+                <a:ea typeface="Arial" pitchFamily="34" charset="-122"/>
+                <a:cs typeface="Arial" pitchFamily="34" charset="-120"/>
+              </a:rPr>
+              <a:t> 1</a:t>
+            </a:r>
+            <a:pPr indent="0" marL="0">
+              <a:buNone/>
+            </a:pPr>
+            <a:r>
+              <a:rPr lang="en-US" sz="950" dirty="0">
+                <a:solidFill>
+                  <a:srgbClr val="333333"/>
+                </a:solidFill>
+                <a:latin typeface="Arial" pitchFamily="34" charset="0"/>
+                <a:ea typeface="Arial" pitchFamily="34" charset="-122"/>
+                <a:cs typeface="Arial" pitchFamily="34" charset="-120"/>
+              </a:rPr>
+              <a:t> — unlocking every drug target at once.</a:t>
             </a:r>
             <a:endParaRPr lang="en-US" sz="950" dirty="0"/>
           </a:p>
@@ -21619,7 +22361,35 @@
                 <a:ea typeface="Arial" pitchFamily="34" charset="-122"/>
                 <a:cs typeface="Arial" pitchFamily="34" charset="-120"/>
               </a:rPr>
-              <a:t>There are ~10⁶⁰ drug-like small molecules. Wet labs can screen millions. Generative models search the rest — proposing novel binders optimized for selectivity, potency, and drug-like properties.</a:t>
+              <a:t>There are ~10⁶⁰ drug-like small molecules.</a:t>
+            </a:r>
+            <a:pPr indent="0" marL="0">
+              <a:buNone/>
+            </a:pPr>
+            <a:r>
+              <a:rPr lang="en-US" sz="650" baseline="30000" dirty="0">
+                <a:solidFill>
+                  <a:srgbClr val="333333"/>
+                </a:solidFill>
+                <a:latin typeface="Arial" pitchFamily="34" charset="0"/>
+                <a:ea typeface="Arial" pitchFamily="34" charset="-122"/>
+                <a:cs typeface="Arial" pitchFamily="34" charset="-120"/>
+              </a:rPr>
+              <a:t> 2</a:t>
+            </a:r>
+            <a:pPr indent="0" marL="0">
+              <a:buNone/>
+            </a:pPr>
+            <a:r>
+              <a:rPr lang="en-US" sz="950" dirty="0">
+                <a:solidFill>
+                  <a:srgbClr val="333333"/>
+                </a:solidFill>
+                <a:latin typeface="Arial" pitchFamily="34" charset="0"/>
+                <a:ea typeface="Arial" pitchFamily="34" charset="-122"/>
+                <a:cs typeface="Arial" pitchFamily="34" charset="-120"/>
+              </a:rPr>
+              <a:t> Wet labs can screen millions. Generative models search the rest — proposing novel binders optimized for selectivity, potency, and drug-like properties.</a:t>
             </a:r>
             <a:endParaRPr lang="en-US" sz="950" dirty="0"/>
           </a:p>
@@ -21825,7 +22595,35 @@
                 <a:ea typeface="Arial" pitchFamily="34" charset="-122"/>
                 <a:cs typeface="Arial" pitchFamily="34" charset="-120"/>
               </a:rPr>
-              <a:t>Traditional pharma: 10–15 years, ~$2.6B per approved drug, &lt;10% Phase I success. AI collapses the design stage — clinical trials are still bound by biology and the FDA.</a:t>
+              <a:t>Traditional pharma: 10–15 years, ~$2.6B per approved drug, &lt;10% Phase I success.</a:t>
+            </a:r>
+            <a:pPr indent="0" marL="0">
+              <a:buNone/>
+            </a:pPr>
+            <a:r>
+              <a:rPr lang="en-US" sz="700" b="1" baseline="30000" dirty="0">
+                <a:solidFill>
+                  <a:srgbClr val="000000"/>
+                </a:solidFill>
+                <a:latin typeface="Arial" pitchFamily="34" charset="0"/>
+                <a:ea typeface="Arial" pitchFamily="34" charset="-122"/>
+                <a:cs typeface="Arial" pitchFamily="34" charset="-120"/>
+              </a:rPr>
+              <a:t> 3</a:t>
+            </a:r>
+            <a:pPr indent="0" marL="0">
+              <a:buNone/>
+            </a:pPr>
+            <a:r>
+              <a:rPr lang="en-US" sz="1000" b="1" dirty="0">
+                <a:solidFill>
+                  <a:srgbClr val="000000"/>
+                </a:solidFill>
+                <a:latin typeface="Arial" pitchFamily="34" charset="0"/>
+                <a:ea typeface="Arial" pitchFamily="34" charset="-122"/>
+                <a:cs typeface="Arial" pitchFamily="34" charset="-120"/>
+              </a:rPr>
+              <a:t> AI collapses the design stage — clinical trials are still bound by biology and the FDA.</a:t>
             </a:r>
             <a:endParaRPr lang="en-US" sz="1000" dirty="0"/>
           </a:p>
@@ -21840,7 +22638,7 @@
         <p:spPr>
           <a:xfrm>
             <a:off x="457200" y="5875020"/>
-            <a:ext cx="8229600" cy="320040"/>
+            <a:ext cx="8229600" cy="457200"/>
           </a:xfrm>
           <a:prstGeom prst="rect">
             <a:avLst/>
@@ -21856,6 +22654,20 @@
               <a:buNone/>
             </a:pPr>
             <a:r>
+              <a:rPr lang="en-US" sz="700" b="1" dirty="0">
+                <a:solidFill>
+                  <a:srgbClr val="999999"/>
+                </a:solidFill>
+                <a:latin typeface="Arial" pitchFamily="34" charset="0"/>
+                <a:ea typeface="Arial" pitchFamily="34" charset="-122"/>
+                <a:cs typeface="Arial" pitchFamily="34" charset="-120"/>
+              </a:rPr>
+              <a:t>(1) </a:t>
+            </a:r>
+            <a:pPr indent="0" marL="0">
+              <a:buNone/>
+            </a:pPr>
+            <a:r>
               <a:rPr lang="en-US" sz="700" dirty="0">
                 <a:solidFill>
                   <a:srgbClr val="999999"/>
@@ -21864,7 +22676,63 @@
                 <a:ea typeface="Arial" pitchFamily="34" charset="-122"/>
                 <a:cs typeface="Arial" pitchFamily="34" charset="-120"/>
               </a:rPr>
-              <a:t>Sources: Jumper et al. (AlphaFold, Nature 2020); Tufts CSDD drug-development cost and timeline studies; Hughes et al., Br. J. Pharmacol. on screening scale; Strategy Research.</a:t>
+              <a:t>Jumper et al., AlphaFold, Nature 2020, </a:t>
+            </a:r>
+            <a:pPr indent="0" marL="0">
+              <a:buNone/>
+            </a:pPr>
+            <a:r>
+              <a:rPr lang="en-US" sz="700" b="1" dirty="0">
+                <a:solidFill>
+                  <a:srgbClr val="999999"/>
+                </a:solidFill>
+                <a:latin typeface="Arial" pitchFamily="34" charset="0"/>
+                <a:ea typeface="Arial" pitchFamily="34" charset="-122"/>
+                <a:cs typeface="Arial" pitchFamily="34" charset="-120"/>
+              </a:rPr>
+              <a:t>(2) </a:t>
+            </a:r>
+            <a:pPr indent="0" marL="0">
+              <a:buNone/>
+            </a:pPr>
+            <a:r>
+              <a:rPr lang="en-US" sz="700" dirty="0">
+                <a:solidFill>
+                  <a:srgbClr val="999999"/>
+                </a:solidFill>
+                <a:latin typeface="Arial" pitchFamily="34" charset="0"/>
+                <a:ea typeface="Arial" pitchFamily="34" charset="-122"/>
+                <a:cs typeface="Arial" pitchFamily="34" charset="-120"/>
+              </a:rPr>
+              <a:t>Hughes et al., Br. J. Pharmacol. — screening scale, </a:t>
+            </a:r>
+            <a:pPr indent="0" marL="0">
+              <a:buNone/>
+            </a:pPr>
+            <a:r>
+              <a:rPr lang="en-US" sz="700" b="1" dirty="0">
+                <a:solidFill>
+                  <a:srgbClr val="999999"/>
+                </a:solidFill>
+                <a:latin typeface="Arial" pitchFamily="34" charset="0"/>
+                <a:ea typeface="Arial" pitchFamily="34" charset="-122"/>
+                <a:cs typeface="Arial" pitchFamily="34" charset="-120"/>
+              </a:rPr>
+              <a:t>(3) </a:t>
+            </a:r>
+            <a:pPr indent="0" marL="0">
+              <a:buNone/>
+            </a:pPr>
+            <a:r>
+              <a:rPr lang="en-US" sz="700" dirty="0">
+                <a:solidFill>
+                  <a:srgbClr val="999999"/>
+                </a:solidFill>
+                <a:latin typeface="Arial" pitchFamily="34" charset="0"/>
+                <a:ea typeface="Arial" pitchFamily="34" charset="-122"/>
+                <a:cs typeface="Arial" pitchFamily="34" charset="-120"/>
+              </a:rPr>
+              <a:t>Tufts CSDD — drug-development cost and timeline.</a:t>
             </a:r>
             <a:endParaRPr lang="en-US" sz="700" dirty="0"/>
           </a:p>

--- a/ai-markets-deck.pptx
+++ b/ai-markets-deck.pptx
@@ -11032,163 +11032,7 @@
         <p:spPr>
           <a:xfrm>
             <a:off x="4754880" y="1783080"/>
-            <a:ext cx="3931920" cy="1280160"/>
-          </a:xfrm>
-          <a:prstGeom prst="rect">
-            <a:avLst/>
-          </a:prstGeom>
-          <a:solidFill>
-            <a:srgbClr val="F9F9F9"/>
-          </a:solidFill>
-          <a:ln w="6350">
-            <a:solidFill>
-              <a:srgbClr val="E5E5E5"/>
-            </a:solidFill>
-            <a:prstDash val="solid"/>
-          </a:ln>
-        </p:spPr>
-      </p:sp>
-      <p:sp>
-        <p:nvSpPr>
-          <p:cNvPr id="11" name="Text 8"/>
-          <p:cNvSpPr/>
-          <p:nvPr/>
-        </p:nvSpPr>
-        <p:spPr>
-          <a:xfrm>
-            <a:off x="4754880" y="1874520"/>
-            <a:ext cx="3931920" cy="228600"/>
-          </a:xfrm>
-          <a:prstGeom prst="rect">
-            <a:avLst/>
-          </a:prstGeom>
-          <a:noFill/>
-          <a:ln/>
-        </p:spPr>
-        <p:txBody>
-          <a:bodyPr wrap="square" lIns="0" tIns="0" rIns="0" bIns="0" rtlCol="0" anchor="ctr"/>
-          <a:lstStyle/>
-          <a:p>
-            <a:pPr algn="ctr" indent="0" marL="0">
-              <a:buNone/>
-            </a:pPr>
-            <a:r>
-              <a:rPr lang="en-US" sz="1000" b="1" spc="300" kern="0" dirty="0">
-                <a:solidFill>
-                  <a:srgbClr val="666666"/>
-                </a:solidFill>
-                <a:latin typeface="Arial" pitchFamily="34" charset="0"/>
-                <a:ea typeface="Arial" pitchFamily="34" charset="-122"/>
-                <a:cs typeface="Arial" pitchFamily="34" charset="-120"/>
-              </a:rPr>
-              <a:t>YTD SPREAD — SOX vs IGV</a:t>
-            </a:r>
-            <a:endParaRPr lang="en-US" sz="1000" dirty="0"/>
-          </a:p>
-        </p:txBody>
-      </p:sp>
-      <p:sp>
-        <p:nvSpPr>
-          <p:cNvPr id="12" name="Text 9"/>
-          <p:cNvSpPr/>
-          <p:nvPr/>
-        </p:nvSpPr>
-        <p:spPr>
-          <a:xfrm>
-            <a:off x="4754880" y="2103120"/>
-            <a:ext cx="3931920" cy="640080"/>
-          </a:xfrm>
-          <a:prstGeom prst="rect">
-            <a:avLst/>
-          </a:prstGeom>
-          <a:noFill/>
-          <a:ln/>
-        </p:spPr>
-        <p:txBody>
-          <a:bodyPr wrap="square" lIns="0" tIns="0" rIns="0" bIns="0" rtlCol="0" anchor="ctr"/>
-          <a:lstStyle/>
-          <a:p>
-            <a:pPr algn="ctr" indent="0" marL="0">
-              <a:buNone/>
-            </a:pPr>
-            <a:r>
-              <a:rPr lang="en-US" sz="5200" b="1" dirty="0">
-                <a:solidFill>
-                  <a:srgbClr val="F6693D"/>
-                </a:solidFill>
-                <a:latin typeface="Arial Black" pitchFamily="34" charset="0"/>
-                <a:ea typeface="Arial Black" pitchFamily="34" charset="-122"/>
-                <a:cs typeface="Arial Black" pitchFamily="34" charset="-120"/>
-              </a:rPr>
-              <a:t>+58 pts</a:t>
-            </a:r>
-            <a:pPr algn="ctr" indent="0" marL="0">
-              <a:buNone/>
-            </a:pPr>
-            <a:r>
-              <a:rPr lang="en-US" sz="1800" baseline="30000" dirty="0">
-                <a:solidFill>
-                  <a:srgbClr val="F6693D"/>
-                </a:solidFill>
-                <a:latin typeface="Arial Black" pitchFamily="34" charset="0"/>
-                <a:ea typeface="Arial Black" pitchFamily="34" charset="-122"/>
-                <a:cs typeface="Arial Black" pitchFamily="34" charset="-120"/>
-              </a:rPr>
-              <a:t> 1</a:t>
-            </a:r>
-            <a:endParaRPr lang="en-US" sz="5200" dirty="0"/>
-          </a:p>
-        </p:txBody>
-      </p:sp>
-      <p:sp>
-        <p:nvSpPr>
-          <p:cNvPr id="13" name="Text 10"/>
-          <p:cNvSpPr/>
-          <p:nvPr/>
-        </p:nvSpPr>
-        <p:spPr>
-          <a:xfrm>
-            <a:off x="4754880" y="2761488"/>
-            <a:ext cx="3931920" cy="256032"/>
-          </a:xfrm>
-          <a:prstGeom prst="rect">
-            <a:avLst/>
-          </a:prstGeom>
-          <a:noFill/>
-          <a:ln/>
-        </p:spPr>
-        <p:txBody>
-          <a:bodyPr wrap="square" lIns="0" tIns="0" rIns="0" bIns="0" rtlCol="0" anchor="t"/>
-          <a:lstStyle/>
-          <a:p>
-            <a:pPr algn="ctr" indent="0" marL="0">
-              <a:buNone/>
-            </a:pPr>
-            <a:r>
-              <a:rPr lang="en-US" sz="1050" dirty="0">
-                <a:solidFill>
-                  <a:srgbClr val="333333"/>
-                </a:solidFill>
-                <a:latin typeface="Arial" pitchFamily="34" charset="0"/>
-                <a:ea typeface="Arial" pitchFamily="34" charset="-122"/>
-                <a:cs typeface="Arial" pitchFamily="34" charset="-120"/>
-              </a:rPr>
-              <a:t>Semis +38% vs software −20%, through Apr 17, 2026</a:t>
-            </a:r>
-            <a:endParaRPr lang="en-US" sz="1050" dirty="0"/>
-          </a:p>
-        </p:txBody>
-      </p:sp>
-      <p:sp>
-        <p:nvSpPr>
-          <p:cNvPr id="14" name="Shape 11"/>
-          <p:cNvSpPr/>
-          <p:nvPr/>
-        </p:nvSpPr>
-        <p:spPr>
-          <a:xfrm>
-            <a:off x="4754880" y="3200400"/>
-            <a:ext cx="1920240" cy="2011680"/>
+            <a:ext cx="3931920" cy="1645920"/>
           </a:xfrm>
           <a:prstGeom prst="rect">
             <a:avLst/>
@@ -11206,14 +11050,14 @@
       </p:sp>
       <p:sp>
         <p:nvSpPr>
-          <p:cNvPr id="15" name="Shape 12"/>
-          <p:cNvSpPr/>
-          <p:nvPr/>
-        </p:nvSpPr>
-        <p:spPr>
-          <a:xfrm>
-            <a:off x="4754880" y="3200400"/>
-            <a:ext cx="1920240" cy="54864"/>
+          <p:cNvPr id="11" name="Shape 8"/>
+          <p:cNvSpPr/>
+          <p:nvPr/>
+        </p:nvSpPr>
+        <p:spPr>
+          <a:xfrm>
+            <a:off x="4754880" y="1783080"/>
+            <a:ext cx="3931920" cy="54864"/>
           </a:xfrm>
           <a:prstGeom prst="rect">
             <a:avLst/>
@@ -11231,14 +11075,14 @@
       </p:sp>
       <p:sp>
         <p:nvSpPr>
-          <p:cNvPr id="16" name="Text 13"/>
-          <p:cNvSpPr/>
-          <p:nvPr/>
-        </p:nvSpPr>
-        <p:spPr>
-          <a:xfrm>
-            <a:off x="4754880" y="3328416"/>
-            <a:ext cx="1920240" cy="237744"/>
+          <p:cNvPr id="12" name="Text 9"/>
+          <p:cNvSpPr/>
+          <p:nvPr/>
+        </p:nvSpPr>
+        <p:spPr>
+          <a:xfrm>
+            <a:off x="4937760" y="1874520"/>
+            <a:ext cx="3566160" cy="182880"/>
           </a:xfrm>
           <a:prstGeom prst="rect">
             <a:avLst/>
@@ -11250,142 +11094,373 @@
           <a:bodyPr wrap="square" lIns="0" tIns="0" rIns="0" bIns="0" rtlCol="0" anchor="ctr"/>
           <a:lstStyle/>
           <a:p>
+            <a:pPr algn="l" indent="0" marL="0">
+              <a:buNone/>
+            </a:pPr>
+            <a:r>
+              <a:rPr lang="en-US" sz="1000" b="1" spc="300" kern="0" dirty="0">
+                <a:solidFill>
+                  <a:srgbClr val="666666"/>
+                </a:solidFill>
+                <a:latin typeface="Arial" pitchFamily="34" charset="0"/>
+                <a:ea typeface="Arial" pitchFamily="34" charset="-122"/>
+                <a:cs typeface="Arial" pitchFamily="34" charset="-120"/>
+              </a:rPr>
+              <a:t>WHY SEMIS ARE UP</a:t>
+            </a:r>
+            <a:endParaRPr lang="en-US" sz="1000" dirty="0"/>
+          </a:p>
+        </p:txBody>
+      </p:sp>
+      <p:sp>
+        <p:nvSpPr>
+          <p:cNvPr id="13" name="Text 10"/>
+          <p:cNvSpPr/>
+          <p:nvPr/>
+        </p:nvSpPr>
+        <p:spPr>
+          <a:xfrm>
+            <a:off x="4937760" y="2057400"/>
+            <a:ext cx="3566160" cy="347472"/>
+          </a:xfrm>
+          <a:prstGeom prst="rect">
+            <a:avLst/>
+          </a:prstGeom>
+          <a:noFill/>
+          <a:ln/>
+        </p:spPr>
+        <p:txBody>
+          <a:bodyPr wrap="square" lIns="0" tIns="0" rIns="0" bIns="0" rtlCol="0" anchor="ctr"/>
+          <a:lstStyle/>
+          <a:p>
+            <a:pPr algn="l" indent="0" marL="0">
+              <a:buNone/>
+            </a:pPr>
+            <a:r>
+              <a:rPr lang="en-US" sz="1200" b="1" dirty="0">
+                <a:solidFill>
+                  <a:srgbClr val="333333"/>
+                </a:solidFill>
+                <a:latin typeface="Arial" pitchFamily="34" charset="0"/>
+                <a:ea typeface="Arial" pitchFamily="34" charset="-122"/>
+                <a:cs typeface="Arial" pitchFamily="34" charset="-120"/>
+              </a:rPr>
+              <a:t>Sold out, with demand still building.</a:t>
+            </a:r>
+            <a:endParaRPr lang="en-US" sz="1200" dirty="0"/>
+          </a:p>
+        </p:txBody>
+      </p:sp>
+      <p:sp>
+        <p:nvSpPr>
+          <p:cNvPr id="14" name="Shape 11"/>
+          <p:cNvSpPr/>
+          <p:nvPr/>
+        </p:nvSpPr>
+        <p:spPr>
+          <a:xfrm>
+            <a:off x="4937760" y="2468880"/>
+            <a:ext cx="274320" cy="274320"/>
+          </a:xfrm>
+          <a:prstGeom prst="ellipse">
+            <a:avLst/>
+          </a:prstGeom>
+          <a:solidFill>
+            <a:srgbClr val="F6693D"/>
+          </a:solidFill>
+          <a:ln w="12700">
+            <a:solidFill>
+              <a:srgbClr val="F6693D"/>
+            </a:solidFill>
+            <a:prstDash val="solid"/>
+          </a:ln>
+        </p:spPr>
+      </p:sp>
+      <p:sp>
+        <p:nvSpPr>
+          <p:cNvPr id="15" name="Text 12"/>
+          <p:cNvSpPr/>
+          <p:nvPr/>
+        </p:nvSpPr>
+        <p:spPr>
+          <a:xfrm>
+            <a:off x="4937760" y="2468880"/>
+            <a:ext cx="274320" cy="274320"/>
+          </a:xfrm>
+          <a:prstGeom prst="rect">
+            <a:avLst/>
+          </a:prstGeom>
+          <a:noFill/>
+          <a:ln/>
+        </p:spPr>
+        <p:txBody>
+          <a:bodyPr wrap="square" lIns="0" tIns="0" rIns="0" bIns="0" rtlCol="0" anchor="ctr"/>
+          <a:lstStyle/>
+          <a:p>
             <a:pPr algn="ctr" indent="0" marL="0">
               <a:buNone/>
             </a:pPr>
             <a:r>
-              <a:rPr lang="en-US" sz="850" b="1" spc="200" kern="0" dirty="0">
-                <a:solidFill>
-                  <a:srgbClr val="333333"/>
-                </a:solidFill>
-                <a:latin typeface="Arial" pitchFamily="34" charset="0"/>
-                <a:ea typeface="Arial" pitchFamily="34" charset="-122"/>
-                <a:cs typeface="Arial" pitchFamily="34" charset="-120"/>
-              </a:rPr>
-              <a:t>WHY SEMIS ARE UP</a:t>
-            </a:r>
-            <a:endParaRPr lang="en-US" sz="850" dirty="0"/>
-          </a:p>
-        </p:txBody>
-      </p:sp>
-      <p:sp>
-        <p:nvSpPr>
-          <p:cNvPr id="17" name="Text 14"/>
-          <p:cNvSpPr/>
-          <p:nvPr/>
-        </p:nvSpPr>
-        <p:spPr>
-          <a:xfrm>
-            <a:off x="4754880" y="3602736"/>
-            <a:ext cx="1920240" cy="548640"/>
-          </a:xfrm>
-          <a:prstGeom prst="rect">
-            <a:avLst/>
-          </a:prstGeom>
-          <a:noFill/>
-          <a:ln/>
-        </p:spPr>
-        <p:txBody>
-          <a:bodyPr wrap="square" lIns="0" tIns="0" rIns="0" bIns="0" rtlCol="0" anchor="ctr"/>
-          <a:lstStyle/>
-          <a:p>
-            <a:pPr algn="ctr" indent="0" marL="0">
-              <a:buNone/>
-            </a:pPr>
-            <a:r>
-              <a:rPr lang="en-US" sz="2800" b="1" dirty="0">
-                <a:solidFill>
-                  <a:srgbClr val="F6693D"/>
+              <a:rPr lang="en-US" sz="1100" b="1" dirty="0">
+                <a:solidFill>
+                  <a:srgbClr val="FFFFFF"/>
                 </a:solidFill>
                 <a:latin typeface="Arial Black" pitchFamily="34" charset="0"/>
                 <a:ea typeface="Arial Black" pitchFamily="34" charset="-122"/>
                 <a:cs typeface="Arial Black" pitchFamily="34" charset="-120"/>
               </a:rPr>
-              <a:t>+47%</a:t>
-            </a:r>
+              <a:t>⚙</a:t>
+            </a:r>
+            <a:endParaRPr lang="en-US" sz="1100" dirty="0"/>
+          </a:p>
+        </p:txBody>
+      </p:sp>
+      <p:sp>
+        <p:nvSpPr>
+          <p:cNvPr id="16" name="Text 13"/>
+          <p:cNvSpPr/>
+          <p:nvPr/>
+        </p:nvSpPr>
+        <p:spPr>
+          <a:xfrm>
+            <a:off x="5303520" y="2441448"/>
+            <a:ext cx="3200400" cy="329184"/>
+          </a:xfrm>
+          <a:prstGeom prst="rect">
+            <a:avLst/>
+          </a:prstGeom>
+          <a:noFill/>
+          <a:ln/>
+        </p:spPr>
+        <p:txBody>
+          <a:bodyPr wrap="square" lIns="0" tIns="0" rIns="0" bIns="0" rtlCol="0" anchor="ctr"/>
+          <a:lstStyle/>
+          <a:p>
+            <a:pPr algn="l" indent="0" marL="0">
+              <a:buNone/>
+            </a:pPr>
+            <a:r>
+              <a:rPr lang="en-US" sz="950" dirty="0">
+                <a:solidFill>
+                  <a:srgbClr val="333333"/>
+                </a:solidFill>
+                <a:latin typeface="Arial" pitchFamily="34" charset="0"/>
+                <a:ea typeface="Arial" pitchFamily="34" charset="-122"/>
+                <a:cs typeface="Arial" pitchFamily="34" charset="-120"/>
+              </a:rPr>
+              <a:t>HBM sold out through 2026; hyperscalers are locking in every GB of memory they can secure.</a:t>
+            </a:r>
+            <a:pPr algn="l" indent="0" marL="0">
+              <a:buNone/>
+            </a:pPr>
+            <a:r>
+              <a:rPr lang="en-US" sz="700" baseline="30000" dirty="0">
+                <a:solidFill>
+                  <a:srgbClr val="F6693D"/>
+                </a:solidFill>
+                <a:latin typeface="Arial" pitchFamily="34" charset="0"/>
+                <a:ea typeface="Arial" pitchFamily="34" charset="-122"/>
+                <a:cs typeface="Arial" pitchFamily="34" charset="-120"/>
+              </a:rPr>
+              <a:t> 1</a:t>
+            </a:r>
+            <a:endParaRPr lang="en-US" sz="950" dirty="0"/>
+          </a:p>
+        </p:txBody>
+      </p:sp>
+      <p:sp>
+        <p:nvSpPr>
+          <p:cNvPr id="17" name="Shape 14"/>
+          <p:cNvSpPr/>
+          <p:nvPr/>
+        </p:nvSpPr>
+        <p:spPr>
+          <a:xfrm>
+            <a:off x="4937760" y="2798064"/>
+            <a:ext cx="274320" cy="274320"/>
+          </a:xfrm>
+          <a:prstGeom prst="ellipse">
+            <a:avLst/>
+          </a:prstGeom>
+          <a:solidFill>
+            <a:srgbClr val="F6693D"/>
+          </a:solidFill>
+          <a:ln w="12700">
+            <a:solidFill>
+              <a:srgbClr val="F6693D"/>
+            </a:solidFill>
+            <a:prstDash val="solid"/>
+          </a:ln>
+        </p:spPr>
+      </p:sp>
+      <p:sp>
+        <p:nvSpPr>
+          <p:cNvPr id="18" name="Text 15"/>
+          <p:cNvSpPr/>
+          <p:nvPr/>
+        </p:nvSpPr>
+        <p:spPr>
+          <a:xfrm>
+            <a:off x="4937760" y="2798064"/>
+            <a:ext cx="274320" cy="274320"/>
+          </a:xfrm>
+          <a:prstGeom prst="rect">
+            <a:avLst/>
+          </a:prstGeom>
+          <a:noFill/>
+          <a:ln/>
+        </p:spPr>
+        <p:txBody>
+          <a:bodyPr wrap="square" lIns="0" tIns="0" rIns="0" bIns="0" rtlCol="0" anchor="ctr"/>
+          <a:lstStyle/>
+          <a:p>
             <a:pPr algn="ctr" indent="0" marL="0">
               <a:buNone/>
             </a:pPr>
             <a:r>
-              <a:rPr lang="en-US" sz="1000" baseline="30000" dirty="0">
-                <a:solidFill>
-                  <a:srgbClr val="F6693D"/>
+              <a:rPr lang="en-US" sz="1100" b="1" dirty="0">
+                <a:solidFill>
+                  <a:srgbClr val="FFFFFF"/>
                 </a:solidFill>
                 <a:latin typeface="Arial Black" pitchFamily="34" charset="0"/>
                 <a:ea typeface="Arial Black" pitchFamily="34" charset="-122"/>
                 <a:cs typeface="Arial Black" pitchFamily="34" charset="-120"/>
               </a:rPr>
-              <a:t> 2</a:t>
-            </a:r>
-            <a:endParaRPr lang="en-US" sz="2800" dirty="0"/>
-          </a:p>
-        </p:txBody>
-      </p:sp>
-      <p:sp>
-        <p:nvSpPr>
-          <p:cNvPr id="18" name="Text 15"/>
-          <p:cNvSpPr/>
-          <p:nvPr/>
-        </p:nvSpPr>
-        <p:spPr>
-          <a:xfrm>
-            <a:off x="4846320" y="4187952"/>
-            <a:ext cx="1737360" cy="310896"/>
-          </a:xfrm>
-          <a:prstGeom prst="rect">
-            <a:avLst/>
-          </a:prstGeom>
-          <a:noFill/>
-          <a:ln/>
-        </p:spPr>
-        <p:txBody>
-          <a:bodyPr wrap="square" lIns="0" tIns="0" rIns="0" bIns="0" rtlCol="0" anchor="t"/>
+              <a:t>⚡</a:t>
+            </a:r>
+            <a:endParaRPr lang="en-US" sz="1100" dirty="0"/>
+          </a:p>
+        </p:txBody>
+      </p:sp>
+      <p:sp>
+        <p:nvSpPr>
+          <p:cNvPr id="19" name="Text 16"/>
+          <p:cNvSpPr/>
+          <p:nvPr/>
+        </p:nvSpPr>
+        <p:spPr>
+          <a:xfrm>
+            <a:off x="5303520" y="2770632"/>
+            <a:ext cx="3200400" cy="329184"/>
+          </a:xfrm>
+          <a:prstGeom prst="rect">
+            <a:avLst/>
+          </a:prstGeom>
+          <a:noFill/>
+          <a:ln/>
+        </p:spPr>
+        <p:txBody>
+          <a:bodyPr wrap="square" lIns="0" tIns="0" rIns="0" bIns="0" rtlCol="0" anchor="ctr"/>
+          <a:lstStyle/>
+          <a:p>
+            <a:pPr algn="l" indent="0" marL="0">
+              <a:buNone/>
+            </a:pPr>
+            <a:r>
+              <a:rPr lang="en-US" sz="950" dirty="0">
+                <a:solidFill>
+                  <a:srgbClr val="333333"/>
+                </a:solidFill>
+                <a:latin typeface="Arial" pitchFamily="34" charset="0"/>
+                <a:ea typeface="Arial" pitchFamily="34" charset="-122"/>
+                <a:cs typeface="Arial" pitchFamily="34" charset="-120"/>
+              </a:rPr>
+              <a:t>Data-center power demand keeps pulling forward; each new model generation wants more silicon.</a:t>
+            </a:r>
+            <a:endParaRPr lang="en-US" sz="950" dirty="0"/>
+          </a:p>
+        </p:txBody>
+      </p:sp>
+      <p:sp>
+        <p:nvSpPr>
+          <p:cNvPr id="20" name="Shape 17"/>
+          <p:cNvSpPr/>
+          <p:nvPr/>
+        </p:nvSpPr>
+        <p:spPr>
+          <a:xfrm>
+            <a:off x="4937760" y="3127248"/>
+            <a:ext cx="274320" cy="274320"/>
+          </a:xfrm>
+          <a:prstGeom prst="ellipse">
+            <a:avLst/>
+          </a:prstGeom>
+          <a:solidFill>
+            <a:srgbClr val="F6693D"/>
+          </a:solidFill>
+          <a:ln w="12700">
+            <a:solidFill>
+              <a:srgbClr val="F6693D"/>
+            </a:solidFill>
+            <a:prstDash val="solid"/>
+          </a:ln>
+        </p:spPr>
+      </p:sp>
+      <p:sp>
+        <p:nvSpPr>
+          <p:cNvPr id="21" name="Text 18"/>
+          <p:cNvSpPr/>
+          <p:nvPr/>
+        </p:nvSpPr>
+        <p:spPr>
+          <a:xfrm>
+            <a:off x="4937760" y="3127248"/>
+            <a:ext cx="274320" cy="274320"/>
+          </a:xfrm>
+          <a:prstGeom prst="rect">
+            <a:avLst/>
+          </a:prstGeom>
+          <a:noFill/>
+          <a:ln/>
+        </p:spPr>
+        <p:txBody>
+          <a:bodyPr wrap="square" lIns="0" tIns="0" rIns="0" bIns="0" rtlCol="0" anchor="ctr"/>
           <a:lstStyle/>
           <a:p>
             <a:pPr algn="ctr" indent="0" marL="0">
               <a:buNone/>
             </a:pPr>
             <a:r>
-              <a:rPr lang="en-US" sz="850" dirty="0">
-                <a:solidFill>
-                  <a:srgbClr val="666666"/>
-                </a:solidFill>
-                <a:latin typeface="Arial" pitchFamily="34" charset="0"/>
-                <a:ea typeface="Arial" pitchFamily="34" charset="-122"/>
-                <a:cs typeface="Arial" pitchFamily="34" charset="-120"/>
-              </a:rPr>
-              <a:t>Samsung HBM capacity lift in 2026</a:t>
-            </a:r>
-            <a:endParaRPr lang="en-US" sz="850" dirty="0"/>
-          </a:p>
-        </p:txBody>
-      </p:sp>
-      <p:sp>
-        <p:nvSpPr>
-          <p:cNvPr id="19" name="Text 16"/>
-          <p:cNvSpPr/>
-          <p:nvPr/>
-        </p:nvSpPr>
-        <p:spPr>
-          <a:xfrm>
-            <a:off x="4864608" y="4517136"/>
-            <a:ext cx="1700784" cy="658368"/>
-          </a:xfrm>
-          <a:prstGeom prst="rect">
-            <a:avLst/>
-          </a:prstGeom>
-          <a:noFill/>
-          <a:ln/>
-        </p:spPr>
-        <p:txBody>
-          <a:bodyPr wrap="square" lIns="0" tIns="0" rIns="0" bIns="0" rtlCol="0" anchor="t"/>
-          <a:lstStyle/>
-          <a:p>
-            <a:pPr algn="ctr" indent="0" marL="0">
-              <a:buNone/>
-            </a:pPr>
-            <a:r>
-              <a:rPr lang="en-US" sz="900" dirty="0">
+              <a:rPr lang="en-US" sz="1100" b="1" dirty="0">
+                <a:solidFill>
+                  <a:srgbClr val="FFFFFF"/>
+                </a:solidFill>
+                <a:latin typeface="Arial Black" pitchFamily="34" charset="0"/>
+                <a:ea typeface="Arial Black" pitchFamily="34" charset="-122"/>
+                <a:cs typeface="Arial Black" pitchFamily="34" charset="-120"/>
+              </a:rPr>
+              <a:t>↑</a:t>
+            </a:r>
+            <a:endParaRPr lang="en-US" sz="1100" dirty="0"/>
+          </a:p>
+        </p:txBody>
+      </p:sp>
+      <p:sp>
+        <p:nvSpPr>
+          <p:cNvPr id="22" name="Text 19"/>
+          <p:cNvSpPr/>
+          <p:nvPr/>
+        </p:nvSpPr>
+        <p:spPr>
+          <a:xfrm>
+            <a:off x="5303520" y="3099816"/>
+            <a:ext cx="3200400" cy="329184"/>
+          </a:xfrm>
+          <a:prstGeom prst="rect">
+            <a:avLst/>
+          </a:prstGeom>
+          <a:noFill/>
+          <a:ln/>
+        </p:spPr>
+        <p:txBody>
+          <a:bodyPr wrap="square" lIns="0" tIns="0" rIns="0" bIns="0" rtlCol="0" anchor="ctr"/>
+          <a:lstStyle/>
+          <a:p>
+            <a:pPr algn="l" indent="0" marL="0">
+              <a:buNone/>
+            </a:pPr>
+            <a:r>
+              <a:rPr lang="en-US" sz="950" dirty="0">
                 <a:solidFill>
                   <a:srgbClr val="333333"/>
                 </a:solidFill>
@@ -11393,22 +11468,22 @@
                 <a:ea typeface="Arial" pitchFamily="34" charset="-122"/>
                 <a:cs typeface="Arial" pitchFamily="34" charset="-120"/>
               </a:rPr>
-              <a:t>HBM sold out through 2026 as hyperscalers lock in every GB of AI memory.</a:t>
-            </a:r>
-            <a:endParaRPr lang="en-US" sz="900" dirty="0"/>
-          </a:p>
-        </p:txBody>
-      </p:sp>
-      <p:sp>
-        <p:nvSpPr>
-          <p:cNvPr id="20" name="Shape 17"/>
-          <p:cNvSpPr/>
-          <p:nvPr/>
-        </p:nvSpPr>
-        <p:spPr>
-          <a:xfrm>
-            <a:off x="6766560" y="3200400"/>
-            <a:ext cx="1920240" cy="2011680"/>
+              <a:t>ASPs and margins are expanding across memory and advanced-node logic.</a:t>
+            </a:r>
+            <a:endParaRPr lang="en-US" sz="950" dirty="0"/>
+          </a:p>
+        </p:txBody>
+      </p:sp>
+      <p:sp>
+        <p:nvSpPr>
+          <p:cNvPr id="23" name="Shape 20"/>
+          <p:cNvSpPr/>
+          <p:nvPr/>
+        </p:nvSpPr>
+        <p:spPr>
+          <a:xfrm>
+            <a:off x="4754880" y="3520440"/>
+            <a:ext cx="3931920" cy="1645920"/>
           </a:xfrm>
           <a:prstGeom prst="rect">
             <a:avLst/>
@@ -11426,14 +11501,14 @@
       </p:sp>
       <p:sp>
         <p:nvSpPr>
-          <p:cNvPr id="21" name="Shape 18"/>
-          <p:cNvSpPr/>
-          <p:nvPr/>
-        </p:nvSpPr>
-        <p:spPr>
-          <a:xfrm>
-            <a:off x="6766560" y="3200400"/>
-            <a:ext cx="1920240" cy="54864"/>
+          <p:cNvPr id="24" name="Shape 21"/>
+          <p:cNvSpPr/>
+          <p:nvPr/>
+        </p:nvSpPr>
+        <p:spPr>
+          <a:xfrm>
+            <a:off x="4754880" y="3520440"/>
+            <a:ext cx="3931920" cy="54864"/>
           </a:xfrm>
           <a:prstGeom prst="rect">
             <a:avLst/>
@@ -11451,14 +11526,14 @@
       </p:sp>
       <p:sp>
         <p:nvSpPr>
-          <p:cNvPr id="22" name="Text 19"/>
-          <p:cNvSpPr/>
-          <p:nvPr/>
-        </p:nvSpPr>
-        <p:spPr>
-          <a:xfrm>
-            <a:off x="6766560" y="3328416"/>
-            <a:ext cx="1920240" cy="237744"/>
+          <p:cNvPr id="25" name="Text 22"/>
+          <p:cNvSpPr/>
+          <p:nvPr/>
+        </p:nvSpPr>
+        <p:spPr>
+          <a:xfrm>
+            <a:off x="4937760" y="3611880"/>
+            <a:ext cx="3566160" cy="182880"/>
           </a:xfrm>
           <a:prstGeom prst="rect">
             <a:avLst/>
@@ -11470,142 +11545,373 @@
           <a:bodyPr wrap="square" lIns="0" tIns="0" rIns="0" bIns="0" rtlCol="0" anchor="ctr"/>
           <a:lstStyle/>
           <a:p>
+            <a:pPr algn="l" indent="0" marL="0">
+              <a:buNone/>
+            </a:pPr>
+            <a:r>
+              <a:rPr lang="en-US" sz="1000" b="1" spc="300" kern="0" dirty="0">
+                <a:solidFill>
+                  <a:srgbClr val="666666"/>
+                </a:solidFill>
+                <a:latin typeface="Arial" pitchFamily="34" charset="0"/>
+                <a:ea typeface="Arial" pitchFamily="34" charset="-122"/>
+                <a:cs typeface="Arial" pitchFamily="34" charset="-120"/>
+              </a:rPr>
+              <a:t>WHY SOFTWARE IS DOWN</a:t>
+            </a:r>
+            <a:endParaRPr lang="en-US" sz="1000" dirty="0"/>
+          </a:p>
+        </p:txBody>
+      </p:sp>
+      <p:sp>
+        <p:nvSpPr>
+          <p:cNvPr id="26" name="Text 23"/>
+          <p:cNvSpPr/>
+          <p:nvPr/>
+        </p:nvSpPr>
+        <p:spPr>
+          <a:xfrm>
+            <a:off x="4937760" y="3794760"/>
+            <a:ext cx="3566160" cy="347472"/>
+          </a:xfrm>
+          <a:prstGeom prst="rect">
+            <a:avLst/>
+          </a:prstGeom>
+          <a:noFill/>
+          <a:ln/>
+        </p:spPr>
+        <p:txBody>
+          <a:bodyPr wrap="square" lIns="0" tIns="0" rIns="0" bIns="0" rtlCol="0" anchor="ctr"/>
+          <a:lstStyle/>
+          <a:p>
+            <a:pPr algn="l" indent="0" marL="0">
+              <a:buNone/>
+            </a:pPr>
+            <a:r>
+              <a:rPr lang="en-US" sz="1200" b="1" dirty="0">
+                <a:solidFill>
+                  <a:srgbClr val="333333"/>
+                </a:solidFill>
+                <a:latin typeface="Arial" pitchFamily="34" charset="0"/>
+                <a:ea typeface="Arial" pitchFamily="34" charset="-122"/>
+                <a:cs typeface="Arial" pitchFamily="34" charset="-120"/>
+              </a:rPr>
+              <a:t>Per-seat pricing is under attack.</a:t>
+            </a:r>
+            <a:endParaRPr lang="en-US" sz="1200" dirty="0"/>
+          </a:p>
+        </p:txBody>
+      </p:sp>
+      <p:sp>
+        <p:nvSpPr>
+          <p:cNvPr id="27" name="Shape 24"/>
+          <p:cNvSpPr/>
+          <p:nvPr/>
+        </p:nvSpPr>
+        <p:spPr>
+          <a:xfrm>
+            <a:off x="4937760" y="4206240"/>
+            <a:ext cx="274320" cy="274320"/>
+          </a:xfrm>
+          <a:prstGeom prst="ellipse">
+            <a:avLst/>
+          </a:prstGeom>
+          <a:solidFill>
+            <a:srgbClr val="CC0000"/>
+          </a:solidFill>
+          <a:ln w="12700">
+            <a:solidFill>
+              <a:srgbClr val="CC0000"/>
+            </a:solidFill>
+            <a:prstDash val="solid"/>
+          </a:ln>
+        </p:spPr>
+      </p:sp>
+      <p:sp>
+        <p:nvSpPr>
+          <p:cNvPr id="28" name="Text 25"/>
+          <p:cNvSpPr/>
+          <p:nvPr/>
+        </p:nvSpPr>
+        <p:spPr>
+          <a:xfrm>
+            <a:off x="4937760" y="4206240"/>
+            <a:ext cx="274320" cy="274320"/>
+          </a:xfrm>
+          <a:prstGeom prst="rect">
+            <a:avLst/>
+          </a:prstGeom>
+          <a:noFill/>
+          <a:ln/>
+        </p:spPr>
+        <p:txBody>
+          <a:bodyPr wrap="square" lIns="0" tIns="0" rIns="0" bIns="0" rtlCol="0" anchor="ctr"/>
+          <a:lstStyle/>
+          <a:p>
             <a:pPr algn="ctr" indent="0" marL="0">
               <a:buNone/>
             </a:pPr>
             <a:r>
-              <a:rPr lang="en-US" sz="850" b="1" spc="200" kern="0" dirty="0">
-                <a:solidFill>
-                  <a:srgbClr val="333333"/>
-                </a:solidFill>
-                <a:latin typeface="Arial" pitchFamily="34" charset="0"/>
-                <a:ea typeface="Arial" pitchFamily="34" charset="-122"/>
-                <a:cs typeface="Arial" pitchFamily="34" charset="-120"/>
-              </a:rPr>
-              <a:t>WHY SOFTWARE IS DOWN</a:t>
-            </a:r>
-            <a:endParaRPr lang="en-US" sz="850" dirty="0"/>
-          </a:p>
-        </p:txBody>
-      </p:sp>
-      <p:sp>
-        <p:nvSpPr>
-          <p:cNvPr id="23" name="Text 20"/>
-          <p:cNvSpPr/>
-          <p:nvPr/>
-        </p:nvSpPr>
-        <p:spPr>
-          <a:xfrm>
-            <a:off x="6766560" y="3602736"/>
-            <a:ext cx="1920240" cy="548640"/>
-          </a:xfrm>
-          <a:prstGeom prst="rect">
-            <a:avLst/>
-          </a:prstGeom>
-          <a:noFill/>
-          <a:ln/>
-        </p:spPr>
-        <p:txBody>
-          <a:bodyPr wrap="square" lIns="0" tIns="0" rIns="0" bIns="0" rtlCol="0" anchor="ctr"/>
-          <a:lstStyle/>
-          <a:p>
-            <a:pPr algn="ctr" indent="0" marL="0">
-              <a:buNone/>
-            </a:pPr>
-            <a:r>
-              <a:rPr lang="en-US" sz="2800" b="1" dirty="0">
-                <a:solidFill>
-                  <a:srgbClr val="CC0000"/>
+              <a:rPr lang="en-US" sz="1100" b="1" dirty="0">
+                <a:solidFill>
+                  <a:srgbClr val="FFFFFF"/>
                 </a:solidFill>
                 <a:latin typeface="Arial Black" pitchFamily="34" charset="0"/>
                 <a:ea typeface="Arial Black" pitchFamily="34" charset="-122"/>
                 <a:cs typeface="Arial Black" pitchFamily="34" charset="-120"/>
               </a:rPr>
-              <a:t>−21%</a:t>
-            </a:r>
+              <a:t>◉</a:t>
+            </a:r>
+            <a:endParaRPr lang="en-US" sz="1100" dirty="0"/>
+          </a:p>
+        </p:txBody>
+      </p:sp>
+      <p:sp>
+        <p:nvSpPr>
+          <p:cNvPr id="29" name="Text 26"/>
+          <p:cNvSpPr/>
+          <p:nvPr/>
+        </p:nvSpPr>
+        <p:spPr>
+          <a:xfrm>
+            <a:off x="5303520" y="4178808"/>
+            <a:ext cx="3200400" cy="329184"/>
+          </a:xfrm>
+          <a:prstGeom prst="rect">
+            <a:avLst/>
+          </a:prstGeom>
+          <a:noFill/>
+          <a:ln/>
+        </p:spPr>
+        <p:txBody>
+          <a:bodyPr wrap="square" lIns="0" tIns="0" rIns="0" bIns="0" rtlCol="0" anchor="ctr"/>
+          <a:lstStyle/>
+          <a:p>
+            <a:pPr algn="l" indent="0" marL="0">
+              <a:buNone/>
+            </a:pPr>
+            <a:r>
+              <a:rPr lang="en-US" sz="950" dirty="0">
+                <a:solidFill>
+                  <a:srgbClr val="333333"/>
+                </a:solidFill>
+                <a:latin typeface="Arial" pitchFamily="34" charset="0"/>
+                <a:ea typeface="Arial" pitchFamily="34" charset="-122"/>
+                <a:cs typeface="Arial" pitchFamily="34" charset="-120"/>
+              </a:rPr>
+              <a:t>Agentic AI threatens per-seat pricing; 2026 CIO surveys flag displacement risk on horizontal SaaS.</a:t>
+            </a:r>
+            <a:endParaRPr lang="en-US" sz="950" dirty="0"/>
+          </a:p>
+        </p:txBody>
+      </p:sp>
+      <p:sp>
+        <p:nvSpPr>
+          <p:cNvPr id="30" name="Shape 27"/>
+          <p:cNvSpPr/>
+          <p:nvPr/>
+        </p:nvSpPr>
+        <p:spPr>
+          <a:xfrm>
+            <a:off x="4937760" y="4535424"/>
+            <a:ext cx="274320" cy="274320"/>
+          </a:xfrm>
+          <a:prstGeom prst="ellipse">
+            <a:avLst/>
+          </a:prstGeom>
+          <a:solidFill>
+            <a:srgbClr val="CC0000"/>
+          </a:solidFill>
+          <a:ln w="12700">
+            <a:solidFill>
+              <a:srgbClr val="CC0000"/>
+            </a:solidFill>
+            <a:prstDash val="solid"/>
+          </a:ln>
+        </p:spPr>
+      </p:sp>
+      <p:sp>
+        <p:nvSpPr>
+          <p:cNvPr id="31" name="Text 28"/>
+          <p:cNvSpPr/>
+          <p:nvPr/>
+        </p:nvSpPr>
+        <p:spPr>
+          <a:xfrm>
+            <a:off x="4937760" y="4535424"/>
+            <a:ext cx="274320" cy="274320"/>
+          </a:xfrm>
+          <a:prstGeom prst="rect">
+            <a:avLst/>
+          </a:prstGeom>
+          <a:noFill/>
+          <a:ln/>
+        </p:spPr>
+        <p:txBody>
+          <a:bodyPr wrap="square" lIns="0" tIns="0" rIns="0" bIns="0" rtlCol="0" anchor="ctr"/>
+          <a:lstStyle/>
+          <a:p>
             <a:pPr algn="ctr" indent="0" marL="0">
               <a:buNone/>
             </a:pPr>
             <a:r>
-              <a:rPr lang="en-US" sz="1000" baseline="30000" dirty="0">
-                <a:solidFill>
-                  <a:srgbClr val="CC0000"/>
+              <a:rPr lang="en-US" sz="1100" b="1" dirty="0">
+                <a:solidFill>
+                  <a:srgbClr val="FFFFFF"/>
                 </a:solidFill>
                 <a:latin typeface="Arial Black" pitchFamily="34" charset="0"/>
                 <a:ea typeface="Arial Black" pitchFamily="34" charset="-122"/>
                 <a:cs typeface="Arial Black" pitchFamily="34" charset="-120"/>
               </a:rPr>
-              <a:t> 3</a:t>
-            </a:r>
-            <a:endParaRPr lang="en-US" sz="2800" dirty="0"/>
-          </a:p>
-        </p:txBody>
-      </p:sp>
-      <p:sp>
-        <p:nvSpPr>
-          <p:cNvPr id="24" name="Text 21"/>
-          <p:cNvSpPr/>
-          <p:nvPr/>
-        </p:nvSpPr>
-        <p:spPr>
-          <a:xfrm>
-            <a:off x="6858000" y="4187952"/>
-            <a:ext cx="1737360" cy="310896"/>
-          </a:xfrm>
-          <a:prstGeom prst="rect">
-            <a:avLst/>
-          </a:prstGeom>
-          <a:noFill/>
-          <a:ln/>
-        </p:spPr>
-        <p:txBody>
-          <a:bodyPr wrap="square" lIns="0" tIns="0" rIns="0" bIns="0" rtlCol="0" anchor="t"/>
+              <a:t>✕</a:t>
+            </a:r>
+            <a:endParaRPr lang="en-US" sz="1100" dirty="0"/>
+          </a:p>
+        </p:txBody>
+      </p:sp>
+      <p:sp>
+        <p:nvSpPr>
+          <p:cNvPr id="32" name="Text 29"/>
+          <p:cNvSpPr/>
+          <p:nvPr/>
+        </p:nvSpPr>
+        <p:spPr>
+          <a:xfrm>
+            <a:off x="5303520" y="4507992"/>
+            <a:ext cx="3200400" cy="329184"/>
+          </a:xfrm>
+          <a:prstGeom prst="rect">
+            <a:avLst/>
+          </a:prstGeom>
+          <a:noFill/>
+          <a:ln/>
+        </p:spPr>
+        <p:txBody>
+          <a:bodyPr wrap="square" lIns="0" tIns="0" rIns="0" bIns="0" rtlCol="0" anchor="ctr"/>
+          <a:lstStyle/>
+          <a:p>
+            <a:pPr algn="l" indent="0" marL="0">
+              <a:buNone/>
+            </a:pPr>
+            <a:r>
+              <a:rPr lang="en-US" sz="950" dirty="0">
+                <a:solidFill>
+                  <a:srgbClr val="333333"/>
+                </a:solidFill>
+                <a:latin typeface="Arial" pitchFamily="34" charset="0"/>
+                <a:ea typeface="Arial" pitchFamily="34" charset="-122"/>
+                <a:cs typeface="Arial" pitchFamily="34" charset="-120"/>
+              </a:rPr>
+              <a:t>Public SaaS multiples re-rated lower as buyers underwrite slower seat growth and pricing pressure.</a:t>
+            </a:r>
+            <a:pPr algn="l" indent="0" marL="0">
+              <a:buNone/>
+            </a:pPr>
+            <a:r>
+              <a:rPr lang="en-US" sz="700" baseline="30000" dirty="0">
+                <a:solidFill>
+                  <a:srgbClr val="CC0000"/>
+                </a:solidFill>
+                <a:latin typeface="Arial" pitchFamily="34" charset="0"/>
+                <a:ea typeface="Arial" pitchFamily="34" charset="-122"/>
+                <a:cs typeface="Arial" pitchFamily="34" charset="-120"/>
+              </a:rPr>
+              <a:t> 2</a:t>
+            </a:r>
+            <a:endParaRPr lang="en-US" sz="950" dirty="0"/>
+          </a:p>
+        </p:txBody>
+      </p:sp>
+      <p:sp>
+        <p:nvSpPr>
+          <p:cNvPr id="33" name="Shape 30"/>
+          <p:cNvSpPr/>
+          <p:nvPr/>
+        </p:nvSpPr>
+        <p:spPr>
+          <a:xfrm>
+            <a:off x="4937760" y="4864608"/>
+            <a:ext cx="274320" cy="274320"/>
+          </a:xfrm>
+          <a:prstGeom prst="ellipse">
+            <a:avLst/>
+          </a:prstGeom>
+          <a:solidFill>
+            <a:srgbClr val="CC0000"/>
+          </a:solidFill>
+          <a:ln w="12700">
+            <a:solidFill>
+              <a:srgbClr val="CC0000"/>
+            </a:solidFill>
+            <a:prstDash val="solid"/>
+          </a:ln>
+        </p:spPr>
+      </p:sp>
+      <p:sp>
+        <p:nvSpPr>
+          <p:cNvPr id="34" name="Text 31"/>
+          <p:cNvSpPr/>
+          <p:nvPr/>
+        </p:nvSpPr>
+        <p:spPr>
+          <a:xfrm>
+            <a:off x="4937760" y="4864608"/>
+            <a:ext cx="274320" cy="274320"/>
+          </a:xfrm>
+          <a:prstGeom prst="rect">
+            <a:avLst/>
+          </a:prstGeom>
+          <a:noFill/>
+          <a:ln/>
+        </p:spPr>
+        <p:txBody>
+          <a:bodyPr wrap="square" lIns="0" tIns="0" rIns="0" bIns="0" rtlCol="0" anchor="ctr"/>
           <a:lstStyle/>
           <a:p>
             <a:pPr algn="ctr" indent="0" marL="0">
               <a:buNone/>
             </a:pPr>
             <a:r>
-              <a:rPr lang="en-US" sz="850" dirty="0">
-                <a:solidFill>
-                  <a:srgbClr val="666666"/>
-                </a:solidFill>
-                <a:latin typeface="Arial" pitchFamily="34" charset="0"/>
-                <a:ea typeface="Arial" pitchFamily="34" charset="-122"/>
-                <a:cs typeface="Arial" pitchFamily="34" charset="-120"/>
-              </a:rPr>
-              <a:t>Public SaaS EV/Revenue, Q4'25 → Q1'26</a:t>
-            </a:r>
-            <a:endParaRPr lang="en-US" sz="850" dirty="0"/>
-          </a:p>
-        </p:txBody>
-      </p:sp>
-      <p:sp>
-        <p:nvSpPr>
-          <p:cNvPr id="25" name="Text 22"/>
-          <p:cNvSpPr/>
-          <p:nvPr/>
-        </p:nvSpPr>
-        <p:spPr>
-          <a:xfrm>
-            <a:off x="6876288" y="4517136"/>
-            <a:ext cx="1700784" cy="658368"/>
-          </a:xfrm>
-          <a:prstGeom prst="rect">
-            <a:avLst/>
-          </a:prstGeom>
-          <a:noFill/>
-          <a:ln/>
-        </p:spPr>
-        <p:txBody>
-          <a:bodyPr wrap="square" lIns="0" tIns="0" rIns="0" bIns="0" rtlCol="0" anchor="t"/>
-          <a:lstStyle/>
-          <a:p>
-            <a:pPr algn="ctr" indent="0" marL="0">
-              <a:buNone/>
-            </a:pPr>
-            <a:r>
-              <a:rPr lang="en-US" sz="900" dirty="0">
+              <a:rPr lang="en-US" sz="1100" b="1" dirty="0">
+                <a:solidFill>
+                  <a:srgbClr val="FFFFFF"/>
+                </a:solidFill>
+                <a:latin typeface="Arial Black" pitchFamily="34" charset="0"/>
+                <a:ea typeface="Arial Black" pitchFamily="34" charset="-122"/>
+                <a:cs typeface="Arial Black" pitchFamily="34" charset="-120"/>
+              </a:rPr>
+              <a:t>↓</a:t>
+            </a:r>
+            <a:endParaRPr lang="en-US" sz="1100" dirty="0"/>
+          </a:p>
+        </p:txBody>
+      </p:sp>
+      <p:sp>
+        <p:nvSpPr>
+          <p:cNvPr id="35" name="Text 32"/>
+          <p:cNvSpPr/>
+          <p:nvPr/>
+        </p:nvSpPr>
+        <p:spPr>
+          <a:xfrm>
+            <a:off x="5303520" y="4837176"/>
+            <a:ext cx="3200400" cy="329184"/>
+          </a:xfrm>
+          <a:prstGeom prst="rect">
+            <a:avLst/>
+          </a:prstGeom>
+          <a:noFill/>
+          <a:ln/>
+        </p:spPr>
+        <p:txBody>
+          <a:bodyPr wrap="square" lIns="0" tIns="0" rIns="0" bIns="0" rtlCol="0" anchor="ctr"/>
+          <a:lstStyle/>
+          <a:p>
+            <a:pPr algn="l" indent="0" marL="0">
+              <a:buNone/>
+            </a:pPr>
+            <a:r>
+              <a:rPr lang="en-US" sz="950" dirty="0">
                 <a:solidFill>
                   <a:srgbClr val="333333"/>
                 </a:solidFill>
@@ -11613,15 +11919,15 @@
                 <a:ea typeface="Arial" pitchFamily="34" charset="-122"/>
                 <a:cs typeface="Arial" pitchFamily="34" charset="-120"/>
               </a:rPr>
-              <a:t>Agentic AI threatens seat pricing; 2026 CIO surveys flag displacement risk.</a:t>
-            </a:r>
-            <a:endParaRPr lang="en-US" sz="900" dirty="0"/>
-          </a:p>
-        </p:txBody>
-      </p:sp>
-      <p:sp>
-        <p:nvSpPr>
-          <p:cNvPr id="26" name="Text 23"/>
+              <a:t>Renewals slowing and deal cycles stretching as customers wait for vendor AI roadmaps to settle.</a:t>
+            </a:r>
+            <a:endParaRPr lang="en-US" sz="950" dirty="0"/>
+          </a:p>
+        </p:txBody>
+      </p:sp>
+      <p:sp>
+        <p:nvSpPr>
+          <p:cNvPr id="36" name="Text 33"/>
           <p:cNvSpPr/>
           <p:nvPr/>
         </p:nvSpPr>
@@ -11652,7 +11958,7 @@
                 <a:ea typeface="Arial" pitchFamily="34" charset="-122"/>
                 <a:cs typeface="Arial" pitchFamily="34" charset="-120"/>
               </a:rPr>
-              <a:t>BDC credit indices down ~5%</a:t>
+              <a:t>BDC credit indices are softening</a:t>
             </a:r>
             <a:pPr algn="ctr" indent="0" marL="0">
               <a:buNone/>
@@ -11666,7 +11972,7 @@
                 <a:ea typeface="Arial" pitchFamily="34" charset="-122"/>
                 <a:cs typeface="Arial" pitchFamily="34" charset="-120"/>
               </a:rPr>
-              <a:t> 4</a:t>
+              <a:t> 3</a:t>
             </a:r>
             <a:pPr algn="ctr" indent="0" marL="0">
               <a:buNone/>
@@ -11680,7 +11986,7 @@
                 <a:ea typeface="Arial" pitchFamily="34" charset="-122"/>
                 <a:cs typeface="Arial" pitchFamily="34" charset="-120"/>
               </a:rPr>
-              <a:t> YTD — early signs the sell-off is bleeding into private credit and PE-held SaaS.</a:t>
+              <a:t> — the first sign the SaaS sell-off is bleeding into private credit and PE-held software.</a:t>
             </a:r>
             <a:endParaRPr lang="en-US" sz="950" dirty="0"/>
           </a:p>
@@ -11688,7 +11994,7 @@
       </p:sp>
       <p:sp>
         <p:nvSpPr>
-          <p:cNvPr id="27" name="Text 24"/>
+          <p:cNvPr id="37" name="Text 34"/>
           <p:cNvSpPr/>
           <p:nvPr/>
         </p:nvSpPr>
@@ -11733,7 +12039,7 @@
                 <a:ea typeface="Arial" pitchFamily="34" charset="-122"/>
                 <a:cs typeface="Arial" pitchFamily="34" charset="-120"/>
               </a:rPr>
-              <a:t>Yahoo Finance, Apr 17, 2026 (SOX, IGV), </a:t>
+              <a:t>TrendForce via Data Center Dynamics, 2026, </a:t>
             </a:r>
             <a:pPr indent="0" marL="0">
               <a:buNone/>
@@ -11761,7 +12067,7 @@
                 <a:ea typeface="Arial" pitchFamily="34" charset="-122"/>
                 <a:cs typeface="Arial" pitchFamily="34" charset="-120"/>
               </a:rPr>
-              <a:t>TrendForce via Data Center Dynamics, 2026, </a:t>
+              <a:t>multiples.vc public software multiples, Apr 2026, </a:t>
             </a:r>
             <a:pPr indent="0" marL="0">
               <a:buNone/>
@@ -11789,34 +12095,6 @@
                 <a:ea typeface="Arial" pitchFamily="34" charset="-122"/>
                 <a:cs typeface="Arial" pitchFamily="34" charset="-120"/>
               </a:rPr>
-              <a:t>multiples.vc public software multiples, Apr 2026, </a:t>
-            </a:r>
-            <a:pPr indent="0" marL="0">
-              <a:buNone/>
-            </a:pPr>
-            <a:r>
-              <a:rPr lang="en-US" sz="700" b="1" dirty="0">
-                <a:solidFill>
-                  <a:srgbClr val="999999"/>
-                </a:solidFill>
-                <a:latin typeface="Arial" pitchFamily="34" charset="0"/>
-                <a:ea typeface="Arial" pitchFamily="34" charset="-122"/>
-                <a:cs typeface="Arial" pitchFamily="34" charset="-120"/>
-              </a:rPr>
-              <a:t>(4) </a:t>
-            </a:r>
-            <a:pPr indent="0" marL="0">
-              <a:buNone/>
-            </a:pPr>
-            <a:r>
-              <a:rPr lang="en-US" sz="700" dirty="0">
-                <a:solidFill>
-                  <a:srgbClr val="999999"/>
-                </a:solidFill>
-                <a:latin typeface="Arial" pitchFamily="34" charset="0"/>
-                <a:ea typeface="Arial" pitchFamily="34" charset="-122"/>
-                <a:cs typeface="Arial" pitchFamily="34" charset="-120"/>
-              </a:rPr>
               <a:t>VanEck BIZD / Yahoo Finance.</a:t>
             </a:r>
             <a:endParaRPr lang="en-US" sz="700" dirty="0"/>
@@ -11825,7 +12103,7 @@
       </p:sp>
       <p:sp>
         <p:nvSpPr>
-          <p:cNvPr id="28" name="Shape 25"/>
+          <p:cNvPr id="38" name="Shape 35"/>
           <p:cNvSpPr/>
           <p:nvPr/>
         </p:nvSpPr>
@@ -11850,7 +12128,7 @@
       </p:sp>
       <p:sp>
         <p:nvSpPr>
-          <p:cNvPr id="29" name="Text 26"/>
+          <p:cNvPr id="39" name="Text 36"/>
           <p:cNvSpPr/>
           <p:nvPr/>
         </p:nvSpPr>
@@ -11889,7 +12167,7 @@
       </p:sp>
       <p:sp>
         <p:nvSpPr>
-          <p:cNvPr id="30" name="Text 27"/>
+          <p:cNvPr id="40" name="Text 37"/>
           <p:cNvSpPr/>
           <p:nvPr/>
         </p:nvSpPr>

--- a/ai-markets-deck.pptx
+++ b/ai-markets-deck.pptx
@@ -11958,35 +11958,7 @@
                 <a:ea typeface="Arial" pitchFamily="34" charset="-122"/>
                 <a:cs typeface="Arial" pitchFamily="34" charset="-120"/>
               </a:rPr>
-              <a:t>BDC credit indices are softening</a:t>
-            </a:r>
-            <a:pPr algn="ctr" indent="0" marL="0">
-              <a:buNone/>
-            </a:pPr>
-            <a:r>
-              <a:rPr lang="en-US" sz="700" i="1" baseline="30000" dirty="0">
-                <a:solidFill>
-                  <a:srgbClr val="666666"/>
-                </a:solidFill>
-                <a:latin typeface="Arial" pitchFamily="34" charset="0"/>
-                <a:ea typeface="Arial" pitchFamily="34" charset="-122"/>
-                <a:cs typeface="Arial" pitchFamily="34" charset="-120"/>
-              </a:rPr>
-              <a:t> 3</a:t>
-            </a:r>
-            <a:pPr algn="ctr" indent="0" marL="0">
-              <a:buNone/>
-            </a:pPr>
-            <a:r>
-              <a:rPr lang="en-US" sz="950" i="1" dirty="0">
-                <a:solidFill>
-                  <a:srgbClr val="666666"/>
-                </a:solidFill>
-                <a:latin typeface="Arial" pitchFamily="34" charset="0"/>
-                <a:ea typeface="Arial" pitchFamily="34" charset="-122"/>
-                <a:cs typeface="Arial" pitchFamily="34" charset="-120"/>
-              </a:rPr>
-              <a:t> — the first sign the SaaS sell-off is bleeding into private credit and PE-held software.</a:t>
+              <a:t>One theme, two outcomes — and software's pain is now bleeding into private equity and private credit, both anchored in SaaS.</a:t>
             </a:r>
             <a:endParaRPr lang="en-US" sz="950" dirty="0"/>
           </a:p>
@@ -12067,35 +12039,7 @@
                 <a:ea typeface="Arial" pitchFamily="34" charset="-122"/>
                 <a:cs typeface="Arial" pitchFamily="34" charset="-120"/>
               </a:rPr>
-              <a:t>multiples.vc public software multiples, Apr 2026, </a:t>
-            </a:r>
-            <a:pPr indent="0" marL="0">
-              <a:buNone/>
-            </a:pPr>
-            <a:r>
-              <a:rPr lang="en-US" sz="700" b="1" dirty="0">
-                <a:solidFill>
-                  <a:srgbClr val="999999"/>
-                </a:solidFill>
-                <a:latin typeface="Arial" pitchFamily="34" charset="0"/>
-                <a:ea typeface="Arial" pitchFamily="34" charset="-122"/>
-                <a:cs typeface="Arial" pitchFamily="34" charset="-120"/>
-              </a:rPr>
-              <a:t>(3) </a:t>
-            </a:r>
-            <a:pPr indent="0" marL="0">
-              <a:buNone/>
-            </a:pPr>
-            <a:r>
-              <a:rPr lang="en-US" sz="700" dirty="0">
-                <a:solidFill>
-                  <a:srgbClr val="999999"/>
-                </a:solidFill>
-                <a:latin typeface="Arial" pitchFamily="34" charset="0"/>
-                <a:ea typeface="Arial" pitchFamily="34" charset="-122"/>
-                <a:cs typeface="Arial" pitchFamily="34" charset="-120"/>
-              </a:rPr>
-              <a:t>VanEck BIZD / Yahoo Finance.</a:t>
+              <a:t>multiples.vc public software multiples, Apr 2026.</a:t>
             </a:r>
             <a:endParaRPr lang="en-US" sz="700" dirty="0"/>
           </a:p>

--- a/ai-markets-deck.pptx
+++ b/ai-markets-deck.pptx
@@ -14084,7 +14084,7 @@
                 <a:ea typeface="Arial Black" pitchFamily="34" charset="-122"/>
                 <a:cs typeface="Arial Black" pitchFamily="34" charset="-120"/>
               </a:rPr>
-              <a:t>Supply chain fragility.</a:t>
+              <a:t>Four single points of failure.</a:t>
             </a:r>
             <a:endParaRPr lang="en-US" sz="2400" dirty="0"/>
           </a:p>
@@ -14123,7 +14123,7 @@
                 <a:ea typeface="Arial" pitchFamily="34" charset="-122"/>
                 <a:cs typeface="Arial" pitchFamily="34" charset="-120"/>
               </a:rPr>
-              <a:t>Four countries control the advanced semiconductor stack. US reshoring is real but slow — most leading-edge fabs come online 2027+.</a:t>
+              <a:t>Three of the four sit in Asia, and all four are single-sourced. US reshoring is real — but most leading-edge capacity doesn't ship until 2027+.</a:t>
             </a:r>
             <a:endParaRPr lang="en-US" sz="1350" dirty="0"/>
           </a:p>
@@ -14160,361 +14160,18 @@
         </p:nvSpPr>
         <p:spPr>
           <a:xfrm>
-            <a:off x="457200" y="1691640"/>
-            <a:ext cx="3200400" cy="3017520"/>
+            <a:off x="457200" y="1783080"/>
+            <a:ext cx="1920240" cy="274320"/>
           </a:xfrm>
           <a:prstGeom prst="rect">
             <a:avLst/>
           </a:prstGeom>
           <a:solidFill>
-            <a:srgbClr val="EEEEEE"/>
-          </a:solidFill>
-          <a:ln w="9525">
-            <a:solidFill>
-              <a:srgbClr val="BBBBBB"/>
-            </a:solidFill>
-            <a:prstDash val="dash"/>
-          </a:ln>
-        </p:spPr>
-      </p:sp>
-      <p:sp>
-        <p:nvSpPr>
-          <p:cNvPr id="8" name="Text 6"/>
-          <p:cNvSpPr/>
-          <p:nvPr/>
-        </p:nvSpPr>
-        <p:spPr>
-          <a:xfrm>
-            <a:off x="548640" y="1691640"/>
-            <a:ext cx="3017520" cy="3017520"/>
-          </a:xfrm>
-          <a:prstGeom prst="rect">
-            <a:avLst/>
-          </a:prstGeom>
-          <a:noFill/>
-          <a:ln/>
-        </p:spPr>
-        <p:txBody>
-          <a:bodyPr wrap="square" lIns="0" tIns="0" rIns="0" bIns="0" rtlCol="0" anchor="ctr"/>
-          <a:lstStyle/>
-          <a:p>
-            <a:pPr algn="ctr" indent="0" marL="0">
-              <a:buNone/>
-            </a:pPr>
-            <a:r>
-              <a:rPr lang="en-US" sz="1000" i="1" dirty="0">
-                <a:solidFill>
-                  <a:srgbClr val="888888"/>
-                </a:solidFill>
-                <a:latin typeface="Arial" pitchFamily="34" charset="0"/>
-                <a:ea typeface="Arial" pitchFamily="34" charset="-122"/>
-                <a:cs typeface="Arial" pitchFamily="34" charset="-120"/>
-              </a:rPr>
-              <a:t>IMAGE: Cinematic — two bunny-suited technicians in front of an EUV lithography tool, warm amber photolith glow, shallow DOF on a gloved hand at a control, stainless-steel cleanroom, near-square</a:t>
-            </a:r>
-            <a:endParaRPr lang="en-US" sz="1000" dirty="0"/>
-          </a:p>
-        </p:txBody>
-      </p:sp>
-      <p:sp>
-        <p:nvSpPr>
-          <p:cNvPr id="9" name="Text 7"/>
-          <p:cNvSpPr/>
-          <p:nvPr/>
-        </p:nvSpPr>
-        <p:spPr>
-          <a:xfrm>
-            <a:off x="3886200" y="1783080"/>
-            <a:ext cx="2377440" cy="685800"/>
-          </a:xfrm>
-          <a:prstGeom prst="rect">
-            <a:avLst/>
-          </a:prstGeom>
-          <a:noFill/>
-          <a:ln/>
-        </p:spPr>
-        <p:txBody>
-          <a:bodyPr wrap="square" lIns="0" tIns="0" rIns="0" bIns="0" rtlCol="0" anchor="ctr"/>
-          <a:lstStyle/>
-          <a:p>
-            <a:pPr algn="ctr" indent="0" marL="0">
-              <a:buNone/>
-            </a:pPr>
-            <a:r>
-              <a:rPr lang="en-US" sz="4000" b="1" dirty="0">
-                <a:solidFill>
-                  <a:srgbClr val="CC0000"/>
-                </a:solidFill>
-                <a:latin typeface="Arial Black" pitchFamily="34" charset="0"/>
-                <a:ea typeface="Arial Black" pitchFamily="34" charset="-122"/>
-                <a:cs typeface="Arial Black" pitchFamily="34" charset="-120"/>
-              </a:rPr>
-              <a:t>~90%</a:t>
-            </a:r>
-            <a:pPr algn="ctr" indent="0" marL="0">
-              <a:buNone/>
-            </a:pPr>
-            <a:r>
-              <a:rPr lang="en-US" sz="1400" baseline="30000" dirty="0">
-                <a:solidFill>
-                  <a:srgbClr val="CC0000"/>
-                </a:solidFill>
-                <a:latin typeface="Arial Black" pitchFamily="34" charset="0"/>
-                <a:ea typeface="Arial Black" pitchFamily="34" charset="-122"/>
-                <a:cs typeface="Arial Black" pitchFamily="34" charset="-120"/>
-              </a:rPr>
-              <a:t> 1</a:t>
-            </a:r>
-            <a:endParaRPr lang="en-US" sz="4000" dirty="0"/>
-          </a:p>
-        </p:txBody>
-      </p:sp>
-      <p:sp>
-        <p:nvSpPr>
-          <p:cNvPr id="10" name="Text 8"/>
-          <p:cNvSpPr/>
-          <p:nvPr/>
-        </p:nvSpPr>
-        <p:spPr>
-          <a:xfrm>
-            <a:off x="3886200" y="2514600"/>
-            <a:ext cx="2377440" cy="502920"/>
-          </a:xfrm>
-          <a:prstGeom prst="rect">
-            <a:avLst/>
-          </a:prstGeom>
-          <a:noFill/>
-          <a:ln/>
-        </p:spPr>
-        <p:txBody>
-          <a:bodyPr wrap="square" lIns="0" tIns="0" rIns="0" bIns="0" rtlCol="0" anchor="t"/>
-          <a:lstStyle/>
-          <a:p>
-            <a:pPr algn="ctr" indent="0" marL="0">
-              <a:buNone/>
-            </a:pPr>
-            <a:r>
-              <a:rPr lang="en-US" sz="1100" dirty="0">
-                <a:solidFill>
-                  <a:srgbClr val="666666"/>
-                </a:solidFill>
-                <a:latin typeface="Arial" pitchFamily="34" charset="0"/>
-                <a:ea typeface="Arial" pitchFamily="34" charset="-122"/>
-                <a:cs typeface="Arial" pitchFamily="34" charset="-120"/>
-              </a:rPr>
-              <a:t>TSMC share of advanced-node chips</a:t>
-            </a:r>
-            <a:endParaRPr lang="en-US" sz="1100" dirty="0"/>
-          </a:p>
-        </p:txBody>
-      </p:sp>
-      <p:sp>
-        <p:nvSpPr>
-          <p:cNvPr id="11" name="Text 9"/>
-          <p:cNvSpPr/>
-          <p:nvPr/>
-        </p:nvSpPr>
-        <p:spPr>
-          <a:xfrm>
-            <a:off x="6446520" y="1783080"/>
-            <a:ext cx="2377440" cy="685800"/>
-          </a:xfrm>
-          <a:prstGeom prst="rect">
-            <a:avLst/>
-          </a:prstGeom>
-          <a:noFill/>
-          <a:ln/>
-        </p:spPr>
-        <p:txBody>
-          <a:bodyPr wrap="square" lIns="0" tIns="0" rIns="0" bIns="0" rtlCol="0" anchor="ctr"/>
-          <a:lstStyle/>
-          <a:p>
-            <a:pPr algn="ctr" indent="0" marL="0">
-              <a:buNone/>
-            </a:pPr>
-            <a:r>
-              <a:rPr lang="en-US" sz="4000" b="1" dirty="0">
-                <a:solidFill>
-                  <a:srgbClr val="CC0000"/>
-                </a:solidFill>
-                <a:latin typeface="Arial Black" pitchFamily="34" charset="0"/>
-                <a:ea typeface="Arial Black" pitchFamily="34" charset="-122"/>
-                <a:cs typeface="Arial Black" pitchFamily="34" charset="-120"/>
-              </a:rPr>
-              <a:t>76%</a:t>
-            </a:r>
-            <a:pPr algn="ctr" indent="0" marL="0">
-              <a:buNone/>
-            </a:pPr>
-            <a:r>
-              <a:rPr lang="en-US" sz="1400" baseline="30000" dirty="0">
-                <a:solidFill>
-                  <a:srgbClr val="CC0000"/>
-                </a:solidFill>
-                <a:latin typeface="Arial Black" pitchFamily="34" charset="0"/>
-                <a:ea typeface="Arial Black" pitchFamily="34" charset="-122"/>
-                <a:cs typeface="Arial Black" pitchFamily="34" charset="-120"/>
-              </a:rPr>
-              <a:t> 2</a:t>
-            </a:r>
-            <a:endParaRPr lang="en-US" sz="4000" dirty="0"/>
-          </a:p>
-        </p:txBody>
-      </p:sp>
-      <p:sp>
-        <p:nvSpPr>
-          <p:cNvPr id="12" name="Text 10"/>
-          <p:cNvSpPr/>
-          <p:nvPr/>
-        </p:nvSpPr>
-        <p:spPr>
-          <a:xfrm>
-            <a:off x="6446520" y="2514600"/>
-            <a:ext cx="2377440" cy="502920"/>
-          </a:xfrm>
-          <a:prstGeom prst="rect">
-            <a:avLst/>
-          </a:prstGeom>
-          <a:noFill/>
-          <a:ln/>
-        </p:spPr>
-        <p:txBody>
-          <a:bodyPr wrap="square" lIns="0" tIns="0" rIns="0" bIns="0" rtlCol="0" anchor="t"/>
-          <a:lstStyle/>
-          <a:p>
-            <a:pPr algn="ctr" indent="0" marL="0">
-              <a:buNone/>
-            </a:pPr>
-            <a:r>
-              <a:rPr lang="en-US" sz="1100" dirty="0">
-                <a:solidFill>
-                  <a:srgbClr val="666666"/>
-                </a:solidFill>
-                <a:latin typeface="Arial" pitchFamily="34" charset="0"/>
-                <a:ea typeface="Arial" pitchFamily="34" charset="-122"/>
-                <a:cs typeface="Arial" pitchFamily="34" charset="-120"/>
-              </a:rPr>
-              <a:t>SK Hynix + Samsung DRAM share</a:t>
-            </a:r>
-            <a:endParaRPr lang="en-US" sz="1100" dirty="0"/>
-          </a:p>
-        </p:txBody>
-      </p:sp>
-      <p:sp>
-        <p:nvSpPr>
-          <p:cNvPr id="13" name="Text 11"/>
-          <p:cNvSpPr/>
-          <p:nvPr/>
-        </p:nvSpPr>
-        <p:spPr>
-          <a:xfrm>
-            <a:off x="3886200" y="3383280"/>
-            <a:ext cx="4800600" cy="1097280"/>
-          </a:xfrm>
-          <a:prstGeom prst="rect">
-            <a:avLst/>
-          </a:prstGeom>
-          <a:noFill/>
-          <a:ln/>
-        </p:spPr>
-        <p:txBody>
-          <a:bodyPr wrap="square" lIns="0" tIns="0" rIns="0" bIns="0" rtlCol="0" anchor="t"/>
-          <a:lstStyle/>
-          <a:p>
-            <a:pPr indent="0" marL="0">
-              <a:buNone/>
-            </a:pPr>
-            <a:r>
-              <a:rPr lang="en-US" sz="1200" dirty="0">
-                <a:solidFill>
-                  <a:srgbClr val="333333"/>
-                </a:solidFill>
-                <a:latin typeface="Arial" pitchFamily="34" charset="0"/>
-                <a:ea typeface="Arial" pitchFamily="34" charset="-122"/>
-                <a:cs typeface="Arial" pitchFamily="34" charset="-120"/>
-              </a:rPr>
-              <a:t>A single leading-edge chip crosses 70+ borders and six countries</a:t>
-            </a:r>
-            <a:pPr indent="0" marL="0">
-              <a:buNone/>
-            </a:pPr>
-            <a:r>
-              <a:rPr lang="en-US" sz="800" baseline="30000" dirty="0">
-                <a:solidFill>
-                  <a:srgbClr val="333333"/>
-                </a:solidFill>
-                <a:latin typeface="Arial" pitchFamily="34" charset="0"/>
-                <a:ea typeface="Arial" pitchFamily="34" charset="-122"/>
-                <a:cs typeface="Arial" pitchFamily="34" charset="-120"/>
-              </a:rPr>
-              <a:t> 3</a:t>
-            </a:r>
-            <a:pPr indent="0" marL="0">
-              <a:buNone/>
-            </a:pPr>
-            <a:r>
-              <a:rPr lang="en-US" sz="1200" dirty="0">
-                <a:solidFill>
-                  <a:srgbClr val="333333"/>
-                </a:solidFill>
-                <a:latin typeface="Arial" pitchFamily="34" charset="0"/>
-                <a:ea typeface="Arial" pitchFamily="34" charset="-122"/>
-                <a:cs typeface="Arial" pitchFamily="34" charset="-120"/>
-              </a:rPr>
-              <a:t> before reaching a data center. ASML builds fewer than 100 EUV machines a year</a:t>
-            </a:r>
-            <a:pPr indent="0" marL="0">
-              <a:buNone/>
-            </a:pPr>
-            <a:r>
-              <a:rPr lang="en-US" sz="800" baseline="30000" dirty="0">
-                <a:solidFill>
-                  <a:srgbClr val="333333"/>
-                </a:solidFill>
-                <a:latin typeface="Arial" pitchFamily="34" charset="0"/>
-                <a:ea typeface="Arial" pitchFamily="34" charset="-122"/>
-                <a:cs typeface="Arial" pitchFamily="34" charset="-120"/>
-              </a:rPr>
-              <a:t> 4</a:t>
-            </a:r>
-            <a:pPr indent="0" marL="0">
-              <a:buNone/>
-            </a:pPr>
-            <a:r>
-              <a:rPr lang="en-US" sz="1200" dirty="0">
-                <a:solidFill>
-                  <a:srgbClr val="333333"/>
-                </a:solidFill>
-                <a:latin typeface="Arial" pitchFamily="34" charset="0"/>
-                <a:ea typeface="Arial" pitchFamily="34" charset="-122"/>
-                <a:cs typeface="Arial" pitchFamily="34" charset="-120"/>
-              </a:rPr>
-              <a:t>.</a:t>
-            </a:r>
-            <a:endParaRPr lang="en-US" sz="1200" dirty="0"/>
-          </a:p>
-        </p:txBody>
-      </p:sp>
-      <p:sp>
-        <p:nvSpPr>
-          <p:cNvPr id="14" name="Shape 12"/>
-          <p:cNvSpPr/>
-          <p:nvPr/>
-        </p:nvSpPr>
-        <p:spPr>
-          <a:xfrm>
-            <a:off x="457200" y="4800600"/>
-            <a:ext cx="8229600" cy="320040"/>
-          </a:xfrm>
-          <a:prstGeom prst="rect">
-            <a:avLst/>
-          </a:prstGeom>
-          <a:solidFill>
-            <a:srgbClr val="333333"/>
+            <a:srgbClr val="CC0000"/>
           </a:solidFill>
           <a:ln w="12700">
             <a:solidFill>
-              <a:srgbClr val="333333"/>
+              <a:srgbClr val="CC0000"/>
             </a:solidFill>
             <a:prstDash val="solid"/>
           </a:ln>
@@ -14522,14 +14179,14 @@
       </p:sp>
       <p:sp>
         <p:nvSpPr>
-          <p:cNvPr id="15" name="Text 13"/>
-          <p:cNvSpPr/>
-          <p:nvPr/>
-        </p:nvSpPr>
-        <p:spPr>
-          <a:xfrm>
-            <a:off x="457200" y="4800600"/>
-            <a:ext cx="8229600" cy="320040"/>
+          <p:cNvPr id="8" name="Text 6"/>
+          <p:cNvSpPr/>
+          <p:nvPr/>
+        </p:nvSpPr>
+        <p:spPr>
+          <a:xfrm>
+            <a:off x="457200" y="1783080"/>
+            <a:ext cx="1920240" cy="274320"/>
           </a:xfrm>
           <a:prstGeom prst="rect">
             <a:avLst/>
@@ -14547,13 +14204,13 @@
             <a:r>
               <a:rPr lang="en-US" sz="1000" b="1" spc="300" kern="0" dirty="0">
                 <a:solidFill>
-                  <a:srgbClr val="F6693D"/>
-                </a:solidFill>
-                <a:latin typeface="Arial" pitchFamily="34" charset="0"/>
-                <a:ea typeface="Arial" pitchFamily="34" charset="-122"/>
-                <a:cs typeface="Arial" pitchFamily="34" charset="-120"/>
-              </a:rPr>
-              <a:t>US RESHORING — ACTUAL STATUS</a:t>
+                  <a:srgbClr val="FFFFFF"/>
+                </a:solidFill>
+                <a:latin typeface="Arial" pitchFamily="34" charset="0"/>
+                <a:ea typeface="Arial" pitchFamily="34" charset="-122"/>
+                <a:cs typeface="Arial" pitchFamily="34" charset="-120"/>
+              </a:rPr>
+              <a:t>NETHERLANDS</a:t>
             </a:r>
             <a:endParaRPr lang="en-US" sz="1000" dirty="0"/>
           </a:p>
@@ -14561,20 +14218,20 @@
       </p:sp>
       <p:sp>
         <p:nvSpPr>
-          <p:cNvPr id="16" name="Shape 14"/>
-          <p:cNvSpPr/>
-          <p:nvPr/>
-        </p:nvSpPr>
-        <p:spPr>
-          <a:xfrm>
-            <a:off x="502920" y="5120640"/>
-            <a:ext cx="1943100" cy="685800"/>
+          <p:cNvPr id="9" name="Shape 7"/>
+          <p:cNvSpPr/>
+          <p:nvPr/>
+        </p:nvSpPr>
+        <p:spPr>
+          <a:xfrm>
+            <a:off x="457200" y="2057400"/>
+            <a:ext cx="1920240" cy="1645920"/>
           </a:xfrm>
           <a:prstGeom prst="rect">
             <a:avLst/>
           </a:prstGeom>
           <a:solidFill>
-            <a:srgbClr val="F9F9F9"/>
+            <a:srgbClr val="FFFFFF"/>
           </a:solidFill>
           <a:ln w="6350">
             <a:solidFill>
@@ -14586,14 +14243,14 @@
       </p:sp>
       <p:sp>
         <p:nvSpPr>
-          <p:cNvPr id="17" name="Text 15"/>
-          <p:cNvSpPr/>
-          <p:nvPr/>
-        </p:nvSpPr>
-        <p:spPr>
-          <a:xfrm>
-            <a:off x="548640" y="5138928"/>
-            <a:ext cx="1828800" cy="274320"/>
+          <p:cNvPr id="10" name="Text 8"/>
+          <p:cNvSpPr/>
+          <p:nvPr/>
+        </p:nvSpPr>
+        <p:spPr>
+          <a:xfrm>
+            <a:off x="457200" y="2103120"/>
+            <a:ext cx="1920240" cy="457200"/>
           </a:xfrm>
           <a:prstGeom prst="rect">
             <a:avLst/>
@@ -14605,34 +14262,34 @@
           <a:bodyPr wrap="square" lIns="0" tIns="0" rIns="0" bIns="0" rtlCol="0" anchor="ctr"/>
           <a:lstStyle/>
           <a:p>
-            <a:pPr indent="0" marL="0">
-              <a:buNone/>
-            </a:pPr>
-            <a:r>
-              <a:rPr lang="en-US" sz="1050" b="1" dirty="0">
-                <a:solidFill>
-                  <a:srgbClr val="000000"/>
-                </a:solidFill>
-                <a:latin typeface="Arial" pitchFamily="34" charset="0"/>
-                <a:ea typeface="Arial" pitchFamily="34" charset="-122"/>
-                <a:cs typeface="Arial" pitchFamily="34" charset="-120"/>
-              </a:rPr>
-              <a:t>TSMC Arizona</a:t>
-            </a:r>
-            <a:endParaRPr lang="en-US" sz="1050" dirty="0"/>
-          </a:p>
-        </p:txBody>
-      </p:sp>
-      <p:sp>
-        <p:nvSpPr>
-          <p:cNvPr id="18" name="Text 16"/>
-          <p:cNvSpPr/>
-          <p:nvPr/>
-        </p:nvSpPr>
-        <p:spPr>
-          <a:xfrm>
-            <a:off x="548640" y="5394960"/>
-            <a:ext cx="1828800" cy="411480"/>
+            <a:pPr algn="ctr" indent="0" marL="0">
+              <a:buNone/>
+            </a:pPr>
+            <a:r>
+              <a:rPr lang="en-US" sz="3600" b="1" dirty="0">
+                <a:solidFill>
+                  <a:srgbClr val="CC0000"/>
+                </a:solidFill>
+                <a:latin typeface="Arial Black" pitchFamily="34" charset="0"/>
+                <a:ea typeface="Arial Black" pitchFamily="34" charset="-122"/>
+                <a:cs typeface="Arial Black" pitchFamily="34" charset="-120"/>
+              </a:rPr>
+              <a:t>▲</a:t>
+            </a:r>
+            <a:endParaRPr lang="en-US" sz="3600" dirty="0"/>
+          </a:p>
+        </p:txBody>
+      </p:sp>
+      <p:sp>
+        <p:nvSpPr>
+          <p:cNvPr id="11" name="Text 9"/>
+          <p:cNvSpPr/>
+          <p:nvPr/>
+        </p:nvSpPr>
+        <p:spPr>
+          <a:xfrm>
+            <a:off x="457200" y="2587752"/>
+            <a:ext cx="1920240" cy="274320"/>
           </a:xfrm>
           <a:prstGeom prst="rect">
             <a:avLst/>
@@ -14644,7 +14301,69 @@
           <a:bodyPr wrap="square" lIns="0" tIns="0" rIns="0" bIns="0" rtlCol="0" anchor="ctr"/>
           <a:lstStyle/>
           <a:p>
-            <a:pPr indent="0" marL="0">
+            <a:pPr algn="ctr" indent="0" marL="0">
+              <a:buNone/>
+            </a:pPr>
+            <a:r>
+              <a:rPr lang="en-US" sz="1300" b="1" dirty="0">
+                <a:solidFill>
+                  <a:srgbClr val="333333"/>
+                </a:solidFill>
+                <a:latin typeface="Arial" pitchFamily="34" charset="0"/>
+                <a:ea typeface="Arial" pitchFamily="34" charset="-122"/>
+                <a:cs typeface="Arial" pitchFamily="34" charset="-120"/>
+              </a:rPr>
+              <a:t>EUV Litho</a:t>
+            </a:r>
+            <a:endParaRPr lang="en-US" sz="1300" dirty="0"/>
+          </a:p>
+        </p:txBody>
+      </p:sp>
+      <p:sp>
+        <p:nvSpPr>
+          <p:cNvPr id="12" name="Shape 10"/>
+          <p:cNvSpPr/>
+          <p:nvPr/>
+        </p:nvSpPr>
+        <p:spPr>
+          <a:xfrm>
+            <a:off x="960120" y="2907792"/>
+            <a:ext cx="914400" cy="0"/>
+          </a:xfrm>
+          <a:prstGeom prst="line">
+            <a:avLst/>
+          </a:prstGeom>
+          <a:noFill/>
+          <a:ln w="19050">
+            <a:solidFill>
+              <a:srgbClr val="CC0000"/>
+            </a:solidFill>
+            <a:prstDash val="solid"/>
+          </a:ln>
+        </p:spPr>
+      </p:sp>
+      <p:sp>
+        <p:nvSpPr>
+          <p:cNvPr id="13" name="Text 11"/>
+          <p:cNvSpPr/>
+          <p:nvPr/>
+        </p:nvSpPr>
+        <p:spPr>
+          <a:xfrm>
+            <a:off x="566928" y="2999232"/>
+            <a:ext cx="1700784" cy="640080"/>
+          </a:xfrm>
+          <a:prstGeom prst="rect">
+            <a:avLst/>
+          </a:prstGeom>
+          <a:noFill/>
+          <a:ln/>
+        </p:spPr>
+        <p:txBody>
+          <a:bodyPr wrap="square" lIns="0" tIns="0" rIns="0" bIns="0" rtlCol="0" anchor="t"/>
+          <a:lstStyle/>
+          <a:p>
+            <a:pPr algn="l" indent="0" marL="0">
               <a:buNone/>
             </a:pPr>
             <a:r>
@@ -14656,7 +14375,21 @@
                 <a:ea typeface="Arial" pitchFamily="34" charset="-122"/>
                 <a:cs typeface="Arial" pitchFamily="34" charset="-120"/>
               </a:rPr>
-              <a:t>Fab 1 at 4nm; Fab 2 ~2026–27</a:t>
+              <a:t>Only firm in the world building EUV scanners — new machines ship in dozens per year, not hundreds.</a:t>
+            </a:r>
+            <a:pPr algn="l" indent="0" marL="0">
+              <a:buNone/>
+            </a:pPr>
+            <a:r>
+              <a:rPr lang="en-US" sz="700" baseline="30000" dirty="0">
+                <a:solidFill>
+                  <a:srgbClr val="CC0000"/>
+                </a:solidFill>
+                <a:latin typeface="Arial" pitchFamily="34" charset="0"/>
+                <a:ea typeface="Arial" pitchFamily="34" charset="-122"/>
+                <a:cs typeface="Arial" pitchFamily="34" charset="-120"/>
+              </a:rPr>
+              <a:t> 1</a:t>
             </a:r>
             <a:endParaRPr lang="en-US" sz="900" dirty="0"/>
           </a:p>
@@ -14664,20 +14397,84 @@
       </p:sp>
       <p:sp>
         <p:nvSpPr>
-          <p:cNvPr id="19" name="Shape 17"/>
-          <p:cNvSpPr/>
-          <p:nvPr/>
-        </p:nvSpPr>
-        <p:spPr>
-          <a:xfrm>
-            <a:off x="2537460" y="5120640"/>
-            <a:ext cx="1943100" cy="685800"/>
+          <p:cNvPr id="14" name="Shape 12"/>
+          <p:cNvSpPr/>
+          <p:nvPr/>
+        </p:nvSpPr>
+        <p:spPr>
+          <a:xfrm>
+            <a:off x="2468880" y="1783080"/>
+            <a:ext cx="1920240" cy="274320"/>
           </a:xfrm>
           <a:prstGeom prst="rect">
             <a:avLst/>
           </a:prstGeom>
           <a:solidFill>
-            <a:srgbClr val="F9F9F9"/>
+            <a:srgbClr val="CC0000"/>
+          </a:solidFill>
+          <a:ln w="12700">
+            <a:solidFill>
+              <a:srgbClr val="CC0000"/>
+            </a:solidFill>
+            <a:prstDash val="solid"/>
+          </a:ln>
+        </p:spPr>
+      </p:sp>
+      <p:sp>
+        <p:nvSpPr>
+          <p:cNvPr id="15" name="Text 13"/>
+          <p:cNvSpPr/>
+          <p:nvPr/>
+        </p:nvSpPr>
+        <p:spPr>
+          <a:xfrm>
+            <a:off x="2468880" y="1783080"/>
+            <a:ext cx="1920240" cy="274320"/>
+          </a:xfrm>
+          <a:prstGeom prst="rect">
+            <a:avLst/>
+          </a:prstGeom>
+          <a:noFill/>
+          <a:ln/>
+        </p:spPr>
+        <p:txBody>
+          <a:bodyPr wrap="square" lIns="0" tIns="0" rIns="0" bIns="0" rtlCol="0" anchor="ctr"/>
+          <a:lstStyle/>
+          <a:p>
+            <a:pPr algn="ctr" indent="0" marL="0">
+              <a:buNone/>
+            </a:pPr>
+            <a:r>
+              <a:rPr lang="en-US" sz="1000" b="1" spc="300" kern="0" dirty="0">
+                <a:solidFill>
+                  <a:srgbClr val="FFFFFF"/>
+                </a:solidFill>
+                <a:latin typeface="Arial" pitchFamily="34" charset="0"/>
+                <a:ea typeface="Arial" pitchFamily="34" charset="-122"/>
+                <a:cs typeface="Arial" pitchFamily="34" charset="-120"/>
+              </a:rPr>
+              <a:t>TAIWAN</a:t>
+            </a:r>
+            <a:endParaRPr lang="en-US" sz="1000" dirty="0"/>
+          </a:p>
+        </p:txBody>
+      </p:sp>
+      <p:sp>
+        <p:nvSpPr>
+          <p:cNvPr id="16" name="Shape 14"/>
+          <p:cNvSpPr/>
+          <p:nvPr/>
+        </p:nvSpPr>
+        <p:spPr>
+          <a:xfrm>
+            <a:off x="2468880" y="2057400"/>
+            <a:ext cx="1920240" cy="1645920"/>
+          </a:xfrm>
+          <a:prstGeom prst="rect">
+            <a:avLst/>
+          </a:prstGeom>
+          <a:solidFill>
+            <a:srgbClr val="FFFFFF"/>
           </a:solidFill>
           <a:ln w="6350">
             <a:solidFill>
@@ -14689,14 +14486,193 @@
       </p:sp>
       <p:sp>
         <p:nvSpPr>
+          <p:cNvPr id="17" name="Text 15"/>
+          <p:cNvSpPr/>
+          <p:nvPr/>
+        </p:nvSpPr>
+        <p:spPr>
+          <a:xfrm>
+            <a:off x="2468880" y="2103120"/>
+            <a:ext cx="1920240" cy="457200"/>
+          </a:xfrm>
+          <a:prstGeom prst="rect">
+            <a:avLst/>
+          </a:prstGeom>
+          <a:noFill/>
+          <a:ln/>
+        </p:spPr>
+        <p:txBody>
+          <a:bodyPr wrap="square" lIns="0" tIns="0" rIns="0" bIns="0" rtlCol="0" anchor="ctr"/>
+          <a:lstStyle/>
+          <a:p>
+            <a:pPr algn="ctr" indent="0" marL="0">
+              <a:buNone/>
+            </a:pPr>
+            <a:r>
+              <a:rPr lang="en-US" sz="3600" b="1" dirty="0">
+                <a:solidFill>
+                  <a:srgbClr val="CC0000"/>
+                </a:solidFill>
+                <a:latin typeface="Arial Black" pitchFamily="34" charset="0"/>
+                <a:ea typeface="Arial Black" pitchFamily="34" charset="-122"/>
+                <a:cs typeface="Arial Black" pitchFamily="34" charset="-120"/>
+              </a:rPr>
+              <a:t>▦</a:t>
+            </a:r>
+            <a:endParaRPr lang="en-US" sz="3600" dirty="0"/>
+          </a:p>
+        </p:txBody>
+      </p:sp>
+      <p:sp>
+        <p:nvSpPr>
+          <p:cNvPr id="18" name="Text 16"/>
+          <p:cNvSpPr/>
+          <p:nvPr/>
+        </p:nvSpPr>
+        <p:spPr>
+          <a:xfrm>
+            <a:off x="2468880" y="2587752"/>
+            <a:ext cx="1920240" cy="274320"/>
+          </a:xfrm>
+          <a:prstGeom prst="rect">
+            <a:avLst/>
+          </a:prstGeom>
+          <a:noFill/>
+          <a:ln/>
+        </p:spPr>
+        <p:txBody>
+          <a:bodyPr wrap="square" lIns="0" tIns="0" rIns="0" bIns="0" rtlCol="0" anchor="ctr"/>
+          <a:lstStyle/>
+          <a:p>
+            <a:pPr algn="ctr" indent="0" marL="0">
+              <a:buNone/>
+            </a:pPr>
+            <a:r>
+              <a:rPr lang="en-US" sz="1300" b="1" dirty="0">
+                <a:solidFill>
+                  <a:srgbClr val="333333"/>
+                </a:solidFill>
+                <a:latin typeface="Arial" pitchFamily="34" charset="0"/>
+                <a:ea typeface="Arial" pitchFamily="34" charset="-122"/>
+                <a:cs typeface="Arial" pitchFamily="34" charset="-120"/>
+              </a:rPr>
+              <a:t>Leading Logic</a:t>
+            </a:r>
+            <a:endParaRPr lang="en-US" sz="1300" dirty="0"/>
+          </a:p>
+        </p:txBody>
+      </p:sp>
+      <p:sp>
+        <p:nvSpPr>
+          <p:cNvPr id="19" name="Shape 17"/>
+          <p:cNvSpPr/>
+          <p:nvPr/>
+        </p:nvSpPr>
+        <p:spPr>
+          <a:xfrm>
+            <a:off x="2971800" y="2907792"/>
+            <a:ext cx="914400" cy="0"/>
+          </a:xfrm>
+          <a:prstGeom prst="line">
+            <a:avLst/>
+          </a:prstGeom>
+          <a:noFill/>
+          <a:ln w="19050">
+            <a:solidFill>
+              <a:srgbClr val="CC0000"/>
+            </a:solidFill>
+            <a:prstDash val="solid"/>
+          </a:ln>
+        </p:spPr>
+      </p:sp>
+      <p:sp>
+        <p:nvSpPr>
           <p:cNvPr id="20" name="Text 18"/>
           <p:cNvSpPr/>
           <p:nvPr/>
         </p:nvSpPr>
         <p:spPr>
           <a:xfrm>
-            <a:off x="2583180" y="5138928"/>
-            <a:ext cx="1828800" cy="274320"/>
+            <a:off x="2578608" y="2999232"/>
+            <a:ext cx="1700784" cy="640080"/>
+          </a:xfrm>
+          <a:prstGeom prst="rect">
+            <a:avLst/>
+          </a:prstGeom>
+          <a:noFill/>
+          <a:ln/>
+        </p:spPr>
+        <p:txBody>
+          <a:bodyPr wrap="square" lIns="0" tIns="0" rIns="0" bIns="0" rtlCol="0" anchor="t"/>
+          <a:lstStyle/>
+          <a:p>
+            <a:pPr algn="l" indent="0" marL="0">
+              <a:buNone/>
+            </a:pPr>
+            <a:r>
+              <a:rPr lang="en-US" sz="900" dirty="0">
+                <a:solidFill>
+                  <a:srgbClr val="333333"/>
+                </a:solidFill>
+                <a:latin typeface="Arial" pitchFamily="34" charset="0"/>
+                <a:ea typeface="Arial" pitchFamily="34" charset="-122"/>
+                <a:cs typeface="Arial" pitchFamily="34" charset="-120"/>
+              </a:rPr>
+              <a:t>Virtually every advanced-node chip runs through TSMC fabs in Hsinchu and Tainan — no real volume alternative exists.</a:t>
+            </a:r>
+            <a:pPr algn="l" indent="0" marL="0">
+              <a:buNone/>
+            </a:pPr>
+            <a:r>
+              <a:rPr lang="en-US" sz="700" baseline="30000" dirty="0">
+                <a:solidFill>
+                  <a:srgbClr val="CC0000"/>
+                </a:solidFill>
+                <a:latin typeface="Arial" pitchFamily="34" charset="0"/>
+                <a:ea typeface="Arial" pitchFamily="34" charset="-122"/>
+                <a:cs typeface="Arial" pitchFamily="34" charset="-120"/>
+              </a:rPr>
+              <a:t> 2</a:t>
+            </a:r>
+            <a:endParaRPr lang="en-US" sz="900" dirty="0"/>
+          </a:p>
+        </p:txBody>
+      </p:sp>
+      <p:sp>
+        <p:nvSpPr>
+          <p:cNvPr id="21" name="Shape 19"/>
+          <p:cNvSpPr/>
+          <p:nvPr/>
+        </p:nvSpPr>
+        <p:spPr>
+          <a:xfrm>
+            <a:off x="4480560" y="1783080"/>
+            <a:ext cx="1920240" cy="274320"/>
+          </a:xfrm>
+          <a:prstGeom prst="rect">
+            <a:avLst/>
+          </a:prstGeom>
+          <a:solidFill>
+            <a:srgbClr val="CC0000"/>
+          </a:solidFill>
+          <a:ln w="12700">
+            <a:solidFill>
+              <a:srgbClr val="CC0000"/>
+            </a:solidFill>
+            <a:prstDash val="solid"/>
+          </a:ln>
+        </p:spPr>
+      </p:sp>
+      <p:sp>
+        <p:nvSpPr>
+          <p:cNvPr id="22" name="Text 20"/>
+          <p:cNvSpPr/>
+          <p:nvPr/>
+        </p:nvSpPr>
+        <p:spPr>
+          <a:xfrm>
+            <a:off x="4480560" y="1783080"/>
+            <a:ext cx="1920240" cy="274320"/>
           </a:xfrm>
           <a:prstGeom prst="rect">
             <a:avLst/>
@@ -14708,79 +14684,40 @@
           <a:bodyPr wrap="square" lIns="0" tIns="0" rIns="0" bIns="0" rtlCol="0" anchor="ctr"/>
           <a:lstStyle/>
           <a:p>
-            <a:pPr indent="0" marL="0">
-              <a:buNone/>
-            </a:pPr>
-            <a:r>
-              <a:rPr lang="en-US" sz="1050" b="1" dirty="0">
-                <a:solidFill>
-                  <a:srgbClr val="000000"/>
-                </a:solidFill>
-                <a:latin typeface="Arial" pitchFamily="34" charset="0"/>
-                <a:ea typeface="Arial" pitchFamily="34" charset="-122"/>
-                <a:cs typeface="Arial" pitchFamily="34" charset="-120"/>
-              </a:rPr>
-              <a:t>Samsung Taylor</a:t>
-            </a:r>
-            <a:endParaRPr lang="en-US" sz="1050" dirty="0"/>
-          </a:p>
-        </p:txBody>
-      </p:sp>
-      <p:sp>
-        <p:nvSpPr>
-          <p:cNvPr id="21" name="Text 19"/>
-          <p:cNvSpPr/>
-          <p:nvPr/>
-        </p:nvSpPr>
-        <p:spPr>
-          <a:xfrm>
-            <a:off x="2583180" y="5394960"/>
-            <a:ext cx="1828800" cy="411480"/>
-          </a:xfrm>
-          <a:prstGeom prst="rect">
-            <a:avLst/>
-          </a:prstGeom>
-          <a:noFill/>
-          <a:ln/>
-        </p:spPr>
-        <p:txBody>
-          <a:bodyPr wrap="square" lIns="0" tIns="0" rIns="0" bIns="0" rtlCol="0" anchor="ctr"/>
-          <a:lstStyle/>
-          <a:p>
-            <a:pPr indent="0" marL="0">
-              <a:buNone/>
-            </a:pPr>
-            <a:r>
-              <a:rPr lang="en-US" sz="900" dirty="0">
-                <a:solidFill>
-                  <a:srgbClr val="333333"/>
-                </a:solidFill>
-                <a:latin typeface="Arial" pitchFamily="34" charset="0"/>
-                <a:ea typeface="Arial" pitchFamily="34" charset="-122"/>
-                <a:cs typeface="Arial" pitchFamily="34" charset="-120"/>
-              </a:rPr>
-              <a:t>2nm fab, pushed to 2026</a:t>
-            </a:r>
-            <a:endParaRPr lang="en-US" sz="900" dirty="0"/>
-          </a:p>
-        </p:txBody>
-      </p:sp>
-      <p:sp>
-        <p:nvSpPr>
-          <p:cNvPr id="22" name="Shape 20"/>
-          <p:cNvSpPr/>
-          <p:nvPr/>
-        </p:nvSpPr>
-        <p:spPr>
-          <a:xfrm>
-            <a:off x="4572000" y="5120640"/>
-            <a:ext cx="1943100" cy="685800"/>
+            <a:pPr algn="ctr" indent="0" marL="0">
+              <a:buNone/>
+            </a:pPr>
+            <a:r>
+              <a:rPr lang="en-US" sz="1000" b="1" spc="300" kern="0" dirty="0">
+                <a:solidFill>
+                  <a:srgbClr val="FFFFFF"/>
+                </a:solidFill>
+                <a:latin typeface="Arial" pitchFamily="34" charset="0"/>
+                <a:ea typeface="Arial" pitchFamily="34" charset="-122"/>
+                <a:cs typeface="Arial" pitchFamily="34" charset="-120"/>
+              </a:rPr>
+              <a:t>KOREA</a:t>
+            </a:r>
+            <a:endParaRPr lang="en-US" sz="1000" dirty="0"/>
+          </a:p>
+        </p:txBody>
+      </p:sp>
+      <p:sp>
+        <p:nvSpPr>
+          <p:cNvPr id="23" name="Shape 21"/>
+          <p:cNvSpPr/>
+          <p:nvPr/>
+        </p:nvSpPr>
+        <p:spPr>
+          <a:xfrm>
+            <a:off x="4480560" y="2057400"/>
+            <a:ext cx="1920240" cy="1645920"/>
           </a:xfrm>
           <a:prstGeom prst="rect">
             <a:avLst/>
           </a:prstGeom>
           <a:solidFill>
-            <a:srgbClr val="F9F9F9"/>
+            <a:srgbClr val="FFFFFF"/>
           </a:solidFill>
           <a:ln w="6350">
             <a:solidFill>
@@ -14792,14 +14729,14 @@
       </p:sp>
       <p:sp>
         <p:nvSpPr>
-          <p:cNvPr id="23" name="Text 21"/>
-          <p:cNvSpPr/>
-          <p:nvPr/>
-        </p:nvSpPr>
-        <p:spPr>
-          <a:xfrm>
-            <a:off x="4617720" y="5138928"/>
-            <a:ext cx="1828800" cy="274320"/>
+          <p:cNvPr id="24" name="Text 22"/>
+          <p:cNvSpPr/>
+          <p:nvPr/>
+        </p:nvSpPr>
+        <p:spPr>
+          <a:xfrm>
+            <a:off x="4480560" y="2103120"/>
+            <a:ext cx="1920240" cy="457200"/>
           </a:xfrm>
           <a:prstGeom prst="rect">
             <a:avLst/>
@@ -14811,34 +14748,34 @@
           <a:bodyPr wrap="square" lIns="0" tIns="0" rIns="0" bIns="0" rtlCol="0" anchor="ctr"/>
           <a:lstStyle/>
           <a:p>
-            <a:pPr indent="0" marL="0">
-              <a:buNone/>
-            </a:pPr>
-            <a:r>
-              <a:rPr lang="en-US" sz="1050" b="1" dirty="0">
-                <a:solidFill>
-                  <a:srgbClr val="000000"/>
-                </a:solidFill>
-                <a:latin typeface="Arial" pitchFamily="34" charset="0"/>
-                <a:ea typeface="Arial" pitchFamily="34" charset="-122"/>
-                <a:cs typeface="Arial" pitchFamily="34" charset="-120"/>
-              </a:rPr>
-              <a:t>Micron Clay NY</a:t>
-            </a:r>
-            <a:endParaRPr lang="en-US" sz="1050" dirty="0"/>
-          </a:p>
-        </p:txBody>
-      </p:sp>
-      <p:sp>
-        <p:nvSpPr>
-          <p:cNvPr id="24" name="Text 22"/>
-          <p:cNvSpPr/>
-          <p:nvPr/>
-        </p:nvSpPr>
-        <p:spPr>
-          <a:xfrm>
-            <a:off x="4617720" y="5394960"/>
-            <a:ext cx="1828800" cy="411480"/>
+            <a:pPr algn="ctr" indent="0" marL="0">
+              <a:buNone/>
+            </a:pPr>
+            <a:r>
+              <a:rPr lang="en-US" sz="3600" b="1" dirty="0">
+                <a:solidFill>
+                  <a:srgbClr val="CC0000"/>
+                </a:solidFill>
+                <a:latin typeface="Arial Black" pitchFamily="34" charset="0"/>
+                <a:ea typeface="Arial Black" pitchFamily="34" charset="-122"/>
+                <a:cs typeface="Arial Black" pitchFamily="34" charset="-120"/>
+              </a:rPr>
+              <a:t>☰</a:t>
+            </a:r>
+            <a:endParaRPr lang="en-US" sz="3600" dirty="0"/>
+          </a:p>
+        </p:txBody>
+      </p:sp>
+      <p:sp>
+        <p:nvSpPr>
+          <p:cNvPr id="25" name="Text 23"/>
+          <p:cNvSpPr/>
+          <p:nvPr/>
+        </p:nvSpPr>
+        <p:spPr>
+          <a:xfrm>
+            <a:off x="4480560" y="2587752"/>
+            <a:ext cx="1920240" cy="274320"/>
           </a:xfrm>
           <a:prstGeom prst="rect">
             <a:avLst/>
@@ -14850,7 +14787,69 @@
           <a:bodyPr wrap="square" lIns="0" tIns="0" rIns="0" bIns="0" rtlCol="0" anchor="ctr"/>
           <a:lstStyle/>
           <a:p>
-            <a:pPr indent="0" marL="0">
+            <a:pPr algn="ctr" indent="0" marL="0">
+              <a:buNone/>
+            </a:pPr>
+            <a:r>
+              <a:rPr lang="en-US" sz="1300" b="1" dirty="0">
+                <a:solidFill>
+                  <a:srgbClr val="333333"/>
+                </a:solidFill>
+                <a:latin typeface="Arial" pitchFamily="34" charset="0"/>
+                <a:ea typeface="Arial" pitchFamily="34" charset="-122"/>
+                <a:cs typeface="Arial" pitchFamily="34" charset="-120"/>
+              </a:rPr>
+              <a:t>HBM Memory</a:t>
+            </a:r>
+            <a:endParaRPr lang="en-US" sz="1300" dirty="0"/>
+          </a:p>
+        </p:txBody>
+      </p:sp>
+      <p:sp>
+        <p:nvSpPr>
+          <p:cNvPr id="26" name="Shape 24"/>
+          <p:cNvSpPr/>
+          <p:nvPr/>
+        </p:nvSpPr>
+        <p:spPr>
+          <a:xfrm>
+            <a:off x="4983480" y="2907792"/>
+            <a:ext cx="914400" cy="0"/>
+          </a:xfrm>
+          <a:prstGeom prst="line">
+            <a:avLst/>
+          </a:prstGeom>
+          <a:noFill/>
+          <a:ln w="19050">
+            <a:solidFill>
+              <a:srgbClr val="CC0000"/>
+            </a:solidFill>
+            <a:prstDash val="solid"/>
+          </a:ln>
+        </p:spPr>
+      </p:sp>
+      <p:sp>
+        <p:nvSpPr>
+          <p:cNvPr id="27" name="Text 25"/>
+          <p:cNvSpPr/>
+          <p:nvPr/>
+        </p:nvSpPr>
+        <p:spPr>
+          <a:xfrm>
+            <a:off x="4590288" y="2999232"/>
+            <a:ext cx="1700784" cy="640080"/>
+          </a:xfrm>
+          <a:prstGeom prst="rect">
+            <a:avLst/>
+          </a:prstGeom>
+          <a:noFill/>
+          <a:ln/>
+        </p:spPr>
+        <p:txBody>
+          <a:bodyPr wrap="square" lIns="0" tIns="0" rIns="0" bIns="0" rtlCol="0" anchor="t"/>
+          <a:lstStyle/>
+          <a:p>
+            <a:pPr algn="l" indent="0" marL="0">
               <a:buNone/>
             </a:pPr>
             <a:r>
@@ -14862,7 +14861,21 @@
                 <a:ea typeface="Arial" pitchFamily="34" charset="-122"/>
                 <a:cs typeface="Arial" pitchFamily="34" charset="-120"/>
               </a:rPr>
-              <a:t>Ground broken; online ~2028–30</a:t>
+              <a:t>Two Korean firms supply nearly all the high-bandwidth memory AI accelerators depend on — both booked through 2026.</a:t>
+            </a:r>
+            <a:pPr algn="l" indent="0" marL="0">
+              <a:buNone/>
+            </a:pPr>
+            <a:r>
+              <a:rPr lang="en-US" sz="700" baseline="30000" dirty="0">
+                <a:solidFill>
+                  <a:srgbClr val="CC0000"/>
+                </a:solidFill>
+                <a:latin typeface="Arial" pitchFamily="34" charset="0"/>
+                <a:ea typeface="Arial" pitchFamily="34" charset="-122"/>
+                <a:cs typeface="Arial" pitchFamily="34" charset="-120"/>
+              </a:rPr>
+              <a:t> 3</a:t>
             </a:r>
             <a:endParaRPr lang="en-US" sz="900" dirty="0"/>
           </a:p>
@@ -14870,20 +14883,84 @@
       </p:sp>
       <p:sp>
         <p:nvSpPr>
-          <p:cNvPr id="25" name="Shape 23"/>
-          <p:cNvSpPr/>
-          <p:nvPr/>
-        </p:nvSpPr>
-        <p:spPr>
-          <a:xfrm>
-            <a:off x="6606540" y="5120640"/>
-            <a:ext cx="1943100" cy="685800"/>
+          <p:cNvPr id="28" name="Shape 26"/>
+          <p:cNvSpPr/>
+          <p:nvPr/>
+        </p:nvSpPr>
+        <p:spPr>
+          <a:xfrm>
+            <a:off x="6492240" y="1783080"/>
+            <a:ext cx="1920240" cy="274320"/>
           </a:xfrm>
           <a:prstGeom prst="rect">
             <a:avLst/>
           </a:prstGeom>
           <a:solidFill>
-            <a:srgbClr val="F9F9F9"/>
+            <a:srgbClr val="CC0000"/>
+          </a:solidFill>
+          <a:ln w="12700">
+            <a:solidFill>
+              <a:srgbClr val="CC0000"/>
+            </a:solidFill>
+            <a:prstDash val="solid"/>
+          </a:ln>
+        </p:spPr>
+      </p:sp>
+      <p:sp>
+        <p:nvSpPr>
+          <p:cNvPr id="29" name="Text 27"/>
+          <p:cNvSpPr/>
+          <p:nvPr/>
+        </p:nvSpPr>
+        <p:spPr>
+          <a:xfrm>
+            <a:off x="6492240" y="1783080"/>
+            <a:ext cx="1920240" cy="274320"/>
+          </a:xfrm>
+          <a:prstGeom prst="rect">
+            <a:avLst/>
+          </a:prstGeom>
+          <a:noFill/>
+          <a:ln/>
+        </p:spPr>
+        <p:txBody>
+          <a:bodyPr wrap="square" lIns="0" tIns="0" rIns="0" bIns="0" rtlCol="0" anchor="ctr"/>
+          <a:lstStyle/>
+          <a:p>
+            <a:pPr algn="ctr" indent="0" marL="0">
+              <a:buNone/>
+            </a:pPr>
+            <a:r>
+              <a:rPr lang="en-US" sz="1000" b="1" spc="300" kern="0" dirty="0">
+                <a:solidFill>
+                  <a:srgbClr val="FFFFFF"/>
+                </a:solidFill>
+                <a:latin typeface="Arial" pitchFamily="34" charset="0"/>
+                <a:ea typeface="Arial" pitchFamily="34" charset="-122"/>
+                <a:cs typeface="Arial" pitchFamily="34" charset="-120"/>
+              </a:rPr>
+              <a:t>TAIWAN</a:t>
+            </a:r>
+            <a:endParaRPr lang="en-US" sz="1000" dirty="0"/>
+          </a:p>
+        </p:txBody>
+      </p:sp>
+      <p:sp>
+        <p:nvSpPr>
+          <p:cNvPr id="30" name="Shape 28"/>
+          <p:cNvSpPr/>
+          <p:nvPr/>
+        </p:nvSpPr>
+        <p:spPr>
+          <a:xfrm>
+            <a:off x="6492240" y="2057400"/>
+            <a:ext cx="1920240" cy="1645920"/>
+          </a:xfrm>
+          <a:prstGeom prst="rect">
+            <a:avLst/>
+          </a:prstGeom>
+          <a:solidFill>
+            <a:srgbClr val="FFFFFF"/>
           </a:solidFill>
           <a:ln w="6350">
             <a:solidFill>
@@ -14895,14 +14972,14 @@
       </p:sp>
       <p:sp>
         <p:nvSpPr>
-          <p:cNvPr id="26" name="Text 24"/>
-          <p:cNvSpPr/>
-          <p:nvPr/>
-        </p:nvSpPr>
-        <p:spPr>
-          <a:xfrm>
-            <a:off x="6652260" y="5138928"/>
-            <a:ext cx="1828800" cy="274320"/>
+          <p:cNvPr id="31" name="Text 29"/>
+          <p:cNvSpPr/>
+          <p:nvPr/>
+        </p:nvSpPr>
+        <p:spPr>
+          <a:xfrm>
+            <a:off x="6492240" y="2103120"/>
+            <a:ext cx="1920240" cy="457200"/>
           </a:xfrm>
           <a:prstGeom prst="rect">
             <a:avLst/>
@@ -14914,13 +14991,563 @@
           <a:bodyPr wrap="square" lIns="0" tIns="0" rIns="0" bIns="0" rtlCol="0" anchor="ctr"/>
           <a:lstStyle/>
           <a:p>
-            <a:pPr indent="0" marL="0">
-              <a:buNone/>
-            </a:pPr>
-            <a:r>
-              <a:rPr lang="en-US" sz="1050" b="1" dirty="0">
-                <a:solidFill>
-                  <a:srgbClr val="000000"/>
+            <a:pPr algn="ctr" indent="0" marL="0">
+              <a:buNone/>
+            </a:pPr>
+            <a:r>
+              <a:rPr lang="en-US" sz="3600" b="1" dirty="0">
+                <a:solidFill>
+                  <a:srgbClr val="CC0000"/>
+                </a:solidFill>
+                <a:latin typeface="Arial Black" pitchFamily="34" charset="0"/>
+                <a:ea typeface="Arial Black" pitchFamily="34" charset="-122"/>
+                <a:cs typeface="Arial Black" pitchFamily="34" charset="-120"/>
+              </a:rPr>
+              <a:t>◫</a:t>
+            </a:r>
+            <a:endParaRPr lang="en-US" sz="3600" dirty="0"/>
+          </a:p>
+        </p:txBody>
+      </p:sp>
+      <p:sp>
+        <p:nvSpPr>
+          <p:cNvPr id="32" name="Text 30"/>
+          <p:cNvSpPr/>
+          <p:nvPr/>
+        </p:nvSpPr>
+        <p:spPr>
+          <a:xfrm>
+            <a:off x="6492240" y="2587752"/>
+            <a:ext cx="1920240" cy="274320"/>
+          </a:xfrm>
+          <a:prstGeom prst="rect">
+            <a:avLst/>
+          </a:prstGeom>
+          <a:noFill/>
+          <a:ln/>
+        </p:spPr>
+        <p:txBody>
+          <a:bodyPr wrap="square" lIns="0" tIns="0" rIns="0" bIns="0" rtlCol="0" anchor="ctr"/>
+          <a:lstStyle/>
+          <a:p>
+            <a:pPr algn="ctr" indent="0" marL="0">
+              <a:buNone/>
+            </a:pPr>
+            <a:r>
+              <a:rPr lang="en-US" sz="1300" b="1" dirty="0">
+                <a:solidFill>
+                  <a:srgbClr val="333333"/>
+                </a:solidFill>
+                <a:latin typeface="Arial" pitchFamily="34" charset="0"/>
+                <a:ea typeface="Arial" pitchFamily="34" charset="-122"/>
+                <a:cs typeface="Arial" pitchFamily="34" charset="-120"/>
+              </a:rPr>
+              <a:t>Advanced Packaging</a:t>
+            </a:r>
+            <a:endParaRPr lang="en-US" sz="1300" dirty="0"/>
+          </a:p>
+        </p:txBody>
+      </p:sp>
+      <p:sp>
+        <p:nvSpPr>
+          <p:cNvPr id="33" name="Shape 31"/>
+          <p:cNvSpPr/>
+          <p:nvPr/>
+        </p:nvSpPr>
+        <p:spPr>
+          <a:xfrm>
+            <a:off x="6995160" y="2907792"/>
+            <a:ext cx="914400" cy="0"/>
+          </a:xfrm>
+          <a:prstGeom prst="line">
+            <a:avLst/>
+          </a:prstGeom>
+          <a:noFill/>
+          <a:ln w="19050">
+            <a:solidFill>
+              <a:srgbClr val="CC0000"/>
+            </a:solidFill>
+            <a:prstDash val="solid"/>
+          </a:ln>
+        </p:spPr>
+      </p:sp>
+      <p:sp>
+        <p:nvSpPr>
+          <p:cNvPr id="34" name="Text 32"/>
+          <p:cNvSpPr/>
+          <p:nvPr/>
+        </p:nvSpPr>
+        <p:spPr>
+          <a:xfrm>
+            <a:off x="6601968" y="2999232"/>
+            <a:ext cx="1700784" cy="640080"/>
+          </a:xfrm>
+          <a:prstGeom prst="rect">
+            <a:avLst/>
+          </a:prstGeom>
+          <a:noFill/>
+          <a:ln/>
+        </p:spPr>
+        <p:txBody>
+          <a:bodyPr wrap="square" lIns="0" tIns="0" rIns="0" bIns="0" rtlCol="0" anchor="t"/>
+          <a:lstStyle/>
+          <a:p>
+            <a:pPr algn="l" indent="0" marL="0">
+              <a:buNone/>
+            </a:pPr>
+            <a:r>
+              <a:rPr lang="en-US" sz="900" dirty="0">
+                <a:solidFill>
+                  <a:srgbClr val="333333"/>
+                </a:solidFill>
+                <a:latin typeface="Arial" pitchFamily="34" charset="0"/>
+                <a:ea typeface="Arial" pitchFamily="34" charset="-122"/>
+                <a:cs typeface="Arial" pitchFamily="34" charset="-120"/>
+              </a:rPr>
+              <a:t>TSMC's CoWoS step fuses the GPU die to its HBM stack — the only volume supplier, sold out through 2026.</a:t>
+            </a:r>
+            <a:pPr algn="l" indent="0" marL="0">
+              <a:buNone/>
+            </a:pPr>
+            <a:r>
+              <a:rPr lang="en-US" sz="700" baseline="30000" dirty="0">
+                <a:solidFill>
+                  <a:srgbClr val="CC0000"/>
+                </a:solidFill>
+                <a:latin typeface="Arial" pitchFamily="34" charset="0"/>
+                <a:ea typeface="Arial" pitchFamily="34" charset="-122"/>
+                <a:cs typeface="Arial" pitchFamily="34" charset="-120"/>
+              </a:rPr>
+              <a:t> 4</a:t>
+            </a:r>
+            <a:endParaRPr lang="en-US" sz="900" dirty="0"/>
+          </a:p>
+        </p:txBody>
+      </p:sp>
+      <p:sp>
+        <p:nvSpPr>
+          <p:cNvPr id="35" name="Text 33"/>
+          <p:cNvSpPr/>
+          <p:nvPr/>
+        </p:nvSpPr>
+        <p:spPr>
+          <a:xfrm>
+            <a:off x="457200" y="3931920"/>
+            <a:ext cx="8229600" cy="228600"/>
+          </a:xfrm>
+          <a:prstGeom prst="rect">
+            <a:avLst/>
+          </a:prstGeom>
+          <a:noFill/>
+          <a:ln/>
+        </p:spPr>
+        <p:txBody>
+          <a:bodyPr wrap="square" lIns="0" tIns="0" rIns="0" bIns="0" rtlCol="0" anchor="ctr"/>
+          <a:lstStyle/>
+          <a:p>
+            <a:pPr algn="l" indent="0" marL="0">
+              <a:buNone/>
+            </a:pPr>
+            <a:r>
+              <a:rPr lang="en-US" sz="1000" b="1" spc="300" kern="0" dirty="0">
+                <a:solidFill>
+                  <a:srgbClr val="333333"/>
+                </a:solidFill>
+                <a:latin typeface="Arial" pitchFamily="34" charset="0"/>
+                <a:ea typeface="Arial" pitchFamily="34" charset="-122"/>
+                <a:cs typeface="Arial" pitchFamily="34" charset="-120"/>
+              </a:rPr>
+              <a:t>US RESHORING — WHEN LEADING-EDGE CAPACITY COMES ONLINE</a:t>
+            </a:r>
+            <a:endParaRPr lang="en-US" sz="1000" dirty="0"/>
+          </a:p>
+        </p:txBody>
+      </p:sp>
+      <p:sp>
+        <p:nvSpPr>
+          <p:cNvPr id="36" name="Shape 34"/>
+          <p:cNvSpPr/>
+          <p:nvPr/>
+        </p:nvSpPr>
+        <p:spPr>
+          <a:xfrm>
+            <a:off x="640080" y="4572000"/>
+            <a:ext cx="7863840" cy="0"/>
+          </a:xfrm>
+          <a:prstGeom prst="line">
+            <a:avLst/>
+          </a:prstGeom>
+          <a:noFill/>
+          <a:ln w="19050">
+            <a:solidFill>
+              <a:srgbClr val="333333"/>
+            </a:solidFill>
+            <a:prstDash val="solid"/>
+          </a:ln>
+        </p:spPr>
+      </p:sp>
+      <p:sp>
+        <p:nvSpPr>
+          <p:cNvPr id="37" name="Shape 35"/>
+          <p:cNvSpPr/>
+          <p:nvPr/>
+        </p:nvSpPr>
+        <p:spPr>
+          <a:xfrm>
+            <a:off x="566928" y="4498848"/>
+            <a:ext cx="146304" cy="146304"/>
+          </a:xfrm>
+          <a:prstGeom prst="ellipse">
+            <a:avLst/>
+          </a:prstGeom>
+          <a:solidFill>
+            <a:srgbClr val="CC0000"/>
+          </a:solidFill>
+          <a:ln w="12700">
+            <a:solidFill>
+              <a:srgbClr val="CC0000"/>
+            </a:solidFill>
+            <a:prstDash val="solid"/>
+          </a:ln>
+        </p:spPr>
+      </p:sp>
+      <p:sp>
+        <p:nvSpPr>
+          <p:cNvPr id="38" name="Text 36"/>
+          <p:cNvSpPr/>
+          <p:nvPr/>
+        </p:nvSpPr>
+        <p:spPr>
+          <a:xfrm>
+            <a:off x="457200" y="4206240"/>
+            <a:ext cx="1280160" cy="274320"/>
+          </a:xfrm>
+          <a:prstGeom prst="rect">
+            <a:avLst/>
+          </a:prstGeom>
+          <a:noFill/>
+          <a:ln/>
+        </p:spPr>
+        <p:txBody>
+          <a:bodyPr wrap="square" lIns="0" tIns="0" rIns="0" bIns="0" rtlCol="0" anchor="b"/>
+          <a:lstStyle/>
+          <a:p>
+            <a:pPr algn="l" indent="0" marL="0">
+              <a:buNone/>
+            </a:pPr>
+            <a:r>
+              <a:rPr lang="en-US" sz="1000" b="1" dirty="0">
+                <a:solidFill>
+                  <a:srgbClr val="333333"/>
+                </a:solidFill>
+                <a:latin typeface="Arial" pitchFamily="34" charset="0"/>
+                <a:ea typeface="Arial" pitchFamily="34" charset="-122"/>
+                <a:cs typeface="Arial" pitchFamily="34" charset="-120"/>
+              </a:rPr>
+              <a:t>TSMC AZ Fab 1</a:t>
+            </a:r>
+            <a:endParaRPr lang="en-US" sz="1000" dirty="0"/>
+          </a:p>
+        </p:txBody>
+      </p:sp>
+      <p:sp>
+        <p:nvSpPr>
+          <p:cNvPr id="39" name="Text 37"/>
+          <p:cNvSpPr/>
+          <p:nvPr/>
+        </p:nvSpPr>
+        <p:spPr>
+          <a:xfrm>
+            <a:off x="365760" y="4709160"/>
+            <a:ext cx="640080" cy="228600"/>
+          </a:xfrm>
+          <a:prstGeom prst="rect">
+            <a:avLst/>
+          </a:prstGeom>
+          <a:noFill/>
+          <a:ln/>
+        </p:spPr>
+        <p:txBody>
+          <a:bodyPr wrap="square" lIns="0" tIns="0" rIns="0" bIns="0" rtlCol="0" anchor="t"/>
+          <a:lstStyle/>
+          <a:p>
+            <a:pPr algn="l" indent="0" marL="0">
+              <a:buNone/>
+            </a:pPr>
+            <a:r>
+              <a:rPr lang="en-US" sz="1000" b="1" dirty="0">
+                <a:solidFill>
+                  <a:srgbClr val="CC0000"/>
+                </a:solidFill>
+                <a:latin typeface="Arial" pitchFamily="34" charset="0"/>
+                <a:ea typeface="Arial" pitchFamily="34" charset="-122"/>
+                <a:cs typeface="Arial" pitchFamily="34" charset="-120"/>
+              </a:rPr>
+              <a:t>2025</a:t>
+            </a:r>
+            <a:endParaRPr lang="en-US" sz="1000" dirty="0"/>
+          </a:p>
+        </p:txBody>
+      </p:sp>
+      <p:sp>
+        <p:nvSpPr>
+          <p:cNvPr id="40" name="Shape 38"/>
+          <p:cNvSpPr/>
+          <p:nvPr/>
+        </p:nvSpPr>
+        <p:spPr>
+          <a:xfrm>
+            <a:off x="2532888" y="4498848"/>
+            <a:ext cx="146304" cy="146304"/>
+          </a:xfrm>
+          <a:prstGeom prst="ellipse">
+            <a:avLst/>
+          </a:prstGeom>
+          <a:solidFill>
+            <a:srgbClr val="CC0000"/>
+          </a:solidFill>
+          <a:ln w="12700">
+            <a:solidFill>
+              <a:srgbClr val="CC0000"/>
+            </a:solidFill>
+            <a:prstDash val="solid"/>
+          </a:ln>
+        </p:spPr>
+      </p:sp>
+      <p:sp>
+        <p:nvSpPr>
+          <p:cNvPr id="41" name="Text 39"/>
+          <p:cNvSpPr/>
+          <p:nvPr/>
+        </p:nvSpPr>
+        <p:spPr>
+          <a:xfrm>
+            <a:off x="1828800" y="4206240"/>
+            <a:ext cx="1554480" cy="274320"/>
+          </a:xfrm>
+          <a:prstGeom prst="rect">
+            <a:avLst/>
+          </a:prstGeom>
+          <a:noFill/>
+          <a:ln/>
+        </p:spPr>
+        <p:txBody>
+          <a:bodyPr wrap="square" lIns="0" tIns="0" rIns="0" bIns="0" rtlCol="0" anchor="b"/>
+          <a:lstStyle/>
+          <a:p>
+            <a:pPr algn="ctr" indent="0" marL="0">
+              <a:buNone/>
+            </a:pPr>
+            <a:r>
+              <a:rPr lang="en-US" sz="1000" b="1" dirty="0">
+                <a:solidFill>
+                  <a:srgbClr val="333333"/>
+                </a:solidFill>
+                <a:latin typeface="Arial" pitchFamily="34" charset="0"/>
+                <a:ea typeface="Arial" pitchFamily="34" charset="-122"/>
+                <a:cs typeface="Arial" pitchFamily="34" charset="-120"/>
+              </a:rPr>
+              <a:t>Samsung Taylor</a:t>
+            </a:r>
+            <a:endParaRPr lang="en-US" sz="1000" dirty="0"/>
+          </a:p>
+        </p:txBody>
+      </p:sp>
+      <p:sp>
+        <p:nvSpPr>
+          <p:cNvPr id="42" name="Text 40"/>
+          <p:cNvSpPr/>
+          <p:nvPr/>
+        </p:nvSpPr>
+        <p:spPr>
+          <a:xfrm>
+            <a:off x="2240280" y="4709160"/>
+            <a:ext cx="731520" cy="228600"/>
+          </a:xfrm>
+          <a:prstGeom prst="rect">
+            <a:avLst/>
+          </a:prstGeom>
+          <a:noFill/>
+          <a:ln/>
+        </p:spPr>
+        <p:txBody>
+          <a:bodyPr wrap="square" lIns="0" tIns="0" rIns="0" bIns="0" rtlCol="0" anchor="t"/>
+          <a:lstStyle/>
+          <a:p>
+            <a:pPr algn="ctr" indent="0" marL="0">
+              <a:buNone/>
+            </a:pPr>
+            <a:r>
+              <a:rPr lang="en-US" sz="1000" b="1" dirty="0">
+                <a:solidFill>
+                  <a:srgbClr val="CC0000"/>
+                </a:solidFill>
+                <a:latin typeface="Arial" pitchFamily="34" charset="0"/>
+                <a:ea typeface="Arial" pitchFamily="34" charset="-122"/>
+                <a:cs typeface="Arial" pitchFamily="34" charset="-120"/>
+              </a:rPr>
+              <a:t>2026</a:t>
+            </a:r>
+            <a:endParaRPr lang="en-US" sz="1000" dirty="0"/>
+          </a:p>
+        </p:txBody>
+      </p:sp>
+      <p:sp>
+        <p:nvSpPr>
+          <p:cNvPr id="43" name="Shape 41"/>
+          <p:cNvSpPr/>
+          <p:nvPr/>
+        </p:nvSpPr>
+        <p:spPr>
+          <a:xfrm>
+            <a:off x="4498848" y="4498848"/>
+            <a:ext cx="146304" cy="146304"/>
+          </a:xfrm>
+          <a:prstGeom prst="ellipse">
+            <a:avLst/>
+          </a:prstGeom>
+          <a:solidFill>
+            <a:srgbClr val="CC0000"/>
+          </a:solidFill>
+          <a:ln w="12700">
+            <a:solidFill>
+              <a:srgbClr val="CC0000"/>
+            </a:solidFill>
+            <a:prstDash val="solid"/>
+          </a:ln>
+        </p:spPr>
+      </p:sp>
+      <p:sp>
+        <p:nvSpPr>
+          <p:cNvPr id="44" name="Text 42"/>
+          <p:cNvSpPr/>
+          <p:nvPr/>
+        </p:nvSpPr>
+        <p:spPr>
+          <a:xfrm>
+            <a:off x="3794760" y="4206240"/>
+            <a:ext cx="1554480" cy="274320"/>
+          </a:xfrm>
+          <a:prstGeom prst="rect">
+            <a:avLst/>
+          </a:prstGeom>
+          <a:noFill/>
+          <a:ln/>
+        </p:spPr>
+        <p:txBody>
+          <a:bodyPr wrap="square" lIns="0" tIns="0" rIns="0" bIns="0" rtlCol="0" anchor="b"/>
+          <a:lstStyle/>
+          <a:p>
+            <a:pPr algn="ctr" indent="0" marL="0">
+              <a:buNone/>
+            </a:pPr>
+            <a:r>
+              <a:rPr lang="en-US" sz="1000" b="1" dirty="0">
+                <a:solidFill>
+                  <a:srgbClr val="333333"/>
+                </a:solidFill>
+                <a:latin typeface="Arial" pitchFamily="34" charset="0"/>
+                <a:ea typeface="Arial" pitchFamily="34" charset="-122"/>
+                <a:cs typeface="Arial" pitchFamily="34" charset="-120"/>
+              </a:rPr>
+              <a:t>TSMC AZ Fab 2</a:t>
+            </a:r>
+            <a:endParaRPr lang="en-US" sz="1000" dirty="0"/>
+          </a:p>
+        </p:txBody>
+      </p:sp>
+      <p:sp>
+        <p:nvSpPr>
+          <p:cNvPr id="45" name="Text 43"/>
+          <p:cNvSpPr/>
+          <p:nvPr/>
+        </p:nvSpPr>
+        <p:spPr>
+          <a:xfrm>
+            <a:off x="4206240" y="4709160"/>
+            <a:ext cx="731520" cy="228600"/>
+          </a:xfrm>
+          <a:prstGeom prst="rect">
+            <a:avLst/>
+          </a:prstGeom>
+          <a:noFill/>
+          <a:ln/>
+        </p:spPr>
+        <p:txBody>
+          <a:bodyPr wrap="square" lIns="0" tIns="0" rIns="0" bIns="0" rtlCol="0" anchor="t"/>
+          <a:lstStyle/>
+          <a:p>
+            <a:pPr algn="ctr" indent="0" marL="0">
+              <a:buNone/>
+            </a:pPr>
+            <a:r>
+              <a:rPr lang="en-US" sz="1000" b="1" dirty="0">
+                <a:solidFill>
+                  <a:srgbClr val="CC0000"/>
+                </a:solidFill>
+                <a:latin typeface="Arial" pitchFamily="34" charset="0"/>
+                <a:ea typeface="Arial" pitchFamily="34" charset="-122"/>
+                <a:cs typeface="Arial" pitchFamily="34" charset="-120"/>
+              </a:rPr>
+              <a:t>2027</a:t>
+            </a:r>
+            <a:endParaRPr lang="en-US" sz="1000" dirty="0"/>
+          </a:p>
+        </p:txBody>
+      </p:sp>
+      <p:sp>
+        <p:nvSpPr>
+          <p:cNvPr id="46" name="Shape 44"/>
+          <p:cNvSpPr/>
+          <p:nvPr/>
+        </p:nvSpPr>
+        <p:spPr>
+          <a:xfrm>
+            <a:off x="6464808" y="4498848"/>
+            <a:ext cx="146304" cy="146304"/>
+          </a:xfrm>
+          <a:prstGeom prst="ellipse">
+            <a:avLst/>
+          </a:prstGeom>
+          <a:solidFill>
+            <a:srgbClr val="CC0000"/>
+          </a:solidFill>
+          <a:ln w="12700">
+            <a:solidFill>
+              <a:srgbClr val="CC0000"/>
+            </a:solidFill>
+            <a:prstDash val="solid"/>
+          </a:ln>
+        </p:spPr>
+      </p:sp>
+      <p:sp>
+        <p:nvSpPr>
+          <p:cNvPr id="47" name="Text 45"/>
+          <p:cNvSpPr/>
+          <p:nvPr/>
+        </p:nvSpPr>
+        <p:spPr>
+          <a:xfrm>
+            <a:off x="5760720" y="4206240"/>
+            <a:ext cx="1554480" cy="274320"/>
+          </a:xfrm>
+          <a:prstGeom prst="rect">
+            <a:avLst/>
+          </a:prstGeom>
+          <a:noFill/>
+          <a:ln/>
+        </p:spPr>
+        <p:txBody>
+          <a:bodyPr wrap="square" lIns="0" tIns="0" rIns="0" bIns="0" rtlCol="0" anchor="b"/>
+          <a:lstStyle/>
+          <a:p>
+            <a:pPr algn="ctr" indent="0" marL="0">
+              <a:buNone/>
+            </a:pPr>
+            <a:r>
+              <a:rPr lang="en-US" sz="1000" b="1" dirty="0">
+                <a:solidFill>
+                  <a:srgbClr val="333333"/>
                 </a:solidFill>
                 <a:latin typeface="Arial" pitchFamily="34" charset="0"/>
                 <a:ea typeface="Arial" pitchFamily="34" charset="-122"/>
@@ -14928,20 +15555,162 @@
               </a:rPr>
               <a:t>Intel Ohio</a:t>
             </a:r>
-            <a:endParaRPr lang="en-US" sz="1050" dirty="0"/>
-          </a:p>
-        </p:txBody>
-      </p:sp>
-      <p:sp>
-        <p:nvSpPr>
-          <p:cNvPr id="27" name="Text 25"/>
-          <p:cNvSpPr/>
-          <p:nvPr/>
-        </p:nvSpPr>
-        <p:spPr>
-          <a:xfrm>
-            <a:off x="6652260" y="5394960"/>
-            <a:ext cx="1828800" cy="411480"/>
+            <a:endParaRPr lang="en-US" sz="1000" dirty="0"/>
+          </a:p>
+        </p:txBody>
+      </p:sp>
+      <p:sp>
+        <p:nvSpPr>
+          <p:cNvPr id="48" name="Text 46"/>
+          <p:cNvSpPr/>
+          <p:nvPr/>
+        </p:nvSpPr>
+        <p:spPr>
+          <a:xfrm>
+            <a:off x="6172200" y="4709160"/>
+            <a:ext cx="731520" cy="228600"/>
+          </a:xfrm>
+          <a:prstGeom prst="rect">
+            <a:avLst/>
+          </a:prstGeom>
+          <a:noFill/>
+          <a:ln/>
+        </p:spPr>
+        <p:txBody>
+          <a:bodyPr wrap="square" lIns="0" tIns="0" rIns="0" bIns="0" rtlCol="0" anchor="t"/>
+          <a:lstStyle/>
+          <a:p>
+            <a:pPr algn="ctr" indent="0" marL="0">
+              <a:buNone/>
+            </a:pPr>
+            <a:r>
+              <a:rPr lang="en-US" sz="1000" b="1" dirty="0">
+                <a:solidFill>
+                  <a:srgbClr val="CC0000"/>
+                </a:solidFill>
+                <a:latin typeface="Arial" pitchFamily="34" charset="0"/>
+                <a:ea typeface="Arial" pitchFamily="34" charset="-122"/>
+                <a:cs typeface="Arial" pitchFamily="34" charset="-120"/>
+              </a:rPr>
+              <a:t>2028</a:t>
+            </a:r>
+            <a:endParaRPr lang="en-US" sz="1000" dirty="0"/>
+          </a:p>
+        </p:txBody>
+      </p:sp>
+      <p:sp>
+        <p:nvSpPr>
+          <p:cNvPr id="49" name="Shape 47"/>
+          <p:cNvSpPr/>
+          <p:nvPr/>
+        </p:nvSpPr>
+        <p:spPr>
+          <a:xfrm>
+            <a:off x="8430768" y="4498848"/>
+            <a:ext cx="146304" cy="146304"/>
+          </a:xfrm>
+          <a:prstGeom prst="ellipse">
+            <a:avLst/>
+          </a:prstGeom>
+          <a:solidFill>
+            <a:srgbClr val="CC0000"/>
+          </a:solidFill>
+          <a:ln w="12700">
+            <a:solidFill>
+              <a:srgbClr val="CC0000"/>
+            </a:solidFill>
+            <a:prstDash val="solid"/>
+          </a:ln>
+        </p:spPr>
+      </p:sp>
+      <p:sp>
+        <p:nvSpPr>
+          <p:cNvPr id="50" name="Text 48"/>
+          <p:cNvSpPr/>
+          <p:nvPr/>
+        </p:nvSpPr>
+        <p:spPr>
+          <a:xfrm>
+            <a:off x="7406640" y="4206240"/>
+            <a:ext cx="1280160" cy="274320"/>
+          </a:xfrm>
+          <a:prstGeom prst="rect">
+            <a:avLst/>
+          </a:prstGeom>
+          <a:noFill/>
+          <a:ln/>
+        </p:spPr>
+        <p:txBody>
+          <a:bodyPr wrap="square" lIns="0" tIns="0" rIns="0" bIns="0" rtlCol="0" anchor="b"/>
+          <a:lstStyle/>
+          <a:p>
+            <a:pPr algn="r" indent="0" marL="0">
+              <a:buNone/>
+            </a:pPr>
+            <a:r>
+              <a:rPr lang="en-US" sz="1000" b="1" dirty="0">
+                <a:solidFill>
+                  <a:srgbClr val="333333"/>
+                </a:solidFill>
+                <a:latin typeface="Arial" pitchFamily="34" charset="0"/>
+                <a:ea typeface="Arial" pitchFamily="34" charset="-122"/>
+                <a:cs typeface="Arial" pitchFamily="34" charset="-120"/>
+              </a:rPr>
+              <a:t>Micron Clay NY</a:t>
+            </a:r>
+            <a:endParaRPr lang="en-US" sz="1000" dirty="0"/>
+          </a:p>
+        </p:txBody>
+      </p:sp>
+      <p:sp>
+        <p:nvSpPr>
+          <p:cNvPr id="51" name="Text 49"/>
+          <p:cNvSpPr/>
+          <p:nvPr/>
+        </p:nvSpPr>
+        <p:spPr>
+          <a:xfrm>
+            <a:off x="7955280" y="4709160"/>
+            <a:ext cx="731520" cy="228600"/>
+          </a:xfrm>
+          <a:prstGeom prst="rect">
+            <a:avLst/>
+          </a:prstGeom>
+          <a:noFill/>
+          <a:ln/>
+        </p:spPr>
+        <p:txBody>
+          <a:bodyPr wrap="square" lIns="0" tIns="0" rIns="0" bIns="0" rtlCol="0" anchor="t"/>
+          <a:lstStyle/>
+          <a:p>
+            <a:pPr algn="r" indent="0" marL="0">
+              <a:buNone/>
+            </a:pPr>
+            <a:r>
+              <a:rPr lang="en-US" sz="1000" b="1" dirty="0">
+                <a:solidFill>
+                  <a:srgbClr val="CC0000"/>
+                </a:solidFill>
+                <a:latin typeface="Arial" pitchFamily="34" charset="0"/>
+                <a:ea typeface="Arial" pitchFamily="34" charset="-122"/>
+                <a:cs typeface="Arial" pitchFamily="34" charset="-120"/>
+              </a:rPr>
+              <a:t>2030+</a:t>
+            </a:r>
+            <a:endParaRPr lang="en-US" sz="1000" dirty="0"/>
+          </a:p>
+        </p:txBody>
+      </p:sp>
+      <p:sp>
+        <p:nvSpPr>
+          <p:cNvPr id="52" name="Text 50"/>
+          <p:cNvSpPr/>
+          <p:nvPr/>
+        </p:nvSpPr>
+        <p:spPr>
+          <a:xfrm>
+            <a:off x="457200" y="5349240"/>
+            <a:ext cx="8229600" cy="274320"/>
           </a:xfrm>
           <a:prstGeom prst="rect">
             <a:avLst/>
@@ -14953,27 +15722,27 @@
           <a:bodyPr wrap="square" lIns="0" tIns="0" rIns="0" bIns="0" rtlCol="0" anchor="ctr"/>
           <a:lstStyle/>
           <a:p>
-            <a:pPr indent="0" marL="0">
-              <a:buNone/>
-            </a:pPr>
-            <a:r>
-              <a:rPr lang="en-US" sz="900" dirty="0">
-                <a:solidFill>
-                  <a:srgbClr val="333333"/>
-                </a:solidFill>
-                <a:latin typeface="Arial" pitchFamily="34" charset="0"/>
-                <a:ea typeface="Arial" pitchFamily="34" charset="-122"/>
-                <a:cs typeface="Arial" pitchFamily="34" charset="-120"/>
-              </a:rPr>
-              <a:t>Two fabs; online ~2027–28</a:t>
-            </a:r>
-            <a:endParaRPr lang="en-US" sz="900" dirty="0"/>
-          </a:p>
-        </p:txBody>
-      </p:sp>
-      <p:sp>
-        <p:nvSpPr>
-          <p:cNvPr id="28" name="Text 26"/>
+            <a:pPr algn="ctr" indent="0" marL="0">
+              <a:buNone/>
+            </a:pPr>
+            <a:r>
+              <a:rPr lang="en-US" sz="950" i="1" dirty="0">
+                <a:solidFill>
+                  <a:srgbClr val="666666"/>
+                </a:solidFill>
+                <a:latin typeface="Arial" pitchFamily="34" charset="0"/>
+                <a:ea typeface="Arial" pitchFamily="34" charset="-122"/>
+                <a:cs typeface="Arial" pitchFamily="34" charset="-120"/>
+              </a:rPr>
+              <a:t>Each link is single-sourced — and there is no spare capacity in the chain to absorb a shock at any one of them.</a:t>
+            </a:r>
+            <a:endParaRPr lang="en-US" sz="950" dirty="0"/>
+          </a:p>
+        </p:txBody>
+      </p:sp>
+      <p:sp>
+        <p:nvSpPr>
+          <p:cNvPr id="53" name="Text 51"/>
           <p:cNvSpPr/>
           <p:nvPr/>
         </p:nvSpPr>
@@ -15018,6 +15787,34 @@
                 <a:ea typeface="Arial" pitchFamily="34" charset="-122"/>
                 <a:cs typeface="Arial" pitchFamily="34" charset="-120"/>
               </a:rPr>
+              <a:t>ASML 2025 annual report, </a:t>
+            </a:r>
+            <a:pPr indent="0" marL="0">
+              <a:buNone/>
+            </a:pPr>
+            <a:r>
+              <a:rPr lang="en-US" sz="700" b="1" dirty="0">
+                <a:solidFill>
+                  <a:srgbClr val="999999"/>
+                </a:solidFill>
+                <a:latin typeface="Arial" pitchFamily="34" charset="0"/>
+                <a:ea typeface="Arial" pitchFamily="34" charset="-122"/>
+                <a:cs typeface="Arial" pitchFamily="34" charset="-120"/>
+              </a:rPr>
+              <a:t>(2) </a:t>
+            </a:r>
+            <a:pPr indent="0" marL="0">
+              <a:buNone/>
+            </a:pPr>
+            <a:r>
+              <a:rPr lang="en-US" sz="700" dirty="0">
+                <a:solidFill>
+                  <a:srgbClr val="999999"/>
+                </a:solidFill>
+                <a:latin typeface="Arial" pitchFamily="34" charset="0"/>
+                <a:ea typeface="Arial" pitchFamily="34" charset="-122"/>
+                <a:cs typeface="Arial" pitchFamily="34" charset="-120"/>
+              </a:rPr>
               <a:t>TrendForce / Counterpoint, 2025, </a:t>
             </a:r>
             <a:pPr indent="0" marL="0">
@@ -15032,7 +15829,7 @@
                 <a:ea typeface="Arial" pitchFamily="34" charset="-122"/>
                 <a:cs typeface="Arial" pitchFamily="34" charset="-120"/>
               </a:rPr>
-              <a:t>(2) </a:t>
+              <a:t>(3) </a:t>
             </a:r>
             <a:pPr indent="0" marL="0">
               <a:buNone/>
@@ -15046,7 +15843,7 @@
                 <a:ea typeface="Arial" pitchFamily="34" charset="-122"/>
                 <a:cs typeface="Arial" pitchFamily="34" charset="-120"/>
               </a:rPr>
-              <a:t>TrendForce, 2025, </a:t>
+              <a:t>TrendForce HBM tracker; SK Hynix Q1 2026 commentary, </a:t>
             </a:r>
             <a:pPr indent="0" marL="0">
               <a:buNone/>
@@ -15060,7 +15857,7 @@
                 <a:ea typeface="Arial" pitchFamily="34" charset="-122"/>
                 <a:cs typeface="Arial" pitchFamily="34" charset="-120"/>
               </a:rPr>
-              <a:t>(3) </a:t>
+              <a:t>(4) </a:t>
             </a:r>
             <a:pPr indent="0" marL="0">
               <a:buNone/>
@@ -15074,35 +15871,7 @@
                 <a:ea typeface="Arial" pitchFamily="34" charset="-122"/>
                 <a:cs typeface="Arial" pitchFamily="34" charset="-120"/>
               </a:rPr>
-              <a:t>SIA semiconductor supply-chain report, </a:t>
-            </a:r>
-            <a:pPr indent="0" marL="0">
-              <a:buNone/>
-            </a:pPr>
-            <a:r>
-              <a:rPr lang="en-US" sz="700" b="1" dirty="0">
-                <a:solidFill>
-                  <a:srgbClr val="999999"/>
-                </a:solidFill>
-                <a:latin typeface="Arial" pitchFamily="34" charset="0"/>
-                <a:ea typeface="Arial" pitchFamily="34" charset="-122"/>
-                <a:cs typeface="Arial" pitchFamily="34" charset="-120"/>
-              </a:rPr>
-              <a:t>(4) </a:t>
-            </a:r>
-            <a:pPr indent="0" marL="0">
-              <a:buNone/>
-            </a:pPr>
-            <a:r>
-              <a:rPr lang="en-US" sz="700" dirty="0">
-                <a:solidFill>
-                  <a:srgbClr val="999999"/>
-                </a:solidFill>
-                <a:latin typeface="Arial" pitchFamily="34" charset="0"/>
-                <a:ea typeface="Arial" pitchFamily="34" charset="-122"/>
-                <a:cs typeface="Arial" pitchFamily="34" charset="-120"/>
-              </a:rPr>
-              <a:t>ASML 2025 annual report.</a:t>
+              <a:t>TSMC Q4 2025 earnings commentary.</a:t>
             </a:r>
             <a:endParaRPr lang="en-US" sz="700" dirty="0"/>
           </a:p>
@@ -15110,7 +15879,7 @@
       </p:sp>
       <p:sp>
         <p:nvSpPr>
-          <p:cNvPr id="29" name="Shape 27"/>
+          <p:cNvPr id="54" name="Shape 52"/>
           <p:cNvSpPr/>
           <p:nvPr/>
         </p:nvSpPr>
@@ -15135,7 +15904,7 @@
       </p:sp>
       <p:sp>
         <p:nvSpPr>
-          <p:cNvPr id="30" name="Text 28"/>
+          <p:cNvPr id="55" name="Text 53"/>
           <p:cNvSpPr/>
           <p:nvPr/>
         </p:nvSpPr>
@@ -15174,7 +15943,7 @@
       </p:sp>
       <p:sp>
         <p:nvSpPr>
-          <p:cNvPr id="31" name="Text 29"/>
+          <p:cNvPr id="56" name="Text 54"/>
           <p:cNvSpPr/>
           <p:nvPr/>
         </p:nvSpPr>

--- a/ai-markets-deck.pptx
+++ b/ai-markets-deck.pptx
@@ -4945,7 +4945,7 @@
                 <a:ea typeface="Arial Black" pitchFamily="34" charset="-122"/>
                 <a:cs typeface="Arial Black" pitchFamily="34" charset="-120"/>
               </a:rPr>
-              <a:t>The labs.</a:t>
+              <a:t>Q1 funding doubled all of 2025 — two giants, one public, one merger</a:t>
             </a:r>
             <a:endParaRPr lang="en-US" sz="2400" dirty="0"/>
           </a:p>
@@ -5887,7 +5887,46 @@
       </p:sp>
       <p:sp>
         <p:nvSpPr>
-          <p:cNvPr id="31" name="Shape 25"/>
+          <p:cNvPr id="31" name="Text 25"/>
+          <p:cNvSpPr/>
+          <p:nvPr/>
+        </p:nvSpPr>
+        <p:spPr>
+          <a:xfrm>
+            <a:off x="457200" y="4919472"/>
+            <a:ext cx="8229600" cy="182880"/>
+          </a:xfrm>
+          <a:prstGeom prst="rect">
+            <a:avLst/>
+          </a:prstGeom>
+          <a:noFill/>
+          <a:ln/>
+        </p:spPr>
+        <p:txBody>
+          <a:bodyPr wrap="square" lIns="0" tIns="0" rIns="0" bIns="0" rtlCol="0" anchor="t"/>
+          <a:lstStyle/>
+          <a:p>
+            <a:pPr algn="r" indent="0" marL="0">
+              <a:buNone/>
+            </a:pPr>
+            <a:r>
+              <a:rPr lang="en-US" sz="800" i="1" dirty="0">
+                <a:solidFill>
+                  <a:srgbClr val="666666"/>
+                </a:solidFill>
+                <a:latin typeface="Arial" pitchFamily="34" charset="0"/>
+                <a:ea typeface="Arial" pitchFamily="34" charset="-122"/>
+                <a:cs typeface="Arial" pitchFamily="34" charset="-120"/>
+              </a:rPr>
+              <a:t>All valuations as of Apr 22, 2026.</a:t>
+            </a:r>
+            <a:endParaRPr lang="en-US" sz="800" dirty="0"/>
+          </a:p>
+        </p:txBody>
+      </p:sp>
+      <p:sp>
+        <p:nvSpPr>
+          <p:cNvPr id="32" name="Shape 26"/>
           <p:cNvSpPr/>
           <p:nvPr/>
         </p:nvSpPr>
@@ -5912,7 +5951,7 @@
       </p:sp>
       <p:sp>
         <p:nvSpPr>
-          <p:cNvPr id="32" name="Text 26"/>
+          <p:cNvPr id="33" name="Text 27"/>
           <p:cNvSpPr/>
           <p:nvPr/>
         </p:nvSpPr>
@@ -5965,7 +6004,7 @@
       </p:sp>
       <p:sp>
         <p:nvSpPr>
-          <p:cNvPr id="33" name="Text 27"/>
+          <p:cNvPr id="34" name="Text 28"/>
           <p:cNvSpPr/>
           <p:nvPr/>
         </p:nvSpPr>
@@ -6130,7 +6169,7 @@
       </p:sp>
       <p:sp>
         <p:nvSpPr>
-          <p:cNvPr id="34" name="Shape 28"/>
+          <p:cNvPr id="35" name="Shape 29"/>
           <p:cNvSpPr/>
           <p:nvPr/>
         </p:nvSpPr>
@@ -6155,7 +6194,7 @@
       </p:sp>
       <p:sp>
         <p:nvSpPr>
-          <p:cNvPr id="35" name="Text 29"/>
+          <p:cNvPr id="36" name="Text 30"/>
           <p:cNvSpPr/>
           <p:nvPr/>
         </p:nvSpPr>
@@ -6194,7 +6233,7 @@
       </p:sp>
       <p:sp>
         <p:nvSpPr>
-          <p:cNvPr id="36" name="Text 30"/>
+          <p:cNvPr id="37" name="Text 31"/>
           <p:cNvSpPr/>
           <p:nvPr/>
         </p:nvSpPr>
@@ -6355,7 +6394,7 @@
                 <a:ea typeface="Arial Black" pitchFamily="34" charset="-122"/>
                 <a:cs typeface="Arial Black" pitchFamily="34" charset="-120"/>
               </a:rPr>
-              <a:t>Earnings &amp; valuations.</a:t>
+              <a:t>Top 10 Tech grow 4× faster than Top 10 Non-Tech — at a similar multiple</a:t>
             </a:r>
             <a:endParaRPr lang="en-US" sz="2400" dirty="0"/>
           </a:p>
@@ -6394,7 +6433,7 @@
                 <a:ea typeface="Arial" pitchFamily="34" charset="-122"/>
                 <a:cs typeface="Arial" pitchFamily="34" charset="-120"/>
               </a:rPr>
-              <a:t>Top 10 Tech firms are growing 4× faster than the top 10 Non-Tech — at a lower multiple. The divergence in fundamentals has not been priced into valuations.</a:t>
+              <a:t>Top 10 Tech firms are growing 4× faster than the top 10 Non-Tech — at a similar multiple. The divergence in fundamentals has not been priced into valuations.</a:t>
             </a:r>
             <a:endParaRPr lang="en-US" sz="1350" dirty="0"/>
           </a:p>
@@ -9100,7 +9139,7 @@
                 <a:ea typeface="Arial" pitchFamily="34" charset="-122"/>
                 <a:cs typeface="Arial" pitchFamily="34" charset="-120"/>
               </a:rPr>
-              <a:t>Tech median: ~26× fwd P/E on ~17% forward revenue growth. Non-Tech: ~23× on ~5%. The divergence is in the engine, not the multiple.</a:t>
+              <a:t>Tech median: ~26× fwd P/E on ~17% forward revenue growth. Non-Tech: ~23× on ~5% (consensus, Apr 22, 2026). The divergence is in the engine, not the multiple.</a:t>
             </a:r>
             <a:endParaRPr lang="en-US" sz="1100" dirty="0"/>
           </a:p>
@@ -9372,7 +9411,7 @@
                 <a:ea typeface="Arial Black" pitchFamily="34" charset="-122"/>
                 <a:cs typeface="Arial Black" pitchFamily="34" charset="-120"/>
               </a:rPr>
-              <a:t>What is agentic AI?</a:t>
+              <a:t>Agentic AI uses 10–100× the compute per session — that's the capex thesis</a:t>
             </a:r>
             <a:endParaRPr lang="en-US" sz="2400" dirty="0"/>
           </a:p>
@@ -10877,7 +10916,7 @@
                 <a:ea typeface="Arial Black" pitchFamily="34" charset="-122"/>
                 <a:cs typeface="Arial Black" pitchFamily="34" charset="-120"/>
               </a:rPr>
-              <a:t>The divergence.</a:t>
+              <a:t>Semis up, software down — one theme, two outcomes</a:t>
             </a:r>
             <a:endParaRPr lang="en-US" sz="2400" dirty="0"/>
           </a:p>
@@ -10916,7 +10955,7 @@
                 <a:ea typeface="Arial" pitchFamily="34" charset="-122"/>
                 <a:cs typeface="Arial" pitchFamily="34" charset="-120"/>
               </a:rPr>
-              <a:t>Semis are up, software is down — a wide spread inside one theme. The sell-off is starting to bleed into private credit and PE-held SaaS.</a:t>
+              <a:t>A 50+ point spread inside a single theme — and the pain is now bleeding into private credit and PE-held SaaS.</a:t>
             </a:r>
             <a:endParaRPr lang="en-US" sz="1350" dirty="0"/>
           </a:p>
@@ -16104,7 +16143,7 @@
                 <a:ea typeface="Arial Black" pitchFamily="34" charset="-122"/>
                 <a:cs typeface="Arial Black" pitchFamily="34" charset="-120"/>
               </a:rPr>
-              <a:t>Policy &amp; regulation.</a:t>
+              <a:t>Export controls, EU rules, and rare-earths decide who sells what</a:t>
             </a:r>
             <a:endParaRPr lang="en-US" sz="2400" dirty="0"/>
           </a:p>
@@ -17735,7 +17774,7 @@
                 <a:ea typeface="Arial Black" pitchFamily="34" charset="-122"/>
                 <a:cs typeface="Arial Black" pitchFamily="34" charset="-120"/>
               </a:rPr>
-              <a:t>AI backlash.</a:t>
+              <a:t>Communities, voters, and labor are pricing the AI infrastructure bet lower</a:t>
             </a:r>
             <a:endParaRPr lang="en-US" sz="2400" dirty="0"/>
           </a:p>
@@ -18198,7 +18237,7 @@
                 <a:ea typeface="Arial" pitchFamily="34" charset="-122"/>
                 <a:cs typeface="Arial" pitchFamily="34" charset="-120"/>
               </a:rPr>
-              <a:t> of Americans view AI positively. March 2026 "Stop the AI Race" protests</a:t>
+              <a:t> (Echelon Insights, Mar 2026) of Americans view AI positively. March 2026 "Stop the AI Race" protests</a:t>
             </a:r>
             <a:pPr indent="0" marL="0">
               <a:buNone/>
@@ -18816,7 +18855,7 @@
                 <a:ea typeface="Arial Black" pitchFamily="34" charset="-122"/>
                 <a:cs typeface="Arial Black" pitchFamily="34" charset="-120"/>
               </a:rPr>
-              <a:t>Beyond the grid.</a:t>
+              <a:t>Orbital compute sidesteps Earth-bound bottlenecks — pilot stage today</a:t>
             </a:r>
             <a:endParaRPr lang="en-US" sz="2400" dirty="0"/>
           </a:p>
@@ -19760,7 +19799,7 @@
                 <a:ea typeface="Arial Black" pitchFamily="34" charset="-122"/>
                 <a:cs typeface="Arial Black" pitchFamily="34" charset="-120"/>
               </a:rPr>
-              <a:t>Physical AI.</a:t>
+              <a:t>Humanoids hit pilot scale — every robot is a walking inference endpoint</a:t>
             </a:r>
             <a:endParaRPr lang="en-US" sz="2400" dirty="0"/>
           </a:p>
@@ -20704,7 +20743,7 @@
         <p:spPr>
           <a:xfrm>
             <a:off x="457200" y="1737360"/>
-            <a:ext cx="109728" cy="585216"/>
+            <a:ext cx="109728" cy="493776"/>
           </a:xfrm>
           <a:prstGeom prst="rect">
             <a:avLst/>
@@ -20729,7 +20768,7 @@
         <p:spPr>
           <a:xfrm>
             <a:off x="731520" y="1737360"/>
-            <a:ext cx="822960" cy="585216"/>
+            <a:ext cx="822960" cy="493776"/>
           </a:xfrm>
           <a:prstGeom prst="rect">
             <a:avLst/>
@@ -20768,7 +20807,7 @@
         <p:spPr>
           <a:xfrm>
             <a:off x="1645920" y="1737360"/>
-            <a:ext cx="5943600" cy="585216"/>
+            <a:ext cx="5943600" cy="493776"/>
           </a:xfrm>
           <a:prstGeom prst="rect">
             <a:avLst/>
@@ -20807,7 +20846,7 @@
         <p:spPr>
           <a:xfrm>
             <a:off x="7315200" y="1737360"/>
-            <a:ext cx="1371600" cy="585216"/>
+            <a:ext cx="1371600" cy="493776"/>
           </a:xfrm>
           <a:prstGeom prst="rect">
             <a:avLst/>
@@ -20845,7 +20884,7 @@
         </p:nvSpPr>
         <p:spPr>
           <a:xfrm>
-            <a:off x="731520" y="2359152"/>
+            <a:off x="731520" y="2267712"/>
             <a:ext cx="7955280" cy="0"/>
           </a:xfrm>
           <a:prstGeom prst="line">
@@ -20868,8 +20907,8 @@
         </p:nvSpPr>
         <p:spPr>
           <a:xfrm>
-            <a:off x="457200" y="2395728"/>
-            <a:ext cx="109728" cy="585216"/>
+            <a:off x="457200" y="2304288"/>
+            <a:ext cx="109728" cy="493776"/>
           </a:xfrm>
           <a:prstGeom prst="rect">
             <a:avLst/>
@@ -20893,8 +20932,8 @@
         </p:nvSpPr>
         <p:spPr>
           <a:xfrm>
-            <a:off x="731520" y="2395728"/>
-            <a:ext cx="822960" cy="585216"/>
+            <a:off x="731520" y="2304288"/>
+            <a:ext cx="822960" cy="493776"/>
           </a:xfrm>
           <a:prstGeom prst="rect">
             <a:avLst/>
@@ -20932,8 +20971,8 @@
         </p:nvSpPr>
         <p:spPr>
           <a:xfrm>
-            <a:off x="1645920" y="2395728"/>
-            <a:ext cx="5943600" cy="585216"/>
+            <a:off x="1645920" y="2304288"/>
+            <a:ext cx="5943600" cy="493776"/>
           </a:xfrm>
           <a:prstGeom prst="rect">
             <a:avLst/>
@@ -20971,8 +21010,8 @@
         </p:nvSpPr>
         <p:spPr>
           <a:xfrm>
-            <a:off x="7315200" y="2395728"/>
-            <a:ext cx="1371600" cy="585216"/>
+            <a:off x="7315200" y="2304288"/>
+            <a:ext cx="1371600" cy="493776"/>
           </a:xfrm>
           <a:prstGeom prst="rect">
             <a:avLst/>
@@ -21010,7 +21049,7 @@
         </p:nvSpPr>
         <p:spPr>
           <a:xfrm>
-            <a:off x="731520" y="3017520"/>
+            <a:off x="731520" y="2834640"/>
             <a:ext cx="7955280" cy="0"/>
           </a:xfrm>
           <a:prstGeom prst="line">
@@ -21033,8 +21072,8 @@
         </p:nvSpPr>
         <p:spPr>
           <a:xfrm>
-            <a:off x="457200" y="3054096"/>
-            <a:ext cx="109728" cy="585216"/>
+            <a:off x="457200" y="2871216"/>
+            <a:ext cx="109728" cy="493776"/>
           </a:xfrm>
           <a:prstGeom prst="rect">
             <a:avLst/>
@@ -21058,8 +21097,8 @@
         </p:nvSpPr>
         <p:spPr>
           <a:xfrm>
-            <a:off x="731520" y="3054096"/>
-            <a:ext cx="822960" cy="585216"/>
+            <a:off x="731520" y="2871216"/>
+            <a:ext cx="822960" cy="493776"/>
           </a:xfrm>
           <a:prstGeom prst="rect">
             <a:avLst/>
@@ -21097,8 +21136,8 @@
         </p:nvSpPr>
         <p:spPr>
           <a:xfrm>
-            <a:off x="1645920" y="3054096"/>
-            <a:ext cx="5943600" cy="585216"/>
+            <a:off x="1645920" y="2871216"/>
+            <a:ext cx="5943600" cy="493776"/>
           </a:xfrm>
           <a:prstGeom prst="rect">
             <a:avLst/>
@@ -21136,8 +21175,8 @@
         </p:nvSpPr>
         <p:spPr>
           <a:xfrm>
-            <a:off x="7315200" y="3054096"/>
-            <a:ext cx="1371600" cy="585216"/>
+            <a:off x="7315200" y="2871216"/>
+            <a:ext cx="1371600" cy="493776"/>
           </a:xfrm>
           <a:prstGeom prst="rect">
             <a:avLst/>
@@ -21175,7 +21214,7 @@
         </p:nvSpPr>
         <p:spPr>
           <a:xfrm>
-            <a:off x="731520" y="3675888"/>
+            <a:off x="731520" y="3401568"/>
             <a:ext cx="7955280" cy="0"/>
           </a:xfrm>
           <a:prstGeom prst="line">
@@ -21198,8 +21237,8 @@
         </p:nvSpPr>
         <p:spPr>
           <a:xfrm>
-            <a:off x="457200" y="3712464"/>
-            <a:ext cx="109728" cy="585216"/>
+            <a:off x="457200" y="3438144"/>
+            <a:ext cx="109728" cy="493776"/>
           </a:xfrm>
           <a:prstGeom prst="rect">
             <a:avLst/>
@@ -21223,8 +21262,8 @@
         </p:nvSpPr>
         <p:spPr>
           <a:xfrm>
-            <a:off x="731520" y="3712464"/>
-            <a:ext cx="822960" cy="585216"/>
+            <a:off x="731520" y="3438144"/>
+            <a:ext cx="822960" cy="493776"/>
           </a:xfrm>
           <a:prstGeom prst="rect">
             <a:avLst/>
@@ -21262,8 +21301,8 @@
         </p:nvSpPr>
         <p:spPr>
           <a:xfrm>
-            <a:off x="1645920" y="3712464"/>
-            <a:ext cx="5943600" cy="585216"/>
+            <a:off x="1645920" y="3438144"/>
+            <a:ext cx="5943600" cy="493776"/>
           </a:xfrm>
           <a:prstGeom prst="rect">
             <a:avLst/>
@@ -21301,8 +21340,8 @@
         </p:nvSpPr>
         <p:spPr>
           <a:xfrm>
-            <a:off x="7315200" y="3712464"/>
-            <a:ext cx="1371600" cy="585216"/>
+            <a:off x="7315200" y="3438144"/>
+            <a:ext cx="1371600" cy="493776"/>
           </a:xfrm>
           <a:prstGeom prst="rect">
             <a:avLst/>
@@ -21340,7 +21379,7 @@
         </p:nvSpPr>
         <p:spPr>
           <a:xfrm>
-            <a:off x="731520" y="4334256"/>
+            <a:off x="731520" y="3968496"/>
             <a:ext cx="7955280" cy="0"/>
           </a:xfrm>
           <a:prstGeom prst="line">
@@ -21363,8 +21402,8 @@
         </p:nvSpPr>
         <p:spPr>
           <a:xfrm>
-            <a:off x="457200" y="4370832"/>
-            <a:ext cx="109728" cy="585216"/>
+            <a:off x="457200" y="4005072"/>
+            <a:ext cx="109728" cy="493776"/>
           </a:xfrm>
           <a:prstGeom prst="rect">
             <a:avLst/>
@@ -21388,8 +21427,8 @@
         </p:nvSpPr>
         <p:spPr>
           <a:xfrm>
-            <a:off x="731520" y="4370832"/>
-            <a:ext cx="822960" cy="585216"/>
+            <a:off x="731520" y="4005072"/>
+            <a:ext cx="822960" cy="493776"/>
           </a:xfrm>
           <a:prstGeom prst="rect">
             <a:avLst/>
@@ -21427,8 +21466,8 @@
         </p:nvSpPr>
         <p:spPr>
           <a:xfrm>
-            <a:off x="1645920" y="4370832"/>
-            <a:ext cx="5943600" cy="585216"/>
+            <a:off x="1645920" y="4005072"/>
+            <a:ext cx="5943600" cy="493776"/>
           </a:xfrm>
           <a:prstGeom prst="rect">
             <a:avLst/>
@@ -21466,8 +21505,8 @@
         </p:nvSpPr>
         <p:spPr>
           <a:xfrm>
-            <a:off x="7315200" y="4370832"/>
-            <a:ext cx="1371600" cy="585216"/>
+            <a:off x="7315200" y="4005072"/>
+            <a:ext cx="1371600" cy="493776"/>
           </a:xfrm>
           <a:prstGeom prst="rect">
             <a:avLst/>
@@ -21505,7 +21544,7 @@
         </p:nvSpPr>
         <p:spPr>
           <a:xfrm>
-            <a:off x="731520" y="4992624"/>
+            <a:off x="731520" y="4535424"/>
             <a:ext cx="7955280" cy="0"/>
           </a:xfrm>
           <a:prstGeom prst="line">
@@ -21528,8 +21567,8 @@
         </p:nvSpPr>
         <p:spPr>
           <a:xfrm>
-            <a:off x="457200" y="5029200"/>
-            <a:ext cx="109728" cy="585216"/>
+            <a:off x="457200" y="4572000"/>
+            <a:ext cx="109728" cy="493776"/>
           </a:xfrm>
           <a:prstGeom prst="rect">
             <a:avLst/>
@@ -21553,8 +21592,8 @@
         </p:nvSpPr>
         <p:spPr>
           <a:xfrm>
-            <a:off x="731520" y="5029200"/>
-            <a:ext cx="822960" cy="585216"/>
+            <a:off x="731520" y="4572000"/>
+            <a:ext cx="822960" cy="493776"/>
           </a:xfrm>
           <a:prstGeom prst="rect">
             <a:avLst/>
@@ -21592,8 +21631,8 @@
         </p:nvSpPr>
         <p:spPr>
           <a:xfrm>
-            <a:off x="1645920" y="5029200"/>
-            <a:ext cx="5943600" cy="585216"/>
+            <a:off x="1645920" y="4572000"/>
+            <a:ext cx="5943600" cy="493776"/>
           </a:xfrm>
           <a:prstGeom prst="rect">
             <a:avLst/>
@@ -21631,8 +21670,8 @@
         </p:nvSpPr>
         <p:spPr>
           <a:xfrm>
-            <a:off x="7315200" y="5029200"/>
-            <a:ext cx="1371600" cy="585216"/>
+            <a:off x="7315200" y="4572000"/>
+            <a:ext cx="1371600" cy="493776"/>
           </a:xfrm>
           <a:prstGeom prst="rect">
             <a:avLst/>
@@ -21664,7 +21703,172 @@
       </p:sp>
       <p:sp>
         <p:nvSpPr>
-          <p:cNvPr id="33" name="Text 31"/>
+          <p:cNvPr id="33" name="Shape 31"/>
+          <p:cNvSpPr/>
+          <p:nvPr/>
+        </p:nvSpPr>
+        <p:spPr>
+          <a:xfrm>
+            <a:off x="731520" y="5102352"/>
+            <a:ext cx="7955280" cy="0"/>
+          </a:xfrm>
+          <a:prstGeom prst="line">
+            <a:avLst/>
+          </a:prstGeom>
+          <a:noFill/>
+          <a:ln w="6350">
+            <a:solidFill>
+              <a:srgbClr val="E5E5E5"/>
+            </a:solidFill>
+            <a:prstDash val="solid"/>
+          </a:ln>
+        </p:spPr>
+      </p:sp>
+      <p:sp>
+        <p:nvSpPr>
+          <p:cNvPr id="34" name="Shape 32"/>
+          <p:cNvSpPr/>
+          <p:nvPr/>
+        </p:nvSpPr>
+        <p:spPr>
+          <a:xfrm>
+            <a:off x="457200" y="5138928"/>
+            <a:ext cx="109728" cy="493776"/>
+          </a:xfrm>
+          <a:prstGeom prst="rect">
+            <a:avLst/>
+          </a:prstGeom>
+          <a:solidFill>
+            <a:srgbClr val="666666"/>
+          </a:solidFill>
+          <a:ln w="12700">
+            <a:solidFill>
+              <a:srgbClr val="666666"/>
+            </a:solidFill>
+            <a:prstDash val="solid"/>
+          </a:ln>
+        </p:spPr>
+      </p:sp>
+      <p:sp>
+        <p:nvSpPr>
+          <p:cNvPr id="35" name="Text 33"/>
+          <p:cNvSpPr/>
+          <p:nvPr/>
+        </p:nvSpPr>
+        <p:spPr>
+          <a:xfrm>
+            <a:off x="731520" y="5138928"/>
+            <a:ext cx="822960" cy="493776"/>
+          </a:xfrm>
+          <a:prstGeom prst="rect">
+            <a:avLst/>
+          </a:prstGeom>
+          <a:noFill/>
+          <a:ln/>
+        </p:spPr>
+        <p:txBody>
+          <a:bodyPr wrap="square" lIns="0" tIns="0" rIns="0" bIns="0" rtlCol="0" anchor="ctr"/>
+          <a:lstStyle/>
+          <a:p>
+            <a:pPr indent="0" marL="0">
+              <a:buNone/>
+            </a:pPr>
+            <a:r>
+              <a:rPr lang="en-US" sz="2200" b="1" dirty="0">
+                <a:solidFill>
+                  <a:srgbClr val="666666"/>
+                </a:solidFill>
+                <a:latin typeface="Arial Black" pitchFamily="34" charset="0"/>
+                <a:ea typeface="Arial Black" pitchFamily="34" charset="-122"/>
+                <a:cs typeface="Arial Black" pitchFamily="34" charset="-120"/>
+              </a:rPr>
+              <a:t>07</a:t>
+            </a:r>
+            <a:endParaRPr lang="en-US" sz="2200" dirty="0"/>
+          </a:p>
+        </p:txBody>
+      </p:sp>
+      <p:sp>
+        <p:nvSpPr>
+          <p:cNvPr id="36" name="Text 34"/>
+          <p:cNvSpPr/>
+          <p:nvPr/>
+        </p:nvSpPr>
+        <p:spPr>
+          <a:xfrm>
+            <a:off x="1645920" y="5138928"/>
+            <a:ext cx="5943600" cy="493776"/>
+          </a:xfrm>
+          <a:prstGeom prst="rect">
+            <a:avLst/>
+          </a:prstGeom>
+          <a:noFill/>
+          <a:ln/>
+        </p:spPr>
+        <p:txBody>
+          <a:bodyPr wrap="square" lIns="0" tIns="0" rIns="0" bIns="0" rtlCol="0" anchor="ctr"/>
+          <a:lstStyle/>
+          <a:p>
+            <a:pPr indent="0" marL="0">
+              <a:buNone/>
+            </a:pPr>
+            <a:r>
+              <a:rPr lang="en-US" sz="2200" b="1" spc="300" kern="0" dirty="0">
+                <a:solidFill>
+                  <a:srgbClr val="000000"/>
+                </a:solidFill>
+                <a:latin typeface="Arial Black" pitchFamily="34" charset="0"/>
+                <a:ea typeface="Arial Black" pitchFamily="34" charset="-122"/>
+                <a:cs typeface="Arial Black" pitchFamily="34" charset="-120"/>
+              </a:rPr>
+              <a:t>APPENDIX</a:t>
+            </a:r>
+            <a:endParaRPr lang="en-US" sz="2200" dirty="0"/>
+          </a:p>
+        </p:txBody>
+      </p:sp>
+      <p:sp>
+        <p:nvSpPr>
+          <p:cNvPr id="37" name="Text 35"/>
+          <p:cNvSpPr/>
+          <p:nvPr/>
+        </p:nvSpPr>
+        <p:spPr>
+          <a:xfrm>
+            <a:off x="7315200" y="5138928"/>
+            <a:ext cx="1371600" cy="493776"/>
+          </a:xfrm>
+          <a:prstGeom prst="rect">
+            <a:avLst/>
+          </a:prstGeom>
+          <a:noFill/>
+          <a:ln/>
+        </p:spPr>
+        <p:txBody>
+          <a:bodyPr wrap="square" lIns="0" tIns="0" rIns="0" bIns="0" rtlCol="0" anchor="ctr"/>
+          <a:lstStyle/>
+          <a:p>
+            <a:pPr algn="r" indent="0" marL="0">
+              <a:buNone/>
+            </a:pPr>
+            <a:r>
+              <a:rPr lang="en-US" sz="1400" dirty="0">
+                <a:solidFill>
+                  <a:srgbClr val="666666"/>
+                </a:solidFill>
+                <a:latin typeface="Arial" pitchFamily="34" charset="0"/>
+                <a:ea typeface="Arial" pitchFamily="34" charset="-122"/>
+                <a:cs typeface="Arial" pitchFamily="34" charset="-120"/>
+              </a:rPr>
+              <a:t>23 – 24</a:t>
+            </a:r>
+            <a:endParaRPr lang="en-US" sz="1400" dirty="0"/>
+          </a:p>
+        </p:txBody>
+      </p:sp>
+      <p:sp>
+        <p:nvSpPr>
+          <p:cNvPr id="38" name="Text 36"/>
           <p:cNvSpPr/>
           <p:nvPr/>
         </p:nvSpPr>
@@ -21695,7 +21899,7 @@
                 <a:ea typeface="Arial" pitchFamily="34" charset="-122"/>
                 <a:cs typeface="Arial" pitchFamily="34" charset="-120"/>
               </a:rPr>
-              <a:t>Source: Strategy Research. 22 slides, read top to bottom.</a:t>
+              <a:t>Source: Strategy Research. 24 slides, read top to bottom.</a:t>
             </a:r>
             <a:endParaRPr lang="en-US" sz="700" dirty="0"/>
           </a:p>
@@ -21703,7 +21907,7 @@
       </p:sp>
       <p:sp>
         <p:nvSpPr>
-          <p:cNvPr id="34" name="Shape 32"/>
+          <p:cNvPr id="39" name="Shape 37"/>
           <p:cNvSpPr/>
           <p:nvPr/>
         </p:nvSpPr>
@@ -21728,7 +21932,7 @@
       </p:sp>
       <p:sp>
         <p:nvSpPr>
-          <p:cNvPr id="35" name="Text 33"/>
+          <p:cNvPr id="40" name="Text 38"/>
           <p:cNvSpPr/>
           <p:nvPr/>
         </p:nvSpPr>
@@ -21767,7 +21971,7 @@
       </p:sp>
       <p:sp>
         <p:nvSpPr>
-          <p:cNvPr id="36" name="Text 34"/>
+          <p:cNvPr id="41" name="Text 39"/>
           <p:cNvSpPr/>
           <p:nvPr/>
         </p:nvSpPr>
@@ -21928,7 +22132,7 @@
                 <a:ea typeface="Arial Black" pitchFamily="34" charset="-122"/>
                 <a:cs typeface="Arial Black" pitchFamily="34" charset="-120"/>
               </a:rPr>
-              <a:t>Autonomous mobility.</a:t>
+              <a:t>Every autonomous mile compounds — every AV runs frontier edge compute</a:t>
             </a:r>
             <a:endParaRPr lang="en-US" sz="2400" dirty="0"/>
           </a:p>
@@ -23890,7 +24094,7 @@
                 <a:ea typeface="Arial Black" pitchFamily="34" charset="-122"/>
                 <a:cs typeface="Arial Black" pitchFamily="34" charset="-120"/>
               </a:rPr>
-              <a:t>Key takeaways.</a:t>
+              <a:t>Capex on credit, basket over, bottleneck moves, exposure is a thesis</a:t>
             </a:r>
             <a:endParaRPr lang="en-US" sz="2400" dirty="0"/>
           </a:p>
@@ -24236,7 +24440,7 @@
                 <a:ea typeface="Arial" pitchFamily="34" charset="-122"/>
                 <a:cs typeface="Arial" pitchFamily="34" charset="-120"/>
               </a:rPr>
-              <a:t>AI stock correlation collapsed from ~80% to ~20%. Semis +38% YTD, software –20% YTD — a 58-point spread. Memory oligopolies with pricing power outperform cloud providers burning cash.</a:t>
+              <a:t>AI stock correlation collapsed from ~80% to ~20%. Semis +38% YTD, software –20% YTD — a 58-point spread (YTD through Apr 17, 2026). Memory oligopolies with pricing power outperform cloud providers burning cash.</a:t>
             </a:r>
             <a:endParaRPr lang="en-US" sz="1050" dirty="0"/>
           </a:p>
@@ -27169,7 +27373,7 @@
                 <a:ea typeface="Arial" pitchFamily="34" charset="-122"/>
                 <a:cs typeface="Arial" pitchFamily="34" charset="-120"/>
               </a:rPr>
-              <a:t>A1</a:t>
+              <a:t>23</a:t>
             </a:r>
             <a:endParaRPr lang="en-US" sz="900" dirty="0"/>
           </a:p>
@@ -30315,7 +30519,7 @@
                 <a:ea typeface="Arial" pitchFamily="34" charset="-122"/>
                 <a:cs typeface="Arial" pitchFamily="34" charset="-120"/>
               </a:rPr>
-              <a:t>A2</a:t>
+              <a:t>24</a:t>
             </a:r>
             <a:endParaRPr lang="en-US" sz="900" dirty="0"/>
           </a:p>
@@ -31166,7 +31370,7 @@
                 <a:ea typeface="Arial Black" pitchFamily="34" charset="-122"/>
                 <a:cs typeface="Arial Black" pitchFamily="34" charset="-120"/>
               </a:rPr>
-              <a:t>AI evolution from chatbots to agents.</a:t>
+              <a:t>Sixty years of AI in six steps — and we are now in step six</a:t>
             </a:r>
             <a:endParaRPr lang="en-US" sz="2400" dirty="0"/>
           </a:p>
@@ -32675,7 +32879,7 @@
                 <a:ea typeface="Arial Black" pitchFamily="34" charset="-122"/>
                 <a:cs typeface="Arial Black" pitchFamily="34" charset="-120"/>
               </a:rPr>
-              <a:t>The AI stack.</a:t>
+              <a:t>Eleven layers, four power blocs — your exposure depends on which layer you own</a:t>
             </a:r>
             <a:endParaRPr lang="en-US" sz="2400" dirty="0"/>
           </a:p>
@@ -35400,7 +35604,7 @@
                 <a:ea typeface="Arial Black" pitchFamily="34" charset="-122"/>
                 <a:cs typeface="Arial Black" pitchFamily="34" charset="-120"/>
               </a:rPr>
-              <a:t>Semiconductors, explained.</a:t>
+              <a:t>Logic and memory absorb the capex — ASML and TSMC decide who ships</a:t>
             </a:r>
             <a:endParaRPr lang="en-US" sz="2400" dirty="0"/>
           </a:p>
@@ -37974,7 +38178,7 @@
                 <a:ea typeface="Arial Black" pitchFamily="34" charset="-122"/>
                 <a:cs typeface="Arial Black" pitchFamily="34" charset="-120"/>
               </a:rPr>
-              <a:t>Who's buying the chips.</a:t>
+              <a:t>Five hyperscalers fund ~60% of AI chip demand — their capex IS the market</a:t>
             </a:r>
             <a:endParaRPr lang="en-US" sz="2400" dirty="0"/>
           </a:p>
@@ -39723,7 +39927,7 @@
                 <a:ea typeface="Arial" pitchFamily="34" charset="-122"/>
                 <a:cs typeface="Arial" pitchFamily="34" charset="-120"/>
               </a:rPr>
-              <a:t>of US electricity demand will go to data centers by 2028 — up from ~4% in 2023</a:t>
+              <a:t>of US electricity demand will go to data centers by 2028 — up from ~4% in 2023 (EPRI high case, 2024)</a:t>
             </a:r>
             <a:endParaRPr lang="en-US" sz="1100" dirty="0"/>
           </a:p>

--- a/ai-markets-deck.pptx
+++ b/ai-markets-deck.pptx
@@ -24070,7 +24070,7 @@
         <p:spPr>
           <a:xfrm>
             <a:off x="457200" y="182880"/>
-            <a:ext cx="6583680" cy="685800"/>
+            <a:ext cx="8229600" cy="685800"/>
           </a:xfrm>
           <a:prstGeom prst="rect">
             <a:avLst/>
@@ -24094,7 +24094,7 @@
                 <a:ea typeface="Arial Black" pitchFamily="34" charset="-122"/>
                 <a:cs typeface="Arial Black" pitchFamily="34" charset="-120"/>
               </a:rPr>
-              <a:t>Capex on credit, basket over, bottleneck moves, exposure is a thesis</a:t>
+              <a:t>Capex on credit. Basket over. Bottleneck moves. Exposure is a thesis.</a:t>
             </a:r>
             <a:endParaRPr lang="en-US" sz="2400" dirty="0"/>
           </a:p>
@@ -24133,7 +24133,7 @@
                 <a:ea typeface="Arial" pitchFamily="34" charset="-122"/>
                 <a:cs typeface="Arial" pitchFamily="34" charset="-120"/>
               </a:rPr>
-              <a:t>The thesis, distilled. Each with the number that makes it investable.</a:t>
+              <a:t>Four big-picture takeaways.</a:t>
             </a:r>
             <a:endParaRPr lang="en-US" sz="1350" dirty="0"/>
           </a:p>
@@ -24170,8 +24170,8 @@
         </p:nvSpPr>
         <p:spPr>
           <a:xfrm>
-            <a:off x="457200" y="1554480"/>
-            <a:ext cx="640080" cy="850392"/>
+            <a:off x="457200" y="1691640"/>
+            <a:ext cx="868680" cy="868680"/>
           </a:xfrm>
           <a:prstGeom prst="rect">
             <a:avLst/>
@@ -24195,8 +24195,8 @@
         </p:nvSpPr>
         <p:spPr>
           <a:xfrm>
-            <a:off x="457200" y="1554480"/>
-            <a:ext cx="640080" cy="850392"/>
+            <a:off x="457200" y="1691640"/>
+            <a:ext cx="868680" cy="868680"/>
           </a:xfrm>
           <a:prstGeom prst="rect">
             <a:avLst/>
@@ -24212,7 +24212,7 @@
               <a:buNone/>
             </a:pPr>
             <a:r>
-              <a:rPr lang="en-US" sz="2000" b="1" dirty="0">
+              <a:rPr lang="en-US" sz="2600" b="1" dirty="0">
                 <a:solidFill>
                   <a:srgbClr val="FFFFFF"/>
                 </a:solidFill>
@@ -24222,7 +24222,7 @@
               </a:rPr>
               <a:t>01</a:t>
             </a:r>
-            <a:endParaRPr lang="en-US" sz="2000" dirty="0"/>
+            <a:endParaRPr lang="en-US" sz="2600" dirty="0"/>
           </a:p>
         </p:txBody>
       </p:sp>
@@ -24234,63 +24234,24 @@
         </p:nvSpPr>
         <p:spPr>
           <a:xfrm>
-            <a:off x="1188720" y="1554480"/>
-            <a:ext cx="7498080" cy="274320"/>
-          </a:xfrm>
-          <a:prstGeom prst="rect">
-            <a:avLst/>
-          </a:prstGeom>
-          <a:noFill/>
-          <a:ln/>
-        </p:spPr>
-        <p:txBody>
-          <a:bodyPr wrap="square" lIns="0" tIns="0" rIns="0" bIns="0" rtlCol="0" anchor="t"/>
-          <a:lstStyle/>
-          <a:p>
-            <a:pPr indent="0" marL="0">
-              <a:buNone/>
-            </a:pPr>
-            <a:r>
-              <a:rPr lang="en-US" sz="1300" b="1" dirty="0">
-                <a:solidFill>
-                  <a:srgbClr val="000000"/>
-                </a:solidFill>
-                <a:latin typeface="Arial" pitchFamily="34" charset="0"/>
-                <a:ea typeface="Arial" pitchFamily="34" charset="-122"/>
-                <a:cs typeface="Arial" pitchFamily="34" charset="-120"/>
-              </a:rPr>
-              <a:t>The largest capex cycle in history — and it's going on credit.</a:t>
-            </a:r>
-            <a:endParaRPr lang="en-US" sz="1300" dirty="0"/>
-          </a:p>
-        </p:txBody>
-      </p:sp>
-      <p:sp>
-        <p:nvSpPr>
-          <p:cNvPr id="8" name="Text 6"/>
-          <p:cNvSpPr/>
-          <p:nvPr/>
-        </p:nvSpPr>
-        <p:spPr>
-          <a:xfrm>
-            <a:off x="1188720" y="1828800"/>
-            <a:ext cx="7498080" cy="576072"/>
-          </a:xfrm>
-          <a:prstGeom prst="rect">
-            <a:avLst/>
-          </a:prstGeom>
-          <a:noFill/>
-          <a:ln/>
-        </p:spPr>
-        <p:txBody>
-          <a:bodyPr wrap="square" lIns="0" tIns="0" rIns="0" bIns="0" rtlCol="0" anchor="t"/>
-          <a:lstStyle/>
-          <a:p>
-            <a:pPr indent="0" marL="0">
-              <a:buNone/>
-            </a:pPr>
-            <a:r>
-              <a:rPr lang="en-US" sz="1050" dirty="0">
+            <a:off x="1508760" y="1691640"/>
+            <a:ext cx="7178040" cy="868680"/>
+          </a:xfrm>
+          <a:prstGeom prst="rect">
+            <a:avLst/>
+          </a:prstGeom>
+          <a:noFill/>
+          <a:ln/>
+        </p:spPr>
+        <p:txBody>
+          <a:bodyPr wrap="square" lIns="0" tIns="0" rIns="0" bIns="0" rtlCol="0" anchor="ctr"/>
+          <a:lstStyle/>
+          <a:p>
+            <a:pPr indent="0" marL="0">
+              <a:buNone/>
+            </a:pPr>
+            <a:r>
+              <a:rPr lang="en-US" sz="1800" b="1" dirty="0">
                 <a:solidFill>
                   <a:srgbClr val="333333"/>
                 </a:solidFill>
@@ -24298,22 +24259,22 @@
                 <a:ea typeface="Arial" pitchFamily="34" charset="-122"/>
                 <a:cs typeface="Arial" pitchFamily="34" charset="-120"/>
               </a:rPr>
-              <a:t>~$750B hyperscaler capex in 2026, up ~$300B YoY. Amazon FCF turns negative; Meta FCF down ~90%. ~75% of that capex is AI-specific. The story has shifted from cash flow to balance sheet.</a:t>
-            </a:r>
-            <a:endParaRPr lang="en-US" sz="1050" dirty="0"/>
-          </a:p>
-        </p:txBody>
-      </p:sp>
-      <p:sp>
-        <p:nvSpPr>
-          <p:cNvPr id="9" name="Shape 7"/>
-          <p:cNvSpPr/>
-          <p:nvPr/>
-        </p:nvSpPr>
-        <p:spPr>
-          <a:xfrm>
-            <a:off x="457200" y="2514600"/>
-            <a:ext cx="640080" cy="850392"/>
+              <a:t>The largest capex cycle in history is going on credit.</a:t>
+            </a:r>
+            <a:endParaRPr lang="en-US" sz="1800" dirty="0"/>
+          </a:p>
+        </p:txBody>
+      </p:sp>
+      <p:sp>
+        <p:nvSpPr>
+          <p:cNvPr id="8" name="Shape 6"/>
+          <p:cNvSpPr/>
+          <p:nvPr/>
+        </p:nvSpPr>
+        <p:spPr>
+          <a:xfrm>
+            <a:off x="457200" y="2651760"/>
+            <a:ext cx="868680" cy="868680"/>
           </a:xfrm>
           <a:prstGeom prst="rect">
             <a:avLst/>
@@ -24331,14 +24292,14 @@
       </p:sp>
       <p:sp>
         <p:nvSpPr>
-          <p:cNvPr id="10" name="Text 8"/>
-          <p:cNvSpPr/>
-          <p:nvPr/>
-        </p:nvSpPr>
-        <p:spPr>
-          <a:xfrm>
-            <a:off x="457200" y="2514600"/>
-            <a:ext cx="640080" cy="850392"/>
+          <p:cNvPr id="9" name="Text 7"/>
+          <p:cNvSpPr/>
+          <p:nvPr/>
+        </p:nvSpPr>
+        <p:spPr>
+          <a:xfrm>
+            <a:off x="457200" y="2651760"/>
+            <a:ext cx="868680" cy="868680"/>
           </a:xfrm>
           <a:prstGeom prst="rect">
             <a:avLst/>
@@ -24354,7 +24315,7 @@
               <a:buNone/>
             </a:pPr>
             <a:r>
-              <a:rPr lang="en-US" sz="2000" b="1" dirty="0">
+              <a:rPr lang="en-US" sz="2600" b="1" dirty="0">
                 <a:solidFill>
                   <a:srgbClr val="FFFFFF"/>
                 </a:solidFill>
@@ -24364,75 +24325,36 @@
               </a:rPr>
               <a:t>02</a:t>
             </a:r>
-            <a:endParaRPr lang="en-US" sz="2000" dirty="0"/>
-          </a:p>
-        </p:txBody>
-      </p:sp>
-      <p:sp>
-        <p:nvSpPr>
-          <p:cNvPr id="11" name="Text 9"/>
-          <p:cNvSpPr/>
-          <p:nvPr/>
-        </p:nvSpPr>
-        <p:spPr>
-          <a:xfrm>
-            <a:off x="1188720" y="2514600"/>
-            <a:ext cx="7498080" cy="274320"/>
-          </a:xfrm>
-          <a:prstGeom prst="rect">
-            <a:avLst/>
-          </a:prstGeom>
-          <a:noFill/>
-          <a:ln/>
-        </p:spPr>
-        <p:txBody>
-          <a:bodyPr wrap="square" lIns="0" tIns="0" rIns="0" bIns="0" rtlCol="0" anchor="t"/>
-          <a:lstStyle/>
-          <a:p>
-            <a:pPr indent="0" marL="0">
-              <a:buNone/>
-            </a:pPr>
-            <a:r>
-              <a:rPr lang="en-US" sz="1300" b="1" dirty="0">
-                <a:solidFill>
-                  <a:srgbClr val="000000"/>
-                </a:solidFill>
-                <a:latin typeface="Arial" pitchFamily="34" charset="0"/>
-                <a:ea typeface="Arial" pitchFamily="34" charset="-122"/>
-                <a:cs typeface="Arial" pitchFamily="34" charset="-120"/>
-              </a:rPr>
-              <a:t>The market is picking winners — the basket trade is over.</a:t>
-            </a:r>
-            <a:endParaRPr lang="en-US" sz="1300" dirty="0"/>
-          </a:p>
-        </p:txBody>
-      </p:sp>
-      <p:sp>
-        <p:nvSpPr>
-          <p:cNvPr id="12" name="Text 10"/>
-          <p:cNvSpPr/>
-          <p:nvPr/>
-        </p:nvSpPr>
-        <p:spPr>
-          <a:xfrm>
-            <a:off x="1188720" y="2788920"/>
-            <a:ext cx="7498080" cy="576072"/>
-          </a:xfrm>
-          <a:prstGeom prst="rect">
-            <a:avLst/>
-          </a:prstGeom>
-          <a:noFill/>
-          <a:ln/>
-        </p:spPr>
-        <p:txBody>
-          <a:bodyPr wrap="square" lIns="0" tIns="0" rIns="0" bIns="0" rtlCol="0" anchor="t"/>
-          <a:lstStyle/>
-          <a:p>
-            <a:pPr indent="0" marL="0">
-              <a:buNone/>
-            </a:pPr>
-            <a:r>
-              <a:rPr lang="en-US" sz="1050" dirty="0">
+            <a:endParaRPr lang="en-US" sz="2600" dirty="0"/>
+          </a:p>
+        </p:txBody>
+      </p:sp>
+      <p:sp>
+        <p:nvSpPr>
+          <p:cNvPr id="10" name="Text 8"/>
+          <p:cNvSpPr/>
+          <p:nvPr/>
+        </p:nvSpPr>
+        <p:spPr>
+          <a:xfrm>
+            <a:off x="1508760" y="2651760"/>
+            <a:ext cx="7178040" cy="868680"/>
+          </a:xfrm>
+          <a:prstGeom prst="rect">
+            <a:avLst/>
+          </a:prstGeom>
+          <a:noFill/>
+          <a:ln/>
+        </p:spPr>
+        <p:txBody>
+          <a:bodyPr wrap="square" lIns="0" tIns="0" rIns="0" bIns="0" rtlCol="0" anchor="ctr"/>
+          <a:lstStyle/>
+          <a:p>
+            <a:pPr indent="0" marL="0">
+              <a:buNone/>
+            </a:pPr>
+            <a:r>
+              <a:rPr lang="en-US" sz="1800" b="1" dirty="0">
                 <a:solidFill>
                   <a:srgbClr val="333333"/>
                 </a:solidFill>
@@ -24440,22 +24362,22 @@
                 <a:ea typeface="Arial" pitchFamily="34" charset="-122"/>
                 <a:cs typeface="Arial" pitchFamily="34" charset="-120"/>
               </a:rPr>
-              <a:t>AI stock correlation collapsed from ~80% to ~20%. Semis +38% YTD, software –20% YTD — a 58-point spread (YTD through Apr 17, 2026). Memory oligopolies with pricing power outperform cloud providers burning cash.</a:t>
-            </a:r>
-            <a:endParaRPr lang="en-US" sz="1050" dirty="0"/>
-          </a:p>
-        </p:txBody>
-      </p:sp>
-      <p:sp>
-        <p:nvSpPr>
-          <p:cNvPr id="13" name="Shape 11"/>
-          <p:cNvSpPr/>
-          <p:nvPr/>
-        </p:nvSpPr>
-        <p:spPr>
-          <a:xfrm>
-            <a:off x="457200" y="3474720"/>
-            <a:ext cx="640080" cy="850392"/>
+              <a:t>The basket trade is over. The market picks winners.</a:t>
+            </a:r>
+            <a:endParaRPr lang="en-US" sz="1800" dirty="0"/>
+          </a:p>
+        </p:txBody>
+      </p:sp>
+      <p:sp>
+        <p:nvSpPr>
+          <p:cNvPr id="11" name="Shape 9"/>
+          <p:cNvSpPr/>
+          <p:nvPr/>
+        </p:nvSpPr>
+        <p:spPr>
+          <a:xfrm>
+            <a:off x="457200" y="3611880"/>
+            <a:ext cx="868680" cy="868680"/>
           </a:xfrm>
           <a:prstGeom prst="rect">
             <a:avLst/>
@@ -24473,14 +24395,14 @@
       </p:sp>
       <p:sp>
         <p:nvSpPr>
-          <p:cNvPr id="14" name="Text 12"/>
-          <p:cNvSpPr/>
-          <p:nvPr/>
-        </p:nvSpPr>
-        <p:spPr>
-          <a:xfrm>
-            <a:off x="457200" y="3474720"/>
-            <a:ext cx="640080" cy="850392"/>
+          <p:cNvPr id="12" name="Text 10"/>
+          <p:cNvSpPr/>
+          <p:nvPr/>
+        </p:nvSpPr>
+        <p:spPr>
+          <a:xfrm>
+            <a:off x="457200" y="3611880"/>
+            <a:ext cx="868680" cy="868680"/>
           </a:xfrm>
           <a:prstGeom prst="rect">
             <a:avLst/>
@@ -24496,7 +24418,7 @@
               <a:buNone/>
             </a:pPr>
             <a:r>
-              <a:rPr lang="en-US" sz="2000" b="1" dirty="0">
+              <a:rPr lang="en-US" sz="2600" b="1" dirty="0">
                 <a:solidFill>
                   <a:srgbClr val="FFFFFF"/>
                 </a:solidFill>
@@ -24506,75 +24428,36 @@
               </a:rPr>
               <a:t>03</a:t>
             </a:r>
-            <a:endParaRPr lang="en-US" sz="2000" dirty="0"/>
-          </a:p>
-        </p:txBody>
-      </p:sp>
-      <p:sp>
-        <p:nvSpPr>
-          <p:cNvPr id="15" name="Text 13"/>
-          <p:cNvSpPr/>
-          <p:nvPr/>
-        </p:nvSpPr>
-        <p:spPr>
-          <a:xfrm>
-            <a:off x="1188720" y="3474720"/>
-            <a:ext cx="7498080" cy="274320"/>
-          </a:xfrm>
-          <a:prstGeom prst="rect">
-            <a:avLst/>
-          </a:prstGeom>
-          <a:noFill/>
-          <a:ln/>
-        </p:spPr>
-        <p:txBody>
-          <a:bodyPr wrap="square" lIns="0" tIns="0" rIns="0" bIns="0" rtlCol="0" anchor="t"/>
-          <a:lstStyle/>
-          <a:p>
-            <a:pPr indent="0" marL="0">
-              <a:buNone/>
-            </a:pPr>
-            <a:r>
-              <a:rPr lang="en-US" sz="1300" b="1" dirty="0">
-                <a:solidFill>
-                  <a:srgbClr val="000000"/>
-                </a:solidFill>
-                <a:latin typeface="Arial" pitchFamily="34" charset="0"/>
-                <a:ea typeface="Arial" pitchFamily="34" charset="-122"/>
-                <a:cs typeface="Arial" pitchFamily="34" charset="-120"/>
-              </a:rPr>
-              <a:t>The bottleneck keeps moving — and that is the opportunity.</a:t>
-            </a:r>
-            <a:endParaRPr lang="en-US" sz="1300" dirty="0"/>
-          </a:p>
-        </p:txBody>
-      </p:sp>
-      <p:sp>
-        <p:nvSpPr>
-          <p:cNvPr id="16" name="Text 14"/>
-          <p:cNvSpPr/>
-          <p:nvPr/>
-        </p:nvSpPr>
-        <p:spPr>
-          <a:xfrm>
-            <a:off x="1188720" y="3749040"/>
-            <a:ext cx="7498080" cy="576072"/>
-          </a:xfrm>
-          <a:prstGeom prst="rect">
-            <a:avLst/>
-          </a:prstGeom>
-          <a:noFill/>
-          <a:ln/>
-        </p:spPr>
-        <p:txBody>
-          <a:bodyPr wrap="square" lIns="0" tIns="0" rIns="0" bIns="0" rtlCol="0" anchor="t"/>
-          <a:lstStyle/>
-          <a:p>
-            <a:pPr indent="0" marL="0">
-              <a:buNone/>
-            </a:pPr>
-            <a:r>
-              <a:rPr lang="en-US" sz="1050" dirty="0">
+            <a:endParaRPr lang="en-US" sz="2600" dirty="0"/>
+          </a:p>
+        </p:txBody>
+      </p:sp>
+      <p:sp>
+        <p:nvSpPr>
+          <p:cNvPr id="13" name="Text 11"/>
+          <p:cNvSpPr/>
+          <p:nvPr/>
+        </p:nvSpPr>
+        <p:spPr>
+          <a:xfrm>
+            <a:off x="1508760" y="3611880"/>
+            <a:ext cx="7178040" cy="868680"/>
+          </a:xfrm>
+          <a:prstGeom prst="rect">
+            <a:avLst/>
+          </a:prstGeom>
+          <a:noFill/>
+          <a:ln/>
+        </p:spPr>
+        <p:txBody>
+          <a:bodyPr wrap="square" lIns="0" tIns="0" rIns="0" bIns="0" rtlCol="0" anchor="ctr"/>
+          <a:lstStyle/>
+          <a:p>
+            <a:pPr indent="0" marL="0">
+              <a:buNone/>
+            </a:pPr>
+            <a:r>
+              <a:rPr lang="en-US" sz="1800" b="1" dirty="0">
                 <a:solidFill>
                   <a:srgbClr val="333333"/>
                 </a:solidFill>
@@ -24582,22 +24465,22 @@
                 <a:ea typeface="Arial" pitchFamily="34" charset="-122"/>
                 <a:cs typeface="Arial" pitchFamily="34" charset="-120"/>
               </a:rPr>
-              <a:t>CoWoS packaging (2023–24) → HBM / silicon wafer supply (now) → EUV lithography (&lt;100 machines/yr) by 2028. Each shift reprices a different part of the stack. HBM TAM on a path from $35B (2025) to $100B (2028).</a:t>
-            </a:r>
-            <a:endParaRPr lang="en-US" sz="1050" dirty="0"/>
-          </a:p>
-        </p:txBody>
-      </p:sp>
-      <p:sp>
-        <p:nvSpPr>
-          <p:cNvPr id="17" name="Shape 15"/>
-          <p:cNvSpPr/>
-          <p:nvPr/>
-        </p:nvSpPr>
-        <p:spPr>
-          <a:xfrm>
-            <a:off x="457200" y="4434840"/>
-            <a:ext cx="640080" cy="850392"/>
+              <a:t>The bottleneck keeps moving. That is the opportunity.</a:t>
+            </a:r>
+            <a:endParaRPr lang="en-US" sz="1800" dirty="0"/>
+          </a:p>
+        </p:txBody>
+      </p:sp>
+      <p:sp>
+        <p:nvSpPr>
+          <p:cNvPr id="14" name="Shape 12"/>
+          <p:cNvSpPr/>
+          <p:nvPr/>
+        </p:nvSpPr>
+        <p:spPr>
+          <a:xfrm>
+            <a:off x="457200" y="4572000"/>
+            <a:ext cx="868680" cy="868680"/>
           </a:xfrm>
           <a:prstGeom prst="rect">
             <a:avLst/>
@@ -24615,14 +24498,14 @@
       </p:sp>
       <p:sp>
         <p:nvSpPr>
-          <p:cNvPr id="18" name="Text 16"/>
-          <p:cNvSpPr/>
-          <p:nvPr/>
-        </p:nvSpPr>
-        <p:spPr>
-          <a:xfrm>
-            <a:off x="457200" y="4434840"/>
-            <a:ext cx="640080" cy="850392"/>
+          <p:cNvPr id="15" name="Text 13"/>
+          <p:cNvSpPr/>
+          <p:nvPr/>
+        </p:nvSpPr>
+        <p:spPr>
+          <a:xfrm>
+            <a:off x="457200" y="4572000"/>
+            <a:ext cx="868680" cy="868680"/>
           </a:xfrm>
           <a:prstGeom prst="rect">
             <a:avLst/>
@@ -24638,7 +24521,7 @@
               <a:buNone/>
             </a:pPr>
             <a:r>
-              <a:rPr lang="en-US" sz="2000" b="1" dirty="0">
+              <a:rPr lang="en-US" sz="2600" b="1" dirty="0">
                 <a:solidFill>
                   <a:srgbClr val="FFFFFF"/>
                 </a:solidFill>
@@ -24648,75 +24531,36 @@
               </a:rPr>
               <a:t>04</a:t>
             </a:r>
-            <a:endParaRPr lang="en-US" sz="2000" dirty="0"/>
-          </a:p>
-        </p:txBody>
-      </p:sp>
-      <p:sp>
-        <p:nvSpPr>
-          <p:cNvPr id="19" name="Text 17"/>
-          <p:cNvSpPr/>
-          <p:nvPr/>
-        </p:nvSpPr>
-        <p:spPr>
-          <a:xfrm>
-            <a:off x="1188720" y="4434840"/>
-            <a:ext cx="7498080" cy="274320"/>
-          </a:xfrm>
-          <a:prstGeom prst="rect">
-            <a:avLst/>
-          </a:prstGeom>
-          <a:noFill/>
-          <a:ln/>
-        </p:spPr>
-        <p:txBody>
-          <a:bodyPr wrap="square" lIns="0" tIns="0" rIns="0" bIns="0" rtlCol="0" anchor="t"/>
-          <a:lstStyle/>
-          <a:p>
-            <a:pPr indent="0" marL="0">
-              <a:buNone/>
-            </a:pPr>
-            <a:r>
-              <a:rPr lang="en-US" sz="1300" b="1" dirty="0">
-                <a:solidFill>
-                  <a:srgbClr val="000000"/>
-                </a:solidFill>
-                <a:latin typeface="Arial" pitchFamily="34" charset="0"/>
-                <a:ea typeface="Arial" pitchFamily="34" charset="-122"/>
-                <a:cs typeface="Arial" pitchFamily="34" charset="-120"/>
-              </a:rPr>
-              <a:t>The question isn't whether you have AI exposure — it's whether you chose it.</a:t>
-            </a:r>
-            <a:endParaRPr lang="en-US" sz="1300" dirty="0"/>
-          </a:p>
-        </p:txBody>
-      </p:sp>
-      <p:sp>
-        <p:nvSpPr>
-          <p:cNvPr id="20" name="Text 18"/>
-          <p:cNvSpPr/>
-          <p:nvPr/>
-        </p:nvSpPr>
-        <p:spPr>
-          <a:xfrm>
-            <a:off x="1188720" y="4709160"/>
-            <a:ext cx="7498080" cy="576072"/>
-          </a:xfrm>
-          <a:prstGeom prst="rect">
-            <a:avLst/>
-          </a:prstGeom>
-          <a:noFill/>
-          <a:ln/>
-        </p:spPr>
-        <p:txBody>
-          <a:bodyPr wrap="square" lIns="0" tIns="0" rIns="0" bIns="0" rtlCol="0" anchor="t"/>
-          <a:lstStyle/>
-          <a:p>
-            <a:pPr indent="0" marL="0">
-              <a:buNone/>
-            </a:pPr>
-            <a:r>
-              <a:rPr lang="en-US" sz="1050" dirty="0">
+            <a:endParaRPr lang="en-US" sz="2600" dirty="0"/>
+          </a:p>
+        </p:txBody>
+      </p:sp>
+      <p:sp>
+        <p:nvSpPr>
+          <p:cNvPr id="16" name="Text 14"/>
+          <p:cNvSpPr/>
+          <p:nvPr/>
+        </p:nvSpPr>
+        <p:spPr>
+          <a:xfrm>
+            <a:off x="1508760" y="4572000"/>
+            <a:ext cx="7178040" cy="868680"/>
+          </a:xfrm>
+          <a:prstGeom prst="rect">
+            <a:avLst/>
+          </a:prstGeom>
+          <a:noFill/>
+          <a:ln/>
+        </p:spPr>
+        <p:txBody>
+          <a:bodyPr wrap="square" lIns="0" tIns="0" rIns="0" bIns="0" rtlCol="0" anchor="ctr"/>
+          <a:lstStyle/>
+          <a:p>
+            <a:pPr indent="0" marL="0">
+              <a:buNone/>
+            </a:pPr>
+            <a:r>
+              <a:rPr lang="en-US" sz="1800" b="1" dirty="0">
                 <a:solidFill>
                   <a:srgbClr val="333333"/>
                 </a:solidFill>
@@ -24724,15 +24568,15 @@
                 <a:ea typeface="Arial" pitchFamily="34" charset="-122"/>
                 <a:cs typeface="Arial" pitchFamily="34" charset="-120"/>
               </a:rPr>
-              <a:t>AI-linked stocks are ~30%+ of US large-cap benchmarks. Passive exposure to a ~$750B capex cycle is not neutral — it's a thesis. Own the layer with pricing power for today's bottleneck.</a:t>
-            </a:r>
-            <a:endParaRPr lang="en-US" sz="1050" dirty="0"/>
-          </a:p>
-        </p:txBody>
-      </p:sp>
-      <p:sp>
-        <p:nvSpPr>
-          <p:cNvPr id="21" name="Text 19"/>
+              <a:t>If you index, you own the thesis. Choose it deliberately.</a:t>
+            </a:r>
+            <a:endParaRPr lang="en-US" sz="1800" dirty="0"/>
+          </a:p>
+        </p:txBody>
+      </p:sp>
+      <p:sp>
+        <p:nvSpPr>
+          <p:cNvPr id="17" name="Text 15"/>
           <p:cNvSpPr/>
           <p:nvPr/>
         </p:nvSpPr>
@@ -24763,7 +24607,7 @@
                 <a:ea typeface="Arial" pitchFamily="34" charset="-122"/>
                 <a:cs typeface="Arial" pitchFamily="34" charset="-120"/>
               </a:rPr>
-              <a:t>Sources: company filings; CreditSights / MUFG hyperscaler capex 2026 (Apr 2026); Goldman Sachs correlation data; Yahoo Finance YTD (Apr 17, 2026); SemiAnalysis; BofA HBM TAM; TrendForce.</a:t>
+              <a:t>Sources: company filings; CreditSights / MUFG; Goldman Sachs; SemiAnalysis; BofA; TrendForce. See appendix for figure-by-figure citations.</a:t>
             </a:r>
             <a:endParaRPr lang="en-US" sz="700" dirty="0"/>
           </a:p>
@@ -24771,7 +24615,7 @@
       </p:sp>
       <p:sp>
         <p:nvSpPr>
-          <p:cNvPr id="22" name="Shape 20"/>
+          <p:cNvPr id="18" name="Shape 16"/>
           <p:cNvSpPr/>
           <p:nvPr/>
         </p:nvSpPr>
@@ -24796,7 +24640,7 @@
       </p:sp>
       <p:sp>
         <p:nvSpPr>
-          <p:cNvPr id="23" name="Text 21"/>
+          <p:cNvPr id="19" name="Text 17"/>
           <p:cNvSpPr/>
           <p:nvPr/>
         </p:nvSpPr>
@@ -24835,7 +24679,7 @@
       </p:sp>
       <p:sp>
         <p:nvSpPr>
-          <p:cNvPr id="24" name="Text 22"/>
+          <p:cNvPr id="20" name="Text 18"/>
           <p:cNvSpPr/>
           <p:nvPr/>
         </p:nvSpPr>
@@ -25691,7 +25535,7 @@
                 <a:ea typeface="Arial" pitchFamily="34" charset="-122"/>
                 <a:cs typeface="Arial" pitchFamily="34" charset="-120"/>
               </a:rPr>
-              <a:t>"$975B 2026E semi market"</a:t>
+              <a:t>Four-stage AI chipmaking process</a:t>
             </a:r>
             <a:pPr indent="0" marL="0">
               <a:spcAft>
@@ -25725,7 +25569,7 @@
                 <a:ea typeface="Arial" pitchFamily="34" charset="-122"/>
                 <a:cs typeface="Arial" pitchFamily="34" charset="-120"/>
               </a:rPr>
-              <a:t>WSTS Fall 2025 forecast (Nov 2025 release)</a:t>
+              <a:t>SIA / SEMI industry taxonomy</a:t>
             </a:r>
             <a:endParaRPr lang="en-US" sz="850" dirty="0"/>
           </a:p>
@@ -25762,7 +25606,7 @@
                 <a:ea typeface="Arial" pitchFamily="34" charset="-122"/>
                 <a:cs typeface="Arial" pitchFamily="34" charset="-120"/>
               </a:rPr>
-              <a:t>Six-category chip taxonomy</a:t>
+              <a:t>"$20B fab" cost benchmark</a:t>
             </a:r>
             <a:pPr indent="0" marL="0">
               <a:spcAft>
@@ -25796,7 +25640,78 @@
                 <a:ea typeface="Arial" pitchFamily="34" charset="-122"/>
                 <a:cs typeface="Arial" pitchFamily="34" charset="-120"/>
               </a:rPr>
-              <a:t>SIA market-structure breakdown</a:t>
+              <a:t>SEMI World Fab Forecast; TSMC / Samsung capex disclosures</a:t>
+            </a:r>
+            <a:endParaRPr lang="en-US" sz="850" dirty="0"/>
+          </a:p>
+          <a:p>
+            <a:pPr indent="0" marL="0">
+              <a:spcAft>
+                <a:spcPts val="200"/>
+              </a:spcAft>
+              <a:buNone/>
+            </a:pPr>
+            <a:r>
+              <a:rPr lang="en-US" sz="850" b="1" dirty="0">
+                <a:solidFill>
+                  <a:srgbClr val="000000"/>
+                </a:solidFill>
+                <a:latin typeface="Arial" pitchFamily="34" charset="0"/>
+                <a:ea typeface="Arial" pitchFamily="34" charset="-122"/>
+                <a:cs typeface="Arial" pitchFamily="34" charset="-120"/>
+              </a:rPr>
+              <a:t>Slide 7  ·  </a:t>
+            </a:r>
+            <a:pPr indent="0" marL="0">
+              <a:spcAft>
+                <a:spcPts val="200"/>
+              </a:spcAft>
+              <a:buNone/>
+            </a:pPr>
+            <a:r>
+              <a:rPr lang="en-US" sz="850" dirty="0">
+                <a:solidFill>
+                  <a:srgbClr val="000000"/>
+                </a:solidFill>
+                <a:latin typeface="Arial" pitchFamily="34" charset="0"/>
+                <a:ea typeface="Arial" pitchFamily="34" charset="-122"/>
+                <a:cs typeface="Arial" pitchFamily="34" charset="-120"/>
+              </a:rPr>
+              <a:t>HBM + CoWoS advanced packaging</a:t>
+            </a:r>
+            <a:pPr indent="0" marL="0">
+              <a:spcAft>
+                <a:spcPts val="200"/>
+              </a:spcAft>
+              <a:buNone/>
+            </a:pPr>
+            <a:r>
+              <a:rPr lang="en-US" sz="850" dirty="0">
+                <a:solidFill>
+                  <a:srgbClr val="666666"/>
+                </a:solidFill>
+                <a:latin typeface="Arial" pitchFamily="34" charset="0"/>
+                <a:ea typeface="Arial" pitchFamily="34" charset="-122"/>
+                <a:cs typeface="Arial" pitchFamily="34" charset="-120"/>
+              </a:rPr>
+              <a:t>  —  </a:t>
+            </a:r>
+            <a:pPr indent="0" marL="0">
+              <a:spcAft>
+                <a:spcPts val="200"/>
+              </a:spcAft>
+              <a:buNone/>
+            </a:pPr>
+            <a:r>
+              <a:rPr lang="en-US" sz="850" i="1" dirty="0">
+                <a:solidFill>
+                  <a:srgbClr val="666666"/>
+                </a:solidFill>
+                <a:latin typeface="Arial" pitchFamily="34" charset="0"/>
+                <a:ea typeface="Arial" pitchFamily="34" charset="-122"/>
+                <a:cs typeface="Arial" pitchFamily="34" charset="-120"/>
+              </a:rPr>
+              <a:t>TrendForce; TSMC CoWoS capacity disclosures</a:t>
             </a:r>
             <a:endParaRPr lang="en-US" sz="850" dirty="0"/>
           </a:p>
@@ -35604,7 +35519,7 @@
                 <a:ea typeface="Arial Black" pitchFamily="34" charset="-122"/>
                 <a:cs typeface="Arial Black" pitchFamily="34" charset="-120"/>
               </a:rPr>
-              <a:t>Logic and memory absorb the capex — ASML and TSMC decide who ships</a:t>
+              <a:t>How an AI chip is made</a:t>
             </a:r>
             <a:endParaRPr lang="en-US" sz="2400" dirty="0"/>
           </a:p>
@@ -35643,7 +35558,7 @@
                 <a:ea typeface="Arial" pitchFamily="34" charset="-122"/>
                 <a:cs typeface="Arial" pitchFamily="34" charset="-120"/>
               </a:rPr>
-              <a:t>Chips pass through four making stages before reaching six product markets. AI capex piles into just two categories — but flows through bottlenecks at every stage.</a:t>
+              <a:t>Every AI accelerator inside a data center, from training GPUs to custom inference silicon, passes through the same four stages.</a:t>
             </a:r>
             <a:endParaRPr lang="en-US" sz="1350" dirty="0"/>
           </a:p>
@@ -35680,15 +35595,155 @@
         </p:nvSpPr>
         <p:spPr>
           <a:xfrm>
-            <a:off x="457200" y="1691640"/>
-            <a:ext cx="8229600" cy="777240"/>
+            <a:off x="457200" y="1554480"/>
+            <a:ext cx="4023360" cy="3931920"/>
           </a:xfrm>
           <a:prstGeom prst="rect">
             <a:avLst/>
           </a:prstGeom>
           <a:solidFill>
-            <a:srgbClr val="F9F9F9"/>
+            <a:srgbClr val="EEEEEE"/>
           </a:solidFill>
+          <a:ln w="9525">
+            <a:solidFill>
+              <a:srgbClr val="BBBBBB"/>
+            </a:solidFill>
+            <a:prstDash val="dash"/>
+          </a:ln>
+        </p:spPr>
+      </p:sp>
+      <p:sp>
+        <p:nvSpPr>
+          <p:cNvPr id="8" name="Text 6"/>
+          <p:cNvSpPr/>
+          <p:nvPr/>
+        </p:nvSpPr>
+        <p:spPr>
+          <a:xfrm>
+            <a:off x="548640" y="1554480"/>
+            <a:ext cx="3840480" cy="3931920"/>
+          </a:xfrm>
+          <a:prstGeom prst="rect">
+            <a:avLst/>
+          </a:prstGeom>
+          <a:noFill/>
+          <a:ln/>
+        </p:spPr>
+        <p:txBody>
+          <a:bodyPr wrap="square" lIns="0" tIns="0" rIns="0" bIns="0" rtlCol="0" anchor="ctr"/>
+          <a:lstStyle/>
+          <a:p>
+            <a:pPr algn="ctr" indent="0" marL="0">
+              <a:buNone/>
+            </a:pPr>
+            <a:r>
+              <a:rPr lang="en-US" sz="1000" i="1" dirty="0">
+                <a:solidFill>
+                  <a:srgbClr val="888888"/>
+                </a:solidFill>
+                <a:latin typeface="Arial" pitchFamily="34" charset="0"/>
+                <a:ea typeface="Arial" pitchFamily="34" charset="-122"/>
+                <a:cs typeface="Arial" pitchFamily="34" charset="-120"/>
+              </a:rPr>
+              <a:t>IMAGE: Photo: AI accelerator package close-up, NVIDIA H100/H200 or Blackwell style. Large central logic die surrounded by HBM memory stacks on a CoWoS substrate, gold contact pads visible, dramatic studio lighting on dark backdrop, square framing.</a:t>
+            </a:r>
+            <a:endParaRPr lang="en-US" sz="1000" dirty="0"/>
+          </a:p>
+        </p:txBody>
+      </p:sp>
+      <p:sp>
+        <p:nvSpPr>
+          <p:cNvPr id="9" name="Text 7"/>
+          <p:cNvSpPr/>
+          <p:nvPr/>
+        </p:nvSpPr>
+        <p:spPr>
+          <a:xfrm>
+            <a:off x="457200" y="5559552"/>
+            <a:ext cx="4023360" cy="274320"/>
+          </a:xfrm>
+          <a:prstGeom prst="rect">
+            <a:avLst/>
+          </a:prstGeom>
+          <a:noFill/>
+          <a:ln/>
+        </p:spPr>
+        <p:txBody>
+          <a:bodyPr wrap="square" lIns="0" tIns="0" rIns="0" bIns="0" rtlCol="0" anchor="t"/>
+          <a:lstStyle/>
+          <a:p>
+            <a:pPr indent="0" marL="0">
+              <a:buNone/>
+            </a:pPr>
+            <a:r>
+              <a:rPr lang="en-US" sz="800" i="1" dirty="0">
+                <a:solidFill>
+                  <a:srgbClr val="666666"/>
+                </a:solidFill>
+                <a:latin typeface="Arial" pitchFamily="34" charset="0"/>
+                <a:ea typeface="Arial" pitchFamily="34" charset="-122"/>
+                <a:cs typeface="Arial" pitchFamily="34" charset="-120"/>
+              </a:rPr>
+              <a:t>An AI accelerator package: a large logic die surrounded by HBM memory stacks on a CoWoS substrate.</a:t>
+            </a:r>
+            <a:endParaRPr lang="en-US" sz="800" dirty="0"/>
+          </a:p>
+        </p:txBody>
+      </p:sp>
+      <p:sp>
+        <p:nvSpPr>
+          <p:cNvPr id="10" name="Text 8"/>
+          <p:cNvSpPr/>
+          <p:nvPr/>
+        </p:nvSpPr>
+        <p:spPr>
+          <a:xfrm>
+            <a:off x="4617720" y="1554480"/>
+            <a:ext cx="4069080" cy="219456"/>
+          </a:xfrm>
+          <a:prstGeom prst="rect">
+            <a:avLst/>
+          </a:prstGeom>
+          <a:noFill/>
+          <a:ln/>
+        </p:spPr>
+        <p:txBody>
+          <a:bodyPr wrap="square" lIns="0" tIns="0" rIns="0" bIns="0" rtlCol="0" anchor="ctr"/>
+          <a:lstStyle/>
+          <a:p>
+            <a:pPr indent="0" marL="0">
+              <a:buNone/>
+            </a:pPr>
+            <a:r>
+              <a:rPr lang="en-US" sz="900" b="1" spc="200" kern="0" dirty="0">
+                <a:solidFill>
+                  <a:srgbClr val="666666"/>
+                </a:solidFill>
+                <a:latin typeface="Arial" pitchFamily="34" charset="0"/>
+                <a:ea typeface="Arial" pitchFamily="34" charset="-122"/>
+                <a:cs typeface="Arial" pitchFamily="34" charset="-120"/>
+              </a:rPr>
+              <a:t>THE FOUR STAGES</a:t>
+            </a:r>
+            <a:endParaRPr lang="en-US" sz="900" dirty="0"/>
+          </a:p>
+        </p:txBody>
+      </p:sp>
+      <p:sp>
+        <p:nvSpPr>
+          <p:cNvPr id="11" name="Shape 9"/>
+          <p:cNvSpPr/>
+          <p:nvPr/>
+        </p:nvSpPr>
+        <p:spPr>
+          <a:xfrm>
+            <a:off x="4617720" y="1783080"/>
+            <a:ext cx="4069080" cy="0"/>
+          </a:xfrm>
+          <a:prstGeom prst="line">
+            <a:avLst/>
+          </a:prstGeom>
+          <a:noFill/>
           <a:ln w="6350">
             <a:solidFill>
               <a:srgbClr val="E5E5E5"/>
@@ -35699,14 +35754,14 @@
       </p:sp>
       <p:sp>
         <p:nvSpPr>
-          <p:cNvPr id="8" name="Shape 6"/>
-          <p:cNvSpPr/>
-          <p:nvPr/>
-        </p:nvSpPr>
-        <p:spPr>
-          <a:xfrm>
-            <a:off x="640080" y="1792224"/>
-            <a:ext cx="128016" cy="128016"/>
+          <p:cNvPr id="12" name="Shape 10"/>
+          <p:cNvSpPr/>
+          <p:nvPr/>
+        </p:nvSpPr>
+        <p:spPr>
+          <a:xfrm>
+            <a:off x="4617720" y="1911096"/>
+            <a:ext cx="384048" cy="384048"/>
           </a:xfrm>
           <a:prstGeom prst="ellipse">
             <a:avLst/>
@@ -35724,14 +35779,14 @@
       </p:sp>
       <p:sp>
         <p:nvSpPr>
-          <p:cNvPr id="9" name="Text 7"/>
-          <p:cNvSpPr/>
-          <p:nvPr/>
-        </p:nvSpPr>
-        <p:spPr>
-          <a:xfrm>
-            <a:off x="822960" y="1709928"/>
-            <a:ext cx="1600200" cy="237744"/>
+          <p:cNvPr id="13" name="Text 11"/>
+          <p:cNvSpPr/>
+          <p:nvPr/>
+        </p:nvSpPr>
+        <p:spPr>
+          <a:xfrm>
+            <a:off x="4617720" y="1911096"/>
+            <a:ext cx="384048" cy="384048"/>
           </a:xfrm>
           <a:prstGeom prst="rect">
             <a:avLst/>
@@ -35743,11 +35798,50 @@
           <a:bodyPr wrap="square" lIns="0" tIns="0" rIns="0" bIns="0" rtlCol="0" anchor="ctr"/>
           <a:lstStyle/>
           <a:p>
-            <a:pPr indent="0" marL="0">
-              <a:buNone/>
-            </a:pPr>
-            <a:r>
-              <a:rPr lang="en-US" sz="1100" b="1" spc="200" kern="0" dirty="0">
+            <a:pPr algn="ctr" indent="0" marL="0">
+              <a:buNone/>
+            </a:pPr>
+            <a:r>
+              <a:rPr lang="en-US" sz="1100" b="1" dirty="0">
+                <a:solidFill>
+                  <a:srgbClr val="FFFFFF"/>
+                </a:solidFill>
+                <a:latin typeface="Arial Black" pitchFamily="34" charset="0"/>
+                <a:ea typeface="Arial Black" pitchFamily="34" charset="-122"/>
+                <a:cs typeface="Arial Black" pitchFamily="34" charset="-120"/>
+              </a:rPr>
+              <a:t>01</a:t>
+            </a:r>
+            <a:endParaRPr lang="en-US" sz="1100" dirty="0"/>
+          </a:p>
+        </p:txBody>
+      </p:sp>
+      <p:sp>
+        <p:nvSpPr>
+          <p:cNvPr id="14" name="Text 12"/>
+          <p:cNvSpPr/>
+          <p:nvPr/>
+        </p:nvSpPr>
+        <p:spPr>
+          <a:xfrm>
+            <a:off x="5166360" y="1874520"/>
+            <a:ext cx="3520440" cy="274320"/>
+          </a:xfrm>
+          <a:prstGeom prst="rect">
+            <a:avLst/>
+          </a:prstGeom>
+          <a:noFill/>
+          <a:ln/>
+        </p:spPr>
+        <p:txBody>
+          <a:bodyPr wrap="square" lIns="0" tIns="0" rIns="0" bIns="0" rtlCol="0" anchor="ctr"/>
+          <a:lstStyle/>
+          <a:p>
+            <a:pPr indent="0" marL="0">
+              <a:buNone/>
+            </a:pPr>
+            <a:r>
+              <a:rPr lang="en-US" sz="1300" b="1" spc="150" kern="0" dirty="0">
                 <a:solidFill>
                   <a:srgbClr val="000000"/>
                 </a:solidFill>
@@ -35757,36 +35851,75 @@
               </a:rPr>
               <a:t>DESIGN</a:t>
             </a:r>
-            <a:endParaRPr lang="en-US" sz="1100" dirty="0"/>
-          </a:p>
-        </p:txBody>
-      </p:sp>
-      <p:sp>
-        <p:nvSpPr>
-          <p:cNvPr id="10" name="Text 8"/>
-          <p:cNvSpPr/>
-          <p:nvPr/>
-        </p:nvSpPr>
-        <p:spPr>
-          <a:xfrm>
-            <a:off x="640080" y="1947672"/>
-            <a:ext cx="1783080" cy="182880"/>
-          </a:xfrm>
-          <a:prstGeom prst="rect">
-            <a:avLst/>
-          </a:prstGeom>
-          <a:noFill/>
-          <a:ln/>
-        </p:spPr>
-        <p:txBody>
-          <a:bodyPr wrap="square" lIns="0" tIns="0" rIns="0" bIns="0" rtlCol="0" anchor="ctr"/>
-          <a:lstStyle/>
-          <a:p>
-            <a:pPr indent="0" marL="0">
-              <a:buNone/>
-            </a:pPr>
-            <a:r>
-              <a:rPr lang="en-US" sz="950" i="1" dirty="0">
+            <a:endParaRPr lang="en-US" sz="1300" dirty="0"/>
+          </a:p>
+        </p:txBody>
+      </p:sp>
+      <p:sp>
+        <p:nvSpPr>
+          <p:cNvPr id="15" name="Text 13"/>
+          <p:cNvSpPr/>
+          <p:nvPr/>
+        </p:nvSpPr>
+        <p:spPr>
+          <a:xfrm>
+            <a:off x="5166360" y="2148840"/>
+            <a:ext cx="3520440" cy="457200"/>
+          </a:xfrm>
+          <a:prstGeom prst="rect">
+            <a:avLst/>
+          </a:prstGeom>
+          <a:noFill/>
+          <a:ln/>
+        </p:spPr>
+        <p:txBody>
+          <a:bodyPr wrap="square" lIns="0" tIns="0" rIns="0" bIns="0" rtlCol="0" anchor="t"/>
+          <a:lstStyle/>
+          <a:p>
+            <a:pPr indent="0" marL="0">
+              <a:buNone/>
+            </a:pPr>
+            <a:r>
+              <a:rPr lang="en-US" sz="1050" dirty="0">
+                <a:solidFill>
+                  <a:srgbClr val="333333"/>
+                </a:solidFill>
+                <a:latin typeface="Arial" pitchFamily="34" charset="0"/>
+                <a:ea typeface="Arial" pitchFamily="34" charset="-122"/>
+                <a:cs typeface="Arial" pitchFamily="34" charset="-120"/>
+              </a:rPr>
+              <a:t>Engineers blueprint the AI chip's tens of billions of transistors in software.</a:t>
+            </a:r>
+            <a:endParaRPr lang="en-US" sz="1050" dirty="0"/>
+          </a:p>
+        </p:txBody>
+      </p:sp>
+      <p:sp>
+        <p:nvSpPr>
+          <p:cNvPr id="16" name="Text 14"/>
+          <p:cNvSpPr/>
+          <p:nvPr/>
+        </p:nvSpPr>
+        <p:spPr>
+          <a:xfrm>
+            <a:off x="5166360" y="2587752"/>
+            <a:ext cx="3520440" cy="182880"/>
+          </a:xfrm>
+          <a:prstGeom prst="rect">
+            <a:avLst/>
+          </a:prstGeom>
+          <a:noFill/>
+          <a:ln/>
+        </p:spPr>
+        <p:txBody>
+          <a:bodyPr wrap="square" lIns="0" tIns="0" rIns="0" bIns="0" rtlCol="0" anchor="t"/>
+          <a:lstStyle/>
+          <a:p>
+            <a:pPr indent="0" marL="0">
+              <a:buNone/>
+            </a:pPr>
+            <a:r>
+              <a:rPr lang="en-US" sz="900" i="1" dirty="0">
                 <a:solidFill>
                   <a:srgbClr val="666666"/>
                 </a:solidFill>
@@ -35794,22 +35927,22 @@
                 <a:ea typeface="Arial" pitchFamily="34" charset="-122"/>
                 <a:cs typeface="Arial" pitchFamily="34" charset="-120"/>
               </a:rPr>
-              <a:t>architects the chip</a:t>
-            </a:r>
-            <a:endParaRPr lang="en-US" sz="950" dirty="0"/>
-          </a:p>
-        </p:txBody>
-      </p:sp>
-      <p:sp>
-        <p:nvSpPr>
-          <p:cNvPr id="11" name="Shape 9"/>
-          <p:cNvSpPr/>
-          <p:nvPr/>
-        </p:nvSpPr>
-        <p:spPr>
-          <a:xfrm>
-            <a:off x="658368" y="2148840"/>
-            <a:ext cx="1600200" cy="0"/>
+              <a:t>NVIDIA · AMD · Broadcom · Google TPU</a:t>
+            </a:r>
+            <a:endParaRPr lang="en-US" sz="900" dirty="0"/>
+          </a:p>
+        </p:txBody>
+      </p:sp>
+      <p:sp>
+        <p:nvSpPr>
+          <p:cNvPr id="17" name="Shape 15"/>
+          <p:cNvSpPr/>
+          <p:nvPr/>
+        </p:nvSpPr>
+        <p:spPr>
+          <a:xfrm>
+            <a:off x="4617720" y="2816352"/>
+            <a:ext cx="4069080" cy="0"/>
           </a:xfrm>
           <a:prstGeom prst="line">
             <a:avLst/>
@@ -35825,92 +35958,14 @@
       </p:sp>
       <p:sp>
         <p:nvSpPr>
-          <p:cNvPr id="12" name="Text 10"/>
-          <p:cNvSpPr/>
-          <p:nvPr/>
-        </p:nvSpPr>
-        <p:spPr>
-          <a:xfrm>
-            <a:off x="640080" y="2167128"/>
-            <a:ext cx="1783080" cy="292608"/>
-          </a:xfrm>
-          <a:prstGeom prst="rect">
-            <a:avLst/>
-          </a:prstGeom>
-          <a:noFill/>
-          <a:ln/>
-        </p:spPr>
-        <p:txBody>
-          <a:bodyPr wrap="square" lIns="0" tIns="0" rIns="0" bIns="0" rtlCol="0" anchor="t"/>
-          <a:lstStyle/>
-          <a:p>
-            <a:pPr indent="0" marL="0">
-              <a:buNone/>
-            </a:pPr>
-            <a:r>
-              <a:rPr lang="en-US" sz="850" dirty="0">
-                <a:solidFill>
-                  <a:srgbClr val="333333"/>
-                </a:solidFill>
-                <a:latin typeface="Arial" pitchFamily="34" charset="0"/>
-                <a:ea typeface="Arial" pitchFamily="34" charset="-122"/>
-                <a:cs typeface="Arial" pitchFamily="34" charset="-120"/>
-              </a:rPr>
-              <a:t>NVIDIA · Apple · AMD · Broadcom</a:t>
-            </a:r>
-            <a:endParaRPr lang="en-US" sz="850" dirty="0"/>
-          </a:p>
-        </p:txBody>
-      </p:sp>
-      <p:sp>
-        <p:nvSpPr>
-          <p:cNvPr id="13" name="Text 11"/>
-          <p:cNvSpPr/>
-          <p:nvPr/>
-        </p:nvSpPr>
-        <p:spPr>
-          <a:xfrm>
-            <a:off x="2359152" y="1897380"/>
-            <a:ext cx="219456" cy="365760"/>
-          </a:xfrm>
-          <a:prstGeom prst="rect">
-            <a:avLst/>
-          </a:prstGeom>
-          <a:noFill/>
-          <a:ln/>
-        </p:spPr>
-        <p:txBody>
-          <a:bodyPr wrap="square" lIns="0" tIns="0" rIns="0" bIns="0" rtlCol="0" anchor="ctr"/>
-          <a:lstStyle/>
-          <a:p>
-            <a:pPr algn="ctr" indent="0" marL="0">
-              <a:buNone/>
-            </a:pPr>
-            <a:r>
-              <a:rPr lang="en-US" sz="2400" b="1" dirty="0">
-                <a:solidFill>
-                  <a:srgbClr val="666666"/>
-                </a:solidFill>
-                <a:latin typeface="Arial" pitchFamily="34" charset="0"/>
-                <a:ea typeface="Arial" pitchFamily="34" charset="-122"/>
-                <a:cs typeface="Arial" pitchFamily="34" charset="-120"/>
-              </a:rPr>
-              <a:t>›</a:t>
-            </a:r>
-            <a:endParaRPr lang="en-US" sz="2400" dirty="0"/>
-          </a:p>
-        </p:txBody>
-      </p:sp>
-      <p:sp>
-        <p:nvSpPr>
-          <p:cNvPr id="14" name="Shape 12"/>
-          <p:cNvSpPr/>
-          <p:nvPr/>
-        </p:nvSpPr>
-        <p:spPr>
-          <a:xfrm>
-            <a:off x="2697480" y="1792224"/>
-            <a:ext cx="128016" cy="128016"/>
+          <p:cNvPr id="18" name="Shape 16"/>
+          <p:cNvSpPr/>
+          <p:nvPr/>
+        </p:nvSpPr>
+        <p:spPr>
+          <a:xfrm>
+            <a:off x="4617720" y="2871216"/>
+            <a:ext cx="384048" cy="384048"/>
           </a:xfrm>
           <a:prstGeom prst="ellipse">
             <a:avLst/>
@@ -35928,14 +35983,14 @@
       </p:sp>
       <p:sp>
         <p:nvSpPr>
-          <p:cNvPr id="15" name="Text 13"/>
-          <p:cNvSpPr/>
-          <p:nvPr/>
-        </p:nvSpPr>
-        <p:spPr>
-          <a:xfrm>
-            <a:off x="2880360" y="1709928"/>
-            <a:ext cx="1600200" cy="237744"/>
+          <p:cNvPr id="19" name="Text 17"/>
+          <p:cNvSpPr/>
+          <p:nvPr/>
+        </p:nvSpPr>
+        <p:spPr>
+          <a:xfrm>
+            <a:off x="4617720" y="2871216"/>
+            <a:ext cx="384048" cy="384048"/>
           </a:xfrm>
           <a:prstGeom prst="rect">
             <a:avLst/>
@@ -35947,11 +36002,50 @@
           <a:bodyPr wrap="square" lIns="0" tIns="0" rIns="0" bIns="0" rtlCol="0" anchor="ctr"/>
           <a:lstStyle/>
           <a:p>
-            <a:pPr indent="0" marL="0">
-              <a:buNone/>
-            </a:pPr>
-            <a:r>
-              <a:rPr lang="en-US" sz="1100" b="1" spc="200" kern="0" dirty="0">
+            <a:pPr algn="ctr" indent="0" marL="0">
+              <a:buNone/>
+            </a:pPr>
+            <a:r>
+              <a:rPr lang="en-US" sz="1100" b="1" dirty="0">
+                <a:solidFill>
+                  <a:srgbClr val="FFFFFF"/>
+                </a:solidFill>
+                <a:latin typeface="Arial Black" pitchFamily="34" charset="0"/>
+                <a:ea typeface="Arial Black" pitchFamily="34" charset="-122"/>
+                <a:cs typeface="Arial Black" pitchFamily="34" charset="-120"/>
+              </a:rPr>
+              <a:t>02</a:t>
+            </a:r>
+            <a:endParaRPr lang="en-US" sz="1100" dirty="0"/>
+          </a:p>
+        </p:txBody>
+      </p:sp>
+      <p:sp>
+        <p:nvSpPr>
+          <p:cNvPr id="20" name="Text 18"/>
+          <p:cNvSpPr/>
+          <p:nvPr/>
+        </p:nvSpPr>
+        <p:spPr>
+          <a:xfrm>
+            <a:off x="5166360" y="2834640"/>
+            <a:ext cx="3520440" cy="274320"/>
+          </a:xfrm>
+          <a:prstGeom prst="rect">
+            <a:avLst/>
+          </a:prstGeom>
+          <a:noFill/>
+          <a:ln/>
+        </p:spPr>
+        <p:txBody>
+          <a:bodyPr wrap="square" lIns="0" tIns="0" rIns="0" bIns="0" rtlCol="0" anchor="ctr"/>
+          <a:lstStyle/>
+          <a:p>
+            <a:pPr indent="0" marL="0">
+              <a:buNone/>
+            </a:pPr>
+            <a:r>
+              <a:rPr lang="en-US" sz="1300" b="1" spc="150" kern="0" dirty="0">
                 <a:solidFill>
                   <a:srgbClr val="000000"/>
                 </a:solidFill>
@@ -35961,36 +36055,75 @@
               </a:rPr>
               <a:t>EQUIPMENT</a:t>
             </a:r>
-            <a:endParaRPr lang="en-US" sz="1100" dirty="0"/>
-          </a:p>
-        </p:txBody>
-      </p:sp>
-      <p:sp>
-        <p:nvSpPr>
-          <p:cNvPr id="16" name="Text 14"/>
-          <p:cNvSpPr/>
-          <p:nvPr/>
-        </p:nvSpPr>
-        <p:spPr>
-          <a:xfrm>
-            <a:off x="2697480" y="1947672"/>
-            <a:ext cx="1783080" cy="182880"/>
-          </a:xfrm>
-          <a:prstGeom prst="rect">
-            <a:avLst/>
-          </a:prstGeom>
-          <a:noFill/>
-          <a:ln/>
-        </p:spPr>
-        <p:txBody>
-          <a:bodyPr wrap="square" lIns="0" tIns="0" rIns="0" bIns="0" rtlCol="0" anchor="ctr"/>
-          <a:lstStyle/>
-          <a:p>
-            <a:pPr indent="0" marL="0">
-              <a:buNone/>
-            </a:pPr>
-            <a:r>
-              <a:rPr lang="en-US" sz="950" i="1" dirty="0">
+            <a:endParaRPr lang="en-US" sz="1300" dirty="0"/>
+          </a:p>
+        </p:txBody>
+      </p:sp>
+      <p:sp>
+        <p:nvSpPr>
+          <p:cNvPr id="21" name="Text 19"/>
+          <p:cNvSpPr/>
+          <p:nvPr/>
+        </p:nvSpPr>
+        <p:spPr>
+          <a:xfrm>
+            <a:off x="5166360" y="3108960"/>
+            <a:ext cx="3520440" cy="457200"/>
+          </a:xfrm>
+          <a:prstGeom prst="rect">
+            <a:avLst/>
+          </a:prstGeom>
+          <a:noFill/>
+          <a:ln/>
+        </p:spPr>
+        <p:txBody>
+          <a:bodyPr wrap="square" lIns="0" tIns="0" rIns="0" bIns="0" rtlCol="0" anchor="t"/>
+          <a:lstStyle/>
+          <a:p>
+            <a:pPr indent="0" marL="0">
+              <a:buNone/>
+            </a:pPr>
+            <a:r>
+              <a:rPr lang="en-US" sz="1050" dirty="0">
+                <a:solidFill>
+                  <a:srgbClr val="333333"/>
+                </a:solidFill>
+                <a:latin typeface="Arial" pitchFamily="34" charset="0"/>
+                <a:ea typeface="Arial" pitchFamily="34" charset="-122"/>
+                <a:cs typeface="Arial" pitchFamily="34" charset="-120"/>
+              </a:rPr>
+              <a:t>Specialized tools, especially EUV lithography, are built to print at atomic scale.</a:t>
+            </a:r>
+            <a:endParaRPr lang="en-US" sz="1050" dirty="0"/>
+          </a:p>
+        </p:txBody>
+      </p:sp>
+      <p:sp>
+        <p:nvSpPr>
+          <p:cNvPr id="22" name="Text 20"/>
+          <p:cNvSpPr/>
+          <p:nvPr/>
+        </p:nvSpPr>
+        <p:spPr>
+          <a:xfrm>
+            <a:off x="5166360" y="3547872"/>
+            <a:ext cx="3520440" cy="182880"/>
+          </a:xfrm>
+          <a:prstGeom prst="rect">
+            <a:avLst/>
+          </a:prstGeom>
+          <a:noFill/>
+          <a:ln/>
+        </p:spPr>
+        <p:txBody>
+          <a:bodyPr wrap="square" lIns="0" tIns="0" rIns="0" bIns="0" rtlCol="0" anchor="t"/>
+          <a:lstStyle/>
+          <a:p>
+            <a:pPr indent="0" marL="0">
+              <a:buNone/>
+            </a:pPr>
+            <a:r>
+              <a:rPr lang="en-US" sz="900" i="1" dirty="0">
                 <a:solidFill>
                   <a:srgbClr val="666666"/>
                 </a:solidFill>
@@ -35998,22 +36131,22 @@
                 <a:ea typeface="Arial" pitchFamily="34" charset="-122"/>
                 <a:cs typeface="Arial" pitchFamily="34" charset="-120"/>
               </a:rPr>
-              <a:t>builds the tools</a:t>
-            </a:r>
-            <a:endParaRPr lang="en-US" sz="950" dirty="0"/>
-          </a:p>
-        </p:txBody>
-      </p:sp>
-      <p:sp>
-        <p:nvSpPr>
-          <p:cNvPr id="17" name="Shape 15"/>
-          <p:cNvSpPr/>
-          <p:nvPr/>
-        </p:nvSpPr>
-        <p:spPr>
-          <a:xfrm>
-            <a:off x="2715768" y="2148840"/>
-            <a:ext cx="1600200" cy="0"/>
+              <a:t>ASML · Applied Materials · Lam · KLA</a:t>
+            </a:r>
+            <a:endParaRPr lang="en-US" sz="900" dirty="0"/>
+          </a:p>
+        </p:txBody>
+      </p:sp>
+      <p:sp>
+        <p:nvSpPr>
+          <p:cNvPr id="23" name="Shape 21"/>
+          <p:cNvSpPr/>
+          <p:nvPr/>
+        </p:nvSpPr>
+        <p:spPr>
+          <a:xfrm>
+            <a:off x="4617720" y="3776472"/>
+            <a:ext cx="4069080" cy="0"/>
           </a:xfrm>
           <a:prstGeom prst="line">
             <a:avLst/>
@@ -36029,102 +36162,24 @@
       </p:sp>
       <p:sp>
         <p:nvSpPr>
-          <p:cNvPr id="18" name="Text 16"/>
-          <p:cNvSpPr/>
-          <p:nvPr/>
-        </p:nvSpPr>
-        <p:spPr>
-          <a:xfrm>
-            <a:off x="2697480" y="2167128"/>
-            <a:ext cx="1783080" cy="292608"/>
-          </a:xfrm>
-          <a:prstGeom prst="rect">
-            <a:avLst/>
-          </a:prstGeom>
-          <a:noFill/>
-          <a:ln/>
-        </p:spPr>
-        <p:txBody>
-          <a:bodyPr wrap="square" lIns="0" tIns="0" rIns="0" bIns="0" rtlCol="0" anchor="t"/>
-          <a:lstStyle/>
-          <a:p>
-            <a:pPr indent="0" marL="0">
-              <a:buNone/>
-            </a:pPr>
-            <a:r>
-              <a:rPr lang="en-US" sz="850" dirty="0">
-                <a:solidFill>
-                  <a:srgbClr val="333333"/>
-                </a:solidFill>
-                <a:latin typeface="Arial" pitchFamily="34" charset="0"/>
-                <a:ea typeface="Arial" pitchFamily="34" charset="-122"/>
-                <a:cs typeface="Arial" pitchFamily="34" charset="-120"/>
-              </a:rPr>
-              <a:t>ASML · Applied Materials · Lam · KLA</a:t>
-            </a:r>
-            <a:endParaRPr lang="en-US" sz="850" dirty="0"/>
-          </a:p>
-        </p:txBody>
-      </p:sp>
-      <p:sp>
-        <p:nvSpPr>
-          <p:cNvPr id="19" name="Text 17"/>
-          <p:cNvSpPr/>
-          <p:nvPr/>
-        </p:nvSpPr>
-        <p:spPr>
-          <a:xfrm>
-            <a:off x="4416552" y="1897380"/>
-            <a:ext cx="219456" cy="365760"/>
-          </a:xfrm>
-          <a:prstGeom prst="rect">
-            <a:avLst/>
-          </a:prstGeom>
-          <a:noFill/>
-          <a:ln/>
-        </p:spPr>
-        <p:txBody>
-          <a:bodyPr wrap="square" lIns="0" tIns="0" rIns="0" bIns="0" rtlCol="0" anchor="ctr"/>
-          <a:lstStyle/>
-          <a:p>
-            <a:pPr algn="ctr" indent="0" marL="0">
-              <a:buNone/>
-            </a:pPr>
-            <a:r>
-              <a:rPr lang="en-US" sz="2400" b="1" dirty="0">
-                <a:solidFill>
-                  <a:srgbClr val="666666"/>
-                </a:solidFill>
-                <a:latin typeface="Arial" pitchFamily="34" charset="0"/>
-                <a:ea typeface="Arial" pitchFamily="34" charset="-122"/>
-                <a:cs typeface="Arial" pitchFamily="34" charset="-120"/>
-              </a:rPr>
-              <a:t>›</a:t>
-            </a:r>
-            <a:endParaRPr lang="en-US" sz="2400" dirty="0"/>
-          </a:p>
-        </p:txBody>
-      </p:sp>
-      <p:sp>
-        <p:nvSpPr>
-          <p:cNvPr id="20" name="Shape 18"/>
-          <p:cNvSpPr/>
-          <p:nvPr/>
-        </p:nvSpPr>
-        <p:spPr>
-          <a:xfrm>
-            <a:off x="4754880" y="1792224"/>
-            <a:ext cx="128016" cy="128016"/>
+          <p:cNvPr id="24" name="Shape 22"/>
+          <p:cNvSpPr/>
+          <p:nvPr/>
+        </p:nvSpPr>
+        <p:spPr>
+          <a:xfrm>
+            <a:off x="4617720" y="3831336"/>
+            <a:ext cx="384048" cy="384048"/>
           </a:xfrm>
           <a:prstGeom prst="ellipse">
             <a:avLst/>
           </a:prstGeom>
           <a:solidFill>
-            <a:srgbClr val="333333"/>
+            <a:srgbClr val="008B8B"/>
           </a:solidFill>
           <a:ln w="12700">
             <a:solidFill>
-              <a:srgbClr val="333333"/>
+              <a:srgbClr val="008B8B"/>
             </a:solidFill>
             <a:prstDash val="solid"/>
           </a:ln>
@@ -36132,14 +36187,14 @@
       </p:sp>
       <p:sp>
         <p:nvSpPr>
-          <p:cNvPr id="21" name="Text 19"/>
-          <p:cNvSpPr/>
-          <p:nvPr/>
-        </p:nvSpPr>
-        <p:spPr>
-          <a:xfrm>
-            <a:off x="4937760" y="1709928"/>
-            <a:ext cx="1600200" cy="237744"/>
+          <p:cNvPr id="25" name="Text 23"/>
+          <p:cNvSpPr/>
+          <p:nvPr/>
+        </p:nvSpPr>
+        <p:spPr>
+          <a:xfrm>
+            <a:off x="4617720" y="3831336"/>
+            <a:ext cx="384048" cy="384048"/>
           </a:xfrm>
           <a:prstGeom prst="rect">
             <a:avLst/>
@@ -36151,11 +36206,50 @@
           <a:bodyPr wrap="square" lIns="0" tIns="0" rIns="0" bIns="0" rtlCol="0" anchor="ctr"/>
           <a:lstStyle/>
           <a:p>
-            <a:pPr indent="0" marL="0">
-              <a:buNone/>
-            </a:pPr>
-            <a:r>
-              <a:rPr lang="en-US" sz="1100" b="1" spc="200" kern="0" dirty="0">
+            <a:pPr algn="ctr" indent="0" marL="0">
+              <a:buNone/>
+            </a:pPr>
+            <a:r>
+              <a:rPr lang="en-US" sz="1100" b="1" dirty="0">
+                <a:solidFill>
+                  <a:srgbClr val="FFFFFF"/>
+                </a:solidFill>
+                <a:latin typeface="Arial Black" pitchFamily="34" charset="0"/>
+                <a:ea typeface="Arial Black" pitchFamily="34" charset="-122"/>
+                <a:cs typeface="Arial Black" pitchFamily="34" charset="-120"/>
+              </a:rPr>
+              <a:t>03</a:t>
+            </a:r>
+            <a:endParaRPr lang="en-US" sz="1100" dirty="0"/>
+          </a:p>
+        </p:txBody>
+      </p:sp>
+      <p:sp>
+        <p:nvSpPr>
+          <p:cNvPr id="26" name="Text 24"/>
+          <p:cNvSpPr/>
+          <p:nvPr/>
+        </p:nvSpPr>
+        <p:spPr>
+          <a:xfrm>
+            <a:off x="5166360" y="3794760"/>
+            <a:ext cx="3520440" cy="274320"/>
+          </a:xfrm>
+          <a:prstGeom prst="rect">
+            <a:avLst/>
+          </a:prstGeom>
+          <a:noFill/>
+          <a:ln/>
+        </p:spPr>
+        <p:txBody>
+          <a:bodyPr wrap="square" lIns="0" tIns="0" rIns="0" bIns="0" rtlCol="0" anchor="ctr"/>
+          <a:lstStyle/>
+          <a:p>
+            <a:pPr indent="0" marL="0">
+              <a:buNone/>
+            </a:pPr>
+            <a:r>
+              <a:rPr lang="en-US" sz="1300" b="1" spc="150" kern="0" dirty="0">
                 <a:solidFill>
                   <a:srgbClr val="000000"/>
                 </a:solidFill>
@@ -36163,38 +36257,77 @@
                 <a:ea typeface="Arial" pitchFamily="34" charset="-122"/>
                 <a:cs typeface="Arial" pitchFamily="34" charset="-120"/>
               </a:rPr>
-              <a:t>FOUNDRY</a:t>
-            </a:r>
-            <a:endParaRPr lang="en-US" sz="1100" dirty="0"/>
-          </a:p>
-        </p:txBody>
-      </p:sp>
-      <p:sp>
-        <p:nvSpPr>
-          <p:cNvPr id="22" name="Text 20"/>
-          <p:cNvSpPr/>
-          <p:nvPr/>
-        </p:nvSpPr>
-        <p:spPr>
-          <a:xfrm>
-            <a:off x="4754880" y="1947672"/>
-            <a:ext cx="1783080" cy="182880"/>
-          </a:xfrm>
-          <a:prstGeom prst="rect">
-            <a:avLst/>
-          </a:prstGeom>
-          <a:noFill/>
-          <a:ln/>
-        </p:spPr>
-        <p:txBody>
-          <a:bodyPr wrap="square" lIns="0" tIns="0" rIns="0" bIns="0" rtlCol="0" anchor="ctr"/>
-          <a:lstStyle/>
-          <a:p>
-            <a:pPr indent="0" marL="0">
-              <a:buNone/>
-            </a:pPr>
-            <a:r>
-              <a:rPr lang="en-US" sz="950" i="1" dirty="0">
+              <a:t>FABRICATION</a:t>
+            </a:r>
+            <a:endParaRPr lang="en-US" sz="1300" dirty="0"/>
+          </a:p>
+        </p:txBody>
+      </p:sp>
+      <p:sp>
+        <p:nvSpPr>
+          <p:cNvPr id="27" name="Text 25"/>
+          <p:cNvSpPr/>
+          <p:nvPr/>
+        </p:nvSpPr>
+        <p:spPr>
+          <a:xfrm>
+            <a:off x="5166360" y="4069080"/>
+            <a:ext cx="3520440" cy="457200"/>
+          </a:xfrm>
+          <a:prstGeom prst="rect">
+            <a:avLst/>
+          </a:prstGeom>
+          <a:noFill/>
+          <a:ln/>
+        </p:spPr>
+        <p:txBody>
+          <a:bodyPr wrap="square" lIns="0" tIns="0" rIns="0" bIns="0" rtlCol="0" anchor="t"/>
+          <a:lstStyle/>
+          <a:p>
+            <a:pPr indent="0" marL="0">
+              <a:buNone/>
+            </a:pPr>
+            <a:r>
+              <a:rPr lang="en-US" sz="1050" dirty="0">
+                <a:solidFill>
+                  <a:srgbClr val="333333"/>
+                </a:solidFill>
+                <a:latin typeface="Arial" pitchFamily="34" charset="0"/>
+                <a:ea typeface="Arial" pitchFamily="34" charset="-122"/>
+                <a:cs typeface="Arial" pitchFamily="34" charset="-120"/>
+              </a:rPr>
+              <a:t>Inside a $20B fab, silicon wafers are processed through 1,000+ steps.</a:t>
+            </a:r>
+            <a:endParaRPr lang="en-US" sz="1050" dirty="0"/>
+          </a:p>
+        </p:txBody>
+      </p:sp>
+      <p:sp>
+        <p:nvSpPr>
+          <p:cNvPr id="28" name="Text 26"/>
+          <p:cNvSpPr/>
+          <p:nvPr/>
+        </p:nvSpPr>
+        <p:spPr>
+          <a:xfrm>
+            <a:off x="5166360" y="4507992"/>
+            <a:ext cx="3520440" cy="182880"/>
+          </a:xfrm>
+          <a:prstGeom prst="rect">
+            <a:avLst/>
+          </a:prstGeom>
+          <a:noFill/>
+          <a:ln/>
+        </p:spPr>
+        <p:txBody>
+          <a:bodyPr wrap="square" lIns="0" tIns="0" rIns="0" bIns="0" rtlCol="0" anchor="t"/>
+          <a:lstStyle/>
+          <a:p>
+            <a:pPr indent="0" marL="0">
+              <a:buNone/>
+            </a:pPr>
+            <a:r>
+              <a:rPr lang="en-US" sz="900" i="1" dirty="0">
                 <a:solidFill>
                   <a:srgbClr val="666666"/>
                 </a:solidFill>
@@ -36202,22 +36335,22 @@
                 <a:ea typeface="Arial" pitchFamily="34" charset="-122"/>
                 <a:cs typeface="Arial" pitchFamily="34" charset="-120"/>
               </a:rPr>
-              <a:t>prints the wafer</a:t>
-            </a:r>
-            <a:endParaRPr lang="en-US" sz="950" dirty="0"/>
-          </a:p>
-        </p:txBody>
-      </p:sp>
-      <p:sp>
-        <p:nvSpPr>
-          <p:cNvPr id="23" name="Shape 21"/>
-          <p:cNvSpPr/>
-          <p:nvPr/>
-        </p:nvSpPr>
-        <p:spPr>
-          <a:xfrm>
-            <a:off x="4773168" y="2148840"/>
-            <a:ext cx="1600200" cy="0"/>
+              <a:t>TSMC · Samsung · Intel</a:t>
+            </a:r>
+            <a:endParaRPr lang="en-US" sz="900" dirty="0"/>
+          </a:p>
+        </p:txBody>
+      </p:sp>
+      <p:sp>
+        <p:nvSpPr>
+          <p:cNvPr id="29" name="Shape 27"/>
+          <p:cNvSpPr/>
+          <p:nvPr/>
+        </p:nvSpPr>
+        <p:spPr>
+          <a:xfrm>
+            <a:off x="4617720" y="4736592"/>
+            <a:ext cx="4069080" cy="0"/>
           </a:xfrm>
           <a:prstGeom prst="line">
             <a:avLst/>
@@ -36233,14 +36366,117 @@
       </p:sp>
       <p:sp>
         <p:nvSpPr>
-          <p:cNvPr id="24" name="Text 22"/>
-          <p:cNvSpPr/>
-          <p:nvPr/>
-        </p:nvSpPr>
-        <p:spPr>
-          <a:xfrm>
-            <a:off x="4754880" y="2167128"/>
-            <a:ext cx="1783080" cy="292608"/>
+          <p:cNvPr id="30" name="Shape 28"/>
+          <p:cNvSpPr/>
+          <p:nvPr/>
+        </p:nvSpPr>
+        <p:spPr>
+          <a:xfrm>
+            <a:off x="4617720" y="4791456"/>
+            <a:ext cx="384048" cy="384048"/>
+          </a:xfrm>
+          <a:prstGeom prst="ellipse">
+            <a:avLst/>
+          </a:prstGeom>
+          <a:solidFill>
+            <a:srgbClr val="051A3D"/>
+          </a:solidFill>
+          <a:ln w="12700">
+            <a:solidFill>
+              <a:srgbClr val="051A3D"/>
+            </a:solidFill>
+            <a:prstDash val="solid"/>
+          </a:ln>
+        </p:spPr>
+      </p:sp>
+      <p:sp>
+        <p:nvSpPr>
+          <p:cNvPr id="31" name="Text 29"/>
+          <p:cNvSpPr/>
+          <p:nvPr/>
+        </p:nvSpPr>
+        <p:spPr>
+          <a:xfrm>
+            <a:off x="4617720" y="4791456"/>
+            <a:ext cx="384048" cy="384048"/>
+          </a:xfrm>
+          <a:prstGeom prst="rect">
+            <a:avLst/>
+          </a:prstGeom>
+          <a:noFill/>
+          <a:ln/>
+        </p:spPr>
+        <p:txBody>
+          <a:bodyPr wrap="square" lIns="0" tIns="0" rIns="0" bIns="0" rtlCol="0" anchor="ctr"/>
+          <a:lstStyle/>
+          <a:p>
+            <a:pPr algn="ctr" indent="0" marL="0">
+              <a:buNone/>
+            </a:pPr>
+            <a:r>
+              <a:rPr lang="en-US" sz="1100" b="1" dirty="0">
+                <a:solidFill>
+                  <a:srgbClr val="FFFFFF"/>
+                </a:solidFill>
+                <a:latin typeface="Arial Black" pitchFamily="34" charset="0"/>
+                <a:ea typeface="Arial Black" pitchFamily="34" charset="-122"/>
+                <a:cs typeface="Arial Black" pitchFamily="34" charset="-120"/>
+              </a:rPr>
+              <a:t>04</a:t>
+            </a:r>
+            <a:endParaRPr lang="en-US" sz="1100" dirty="0"/>
+          </a:p>
+        </p:txBody>
+      </p:sp>
+      <p:sp>
+        <p:nvSpPr>
+          <p:cNvPr id="32" name="Text 30"/>
+          <p:cNvSpPr/>
+          <p:nvPr/>
+        </p:nvSpPr>
+        <p:spPr>
+          <a:xfrm>
+            <a:off x="5166360" y="4754880"/>
+            <a:ext cx="3520440" cy="274320"/>
+          </a:xfrm>
+          <a:prstGeom prst="rect">
+            <a:avLst/>
+          </a:prstGeom>
+          <a:noFill/>
+          <a:ln/>
+        </p:spPr>
+        <p:txBody>
+          <a:bodyPr wrap="square" lIns="0" tIns="0" rIns="0" bIns="0" rtlCol="0" anchor="ctr"/>
+          <a:lstStyle/>
+          <a:p>
+            <a:pPr indent="0" marL="0">
+              <a:buNone/>
+            </a:pPr>
+            <a:r>
+              <a:rPr lang="en-US" sz="1300" b="1" spc="150" kern="0" dirty="0">
+                <a:solidFill>
+                  <a:srgbClr val="000000"/>
+                </a:solidFill>
+                <a:latin typeface="Arial" pitchFamily="34" charset="0"/>
+                <a:ea typeface="Arial" pitchFamily="34" charset="-122"/>
+                <a:cs typeface="Arial" pitchFamily="34" charset="-120"/>
+              </a:rPr>
+              <a:t>PACKAGING</a:t>
+            </a:r>
+            <a:endParaRPr lang="en-US" sz="1300" dirty="0"/>
+          </a:p>
+        </p:txBody>
+      </p:sp>
+      <p:sp>
+        <p:nvSpPr>
+          <p:cNvPr id="33" name="Text 31"/>
+          <p:cNvSpPr/>
+          <p:nvPr/>
+        </p:nvSpPr>
+        <p:spPr>
+          <a:xfrm>
+            <a:off x="5166360" y="5029200"/>
+            <a:ext cx="3520440" cy="457200"/>
           </a:xfrm>
           <a:prstGeom prst="rect">
             <a:avLst/>
@@ -36256,7 +36492,7 @@
               <a:buNone/>
             </a:pPr>
             <a:r>
-              <a:rPr lang="en-US" sz="850" dirty="0">
+              <a:rPr lang="en-US" sz="1050" dirty="0">
                 <a:solidFill>
                   <a:srgbClr val="333333"/>
                 </a:solidFill>
@@ -36264,38 +36500,38 @@
                 <a:ea typeface="Arial" pitchFamily="34" charset="-122"/>
                 <a:cs typeface="Arial" pitchFamily="34" charset="-120"/>
               </a:rPr>
-              <a:t>TSMC · Samsung · Intel Foundry</a:t>
-            </a:r>
-            <a:endParaRPr lang="en-US" sz="850" dirty="0"/>
-          </a:p>
-        </p:txBody>
-      </p:sp>
-      <p:sp>
-        <p:nvSpPr>
-          <p:cNvPr id="25" name="Text 23"/>
-          <p:cNvSpPr/>
-          <p:nvPr/>
-        </p:nvSpPr>
-        <p:spPr>
-          <a:xfrm>
-            <a:off x="6473952" y="1897380"/>
-            <a:ext cx="219456" cy="365760"/>
-          </a:xfrm>
-          <a:prstGeom prst="rect">
-            <a:avLst/>
-          </a:prstGeom>
-          <a:noFill/>
-          <a:ln/>
-        </p:spPr>
-        <p:txBody>
-          <a:bodyPr wrap="square" lIns="0" tIns="0" rIns="0" bIns="0" rtlCol="0" anchor="ctr"/>
-          <a:lstStyle/>
-          <a:p>
-            <a:pPr algn="ctr" indent="0" marL="0">
-              <a:buNone/>
-            </a:pPr>
-            <a:r>
-              <a:rPr lang="en-US" sz="2400" b="1" dirty="0">
+              <a:t>Logic dies are stacked with HBM memory using advanced packaging like CoWoS.</a:t>
+            </a:r>
+            <a:endParaRPr lang="en-US" sz="1050" dirty="0"/>
+          </a:p>
+        </p:txBody>
+      </p:sp>
+      <p:sp>
+        <p:nvSpPr>
+          <p:cNvPr id="34" name="Text 32"/>
+          <p:cNvSpPr/>
+          <p:nvPr/>
+        </p:nvSpPr>
+        <p:spPr>
+          <a:xfrm>
+            <a:off x="5166360" y="5468112"/>
+            <a:ext cx="3520440" cy="182880"/>
+          </a:xfrm>
+          <a:prstGeom prst="rect">
+            <a:avLst/>
+          </a:prstGeom>
+          <a:noFill/>
+          <a:ln/>
+        </p:spPr>
+        <p:txBody>
+          <a:bodyPr wrap="square" lIns="0" tIns="0" rIns="0" bIns="0" rtlCol="0" anchor="t"/>
+          <a:lstStyle/>
+          <a:p>
+            <a:pPr indent="0" marL="0">
+              <a:buNone/>
+            </a:pPr>
+            <a:r>
+              <a:rPr lang="en-US" sz="900" i="1" dirty="0">
                 <a:solidFill>
                   <a:srgbClr val="666666"/>
                 </a:solidFill>
@@ -36303,24 +36539,63 @@
                 <a:ea typeface="Arial" pitchFamily="34" charset="-122"/>
                 <a:cs typeface="Arial" pitchFamily="34" charset="-120"/>
               </a:rPr>
-              <a:t>›</a:t>
-            </a:r>
-            <a:endParaRPr lang="en-US" sz="2400" dirty="0"/>
-          </a:p>
-        </p:txBody>
-      </p:sp>
-      <p:sp>
-        <p:nvSpPr>
-          <p:cNvPr id="26" name="Shape 24"/>
-          <p:cNvSpPr/>
-          <p:nvPr/>
-        </p:nvSpPr>
-        <p:spPr>
-          <a:xfrm>
-            <a:off x="6812280" y="1792224"/>
-            <a:ext cx="128016" cy="128016"/>
-          </a:xfrm>
-          <a:prstGeom prst="ellipse">
+              <a:t>TSMC CoWoS · ASE · Amkor</a:t>
+            </a:r>
+            <a:endParaRPr lang="en-US" sz="900" dirty="0"/>
+          </a:p>
+        </p:txBody>
+      </p:sp>
+      <p:sp>
+        <p:nvSpPr>
+          <p:cNvPr id="35" name="Text 33"/>
+          <p:cNvSpPr/>
+          <p:nvPr/>
+        </p:nvSpPr>
+        <p:spPr>
+          <a:xfrm>
+            <a:off x="457200" y="5875020"/>
+            <a:ext cx="8229600" cy="320040"/>
+          </a:xfrm>
+          <a:prstGeom prst="rect">
+            <a:avLst/>
+          </a:prstGeom>
+          <a:noFill/>
+          <a:ln/>
+        </p:spPr>
+        <p:txBody>
+          <a:bodyPr wrap="square" lIns="0" tIns="0" rIns="0" bIns="0" rtlCol="0" anchor="t"/>
+          <a:lstStyle/>
+          <a:p>
+            <a:pPr indent="0" marL="0">
+              <a:buNone/>
+            </a:pPr>
+            <a:r>
+              <a:rPr lang="en-US" sz="700" dirty="0">
+                <a:solidFill>
+                  <a:srgbClr val="999999"/>
+                </a:solidFill>
+                <a:latin typeface="Arial" pitchFamily="34" charset="0"/>
+                <a:ea typeface="Arial" pitchFamily="34" charset="-122"/>
+                <a:cs typeface="Arial" pitchFamily="34" charset="-120"/>
+              </a:rPr>
+              <a:t>Source: SIA / SEMI industry taxonomy; SEMI World Fab Forecast; TSMC, NVIDIA, ASML disclosures. Process descriptions are plain-English simplifications.</a:t>
+            </a:r>
+            <a:endParaRPr lang="en-US" sz="700" dirty="0"/>
+          </a:p>
+        </p:txBody>
+      </p:sp>
+      <p:sp>
+        <p:nvSpPr>
+          <p:cNvPr id="36" name="Shape 34"/>
+          <p:cNvSpPr/>
+          <p:nvPr/>
+        </p:nvSpPr>
+        <p:spPr>
+          <a:xfrm>
+            <a:off x="0" y="6286500"/>
+            <a:ext cx="9144000" cy="571500"/>
+          </a:xfrm>
+          <a:prstGeom prst="rect">
             <a:avLst/>
           </a:prstGeom>
           <a:solidFill>
@@ -36336,1649 +36611,7 @@
       </p:sp>
       <p:sp>
         <p:nvSpPr>
-          <p:cNvPr id="27" name="Text 25"/>
-          <p:cNvSpPr/>
-          <p:nvPr/>
-        </p:nvSpPr>
-        <p:spPr>
-          <a:xfrm>
-            <a:off x="6995160" y="1709928"/>
-            <a:ext cx="1600200" cy="237744"/>
-          </a:xfrm>
-          <a:prstGeom prst="rect">
-            <a:avLst/>
-          </a:prstGeom>
-          <a:noFill/>
-          <a:ln/>
-        </p:spPr>
-        <p:txBody>
-          <a:bodyPr wrap="square" lIns="0" tIns="0" rIns="0" bIns="0" rtlCol="0" anchor="ctr"/>
-          <a:lstStyle/>
-          <a:p>
-            <a:pPr indent="0" marL="0">
-              <a:buNone/>
-            </a:pPr>
-            <a:r>
-              <a:rPr lang="en-US" sz="1100" b="1" spc="200" kern="0" dirty="0">
-                <a:solidFill>
-                  <a:srgbClr val="000000"/>
-                </a:solidFill>
-                <a:latin typeface="Arial" pitchFamily="34" charset="0"/>
-                <a:ea typeface="Arial" pitchFamily="34" charset="-122"/>
-                <a:cs typeface="Arial" pitchFamily="34" charset="-120"/>
-              </a:rPr>
-              <a:t>PACKAGING</a:t>
-            </a:r>
-            <a:endParaRPr lang="en-US" sz="1100" dirty="0"/>
-          </a:p>
-        </p:txBody>
-      </p:sp>
-      <p:sp>
-        <p:nvSpPr>
-          <p:cNvPr id="28" name="Text 26"/>
-          <p:cNvSpPr/>
-          <p:nvPr/>
-        </p:nvSpPr>
-        <p:spPr>
-          <a:xfrm>
-            <a:off x="6812280" y="1947672"/>
-            <a:ext cx="1783080" cy="182880"/>
-          </a:xfrm>
-          <a:prstGeom prst="rect">
-            <a:avLst/>
-          </a:prstGeom>
-          <a:noFill/>
-          <a:ln/>
-        </p:spPr>
-        <p:txBody>
-          <a:bodyPr wrap="square" lIns="0" tIns="0" rIns="0" bIns="0" rtlCol="0" anchor="ctr"/>
-          <a:lstStyle/>
-          <a:p>
-            <a:pPr indent="0" marL="0">
-              <a:buNone/>
-            </a:pPr>
-            <a:r>
-              <a:rPr lang="en-US" sz="950" i="1" dirty="0">
-                <a:solidFill>
-                  <a:srgbClr val="666666"/>
-                </a:solidFill>
-                <a:latin typeface="Arial" pitchFamily="34" charset="0"/>
-                <a:ea typeface="Arial" pitchFamily="34" charset="-122"/>
-                <a:cs typeface="Arial" pitchFamily="34" charset="-120"/>
-              </a:rPr>
-              <a:t>stacks the dies</a:t>
-            </a:r>
-            <a:endParaRPr lang="en-US" sz="950" dirty="0"/>
-          </a:p>
-        </p:txBody>
-      </p:sp>
-      <p:sp>
-        <p:nvSpPr>
-          <p:cNvPr id="29" name="Shape 27"/>
-          <p:cNvSpPr/>
-          <p:nvPr/>
-        </p:nvSpPr>
-        <p:spPr>
-          <a:xfrm>
-            <a:off x="6830568" y="2148840"/>
-            <a:ext cx="1600200" cy="0"/>
-          </a:xfrm>
-          <a:prstGeom prst="line">
-            <a:avLst/>
-          </a:prstGeom>
-          <a:noFill/>
-          <a:ln w="6350">
-            <a:solidFill>
-              <a:srgbClr val="E5E5E5"/>
-            </a:solidFill>
-            <a:prstDash val="solid"/>
-          </a:ln>
-        </p:spPr>
-      </p:sp>
-      <p:sp>
-        <p:nvSpPr>
-          <p:cNvPr id="30" name="Text 28"/>
-          <p:cNvSpPr/>
-          <p:nvPr/>
-        </p:nvSpPr>
-        <p:spPr>
-          <a:xfrm>
-            <a:off x="6812280" y="2167128"/>
-            <a:ext cx="1783080" cy="292608"/>
-          </a:xfrm>
-          <a:prstGeom prst="rect">
-            <a:avLst/>
-          </a:prstGeom>
-          <a:noFill/>
-          <a:ln/>
-        </p:spPr>
-        <p:txBody>
-          <a:bodyPr wrap="square" lIns="0" tIns="0" rIns="0" bIns="0" rtlCol="0" anchor="t"/>
-          <a:lstStyle/>
-          <a:p>
-            <a:pPr indent="0" marL="0">
-              <a:buNone/>
-            </a:pPr>
-            <a:r>
-              <a:rPr lang="en-US" sz="850" dirty="0">
-                <a:solidFill>
-                  <a:srgbClr val="333333"/>
-                </a:solidFill>
-                <a:latin typeface="Arial" pitchFamily="34" charset="0"/>
-                <a:ea typeface="Arial" pitchFamily="34" charset="-122"/>
-                <a:cs typeface="Arial" pitchFamily="34" charset="-120"/>
-              </a:rPr>
-              <a:t>TSMC CoWoS · ASE · Amkor</a:t>
-            </a:r>
-            <a:endParaRPr lang="en-US" sz="850" dirty="0"/>
-          </a:p>
-        </p:txBody>
-      </p:sp>
-      <p:sp>
-        <p:nvSpPr>
-          <p:cNvPr id="31" name="Shape 29"/>
-          <p:cNvSpPr/>
-          <p:nvPr/>
-        </p:nvSpPr>
-        <p:spPr>
-          <a:xfrm>
-            <a:off x="457200" y="2606040"/>
-            <a:ext cx="2651760" cy="1280160"/>
-          </a:xfrm>
-          <a:prstGeom prst="rect">
-            <a:avLst/>
-          </a:prstGeom>
-          <a:solidFill>
-            <a:srgbClr val="F9F9F9"/>
-          </a:solidFill>
-          <a:ln w="6350">
-            <a:solidFill>
-              <a:srgbClr val="E5E5E5"/>
-            </a:solidFill>
-            <a:prstDash val="solid"/>
-          </a:ln>
-        </p:spPr>
-      </p:sp>
-      <p:sp>
-        <p:nvSpPr>
-          <p:cNvPr id="32" name="Shape 30"/>
-          <p:cNvSpPr/>
-          <p:nvPr/>
-        </p:nvSpPr>
-        <p:spPr>
-          <a:xfrm>
-            <a:off x="457200" y="2606040"/>
-            <a:ext cx="2651760" cy="256032"/>
-          </a:xfrm>
-          <a:prstGeom prst="rect">
-            <a:avLst/>
-          </a:prstGeom>
-          <a:solidFill>
-            <a:srgbClr val="F6693D"/>
-          </a:solidFill>
-          <a:ln w="12700">
-            <a:solidFill>
-              <a:srgbClr val="F6693D"/>
-            </a:solidFill>
-            <a:prstDash val="solid"/>
-          </a:ln>
-        </p:spPr>
-      </p:sp>
-      <p:sp>
-        <p:nvSpPr>
-          <p:cNvPr id="33" name="Text 31"/>
-          <p:cNvSpPr/>
-          <p:nvPr/>
-        </p:nvSpPr>
-        <p:spPr>
-          <a:xfrm>
-            <a:off x="457200" y="2606040"/>
-            <a:ext cx="2651760" cy="256032"/>
-          </a:xfrm>
-          <a:prstGeom prst="rect">
-            <a:avLst/>
-          </a:prstGeom>
-          <a:noFill/>
-          <a:ln/>
-        </p:spPr>
-        <p:txBody>
-          <a:bodyPr wrap="square" lIns="0" tIns="0" rIns="0" bIns="0" rtlCol="0" anchor="ctr"/>
-          <a:lstStyle/>
-          <a:p>
-            <a:pPr algn="ctr" indent="0" marL="0">
-              <a:buNone/>
-            </a:pPr>
-            <a:r>
-              <a:rPr lang="en-US" sz="1000" b="1" spc="200" kern="0" dirty="0">
-                <a:solidFill>
-                  <a:srgbClr val="FFFFFF"/>
-                </a:solidFill>
-                <a:latin typeface="Arial" pitchFamily="34" charset="0"/>
-                <a:ea typeface="Arial" pitchFamily="34" charset="-122"/>
-                <a:cs typeface="Arial" pitchFamily="34" charset="-120"/>
-              </a:rPr>
-              <a:t>LOGIC</a:t>
-            </a:r>
-            <a:endParaRPr lang="en-US" sz="1000" dirty="0"/>
-          </a:p>
-        </p:txBody>
-      </p:sp>
-      <p:sp>
-        <p:nvSpPr>
-          <p:cNvPr id="34" name="Text 32"/>
-          <p:cNvSpPr/>
-          <p:nvPr/>
-        </p:nvSpPr>
-        <p:spPr>
-          <a:xfrm>
-            <a:off x="594360" y="2916936"/>
-            <a:ext cx="2377440" cy="457200"/>
-          </a:xfrm>
-          <a:prstGeom prst="rect">
-            <a:avLst/>
-          </a:prstGeom>
-          <a:noFill/>
-          <a:ln/>
-        </p:spPr>
-        <p:txBody>
-          <a:bodyPr wrap="square" lIns="0" tIns="0" rIns="0" bIns="0" rtlCol="0" anchor="t"/>
-          <a:lstStyle/>
-          <a:p>
-            <a:pPr indent="0" marL="0">
-              <a:buNone/>
-            </a:pPr>
-            <a:r>
-              <a:rPr lang="en-US" sz="950" dirty="0">
-                <a:solidFill>
-                  <a:srgbClr val="333333"/>
-                </a:solidFill>
-                <a:latin typeface="Arial" pitchFamily="34" charset="0"/>
-                <a:ea typeface="Arial" pitchFamily="34" charset="-122"/>
-                <a:cs typeface="Arial" pitchFamily="34" charset="-120"/>
-              </a:rPr>
-              <a:t>Where computation happens — the chips that run code and move data.</a:t>
-            </a:r>
-            <a:endParaRPr lang="en-US" sz="950" dirty="0"/>
-          </a:p>
-        </p:txBody>
-      </p:sp>
-      <p:sp>
-        <p:nvSpPr>
-          <p:cNvPr id="35" name="Text 33"/>
-          <p:cNvSpPr/>
-          <p:nvPr/>
-        </p:nvSpPr>
-        <p:spPr>
-          <a:xfrm>
-            <a:off x="594360" y="3392424"/>
-            <a:ext cx="2377440" cy="237744"/>
-          </a:xfrm>
-          <a:prstGeom prst="rect">
-            <a:avLst/>
-          </a:prstGeom>
-          <a:noFill/>
-          <a:ln/>
-        </p:spPr>
-        <p:txBody>
-          <a:bodyPr wrap="square" lIns="0" tIns="0" rIns="0" bIns="0" rtlCol="0" anchor="t"/>
-          <a:lstStyle/>
-          <a:p>
-            <a:pPr indent="0" marL="0">
-              <a:buNone/>
-            </a:pPr>
-            <a:r>
-              <a:rPr lang="en-US" sz="850" i="1" dirty="0">
-                <a:solidFill>
-                  <a:srgbClr val="666666"/>
-                </a:solidFill>
-                <a:latin typeface="Arial" pitchFamily="34" charset="0"/>
-                <a:ea typeface="Arial" pitchFamily="34" charset="-122"/>
-                <a:cs typeface="Arial" pitchFamily="34" charset="-120"/>
-              </a:rPr>
-              <a:t>GPUs, AI accelerators, ASICs, FPGAs</a:t>
-            </a:r>
-            <a:endParaRPr lang="en-US" sz="850" dirty="0"/>
-          </a:p>
-        </p:txBody>
-      </p:sp>
-      <p:sp>
-        <p:nvSpPr>
-          <p:cNvPr id="36" name="Shape 34"/>
-          <p:cNvSpPr/>
-          <p:nvPr/>
-        </p:nvSpPr>
-        <p:spPr>
-          <a:xfrm>
-            <a:off x="640080" y="3648456"/>
-            <a:ext cx="2286000" cy="0"/>
-          </a:xfrm>
-          <a:prstGeom prst="line">
-            <a:avLst/>
-          </a:prstGeom>
-          <a:noFill/>
-          <a:ln w="6350">
-            <a:solidFill>
-              <a:srgbClr val="E5E5E5"/>
-            </a:solidFill>
-            <a:prstDash val="solid"/>
-          </a:ln>
-        </p:spPr>
-      </p:sp>
-      <p:sp>
-        <p:nvSpPr>
           <p:cNvPr id="37" name="Text 35"/>
-          <p:cNvSpPr/>
-          <p:nvPr/>
-        </p:nvSpPr>
-        <p:spPr>
-          <a:xfrm>
-            <a:off x="457200" y="3666744"/>
-            <a:ext cx="2651760" cy="201168"/>
-          </a:xfrm>
-          <a:prstGeom prst="rect">
-            <a:avLst/>
-          </a:prstGeom>
-          <a:noFill/>
-          <a:ln/>
-        </p:spPr>
-        <p:txBody>
-          <a:bodyPr wrap="square" lIns="0" tIns="0" rIns="0" bIns="0" rtlCol="0" anchor="ctr"/>
-          <a:lstStyle/>
-          <a:p>
-            <a:pPr algn="ctr" indent="0" marL="0">
-              <a:buNone/>
-            </a:pPr>
-            <a:r>
-              <a:rPr lang="en-US" sz="750" i="1" dirty="0">
-                <a:solidFill>
-                  <a:srgbClr val="666666"/>
-                </a:solidFill>
-                <a:latin typeface="Arial" pitchFamily="34" charset="0"/>
-                <a:ea typeface="Arial" pitchFamily="34" charset="-122"/>
-                <a:cs typeface="Arial" pitchFamily="34" charset="-120"/>
-              </a:rPr>
-              <a:t>NVIDIA · AMD · Broadcom · TSMC</a:t>
-            </a:r>
-            <a:endParaRPr lang="en-US" sz="750" dirty="0"/>
-          </a:p>
-        </p:txBody>
-      </p:sp>
-      <p:sp>
-        <p:nvSpPr>
-          <p:cNvPr id="38" name="Shape 36"/>
-          <p:cNvSpPr/>
-          <p:nvPr/>
-        </p:nvSpPr>
-        <p:spPr>
-          <a:xfrm>
-            <a:off x="3246120" y="2606040"/>
-            <a:ext cx="2651760" cy="1280160"/>
-          </a:xfrm>
-          <a:prstGeom prst="rect">
-            <a:avLst/>
-          </a:prstGeom>
-          <a:solidFill>
-            <a:srgbClr val="F9F9F9"/>
-          </a:solidFill>
-          <a:ln w="6350">
-            <a:solidFill>
-              <a:srgbClr val="E5E5E5"/>
-            </a:solidFill>
-            <a:prstDash val="solid"/>
-          </a:ln>
-        </p:spPr>
-      </p:sp>
-      <p:sp>
-        <p:nvSpPr>
-          <p:cNvPr id="39" name="Shape 37"/>
-          <p:cNvSpPr/>
-          <p:nvPr/>
-        </p:nvSpPr>
-        <p:spPr>
-          <a:xfrm>
-            <a:off x="3246120" y="2606040"/>
-            <a:ext cx="2651760" cy="256032"/>
-          </a:xfrm>
-          <a:prstGeom prst="rect">
-            <a:avLst/>
-          </a:prstGeom>
-          <a:solidFill>
-            <a:srgbClr val="FFB800"/>
-          </a:solidFill>
-          <a:ln w="12700">
-            <a:solidFill>
-              <a:srgbClr val="FFB800"/>
-            </a:solidFill>
-            <a:prstDash val="solid"/>
-          </a:ln>
-        </p:spPr>
-      </p:sp>
-      <p:sp>
-        <p:nvSpPr>
-          <p:cNvPr id="40" name="Text 38"/>
-          <p:cNvSpPr/>
-          <p:nvPr/>
-        </p:nvSpPr>
-        <p:spPr>
-          <a:xfrm>
-            <a:off x="3246120" y="2606040"/>
-            <a:ext cx="2651760" cy="256032"/>
-          </a:xfrm>
-          <a:prstGeom prst="rect">
-            <a:avLst/>
-          </a:prstGeom>
-          <a:noFill/>
-          <a:ln/>
-        </p:spPr>
-        <p:txBody>
-          <a:bodyPr wrap="square" lIns="0" tIns="0" rIns="0" bIns="0" rtlCol="0" anchor="ctr"/>
-          <a:lstStyle/>
-          <a:p>
-            <a:pPr algn="ctr" indent="0" marL="0">
-              <a:buNone/>
-            </a:pPr>
-            <a:r>
-              <a:rPr lang="en-US" sz="1000" b="1" spc="200" kern="0" dirty="0">
-                <a:solidFill>
-                  <a:srgbClr val="000000"/>
-                </a:solidFill>
-                <a:latin typeface="Arial" pitchFamily="34" charset="0"/>
-                <a:ea typeface="Arial" pitchFamily="34" charset="-122"/>
-                <a:cs typeface="Arial" pitchFamily="34" charset="-120"/>
-              </a:rPr>
-              <a:t>MEMORY</a:t>
-            </a:r>
-            <a:endParaRPr lang="en-US" sz="1000" dirty="0"/>
-          </a:p>
-        </p:txBody>
-      </p:sp>
-      <p:sp>
-        <p:nvSpPr>
-          <p:cNvPr id="41" name="Text 39"/>
-          <p:cNvSpPr/>
-          <p:nvPr/>
-        </p:nvSpPr>
-        <p:spPr>
-          <a:xfrm>
-            <a:off x="3383280" y="2916936"/>
-            <a:ext cx="2377440" cy="457200"/>
-          </a:xfrm>
-          <a:prstGeom prst="rect">
-            <a:avLst/>
-          </a:prstGeom>
-          <a:noFill/>
-          <a:ln/>
-        </p:spPr>
-        <p:txBody>
-          <a:bodyPr wrap="square" lIns="0" tIns="0" rIns="0" bIns="0" rtlCol="0" anchor="t"/>
-          <a:lstStyle/>
-          <a:p>
-            <a:pPr indent="0" marL="0">
-              <a:buNone/>
-            </a:pPr>
-            <a:r>
-              <a:rPr lang="en-US" sz="950" dirty="0">
-                <a:solidFill>
-                  <a:srgbClr val="333333"/>
-                </a:solidFill>
-                <a:latin typeface="Arial" pitchFamily="34" charset="0"/>
-                <a:ea typeface="Arial" pitchFamily="34" charset="-122"/>
-                <a:cs typeface="Arial" pitchFamily="34" charset="-120"/>
-              </a:rPr>
-              <a:t>Stores data so logic can read it at terabit speeds.</a:t>
-            </a:r>
-            <a:endParaRPr lang="en-US" sz="950" dirty="0"/>
-          </a:p>
-        </p:txBody>
-      </p:sp>
-      <p:sp>
-        <p:nvSpPr>
-          <p:cNvPr id="42" name="Text 40"/>
-          <p:cNvSpPr/>
-          <p:nvPr/>
-        </p:nvSpPr>
-        <p:spPr>
-          <a:xfrm>
-            <a:off x="3383280" y="3392424"/>
-            <a:ext cx="2377440" cy="237744"/>
-          </a:xfrm>
-          <a:prstGeom prst="rect">
-            <a:avLst/>
-          </a:prstGeom>
-          <a:noFill/>
-          <a:ln/>
-        </p:spPr>
-        <p:txBody>
-          <a:bodyPr wrap="square" lIns="0" tIns="0" rIns="0" bIns="0" rtlCol="0" anchor="t"/>
-          <a:lstStyle/>
-          <a:p>
-            <a:pPr indent="0" marL="0">
-              <a:buNone/>
-            </a:pPr>
-            <a:r>
-              <a:rPr lang="en-US" sz="850" i="1" dirty="0">
-                <a:solidFill>
-                  <a:srgbClr val="666666"/>
-                </a:solidFill>
-                <a:latin typeface="Arial" pitchFamily="34" charset="0"/>
-                <a:ea typeface="Arial" pitchFamily="34" charset="-122"/>
-                <a:cs typeface="Arial" pitchFamily="34" charset="-120"/>
-              </a:rPr>
-              <a:t>DRAM, HBM, NAND — every AI server</a:t>
-            </a:r>
-            <a:endParaRPr lang="en-US" sz="850" dirty="0"/>
-          </a:p>
-        </p:txBody>
-      </p:sp>
-      <p:sp>
-        <p:nvSpPr>
-          <p:cNvPr id="43" name="Shape 41"/>
-          <p:cNvSpPr/>
-          <p:nvPr/>
-        </p:nvSpPr>
-        <p:spPr>
-          <a:xfrm>
-            <a:off x="3429000" y="3648456"/>
-            <a:ext cx="2286000" cy="0"/>
-          </a:xfrm>
-          <a:prstGeom prst="line">
-            <a:avLst/>
-          </a:prstGeom>
-          <a:noFill/>
-          <a:ln w="6350">
-            <a:solidFill>
-              <a:srgbClr val="E5E5E5"/>
-            </a:solidFill>
-            <a:prstDash val="solid"/>
-          </a:ln>
-        </p:spPr>
-      </p:sp>
-      <p:sp>
-        <p:nvSpPr>
-          <p:cNvPr id="44" name="Text 42"/>
-          <p:cNvSpPr/>
-          <p:nvPr/>
-        </p:nvSpPr>
-        <p:spPr>
-          <a:xfrm>
-            <a:off x="3246120" y="3666744"/>
-            <a:ext cx="2651760" cy="201168"/>
-          </a:xfrm>
-          <a:prstGeom prst="rect">
-            <a:avLst/>
-          </a:prstGeom>
-          <a:noFill/>
-          <a:ln/>
-        </p:spPr>
-        <p:txBody>
-          <a:bodyPr wrap="square" lIns="0" tIns="0" rIns="0" bIns="0" rtlCol="0" anchor="ctr"/>
-          <a:lstStyle/>
-          <a:p>
-            <a:pPr algn="ctr" indent="0" marL="0">
-              <a:buNone/>
-            </a:pPr>
-            <a:r>
-              <a:rPr lang="en-US" sz="750" i="1" dirty="0">
-                <a:solidFill>
-                  <a:srgbClr val="666666"/>
-                </a:solidFill>
-                <a:latin typeface="Arial" pitchFamily="34" charset="0"/>
-                <a:ea typeface="Arial" pitchFamily="34" charset="-122"/>
-                <a:cs typeface="Arial" pitchFamily="34" charset="-120"/>
-              </a:rPr>
-              <a:t>SK Hynix · Samsung · Micron</a:t>
-            </a:r>
-            <a:endParaRPr lang="en-US" sz="750" dirty="0"/>
-          </a:p>
-        </p:txBody>
-      </p:sp>
-      <p:sp>
-        <p:nvSpPr>
-          <p:cNvPr id="45" name="Shape 43"/>
-          <p:cNvSpPr/>
-          <p:nvPr/>
-        </p:nvSpPr>
-        <p:spPr>
-          <a:xfrm>
-            <a:off x="6035040" y="2606040"/>
-            <a:ext cx="2651760" cy="1280160"/>
-          </a:xfrm>
-          <a:prstGeom prst="rect">
-            <a:avLst/>
-          </a:prstGeom>
-          <a:solidFill>
-            <a:srgbClr val="F9F9F9"/>
-          </a:solidFill>
-          <a:ln w="6350">
-            <a:solidFill>
-              <a:srgbClr val="E5E5E5"/>
-            </a:solidFill>
-            <a:prstDash val="solid"/>
-          </a:ln>
-        </p:spPr>
-      </p:sp>
-      <p:sp>
-        <p:nvSpPr>
-          <p:cNvPr id="46" name="Shape 44"/>
-          <p:cNvSpPr/>
-          <p:nvPr/>
-        </p:nvSpPr>
-        <p:spPr>
-          <a:xfrm>
-            <a:off x="6035040" y="2606040"/>
-            <a:ext cx="2651760" cy="256032"/>
-          </a:xfrm>
-          <a:prstGeom prst="rect">
-            <a:avLst/>
-          </a:prstGeom>
-          <a:solidFill>
-            <a:srgbClr val="008B8B"/>
-          </a:solidFill>
-          <a:ln w="12700">
-            <a:solidFill>
-              <a:srgbClr val="008B8B"/>
-            </a:solidFill>
-            <a:prstDash val="solid"/>
-          </a:ln>
-        </p:spPr>
-      </p:sp>
-      <p:sp>
-        <p:nvSpPr>
-          <p:cNvPr id="47" name="Text 45"/>
-          <p:cNvSpPr/>
-          <p:nvPr/>
-        </p:nvSpPr>
-        <p:spPr>
-          <a:xfrm>
-            <a:off x="6035040" y="2606040"/>
-            <a:ext cx="2651760" cy="256032"/>
-          </a:xfrm>
-          <a:prstGeom prst="rect">
-            <a:avLst/>
-          </a:prstGeom>
-          <a:noFill/>
-          <a:ln/>
-        </p:spPr>
-        <p:txBody>
-          <a:bodyPr wrap="square" lIns="0" tIns="0" rIns="0" bIns="0" rtlCol="0" anchor="ctr"/>
-          <a:lstStyle/>
-          <a:p>
-            <a:pPr algn="ctr" indent="0" marL="0">
-              <a:buNone/>
-            </a:pPr>
-            <a:r>
-              <a:rPr lang="en-US" sz="1000" b="1" spc="200" kern="0" dirty="0">
-                <a:solidFill>
-                  <a:srgbClr val="FFFFFF"/>
-                </a:solidFill>
-                <a:latin typeface="Arial" pitchFamily="34" charset="0"/>
-                <a:ea typeface="Arial" pitchFamily="34" charset="-122"/>
-                <a:cs typeface="Arial" pitchFamily="34" charset="-120"/>
-              </a:rPr>
-              <a:t>PROCESSORS</a:t>
-            </a:r>
-            <a:endParaRPr lang="en-US" sz="1000" dirty="0"/>
-          </a:p>
-        </p:txBody>
-      </p:sp>
-      <p:sp>
-        <p:nvSpPr>
-          <p:cNvPr id="48" name="Text 46"/>
-          <p:cNvSpPr/>
-          <p:nvPr/>
-        </p:nvSpPr>
-        <p:spPr>
-          <a:xfrm>
-            <a:off x="6172200" y="2916936"/>
-            <a:ext cx="2377440" cy="457200"/>
-          </a:xfrm>
-          <a:prstGeom prst="rect">
-            <a:avLst/>
-          </a:prstGeom>
-          <a:noFill/>
-          <a:ln/>
-        </p:spPr>
-        <p:txBody>
-          <a:bodyPr wrap="square" lIns="0" tIns="0" rIns="0" bIns="0" rtlCol="0" anchor="t"/>
-          <a:lstStyle/>
-          <a:p>
-            <a:pPr indent="0" marL="0">
-              <a:buNone/>
-            </a:pPr>
-            <a:r>
-              <a:rPr lang="en-US" sz="950" dirty="0">
-                <a:solidFill>
-                  <a:srgbClr val="333333"/>
-                </a:solidFill>
-                <a:latin typeface="Arial" pitchFamily="34" charset="0"/>
-                <a:ea typeface="Arial" pitchFamily="34" charset="-122"/>
-                <a:cs typeface="Arial" pitchFamily="34" charset="-120"/>
-              </a:rPr>
-              <a:t>General-purpose silicon that runs your operating system.</a:t>
-            </a:r>
-            <a:endParaRPr lang="en-US" sz="950" dirty="0"/>
-          </a:p>
-        </p:txBody>
-      </p:sp>
-      <p:sp>
-        <p:nvSpPr>
-          <p:cNvPr id="49" name="Text 47"/>
-          <p:cNvSpPr/>
-          <p:nvPr/>
-        </p:nvSpPr>
-        <p:spPr>
-          <a:xfrm>
-            <a:off x="6172200" y="3392424"/>
-            <a:ext cx="2377440" cy="237744"/>
-          </a:xfrm>
-          <a:prstGeom prst="rect">
-            <a:avLst/>
-          </a:prstGeom>
-          <a:noFill/>
-          <a:ln/>
-        </p:spPr>
-        <p:txBody>
-          <a:bodyPr wrap="square" lIns="0" tIns="0" rIns="0" bIns="0" rtlCol="0" anchor="t"/>
-          <a:lstStyle/>
-          <a:p>
-            <a:pPr indent="0" marL="0">
-              <a:buNone/>
-            </a:pPr>
-            <a:r>
-              <a:rPr lang="en-US" sz="850" i="1" dirty="0">
-                <a:solidFill>
-                  <a:srgbClr val="666666"/>
-                </a:solidFill>
-                <a:latin typeface="Arial" pitchFamily="34" charset="0"/>
-                <a:ea typeface="Arial" pitchFamily="34" charset="-122"/>
-                <a:cs typeface="Arial" pitchFamily="34" charset="-120"/>
-              </a:rPr>
-              <a:t>CPUs in every phone and PC</a:t>
-            </a:r>
-            <a:endParaRPr lang="en-US" sz="850" dirty="0"/>
-          </a:p>
-        </p:txBody>
-      </p:sp>
-      <p:sp>
-        <p:nvSpPr>
-          <p:cNvPr id="50" name="Shape 48"/>
-          <p:cNvSpPr/>
-          <p:nvPr/>
-        </p:nvSpPr>
-        <p:spPr>
-          <a:xfrm>
-            <a:off x="6217920" y="3648456"/>
-            <a:ext cx="2286000" cy="0"/>
-          </a:xfrm>
-          <a:prstGeom prst="line">
-            <a:avLst/>
-          </a:prstGeom>
-          <a:noFill/>
-          <a:ln w="6350">
-            <a:solidFill>
-              <a:srgbClr val="E5E5E5"/>
-            </a:solidFill>
-            <a:prstDash val="solid"/>
-          </a:ln>
-        </p:spPr>
-      </p:sp>
-      <p:sp>
-        <p:nvSpPr>
-          <p:cNvPr id="51" name="Text 49"/>
-          <p:cNvSpPr/>
-          <p:nvPr/>
-        </p:nvSpPr>
-        <p:spPr>
-          <a:xfrm>
-            <a:off x="6035040" y="3666744"/>
-            <a:ext cx="2651760" cy="201168"/>
-          </a:xfrm>
-          <a:prstGeom prst="rect">
-            <a:avLst/>
-          </a:prstGeom>
-          <a:noFill/>
-          <a:ln/>
-        </p:spPr>
-        <p:txBody>
-          <a:bodyPr wrap="square" lIns="0" tIns="0" rIns="0" bIns="0" rtlCol="0" anchor="ctr"/>
-          <a:lstStyle/>
-          <a:p>
-            <a:pPr algn="ctr" indent="0" marL="0">
-              <a:buNone/>
-            </a:pPr>
-            <a:r>
-              <a:rPr lang="en-US" sz="750" i="1" dirty="0">
-                <a:solidFill>
-                  <a:srgbClr val="666666"/>
-                </a:solidFill>
-                <a:latin typeface="Arial" pitchFamily="34" charset="0"/>
-                <a:ea typeface="Arial" pitchFamily="34" charset="-122"/>
-                <a:cs typeface="Arial" pitchFamily="34" charset="-120"/>
-              </a:rPr>
-              <a:t>Intel · AMD · Apple · Qualcomm</a:t>
-            </a:r>
-            <a:endParaRPr lang="en-US" sz="750" dirty="0"/>
-          </a:p>
-        </p:txBody>
-      </p:sp>
-      <p:sp>
-        <p:nvSpPr>
-          <p:cNvPr id="52" name="Shape 50"/>
-          <p:cNvSpPr/>
-          <p:nvPr/>
-        </p:nvSpPr>
-        <p:spPr>
-          <a:xfrm>
-            <a:off x="457200" y="3977640"/>
-            <a:ext cx="2651760" cy="1280160"/>
-          </a:xfrm>
-          <a:prstGeom prst="rect">
-            <a:avLst/>
-          </a:prstGeom>
-          <a:solidFill>
-            <a:srgbClr val="F9F9F9"/>
-          </a:solidFill>
-          <a:ln w="6350">
-            <a:solidFill>
-              <a:srgbClr val="E5E5E5"/>
-            </a:solidFill>
-            <a:prstDash val="solid"/>
-          </a:ln>
-        </p:spPr>
-      </p:sp>
-      <p:sp>
-        <p:nvSpPr>
-          <p:cNvPr id="53" name="Shape 51"/>
-          <p:cNvSpPr/>
-          <p:nvPr/>
-        </p:nvSpPr>
-        <p:spPr>
-          <a:xfrm>
-            <a:off x="457200" y="3977640"/>
-            <a:ext cx="2651760" cy="256032"/>
-          </a:xfrm>
-          <a:prstGeom prst="rect">
-            <a:avLst/>
-          </a:prstGeom>
-          <a:solidFill>
-            <a:srgbClr val="051A3D"/>
-          </a:solidFill>
-          <a:ln w="12700">
-            <a:solidFill>
-              <a:srgbClr val="051A3D"/>
-            </a:solidFill>
-            <a:prstDash val="solid"/>
-          </a:ln>
-        </p:spPr>
-      </p:sp>
-      <p:sp>
-        <p:nvSpPr>
-          <p:cNvPr id="54" name="Text 52"/>
-          <p:cNvSpPr/>
-          <p:nvPr/>
-        </p:nvSpPr>
-        <p:spPr>
-          <a:xfrm>
-            <a:off x="457200" y="3977640"/>
-            <a:ext cx="2651760" cy="256032"/>
-          </a:xfrm>
-          <a:prstGeom prst="rect">
-            <a:avLst/>
-          </a:prstGeom>
-          <a:noFill/>
-          <a:ln/>
-        </p:spPr>
-        <p:txBody>
-          <a:bodyPr wrap="square" lIns="0" tIns="0" rIns="0" bIns="0" rtlCol="0" anchor="ctr"/>
-          <a:lstStyle/>
-          <a:p>
-            <a:pPr algn="ctr" indent="0" marL="0">
-              <a:buNone/>
-            </a:pPr>
-            <a:r>
-              <a:rPr lang="en-US" sz="1000" b="1" spc="200" kern="0" dirty="0">
-                <a:solidFill>
-                  <a:srgbClr val="FFFFFF"/>
-                </a:solidFill>
-                <a:latin typeface="Arial" pitchFamily="34" charset="0"/>
-                <a:ea typeface="Arial" pitchFamily="34" charset="-122"/>
-                <a:cs typeface="Arial" pitchFamily="34" charset="-120"/>
-              </a:rPr>
-              <a:t>ANALOG</a:t>
-            </a:r>
-            <a:endParaRPr lang="en-US" sz="1000" dirty="0"/>
-          </a:p>
-        </p:txBody>
-      </p:sp>
-      <p:sp>
-        <p:nvSpPr>
-          <p:cNvPr id="55" name="Text 53"/>
-          <p:cNvSpPr/>
-          <p:nvPr/>
-        </p:nvSpPr>
-        <p:spPr>
-          <a:xfrm>
-            <a:off x="594360" y="4288536"/>
-            <a:ext cx="2377440" cy="457200"/>
-          </a:xfrm>
-          <a:prstGeom prst="rect">
-            <a:avLst/>
-          </a:prstGeom>
-          <a:noFill/>
-          <a:ln/>
-        </p:spPr>
-        <p:txBody>
-          <a:bodyPr wrap="square" lIns="0" tIns="0" rIns="0" bIns="0" rtlCol="0" anchor="t"/>
-          <a:lstStyle/>
-          <a:p>
-            <a:pPr indent="0" marL="0">
-              <a:buNone/>
-            </a:pPr>
-            <a:r>
-              <a:rPr lang="en-US" sz="950" dirty="0">
-                <a:solidFill>
-                  <a:srgbClr val="333333"/>
-                </a:solidFill>
-                <a:latin typeface="Arial" pitchFamily="34" charset="0"/>
-                <a:ea typeface="Arial" pitchFamily="34" charset="-122"/>
-                <a:cs typeface="Arial" pitchFamily="34" charset="-120"/>
-              </a:rPr>
-              <a:t>The bridge between silicon and the real world — voltages, signals, RF.</a:t>
-            </a:r>
-            <a:endParaRPr lang="en-US" sz="950" dirty="0"/>
-          </a:p>
-        </p:txBody>
-      </p:sp>
-      <p:sp>
-        <p:nvSpPr>
-          <p:cNvPr id="56" name="Text 54"/>
-          <p:cNvSpPr/>
-          <p:nvPr/>
-        </p:nvSpPr>
-        <p:spPr>
-          <a:xfrm>
-            <a:off x="594360" y="4764024"/>
-            <a:ext cx="2377440" cy="237744"/>
-          </a:xfrm>
-          <a:prstGeom prst="rect">
-            <a:avLst/>
-          </a:prstGeom>
-          <a:noFill/>
-          <a:ln/>
-        </p:spPr>
-        <p:txBody>
-          <a:bodyPr wrap="square" lIns="0" tIns="0" rIns="0" bIns="0" rtlCol="0" anchor="t"/>
-          <a:lstStyle/>
-          <a:p>
-            <a:pPr indent="0" marL="0">
-              <a:buNone/>
-            </a:pPr>
-            <a:r>
-              <a:rPr lang="en-US" sz="850" i="1" dirty="0">
-                <a:solidFill>
-                  <a:srgbClr val="666666"/>
-                </a:solidFill>
-                <a:latin typeface="Arial" pitchFamily="34" charset="0"/>
-                <a:ea typeface="Arial" pitchFamily="34" charset="-122"/>
-                <a:cs typeface="Arial" pitchFamily="34" charset="-120"/>
-              </a:rPr>
-              <a:t>Power management, radio, audio</a:t>
-            </a:r>
-            <a:endParaRPr lang="en-US" sz="850" dirty="0"/>
-          </a:p>
-        </p:txBody>
-      </p:sp>
-      <p:sp>
-        <p:nvSpPr>
-          <p:cNvPr id="57" name="Shape 55"/>
-          <p:cNvSpPr/>
-          <p:nvPr/>
-        </p:nvSpPr>
-        <p:spPr>
-          <a:xfrm>
-            <a:off x="640080" y="5020056"/>
-            <a:ext cx="2286000" cy="0"/>
-          </a:xfrm>
-          <a:prstGeom prst="line">
-            <a:avLst/>
-          </a:prstGeom>
-          <a:noFill/>
-          <a:ln w="6350">
-            <a:solidFill>
-              <a:srgbClr val="E5E5E5"/>
-            </a:solidFill>
-            <a:prstDash val="solid"/>
-          </a:ln>
-        </p:spPr>
-      </p:sp>
-      <p:sp>
-        <p:nvSpPr>
-          <p:cNvPr id="58" name="Text 56"/>
-          <p:cNvSpPr/>
-          <p:nvPr/>
-        </p:nvSpPr>
-        <p:spPr>
-          <a:xfrm>
-            <a:off x="457200" y="5038344"/>
-            <a:ext cx="2651760" cy="201168"/>
-          </a:xfrm>
-          <a:prstGeom prst="rect">
-            <a:avLst/>
-          </a:prstGeom>
-          <a:noFill/>
-          <a:ln/>
-        </p:spPr>
-        <p:txBody>
-          <a:bodyPr wrap="square" lIns="0" tIns="0" rIns="0" bIns="0" rtlCol="0" anchor="ctr"/>
-          <a:lstStyle/>
-          <a:p>
-            <a:pPr algn="ctr" indent="0" marL="0">
-              <a:buNone/>
-            </a:pPr>
-            <a:r>
-              <a:rPr lang="en-US" sz="750" i="1" dirty="0">
-                <a:solidFill>
-                  <a:srgbClr val="666666"/>
-                </a:solidFill>
-                <a:latin typeface="Arial" pitchFamily="34" charset="0"/>
-                <a:ea typeface="Arial" pitchFamily="34" charset="-122"/>
-                <a:cs typeface="Arial" pitchFamily="34" charset="-120"/>
-              </a:rPr>
-              <a:t>TI · Analog Devices · Infineon</a:t>
-            </a:r>
-            <a:endParaRPr lang="en-US" sz="750" dirty="0"/>
-          </a:p>
-        </p:txBody>
-      </p:sp>
-      <p:sp>
-        <p:nvSpPr>
-          <p:cNvPr id="59" name="Shape 57"/>
-          <p:cNvSpPr/>
-          <p:nvPr/>
-        </p:nvSpPr>
-        <p:spPr>
-          <a:xfrm>
-            <a:off x="3246120" y="3977640"/>
-            <a:ext cx="2651760" cy="1280160"/>
-          </a:xfrm>
-          <a:prstGeom prst="rect">
-            <a:avLst/>
-          </a:prstGeom>
-          <a:solidFill>
-            <a:srgbClr val="F9F9F9"/>
-          </a:solidFill>
-          <a:ln w="6350">
-            <a:solidFill>
-              <a:srgbClr val="E5E5E5"/>
-            </a:solidFill>
-            <a:prstDash val="solid"/>
-          </a:ln>
-        </p:spPr>
-      </p:sp>
-      <p:sp>
-        <p:nvSpPr>
-          <p:cNvPr id="60" name="Shape 58"/>
-          <p:cNvSpPr/>
-          <p:nvPr/>
-        </p:nvSpPr>
-        <p:spPr>
-          <a:xfrm>
-            <a:off x="3246120" y="3977640"/>
-            <a:ext cx="2651760" cy="256032"/>
-          </a:xfrm>
-          <a:prstGeom prst="rect">
-            <a:avLst/>
-          </a:prstGeom>
-          <a:solidFill>
-            <a:srgbClr val="00A854"/>
-          </a:solidFill>
-          <a:ln w="12700">
-            <a:solidFill>
-              <a:srgbClr val="00A854"/>
-            </a:solidFill>
-            <a:prstDash val="solid"/>
-          </a:ln>
-        </p:spPr>
-      </p:sp>
-      <p:sp>
-        <p:nvSpPr>
-          <p:cNvPr id="61" name="Text 59"/>
-          <p:cNvSpPr/>
-          <p:nvPr/>
-        </p:nvSpPr>
-        <p:spPr>
-          <a:xfrm>
-            <a:off x="3246120" y="3977640"/>
-            <a:ext cx="2651760" cy="256032"/>
-          </a:xfrm>
-          <a:prstGeom prst="rect">
-            <a:avLst/>
-          </a:prstGeom>
-          <a:noFill/>
-          <a:ln/>
-        </p:spPr>
-        <p:txBody>
-          <a:bodyPr wrap="square" lIns="0" tIns="0" rIns="0" bIns="0" rtlCol="0" anchor="ctr"/>
-          <a:lstStyle/>
-          <a:p>
-            <a:pPr algn="ctr" indent="0" marL="0">
-              <a:buNone/>
-            </a:pPr>
-            <a:r>
-              <a:rPr lang="en-US" sz="1000" b="1" spc="200" kern="0" dirty="0">
-                <a:solidFill>
-                  <a:srgbClr val="FFFFFF"/>
-                </a:solidFill>
-                <a:latin typeface="Arial" pitchFamily="34" charset="0"/>
-                <a:ea typeface="Arial" pitchFamily="34" charset="-122"/>
-                <a:cs typeface="Arial" pitchFamily="34" charset="-120"/>
-              </a:rPr>
-              <a:t>SENSORS + OPTO</a:t>
-            </a:r>
-            <a:endParaRPr lang="en-US" sz="1000" dirty="0"/>
-          </a:p>
-        </p:txBody>
-      </p:sp>
-      <p:sp>
-        <p:nvSpPr>
-          <p:cNvPr id="62" name="Text 60"/>
-          <p:cNvSpPr/>
-          <p:nvPr/>
-        </p:nvSpPr>
-        <p:spPr>
-          <a:xfrm>
-            <a:off x="3383280" y="4288536"/>
-            <a:ext cx="2377440" cy="457200"/>
-          </a:xfrm>
-          <a:prstGeom prst="rect">
-            <a:avLst/>
-          </a:prstGeom>
-          <a:noFill/>
-          <a:ln/>
-        </p:spPr>
-        <p:txBody>
-          <a:bodyPr wrap="square" lIns="0" tIns="0" rIns="0" bIns="0" rtlCol="0" anchor="t"/>
-          <a:lstStyle/>
-          <a:p>
-            <a:pPr indent="0" marL="0">
-              <a:buNone/>
-            </a:pPr>
-            <a:r>
-              <a:rPr lang="en-US" sz="950" dirty="0">
-                <a:solidFill>
-                  <a:srgbClr val="333333"/>
-                </a:solidFill>
-                <a:latin typeface="Arial" pitchFamily="34" charset="0"/>
-                <a:ea typeface="Arial" pitchFamily="34" charset="-122"/>
-                <a:cs typeface="Arial" pitchFamily="34" charset="-120"/>
-              </a:rPr>
-              <a:t>How chips see, hear, and communicate with photons.</a:t>
-            </a:r>
-            <a:endParaRPr lang="en-US" sz="950" dirty="0"/>
-          </a:p>
-        </p:txBody>
-      </p:sp>
-      <p:sp>
-        <p:nvSpPr>
-          <p:cNvPr id="63" name="Text 61"/>
-          <p:cNvSpPr/>
-          <p:nvPr/>
-        </p:nvSpPr>
-        <p:spPr>
-          <a:xfrm>
-            <a:off x="3383280" y="4764024"/>
-            <a:ext cx="2377440" cy="237744"/>
-          </a:xfrm>
-          <a:prstGeom prst="rect">
-            <a:avLst/>
-          </a:prstGeom>
-          <a:noFill/>
-          <a:ln/>
-        </p:spPr>
-        <p:txBody>
-          <a:bodyPr wrap="square" lIns="0" tIns="0" rIns="0" bIns="0" rtlCol="0" anchor="t"/>
-          <a:lstStyle/>
-          <a:p>
-            <a:pPr indent="0" marL="0">
-              <a:buNone/>
-            </a:pPr>
-            <a:r>
-              <a:rPr lang="en-US" sz="850" i="1" dirty="0">
-                <a:solidFill>
-                  <a:srgbClr val="666666"/>
-                </a:solidFill>
-                <a:latin typeface="Arial" pitchFamily="34" charset="0"/>
-                <a:ea typeface="Arial" pitchFamily="34" charset="-122"/>
-                <a:cs typeface="Arial" pitchFamily="34" charset="-120"/>
-              </a:rPr>
-              <a:t>Phone cameras, lidar, fiber optics</a:t>
-            </a:r>
-            <a:endParaRPr lang="en-US" sz="850" dirty="0"/>
-          </a:p>
-        </p:txBody>
-      </p:sp>
-      <p:sp>
-        <p:nvSpPr>
-          <p:cNvPr id="64" name="Shape 62"/>
-          <p:cNvSpPr/>
-          <p:nvPr/>
-        </p:nvSpPr>
-        <p:spPr>
-          <a:xfrm>
-            <a:off x="3429000" y="5020056"/>
-            <a:ext cx="2286000" cy="0"/>
-          </a:xfrm>
-          <a:prstGeom prst="line">
-            <a:avLst/>
-          </a:prstGeom>
-          <a:noFill/>
-          <a:ln w="6350">
-            <a:solidFill>
-              <a:srgbClr val="E5E5E5"/>
-            </a:solidFill>
-            <a:prstDash val="solid"/>
-          </a:ln>
-        </p:spPr>
-      </p:sp>
-      <p:sp>
-        <p:nvSpPr>
-          <p:cNvPr id="65" name="Text 63"/>
-          <p:cNvSpPr/>
-          <p:nvPr/>
-        </p:nvSpPr>
-        <p:spPr>
-          <a:xfrm>
-            <a:off x="3246120" y="5038344"/>
-            <a:ext cx="2651760" cy="201168"/>
-          </a:xfrm>
-          <a:prstGeom prst="rect">
-            <a:avLst/>
-          </a:prstGeom>
-          <a:noFill/>
-          <a:ln/>
-        </p:spPr>
-        <p:txBody>
-          <a:bodyPr wrap="square" lIns="0" tIns="0" rIns="0" bIns="0" rtlCol="0" anchor="ctr"/>
-          <a:lstStyle/>
-          <a:p>
-            <a:pPr algn="ctr" indent="0" marL="0">
-              <a:buNone/>
-            </a:pPr>
-            <a:r>
-              <a:rPr lang="en-US" sz="750" i="1" dirty="0">
-                <a:solidFill>
-                  <a:srgbClr val="666666"/>
-                </a:solidFill>
-                <a:latin typeface="Arial" pitchFamily="34" charset="0"/>
-                <a:ea typeface="Arial" pitchFamily="34" charset="-122"/>
-                <a:cs typeface="Arial" pitchFamily="34" charset="-120"/>
-              </a:rPr>
-              <a:t>Sony · Samsung · STMicro</a:t>
-            </a:r>
-            <a:endParaRPr lang="en-US" sz="750" dirty="0"/>
-          </a:p>
-        </p:txBody>
-      </p:sp>
-      <p:sp>
-        <p:nvSpPr>
-          <p:cNvPr id="66" name="Shape 64"/>
-          <p:cNvSpPr/>
-          <p:nvPr/>
-        </p:nvSpPr>
-        <p:spPr>
-          <a:xfrm>
-            <a:off x="6035040" y="3977640"/>
-            <a:ext cx="2651760" cy="1280160"/>
-          </a:xfrm>
-          <a:prstGeom prst="rect">
-            <a:avLst/>
-          </a:prstGeom>
-          <a:solidFill>
-            <a:srgbClr val="F9F9F9"/>
-          </a:solidFill>
-          <a:ln w="6350">
-            <a:solidFill>
-              <a:srgbClr val="E5E5E5"/>
-            </a:solidFill>
-            <a:prstDash val="solid"/>
-          </a:ln>
-        </p:spPr>
-      </p:sp>
-      <p:sp>
-        <p:nvSpPr>
-          <p:cNvPr id="67" name="Shape 65"/>
-          <p:cNvSpPr/>
-          <p:nvPr/>
-        </p:nvSpPr>
-        <p:spPr>
-          <a:xfrm>
-            <a:off x="6035040" y="3977640"/>
-            <a:ext cx="2651760" cy="256032"/>
-          </a:xfrm>
-          <a:prstGeom prst="rect">
-            <a:avLst/>
-          </a:prstGeom>
-          <a:solidFill>
-            <a:srgbClr val="666666"/>
-          </a:solidFill>
-          <a:ln w="12700">
-            <a:solidFill>
-              <a:srgbClr val="666666"/>
-            </a:solidFill>
-            <a:prstDash val="solid"/>
-          </a:ln>
-        </p:spPr>
-      </p:sp>
-      <p:sp>
-        <p:nvSpPr>
-          <p:cNvPr id="68" name="Text 66"/>
-          <p:cNvSpPr/>
-          <p:nvPr/>
-        </p:nvSpPr>
-        <p:spPr>
-          <a:xfrm>
-            <a:off x="6035040" y="3977640"/>
-            <a:ext cx="2651760" cy="256032"/>
-          </a:xfrm>
-          <a:prstGeom prst="rect">
-            <a:avLst/>
-          </a:prstGeom>
-          <a:noFill/>
-          <a:ln/>
-        </p:spPr>
-        <p:txBody>
-          <a:bodyPr wrap="square" lIns="0" tIns="0" rIns="0" bIns="0" rtlCol="0" anchor="ctr"/>
-          <a:lstStyle/>
-          <a:p>
-            <a:pPr algn="ctr" indent="0" marL="0">
-              <a:buNone/>
-            </a:pPr>
-            <a:r>
-              <a:rPr lang="en-US" sz="1000" b="1" spc="200" kern="0" dirty="0">
-                <a:solidFill>
-                  <a:srgbClr val="FFFFFF"/>
-                </a:solidFill>
-                <a:latin typeface="Arial" pitchFamily="34" charset="0"/>
-                <a:ea typeface="Arial" pitchFamily="34" charset="-122"/>
-                <a:cs typeface="Arial" pitchFamily="34" charset="-120"/>
-              </a:rPr>
-              <a:t>DISCRETE + POWER</a:t>
-            </a:r>
-            <a:endParaRPr lang="en-US" sz="1000" dirty="0"/>
-          </a:p>
-        </p:txBody>
-      </p:sp>
-      <p:sp>
-        <p:nvSpPr>
-          <p:cNvPr id="69" name="Text 67"/>
-          <p:cNvSpPr/>
-          <p:nvPr/>
-        </p:nvSpPr>
-        <p:spPr>
-          <a:xfrm>
-            <a:off x="6172200" y="4288536"/>
-            <a:ext cx="2377440" cy="457200"/>
-          </a:xfrm>
-          <a:prstGeom prst="rect">
-            <a:avLst/>
-          </a:prstGeom>
-          <a:noFill/>
-          <a:ln/>
-        </p:spPr>
-        <p:txBody>
-          <a:bodyPr wrap="square" lIns="0" tIns="0" rIns="0" bIns="0" rtlCol="0" anchor="t"/>
-          <a:lstStyle/>
-          <a:p>
-            <a:pPr indent="0" marL="0">
-              <a:buNone/>
-            </a:pPr>
-            <a:r>
-              <a:rPr lang="en-US" sz="950" dirty="0">
-                <a:solidFill>
-                  <a:srgbClr val="333333"/>
-                </a:solidFill>
-                <a:latin typeface="Arial" pitchFamily="34" charset="0"/>
-                <a:ea typeface="Arial" pitchFamily="34" charset="-122"/>
-                <a:cs typeface="Arial" pitchFamily="34" charset="-120"/>
-              </a:rPr>
-              <a:t>Heavy-current switching for machines, grids, and vehicles.</a:t>
-            </a:r>
-            <a:endParaRPr lang="en-US" sz="950" dirty="0"/>
-          </a:p>
-        </p:txBody>
-      </p:sp>
-      <p:sp>
-        <p:nvSpPr>
-          <p:cNvPr id="70" name="Text 68"/>
-          <p:cNvSpPr/>
-          <p:nvPr/>
-        </p:nvSpPr>
-        <p:spPr>
-          <a:xfrm>
-            <a:off x="6172200" y="4764024"/>
-            <a:ext cx="2377440" cy="237744"/>
-          </a:xfrm>
-          <a:prstGeom prst="rect">
-            <a:avLst/>
-          </a:prstGeom>
-          <a:noFill/>
-          <a:ln/>
-        </p:spPr>
-        <p:txBody>
-          <a:bodyPr wrap="square" lIns="0" tIns="0" rIns="0" bIns="0" rtlCol="0" anchor="t"/>
-          <a:lstStyle/>
-          <a:p>
-            <a:pPr indent="0" marL="0">
-              <a:buNone/>
-            </a:pPr>
-            <a:r>
-              <a:rPr lang="en-US" sz="850" i="1" dirty="0">
-                <a:solidFill>
-                  <a:srgbClr val="666666"/>
-                </a:solidFill>
-                <a:latin typeface="Arial" pitchFamily="34" charset="0"/>
-                <a:ea typeface="Arial" pitchFamily="34" charset="-122"/>
-                <a:cs typeface="Arial" pitchFamily="34" charset="-120"/>
-              </a:rPr>
-              <a:t>EVs, industrial motors, chargers</a:t>
-            </a:r>
-            <a:endParaRPr lang="en-US" sz="850" dirty="0"/>
-          </a:p>
-        </p:txBody>
-      </p:sp>
-      <p:sp>
-        <p:nvSpPr>
-          <p:cNvPr id="71" name="Shape 69"/>
-          <p:cNvSpPr/>
-          <p:nvPr/>
-        </p:nvSpPr>
-        <p:spPr>
-          <a:xfrm>
-            <a:off x="6217920" y="5020056"/>
-            <a:ext cx="2286000" cy="0"/>
-          </a:xfrm>
-          <a:prstGeom prst="line">
-            <a:avLst/>
-          </a:prstGeom>
-          <a:noFill/>
-          <a:ln w="6350">
-            <a:solidFill>
-              <a:srgbClr val="E5E5E5"/>
-            </a:solidFill>
-            <a:prstDash val="solid"/>
-          </a:ln>
-        </p:spPr>
-      </p:sp>
-      <p:sp>
-        <p:nvSpPr>
-          <p:cNvPr id="72" name="Text 70"/>
-          <p:cNvSpPr/>
-          <p:nvPr/>
-        </p:nvSpPr>
-        <p:spPr>
-          <a:xfrm>
-            <a:off x="6035040" y="5038344"/>
-            <a:ext cx="2651760" cy="201168"/>
-          </a:xfrm>
-          <a:prstGeom prst="rect">
-            <a:avLst/>
-          </a:prstGeom>
-          <a:noFill/>
-          <a:ln/>
-        </p:spPr>
-        <p:txBody>
-          <a:bodyPr wrap="square" lIns="0" tIns="0" rIns="0" bIns="0" rtlCol="0" anchor="ctr"/>
-          <a:lstStyle/>
-          <a:p>
-            <a:pPr algn="ctr" indent="0" marL="0">
-              <a:buNone/>
-            </a:pPr>
-            <a:r>
-              <a:rPr lang="en-US" sz="750" i="1" dirty="0">
-                <a:solidFill>
-                  <a:srgbClr val="666666"/>
-                </a:solidFill>
-                <a:latin typeface="Arial" pitchFamily="34" charset="0"/>
-                <a:ea typeface="Arial" pitchFamily="34" charset="-122"/>
-                <a:cs typeface="Arial" pitchFamily="34" charset="-120"/>
-              </a:rPr>
-              <a:t>Infineon · ON Semi · Wolfspeed</a:t>
-            </a:r>
-            <a:endParaRPr lang="en-US" sz="750" dirty="0"/>
-          </a:p>
-        </p:txBody>
-      </p:sp>
-      <p:sp>
-        <p:nvSpPr>
-          <p:cNvPr id="73" name="Shape 71"/>
-          <p:cNvSpPr/>
-          <p:nvPr/>
-        </p:nvSpPr>
-        <p:spPr>
-          <a:xfrm>
-            <a:off x="457200" y="5285232"/>
-            <a:ext cx="8229600" cy="402336"/>
-          </a:xfrm>
-          <a:prstGeom prst="rect">
-            <a:avLst/>
-          </a:prstGeom>
-          <a:solidFill>
-            <a:srgbClr val="FFD100"/>
-          </a:solidFill>
-          <a:ln w="12700">
-            <a:solidFill>
-              <a:srgbClr val="FFD100"/>
-            </a:solidFill>
-            <a:prstDash val="solid"/>
-          </a:ln>
-        </p:spPr>
-      </p:sp>
-      <p:sp>
-        <p:nvSpPr>
-          <p:cNvPr id="74" name="Text 72"/>
-          <p:cNvSpPr/>
-          <p:nvPr/>
-        </p:nvSpPr>
-        <p:spPr>
-          <a:xfrm>
-            <a:off x="640080" y="5285232"/>
-            <a:ext cx="7863840" cy="402336"/>
-          </a:xfrm>
-          <a:prstGeom prst="rect">
-            <a:avLst/>
-          </a:prstGeom>
-          <a:noFill/>
-          <a:ln/>
-        </p:spPr>
-        <p:txBody>
-          <a:bodyPr wrap="square" lIns="0" tIns="0" rIns="0" bIns="0" rtlCol="0" anchor="ctr"/>
-          <a:lstStyle/>
-          <a:p>
-            <a:pPr indent="0" marL="0">
-              <a:buNone/>
-            </a:pPr>
-            <a:r>
-              <a:rPr lang="en-US" sz="1150" b="1" dirty="0">
-                <a:solidFill>
-                  <a:srgbClr val="000000"/>
-                </a:solidFill>
-                <a:latin typeface="Arial" pitchFamily="34" charset="0"/>
-                <a:ea typeface="Arial" pitchFamily="34" charset="-122"/>
-                <a:cs typeface="Arial" pitchFamily="34" charset="-120"/>
-              </a:rPr>
-              <a:t>Logic and memory absorb the AI capex — but every chip flows through ASML tools, TSMC fabs, and advanced packaging, where bottlenecks decide who ships.</a:t>
-            </a:r>
-            <a:endParaRPr lang="en-US" sz="1150" dirty="0"/>
-          </a:p>
-        </p:txBody>
-      </p:sp>
-      <p:sp>
-        <p:nvSpPr>
-          <p:cNvPr id="75" name="Text 73"/>
-          <p:cNvSpPr/>
-          <p:nvPr/>
-        </p:nvSpPr>
-        <p:spPr>
-          <a:xfrm>
-            <a:off x="457200" y="5875020"/>
-            <a:ext cx="8229600" cy="320040"/>
-          </a:xfrm>
-          <a:prstGeom prst="rect">
-            <a:avLst/>
-          </a:prstGeom>
-          <a:noFill/>
-          <a:ln/>
-        </p:spPr>
-        <p:txBody>
-          <a:bodyPr wrap="square" lIns="0" tIns="0" rIns="0" bIns="0" rtlCol="0" anchor="t"/>
-          <a:lstStyle/>
-          <a:p>
-            <a:pPr indent="0" marL="0">
-              <a:buNone/>
-            </a:pPr>
-            <a:r>
-              <a:rPr lang="en-US" sz="700" dirty="0">
-                <a:solidFill>
-                  <a:srgbClr val="999999"/>
-                </a:solidFill>
-                <a:latin typeface="Arial" pitchFamily="34" charset="0"/>
-                <a:ea typeface="Arial" pitchFamily="34" charset="-122"/>
-                <a:cs typeface="Arial" pitchFamily="34" charset="-120"/>
-              </a:rPr>
-              <a:t>Sources: SIA category taxonomy; WSTS Fall 2025; SEMI World Fab Forecast; TrendForce; company disclosures. Category descriptions are plain-English simplifications.</a:t>
-            </a:r>
-            <a:endParaRPr lang="en-US" sz="700" dirty="0"/>
-          </a:p>
-        </p:txBody>
-      </p:sp>
-      <p:sp>
-        <p:nvSpPr>
-          <p:cNvPr id="76" name="Shape 74"/>
-          <p:cNvSpPr/>
-          <p:nvPr/>
-        </p:nvSpPr>
-        <p:spPr>
-          <a:xfrm>
-            <a:off x="0" y="6286500"/>
-            <a:ext cx="9144000" cy="571500"/>
-          </a:xfrm>
-          <a:prstGeom prst="rect">
-            <a:avLst/>
-          </a:prstGeom>
-          <a:solidFill>
-            <a:srgbClr val="000000"/>
-          </a:solidFill>
-          <a:ln w="12700">
-            <a:solidFill>
-              <a:srgbClr val="000000"/>
-            </a:solidFill>
-            <a:prstDash val="solid"/>
-          </a:ln>
-        </p:spPr>
-      </p:sp>
-      <p:sp>
-        <p:nvSpPr>
-          <p:cNvPr id="77" name="Text 75"/>
           <p:cNvSpPr/>
           <p:nvPr/>
         </p:nvSpPr>
@@ -38017,7 +36650,7 @@
       </p:sp>
       <p:sp>
         <p:nvSpPr>
-          <p:cNvPr id="78" name="Text 76"/>
+          <p:cNvPr id="38" name="Text 36"/>
           <p:cNvSpPr/>
           <p:nvPr/>
         </p:nvSpPr>

--- a/ai-markets-deck.pptx
+++ b/ai-markets-deck.pptx
@@ -35684,7 +35684,7 @@
                 <a:ea typeface="Arial" pitchFamily="34" charset="-122"/>
                 <a:cs typeface="Arial" pitchFamily="34" charset="-120"/>
               </a:rPr>
-              <a:t>An AI accelerator package: a large logic die surrounded by HBM memory stacks on a CoWoS substrate.</a:t>
+              <a:t>An AI accelerator package: a large processor chip surrounded by high-speed memory chips, all wired into one unit.</a:t>
             </a:r>
             <a:endParaRPr lang="en-US" sz="800" dirty="0"/>
           </a:p>
@@ -35864,7 +35864,7 @@
         <p:spPr>
           <a:xfrm>
             <a:off x="5166360" y="2148840"/>
-            <a:ext cx="3520440" cy="457200"/>
+            <a:ext cx="3520440" cy="594360"/>
           </a:xfrm>
           <a:prstGeom prst="rect">
             <a:avLst/>
@@ -35888,7 +35888,7 @@
                 <a:ea typeface="Arial" pitchFamily="34" charset="-122"/>
                 <a:cs typeface="Arial" pitchFamily="34" charset="-120"/>
               </a:rPr>
-              <a:t>Engineers blueprint the AI chip's tens of billions of transistors in software.</a:t>
+              <a:t>Engineers draft the chip's blueprint in software, mapping where each of tens of billions of microscopic switches will sit.</a:t>
             </a:r>
             <a:endParaRPr lang="en-US" sz="1050" dirty="0"/>
           </a:p>
@@ -35896,46 +35896,7 @@
       </p:sp>
       <p:sp>
         <p:nvSpPr>
-          <p:cNvPr id="16" name="Text 14"/>
-          <p:cNvSpPr/>
-          <p:nvPr/>
-        </p:nvSpPr>
-        <p:spPr>
-          <a:xfrm>
-            <a:off x="5166360" y="2587752"/>
-            <a:ext cx="3520440" cy="182880"/>
-          </a:xfrm>
-          <a:prstGeom prst="rect">
-            <a:avLst/>
-          </a:prstGeom>
-          <a:noFill/>
-          <a:ln/>
-        </p:spPr>
-        <p:txBody>
-          <a:bodyPr wrap="square" lIns="0" tIns="0" rIns="0" bIns="0" rtlCol="0" anchor="t"/>
-          <a:lstStyle/>
-          <a:p>
-            <a:pPr indent="0" marL="0">
-              <a:buNone/>
-            </a:pPr>
-            <a:r>
-              <a:rPr lang="en-US" sz="900" i="1" dirty="0">
-                <a:solidFill>
-                  <a:srgbClr val="666666"/>
-                </a:solidFill>
-                <a:latin typeface="Arial" pitchFamily="34" charset="0"/>
-                <a:ea typeface="Arial" pitchFamily="34" charset="-122"/>
-                <a:cs typeface="Arial" pitchFamily="34" charset="-120"/>
-              </a:rPr>
-              <a:t>NVIDIA · AMD · Broadcom · Google TPU</a:t>
-            </a:r>
-            <a:endParaRPr lang="en-US" sz="900" dirty="0"/>
-          </a:p>
-        </p:txBody>
-      </p:sp>
-      <p:sp>
-        <p:nvSpPr>
-          <p:cNvPr id="17" name="Shape 15"/>
+          <p:cNvPr id="16" name="Shape 14"/>
           <p:cNvSpPr/>
           <p:nvPr/>
         </p:nvSpPr>
@@ -35958,7 +35919,7 @@
       </p:sp>
       <p:sp>
         <p:nvSpPr>
-          <p:cNvPr id="18" name="Shape 16"/>
+          <p:cNvPr id="17" name="Shape 15"/>
           <p:cNvSpPr/>
           <p:nvPr/>
         </p:nvSpPr>
@@ -35983,7 +35944,7 @@
       </p:sp>
       <p:sp>
         <p:nvSpPr>
-          <p:cNvPr id="19" name="Text 17"/>
+          <p:cNvPr id="18" name="Text 16"/>
           <p:cNvSpPr/>
           <p:nvPr/>
         </p:nvSpPr>
@@ -36022,7 +35983,7 @@
       </p:sp>
       <p:sp>
         <p:nvSpPr>
-          <p:cNvPr id="20" name="Text 18"/>
+          <p:cNvPr id="19" name="Text 17"/>
           <p:cNvSpPr/>
           <p:nvPr/>
         </p:nvSpPr>
@@ -36061,14 +36022,14 @@
       </p:sp>
       <p:sp>
         <p:nvSpPr>
-          <p:cNvPr id="21" name="Text 19"/>
+          <p:cNvPr id="20" name="Text 18"/>
           <p:cNvSpPr/>
           <p:nvPr/>
         </p:nvSpPr>
         <p:spPr>
           <a:xfrm>
             <a:off x="5166360" y="3108960"/>
-            <a:ext cx="3520440" cy="457200"/>
+            <a:ext cx="3520440" cy="594360"/>
           </a:xfrm>
           <a:prstGeom prst="rect">
             <a:avLst/>
@@ -36092,7 +36053,7 @@
                 <a:ea typeface="Arial" pitchFamily="34" charset="-122"/>
                 <a:cs typeface="Arial" pitchFamily="34" charset="-120"/>
               </a:rPr>
-              <a:t>Specialized tools, especially EUV lithography, are built to print at atomic scale.</a:t>
+              <a:t>Highly specialized machines are built to print circuit patterns at near-atomic scale using ultraviolet light.</a:t>
             </a:r>
             <a:endParaRPr lang="en-US" sz="1050" dirty="0"/>
           </a:p>
@@ -36100,46 +36061,7 @@
       </p:sp>
       <p:sp>
         <p:nvSpPr>
-          <p:cNvPr id="22" name="Text 20"/>
-          <p:cNvSpPr/>
-          <p:nvPr/>
-        </p:nvSpPr>
-        <p:spPr>
-          <a:xfrm>
-            <a:off x="5166360" y="3547872"/>
-            <a:ext cx="3520440" cy="182880"/>
-          </a:xfrm>
-          <a:prstGeom prst="rect">
-            <a:avLst/>
-          </a:prstGeom>
-          <a:noFill/>
-          <a:ln/>
-        </p:spPr>
-        <p:txBody>
-          <a:bodyPr wrap="square" lIns="0" tIns="0" rIns="0" bIns="0" rtlCol="0" anchor="t"/>
-          <a:lstStyle/>
-          <a:p>
-            <a:pPr indent="0" marL="0">
-              <a:buNone/>
-            </a:pPr>
-            <a:r>
-              <a:rPr lang="en-US" sz="900" i="1" dirty="0">
-                <a:solidFill>
-                  <a:srgbClr val="666666"/>
-                </a:solidFill>
-                <a:latin typeface="Arial" pitchFamily="34" charset="0"/>
-                <a:ea typeface="Arial" pitchFamily="34" charset="-122"/>
-                <a:cs typeface="Arial" pitchFamily="34" charset="-120"/>
-              </a:rPr>
-              <a:t>ASML · Applied Materials · Lam · KLA</a:t>
-            </a:r>
-            <a:endParaRPr lang="en-US" sz="900" dirty="0"/>
-          </a:p>
-        </p:txBody>
-      </p:sp>
-      <p:sp>
-        <p:nvSpPr>
-          <p:cNvPr id="23" name="Shape 21"/>
+          <p:cNvPr id="21" name="Shape 19"/>
           <p:cNvSpPr/>
           <p:nvPr/>
         </p:nvSpPr>
@@ -36162,7 +36084,7 @@
       </p:sp>
       <p:sp>
         <p:nvSpPr>
-          <p:cNvPr id="24" name="Shape 22"/>
+          <p:cNvPr id="22" name="Shape 20"/>
           <p:cNvSpPr/>
           <p:nvPr/>
         </p:nvSpPr>
@@ -36187,7 +36109,7 @@
       </p:sp>
       <p:sp>
         <p:nvSpPr>
-          <p:cNvPr id="25" name="Text 23"/>
+          <p:cNvPr id="23" name="Text 21"/>
           <p:cNvSpPr/>
           <p:nvPr/>
         </p:nvSpPr>
@@ -36226,7 +36148,7 @@
       </p:sp>
       <p:sp>
         <p:nvSpPr>
-          <p:cNvPr id="26" name="Text 24"/>
+          <p:cNvPr id="24" name="Text 22"/>
           <p:cNvSpPr/>
           <p:nvPr/>
         </p:nvSpPr>
@@ -36265,14 +36187,14 @@
       </p:sp>
       <p:sp>
         <p:nvSpPr>
-          <p:cNvPr id="27" name="Text 25"/>
+          <p:cNvPr id="25" name="Text 23"/>
           <p:cNvSpPr/>
           <p:nvPr/>
         </p:nvSpPr>
         <p:spPr>
           <a:xfrm>
             <a:off x="5166360" y="4069080"/>
-            <a:ext cx="3520440" cy="457200"/>
+            <a:ext cx="3520440" cy="594360"/>
           </a:xfrm>
           <a:prstGeom prst="rect">
             <a:avLst/>
@@ -36296,7 +36218,7 @@
                 <a:ea typeface="Arial" pitchFamily="34" charset="-122"/>
                 <a:cs typeface="Arial" pitchFamily="34" charset="-120"/>
               </a:rPr>
-              <a:t>Inside a $20B fab, silicon wafers are processed through 1,000+ steps.</a:t>
+              <a:t>Silicon wafers pass through more than a thousand precise steps inside ultra-clean factories that take years to build.</a:t>
             </a:r>
             <a:endParaRPr lang="en-US" sz="1050" dirty="0"/>
           </a:p>
@@ -36304,46 +36226,7 @@
       </p:sp>
       <p:sp>
         <p:nvSpPr>
-          <p:cNvPr id="28" name="Text 26"/>
-          <p:cNvSpPr/>
-          <p:nvPr/>
-        </p:nvSpPr>
-        <p:spPr>
-          <a:xfrm>
-            <a:off x="5166360" y="4507992"/>
-            <a:ext cx="3520440" cy="182880"/>
-          </a:xfrm>
-          <a:prstGeom prst="rect">
-            <a:avLst/>
-          </a:prstGeom>
-          <a:noFill/>
-          <a:ln/>
-        </p:spPr>
-        <p:txBody>
-          <a:bodyPr wrap="square" lIns="0" tIns="0" rIns="0" bIns="0" rtlCol="0" anchor="t"/>
-          <a:lstStyle/>
-          <a:p>
-            <a:pPr indent="0" marL="0">
-              <a:buNone/>
-            </a:pPr>
-            <a:r>
-              <a:rPr lang="en-US" sz="900" i="1" dirty="0">
-                <a:solidFill>
-                  <a:srgbClr val="666666"/>
-                </a:solidFill>
-                <a:latin typeface="Arial" pitchFamily="34" charset="0"/>
-                <a:ea typeface="Arial" pitchFamily="34" charset="-122"/>
-                <a:cs typeface="Arial" pitchFamily="34" charset="-120"/>
-              </a:rPr>
-              <a:t>TSMC · Samsung · Intel</a:t>
-            </a:r>
-            <a:endParaRPr lang="en-US" sz="900" dirty="0"/>
-          </a:p>
-        </p:txBody>
-      </p:sp>
-      <p:sp>
-        <p:nvSpPr>
-          <p:cNvPr id="29" name="Shape 27"/>
+          <p:cNvPr id="26" name="Shape 24"/>
           <p:cNvSpPr/>
           <p:nvPr/>
         </p:nvSpPr>
@@ -36366,7 +36249,7 @@
       </p:sp>
       <p:sp>
         <p:nvSpPr>
-          <p:cNvPr id="30" name="Shape 28"/>
+          <p:cNvPr id="27" name="Shape 25"/>
           <p:cNvSpPr/>
           <p:nvPr/>
         </p:nvSpPr>
@@ -36391,7 +36274,7 @@
       </p:sp>
       <p:sp>
         <p:nvSpPr>
-          <p:cNvPr id="31" name="Text 29"/>
+          <p:cNvPr id="28" name="Text 26"/>
           <p:cNvSpPr/>
           <p:nvPr/>
         </p:nvSpPr>
@@ -36430,7 +36313,7 @@
       </p:sp>
       <p:sp>
         <p:nvSpPr>
-          <p:cNvPr id="32" name="Text 30"/>
+          <p:cNvPr id="29" name="Text 27"/>
           <p:cNvSpPr/>
           <p:nvPr/>
         </p:nvSpPr>
@@ -36469,14 +36352,14 @@
       </p:sp>
       <p:sp>
         <p:nvSpPr>
-          <p:cNvPr id="33" name="Text 31"/>
+          <p:cNvPr id="30" name="Text 28"/>
           <p:cNvSpPr/>
           <p:nvPr/>
         </p:nvSpPr>
         <p:spPr>
           <a:xfrm>
             <a:off x="5166360" y="5029200"/>
-            <a:ext cx="3520440" cy="457200"/>
+            <a:ext cx="3520440" cy="594360"/>
           </a:xfrm>
           <a:prstGeom prst="rect">
             <a:avLst/>
@@ -36500,7 +36383,7 @@
                 <a:ea typeface="Arial" pitchFamily="34" charset="-122"/>
                 <a:cs typeface="Arial" pitchFamily="34" charset="-120"/>
               </a:rPr>
-              <a:t>Logic dies are stacked with HBM memory using advanced packaging like CoWoS.</a:t>
+              <a:t>The finished chip is bonded with high-speed memory into a single package ready to plug into a server.</a:t>
             </a:r>
             <a:endParaRPr lang="en-US" sz="1050" dirty="0"/>
           </a:p>
@@ -36508,46 +36391,7 @@
       </p:sp>
       <p:sp>
         <p:nvSpPr>
-          <p:cNvPr id="34" name="Text 32"/>
-          <p:cNvSpPr/>
-          <p:nvPr/>
-        </p:nvSpPr>
-        <p:spPr>
-          <a:xfrm>
-            <a:off x="5166360" y="5468112"/>
-            <a:ext cx="3520440" cy="182880"/>
-          </a:xfrm>
-          <a:prstGeom prst="rect">
-            <a:avLst/>
-          </a:prstGeom>
-          <a:noFill/>
-          <a:ln/>
-        </p:spPr>
-        <p:txBody>
-          <a:bodyPr wrap="square" lIns="0" tIns="0" rIns="0" bIns="0" rtlCol="0" anchor="t"/>
-          <a:lstStyle/>
-          <a:p>
-            <a:pPr indent="0" marL="0">
-              <a:buNone/>
-            </a:pPr>
-            <a:r>
-              <a:rPr lang="en-US" sz="900" i="1" dirty="0">
-                <a:solidFill>
-                  <a:srgbClr val="666666"/>
-                </a:solidFill>
-                <a:latin typeface="Arial" pitchFamily="34" charset="0"/>
-                <a:ea typeface="Arial" pitchFamily="34" charset="-122"/>
-                <a:cs typeface="Arial" pitchFamily="34" charset="-120"/>
-              </a:rPr>
-              <a:t>TSMC CoWoS · ASE · Amkor</a:t>
-            </a:r>
-            <a:endParaRPr lang="en-US" sz="900" dirty="0"/>
-          </a:p>
-        </p:txBody>
-      </p:sp>
-      <p:sp>
-        <p:nvSpPr>
-          <p:cNvPr id="35" name="Text 33"/>
+          <p:cNvPr id="31" name="Text 29"/>
           <p:cNvSpPr/>
           <p:nvPr/>
         </p:nvSpPr>
@@ -36586,7 +36430,7 @@
       </p:sp>
       <p:sp>
         <p:nvSpPr>
-          <p:cNvPr id="36" name="Shape 34"/>
+          <p:cNvPr id="32" name="Shape 30"/>
           <p:cNvSpPr/>
           <p:nvPr/>
         </p:nvSpPr>
@@ -36611,7 +36455,7 @@
       </p:sp>
       <p:sp>
         <p:nvSpPr>
-          <p:cNvPr id="37" name="Text 35"/>
+          <p:cNvPr id="33" name="Text 31"/>
           <p:cNvSpPr/>
           <p:nvPr/>
         </p:nvSpPr>
@@ -36650,7 +36494,7 @@
       </p:sp>
       <p:sp>
         <p:nvSpPr>
-          <p:cNvPr id="38" name="Text 36"/>
+          <p:cNvPr id="34" name="Text 32"/>
           <p:cNvSpPr/>
           <p:nvPr/>
         </p:nvSpPr>

--- a/ai-markets-deck.pptx
+++ b/ai-markets-deck.pptx
@@ -24170,7 +24170,7 @@
         </p:nvSpPr>
         <p:spPr>
           <a:xfrm>
-            <a:off x="457200" y="1691640"/>
+            <a:off x="457200" y="1463040"/>
             <a:ext cx="868680" cy="868680"/>
           </a:xfrm>
           <a:prstGeom prst="rect">
@@ -24195,7 +24195,7 @@
         </p:nvSpPr>
         <p:spPr>
           <a:xfrm>
-            <a:off x="457200" y="1691640"/>
+            <a:off x="457200" y="1463040"/>
             <a:ext cx="868680" cy="868680"/>
           </a:xfrm>
           <a:prstGeom prst="rect">
@@ -24234,24 +24234,24 @@
         </p:nvSpPr>
         <p:spPr>
           <a:xfrm>
-            <a:off x="1508760" y="1691640"/>
-            <a:ext cx="7178040" cy="868680"/>
-          </a:xfrm>
-          <a:prstGeom prst="rect">
-            <a:avLst/>
-          </a:prstGeom>
-          <a:noFill/>
-          <a:ln/>
-        </p:spPr>
-        <p:txBody>
-          <a:bodyPr wrap="square" lIns="0" tIns="0" rIns="0" bIns="0" rtlCol="0" anchor="ctr"/>
-          <a:lstStyle/>
-          <a:p>
-            <a:pPr indent="0" marL="0">
-              <a:buNone/>
-            </a:pPr>
-            <a:r>
-              <a:rPr lang="en-US" sz="1800" b="1" dirty="0">
+            <a:off x="1508760" y="1481328"/>
+            <a:ext cx="7178040" cy="329184"/>
+          </a:xfrm>
+          <a:prstGeom prst="rect">
+            <a:avLst/>
+          </a:prstGeom>
+          <a:noFill/>
+          <a:ln/>
+        </p:spPr>
+        <p:txBody>
+          <a:bodyPr wrap="square" lIns="0" tIns="0" rIns="0" bIns="0" rtlCol="0" anchor="t"/>
+          <a:lstStyle/>
+          <a:p>
+            <a:pPr indent="0" marL="0">
+              <a:buNone/>
+            </a:pPr>
+            <a:r>
+              <a:rPr lang="en-US" sz="1500" b="1" dirty="0">
                 <a:solidFill>
                   <a:srgbClr val="333333"/>
                 </a:solidFill>
@@ -24261,19 +24261,58 @@
               </a:rPr>
               <a:t>The largest capex cycle in history is going on credit.</a:t>
             </a:r>
-            <a:endParaRPr lang="en-US" sz="1800" dirty="0"/>
-          </a:p>
-        </p:txBody>
-      </p:sp>
-      <p:sp>
-        <p:nvSpPr>
-          <p:cNvPr id="8" name="Shape 6"/>
-          <p:cNvSpPr/>
-          <p:nvPr/>
-        </p:nvSpPr>
-        <p:spPr>
-          <a:xfrm>
-            <a:off x="457200" y="2651760"/>
+            <a:endParaRPr lang="en-US" sz="1500" dirty="0"/>
+          </a:p>
+        </p:txBody>
+      </p:sp>
+      <p:sp>
+        <p:nvSpPr>
+          <p:cNvPr id="8" name="Text 6"/>
+          <p:cNvSpPr/>
+          <p:nvPr/>
+        </p:nvSpPr>
+        <p:spPr>
+          <a:xfrm>
+            <a:off x="1508760" y="1828800"/>
+            <a:ext cx="7178040" cy="621792"/>
+          </a:xfrm>
+          <a:prstGeom prst="rect">
+            <a:avLst/>
+          </a:prstGeom>
+          <a:noFill/>
+          <a:ln/>
+        </p:spPr>
+        <p:txBody>
+          <a:bodyPr wrap="square" lIns="0" tIns="0" rIns="0" bIns="0" rtlCol="0" anchor="t"/>
+          <a:lstStyle/>
+          <a:p>
+            <a:pPr indent="0" marL="0">
+              <a:buNone/>
+            </a:pPr>
+            <a:r>
+              <a:rPr lang="en-US" sz="1050" dirty="0">
+                <a:solidFill>
+                  <a:srgbClr val="666666"/>
+                </a:solidFill>
+                <a:latin typeface="Arial" pitchFamily="34" charset="0"/>
+                <a:ea typeface="Arial" pitchFamily="34" charset="-122"/>
+                <a:cs typeface="Arial" pitchFamily="34" charset="-120"/>
+              </a:rPr>
+              <a:t>Hyperscalers fund a record AI buildout with rising leverage, not free cash flow. The cycle's risk shifts from operations onto balance sheets, and credit conditions now matter as much as compute demand.</a:t>
+            </a:r>
+            <a:endParaRPr lang="en-US" sz="1050" dirty="0"/>
+          </a:p>
+        </p:txBody>
+      </p:sp>
+      <p:sp>
+        <p:nvSpPr>
+          <p:cNvPr id="9" name="Shape 7"/>
+          <p:cNvSpPr/>
+          <p:nvPr/>
+        </p:nvSpPr>
+        <p:spPr>
+          <a:xfrm>
+            <a:off x="457200" y="2487168"/>
             <a:ext cx="868680" cy="868680"/>
           </a:xfrm>
           <a:prstGeom prst="rect">
@@ -24292,13 +24331,13 @@
       </p:sp>
       <p:sp>
         <p:nvSpPr>
-          <p:cNvPr id="9" name="Text 7"/>
-          <p:cNvSpPr/>
-          <p:nvPr/>
-        </p:nvSpPr>
-        <p:spPr>
-          <a:xfrm>
-            <a:off x="457200" y="2651760"/>
+          <p:cNvPr id="10" name="Text 8"/>
+          <p:cNvSpPr/>
+          <p:nvPr/>
+        </p:nvSpPr>
+        <p:spPr>
+          <a:xfrm>
+            <a:off x="457200" y="2487168"/>
             <a:ext cx="868680" cy="868680"/>
           </a:xfrm>
           <a:prstGeom prst="rect">
@@ -24331,30 +24370,30 @@
       </p:sp>
       <p:sp>
         <p:nvSpPr>
-          <p:cNvPr id="10" name="Text 8"/>
-          <p:cNvSpPr/>
-          <p:nvPr/>
-        </p:nvSpPr>
-        <p:spPr>
-          <a:xfrm>
-            <a:off x="1508760" y="2651760"/>
-            <a:ext cx="7178040" cy="868680"/>
-          </a:xfrm>
-          <a:prstGeom prst="rect">
-            <a:avLst/>
-          </a:prstGeom>
-          <a:noFill/>
-          <a:ln/>
-        </p:spPr>
-        <p:txBody>
-          <a:bodyPr wrap="square" lIns="0" tIns="0" rIns="0" bIns="0" rtlCol="0" anchor="ctr"/>
-          <a:lstStyle/>
-          <a:p>
-            <a:pPr indent="0" marL="0">
-              <a:buNone/>
-            </a:pPr>
-            <a:r>
-              <a:rPr lang="en-US" sz="1800" b="1" dirty="0">
+          <p:cNvPr id="11" name="Text 9"/>
+          <p:cNvSpPr/>
+          <p:nvPr/>
+        </p:nvSpPr>
+        <p:spPr>
+          <a:xfrm>
+            <a:off x="1508760" y="2505456"/>
+            <a:ext cx="7178040" cy="329184"/>
+          </a:xfrm>
+          <a:prstGeom prst="rect">
+            <a:avLst/>
+          </a:prstGeom>
+          <a:noFill/>
+          <a:ln/>
+        </p:spPr>
+        <p:txBody>
+          <a:bodyPr wrap="square" lIns="0" tIns="0" rIns="0" bIns="0" rtlCol="0" anchor="t"/>
+          <a:lstStyle/>
+          <a:p>
+            <a:pPr indent="0" marL="0">
+              <a:buNone/>
+            </a:pPr>
+            <a:r>
+              <a:rPr lang="en-US" sz="1500" b="1" dirty="0">
                 <a:solidFill>
                   <a:srgbClr val="333333"/>
                 </a:solidFill>
@@ -24364,19 +24403,58 @@
               </a:rPr>
               <a:t>The basket trade is over. The market picks winners.</a:t>
             </a:r>
-            <a:endParaRPr lang="en-US" sz="1800" dirty="0"/>
-          </a:p>
-        </p:txBody>
-      </p:sp>
-      <p:sp>
-        <p:nvSpPr>
-          <p:cNvPr id="11" name="Shape 9"/>
-          <p:cNvSpPr/>
-          <p:nvPr/>
-        </p:nvSpPr>
-        <p:spPr>
-          <a:xfrm>
-            <a:off x="457200" y="3611880"/>
+            <a:endParaRPr lang="en-US" sz="1500" dirty="0"/>
+          </a:p>
+        </p:txBody>
+      </p:sp>
+      <p:sp>
+        <p:nvSpPr>
+          <p:cNvPr id="12" name="Text 10"/>
+          <p:cNvSpPr/>
+          <p:nvPr/>
+        </p:nvSpPr>
+        <p:spPr>
+          <a:xfrm>
+            <a:off x="1508760" y="2852928"/>
+            <a:ext cx="7178040" cy="621792"/>
+          </a:xfrm>
+          <a:prstGeom prst="rect">
+            <a:avLst/>
+          </a:prstGeom>
+          <a:noFill/>
+          <a:ln/>
+        </p:spPr>
+        <p:txBody>
+          <a:bodyPr wrap="square" lIns="0" tIns="0" rIns="0" bIns="0" rtlCol="0" anchor="t"/>
+          <a:lstStyle/>
+          <a:p>
+            <a:pPr indent="0" marL="0">
+              <a:buNone/>
+            </a:pPr>
+            <a:r>
+              <a:rPr lang="en-US" sz="1050" dirty="0">
+                <a:solidFill>
+                  <a:srgbClr val="666666"/>
+                </a:solidFill>
+                <a:latin typeface="Arial" pitchFamily="34" charset="0"/>
+                <a:ea typeface="Arial" pitchFamily="34" charset="-122"/>
+                <a:cs typeface="Arial" pitchFamily="34" charset="-120"/>
+              </a:rPr>
+              <a:t>Returns inside the AI complex have dispersed sharply. Owning the whole space no longer works; alpha now sits in choosing which layer of the stack, and which name within it, you actually want to own.</a:t>
+            </a:r>
+            <a:endParaRPr lang="en-US" sz="1050" dirty="0"/>
+          </a:p>
+        </p:txBody>
+      </p:sp>
+      <p:sp>
+        <p:nvSpPr>
+          <p:cNvPr id="13" name="Shape 11"/>
+          <p:cNvSpPr/>
+          <p:nvPr/>
+        </p:nvSpPr>
+        <p:spPr>
+          <a:xfrm>
+            <a:off x="457200" y="3511296"/>
             <a:ext cx="868680" cy="868680"/>
           </a:xfrm>
           <a:prstGeom prst="rect">
@@ -24395,13 +24473,13 @@
       </p:sp>
       <p:sp>
         <p:nvSpPr>
-          <p:cNvPr id="12" name="Text 10"/>
-          <p:cNvSpPr/>
-          <p:nvPr/>
-        </p:nvSpPr>
-        <p:spPr>
-          <a:xfrm>
-            <a:off x="457200" y="3611880"/>
+          <p:cNvPr id="14" name="Text 12"/>
+          <p:cNvSpPr/>
+          <p:nvPr/>
+        </p:nvSpPr>
+        <p:spPr>
+          <a:xfrm>
+            <a:off x="457200" y="3511296"/>
             <a:ext cx="868680" cy="868680"/>
           </a:xfrm>
           <a:prstGeom prst="rect">
@@ -24434,30 +24512,30 @@
       </p:sp>
       <p:sp>
         <p:nvSpPr>
-          <p:cNvPr id="13" name="Text 11"/>
-          <p:cNvSpPr/>
-          <p:nvPr/>
-        </p:nvSpPr>
-        <p:spPr>
-          <a:xfrm>
-            <a:off x="1508760" y="3611880"/>
-            <a:ext cx="7178040" cy="868680"/>
-          </a:xfrm>
-          <a:prstGeom prst="rect">
-            <a:avLst/>
-          </a:prstGeom>
-          <a:noFill/>
-          <a:ln/>
-        </p:spPr>
-        <p:txBody>
-          <a:bodyPr wrap="square" lIns="0" tIns="0" rIns="0" bIns="0" rtlCol="0" anchor="ctr"/>
-          <a:lstStyle/>
-          <a:p>
-            <a:pPr indent="0" marL="0">
-              <a:buNone/>
-            </a:pPr>
-            <a:r>
-              <a:rPr lang="en-US" sz="1800" b="1" dirty="0">
+          <p:cNvPr id="15" name="Text 13"/>
+          <p:cNvSpPr/>
+          <p:nvPr/>
+        </p:nvSpPr>
+        <p:spPr>
+          <a:xfrm>
+            <a:off x="1508760" y="3529584"/>
+            <a:ext cx="7178040" cy="329184"/>
+          </a:xfrm>
+          <a:prstGeom prst="rect">
+            <a:avLst/>
+          </a:prstGeom>
+          <a:noFill/>
+          <a:ln/>
+        </p:spPr>
+        <p:txBody>
+          <a:bodyPr wrap="square" lIns="0" tIns="0" rIns="0" bIns="0" rtlCol="0" anchor="t"/>
+          <a:lstStyle/>
+          <a:p>
+            <a:pPr indent="0" marL="0">
+              <a:buNone/>
+            </a:pPr>
+            <a:r>
+              <a:rPr lang="en-US" sz="1500" b="1" dirty="0">
                 <a:solidFill>
                   <a:srgbClr val="333333"/>
                 </a:solidFill>
@@ -24467,19 +24545,58 @@
               </a:rPr>
               <a:t>The bottleneck keeps moving. That is the opportunity.</a:t>
             </a:r>
-            <a:endParaRPr lang="en-US" sz="1800" dirty="0"/>
-          </a:p>
-        </p:txBody>
-      </p:sp>
-      <p:sp>
-        <p:nvSpPr>
-          <p:cNvPr id="14" name="Shape 12"/>
-          <p:cNvSpPr/>
-          <p:nvPr/>
-        </p:nvSpPr>
-        <p:spPr>
-          <a:xfrm>
-            <a:off x="457200" y="4572000"/>
+            <a:endParaRPr lang="en-US" sz="1500" dirty="0"/>
+          </a:p>
+        </p:txBody>
+      </p:sp>
+      <p:sp>
+        <p:nvSpPr>
+          <p:cNvPr id="16" name="Text 14"/>
+          <p:cNvSpPr/>
+          <p:nvPr/>
+        </p:nvSpPr>
+        <p:spPr>
+          <a:xfrm>
+            <a:off x="1508760" y="3877056"/>
+            <a:ext cx="7178040" cy="621792"/>
+          </a:xfrm>
+          <a:prstGeom prst="rect">
+            <a:avLst/>
+          </a:prstGeom>
+          <a:noFill/>
+          <a:ln/>
+        </p:spPr>
+        <p:txBody>
+          <a:bodyPr wrap="square" lIns="0" tIns="0" rIns="0" bIns="0" rtlCol="0" anchor="t"/>
+          <a:lstStyle/>
+          <a:p>
+            <a:pPr indent="0" marL="0">
+              <a:buNone/>
+            </a:pPr>
+            <a:r>
+              <a:rPr lang="en-US" sz="1050" dirty="0">
+                <a:solidFill>
+                  <a:srgbClr val="666666"/>
+                </a:solidFill>
+                <a:latin typeface="Arial" pitchFamily="34" charset="0"/>
+                <a:ea typeface="Arial" pitchFamily="34" charset="-122"/>
+                <a:cs typeface="Arial" pitchFamily="34" charset="-120"/>
+              </a:rPr>
+              <a:t>From foundry capacity to memory to advanced packaging to power and the grid, the binding constraint keeps shifting. Whoever owns the next bottleneck captures the margin until the next one forms.</a:t>
+            </a:r>
+            <a:endParaRPr lang="en-US" sz="1050" dirty="0"/>
+          </a:p>
+        </p:txBody>
+      </p:sp>
+      <p:sp>
+        <p:nvSpPr>
+          <p:cNvPr id="17" name="Shape 15"/>
+          <p:cNvSpPr/>
+          <p:nvPr/>
+        </p:nvSpPr>
+        <p:spPr>
+          <a:xfrm>
+            <a:off x="457200" y="4535424"/>
             <a:ext cx="868680" cy="868680"/>
           </a:xfrm>
           <a:prstGeom prst="rect">
@@ -24498,13 +24615,13 @@
       </p:sp>
       <p:sp>
         <p:nvSpPr>
-          <p:cNvPr id="15" name="Text 13"/>
-          <p:cNvSpPr/>
-          <p:nvPr/>
-        </p:nvSpPr>
-        <p:spPr>
-          <a:xfrm>
-            <a:off x="457200" y="4572000"/>
+          <p:cNvPr id="18" name="Text 16"/>
+          <p:cNvSpPr/>
+          <p:nvPr/>
+        </p:nvSpPr>
+        <p:spPr>
+          <a:xfrm>
+            <a:off x="457200" y="4535424"/>
             <a:ext cx="868680" cy="868680"/>
           </a:xfrm>
           <a:prstGeom prst="rect">
@@ -24537,30 +24654,30 @@
       </p:sp>
       <p:sp>
         <p:nvSpPr>
-          <p:cNvPr id="16" name="Text 14"/>
-          <p:cNvSpPr/>
-          <p:nvPr/>
-        </p:nvSpPr>
-        <p:spPr>
-          <a:xfrm>
-            <a:off x="1508760" y="4572000"/>
-            <a:ext cx="7178040" cy="868680"/>
-          </a:xfrm>
-          <a:prstGeom prst="rect">
-            <a:avLst/>
-          </a:prstGeom>
-          <a:noFill/>
-          <a:ln/>
-        </p:spPr>
-        <p:txBody>
-          <a:bodyPr wrap="square" lIns="0" tIns="0" rIns="0" bIns="0" rtlCol="0" anchor="ctr"/>
-          <a:lstStyle/>
-          <a:p>
-            <a:pPr indent="0" marL="0">
-              <a:buNone/>
-            </a:pPr>
-            <a:r>
-              <a:rPr lang="en-US" sz="1800" b="1" dirty="0">
+          <p:cNvPr id="19" name="Text 17"/>
+          <p:cNvSpPr/>
+          <p:nvPr/>
+        </p:nvSpPr>
+        <p:spPr>
+          <a:xfrm>
+            <a:off x="1508760" y="4553712"/>
+            <a:ext cx="7178040" cy="329184"/>
+          </a:xfrm>
+          <a:prstGeom prst="rect">
+            <a:avLst/>
+          </a:prstGeom>
+          <a:noFill/>
+          <a:ln/>
+        </p:spPr>
+        <p:txBody>
+          <a:bodyPr wrap="square" lIns="0" tIns="0" rIns="0" bIns="0" rtlCol="0" anchor="t"/>
+          <a:lstStyle/>
+          <a:p>
+            <a:pPr indent="0" marL="0">
+              <a:buNone/>
+            </a:pPr>
+            <a:r>
+              <a:rPr lang="en-US" sz="1500" b="1" dirty="0">
                 <a:solidFill>
                   <a:srgbClr val="333333"/>
                 </a:solidFill>
@@ -24570,13 +24687,52 @@
               </a:rPr>
               <a:t>If you index, you own the thesis. Choose it deliberately.</a:t>
             </a:r>
-            <a:endParaRPr lang="en-US" sz="1800" dirty="0"/>
-          </a:p>
-        </p:txBody>
-      </p:sp>
-      <p:sp>
-        <p:nvSpPr>
-          <p:cNvPr id="17" name="Text 15"/>
+            <a:endParaRPr lang="en-US" sz="1500" dirty="0"/>
+          </a:p>
+        </p:txBody>
+      </p:sp>
+      <p:sp>
+        <p:nvSpPr>
+          <p:cNvPr id="20" name="Text 18"/>
+          <p:cNvSpPr/>
+          <p:nvPr/>
+        </p:nvSpPr>
+        <p:spPr>
+          <a:xfrm>
+            <a:off x="1508760" y="4901184"/>
+            <a:ext cx="7178040" cy="621792"/>
+          </a:xfrm>
+          <a:prstGeom prst="rect">
+            <a:avLst/>
+          </a:prstGeom>
+          <a:noFill/>
+          <a:ln/>
+        </p:spPr>
+        <p:txBody>
+          <a:bodyPr wrap="square" lIns="0" tIns="0" rIns="0" bIns="0" rtlCol="0" anchor="t"/>
+          <a:lstStyle/>
+          <a:p>
+            <a:pPr indent="0" marL="0">
+              <a:buNone/>
+            </a:pPr>
+            <a:r>
+              <a:rPr lang="en-US" sz="1050" dirty="0">
+                <a:solidFill>
+                  <a:srgbClr val="666666"/>
+                </a:solidFill>
+                <a:latin typeface="Arial" pitchFamily="34" charset="0"/>
+                <a:ea typeface="Arial" pitchFamily="34" charset="-122"/>
+                <a:cs typeface="Arial" pitchFamily="34" charset="-120"/>
+              </a:rPr>
+              <a:t>US large-cap indices already embed AI capex exposure at concentrated weights. Recognize that exposure, size it, or hedge it, but the position should be a deliberate choice rather than a default.</a:t>
+            </a:r>
+            <a:endParaRPr lang="en-US" sz="1050" dirty="0"/>
+          </a:p>
+        </p:txBody>
+      </p:sp>
+      <p:sp>
+        <p:nvSpPr>
+          <p:cNvPr id="21" name="Text 19"/>
           <p:cNvSpPr/>
           <p:nvPr/>
         </p:nvSpPr>
@@ -24615,7 +24771,7 @@
       </p:sp>
       <p:sp>
         <p:nvSpPr>
-          <p:cNvPr id="18" name="Shape 16"/>
+          <p:cNvPr id="22" name="Shape 20"/>
           <p:cNvSpPr/>
           <p:nvPr/>
         </p:nvSpPr>
@@ -24640,7 +24796,7 @@
       </p:sp>
       <p:sp>
         <p:nvSpPr>
-          <p:cNvPr id="19" name="Text 17"/>
+          <p:cNvPr id="23" name="Text 21"/>
           <p:cNvSpPr/>
           <p:nvPr/>
         </p:nvSpPr>
@@ -24679,7 +24835,7 @@
       </p:sp>
       <p:sp>
         <p:nvSpPr>
-          <p:cNvPr id="20" name="Text 18"/>
+          <p:cNvPr id="24" name="Text 22"/>
           <p:cNvSpPr/>
           <p:nvPr/>
         </p:nvSpPr>

--- a/ai-markets-deck.pptx
+++ b/ai-markets-deck.pptx
@@ -24094,7 +24094,7 @@
                 <a:ea typeface="Arial Black" pitchFamily="34" charset="-122"/>
                 <a:cs typeface="Arial Black" pitchFamily="34" charset="-120"/>
               </a:rPr>
-              <a:t>Capex on credit. Basket over. Bottleneck moves. Exposure is a thesis.</a:t>
+              <a:t>Generational scale. Basket over. Bottleneck moves. Exposure is a thesis.</a:t>
             </a:r>
             <a:endParaRPr lang="en-US" sz="2400" dirty="0"/>
           </a:p>
@@ -24259,7 +24259,7 @@
                 <a:ea typeface="Arial" pitchFamily="34" charset="-122"/>
                 <a:cs typeface="Arial" pitchFamily="34" charset="-120"/>
               </a:rPr>
-              <a:t>The largest capex cycle in history is going on credit.</a:t>
+              <a:t>The AI buildout has no modern precedent in scale.</a:t>
             </a:r>
             <a:endParaRPr lang="en-US" sz="1500" dirty="0"/>
           </a:p>
@@ -24298,7 +24298,7 @@
                 <a:ea typeface="Arial" pitchFamily="34" charset="-122"/>
                 <a:cs typeface="Arial" pitchFamily="34" charset="-120"/>
               </a:rPr>
-              <a:t>Hyperscalers fund a record AI buildout with rising leverage, not free cash flow. The cycle's risk shifts from operations onto balance sheets, and credit conditions now matter as much as compute demand.</a:t>
+              <a:t>In 2026 alone, hyperscalers will spend more on AI infrastructure than the inflation-adjusted cost of the entire Apollo program, and roughly three times peak dot-com telecom capex. The scale itself is the story.</a:t>
             </a:r>
             <a:endParaRPr lang="en-US" sz="1050" dirty="0"/>
           </a:p>
@@ -24763,7 +24763,7 @@
                 <a:ea typeface="Arial" pitchFamily="34" charset="-122"/>
                 <a:cs typeface="Arial" pitchFamily="34" charset="-120"/>
               </a:rPr>
-              <a:t>Sources: company filings; CreditSights / MUFG; Goldman Sachs; SemiAnalysis; BofA; TrendForce. See appendix for figure-by-figure citations.</a:t>
+              <a:t>Sources: company filings; Planetary Society / NASA Apollo cost data; Richmond Fed dot-com telecom capex; Goldman Sachs; SemiAnalysis; BofA; TrendForce. See appendix for figure-by-figure citations.</a:t>
             </a:r>
             <a:endParaRPr lang="en-US" sz="700" dirty="0"/>
           </a:p>

--- a/ai-markets-deck.pptx
+++ b/ai-markets-deck.pptx
@@ -24259,7 +24259,7 @@
                 <a:ea typeface="Arial" pitchFamily="34" charset="-122"/>
                 <a:cs typeface="Arial" pitchFamily="34" charset="-120"/>
               </a:rPr>
-              <a:t>The AI buildout has no modern precedent in scale.</a:t>
+              <a:t>AI is the largest single-technology capex cycle in modern history.</a:t>
             </a:r>
             <a:endParaRPr lang="en-US" sz="1500" dirty="0"/>
           </a:p>
@@ -24401,7 +24401,7 @@
                 <a:ea typeface="Arial" pitchFamily="34" charset="-122"/>
                 <a:cs typeface="Arial" pitchFamily="34" charset="-120"/>
               </a:rPr>
-              <a:t>The basket trade is over. The market picks winners.</a:t>
+              <a:t>The basket trade is over. Stock selection now drives AI returns.</a:t>
             </a:r>
             <a:endParaRPr lang="en-US" sz="1500" dirty="0"/>
           </a:p>
@@ -24543,7 +24543,7 @@
                 <a:ea typeface="Arial" pitchFamily="34" charset="-122"/>
                 <a:cs typeface="Arial" pitchFamily="34" charset="-120"/>
               </a:rPr>
-              <a:t>The bottleneck keeps moving. That is the opportunity.</a:t>
+              <a:t>The bottleneck moves through the AI stack. Own the next one.</a:t>
             </a:r>
             <a:endParaRPr lang="en-US" sz="1500" dirty="0"/>
           </a:p>
@@ -24685,7 +24685,7 @@
                 <a:ea typeface="Arial" pitchFamily="34" charset="-122"/>
                 <a:cs typeface="Arial" pitchFamily="34" charset="-120"/>
               </a:rPr>
-              <a:t>If you index, you own the thesis. Choose it deliberately.</a:t>
+              <a:t>If you index, you already own the AI capex thesis.</a:t>
             </a:r>
             <a:endParaRPr lang="en-US" sz="1500" dirty="0"/>
           </a:p>

--- a/ai-markets-deck.pptx
+++ b/ai-markets-deck.pptx
@@ -24259,7 +24259,7 @@
                 <a:ea typeface="Arial" pitchFamily="34" charset="-122"/>
                 <a:cs typeface="Arial" pitchFamily="34" charset="-120"/>
               </a:rPr>
-              <a:t>AI is the largest single-technology capex cycle in modern history.</a:t>
+              <a:t>AI is the defining capital-allocation event of this decade.</a:t>
             </a:r>
             <a:endParaRPr lang="en-US" sz="1500" dirty="0"/>
           </a:p>
@@ -24298,7 +24298,7 @@
                 <a:ea typeface="Arial" pitchFamily="34" charset="-122"/>
                 <a:cs typeface="Arial" pitchFamily="34" charset="-120"/>
               </a:rPr>
-              <a:t>In 2026 alone, hyperscalers will spend more on AI infrastructure than the inflation-adjusted cost of the entire Apollo program, and roughly three times peak dot-com telecom capex. The scale itself is the story.</a:t>
+              <a:t>A handful of hyperscalers are deploying capital fast enough to reshape power grids, real estate, and global supply chains all at once. AI capex has become the dominant driver of US business investment, and the scale itself is the story.</a:t>
             </a:r>
             <a:endParaRPr lang="en-US" sz="1050" dirty="0"/>
           </a:p>
@@ -24763,7 +24763,7 @@
                 <a:ea typeface="Arial" pitchFamily="34" charset="-122"/>
                 <a:cs typeface="Arial" pitchFamily="34" charset="-120"/>
               </a:rPr>
-              <a:t>Sources: company filings; Planetary Society / NASA Apollo cost data; Richmond Fed dot-com telecom capex; Goldman Sachs; SemiAnalysis; BofA; TrendForce. See appendix for figure-by-figure citations.</a:t>
+              <a:t>Sources: company filings; Goldman Sachs; SemiAnalysis; BofA; TrendForce. See appendix for figure-by-figure citations.</a:t>
             </a:r>
             <a:endParaRPr lang="en-US" sz="700" dirty="0"/>
           </a:p>

--- a/ai-markets-deck.pptx
+++ b/ai-markets-deck.pptx
@@ -24094,7 +24094,7 @@
                 <a:ea typeface="Arial Black" pitchFamily="34" charset="-122"/>
                 <a:cs typeface="Arial Black" pitchFamily="34" charset="-120"/>
               </a:rPr>
-              <a:t>Generational scale. Basket over. Bottleneck moves. Exposure is a thesis.</a:t>
+              <a:t>Generational scale. Winners diverge. Trade evolves. Exposure is a thesis.</a:t>
             </a:r>
             <a:endParaRPr lang="en-US" sz="2400" dirty="0"/>
           </a:p>
@@ -24401,7 +24401,7 @@
                 <a:ea typeface="Arial" pitchFamily="34" charset="-122"/>
                 <a:cs typeface="Arial" pitchFamily="34" charset="-120"/>
               </a:rPr>
-              <a:t>The basket trade is over. Stock selection now drives AI returns.</a:t>
+              <a:t>The AI buildout is producing sharp winners and sharp losers.</a:t>
             </a:r>
             <a:endParaRPr lang="en-US" sz="1500" dirty="0"/>
           </a:p>
@@ -24440,7 +24440,7 @@
                 <a:ea typeface="Arial" pitchFamily="34" charset="-122"/>
                 <a:cs typeface="Arial" pitchFamily="34" charset="-120"/>
               </a:rPr>
-              <a:t>Returns inside the AI complex have dispersed sharply. Owning the whole space no longer works; alpha now sits in choosing which layer of the stack, and which name within it, you actually want to own.</a:t>
+              <a:t>Foundries, memory, and the picks-and-shovels of AI infrastructure are surging, while parts of legacy software and SaaS are getting cannibalized by AI-native competitors. Returns inside the AI complex have dispersed sharply, and the spread keeps widening.</a:t>
             </a:r>
             <a:endParaRPr lang="en-US" sz="1050" dirty="0"/>
           </a:p>
@@ -24543,7 +24543,7 @@
                 <a:ea typeface="Arial" pitchFamily="34" charset="-122"/>
                 <a:cs typeface="Arial" pitchFamily="34" charset="-120"/>
               </a:rPr>
-              <a:t>The bottleneck moves through the AI stack. Own the next one.</a:t>
+              <a:t>The AI trade keeps evolving as bottlenecks shift through the stack.</a:t>
             </a:r>
             <a:endParaRPr lang="en-US" sz="1500" dirty="0"/>
           </a:p>
@@ -24582,7 +24582,7 @@
                 <a:ea typeface="Arial" pitchFamily="34" charset="-122"/>
                 <a:cs typeface="Arial" pitchFamily="34" charset="-120"/>
               </a:rPr>
-              <a:t>From foundry capacity to memory to advanced packaging to power and the grid, the binding constraint keeps shifting. Whoever owns the next bottleneck captures the margin until the next one forms.</a:t>
+              <a:t>Yesterday it was foundry capacity. Today it is memory and advanced packaging. Tomorrow it will be power and the grid. The binding constraint keeps moving, and the names that lead the trade move with it.</a:t>
             </a:r>
             <a:endParaRPr lang="en-US" sz="1050" dirty="0"/>
           </a:p>
@@ -24685,7 +24685,7 @@
                 <a:ea typeface="Arial" pitchFamily="34" charset="-122"/>
                 <a:cs typeface="Arial" pitchFamily="34" charset="-120"/>
               </a:rPr>
-              <a:t>If you index, you already own the AI capex thesis.</a:t>
+              <a:t>The question isn't whether you have AI exposure. It's whether you chose it.</a:t>
             </a:r>
             <a:endParaRPr lang="en-US" sz="1500" dirty="0"/>
           </a:p>

--- a/ai-markets-deck.pptx
+++ b/ai-markets-deck.pptx
@@ -5015,7 +5015,186 @@
       </p:sp>
       <p:sp>
         <p:nvSpPr>
-          <p:cNvPr id="7" name="Shape 5"/>
+          <p:cNvPr id="7" name="Text 5"/>
+          <p:cNvSpPr/>
+          <p:nvPr/>
+        </p:nvSpPr>
+        <p:spPr>
+          <a:xfrm>
+            <a:off x="640080" y="1417320"/>
+            <a:ext cx="2468880" cy="201168"/>
+          </a:xfrm>
+          <a:prstGeom prst="rect">
+            <a:avLst/>
+          </a:prstGeom>
+          <a:noFill/>
+          <a:ln/>
+        </p:spPr>
+        <p:txBody>
+          <a:bodyPr wrap="square" lIns="0" tIns="0" rIns="0" bIns="0" rtlCol="0" anchor="ctr"/>
+          <a:lstStyle/>
+          <a:p>
+            <a:pPr indent="0" marL="0">
+              <a:buNone/>
+            </a:pPr>
+            <a:r>
+              <a:rPr lang="en-US" sz="900" b="1" spc="200" kern="0" dirty="0">
+                <a:solidFill>
+                  <a:srgbClr val="666666"/>
+                </a:solidFill>
+                <a:latin typeface="Arial" pitchFamily="34" charset="0"/>
+                <a:ea typeface="Arial" pitchFamily="34" charset="-122"/>
+                <a:cs typeface="Arial" pitchFamily="34" charset="-120"/>
+              </a:rPr>
+              <a:t>LAB</a:t>
+            </a:r>
+            <a:endParaRPr lang="en-US" sz="900" dirty="0"/>
+          </a:p>
+        </p:txBody>
+      </p:sp>
+      <p:sp>
+        <p:nvSpPr>
+          <p:cNvPr id="8" name="Text 6"/>
+          <p:cNvSpPr/>
+          <p:nvPr/>
+        </p:nvSpPr>
+        <p:spPr>
+          <a:xfrm>
+            <a:off x="3200400" y="1417320"/>
+            <a:ext cx="1280160" cy="201168"/>
+          </a:xfrm>
+          <a:prstGeom prst="rect">
+            <a:avLst/>
+          </a:prstGeom>
+          <a:noFill/>
+          <a:ln/>
+        </p:spPr>
+        <p:txBody>
+          <a:bodyPr wrap="square" lIns="0" tIns="0" rIns="0" bIns="0" rtlCol="0" anchor="ctr"/>
+          <a:lstStyle/>
+          <a:p>
+            <a:pPr algn="ctr" indent="0" marL="0">
+              <a:buNone/>
+            </a:pPr>
+            <a:r>
+              <a:rPr lang="en-US" sz="900" b="1" spc="200" kern="0" dirty="0">
+                <a:solidFill>
+                  <a:srgbClr val="666666"/>
+                </a:solidFill>
+                <a:latin typeface="Arial" pitchFamily="34" charset="0"/>
+                <a:ea typeface="Arial" pitchFamily="34" charset="-122"/>
+                <a:cs typeface="Arial" pitchFamily="34" charset="-120"/>
+              </a:rPr>
+              <a:t>VALUATION</a:t>
+            </a:r>
+            <a:endParaRPr lang="en-US" sz="900" dirty="0"/>
+          </a:p>
+        </p:txBody>
+      </p:sp>
+      <p:sp>
+        <p:nvSpPr>
+          <p:cNvPr id="9" name="Text 7"/>
+          <p:cNvSpPr/>
+          <p:nvPr/>
+        </p:nvSpPr>
+        <p:spPr>
+          <a:xfrm>
+            <a:off x="4480560" y="1417320"/>
+            <a:ext cx="1188720" cy="201168"/>
+          </a:xfrm>
+          <a:prstGeom prst="rect">
+            <a:avLst/>
+          </a:prstGeom>
+          <a:noFill/>
+          <a:ln/>
+        </p:spPr>
+        <p:txBody>
+          <a:bodyPr wrap="square" lIns="0" tIns="0" rIns="0" bIns="0" rtlCol="0" anchor="ctr"/>
+          <a:lstStyle/>
+          <a:p>
+            <a:pPr algn="ctr" indent="0" marL="0">
+              <a:buNone/>
+            </a:pPr>
+            <a:r>
+              <a:rPr lang="en-US" sz="900" b="1" spc="200" kern="0" dirty="0">
+                <a:solidFill>
+                  <a:srgbClr val="666666"/>
+                </a:solidFill>
+                <a:latin typeface="Arial" pitchFamily="34" charset="0"/>
+                <a:ea typeface="Arial" pitchFamily="34" charset="-122"/>
+                <a:cs typeface="Arial" pitchFamily="34" charset="-120"/>
+              </a:rPr>
+              <a:t>MULTIPLE</a:t>
+            </a:r>
+            <a:endParaRPr lang="en-US" sz="900" dirty="0"/>
+          </a:p>
+        </p:txBody>
+      </p:sp>
+      <p:sp>
+        <p:nvSpPr>
+          <p:cNvPr id="10" name="Text 8"/>
+          <p:cNvSpPr/>
+          <p:nvPr/>
+        </p:nvSpPr>
+        <p:spPr>
+          <a:xfrm>
+            <a:off x="5760720" y="1417320"/>
+            <a:ext cx="2834640" cy="201168"/>
+          </a:xfrm>
+          <a:prstGeom prst="rect">
+            <a:avLst/>
+          </a:prstGeom>
+          <a:noFill/>
+          <a:ln/>
+        </p:spPr>
+        <p:txBody>
+          <a:bodyPr wrap="square" lIns="0" tIns="0" rIns="0" bIns="0" rtlCol="0" anchor="ctr"/>
+          <a:lstStyle/>
+          <a:p>
+            <a:pPr indent="0" marL="0">
+              <a:buNone/>
+            </a:pPr>
+            <a:r>
+              <a:rPr lang="en-US" sz="900" b="1" spc="200" kern="0" dirty="0">
+                <a:solidFill>
+                  <a:srgbClr val="666666"/>
+                </a:solidFill>
+                <a:latin typeface="Arial" pitchFamily="34" charset="0"/>
+                <a:ea typeface="Arial" pitchFamily="34" charset="-122"/>
+                <a:cs typeface="Arial" pitchFamily="34" charset="-120"/>
+              </a:rPr>
+              <a:t>RECENT EVENT</a:t>
+            </a:r>
+            <a:endParaRPr lang="en-US" sz="900" dirty="0"/>
+          </a:p>
+        </p:txBody>
+      </p:sp>
+      <p:sp>
+        <p:nvSpPr>
+          <p:cNvPr id="11" name="Shape 9"/>
+          <p:cNvSpPr/>
+          <p:nvPr/>
+        </p:nvSpPr>
+        <p:spPr>
+          <a:xfrm>
+            <a:off x="457200" y="1645920"/>
+            <a:ext cx="8229600" cy="0"/>
+          </a:xfrm>
+          <a:prstGeom prst="line">
+            <a:avLst/>
+          </a:prstGeom>
+          <a:noFill/>
+          <a:ln w="6350">
+            <a:solidFill>
+              <a:srgbClr val="E5E5E5"/>
+            </a:solidFill>
+            <a:prstDash val="solid"/>
+          </a:ln>
+        </p:spPr>
+      </p:sp>
+      <p:sp>
+        <p:nvSpPr>
+          <p:cNvPr id="12" name="Shape 10"/>
           <p:cNvSpPr/>
           <p:nvPr/>
         </p:nvSpPr>
@@ -5040,7 +5219,7 @@
       </p:sp>
       <p:pic>
         <p:nvPicPr>
-          <p:cNvPr id="8" name="Image 0" descr="logos/openai.png">    </p:cNvPr>
+          <p:cNvPr id="13" name="Image 0" descr="logos/openai.png">    </p:cNvPr>
           <p:cNvPicPr>
             <a:picLocks noChangeAspect="1"/>
           </p:cNvPicPr>
@@ -5063,7 +5242,7 @@
       </p:pic>
       <p:sp>
         <p:nvSpPr>
-          <p:cNvPr id="9" name="Text 6"/>
+          <p:cNvPr id="14" name="Text 11"/>
           <p:cNvSpPr/>
           <p:nvPr/>
         </p:nvSpPr>
@@ -5102,7 +5281,7 @@
       </p:sp>
       <p:sp>
         <p:nvSpPr>
-          <p:cNvPr id="10" name="Text 7"/>
+          <p:cNvPr id="15" name="Text 12"/>
           <p:cNvSpPr/>
           <p:nvPr/>
         </p:nvSpPr>
@@ -5155,7 +5334,7 @@
       </p:sp>
       <p:sp>
         <p:nvSpPr>
-          <p:cNvPr id="11" name="Text 8"/>
+          <p:cNvPr id="16" name="Text 13"/>
           <p:cNvSpPr/>
           <p:nvPr/>
         </p:nvSpPr>
@@ -5194,7 +5373,7 @@
       </p:sp>
       <p:sp>
         <p:nvSpPr>
-          <p:cNvPr id="12" name="Text 9"/>
+          <p:cNvPr id="17" name="Text 14"/>
           <p:cNvSpPr/>
           <p:nvPr/>
         </p:nvSpPr>
@@ -5225,7 +5404,7 @@
                 <a:ea typeface="Arial" pitchFamily="34" charset="-122"/>
                 <a:cs typeface="Arial" pitchFamily="34" charset="-120"/>
               </a:rPr>
-              <a:t>$122B round · AMZN / NVDA / SoftBank · Apr 2026</a:t>
+              <a:t>$122B round · AMZN / NVDA / SoftBank · Mar 2026</a:t>
             </a:r>
             <a:endParaRPr lang="en-US" sz="1100" dirty="0"/>
           </a:p>
@@ -5233,7 +5412,7 @@
       </p:sp>
       <p:sp>
         <p:nvSpPr>
-          <p:cNvPr id="13" name="Shape 10"/>
+          <p:cNvPr id="18" name="Shape 15"/>
           <p:cNvSpPr/>
           <p:nvPr/>
         </p:nvSpPr>
@@ -5258,7 +5437,7 @@
       </p:sp>
       <p:pic>
         <p:nvPicPr>
-          <p:cNvPr id="14" name="Image 1" descr="logos/anthropic.png">    </p:cNvPr>
+          <p:cNvPr id="19" name="Image 1" descr="logos/anthropic.png">    </p:cNvPr>
           <p:cNvPicPr>
             <a:picLocks noChangeAspect="1"/>
           </p:cNvPicPr>
@@ -5281,7 +5460,7 @@
       </p:pic>
       <p:sp>
         <p:nvSpPr>
-          <p:cNvPr id="15" name="Text 11"/>
+          <p:cNvPr id="20" name="Text 16"/>
           <p:cNvSpPr/>
           <p:nvPr/>
         </p:nvSpPr>
@@ -5320,7 +5499,7 @@
       </p:sp>
       <p:sp>
         <p:nvSpPr>
-          <p:cNvPr id="16" name="Text 12"/>
+          <p:cNvPr id="21" name="Text 17"/>
           <p:cNvSpPr/>
           <p:nvPr/>
         </p:nvSpPr>
@@ -5373,7 +5552,7 @@
       </p:sp>
       <p:sp>
         <p:nvSpPr>
-          <p:cNvPr id="17" name="Text 13"/>
+          <p:cNvPr id="22" name="Text 18"/>
           <p:cNvSpPr/>
           <p:nvPr/>
         </p:nvSpPr>
@@ -5412,7 +5591,7 @@
       </p:sp>
       <p:sp>
         <p:nvSpPr>
-          <p:cNvPr id="18" name="Text 14"/>
+          <p:cNvPr id="23" name="Text 19"/>
           <p:cNvSpPr/>
           <p:nvPr/>
         </p:nvSpPr>
@@ -5443,7 +5622,7 @@
                 <a:ea typeface="Arial" pitchFamily="34" charset="-122"/>
                 <a:cs typeface="Arial" pitchFamily="34" charset="-120"/>
               </a:rPr>
-              <a:t>$30B Series G (Feb); VCs now offering $800B+</a:t>
+              <a:t>$30B Series G (Feb); Google $40B (Apr); VCs offering $800B+</a:t>
             </a:r>
             <a:endParaRPr lang="en-US" sz="1100" dirty="0"/>
           </a:p>
@@ -5451,7 +5630,7 @@
       </p:sp>
       <p:sp>
         <p:nvSpPr>
-          <p:cNvPr id="19" name="Shape 15"/>
+          <p:cNvPr id="24" name="Shape 20"/>
           <p:cNvSpPr/>
           <p:nvPr/>
         </p:nvSpPr>
@@ -5476,7 +5655,7 @@
       </p:sp>
       <p:pic>
         <p:nvPicPr>
-          <p:cNvPr id="20" name="Image 2" descr="logos/google.png">    </p:cNvPr>
+          <p:cNvPr id="25" name="Image 2" descr="logos/google.png">    </p:cNvPr>
           <p:cNvPicPr>
             <a:picLocks noChangeAspect="1"/>
           </p:cNvPicPr>
@@ -5499,7 +5678,7 @@
       </p:pic>
       <p:sp>
         <p:nvSpPr>
-          <p:cNvPr id="21" name="Text 16"/>
+          <p:cNvPr id="26" name="Text 21"/>
           <p:cNvSpPr/>
           <p:nvPr/>
         </p:nvSpPr>
@@ -5538,7 +5717,7 @@
       </p:sp>
       <p:sp>
         <p:nvSpPr>
-          <p:cNvPr id="22" name="Text 17"/>
+          <p:cNvPr id="27" name="Text 22"/>
           <p:cNvSpPr/>
           <p:nvPr/>
         </p:nvSpPr>
@@ -5569,7 +5748,7 @@
                 <a:ea typeface="Arial Black" pitchFamily="34" charset="-122"/>
                 <a:cs typeface="Arial Black" pitchFamily="34" charset="-120"/>
               </a:rPr>
-              <a:t>$2.3T</a:t>
+              <a:t>$4.0T</a:t>
             </a:r>
             <a:pPr algn="ctr" indent="0" marL="0">
               <a:buNone/>
@@ -5591,7 +5770,7 @@
       </p:sp>
       <p:sp>
         <p:nvSpPr>
-          <p:cNvPr id="23" name="Text 18"/>
+          <p:cNvPr id="28" name="Text 23"/>
           <p:cNvSpPr/>
           <p:nvPr/>
         </p:nvSpPr>
@@ -5622,7 +5801,7 @@
                 <a:ea typeface="Arial" pitchFamily="34" charset="-122"/>
                 <a:cs typeface="Arial" pitchFamily="34" charset="-120"/>
               </a:rPr>
-              <a:t>~20× P/E</a:t>
+              <a:t>~31× P/E</a:t>
             </a:r>
             <a:endParaRPr lang="en-US" sz="1200" dirty="0"/>
           </a:p>
@@ -5630,7 +5809,7 @@
       </p:sp>
       <p:sp>
         <p:nvSpPr>
-          <p:cNvPr id="24" name="Text 19"/>
+          <p:cNvPr id="29" name="Text 24"/>
           <p:cNvSpPr/>
           <p:nvPr/>
         </p:nvSpPr>
@@ -5661,7 +5840,7 @@
                 <a:ea typeface="Arial" pitchFamily="34" charset="-122"/>
                 <a:cs typeface="Arial" pitchFamily="34" charset="-120"/>
               </a:rPr>
-              <a:t>Alphabet (public) · Gemini 3 / DeepMind · ~$85B 2026 capex</a:t>
+              <a:t>Alphabet (public) · Gemini 3 / DeepMind · ~$180B 2026 capex</a:t>
             </a:r>
             <a:endParaRPr lang="en-US" sz="1100" dirty="0"/>
           </a:p>
@@ -5669,7 +5848,7 @@
       </p:sp>
       <p:sp>
         <p:nvSpPr>
-          <p:cNvPr id="25" name="Shape 20"/>
+          <p:cNvPr id="30" name="Shape 25"/>
           <p:cNvSpPr/>
           <p:nvPr/>
         </p:nvSpPr>
@@ -5694,7 +5873,7 @@
       </p:sp>
       <p:pic>
         <p:nvPicPr>
-          <p:cNvPr id="26" name="Image 3" descr="logos/xai.png">    </p:cNvPr>
+          <p:cNvPr id="31" name="Image 3" descr="logos/xai.png">    </p:cNvPr>
           <p:cNvPicPr>
             <a:picLocks noChangeAspect="1"/>
           </p:cNvPicPr>
@@ -5717,7 +5896,7 @@
       </p:pic>
       <p:sp>
         <p:nvSpPr>
-          <p:cNvPr id="27" name="Text 21"/>
+          <p:cNvPr id="32" name="Text 26"/>
           <p:cNvSpPr/>
           <p:nvPr/>
         </p:nvSpPr>
@@ -5756,7 +5935,7 @@
       </p:sp>
       <p:sp>
         <p:nvSpPr>
-          <p:cNvPr id="28" name="Text 22"/>
+          <p:cNvPr id="33" name="Text 27"/>
           <p:cNvSpPr/>
           <p:nvPr/>
         </p:nvSpPr>
@@ -5809,7 +5988,7 @@
       </p:sp>
       <p:sp>
         <p:nvSpPr>
-          <p:cNvPr id="29" name="Text 23"/>
+          <p:cNvPr id="34" name="Text 28"/>
           <p:cNvSpPr/>
           <p:nvPr/>
         </p:nvSpPr>
@@ -5848,7 +6027,7 @@
       </p:sp>
       <p:sp>
         <p:nvSpPr>
-          <p:cNvPr id="30" name="Text 24"/>
+          <p:cNvPr id="35" name="Text 29"/>
           <p:cNvSpPr/>
           <p:nvPr/>
         </p:nvSpPr>
@@ -5887,7 +6066,7 @@
       </p:sp>
       <p:sp>
         <p:nvSpPr>
-          <p:cNvPr id="31" name="Text 25"/>
+          <p:cNvPr id="36" name="Text 30"/>
           <p:cNvSpPr/>
           <p:nvPr/>
         </p:nvSpPr>
@@ -5926,7 +6105,7 @@
       </p:sp>
       <p:sp>
         <p:nvSpPr>
-          <p:cNvPr id="32" name="Shape 26"/>
+          <p:cNvPr id="37" name="Shape 31"/>
           <p:cNvSpPr/>
           <p:nvPr/>
         </p:nvSpPr>
@@ -5951,7 +6130,7 @@
       </p:sp>
       <p:sp>
         <p:nvSpPr>
-          <p:cNvPr id="33" name="Text 27"/>
+          <p:cNvPr id="38" name="Text 32"/>
           <p:cNvSpPr/>
           <p:nvPr/>
         </p:nvSpPr>
@@ -6004,7 +6183,7 @@
       </p:sp>
       <p:sp>
         <p:nvSpPr>
-          <p:cNvPr id="34" name="Text 28"/>
+          <p:cNvPr id="39" name="Text 33"/>
           <p:cNvSpPr/>
           <p:nvPr/>
         </p:nvSpPr>
@@ -6049,7 +6228,7 @@
                 <a:ea typeface="Arial" pitchFamily="34" charset="-122"/>
                 <a:cs typeface="Arial" pitchFamily="34" charset="-120"/>
               </a:rPr>
-              <a:t>Bloomberg / CNBC — OpenAI $122B round, Apr 2026, </a:t>
+              <a:t>Bloomberg / CNBC — OpenAI $122B round, Mar 2026, </a:t>
             </a:r>
             <a:pPr indent="0" marL="0">
               <a:buNone/>
@@ -6169,7 +6348,7 @@
       </p:sp>
       <p:sp>
         <p:nvSpPr>
-          <p:cNvPr id="35" name="Shape 29"/>
+          <p:cNvPr id="40" name="Shape 34"/>
           <p:cNvSpPr/>
           <p:nvPr/>
         </p:nvSpPr>
@@ -6194,7 +6373,7 @@
       </p:sp>
       <p:sp>
         <p:nvSpPr>
-          <p:cNvPr id="36" name="Text 30"/>
+          <p:cNvPr id="41" name="Text 35"/>
           <p:cNvSpPr/>
           <p:nvPr/>
         </p:nvSpPr>
@@ -6233,7 +6412,7 @@
       </p:sp>
       <p:sp>
         <p:nvSpPr>
-          <p:cNvPr id="37" name="Text 31"/>
+          <p:cNvPr id="42" name="Text 36"/>
           <p:cNvSpPr/>
           <p:nvPr/>
         </p:nvSpPr>
@@ -26472,7 +26651,7 @@
                 <a:ea typeface="Arial" pitchFamily="34" charset="-122"/>
                 <a:cs typeface="Arial" pitchFamily="34" charset="-120"/>
               </a:rPr>
-              <a:t>Alphabet $2.3T / ~$85B 2026 capex</a:t>
+              <a:t>Alphabet $4.0T / ~$180B 2026 capex</a:t>
             </a:r>
             <a:pPr indent="0" marL="0">
               <a:spcAft>
@@ -26506,7 +26685,7 @@
                 <a:ea typeface="Arial" pitchFamily="34" charset="-122"/>
                 <a:cs typeface="Arial" pitchFamily="34" charset="-120"/>
               </a:rPr>
-              <a:t>Alphabet 10-K and 2026 capex guide</a:t>
+              <a:t>companiesmarketcap; Alphabet 2026 capex guide (Q4 2025 call)</a:t>
             </a:r>
             <a:endParaRPr lang="en-US" sz="850" dirty="0"/>
           </a:p>

--- a/ai-markets-deck.pptx
+++ b/ai-markets-deck.pptx
@@ -1669,7 +1669,7 @@
           <a:p>
             <a:r>
               <a:rPr lang="en-US" dirty="0"/>
-              <a:t>The deck in one breath: part one is what's happening right now — models became loop-running agents, tokens became a rationed input, and Washington moved from regulating AI to debating who owns it. Part two is how markets reprice all of it: equities split the trade, the labor data started moving, the financing moved into the bond market, and your benchmark quietly became an AI fund. Twelve slides, two parts, one question throughout: what does this do to portfolios.</a:t>
+              <a:t>The deck in one breath: part one is what’s happening right now — models became loop-running agents, tokens became a rationed input, and Washington moved from regulating AI to debating who owns it. Part two is how markets reprice all of it: equities split the trade, the labor data started moving, the financing moved into the bond market, and your benchmark quietly became an AI fund. Twelve slides, two parts, one question throughout: what does this do to portfolios.</a:t>
             </a:r>
             <a:endParaRPr lang="en-US" dirty="0"/>
           </a:p>
@@ -1757,7 +1757,7 @@
           <a:p>
             <a:r>
               <a:rPr lang="en-US" dirty="0"/>
-              <a:t>The so-what slide. Nobody in this room would deliberately put 37% of an equity sleeve in ten correlated names sharing one earnings driver — but a benchmark allocation does precisely that ($37 of every $100). Four gauges, each paired with an action: demand (capex guidance + token budgets — the new same-store sales), financing (CDS and new-issue spreads, per slide 9), rates (long-duration cash flows + record supply), and concentration (equal-weight vs cap-weight as the orderly preview of the disorderly version). Honest caveat: equal-weight won 2026 but lost 2024–25 — the message is 'size the bet on purpose,' not 'sell megacaps.' Closing line is the deck's thesis in one sentence.</a:t>
+              <a:t>The so-what slide. Nobody in this room would deliberately put 37% of an equity sleeve in ten correlated names sharing one earnings driver — but a benchmark allocation does precisely that ($37 of every $100). Four gauges, each paired with an action: demand (capex guidance + token budgets — the new same-store sales), financing (CDS and new-issue spreads, per slide 9), rates (long-duration cash flows + record supply), and concentration (equal-weight vs cap-weight as the orderly preview of the disorderly version). Honest caveat: equal-weight won 2026 but lost 2024–25 — the message is 'size the bet on purpose,' not 'sell megacaps.' Closing line is the deck’s thesis in one sentence.</a:t>
             </a:r>
             <a:endParaRPr lang="en-US" dirty="0"/>
           </a:p>
@@ -1845,7 +1845,7 @@
           <a:p>
             <a:r>
               <a:rPr lang="en-US" dirty="0"/>
-              <a:t>The closer — the option value sitting behind the multiples, kept disciplined. Embodiment: agentic loops in a body, walking a shift. Orbit: it removes the exact power-and-cooling constraints behind token rationing (slide 4), and SpaceX is simultaneously the neocloud king and the launch monopolist — if orbital compute happens it's an extension of the most vertically integrated player in the stack. Wheels: every robotaxi mile is metered inference. Proteins: frontier models lead biology benchmarks; discovery becomes compute-bound. Every card is new compute demand — the Jevons curve extended a decade. Flagged speculative; gauges, not guidance.</a:t>
+              <a:t>The closer — the option value sitting behind the multiples, kept disciplined. Embodiment: agentic loops in a body, walking a shift. Orbit: it removes the exact power-and-cooling constraints behind token rationing (slide 4), and SpaceX is simultaneously the neocloud king and the launch monopolist — if orbital compute happens it’s an extension of the most vertically integrated player in the stack. Wheels: every robotaxi mile is metered inference. Proteins: frontier models lead biology benchmarks; discovery becomes compute-bound. Every card is new compute demand — the Jevons curve extended a decade. Flagged speculative; gauges, not guidance.</a:t>
             </a:r>
             <a:endParaRPr lang="en-US" dirty="0"/>
           </a:p>
@@ -2021,7 +2021,7 @@
           <a:p>
             <a:r>
               <a:rPr lang="en-US" dirty="0"/>
-              <a:t>The thesis slide — and why this isn't 2023's hype cycle: three independent systems shifting in the same direction at once. Capability: models became loop-running systems (slide 3). Economics: tokens went from subsidized to rationed (slide 4). Policy: when governments debate taking equity, the asset class changed category (slide 5). Each column carries one proof stat: $47B of run rate, $920M/month of rental, a 50% equity-tax proposal. The banner is the line to read aloud.</a:t>
+              <a:t>The thesis slide — and why this isn’t 2023’s hype cycle: three independent systems shifting in the same direction at once. Capability: models became loop-running systems (slide 3). Economics: tokens went from subsidized to rationed (slide 4). Policy: when governments debate taking equity, the asset class changed category (slide 5). Each column carries one proof stat: $47B of run rate, $920M/month of rental, a 50% equity-tax proposal. The banner is the line to read aloud.</a:t>
             </a:r>
             <a:endParaRPr lang="en-US" dirty="0"/>
           </a:p>
@@ -2109,7 +2109,7 @@
           <a:p>
             <a:r>
               <a:rPr lang="en-US" dirty="0"/>
-              <a:t>The core slide of part one. Left: the unit of work changed — from one-shot prompting to loops that try, fail, fix, and ship without a human in each cycle. Cherny's line is the cleanest articulation. Right: the Jevons paradox (coal, 1865) applied — as agents make software effectively free to produce, we don't write the same software cheaper, we write categorically more of it: PDF summaries become dashboards become disposable single-use apps become giant research projects. Investment translation: efficiency improvements do NOT cap compute demand — they expand it. That's the demand engine behind everything in part two.</a:t>
+              <a:t>The core slide of part one. Left: the unit of work changed — from one-shot prompting to loops that try, fail, fix, and ship without a human in each cycle. Cherny’s line is the cleanest articulation. Right: the Jevons paradox (coal, 1865) applied — as agents make software effectively free to produce, we don’t write the same software cheaper, we write categorically more of it: PDF summaries become dashboards become disposable single-use apps become giant research projects. Investment translation: efficiency improvements do NOT cap compute demand — they expand it. That’s the demand engine behind everything in part two.</a:t>
             </a:r>
             <a:endParaRPr lang="en-US" dirty="0"/>
           </a:p>
@@ -2197,7 +2197,7 @@
           <a:p>
             <a:r>
               <a:rPr lang="en-US" dirty="0"/>
-              <a:t>Three data points, one message: enterprises now treat tokens as a metered input with a budget line. Uber: $1,500/month per employee. Walmart: killed unlimited access for Code Puppy. The third card is the supply side — SK Hynix says the HBM shortage outlasts the decade even after doubling capacity, and Google's $920M/month rental is what scarcity costs when you don't own capacity. The READ box carries the investability point: token budgets are the new same-store sales.</a:t>
+              <a:t>Three data points, one message: enterprises now treat tokens as a metered input with a budget line. Uber: $1,500/month per employee. Walmart: killed unlimited access for Code Puppy. The third card is the supply side — SK Hynix sees no HBM relief before ~2030 even after doubling capacity, and Google’s $920M/month rental is what scarcity costs when you don’t own capacity. The READ box carries the investability point: token budgets are the new same-store sales.</a:t>
             </a:r>
             <a:endParaRPr lang="en-US" dirty="0"/>
           </a:p>
@@ -2373,7 +2373,7 @@
           <a:p>
             <a:r>
               <a:rPr lang="en-US" dirty="0"/>
-              <a:t>Part two opens with the equity scoreboard. SOXX +80% YTD (best run since 2000, ~$5.7T added in the April rally alone); equal-weight +14% beats cap-weight +11%; MAGS +6% lags; software −10%, priced for disruption. The market is no longer trading 'AI yes/no' — it's trading position in the chain. The right rail is the concentration story: 37% of the index in ten names (double the 25-year norm), Nvidia alone at 7%, and a forward multiple that's elevated but not extreme — provided the AI earnings stream keeps compounding.</a:t>
+              <a:t>Part two opens with the equity scoreboard. SOXX +80% YTD (best run since 2000, ~$5.7T added in the April rally alone); equal-weight +14% beats cap-weight +11%; MAGS +6% lags; software −10%, priced for disruption. The market is no longer trading 'AI yes/no' — it’s trading position in the chain. The right rail is the concentration story: 37% of the index in ten names (double the 25-year norm), Nvidia alone at 7%, and a forward multiple that’s elevated but not extreme — provided the AI earnings stream keeps compounding.</a:t>
             </a:r>
             <a:endParaRPr lang="en-US" dirty="0"/>
           </a:p>
@@ -2461,7 +2461,7 @@
           <a:p>
             <a:r>
               <a:rPr lang="en-US" dirty="0"/>
-              <a:t>The labor slide — new this version, with verified June 2026 data. Left: the structural story — a job stops being task execution and becomes orchestration of parallel agent loops; the 20–25% coordination figure is the pool agents are bought to recover. Right: the data — Challenger's May report made AI the #1 stated layoff reason for the first time (~40% of announced cuts, with the honest caveat that it's self-reported and partly scapegoating); the entry level is where it bites (grad unemployment 5.6% vs 4.2%, declining payrolls for the youngest AI-exposed cohort); and the advantage gap stratifies pay within surviving roles. Markets price labor twice: as a cost line agents deflate, and as the political trigger for slide 5's ownership debate.</a:t>
+              <a:t>The labor slide — new this version, with verified June 2026 data. Left: the structural story — a job stops being task execution and becomes orchestration of parallel agent loops; the 20–25% coordination figure is the pool agents are bought to recover. Right: the data — Challenger’s May report made AI the #1 stated layoff reason for the first time (~40% of announced cuts, with the honest caveat that it’s self-reported and partly scapegoating); the entry level is where it bites (grad unemployment 5.6% vs 4.2%, declining payrolls for the youngest AI-exposed cohort); and the advantage gap stratifies pay within surviving roles. Markets price labor twice: as a cost line agents deflate, and as the political trigger for slide 5’s ownership debate.</a:t>
             </a:r>
             <a:endParaRPr lang="en-US" dirty="0"/>
           </a:p>
@@ -2549,7 +2549,7 @@
           <a:p>
             <a:r>
               <a:rPr lang="en-US" dirty="0"/>
-              <a:t>Bonds, part one: the gap. Capex went from $410B to ~$705B guided (+72%) — and three of four raised guidance in the latest round. The cash math: ~94% of operating cash flow committed to capex, dividends, and buybacks; Big-4 FCF at a decade low; Amazon outright negative ($200B capex vs ~$140B operating cash flow); Alphabet's FCF down ~90% to ~$8B. For a decade the megacap social contract was self-funding plus buybacks. It broke in 2026 — and something had to fill the gap. Next slide.</a:t>
+              <a:t>Bonds, part one: the gap. Capex went from $410B to ~$705B guided (+72%) — and three of four raised guidance in the latest round. The cash math: ~94% of operating cash flow committed to capex, dividends, and buybacks; Big-4 FCF at a decade low; Amazon outright negative ($200B capex vs ~$140B operating cash flow); Alphabet’s FCF down ~90% to ~$8B. For a decade the megacap social contract was self-funding plus buybacks. It broke in 2026 — and something had to fill the gap. Next slide.</a:t>
             </a:r>
             <a:endParaRPr lang="en-US" dirty="0"/>
           </a:p>
@@ -2637,7 +2637,7 @@
           <a:p>
             <a:r>
               <a:rPr lang="en-US" dirty="0"/>
-              <a:t>Bonds, part two: the wave. Five mega-deals in nine months — Oracle $18B (Sep '25), Meta $30B (Oct '25, the largest non-M&amp;A IG deal on record), Alphabet $17.5B and Amazon $15B (Nov '25), Oracle again $25B across eight tranches (Feb '26). Street consensus: ~$300B of AI-linked IG supply in 2026. The signal layer: Oracle's 5-yr CDS above ~125bp despite light leverage — credit is already discriminating by funding capacity, not just rating. The READ box is the takeaway for equity holders: spreads reprice before earnings revisions. Balance sheets are still lightly levered vs IG norms — this is not 2008 telecom — but the funding model changed permanently.</a:t>
+              <a:t>Bonds, part two: the wave. Five mega-deals in six months — Oracle $18B (Sep ’25), Meta $30B (Oct ’25, the largest non-M&amp;A IG deal on record), Alphabet $17.5B and Amazon $15B (Nov ’25), Oracle again $25B across eight tranches (Feb ’26). Street consensus: ~$300B of AI-linked IG supply in 2026. The signal layer: Oracle’s 5-yr CDS above ~125bp despite light leverage — credit is already discriminating by funding capacity, not just rating. The READ box is the takeaway for equity holders: spreads reprice before earnings revisions. Balance sheets are still lightly levered vs IG norms — this is not 2008 telecom — but the funding model changed permanently.</a:t>
             </a:r>
             <a:endParaRPr lang="en-US" dirty="0"/>
           </a:p>
@@ -3141,7 +3141,7 @@
                 <a:ea typeface="Arial Black" pitchFamily="34" charset="-122"/>
                 <a:cs typeface="Arial Black" pitchFamily="34" charset="-120"/>
               </a:rPr>
-              <a:t>What's happening now — and how markets reprice.</a:t>
+              <a:t>What’s happening now — and how markets reprice.</a:t>
             </a:r>
             <a:endParaRPr lang="en-US" sz="2000" dirty="0"/>
           </a:p>
@@ -3180,7 +3180,7 @@
                 <a:ea typeface="Arial" pitchFamily="34" charset="-122"/>
                 <a:cs typeface="Arial" pitchFamily="34" charset="-120"/>
               </a:rPr>
-              <a:t>Agentic loops, token rationing, and Washington's entry — then the repricing: equities, labor, and a $300B bond wave.</a:t>
+              <a:t>Agentic loops, token rationing, and Washington’s entry — then the repricing: equities, labor, and a $300B bond wave.</a:t>
             </a:r>
             <a:endParaRPr lang="en-US" sz="1300" dirty="0"/>
           </a:p>
@@ -3868,7 +3868,7 @@
         <p:spPr>
           <a:xfrm>
             <a:off x="4297680" y="1481328"/>
-            <a:ext cx="4434840" cy="256032"/>
+            <a:ext cx="4389120" cy="256032"/>
           </a:xfrm>
           <a:prstGeom prst="rect">
             <a:avLst/>
@@ -3907,7 +3907,7 @@
         <p:spPr>
           <a:xfrm>
             <a:off x="4297680" y="1783080"/>
-            <a:ext cx="4434840" cy="0"/>
+            <a:ext cx="4389120" cy="0"/>
           </a:xfrm>
           <a:prstGeom prst="line">
             <a:avLst/>
@@ -3950,7 +3950,7 @@
         <p:spPr>
           <a:xfrm>
             <a:off x="4453128" y="1847088"/>
-            <a:ext cx="4251960" cy="548640"/>
+            <a:ext cx="4233672" cy="548640"/>
           </a:xfrm>
           <a:prstGeom prst="rect">
             <a:avLst/>
@@ -4040,7 +4040,7 @@
         <p:spPr>
           <a:xfrm>
             <a:off x="4453128" y="2414016"/>
-            <a:ext cx="4251960" cy="548640"/>
+            <a:ext cx="4233672" cy="548640"/>
           </a:xfrm>
           <a:prstGeom prst="rect">
             <a:avLst/>
@@ -4130,7 +4130,7 @@
         <p:spPr>
           <a:xfrm>
             <a:off x="4453128" y="2980944"/>
-            <a:ext cx="4251960" cy="548640"/>
+            <a:ext cx="4233672" cy="548640"/>
           </a:xfrm>
           <a:prstGeom prst="rect">
             <a:avLst/>
@@ -4220,7 +4220,7 @@
         <p:spPr>
           <a:xfrm>
             <a:off x="4453128" y="3547872"/>
-            <a:ext cx="4251960" cy="548640"/>
+            <a:ext cx="4233672" cy="548640"/>
           </a:xfrm>
           <a:prstGeom prst="rect">
             <a:avLst/>
@@ -4328,7 +4328,7 @@
                 <a:ea typeface="Arial" pitchFamily="34" charset="-122"/>
                 <a:cs typeface="Arial" pitchFamily="34" charset="-120"/>
               </a:rPr>
-              <a:t>you don't need a view on AGI — you need to know what your portfolio already believes.</a:t>
+              <a:t>you don’t need a view on AGI — you need to know what your portfolio already believes.</a:t>
             </a:r>
             <a:endParaRPr lang="en-US" sz="1050" dirty="0"/>
           </a:p>
@@ -4555,7 +4555,7 @@
         <p:spPr>
           <a:xfrm>
             <a:off x="841248" y="155448"/>
-            <a:ext cx="5943600" cy="274320"/>
+            <a:ext cx="3931920" cy="274320"/>
           </a:xfrm>
           <a:prstGeom prst="rect">
             <a:avLst/>
@@ -4820,7 +4820,7 @@
       </p:sp>
       <p:pic>
         <p:nvPicPr>
-          <p:cNvPr id="11" name="Image 1" descr="slides-images/web/orbital.jpg">    </p:cNvPr>
+          <p:cNvPr id="11" name="Image 1" descr="slides-images/web/robotaxi.jpg">    </p:cNvPr>
           <p:cNvPicPr>
             <a:picLocks noChangeAspect="1"/>
           </p:cNvPicPr>
@@ -4914,7 +4914,7 @@
                 <a:ea typeface="Arial" pitchFamily="34" charset="-122"/>
                 <a:cs typeface="Arial" pitchFamily="34" charset="-120"/>
               </a:rPr>
-              <a:t>Orbit.  </a:t>
+              <a:t>Wheels.  </a:t>
             </a:r>
             <a:pPr indent="0" marL="0">
               <a:buNone/>
@@ -4928,7 +4928,7 @@
                 <a:ea typeface="Arial" pitchFamily="34" charset="-122"/>
                 <a:cs typeface="Arial" pitchFamily="34" charset="-120"/>
               </a:rPr>
-              <a:t>24/7 solar and radiative cooling escape the grid constraint behind token rationing. SpaceX owns the rockets and 550k-GPU clusters.</a:t>
+              <a:t>Robotaxis are inference on wheels — per-mile token economics and a city-scale demand pool for compute.</a:t>
             </a:r>
             <a:endParaRPr lang="en-US" sz="950" dirty="0"/>
           </a:p>
@@ -4936,7 +4936,7 @@
       </p:sp>
       <p:pic>
         <p:nvPicPr>
-          <p:cNvPr id="15" name="Image 2" descr="slides-images/web/robotaxi.jpg">    </p:cNvPr>
+          <p:cNvPr id="15" name="Image 2" descr="slides-images/web/orbital.jpg">    </p:cNvPr>
           <p:cNvPicPr>
             <a:picLocks noChangeAspect="1"/>
           </p:cNvPicPr>
@@ -5030,7 +5030,7 @@
                 <a:ea typeface="Arial" pitchFamily="34" charset="-122"/>
                 <a:cs typeface="Arial" pitchFamily="34" charset="-120"/>
               </a:rPr>
-              <a:t>Wheels.  </a:t>
+              <a:t>Orbit.  </a:t>
             </a:r>
             <a:pPr indent="0" marL="0">
               <a:buNone/>
@@ -5044,7 +5044,7 @@
                 <a:ea typeface="Arial" pitchFamily="34" charset="-122"/>
                 <a:cs typeface="Arial" pitchFamily="34" charset="-120"/>
               </a:rPr>
-              <a:t>Robotaxis are inference on wheels — per-mile token economics and a city-scale demand pool for compute.</a:t>
+              <a:t>24/7 solar and radiative cooling escape the grid constraint behind token rationing. SpaceX owns the rockets and 550k-GPU clusters.</a:t>
             </a:r>
             <a:endParaRPr lang="en-US" sz="950" dirty="0"/>
           </a:p>
@@ -5542,7 +5542,7 @@
                 <a:ea typeface="Arial" pitchFamily="34" charset="-122"/>
                 <a:cs typeface="Arial" pitchFamily="34" charset="-120"/>
               </a:rPr>
-              <a:t>Returns are total returns YTD through the most recent available close (Jun 5–9, 2026, unless noted). Index and market-cap figures as of early June 2026.</a:t>
+              <a:t>All return figures are YTD total returns through the most recent available close (Jun 5–9, 2026, unless noted). Index and market-cap figures as of early June 2026.</a:t>
             </a:r>
             <a:endParaRPr lang="en-US" sz="850" dirty="0"/>
           </a:p>
@@ -5809,7 +5809,7 @@
                 <a:ea typeface="Arial" pitchFamily="34" charset="-122"/>
                 <a:cs typeface="Arial" pitchFamily="34" charset="-120"/>
               </a:rPr>
-              <a:t>Capex guidance: company reports via CNBC (Feb 6, 2026); Tom's Hardware; Statista (midpoints)</a:t>
+              <a:t>Capex guidance: company reports via CNBC (Feb 6, 2026); Tom’s Hardware; Statista (midpoints)</a:t>
             </a:r>
             <a:endParaRPr lang="en-US" sz="720" dirty="0"/>
           </a:p>
@@ -6181,7 +6181,7 @@
                 <a:ea typeface="Arial" pitchFamily="34" charset="-122"/>
                 <a:cs typeface="Arial" pitchFamily="34" charset="-120"/>
               </a:rPr>
-              <a:t>Compute: SK Hynix HBM outlook; SpaceX Colossus; Google GPU rental; run rates via Leona's Capital</a:t>
+              <a:t>Compute: SK Hynix HBM outlook; SpaceX Colossus; Google GPU rental; run rates via Leona’s Capital</a:t>
             </a:r>
             <a:endParaRPr lang="en-US" sz="720" dirty="0"/>
           </a:p>
@@ -6472,7 +6472,7 @@
                 <a:ea typeface="Arial" pitchFamily="34" charset="-122"/>
                 <a:cs typeface="Arial" pitchFamily="34" charset="-120"/>
               </a:rPr>
-              <a:t>Capability, economics, and policy are moving at once. First what's changing (slides 3–5) — then how markets are repricing it (slides 6–11).</a:t>
+              <a:t>Capability, economics, and policy are moving at once. First what’s changing (slides 3–5) — then how markets are repricing it (slides 6–11).</a:t>
             </a:r>
             <a:endParaRPr lang="en-US" sz="1250" dirty="0"/>
           </a:p>
@@ -7340,7 +7340,7 @@
                 <a:ea typeface="Arial" pitchFamily="34" charset="-122"/>
                 <a:cs typeface="Arial" pitchFamily="34" charset="-120"/>
               </a:rPr>
-              <a:t>The chatbot's economics are exhausted. The stack is reorganizing around token-burning agentic loops — and markets are repricing around it.</a:t>
+              <a:t>The chatbot’s economics are exhausted. The stack is reorganizing around token-burning agentic loops — and markets are repricing around it.</a:t>
             </a:r>
             <a:endParaRPr lang="en-US" sz="1100" dirty="0"/>
           </a:p>
@@ -7552,7 +7552,7 @@
                 <a:ea typeface="Arial" pitchFamily="34" charset="-122"/>
                 <a:cs typeface="Arial" pitchFamily="34" charset="-120"/>
               </a:rPr>
-              <a:t>01  ·  WHAT'S HAPPENING  —  AGENTIC LOOPS</a:t>
+              <a:t>01  ·  WHAT’S HAPPENING  —  AGENTIC LOOPS</a:t>
             </a:r>
             <a:endParaRPr lang="en-US" sz="900" dirty="0"/>
           </a:p>
@@ -9039,7 +9039,7 @@
                 <a:ea typeface="Arial" pitchFamily="34" charset="-122"/>
                 <a:cs typeface="Arial" pitchFamily="34" charset="-120"/>
               </a:rPr>
-              <a:t>01  ·  WHAT'S HAPPENING  —  TOKEN RATIONING</a:t>
+              <a:t>01  ·  WHAT’S HAPPENING  —  TOKEN RATIONING</a:t>
             </a:r>
             <a:endParaRPr lang="en-US" sz="900" dirty="0"/>
           </a:p>
@@ -9527,8 +9527,8 @@
         </p:nvSpPr>
         <p:spPr>
           <a:xfrm>
-            <a:off x="6035040" y="1517904"/>
-            <a:ext cx="2651760" cy="1280160"/>
+            <a:off x="6080760" y="1517904"/>
+            <a:ext cx="2606040" cy="1280160"/>
           </a:xfrm>
           <a:prstGeom prst="rect">
             <a:avLst/>
@@ -9552,7 +9552,7 @@
         </p:nvSpPr>
         <p:spPr>
           <a:xfrm>
-            <a:off x="6035040" y="1517904"/>
+            <a:off x="6080760" y="1517904"/>
             <a:ext cx="274320" cy="32004"/>
           </a:xfrm>
           <a:prstGeom prst="rect">
@@ -9572,7 +9572,7 @@
         </p:nvSpPr>
         <p:spPr>
           <a:xfrm>
-            <a:off x="6035040" y="1517904"/>
+            <a:off x="6080760" y="1517904"/>
             <a:ext cx="32004" cy="274320"/>
           </a:xfrm>
           <a:prstGeom prst="rect">
@@ -9632,7 +9632,7 @@
         </p:nvSpPr>
         <p:spPr>
           <a:xfrm>
-            <a:off x="7040880" y="1719072"/>
+            <a:off x="7063740" y="1719072"/>
             <a:ext cx="640080" cy="347472"/>
           </a:xfrm>
           <a:prstGeom prst="triangle">
@@ -9654,7 +9654,7 @@
         </p:nvSpPr>
         <p:spPr>
           <a:xfrm>
-            <a:off x="7488936" y="1591056"/>
+            <a:off x="7511796" y="1591056"/>
             <a:ext cx="146304" cy="146304"/>
           </a:xfrm>
           <a:prstGeom prst="ellipse">
@@ -9676,8 +9676,8 @@
         </p:nvSpPr>
         <p:spPr>
           <a:xfrm>
-            <a:off x="6126480" y="2176272"/>
-            <a:ext cx="2468880" cy="219456"/>
+            <a:off x="6172200" y="2176272"/>
+            <a:ext cx="2423160" cy="219456"/>
           </a:xfrm>
           <a:prstGeom prst="rect">
             <a:avLst/>
@@ -9715,8 +9715,8 @@
         </p:nvSpPr>
         <p:spPr>
           <a:xfrm>
-            <a:off x="6217920" y="2432304"/>
-            <a:ext cx="2286000" cy="594360"/>
+            <a:off x="6263640" y="2432304"/>
+            <a:ext cx="2240280" cy="594360"/>
           </a:xfrm>
           <a:prstGeom prst="rect">
             <a:avLst/>
@@ -9754,8 +9754,8 @@
         </p:nvSpPr>
         <p:spPr>
           <a:xfrm>
-            <a:off x="6035040" y="2889504"/>
-            <a:ext cx="2651760" cy="1243584"/>
+            <a:off x="6080760" y="2889504"/>
+            <a:ext cx="2606040" cy="1243584"/>
           </a:xfrm>
           <a:prstGeom prst="rect">
             <a:avLst/>
@@ -9779,8 +9779,8 @@
         </p:nvSpPr>
         <p:spPr>
           <a:xfrm>
-            <a:off x="6172200" y="2980944"/>
-            <a:ext cx="2377440" cy="228600"/>
+            <a:off x="6217920" y="2980944"/>
+            <a:ext cx="2331720" cy="228600"/>
           </a:xfrm>
           <a:prstGeom prst="rect">
             <a:avLst/>
@@ -9818,8 +9818,8 @@
         </p:nvSpPr>
         <p:spPr>
           <a:xfrm>
-            <a:off x="6172200" y="3255264"/>
-            <a:ext cx="2377440" cy="786384"/>
+            <a:off x="6217920" y="3255264"/>
+            <a:ext cx="2331720" cy="786384"/>
           </a:xfrm>
           <a:prstGeom prst="rect">
             <a:avLst/>
@@ -10117,7 +10117,7 @@
                 <a:ea typeface="Arial" pitchFamily="34" charset="-122"/>
                 <a:cs typeface="Arial" pitchFamily="34" charset="-120"/>
               </a:rPr>
-              <a:t>01  ·  WHAT'S HAPPENING  —  THE STATE</a:t>
+              <a:t>01  ·  WHAT’S HAPPENING  —  POLICY</a:t>
             </a:r>
             <a:endParaRPr lang="en-US" sz="900" dirty="0"/>
           </a:p>
@@ -10156,7 +10156,7 @@
                 <a:ea typeface="Arial Black" pitchFamily="34" charset="-122"/>
                 <a:cs typeface="Arial Black" pitchFamily="34" charset="-120"/>
               </a:rPr>
-              <a:t>Washington enters the trade</a:t>
+              <a:t>Washington wants a stake</a:t>
             </a:r>
             <a:endParaRPr lang="en-US" sz="2600" dirty="0"/>
           </a:p>
@@ -10327,7 +10327,7 @@
                 <a:ea typeface="Arial" pitchFamily="34" charset="-122"/>
                 <a:cs typeface="Arial" pitchFamily="34" charset="-120"/>
               </a:rPr>
-              <a:t>Voluntary but high-pressure NSA review before releasing models with a “meaningful step change” in cyber capability (down from 90 days). Mandatory licensing expressly forbidden — for now.</a:t>
+              <a:t>Voluntary but high-pressure NSA review — 30 days, down from 90 — before releasing models with a “meaningful step change” in cyber capability. Mandatory licensing expressly forbidden — for now.</a:t>
             </a:r>
             <a:endParaRPr lang="en-US" sz="1050" dirty="0"/>
           </a:p>
@@ -10459,7 +10459,7 @@
                 <a:ea typeface="Arial" pitchFamily="34" charset="-122"/>
                 <a:cs typeface="Arial" pitchFamily="34" charset="-120"/>
               </a:rPr>
-              <a:t>Sanders' proposal, echoed by Trump as “a concept of a plan”: a one-time 50% tax on AI-lab equity (not profits) seeds a public fund paying “AI Dividends” to citizens.</a:t>
+              <a:t>Sanders’ proposal, echoed by Trump as “a concept of a plan”: a one-time 50% tax on AI-lab equity (not profits) seeds a public fund paying “AI Dividends” to citizens.</a:t>
             </a:r>
             <a:endParaRPr lang="en-US" sz="1050" dirty="0"/>
           </a:p>
@@ -10605,8 +10605,8 @@
         </p:nvSpPr>
         <p:spPr>
           <a:xfrm>
-            <a:off x="6172200" y="1463040"/>
-            <a:ext cx="2514600" cy="2377440"/>
+            <a:off x="6080760" y="1463040"/>
+            <a:ext cx="2606040" cy="2377440"/>
           </a:xfrm>
           <a:prstGeom prst="rect">
             <a:avLst/>
@@ -10630,7 +10630,7 @@
         </p:nvSpPr>
         <p:spPr>
           <a:xfrm>
-            <a:off x="6172200" y="1463040"/>
+            <a:off x="6080760" y="1463040"/>
             <a:ext cx="274320" cy="32004"/>
           </a:xfrm>
           <a:prstGeom prst="rect">
@@ -10650,7 +10650,7 @@
         </p:nvSpPr>
         <p:spPr>
           <a:xfrm>
-            <a:off x="6172200" y="1463040"/>
+            <a:off x="6080760" y="1463040"/>
             <a:ext cx="32004" cy="274320"/>
           </a:xfrm>
           <a:prstGeom prst="rect">
@@ -10710,7 +10710,7 @@
         </p:nvSpPr>
         <p:spPr>
           <a:xfrm>
-            <a:off x="7109460" y="2212848"/>
+            <a:off x="7063740" y="2212848"/>
             <a:ext cx="640080" cy="347472"/>
           </a:xfrm>
           <a:prstGeom prst="triangle">
@@ -10732,7 +10732,7 @@
         </p:nvSpPr>
         <p:spPr>
           <a:xfrm>
-            <a:off x="7557516" y="2084832"/>
+            <a:off x="7511796" y="2084832"/>
             <a:ext cx="146304" cy="146304"/>
           </a:xfrm>
           <a:prstGeom prst="ellipse">
@@ -10754,8 +10754,8 @@
         </p:nvSpPr>
         <p:spPr>
           <a:xfrm>
-            <a:off x="6263640" y="2670048"/>
-            <a:ext cx="2331720" cy="219456"/>
+            <a:off x="6172200" y="2670048"/>
+            <a:ext cx="2423160" cy="219456"/>
           </a:xfrm>
           <a:prstGeom prst="rect">
             <a:avLst/>
@@ -10793,8 +10793,8 @@
         </p:nvSpPr>
         <p:spPr>
           <a:xfrm>
-            <a:off x="6355080" y="2926080"/>
-            <a:ext cx="2148840" cy="594360"/>
+            <a:off x="6263640" y="2926080"/>
+            <a:ext cx="2240280" cy="594360"/>
           </a:xfrm>
           <a:prstGeom prst="rect">
             <a:avLst/>
@@ -10832,8 +10832,8 @@
         </p:nvSpPr>
         <p:spPr>
           <a:xfrm>
-            <a:off x="457200" y="4023360"/>
-            <a:ext cx="8229600" cy="274320"/>
+            <a:off x="457200" y="3931920"/>
+            <a:ext cx="8229600" cy="347472"/>
           </a:xfrm>
           <a:prstGeom prst="rect">
             <a:avLst/>
@@ -10871,7 +10871,7 @@
                 <a:ea typeface="Arial" pitchFamily="34" charset="-122"/>
                 <a:cs typeface="Arial" pitchFamily="34" charset="-120"/>
               </a:rPr>
-              <a:t>the 2026 debate is no longer whether AI is regulated — it's whether the means of AI production are publicly owned. That's a dilution tail risk no equity model carries.</a:t>
+              <a:t>the 2026 debate is no longer whether AI is regulated — it’s whether the means of AI production are publicly owned. That’s a dilution tail risk no equity model carries.</a:t>
             </a:r>
             <a:endParaRPr lang="en-US" sz="1000" dirty="0"/>
           </a:p>
@@ -11200,7 +11200,7 @@
                 <a:ea typeface="Arial" pitchFamily="34" charset="-122"/>
                 <a:cs typeface="Arial" pitchFamily="34" charset="-120"/>
               </a:rPr>
-              <a:t>Semis +80%, software −10% — a 90-point spread inside one theme, while ten stocks hold ~37% of the index.</a:t>
+              <a:t>Semis +80%, software −10% — a ~90-point spread inside one theme, while ten stocks hold ~37% of the index.</a:t>
             </a:r>
             <a:endParaRPr lang="en-US" sz="1250" dirty="0"/>
           </a:p>
@@ -12034,7 +12034,7 @@
                 <a:ea typeface="Arial" pitchFamily="34" charset="-122"/>
                 <a:cs typeface="Arial" pitchFamily="34" charset="-120"/>
               </a:rPr>
-              <a:t>of the work week goes to coordination and retrieval (OpenAI's “strange abundance”) — the labor pool agents are bought to recover.</a:t>
+              <a:t>of the work week goes to coordination and retrieval (OpenAI’s “strange abundance”) — the labor pool agents are bought to recover.</a:t>
             </a:r>
             <a:endParaRPr lang="en-US" sz="750" dirty="0"/>
           </a:p>
@@ -12695,7 +12695,7 @@
                 <a:ea typeface="Arial" pitchFamily="34" charset="-122"/>
                 <a:cs typeface="Arial" pitchFamily="34" charset="-120"/>
               </a:rPr>
-              <a:t>Challenger: AI was cited in ~40% of May's announced US job cuts (38.6k of 97k) — the first month it beat “market conditions.” 87.7k AI-attributed cuts YTD vs 54.8k in all of 2025. (Self-reported; some firms may be scapegoating AI.)</a:t>
+              <a:t>Challenger: AI was cited in ~40% of May’s announced US job cuts (38.6k of 97k) — the first month it beat “market conditions.” 87.7k AI-attributed cuts YTD vs 54.8k in all of 2025. (Self-reported; some firms may be scapegoating AI.)</a:t>
             </a:r>
             <a:endParaRPr lang="en-US" sz="950" dirty="0"/>
           </a:p>
@@ -12841,7 +12841,7 @@
                 <a:ea typeface="Arial" pitchFamily="34" charset="-122"/>
                 <a:cs typeface="Arial" pitchFamily="34" charset="-120"/>
               </a:rPr>
-              <a:t>Power users running parallel loops compound their advantage over casual users; comp follows loop design, not task execution. And displacement fear is the political fuel behind slide 5's equity-tax debate.</a:t>
+              <a:t>Power users running parallel loops compound their advantage over casual users; comp follows loop design, not task execution. And displacement fear is the political fuel behind slide 5’s equity-tax debate.</a:t>
             </a:r>
             <a:endParaRPr lang="en-US" sz="950" dirty="0"/>
           </a:p>
@@ -12880,7 +12880,7 @@
                 <a:ea typeface="Arial" pitchFamily="34" charset="-122"/>
                 <a:cs typeface="Arial" pitchFamily="34" charset="-120"/>
               </a:rPr>
-              <a:t>Source: Challenger, Gray &amp; Christmas via CNBC (Jun 5, 2026) &amp; CBS News; NY Fed recent-grad series via CNBC; orchestration framing: Internal strategic review, “The 2026 AI Frontier” (Jun 2026).</a:t>
+              <a:t>Source: Challenger, Gray &amp; Christmas via CNBC (Jun 5, 2026) &amp; CBS News; NY Fed via CNBC; entry-level payrolls: academic working papers; framing: internal strategic review (Jun 2026).</a:t>
             </a:r>
             <a:endParaRPr lang="en-US" sz="700" dirty="0"/>
           </a:p>
@@ -13170,7 +13170,7 @@
                 <a:ea typeface="Arial" pitchFamily="34" charset="-122"/>
                 <a:cs typeface="Arial" pitchFamily="34" charset="-120"/>
               </a:rPr>
-              <a:t>The buildout was self-funded until it wasn't. ~$705B of guided 2026 capex consumes the cash machine — and opens a funding gap.</a:t>
+              <a:t>The buildout was self-funded until it wasn’t. ~$705B of guided 2026 capex consumes the cash machine — and opens a funding gap.</a:t>
             </a:r>
             <a:endParaRPr lang="en-US" sz="1250" dirty="0"/>
           </a:p>
@@ -13287,7 +13287,7 @@
                 <a:ea typeface="Arial" pitchFamily="34" charset="-122"/>
                 <a:cs typeface="Arial" pitchFamily="34" charset="-120"/>
               </a:rPr>
-              <a:t>+72% year over year — guided in public, raised into record spend</a:t>
+              <a:t>+72% YoY — raised into record spend</a:t>
             </a:r>
             <a:endParaRPr lang="en-US" sz="800" dirty="0"/>
           </a:p>
@@ -13782,7 +13782,7 @@
                 <a:ea typeface="Arial" pitchFamily="34" charset="-122"/>
                 <a:cs typeface="Arial" pitchFamily="34" charset="-120"/>
               </a:rPr>
-              <a:t>Alphabet drops −90%.</a:t>
+              <a:t>Alphabet FCF −90%.</a:t>
             </a:r>
             <a:endParaRPr lang="en-US" sz="1100" dirty="0"/>
           </a:p>
@@ -13835,8 +13835,8 @@
         </p:nvSpPr>
         <p:spPr>
           <a:xfrm>
-            <a:off x="3749040" y="4041648"/>
-            <a:ext cx="4937760" cy="237744"/>
+            <a:off x="3749040" y="3986784"/>
+            <a:ext cx="4937760" cy="292608"/>
           </a:xfrm>
           <a:prstGeom prst="rect">
             <a:avLst/>
@@ -13913,7 +13913,7 @@
                 <a:ea typeface="Arial" pitchFamily="34" charset="-122"/>
                 <a:cs typeface="Arial" pitchFamily="34" charset="-120"/>
               </a:rPr>
-              <a:t>Source: BofA via Breckinridge; CNBC (Feb 6, 2026); techtimes/beincrypto FCF estimates; capex guidance via CNBC, Tom's Hardware, Statista (midpoints).</a:t>
+              <a:t>Source: BofA via Breckinridge; CNBC (Feb 6, 2026); techtimes/beincrypto FCF estimates; capex guidance via CNBC, Tom’s Hardware, Statista (midpoints).</a:t>
             </a:r>
             <a:endParaRPr lang="en-US" sz="700" dirty="0"/>
           </a:p>
@@ -14203,7 +14203,7 @@
                 <a:ea typeface="Arial" pitchFamily="34" charset="-122"/>
                 <a:cs typeface="Arial" pitchFamily="34" charset="-120"/>
               </a:rPr>
-              <a:t>$105B+ of investment-grade mega-deals in nine months — record prints, a live CDS signal, and ~$300B more expected in 2026.</a:t>
+              <a:t>$105B+ of investment-grade mega-deals in six months — record prints, a live CDS signal, and ~$300B of supply expected for full-year 2026.</a:t>
             </a:r>
             <a:endParaRPr lang="en-US" sz="1250" dirty="0"/>
           </a:p>
@@ -14403,7 +14403,7 @@
                 <a:ea typeface="Arial" pitchFamily="34" charset="-122"/>
                 <a:cs typeface="Arial" pitchFamily="34" charset="-120"/>
               </a:rPr>
-              <a:t>Sep '25</a:t>
+              <a:t>Sep ’25</a:t>
             </a:r>
             <a:endParaRPr lang="en-US" sz="800" dirty="0"/>
           </a:p>
@@ -14535,7 +14535,7 @@
                 <a:ea typeface="Arial" pitchFamily="34" charset="-122"/>
                 <a:cs typeface="Arial" pitchFamily="34" charset="-120"/>
               </a:rPr>
-              <a:t>Oct '25</a:t>
+              <a:t>Oct ’25</a:t>
             </a:r>
             <a:endParaRPr lang="en-US" sz="800" dirty="0"/>
           </a:p>
@@ -14650,7 +14650,7 @@
                 <a:ea typeface="Arial" pitchFamily="34" charset="-122"/>
                 <a:cs typeface="Arial" pitchFamily="34" charset="-120"/>
               </a:rPr>
-              <a:t>Nov '25</a:t>
+              <a:t>Nov ’25</a:t>
             </a:r>
             <a:endParaRPr lang="en-US" sz="800" dirty="0"/>
           </a:p>
@@ -14765,7 +14765,7 @@
                 <a:ea typeface="Arial" pitchFamily="34" charset="-122"/>
                 <a:cs typeface="Arial" pitchFamily="34" charset="-120"/>
               </a:rPr>
-              <a:t>Nov '25</a:t>
+              <a:t>Nov ’25</a:t>
             </a:r>
             <a:endParaRPr lang="en-US" sz="800" dirty="0"/>
           </a:p>
@@ -14897,7 +14897,7 @@
                 <a:ea typeface="Arial" pitchFamily="34" charset="-122"/>
                 <a:cs typeface="Arial" pitchFamily="34" charset="-120"/>
               </a:rPr>
-              <a:t>Feb '26</a:t>
+              <a:t>Feb ’26</a:t>
             </a:r>
             <a:endParaRPr lang="en-US" sz="800" dirty="0"/>
           </a:p>
@@ -14976,7 +14976,7 @@
                 <a:ea typeface="Arial" pitchFamily="34" charset="-122"/>
                 <a:cs typeface="Arial" pitchFamily="34" charset="-120"/>
               </a:rPr>
-              <a:t>$105B+ in nine months. </a:t>
+              <a:t>$105B+ in six months. </a:t>
             </a:r>
             <a:pPr indent="0" marL="0">
               <a:buNone/>

--- a/ai-markets-deck.pptx
+++ b/ai-markets-deck.pptx
@@ -1201,13 +1201,13 @@
               <c:strCache>
                 <c:ptCount val="3"/>
                 <c:pt idx="0">
-                  <c:v>Top 3 — $18</c:v>
+                  <c:v>Top 3: $18</c:v>
                 </c:pt>
                 <c:pt idx="1">
-                  <c:v>Rest of top 10 — $19</c:v>
+                  <c:v>Rest of top 10: $19</c:v>
                 </c:pt>
                 <c:pt idx="2">
-                  <c:v>Other 490 — $63</c:v>
+                  <c:v>Other 490: $63</c:v>
                 </c:pt>
               </c:strCache>
             </c:strRef>
@@ -1670,7 +1670,7 @@
           <a:p>
             <a:r>
               <a:rPr lang="en-US" dirty="0"/>
-              <a:t>The deck in one breath: part one is what’s happening right now — models became loop-running agents, tokens became a rationed input, and Washington moved from regulating AI to debating who owns it. Part two is how markets reprice all of it: equities split the trade, the labor data started moving, the financing moved into the bond market, and your benchmark quietly became an AI fund. Twelve slides, two parts, one question throughout: what does this do to portfolios.</a:t>
+              <a:t>The deck in one breath: part one is what’s happening right now: models became loop-running agents, tokens became a rationed input, and governments moved from regulating AI to debating who owns it. Part two is how markets reprice all of it: equities split the trade, the labor data started moving, the financing moved into the bond market, and your benchmark quietly became an AI fund. Thirteen slides, two parts, one question throughout: what does this do to portfolios.</a:t>
             </a:r>
             <a:endParaRPr lang="en-US" dirty="0"/>
           </a:p>
@@ -1758,7 +1758,7 @@
           <a:p>
             <a:r>
               <a:rPr lang="en-US" dirty="0"/>
-              <a:t>Bonds, part two: the wave. Five mega-deals in six months — Oracle $18B (Sep ’25), Meta $30B (Oct ’25, the largest non-M&amp;A IG deal on record), Alphabet $17.5B and Amazon $15B (Nov ’25), Oracle again $25B across eight tranches (Feb ’26). Street consensus: ~$300B of AI-linked IG supply in 2026. The signal layer: Oracle’s 5-yr CDS above ~125bp despite light leverage — credit is already discriminating by funding capacity, not just rating. The READ box is the takeaway for equity holders: spreads reprice before earnings revisions. Balance sheets are still lightly levered vs IG norms — this is not 2008 telecom — but the funding model changed permanently.</a:t>
+              <a:t>Bonds, part two: the wave. Five mega-deals in six months: Oracle $18B (Sep ’25), Meta $30B (Oct ’25, the largest non-M&amp;A IG deal on record), Alphabet $17.5B and Amazon $15B (Nov ’25), Oracle again $25B across eight tranches (Feb ’26). Street consensus: ~$300B of AI-linked IG supply in 2026. The signal layer: Oracle’s 5-yr CDS above ~125bp despite light leverage; credit is already discriminating by funding capacity, not just rating. The READ box is the takeaway for equity holders: spreads reprice before earnings revisions. Balance sheets are still lightly levered vs IG norms (this is not 2008 telecom), but the funding model changed permanently.</a:t>
             </a:r>
             <a:endParaRPr lang="en-US" dirty="0"/>
           </a:p>
@@ -1846,7 +1846,7 @@
           <a:p>
             <a:r>
               <a:rPr lang="en-US" dirty="0"/>
-              <a:t>The so-what slide. Nobody in this room would deliberately put 37% of an equity sleeve in ten correlated names sharing one earnings driver — but a benchmark allocation does precisely that ($37 of every $100). Four gauges, each paired with an action: demand (capex guidance + token budgets — the new same-store sales), financing (CDS and new-issue spreads, per slide 10), rates (long-duration cash flows + record supply), and concentration (equal-weight vs cap-weight as the orderly preview of the disorderly version). Honest caveat: equal-weight won 2026 but lost 2024–25 — the message is 'size the bet on purpose,' not 'sell megacaps.' Closing line is the deck’s thesis in one sentence.</a:t>
+              <a:t>The so-what slide. Nobody in this room would deliberately put 37% of an equity sleeve in ten correlated names sharing one earnings driver, but a benchmark allocation does precisely that ($37 of every $100). Four gauges, each paired with an action: demand (capex guidance + token budgets: the new same-store sales), financing (CDS and new-issue spreads, per slide 10), rates (long-duration cash flows + record supply), and concentration (equal-weight vs cap-weight as the orderly preview of the disorderly version). Honest caveat: equal-weight won 2026 but lost 2024–25; the message is 'size the bet on purpose,' not 'sell megacaps.' Closing line is the deck’s thesis in one sentence.</a:t>
             </a:r>
             <a:endParaRPr lang="en-US" dirty="0"/>
           </a:p>
@@ -1934,7 +1934,7 @@
           <a:p>
             <a:r>
               <a:rPr lang="en-US" dirty="0"/>
-              <a:t>The closer — the option value sitting behind the multiples, kept disciplined. Embodiment: agentic loops in a body, walking a shift. Orbit: it removes the exact power-and-cooling constraints behind token rationing (slide 5), and SpaceX is simultaneously the neocloud king and the launch monopolist — if orbital compute happens it’s an extension of the most vertically integrated player in the stack. Wheels: every robotaxi mile is metered inference. Proteins: frontier models lead biology benchmarks; discovery becomes compute-bound. Every card is new compute demand — the Jevons curve extended a decade. Flagged speculative; gauges, not guidance.</a:t>
+              <a:t>The closer: the option value sitting behind the multiples, kept disciplined. Embodiment: agentic loops in a body, walking a shift. Orbit: it removes the exact power-and-cooling constraints behind token rationing (slide 5), and SpaceX is simultaneously the neocloud king and the launch monopolist; if orbital compute happens it’s an extension of the most vertically integrated player in the stack. Wheels: every robotaxi mile is metered inference. Proteins: frontier models lead biology benchmarks; discovery becomes compute-bound. Every card is new compute demand: the Jevons curve extended a decade. Flagged speculative; gauges, not guidance.</a:t>
             </a:r>
             <a:endParaRPr lang="en-US" dirty="0"/>
           </a:p>
@@ -2022,7 +2022,7 @@
           <a:p>
             <a:r>
               <a:rPr lang="en-US" dirty="0"/>
-              <a:t>Back matter. Canonical stamp: data as of June 2026; returns through Jun 5–9 closes. New LABOR &amp; POLICY column covers the web-verified Challenger and NY Fed figures. Honesty notes: the Jevons curve is illustrative; AI layoff attributions are self-reported and may overstate causation; frontier items are speculative; the three image placeholders (cover, token meter, capitol) are pending final art and labeled as such on-slide.</a:t>
+              <a:t>Back matter. Canonical stamp: data as of June 2026; returns through Jun 5–9 closes. New LABOR &amp; POLICY column covers the web-verified Challenger and NY Fed figures. Honesty notes: the Jevons curve is illustrative; AI layoff attributions are self-reported and may overstate causation; frontier items are speculative.</a:t>
             </a:r>
             <a:endParaRPr lang="en-US" dirty="0"/>
           </a:p>
@@ -2110,7 +2110,7 @@
           <a:p>
             <a:r>
               <a:rPr lang="en-US" dirty="0"/>
-              <a:t>The thesis slide — and why this isn’t 2023’s hype cycle: three independent systems shifting in the same direction at once. Capability: models became loop-running systems (slide 4). Economics: tokens went from subsidized to rationed (slide 5). Policy: when governments debate taking equity, the asset class changed category (slide 6). Each column carries one proof stat: $47B of run rate, $920M/month of rental, a 50% equity-tax proposal. The banner is the line to read aloud.</a:t>
+              <a:t>The thesis slide, and why this isn’t 2023’s hype cycle: three independent systems shifting in the same direction at once. Capability: models became loop-running systems (slide 4). Economics: tokens went from subsidized to rationed (slide 5). Policy: when governments debate taking equity, the asset class changed category (slide 6). Each column carries one proof stat: $47B of run rate, $920M/month of rental, a 50% equity-tax proposal. The banner is the line to read aloud.</a:t>
             </a:r>
             <a:endParaRPr lang="en-US" dirty="0"/>
           </a:p>
@@ -2198,7 +2198,7 @@
           <a:p>
             <a:r>
               <a:rPr lang="en-US" dirty="0"/>
-              <a:t>Framework slide — four dimensions where the assisted-to-agentic transition shows up. Interface shifted from chat to background loops. Cost moved from flat seats to metered tokens. Output evolved from snippets to disposable apps. Bottleneck moved from human attention to compute allocation. Each of these shows up in the market data on the slides that follow.</a:t>
+              <a:t>Framework slide: four dimensions where the assisted-to-agentic transition shows up. Interface shifted from chat to background loops. Cost moved from flat seats to metered tokens. Output evolved from snippets to disposable apps. Bottleneck moved from human attention to compute allocation. Each of these shows up in the market data on the slides that follow.</a:t>
             </a:r>
             <a:endParaRPr lang="en-US" dirty="0"/>
           </a:p>
@@ -2286,7 +2286,7 @@
           <a:p>
             <a:r>
               <a:rPr lang="en-US" dirty="0"/>
-              <a:t>The core slide of part one. Left: the unit of work changed — from one-shot prompting to loops that try, fail, fix, and ship without a human in each cycle. Cherny’s line is the cleanest articulation. Right: the Jevons paradox (coal, 1865) applied — as agents make software effectively free to produce, we don’t write the same software cheaper, we write categorically more of it: PDF summaries become dashboards become disposable single-use apps become giant research projects. Investment translation: efficiency improvements do NOT cap compute demand — they expand it. That’s the demand engine behind everything in part two.</a:t>
+              <a:t>The core slide of part one. Left: the unit of work changed: from one-shot prompting to loops that try, fail, fix, and ship without a human in each cycle. Cherny’s line is the cleanest articulation. Right: the Jevons paradox (coal, 1865) applied: as agents make software effectively free to produce, we don’t write the same software cheaper, we write categorically more of it: PDF summaries become dashboards become disposable single-use apps become giant research projects. Investment translation: efficiency improvements do NOT cap compute demand; they expand it. That’s the demand engine behind everything in part two.</a:t>
             </a:r>
             <a:endParaRPr lang="en-US" dirty="0"/>
           </a:p>
@@ -2374,7 +2374,7 @@
           <a:p>
             <a:r>
               <a:rPr lang="en-US" dirty="0"/>
-              <a:t>Three data points, one message: enterprises now treat tokens as a metered input with a budget line. Uber: $1,500/month per employee. Walmart: killed unlimited access for Code Puppy. The third card is the supply side — SK Hynix sees no HBM relief before ~2030 even after doubling capacity, and Google’s $920M/month rental is what scarcity costs when you don’t own capacity. The READ box carries the investability point: token budgets are the new same-store sales.</a:t>
+              <a:t>Three data points, one message: enterprises now treat tokens as a metered input with a budget line. Uber: $1,500/month per employee. Walmart: killed unlimited access for Code Puppy. The third card is the supply side: SK Hynix sees no HBM relief before ~2030 even after doubling capacity, and Google’s $920M/month rental is what scarcity costs when you don’t own capacity. The READ box carries the investability point: token budgets are the new same-store sales.</a:t>
             </a:r>
             <a:endParaRPr lang="en-US" dirty="0"/>
           </a:p>
@@ -2462,7 +2462,7 @@
           <a:p>
             <a:r>
               <a:rPr lang="en-US" dirty="0"/>
-              <a:t>The policy slide stays neutral by quoting all sides. EO: voluntary 30-day NSA review, cyber-focused, no licensing — lighter than feared, but a calendar item before every frontier release. SWF: a one-time 50% equity tax to fund AI Dividends — when Sanders proposes and Trump echoes, the Overton window has genuinely moved. Sacks' critique is the third leg: nationalization as a threat to the property rights underpinning lab valuations. The investable point: public-ownership tail risk now belongs in any model of lab equity, the IPO pipeline, and the hyperscalers holding lab stakes. This slide is also the political receiving end of the labor story on slide 8.</a:t>
+              <a:t>The policy slide, now global. Left: US. EO is a voluntary 30-day NSA review, lighter than feared but a calendar item before every frontier release. The 50% equity-tax proposal seeds AI Dividends: when Sanders and Trump both float it, the Overton window moved. Sacks' critique completes the triangle. Right: South Korea. Kim Yong-beom (presidential policy chief) posted a "citizen dividend" idea on May 12; KOSPI dropped 5.1% intraday. Lee Jae-myung walked it back, but Samsung's union had already demanded 15% of chip-division profit (April). The pattern: once governments frame AI as a sovereign asset, the ownership debate follows. Investable point: public-ownership tail risk now belongs in any model of lab equity, the IPO pipeline, and the hyperscalers holding lab stakes.</a:t>
             </a:r>
             <a:endParaRPr lang="en-US" dirty="0"/>
           </a:p>
@@ -2550,7 +2550,7 @@
           <a:p>
             <a:r>
               <a:rPr lang="en-US" dirty="0"/>
-              <a:t>Part two opens with the equity scoreboard. SOXX +80% YTD (best run since 2000, ~$5.7T added in the April rally alone); equal-weight +14% beats cap-weight +11%; MAGS +6% lags; software −10%, priced for disruption. The market is no longer trading 'AI yes/no' — it’s trading position in the chain. The right rail is the concentration story: 37% of the index in ten names (double the 25-year norm), Nvidia alone at 7%, and a forward multiple that’s elevated but not extreme — provided the AI earnings stream keeps compounding.</a:t>
+              <a:t>Part two opens with the equity scoreboard. SOXX +80% YTD (best run since 2000, ~$5.7T added in the April rally alone); equal-weight +14% beats cap-weight +11%; MAGS +6% lags; software −10%, priced for disruption. The market is no longer trading 'AI yes/no'; it’s trading position in the chain. The right rail is the concentration story: 37% of the index in ten names (double the 25-year norm), Nvidia alone at 7%, and a forward multiple that’s elevated but not extreme, provided the AI earnings stream keeps compounding.</a:t>
             </a:r>
             <a:endParaRPr lang="en-US" dirty="0"/>
           </a:p>
@@ -2638,7 +2638,7 @@
           <a:p>
             <a:r>
               <a:rPr lang="en-US" dirty="0"/>
-              <a:t>The labor slide — new this version, with verified June 2026 data. Left: the structural story — a job stops being task execution and becomes orchestration of parallel agent loops; the 20–25% coordination figure is the pool agents are bought to recover. Right: the data — Challenger’s May report made AI the #1 stated layoff reason for the first time (~40% of announced cuts, with the honest caveat that it’s self-reported and partly scapegoating); the entry level is where it bites (grad unemployment 5.6% vs 4.2%, declining payrolls for the youngest AI-exposed cohort); and the advantage gap stratifies pay within surviving roles. Markets price labor twice: as a cost line agents deflate, and as the political trigger for slide 6’s ownership debate.</a:t>
+              <a:t>The labor slide, new this version, with verified June 2026 data. Left: the structural story: a job stops being task execution and becomes orchestration of parallel agent loops; the 20–25% coordination figure is the pool agents are bought to recover. Right: the data: Challenger’s May report made AI the #1 stated layoff reason for the first time (~40% of announced cuts, with the honest caveat that it’s self-reported and partly scapegoating); the entry level is where it bites (grad unemployment 5.6% vs 4.2%, declining payrolls for the youngest AI-exposed cohort); and the advantage gap stratifies pay within surviving roles. Markets price labor twice: as a cost line agents deflate, and as the political trigger for slide 6’s ownership debate.</a:t>
             </a:r>
             <a:endParaRPr lang="en-US" dirty="0"/>
           </a:p>
@@ -2726,7 +2726,7 @@
           <a:p>
             <a:r>
               <a:rPr lang="en-US" dirty="0"/>
-              <a:t>Bonds, part one: the gap. Capex went from $410B to ~$705B guided (+72%) — and three of four raised guidance in the latest round. The cash math: ~94% of operating cash flow committed to capex, dividends, and buybacks; Big-4 FCF at a decade low; Amazon outright negative ($200B capex vs ~$140B operating cash flow); Alphabet’s FCF down ~90% to ~$8B. For a decade the megacap social contract was self-funding plus buybacks. It broke in 2026 — and something had to fill the gap. Next slide.</a:t>
+              <a:t>Bonds, part one: the gap. Capex went from $410B to ~$705B guided (+72%), and three of four raised guidance in the latest round. The cash math: ~94% of operating cash flow committed to capex, dividends, and buybacks; Big-4 FCF at a decade low; Amazon outright negative ($200B capex vs ~$140B operating cash flow); Alphabet’s FCF down ~90% to ~$8B. For a decade the megacap social contract was self-funding plus buybacks. It broke in 2026, and something had to fill the gap. Next slide.</a:t>
             </a:r>
             <a:endParaRPr lang="en-US" dirty="0"/>
           </a:p>
@@ -3191,7 +3191,7 @@
                 <a:ea typeface="Arial Black" pitchFamily="34" charset="-122"/>
                 <a:cs typeface="Arial Black" pitchFamily="34" charset="-120"/>
               </a:rPr>
-              <a:t>AI in the Market.</a:t>
+              <a:t>AI in the markets.</a:t>
             </a:r>
             <a:endParaRPr lang="en-US" sz="4000" dirty="0"/>
           </a:p>
@@ -3230,7 +3230,7 @@
                 <a:ea typeface="Arial Black" pitchFamily="34" charset="-122"/>
                 <a:cs typeface="Arial Black" pitchFamily="34" charset="-120"/>
               </a:rPr>
-              <a:t>What’s happening now — and how markets reprice.</a:t>
+              <a:t>What’s happening now, and how markets reprice.</a:t>
             </a:r>
             <a:endParaRPr lang="en-US" sz="2000" dirty="0"/>
           </a:p>
@@ -3269,7 +3269,7 @@
                 <a:ea typeface="Arial" pitchFamily="34" charset="-122"/>
                 <a:cs typeface="Arial" pitchFamily="34" charset="-120"/>
               </a:rPr>
-              <a:t>Agentic loops, token rationing, and Washington’s entry — then the repricing: equities, labor, and a $300B bond wave.</a:t>
+              <a:t>Agentic loops, token rationing, and the policy shift; the repricing: equities, labor, and a $300B bond wave.</a:t>
             </a:r>
             <a:endParaRPr lang="en-US" sz="1300" dirty="0"/>
           </a:p>
@@ -3326,6 +3326,481 @@
             <a:ext cx="2377440" cy="3520440"/>
           </a:xfrm>
           <a:prstGeom prst="rect">
+            <a:avLst/>
+          </a:prstGeom>
+          <a:solidFill>
+            <a:srgbClr val="1C1C20"/>
+          </a:solidFill>
+          <a:ln w="12700">
+            <a:solidFill>
+              <a:srgbClr val="2A2A30"/>
+            </a:solidFill>
+            <a:prstDash val="solid"/>
+          </a:ln>
+        </p:spPr>
+      </p:sp>
+      <p:sp>
+        <p:nvSpPr>
+          <p:cNvPr id="9" name="Shape 7"/>
+          <p:cNvSpPr/>
+          <p:nvPr/>
+        </p:nvSpPr>
+        <p:spPr>
+          <a:xfrm>
+            <a:off x="6309360" y="777240"/>
+            <a:ext cx="73152" cy="3520440"/>
+          </a:xfrm>
+          <a:prstGeom prst="rect">
+            <a:avLst/>
+          </a:prstGeom>
+          <a:solidFill>
+            <a:srgbClr val="FFD100"/>
+          </a:solidFill>
+          <a:ln/>
+        </p:spPr>
+      </p:sp>
+      <p:sp>
+        <p:nvSpPr>
+          <p:cNvPr id="10" name="Text 8"/>
+          <p:cNvSpPr/>
+          <p:nvPr/>
+        </p:nvSpPr>
+        <p:spPr>
+          <a:xfrm>
+            <a:off x="6537960" y="1033272"/>
+            <a:ext cx="1920240" cy="219456"/>
+          </a:xfrm>
+          <a:prstGeom prst="rect">
+            <a:avLst/>
+          </a:prstGeom>
+          <a:noFill/>
+          <a:ln/>
+        </p:spPr>
+        <p:txBody>
+          <a:bodyPr wrap="square" lIns="0" tIns="0" rIns="0" bIns="0" rtlCol="0" anchor="ctr"/>
+          <a:lstStyle/>
+          <a:p>
+            <a:pPr indent="0" marL="0">
+              <a:buNone/>
+            </a:pPr>
+            <a:r>
+              <a:rPr lang="en-US" sz="800" b="1" spc="220" kern="0" dirty="0">
+                <a:solidFill>
+                  <a:srgbClr val="FFD100"/>
+                </a:solidFill>
+                <a:latin typeface="Arial" pitchFamily="34" charset="0"/>
+                <a:ea typeface="Arial" pitchFamily="34" charset="-122"/>
+                <a:cs typeface="Arial" pitchFamily="34" charset="-120"/>
+              </a:rPr>
+              <a:t>AGENTIC LOOP</a:t>
+            </a:r>
+            <a:endParaRPr lang="en-US" sz="800" dirty="0"/>
+          </a:p>
+        </p:txBody>
+      </p:sp>
+      <p:sp>
+        <p:nvSpPr>
+          <p:cNvPr id="11" name="Text 9"/>
+          <p:cNvSpPr/>
+          <p:nvPr/>
+        </p:nvSpPr>
+        <p:spPr>
+          <a:xfrm>
+            <a:off x="6537960" y="1307592"/>
+            <a:ext cx="1920240" cy="365760"/>
+          </a:xfrm>
+          <a:prstGeom prst="rect">
+            <a:avLst/>
+          </a:prstGeom>
+          <a:noFill/>
+          <a:ln/>
+        </p:spPr>
+        <p:txBody>
+          <a:bodyPr wrap="square" lIns="0" tIns="0" rIns="0" bIns="0" rtlCol="0" anchor="ctr"/>
+          <a:lstStyle/>
+          <a:p>
+            <a:pPr indent="0" marL="0">
+              <a:buNone/>
+            </a:pPr>
+            <a:r>
+              <a:rPr lang="en-US" sz="900" dirty="0">
+                <a:solidFill>
+                  <a:srgbClr val="C9C9CE"/>
+                </a:solidFill>
+                <a:latin typeface="Arial" pitchFamily="34" charset="0"/>
+                <a:ea typeface="Arial" pitchFamily="34" charset="-122"/>
+                <a:cs typeface="Arial" pitchFamily="34" charset="-120"/>
+              </a:rPr>
+              <a:t>Try, fail, fix, ship - then meter the compute.</a:t>
+            </a:r>
+            <a:endParaRPr lang="en-US" sz="900" dirty="0"/>
+          </a:p>
+        </p:txBody>
+      </p:sp>
+      <p:sp>
+        <p:nvSpPr>
+          <p:cNvPr id="12" name="Shape 10"/>
+          <p:cNvSpPr/>
+          <p:nvPr/>
+        </p:nvSpPr>
+        <p:spPr>
+          <a:xfrm>
+            <a:off x="7406640" y="2203704"/>
+            <a:ext cx="256032" cy="0"/>
+          </a:xfrm>
+          <a:prstGeom prst="line">
+            <a:avLst/>
+          </a:prstGeom>
+          <a:noFill/>
+          <a:ln w="17780">
+            <a:solidFill>
+              <a:srgbClr val="2BC4C4"/>
+            </a:solidFill>
+            <a:prstDash val="solid"/>
+            <a:tailEnd type="triangle"/>
+          </a:ln>
+        </p:spPr>
+      </p:sp>
+      <p:sp>
+        <p:nvSpPr>
+          <p:cNvPr id="13" name="Shape 11"/>
+          <p:cNvSpPr/>
+          <p:nvPr/>
+        </p:nvSpPr>
+        <p:spPr>
+          <a:xfrm>
+            <a:off x="7991856" y="2368296"/>
+            <a:ext cx="0" cy="438912"/>
+          </a:xfrm>
+          <a:prstGeom prst="line">
+            <a:avLst/>
+          </a:prstGeom>
+          <a:noFill/>
+          <a:ln w="17780">
+            <a:solidFill>
+              <a:srgbClr val="2BC4C4"/>
+            </a:solidFill>
+            <a:prstDash val="solid"/>
+            <a:tailEnd type="triangle"/>
+          </a:ln>
+        </p:spPr>
+      </p:sp>
+      <p:sp>
+        <p:nvSpPr>
+          <p:cNvPr id="14" name="Shape 12"/>
+          <p:cNvSpPr/>
+          <p:nvPr/>
+        </p:nvSpPr>
+        <p:spPr>
+          <a:xfrm flipH="1">
+            <a:off x="7406640" y="2971800"/>
+            <a:ext cx="256032" cy="0"/>
+          </a:xfrm>
+          <a:prstGeom prst="line">
+            <a:avLst/>
+          </a:prstGeom>
+          <a:noFill/>
+          <a:ln w="17780">
+            <a:solidFill>
+              <a:srgbClr val="2BC4C4"/>
+            </a:solidFill>
+            <a:prstDash val="solid"/>
+            <a:tailEnd type="triangle"/>
+          </a:ln>
+        </p:spPr>
+      </p:sp>
+      <p:sp>
+        <p:nvSpPr>
+          <p:cNvPr id="15" name="Shape 13"/>
+          <p:cNvSpPr/>
+          <p:nvPr/>
+        </p:nvSpPr>
+        <p:spPr>
+          <a:xfrm flipV="1">
+            <a:off x="7077456" y="2368296"/>
+            <a:ext cx="0" cy="438912"/>
+          </a:xfrm>
+          <a:prstGeom prst="line">
+            <a:avLst/>
+          </a:prstGeom>
+          <a:noFill/>
+          <a:ln w="17780">
+            <a:solidFill>
+              <a:srgbClr val="2BC4C4"/>
+            </a:solidFill>
+            <a:prstDash val="solid"/>
+            <a:tailEnd type="triangle"/>
+          </a:ln>
+        </p:spPr>
+      </p:sp>
+      <p:sp>
+        <p:nvSpPr>
+          <p:cNvPr id="16" name="Shape 14"/>
+          <p:cNvSpPr/>
+          <p:nvPr/>
+        </p:nvSpPr>
+        <p:spPr>
+          <a:xfrm>
+            <a:off x="6748272" y="2039112"/>
+            <a:ext cx="658368" cy="329184"/>
+          </a:xfrm>
+          <a:prstGeom prst="ellipse">
+            <a:avLst/>
+          </a:prstGeom>
+          <a:solidFill>
+            <a:srgbClr val="111114"/>
+          </a:solidFill>
+          <a:ln w="19050">
+            <a:solidFill>
+              <a:srgbClr val="2BC4C4"/>
+            </a:solidFill>
+            <a:prstDash val="solid"/>
+          </a:ln>
+        </p:spPr>
+      </p:sp>
+      <p:sp>
+        <p:nvSpPr>
+          <p:cNvPr id="17" name="Text 15"/>
+          <p:cNvSpPr/>
+          <p:nvPr/>
+        </p:nvSpPr>
+        <p:spPr>
+          <a:xfrm>
+            <a:off x="6748272" y="2112264"/>
+            <a:ext cx="658368" cy="146304"/>
+          </a:xfrm>
+          <a:prstGeom prst="rect">
+            <a:avLst/>
+          </a:prstGeom>
+          <a:noFill/>
+          <a:ln/>
+        </p:spPr>
+        <p:txBody>
+          <a:bodyPr wrap="square" lIns="0" tIns="0" rIns="0" bIns="0" rtlCol="0" anchor="ctr"/>
+          <a:lstStyle/>
+          <a:p>
+            <a:pPr algn="ctr" indent="0" marL="0">
+              <a:buNone/>
+            </a:pPr>
+            <a:r>
+              <a:rPr lang="en-US" sz="750" b="1" dirty="0">
+                <a:solidFill>
+                  <a:srgbClr val="2BC4C4"/>
+                </a:solidFill>
+                <a:latin typeface="Arial" pitchFamily="34" charset="0"/>
+                <a:ea typeface="Arial" pitchFamily="34" charset="-122"/>
+                <a:cs typeface="Arial" pitchFamily="34" charset="-120"/>
+              </a:rPr>
+              <a:t>TRY</a:t>
+            </a:r>
+            <a:endParaRPr lang="en-US" sz="750" dirty="0"/>
+          </a:p>
+        </p:txBody>
+      </p:sp>
+      <p:sp>
+        <p:nvSpPr>
+          <p:cNvPr id="18" name="Shape 16"/>
+          <p:cNvSpPr/>
+          <p:nvPr/>
+        </p:nvSpPr>
+        <p:spPr>
+          <a:xfrm>
+            <a:off x="7662672" y="2039112"/>
+            <a:ext cx="658368" cy="329184"/>
+          </a:xfrm>
+          <a:prstGeom prst="ellipse">
+            <a:avLst/>
+          </a:prstGeom>
+          <a:solidFill>
+            <a:srgbClr val="111114"/>
+          </a:solidFill>
+          <a:ln w="19050">
+            <a:solidFill>
+              <a:srgbClr val="2BC4C4"/>
+            </a:solidFill>
+            <a:prstDash val="solid"/>
+          </a:ln>
+        </p:spPr>
+      </p:sp>
+      <p:sp>
+        <p:nvSpPr>
+          <p:cNvPr id="19" name="Text 17"/>
+          <p:cNvSpPr/>
+          <p:nvPr/>
+        </p:nvSpPr>
+        <p:spPr>
+          <a:xfrm>
+            <a:off x="7662672" y="2112264"/>
+            <a:ext cx="658368" cy="146304"/>
+          </a:xfrm>
+          <a:prstGeom prst="rect">
+            <a:avLst/>
+          </a:prstGeom>
+          <a:noFill/>
+          <a:ln/>
+        </p:spPr>
+        <p:txBody>
+          <a:bodyPr wrap="square" lIns="0" tIns="0" rIns="0" bIns="0" rtlCol="0" anchor="ctr"/>
+          <a:lstStyle/>
+          <a:p>
+            <a:pPr algn="ctr" indent="0" marL="0">
+              <a:buNone/>
+            </a:pPr>
+            <a:r>
+              <a:rPr lang="en-US" sz="750" b="1" dirty="0">
+                <a:solidFill>
+                  <a:srgbClr val="2BC4C4"/>
+                </a:solidFill>
+                <a:latin typeface="Arial" pitchFamily="34" charset="0"/>
+                <a:ea typeface="Arial" pitchFamily="34" charset="-122"/>
+                <a:cs typeface="Arial" pitchFamily="34" charset="-120"/>
+              </a:rPr>
+              <a:t>FAIL</a:t>
+            </a:r>
+            <a:endParaRPr lang="en-US" sz="750" dirty="0"/>
+          </a:p>
+        </p:txBody>
+      </p:sp>
+      <p:sp>
+        <p:nvSpPr>
+          <p:cNvPr id="20" name="Shape 18"/>
+          <p:cNvSpPr/>
+          <p:nvPr/>
+        </p:nvSpPr>
+        <p:spPr>
+          <a:xfrm>
+            <a:off x="7662672" y="2807208"/>
+            <a:ext cx="658368" cy="329184"/>
+          </a:xfrm>
+          <a:prstGeom prst="ellipse">
+            <a:avLst/>
+          </a:prstGeom>
+          <a:solidFill>
+            <a:srgbClr val="111114"/>
+          </a:solidFill>
+          <a:ln w="19050">
+            <a:solidFill>
+              <a:srgbClr val="2BC4C4"/>
+            </a:solidFill>
+            <a:prstDash val="solid"/>
+          </a:ln>
+        </p:spPr>
+      </p:sp>
+      <p:sp>
+        <p:nvSpPr>
+          <p:cNvPr id="21" name="Text 19"/>
+          <p:cNvSpPr/>
+          <p:nvPr/>
+        </p:nvSpPr>
+        <p:spPr>
+          <a:xfrm>
+            <a:off x="7662672" y="2880360"/>
+            <a:ext cx="658368" cy="146304"/>
+          </a:xfrm>
+          <a:prstGeom prst="rect">
+            <a:avLst/>
+          </a:prstGeom>
+          <a:noFill/>
+          <a:ln/>
+        </p:spPr>
+        <p:txBody>
+          <a:bodyPr wrap="square" lIns="0" tIns="0" rIns="0" bIns="0" rtlCol="0" anchor="ctr"/>
+          <a:lstStyle/>
+          <a:p>
+            <a:pPr algn="ctr" indent="0" marL="0">
+              <a:buNone/>
+            </a:pPr>
+            <a:r>
+              <a:rPr lang="en-US" sz="750" b="1" dirty="0">
+                <a:solidFill>
+                  <a:srgbClr val="2BC4C4"/>
+                </a:solidFill>
+                <a:latin typeface="Arial" pitchFamily="34" charset="0"/>
+                <a:ea typeface="Arial" pitchFamily="34" charset="-122"/>
+                <a:cs typeface="Arial" pitchFamily="34" charset="-120"/>
+              </a:rPr>
+              <a:t>FIX</a:t>
+            </a:r>
+            <a:endParaRPr lang="en-US" sz="750" dirty="0"/>
+          </a:p>
+        </p:txBody>
+      </p:sp>
+      <p:sp>
+        <p:nvSpPr>
+          <p:cNvPr id="22" name="Shape 20"/>
+          <p:cNvSpPr/>
+          <p:nvPr/>
+        </p:nvSpPr>
+        <p:spPr>
+          <a:xfrm>
+            <a:off x="6748272" y="2807208"/>
+            <a:ext cx="658368" cy="329184"/>
+          </a:xfrm>
+          <a:prstGeom prst="ellipse">
+            <a:avLst/>
+          </a:prstGeom>
+          <a:solidFill>
+            <a:srgbClr val="111114"/>
+          </a:solidFill>
+          <a:ln w="19050">
+            <a:solidFill>
+              <a:srgbClr val="2BC4C4"/>
+            </a:solidFill>
+            <a:prstDash val="solid"/>
+          </a:ln>
+        </p:spPr>
+      </p:sp>
+      <p:sp>
+        <p:nvSpPr>
+          <p:cNvPr id="23" name="Text 21"/>
+          <p:cNvSpPr/>
+          <p:nvPr/>
+        </p:nvSpPr>
+        <p:spPr>
+          <a:xfrm>
+            <a:off x="6748272" y="2880360"/>
+            <a:ext cx="658368" cy="146304"/>
+          </a:xfrm>
+          <a:prstGeom prst="rect">
+            <a:avLst/>
+          </a:prstGeom>
+          <a:noFill/>
+          <a:ln/>
+        </p:spPr>
+        <p:txBody>
+          <a:bodyPr wrap="square" lIns="0" tIns="0" rIns="0" bIns="0" rtlCol="0" anchor="ctr"/>
+          <a:lstStyle/>
+          <a:p>
+            <a:pPr algn="ctr" indent="0" marL="0">
+              <a:buNone/>
+            </a:pPr>
+            <a:r>
+              <a:rPr lang="en-US" sz="750" b="1" dirty="0">
+                <a:solidFill>
+                  <a:srgbClr val="2BC4C4"/>
+                </a:solidFill>
+                <a:latin typeface="Arial" pitchFamily="34" charset="0"/>
+                <a:ea typeface="Arial" pitchFamily="34" charset="-122"/>
+                <a:cs typeface="Arial" pitchFamily="34" charset="-120"/>
+              </a:rPr>
+              <a:t>SHIP</a:t>
+            </a:r>
+            <a:endParaRPr lang="en-US" sz="750" dirty="0"/>
+          </a:p>
+        </p:txBody>
+      </p:sp>
+      <p:sp>
+        <p:nvSpPr>
+          <p:cNvPr id="24" name="Shape 22"/>
+          <p:cNvSpPr/>
+          <p:nvPr/>
+        </p:nvSpPr>
+        <p:spPr>
+          <a:xfrm>
+            <a:off x="7086600" y="2404872"/>
+            <a:ext cx="822960" cy="402336"/>
+          </a:xfrm>
+          <a:prstGeom prst="ellipse">
             <a:avLst/>
           </a:prstGeom>
           <a:solidFill>
@@ -3335,144 +3810,20 @@
             <a:solidFill>
               <a:srgbClr val="2A2A30"/>
             </a:solidFill>
-            <a:prstDash val="dash"/>
-          </a:ln>
-        </p:spPr>
-      </p:sp>
-      <p:sp>
-        <p:nvSpPr>
-          <p:cNvPr id="9" name="Shape 7"/>
-          <p:cNvSpPr/>
-          <p:nvPr/>
-        </p:nvSpPr>
-        <p:spPr>
-          <a:xfrm>
-            <a:off x="6309360" y="777240"/>
-            <a:ext cx="274320" cy="32004"/>
-          </a:xfrm>
-          <a:prstGeom prst="rect">
-            <a:avLst/>
-          </a:prstGeom>
-          <a:solidFill>
-            <a:srgbClr val="FFD100"/>
-          </a:solidFill>
-          <a:ln/>
-        </p:spPr>
-      </p:sp>
-      <p:sp>
-        <p:nvSpPr>
-          <p:cNvPr id="10" name="Shape 8"/>
-          <p:cNvSpPr/>
-          <p:nvPr/>
-        </p:nvSpPr>
-        <p:spPr>
-          <a:xfrm>
-            <a:off x="6309360" y="777240"/>
-            <a:ext cx="32004" cy="274320"/>
-          </a:xfrm>
-          <a:prstGeom prst="rect">
-            <a:avLst/>
-          </a:prstGeom>
-          <a:solidFill>
-            <a:srgbClr val="FFD100"/>
-          </a:solidFill>
-          <a:ln/>
-        </p:spPr>
-      </p:sp>
-      <p:sp>
-        <p:nvSpPr>
-          <p:cNvPr id="11" name="Shape 9"/>
-          <p:cNvSpPr/>
-          <p:nvPr/>
-        </p:nvSpPr>
-        <p:spPr>
-          <a:xfrm>
-            <a:off x="8412480" y="4265676"/>
-            <a:ext cx="274320" cy="32004"/>
-          </a:xfrm>
-          <a:prstGeom prst="rect">
-            <a:avLst/>
-          </a:prstGeom>
-          <a:solidFill>
-            <a:srgbClr val="FFD100"/>
-          </a:solidFill>
-          <a:ln/>
-        </p:spPr>
-      </p:sp>
-      <p:sp>
-        <p:nvSpPr>
-          <p:cNvPr id="12" name="Shape 10"/>
-          <p:cNvSpPr/>
-          <p:nvPr/>
-        </p:nvSpPr>
-        <p:spPr>
-          <a:xfrm>
-            <a:off x="8654796" y="4023360"/>
-            <a:ext cx="32004" cy="274320"/>
-          </a:xfrm>
-          <a:prstGeom prst="rect">
-            <a:avLst/>
-          </a:prstGeom>
-          <a:solidFill>
-            <a:srgbClr val="FFD100"/>
-          </a:solidFill>
-          <a:ln/>
-        </p:spPr>
-      </p:sp>
-      <p:sp>
-        <p:nvSpPr>
-          <p:cNvPr id="13" name="Shape 11"/>
-          <p:cNvSpPr/>
-          <p:nvPr/>
-        </p:nvSpPr>
-        <p:spPr>
-          <a:xfrm>
-            <a:off x="7178040" y="2098548"/>
-            <a:ext cx="640080" cy="347472"/>
-          </a:xfrm>
-          <a:prstGeom prst="triangle">
-            <a:avLst/>
-          </a:prstGeom>
-          <a:ln w="19050">
-            <a:solidFill>
-              <a:srgbClr val="9A9AA0"/>
-            </a:solidFill>
             <a:prstDash val="solid"/>
           </a:ln>
         </p:spPr>
       </p:sp>
       <p:sp>
         <p:nvSpPr>
-          <p:cNvPr id="14" name="Shape 12"/>
-          <p:cNvSpPr/>
-          <p:nvPr/>
-        </p:nvSpPr>
-        <p:spPr>
-          <a:xfrm>
-            <a:off x="7626096" y="1970532"/>
-            <a:ext cx="146304" cy="146304"/>
-          </a:xfrm>
-          <a:prstGeom prst="ellipse">
-            <a:avLst/>
-          </a:prstGeom>
-          <a:ln w="19050">
-            <a:solidFill>
-              <a:srgbClr val="9A9AA0"/>
-            </a:solidFill>
-            <a:prstDash val="solid"/>
-          </a:ln>
-        </p:spPr>
-      </p:sp>
-      <p:sp>
-        <p:nvSpPr>
-          <p:cNvPr id="15" name="Text 13"/>
-          <p:cNvSpPr/>
-          <p:nvPr/>
-        </p:nvSpPr>
-        <p:spPr>
-          <a:xfrm>
-            <a:off x="6400800" y="2555748"/>
-            <a:ext cx="2194560" cy="219456"/>
+          <p:cNvPr id="25" name="Text 23"/>
+          <p:cNvSpPr/>
+          <p:nvPr/>
+        </p:nvSpPr>
+        <p:spPr>
+          <a:xfrm>
+            <a:off x="7168896" y="2532888"/>
+            <a:ext cx="658368" cy="109728"/>
           </a:xfrm>
           <a:prstGeom prst="rect">
             <a:avLst/>
@@ -3488,46 +3839,125 @@
               <a:buNone/>
             </a:pPr>
             <a:r>
-              <a:rPr lang="en-US" sz="800" b="1" spc="200" kern="0" dirty="0">
-                <a:solidFill>
-                  <a:srgbClr val="FFD100"/>
-                </a:solidFill>
-                <a:latin typeface="Arial" pitchFamily="34" charset="0"/>
-                <a:ea typeface="Arial" pitchFamily="34" charset="-122"/>
-                <a:cs typeface="Arial" pitchFamily="34" charset="-120"/>
-              </a:rPr>
-              <a:t>IMAGE — AGENTIC LOOP LIGHT TRAILS</a:t>
-            </a:r>
-            <a:endParaRPr lang="en-US" sz="800" dirty="0"/>
-          </a:p>
-        </p:txBody>
-      </p:sp>
-      <p:sp>
-        <p:nvSpPr>
-          <p:cNvPr id="16" name="Text 14"/>
-          <p:cNvSpPr/>
-          <p:nvPr/>
-        </p:nvSpPr>
-        <p:spPr>
-          <a:xfrm>
-            <a:off x="6492240" y="2811780"/>
-            <a:ext cx="2011680" cy="594360"/>
-          </a:xfrm>
-          <a:prstGeom prst="rect">
-            <a:avLst/>
-          </a:prstGeom>
-          <a:noFill/>
-          <a:ln/>
-        </p:spPr>
-        <p:txBody>
-          <a:bodyPr wrap="square" lIns="0" tIns="0" rIns="0" bIns="0" rtlCol="0" anchor="t"/>
+              <a:rPr lang="en-US" sz="580" b="1" dirty="0">
+                <a:solidFill>
+                  <a:srgbClr val="FFFFFF"/>
+                </a:solidFill>
+                <a:latin typeface="Arial" pitchFamily="34" charset="0"/>
+                <a:ea typeface="Arial" pitchFamily="34" charset="-122"/>
+                <a:cs typeface="Arial" pitchFamily="34" charset="-120"/>
+              </a:rPr>
+              <a:t>RUNS UNTIL DONE</a:t>
+            </a:r>
+            <a:endParaRPr lang="en-US" sz="580" dirty="0"/>
+          </a:p>
+        </p:txBody>
+      </p:sp>
+      <p:sp>
+        <p:nvSpPr>
+          <p:cNvPr id="26" name="Text 24"/>
+          <p:cNvSpPr/>
+          <p:nvPr/>
+        </p:nvSpPr>
+        <p:spPr>
+          <a:xfrm>
+            <a:off x="6537960" y="3657600"/>
+            <a:ext cx="1005840" cy="146304"/>
+          </a:xfrm>
+          <a:prstGeom prst="rect">
+            <a:avLst/>
+          </a:prstGeom>
+          <a:noFill/>
+          <a:ln/>
+        </p:spPr>
+        <p:txBody>
+          <a:bodyPr wrap="square" lIns="0" tIns="0" rIns="0" bIns="0" rtlCol="0" anchor="ctr"/>
+          <a:lstStyle/>
+          <a:p>
+            <a:pPr indent="0" marL="0">
+              <a:buNone/>
+            </a:pPr>
+            <a:r>
+              <a:rPr lang="en-US" sz="650" b="1" spc="140" kern="0" dirty="0">
+                <a:solidFill>
+                  <a:srgbClr val="9A9AA0"/>
+                </a:solidFill>
+                <a:latin typeface="Arial" pitchFamily="34" charset="0"/>
+                <a:ea typeface="Arial" pitchFamily="34" charset="-122"/>
+                <a:cs typeface="Arial" pitchFamily="34" charset="-120"/>
+              </a:rPr>
+              <a:t>MARKET SIGNAL</a:t>
+            </a:r>
+            <a:endParaRPr lang="en-US" sz="650" dirty="0"/>
+          </a:p>
+        </p:txBody>
+      </p:sp>
+      <p:sp>
+        <p:nvSpPr>
+          <p:cNvPr id="27" name="Shape 25"/>
+          <p:cNvSpPr/>
+          <p:nvPr/>
+        </p:nvSpPr>
+        <p:spPr>
+          <a:xfrm>
+            <a:off x="6537960" y="3886200"/>
+            <a:ext cx="1920240" cy="73152"/>
+          </a:xfrm>
+          <a:prstGeom prst="rect">
+            <a:avLst/>
+          </a:prstGeom>
+          <a:solidFill>
+            <a:srgbClr val="3E3E46"/>
+          </a:solidFill>
+          <a:ln/>
+        </p:spPr>
+      </p:sp>
+      <p:sp>
+        <p:nvSpPr>
+          <p:cNvPr id="28" name="Shape 26"/>
+          <p:cNvSpPr/>
+          <p:nvPr/>
+        </p:nvSpPr>
+        <p:spPr>
+          <a:xfrm>
+            <a:off x="6537960" y="3886200"/>
+            <a:ext cx="1382573" cy="73152"/>
+          </a:xfrm>
+          <a:prstGeom prst="rect">
+            <a:avLst/>
+          </a:prstGeom>
+          <a:solidFill>
+            <a:srgbClr val="F6693D"/>
+          </a:solidFill>
+          <a:ln/>
+        </p:spPr>
+      </p:sp>
+      <p:sp>
+        <p:nvSpPr>
+          <p:cNvPr id="29" name="Text 27"/>
+          <p:cNvSpPr/>
+          <p:nvPr/>
+        </p:nvSpPr>
+        <p:spPr>
+          <a:xfrm>
+            <a:off x="6537960" y="4041648"/>
+            <a:ext cx="1920240" cy="164592"/>
+          </a:xfrm>
+          <a:prstGeom prst="rect">
+            <a:avLst/>
+          </a:prstGeom>
+          <a:noFill/>
+          <a:ln/>
+        </p:spPr>
+        <p:txBody>
+          <a:bodyPr wrap="square" lIns="0" tIns="0" rIns="0" bIns="0" rtlCol="0" anchor="ctr"/>
           <a:lstStyle/>
           <a:p>
             <a:pPr algn="ctr" indent="0" marL="0">
               <a:buNone/>
             </a:pPr>
             <a:r>
-              <a:rPr lang="en-US" sz="700" i="1" dirty="0">
+              <a:rPr lang="en-US" sz="720" dirty="0">
                 <a:solidFill>
                   <a:srgbClr val="9A9AA0"/>
                 </a:solidFill>
@@ -3535,15 +3965,15 @@
                 <a:ea typeface="Arial" pitchFamily="34" charset="-122"/>
                 <a:cs typeface="Arial" pitchFamily="34" charset="-120"/>
               </a:rPr>
-              <a:t>Glowing teal and yellow light trails forming interlocking orbits on near-black — abstract agent loops, cinematic, minimal.</a:t>
-            </a:r>
-            <a:endParaRPr lang="en-US" sz="700" dirty="0"/>
-          </a:p>
-        </p:txBody>
-      </p:sp>
-      <p:sp>
-        <p:nvSpPr>
-          <p:cNvPr id="17" name="Shape 15"/>
+              <a:t>more loops -&gt; more tokens -&gt; more capex</a:t>
+            </a:r>
+            <a:endParaRPr lang="en-US" sz="720" dirty="0"/>
+          </a:p>
+        </p:txBody>
+      </p:sp>
+      <p:sp>
+        <p:nvSpPr>
+          <p:cNvPr id="30" name="Shape 28"/>
           <p:cNvSpPr/>
           <p:nvPr/>
         </p:nvSpPr>
@@ -3563,7 +3993,7 @@
       </p:sp>
       <p:sp>
         <p:nvSpPr>
-          <p:cNvPr id="18" name="Shape 16"/>
+          <p:cNvPr id="31" name="Shape 29"/>
           <p:cNvSpPr/>
           <p:nvPr/>
         </p:nvSpPr>
@@ -3586,7 +4016,7 @@
       </p:sp>
       <p:sp>
         <p:nvSpPr>
-          <p:cNvPr id="19" name="Text 17"/>
+          <p:cNvPr id="32" name="Text 30"/>
           <p:cNvSpPr/>
           <p:nvPr/>
         </p:nvSpPr>
@@ -3708,7 +4138,7 @@
                 <a:ea typeface="Arial" pitchFamily="34" charset="-122"/>
                 <a:cs typeface="Arial" pitchFamily="34" charset="-120"/>
               </a:rPr>
-              <a:t>02  ·  MARKET IMPACT  —  FINANCING — THE BOND WAVE</a:t>
+              <a:t>02  ·  MARKET IMPACT  ·  FINANCING · THE BOND WAVE</a:t>
             </a:r>
             <a:endParaRPr lang="en-US" sz="900" dirty="0"/>
           </a:p>
@@ -3786,7 +4216,7 @@
                 <a:ea typeface="Arial" pitchFamily="34" charset="-122"/>
                 <a:cs typeface="Arial" pitchFamily="34" charset="-120"/>
               </a:rPr>
-              <a:t>$105B+ of investment-grade mega-deals in six months — record prints, a live CDS signal, and ~$300B of supply expected for full-year 2026.</a:t>
+              <a:t>$105B+ of investment-grade mega-deals in six months: record prints, a live CDS signal, and ~$300B of supply expected for full-year 2026.</a:t>
             </a:r>
             <a:endParaRPr lang="en-US" sz="1250" dirty="0"/>
           </a:p>
@@ -4729,7 +5159,7 @@
                 <a:ea typeface="Arial" pitchFamily="34" charset="-122"/>
                 <a:cs typeface="Arial" pitchFamily="34" charset="-120"/>
               </a:rPr>
-              <a:t>Oracle 5-yr CDS despite light leverage — credit already discriminates by funding capacity (MUFG).</a:t>
+              <a:t>Oracle 5-yr CDS despite light leverage; credit already discriminates by funding capacity (MUFG).</a:t>
             </a:r>
             <a:endParaRPr lang="en-US" sz="750" dirty="0"/>
           </a:p>
@@ -4855,7 +5285,7 @@
                 <a:ea typeface="Arial" pitchFamily="34" charset="-122"/>
                 <a:cs typeface="Arial" pitchFamily="34" charset="-120"/>
               </a:rPr>
-              <a:t>Spreads move before earnings revisions — the early-warning gauge for AI equities.</a:t>
+              <a:t>Spreads move before earnings revisions: the early-warning gauge for AI equities.</a:t>
             </a:r>
             <a:endParaRPr lang="en-US" sz="1000" dirty="0"/>
           </a:p>
@@ -5106,7 +5536,7 @@
                 <a:ea typeface="Arial" pitchFamily="34" charset="-122"/>
                 <a:cs typeface="Arial" pitchFamily="34" charset="-120"/>
               </a:rPr>
-              <a:t>02  ·  MARKET IMPACT  —  PORTFOLIO</a:t>
+              <a:t>02  ·  MARKET IMPACT  ·  PORTFOLIO</a:t>
             </a:r>
             <a:endParaRPr lang="en-US" sz="900" dirty="0"/>
           </a:p>
@@ -5184,7 +5614,7 @@
                 <a:ea typeface="Arial" pitchFamily="34" charset="-122"/>
                 <a:cs typeface="Arial" pitchFamily="34" charset="-120"/>
               </a:rPr>
-              <a:t>A passive S&amp;P 500 allocation embeds an undiversified AI bet no one sized deliberately — manage it with four gauges.</a:t>
+              <a:t>A passive S&amp;P 500 allocation embeds an undiversified AI bet no one sized deliberately; manage it with four gauges.</a:t>
             </a:r>
             <a:endParaRPr lang="en-US" sz="1250" dirty="0"/>
           </a:p>
@@ -5379,7 +5809,7 @@
                 <a:ea typeface="Arial" pitchFamily="34" charset="-122"/>
                 <a:cs typeface="Arial" pitchFamily="34" charset="-120"/>
               </a:rPr>
-              <a:t>Four gauges — and what to do with them</a:t>
+              <a:t>Four gauges, and what to do with them</a:t>
             </a:r>
             <a:endParaRPr lang="en-US" sz="1300" dirty="0"/>
           </a:p>
@@ -5492,7 +5922,7 @@
                 <a:ea typeface="Arial" pitchFamily="34" charset="-122"/>
                 <a:cs typeface="Arial" pitchFamily="34" charset="-120"/>
               </a:rPr>
-              <a:t>~94% of op cash flow is committed; token budgets are the new same-store sales. Know your AI beta — size the 37% deliberately.</a:t>
+              <a:t>~94% of op cash flow is committed; token budgets are the new same-store sales. Know your AI beta; size the 37% deliberately.</a:t>
             </a:r>
             <a:endParaRPr lang="en-US" sz="900" dirty="0"/>
           </a:p>
@@ -5815,7 +6245,7 @@
                 <a:ea typeface="Arial" pitchFamily="34" charset="-122"/>
                 <a:cs typeface="Arial" pitchFamily="34" charset="-120"/>
               </a:rPr>
-              <a:t>you don’t need a view on AGI — you need to know what your portfolio already believes.</a:t>
+              <a:t>you don’t need a view on AGI; you need to know what your portfolio already believes.</a:t>
             </a:r>
             <a:endParaRPr lang="en-US" sz="1050" dirty="0"/>
           </a:p>
@@ -6066,7 +6496,7 @@
                 <a:ea typeface="Arial" pitchFamily="34" charset="-122"/>
                 <a:cs typeface="Arial" pitchFamily="34" charset="-120"/>
               </a:rPr>
-              <a:t>02  ·  MARKET IMPACT  —  THE FRONTIER</a:t>
+              <a:t>02  ·  MARKET IMPACT  ·  THE FRONTIER</a:t>
             </a:r>
             <a:endParaRPr lang="en-US" sz="900" dirty="0"/>
           </a:p>
@@ -6105,7 +6535,7 @@
                 <a:ea typeface="Arial" pitchFamily="34" charset="-122"/>
                 <a:cs typeface="Arial" pitchFamily="34" charset="-120"/>
               </a:rPr>
-              <a:t>FRONTIER WATCH — SPECULATIVE</a:t>
+              <a:t>FRONTIER WATCH · SPECULATIVE</a:t>
             </a:r>
             <a:endParaRPr lang="en-US" sz="800" dirty="0"/>
           </a:p>
@@ -6144,7 +6574,7 @@
                 <a:ea typeface="Arial Black" pitchFamily="34" charset="-122"/>
                 <a:cs typeface="Arial Black" pitchFamily="34" charset="-120"/>
               </a:rPr>
-              <a:t>The loop gets hands, wheels, wings — and proteins</a:t>
+              <a:t>The loop gets hands, wheels, wings, and proteins</a:t>
             </a:r>
             <a:endParaRPr lang="en-US" sz="2300" dirty="0"/>
           </a:p>
@@ -6183,7 +6613,7 @@
                 <a:ea typeface="Arial" pitchFamily="34" charset="-122"/>
                 <a:cs typeface="Arial" pitchFamily="34" charset="-120"/>
               </a:rPr>
-              <a:t>None of this is in 2026 guidance. All of it extends the Jevons demand curve (slide 4) by another decade — the option value markets quietly pay for.</a:t>
+              <a:t>None of this is in 2026 guidance. All of it extends the Jevons demand curve (slide 4) by another decade: the option value markets quietly pay for.</a:t>
             </a:r>
             <a:endParaRPr lang="en-US" sz="1250" dirty="0"/>
           </a:p>
@@ -6299,7 +6729,7 @@
                 <a:ea typeface="Arial" pitchFamily="34" charset="-122"/>
                 <a:cs typeface="Arial" pitchFamily="34" charset="-120"/>
               </a:rPr>
-              <a:t>Agentic loops in a body — warehouse shifts, not concept art. Physical labor enters the token economy.</a:t>
+              <a:t>Agentic loops in a body: warehouse shifts, not concept art. Physical labor enters the token economy.</a:t>
             </a:r>
             <a:endParaRPr lang="en-US" sz="950" dirty="0"/>
           </a:p>
@@ -6415,7 +6845,7 @@
                 <a:ea typeface="Arial" pitchFamily="34" charset="-122"/>
                 <a:cs typeface="Arial" pitchFamily="34" charset="-120"/>
               </a:rPr>
-              <a:t>Robotaxis are inference on wheels — per-mile token economics and a city-scale demand pool for compute.</a:t>
+              <a:t>Robotaxis are inference on wheels: per-mile token economics and a city-scale demand pool for compute.</a:t>
             </a:r>
             <a:endParaRPr lang="en-US" sz="950" dirty="0"/>
           </a:p>
@@ -6700,7 +7130,7 @@
                 <a:ea typeface="Arial" pitchFamily="34" charset="-122"/>
                 <a:cs typeface="Arial" pitchFamily="34" charset="-120"/>
               </a:rPr>
-              <a:t>launch cadence, fleet miles, design wins — gauges, not guidance.</a:t>
+              <a:t>launch cadence, fleet miles, design wins: gauges, not guidance.</a:t>
             </a:r>
             <a:endParaRPr lang="en-US" sz="1000" dirty="0"/>
           </a:p>
@@ -7461,7 +7891,7 @@
                 <a:ea typeface="Arial" pitchFamily="34" charset="-122"/>
                 <a:cs typeface="Arial" pitchFamily="34" charset="-120"/>
               </a:rPr>
-              <a:t>Layoffs: Challenger, Gray &amp; Christmas via CNBC (Jun 5, 2026) &amp; CBS News — AI cited in ~40% of May cuts; 87.7k YTD</a:t>
+              <a:t>Layoffs: Challenger, Gray &amp; Christmas via CNBC (Jun 5, 2026) &amp; CBS News; AI cited in ~40% of May cuts; 87.7k YTD</a:t>
             </a:r>
             <a:endParaRPr lang="en-US" sz="720" dirty="0"/>
           </a:p>
@@ -7524,7 +7954,7 @@
                 <a:ea typeface="Arial" pitchFamily="34" charset="-122"/>
                 <a:cs typeface="Arial" pitchFamily="34" charset="-120"/>
               </a:rPr>
-              <a:t>Policy: Executive Order provisions, sovereign-wealth-fund proposals, Sacks critique — per the strategic review</a:t>
+              <a:t>Policy: Executive Order provisions, sovereign-wealth-fund proposals, Sacks critique, per the strategic review</a:t>
             </a:r>
             <a:endParaRPr lang="en-US" sz="720" dirty="0"/>
           </a:p>
@@ -7689,7 +8119,7 @@
                 <a:ea typeface="Arial" pitchFamily="34" charset="-122"/>
                 <a:cs typeface="Arial" pitchFamily="34" charset="-120"/>
               </a:rPr>
-              <a:t>Frontier watch: embodiment, orbital compute, robotaxis, AI biology — speculative</a:t>
+              <a:t>Frontier watch: embodiment, orbital compute, robotaxis, AI biology; speculative</a:t>
             </a:r>
             <a:endParaRPr lang="en-US" sz="720" dirty="0"/>
           </a:p>
@@ -7728,7 +8158,7 @@
                 <a:ea typeface="Arial" pitchFamily="34" charset="-122"/>
                 <a:cs typeface="Arial" pitchFamily="34" charset="-120"/>
               </a:rPr>
-              <a:t>Methodology: figures verified against at least one primary or institutional source; where sources disagreed, the more conservative figure was used. The Jevons chart (slide 4) is illustrative, not measured data. Layoff attributions to AI are self-reported by employers (Challenger) and may overstate causation. Frontier items (slide 12) are speculative and appear in no company guidance. Image placeholders are labeled in situ and pending final art. End of deck.</a:t>
+              <a:t>Methodology: figures verified against at least one primary or institutional source; where sources disagreed, the more conservative figure was used. The Jevons chart (slide 4) is illustrative, not measured data. Layoff attributions to AI are self-reported by employers (Challenger) and may overstate causation. Frontier items (slide 12) are speculative and appear in no company guidance. End of deck.</a:t>
             </a:r>
             <a:endParaRPr lang="en-US" sz="750" dirty="0"/>
           </a:p>
@@ -7959,7 +8389,7 @@
                 <a:ea typeface="Arial" pitchFamily="34" charset="-122"/>
                 <a:cs typeface="Arial" pitchFamily="34" charset="-120"/>
               </a:rPr>
-              <a:t>Capability, economics, and policy are moving at once. First what’s changing (slides 3–6) — then how markets are repricing it (slides 7–12).</a:t>
+              <a:t>Capability, economics, and policy are moving at once. First what’s changing (slides 3–6), then how markets are repricing it (slides 7–12).</a:t>
             </a:r>
             <a:endParaRPr lang="en-US" sz="1250" dirty="0"/>
           </a:p>
@@ -8222,7 +8652,7 @@
                 <a:ea typeface="Arial" pitchFamily="34" charset="-122"/>
                 <a:cs typeface="Arial" pitchFamily="34" charset="-120"/>
               </a:rPr>
-              <a:t>Anthropic run rate, 2026 — was $3B in 2025. Agentic capability, monetized at scale.</a:t>
+              <a:t>Anthropic run rate, 2026; was $3B in 2025. Agentic capability, monetized at scale.</a:t>
             </a:r>
             <a:endParaRPr lang="en-US" sz="750" dirty="0"/>
           </a:p>
@@ -8485,7 +8915,7 @@
                 <a:ea typeface="Arial" pitchFamily="34" charset="-122"/>
                 <a:cs typeface="Arial" pitchFamily="34" charset="-120"/>
               </a:rPr>
-              <a:t>What Google pays SpaceX to rent 110k GPUs — the market-clearing price of scarcity.</a:t>
+              <a:t>What Google pays SpaceX to rent 110k GPUs: the market-clearing price of scarcity.</a:t>
             </a:r>
             <a:endParaRPr lang="en-US" sz="750" dirty="0"/>
           </a:p>
@@ -8670,7 +9100,7 @@
                 <a:ea typeface="Arial" pitchFamily="34" charset="-122"/>
                 <a:cs typeface="Arial" pitchFamily="34" charset="-120"/>
               </a:rPr>
-              <a:t>Equity-tax proposals and pre-release reviews mean foundation models are now treated as sovereign assets — too important to leave private.</a:t>
+              <a:t>Equity-tax proposals and pre-release reviews mean foundation models are now treated as sovereign assets: too important to leave private.</a:t>
             </a:r>
             <a:endParaRPr lang="en-US" sz="900" dirty="0"/>
           </a:p>
@@ -8827,7 +9257,7 @@
                 <a:ea typeface="Arial" pitchFamily="34" charset="-122"/>
                 <a:cs typeface="Arial" pitchFamily="34" charset="-120"/>
               </a:rPr>
-              <a:t>The chatbot’s economics are exhausted. The stack is reorganizing around token-burning agentic loops — and markets are repricing around it.</a:t>
+              <a:t>The chatbot’s economics are exhausted. The stack is reorganizing around token-burning agentic loops, and markets are repricing around it.</a:t>
             </a:r>
             <a:endParaRPr lang="en-US" sz="1100" dirty="0"/>
           </a:p>
@@ -9039,7 +9469,7 @@
                 <a:ea typeface="Arial" pitchFamily="34" charset="-122"/>
                 <a:cs typeface="Arial" pitchFamily="34" charset="-120"/>
               </a:rPr>
-              <a:t>01  ·  WHAT’S HAPPENING  —  DIAGNOSTIC MATRIX</a:t>
+              <a:t>01  ·  WHAT’S HAPPENING  ·  DIAGNOSTIC MATRIX</a:t>
             </a:r>
             <a:endParaRPr lang="en-US" sz="900" dirty="0"/>
           </a:p>
@@ -9117,7 +9547,7 @@
                 <a:ea typeface="Arial" pitchFamily="34" charset="-122"/>
                 <a:cs typeface="Arial" pitchFamily="34" charset="-120"/>
               </a:rPr>
-              <a:t>Four dimensions where the shift from assisted to agentic shows up — each reprices differently.</a:t>
+              <a:t>Four dimensions where the shift from assisted to agentic shows up; each reprices differently.</a:t>
             </a:r>
             <a:endParaRPr lang="en-US" sz="1250" dirty="0"/>
           </a:p>
@@ -10315,7 +10745,7 @@
                 <a:ea typeface="Arial" pitchFamily="34" charset="-122"/>
                 <a:cs typeface="Arial" pitchFamily="34" charset="-120"/>
               </a:rPr>
-              <a:t>01  ·  WHAT’S HAPPENING  —  AGENTIC LOOPS</a:t>
+              <a:t>01  ·  WHAT’S HAPPENING  ·  AGENTIC LOOPS</a:t>
             </a:r>
             <a:endParaRPr lang="en-US" sz="900" dirty="0"/>
           </a:p>
@@ -10354,7 +10784,7 @@
                 <a:ea typeface="Arial Black" pitchFamily="34" charset="-122"/>
                 <a:cs typeface="Arial Black" pitchFamily="34" charset="-120"/>
               </a:rPr>
-              <a:t>From prompts to loops — demand has no ceiling</a:t>
+              <a:t>From prompts to loops: demand has no ceiling</a:t>
             </a:r>
             <a:endParaRPr lang="en-US" sz="2400" dirty="0"/>
           </a:p>
@@ -10393,7 +10823,7 @@
                 <a:ea typeface="Arial" pitchFamily="34" charset="-122"/>
                 <a:cs typeface="Arial" pitchFamily="34" charset="-120"/>
               </a:rPr>
-              <a:t>Agents try, fail, fix, and ship on their own. A loop burns orders of magnitude more tokens than a chat — and the Jevons curve does the rest.</a:t>
+              <a:t>Agents try, fail, fix, and ship on their own. A loop burns orders of magnitude more tokens than a chat, and the Jevons curve does the rest.</a:t>
             </a:r>
             <a:endParaRPr lang="en-US" sz="1250" dirty="0"/>
           </a:p>
@@ -11159,7 +11589,7 @@
                 <a:ea typeface="Arial" pitchFamily="34" charset="-122"/>
                 <a:cs typeface="Arial" pitchFamily="34" charset="-120"/>
               </a:rPr>
-              <a:t>Boris Cherny — the agentic workflow in one sentence</a:t>
+              <a:t>Boris Cherny, the agentic workflow in one sentence</a:t>
             </a:r>
             <a:endParaRPr lang="en-US" sz="700" dirty="0"/>
           </a:p>
@@ -11590,7 +12020,7 @@
                 <a:ea typeface="Arial" pitchFamily="34" charset="-122"/>
                 <a:cs typeface="Arial" pitchFamily="34" charset="-120"/>
               </a:rPr>
-              <a:t>Source: Internal strategic review, “The 2026 AI Frontier” (Jun 2026) — Cherny/Steinberger loops framing, Karpathy commentary, Codex “disposable software.” Jevons curve illustrative, not measured data.</a:t>
+              <a:t>Source: Internal strategic review, “The 2026 AI Frontier” (Jun 2026). Cherny/Steinberger loops framing, Karpathy commentary, Codex “disposable software.” Jevons curve illustrative, not measured data.</a:t>
             </a:r>
             <a:endParaRPr lang="en-US" sz="700" dirty="0"/>
           </a:p>
@@ -11802,7 +12232,7 @@
                 <a:ea typeface="Arial" pitchFamily="34" charset="-122"/>
                 <a:cs typeface="Arial" pitchFamily="34" charset="-120"/>
               </a:rPr>
-              <a:t>01  ·  WHAT’S HAPPENING  —  TOKEN RATIONING</a:t>
+              <a:t>01  ·  WHAT’S HAPPENING  ·  TOKEN RATIONING</a:t>
             </a:r>
             <a:endParaRPr lang="en-US" sz="900" dirty="0"/>
           </a:p>
@@ -11880,7 +12310,7 @@
                 <a:ea typeface="Arial" pitchFamily="34" charset="-122"/>
                 <a:cs typeface="Arial" pitchFamily="34" charset="-120"/>
               </a:rPr>
-              <a:t>Major firms are abandoning unlimited access and writing token budgets — rationing is what demand looks like when the input is scarce.</a:t>
+              <a:t>Major firms are abandoning unlimited access and writing token budgets; rationing is what demand looks like when the input is scarce.</a:t>
             </a:r>
             <a:endParaRPr lang="en-US" sz="1250" dirty="0"/>
           </a:p>
@@ -12012,7 +12442,7 @@
                 <a:ea typeface="Arial" pitchFamily="34" charset="-122"/>
                 <a:cs typeface="Arial" pitchFamily="34" charset="-120"/>
               </a:rPr>
-              <a:t>A hard $1,500/month token cap per employee replaced unlimited access — “eye-watering” agentic costs became a managed line item, not an experiment.</a:t>
+              <a:t>A hard $1,500/month token cap per employee replaced unlimited access; “eye-watering” agentic costs became a managed line item, not an experiment.</a:t>
             </a:r>
             <a:endParaRPr lang="en-US" sz="1050" dirty="0"/>
           </a:p>
@@ -12144,7 +12574,7 @@
                 <a:ea typeface="Arial" pitchFamily="34" charset="-122"/>
                 <a:cs typeface="Arial" pitchFamily="34" charset="-120"/>
               </a:rPr>
-              <a:t>“Code Puppy,” its agentic dev tool, moved from unlimited tokens to individual budgets plus efficiency training — absorbing the cost of the agentic shift.</a:t>
+              <a:t>“Code Puppy,” its agentic dev tool, moved from unlimited tokens to individual budgets plus efficiency training, absorbing the cost of the agentic shift.</a:t>
             </a:r>
             <a:endParaRPr lang="en-US" sz="1050" dirty="0"/>
           </a:p>
@@ -12262,7 +12692,7 @@
                 <a:ea typeface="Arial" pitchFamily="34" charset="-122"/>
                 <a:cs typeface="Arial" pitchFamily="34" charset="-120"/>
               </a:rPr>
-              <a:t>Scarcity is structural — and priced.  </a:t>
+              <a:t>Scarcity is structural, and priced.  </a:t>
             </a:r>
             <a:pPr indent="0" marL="0">
               <a:buNone/>
@@ -12297,13 +12727,13 @@
             <a:avLst/>
           </a:prstGeom>
           <a:solidFill>
-            <a:srgbClr val="1E1E24"/>
+            <a:srgbClr val="1C1C20"/>
           </a:solidFill>
           <a:ln w="12700">
             <a:solidFill>
               <a:srgbClr val="2A2A30"/>
             </a:solidFill>
-            <a:prstDash val="dash"/>
+            <a:prstDash val="solid"/>
           </a:ln>
         </p:spPr>
       </p:sp>
@@ -12316,7 +12746,7 @@
         <p:spPr>
           <a:xfrm>
             <a:off x="6080760" y="1517904"/>
-            <a:ext cx="274320" cy="32004"/>
+            <a:ext cx="2606040" cy="54864"/>
           </a:xfrm>
           <a:prstGeom prst="rect">
             <a:avLst/>
@@ -12329,14 +12759,448 @@
       </p:sp>
       <p:sp>
         <p:nvSpPr>
-          <p:cNvPr id="20" name="Shape 18"/>
-          <p:cNvSpPr/>
-          <p:nvPr/>
-        </p:nvSpPr>
-        <p:spPr>
-          <a:xfrm>
-            <a:off x="6080760" y="1517904"/>
-            <a:ext cx="32004" cy="274320"/>
+          <p:cNvPr id="20" name="Text 18"/>
+          <p:cNvSpPr/>
+          <p:nvPr/>
+        </p:nvSpPr>
+        <p:spPr>
+          <a:xfrm>
+            <a:off x="6245352" y="1664208"/>
+            <a:ext cx="2276856" cy="164592"/>
+          </a:xfrm>
+          <a:prstGeom prst="rect">
+            <a:avLst/>
+          </a:prstGeom>
+          <a:noFill/>
+          <a:ln/>
+        </p:spPr>
+        <p:txBody>
+          <a:bodyPr wrap="square" lIns="0" tIns="0" rIns="0" bIns="0" rtlCol="0" anchor="ctr"/>
+          <a:lstStyle/>
+          <a:p>
+            <a:pPr indent="0" marL="0">
+              <a:buNone/>
+            </a:pPr>
+            <a:r>
+              <a:rPr lang="en-US" sz="720" b="1" spc="200" kern="0" dirty="0">
+                <a:solidFill>
+                  <a:srgbClr val="FFB800"/>
+                </a:solidFill>
+                <a:latin typeface="Arial" pitchFamily="34" charset="0"/>
+                <a:ea typeface="Arial" pitchFamily="34" charset="-122"/>
+                <a:cs typeface="Arial" pitchFamily="34" charset="-120"/>
+              </a:rPr>
+              <a:t>TOKEN BUDGET METER</a:t>
+            </a:r>
+            <a:endParaRPr lang="en-US" sz="720" dirty="0"/>
+          </a:p>
+        </p:txBody>
+      </p:sp>
+      <p:sp>
+        <p:nvSpPr>
+          <p:cNvPr id="21" name="Shape 19"/>
+          <p:cNvSpPr/>
+          <p:nvPr/>
+        </p:nvSpPr>
+        <p:spPr>
+          <a:xfrm>
+            <a:off x="6281928" y="1975104"/>
+            <a:ext cx="256032" cy="320040"/>
+          </a:xfrm>
+          <a:prstGeom prst="rect">
+            <a:avLst/>
+          </a:prstGeom>
+          <a:solidFill>
+            <a:srgbClr val="000000"/>
+          </a:solidFill>
+          <a:ln w="9525">
+            <a:solidFill>
+              <a:srgbClr val="2A2A30"/>
+            </a:solidFill>
+            <a:prstDash val="solid"/>
+          </a:ln>
+        </p:spPr>
+      </p:sp>
+      <p:sp>
+        <p:nvSpPr>
+          <p:cNvPr id="22" name="Text 20"/>
+          <p:cNvSpPr/>
+          <p:nvPr/>
+        </p:nvSpPr>
+        <p:spPr>
+          <a:xfrm>
+            <a:off x="6281928" y="2039112"/>
+            <a:ext cx="256032" cy="146304"/>
+          </a:xfrm>
+          <a:prstGeom prst="rect">
+            <a:avLst/>
+          </a:prstGeom>
+          <a:noFill/>
+          <a:ln/>
+        </p:spPr>
+        <p:txBody>
+          <a:bodyPr wrap="square" lIns="0" tIns="0" rIns="0" bIns="0" rtlCol="0" anchor="ctr"/>
+          <a:lstStyle/>
+          <a:p>
+            <a:pPr algn="ctr" indent="0" marL="0">
+              <a:buNone/>
+            </a:pPr>
+            <a:r>
+              <a:rPr lang="en-US" sz="1000" b="1" dirty="0">
+                <a:solidFill>
+                  <a:srgbClr val="FFFFFF"/>
+                </a:solidFill>
+                <a:latin typeface="Arial Black" pitchFamily="34" charset="0"/>
+                <a:ea typeface="Arial Black" pitchFamily="34" charset="-122"/>
+                <a:cs typeface="Arial Black" pitchFamily="34" charset="-120"/>
+              </a:rPr>
+              <a:t>1</a:t>
+            </a:r>
+            <a:endParaRPr lang="en-US" sz="1000" dirty="0"/>
+          </a:p>
+        </p:txBody>
+      </p:sp>
+      <p:sp>
+        <p:nvSpPr>
+          <p:cNvPr id="23" name="Shape 21"/>
+          <p:cNvSpPr/>
+          <p:nvPr/>
+        </p:nvSpPr>
+        <p:spPr>
+          <a:xfrm>
+            <a:off x="6592824" y="1975104"/>
+            <a:ext cx="256032" cy="320040"/>
+          </a:xfrm>
+          <a:prstGeom prst="rect">
+            <a:avLst/>
+          </a:prstGeom>
+          <a:solidFill>
+            <a:srgbClr val="000000"/>
+          </a:solidFill>
+          <a:ln w="9525">
+            <a:solidFill>
+              <a:srgbClr val="2A2A30"/>
+            </a:solidFill>
+            <a:prstDash val="solid"/>
+          </a:ln>
+        </p:spPr>
+      </p:sp>
+      <p:sp>
+        <p:nvSpPr>
+          <p:cNvPr id="24" name="Text 22"/>
+          <p:cNvSpPr/>
+          <p:nvPr/>
+        </p:nvSpPr>
+        <p:spPr>
+          <a:xfrm>
+            <a:off x="6592824" y="2039112"/>
+            <a:ext cx="256032" cy="146304"/>
+          </a:xfrm>
+          <a:prstGeom prst="rect">
+            <a:avLst/>
+          </a:prstGeom>
+          <a:noFill/>
+          <a:ln/>
+        </p:spPr>
+        <p:txBody>
+          <a:bodyPr wrap="square" lIns="0" tIns="0" rIns="0" bIns="0" rtlCol="0" anchor="ctr"/>
+          <a:lstStyle/>
+          <a:p>
+            <a:pPr algn="ctr" indent="0" marL="0">
+              <a:buNone/>
+            </a:pPr>
+            <a:r>
+              <a:rPr lang="en-US" sz="1000" b="1" dirty="0">
+                <a:solidFill>
+                  <a:srgbClr val="FFFFFF"/>
+                </a:solidFill>
+                <a:latin typeface="Arial Black" pitchFamily="34" charset="0"/>
+                <a:ea typeface="Arial Black" pitchFamily="34" charset="-122"/>
+                <a:cs typeface="Arial Black" pitchFamily="34" charset="-120"/>
+              </a:rPr>
+              <a:t>5</a:t>
+            </a:r>
+            <a:endParaRPr lang="en-US" sz="1000" dirty="0"/>
+          </a:p>
+        </p:txBody>
+      </p:sp>
+      <p:sp>
+        <p:nvSpPr>
+          <p:cNvPr id="25" name="Shape 23"/>
+          <p:cNvSpPr/>
+          <p:nvPr/>
+        </p:nvSpPr>
+        <p:spPr>
+          <a:xfrm>
+            <a:off x="6903720" y="1975104"/>
+            <a:ext cx="256032" cy="320040"/>
+          </a:xfrm>
+          <a:prstGeom prst="rect">
+            <a:avLst/>
+          </a:prstGeom>
+          <a:solidFill>
+            <a:srgbClr val="000000"/>
+          </a:solidFill>
+          <a:ln w="9525">
+            <a:solidFill>
+              <a:srgbClr val="2A2A30"/>
+            </a:solidFill>
+            <a:prstDash val="solid"/>
+          </a:ln>
+        </p:spPr>
+      </p:sp>
+      <p:sp>
+        <p:nvSpPr>
+          <p:cNvPr id="26" name="Text 24"/>
+          <p:cNvSpPr/>
+          <p:nvPr/>
+        </p:nvSpPr>
+        <p:spPr>
+          <a:xfrm>
+            <a:off x="6903720" y="2039112"/>
+            <a:ext cx="256032" cy="146304"/>
+          </a:xfrm>
+          <a:prstGeom prst="rect">
+            <a:avLst/>
+          </a:prstGeom>
+          <a:noFill/>
+          <a:ln/>
+        </p:spPr>
+        <p:txBody>
+          <a:bodyPr wrap="square" lIns="0" tIns="0" rIns="0" bIns="0" rtlCol="0" anchor="ctr"/>
+          <a:lstStyle/>
+          <a:p>
+            <a:pPr algn="ctr" indent="0" marL="0">
+              <a:buNone/>
+            </a:pPr>
+            <a:r>
+              <a:rPr lang="en-US" sz="1000" b="1" dirty="0">
+                <a:solidFill>
+                  <a:srgbClr val="FFFFFF"/>
+                </a:solidFill>
+                <a:latin typeface="Arial Black" pitchFamily="34" charset="0"/>
+                <a:ea typeface="Arial Black" pitchFamily="34" charset="-122"/>
+                <a:cs typeface="Arial Black" pitchFamily="34" charset="-120"/>
+              </a:rPr>
+              <a:t>0</a:t>
+            </a:r>
+            <a:endParaRPr lang="en-US" sz="1000" dirty="0"/>
+          </a:p>
+        </p:txBody>
+      </p:sp>
+      <p:sp>
+        <p:nvSpPr>
+          <p:cNvPr id="27" name="Shape 25"/>
+          <p:cNvSpPr/>
+          <p:nvPr/>
+        </p:nvSpPr>
+        <p:spPr>
+          <a:xfrm>
+            <a:off x="7214616" y="1975104"/>
+            <a:ext cx="256032" cy="320040"/>
+          </a:xfrm>
+          <a:prstGeom prst="rect">
+            <a:avLst/>
+          </a:prstGeom>
+          <a:solidFill>
+            <a:srgbClr val="000000"/>
+          </a:solidFill>
+          <a:ln w="9525">
+            <a:solidFill>
+              <a:srgbClr val="2A2A30"/>
+            </a:solidFill>
+            <a:prstDash val="solid"/>
+          </a:ln>
+        </p:spPr>
+      </p:sp>
+      <p:sp>
+        <p:nvSpPr>
+          <p:cNvPr id="28" name="Text 26"/>
+          <p:cNvSpPr/>
+          <p:nvPr/>
+        </p:nvSpPr>
+        <p:spPr>
+          <a:xfrm>
+            <a:off x="7214616" y="2039112"/>
+            <a:ext cx="256032" cy="146304"/>
+          </a:xfrm>
+          <a:prstGeom prst="rect">
+            <a:avLst/>
+          </a:prstGeom>
+          <a:noFill/>
+          <a:ln/>
+        </p:spPr>
+        <p:txBody>
+          <a:bodyPr wrap="square" lIns="0" tIns="0" rIns="0" bIns="0" rtlCol="0" anchor="ctr"/>
+          <a:lstStyle/>
+          <a:p>
+            <a:pPr algn="ctr" indent="0" marL="0">
+              <a:buNone/>
+            </a:pPr>
+            <a:r>
+              <a:rPr lang="en-US" sz="1000" b="1" dirty="0">
+                <a:solidFill>
+                  <a:srgbClr val="FFFFFF"/>
+                </a:solidFill>
+                <a:latin typeface="Arial Black" pitchFamily="34" charset="0"/>
+                <a:ea typeface="Arial Black" pitchFamily="34" charset="-122"/>
+                <a:cs typeface="Arial Black" pitchFamily="34" charset="-120"/>
+              </a:rPr>
+              <a:t>0</a:t>
+            </a:r>
+            <a:endParaRPr lang="en-US" sz="1000" dirty="0"/>
+          </a:p>
+        </p:txBody>
+      </p:sp>
+      <p:sp>
+        <p:nvSpPr>
+          <p:cNvPr id="29" name="Text 27"/>
+          <p:cNvSpPr/>
+          <p:nvPr/>
+        </p:nvSpPr>
+        <p:spPr>
+          <a:xfrm>
+            <a:off x="7616952" y="2048256"/>
+            <a:ext cx="868680" cy="201168"/>
+          </a:xfrm>
+          <a:prstGeom prst="rect">
+            <a:avLst/>
+          </a:prstGeom>
+          <a:noFill/>
+          <a:ln/>
+        </p:spPr>
+        <p:txBody>
+          <a:bodyPr wrap="square" lIns="0" tIns="0" rIns="0" bIns="0" rtlCol="0" anchor="ctr"/>
+          <a:lstStyle/>
+          <a:p>
+            <a:pPr indent="0" marL="0">
+              <a:buNone/>
+            </a:pPr>
+            <a:r>
+              <a:rPr lang="en-US" sz="720" dirty="0">
+                <a:solidFill>
+                  <a:srgbClr val="9A9AA0"/>
+                </a:solidFill>
+                <a:latin typeface="Arial" pitchFamily="34" charset="0"/>
+                <a:ea typeface="Arial" pitchFamily="34" charset="-122"/>
+                <a:cs typeface="Arial" pitchFamily="34" charset="-120"/>
+              </a:rPr>
+              <a:t>$ / employee / month</a:t>
+            </a:r>
+            <a:endParaRPr lang="en-US" sz="720" dirty="0"/>
+          </a:p>
+        </p:txBody>
+      </p:sp>
+      <p:sp>
+        <p:nvSpPr>
+          <p:cNvPr id="30" name="Shape 28"/>
+          <p:cNvSpPr/>
+          <p:nvPr/>
+        </p:nvSpPr>
+        <p:spPr>
+          <a:xfrm>
+            <a:off x="6336792" y="2629814"/>
+            <a:ext cx="219456" cy="149962"/>
+          </a:xfrm>
+          <a:prstGeom prst="rect">
+            <a:avLst/>
+          </a:prstGeom>
+          <a:solidFill>
+            <a:srgbClr val="F6693D"/>
+          </a:solidFill>
+          <a:ln w="12700">
+            <a:solidFill>
+              <a:srgbClr val="F6693D"/>
+            </a:solidFill>
+            <a:prstDash val="solid"/>
+          </a:ln>
+        </p:spPr>
+      </p:sp>
+      <p:sp>
+        <p:nvSpPr>
+          <p:cNvPr id="31" name="Shape 29"/>
+          <p:cNvSpPr/>
+          <p:nvPr/>
+        </p:nvSpPr>
+        <p:spPr>
+          <a:xfrm>
+            <a:off x="6629400" y="2601651"/>
+            <a:ext cx="219456" cy="178125"/>
+          </a:xfrm>
+          <a:prstGeom prst="rect">
+            <a:avLst/>
+          </a:prstGeom>
+          <a:solidFill>
+            <a:srgbClr val="F6693D"/>
+          </a:solidFill>
+          <a:ln w="12700">
+            <a:solidFill>
+              <a:srgbClr val="F6693D"/>
+            </a:solidFill>
+            <a:prstDash val="solid"/>
+          </a:ln>
+        </p:spPr>
+      </p:sp>
+      <p:sp>
+        <p:nvSpPr>
+          <p:cNvPr id="32" name="Shape 30"/>
+          <p:cNvSpPr/>
+          <p:nvPr/>
+        </p:nvSpPr>
+        <p:spPr>
+          <a:xfrm>
+            <a:off x="6922008" y="2569464"/>
+            <a:ext cx="219456" cy="210312"/>
+          </a:xfrm>
+          <a:prstGeom prst="rect">
+            <a:avLst/>
+          </a:prstGeom>
+          <a:solidFill>
+            <a:srgbClr val="F6693D"/>
+          </a:solidFill>
+          <a:ln w="12700">
+            <a:solidFill>
+              <a:srgbClr val="F6693D"/>
+            </a:solidFill>
+            <a:prstDash val="solid"/>
+          </a:ln>
+        </p:spPr>
+      </p:sp>
+      <p:sp>
+        <p:nvSpPr>
+          <p:cNvPr id="33" name="Shape 31"/>
+          <p:cNvSpPr/>
+          <p:nvPr/>
+        </p:nvSpPr>
+        <p:spPr>
+          <a:xfrm>
+            <a:off x="7214616" y="2545324"/>
+            <a:ext cx="219456" cy="234452"/>
+          </a:xfrm>
+          <a:prstGeom prst="rect">
+            <a:avLst/>
+          </a:prstGeom>
+          <a:solidFill>
+            <a:srgbClr val="F6693D"/>
+          </a:solidFill>
+          <a:ln w="12700">
+            <a:solidFill>
+              <a:srgbClr val="F6693D"/>
+            </a:solidFill>
+            <a:prstDash val="solid"/>
+          </a:ln>
+        </p:spPr>
+      </p:sp>
+      <p:sp>
+        <p:nvSpPr>
+          <p:cNvPr id="34" name="Shape 32"/>
+          <p:cNvSpPr/>
+          <p:nvPr/>
+        </p:nvSpPr>
+        <p:spPr>
+          <a:xfrm>
+            <a:off x="7507224" y="2509114"/>
+            <a:ext cx="219456" cy="270662"/>
           </a:xfrm>
           <a:prstGeom prst="rect">
             <a:avLst/>
@@ -12344,19 +13208,24 @@
           <a:solidFill>
             <a:srgbClr val="FFB800"/>
           </a:solidFill>
-          <a:ln/>
-        </p:spPr>
-      </p:sp>
-      <p:sp>
-        <p:nvSpPr>
-          <p:cNvPr id="21" name="Shape 19"/>
-          <p:cNvSpPr/>
-          <p:nvPr/>
-        </p:nvSpPr>
-        <p:spPr>
-          <a:xfrm>
-            <a:off x="8412480" y="2766060"/>
-            <a:ext cx="274320" cy="32004"/>
+          <a:ln w="12700">
+            <a:solidFill>
+              <a:srgbClr val="FFB800"/>
+            </a:solidFill>
+            <a:prstDash val="solid"/>
+          </a:ln>
+        </p:spPr>
+      </p:sp>
+      <p:sp>
+        <p:nvSpPr>
+          <p:cNvPr id="35" name="Shape 33"/>
+          <p:cNvSpPr/>
+          <p:nvPr/>
+        </p:nvSpPr>
+        <p:spPr>
+          <a:xfrm>
+            <a:off x="7799832" y="2468880"/>
+            <a:ext cx="219456" cy="310896"/>
           </a:xfrm>
           <a:prstGeom prst="rect">
             <a:avLst/>
@@ -12364,46 +13233,9 @@
           <a:solidFill>
             <a:srgbClr val="FFB800"/>
           </a:solidFill>
-          <a:ln/>
-        </p:spPr>
-      </p:sp>
-      <p:sp>
-        <p:nvSpPr>
-          <p:cNvPr id="22" name="Shape 20"/>
-          <p:cNvSpPr/>
-          <p:nvPr/>
-        </p:nvSpPr>
-        <p:spPr>
-          <a:xfrm>
-            <a:off x="8654796" y="2523744"/>
-            <a:ext cx="32004" cy="274320"/>
-          </a:xfrm>
-          <a:prstGeom prst="rect">
-            <a:avLst/>
-          </a:prstGeom>
-          <a:solidFill>
-            <a:srgbClr val="FFB800"/>
-          </a:solidFill>
-          <a:ln/>
-        </p:spPr>
-      </p:sp>
-      <p:sp>
-        <p:nvSpPr>
-          <p:cNvPr id="23" name="Shape 21"/>
-          <p:cNvSpPr/>
-          <p:nvPr/>
-        </p:nvSpPr>
-        <p:spPr>
-          <a:xfrm>
-            <a:off x="7063740" y="1719072"/>
-            <a:ext cx="640080" cy="347472"/>
-          </a:xfrm>
-          <a:prstGeom prst="triangle">
-            <a:avLst/>
-          </a:prstGeom>
-          <a:ln w="19050">
+          <a:ln w="12700">
             <a:solidFill>
-              <a:srgbClr val="9A9AA0"/>
+              <a:srgbClr val="FFB800"/>
             </a:solidFill>
             <a:prstDash val="solid"/>
           </a:ln>
@@ -12411,107 +13243,7 @@
       </p:sp>
       <p:sp>
         <p:nvSpPr>
-          <p:cNvPr id="24" name="Shape 22"/>
-          <p:cNvSpPr/>
-          <p:nvPr/>
-        </p:nvSpPr>
-        <p:spPr>
-          <a:xfrm>
-            <a:off x="7511796" y="1591056"/>
-            <a:ext cx="146304" cy="146304"/>
-          </a:xfrm>
-          <a:prstGeom prst="ellipse">
-            <a:avLst/>
-          </a:prstGeom>
-          <a:ln w="19050">
-            <a:solidFill>
-              <a:srgbClr val="9A9AA0"/>
-            </a:solidFill>
-            <a:prstDash val="solid"/>
-          </a:ln>
-        </p:spPr>
-      </p:sp>
-      <p:sp>
-        <p:nvSpPr>
-          <p:cNvPr id="25" name="Text 23"/>
-          <p:cNvSpPr/>
-          <p:nvPr/>
-        </p:nvSpPr>
-        <p:spPr>
-          <a:xfrm>
-            <a:off x="6172200" y="2176272"/>
-            <a:ext cx="2423160" cy="219456"/>
-          </a:xfrm>
-          <a:prstGeom prst="rect">
-            <a:avLst/>
-          </a:prstGeom>
-          <a:noFill/>
-          <a:ln/>
-        </p:spPr>
-        <p:txBody>
-          <a:bodyPr wrap="square" lIns="0" tIns="0" rIns="0" bIns="0" rtlCol="0" anchor="ctr"/>
-          <a:lstStyle/>
-          <a:p>
-            <a:pPr algn="ctr" indent="0" marL="0">
-              <a:buNone/>
-            </a:pPr>
-            <a:r>
-              <a:rPr lang="en-US" sz="800" b="1" spc="200" kern="0" dirty="0">
-                <a:solidFill>
-                  <a:srgbClr val="FFB800"/>
-                </a:solidFill>
-                <a:latin typeface="Arial" pitchFamily="34" charset="0"/>
-                <a:ea typeface="Arial" pitchFamily="34" charset="-122"/>
-                <a:cs typeface="Arial" pitchFamily="34" charset="-120"/>
-              </a:rPr>
-              <a:t>IMAGE — TOKEN METER</a:t>
-            </a:r>
-            <a:endParaRPr lang="en-US" sz="800" dirty="0"/>
-          </a:p>
-        </p:txBody>
-      </p:sp>
-      <p:sp>
-        <p:nvSpPr>
-          <p:cNvPr id="26" name="Text 24"/>
-          <p:cNvSpPr/>
-          <p:nvPr/>
-        </p:nvSpPr>
-        <p:spPr>
-          <a:xfrm>
-            <a:off x="6263640" y="2432304"/>
-            <a:ext cx="2240280" cy="594360"/>
-          </a:xfrm>
-          <a:prstGeom prst="rect">
-            <a:avLst/>
-          </a:prstGeom>
-          <a:noFill/>
-          <a:ln/>
-        </p:spPr>
-        <p:txBody>
-          <a:bodyPr wrap="square" lIns="0" tIns="0" rIns="0" bIns="0" rtlCol="0" anchor="t"/>
-          <a:lstStyle/>
-          <a:p>
-            <a:pPr algn="ctr" indent="0" marL="0">
-              <a:buNone/>
-            </a:pPr>
-            <a:r>
-              <a:rPr lang="en-US" sz="700" i="1" dirty="0">
-                <a:solidFill>
-                  <a:srgbClr val="9A9AA0"/>
-                </a:solidFill>
-                <a:latin typeface="Arial" pitchFamily="34" charset="0"/>
-                <a:ea typeface="Arial" pitchFamily="34" charset="-122"/>
-                <a:cs typeface="Arial" pitchFamily="34" charset="-120"/>
-              </a:rPr>
-              <a:t>Industrial utility meter for the AI era — glowing gold digits, a stream of tokens flowing in, dark brushed metal.</a:t>
-            </a:r>
-            <a:endParaRPr lang="en-US" sz="700" dirty="0"/>
-          </a:p>
-        </p:txBody>
-      </p:sp>
-      <p:sp>
-        <p:nvSpPr>
-          <p:cNvPr id="27" name="Shape 25"/>
+          <p:cNvPr id="36" name="Shape 34"/>
           <p:cNvSpPr/>
           <p:nvPr/>
         </p:nvSpPr>
@@ -12536,7 +13268,7 @@
       </p:sp>
       <p:sp>
         <p:nvSpPr>
-          <p:cNvPr id="28" name="Text 26"/>
+          <p:cNvPr id="37" name="Text 35"/>
           <p:cNvSpPr/>
           <p:nvPr/>
         </p:nvSpPr>
@@ -12575,7 +13307,7 @@
       </p:sp>
       <p:sp>
         <p:nvSpPr>
-          <p:cNvPr id="29" name="Text 27"/>
+          <p:cNvPr id="38" name="Text 36"/>
           <p:cNvSpPr/>
           <p:nvPr/>
         </p:nvSpPr>
@@ -12637,7 +13369,7 @@
       </p:sp>
       <p:sp>
         <p:nvSpPr>
-          <p:cNvPr id="30" name="Text 28"/>
+          <p:cNvPr id="39" name="Text 37"/>
           <p:cNvSpPr/>
           <p:nvPr/>
         </p:nvSpPr>
@@ -12668,7 +13400,7 @@
                 <a:ea typeface="Arial" pitchFamily="34" charset="-122"/>
                 <a:cs typeface="Arial" pitchFamily="34" charset="-120"/>
               </a:rPr>
-              <a:t>Source: Internal strategic review, “The 2026 AI Frontier” (Jun 2026) — Uber and Walmart cost-management cases; SK Hynix HBM outlook; Google/SpaceX GPU rental.</a:t>
+              <a:t>Source: Internal strategic review, “The 2026 AI Frontier” (Jun 2026). Uber and Walmart cost-management cases; SK Hynix HBM outlook; Google/SpaceX GPU rental.</a:t>
             </a:r>
             <a:endParaRPr lang="en-US" sz="700" dirty="0"/>
           </a:p>
@@ -12676,7 +13408,7 @@
       </p:sp>
       <p:sp>
         <p:nvSpPr>
-          <p:cNvPr id="31" name="Shape 29"/>
+          <p:cNvPr id="40" name="Shape 38"/>
           <p:cNvSpPr/>
           <p:nvPr/>
         </p:nvSpPr>
@@ -12696,7 +13428,7 @@
       </p:sp>
       <p:sp>
         <p:nvSpPr>
-          <p:cNvPr id="32" name="Shape 30"/>
+          <p:cNvPr id="41" name="Shape 39"/>
           <p:cNvSpPr/>
           <p:nvPr/>
         </p:nvSpPr>
@@ -12719,7 +13451,7 @@
       </p:sp>
       <p:sp>
         <p:nvSpPr>
-          <p:cNvPr id="33" name="Text 31"/>
+          <p:cNvPr id="42" name="Text 40"/>
           <p:cNvSpPr/>
           <p:nvPr/>
         </p:nvSpPr>
@@ -12758,7 +13490,7 @@
       </p:sp>
       <p:sp>
         <p:nvSpPr>
-          <p:cNvPr id="34" name="Text 32"/>
+          <p:cNvPr id="43" name="Text 41"/>
           <p:cNvSpPr/>
           <p:nvPr/>
         </p:nvSpPr>
@@ -12880,7 +13612,7 @@
                 <a:ea typeface="Arial" pitchFamily="34" charset="-122"/>
                 <a:cs typeface="Arial" pitchFamily="34" charset="-120"/>
               </a:rPr>
-              <a:t>01  ·  WHAT’S HAPPENING  —  POLICY</a:t>
+              <a:t>01  ·  WHAT’S HAPPENING  ·  POLICY</a:t>
             </a:r>
             <a:endParaRPr lang="en-US" sz="900" dirty="0"/>
           </a:p>
@@ -12919,7 +13651,7 @@
                 <a:ea typeface="Arial Black" pitchFamily="34" charset="-122"/>
                 <a:cs typeface="Arial Black" pitchFamily="34" charset="-120"/>
               </a:rPr>
-              <a:t>Washington wants a stake</a:t>
+              <a:t>Governments want a stake</a:t>
             </a:r>
             <a:endParaRPr lang="en-US" sz="2600" dirty="0"/>
           </a:p>
@@ -12958,7 +13690,7 @@
                 <a:ea typeface="Arial" pitchFamily="34" charset="-122"/>
                 <a:cs typeface="Arial" pitchFamily="34" charset="-120"/>
               </a:rPr>
-              <a:t>Trump, Bannon, and Sanders converge on oversight and public participation in the AI upside — ownership, not regulation, is now the debate.</a:t>
+              <a:t>From Washington to Seoul, the debate shifted from regulating AI to owning a piece of it. Markets priced the Korea proposal in hours.</a:t>
             </a:r>
             <a:endParaRPr lang="en-US" sz="1250" dirty="0"/>
           </a:p>
@@ -12966,14 +13698,53 @@
       </p:sp>
       <p:sp>
         <p:nvSpPr>
-          <p:cNvPr id="6" name="Shape 4"/>
-          <p:cNvSpPr/>
-          <p:nvPr/>
-        </p:nvSpPr>
-        <p:spPr>
-          <a:xfrm>
-            <a:off x="457200" y="1463040"/>
-            <a:ext cx="5486400" cy="768096"/>
+          <p:cNvPr id="6" name="Text 4"/>
+          <p:cNvSpPr/>
+          <p:nvPr/>
+        </p:nvSpPr>
+        <p:spPr>
+          <a:xfrm>
+            <a:off x="457200" y="1417320"/>
+            <a:ext cx="4297680" cy="182880"/>
+          </a:xfrm>
+          <a:prstGeom prst="rect">
+            <a:avLst/>
+          </a:prstGeom>
+          <a:noFill/>
+          <a:ln/>
+        </p:spPr>
+        <p:txBody>
+          <a:bodyPr wrap="square" lIns="0" tIns="0" rIns="0" bIns="0" rtlCol="0" anchor="ctr"/>
+          <a:lstStyle/>
+          <a:p>
+            <a:pPr indent="0" marL="0">
+              <a:buNone/>
+            </a:pPr>
+            <a:r>
+              <a:rPr lang="en-US" sz="800" b="1" spc="200" kern="0" dirty="0">
+                <a:solidFill>
+                  <a:srgbClr val="9B7BE0"/>
+                </a:solidFill>
+                <a:latin typeface="Arial" pitchFamily="34" charset="0"/>
+                <a:ea typeface="Arial" pitchFamily="34" charset="-122"/>
+                <a:cs typeface="Arial" pitchFamily="34" charset="-120"/>
+              </a:rPr>
+              <a:t>UNITED STATES</a:t>
+            </a:r>
+            <a:endParaRPr lang="en-US" sz="800" dirty="0"/>
+          </a:p>
+        </p:txBody>
+      </p:sp>
+      <p:sp>
+        <p:nvSpPr>
+          <p:cNvPr id="7" name="Shape 5"/>
+          <p:cNvSpPr/>
+          <p:nvPr/>
+        </p:nvSpPr>
+        <p:spPr>
+          <a:xfrm>
+            <a:off x="457200" y="1664208"/>
+            <a:ext cx="4297680" cy="658368"/>
           </a:xfrm>
           <a:prstGeom prst="rect">
             <a:avLst/>
@@ -12986,14 +13757,14 @@
       </p:sp>
       <p:sp>
         <p:nvSpPr>
-          <p:cNvPr id="7" name="Shape 5"/>
-          <p:cNvSpPr/>
-          <p:nvPr/>
-        </p:nvSpPr>
-        <p:spPr>
-          <a:xfrm>
-            <a:off x="457200" y="1463040"/>
-            <a:ext cx="64008" cy="768096"/>
+          <p:cNvPr id="8" name="Shape 6"/>
+          <p:cNvSpPr/>
+          <p:nvPr/>
+        </p:nvSpPr>
+        <p:spPr>
+          <a:xfrm>
+            <a:off x="457200" y="1664208"/>
+            <a:ext cx="64008" cy="658368"/>
           </a:xfrm>
           <a:prstGeom prst="rect">
             <a:avLst/>
@@ -13006,14 +13777,14 @@
       </p:sp>
       <p:sp>
         <p:nvSpPr>
-          <p:cNvPr id="8" name="Text 6"/>
-          <p:cNvSpPr/>
-          <p:nvPr/>
-        </p:nvSpPr>
-        <p:spPr>
-          <a:xfrm>
-            <a:off x="621792" y="1536192"/>
-            <a:ext cx="5212080" cy="182880"/>
+          <p:cNvPr id="9" name="Text 7"/>
+          <p:cNvSpPr/>
+          <p:nvPr/>
+        </p:nvSpPr>
+        <p:spPr>
+          <a:xfrm>
+            <a:off x="621792" y="1737360"/>
+            <a:ext cx="4023360" cy="182880"/>
           </a:xfrm>
           <a:prstGeom prst="rect">
             <a:avLst/>
@@ -13037,7 +13808,7 @@
                 <a:ea typeface="Arial" pitchFamily="34" charset="-122"/>
                 <a:cs typeface="Arial" pitchFamily="34" charset="-120"/>
               </a:rPr>
-              <a:t>THE EXECUTIVE ORDER</a:t>
+              <a:t>EXECUTIVE ORDER</a:t>
             </a:r>
             <a:endParaRPr lang="en-US" sz="750" dirty="0"/>
           </a:p>
@@ -13045,14 +13816,14 @@
       </p:sp>
       <p:sp>
         <p:nvSpPr>
-          <p:cNvPr id="9" name="Text 7"/>
-          <p:cNvSpPr/>
-          <p:nvPr/>
-        </p:nvSpPr>
-        <p:spPr>
-          <a:xfrm>
-            <a:off x="621792" y="1737360"/>
-            <a:ext cx="5157216" cy="402336"/>
+          <p:cNvPr id="10" name="Text 8"/>
+          <p:cNvSpPr/>
+          <p:nvPr/>
+        </p:nvSpPr>
+        <p:spPr>
+          <a:xfrm>
+            <a:off x="621792" y="1938528"/>
+            <a:ext cx="3968496" cy="292608"/>
           </a:xfrm>
           <a:prstGeom prst="rect">
             <a:avLst/>
@@ -13076,7 +13847,7 @@
                 <a:ea typeface="Arial" pitchFamily="34" charset="-122"/>
                 <a:cs typeface="Arial" pitchFamily="34" charset="-120"/>
               </a:rPr>
-              <a:t>A 30-day federal checkpoint.  </a:t>
+              <a:t>30-day NSA checkpoint.  </a:t>
             </a:r>
             <a:pPr indent="0" marL="0">
               <a:buNone/>
@@ -13090,7 +13861,7 @@
                 <a:ea typeface="Arial" pitchFamily="34" charset="-122"/>
                 <a:cs typeface="Arial" pitchFamily="34" charset="-120"/>
               </a:rPr>
-              <a:t>Voluntary but high-pressure NSA review — 30 days, down from 90 — before releasing models with a “meaningful step change” in cyber capability. Mandatory licensing expressly forbidden — for now.</a:t>
+              <a:t>Voluntary pre-release review before deploying models with a step change in cyber capability. Mandatory licensing expressly forbidden, for now.</a:t>
             </a:r>
             <a:endParaRPr lang="en-US" sz="1050" dirty="0"/>
           </a:p>
@@ -13098,14 +13869,14 @@
       </p:sp>
       <p:sp>
         <p:nvSpPr>
-          <p:cNvPr id="10" name="Shape 8"/>
-          <p:cNvSpPr/>
-          <p:nvPr/>
-        </p:nvSpPr>
-        <p:spPr>
-          <a:xfrm>
-            <a:off x="457200" y="2304288"/>
-            <a:ext cx="5486400" cy="768096"/>
+          <p:cNvPr id="11" name="Shape 9"/>
+          <p:cNvSpPr/>
+          <p:nvPr/>
+        </p:nvSpPr>
+        <p:spPr>
+          <a:xfrm>
+            <a:off x="457200" y="2377440"/>
+            <a:ext cx="4297680" cy="658368"/>
           </a:xfrm>
           <a:prstGeom prst="rect">
             <a:avLst/>
@@ -13118,14 +13889,14 @@
       </p:sp>
       <p:sp>
         <p:nvSpPr>
-          <p:cNvPr id="11" name="Shape 9"/>
-          <p:cNvSpPr/>
-          <p:nvPr/>
-        </p:nvSpPr>
-        <p:spPr>
-          <a:xfrm>
-            <a:off x="457200" y="2304288"/>
-            <a:ext cx="64008" cy="768096"/>
+          <p:cNvPr id="12" name="Shape 10"/>
+          <p:cNvSpPr/>
+          <p:nvPr/>
+        </p:nvSpPr>
+        <p:spPr>
+          <a:xfrm>
+            <a:off x="457200" y="2377440"/>
+            <a:ext cx="64008" cy="658368"/>
           </a:xfrm>
           <a:prstGeom prst="rect">
             <a:avLst/>
@@ -13138,14 +13909,14 @@
       </p:sp>
       <p:sp>
         <p:nvSpPr>
-          <p:cNvPr id="12" name="Text 10"/>
-          <p:cNvSpPr/>
-          <p:nvPr/>
-        </p:nvSpPr>
-        <p:spPr>
-          <a:xfrm>
-            <a:off x="621792" y="2377440"/>
-            <a:ext cx="5212080" cy="182880"/>
+          <p:cNvPr id="13" name="Text 11"/>
+          <p:cNvSpPr/>
+          <p:nvPr/>
+        </p:nvSpPr>
+        <p:spPr>
+          <a:xfrm>
+            <a:off x="621792" y="2450592"/>
+            <a:ext cx="4023360" cy="182880"/>
           </a:xfrm>
           <a:prstGeom prst="rect">
             <a:avLst/>
@@ -13169,7 +13940,7 @@
                 <a:ea typeface="Arial" pitchFamily="34" charset="-122"/>
                 <a:cs typeface="Arial" pitchFamily="34" charset="-120"/>
               </a:rPr>
-              <a:t>THE SOVEREIGN WEALTH FUND</a:t>
+              <a:t>SOVEREIGN WEALTH FUND</a:t>
             </a:r>
             <a:endParaRPr lang="en-US" sz="750" dirty="0"/>
           </a:p>
@@ -13177,14 +13948,14 @@
       </p:sp>
       <p:sp>
         <p:nvSpPr>
-          <p:cNvPr id="13" name="Text 11"/>
-          <p:cNvSpPr/>
-          <p:nvPr/>
-        </p:nvSpPr>
-        <p:spPr>
-          <a:xfrm>
-            <a:off x="621792" y="2578608"/>
-            <a:ext cx="5157216" cy="402336"/>
+          <p:cNvPr id="14" name="Text 12"/>
+          <p:cNvSpPr/>
+          <p:nvPr/>
+        </p:nvSpPr>
+        <p:spPr>
+          <a:xfrm>
+            <a:off x="621792" y="2651760"/>
+            <a:ext cx="3968496" cy="292608"/>
           </a:xfrm>
           <a:prstGeom prst="rect">
             <a:avLst/>
@@ -13208,7 +13979,7 @@
                 <a:ea typeface="Arial" pitchFamily="34" charset="-122"/>
                 <a:cs typeface="Arial" pitchFamily="34" charset="-120"/>
               </a:rPr>
-              <a:t>A 50% claim on lab equity.  </a:t>
+              <a:t>50% claim on lab equity.  </a:t>
             </a:r>
             <a:pPr indent="0" marL="0">
               <a:buNone/>
@@ -13222,7 +13993,7 @@
                 <a:ea typeface="Arial" pitchFamily="34" charset="-122"/>
                 <a:cs typeface="Arial" pitchFamily="34" charset="-120"/>
               </a:rPr>
-              <a:t>Sanders’ proposal, echoed by Trump as “a concept of a plan”: a one-time 50% tax on AI-lab equity (not profits) seeds a public fund paying “AI Dividends” to citizens.</a:t>
+              <a:t>Sanders proposed, Trump echoed: a one-time 50% tax on AI-lab equity to seed a public fund paying "AI Dividends" to citizens.</a:t>
             </a:r>
             <a:endParaRPr lang="en-US" sz="1050" dirty="0"/>
           </a:p>
@@ -13230,14 +14001,14 @@
       </p:sp>
       <p:sp>
         <p:nvSpPr>
-          <p:cNvPr id="14" name="Shape 12"/>
-          <p:cNvSpPr/>
-          <p:nvPr/>
-        </p:nvSpPr>
-        <p:spPr>
-          <a:xfrm>
-            <a:off x="457200" y="3145536"/>
-            <a:ext cx="5486400" cy="768096"/>
+          <p:cNvPr id="15" name="Shape 13"/>
+          <p:cNvSpPr/>
+          <p:nvPr/>
+        </p:nvSpPr>
+        <p:spPr>
+          <a:xfrm>
+            <a:off x="457200" y="3090672"/>
+            <a:ext cx="4297680" cy="658368"/>
           </a:xfrm>
           <a:prstGeom prst="rect">
             <a:avLst/>
@@ -13250,14 +14021,14 @@
       </p:sp>
       <p:sp>
         <p:nvSpPr>
-          <p:cNvPr id="15" name="Shape 13"/>
-          <p:cNvSpPr/>
-          <p:nvPr/>
-        </p:nvSpPr>
-        <p:spPr>
-          <a:xfrm>
-            <a:off x="457200" y="3145536"/>
-            <a:ext cx="64008" cy="768096"/>
+          <p:cNvPr id="16" name="Shape 14"/>
+          <p:cNvSpPr/>
+          <p:nvPr/>
+        </p:nvSpPr>
+        <p:spPr>
+          <a:xfrm>
+            <a:off x="457200" y="3090672"/>
+            <a:ext cx="64008" cy="658368"/>
           </a:xfrm>
           <a:prstGeom prst="rect">
             <a:avLst/>
@@ -13270,14 +14041,14 @@
       </p:sp>
       <p:sp>
         <p:nvSpPr>
-          <p:cNvPr id="16" name="Text 14"/>
-          <p:cNvSpPr/>
-          <p:nvPr/>
-        </p:nvSpPr>
-        <p:spPr>
-          <a:xfrm>
-            <a:off x="621792" y="3218688"/>
-            <a:ext cx="5212080" cy="182880"/>
+          <p:cNvPr id="17" name="Text 15"/>
+          <p:cNvSpPr/>
+          <p:nvPr/>
+        </p:nvSpPr>
+        <p:spPr>
+          <a:xfrm>
+            <a:off x="621792" y="3163824"/>
+            <a:ext cx="4023360" cy="182880"/>
           </a:xfrm>
           <a:prstGeom prst="rect">
             <a:avLst/>
@@ -13309,14 +14080,14 @@
       </p:sp>
       <p:sp>
         <p:nvSpPr>
-          <p:cNvPr id="17" name="Text 15"/>
-          <p:cNvSpPr/>
-          <p:nvPr/>
-        </p:nvSpPr>
-        <p:spPr>
-          <a:xfrm>
-            <a:off x="621792" y="3419856"/>
-            <a:ext cx="5157216" cy="402336"/>
+          <p:cNvPr id="18" name="Text 16"/>
+          <p:cNvSpPr/>
+          <p:nvPr/>
+        </p:nvSpPr>
+        <p:spPr>
+          <a:xfrm>
+            <a:off x="621792" y="3364992"/>
+            <a:ext cx="3968496" cy="292608"/>
           </a:xfrm>
           <a:prstGeom prst="rect">
             <a:avLst/>
@@ -13340,7 +14111,7 @@
                 <a:ea typeface="Arial" pitchFamily="34" charset="-122"/>
                 <a:cs typeface="Arial" pitchFamily="34" charset="-120"/>
               </a:rPr>
-              <a:t>“Corporate-government fusion.”  </a:t>
+              <a:t>"Corporate-government fusion."  </a:t>
             </a:r>
             <a:pPr indent="0" marL="0">
               <a:buNone/>
@@ -13354,7 +14125,7 @@
                 <a:ea typeface="Arial" pitchFamily="34" charset="-122"/>
                 <a:cs typeface="Arial" pitchFamily="34" charset="-120"/>
               </a:rPr>
-              <a:t>Sacks: government equity risks a CCP-style social-credit state — and nationalization talk is a “stupidity tax” on the job-apocalypse narrative the labs themselves stoked.</a:t>
+              <a:t>Sacks: government equity risks a social-credit state. Nationalization talk is a "stupidity tax" on the job-apocalypse narrative.</a:t>
             </a:r>
             <a:endParaRPr lang="en-US" sz="1050" dirty="0"/>
           </a:p>
@@ -13362,163 +14133,303 @@
       </p:sp>
       <p:sp>
         <p:nvSpPr>
-          <p:cNvPr id="18" name="Shape 16"/>
-          <p:cNvSpPr/>
-          <p:nvPr/>
-        </p:nvSpPr>
-        <p:spPr>
-          <a:xfrm>
-            <a:off x="6080760" y="1463040"/>
-            <a:ext cx="2606040" cy="2377440"/>
+          <p:cNvPr id="19" name="Text 17"/>
+          <p:cNvSpPr/>
+          <p:nvPr/>
+        </p:nvSpPr>
+        <p:spPr>
+          <a:xfrm>
+            <a:off x="4892040" y="1417320"/>
+            <a:ext cx="3794760" cy="182880"/>
+          </a:xfrm>
+          <a:prstGeom prst="rect">
+            <a:avLst/>
+          </a:prstGeom>
+          <a:noFill/>
+          <a:ln/>
+        </p:spPr>
+        <p:txBody>
+          <a:bodyPr wrap="square" lIns="0" tIns="0" rIns="0" bIns="0" rtlCol="0" anchor="ctr"/>
+          <a:lstStyle/>
+          <a:p>
+            <a:pPr indent="0" marL="0">
+              <a:buNone/>
+            </a:pPr>
+            <a:r>
+              <a:rPr lang="en-US" sz="800" b="1" spc="200" kern="0" dirty="0">
+                <a:solidFill>
+                  <a:srgbClr val="2BC4C4"/>
+                </a:solidFill>
+                <a:latin typeface="Arial" pitchFamily="34" charset="0"/>
+                <a:ea typeface="Arial" pitchFamily="34" charset="-122"/>
+                <a:cs typeface="Arial" pitchFamily="34" charset="-120"/>
+              </a:rPr>
+              <a:t>SOUTH KOREA</a:t>
+            </a:r>
+            <a:endParaRPr lang="en-US" sz="800" dirty="0"/>
+          </a:p>
+        </p:txBody>
+      </p:sp>
+      <p:sp>
+        <p:nvSpPr>
+          <p:cNvPr id="20" name="Text 18"/>
+          <p:cNvSpPr/>
+          <p:nvPr/>
+        </p:nvSpPr>
+        <p:spPr>
+          <a:xfrm>
+            <a:off x="4892040" y="1664208"/>
+            <a:ext cx="3794760" cy="384048"/>
+          </a:xfrm>
+          <a:prstGeom prst="rect">
+            <a:avLst/>
+          </a:prstGeom>
+          <a:noFill/>
+          <a:ln/>
+        </p:spPr>
+        <p:txBody>
+          <a:bodyPr wrap="square" lIns="0" tIns="0" rIns="0" bIns="0" rtlCol="0" anchor="ctr"/>
+          <a:lstStyle/>
+          <a:p>
+            <a:pPr indent="0" marL="0">
+              <a:buNone/>
+            </a:pPr>
+            <a:r>
+              <a:rPr lang="en-US" sz="2000" b="1" dirty="0">
+                <a:solidFill>
+                  <a:srgbClr val="E5484D"/>
+                </a:solidFill>
+                <a:latin typeface="Arial Black" pitchFamily="34" charset="0"/>
+                <a:ea typeface="Arial Black" pitchFamily="34" charset="-122"/>
+                <a:cs typeface="Arial Black" pitchFamily="34" charset="-120"/>
+              </a:rPr>
+              <a:t>KOSPI -5.1%</a:t>
+            </a:r>
+            <a:endParaRPr lang="en-US" sz="2000" dirty="0"/>
+          </a:p>
+        </p:txBody>
+      </p:sp>
+      <p:sp>
+        <p:nvSpPr>
+          <p:cNvPr id="21" name="Text 19"/>
+          <p:cNvSpPr/>
+          <p:nvPr/>
+        </p:nvSpPr>
+        <p:spPr>
+          <a:xfrm>
+            <a:off x="4892040" y="2066544"/>
+            <a:ext cx="3794760" cy="438912"/>
+          </a:xfrm>
+          <a:prstGeom prst="rect">
+            <a:avLst/>
+          </a:prstGeom>
+          <a:noFill/>
+          <a:ln/>
+        </p:spPr>
+        <p:txBody>
+          <a:bodyPr wrap="square" lIns="0" tIns="0" rIns="0" bIns="0" rtlCol="0" anchor="t"/>
+          <a:lstStyle/>
+          <a:p>
+            <a:pPr indent="0" marL="0">
+              <a:buNone/>
+            </a:pPr>
+            <a:r>
+              <a:rPr lang="en-US" sz="750" dirty="0">
+                <a:solidFill>
+                  <a:srgbClr val="9A9AA0"/>
+                </a:solidFill>
+                <a:latin typeface="Arial" pitchFamily="34" charset="0"/>
+                <a:ea typeface="Arial" pitchFamily="34" charset="-122"/>
+                <a:cs typeface="Arial" pitchFamily="34" charset="-120"/>
+              </a:rPr>
+              <a:t>Intraday drop on May 12 after the "citizen dividend" post. The market priced the proposal in hours.</a:t>
+            </a:r>
+            <a:endParaRPr lang="en-US" sz="750" dirty="0"/>
+          </a:p>
+        </p:txBody>
+      </p:sp>
+      <p:sp>
+        <p:nvSpPr>
+          <p:cNvPr id="22" name="Shape 20"/>
+          <p:cNvSpPr/>
+          <p:nvPr/>
+        </p:nvSpPr>
+        <p:spPr>
+          <a:xfrm>
+            <a:off x="4892040" y="2514600"/>
+            <a:ext cx="3794760" cy="841248"/>
           </a:xfrm>
           <a:prstGeom prst="rect">
             <a:avLst/>
           </a:prstGeom>
           <a:solidFill>
-            <a:srgbClr val="1E1E24"/>
+            <a:srgbClr val="1C1C20"/>
           </a:solidFill>
-          <a:ln w="12700">
-            <a:solidFill>
-              <a:srgbClr val="2A2A30"/>
-            </a:solidFill>
-            <a:prstDash val="dash"/>
-          </a:ln>
-        </p:spPr>
-      </p:sp>
-      <p:sp>
-        <p:nvSpPr>
-          <p:cNvPr id="19" name="Shape 17"/>
-          <p:cNvSpPr/>
-          <p:nvPr/>
-        </p:nvSpPr>
-        <p:spPr>
-          <a:xfrm>
-            <a:off x="6080760" y="1463040"/>
-            <a:ext cx="274320" cy="32004"/>
+          <a:ln/>
+        </p:spPr>
+      </p:sp>
+      <p:sp>
+        <p:nvSpPr>
+          <p:cNvPr id="23" name="Shape 21"/>
+          <p:cNvSpPr/>
+          <p:nvPr/>
+        </p:nvSpPr>
+        <p:spPr>
+          <a:xfrm>
+            <a:off x="4892040" y="2514600"/>
+            <a:ext cx="64008" cy="841248"/>
           </a:xfrm>
           <a:prstGeom prst="rect">
             <a:avLst/>
           </a:prstGeom>
           <a:solidFill>
-            <a:srgbClr val="9B7BE0"/>
+            <a:srgbClr val="2BC4C4"/>
           </a:solidFill>
           <a:ln/>
         </p:spPr>
       </p:sp>
       <p:sp>
         <p:nvSpPr>
-          <p:cNvPr id="20" name="Shape 18"/>
-          <p:cNvSpPr/>
-          <p:nvPr/>
-        </p:nvSpPr>
-        <p:spPr>
-          <a:xfrm>
-            <a:off x="6080760" y="1463040"/>
-            <a:ext cx="32004" cy="274320"/>
+          <p:cNvPr id="24" name="Text 22"/>
+          <p:cNvSpPr/>
+          <p:nvPr/>
+        </p:nvSpPr>
+        <p:spPr>
+          <a:xfrm>
+            <a:off x="5056632" y="2587752"/>
+            <a:ext cx="3520440" cy="182880"/>
+          </a:xfrm>
+          <a:prstGeom prst="rect">
+            <a:avLst/>
+          </a:prstGeom>
+          <a:noFill/>
+          <a:ln/>
+        </p:spPr>
+        <p:txBody>
+          <a:bodyPr wrap="square" lIns="0" tIns="0" rIns="0" bIns="0" rtlCol="0" anchor="ctr"/>
+          <a:lstStyle/>
+          <a:p>
+            <a:pPr indent="0" marL="0">
+              <a:buNone/>
+            </a:pPr>
+            <a:r>
+              <a:rPr lang="en-US" sz="750" b="1" spc="200" kern="0" dirty="0">
+                <a:solidFill>
+                  <a:srgbClr val="2BC4C4"/>
+                </a:solidFill>
+                <a:latin typeface="Arial" pitchFamily="34" charset="0"/>
+                <a:ea typeface="Arial" pitchFamily="34" charset="-122"/>
+                <a:cs typeface="Arial" pitchFamily="34" charset="-120"/>
+              </a:rPr>
+              <a:t>CITIZEN DIVIDEND</a:t>
+            </a:r>
+            <a:endParaRPr lang="en-US" sz="750" dirty="0"/>
+          </a:p>
+        </p:txBody>
+      </p:sp>
+      <p:sp>
+        <p:nvSpPr>
+          <p:cNvPr id="25" name="Text 23"/>
+          <p:cNvSpPr/>
+          <p:nvPr/>
+        </p:nvSpPr>
+        <p:spPr>
+          <a:xfrm>
+            <a:off x="5056632" y="2788920"/>
+            <a:ext cx="3465576" cy="475488"/>
+          </a:xfrm>
+          <a:prstGeom prst="rect">
+            <a:avLst/>
+          </a:prstGeom>
+          <a:noFill/>
+          <a:ln/>
+        </p:spPr>
+        <p:txBody>
+          <a:bodyPr wrap="square" lIns="0" tIns="0" rIns="0" bIns="0" rtlCol="0" anchor="t"/>
+          <a:lstStyle/>
+          <a:p>
+            <a:pPr indent="0" marL="0">
+              <a:buNone/>
+            </a:pPr>
+            <a:r>
+              <a:rPr lang="en-US" sz="1050" b="1" dirty="0">
+                <a:solidFill>
+                  <a:srgbClr val="FFFFFF"/>
+                </a:solidFill>
+                <a:latin typeface="Arial" pitchFamily="34" charset="0"/>
+                <a:ea typeface="Arial" pitchFamily="34" charset="-122"/>
+                <a:cs typeface="Arial" pitchFamily="34" charset="-120"/>
+              </a:rPr>
+              <a:t>Kim Yong-beom floated an AI tax windfall.  </a:t>
+            </a:r>
+            <a:pPr indent="0" marL="0">
+              <a:buNone/>
+            </a:pPr>
+            <a:r>
+              <a:rPr lang="en-US" sz="900" dirty="0">
+                <a:solidFill>
+                  <a:srgbClr val="C9C9CE"/>
+                </a:solidFill>
+                <a:latin typeface="Arial" pitchFamily="34" charset="0"/>
+                <a:ea typeface="Arial" pitchFamily="34" charset="-122"/>
+                <a:cs typeface="Arial" pitchFamily="34" charset="-120"/>
+              </a:rPr>
+              <a:t>The presidential policy chief proposed a "citizen dividend" funded by AI and chip-sector tax revenue (May 12, Facebook post). President Lee Jae-myung clarified it was not official policy. Norway and Alaska sovereign-fund models cited.</a:t>
+            </a:r>
+            <a:endParaRPr lang="en-US" sz="1050" dirty="0"/>
+          </a:p>
+        </p:txBody>
+      </p:sp>
+      <p:sp>
+        <p:nvSpPr>
+          <p:cNvPr id="26" name="Shape 24"/>
+          <p:cNvSpPr/>
+          <p:nvPr/>
+        </p:nvSpPr>
+        <p:spPr>
+          <a:xfrm>
+            <a:off x="4892040" y="3429000"/>
+            <a:ext cx="3794760" cy="658368"/>
           </a:xfrm>
           <a:prstGeom prst="rect">
             <a:avLst/>
           </a:prstGeom>
           <a:solidFill>
-            <a:srgbClr val="9B7BE0"/>
+            <a:srgbClr val="1C1C20"/>
           </a:solidFill>
           <a:ln/>
         </p:spPr>
       </p:sp>
       <p:sp>
         <p:nvSpPr>
-          <p:cNvPr id="21" name="Shape 19"/>
-          <p:cNvSpPr/>
-          <p:nvPr/>
-        </p:nvSpPr>
-        <p:spPr>
-          <a:xfrm>
-            <a:off x="8412480" y="3808476"/>
-            <a:ext cx="274320" cy="32004"/>
+          <p:cNvPr id="27" name="Shape 25"/>
+          <p:cNvSpPr/>
+          <p:nvPr/>
+        </p:nvSpPr>
+        <p:spPr>
+          <a:xfrm>
+            <a:off x="4892040" y="3429000"/>
+            <a:ext cx="64008" cy="658368"/>
           </a:xfrm>
           <a:prstGeom prst="rect">
             <a:avLst/>
           </a:prstGeom>
           <a:solidFill>
-            <a:srgbClr val="9B7BE0"/>
+            <a:srgbClr val="FFB800"/>
           </a:solidFill>
           <a:ln/>
         </p:spPr>
       </p:sp>
       <p:sp>
         <p:nvSpPr>
-          <p:cNvPr id="22" name="Shape 20"/>
-          <p:cNvSpPr/>
-          <p:nvPr/>
-        </p:nvSpPr>
-        <p:spPr>
-          <a:xfrm>
-            <a:off x="8654796" y="3566160"/>
-            <a:ext cx="32004" cy="274320"/>
-          </a:xfrm>
-          <a:prstGeom prst="rect">
-            <a:avLst/>
-          </a:prstGeom>
-          <a:solidFill>
-            <a:srgbClr val="9B7BE0"/>
-          </a:solidFill>
-          <a:ln/>
-        </p:spPr>
-      </p:sp>
-      <p:sp>
-        <p:nvSpPr>
-          <p:cNvPr id="23" name="Shape 21"/>
-          <p:cNvSpPr/>
-          <p:nvPr/>
-        </p:nvSpPr>
-        <p:spPr>
-          <a:xfrm>
-            <a:off x="7063740" y="2212848"/>
-            <a:ext cx="640080" cy="347472"/>
-          </a:xfrm>
-          <a:prstGeom prst="triangle">
-            <a:avLst/>
-          </a:prstGeom>
-          <a:ln w="19050">
-            <a:solidFill>
-              <a:srgbClr val="9A9AA0"/>
-            </a:solidFill>
-            <a:prstDash val="solid"/>
-          </a:ln>
-        </p:spPr>
-      </p:sp>
-      <p:sp>
-        <p:nvSpPr>
-          <p:cNvPr id="24" name="Shape 22"/>
-          <p:cNvSpPr/>
-          <p:nvPr/>
-        </p:nvSpPr>
-        <p:spPr>
-          <a:xfrm>
-            <a:off x="7511796" y="2084832"/>
-            <a:ext cx="146304" cy="146304"/>
-          </a:xfrm>
-          <a:prstGeom prst="ellipse">
-            <a:avLst/>
-          </a:prstGeom>
-          <a:ln w="19050">
-            <a:solidFill>
-              <a:srgbClr val="9A9AA0"/>
-            </a:solidFill>
-            <a:prstDash val="solid"/>
-          </a:ln>
-        </p:spPr>
-      </p:sp>
-      <p:sp>
-        <p:nvSpPr>
-          <p:cNvPr id="25" name="Text 23"/>
-          <p:cNvSpPr/>
-          <p:nvPr/>
-        </p:nvSpPr>
-        <p:spPr>
-          <a:xfrm>
-            <a:off x="6172200" y="2670048"/>
-            <a:ext cx="2423160" cy="219456"/>
+          <p:cNvPr id="28" name="Text 26"/>
+          <p:cNvSpPr/>
+          <p:nvPr/>
+        </p:nvSpPr>
+        <p:spPr>
+          <a:xfrm>
+            <a:off x="5056632" y="3502152"/>
+            <a:ext cx="3520440" cy="182880"/>
           </a:xfrm>
           <a:prstGeom prst="rect">
             <a:avLst/>
@@ -13530,34 +14441,34 @@
           <a:bodyPr wrap="square" lIns="0" tIns="0" rIns="0" bIns="0" rtlCol="0" anchor="ctr"/>
           <a:lstStyle/>
           <a:p>
-            <a:pPr algn="ctr" indent="0" marL="0">
-              <a:buNone/>
-            </a:pPr>
-            <a:r>
-              <a:rPr lang="en-US" sz="800" b="1" spc="200" kern="0" dirty="0">
-                <a:solidFill>
-                  <a:srgbClr val="9B7BE0"/>
-                </a:solidFill>
-                <a:latin typeface="Arial" pitchFamily="34" charset="0"/>
-                <a:ea typeface="Arial" pitchFamily="34" charset="-122"/>
-                <a:cs typeface="Arial" pitchFamily="34" charset="-120"/>
-              </a:rPr>
-              <a:t>IMAGE — CAPITOL IN DARK GLASS</a:t>
-            </a:r>
-            <a:endParaRPr lang="en-US" sz="800" dirty="0"/>
-          </a:p>
-        </p:txBody>
-      </p:sp>
-      <p:sp>
-        <p:nvSpPr>
-          <p:cNvPr id="26" name="Text 24"/>
-          <p:cNvSpPr/>
-          <p:nvPr/>
-        </p:nvSpPr>
-        <p:spPr>
-          <a:xfrm>
-            <a:off x="6263640" y="2926080"/>
-            <a:ext cx="2240280" cy="594360"/>
+            <a:pPr indent="0" marL="0">
+              <a:buNone/>
+            </a:pPr>
+            <a:r>
+              <a:rPr lang="en-US" sz="750" b="1" spc="200" kern="0" dirty="0">
+                <a:solidFill>
+                  <a:srgbClr val="FFB800"/>
+                </a:solidFill>
+                <a:latin typeface="Arial" pitchFamily="34" charset="0"/>
+                <a:ea typeface="Arial" pitchFamily="34" charset="-122"/>
+                <a:cs typeface="Arial" pitchFamily="34" charset="-120"/>
+              </a:rPr>
+              <a:t>SAMSUNG UNION</a:t>
+            </a:r>
+            <a:endParaRPr lang="en-US" sz="750" dirty="0"/>
+          </a:p>
+        </p:txBody>
+      </p:sp>
+      <p:sp>
+        <p:nvSpPr>
+          <p:cNvPr id="29" name="Text 27"/>
+          <p:cNvSpPr/>
+          <p:nvPr/>
+        </p:nvSpPr>
+        <p:spPr>
+          <a:xfrm>
+            <a:off x="5056632" y="3703320"/>
+            <a:ext cx="3465576" cy="292608"/>
           </a:xfrm>
           <a:prstGeom prst="rect">
             <a:avLst/>
@@ -13569,19 +14480,125 @@
           <a:bodyPr wrap="square" lIns="0" tIns="0" rIns="0" bIns="0" rtlCol="0" anchor="t"/>
           <a:lstStyle/>
           <a:p>
-            <a:pPr algn="ctr" indent="0" marL="0">
-              <a:buNone/>
-            </a:pPr>
-            <a:r>
-              <a:rPr lang="en-US" sz="700" i="1" dirty="0">
-                <a:solidFill>
-                  <a:srgbClr val="9A9AA0"/>
-                </a:solidFill>
-                <a:latin typeface="Arial" pitchFamily="34" charset="0"/>
-                <a:ea typeface="Arial" pitchFamily="34" charset="-122"/>
-                <a:cs typeface="Arial" pitchFamily="34" charset="-120"/>
-              </a:rPr>
-              <a:t>Neoclassical government dome rendered in dark glass, faint purple circuit patterns glowing inside, black background, centered.</a:t>
+            <a:pPr indent="0" marL="0">
+              <a:buNone/>
+            </a:pPr>
+            <a:r>
+              <a:rPr lang="en-US" sz="1050" b="1" dirty="0">
+                <a:solidFill>
+                  <a:srgbClr val="FFFFFF"/>
+                </a:solidFill>
+                <a:latin typeface="Arial" pitchFamily="34" charset="0"/>
+                <a:ea typeface="Arial" pitchFamily="34" charset="-122"/>
+                <a:cs typeface="Arial" pitchFamily="34" charset="-120"/>
+              </a:rPr>
+              <a:t>Workers want 15% of chip profits.  </a:t>
+            </a:r>
+            <a:pPr indent="0" marL="0">
+              <a:buNone/>
+            </a:pPr>
+            <a:r>
+              <a:rPr lang="en-US" sz="900" dirty="0">
+                <a:solidFill>
+                  <a:srgbClr val="C9C9CE"/>
+                </a:solidFill>
+                <a:latin typeface="Arial" pitchFamily="34" charset="0"/>
+                <a:ea typeface="Arial" pitchFamily="34" charset="-122"/>
+                <a:cs typeface="Arial" pitchFamily="34" charset="-120"/>
+              </a:rPr>
+              <a:t>Samsung's largest union demanded 15% of semiconductor-division profit be shared with workers (Apr 2026), tying labor's AI claim directly to the supply chain.</a:t>
+            </a:r>
+            <a:endParaRPr lang="en-US" sz="1050" dirty="0"/>
+          </a:p>
+        </p:txBody>
+      </p:sp>
+      <p:sp>
+        <p:nvSpPr>
+          <p:cNvPr id="30" name="Text 28"/>
+          <p:cNvSpPr/>
+          <p:nvPr/>
+        </p:nvSpPr>
+        <p:spPr>
+          <a:xfrm>
+            <a:off x="457200" y="4133088"/>
+            <a:ext cx="8229600" cy="347472"/>
+          </a:xfrm>
+          <a:prstGeom prst="rect">
+            <a:avLst/>
+          </a:prstGeom>
+          <a:noFill/>
+          <a:ln/>
+        </p:spPr>
+        <p:txBody>
+          <a:bodyPr wrap="square" lIns="0" tIns="0" rIns="0" bIns="0" rtlCol="0" anchor="ctr"/>
+          <a:lstStyle/>
+          <a:p>
+            <a:pPr indent="0" marL="0">
+              <a:buNone/>
+            </a:pPr>
+            <a:r>
+              <a:rPr lang="en-US" sz="950" b="1" dirty="0">
+                <a:solidFill>
+                  <a:srgbClr val="FFFFFF"/>
+                </a:solidFill>
+                <a:latin typeface="Arial" pitchFamily="34" charset="0"/>
+                <a:ea typeface="Arial" pitchFamily="34" charset="-122"/>
+                <a:cs typeface="Arial" pitchFamily="34" charset="-120"/>
+              </a:rPr>
+              <a:t>Investor read: </a:t>
+            </a:r>
+            <a:pPr indent="0" marL="0">
+              <a:buNone/>
+            </a:pPr>
+            <a:r>
+              <a:rPr lang="en-US" sz="950" dirty="0">
+                <a:solidFill>
+                  <a:srgbClr val="C9C9CE"/>
+                </a:solidFill>
+                <a:latin typeface="Arial" pitchFamily="34" charset="0"/>
+                <a:ea typeface="Arial" pitchFamily="34" charset="-122"/>
+                <a:cs typeface="Arial" pitchFamily="34" charset="-120"/>
+              </a:rPr>
+              <a:t>the 2026 debate is no longer whether AI is regulated. It is whether the means of AI production are publicly owned. That is a dilution tail risk no equity model carries.</a:t>
+            </a:r>
+            <a:endParaRPr lang="en-US" sz="950" dirty="0"/>
+          </a:p>
+        </p:txBody>
+      </p:sp>
+      <p:sp>
+        <p:nvSpPr>
+          <p:cNvPr id="31" name="Text 29"/>
+          <p:cNvSpPr/>
+          <p:nvPr/>
+        </p:nvSpPr>
+        <p:spPr>
+          <a:xfrm>
+            <a:off x="457200" y="4498848"/>
+            <a:ext cx="8229600" cy="384048"/>
+          </a:xfrm>
+          <a:prstGeom prst="rect">
+            <a:avLst/>
+          </a:prstGeom>
+          <a:noFill/>
+          <a:ln/>
+        </p:spPr>
+        <p:txBody>
+          <a:bodyPr wrap="square" lIns="0" tIns="0" rIns="0" bIns="0" rtlCol="0" anchor="t"/>
+          <a:lstStyle/>
+          <a:p>
+            <a:pPr indent="0" marL="0">
+              <a:buNone/>
+            </a:pPr>
+            <a:r>
+              <a:rPr lang="en-US" sz="700" dirty="0">
+                <a:solidFill>
+                  <a:srgbClr val="8A8A90"/>
+                </a:solidFill>
+                <a:latin typeface="Arial" pitchFamily="34" charset="0"/>
+                <a:ea typeface="Arial" pitchFamily="34" charset="-122"/>
+                <a:cs typeface="Arial" pitchFamily="34" charset="-120"/>
+              </a:rPr>
+              <a:t>Source: Internal strategic review, “The 2026 AI Frontier” (Jun 2026); Korea Herald, Bloomberg, Nikkei Asia (May 2026); Executive Order provisions; sovereign wealth fund proposals; Sacks critique.</a:t>
             </a:r>
             <a:endParaRPr lang="en-US" sz="700" dirty="0"/>
           </a:p>
@@ -13589,99 +14606,7 @@
       </p:sp>
       <p:sp>
         <p:nvSpPr>
-          <p:cNvPr id="27" name="Text 25"/>
-          <p:cNvSpPr/>
-          <p:nvPr/>
-        </p:nvSpPr>
-        <p:spPr>
-          <a:xfrm>
-            <a:off x="457200" y="3931920"/>
-            <a:ext cx="8229600" cy="347472"/>
-          </a:xfrm>
-          <a:prstGeom prst="rect">
-            <a:avLst/>
-          </a:prstGeom>
-          <a:noFill/>
-          <a:ln/>
-        </p:spPr>
-        <p:txBody>
-          <a:bodyPr wrap="square" lIns="0" tIns="0" rIns="0" bIns="0" rtlCol="0" anchor="ctr"/>
-          <a:lstStyle/>
-          <a:p>
-            <a:pPr indent="0" marL="0">
-              <a:buNone/>
-            </a:pPr>
-            <a:r>
-              <a:rPr lang="en-US" sz="1000" b="1" dirty="0">
-                <a:solidFill>
-                  <a:srgbClr val="FFFFFF"/>
-                </a:solidFill>
-                <a:latin typeface="Arial" pitchFamily="34" charset="0"/>
-                <a:ea typeface="Arial" pitchFamily="34" charset="-122"/>
-                <a:cs typeface="Arial" pitchFamily="34" charset="-120"/>
-              </a:rPr>
-              <a:t>Investor read: </a:t>
-            </a:r>
-            <a:pPr indent="0" marL="0">
-              <a:buNone/>
-            </a:pPr>
-            <a:r>
-              <a:rPr lang="en-US" sz="1000" dirty="0">
-                <a:solidFill>
-                  <a:srgbClr val="C9C9CE"/>
-                </a:solidFill>
-                <a:latin typeface="Arial" pitchFamily="34" charset="0"/>
-                <a:ea typeface="Arial" pitchFamily="34" charset="-122"/>
-                <a:cs typeface="Arial" pitchFamily="34" charset="-120"/>
-              </a:rPr>
-              <a:t>the 2026 debate is no longer whether AI is regulated — it’s whether the means of AI production are publicly owned. That’s a dilution tail risk no equity model carries.</a:t>
-            </a:r>
-            <a:endParaRPr lang="en-US" sz="1000" dirty="0"/>
-          </a:p>
-        </p:txBody>
-      </p:sp>
-      <p:sp>
-        <p:nvSpPr>
-          <p:cNvPr id="28" name="Text 26"/>
-          <p:cNvSpPr/>
-          <p:nvPr/>
-        </p:nvSpPr>
-        <p:spPr>
-          <a:xfrm>
-            <a:off x="457200" y="4297680"/>
-            <a:ext cx="8229600" cy="384048"/>
-          </a:xfrm>
-          <a:prstGeom prst="rect">
-            <a:avLst/>
-          </a:prstGeom>
-          <a:noFill/>
-          <a:ln/>
-        </p:spPr>
-        <p:txBody>
-          <a:bodyPr wrap="square" lIns="0" tIns="0" rIns="0" bIns="0" rtlCol="0" anchor="t"/>
-          <a:lstStyle/>
-          <a:p>
-            <a:pPr indent="0" marL="0">
-              <a:buNone/>
-            </a:pPr>
-            <a:r>
-              <a:rPr lang="en-US" sz="700" dirty="0">
-                <a:solidFill>
-                  <a:srgbClr val="8A8A90"/>
-                </a:solidFill>
-                <a:latin typeface="Arial" pitchFamily="34" charset="0"/>
-                <a:ea typeface="Arial" pitchFamily="34" charset="-122"/>
-                <a:cs typeface="Arial" pitchFamily="34" charset="-120"/>
-              </a:rPr>
-              <a:t>Source: Internal strategic review, “The 2026 AI Frontier” (Jun 2026) — Executive Order provisions, sovereign wealth fund proposals, Sacks critique.</a:t>
-            </a:r>
-            <a:endParaRPr lang="en-US" sz="700" dirty="0"/>
-          </a:p>
-        </p:txBody>
-      </p:sp>
-      <p:sp>
-        <p:nvSpPr>
-          <p:cNvPr id="29" name="Shape 27"/>
+          <p:cNvPr id="32" name="Shape 30"/>
           <p:cNvSpPr/>
           <p:nvPr/>
         </p:nvSpPr>
@@ -13701,7 +14626,7 @@
       </p:sp>
       <p:sp>
         <p:nvSpPr>
-          <p:cNvPr id="30" name="Shape 28"/>
+          <p:cNvPr id="33" name="Shape 31"/>
           <p:cNvSpPr/>
           <p:nvPr/>
         </p:nvSpPr>
@@ -13724,7 +14649,7 @@
       </p:sp>
       <p:sp>
         <p:nvSpPr>
-          <p:cNvPr id="31" name="Text 29"/>
+          <p:cNvPr id="34" name="Text 32"/>
           <p:cNvSpPr/>
           <p:nvPr/>
         </p:nvSpPr>
@@ -13763,7 +14688,7 @@
       </p:sp>
       <p:sp>
         <p:nvSpPr>
-          <p:cNvPr id="32" name="Text 30"/>
+          <p:cNvPr id="35" name="Text 33"/>
           <p:cNvSpPr/>
           <p:nvPr/>
         </p:nvSpPr>
@@ -13885,7 +14810,7 @@
                 <a:ea typeface="Arial" pitchFamily="34" charset="-122"/>
                 <a:cs typeface="Arial" pitchFamily="34" charset="-120"/>
               </a:rPr>
-              <a:t>02  ·  MARKET IMPACT  —  EQUITIES</a:t>
+              <a:t>02  ·  MARKET IMPACT  ·  EQUITIES</a:t>
             </a:r>
             <a:endParaRPr lang="en-US" sz="900" dirty="0"/>
           </a:p>
@@ -13963,7 +14888,7 @@
                 <a:ea typeface="Arial" pitchFamily="34" charset="-122"/>
                 <a:cs typeface="Arial" pitchFamily="34" charset="-120"/>
               </a:rPr>
-              <a:t>Semis +80%, software −10% — a ~90-point spread inside one theme, while ten stocks hold ~37% of the index.</a:t>
+              <a:t>Semis +80%, software −10%: a ~90-point spread inside one theme, while ten stocks hold ~37% of the index.</a:t>
             </a:r>
             <a:endParaRPr lang="en-US" sz="1250" dirty="0"/>
           </a:p>
@@ -14119,7 +15044,7 @@
                 <a:ea typeface="Arial" pitchFamily="34" charset="-122"/>
                 <a:cs typeface="Arial" pitchFamily="34" charset="-120"/>
               </a:rPr>
-              <a:t>Top-10 share of S&amp;P 500 market cap — the 1990–2015 norm was 18–23%; the 2025 peak 40.7%.</a:t>
+              <a:t>Top-10 share of S&amp;P 500 market cap; the 1990–2015 norm was 18–23%, the 2025 peak 40.7%.</a:t>
             </a:r>
             <a:endParaRPr lang="en-US" sz="750" dirty="0"/>
           </a:p>
@@ -14197,7 +15122,7 @@
                 <a:ea typeface="Arial" pitchFamily="34" charset="-122"/>
                 <a:cs typeface="Arial" pitchFamily="34" charset="-120"/>
               </a:rPr>
-              <a:t>Nvidia market cap, 7.0% of the index — Apple $4.6T and Microsoft $3.3T behind it; three names ≈ 18%.</a:t>
+              <a:t>Nvidia market cap, 7.0% of the index; Apple $4.6T and Microsoft $3.3T behind it; three names ≈ 18%.</a:t>
             </a:r>
             <a:endParaRPr lang="en-US" sz="750" dirty="0"/>
           </a:p>
@@ -14275,7 +15200,7 @@
                 <a:ea typeface="Arial" pitchFamily="34" charset="-122"/>
                 <a:cs typeface="Arial" pitchFamily="34" charset="-120"/>
               </a:rPr>
-              <a:t>S&amp;P 500 forward P/E vs a 19.0x 10-yr average — elevated, not extreme. The spread is the signal.</a:t>
+              <a:t>S&amp;P 500 forward P/E vs a 19.0x 10-yr average: elevated, not extreme. The spread is the signal.</a:t>
             </a:r>
             <a:endParaRPr lang="en-US" sz="750" dirty="0"/>
           </a:p>
@@ -14328,7 +15253,7 @@
                 <a:ea typeface="Arial" pitchFamily="34" charset="-122"/>
                 <a:cs typeface="Arial" pitchFamily="34" charset="-120"/>
               </a:rPr>
-              <a:t>Value accrues where AI spend is revenue — and erodes where AI is the threat.</a:t>
+              <a:t>Value accrues where AI spend is revenue, and erodes where AI is the threat.</a:t>
             </a:r>
             <a:endParaRPr lang="en-US" sz="1000" dirty="0"/>
           </a:p>
@@ -14579,7 +15504,7 @@
                 <a:ea typeface="Arial" pitchFamily="34" charset="-122"/>
                 <a:cs typeface="Arial" pitchFamily="34" charset="-120"/>
               </a:rPr>
-              <a:t>02  ·  MARKET IMPACT  —  LABOR</a:t>
+              <a:t>02  ·  MARKET IMPACT  ·  LABOR</a:t>
             </a:r>
             <a:endParaRPr lang="en-US" sz="900" dirty="0"/>
           </a:p>
@@ -14657,7 +15582,7 @@
                 <a:ea typeface="Arial" pitchFamily="34" charset="-122"/>
                 <a:cs typeface="Arial" pitchFamily="34" charset="-120"/>
               </a:rPr>
-              <a:t>Agents change what a job is — and in 2026 the labor data started moving. Markets price both: deflated cost lines and the policy risk that displacement fuels.</a:t>
+              <a:t>Agents change what a job is, and in 2026 the labor data started moving. Markets price both: deflated cost lines and the policy risk that displacement fuels.</a:t>
             </a:r>
             <a:endParaRPr lang="en-US" sz="1250" dirty="0"/>
           </a:p>
@@ -14797,7 +15722,7 @@
                 <a:ea typeface="Arial" pitchFamily="34" charset="-122"/>
                 <a:cs typeface="Arial" pitchFamily="34" charset="-120"/>
               </a:rPr>
-              <a:t>of the work week goes to coordination and retrieval (OpenAI’s “strange abundance”) — the labor pool agents are bought to recover.</a:t>
+              <a:t>of the work week goes to coordination and retrieval (OpenAI’s “strange abundance”): the labor pool agents are bought to recover.</a:t>
             </a:r>
             <a:endParaRPr lang="en-US" sz="750" dirty="0"/>
           </a:p>
@@ -15458,7 +16383,7 @@
                 <a:ea typeface="Arial" pitchFamily="34" charset="-122"/>
                 <a:cs typeface="Arial" pitchFamily="34" charset="-120"/>
               </a:rPr>
-              <a:t>Challenger: AI was cited in ~40% of May’s announced US job cuts (38.6k of 97k) — the first month it beat “market conditions.” 87.7k AI-attributed cuts YTD vs 54.8k in all of 2025. (Self-reported; some firms may be scapegoating AI.)</a:t>
+              <a:t>Challenger: AI was cited in ~40% of May’s announced US job cuts (38.6k of 97k), the first month it beat “market conditions.” 87.7k AI-attributed cuts YTD vs 54.8k in all of 2025. (Self-reported; some firms may be scapegoating AI.)</a:t>
             </a:r>
             <a:endParaRPr lang="en-US" sz="950" dirty="0"/>
           </a:p>
@@ -15531,7 +16456,7 @@
                 <a:ea typeface="Arial" pitchFamily="34" charset="-122"/>
                 <a:cs typeface="Arial" pitchFamily="34" charset="-120"/>
               </a:rPr>
-              <a:t>Recent-grad unemployment 5.6% vs 4.2% overall (NY Fed, Mar 2026) — one of the worst readings in a decade outside the pandemic. Payrolls for 22–25-year-olds in AI-exposed roles are declining while senior cohorts hold.</a:t>
+              <a:t>Recent-grad unemployment 5.6% vs 4.2% overall (NY Fed, Mar 2026), one of the worst readings in a decade outside the pandemic. Payrolls for 22–25-year-olds in AI-exposed roles are declining while senior cohorts hold.</a:t>
             </a:r>
             <a:endParaRPr lang="en-US" sz="950" dirty="0"/>
           </a:p>
@@ -15855,7 +16780,7 @@
                 <a:ea typeface="Arial" pitchFamily="34" charset="-122"/>
                 <a:cs typeface="Arial" pitchFamily="34" charset="-120"/>
               </a:rPr>
-              <a:t>02  ·  MARKET IMPACT  —  FINANCING — THE GAP</a:t>
+              <a:t>02  ·  MARKET IMPACT  ·  FINANCING · THE GAP</a:t>
             </a:r>
             <a:endParaRPr lang="en-US" sz="900" dirty="0"/>
           </a:p>
@@ -15933,7 +16858,7 @@
                 <a:ea typeface="Arial" pitchFamily="34" charset="-122"/>
                 <a:cs typeface="Arial" pitchFamily="34" charset="-120"/>
               </a:rPr>
-              <a:t>The buildout was self-funded until it wasn’t. ~$705B of guided 2026 capex consumes the cash machine — and opens a funding gap.</a:t>
+              <a:t>The buildout was self-funded until it wasn’t. ~$705B of guided 2026 capex consumes the cash machine, and opens a funding gap.</a:t>
             </a:r>
             <a:endParaRPr lang="en-US" sz="1250" dirty="0"/>
           </a:p>
@@ -16050,7 +16975,7 @@
                 <a:ea typeface="Arial" pitchFamily="34" charset="-122"/>
                 <a:cs typeface="Arial" pitchFamily="34" charset="-120"/>
               </a:rPr>
-              <a:t>+72% YoY — raised into record spend</a:t>
+              <a:t>+72% YoY, raised into record spend</a:t>
             </a:r>
             <a:endParaRPr lang="en-US" sz="800" dirty="0"/>
           </a:p>
@@ -16348,7 +17273,7 @@
                 <a:ea typeface="Arial" pitchFamily="34" charset="-122"/>
                 <a:cs typeface="Arial" pitchFamily="34" charset="-120"/>
               </a:rPr>
-              <a:t>Big-4 free cash flow at a decade low — at far larger revenue (CNBC)</a:t>
+              <a:t>Big-4 free cash flow at a decade low, at far larger revenue (CNBC)</a:t>
             </a:r>
             <a:endParaRPr lang="en-US" sz="750" dirty="0"/>
           </a:p>

--- a/ai-markets-deck.pptx
+++ b/ai-markets-deck.pptx
@@ -2778,7 +2778,7 @@
                 <a:ea typeface="Arial" pitchFamily="34" charset="-122"/>
                 <a:cs typeface="Arial" pitchFamily="34" charset="-120"/>
               </a:rPr>
-              <a:t>Isometric 3D illustration, a financial district whose skyscrapers are built from stacked GPU / circuit-board blocks, glowing orange and yellow data streams flowing between the towers, near-black background, clean low-poly vector style, soft studio glow, subtle floor grid, centered, no text, no logos.</a:t>
+              <a:t>Isometric 3D illustration, a financial district at night where the skyscrapers are stacked GPU server-racks; a glowing candlestick stock-chart runs like a road along their base, and a curved arrow of capital flows from a domed bank building into the single tallest GPU tower; orange and yellow accents, near-black background, clean low-poly vector style, soft studio glow, subtle floor grid, centered, no text, no logos.</a:t>
             </a:r>
             <a:endParaRPr lang="en-US" sz="700" dirty="0"/>
           </a:p>
@@ -4160,7 +4160,7 @@
                 <a:ea typeface="Arial" pitchFamily="34" charset="-122"/>
                 <a:cs typeface="Arial" pitchFamily="34" charset="-120"/>
               </a:rPr>
-              <a:t>Isometric 3D illustration, a humanoid robot working on a warehouse floor among shelving, pink accents, near-black background, clean low-poly vector style, soft studio glow, subtle floor grid, centered, no text, no logos.</a:t>
+              <a:t>Isometric 3D illustration, a humanoid robot carrying a labeled tote down a numbered warehouse aisle lined with shelving racks, mid-stride, pink accents, near-black background, clean low-poly vector style, soft studio glow, subtle floor grid, centered, no text, no logos.</a:t>
             </a:r>
             <a:endParaRPr lang="en-US" sz="700" dirty="0"/>
           </a:p>
@@ -4456,7 +4456,7 @@
                 <a:ea typeface="Arial" pitchFamily="34" charset="-122"/>
                 <a:cs typeface="Arial" pitchFamily="34" charset="-120"/>
               </a:rPr>
-              <a:t>Isometric 3D illustration, an autonomous robotaxi with a glowing sensor halo on a small city block, pink accents, near-black background, clean low-poly vector style, soft studio glow, subtle floor grid, centered, no text, no logos.</a:t>
+              <a:t>Isometric 3D illustration, a driverless robotaxi with a spinning lidar turret and glowing sensor cones stopped at a small city intersection with a traffic light and crosswalk, pink accents, near-black background, clean low-poly vector style, soft studio glow, subtle floor grid, centered, no text, no logos.</a:t>
             </a:r>
             <a:endParaRPr lang="en-US" sz="700" dirty="0"/>
           </a:p>
@@ -4752,7 +4752,7 @@
                 <a:ea typeface="Arial" pitchFamily="34" charset="-122"/>
                 <a:cs typeface="Arial" pitchFamily="34" charset="-120"/>
               </a:rPr>
-              <a:t>Isometric 3D illustration, an orbital data-center satellite with large solar panels above the curve of Earth, pink accents, near-black background, clean low-poly vector style, soft studio glow, subtle floor grid, centered, no text, no logos.</a:t>
+              <a:t>Isometric 3D illustration, a ring-shaped orbital data-center with unfolded solar-panel wings and server modules, floating above the curved horizon of Earth with sparse stars, pink accents, near-black background, clean low-poly vector style, soft studio glow, subtle floor grid, centered, no text, no logos.</a:t>
             </a:r>
             <a:endParaRPr lang="en-US" sz="700" dirty="0"/>
           </a:p>
@@ -5048,7 +5048,7 @@
                 <a:ea typeface="Arial" pitchFamily="34" charset="-122"/>
                 <a:cs typeface="Arial" pitchFamily="34" charset="-120"/>
               </a:rPr>
-              <a:t>Isometric 3D illustration, a robotic lab arm assembling a glowing folded-protein / molecule structure, pink accents, near-black background, clean low-poly vector style, soft studio glow, subtle floor grid, centered, no text, no logos.</a:t>
+              <a:t>Isometric 3D illustration, a robotic pipette arm in a lab assembling a glowing folded-protein ribbon and double-helix on a sample platform, small vials arranged around it, pink accents, near-black background, clean low-poly vector style, soft studio glow, subtle floor grid, centered, no text, no logos.</a:t>
             </a:r>
             <a:endParaRPr lang="en-US" sz="700" dirty="0"/>
           </a:p>
@@ -6695,7 +6695,7 @@
                 <a:ea typeface="Arial" pitchFamily="34" charset="-122"/>
                 <a:cs typeface="Arial" pitchFamily="34" charset="-120"/>
               </a:rPr>
-              <a:t>Isometric 3D illustration, a small robot arm assembling a glowing cube inside an endless loop track (an autonomous work loop), teal accents, near-black background, clean low-poly vector style, soft studio glow, subtle floor grid, centered, no text, no logos.</a:t>
+              <a:t>Isometric 3D illustration, a robotic arm on a small circular conveyor picking up a glowing cube, spotting a flaw, and placing it back to retry — a literal self-correcting loop, teal accents, near-black background, clean low-poly vector style, soft studio glow, subtle floor grid, centered, no text, no logos.</a:t>
             </a:r>
             <a:endParaRPr lang="en-US" sz="700" dirty="0"/>
           </a:p>
@@ -7040,7 +7040,7 @@
                 <a:ea typeface="Arial" pitchFamily="34" charset="-122"/>
                 <a:cs typeface="Arial" pitchFamily="34" charset="-120"/>
               </a:rPr>
-              <a:t>Isometric 3D illustration, a utility meter / fuel gauge dispensing glowing token coins into a laptop, metered-compute feel, orange accents, near-black background, clean low-poly vector style, soft studio glow, subtle floor grid, centered, no text, no logos.</a:t>
+              <a:t>Isometric 3D illustration, a coin-operated electricity meter wired into a GPU, its dial pushed near a red limit line, a small rationed stack of glowing token-coins beside it, orange accents, near-black background, clean low-poly vector style, soft studio glow, subtle floor grid, centered, no text, no logos.</a:t>
             </a:r>
             <a:endParaRPr lang="en-US" sz="700" dirty="0"/>
           </a:p>
@@ -7385,7 +7385,7 @@
                 <a:ea typeface="Arial" pitchFamily="34" charset="-122"/>
                 <a:cs typeface="Arial" pitchFamily="34" charset="-120"/>
               </a:rPr>
-              <a:t>Isometric 3D illustration, a government / capitol building with a glowing microchip resting on top, a flag planted in a server rack, purple accents, near-black background, clean low-poly vector style, soft studio glow, subtle floor grid, centered, no text, no logos.</a:t>
+              <a:t>Isometric 3D illustration, a capitol dome beside a server-rack tower; a giant government hand plants a flag stamped with a percent sign on the tower while an official seal hovers over a glowing microchip, purple accents, near-black background, clean low-poly vector style, soft studio glow, subtle floor grid, centered, no text, no logos.</a:t>
             </a:r>
             <a:endParaRPr lang="en-US" sz="700" dirty="0"/>
           </a:p>
@@ -9150,8 +9150,8 @@
         </p:nvSpPr>
         <p:spPr>
           <a:xfrm>
-            <a:off x="457200" y="1691640"/>
-            <a:ext cx="4206240" cy="182880"/>
+            <a:off x="457200" y="1664208"/>
+            <a:ext cx="3931920" cy="182880"/>
           </a:xfrm>
           <a:prstGeom prst="rect">
             <a:avLst/>
@@ -9167,7 +9167,7 @@
               <a:buNone/>
             </a:pPr>
             <a:r>
-              <a:rPr lang="en-US" sz="800" b="1" spc="150" kern="0" dirty="0">
+              <a:rPr lang="en-US" sz="900" b="1" spc="200" kern="0" dirty="0">
                 <a:solidFill>
                   <a:srgbClr val="2BC4C4"/>
                 </a:solidFill>
@@ -9175,50 +9175,38 @@
                 <a:ea typeface="Arial" pitchFamily="34" charset="-122"/>
                 <a:cs typeface="Arial" pitchFamily="34" charset="-120"/>
               </a:rPr>
-              <a:t>THE UNIT OF WORK CHANGED</a:t>
-            </a:r>
-            <a:endParaRPr lang="en-US" sz="800" dirty="0"/>
-          </a:p>
-        </p:txBody>
-      </p:sp>
-      <p:sp>
-        <p:nvSpPr>
-          <p:cNvPr id="7" name="Text 5"/>
-          <p:cNvSpPr/>
-          <p:nvPr/>
-        </p:nvSpPr>
-        <p:spPr>
-          <a:xfrm>
-            <a:off x="457200" y="1938528"/>
-            <a:ext cx="4206240" cy="1097280"/>
-          </a:xfrm>
-          <a:prstGeom prst="rect">
-            <a:avLst/>
-          </a:prstGeom>
-          <a:noFill/>
-          <a:ln/>
-        </p:spPr>
-        <p:txBody>
-          <a:bodyPr wrap="square" lIns="0" tIns="0" rIns="0" bIns="0" rtlCol="0" anchor="t"/>
-          <a:lstStyle/>
-          <a:p>
-            <a:pPr indent="0" marL="0">
-              <a:buNone/>
-            </a:pPr>
-            <a:r>
-              <a:rPr lang="en-US" sz="1100" dirty="0">
-                <a:solidFill>
-                  <a:srgbClr val="C9C9CE"/>
-                </a:solidFill>
-                <a:latin typeface="Arial" pitchFamily="34" charset="0"/>
-                <a:ea typeface="Arial" pitchFamily="34" charset="-122"/>
-                <a:cs typeface="Arial" pitchFamily="34" charset="-120"/>
-              </a:rPr>
-              <a:t>One-shot prompting gave way to try → fail → fix → ship loops that run without a human in each cycle. As creation friction falls, compute demand expands geometrically (the Jevons paradox).</a:t>
-            </a:r>
-            <a:endParaRPr lang="en-US" sz="1100" dirty="0"/>
-          </a:p>
-        </p:txBody>
+              <a:t>THE AGENTIC LOOP</a:t>
+            </a:r>
+            <a:endParaRPr lang="en-US" sz="900" dirty="0"/>
+          </a:p>
+        </p:txBody>
+      </p:sp>
+      <p:sp>
+        <p:nvSpPr>
+          <p:cNvPr id="7" name="Shape 5"/>
+          <p:cNvSpPr/>
+          <p:nvPr/>
+        </p:nvSpPr>
+        <p:spPr>
+          <a:xfrm>
+            <a:off x="868680" y="2011680"/>
+            <a:ext cx="1097280" cy="457200"/>
+          </a:xfrm>
+          <a:prstGeom prst="roundRect">
+            <a:avLst>
+              <a:gd name="adj" fmla="val 12000"/>
+            </a:avLst>
+          </a:prstGeom>
+          <a:solidFill>
+            <a:srgbClr val="1C1C20"/>
+          </a:solidFill>
+          <a:ln w="19050">
+            <a:solidFill>
+              <a:srgbClr val="2BC4C4"/>
+            </a:solidFill>
+            <a:prstDash val="solid"/>
+          </a:ln>
+        </p:spPr>
       </p:sp>
       <p:sp>
         <p:nvSpPr>
@@ -9228,8 +9216,8 @@
         </p:nvSpPr>
         <p:spPr>
           <a:xfrm>
-            <a:off x="457200" y="3383280"/>
-            <a:ext cx="4206240" cy="320040"/>
+            <a:off x="868680" y="2011680"/>
+            <a:ext cx="1097280" cy="457200"/>
           </a:xfrm>
           <a:prstGeom prst="rect">
             <a:avLst/>
@@ -9241,11 +9229,400 @@
           <a:bodyPr wrap="square" lIns="0" tIns="0" rIns="0" bIns="0" rtlCol="0" anchor="ctr"/>
           <a:lstStyle/>
           <a:p>
-            <a:pPr indent="0" marL="0">
-              <a:buNone/>
-            </a:pPr>
-            <a:r>
-              <a:rPr lang="en-US" sz="1500" b="1" dirty="0">
+            <a:pPr algn="ctr" indent="0" marL="0">
+              <a:buNone/>
+            </a:pPr>
+            <a:r>
+              <a:rPr lang="en-US" sz="1000" b="1" dirty="0">
+                <a:solidFill>
+                  <a:srgbClr val="2BC4C4"/>
+                </a:solidFill>
+                <a:latin typeface="Arial" pitchFamily="34" charset="0"/>
+                <a:ea typeface="Arial" pitchFamily="34" charset="-122"/>
+                <a:cs typeface="Arial" pitchFamily="34" charset="-120"/>
+              </a:rPr>
+              <a:t>TRY</a:t>
+            </a:r>
+            <a:endParaRPr lang="en-US" sz="1000" dirty="0"/>
+          </a:p>
+        </p:txBody>
+      </p:sp>
+      <p:sp>
+        <p:nvSpPr>
+          <p:cNvPr id="9" name="Shape 7"/>
+          <p:cNvSpPr/>
+          <p:nvPr/>
+        </p:nvSpPr>
+        <p:spPr>
+          <a:xfrm>
+            <a:off x="2514600" y="2011680"/>
+            <a:ext cx="1097280" cy="457200"/>
+          </a:xfrm>
+          <a:prstGeom prst="roundRect">
+            <a:avLst>
+              <a:gd name="adj" fmla="val 12000"/>
+            </a:avLst>
+          </a:prstGeom>
+          <a:solidFill>
+            <a:srgbClr val="1C1C20"/>
+          </a:solidFill>
+          <a:ln w="19050">
+            <a:solidFill>
+              <a:srgbClr val="2BC4C4"/>
+            </a:solidFill>
+            <a:prstDash val="solid"/>
+          </a:ln>
+        </p:spPr>
+      </p:sp>
+      <p:sp>
+        <p:nvSpPr>
+          <p:cNvPr id="10" name="Text 8"/>
+          <p:cNvSpPr/>
+          <p:nvPr/>
+        </p:nvSpPr>
+        <p:spPr>
+          <a:xfrm>
+            <a:off x="2514600" y="2011680"/>
+            <a:ext cx="1097280" cy="457200"/>
+          </a:xfrm>
+          <a:prstGeom prst="rect">
+            <a:avLst/>
+          </a:prstGeom>
+          <a:noFill/>
+          <a:ln/>
+        </p:spPr>
+        <p:txBody>
+          <a:bodyPr wrap="square" lIns="0" tIns="0" rIns="0" bIns="0" rtlCol="0" anchor="ctr"/>
+          <a:lstStyle/>
+          <a:p>
+            <a:pPr algn="ctr" indent="0" marL="0">
+              <a:buNone/>
+            </a:pPr>
+            <a:r>
+              <a:rPr lang="en-US" sz="1000" b="1" dirty="0">
+                <a:solidFill>
+                  <a:srgbClr val="2BC4C4"/>
+                </a:solidFill>
+                <a:latin typeface="Arial" pitchFamily="34" charset="0"/>
+                <a:ea typeface="Arial" pitchFamily="34" charset="-122"/>
+                <a:cs typeface="Arial" pitchFamily="34" charset="-120"/>
+              </a:rPr>
+              <a:t>FAIL</a:t>
+            </a:r>
+            <a:endParaRPr lang="en-US" sz="1000" dirty="0"/>
+          </a:p>
+        </p:txBody>
+      </p:sp>
+      <p:sp>
+        <p:nvSpPr>
+          <p:cNvPr id="11" name="Shape 9"/>
+          <p:cNvSpPr/>
+          <p:nvPr/>
+        </p:nvSpPr>
+        <p:spPr>
+          <a:xfrm>
+            <a:off x="2514600" y="2880360"/>
+            <a:ext cx="1097280" cy="457200"/>
+          </a:xfrm>
+          <a:prstGeom prst="roundRect">
+            <a:avLst>
+              <a:gd name="adj" fmla="val 12000"/>
+            </a:avLst>
+          </a:prstGeom>
+          <a:solidFill>
+            <a:srgbClr val="1C1C20"/>
+          </a:solidFill>
+          <a:ln w="19050">
+            <a:solidFill>
+              <a:srgbClr val="2BC4C4"/>
+            </a:solidFill>
+            <a:prstDash val="solid"/>
+          </a:ln>
+        </p:spPr>
+      </p:sp>
+      <p:sp>
+        <p:nvSpPr>
+          <p:cNvPr id="12" name="Text 10"/>
+          <p:cNvSpPr/>
+          <p:nvPr/>
+        </p:nvSpPr>
+        <p:spPr>
+          <a:xfrm>
+            <a:off x="2514600" y="2880360"/>
+            <a:ext cx="1097280" cy="457200"/>
+          </a:xfrm>
+          <a:prstGeom prst="rect">
+            <a:avLst/>
+          </a:prstGeom>
+          <a:noFill/>
+          <a:ln/>
+        </p:spPr>
+        <p:txBody>
+          <a:bodyPr wrap="square" lIns="0" tIns="0" rIns="0" bIns="0" rtlCol="0" anchor="ctr"/>
+          <a:lstStyle/>
+          <a:p>
+            <a:pPr algn="ctr" indent="0" marL="0">
+              <a:buNone/>
+            </a:pPr>
+            <a:r>
+              <a:rPr lang="en-US" sz="1000" b="1" dirty="0">
+                <a:solidFill>
+                  <a:srgbClr val="2BC4C4"/>
+                </a:solidFill>
+                <a:latin typeface="Arial" pitchFamily="34" charset="0"/>
+                <a:ea typeface="Arial" pitchFamily="34" charset="-122"/>
+                <a:cs typeface="Arial" pitchFamily="34" charset="-120"/>
+              </a:rPr>
+              <a:t>FIX</a:t>
+            </a:r>
+            <a:endParaRPr lang="en-US" sz="1000" dirty="0"/>
+          </a:p>
+        </p:txBody>
+      </p:sp>
+      <p:sp>
+        <p:nvSpPr>
+          <p:cNvPr id="13" name="Shape 11"/>
+          <p:cNvSpPr/>
+          <p:nvPr/>
+        </p:nvSpPr>
+        <p:spPr>
+          <a:xfrm>
+            <a:off x="868680" y="2880360"/>
+            <a:ext cx="1097280" cy="457200"/>
+          </a:xfrm>
+          <a:prstGeom prst="roundRect">
+            <a:avLst>
+              <a:gd name="adj" fmla="val 12000"/>
+            </a:avLst>
+          </a:prstGeom>
+          <a:solidFill>
+            <a:srgbClr val="1C1C20"/>
+          </a:solidFill>
+          <a:ln w="19050">
+            <a:solidFill>
+              <a:srgbClr val="2BC4C4"/>
+            </a:solidFill>
+            <a:prstDash val="solid"/>
+          </a:ln>
+        </p:spPr>
+      </p:sp>
+      <p:sp>
+        <p:nvSpPr>
+          <p:cNvPr id="14" name="Text 12"/>
+          <p:cNvSpPr/>
+          <p:nvPr/>
+        </p:nvSpPr>
+        <p:spPr>
+          <a:xfrm>
+            <a:off x="868680" y="2880360"/>
+            <a:ext cx="1097280" cy="457200"/>
+          </a:xfrm>
+          <a:prstGeom prst="rect">
+            <a:avLst/>
+          </a:prstGeom>
+          <a:noFill/>
+          <a:ln/>
+        </p:spPr>
+        <p:txBody>
+          <a:bodyPr wrap="square" lIns="0" tIns="0" rIns="0" bIns="0" rtlCol="0" anchor="ctr"/>
+          <a:lstStyle/>
+          <a:p>
+            <a:pPr algn="ctr" indent="0" marL="0">
+              <a:buNone/>
+            </a:pPr>
+            <a:r>
+              <a:rPr lang="en-US" sz="1000" b="1" dirty="0">
+                <a:solidFill>
+                  <a:srgbClr val="2BC4C4"/>
+                </a:solidFill>
+                <a:latin typeface="Arial" pitchFamily="34" charset="0"/>
+                <a:ea typeface="Arial" pitchFamily="34" charset="-122"/>
+                <a:cs typeface="Arial" pitchFamily="34" charset="-120"/>
+              </a:rPr>
+              <a:t>SHIP</a:t>
+            </a:r>
+            <a:endParaRPr lang="en-US" sz="1000" dirty="0"/>
+          </a:p>
+        </p:txBody>
+      </p:sp>
+      <p:sp>
+        <p:nvSpPr>
+          <p:cNvPr id="15" name="Shape 13"/>
+          <p:cNvSpPr/>
+          <p:nvPr/>
+        </p:nvSpPr>
+        <p:spPr>
+          <a:xfrm>
+            <a:off x="1993392" y="2240280"/>
+            <a:ext cx="493776" cy="0"/>
+          </a:xfrm>
+          <a:prstGeom prst="line">
+            <a:avLst/>
+          </a:prstGeom>
+          <a:noFill/>
+          <a:ln w="22225">
+            <a:solidFill>
+              <a:srgbClr val="2BC4C4"/>
+            </a:solidFill>
+            <a:prstDash val="solid"/>
+            <a:tailEnd type="triangle"/>
+          </a:ln>
+        </p:spPr>
+      </p:sp>
+      <p:sp>
+        <p:nvSpPr>
+          <p:cNvPr id="16" name="Shape 14"/>
+          <p:cNvSpPr/>
+          <p:nvPr/>
+        </p:nvSpPr>
+        <p:spPr>
+          <a:xfrm>
+            <a:off x="3063240" y="2496312"/>
+            <a:ext cx="0" cy="365760"/>
+          </a:xfrm>
+          <a:prstGeom prst="line">
+            <a:avLst/>
+          </a:prstGeom>
+          <a:noFill/>
+          <a:ln w="22225">
+            <a:solidFill>
+              <a:srgbClr val="2BC4C4"/>
+            </a:solidFill>
+            <a:prstDash val="solid"/>
+            <a:tailEnd type="triangle"/>
+          </a:ln>
+        </p:spPr>
+      </p:sp>
+      <p:sp>
+        <p:nvSpPr>
+          <p:cNvPr id="17" name="Shape 15"/>
+          <p:cNvSpPr/>
+          <p:nvPr/>
+        </p:nvSpPr>
+        <p:spPr>
+          <a:xfrm flipH="1">
+            <a:off x="1993392" y="3108960"/>
+            <a:ext cx="493776" cy="0"/>
+          </a:xfrm>
+          <a:prstGeom prst="line">
+            <a:avLst/>
+          </a:prstGeom>
+          <a:noFill/>
+          <a:ln w="22225">
+            <a:solidFill>
+              <a:srgbClr val="2BC4C4"/>
+            </a:solidFill>
+            <a:prstDash val="solid"/>
+            <a:tailEnd type="triangle"/>
+          </a:ln>
+        </p:spPr>
+      </p:sp>
+      <p:sp>
+        <p:nvSpPr>
+          <p:cNvPr id="18" name="Shape 16"/>
+          <p:cNvSpPr/>
+          <p:nvPr/>
+        </p:nvSpPr>
+        <p:spPr>
+          <a:xfrm flipV="1">
+            <a:off x="1417320" y="2496312"/>
+            <a:ext cx="0" cy="365760"/>
+          </a:xfrm>
+          <a:prstGeom prst="line">
+            <a:avLst/>
+          </a:prstGeom>
+          <a:noFill/>
+          <a:ln w="22225">
+            <a:solidFill>
+              <a:srgbClr val="2BC4C4"/>
+            </a:solidFill>
+            <a:prstDash val="solid"/>
+            <a:tailEnd type="triangle"/>
+          </a:ln>
+        </p:spPr>
+      </p:sp>
+      <p:sp>
+        <p:nvSpPr>
+          <p:cNvPr id="19" name="Text 17"/>
+          <p:cNvSpPr/>
+          <p:nvPr/>
+        </p:nvSpPr>
+        <p:spPr>
+          <a:xfrm>
+            <a:off x="1764792" y="2542032"/>
+            <a:ext cx="813816" cy="320040"/>
+          </a:xfrm>
+          <a:prstGeom prst="rect">
+            <a:avLst/>
+          </a:prstGeom>
+          <a:noFill/>
+          <a:ln/>
+        </p:spPr>
+        <p:txBody>
+          <a:bodyPr wrap="square" lIns="0" tIns="0" rIns="0" bIns="0" rtlCol="0" anchor="ctr"/>
+          <a:lstStyle/>
+          <a:p>
+            <a:pPr algn="ctr" indent="0" marL="0">
+              <a:buNone/>
+            </a:pPr>
+            <a:r>
+              <a:rPr lang="en-US" sz="700" i="1" dirty="0">
+                <a:solidFill>
+                  <a:srgbClr val="9A9AA0"/>
+                </a:solidFill>
+                <a:latin typeface="Arial" pitchFamily="34" charset="0"/>
+                <a:ea typeface="Arial" pitchFamily="34" charset="-122"/>
+                <a:cs typeface="Arial" pitchFamily="34" charset="-120"/>
+              </a:rPr>
+              <a:t>runs until</a:t>
+            </a:r>
+            <a:endParaRPr lang="en-US" sz="700" dirty="0"/>
+          </a:p>
+          <a:p>
+            <a:pPr algn="ctr" indent="0" marL="0">
+              <a:buNone/>
+            </a:pPr>
+            <a:r>
+              <a:rPr lang="en-US" sz="700" i="1" dirty="0">
+                <a:solidFill>
+                  <a:srgbClr val="9A9AA0"/>
+                </a:solidFill>
+                <a:latin typeface="Arial" pitchFamily="34" charset="0"/>
+                <a:ea typeface="Arial" pitchFamily="34" charset="-122"/>
+                <a:cs typeface="Arial" pitchFamily="34" charset="-120"/>
+              </a:rPr>
+              <a:t>done</a:t>
+            </a:r>
+            <a:endParaRPr lang="en-US" sz="700" dirty="0"/>
+          </a:p>
+        </p:txBody>
+      </p:sp>
+      <p:sp>
+        <p:nvSpPr>
+          <p:cNvPr id="20" name="Text 18"/>
+          <p:cNvSpPr/>
+          <p:nvPr/>
+        </p:nvSpPr>
+        <p:spPr>
+          <a:xfrm>
+            <a:off x="457200" y="3584448"/>
+            <a:ext cx="3931920" cy="292608"/>
+          </a:xfrm>
+          <a:prstGeom prst="rect">
+            <a:avLst/>
+          </a:prstGeom>
+          <a:noFill/>
+          <a:ln/>
+        </p:spPr>
+        <p:txBody>
+          <a:bodyPr wrap="square" lIns="0" tIns="0" rIns="0" bIns="0" rtlCol="0" anchor="ctr"/>
+          <a:lstStyle/>
+          <a:p>
+            <a:pPr indent="0" marL="0">
+              <a:buNone/>
+            </a:pPr>
+            <a:r>
+              <a:rPr lang="en-US" sz="1400" b="1" dirty="0">
                 <a:solidFill>
                   <a:srgbClr val="FFFFFF"/>
                 </a:solidFill>
@@ -9255,20 +9632,20 @@
               </a:rPr>
               <a:t>“My job is to write loops.”</a:t>
             </a:r>
-            <a:endParaRPr lang="en-US" sz="1500" dirty="0"/>
-          </a:p>
-        </p:txBody>
-      </p:sp>
-      <p:sp>
-        <p:nvSpPr>
-          <p:cNvPr id="9" name="Text 7"/>
-          <p:cNvSpPr/>
-          <p:nvPr/>
-        </p:nvSpPr>
-        <p:spPr>
-          <a:xfrm>
-            <a:off x="457200" y="3712464"/>
-            <a:ext cx="4206240" cy="182880"/>
+            <a:endParaRPr lang="en-US" sz="1400" dirty="0"/>
+          </a:p>
+        </p:txBody>
+      </p:sp>
+      <p:sp>
+        <p:nvSpPr>
+          <p:cNvPr id="21" name="Text 19"/>
+          <p:cNvSpPr/>
+          <p:nvPr/>
+        </p:nvSpPr>
+        <p:spPr>
+          <a:xfrm>
+            <a:off x="457200" y="3886200"/>
+            <a:ext cx="3931920" cy="182880"/>
           </a:xfrm>
           <a:prstGeom prst="rect">
             <a:avLst/>
@@ -9284,7 +9661,7 @@
               <a:buNone/>
             </a:pPr>
             <a:r>
-              <a:rPr lang="en-US" sz="800" dirty="0">
+              <a:rPr lang="en-US" sz="750" dirty="0">
                 <a:solidFill>
                   <a:srgbClr val="9A9AA0"/>
                 </a:solidFill>
@@ -9294,45 +9671,250 @@
               </a:rPr>
               <a:t>Boris Cherny — the agentic workflow in one sentence</a:t>
             </a:r>
-            <a:endParaRPr lang="en-US" sz="800" dirty="0"/>
-          </a:p>
-        </p:txBody>
-      </p:sp>
-      <p:sp>
-        <p:nvSpPr>
-          <p:cNvPr id="10" name="Shape 8"/>
-          <p:cNvSpPr/>
-          <p:nvPr/>
-        </p:nvSpPr>
-        <p:spPr>
-          <a:xfrm>
-            <a:off x="4846320" y="1627632"/>
-            <a:ext cx="3840480" cy="2377440"/>
+            <a:endParaRPr lang="en-US" sz="750" dirty="0"/>
+          </a:p>
+        </p:txBody>
+      </p:sp>
+      <p:sp>
+        <p:nvSpPr>
+          <p:cNvPr id="22" name="Text 20"/>
+          <p:cNvSpPr/>
+          <p:nvPr/>
+        </p:nvSpPr>
+        <p:spPr>
+          <a:xfrm>
+            <a:off x="4663440" y="1664208"/>
+            <a:ext cx="4023360" cy="182880"/>
+          </a:xfrm>
+          <a:prstGeom prst="rect">
+            <a:avLst/>
+          </a:prstGeom>
+          <a:noFill/>
+          <a:ln/>
+        </p:spPr>
+        <p:txBody>
+          <a:bodyPr wrap="square" lIns="0" tIns="0" rIns="0" bIns="0" rtlCol="0" anchor="ctr"/>
+          <a:lstStyle/>
+          <a:p>
+            <a:pPr indent="0" marL="0">
+              <a:buNone/>
+            </a:pPr>
+            <a:r>
+              <a:rPr lang="en-US" sz="900" b="1" spc="150" kern="0" dirty="0">
+                <a:solidFill>
+                  <a:srgbClr val="2BC4C4"/>
+                </a:solidFill>
+                <a:latin typeface="Arial" pitchFamily="34" charset="0"/>
+                <a:ea typeface="Arial" pitchFamily="34" charset="-122"/>
+                <a:cs typeface="Arial" pitchFamily="34" charset="-120"/>
+              </a:rPr>
+              <a:t>AS FRICTION FALLS, MORE GETS BUILT</a:t>
+            </a:r>
+            <a:endParaRPr lang="en-US" sz="900" dirty="0"/>
+          </a:p>
+        </p:txBody>
+      </p:sp>
+      <p:sp>
+        <p:nvSpPr>
+          <p:cNvPr id="23" name="Text 21"/>
+          <p:cNvSpPr/>
+          <p:nvPr/>
+        </p:nvSpPr>
+        <p:spPr>
+          <a:xfrm>
+            <a:off x="4663440" y="1883664"/>
+            <a:ext cx="4023360" cy="164592"/>
+          </a:xfrm>
+          <a:prstGeom prst="rect">
+            <a:avLst/>
+          </a:prstGeom>
+          <a:noFill/>
+          <a:ln/>
+        </p:spPr>
+        <p:txBody>
+          <a:bodyPr wrap="square" lIns="0" tIns="0" rIns="0" bIns="0" rtlCol="0" anchor="ctr"/>
+          <a:lstStyle/>
+          <a:p>
+            <a:pPr algn="r" indent="0" marL="0">
+              <a:buNone/>
+            </a:pPr>
+            <a:r>
+              <a:rPr lang="en-US" sz="750" i="1" dirty="0">
+                <a:solidFill>
+                  <a:srgbClr val="9A9AA0"/>
+                </a:solidFill>
+                <a:latin typeface="Arial" pitchFamily="34" charset="0"/>
+                <a:ea typeface="Arial" pitchFamily="34" charset="-122"/>
+                <a:cs typeface="Arial" pitchFamily="34" charset="-120"/>
+              </a:rPr>
+              <a:t>compute demanded ↑</a:t>
+            </a:r>
+            <a:endParaRPr lang="en-US" sz="750" dirty="0"/>
+          </a:p>
+        </p:txBody>
+      </p:sp>
+      <p:sp>
+        <p:nvSpPr>
+          <p:cNvPr id="24" name="Shape 22"/>
+          <p:cNvSpPr/>
+          <p:nvPr/>
+        </p:nvSpPr>
+        <p:spPr>
+          <a:xfrm>
+            <a:off x="4892040" y="3200400"/>
+            <a:ext cx="777240" cy="411480"/>
           </a:xfrm>
           <a:prstGeom prst="rect">
             <a:avLst/>
           </a:prstGeom>
           <a:solidFill>
-            <a:srgbClr val="1E1E24"/>
+            <a:srgbClr val="3E3E46"/>
           </a:solidFill>
-          <a:ln w="12700">
-            <a:solidFill>
-              <a:srgbClr val="2A2A30"/>
-            </a:solidFill>
-            <a:prstDash val="dash"/>
-          </a:ln>
-        </p:spPr>
-      </p:sp>
-      <p:sp>
-        <p:nvSpPr>
-          <p:cNvPr id="11" name="Shape 9"/>
-          <p:cNvSpPr/>
-          <p:nvPr/>
-        </p:nvSpPr>
-        <p:spPr>
-          <a:xfrm>
-            <a:off x="4846320" y="1627632"/>
-            <a:ext cx="310896" cy="36576"/>
+          <a:ln/>
+        </p:spPr>
+      </p:sp>
+      <p:sp>
+        <p:nvSpPr>
+          <p:cNvPr id="25" name="Text 23"/>
+          <p:cNvSpPr/>
+          <p:nvPr/>
+        </p:nvSpPr>
+        <p:spPr>
+          <a:xfrm>
+            <a:off x="4782312" y="3657600"/>
+            <a:ext cx="996696" cy="384048"/>
+          </a:xfrm>
+          <a:prstGeom prst="rect">
+            <a:avLst/>
+          </a:prstGeom>
+          <a:noFill/>
+          <a:ln/>
+        </p:spPr>
+        <p:txBody>
+          <a:bodyPr wrap="square" lIns="0" tIns="0" rIns="0" bIns="0" rtlCol="0" anchor="t"/>
+          <a:lstStyle/>
+          <a:p>
+            <a:pPr algn="ctr" indent="0" marL="0">
+              <a:buNone/>
+            </a:pPr>
+            <a:r>
+              <a:rPr lang="en-US" sz="680" dirty="0">
+                <a:solidFill>
+                  <a:srgbClr val="9A9AA0"/>
+                </a:solidFill>
+                <a:latin typeface="Arial" pitchFamily="34" charset="0"/>
+                <a:ea typeface="Arial" pitchFamily="34" charset="-122"/>
+                <a:cs typeface="Arial" pitchFamily="34" charset="-120"/>
+              </a:rPr>
+              <a:t>Internal</a:t>
+            </a:r>
+            <a:endParaRPr lang="en-US" sz="680" dirty="0"/>
+          </a:p>
+          <a:p>
+            <a:pPr algn="ctr" indent="0" marL="0">
+              <a:buNone/>
+            </a:pPr>
+            <a:r>
+              <a:rPr lang="en-US" sz="680" dirty="0">
+                <a:solidFill>
+                  <a:srgbClr val="9A9AA0"/>
+                </a:solidFill>
+                <a:latin typeface="Arial" pitchFamily="34" charset="0"/>
+                <a:ea typeface="Arial" pitchFamily="34" charset="-122"/>
+                <a:cs typeface="Arial" pitchFamily="34" charset="-120"/>
+              </a:rPr>
+              <a:t>PDF summaries</a:t>
+            </a:r>
+            <a:endParaRPr lang="en-US" sz="680" dirty="0"/>
+          </a:p>
+        </p:txBody>
+      </p:sp>
+      <p:sp>
+        <p:nvSpPr>
+          <p:cNvPr id="26" name="Shape 24"/>
+          <p:cNvSpPr/>
+          <p:nvPr/>
+        </p:nvSpPr>
+        <p:spPr>
+          <a:xfrm>
+            <a:off x="5852160" y="2834640"/>
+            <a:ext cx="777240" cy="777240"/>
+          </a:xfrm>
+          <a:prstGeom prst="rect">
+            <a:avLst/>
+          </a:prstGeom>
+          <a:solidFill>
+            <a:srgbClr val="3E3E46"/>
+          </a:solidFill>
+          <a:ln/>
+        </p:spPr>
+      </p:sp>
+      <p:sp>
+        <p:nvSpPr>
+          <p:cNvPr id="27" name="Text 25"/>
+          <p:cNvSpPr/>
+          <p:nvPr/>
+        </p:nvSpPr>
+        <p:spPr>
+          <a:xfrm>
+            <a:off x="5742432" y="3657600"/>
+            <a:ext cx="996696" cy="384048"/>
+          </a:xfrm>
+          <a:prstGeom prst="rect">
+            <a:avLst/>
+          </a:prstGeom>
+          <a:noFill/>
+          <a:ln/>
+        </p:spPr>
+        <p:txBody>
+          <a:bodyPr wrap="square" lIns="0" tIns="0" rIns="0" bIns="0" rtlCol="0" anchor="t"/>
+          <a:lstStyle/>
+          <a:p>
+            <a:pPr algn="ctr" indent="0" marL="0">
+              <a:buNone/>
+            </a:pPr>
+            <a:r>
+              <a:rPr lang="en-US" sz="680" dirty="0">
+                <a:solidFill>
+                  <a:srgbClr val="9A9AA0"/>
+                </a:solidFill>
+                <a:latin typeface="Arial" pitchFamily="34" charset="0"/>
+                <a:ea typeface="Arial" pitchFamily="34" charset="-122"/>
+                <a:cs typeface="Arial" pitchFamily="34" charset="-120"/>
+              </a:rPr>
+              <a:t>Custom</a:t>
+            </a:r>
+            <a:endParaRPr lang="en-US" sz="680" dirty="0"/>
+          </a:p>
+          <a:p>
+            <a:pPr algn="ctr" indent="0" marL="0">
+              <a:buNone/>
+            </a:pPr>
+            <a:r>
+              <a:rPr lang="en-US" sz="680" dirty="0">
+                <a:solidFill>
+                  <a:srgbClr val="9A9AA0"/>
+                </a:solidFill>
+                <a:latin typeface="Arial" pitchFamily="34" charset="0"/>
+                <a:ea typeface="Arial" pitchFamily="34" charset="-122"/>
+                <a:cs typeface="Arial" pitchFamily="34" charset="-120"/>
+              </a:rPr>
+              <a:t>dashboards</a:t>
+            </a:r>
+            <a:endParaRPr lang="en-US" sz="680" dirty="0"/>
+          </a:p>
+        </p:txBody>
+      </p:sp>
+      <p:sp>
+        <p:nvSpPr>
+          <p:cNvPr id="28" name="Shape 26"/>
+          <p:cNvSpPr/>
+          <p:nvPr/>
+        </p:nvSpPr>
+        <p:spPr>
+          <a:xfrm>
+            <a:off x="6812280" y="2468880"/>
+            <a:ext cx="777240" cy="1143000"/>
           </a:xfrm>
           <a:prstGeom prst="rect">
             <a:avLst/>
@@ -9345,14 +9927,70 @@
       </p:sp>
       <p:sp>
         <p:nvSpPr>
-          <p:cNvPr id="12" name="Shape 10"/>
-          <p:cNvSpPr/>
-          <p:nvPr/>
-        </p:nvSpPr>
-        <p:spPr>
-          <a:xfrm>
-            <a:off x="4846320" y="1627632"/>
-            <a:ext cx="36576" cy="310896"/>
+          <p:cNvPr id="29" name="Text 27"/>
+          <p:cNvSpPr/>
+          <p:nvPr/>
+        </p:nvSpPr>
+        <p:spPr>
+          <a:xfrm>
+            <a:off x="6702552" y="3657600"/>
+            <a:ext cx="996696" cy="384048"/>
+          </a:xfrm>
+          <a:prstGeom prst="rect">
+            <a:avLst/>
+          </a:prstGeom>
+          <a:noFill/>
+          <a:ln/>
+        </p:spPr>
+        <p:txBody>
+          <a:bodyPr wrap="square" lIns="0" tIns="0" rIns="0" bIns="0" rtlCol="0" anchor="t"/>
+          <a:lstStyle/>
+          <a:p>
+            <a:pPr algn="ctr" indent="0" marL="0">
+              <a:buNone/>
+            </a:pPr>
+            <a:r>
+              <a:rPr lang="en-US" sz="680" b="1" dirty="0">
+                <a:solidFill>
+                  <a:srgbClr val="FFFFFF"/>
+                </a:solidFill>
+                <a:latin typeface="Arial" pitchFamily="34" charset="0"/>
+                <a:ea typeface="Arial" pitchFamily="34" charset="-122"/>
+                <a:cs typeface="Arial" pitchFamily="34" charset="-120"/>
+              </a:rPr>
+              <a:t>Disposable</a:t>
+            </a:r>
+            <a:endParaRPr lang="en-US" sz="680" dirty="0"/>
+          </a:p>
+          <a:p>
+            <a:pPr algn="ctr" indent="0" marL="0">
+              <a:buNone/>
+            </a:pPr>
+            <a:r>
+              <a:rPr lang="en-US" sz="680" b="1" dirty="0">
+                <a:solidFill>
+                  <a:srgbClr val="FFFFFF"/>
+                </a:solidFill>
+                <a:latin typeface="Arial" pitchFamily="34" charset="0"/>
+                <a:ea typeface="Arial" pitchFamily="34" charset="-122"/>
+                <a:cs typeface="Arial" pitchFamily="34" charset="-120"/>
+              </a:rPr>
+              <a:t>web apps</a:t>
+            </a:r>
+            <a:endParaRPr lang="en-US" sz="680" dirty="0"/>
+          </a:p>
+        </p:txBody>
+      </p:sp>
+      <p:sp>
+        <p:nvSpPr>
+          <p:cNvPr id="30" name="Shape 28"/>
+          <p:cNvSpPr/>
+          <p:nvPr/>
+        </p:nvSpPr>
+        <p:spPr>
+          <a:xfrm>
+            <a:off x="7772400" y="2148840"/>
+            <a:ext cx="777240" cy="1463040"/>
           </a:xfrm>
           <a:prstGeom prst="rect">
             <a:avLst/>
@@ -9365,93 +10003,14 @@
       </p:sp>
       <p:sp>
         <p:nvSpPr>
-          <p:cNvPr id="13" name="Shape 11"/>
-          <p:cNvSpPr/>
-          <p:nvPr/>
-        </p:nvSpPr>
-        <p:spPr>
-          <a:xfrm>
-            <a:off x="8375904" y="3968496"/>
-            <a:ext cx="310896" cy="36576"/>
-          </a:xfrm>
-          <a:prstGeom prst="rect">
-            <a:avLst/>
-          </a:prstGeom>
-          <a:solidFill>
-            <a:srgbClr val="2BC4C4"/>
-          </a:solidFill>
-          <a:ln/>
-        </p:spPr>
-      </p:sp>
-      <p:sp>
-        <p:nvSpPr>
-          <p:cNvPr id="14" name="Shape 12"/>
-          <p:cNvSpPr/>
-          <p:nvPr/>
-        </p:nvSpPr>
-        <p:spPr>
-          <a:xfrm>
-            <a:off x="8650224" y="3694176"/>
-            <a:ext cx="36576" cy="310896"/>
-          </a:xfrm>
-          <a:prstGeom prst="rect">
-            <a:avLst/>
-          </a:prstGeom>
-          <a:solidFill>
-            <a:srgbClr val="2BC4C4"/>
-          </a:solidFill>
-          <a:ln/>
-        </p:spPr>
-      </p:sp>
-      <p:sp>
-        <p:nvSpPr>
-          <p:cNvPr id="15" name="Text 13"/>
-          <p:cNvSpPr/>
-          <p:nvPr/>
-        </p:nvSpPr>
-        <p:spPr>
-          <a:xfrm>
-            <a:off x="5029200" y="1773936"/>
-            <a:ext cx="3474720" cy="219456"/>
-          </a:xfrm>
-          <a:prstGeom prst="rect">
-            <a:avLst/>
-          </a:prstGeom>
-          <a:noFill/>
-          <a:ln/>
-        </p:spPr>
-        <p:txBody>
-          <a:bodyPr wrap="square" lIns="0" tIns="0" rIns="0" bIns="0" rtlCol="0" anchor="ctr"/>
-          <a:lstStyle/>
-          <a:p>
-            <a:pPr indent="0" marL="0">
-              <a:buNone/>
-            </a:pPr>
-            <a:r>
-              <a:rPr lang="en-US" sz="900" b="1" spc="200" kern="0" dirty="0">
-                <a:solidFill>
-                  <a:srgbClr val="2BC4C4"/>
-                </a:solidFill>
-                <a:latin typeface="Arial" pitchFamily="34" charset="0"/>
-                <a:ea typeface="Arial" pitchFamily="34" charset="-122"/>
-                <a:cs typeface="Arial" pitchFamily="34" charset="-120"/>
-              </a:rPr>
-              <a:t>IMAGE  ·  loop + rising demand</a:t>
-            </a:r>
-            <a:endParaRPr lang="en-US" sz="900" dirty="0"/>
-          </a:p>
-        </p:txBody>
-      </p:sp>
-      <p:sp>
-        <p:nvSpPr>
-          <p:cNvPr id="16" name="Text 14"/>
-          <p:cNvSpPr/>
-          <p:nvPr/>
-        </p:nvSpPr>
-        <p:spPr>
-          <a:xfrm>
-            <a:off x="5029200" y="2048256"/>
-            <a:ext cx="3474720" cy="1773936"/>
+          <p:cNvPr id="31" name="Text 29"/>
+          <p:cNvSpPr/>
+          <p:nvPr/>
+        </p:nvSpPr>
+        <p:spPr>
+          <a:xfrm>
+            <a:off x="7662672" y="3657600"/>
+            <a:ext cx="996696" cy="384048"/>
           </a:xfrm>
           <a:prstGeom prst="rect">
             <a:avLst/>
@@ -9463,11 +10022,91 @@
           <a:bodyPr wrap="square" lIns="0" tIns="0" rIns="0" bIns="0" rtlCol="0" anchor="t"/>
           <a:lstStyle/>
           <a:p>
-            <a:pPr indent="0" marL="0">
-              <a:buNone/>
-            </a:pPr>
-            <a:r>
-              <a:rPr lang="en-US" sz="700" i="1" dirty="0">
+            <a:pPr algn="ctr" indent="0" marL="0">
+              <a:buNone/>
+            </a:pPr>
+            <a:r>
+              <a:rPr lang="en-US" sz="680" b="1" dirty="0">
+                <a:solidFill>
+                  <a:srgbClr val="FFFFFF"/>
+                </a:solidFill>
+                <a:latin typeface="Arial" pitchFamily="34" charset="0"/>
+                <a:ea typeface="Arial" pitchFamily="34" charset="-122"/>
+                <a:cs typeface="Arial" pitchFamily="34" charset="-120"/>
+              </a:rPr>
+              <a:t>Giant research</a:t>
+            </a:r>
+            <a:endParaRPr lang="en-US" sz="680" dirty="0"/>
+          </a:p>
+          <a:p>
+            <a:pPr algn="ctr" indent="0" marL="0">
+              <a:buNone/>
+            </a:pPr>
+            <a:r>
+              <a:rPr lang="en-US" sz="680" b="1" dirty="0">
+                <a:solidFill>
+                  <a:srgbClr val="FFFFFF"/>
+                </a:solidFill>
+                <a:latin typeface="Arial" pitchFamily="34" charset="0"/>
+                <a:ea typeface="Arial" pitchFamily="34" charset="-122"/>
+                <a:cs typeface="Arial" pitchFamily="34" charset="-120"/>
+              </a:rPr>
+              <a:t>projects</a:t>
+            </a:r>
+            <a:endParaRPr lang="en-US" sz="680" dirty="0"/>
+          </a:p>
+        </p:txBody>
+      </p:sp>
+      <p:sp>
+        <p:nvSpPr>
+          <p:cNvPr id="32" name="Shape 30"/>
+          <p:cNvSpPr/>
+          <p:nvPr/>
+        </p:nvSpPr>
+        <p:spPr>
+          <a:xfrm flipV="1">
+            <a:off x="5029200" y="2103120"/>
+            <a:ext cx="3200400" cy="1097280"/>
+          </a:xfrm>
+          <a:prstGeom prst="line">
+            <a:avLst/>
+          </a:prstGeom>
+          <a:noFill/>
+          <a:ln w="25400">
+            <a:solidFill>
+              <a:srgbClr val="2BC4C4"/>
+            </a:solidFill>
+            <a:prstDash val="solid"/>
+            <a:tailEnd type="triangle"/>
+          </a:ln>
+        </p:spPr>
+      </p:sp>
+      <p:sp>
+        <p:nvSpPr>
+          <p:cNvPr id="33" name="Text 31"/>
+          <p:cNvSpPr/>
+          <p:nvPr/>
+        </p:nvSpPr>
+        <p:spPr>
+          <a:xfrm>
+            <a:off x="457200" y="4160520"/>
+            <a:ext cx="8229600" cy="384048"/>
+          </a:xfrm>
+          <a:prstGeom prst="rect">
+            <a:avLst/>
+          </a:prstGeom>
+          <a:noFill/>
+          <a:ln/>
+        </p:spPr>
+        <p:txBody>
+          <a:bodyPr wrap="square" lIns="0" tIns="0" rIns="0" bIns="0" rtlCol="0" anchor="t"/>
+          <a:lstStyle/>
+          <a:p>
+            <a:pPr indent="0" marL="0">
+              <a:buNone/>
+            </a:pPr>
+            <a:r>
+              <a:rPr lang="en-US" sz="700" dirty="0">
                 <a:solidFill>
                   <a:srgbClr val="8A8A90"/>
                 </a:solidFill>
@@ -9475,71 +10114,15 @@
                 <a:ea typeface="Arial" pitchFamily="34" charset="-122"/>
                 <a:cs typeface="Arial" pitchFamily="34" charset="-120"/>
               </a:rPr>
-              <a:t>ISOMETRIC PROMPT → save as loops-jevons.png</a:t>
+              <a:t>Source: Internal strategic review, “The 2026 AI Frontier” (Jun 2026). Cherny/Steinberger loop framing; Jevons paradox illustrative, not measured data.</a:t>
             </a:r>
             <a:endParaRPr lang="en-US" sz="700" dirty="0"/>
           </a:p>
-          <a:p>
-            <a:pPr indent="0" marL="0">
-              <a:buNone/>
-            </a:pPr>
-            <a:r>
-              <a:rPr lang="en-US" sz="850" dirty="0">
-                <a:solidFill>
-                  <a:srgbClr val="C9C9CE"/>
-                </a:solidFill>
-                <a:latin typeface="Arial" pitchFamily="34" charset="0"/>
-                <a:ea typeface="Arial" pitchFamily="34" charset="-122"/>
-                <a:cs typeface="Arial" pitchFamily="34" charset="-120"/>
-              </a:rPr>
-              <a:t>Isometric 3D illustration, an infinity-shaped pipeline of four gears labelled by position (try, fail, fix, ship) feeding an ascending staircase of glowing server-rack blocks that grows taller to the right (runaway compute demand), teal accents, near-black background, clean low-poly vector style, soft studio glow, subtle floor grid, centered, no text, no logos.</a:t>
-            </a:r>
-            <a:endParaRPr lang="en-US" sz="700" dirty="0"/>
-          </a:p>
-        </p:txBody>
-      </p:sp>
-      <p:sp>
-        <p:nvSpPr>
-          <p:cNvPr id="17" name="Text 15"/>
-          <p:cNvSpPr/>
-          <p:nvPr/>
-        </p:nvSpPr>
-        <p:spPr>
-          <a:xfrm>
-            <a:off x="457200" y="4114800"/>
-            <a:ext cx="8229600" cy="384048"/>
-          </a:xfrm>
-          <a:prstGeom prst="rect">
-            <a:avLst/>
-          </a:prstGeom>
-          <a:noFill/>
-          <a:ln/>
-        </p:spPr>
-        <p:txBody>
-          <a:bodyPr wrap="square" lIns="0" tIns="0" rIns="0" bIns="0" rtlCol="0" anchor="t"/>
-          <a:lstStyle/>
-          <a:p>
-            <a:pPr indent="0" marL="0">
-              <a:buNone/>
-            </a:pPr>
-            <a:r>
-              <a:rPr lang="en-US" sz="700" dirty="0">
-                <a:solidFill>
-                  <a:srgbClr val="8A8A90"/>
-                </a:solidFill>
-                <a:latin typeface="Arial" pitchFamily="34" charset="0"/>
-                <a:ea typeface="Arial" pitchFamily="34" charset="-122"/>
-                <a:cs typeface="Arial" pitchFamily="34" charset="-120"/>
-              </a:rPr>
-              <a:t>Source: Internal strategic review, “The 2026 AI Frontier” (Jun 2026). Cherny/Steinberger loop framing; Jevons paradox illustrative, not measured data.</a:t>
-            </a:r>
-            <a:endParaRPr lang="en-US" sz="700" dirty="0"/>
-          </a:p>
-        </p:txBody>
-      </p:sp>
-      <p:sp>
-        <p:nvSpPr>
-          <p:cNvPr id="18" name="Shape 16"/>
+        </p:txBody>
+      </p:sp>
+      <p:sp>
+        <p:nvSpPr>
+          <p:cNvPr id="34" name="Shape 32"/>
           <p:cNvSpPr/>
           <p:nvPr/>
         </p:nvSpPr>
@@ -9559,7 +10142,7 @@
       </p:sp>
       <p:sp>
         <p:nvSpPr>
-          <p:cNvPr id="19" name="Shape 17"/>
+          <p:cNvPr id="35" name="Shape 33"/>
           <p:cNvSpPr/>
           <p:nvPr/>
         </p:nvSpPr>
@@ -9582,7 +10165,7 @@
       </p:sp>
       <p:sp>
         <p:nvSpPr>
-          <p:cNvPr id="20" name="Text 18"/>
+          <p:cNvPr id="36" name="Text 34"/>
           <p:cNvSpPr/>
           <p:nvPr/>
         </p:nvSpPr>
@@ -9621,7 +10204,7 @@
       </p:sp>
       <p:sp>
         <p:nvSpPr>
-          <p:cNvPr id="21" name="Text 19"/>
+          <p:cNvPr id="37" name="Text 35"/>
           <p:cNvSpPr/>
           <p:nvPr/>
         </p:nvSpPr>
@@ -10021,7 +10604,7 @@
                 <a:ea typeface="Arial" pitchFamily="34" charset="-122"/>
                 <a:cs typeface="Arial" pitchFamily="34" charset="-120"/>
               </a:rPr>
-              <a:t>Isometric 3D illustration, a fuel-pump-style 'token budget' dispenser with a glowing numeric meter, piping metered light into a laptop while a near-empty reservoir sits behind it (scarcity), orange and gold accents, near-black background, clean low-poly vector style, soft studio glow, subtle floor grid, centered, no text, no logos.</a:t>
+              <a:t>Isometric 3D illustration, a guarded vault dispensing only a small rationed handful of glowing tokens onto a conveyor that feeds a row of waiting laptops, an 'allocation' valve throttling the flow, orange and gold accents, near-black background, clean low-poly vector style, soft studio glow, subtle floor grid, centered, no text, no logos.</a:t>
             </a:r>
             <a:endParaRPr lang="en-US" sz="700" dirty="0"/>
           </a:p>
@@ -10898,7 +11481,7 @@
                 <a:ea typeface="Arial" pitchFamily="34" charset="-122"/>
                 <a:cs typeface="Arial" pitchFamily="34" charset="-120"/>
               </a:rPr>
-              <a:t>Isometric 3D illustration, a government capitol building and a corporate AI tower linked by a glowing bridge made of equity/share certificates and a handshake, a public 'dividend' coin flowing toward small houses, purple accents, near-black background, clean low-poly vector style, soft studio glow, subtle floor grid, centered, no text, no logos.</a:t>
+              <a:t>Isometric 3D illustration, a giant government hand planting a flag bearing a percentage symbol atop a glowing server-rack skyscraper, while a chute rains small dividend coins down onto a cluster of tiny suburban houses below, purple accents, near-black background, clean low-poly vector style, soft studio glow, subtle floor grid, centered, no text, no logos.</a:t>
             </a:r>
             <a:endParaRPr lang="en-US" sz="700" dirty="0"/>
           </a:p>
@@ -12132,107 +12715,170 @@
       </p:sp>
       <p:sp>
         <p:nvSpPr>
-          <p:cNvPr id="6" name="Shape 4"/>
-          <p:cNvSpPr/>
-          <p:nvPr/>
-        </p:nvSpPr>
-        <p:spPr>
-          <a:xfrm>
-            <a:off x="457200" y="1645920"/>
-            <a:ext cx="3840480" cy="2377440"/>
-          </a:xfrm>
-          <a:prstGeom prst="rect">
-            <a:avLst/>
+          <p:cNvPr id="6" name="Text 4"/>
+          <p:cNvSpPr/>
+          <p:nvPr/>
+        </p:nvSpPr>
+        <p:spPr>
+          <a:xfrm>
+            <a:off x="457200" y="1664208"/>
+            <a:ext cx="3931920" cy="182880"/>
+          </a:xfrm>
+          <a:prstGeom prst="rect">
+            <a:avLst/>
+          </a:prstGeom>
+          <a:noFill/>
+          <a:ln/>
+        </p:spPr>
+        <p:txBody>
+          <a:bodyPr wrap="square" lIns="0" tIns="0" rIns="0" bIns="0" rtlCol="0" anchor="ctr"/>
+          <a:lstStyle/>
+          <a:p>
+            <a:pPr indent="0" marL="0">
+              <a:buNone/>
+            </a:pPr>
+            <a:r>
+              <a:rPr lang="en-US" sz="900" b="1" spc="150" kern="0" dirty="0">
+                <a:solidFill>
+                  <a:srgbClr val="2BC4C4"/>
+                </a:solidFill>
+                <a:latin typeface="Arial" pitchFamily="34" charset="0"/>
+                <a:ea typeface="Arial" pitchFamily="34" charset="-122"/>
+                <a:cs typeface="Arial" pitchFamily="34" charset="-120"/>
+              </a:rPr>
+              <a:t>ONE ORCHESTRATOR  →  N AGENTS</a:t>
+            </a:r>
+            <a:endParaRPr lang="en-US" sz="900" dirty="0"/>
+          </a:p>
+        </p:txBody>
+      </p:sp>
+      <p:sp>
+        <p:nvSpPr>
+          <p:cNvPr id="7" name="Shape 5"/>
+          <p:cNvSpPr/>
+          <p:nvPr/>
+        </p:nvSpPr>
+        <p:spPr>
+          <a:xfrm>
+            <a:off x="548640" y="2606040"/>
+            <a:ext cx="1234440" cy="731520"/>
+          </a:xfrm>
+          <a:prstGeom prst="roundRect">
+            <a:avLst>
+              <a:gd name="adj" fmla="val 7500"/>
+            </a:avLst>
           </a:prstGeom>
           <a:solidFill>
-            <a:srgbClr val="1E1E24"/>
+            <a:srgbClr val="1C1C20"/>
           </a:solidFill>
+          <a:ln w="22225">
+            <a:solidFill>
+              <a:srgbClr val="2BC4C4"/>
+            </a:solidFill>
+            <a:prstDash val="solid"/>
+          </a:ln>
+        </p:spPr>
+      </p:sp>
+      <p:sp>
+        <p:nvSpPr>
+          <p:cNvPr id="8" name="Text 6"/>
+          <p:cNvSpPr/>
+          <p:nvPr/>
+        </p:nvSpPr>
+        <p:spPr>
+          <a:xfrm>
+            <a:off x="548640" y="2606040"/>
+            <a:ext cx="1234440" cy="731520"/>
+          </a:xfrm>
+          <a:prstGeom prst="rect">
+            <a:avLst/>
+          </a:prstGeom>
+          <a:noFill/>
+          <a:ln/>
+        </p:spPr>
+        <p:txBody>
+          <a:bodyPr wrap="square" lIns="0" tIns="0" rIns="0" bIns="0" rtlCol="0" anchor="ctr"/>
+          <a:lstStyle/>
+          <a:p>
+            <a:pPr algn="ctr" indent="0" marL="0">
+              <a:buNone/>
+            </a:pPr>
+            <a:r>
+              <a:rPr lang="en-US" sz="1100" b="1" dirty="0">
+                <a:solidFill>
+                  <a:srgbClr val="FFFFFF"/>
+                </a:solidFill>
+                <a:latin typeface="Arial" pitchFamily="34" charset="0"/>
+                <a:ea typeface="Arial" pitchFamily="34" charset="-122"/>
+                <a:cs typeface="Arial" pitchFamily="34" charset="-120"/>
+              </a:rPr>
+              <a:t>YOU</a:t>
+            </a:r>
+            <a:endParaRPr lang="en-US" sz="1100" dirty="0"/>
+          </a:p>
+          <a:p>
+            <a:pPr algn="ctr" indent="0" marL="0">
+              <a:buNone/>
+            </a:pPr>
+            <a:r>
+              <a:rPr lang="en-US" sz="750" dirty="0">
+                <a:solidFill>
+                  <a:srgbClr val="2BC4C4"/>
+                </a:solidFill>
+                <a:latin typeface="Arial" pitchFamily="34" charset="0"/>
+                <a:ea typeface="Arial" pitchFamily="34" charset="-122"/>
+                <a:cs typeface="Arial" pitchFamily="34" charset="-120"/>
+              </a:rPr>
+              <a:t>orchestrator</a:t>
+            </a:r>
+            <a:endParaRPr lang="en-US" sz="1100" dirty="0"/>
+          </a:p>
+        </p:txBody>
+      </p:sp>
+      <p:sp>
+        <p:nvSpPr>
+          <p:cNvPr id="9" name="Shape 7"/>
+          <p:cNvSpPr/>
+          <p:nvPr/>
+        </p:nvSpPr>
+        <p:spPr>
+          <a:xfrm flipV="1">
+            <a:off x="1783080" y="2039112"/>
+            <a:ext cx="1188720" cy="932688"/>
+          </a:xfrm>
+          <a:prstGeom prst="line">
+            <a:avLst/>
+          </a:prstGeom>
+          <a:noFill/>
           <a:ln w="12700">
             <a:solidFill>
-              <a:srgbClr val="2A2A30"/>
+              <a:srgbClr val="9A9AA0"/>
             </a:solidFill>
-            <a:prstDash val="dash"/>
+            <a:prstDash val="solid"/>
+            <a:tailEnd type="triangle"/>
           </a:ln>
         </p:spPr>
       </p:sp>
       <p:sp>
         <p:nvSpPr>
-          <p:cNvPr id="7" name="Shape 5"/>
-          <p:cNvSpPr/>
-          <p:nvPr/>
-        </p:nvSpPr>
-        <p:spPr>
-          <a:xfrm>
-            <a:off x="457200" y="1645920"/>
-            <a:ext cx="310896" cy="36576"/>
-          </a:xfrm>
-          <a:prstGeom prst="rect">
-            <a:avLst/>
-          </a:prstGeom>
-          <a:solidFill>
-            <a:srgbClr val="2BC4C4"/>
-          </a:solidFill>
-          <a:ln/>
-        </p:spPr>
-      </p:sp>
-      <p:sp>
-        <p:nvSpPr>
-          <p:cNvPr id="8" name="Shape 6"/>
-          <p:cNvSpPr/>
-          <p:nvPr/>
-        </p:nvSpPr>
-        <p:spPr>
-          <a:xfrm>
-            <a:off x="457200" y="1645920"/>
-            <a:ext cx="36576" cy="310896"/>
-          </a:xfrm>
-          <a:prstGeom prst="rect">
-            <a:avLst/>
-          </a:prstGeom>
-          <a:solidFill>
-            <a:srgbClr val="2BC4C4"/>
-          </a:solidFill>
-          <a:ln/>
-        </p:spPr>
-      </p:sp>
-      <p:sp>
-        <p:nvSpPr>
-          <p:cNvPr id="9" name="Shape 7"/>
-          <p:cNvSpPr/>
-          <p:nvPr/>
-        </p:nvSpPr>
-        <p:spPr>
-          <a:xfrm>
-            <a:off x="3986784" y="3986784"/>
-            <a:ext cx="310896" cy="36576"/>
-          </a:xfrm>
-          <a:prstGeom prst="rect">
-            <a:avLst/>
-          </a:prstGeom>
-          <a:solidFill>
-            <a:srgbClr val="2BC4C4"/>
-          </a:solidFill>
-          <a:ln/>
-        </p:spPr>
-      </p:sp>
-      <p:sp>
-        <p:nvSpPr>
           <p:cNvPr id="10" name="Shape 8"/>
           <p:cNvSpPr/>
           <p:nvPr/>
         </p:nvSpPr>
         <p:spPr>
           <a:xfrm>
-            <a:off x="4261104" y="3712464"/>
-            <a:ext cx="36576" cy="310896"/>
-          </a:xfrm>
-          <a:prstGeom prst="rect">
-            <a:avLst/>
-          </a:prstGeom>
-          <a:solidFill>
-            <a:srgbClr val="2BC4C4"/>
-          </a:solidFill>
-          <a:ln/>
+            <a:off x="2971800" y="1810512"/>
+            <a:ext cx="1280160" cy="457200"/>
+          </a:xfrm>
+          <a:prstGeom prst="rect">
+            <a:avLst/>
+          </a:prstGeom>
+          <a:ln w="15875">
+            <a:solidFill>
+              <a:srgbClr val="2BC4C4"/>
+            </a:solidFill>
+            <a:prstDash val="solid"/>
+          </a:ln>
         </p:spPr>
       </p:sp>
       <p:sp>
@@ -12243,8 +12889,8 @@
         </p:nvSpPr>
         <p:spPr>
           <a:xfrm>
-            <a:off x="640080" y="1792224"/>
-            <a:ext cx="3474720" cy="219456"/>
+            <a:off x="2971800" y="1810512"/>
+            <a:ext cx="1280160" cy="457200"/>
           </a:xfrm>
           <a:prstGeom prst="rect">
             <a:avLst/>
@@ -12256,11 +12902,11 @@
           <a:bodyPr wrap="square" lIns="0" tIns="0" rIns="0" bIns="0" rtlCol="0" anchor="ctr"/>
           <a:lstStyle/>
           <a:p>
-            <a:pPr indent="0" marL="0">
-              <a:buNone/>
-            </a:pPr>
-            <a:r>
-              <a:rPr lang="en-US" sz="900" b="1" spc="200" kern="0" dirty="0">
+            <a:pPr algn="ctr" indent="0" marL="0">
+              <a:buNone/>
+            </a:pPr>
+            <a:r>
+              <a:rPr lang="en-US" sz="850" b="1" dirty="0">
                 <a:solidFill>
                   <a:srgbClr val="2BC4C4"/>
                 </a:solidFill>
@@ -12268,22 +12914,277 @@
                 <a:ea typeface="Arial" pitchFamily="34" charset="-122"/>
                 <a:cs typeface="Arial" pitchFamily="34" charset="-120"/>
               </a:rPr>
-              <a:t>IMAGE  ·  orchestrator + N agents</a:t>
-            </a:r>
-            <a:endParaRPr lang="en-US" sz="900" dirty="0"/>
-          </a:p>
-        </p:txBody>
-      </p:sp>
-      <p:sp>
-        <p:nvSpPr>
-          <p:cNvPr id="12" name="Text 10"/>
-          <p:cNvSpPr/>
-          <p:nvPr/>
-        </p:nvSpPr>
-        <p:spPr>
-          <a:xfrm>
-            <a:off x="640080" y="2066544"/>
-            <a:ext cx="3474720" cy="1773936"/>
+              <a:t>RESEARCH</a:t>
+            </a:r>
+            <a:endParaRPr lang="en-US" sz="850" dirty="0"/>
+          </a:p>
+        </p:txBody>
+      </p:sp>
+      <p:sp>
+        <p:nvSpPr>
+          <p:cNvPr id="12" name="Shape 10"/>
+          <p:cNvSpPr/>
+          <p:nvPr/>
+        </p:nvSpPr>
+        <p:spPr>
+          <a:xfrm flipV="1">
+            <a:off x="1783080" y="2624328"/>
+            <a:ext cx="1188720" cy="347472"/>
+          </a:xfrm>
+          <a:prstGeom prst="line">
+            <a:avLst/>
+          </a:prstGeom>
+          <a:noFill/>
+          <a:ln w="12700">
+            <a:solidFill>
+              <a:srgbClr val="9A9AA0"/>
+            </a:solidFill>
+            <a:prstDash val="solid"/>
+            <a:tailEnd type="triangle"/>
+          </a:ln>
+        </p:spPr>
+      </p:sp>
+      <p:sp>
+        <p:nvSpPr>
+          <p:cNvPr id="13" name="Shape 11"/>
+          <p:cNvSpPr/>
+          <p:nvPr/>
+        </p:nvSpPr>
+        <p:spPr>
+          <a:xfrm>
+            <a:off x="2971800" y="2395728"/>
+            <a:ext cx="1280160" cy="457200"/>
+          </a:xfrm>
+          <a:prstGeom prst="rect">
+            <a:avLst/>
+          </a:prstGeom>
+          <a:ln w="15875">
+            <a:solidFill>
+              <a:srgbClr val="2BC4C4"/>
+            </a:solidFill>
+            <a:prstDash val="solid"/>
+          </a:ln>
+        </p:spPr>
+      </p:sp>
+      <p:sp>
+        <p:nvSpPr>
+          <p:cNvPr id="14" name="Text 12"/>
+          <p:cNvSpPr/>
+          <p:nvPr/>
+        </p:nvSpPr>
+        <p:spPr>
+          <a:xfrm>
+            <a:off x="2971800" y="2395728"/>
+            <a:ext cx="1280160" cy="457200"/>
+          </a:xfrm>
+          <a:prstGeom prst="rect">
+            <a:avLst/>
+          </a:prstGeom>
+          <a:noFill/>
+          <a:ln/>
+        </p:spPr>
+        <p:txBody>
+          <a:bodyPr wrap="square" lIns="0" tIns="0" rIns="0" bIns="0" rtlCol="0" anchor="ctr"/>
+          <a:lstStyle/>
+          <a:p>
+            <a:pPr algn="ctr" indent="0" marL="0">
+              <a:buNone/>
+            </a:pPr>
+            <a:r>
+              <a:rPr lang="en-US" sz="850" b="1" dirty="0">
+                <a:solidFill>
+                  <a:srgbClr val="2BC4C4"/>
+                </a:solidFill>
+                <a:latin typeface="Arial" pitchFamily="34" charset="0"/>
+                <a:ea typeface="Arial" pitchFamily="34" charset="-122"/>
+                <a:cs typeface="Arial" pitchFamily="34" charset="-120"/>
+              </a:rPr>
+              <a:t>BUILD</a:t>
+            </a:r>
+            <a:endParaRPr lang="en-US" sz="850" dirty="0"/>
+          </a:p>
+        </p:txBody>
+      </p:sp>
+      <p:sp>
+        <p:nvSpPr>
+          <p:cNvPr id="15" name="Shape 13"/>
+          <p:cNvSpPr/>
+          <p:nvPr/>
+        </p:nvSpPr>
+        <p:spPr>
+          <a:xfrm>
+            <a:off x="1783080" y="2971800"/>
+            <a:ext cx="1188720" cy="237744"/>
+          </a:xfrm>
+          <a:prstGeom prst="line">
+            <a:avLst/>
+          </a:prstGeom>
+          <a:noFill/>
+          <a:ln w="12700">
+            <a:solidFill>
+              <a:srgbClr val="9A9AA0"/>
+            </a:solidFill>
+            <a:prstDash val="solid"/>
+            <a:tailEnd type="triangle"/>
+          </a:ln>
+        </p:spPr>
+      </p:sp>
+      <p:sp>
+        <p:nvSpPr>
+          <p:cNvPr id="16" name="Shape 14"/>
+          <p:cNvSpPr/>
+          <p:nvPr/>
+        </p:nvSpPr>
+        <p:spPr>
+          <a:xfrm>
+            <a:off x="2971800" y="2980944"/>
+            <a:ext cx="1280160" cy="457200"/>
+          </a:xfrm>
+          <a:prstGeom prst="rect">
+            <a:avLst/>
+          </a:prstGeom>
+          <a:ln w="15875">
+            <a:solidFill>
+              <a:srgbClr val="2BC4C4"/>
+            </a:solidFill>
+            <a:prstDash val="solid"/>
+          </a:ln>
+        </p:spPr>
+      </p:sp>
+      <p:sp>
+        <p:nvSpPr>
+          <p:cNvPr id="17" name="Text 15"/>
+          <p:cNvSpPr/>
+          <p:nvPr/>
+        </p:nvSpPr>
+        <p:spPr>
+          <a:xfrm>
+            <a:off x="2971800" y="2980944"/>
+            <a:ext cx="1280160" cy="457200"/>
+          </a:xfrm>
+          <a:prstGeom prst="rect">
+            <a:avLst/>
+          </a:prstGeom>
+          <a:noFill/>
+          <a:ln/>
+        </p:spPr>
+        <p:txBody>
+          <a:bodyPr wrap="square" lIns="0" tIns="0" rIns="0" bIns="0" rtlCol="0" anchor="ctr"/>
+          <a:lstStyle/>
+          <a:p>
+            <a:pPr algn="ctr" indent="0" marL="0">
+              <a:buNone/>
+            </a:pPr>
+            <a:r>
+              <a:rPr lang="en-US" sz="850" b="1" dirty="0">
+                <a:solidFill>
+                  <a:srgbClr val="2BC4C4"/>
+                </a:solidFill>
+                <a:latin typeface="Arial" pitchFamily="34" charset="0"/>
+                <a:ea typeface="Arial" pitchFamily="34" charset="-122"/>
+                <a:cs typeface="Arial" pitchFamily="34" charset="-120"/>
+              </a:rPr>
+              <a:t>TEST</a:t>
+            </a:r>
+            <a:endParaRPr lang="en-US" sz="850" dirty="0"/>
+          </a:p>
+        </p:txBody>
+      </p:sp>
+      <p:sp>
+        <p:nvSpPr>
+          <p:cNvPr id="18" name="Shape 16"/>
+          <p:cNvSpPr/>
+          <p:nvPr/>
+        </p:nvSpPr>
+        <p:spPr>
+          <a:xfrm>
+            <a:off x="1783080" y="2971800"/>
+            <a:ext cx="1188720" cy="822960"/>
+          </a:xfrm>
+          <a:prstGeom prst="line">
+            <a:avLst/>
+          </a:prstGeom>
+          <a:noFill/>
+          <a:ln w="12700">
+            <a:solidFill>
+              <a:srgbClr val="9A9AA0"/>
+            </a:solidFill>
+            <a:prstDash val="solid"/>
+            <a:tailEnd type="triangle"/>
+          </a:ln>
+        </p:spPr>
+      </p:sp>
+      <p:sp>
+        <p:nvSpPr>
+          <p:cNvPr id="19" name="Shape 17"/>
+          <p:cNvSpPr/>
+          <p:nvPr/>
+        </p:nvSpPr>
+        <p:spPr>
+          <a:xfrm>
+            <a:off x="2971800" y="3566160"/>
+            <a:ext cx="1280160" cy="457200"/>
+          </a:xfrm>
+          <a:prstGeom prst="rect">
+            <a:avLst/>
+          </a:prstGeom>
+          <a:ln w="15875">
+            <a:solidFill>
+              <a:srgbClr val="2BC4C4"/>
+            </a:solidFill>
+            <a:prstDash val="solid"/>
+          </a:ln>
+        </p:spPr>
+      </p:sp>
+      <p:sp>
+        <p:nvSpPr>
+          <p:cNvPr id="20" name="Text 18"/>
+          <p:cNvSpPr/>
+          <p:nvPr/>
+        </p:nvSpPr>
+        <p:spPr>
+          <a:xfrm>
+            <a:off x="2971800" y="3566160"/>
+            <a:ext cx="1280160" cy="457200"/>
+          </a:xfrm>
+          <a:prstGeom prst="rect">
+            <a:avLst/>
+          </a:prstGeom>
+          <a:noFill/>
+          <a:ln/>
+        </p:spPr>
+        <p:txBody>
+          <a:bodyPr wrap="square" lIns="0" tIns="0" rIns="0" bIns="0" rtlCol="0" anchor="ctr"/>
+          <a:lstStyle/>
+          <a:p>
+            <a:pPr algn="ctr" indent="0" marL="0">
+              <a:buNone/>
+            </a:pPr>
+            <a:r>
+              <a:rPr lang="en-US" sz="850" b="1" dirty="0">
+                <a:solidFill>
+                  <a:srgbClr val="2BC4C4"/>
+                </a:solidFill>
+                <a:latin typeface="Arial" pitchFamily="34" charset="0"/>
+                <a:ea typeface="Arial" pitchFamily="34" charset="-122"/>
+                <a:cs typeface="Arial" pitchFamily="34" charset="-120"/>
+              </a:rPr>
+              <a:t>SHIP</a:t>
+            </a:r>
+            <a:endParaRPr lang="en-US" sz="850" dirty="0"/>
+          </a:p>
+        </p:txBody>
+      </p:sp>
+      <p:sp>
+        <p:nvSpPr>
+          <p:cNvPr id="21" name="Text 19"/>
+          <p:cNvSpPr/>
+          <p:nvPr/>
+        </p:nvSpPr>
+        <p:spPr>
+          <a:xfrm>
+            <a:off x="548640" y="3675888"/>
+            <a:ext cx="2286000" cy="457200"/>
           </a:xfrm>
           <a:prstGeom prst="rect">
             <a:avLst/>
@@ -12299,40 +13200,23 @@
               <a:buNone/>
             </a:pPr>
             <a:r>
-              <a:rPr lang="en-US" sz="700" i="1" dirty="0">
-                <a:solidFill>
-                  <a:srgbClr val="8A8A90"/>
-                </a:solidFill>
-                <a:latin typeface="Arial" pitchFamily="34" charset="0"/>
-                <a:ea typeface="Arial" pitchFamily="34" charset="-122"/>
-                <a:cs typeface="Arial" pitchFamily="34" charset="-120"/>
-              </a:rPr>
-              <a:t>ISOMETRIC PROMPT → save as labor-orchestrator.png</a:t>
-            </a:r>
-            <a:endParaRPr lang="en-US" sz="700" dirty="0"/>
-          </a:p>
-          <a:p>
-            <a:pPr indent="0" marL="0">
-              <a:buNone/>
-            </a:pPr>
-            <a:r>
-              <a:rPr lang="en-US" sz="850" dirty="0">
-                <a:solidFill>
-                  <a:srgbClr val="C9C9CE"/>
-                </a:solidFill>
-                <a:latin typeface="Arial" pitchFamily="34" charset="0"/>
-                <a:ea typeface="Arial" pitchFamily="34" charset="-122"/>
-                <a:cs typeface="Arial" pitchFamily="34" charset="-120"/>
-              </a:rPr>
-              <a:t>Isometric 3D illustration, a single human at a control console directing a fan-out of many small agent-robots working in parallel on research, build, test and ship tasks, glowing connection lines, teal accents, near-black background, clean low-poly vector style, soft studio glow, subtle floor grid, centered, no text, no logos.</a:t>
-            </a:r>
-            <a:endParaRPr lang="en-US" sz="700" dirty="0"/>
-          </a:p>
-        </p:txBody>
-      </p:sp>
-      <p:sp>
-        <p:nvSpPr>
-          <p:cNvPr id="13" name="Shape 11"/>
+              <a:rPr lang="en-US" sz="800" i="1" dirty="0">
+                <a:solidFill>
+                  <a:srgbClr val="9A9AA0"/>
+                </a:solidFill>
+                <a:latin typeface="Arial" pitchFamily="34" charset="0"/>
+                <a:ea typeface="Arial" pitchFamily="34" charset="-122"/>
+                <a:cs typeface="Arial" pitchFamily="34" charset="-120"/>
+              </a:rPr>
+              <a:t>one person now outputs like a team</a:t>
+            </a:r>
+            <a:endParaRPr lang="en-US" sz="800" dirty="0"/>
+          </a:p>
+        </p:txBody>
+      </p:sp>
+      <p:sp>
+        <p:nvSpPr>
+          <p:cNvPr id="22" name="Shape 20"/>
           <p:cNvSpPr/>
           <p:nvPr/>
         </p:nvSpPr>
@@ -12352,7 +13236,7 @@
       </p:sp>
       <p:sp>
         <p:nvSpPr>
-          <p:cNvPr id="14" name="Text 12"/>
+          <p:cNvPr id="23" name="Text 21"/>
           <p:cNvSpPr/>
           <p:nvPr/>
         </p:nvSpPr>
@@ -12408,7 +13292,7 @@
       </p:sp>
       <p:sp>
         <p:nvSpPr>
-          <p:cNvPr id="15" name="Shape 13"/>
+          <p:cNvPr id="24" name="Shape 22"/>
           <p:cNvSpPr/>
           <p:nvPr/>
         </p:nvSpPr>
@@ -12428,7 +13312,7 @@
       </p:sp>
       <p:sp>
         <p:nvSpPr>
-          <p:cNvPr id="16" name="Text 14"/>
+          <p:cNvPr id="25" name="Text 23"/>
           <p:cNvSpPr/>
           <p:nvPr/>
         </p:nvSpPr>
@@ -12484,7 +13368,7 @@
       </p:sp>
       <p:sp>
         <p:nvSpPr>
-          <p:cNvPr id="17" name="Shape 15"/>
+          <p:cNvPr id="26" name="Shape 24"/>
           <p:cNvSpPr/>
           <p:nvPr/>
         </p:nvSpPr>
@@ -12504,7 +13388,7 @@
       </p:sp>
       <p:sp>
         <p:nvSpPr>
-          <p:cNvPr id="18" name="Text 16"/>
+          <p:cNvPr id="27" name="Text 25"/>
           <p:cNvSpPr/>
           <p:nvPr/>
         </p:nvSpPr>
@@ -12560,7 +13444,7 @@
       </p:sp>
       <p:sp>
         <p:nvSpPr>
-          <p:cNvPr id="19" name="Text 17"/>
+          <p:cNvPr id="28" name="Text 26"/>
           <p:cNvSpPr/>
           <p:nvPr/>
         </p:nvSpPr>
@@ -12599,7 +13483,7 @@
       </p:sp>
       <p:sp>
         <p:nvSpPr>
-          <p:cNvPr id="20" name="Shape 18"/>
+          <p:cNvPr id="29" name="Shape 27"/>
           <p:cNvSpPr/>
           <p:nvPr/>
         </p:nvSpPr>
@@ -12619,7 +13503,7 @@
       </p:sp>
       <p:sp>
         <p:nvSpPr>
-          <p:cNvPr id="21" name="Shape 19"/>
+          <p:cNvPr id="30" name="Shape 28"/>
           <p:cNvSpPr/>
           <p:nvPr/>
         </p:nvSpPr>
@@ -12642,7 +13526,7 @@
       </p:sp>
       <p:sp>
         <p:nvSpPr>
-          <p:cNvPr id="22" name="Text 20"/>
+          <p:cNvPr id="31" name="Text 29"/>
           <p:cNvSpPr/>
           <p:nvPr/>
         </p:nvSpPr>
@@ -12681,7 +13565,7 @@
       </p:sp>
       <p:sp>
         <p:nvSpPr>
-          <p:cNvPr id="23" name="Text 21"/>
+          <p:cNvPr id="32" name="Text 30"/>
           <p:cNvSpPr/>
           <p:nvPr/>
         </p:nvSpPr>

--- a/ai-markets-deck.pptx
+++ b/ai-markets-deck.pptx
@@ -2761,7 +2761,7 @@
                 <a:ea typeface="Arial" pitchFamily="34" charset="-122"/>
                 <a:cs typeface="Arial" pitchFamily="34" charset="-120"/>
               </a:rPr>
-              <a:t>ISOMETRIC PROMPT → save as cover.png</a:t>
+              <a:t>IMAGE PROMPT → save as cover.png</a:t>
             </a:r>
             <a:endParaRPr lang="en-US" sz="700" dirty="0"/>
           </a:p>
@@ -2778,7 +2778,7 @@
                 <a:ea typeface="Arial" pitchFamily="34" charset="-122"/>
                 <a:cs typeface="Arial" pitchFamily="34" charset="-120"/>
               </a:rPr>
-              <a:t>Isometric 3D illustration, a financial district at night where the skyscrapers are stacked GPU server-racks; a glowing candlestick stock-chart runs like a road along their base, and a curved arrow of capital flows from a domed bank building into the single tallest GPU tower; orange and yellow accents, near-black background, clean low-poly vector style, soft studio glow, subtle floor grid, centered, no text, no logos.</a:t>
+              <a:t>Clean modern editorial illustration with natural perspective (not isometric), a financial district at night where the skyscrapers are stacked GPU server-racks; a glowing candlestick stock-chart runs like a road along their base, and a curved arrow of capital flows from a domed bank building into the single tallest GPU tower; orange and yellow accents, on a near-black background, soft cinematic studio lighting, minimal and polished, single centered subject, no text, no words, no logos.</a:t>
             </a:r>
             <a:endParaRPr lang="en-US" sz="700" dirty="0"/>
           </a:p>
@@ -4143,7 +4143,7 @@
                 <a:ea typeface="Arial" pitchFamily="34" charset="-122"/>
                 <a:cs typeface="Arial" pitchFamily="34" charset="-120"/>
               </a:rPr>
-              <a:t>ISOMETRIC PROMPT → save as frontier-embodiment.png</a:t>
+              <a:t>IMAGE PROMPT → save as frontier-embodiment.png</a:t>
             </a:r>
             <a:endParaRPr lang="en-US" sz="700" dirty="0"/>
           </a:p>
@@ -4160,7 +4160,7 @@
                 <a:ea typeface="Arial" pitchFamily="34" charset="-122"/>
                 <a:cs typeface="Arial" pitchFamily="34" charset="-120"/>
               </a:rPr>
-              <a:t>Isometric 3D illustration, a humanoid robot carrying a labeled tote down a numbered warehouse aisle lined with shelving racks, mid-stride, pink accents, near-black background, clean low-poly vector style, soft studio glow, subtle floor grid, centered, no text, no logos.</a:t>
+              <a:t>Clean modern editorial illustration with natural perspective (not isometric), a humanoid robot carrying a labeled tote down a numbered warehouse aisle lined with shelving racks, mid-stride, pink accents, on a near-black background, soft cinematic studio lighting, minimal and polished, single centered subject, no text, no words, no logos.</a:t>
             </a:r>
             <a:endParaRPr lang="en-US" sz="700" dirty="0"/>
           </a:p>
@@ -4439,7 +4439,7 @@
                 <a:ea typeface="Arial" pitchFamily="34" charset="-122"/>
                 <a:cs typeface="Arial" pitchFamily="34" charset="-120"/>
               </a:rPr>
-              <a:t>ISOMETRIC PROMPT → save as frontier-wheels.png</a:t>
+              <a:t>IMAGE PROMPT → save as frontier-wheels.png</a:t>
             </a:r>
             <a:endParaRPr lang="en-US" sz="700" dirty="0"/>
           </a:p>
@@ -4456,7 +4456,7 @@
                 <a:ea typeface="Arial" pitchFamily="34" charset="-122"/>
                 <a:cs typeface="Arial" pitchFamily="34" charset="-120"/>
               </a:rPr>
-              <a:t>Isometric 3D illustration, a driverless robotaxi with a spinning lidar turret and glowing sensor cones stopped at a small city intersection with a traffic light and crosswalk, pink accents, near-black background, clean low-poly vector style, soft studio glow, subtle floor grid, centered, no text, no logos.</a:t>
+              <a:t>Clean modern editorial illustration with natural perspective (not isometric), a driverless robotaxi with a spinning lidar turret and glowing sensor cones stopped at a small city intersection with a traffic light and crosswalk, pink accents, on a near-black background, soft cinematic studio lighting, minimal and polished, single centered subject, no text, no words, no logos.</a:t>
             </a:r>
             <a:endParaRPr lang="en-US" sz="700" dirty="0"/>
           </a:p>
@@ -4735,7 +4735,7 @@
                 <a:ea typeface="Arial" pitchFamily="34" charset="-122"/>
                 <a:cs typeface="Arial" pitchFamily="34" charset="-120"/>
               </a:rPr>
-              <a:t>ISOMETRIC PROMPT → save as frontier-orbit.png</a:t>
+              <a:t>IMAGE PROMPT → save as frontier-orbit.png</a:t>
             </a:r>
             <a:endParaRPr lang="en-US" sz="700" dirty="0"/>
           </a:p>
@@ -4752,7 +4752,7 @@
                 <a:ea typeface="Arial" pitchFamily="34" charset="-122"/>
                 <a:cs typeface="Arial" pitchFamily="34" charset="-120"/>
               </a:rPr>
-              <a:t>Isometric 3D illustration, a ring-shaped orbital data-center with unfolded solar-panel wings and server modules, floating above the curved horizon of Earth with sparse stars, pink accents, near-black background, clean low-poly vector style, soft studio glow, subtle floor grid, centered, no text, no logos.</a:t>
+              <a:t>Clean modern editorial illustration with natural perspective (not isometric), a ring-shaped orbital data-center with unfolded solar-panel wings and server modules, floating above the curved horizon of Earth with sparse stars, pink accents, on a near-black background, soft cinematic studio lighting, minimal and polished, single centered subject, no text, no words, no logos.</a:t>
             </a:r>
             <a:endParaRPr lang="en-US" sz="700" dirty="0"/>
           </a:p>
@@ -5031,7 +5031,7 @@
                 <a:ea typeface="Arial" pitchFamily="34" charset="-122"/>
                 <a:cs typeface="Arial" pitchFamily="34" charset="-120"/>
               </a:rPr>
-              <a:t>ISOMETRIC PROMPT → save as frontier-proteins.png</a:t>
+              <a:t>IMAGE PROMPT → save as frontier-proteins.png</a:t>
             </a:r>
             <a:endParaRPr lang="en-US" sz="700" dirty="0"/>
           </a:p>
@@ -5048,7 +5048,7 @@
                 <a:ea typeface="Arial" pitchFamily="34" charset="-122"/>
                 <a:cs typeface="Arial" pitchFamily="34" charset="-120"/>
               </a:rPr>
-              <a:t>Isometric 3D illustration, a robotic pipette arm in a lab assembling a glowing folded-protein ribbon and double-helix on a sample platform, small vials arranged around it, pink accents, near-black background, clean low-poly vector style, soft studio glow, subtle floor grid, centered, no text, no logos.</a:t>
+              <a:t>Clean modern editorial illustration with natural perspective (not isometric), a robotic pipette arm in a lab assembling a glowing folded-protein ribbon and double-helix on a sample platform, small vials arranged around it, pink accents, on a near-black background, soft cinematic studio lighting, minimal and polished, single centered subject, no text, no words, no logos.</a:t>
             </a:r>
             <a:endParaRPr lang="en-US" sz="700" dirty="0"/>
           </a:p>
@@ -6464,13 +6464,53 @@
       </p:sp>
       <p:sp>
         <p:nvSpPr>
-          <p:cNvPr id="4" name="Text 2"/>
-          <p:cNvSpPr/>
-          <p:nvPr/>
-        </p:nvSpPr>
-        <p:spPr>
-          <a:xfrm>
-            <a:off x="457200" y="1463040"/>
+          <p:cNvPr id="4" name="Shape 2"/>
+          <p:cNvSpPr/>
+          <p:nvPr/>
+        </p:nvSpPr>
+        <p:spPr>
+          <a:xfrm>
+            <a:off x="457200" y="1481328"/>
+            <a:ext cx="2697480" cy="2395728"/>
+          </a:xfrm>
+          <a:prstGeom prst="rect">
+            <a:avLst/>
+          </a:prstGeom>
+          <a:solidFill>
+            <a:srgbClr val="1C1C20"/>
+          </a:solidFill>
+          <a:ln/>
+        </p:spPr>
+      </p:sp>
+      <p:sp>
+        <p:nvSpPr>
+          <p:cNvPr id="5" name="Shape 3"/>
+          <p:cNvSpPr/>
+          <p:nvPr/>
+        </p:nvSpPr>
+        <p:spPr>
+          <a:xfrm>
+            <a:off x="457200" y="1481328"/>
+            <a:ext cx="2697480" cy="45720"/>
+          </a:xfrm>
+          <a:prstGeom prst="rect">
+            <a:avLst/>
+          </a:prstGeom>
+          <a:solidFill>
+            <a:srgbClr val="2BC4C4"/>
+          </a:solidFill>
+          <a:ln/>
+        </p:spPr>
+      </p:sp>
+      <p:sp>
+        <p:nvSpPr>
+          <p:cNvPr id="6" name="Text 4"/>
+          <p:cNvSpPr/>
+          <p:nvPr/>
+        </p:nvSpPr>
+        <p:spPr>
+          <a:xfrm>
+            <a:off x="457200" y="1627632"/>
             <a:ext cx="2697480" cy="182880"/>
           </a:xfrm>
           <a:prstGeom prst="rect">
@@ -6503,17 +6543,19 @@
       </p:sp>
       <p:sp>
         <p:nvSpPr>
-          <p:cNvPr id="5" name="Shape 3"/>
-          <p:cNvSpPr/>
-          <p:nvPr/>
-        </p:nvSpPr>
-        <p:spPr>
-          <a:xfrm>
-            <a:off x="457200" y="1700784"/>
-            <a:ext cx="2697480" cy="1417320"/>
-          </a:xfrm>
-          <a:prstGeom prst="rect">
-            <a:avLst/>
+          <p:cNvPr id="7" name="Shape 5"/>
+          <p:cNvSpPr/>
+          <p:nvPr/>
+        </p:nvSpPr>
+        <p:spPr>
+          <a:xfrm>
+            <a:off x="868680" y="1938528"/>
+            <a:ext cx="1874520" cy="384048"/>
+          </a:xfrm>
+          <a:prstGeom prst="roundRect">
+            <a:avLst>
+              <a:gd name="adj" fmla="val 11905"/>
+            </a:avLst>
           </a:prstGeom>
           <a:solidFill>
             <a:srgbClr val="1E1E24"/>
@@ -6522,100 +6564,228 @@
             <a:solidFill>
               <a:srgbClr val="2A2A30"/>
             </a:solidFill>
-            <a:prstDash val="dash"/>
+            <a:prstDash val="solid"/>
           </a:ln>
         </p:spPr>
       </p:sp>
       <p:sp>
         <p:nvSpPr>
-          <p:cNvPr id="6" name="Shape 4"/>
-          <p:cNvSpPr/>
-          <p:nvPr/>
-        </p:nvSpPr>
-        <p:spPr>
-          <a:xfrm>
-            <a:off x="457200" y="1700784"/>
-            <a:ext cx="310896" cy="36576"/>
-          </a:xfrm>
-          <a:prstGeom prst="rect">
-            <a:avLst/>
+          <p:cNvPr id="8" name="Text 6"/>
+          <p:cNvSpPr/>
+          <p:nvPr/>
+        </p:nvSpPr>
+        <p:spPr>
+          <a:xfrm>
+            <a:off x="868680" y="1938528"/>
+            <a:ext cx="1874520" cy="384048"/>
+          </a:xfrm>
+          <a:prstGeom prst="rect">
+            <a:avLst/>
+          </a:prstGeom>
+          <a:noFill/>
+          <a:ln/>
+        </p:spPr>
+        <p:txBody>
+          <a:bodyPr wrap="square" lIns="0" tIns="0" rIns="0" bIns="0" rtlCol="0" anchor="ctr"/>
+          <a:lstStyle/>
+          <a:p>
+            <a:pPr algn="ctr" indent="0" marL="0">
+              <a:buNone/>
+            </a:pPr>
+            <a:r>
+              <a:rPr lang="en-US" sz="950" dirty="0">
+                <a:solidFill>
+                  <a:srgbClr val="9A9AA0"/>
+                </a:solidFill>
+                <a:latin typeface="Arial" pitchFamily="34" charset="0"/>
+                <a:ea typeface="Arial" pitchFamily="34" charset="-122"/>
+                <a:cs typeface="Arial" pitchFamily="34" charset="-120"/>
+              </a:rPr>
+              <a:t>Linear chat</a:t>
+            </a:r>
+            <a:endParaRPr lang="en-US" sz="950" dirty="0"/>
+          </a:p>
+        </p:txBody>
+      </p:sp>
+      <p:sp>
+        <p:nvSpPr>
+          <p:cNvPr id="9" name="Shape 7"/>
+          <p:cNvSpPr/>
+          <p:nvPr/>
+        </p:nvSpPr>
+        <p:spPr>
+          <a:xfrm>
+            <a:off x="1805940" y="2359152"/>
+            <a:ext cx="0" cy="237744"/>
+          </a:xfrm>
+          <a:prstGeom prst="line">
+            <a:avLst/>
+          </a:prstGeom>
+          <a:noFill/>
+          <a:ln w="25400">
+            <a:solidFill>
+              <a:srgbClr val="2BC4C4"/>
+            </a:solidFill>
+            <a:prstDash val="solid"/>
+            <a:tailEnd type="triangle"/>
+          </a:ln>
+        </p:spPr>
+      </p:sp>
+      <p:sp>
+        <p:nvSpPr>
+          <p:cNvPr id="10" name="Shape 8"/>
+          <p:cNvSpPr/>
+          <p:nvPr/>
+        </p:nvSpPr>
+        <p:spPr>
+          <a:xfrm>
+            <a:off x="868680" y="2633472"/>
+            <a:ext cx="1874520" cy="384048"/>
+          </a:xfrm>
+          <a:prstGeom prst="roundRect">
+            <a:avLst>
+              <a:gd name="adj" fmla="val 11905"/>
+            </a:avLst>
           </a:prstGeom>
           <a:solidFill>
-            <a:srgbClr val="2BC4C4"/>
+            <a:srgbClr val="1C1C20"/>
           </a:solidFill>
-          <a:ln/>
-        </p:spPr>
-      </p:sp>
-      <p:sp>
-        <p:nvSpPr>
-          <p:cNvPr id="7" name="Shape 5"/>
-          <p:cNvSpPr/>
-          <p:nvPr/>
-        </p:nvSpPr>
-        <p:spPr>
-          <a:xfrm>
-            <a:off x="457200" y="1700784"/>
-            <a:ext cx="36576" cy="310896"/>
+          <a:ln w="19050">
+            <a:solidFill>
+              <a:srgbClr val="2BC4C4"/>
+            </a:solidFill>
+            <a:prstDash val="solid"/>
+          </a:ln>
+        </p:spPr>
+      </p:sp>
+      <p:sp>
+        <p:nvSpPr>
+          <p:cNvPr id="11" name="Text 9"/>
+          <p:cNvSpPr/>
+          <p:nvPr/>
+        </p:nvSpPr>
+        <p:spPr>
+          <a:xfrm>
+            <a:off x="868680" y="2633472"/>
+            <a:ext cx="1874520" cy="384048"/>
+          </a:xfrm>
+          <a:prstGeom prst="rect">
+            <a:avLst/>
+          </a:prstGeom>
+          <a:noFill/>
+          <a:ln/>
+        </p:spPr>
+        <p:txBody>
+          <a:bodyPr wrap="square" lIns="0" tIns="0" rIns="0" bIns="0" rtlCol="0" anchor="ctr"/>
+          <a:lstStyle/>
+          <a:p>
+            <a:pPr algn="ctr" indent="0" marL="0">
+              <a:buNone/>
+            </a:pPr>
+            <a:r>
+              <a:rPr lang="en-US" sz="950" b="1" dirty="0">
+                <a:solidFill>
+                  <a:srgbClr val="FFFFFF"/>
+                </a:solidFill>
+                <a:latin typeface="Arial" pitchFamily="34" charset="0"/>
+                <a:ea typeface="Arial" pitchFamily="34" charset="-122"/>
+                <a:cs typeface="Arial" pitchFamily="34" charset="-120"/>
+              </a:rPr>
+              <a:t>Autonomous loops</a:t>
+            </a:r>
+            <a:endParaRPr lang="en-US" sz="950" dirty="0"/>
+          </a:p>
+        </p:txBody>
+      </p:sp>
+      <p:sp>
+        <p:nvSpPr>
+          <p:cNvPr id="12" name="Text 10"/>
+          <p:cNvSpPr/>
+          <p:nvPr/>
+        </p:nvSpPr>
+        <p:spPr>
+          <a:xfrm>
+            <a:off x="621792" y="3163824"/>
+            <a:ext cx="2368296" cy="658368"/>
+          </a:xfrm>
+          <a:prstGeom prst="rect">
+            <a:avLst/>
+          </a:prstGeom>
+          <a:noFill/>
+          <a:ln/>
+        </p:spPr>
+        <p:txBody>
+          <a:bodyPr wrap="square" lIns="0" tIns="0" rIns="0" bIns="0" rtlCol="0" anchor="t"/>
+          <a:lstStyle/>
+          <a:p>
+            <a:pPr algn="ctr" indent="0" marL="0">
+              <a:buNone/>
+            </a:pPr>
+            <a:r>
+              <a:rPr lang="en-US" sz="850" dirty="0">
+                <a:solidFill>
+                  <a:srgbClr val="9A9AA0"/>
+                </a:solidFill>
+                <a:latin typeface="Arial" pitchFamily="34" charset="0"/>
+                <a:ea typeface="Arial" pitchFamily="34" charset="-122"/>
+                <a:cs typeface="Arial" pitchFamily="34" charset="-120"/>
+              </a:rPr>
+              <a:t>Models became self-correcting agents that run until the task is done.</a:t>
+            </a:r>
+            <a:endParaRPr lang="en-US" sz="850" dirty="0"/>
+          </a:p>
+        </p:txBody>
+      </p:sp>
+      <p:sp>
+        <p:nvSpPr>
+          <p:cNvPr id="13" name="Shape 11"/>
+          <p:cNvSpPr/>
+          <p:nvPr/>
+        </p:nvSpPr>
+        <p:spPr>
+          <a:xfrm>
+            <a:off x="3264408" y="1481328"/>
+            <a:ext cx="2697480" cy="2395728"/>
           </a:xfrm>
           <a:prstGeom prst="rect">
             <a:avLst/>
           </a:prstGeom>
           <a:solidFill>
-            <a:srgbClr val="2BC4C4"/>
+            <a:srgbClr val="1C1C20"/>
           </a:solidFill>
           <a:ln/>
         </p:spPr>
       </p:sp>
       <p:sp>
         <p:nvSpPr>
-          <p:cNvPr id="8" name="Shape 6"/>
-          <p:cNvSpPr/>
-          <p:nvPr/>
-        </p:nvSpPr>
-        <p:spPr>
-          <a:xfrm>
-            <a:off x="2843784" y="3081528"/>
-            <a:ext cx="310896" cy="36576"/>
+          <p:cNvPr id="14" name="Shape 12"/>
+          <p:cNvSpPr/>
+          <p:nvPr/>
+        </p:nvSpPr>
+        <p:spPr>
+          <a:xfrm>
+            <a:off x="3264408" y="1481328"/>
+            <a:ext cx="2697480" cy="45720"/>
           </a:xfrm>
           <a:prstGeom prst="rect">
             <a:avLst/>
           </a:prstGeom>
           <a:solidFill>
-            <a:srgbClr val="2BC4C4"/>
+            <a:srgbClr val="F6693D"/>
           </a:solidFill>
           <a:ln/>
         </p:spPr>
       </p:sp>
       <p:sp>
         <p:nvSpPr>
-          <p:cNvPr id="9" name="Shape 7"/>
-          <p:cNvSpPr/>
-          <p:nvPr/>
-        </p:nvSpPr>
-        <p:spPr>
-          <a:xfrm>
-            <a:off x="3118104" y="2807208"/>
-            <a:ext cx="36576" cy="310896"/>
-          </a:xfrm>
-          <a:prstGeom prst="rect">
-            <a:avLst/>
-          </a:prstGeom>
-          <a:solidFill>
-            <a:srgbClr val="2BC4C4"/>
-          </a:solidFill>
-          <a:ln/>
-        </p:spPr>
-      </p:sp>
-      <p:sp>
-        <p:nvSpPr>
-          <p:cNvPr id="10" name="Text 8"/>
-          <p:cNvSpPr/>
-          <p:nvPr/>
-        </p:nvSpPr>
-        <p:spPr>
-          <a:xfrm>
-            <a:off x="640080" y="1847088"/>
-            <a:ext cx="2331720" cy="219456"/>
+          <p:cNvPr id="15" name="Text 13"/>
+          <p:cNvSpPr/>
+          <p:nvPr/>
+        </p:nvSpPr>
+        <p:spPr>
+          <a:xfrm>
+            <a:off x="3264408" y="1627632"/>
+            <a:ext cx="2697480" cy="182880"/>
           </a:xfrm>
           <a:prstGeom prst="rect">
             <a:avLst/>
@@ -6627,211 +6797,10 @@
           <a:bodyPr wrap="square" lIns="0" tIns="0" rIns="0" bIns="0" rtlCol="0" anchor="ctr"/>
           <a:lstStyle/>
           <a:p>
-            <a:pPr indent="0" marL="0">
-              <a:buNone/>
-            </a:pPr>
-            <a:r>
-              <a:rPr lang="en-US" sz="900" b="1" spc="200" kern="0" dirty="0">
-                <a:solidFill>
-                  <a:srgbClr val="2BC4C4"/>
-                </a:solidFill>
-                <a:latin typeface="Arial" pitchFamily="34" charset="0"/>
-                <a:ea typeface="Arial" pitchFamily="34" charset="-122"/>
-                <a:cs typeface="Arial" pitchFamily="34" charset="-120"/>
-              </a:rPr>
-              <a:t>IMAGE  ·  capability</a:t>
-            </a:r>
-            <a:endParaRPr lang="en-US" sz="900" dirty="0"/>
-          </a:p>
-        </p:txBody>
-      </p:sp>
-      <p:sp>
-        <p:nvSpPr>
-          <p:cNvPr id="11" name="Text 9"/>
-          <p:cNvSpPr/>
-          <p:nvPr/>
-        </p:nvSpPr>
-        <p:spPr>
-          <a:xfrm>
-            <a:off x="640080" y="2121408"/>
-            <a:ext cx="2331720" cy="813816"/>
-          </a:xfrm>
-          <a:prstGeom prst="rect">
-            <a:avLst/>
-          </a:prstGeom>
-          <a:noFill/>
-          <a:ln/>
-        </p:spPr>
-        <p:txBody>
-          <a:bodyPr wrap="square" lIns="0" tIns="0" rIns="0" bIns="0" rtlCol="0" anchor="t"/>
-          <a:lstStyle/>
-          <a:p>
-            <a:pPr indent="0" marL="0">
-              <a:buNone/>
-            </a:pPr>
-            <a:r>
-              <a:rPr lang="en-US" sz="700" i="1" dirty="0">
-                <a:solidFill>
-                  <a:srgbClr val="8A8A90"/>
-                </a:solidFill>
-                <a:latin typeface="Arial" pitchFamily="34" charset="0"/>
-                <a:ea typeface="Arial" pitchFamily="34" charset="-122"/>
-                <a:cs typeface="Arial" pitchFamily="34" charset="-120"/>
-              </a:rPr>
-              <a:t>ISOMETRIC PROMPT → save as shift-capability.png</a:t>
-            </a:r>
-            <a:endParaRPr lang="en-US" sz="700" dirty="0"/>
-          </a:p>
-          <a:p>
-            <a:pPr indent="0" marL="0">
-              <a:buNone/>
-            </a:pPr>
-            <a:r>
-              <a:rPr lang="en-US" sz="850" dirty="0">
-                <a:solidFill>
-                  <a:srgbClr val="C9C9CE"/>
-                </a:solidFill>
-                <a:latin typeface="Arial" pitchFamily="34" charset="0"/>
-                <a:ea typeface="Arial" pitchFamily="34" charset="-122"/>
-                <a:cs typeface="Arial" pitchFamily="34" charset="-120"/>
-              </a:rPr>
-              <a:t>Isometric 3D illustration, a robotic arm on a small circular conveyor picking up a glowing cube, spotting a flaw, and placing it back to retry — a literal self-correcting loop, teal accents, near-black background, clean low-poly vector style, soft studio glow, subtle floor grid, centered, no text, no logos.</a:t>
-            </a:r>
-            <a:endParaRPr lang="en-US" sz="700" dirty="0"/>
-          </a:p>
-        </p:txBody>
-      </p:sp>
-      <p:sp>
-        <p:nvSpPr>
-          <p:cNvPr id="12" name="Text 10"/>
-          <p:cNvSpPr/>
-          <p:nvPr/>
-        </p:nvSpPr>
-        <p:spPr>
-          <a:xfrm>
-            <a:off x="457200" y="3200400"/>
-            <a:ext cx="2697480" cy="274320"/>
-          </a:xfrm>
-          <a:prstGeom prst="rect">
-            <a:avLst/>
-          </a:prstGeom>
-          <a:noFill/>
-          <a:ln/>
-        </p:spPr>
-        <p:txBody>
-          <a:bodyPr wrap="square" lIns="0" tIns="0" rIns="0" bIns="0" rtlCol="0" anchor="ctr"/>
-          <a:lstStyle/>
-          <a:p>
             <a:pPr algn="ctr" indent="0" marL="0">
               <a:buNone/>
             </a:pPr>
             <a:r>
-              <a:rPr lang="en-US" sz="1100" b="1" dirty="0">
-                <a:solidFill>
-                  <a:srgbClr val="C9C9CE"/>
-                </a:solidFill>
-                <a:latin typeface="Arial" pitchFamily="34" charset="0"/>
-                <a:ea typeface="Arial" pitchFamily="34" charset="-122"/>
-                <a:cs typeface="Arial" pitchFamily="34" charset="-120"/>
-              </a:rPr>
-              <a:t>Linear chat  </a:t>
-            </a:r>
-            <a:pPr algn="ctr" indent="0" marL="0">
-              <a:buNone/>
-            </a:pPr>
-            <a:r>
-              <a:rPr lang="en-US" sz="1200" b="1" dirty="0">
-                <a:solidFill>
-                  <a:srgbClr val="2BC4C4"/>
-                </a:solidFill>
-                <a:latin typeface="Arial" pitchFamily="34" charset="0"/>
-                <a:ea typeface="Arial" pitchFamily="34" charset="-122"/>
-                <a:cs typeface="Arial" pitchFamily="34" charset="-120"/>
-              </a:rPr>
-              <a:t>→  </a:t>
-            </a:r>
-            <a:pPr algn="ctr" indent="0" marL="0">
-              <a:buNone/>
-            </a:pPr>
-            <a:r>
-              <a:rPr lang="en-US" sz="1100" b="1" dirty="0">
-                <a:solidFill>
-                  <a:srgbClr val="FFFFFF"/>
-                </a:solidFill>
-                <a:latin typeface="Arial" pitchFamily="34" charset="0"/>
-                <a:ea typeface="Arial" pitchFamily="34" charset="-122"/>
-                <a:cs typeface="Arial" pitchFamily="34" charset="-120"/>
-              </a:rPr>
-              <a:t>Autonomous loops</a:t>
-            </a:r>
-            <a:endParaRPr lang="en-US" sz="1100" dirty="0"/>
-          </a:p>
-        </p:txBody>
-      </p:sp>
-      <p:sp>
-        <p:nvSpPr>
-          <p:cNvPr id="13" name="Text 11"/>
-          <p:cNvSpPr/>
-          <p:nvPr/>
-        </p:nvSpPr>
-        <p:spPr>
-          <a:xfrm>
-            <a:off x="566928" y="3511296"/>
-            <a:ext cx="2478024" cy="457200"/>
-          </a:xfrm>
-          <a:prstGeom prst="rect">
-            <a:avLst/>
-          </a:prstGeom>
-          <a:noFill/>
-          <a:ln/>
-        </p:spPr>
-        <p:txBody>
-          <a:bodyPr wrap="square" lIns="0" tIns="0" rIns="0" bIns="0" rtlCol="0" anchor="t"/>
-          <a:lstStyle/>
-          <a:p>
-            <a:pPr algn="ctr" indent="0" marL="0">
-              <a:buNone/>
-            </a:pPr>
-            <a:r>
-              <a:rPr lang="en-US" sz="850" dirty="0">
-                <a:solidFill>
-                  <a:srgbClr val="9A9AA0"/>
-                </a:solidFill>
-                <a:latin typeface="Arial" pitchFamily="34" charset="0"/>
-                <a:ea typeface="Arial" pitchFamily="34" charset="-122"/>
-                <a:cs typeface="Arial" pitchFamily="34" charset="-120"/>
-              </a:rPr>
-              <a:t>Models became self-correcting agents that run until the task is done.</a:t>
-            </a:r>
-            <a:endParaRPr lang="en-US" sz="850" dirty="0"/>
-          </a:p>
-        </p:txBody>
-      </p:sp>
-      <p:sp>
-        <p:nvSpPr>
-          <p:cNvPr id="14" name="Text 12"/>
-          <p:cNvSpPr/>
-          <p:nvPr/>
-        </p:nvSpPr>
-        <p:spPr>
-          <a:xfrm>
-            <a:off x="3264408" y="1463040"/>
-            <a:ext cx="2697480" cy="182880"/>
-          </a:xfrm>
-          <a:prstGeom prst="rect">
-            <a:avLst/>
-          </a:prstGeom>
-          <a:noFill/>
-          <a:ln/>
-        </p:spPr>
-        <p:txBody>
-          <a:bodyPr wrap="square" lIns="0" tIns="0" rIns="0" bIns="0" rtlCol="0" anchor="ctr"/>
-          <a:lstStyle/>
-          <a:p>
-            <a:pPr algn="ctr" indent="0" marL="0">
-              <a:buNone/>
-            </a:pPr>
-            <a:r>
               <a:rPr lang="en-US" sz="800" b="1" spc="200" kern="0" dirty="0">
                 <a:solidFill>
                   <a:srgbClr val="F6693D"/>
@@ -6848,17 +6817,19 @@
       </p:sp>
       <p:sp>
         <p:nvSpPr>
-          <p:cNvPr id="15" name="Shape 13"/>
-          <p:cNvSpPr/>
-          <p:nvPr/>
-        </p:nvSpPr>
-        <p:spPr>
-          <a:xfrm>
-            <a:off x="3264408" y="1700784"/>
-            <a:ext cx="2697480" cy="1417320"/>
-          </a:xfrm>
-          <a:prstGeom prst="rect">
-            <a:avLst/>
+          <p:cNvPr id="16" name="Shape 14"/>
+          <p:cNvSpPr/>
+          <p:nvPr/>
+        </p:nvSpPr>
+        <p:spPr>
+          <a:xfrm>
+            <a:off x="3675888" y="1938528"/>
+            <a:ext cx="1874520" cy="384048"/>
+          </a:xfrm>
+          <a:prstGeom prst="roundRect">
+            <a:avLst>
+              <a:gd name="adj" fmla="val 11905"/>
+            </a:avLst>
           </a:prstGeom>
           <a:solidFill>
             <a:srgbClr val="1E1E24"/>
@@ -6867,100 +6838,228 @@
             <a:solidFill>
               <a:srgbClr val="2A2A30"/>
             </a:solidFill>
-            <a:prstDash val="dash"/>
+            <a:prstDash val="solid"/>
           </a:ln>
         </p:spPr>
       </p:sp>
       <p:sp>
         <p:nvSpPr>
-          <p:cNvPr id="16" name="Shape 14"/>
-          <p:cNvSpPr/>
-          <p:nvPr/>
-        </p:nvSpPr>
-        <p:spPr>
-          <a:xfrm>
-            <a:off x="3264408" y="1700784"/>
-            <a:ext cx="310896" cy="36576"/>
-          </a:xfrm>
-          <a:prstGeom prst="rect">
-            <a:avLst/>
+          <p:cNvPr id="17" name="Text 15"/>
+          <p:cNvSpPr/>
+          <p:nvPr/>
+        </p:nvSpPr>
+        <p:spPr>
+          <a:xfrm>
+            <a:off x="3675888" y="1938528"/>
+            <a:ext cx="1874520" cy="384048"/>
+          </a:xfrm>
+          <a:prstGeom prst="rect">
+            <a:avLst/>
+          </a:prstGeom>
+          <a:noFill/>
+          <a:ln/>
+        </p:spPr>
+        <p:txBody>
+          <a:bodyPr wrap="square" lIns="0" tIns="0" rIns="0" bIns="0" rtlCol="0" anchor="ctr"/>
+          <a:lstStyle/>
+          <a:p>
+            <a:pPr algn="ctr" indent="0" marL="0">
+              <a:buNone/>
+            </a:pPr>
+            <a:r>
+              <a:rPr lang="en-US" sz="950" dirty="0">
+                <a:solidFill>
+                  <a:srgbClr val="9A9AA0"/>
+                </a:solidFill>
+                <a:latin typeface="Arial" pitchFamily="34" charset="0"/>
+                <a:ea typeface="Arial" pitchFamily="34" charset="-122"/>
+                <a:cs typeface="Arial" pitchFamily="34" charset="-120"/>
+              </a:rPr>
+              <a:t>Token subsidy</a:t>
+            </a:r>
+            <a:endParaRPr lang="en-US" sz="950" dirty="0"/>
+          </a:p>
+        </p:txBody>
+      </p:sp>
+      <p:sp>
+        <p:nvSpPr>
+          <p:cNvPr id="18" name="Shape 16"/>
+          <p:cNvSpPr/>
+          <p:nvPr/>
+        </p:nvSpPr>
+        <p:spPr>
+          <a:xfrm>
+            <a:off x="4613148" y="2359152"/>
+            <a:ext cx="0" cy="237744"/>
+          </a:xfrm>
+          <a:prstGeom prst="line">
+            <a:avLst/>
+          </a:prstGeom>
+          <a:noFill/>
+          <a:ln w="25400">
+            <a:solidFill>
+              <a:srgbClr val="F6693D"/>
+            </a:solidFill>
+            <a:prstDash val="solid"/>
+            <a:tailEnd type="triangle"/>
+          </a:ln>
+        </p:spPr>
+      </p:sp>
+      <p:sp>
+        <p:nvSpPr>
+          <p:cNvPr id="19" name="Shape 17"/>
+          <p:cNvSpPr/>
+          <p:nvPr/>
+        </p:nvSpPr>
+        <p:spPr>
+          <a:xfrm>
+            <a:off x="3675888" y="2633472"/>
+            <a:ext cx="1874520" cy="384048"/>
+          </a:xfrm>
+          <a:prstGeom prst="roundRect">
+            <a:avLst>
+              <a:gd name="adj" fmla="val 11905"/>
+            </a:avLst>
           </a:prstGeom>
           <a:solidFill>
-            <a:srgbClr val="F6693D"/>
+            <a:srgbClr val="1C1C20"/>
           </a:solidFill>
-          <a:ln/>
-        </p:spPr>
-      </p:sp>
-      <p:sp>
-        <p:nvSpPr>
-          <p:cNvPr id="17" name="Shape 15"/>
-          <p:cNvSpPr/>
-          <p:nvPr/>
-        </p:nvSpPr>
-        <p:spPr>
-          <a:xfrm>
-            <a:off x="3264408" y="1700784"/>
-            <a:ext cx="36576" cy="310896"/>
+          <a:ln w="19050">
+            <a:solidFill>
+              <a:srgbClr val="F6693D"/>
+            </a:solidFill>
+            <a:prstDash val="solid"/>
+          </a:ln>
+        </p:spPr>
+      </p:sp>
+      <p:sp>
+        <p:nvSpPr>
+          <p:cNvPr id="20" name="Text 18"/>
+          <p:cNvSpPr/>
+          <p:nvPr/>
+        </p:nvSpPr>
+        <p:spPr>
+          <a:xfrm>
+            <a:off x="3675888" y="2633472"/>
+            <a:ext cx="1874520" cy="384048"/>
+          </a:xfrm>
+          <a:prstGeom prst="rect">
+            <a:avLst/>
+          </a:prstGeom>
+          <a:noFill/>
+          <a:ln/>
+        </p:spPr>
+        <p:txBody>
+          <a:bodyPr wrap="square" lIns="0" tIns="0" rIns="0" bIns="0" rtlCol="0" anchor="ctr"/>
+          <a:lstStyle/>
+          <a:p>
+            <a:pPr algn="ctr" indent="0" marL="0">
+              <a:buNone/>
+            </a:pPr>
+            <a:r>
+              <a:rPr lang="en-US" sz="950" b="1" dirty="0">
+                <a:solidFill>
+                  <a:srgbClr val="FFFFFF"/>
+                </a:solidFill>
+                <a:latin typeface="Arial" pitchFamily="34" charset="0"/>
+                <a:ea typeface="Arial" pitchFamily="34" charset="-122"/>
+                <a:cs typeface="Arial" pitchFamily="34" charset="-120"/>
+              </a:rPr>
+              <a:t>Token scarcity</a:t>
+            </a:r>
+            <a:endParaRPr lang="en-US" sz="950" dirty="0"/>
+          </a:p>
+        </p:txBody>
+      </p:sp>
+      <p:sp>
+        <p:nvSpPr>
+          <p:cNvPr id="21" name="Text 19"/>
+          <p:cNvSpPr/>
+          <p:nvPr/>
+        </p:nvSpPr>
+        <p:spPr>
+          <a:xfrm>
+            <a:off x="3429000" y="3163824"/>
+            <a:ext cx="2368296" cy="658368"/>
+          </a:xfrm>
+          <a:prstGeom prst="rect">
+            <a:avLst/>
+          </a:prstGeom>
+          <a:noFill/>
+          <a:ln/>
+        </p:spPr>
+        <p:txBody>
+          <a:bodyPr wrap="square" lIns="0" tIns="0" rIns="0" bIns="0" rtlCol="0" anchor="t"/>
+          <a:lstStyle/>
+          <a:p>
+            <a:pPr algn="ctr" indent="0" marL="0">
+              <a:buNone/>
+            </a:pPr>
+            <a:r>
+              <a:rPr lang="en-US" sz="850" dirty="0">
+                <a:solidFill>
+                  <a:srgbClr val="9A9AA0"/>
+                </a:solidFill>
+                <a:latin typeface="Arial" pitchFamily="34" charset="0"/>
+                <a:ea typeface="Arial" pitchFamily="34" charset="-122"/>
+                <a:cs typeface="Arial" pitchFamily="34" charset="-120"/>
+              </a:rPr>
+              <a:t>Labs stopped subsidizing tokens; enterprises now ration them like a commodity.</a:t>
+            </a:r>
+            <a:endParaRPr lang="en-US" sz="850" dirty="0"/>
+          </a:p>
+        </p:txBody>
+      </p:sp>
+      <p:sp>
+        <p:nvSpPr>
+          <p:cNvPr id="22" name="Shape 20"/>
+          <p:cNvSpPr/>
+          <p:nvPr/>
+        </p:nvSpPr>
+        <p:spPr>
+          <a:xfrm>
+            <a:off x="6071616" y="1481328"/>
+            <a:ext cx="2697480" cy="2395728"/>
           </a:xfrm>
           <a:prstGeom prst="rect">
             <a:avLst/>
           </a:prstGeom>
           <a:solidFill>
-            <a:srgbClr val="F6693D"/>
+            <a:srgbClr val="1C1C20"/>
           </a:solidFill>
           <a:ln/>
         </p:spPr>
       </p:sp>
       <p:sp>
         <p:nvSpPr>
-          <p:cNvPr id="18" name="Shape 16"/>
-          <p:cNvSpPr/>
-          <p:nvPr/>
-        </p:nvSpPr>
-        <p:spPr>
-          <a:xfrm>
-            <a:off x="5650992" y="3081528"/>
-            <a:ext cx="310896" cy="36576"/>
+          <p:cNvPr id="23" name="Shape 21"/>
+          <p:cNvSpPr/>
+          <p:nvPr/>
+        </p:nvSpPr>
+        <p:spPr>
+          <a:xfrm>
+            <a:off x="6071616" y="1481328"/>
+            <a:ext cx="2697480" cy="45720"/>
           </a:xfrm>
           <a:prstGeom prst="rect">
             <a:avLst/>
           </a:prstGeom>
           <a:solidFill>
-            <a:srgbClr val="F6693D"/>
+            <a:srgbClr val="9B7BE0"/>
           </a:solidFill>
           <a:ln/>
         </p:spPr>
       </p:sp>
       <p:sp>
         <p:nvSpPr>
-          <p:cNvPr id="19" name="Shape 17"/>
-          <p:cNvSpPr/>
-          <p:nvPr/>
-        </p:nvSpPr>
-        <p:spPr>
-          <a:xfrm>
-            <a:off x="5925312" y="2807208"/>
-            <a:ext cx="36576" cy="310896"/>
-          </a:xfrm>
-          <a:prstGeom prst="rect">
-            <a:avLst/>
-          </a:prstGeom>
-          <a:solidFill>
-            <a:srgbClr val="F6693D"/>
-          </a:solidFill>
-          <a:ln/>
-        </p:spPr>
-      </p:sp>
-      <p:sp>
-        <p:nvSpPr>
-          <p:cNvPr id="20" name="Text 18"/>
-          <p:cNvSpPr/>
-          <p:nvPr/>
-        </p:nvSpPr>
-        <p:spPr>
-          <a:xfrm>
-            <a:off x="3447288" y="1847088"/>
-            <a:ext cx="2331720" cy="219456"/>
+          <p:cNvPr id="24" name="Text 22"/>
+          <p:cNvSpPr/>
+          <p:nvPr/>
+        </p:nvSpPr>
+        <p:spPr>
+          <a:xfrm>
+            <a:off x="6071616" y="1627632"/>
+            <a:ext cx="2697480" cy="182880"/>
           </a:xfrm>
           <a:prstGeom prst="rect">
             <a:avLst/>
@@ -6972,211 +7071,10 @@
           <a:bodyPr wrap="square" lIns="0" tIns="0" rIns="0" bIns="0" rtlCol="0" anchor="ctr"/>
           <a:lstStyle/>
           <a:p>
-            <a:pPr indent="0" marL="0">
-              <a:buNone/>
-            </a:pPr>
-            <a:r>
-              <a:rPr lang="en-US" sz="900" b="1" spc="200" kern="0" dirty="0">
-                <a:solidFill>
-                  <a:srgbClr val="F6693D"/>
-                </a:solidFill>
-                <a:latin typeface="Arial" pitchFamily="34" charset="0"/>
-                <a:ea typeface="Arial" pitchFamily="34" charset="-122"/>
-                <a:cs typeface="Arial" pitchFamily="34" charset="-120"/>
-              </a:rPr>
-              <a:t>IMAGE  ·  economics</a:t>
-            </a:r>
-            <a:endParaRPr lang="en-US" sz="900" dirty="0"/>
-          </a:p>
-        </p:txBody>
-      </p:sp>
-      <p:sp>
-        <p:nvSpPr>
-          <p:cNvPr id="21" name="Text 19"/>
-          <p:cNvSpPr/>
-          <p:nvPr/>
-        </p:nvSpPr>
-        <p:spPr>
-          <a:xfrm>
-            <a:off x="3447288" y="2121408"/>
-            <a:ext cx="2331720" cy="813816"/>
-          </a:xfrm>
-          <a:prstGeom prst="rect">
-            <a:avLst/>
-          </a:prstGeom>
-          <a:noFill/>
-          <a:ln/>
-        </p:spPr>
-        <p:txBody>
-          <a:bodyPr wrap="square" lIns="0" tIns="0" rIns="0" bIns="0" rtlCol="0" anchor="t"/>
-          <a:lstStyle/>
-          <a:p>
-            <a:pPr indent="0" marL="0">
-              <a:buNone/>
-            </a:pPr>
-            <a:r>
-              <a:rPr lang="en-US" sz="700" i="1" dirty="0">
-                <a:solidFill>
-                  <a:srgbClr val="8A8A90"/>
-                </a:solidFill>
-                <a:latin typeface="Arial" pitchFamily="34" charset="0"/>
-                <a:ea typeface="Arial" pitchFamily="34" charset="-122"/>
-                <a:cs typeface="Arial" pitchFamily="34" charset="-120"/>
-              </a:rPr>
-              <a:t>ISOMETRIC PROMPT → save as shift-economics.png</a:t>
-            </a:r>
-            <a:endParaRPr lang="en-US" sz="700" dirty="0"/>
-          </a:p>
-          <a:p>
-            <a:pPr indent="0" marL="0">
-              <a:buNone/>
-            </a:pPr>
-            <a:r>
-              <a:rPr lang="en-US" sz="850" dirty="0">
-                <a:solidFill>
-                  <a:srgbClr val="C9C9CE"/>
-                </a:solidFill>
-                <a:latin typeface="Arial" pitchFamily="34" charset="0"/>
-                <a:ea typeface="Arial" pitchFamily="34" charset="-122"/>
-                <a:cs typeface="Arial" pitchFamily="34" charset="-120"/>
-              </a:rPr>
-              <a:t>Isometric 3D illustration, a coin-operated electricity meter wired into a GPU, its dial pushed near a red limit line, a small rationed stack of glowing token-coins beside it, orange accents, near-black background, clean low-poly vector style, soft studio glow, subtle floor grid, centered, no text, no logos.</a:t>
-            </a:r>
-            <a:endParaRPr lang="en-US" sz="700" dirty="0"/>
-          </a:p>
-        </p:txBody>
-      </p:sp>
-      <p:sp>
-        <p:nvSpPr>
-          <p:cNvPr id="22" name="Text 20"/>
-          <p:cNvSpPr/>
-          <p:nvPr/>
-        </p:nvSpPr>
-        <p:spPr>
-          <a:xfrm>
-            <a:off x="3264408" y="3200400"/>
-            <a:ext cx="2697480" cy="274320"/>
-          </a:xfrm>
-          <a:prstGeom prst="rect">
-            <a:avLst/>
-          </a:prstGeom>
-          <a:noFill/>
-          <a:ln/>
-        </p:spPr>
-        <p:txBody>
-          <a:bodyPr wrap="square" lIns="0" tIns="0" rIns="0" bIns="0" rtlCol="0" anchor="ctr"/>
-          <a:lstStyle/>
-          <a:p>
             <a:pPr algn="ctr" indent="0" marL="0">
               <a:buNone/>
             </a:pPr>
             <a:r>
-              <a:rPr lang="en-US" sz="1100" b="1" dirty="0">
-                <a:solidFill>
-                  <a:srgbClr val="C9C9CE"/>
-                </a:solidFill>
-                <a:latin typeface="Arial" pitchFamily="34" charset="0"/>
-                <a:ea typeface="Arial" pitchFamily="34" charset="-122"/>
-                <a:cs typeface="Arial" pitchFamily="34" charset="-120"/>
-              </a:rPr>
-              <a:t>Token subsidy  </a:t>
-            </a:r>
-            <a:pPr algn="ctr" indent="0" marL="0">
-              <a:buNone/>
-            </a:pPr>
-            <a:r>
-              <a:rPr lang="en-US" sz="1200" b="1" dirty="0">
-                <a:solidFill>
-                  <a:srgbClr val="F6693D"/>
-                </a:solidFill>
-                <a:latin typeface="Arial" pitchFamily="34" charset="0"/>
-                <a:ea typeface="Arial" pitchFamily="34" charset="-122"/>
-                <a:cs typeface="Arial" pitchFamily="34" charset="-120"/>
-              </a:rPr>
-              <a:t>→  </a:t>
-            </a:r>
-            <a:pPr algn="ctr" indent="0" marL="0">
-              <a:buNone/>
-            </a:pPr>
-            <a:r>
-              <a:rPr lang="en-US" sz="1100" b="1" dirty="0">
-                <a:solidFill>
-                  <a:srgbClr val="FFFFFF"/>
-                </a:solidFill>
-                <a:latin typeface="Arial" pitchFamily="34" charset="0"/>
-                <a:ea typeface="Arial" pitchFamily="34" charset="-122"/>
-                <a:cs typeface="Arial" pitchFamily="34" charset="-120"/>
-              </a:rPr>
-              <a:t>Token scarcity</a:t>
-            </a:r>
-            <a:endParaRPr lang="en-US" sz="1100" dirty="0"/>
-          </a:p>
-        </p:txBody>
-      </p:sp>
-      <p:sp>
-        <p:nvSpPr>
-          <p:cNvPr id="23" name="Text 21"/>
-          <p:cNvSpPr/>
-          <p:nvPr/>
-        </p:nvSpPr>
-        <p:spPr>
-          <a:xfrm>
-            <a:off x="3374136" y="3511296"/>
-            <a:ext cx="2478024" cy="457200"/>
-          </a:xfrm>
-          <a:prstGeom prst="rect">
-            <a:avLst/>
-          </a:prstGeom>
-          <a:noFill/>
-          <a:ln/>
-        </p:spPr>
-        <p:txBody>
-          <a:bodyPr wrap="square" lIns="0" tIns="0" rIns="0" bIns="0" rtlCol="0" anchor="t"/>
-          <a:lstStyle/>
-          <a:p>
-            <a:pPr algn="ctr" indent="0" marL="0">
-              <a:buNone/>
-            </a:pPr>
-            <a:r>
-              <a:rPr lang="en-US" sz="850" dirty="0">
-                <a:solidFill>
-                  <a:srgbClr val="9A9AA0"/>
-                </a:solidFill>
-                <a:latin typeface="Arial" pitchFamily="34" charset="0"/>
-                <a:ea typeface="Arial" pitchFamily="34" charset="-122"/>
-                <a:cs typeface="Arial" pitchFamily="34" charset="-120"/>
-              </a:rPr>
-              <a:t>Labs stopped subsidizing tokens; enterprises now ration them like a commodity.</a:t>
-            </a:r>
-            <a:endParaRPr lang="en-US" sz="850" dirty="0"/>
-          </a:p>
-        </p:txBody>
-      </p:sp>
-      <p:sp>
-        <p:nvSpPr>
-          <p:cNvPr id="24" name="Text 22"/>
-          <p:cNvSpPr/>
-          <p:nvPr/>
-        </p:nvSpPr>
-        <p:spPr>
-          <a:xfrm>
-            <a:off x="6071616" y="1463040"/>
-            <a:ext cx="2697480" cy="182880"/>
-          </a:xfrm>
-          <a:prstGeom prst="rect">
-            <a:avLst/>
-          </a:prstGeom>
-          <a:noFill/>
-          <a:ln/>
-        </p:spPr>
-        <p:txBody>
-          <a:bodyPr wrap="square" lIns="0" tIns="0" rIns="0" bIns="0" rtlCol="0" anchor="ctr"/>
-          <a:lstStyle/>
-          <a:p>
-            <a:pPr algn="ctr" indent="0" marL="0">
-              <a:buNone/>
-            </a:pPr>
-            <a:r>
               <a:rPr lang="en-US" sz="800" b="1" spc="200" kern="0" dirty="0">
                 <a:solidFill>
                   <a:srgbClr val="9B7BE0"/>
@@ -7199,11 +7097,13 @@
         </p:nvSpPr>
         <p:spPr>
           <a:xfrm>
-            <a:off x="6071616" y="1700784"/>
-            <a:ext cx="2697480" cy="1417320"/>
-          </a:xfrm>
-          <a:prstGeom prst="rect">
-            <a:avLst/>
+            <a:off x="6483096" y="1938528"/>
+            <a:ext cx="1874520" cy="384048"/>
+          </a:xfrm>
+          <a:prstGeom prst="roundRect">
+            <a:avLst>
+              <a:gd name="adj" fmla="val 11905"/>
+            </a:avLst>
           </a:prstGeom>
           <a:solidFill>
             <a:srgbClr val="1E1E24"/>
@@ -7212,29 +7112,48 @@
             <a:solidFill>
               <a:srgbClr val="2A2A30"/>
             </a:solidFill>
-            <a:prstDash val="dash"/>
+            <a:prstDash val="solid"/>
           </a:ln>
         </p:spPr>
       </p:sp>
       <p:sp>
         <p:nvSpPr>
-          <p:cNvPr id="26" name="Shape 24"/>
-          <p:cNvSpPr/>
-          <p:nvPr/>
-        </p:nvSpPr>
-        <p:spPr>
-          <a:xfrm>
-            <a:off x="6071616" y="1700784"/>
-            <a:ext cx="310896" cy="36576"/>
-          </a:xfrm>
-          <a:prstGeom prst="rect">
-            <a:avLst/>
-          </a:prstGeom>
-          <a:solidFill>
-            <a:srgbClr val="9B7BE0"/>
-          </a:solidFill>
-          <a:ln/>
-        </p:spPr>
+          <p:cNvPr id="26" name="Text 24"/>
+          <p:cNvSpPr/>
+          <p:nvPr/>
+        </p:nvSpPr>
+        <p:spPr>
+          <a:xfrm>
+            <a:off x="6483096" y="1938528"/>
+            <a:ext cx="1874520" cy="384048"/>
+          </a:xfrm>
+          <a:prstGeom prst="rect">
+            <a:avLst/>
+          </a:prstGeom>
+          <a:noFill/>
+          <a:ln/>
+        </p:spPr>
+        <p:txBody>
+          <a:bodyPr wrap="square" lIns="0" tIns="0" rIns="0" bIns="0" rtlCol="0" anchor="ctr"/>
+          <a:lstStyle/>
+          <a:p>
+            <a:pPr algn="ctr" indent="0" marL="0">
+              <a:buNone/>
+            </a:pPr>
+            <a:r>
+              <a:rPr lang="en-US" sz="950" dirty="0">
+                <a:solidFill>
+                  <a:srgbClr val="9A9AA0"/>
+                </a:solidFill>
+                <a:latin typeface="Arial" pitchFamily="34" charset="0"/>
+                <a:ea typeface="Arial" pitchFamily="34" charset="-122"/>
+                <a:cs typeface="Arial" pitchFamily="34" charset="-120"/>
+              </a:rPr>
+              <a:t>Private tech</a:t>
+            </a:r>
+            <a:endParaRPr lang="en-US" sz="950" dirty="0"/>
+          </a:p>
+        </p:txBody>
       </p:sp>
       <p:sp>
         <p:nvSpPr>
@@ -7244,16 +7163,20 @@
         </p:nvSpPr>
         <p:spPr>
           <a:xfrm>
-            <a:off x="6071616" y="1700784"/>
-            <a:ext cx="36576" cy="310896"/>
-          </a:xfrm>
-          <a:prstGeom prst="rect">
-            <a:avLst/>
-          </a:prstGeom>
-          <a:solidFill>
-            <a:srgbClr val="9B7BE0"/>
-          </a:solidFill>
-          <a:ln/>
+            <a:off x="7420356" y="2359152"/>
+            <a:ext cx="0" cy="237744"/>
+          </a:xfrm>
+          <a:prstGeom prst="line">
+            <a:avLst/>
+          </a:prstGeom>
+          <a:noFill/>
+          <a:ln w="25400">
+            <a:solidFill>
+              <a:srgbClr val="9B7BE0"/>
+            </a:solidFill>
+            <a:prstDash val="solid"/>
+            <a:tailEnd type="triangle"/>
+          </a:ln>
         </p:spPr>
       </p:sp>
       <p:sp>
@@ -7264,262 +7187,126 @@
         </p:nvSpPr>
         <p:spPr>
           <a:xfrm>
-            <a:off x="8458200" y="3081528"/>
-            <a:ext cx="310896" cy="36576"/>
-          </a:xfrm>
-          <a:prstGeom prst="rect">
-            <a:avLst/>
-          </a:prstGeom>
-          <a:solidFill>
-            <a:srgbClr val="9B7BE0"/>
-          </a:solidFill>
-          <a:ln/>
-        </p:spPr>
-      </p:sp>
-      <p:sp>
-        <p:nvSpPr>
-          <p:cNvPr id="29" name="Shape 27"/>
-          <p:cNvSpPr/>
-          <p:nvPr/>
-        </p:nvSpPr>
-        <p:spPr>
-          <a:xfrm>
-            <a:off x="8732520" y="2807208"/>
-            <a:ext cx="36576" cy="310896"/>
-          </a:xfrm>
-          <a:prstGeom prst="rect">
-            <a:avLst/>
-          </a:prstGeom>
-          <a:solidFill>
-            <a:srgbClr val="9B7BE0"/>
-          </a:solidFill>
-          <a:ln/>
-        </p:spPr>
-      </p:sp>
-      <p:sp>
-        <p:nvSpPr>
-          <p:cNvPr id="30" name="Text 28"/>
-          <p:cNvSpPr/>
-          <p:nvPr/>
-        </p:nvSpPr>
-        <p:spPr>
-          <a:xfrm>
-            <a:off x="6254496" y="1847088"/>
-            <a:ext cx="2331720" cy="219456"/>
-          </a:xfrm>
-          <a:prstGeom prst="rect">
-            <a:avLst/>
-          </a:prstGeom>
-          <a:noFill/>
-          <a:ln/>
-        </p:spPr>
-        <p:txBody>
-          <a:bodyPr wrap="square" lIns="0" tIns="0" rIns="0" bIns="0" rtlCol="0" anchor="ctr"/>
-          <a:lstStyle/>
-          <a:p>
-            <a:pPr indent="0" marL="0">
-              <a:buNone/>
-            </a:pPr>
-            <a:r>
-              <a:rPr lang="en-US" sz="900" b="1" spc="200" kern="0" dirty="0">
-                <a:solidFill>
-                  <a:srgbClr val="9B7BE0"/>
-                </a:solidFill>
-                <a:latin typeface="Arial" pitchFamily="34" charset="0"/>
-                <a:ea typeface="Arial" pitchFamily="34" charset="-122"/>
-                <a:cs typeface="Arial" pitchFamily="34" charset="-120"/>
-              </a:rPr>
-              <a:t>IMAGE  ·  policy</a:t>
-            </a:r>
-            <a:endParaRPr lang="en-US" sz="900" dirty="0"/>
-          </a:p>
-        </p:txBody>
-      </p:sp>
-      <p:sp>
-        <p:nvSpPr>
-          <p:cNvPr id="31" name="Text 29"/>
-          <p:cNvSpPr/>
-          <p:nvPr/>
-        </p:nvSpPr>
-        <p:spPr>
-          <a:xfrm>
-            <a:off x="6254496" y="2121408"/>
-            <a:ext cx="2331720" cy="813816"/>
-          </a:xfrm>
-          <a:prstGeom prst="rect">
-            <a:avLst/>
-          </a:prstGeom>
-          <a:noFill/>
-          <a:ln/>
-        </p:spPr>
-        <p:txBody>
-          <a:bodyPr wrap="square" lIns="0" tIns="0" rIns="0" bIns="0" rtlCol="0" anchor="t"/>
-          <a:lstStyle/>
-          <a:p>
-            <a:pPr indent="0" marL="0">
-              <a:buNone/>
-            </a:pPr>
-            <a:r>
-              <a:rPr lang="en-US" sz="700" i="1" dirty="0">
-                <a:solidFill>
-                  <a:srgbClr val="8A8A90"/>
-                </a:solidFill>
-                <a:latin typeface="Arial" pitchFamily="34" charset="0"/>
-                <a:ea typeface="Arial" pitchFamily="34" charset="-122"/>
-                <a:cs typeface="Arial" pitchFamily="34" charset="-120"/>
-              </a:rPr>
-              <a:t>ISOMETRIC PROMPT → save as shift-policy.png</a:t>
-            </a:r>
-            <a:endParaRPr lang="en-US" sz="700" dirty="0"/>
-          </a:p>
-          <a:p>
-            <a:pPr indent="0" marL="0">
-              <a:buNone/>
-            </a:pPr>
-            <a:r>
-              <a:rPr lang="en-US" sz="850" dirty="0">
-                <a:solidFill>
-                  <a:srgbClr val="C9C9CE"/>
-                </a:solidFill>
-                <a:latin typeface="Arial" pitchFamily="34" charset="0"/>
-                <a:ea typeface="Arial" pitchFamily="34" charset="-122"/>
-                <a:cs typeface="Arial" pitchFamily="34" charset="-120"/>
-              </a:rPr>
-              <a:t>Isometric 3D illustration, a capitol dome beside a server-rack tower; a giant government hand plants a flag stamped with a percent sign on the tower while an official seal hovers over a glowing microchip, purple accents, near-black background, clean low-poly vector style, soft studio glow, subtle floor grid, centered, no text, no logos.</a:t>
-            </a:r>
-            <a:endParaRPr lang="en-US" sz="700" dirty="0"/>
-          </a:p>
-        </p:txBody>
-      </p:sp>
-      <p:sp>
-        <p:nvSpPr>
-          <p:cNvPr id="32" name="Text 30"/>
-          <p:cNvSpPr/>
-          <p:nvPr/>
-        </p:nvSpPr>
-        <p:spPr>
-          <a:xfrm>
-            <a:off x="6071616" y="3200400"/>
-            <a:ext cx="2697480" cy="274320"/>
-          </a:xfrm>
-          <a:prstGeom prst="rect">
-            <a:avLst/>
-          </a:prstGeom>
-          <a:noFill/>
-          <a:ln/>
-        </p:spPr>
-        <p:txBody>
-          <a:bodyPr wrap="square" lIns="0" tIns="0" rIns="0" bIns="0" rtlCol="0" anchor="ctr"/>
-          <a:lstStyle/>
-          <a:p>
-            <a:pPr algn="ctr" indent="0" marL="0">
-              <a:buNone/>
-            </a:pPr>
-            <a:r>
-              <a:rPr lang="en-US" sz="1100" b="1" dirty="0">
-                <a:solidFill>
-                  <a:srgbClr val="C9C9CE"/>
-                </a:solidFill>
-                <a:latin typeface="Arial" pitchFamily="34" charset="0"/>
-                <a:ea typeface="Arial" pitchFamily="34" charset="-122"/>
-                <a:cs typeface="Arial" pitchFamily="34" charset="-120"/>
-              </a:rPr>
-              <a:t>Private tech  </a:t>
-            </a:r>
-            <a:pPr algn="ctr" indent="0" marL="0">
-              <a:buNone/>
-            </a:pPr>
-            <a:r>
-              <a:rPr lang="en-US" sz="1200" b="1" dirty="0">
-                <a:solidFill>
-                  <a:srgbClr val="9B7BE0"/>
-                </a:solidFill>
-                <a:latin typeface="Arial" pitchFamily="34" charset="0"/>
-                <a:ea typeface="Arial" pitchFamily="34" charset="-122"/>
-                <a:cs typeface="Arial" pitchFamily="34" charset="-120"/>
-              </a:rPr>
-              <a:t>→  </a:t>
-            </a:r>
-            <a:pPr algn="ctr" indent="0" marL="0">
-              <a:buNone/>
-            </a:pPr>
-            <a:r>
-              <a:rPr lang="en-US" sz="1100" b="1" dirty="0">
-                <a:solidFill>
-                  <a:srgbClr val="FFFFFF"/>
-                </a:solidFill>
-                <a:latin typeface="Arial" pitchFamily="34" charset="0"/>
-                <a:ea typeface="Arial" pitchFamily="34" charset="-122"/>
-                <a:cs typeface="Arial" pitchFamily="34" charset="-120"/>
-              </a:rPr>
-              <a:t>Sovereign asset</a:t>
-            </a:r>
-            <a:endParaRPr lang="en-US" sz="1100" dirty="0"/>
-          </a:p>
-        </p:txBody>
-      </p:sp>
-      <p:sp>
-        <p:nvSpPr>
-          <p:cNvPr id="33" name="Text 31"/>
-          <p:cNvSpPr/>
-          <p:nvPr/>
-        </p:nvSpPr>
-        <p:spPr>
-          <a:xfrm>
-            <a:off x="6181344" y="3511296"/>
-            <a:ext cx="2478024" cy="457200"/>
-          </a:xfrm>
-          <a:prstGeom prst="rect">
-            <a:avLst/>
-          </a:prstGeom>
-          <a:noFill/>
-          <a:ln/>
-        </p:spPr>
-        <p:txBody>
-          <a:bodyPr wrap="square" lIns="0" tIns="0" rIns="0" bIns="0" rtlCol="0" anchor="t"/>
-          <a:lstStyle/>
-          <a:p>
-            <a:pPr algn="ctr" indent="0" marL="0">
-              <a:buNone/>
-            </a:pPr>
-            <a:r>
-              <a:rPr lang="en-US" sz="850" dirty="0">
-                <a:solidFill>
-                  <a:srgbClr val="9A9AA0"/>
-                </a:solidFill>
-                <a:latin typeface="Arial" pitchFamily="34" charset="0"/>
-                <a:ea typeface="Arial" pitchFamily="34" charset="-122"/>
-                <a:cs typeface="Arial" pitchFamily="34" charset="-120"/>
-              </a:rPr>
-              <a:t>Governments now debate owning a piece of the labs, not just regulating them.</a:t>
-            </a:r>
-            <a:endParaRPr lang="en-US" sz="850" dirty="0"/>
-          </a:p>
-        </p:txBody>
-      </p:sp>
-      <p:sp>
-        <p:nvSpPr>
-          <p:cNvPr id="34" name="Shape 32"/>
-          <p:cNvSpPr/>
-          <p:nvPr/>
-        </p:nvSpPr>
-        <p:spPr>
-          <a:xfrm>
-            <a:off x="0" y="4041648"/>
-            <a:ext cx="9144000" cy="457200"/>
-          </a:xfrm>
-          <a:prstGeom prst="rect">
-            <a:avLst/>
+            <a:off x="6483096" y="2633472"/>
+            <a:ext cx="1874520" cy="384048"/>
+          </a:xfrm>
+          <a:prstGeom prst="roundRect">
+            <a:avLst>
+              <a:gd name="adj" fmla="val 11905"/>
+            </a:avLst>
           </a:prstGeom>
           <a:solidFill>
             <a:srgbClr val="1C1C20"/>
           </a:solidFill>
-          <a:ln/>
-        </p:spPr>
-      </p:sp>
-      <p:sp>
-        <p:nvSpPr>
-          <p:cNvPr id="35" name="Shape 33"/>
+          <a:ln w="19050">
+            <a:solidFill>
+              <a:srgbClr val="9B7BE0"/>
+            </a:solidFill>
+            <a:prstDash val="solid"/>
+          </a:ln>
+        </p:spPr>
+      </p:sp>
+      <p:sp>
+        <p:nvSpPr>
+          <p:cNvPr id="29" name="Text 27"/>
+          <p:cNvSpPr/>
+          <p:nvPr/>
+        </p:nvSpPr>
+        <p:spPr>
+          <a:xfrm>
+            <a:off x="6483096" y="2633472"/>
+            <a:ext cx="1874520" cy="384048"/>
+          </a:xfrm>
+          <a:prstGeom prst="rect">
+            <a:avLst/>
+          </a:prstGeom>
+          <a:noFill/>
+          <a:ln/>
+        </p:spPr>
+        <p:txBody>
+          <a:bodyPr wrap="square" lIns="0" tIns="0" rIns="0" bIns="0" rtlCol="0" anchor="ctr"/>
+          <a:lstStyle/>
+          <a:p>
+            <a:pPr algn="ctr" indent="0" marL="0">
+              <a:buNone/>
+            </a:pPr>
+            <a:r>
+              <a:rPr lang="en-US" sz="950" b="1" dirty="0">
+                <a:solidFill>
+                  <a:srgbClr val="FFFFFF"/>
+                </a:solidFill>
+                <a:latin typeface="Arial" pitchFamily="34" charset="0"/>
+                <a:ea typeface="Arial" pitchFamily="34" charset="-122"/>
+                <a:cs typeface="Arial" pitchFamily="34" charset="-120"/>
+              </a:rPr>
+              <a:t>Sovereign asset</a:t>
+            </a:r>
+            <a:endParaRPr lang="en-US" sz="950" dirty="0"/>
+          </a:p>
+        </p:txBody>
+      </p:sp>
+      <p:sp>
+        <p:nvSpPr>
+          <p:cNvPr id="30" name="Text 28"/>
+          <p:cNvSpPr/>
+          <p:nvPr/>
+        </p:nvSpPr>
+        <p:spPr>
+          <a:xfrm>
+            <a:off x="6236208" y="3163824"/>
+            <a:ext cx="2368296" cy="658368"/>
+          </a:xfrm>
+          <a:prstGeom prst="rect">
+            <a:avLst/>
+          </a:prstGeom>
+          <a:noFill/>
+          <a:ln/>
+        </p:spPr>
+        <p:txBody>
+          <a:bodyPr wrap="square" lIns="0" tIns="0" rIns="0" bIns="0" rtlCol="0" anchor="t"/>
+          <a:lstStyle/>
+          <a:p>
+            <a:pPr algn="ctr" indent="0" marL="0">
+              <a:buNone/>
+            </a:pPr>
+            <a:r>
+              <a:rPr lang="en-US" sz="850" dirty="0">
+                <a:solidFill>
+                  <a:srgbClr val="9A9AA0"/>
+                </a:solidFill>
+                <a:latin typeface="Arial" pitchFamily="34" charset="0"/>
+                <a:ea typeface="Arial" pitchFamily="34" charset="-122"/>
+                <a:cs typeface="Arial" pitchFamily="34" charset="-120"/>
+              </a:rPr>
+              <a:t>Governments now debate owning a piece of the labs, not just regulating them.</a:t>
+            </a:r>
+            <a:endParaRPr lang="en-US" sz="850" dirty="0"/>
+          </a:p>
+        </p:txBody>
+      </p:sp>
+      <p:sp>
+        <p:nvSpPr>
+          <p:cNvPr id="31" name="Shape 29"/>
+          <p:cNvSpPr/>
+          <p:nvPr/>
+        </p:nvSpPr>
+        <p:spPr>
+          <a:xfrm>
+            <a:off x="0" y="4041648"/>
+            <a:ext cx="9144000" cy="457200"/>
+          </a:xfrm>
+          <a:prstGeom prst="rect">
+            <a:avLst/>
+          </a:prstGeom>
+          <a:solidFill>
+            <a:srgbClr val="1C1C20"/>
+          </a:solidFill>
+          <a:ln/>
+        </p:spPr>
+      </p:sp>
+      <p:sp>
+        <p:nvSpPr>
+          <p:cNvPr id="32" name="Shape 30"/>
           <p:cNvSpPr/>
           <p:nvPr/>
         </p:nvSpPr>
@@ -7539,7 +7326,7 @@
       </p:sp>
       <p:sp>
         <p:nvSpPr>
-          <p:cNvPr id="36" name="Text 34"/>
+          <p:cNvPr id="33" name="Text 31"/>
           <p:cNvSpPr/>
           <p:nvPr/>
         </p:nvSpPr>
@@ -7578,7 +7365,7 @@
       </p:sp>
       <p:sp>
         <p:nvSpPr>
-          <p:cNvPr id="37" name="Shape 35"/>
+          <p:cNvPr id="34" name="Shape 32"/>
           <p:cNvSpPr/>
           <p:nvPr/>
         </p:nvSpPr>
@@ -7598,7 +7385,7 @@
       </p:sp>
       <p:sp>
         <p:nvSpPr>
-          <p:cNvPr id="38" name="Shape 36"/>
+          <p:cNvPr id="35" name="Shape 33"/>
           <p:cNvSpPr/>
           <p:nvPr/>
         </p:nvSpPr>
@@ -7621,7 +7408,7 @@
       </p:sp>
       <p:sp>
         <p:nvSpPr>
-          <p:cNvPr id="39" name="Text 37"/>
+          <p:cNvPr id="36" name="Text 34"/>
           <p:cNvSpPr/>
           <p:nvPr/>
         </p:nvSpPr>
@@ -7660,7 +7447,7 @@
       </p:sp>
       <p:sp>
         <p:nvSpPr>
-          <p:cNvPr id="40" name="Text 38"/>
+          <p:cNvPr id="37" name="Text 35"/>
           <p:cNvSpPr/>
           <p:nvPr/>
         </p:nvSpPr>
@@ -10587,7 +10374,7 @@
                 <a:ea typeface="Arial" pitchFamily="34" charset="-122"/>
                 <a:cs typeface="Arial" pitchFamily="34" charset="-120"/>
               </a:rPr>
-              <a:t>ISOMETRIC PROMPT → save as token-budget.png</a:t>
+              <a:t>IMAGE PROMPT → save as token-budget.png</a:t>
             </a:r>
             <a:endParaRPr lang="en-US" sz="700" dirty="0"/>
           </a:p>
@@ -10604,7 +10391,7 @@
                 <a:ea typeface="Arial" pitchFamily="34" charset="-122"/>
                 <a:cs typeface="Arial" pitchFamily="34" charset="-120"/>
               </a:rPr>
-              <a:t>Isometric 3D illustration, a guarded vault dispensing only a small rationed handful of glowing tokens onto a conveyor that feeds a row of waiting laptops, an 'allocation' valve throttling the flow, orange and gold accents, near-black background, clean low-poly vector style, soft studio glow, subtle floor grid, centered, no text, no logos.</a:t>
+              <a:t>Clean modern editorial illustration with natural perspective (not isometric), a guarded vault dispensing only a small rationed handful of glowing tokens onto a conveyor that feeds a row of waiting laptops, an 'allocation' valve throttling the flow, orange and gold accents, on a near-black background, soft cinematic studio lighting, minimal and polished, single centered subject, no text, no words, no logos.</a:t>
             </a:r>
             <a:endParaRPr lang="en-US" sz="700" dirty="0"/>
           </a:p>
@@ -11464,7 +11251,7 @@
                 <a:ea typeface="Arial" pitchFamily="34" charset="-122"/>
                 <a:cs typeface="Arial" pitchFamily="34" charset="-120"/>
               </a:rPr>
-              <a:t>ISOMETRIC PROMPT → save as gov-stake.png</a:t>
+              <a:t>IMAGE PROMPT → save as gov-stake.png</a:t>
             </a:r>
             <a:endParaRPr lang="en-US" sz="700" dirty="0"/>
           </a:p>
@@ -11481,7 +11268,7 @@
                 <a:ea typeface="Arial" pitchFamily="34" charset="-122"/>
                 <a:cs typeface="Arial" pitchFamily="34" charset="-120"/>
               </a:rPr>
-              <a:t>Isometric 3D illustration, a giant government hand planting a flag bearing a percentage symbol atop a glowing server-rack skyscraper, while a chute rains small dividend coins down onto a cluster of tiny suburban houses below, purple accents, near-black background, clean low-poly vector style, soft studio glow, subtle floor grid, centered, no text, no logos.</a:t>
+              <a:t>Clean modern editorial illustration with natural perspective (not isometric), a giant government hand planting a flag bearing a percentage symbol atop a glowing server-rack skyscraper, while a chute rains small dividend coins down onto a cluster of tiny suburban houses below, purple accents, on a near-black background, soft cinematic studio lighting, minimal and polished, single centered subject, no text, no words, no logos.</a:t>
             </a:r>
             <a:endParaRPr lang="en-US" sz="700" dirty="0"/>
           </a:p>

--- a/ai-markets-deck.pptx
+++ b/ai-markets-deck.pptx
@@ -2778,7 +2778,7 @@
                 <a:ea typeface="Arial" pitchFamily="34" charset="-122"/>
                 <a:cs typeface="Arial" pitchFamily="34" charset="-120"/>
               </a:rPr>
-              <a:t>Clean modern editorial illustration with natural perspective (not isometric), a financial district at night where the skyscrapers are stacked GPU server-racks; a glowing candlestick stock-chart runs like a road along their base, and a curved arrow of capital flows from a domed bank building into the single tallest GPU tower; orange and yellow accents, on a near-black background, soft cinematic studio lighting, minimal and polished, single centered subject, no text, no words, no logos.</a:t>
+              <a:t>Detailed modern editorial 3D illustration, slight three-quarter camera angle, polished semi-realistic render, cinematic: a financial district at night where the skyscrapers are stacked GPU server-racks; a glowing candlestick stock-chart runs like a road along their base, and a curved arrow of capital flows from a domed bank building into the single tallest GPU tower; orange and yellow accents. Deep near-black studio background (#111114), soft volumetric lighting with gentle rim light, glossy and matte materials, fine detail, crisp focus, premium financial-tech mood, single hero subject with generous negative space, no text, no words, no logos, no watermark.</a:t>
             </a:r>
             <a:endParaRPr lang="en-US" sz="700" dirty="0"/>
           </a:p>
@@ -4160,7 +4160,7 @@
                 <a:ea typeface="Arial" pitchFamily="34" charset="-122"/>
                 <a:cs typeface="Arial" pitchFamily="34" charset="-120"/>
               </a:rPr>
-              <a:t>Clean modern editorial illustration with natural perspective (not isometric), a humanoid robot carrying a labeled tote down a numbered warehouse aisle lined with shelving racks, mid-stride, pink accents, on a near-black background, soft cinematic studio lighting, minimal and polished, single centered subject, no text, no words, no logos.</a:t>
+              <a:t>Detailed modern editorial 3D illustration, slight three-quarter camera angle, polished semi-realistic render, cinematic: a humanoid robot carrying a labeled tote down a numbered warehouse aisle lined with shelving racks, mid-stride, pink accents. Deep near-black studio background (#111114), soft volumetric lighting with gentle rim light, glossy and matte materials, fine detail, crisp focus, premium financial-tech mood, single hero subject with generous negative space, no text, no words, no logos, no watermark.</a:t>
             </a:r>
             <a:endParaRPr lang="en-US" sz="700" dirty="0"/>
           </a:p>
@@ -4456,7 +4456,7 @@
                 <a:ea typeface="Arial" pitchFamily="34" charset="-122"/>
                 <a:cs typeface="Arial" pitchFamily="34" charset="-120"/>
               </a:rPr>
-              <a:t>Clean modern editorial illustration with natural perspective (not isometric), a driverless robotaxi with a spinning lidar turret and glowing sensor cones stopped at a small city intersection with a traffic light and crosswalk, pink accents, on a near-black background, soft cinematic studio lighting, minimal and polished, single centered subject, no text, no words, no logos.</a:t>
+              <a:t>Detailed modern editorial 3D illustration, slight three-quarter camera angle, polished semi-realistic render, cinematic: a driverless robotaxi with a spinning lidar turret and glowing sensor cones stopped at a small city intersection with a traffic light and crosswalk, pink accents. Deep near-black studio background (#111114), soft volumetric lighting with gentle rim light, glossy and matte materials, fine detail, crisp focus, premium financial-tech mood, single hero subject with generous negative space, no text, no words, no logos, no watermark.</a:t>
             </a:r>
             <a:endParaRPr lang="en-US" sz="700" dirty="0"/>
           </a:p>
@@ -4752,7 +4752,7 @@
                 <a:ea typeface="Arial" pitchFamily="34" charset="-122"/>
                 <a:cs typeface="Arial" pitchFamily="34" charset="-120"/>
               </a:rPr>
-              <a:t>Clean modern editorial illustration with natural perspective (not isometric), a ring-shaped orbital data-center with unfolded solar-panel wings and server modules, floating above the curved horizon of Earth with sparse stars, pink accents, on a near-black background, soft cinematic studio lighting, minimal and polished, single centered subject, no text, no words, no logos.</a:t>
+              <a:t>Detailed modern editorial 3D illustration, slight three-quarter camera angle, polished semi-realistic render, cinematic: a ring-shaped orbital data-center with unfolded solar-panel wings and server modules, floating above the curved horizon of Earth with sparse stars, pink accents. Deep near-black studio background (#111114), soft volumetric lighting with gentle rim light, glossy and matte materials, fine detail, crisp focus, premium financial-tech mood, single hero subject with generous negative space, no text, no words, no logos, no watermark.</a:t>
             </a:r>
             <a:endParaRPr lang="en-US" sz="700" dirty="0"/>
           </a:p>
@@ -5048,7 +5048,7 @@
                 <a:ea typeface="Arial" pitchFamily="34" charset="-122"/>
                 <a:cs typeface="Arial" pitchFamily="34" charset="-120"/>
               </a:rPr>
-              <a:t>Clean modern editorial illustration with natural perspective (not isometric), a robotic pipette arm in a lab assembling a glowing folded-protein ribbon and double-helix on a sample platform, small vials arranged around it, pink accents, on a near-black background, soft cinematic studio lighting, minimal and polished, single centered subject, no text, no words, no logos.</a:t>
+              <a:t>Detailed modern editorial 3D illustration, slight three-quarter camera angle, polished semi-realistic render, cinematic: a robotic pipette arm in a lab assembling a glowing folded-protein ribbon and double-helix on a sample platform, small vials arranged around it, pink accents. Deep near-black studio background (#111114), soft volumetric lighting with gentle rim light, glossy and matte materials, fine detail, crisp focus, premium financial-tech mood, single hero subject with generous negative space, no text, no words, no logos, no watermark.</a:t>
             </a:r>
             <a:endParaRPr lang="en-US" sz="700" dirty="0"/>
           </a:p>
@@ -10391,7 +10391,7 @@
                 <a:ea typeface="Arial" pitchFamily="34" charset="-122"/>
                 <a:cs typeface="Arial" pitchFamily="34" charset="-120"/>
               </a:rPr>
-              <a:t>Clean modern editorial illustration with natural perspective (not isometric), a guarded vault dispensing only a small rationed handful of glowing tokens onto a conveyor that feeds a row of waiting laptops, an 'allocation' valve throttling the flow, orange and gold accents, on a near-black background, soft cinematic studio lighting, minimal and polished, single centered subject, no text, no words, no logos.</a:t>
+              <a:t>Detailed modern editorial 3D illustration, slight three-quarter camera angle, polished semi-realistic render, cinematic: a guarded vault dispensing only a small rationed handful of glowing tokens onto a conveyor that feeds a row of waiting laptops, an 'allocation' valve throttling the flow, orange and gold accents. Deep near-black studio background (#111114), soft volumetric lighting with gentle rim light, glossy and matte materials, fine detail, crisp focus, premium financial-tech mood, single hero subject with generous negative space, no text, no words, no logos, no watermark.</a:t>
             </a:r>
             <a:endParaRPr lang="en-US" sz="700" dirty="0"/>
           </a:p>
@@ -11268,7 +11268,7 @@
                 <a:ea typeface="Arial" pitchFamily="34" charset="-122"/>
                 <a:cs typeface="Arial" pitchFamily="34" charset="-120"/>
               </a:rPr>
-              <a:t>Clean modern editorial illustration with natural perspective (not isometric), a giant government hand planting a flag bearing a percentage symbol atop a glowing server-rack skyscraper, while a chute rains small dividend coins down onto a cluster of tiny suburban houses below, purple accents, on a near-black background, soft cinematic studio lighting, minimal and polished, single centered subject, no text, no words, no logos.</a:t>
+              <a:t>Detailed modern editorial 3D illustration, slight three-quarter camera angle, polished semi-realistic render, cinematic: a giant government hand planting a flag bearing a percentage symbol atop a glowing server-rack skyscraper, while a chute rains small dividend coins down onto a cluster of tiny suburban houses below, purple accents. Deep near-black studio background (#111114), soft volumetric lighting with gentle rim light, glossy and matte materials, fine detail, crisp focus, premium financial-tech mood, single hero subject with generous negative space, no text, no words, no logos, no watermark.</a:t>
             </a:r>
             <a:endParaRPr lang="en-US" sz="700" dirty="0"/>
           </a:p>

--- a/ai-markets-deck.pptx
+++ b/ai-markets-deck.pptx
@@ -2778,7 +2778,7 @@
                 <a:ea typeface="Arial" pitchFamily="34" charset="-122"/>
                 <a:cs typeface="Arial" pitchFamily="34" charset="-120"/>
               </a:rPr>
-              <a:t>Detailed modern editorial 3D illustration, slight three-quarter camera angle, polished semi-realistic render, cinematic: a financial district at night where the skyscrapers are stacked GPU server-racks; a glowing candlestick stock-chart runs like a road along their base, and a curved arrow of capital flows from a domed bank building into the single tallest GPU tower; orange and yellow accents. Deep near-black studio background (#111114), soft volumetric lighting with gentle rim light, glossy and matte materials, fine detail, crisp focus, premium financial-tech mood, single hero subject with generous negative space, no text, no words, no logos, no watermark.</a:t>
+              <a:t>Detailed modern editorial 3D illustration, slight three-quarter camera angle, polished semi-realistic render, clean and bright: a bright, optimistic financial district lit against a deep near-black sky, its skyscrapers built from stacked GPU server-racks with glowing status lights; a candlestick stock-chart winds through the streets like a lit highway with green up-bars and red down-bars; a luminous ribbon-arrow of capital arcs from a domed bank building up into the single tallest tower; orange (#F6693D) and gold (#FFB800) accents with green (#00A854) and red (#CC0000) candlesticks. Deep near-black (#111114) studio background; brushed-silver and white materials; clean, bright, optimistic BlackRock-style institutional palette, never dark or ominous; soft even lighting, crisp focus, premium financial-tech mood; single hero subject with generous negative space; no text, no words, no logos, no watermark.</a:t>
             </a:r>
             <a:endParaRPr lang="en-US" sz="700" dirty="0"/>
           </a:p>
@@ -4160,7 +4160,7 @@
                 <a:ea typeface="Arial" pitchFamily="34" charset="-122"/>
                 <a:cs typeface="Arial" pitchFamily="34" charset="-120"/>
               </a:rPr>
-              <a:t>Detailed modern editorial 3D illustration, slight three-quarter camera angle, polished semi-realistic render, cinematic: a humanoid robot carrying a labeled tote down a numbered warehouse aisle lined with shelving racks, mid-stride, pink accents. Deep near-black studio background (#111114), soft volumetric lighting with gentle rim light, glossy and matte materials, fine detail, crisp focus, premium financial-tech mood, single hero subject with generous negative space, no text, no words, no logos, no watermark.</a:t>
+              <a:t>Detailed modern editorial 3D illustration, slight three-quarter camera angle, polished semi-realistic render, clean and bright: a friendly, sleek white-and-silver humanoid robot walking upright down a bright, well-lit numbered warehouse aisle, carrying a labeled tote, neat shelving on either side; magenta-pink (#E8478D) and warm orange accents. Deep near-black (#111114) studio background; brushed-silver and white materials; clean, bright, optimistic BlackRock-style institutional palette, never dark or ominous; soft even lighting, crisp focus, premium financial-tech mood; single hero subject with generous negative space; no text, no words, no logos, no watermark.</a:t>
             </a:r>
             <a:endParaRPr lang="en-US" sz="700" dirty="0"/>
           </a:p>
@@ -4456,7 +4456,7 @@
                 <a:ea typeface="Arial" pitchFamily="34" charset="-122"/>
                 <a:cs typeface="Arial" pitchFamily="34" charset="-120"/>
               </a:rPr>
-              <a:t>Detailed modern editorial 3D illustration, slight three-quarter camera angle, polished semi-realistic render, cinematic: a driverless robotaxi with a spinning lidar turret and glowing sensor cones stopped at a small city intersection with a traffic light and crosswalk, pink accents. Deep near-black studio background (#111114), soft volumetric lighting with gentle rim light, glossy and matte materials, fine detail, crisp focus, premium financial-tech mood, single hero subject with generous negative space, no text, no words, no logos, no watermark.</a:t>
+              <a:t>Detailed modern editorial 3D illustration, slight three-quarter camera angle, polished semi-realistic render, clean and bright: a sleek driverless robotaxi with a spinning lidar turret and soft glowing sensor cones, stopped at a clean, bright city intersection with a traffic light and crosswalk; magenta-pink (#E8478D) and warm orange accents. Deep near-black (#111114) studio background; brushed-silver and white materials; clean, bright, optimistic BlackRock-style institutional palette, never dark or ominous; soft even lighting, crisp focus, premium financial-tech mood; single hero subject with generous negative space; no text, no words, no logos, no watermark.</a:t>
             </a:r>
             <a:endParaRPr lang="en-US" sz="700" dirty="0"/>
           </a:p>
@@ -4752,7 +4752,7 @@
                 <a:ea typeface="Arial" pitchFamily="34" charset="-122"/>
                 <a:cs typeface="Arial" pitchFamily="34" charset="-120"/>
               </a:rPr>
-              <a:t>Detailed modern editorial 3D illustration, slight three-quarter camera angle, polished semi-realistic render, cinematic: a ring-shaped orbital data-center with unfolded solar-panel wings and server modules, floating above the curved horizon of Earth with sparse stars, pink accents. Deep near-black studio background (#111114), soft volumetric lighting with gentle rim light, glossy and matte materials, fine detail, crisp focus, premium financial-tech mood, single hero subject with generous negative space, no text, no words, no logos, no watermark.</a:t>
+              <a:t>Detailed modern editorial 3D illustration, slight three-quarter camera angle, polished semi-realistic render, clean and bright: a ring-shaped orbital data-center with unfolded solar-panel wings and server modules, sunlit above the bright curved horizon of Earth; magenta-pink (#E8478D) and warm orange accents. Deep near-black (#111114) studio background; brushed-silver and white materials; clean, bright, optimistic BlackRock-style institutional palette, never dark or ominous; soft even lighting, crisp focus, premium financial-tech mood; single hero subject with generous negative space; no text, no words, no logos, no watermark.</a:t>
             </a:r>
             <a:endParaRPr lang="en-US" sz="700" dirty="0"/>
           </a:p>
@@ -5048,7 +5048,7 @@
                 <a:ea typeface="Arial" pitchFamily="34" charset="-122"/>
                 <a:cs typeface="Arial" pitchFamily="34" charset="-120"/>
               </a:rPr>
-              <a:t>Detailed modern editorial 3D illustration, slight three-quarter camera angle, polished semi-realistic render, cinematic: a robotic pipette arm in a lab assembling a glowing folded-protein ribbon and double-helix on a sample platform, small vials arranged around it, pink accents. Deep near-black studio background (#111114), soft volumetric lighting with gentle rim light, glossy and matte materials, fine detail, crisp focus, premium financial-tech mood, single hero subject with generous negative space, no text, no words, no logos, no watermark.</a:t>
+              <a:t>Detailed modern editorial 3D illustration, slight three-quarter camera angle, polished semi-realistic render, clean and bright: a precise robotic lab arm assembling a glowing folded-protein ribbon and DNA double-helix on a bright, clean sample platform with small glass vials around it; magenta-pink (#E8478D) and warm orange accents. Deep near-black (#111114) studio background; brushed-silver and white materials; clean, bright, optimistic BlackRock-style institutional palette, never dark or ominous; soft even lighting, crisp focus, premium financial-tech mood; single hero subject with generous negative space; no text, no words, no logos, no watermark.</a:t>
             </a:r>
             <a:endParaRPr lang="en-US" sz="700" dirty="0"/>
           </a:p>
@@ -10391,7 +10391,7 @@
                 <a:ea typeface="Arial" pitchFamily="34" charset="-122"/>
                 <a:cs typeface="Arial" pitchFamily="34" charset="-120"/>
               </a:rPr>
-              <a:t>Detailed modern editorial 3D illustration, slight three-quarter camera angle, polished semi-realistic render, cinematic: a guarded vault dispensing only a small rationed handful of glowing tokens onto a conveyor that feeds a row of waiting laptops, an 'allocation' valve throttling the flow, orange and gold accents. Deep near-black studio background (#111114), soft volumetric lighting with gentle rim light, glossy and matte materials, fine detail, crisp focus, premium financial-tech mood, single hero subject with generous negative space, no text, no words, no logos, no watermark.</a:t>
+              <a:t>Detailed modern editorial 3D illustration, slight three-quarter camera angle, polished semi-realistic render, clean and bright: a clean, orderly allocation station that dispenses a measured handful of glowing tokens onto a conveyor feeding a row of laptops, a clear dial set to a budget limit, managed and modern (not grim); orange (#F6693D) and gold (#FFB800) accents. Deep near-black (#111114) studio background; brushed-silver and white materials; clean, bright, optimistic BlackRock-style institutional palette, never dark or ominous; soft even lighting, crisp focus, premium financial-tech mood; single hero subject with generous negative space; no text, no words, no logos, no watermark.</a:t>
             </a:r>
             <a:endParaRPr lang="en-US" sz="700" dirty="0"/>
           </a:p>
@@ -11268,7 +11268,7 @@
                 <a:ea typeface="Arial" pitchFamily="34" charset="-122"/>
                 <a:cs typeface="Arial" pitchFamily="34" charset="-120"/>
               </a:rPr>
-              <a:t>Detailed modern editorial 3D illustration, slight three-quarter camera angle, polished semi-realistic render, cinematic: a giant government hand planting a flag bearing a percentage symbol atop a glowing server-rack skyscraper, while a chute rains small dividend coins down onto a cluster of tiny suburban houses below, purple accents. Deep near-black studio background (#111114), soft volumetric lighting with gentle rim light, glossy and matte materials, fine detail, crisp focus, premium financial-tech mood, single hero subject with generous negative space, no text, no words, no logos, no watermark.</a:t>
+              <a:t>Detailed modern editorial 3D illustration, slight three-quarter camera angle, polished semi-realistic render, clean and bright: a classical domed government building and a modern data-center tower standing side by side on a clean plaza, linked by a bright walkway along which glowing 'dividend' coins travel toward a tidy row of friendly homes — an optimistic public-private partnership; orange (#F6693D) and gold (#FFB800) accents. Deep near-black (#111114) studio background; brushed-silver and white materials; clean, bright, optimistic BlackRock-style institutional palette, never dark or ominous; soft even lighting, crisp focus, premium financial-tech mood; single hero subject with generous negative space; no text, no words, no logos, no watermark.</a:t>
             </a:r>
             <a:endParaRPr lang="en-US" sz="700" dirty="0"/>
           </a:p>

--- a/ai-markets-deck.pptx
+++ b/ai-markets-deck.pptx
@@ -16,10 +16,9 @@
     <p:sldId id="264" r:id="rId10"/>
     <p:sldId id="265" r:id="rId11"/>
     <p:sldId id="266" r:id="rId12"/>
-    <p:sldId id="267" r:id="rId13"/>
   </p:sldIdLst>
   <p:notesMasterIdLst>
-    <p:notesMasterId r:id="rId14"/>
+    <p:notesMasterId r:id="rId13"/>
   </p:notesMasterIdLst>
   <p:sldSz cx="9144000" cy="5143500"/>
   <p:notesSz cx="5143500" cy="9144000"/>
@@ -426,252 +425,6 @@
 </c:chartSpace>
 </file>
 
-<file path=ppt/charts/chart2.xml><?xml version="1.0" encoding="utf-8"?>
-<c:chartSpace xmlns:c="http://schemas.openxmlformats.org/drawingml/2006/chart" xmlns:a="http://schemas.openxmlformats.org/drawingml/2006/main" xmlns:r="http://schemas.openxmlformats.org/officeDocument/2006/relationships">
-  <c:date1904 val="0"/>
-  <c:roundedCorners val="1"/>
-  <c:chart>
-    <c:autoTitleDeleted val="1"/>
-    <c:plotArea>
-      <c:layout/>
-      <c:doughnutChart>
-        <c:varyColors val="1"/>
-        <c:ser>
-          <c:idx val="0"/>
-          <c:order val="0"/>
-          <c:tx>
-            <c:strRef>
-              <c:f>Sheet1!$B$1</c:f>
-              <c:strCache>
-                <c:ptCount val="1"/>
-                <c:pt idx="0">
-                  <c:v>Allocation</c:v>
-                </c:pt>
-              </c:strCache>
-            </c:strRef>
-          </c:tx>
-          <c:spPr>
-            <a:solidFill>
-              <a:schemeClr val="accent1"/>
-            </a:solidFill>
-            <a:ln w="9525" cap="flat">
-              <a:solidFill>
-                <a:srgbClr val="F9F9F9"/>
-              </a:solidFill>
-              <a:prstDash val="solid"/>
-              <a:round/>
-            </a:ln>
-            <a:effectLst/>
-          </c:spPr>
-          <c:dPt>
-            <c:idx val="0"/>
-            <c:bubble3D val="0"/>
-            <c:spPr>
-              <a:solidFill>
-                <a:srgbClr val="F6693D"/>
-              </a:solidFill>
-              <a:effectLst/>
-            </c:spPr>
-          </c:dPt>
-          <c:dPt>
-            <c:idx val="1"/>
-            <c:bubble3D val="0"/>
-            <c:spPr>
-              <a:solidFill>
-                <a:srgbClr val="FFB800"/>
-              </a:solidFill>
-              <a:effectLst/>
-            </c:spPr>
-          </c:dPt>
-          <c:dPt>
-            <c:idx val="2"/>
-            <c:bubble3D val="0"/>
-            <c:spPr>
-              <a:solidFill>
-                <a:srgbClr val="3E3E46"/>
-              </a:solidFill>
-              <a:effectLst/>
-            </c:spPr>
-          </c:dPt>
-          <c:dLbls>
-            <c:dLbl>
-              <c:idx val="0"/>
-              <c:numFmt formatCode="General" sourceLinked="0"/>
-              <c:spPr/>
-              <c:txPr>
-                <a:bodyPr/>
-                <a:lstStyle/>
-                <a:p>
-                  <a:pPr>
-                    <a:defRPr sz="1200" b="0" i="0" u="none" strike="noStrike">
-                      <a:solidFill>
-                        <a:srgbClr val="000000"/>
-                      </a:solidFill>
-                      <a:latin typeface="Arial"/>
-                    </a:defRPr>
-                  </a:pPr>
-                </a:p>
-              </c:txPr>
-              <c:showLegendKey val="0"/>
-              <c:showVal val="0"/>
-              <c:showCatName val="0"/>
-              <c:showSerName val="0"/>
-              <c:showPercent val="0"/>
-              <c:showBubbleSize val="0"/>
-            </c:dLbl>
-            <c:dLbl>
-              <c:idx val="1"/>
-              <c:numFmt formatCode="General" sourceLinked="0"/>
-              <c:spPr/>
-              <c:txPr>
-                <a:bodyPr/>
-                <a:lstStyle/>
-                <a:p>
-                  <a:pPr>
-                    <a:defRPr sz="1200" b="0" i="0" u="none" strike="noStrike">
-                      <a:solidFill>
-                        <a:srgbClr val="000000"/>
-                      </a:solidFill>
-                      <a:latin typeface="Arial"/>
-                    </a:defRPr>
-                  </a:pPr>
-                </a:p>
-              </c:txPr>
-              <c:showLegendKey val="0"/>
-              <c:showVal val="0"/>
-              <c:showCatName val="0"/>
-              <c:showSerName val="0"/>
-              <c:showPercent val="0"/>
-              <c:showBubbleSize val="0"/>
-            </c:dLbl>
-            <c:dLbl>
-              <c:idx val="2"/>
-              <c:numFmt formatCode="General" sourceLinked="0"/>
-              <c:spPr/>
-              <c:txPr>
-                <a:bodyPr/>
-                <a:lstStyle/>
-                <a:p>
-                  <a:pPr>
-                    <a:defRPr sz="1200" b="0" i="0" u="none" strike="noStrike">
-                      <a:solidFill>
-                        <a:srgbClr val="000000"/>
-                      </a:solidFill>
-                      <a:latin typeface="Arial"/>
-                    </a:defRPr>
-                  </a:pPr>
-                </a:p>
-              </c:txPr>
-              <c:showLegendKey val="0"/>
-              <c:showVal val="0"/>
-              <c:showCatName val="0"/>
-              <c:showSerName val="0"/>
-              <c:showPercent val="0"/>
-              <c:showBubbleSize val="0"/>
-            </c:dLbl>
-            <c:numFmt formatCode="General" sourceLinked="0"/>
-            <c:txPr>
-              <a:bodyPr/>
-              <a:lstStyle/>
-              <a:p>
-                <a:pPr>
-                  <a:defRPr sz="1800" b="0" i="0" u="none" strike="noStrike">
-                    <a:solidFill>
-                      <a:srgbClr val="000000"/>
-                    </a:solidFill>
-                    <a:latin typeface="Arial"/>
-                  </a:defRPr>
-                </a:pPr>
-              </a:p>
-            </c:txPr>
-            <c:showLegendKey val="0"/>
-            <c:showVal val="0"/>
-            <c:showCatName val="1"/>
-            <c:showSerName val="0"/>
-            <c:showPercent val="1"/>
-            <c:showBubbleSize val="0"/>
-            <c:showLeaderLines val="0"/>
-          </c:dLbls>
-          <c:cat>
-            <c:strRef>
-              <c:f>Sheet1!$A$2:$A$4</c:f>
-              <c:strCache>
-                <c:ptCount val="3"/>
-                <c:pt idx="0">
-                  <c:v>Top 3: $18</c:v>
-                </c:pt>
-                <c:pt idx="1">
-                  <c:v>Rest of top 10: $19</c:v>
-                </c:pt>
-                <c:pt idx="2">
-                  <c:v>Other 490: $63</c:v>
-                </c:pt>
-              </c:strCache>
-            </c:strRef>
-          </c:cat>
-          <c:val>
-            <c:numRef>
-              <c:f>Sheet1!$B$2:$B$4</c:f>
-              <c:numCache>
-                <c:ptCount val="3"/>
-                <c:pt idx="0">
-                  <c:v>18</c:v>
-                </c:pt>
-                <c:pt idx="1">
-                  <c:v>19</c:v>
-                </c:pt>
-                <c:pt idx="2">
-                  <c:v>63</c:v>
-                </c:pt>
-              </c:numCache>
-            </c:numRef>
-          </c:val>
-        </c:ser>
-        <c:firstSliceAng val="0"/>
-        <c:holeSize val="60"/>
-      </c:doughnutChart>
-      <c:spPr>
-        <a:noFill/>
-        <a:ln>
-          <a:noFill/>
-        </a:ln>
-        <a:effectLst/>
-      </c:spPr>
-    </c:plotArea>
-    <c:legend>
-      <c:legendPos val="b"/>
-      <c:overlay val="0"/>
-      <c:txPr>
-        <a:bodyPr/>
-        <a:lstStyle/>
-        <a:p>
-          <a:pPr>
-            <a:defRPr sz="800">
-              <a:solidFill>
-                <a:srgbClr val="E8E8EA"/>
-              </a:solidFill>
-            </a:defRPr>
-          </a:pPr>
-          <a:endParaRPr lang="en-US"/>
-        </a:p>
-      </c:txPr>
-    </c:legend>
-    <c:plotVisOnly val="1"/>
-    <c:dispBlanksAs val="span"/>
-  </c:chart>
-  <c:spPr>
-    <a:noFill/>
-    <a:ln>
-      <a:noFill/>
-    </a:ln>
-    <a:effectLst/>
-  </c:spPr>
-  <c:externalData r:id="rId1">
-    <c:autoUpdate val="0"/>
-  </c:externalData>
-</c:chartSpace>
-</file>
-
 <file path=ppt/notesMasters/notesMaster1.xml><?xml version="1.0" encoding="utf-8"?>
 <p:notesMaster xmlns:a="http://schemas.openxmlformats.org/drawingml/2006/main" xmlns:r="http://schemas.openxmlformats.org/officeDocument/2006/relationships" xmlns:p="http://schemas.openxmlformats.org/presentationml/2006/main">
   <p:cSld>
@@ -1067,7 +820,7 @@
           <a:p>
             <a:r>
               <a:rPr lang="en-US" dirty="0"/>
-              <a:t>Open here. The deck in one breath. Part one is what's happening right now: models became loop-running agents, tokens became a rationed input, and governments moved from regulating AI to debating who owns it. Part two is how markets reprice all of it: equities split the trade, the labor data started moving, financing moved into the bond market, and your benchmark quietly became an AI fund. Twelve slides, two parts, one question throughout: what does this do to portfolios. Keep the framing simple up top; the detail comes slide by slide.</a:t>
+              <a:t>Open here. The deck in one breath: the AI trade is evolving and we are still in the early stages of this transformation. Part one is what’s shifted so far: models became loop-running agents, tokens became a rationed input, and governments moved from regulating AI to debating who owns it. Part two is how markets are beginning to reprice: equities split the trade, the labor data started moving, and financing moved into the bond market. Eleven slides, two parts, one question throughout: what does this do to portfolios. Keep the framing simple up top; the detail comes slide by slide.</a:t>
             </a:r>
             <a:endParaRPr lang="en-US" dirty="0"/>
           </a:p>
@@ -1155,7 +908,7 @@
           <a:p>
             <a:r>
               <a:rPr lang="en-US" dirty="0"/>
-              <a:t>The so-what slide. Nobody in this room would deliberately put 37% of an equity sleeve in ten correlated names sharing one earnings driver, but a passive S&amp;P 500 allocation does precisely that: $37 of every $100. Manage it with four gauges, each paired with an action. Demand: capex guidance plus enterprise token budgets, the new same-store sales. Financing: CDS and new-issue spreads, per the bond slide, because a failed mega-deal would reprice AI equities within days. Rates: the roughly 4.5% 10-year, because long-duration AI cash flows and record IG supply both lean on rates staying contained. Concentration: top-10 share and the equal-weight-versus-cap-weight spread as the orderly preview of the disorderly version. Honest caveat: equal-weight won 2026 but lost 2024 and 2025, so the message is 'size the bet on purpose,' not 'sell megacaps.' Closing line is the deck's thesis in one sentence: you don't need a view on AGI, you need to know what your portfolio already believes.</a:t>
+              <a:t>The closer: the option value sitting behind the multiples, kept disciplined and flagged speculative. Embodiment: agentic loops in a body, walking a warehouse shift, so physical labor enters the token economy. Wheels: every robotaxi mile is metered inference and a city-scale demand pool for compute. Orbit: orbital compute removes the exact power-and-cooling constraints behind token rationing, and SpaceX is simultaneously the neocloud king and the launch monopolist, so if it happens it extends the most vertically integrated player in the stack. Proteins: frontier models lead biology benchmarks and AI-designed proteins make discovery compute-bound, so R&amp;D starts to look like capex. Every card is new compute demand: the Jevons curve extended a decade. These are not 2026 revenue items — they are the next decade’s demand curve, extending the early-stage thesis. Watch them like markets, not memes: launch cadence, fleet miles, design wins; gauges, not guidance.</a:t>
             </a:r>
             <a:endParaRPr lang="en-US" dirty="0"/>
           </a:p>
@@ -1243,7 +996,7 @@
           <a:p>
             <a:r>
               <a:rPr lang="en-US" dirty="0"/>
-              <a:t>The closer: the option value sitting behind the multiples, kept disciplined and flagged speculative. Embodiment: agentic loops in a body, walking a warehouse shift, so physical labor enters the token economy. Wheels: every robotaxi mile is metered inference and a city-scale demand pool for compute. Orbit: orbital compute removes the exact power-and-cooling constraints behind token rationing, and SpaceX is simultaneously the neocloud king and the launch monopolist, so if it happens it extends the most vertically integrated player in the stack. Proteins: frontier models lead biology benchmarks and AI-designed proteins make discovery compute-bound, so R&amp;D starts to look like capex. Every card is new compute demand: the Jevons curve extended a decade. Watch them like markets, not memes: launch cadence, fleet miles, design wins; gauges, not guidance.</a:t>
+              <a:t>Back matter. Canonical stamp: data as of June 2026, returns through the Jun 5–9 closes. Four source columns: market data, capex and financing, labor and policy, and the internal frontier review. Honesty notes to say out loud if asked: the Jevons relationship is illustrative, not measured; AI layoff attributions are self-reported by employers and may overstate causation; and the frontier items are speculative and appear in no company guidance. Where sources disagreed, the more conservative figure was used. End of deck.</a:t>
             </a:r>
             <a:endParaRPr lang="en-US" dirty="0"/>
           </a:p>
@@ -1267,94 +1020,6 @@
             <a:fld id="{F7021451-1387-4CA6-816F-3879F97B5CBC}" type="slidenum">
               <a:rPr lang="en-US"/>
               <a:t>11</a:t>
-            </a:fld>
-            <a:endParaRPr lang="en-US"/>
-          </a:p>
-        </p:txBody>
-      </p:sp>
-    </p:spTree>
-    <p:extLst>
-      <p:ext uri="{BB962C8B-B14F-4D97-AF65-F5344CB8AC3E}">
-        <p14:creationId xmlns:p14="http://schemas.microsoft.com/office/powerpoint/2010/main" val="1024086991"/>
-      </p:ext>
-    </p:extLst>
-  </p:cSld>
-  <p:clrMapOvr>
-    <a:masterClrMapping/>
-  </p:clrMapOvr>
-</p:notes>
-</file>
-
-<file path=ppt/notesSlides/notesSlide12.xml><?xml version="1.0" encoding="utf-8"?>
-<p:notes xmlns:a="http://schemas.openxmlformats.org/drawingml/2006/main" xmlns:r="http://schemas.openxmlformats.org/officeDocument/2006/relationships" xmlns:p="http://schemas.openxmlformats.org/presentationml/2006/main">
-  <p:cSld>
-    <p:spTree>
-      <p:nvGrpSpPr>
-        <p:cNvPr id="1" name=""/>
-        <p:cNvGrpSpPr/>
-        <p:nvPr/>
-      </p:nvGrpSpPr>
-      <p:grpSpPr>
-        <a:xfrm>
-          <a:off x="0" y="0"/>
-          <a:ext cx="0" cy="0"/>
-          <a:chOff x="0" y="0"/>
-          <a:chExt cx="0" cy="0"/>
-        </a:xfrm>
-      </p:grpSpPr>
-      <p:sp>
-        <p:nvSpPr>
-          <p:cNvPr id="2" name="Slide Image Placeholder 1"/>
-          <p:cNvSpPr>
-            <a:spLocks noGrp="1" noRot="1" noChangeAspect="1"/>
-          </p:cNvSpPr>
-          <p:nvPr>
-            <p:ph type="sldImg"/>
-          </p:nvPr>
-        </p:nvSpPr>
-        <p:spPr/>
-      </p:sp>
-      <p:sp>
-        <p:nvSpPr>
-          <p:cNvPr id="3" name="Notes Placeholder 2"/>
-          <p:cNvSpPr>
-            <a:spLocks noGrp="1"/>
-          </p:cNvSpPr>
-          <p:nvPr>
-            <p:ph type="body" idx="1"/>
-          </p:nvPr>
-        </p:nvSpPr>
-        <p:spPr/>
-        <p:txBody>
-          <a:bodyPr/>
-          <a:lstStyle/>
-          <a:p>
-            <a:r>
-              <a:rPr lang="en-US" dirty="0"/>
-              <a:t>Back matter. Canonical stamp: data as of June 2026, returns through the Jun 5–9 closes. Four source columns: market data, capex and financing, labor and policy, and the internal frontier review. Honesty notes to say out loud if asked: the Jevons relationship is illustrative, not measured; AI layoff attributions are self-reported by employers and may overstate causation; and the frontier items are speculative and appear in no company guidance. Where sources disagreed, the more conservative figure was used. End of deck.</a:t>
-            </a:r>
-            <a:endParaRPr lang="en-US" dirty="0"/>
-          </a:p>
-        </p:txBody>
-      </p:sp>
-      <p:sp>
-        <p:nvSpPr>
-          <p:cNvPr id="4" name="Slide Number Placeholder 3"/>
-          <p:cNvSpPr>
-            <a:spLocks noGrp="1"/>
-          </p:cNvSpPr>
-          <p:nvPr>
-            <p:ph type="sldNum" sz="quarter" idx="10"/>
-          </p:nvPr>
-        </p:nvSpPr>
-        <p:spPr/>
-        <p:txBody>
-          <a:bodyPr/>
-          <a:lstStyle/>
-          <a:p>
-            <a:fld id="{F7021451-1387-4CA6-816F-3879F97B5CBC}" type="slidenum">
-              <a:rPr lang="en-US"/>
-              <a:t>12</a:t>
             </a:fld>
             <a:endParaRPr lang="en-US"/>
           </a:p>
@@ -1419,7 +1084,7 @@
           <a:p>
             <a:r>
               <a:rPr lang="en-US" dirty="0"/>
-              <a:t>The thesis, and why this isn't 2023's hype cycle: three independent systems shifting in the same direction at once. CAPABILITY: Fable 5-class models swept functional SOTA; the unit of work moved from prompting outputs to designing self-correcting loops that run until done. Proof point: Anthropic's run rate went from about $3B in 2025 to about $47B in 2026. ECONOMICS: labs stopped subsidizing tokens and enterprises started rationing them; compute is now priced like a scarce commodity at every layer. Proof point: Google pays SpaceX about $920M a month to rent 110k GPUs, the market-clearing price of scarcity. POLICY: equity-tax proposals and pre-release reviews mean foundation models are treated as sovereign assets. Proof point: a floated one-time 50% tax on AI-lab equity to seed a public 'AI Dividends' fund. The banner is the line to read aloud: the chatbot's economics are exhausted, and the stack is reorganizing around token-burning agentic loops.</a:t>
+              <a:t>The thesis, and why this isn’t 2023’s hype cycle: three independent systems shifting in the same direction at once. CAPABILITY: Fable 5-class models swept functional SOTA; the unit of work moved from prompting outputs to designing self-correcting loops that run until done. Proof point: Anthropic’s run rate went from about $3B in 2025 to about $47B in 2026. ECONOMICS: labs stopped subsidizing tokens and enterprises started rationing them; compute is now priced like a scarce commodity at every layer. Proof point: Google pays SpaceX about $920M a month to rent 110k GPUs, the market-clearing price of scarcity. POLICY: equity-tax proposals and pre-release reviews mean foundation models are treated as sovereign assets. Proof point: a floated one-time 50% tax on AI-lab equity to seed a public ‘AI Dividends’ fund. The banner is the line to read aloud: the chatbot’s economics are exhausted, and the stack is reorganizing around token-burning agentic loops — and the repricing has only begun.</a:t>
             </a:r>
             <a:endParaRPr lang="en-US" dirty="0"/>
           </a:p>
@@ -1507,7 +1172,7 @@
           <a:p>
             <a:r>
               <a:rPr lang="en-US" dirty="0"/>
-              <a:t>Framework slide: four dimensions where the assisted-to-agentic transition shows up, and each reprices differently. Interface shifted from chat bubbles to background loops and parallel agents. Cost moved from flat seats to metered, usage-based token budgets. Output evolved from text and code snippets to disposable apps and whole software architectures. The bottleneck moved from human attention and typing speed to token limits and compute allocation. Use this as the map: every market-impact slide that follows is one of these four dimensions showing up in the data.</a:t>
+              <a:t>Framework slide: four dimensions where the assisted-to-agentic transition shows up, and each reprices differently. Interface shifted from chat bubbles to background loops and parallel agents. Cost moved from flat seats to metered, usage-based token budgets. Output evolved from text and code snippets to disposable apps and whole software architectures. The bottleneck moved from human attention and typing speed to token limits and compute allocation. Most enterprises are between columns, not at the destination — the transition is still unfolding. Use this as the map: every market-signal slide that follows is one of these four dimensions showing up in the data.</a:t>
             </a:r>
             <a:endParaRPr lang="en-US" dirty="0"/>
           </a:p>
@@ -1595,7 +1260,7 @@
           <a:p>
             <a:r>
               <a:rPr lang="en-US" dirty="0"/>
-              <a:t>The core slide of part one. The unit of work changed: from one-shot prompting to loops that try, fail, fix, and ship without a human in each cycle. Boris Cherny's line, 'my job is to write loops,' is the cleanest articulation. Then the Jevons paradox, coal in 1865 applied to compute: as agents make software effectively free to produce, we don't write the same software cheaper, we write categorically more of it: internal PDF summaries become dashboards become disposable single-use apps become giant research projects. The investment translation: efficiency improvements do not cap compute demand, they expand it. That is the demand engine behind everything in part two. Flag the curve as illustrative, not measured data.</a:t>
+              <a:t>The core slide of part one. The unit of work changed: from one-shot prompting to loops that try, fail, fix, and ship without a human in each cycle. Boris Cherny’s line, ‘my job is to write loops,’ is the cleanest articulation. Then the Jevons paradox, coal in 1865 applied to compute: as agents make software effectively free to produce, we don’t write the same software cheaper, we write categorically more of it: internal PDF summaries become dashboards become disposable single-use apps become giant research projects. The investment translation: efficiency improvements do not cap compute demand, they expand it. That is the demand engine behind everything in part two. Flag the curve as illustrative, not measured data.</a:t>
             </a:r>
             <a:endParaRPr lang="en-US" dirty="0"/>
           </a:p>
@@ -1683,7 +1348,7 @@
           <a:p>
             <a:r>
               <a:rPr lang="en-US" dirty="0"/>
-              <a:t>Three data points, one message: enterprises now treat tokens as a metered input with a budget line. Uber put a hard $1,500-per-month per-employee cap in place, replacing unlimited access. Walmart killed unlimited access for its 'Code Puppy' agentic dev tool and moved to per-seat budgets plus efficiency training. The third point is the supply side: SK Hynix sees no HBM relief before about 2030 even after doubling capacity, and Google's roughly $920M-a-month GPU rental is what scarcity costs when you don't own the capacity. The read is the investability point: token budgets are the new same-store sales, watch them the way retail analysts watch foot traffic.</a:t>
+              <a:t>Three data points, one message: enterprises now treat tokens as a metered input with a budget line. Uber put a hard $1,500-per-month per-employee cap in place, replacing unlimited access. Walmart killed unlimited access for its ‘Code Puppy’ agentic dev tool and moved to per-seat budgets plus efficiency training. The third point is the supply side: SK Hynix sees no HBM relief before about 2030 even after doubling capacity, and Google’s roughly $920M-a-month GPU rental is what scarcity costs when you don’t own the capacity. The read is the investability point: token rationing is the first real demand signal, and enterprise adoption is still in the early innings — watch token budgets the way retail analysts watch foot traffic.</a:t>
             </a:r>
             <a:endParaRPr lang="en-US" dirty="0"/>
           </a:p>
@@ -1771,7 +1436,7 @@
           <a:p>
             <a:r>
               <a:rPr lang="en-US" dirty="0"/>
-              <a:t>The policy slide, now global, and the KOSPI number lives here in the talk track rather than on the slide. United States: a voluntary 30-day NSA pre-release review (a calendar item before every frontier release), plus a floated one-time 50% tax on AI-lab equity to seed a public 'AI Dividends' fund, proposed by Sanders and echoed by Trump, which tells you the Overton window moved. South Korea: a presidential policy adviser, Kim Yong-beom, floated a 'citizen dividend' from AI and chip tax windfalls on May 12; the KOSPI dropped about 5.1% intraday before President Lee Jae-myung walked it back, and Samsung's union had already demanded 15% of chip-division profit in April. Sacks completes the triangle, warning government equity risks corporate-government fusion. The investable point: public-ownership is now a dilution tail risk that belongs in any model of lab equity, the IPO pipeline, and the hyperscalers holding lab stakes.</a:t>
+              <a:t>The policy slide, now global, and the KOSPI number lives here in the talk track rather than on the slide. United States: a voluntary 30-day NSA pre-release review (a calendar item before every frontier release), plus a floated one-time 50% tax on AI-lab equity to seed a public ‘AI Dividends’ fund, proposed by Sanders and echoed by Trump, which tells you the Overton window moved. South Korea: a presidential policy adviser, Kim Yong-beom, floated a ‘citizen dividend’ from AI and chip tax windfalls on May 12; the KOSPI dropped about 5.1% intraday before President Lee Jae-myung walked it back, and Samsung’s union had already demanded 15% of chip-division profit in April. Sacks completes the triangle, warning government equity risks corporate-government fusion. The investable point: public-ownership is now a dilution tail risk that belongs in any model of lab equity, the IPO pipeline, and the hyperscalers holding lab stakes.</a:t>
             </a:r>
             <a:endParaRPr lang="en-US" dirty="0"/>
           </a:p>
@@ -1859,7 +1524,7 @@
           <a:p>
             <a:r>
               <a:rPr lang="en-US" dirty="0"/>
-              <a:t>Part two opens with the equity scoreboard. Semis (SOXX) up about 80% year to date, the best run since 2000; equal-weight (RSP) up about 14%, beating cap-weight at about 11%; Mag-7 (MAGS) up about 6%, lagging; software (IGV) down about 10%, priced for disruption. That is roughly a 90-point spread inside one theme. The market is no longer trading 'AI yes or no'; it is trading position in the chain. The right rail is the concentration story: 37% of the index sits in ten names, double the 25-year norm; the forward multiple at 21.1x is elevated but not extreme, provided the AI earnings stream keeps compounding. Takeaway: value accrues where AI spend is revenue and erodes where AI is the threat.</a:t>
+              <a:t>Part two opens with the equity scoreboard. Semis (SOXX) up about 80% year to date, the best run since 2000; equal-weight (RSP) up about 14%, beating cap-weight at about 11%; Mag-7 (MAGS) up about 6%, lagging; software (IGV) down about 10%, priced for disruption. That is roughly a 90-point spread inside one theme. The market is no longer trading ‘AI yes or no’; it is trading position in the chain. The right rail is the concentration story: 37% of the index sits in ten names, double the 25-year norm; the forward multiple at 21.1x is elevated but not extreme, provided the AI earnings stream keeps compounding. Takeaway: value accrues where AI spend is revenue and erodes where AI is the threat — and the reallocation is still underway.</a:t>
             </a:r>
             <a:endParaRPr lang="en-US" dirty="0"/>
           </a:p>
@@ -1947,7 +1612,7 @@
           <a:p>
             <a:r>
               <a:rPr lang="en-US" dirty="0"/>
-              <a:t>The labor slide, with verified June 2026 data. The structural story on the left: a job stops being task execution and becomes orchestration of parallel agent loops; one person now outputs like a team. The data on the right: Challenger's May report made AI the number-one stated reason for layoffs for the first time, cited in about 40% of announced cuts, with 87.7k AI-attributed cuts year to date versus 54.8k in all of 2025, with the honest caveat that this is self-reported and some firms may be scapegoating AI. The entry level is where it bites: recent-grad unemployment at 5.6% versus 4.2% overall, per the NY Fed, with declining payrolls for the youngest AI-exposed cohort. Markets price labor twice: as a cost line agents deflate, and as the political trigger for the slide-6 ownership debate.</a:t>
+              <a:t>The labor slide, with verified June 2026 data. The structural story: a job stops being task execution and becomes orchestration of parallel agent loops; one person now outputs like a team. The data: Challenger’s May report made AI the number-one stated reason for layoffs for the first time, cited in about 40% of announced cuts, with 87.7k AI-attributed cuts year to date versus 54.8k in all of 2025, with the honest caveat that this is self-reported and some firms may be scapegoating AI. The entry level is where it bites: recent-grad unemployment at 5.6% versus 4.2% overall, per the NY Fed, with declining payrolls for the youngest AI-exposed cohort. Markets price labor twice: as a cost line agents deflate, and as the political trigger for the slide-6 ownership debate.</a:t>
             </a:r>
             <a:endParaRPr lang="en-US" dirty="0"/>
           </a:p>
@@ -2035,7 +1700,7 @@
           <a:p>
             <a:r>
               <a:rPr lang="en-US" dirty="0"/>
-              <a:t>Bonds, the whole arc on one slide. First the gap: Big-4 capex went from $410B to about $705B guided, up 72%, and that consumes roughly 94% of operating cash flow once you add dividends and buybacks; Big-4 free cash flow is at a decade low, Amazon goes outright negative ($200B capex versus about $140B operating cash flow), and Alphabet's FCF falls about 90% to roughly $8B. The self-funding megacap contract broke in 2026. Then the wave that filled the gap: Oracle $18B (Sep '25), Meta $30B (Oct '25, the largest non-M&amp;A IG deal on record), Alphabet $17.5B and Amazon $15B (Nov '25), and Oracle again $25B across eight tranches (Feb '26), totaling $105B-plus in six months, with Street consensus around $300B of AI-linked IG supply for full-year 2026. The signal layer: Oracle's 5-year CDS above about 125bp despite light leverage, so credit is already discriminating by funding capacity. The read for equity holders: credit reprices before equity, spreads move before earnings revisions. Balance sheets are still lightly levered versus IG norms, so this is not 2008 telecom, but the funding model changed permanently.</a:t>
+              <a:t>Bonds, the whole arc on one slide. First the gap: Big-4 capex went from $410B to about $705B guided, up 72%, and that consumes roughly 94% of operating cash flow once you add dividends and buybacks; Big-4 free cash flow is at a decade low, Amazon goes outright negative ($200B capex versus about $140B operating cash flow), and Alphabet’s FCF falls about 90% to roughly $8B. The self-funding megacap contract broke in 2026. Then the wave that filled the gap: Oracle $18B (Sep ’25), Meta $30B (Oct ’25, the largest non-M&amp;A IG deal on record), Alphabet $17.5B and Amazon $15B (Nov ’25), and Oracle again $25B across eight tranches (Feb ’26), totaling $105B-plus in six months, with Street consensus around $300B of AI-linked IG supply for full-year 2026. The signal layer: Oracle’s 5-year CDS above about 125bp despite light leverage, so credit is already discriminating by funding capacity. The read for equity holders: credit reprices before equity, spreads move before earnings revisions. Four gauges to watch: demand (capex + token budgets), financing (CDS and new-issue spreads), rates (~4.5% 10-year), concentration (top-10 share vs equal-weight spread). A failed mega-deal would reprice AI equities within days. Balance sheets are still lightly levered versus IG norms, so this is not 2008 telecom, but the funding model changed permanently.</a:t>
             </a:r>
             <a:endParaRPr lang="en-US" dirty="0"/>
           </a:p>
@@ -2539,7 +2204,7 @@
                 <a:ea typeface="Arial Black" pitchFamily="34" charset="-122"/>
                 <a:cs typeface="Arial Black" pitchFamily="34" charset="-120"/>
               </a:rPr>
-              <a:t>What's happening now, and how markets reprice.</a:t>
+              <a:t>The AI trade is evolving. We are still in the early stages.</a:t>
             </a:r>
             <a:endParaRPr lang="en-US" sz="1800" dirty="0"/>
           </a:p>
@@ -2778,7 +2443,7 @@
                 <a:ea typeface="Arial" pitchFamily="34" charset="-122"/>
                 <a:cs typeface="Arial" pitchFamily="34" charset="-120"/>
               </a:rPr>
-              <a:t>Detailed modern editorial 3D illustration, slight three-quarter camera angle, polished semi-realistic render, clean and bright: a bright, optimistic financial district lit against a deep near-black sky, its skyscrapers built from stacked GPU server-racks with glowing status lights; a candlestick stock-chart winds through the streets like a lit highway with green up-bars and red down-bars; a luminous ribbon-arrow of capital arcs from a domed bank building up into the single tallest tower; orange (#F6693D) and gold (#FFB800) accents with green (#00A854) and red (#CC0000) candlesticks. Deep near-black (#111114) studio background; brushed-silver and white materials; clean, bright, optimistic BlackRock-style institutional palette, never dark or ominous; soft even lighting, crisp focus, premium financial-tech mood; single hero subject with generous negative space; no text, no words, no logos, no watermark.</a:t>
+              <a:t>Clean flat infographic illustration, data-visualization aesthetic, modern and informational: three large circular icons in a gentle arc across the composition: a chip/neural-network icon in teal (#2BC4C4) for CAPABILITY, a metered-gauge icon in orange (#F6693D) for ECONOMICS, a governance-shield icon in gold (#FFB800) for POLICY; thin flowing connector lines in muted gray (#2A2A30) converge from all three into a single bright diamond convergence point at bottom-center; each icon sits inside a soft circular glow of its accent color; generous negative space. Deep near-black (#111114) background; clean vector-style shapes with soft gradients; muted institutional palette with selective bright accents; generous whitespace; organized layout with clear visual hierarchy; no photorealism, no dramatic lighting, no 3D renders; no text, no words, no logos, no watermark.</a:t>
             </a:r>
             <a:endParaRPr lang="en-US" sz="700" dirty="0"/>
           </a:p>
@@ -2913,7 +2578,7 @@
             <a:avLst/>
           </a:prstGeom>
           <a:solidFill>
-            <a:srgbClr val="9B7BE0"/>
+            <a:srgbClr val="E8478D"/>
           </a:solidFill>
           <a:ln/>
         </p:spPr>
@@ -2927,7 +2592,7 @@
         <p:spPr>
           <a:xfrm>
             <a:off x="841248" y="155448"/>
-            <a:ext cx="5943600" cy="274320"/>
+            <a:ext cx="3931920" cy="274320"/>
           </a:xfrm>
           <a:prstGeom prst="rect">
             <a:avLst/>
@@ -2945,13 +2610,13 @@
             <a:r>
               <a:rPr lang="en-US" sz="900" b="1" spc="300" kern="0" dirty="0">
                 <a:solidFill>
-                  <a:srgbClr val="9B7BE0"/>
-                </a:solidFill>
-                <a:latin typeface="Arial" pitchFamily="34" charset="0"/>
-                <a:ea typeface="Arial" pitchFamily="34" charset="-122"/>
-                <a:cs typeface="Arial" pitchFamily="34" charset="-120"/>
-              </a:rPr>
-              <a:t>02  ·  MARKET IMPACT  ·  PORTFOLIO</a:t>
+                  <a:srgbClr val="E8478D"/>
+                </a:solidFill>
+                <a:latin typeface="Arial" pitchFamily="34" charset="0"/>
+                <a:ea typeface="Arial" pitchFamily="34" charset="-122"/>
+                <a:cs typeface="Arial" pitchFamily="34" charset="-120"/>
+              </a:rPr>
+              <a:t>02  ·  EARLY MARKET SIGNALS  ·  THE FRONTIER</a:t>
             </a:r>
             <a:endParaRPr lang="en-US" sz="900" dirty="0"/>
           </a:p>
@@ -2960,6 +2625,45 @@
       <p:sp>
         <p:nvSpPr>
           <p:cNvPr id="4" name="Text 2"/>
+          <p:cNvSpPr/>
+          <p:nvPr/>
+        </p:nvSpPr>
+        <p:spPr>
+          <a:xfrm>
+            <a:off x="4937760" y="155448"/>
+            <a:ext cx="3749040" cy="274320"/>
+          </a:xfrm>
+          <a:prstGeom prst="rect">
+            <a:avLst/>
+          </a:prstGeom>
+          <a:noFill/>
+          <a:ln/>
+        </p:spPr>
+        <p:txBody>
+          <a:bodyPr wrap="square" lIns="0" tIns="0" rIns="0" bIns="0" rtlCol="0" anchor="ctr"/>
+          <a:lstStyle/>
+          <a:p>
+            <a:pPr algn="r" indent="0" marL="0">
+              <a:buNone/>
+            </a:pPr>
+            <a:r>
+              <a:rPr lang="en-US" sz="800" b="1" spc="200" kern="0" dirty="0">
+                <a:solidFill>
+                  <a:srgbClr val="9A9AA0"/>
+                </a:solidFill>
+                <a:latin typeface="Arial" pitchFamily="34" charset="0"/>
+                <a:ea typeface="Arial" pitchFamily="34" charset="-122"/>
+                <a:cs typeface="Arial" pitchFamily="34" charset="-120"/>
+              </a:rPr>
+              <a:t>FRONTIER WATCH · SPECULATIVE</a:t>
+            </a:r>
+            <a:endParaRPr lang="en-US" sz="800" dirty="0"/>
+          </a:p>
+        </p:txBody>
+      </p:sp>
+      <p:sp>
+        <p:nvSpPr>
+          <p:cNvPr id="5" name="Text 3"/>
           <p:cNvSpPr/>
           <p:nvPr/>
         </p:nvSpPr>
@@ -2982,7 +2686,7 @@
               <a:buNone/>
             </a:pPr>
             <a:r>
-              <a:rPr lang="en-US" sz="3000" b="1" dirty="0">
+              <a:rPr lang="en-US" sz="2400" b="1" dirty="0">
                 <a:solidFill>
                   <a:srgbClr val="FFFFFF"/>
                 </a:solidFill>
@@ -2990,15 +2694,15 @@
                 <a:ea typeface="Arial Black" pitchFamily="34" charset="-122"/>
                 <a:cs typeface="Arial Black" pitchFamily="34" charset="-120"/>
               </a:rPr>
-              <a:t>Your index fund is an AI fund now</a:t>
-            </a:r>
-            <a:endParaRPr lang="en-US" sz="3000" dirty="0"/>
-          </a:p>
-        </p:txBody>
-      </p:sp>
-      <p:sp>
-        <p:nvSpPr>
-          <p:cNvPr id="5" name="Text 3"/>
+              <a:t>Where the next decade of demand lives</a:t>
+            </a:r>
+            <a:endParaRPr lang="en-US" sz="2400" dirty="0"/>
+          </a:p>
+        </p:txBody>
+      </p:sp>
+      <p:sp>
+        <p:nvSpPr>
+          <p:cNvPr id="6" name="Text 4"/>
           <p:cNvSpPr/>
           <p:nvPr/>
         </p:nvSpPr>
@@ -3029,7 +2733,7 @@
                 <a:ea typeface="Arial" pitchFamily="34" charset="-122"/>
                 <a:cs typeface="Arial" pitchFamily="34" charset="-120"/>
               </a:rPr>
-              <a:t>A passive S&amp;P 500 allocation embeds an undiversified AI bet no one sized on purpose.</a:t>
+              <a:t>None of this is in 2026 guidance — all of it extends the Jevons demand curve by another decade.</a:t>
             </a:r>
             <a:endParaRPr lang="en-US" sz="1300" dirty="0"/>
           </a:p>
@@ -3037,92 +2741,119 @@
       </p:sp>
       <p:sp>
         <p:nvSpPr>
-          <p:cNvPr id="6" name="Text 4"/>
+          <p:cNvPr id="7" name="Shape 5"/>
           <p:cNvSpPr/>
           <p:nvPr/>
         </p:nvSpPr>
         <p:spPr>
           <a:xfrm>
             <a:off x="457200" y="1554480"/>
-            <a:ext cx="3657600" cy="256032"/>
-          </a:xfrm>
-          <a:prstGeom prst="rect">
-            <a:avLst/>
-          </a:prstGeom>
-          <a:noFill/>
-          <a:ln/>
-        </p:spPr>
-        <p:txBody>
-          <a:bodyPr wrap="square" lIns="0" tIns="0" rIns="0" bIns="0" rtlCol="0" anchor="b"/>
-          <a:lstStyle/>
-          <a:p>
-            <a:pPr indent="0" marL="0">
-              <a:buNone/>
-            </a:pPr>
-            <a:r>
-              <a:rPr lang="en-US" sz="1300" b="1" dirty="0">
-                <a:solidFill>
-                  <a:srgbClr val="E8E8EA"/>
-                </a:solidFill>
-                <a:latin typeface="Arial" pitchFamily="34" charset="0"/>
-                <a:ea typeface="Arial" pitchFamily="34" charset="-122"/>
-                <a:cs typeface="Arial" pitchFamily="34" charset="-120"/>
-              </a:rPr>
-              <a:t>Where $100 of S&amp;P 500 exposure sits</a:t>
-            </a:r>
-            <a:endParaRPr lang="en-US" sz="1300" dirty="0"/>
-          </a:p>
-        </p:txBody>
-      </p:sp>
-      <p:sp>
-        <p:nvSpPr>
-          <p:cNvPr id="7" name="Shape 5"/>
-          <p:cNvSpPr/>
-          <p:nvPr/>
-        </p:nvSpPr>
-        <p:spPr>
-          <a:xfrm>
-            <a:off x="457200" y="1856232"/>
-            <a:ext cx="3657600" cy="0"/>
-          </a:xfrm>
-          <a:prstGeom prst="line">
-            <a:avLst/>
-          </a:prstGeom>
-          <a:noFill/>
+            <a:ext cx="1920240" cy="1234440"/>
+          </a:xfrm>
+          <a:prstGeom prst="rect">
+            <a:avLst/>
+          </a:prstGeom>
+          <a:solidFill>
+            <a:srgbClr val="1E1E24"/>
+          </a:solidFill>
           <a:ln w="12700">
             <a:solidFill>
-              <a:srgbClr val="9B7BE0"/>
+              <a:srgbClr val="2A2A30"/>
             </a:solidFill>
-            <a:prstDash val="solid"/>
+            <a:prstDash val="dash"/>
           </a:ln>
         </p:spPr>
       </p:sp>
-      <p:graphicFrame>
-        <p:nvGraphicFramePr>
-          <p:cNvPr id="8" name="Chart 0" descr=""/>
-          <p:cNvGraphicFramePr/>
-          <p:nvPr/>
-        </p:nvGraphicFramePr>
-        <p:xfrm>
-          <a:off x="457200" y="1874520"/>
-          <a:ext cx="3657600" cy="2286000"/>
-        </p:xfrm>
-        <a:graphic xmlns:a="http://schemas.openxmlformats.org/drawingml/2006/main">
-          <a:graphicData uri="http://schemas.openxmlformats.org/drawingml/2006/chart">
-            <c:chart xmlns:c="http://schemas.openxmlformats.org/drawingml/2006/chart" r:id="rId1"/>
-          </a:graphicData>
-        </a:graphic>
-      </p:graphicFrame>
-      <p:sp>
-        <p:nvSpPr>
-          <p:cNvPr id="9" name="Text 6"/>
-          <p:cNvSpPr/>
-          <p:nvPr/>
-        </p:nvSpPr>
-        <p:spPr>
-          <a:xfrm>
-            <a:off x="1600200" y="2578608"/>
-            <a:ext cx="1371600" cy="365760"/>
+      <p:sp>
+        <p:nvSpPr>
+          <p:cNvPr id="8" name="Shape 6"/>
+          <p:cNvSpPr/>
+          <p:nvPr/>
+        </p:nvSpPr>
+        <p:spPr>
+          <a:xfrm>
+            <a:off x="457200" y="1554480"/>
+            <a:ext cx="310896" cy="36576"/>
+          </a:xfrm>
+          <a:prstGeom prst="rect">
+            <a:avLst/>
+          </a:prstGeom>
+          <a:solidFill>
+            <a:srgbClr val="E8478D"/>
+          </a:solidFill>
+          <a:ln/>
+        </p:spPr>
+      </p:sp>
+      <p:sp>
+        <p:nvSpPr>
+          <p:cNvPr id="9" name="Shape 7"/>
+          <p:cNvSpPr/>
+          <p:nvPr/>
+        </p:nvSpPr>
+        <p:spPr>
+          <a:xfrm>
+            <a:off x="457200" y="1554480"/>
+            <a:ext cx="36576" cy="310896"/>
+          </a:xfrm>
+          <a:prstGeom prst="rect">
+            <a:avLst/>
+          </a:prstGeom>
+          <a:solidFill>
+            <a:srgbClr val="E8478D"/>
+          </a:solidFill>
+          <a:ln/>
+        </p:spPr>
+      </p:sp>
+      <p:sp>
+        <p:nvSpPr>
+          <p:cNvPr id="10" name="Shape 8"/>
+          <p:cNvSpPr/>
+          <p:nvPr/>
+        </p:nvSpPr>
+        <p:spPr>
+          <a:xfrm>
+            <a:off x="2066544" y="2752344"/>
+            <a:ext cx="310896" cy="36576"/>
+          </a:xfrm>
+          <a:prstGeom prst="rect">
+            <a:avLst/>
+          </a:prstGeom>
+          <a:solidFill>
+            <a:srgbClr val="E8478D"/>
+          </a:solidFill>
+          <a:ln/>
+        </p:spPr>
+      </p:sp>
+      <p:sp>
+        <p:nvSpPr>
+          <p:cNvPr id="11" name="Shape 9"/>
+          <p:cNvSpPr/>
+          <p:nvPr/>
+        </p:nvSpPr>
+        <p:spPr>
+          <a:xfrm>
+            <a:off x="2340864" y="2478024"/>
+            <a:ext cx="36576" cy="310896"/>
+          </a:xfrm>
+          <a:prstGeom prst="rect">
+            <a:avLst/>
+          </a:prstGeom>
+          <a:solidFill>
+            <a:srgbClr val="E8478D"/>
+          </a:solidFill>
+          <a:ln/>
+        </p:spPr>
+      </p:sp>
+      <p:sp>
+        <p:nvSpPr>
+          <p:cNvPr id="12" name="Text 10"/>
+          <p:cNvSpPr/>
+          <p:nvPr/>
+        </p:nvSpPr>
+        <p:spPr>
+          <a:xfrm>
+            <a:off x="640080" y="1700784"/>
+            <a:ext cx="1554480" cy="219456"/>
           </a:xfrm>
           <a:prstGeom prst="rect">
             <a:avLst/>
@@ -3134,155 +2865,330 @@
           <a:bodyPr wrap="square" lIns="0" tIns="0" rIns="0" bIns="0" rtlCol="0" anchor="ctr"/>
           <a:lstStyle/>
           <a:p>
-            <a:pPr algn="ctr" indent="0" marL="0">
-              <a:buNone/>
-            </a:pPr>
-            <a:r>
-              <a:rPr lang="en-US" sz="1600" b="1" dirty="0">
+            <a:pPr indent="0" marL="0">
+              <a:buNone/>
+            </a:pPr>
+            <a:r>
+              <a:rPr lang="en-US" sz="900" b="1" spc="200" kern="0" dirty="0">
+                <a:solidFill>
+                  <a:srgbClr val="E8478D"/>
+                </a:solidFill>
+                <a:latin typeface="Arial" pitchFamily="34" charset="0"/>
+                <a:ea typeface="Arial" pitchFamily="34" charset="-122"/>
+                <a:cs typeface="Arial" pitchFamily="34" charset="-120"/>
+              </a:rPr>
+              <a:t>IMAGE  ·  embodiment</a:t>
+            </a:r>
+            <a:endParaRPr lang="en-US" sz="900" dirty="0"/>
+          </a:p>
+        </p:txBody>
+      </p:sp>
+      <p:sp>
+        <p:nvSpPr>
+          <p:cNvPr id="13" name="Text 11"/>
+          <p:cNvSpPr/>
+          <p:nvPr/>
+        </p:nvSpPr>
+        <p:spPr>
+          <a:xfrm>
+            <a:off x="640080" y="1975104"/>
+            <a:ext cx="1554480" cy="630936"/>
+          </a:xfrm>
+          <a:prstGeom prst="rect">
+            <a:avLst/>
+          </a:prstGeom>
+          <a:noFill/>
+          <a:ln/>
+        </p:spPr>
+        <p:txBody>
+          <a:bodyPr wrap="square" lIns="0" tIns="0" rIns="0" bIns="0" rtlCol="0" anchor="t"/>
+          <a:lstStyle/>
+          <a:p>
+            <a:pPr indent="0" marL="0">
+              <a:buNone/>
+            </a:pPr>
+            <a:r>
+              <a:rPr lang="en-US" sz="700" i="1" dirty="0">
+                <a:solidFill>
+                  <a:srgbClr val="8A8A90"/>
+                </a:solidFill>
+                <a:latin typeface="Arial" pitchFamily="34" charset="0"/>
+                <a:ea typeface="Arial" pitchFamily="34" charset="-122"/>
+                <a:cs typeface="Arial" pitchFamily="34" charset="-120"/>
+              </a:rPr>
+              <a:t>IMAGE PROMPT → save as frontier-embodiment.png</a:t>
+            </a:r>
+            <a:endParaRPr lang="en-US" sz="700" dirty="0"/>
+          </a:p>
+          <a:p>
+            <a:pPr indent="0" marL="0">
+              <a:buNone/>
+            </a:pPr>
+            <a:r>
+              <a:rPr lang="en-US" sz="850" dirty="0">
+                <a:solidFill>
+                  <a:srgbClr val="C9C9CE"/>
+                </a:solidFill>
+                <a:latin typeface="Arial" pitchFamily="34" charset="0"/>
+                <a:ea typeface="Arial" pitchFamily="34" charset="-122"/>
+                <a:cs typeface="Arial" pitchFamily="34" charset="-120"/>
+              </a:rPr>
+              <a:t>Clean flat infographic illustration, data-visualization aesthetic, modern and informational: a simple robotic-arm icon in magenta-pink (#E8478D) connected by a curved arrow to a circular loop symbol; a small warehouse/factory icon in muted gray (#3E3E46) in the background; abstract and diagrammatic; generous spacing. Deep near-black (#111114) background; clean vector-style shapes with soft gradients; muted institutional palette with selective bright accents; generous whitespace; organized layout with clear visual hierarchy; no photorealism, no dramatic lighting, no 3D renders; no text, no words, no logos, no watermark.</a:t>
+            </a:r>
+            <a:endParaRPr lang="en-US" sz="700" dirty="0"/>
+          </a:p>
+        </p:txBody>
+      </p:sp>
+      <p:sp>
+        <p:nvSpPr>
+          <p:cNvPr id="14" name="Shape 12"/>
+          <p:cNvSpPr/>
+          <p:nvPr/>
+        </p:nvSpPr>
+        <p:spPr>
+          <a:xfrm>
+            <a:off x="457200" y="2852928"/>
+            <a:ext cx="1920240" cy="1170432"/>
+          </a:xfrm>
+          <a:prstGeom prst="rect">
+            <a:avLst/>
+          </a:prstGeom>
+          <a:solidFill>
+            <a:srgbClr val="1C1C20"/>
+          </a:solidFill>
+          <a:ln/>
+        </p:spPr>
+      </p:sp>
+      <p:sp>
+        <p:nvSpPr>
+          <p:cNvPr id="15" name="Shape 13"/>
+          <p:cNvSpPr/>
+          <p:nvPr/>
+        </p:nvSpPr>
+        <p:spPr>
+          <a:xfrm>
+            <a:off x="457200" y="2852928"/>
+            <a:ext cx="1920240" cy="36576"/>
+          </a:xfrm>
+          <a:prstGeom prst="rect">
+            <a:avLst/>
+          </a:prstGeom>
+          <a:solidFill>
+            <a:srgbClr val="E8478D"/>
+          </a:solidFill>
+          <a:ln/>
+        </p:spPr>
+      </p:sp>
+      <p:sp>
+        <p:nvSpPr>
+          <p:cNvPr id="16" name="Text 14"/>
+          <p:cNvSpPr/>
+          <p:nvPr/>
+        </p:nvSpPr>
+        <p:spPr>
+          <a:xfrm>
+            <a:off x="566928" y="2962656"/>
+            <a:ext cx="1700784" cy="987552"/>
+          </a:xfrm>
+          <a:prstGeom prst="rect">
+            <a:avLst/>
+          </a:prstGeom>
+          <a:noFill/>
+          <a:ln/>
+        </p:spPr>
+        <p:txBody>
+          <a:bodyPr wrap="square" lIns="0" tIns="0" rIns="0" bIns="0" rtlCol="0" anchor="t"/>
+          <a:lstStyle/>
+          <a:p>
+            <a:pPr indent="0" marL="0">
+              <a:buNone/>
+            </a:pPr>
+            <a:r>
+              <a:rPr lang="en-US" sz="950" b="1" dirty="0">
                 <a:solidFill>
                   <a:srgbClr val="FFFFFF"/>
                 </a:solidFill>
-                <a:latin typeface="Arial Black" pitchFamily="34" charset="0"/>
-                <a:ea typeface="Arial Black" pitchFamily="34" charset="-122"/>
-                <a:cs typeface="Arial Black" pitchFamily="34" charset="-120"/>
-              </a:rPr>
-              <a:t>$37</a:t>
-            </a:r>
-            <a:endParaRPr lang="en-US" sz="1600" dirty="0"/>
-          </a:p>
-        </p:txBody>
-      </p:sp>
-      <p:sp>
-        <p:nvSpPr>
-          <p:cNvPr id="10" name="Text 7"/>
-          <p:cNvSpPr/>
-          <p:nvPr/>
-        </p:nvSpPr>
-        <p:spPr>
-          <a:xfrm>
-            <a:off x="1600200" y="2926080"/>
-            <a:ext cx="1371600" cy="182880"/>
-          </a:xfrm>
-          <a:prstGeom prst="rect">
-            <a:avLst/>
-          </a:prstGeom>
-          <a:noFill/>
-          <a:ln/>
-        </p:spPr>
-        <p:txBody>
-          <a:bodyPr wrap="square" lIns="0" tIns="0" rIns="0" bIns="0" rtlCol="0" anchor="ctr"/>
-          <a:lstStyle/>
-          <a:p>
-            <a:pPr algn="ctr" indent="0" marL="0">
-              <a:buNone/>
-            </a:pPr>
-            <a:r>
-              <a:rPr lang="en-US" sz="700" dirty="0">
-                <a:solidFill>
-                  <a:srgbClr val="9A9AA0"/>
-                </a:solidFill>
-                <a:latin typeface="Arial" pitchFamily="34" charset="0"/>
-                <a:ea typeface="Arial" pitchFamily="34" charset="-122"/>
-                <a:cs typeface="Arial" pitchFamily="34" charset="-120"/>
-              </a:rPr>
-              <a:t>in ten names</a:t>
-            </a:r>
-            <a:endParaRPr lang="en-US" sz="700" dirty="0"/>
-          </a:p>
-        </p:txBody>
-      </p:sp>
-      <p:sp>
-        <p:nvSpPr>
-          <p:cNvPr id="11" name="Text 8"/>
-          <p:cNvSpPr/>
-          <p:nvPr/>
-        </p:nvSpPr>
-        <p:spPr>
-          <a:xfrm>
-            <a:off x="4389120" y="1554480"/>
-            <a:ext cx="4297680" cy="256032"/>
-          </a:xfrm>
-          <a:prstGeom prst="rect">
-            <a:avLst/>
-          </a:prstGeom>
-          <a:noFill/>
-          <a:ln/>
-        </p:spPr>
-        <p:txBody>
-          <a:bodyPr wrap="square" lIns="0" tIns="0" rIns="0" bIns="0" rtlCol="0" anchor="b"/>
-          <a:lstStyle/>
-          <a:p>
-            <a:pPr indent="0" marL="0">
-              <a:buNone/>
-            </a:pPr>
-            <a:r>
-              <a:rPr lang="en-US" sz="1300" b="1" dirty="0">
-                <a:solidFill>
-                  <a:srgbClr val="E8E8EA"/>
-                </a:solidFill>
-                <a:latin typeface="Arial" pitchFamily="34" charset="0"/>
-                <a:ea typeface="Arial" pitchFamily="34" charset="-122"/>
-                <a:cs typeface="Arial" pitchFamily="34" charset="-120"/>
-              </a:rPr>
-              <a:t>Four gauges to watch</a:t>
-            </a:r>
-            <a:endParaRPr lang="en-US" sz="1300" dirty="0"/>
-          </a:p>
-        </p:txBody>
-      </p:sp>
-      <p:sp>
-        <p:nvSpPr>
-          <p:cNvPr id="12" name="Shape 9"/>
-          <p:cNvSpPr/>
-          <p:nvPr/>
-        </p:nvSpPr>
-        <p:spPr>
-          <a:xfrm>
-            <a:off x="4389120" y="1856232"/>
-            <a:ext cx="4297680" cy="0"/>
-          </a:xfrm>
-          <a:prstGeom prst="line">
-            <a:avLst/>
-          </a:prstGeom>
-          <a:noFill/>
+                <a:latin typeface="Arial" pitchFamily="34" charset="0"/>
+                <a:ea typeface="Arial" pitchFamily="34" charset="-122"/>
+                <a:cs typeface="Arial" pitchFamily="34" charset="-120"/>
+              </a:rPr>
+              <a:t>Embodiment.  </a:t>
+            </a:r>
+            <a:endParaRPr lang="en-US" sz="950" dirty="0"/>
+          </a:p>
+          <a:p>
+            <a:pPr indent="0" marL="0">
+              <a:buNone/>
+            </a:pPr>
+            <a:r>
+              <a:rPr lang="en-US" sz="800" dirty="0">
+                <a:solidFill>
+                  <a:srgbClr val="C9C9CE"/>
+                </a:solidFill>
+                <a:latin typeface="Arial" pitchFamily="34" charset="0"/>
+                <a:ea typeface="Arial" pitchFamily="34" charset="-122"/>
+                <a:cs typeface="Arial" pitchFamily="34" charset="-120"/>
+              </a:rPr>
+              <a:t>Agentic loops in a body — physical labor enters the token economy.</a:t>
+            </a:r>
+            <a:endParaRPr lang="en-US" sz="950" dirty="0"/>
+          </a:p>
+        </p:txBody>
+      </p:sp>
+      <p:sp>
+        <p:nvSpPr>
+          <p:cNvPr id="17" name="Shape 15"/>
+          <p:cNvSpPr/>
+          <p:nvPr/>
+        </p:nvSpPr>
+        <p:spPr>
+          <a:xfrm>
+            <a:off x="2514600" y="1554480"/>
+            <a:ext cx="1920240" cy="1234440"/>
+          </a:xfrm>
+          <a:prstGeom prst="rect">
+            <a:avLst/>
+          </a:prstGeom>
+          <a:solidFill>
+            <a:srgbClr val="1E1E24"/>
+          </a:solidFill>
           <a:ln w="12700">
             <a:solidFill>
-              <a:srgbClr val="9B7BE0"/>
+              <a:srgbClr val="2A2A30"/>
             </a:solidFill>
-            <a:prstDash val="solid"/>
+            <a:prstDash val="dash"/>
           </a:ln>
         </p:spPr>
       </p:sp>
       <p:sp>
         <p:nvSpPr>
-          <p:cNvPr id="13" name="Shape 10"/>
-          <p:cNvSpPr/>
-          <p:nvPr/>
-        </p:nvSpPr>
-        <p:spPr>
-          <a:xfrm>
-            <a:off x="4389120" y="1901952"/>
-            <a:ext cx="64008" cy="493776"/>
-          </a:xfrm>
-          <a:prstGeom prst="rect">
-            <a:avLst/>
-          </a:prstGeom>
-          <a:solidFill>
-            <a:srgbClr val="E5484D"/>
-          </a:solidFill>
-          <a:ln/>
-        </p:spPr>
-      </p:sp>
-      <p:sp>
-        <p:nvSpPr>
-          <p:cNvPr id="14" name="Text 11"/>
-          <p:cNvSpPr/>
-          <p:nvPr/>
-        </p:nvSpPr>
-        <p:spPr>
-          <a:xfrm>
-            <a:off x="4544568" y="1901952"/>
-            <a:ext cx="4142232" cy="530352"/>
+          <p:cNvPr id="18" name="Shape 16"/>
+          <p:cNvSpPr/>
+          <p:nvPr/>
+        </p:nvSpPr>
+        <p:spPr>
+          <a:xfrm>
+            <a:off x="2514600" y="1554480"/>
+            <a:ext cx="310896" cy="36576"/>
+          </a:xfrm>
+          <a:prstGeom prst="rect">
+            <a:avLst/>
+          </a:prstGeom>
+          <a:solidFill>
+            <a:srgbClr val="E8478D"/>
+          </a:solidFill>
+          <a:ln/>
+        </p:spPr>
+      </p:sp>
+      <p:sp>
+        <p:nvSpPr>
+          <p:cNvPr id="19" name="Shape 17"/>
+          <p:cNvSpPr/>
+          <p:nvPr/>
+        </p:nvSpPr>
+        <p:spPr>
+          <a:xfrm>
+            <a:off x="2514600" y="1554480"/>
+            <a:ext cx="36576" cy="310896"/>
+          </a:xfrm>
+          <a:prstGeom prst="rect">
+            <a:avLst/>
+          </a:prstGeom>
+          <a:solidFill>
+            <a:srgbClr val="E8478D"/>
+          </a:solidFill>
+          <a:ln/>
+        </p:spPr>
+      </p:sp>
+      <p:sp>
+        <p:nvSpPr>
+          <p:cNvPr id="20" name="Shape 18"/>
+          <p:cNvSpPr/>
+          <p:nvPr/>
+        </p:nvSpPr>
+        <p:spPr>
+          <a:xfrm>
+            <a:off x="4123944" y="2752344"/>
+            <a:ext cx="310896" cy="36576"/>
+          </a:xfrm>
+          <a:prstGeom prst="rect">
+            <a:avLst/>
+          </a:prstGeom>
+          <a:solidFill>
+            <a:srgbClr val="E8478D"/>
+          </a:solidFill>
+          <a:ln/>
+        </p:spPr>
+      </p:sp>
+      <p:sp>
+        <p:nvSpPr>
+          <p:cNvPr id="21" name="Shape 19"/>
+          <p:cNvSpPr/>
+          <p:nvPr/>
+        </p:nvSpPr>
+        <p:spPr>
+          <a:xfrm>
+            <a:off x="4398264" y="2478024"/>
+            <a:ext cx="36576" cy="310896"/>
+          </a:xfrm>
+          <a:prstGeom prst="rect">
+            <a:avLst/>
+          </a:prstGeom>
+          <a:solidFill>
+            <a:srgbClr val="E8478D"/>
+          </a:solidFill>
+          <a:ln/>
+        </p:spPr>
+      </p:sp>
+      <p:sp>
+        <p:nvSpPr>
+          <p:cNvPr id="22" name="Text 20"/>
+          <p:cNvSpPr/>
+          <p:nvPr/>
+        </p:nvSpPr>
+        <p:spPr>
+          <a:xfrm>
+            <a:off x="2697480" y="1700784"/>
+            <a:ext cx="1554480" cy="219456"/>
+          </a:xfrm>
+          <a:prstGeom prst="rect">
+            <a:avLst/>
+          </a:prstGeom>
+          <a:noFill/>
+          <a:ln/>
+        </p:spPr>
+        <p:txBody>
+          <a:bodyPr wrap="square" lIns="0" tIns="0" rIns="0" bIns="0" rtlCol="0" anchor="ctr"/>
+          <a:lstStyle/>
+          <a:p>
+            <a:pPr indent="0" marL="0">
+              <a:buNone/>
+            </a:pPr>
+            <a:r>
+              <a:rPr lang="en-US" sz="900" b="1" spc="200" kern="0" dirty="0">
+                <a:solidFill>
+                  <a:srgbClr val="E8478D"/>
+                </a:solidFill>
+                <a:latin typeface="Arial" pitchFamily="34" charset="0"/>
+                <a:ea typeface="Arial" pitchFamily="34" charset="-122"/>
+                <a:cs typeface="Arial" pitchFamily="34" charset="-120"/>
+              </a:rPr>
+              <a:t>IMAGE  ·  wheels</a:t>
+            </a:r>
+            <a:endParaRPr lang="en-US" sz="900" dirty="0"/>
+          </a:p>
+        </p:txBody>
+      </p:sp>
+      <p:sp>
+        <p:nvSpPr>
+          <p:cNvPr id="23" name="Text 21"/>
+          <p:cNvSpPr/>
+          <p:nvPr/>
+        </p:nvSpPr>
+        <p:spPr>
+          <a:xfrm>
+            <a:off x="2697480" y="1975104"/>
+            <a:ext cx="1554480" cy="630936"/>
           </a:xfrm>
           <a:prstGeom prst="rect">
             <a:avLst/>
@@ -3298,6 +3204,102 @@
               <a:buNone/>
             </a:pPr>
             <a:r>
+              <a:rPr lang="en-US" sz="700" i="1" dirty="0">
+                <a:solidFill>
+                  <a:srgbClr val="8A8A90"/>
+                </a:solidFill>
+                <a:latin typeface="Arial" pitchFamily="34" charset="0"/>
+                <a:ea typeface="Arial" pitchFamily="34" charset="-122"/>
+                <a:cs typeface="Arial" pitchFamily="34" charset="-120"/>
+              </a:rPr>
+              <a:t>IMAGE PROMPT → save as frontier-wheels.png</a:t>
+            </a:r>
+            <a:endParaRPr lang="en-US" sz="700" dirty="0"/>
+          </a:p>
+          <a:p>
+            <a:pPr indent="0" marL="0">
+              <a:buNone/>
+            </a:pPr>
+            <a:r>
+              <a:rPr lang="en-US" sz="850" dirty="0">
+                <a:solidFill>
+                  <a:srgbClr val="C9C9CE"/>
+                </a:solidFill>
+                <a:latin typeface="Arial" pitchFamily="34" charset="0"/>
+                <a:ea typeface="Arial" pitchFamily="34" charset="-122"/>
+                <a:cs typeface="Arial" pitchFamily="34" charset="-120"/>
+              </a:rPr>
+              <a:t>Clean flat infographic illustration, data-visualization aesthetic, modern and informational: a minimal car silhouette icon in magenta-pink (#E8478D) with small radiating sensor-cone lines; thin data-stream lines flow from a cloud/server icon above into the car; a subtle road grid in muted gray (#2A2A30) beneath; abstract and diagrammatic. Deep near-black (#111114) background; clean vector-style shapes with soft gradients; muted institutional palette with selective bright accents; generous whitespace; organized layout with clear visual hierarchy; no photorealism, no dramatic lighting, no 3D renders; no text, no words, no logos, no watermark.</a:t>
+            </a:r>
+            <a:endParaRPr lang="en-US" sz="700" dirty="0"/>
+          </a:p>
+        </p:txBody>
+      </p:sp>
+      <p:sp>
+        <p:nvSpPr>
+          <p:cNvPr id="24" name="Shape 22"/>
+          <p:cNvSpPr/>
+          <p:nvPr/>
+        </p:nvSpPr>
+        <p:spPr>
+          <a:xfrm>
+            <a:off x="2514600" y="2852928"/>
+            <a:ext cx="1920240" cy="1170432"/>
+          </a:xfrm>
+          <a:prstGeom prst="rect">
+            <a:avLst/>
+          </a:prstGeom>
+          <a:solidFill>
+            <a:srgbClr val="1C1C20"/>
+          </a:solidFill>
+          <a:ln/>
+        </p:spPr>
+      </p:sp>
+      <p:sp>
+        <p:nvSpPr>
+          <p:cNvPr id="25" name="Shape 23"/>
+          <p:cNvSpPr/>
+          <p:nvPr/>
+        </p:nvSpPr>
+        <p:spPr>
+          <a:xfrm>
+            <a:off x="2514600" y="2852928"/>
+            <a:ext cx="1920240" cy="36576"/>
+          </a:xfrm>
+          <a:prstGeom prst="rect">
+            <a:avLst/>
+          </a:prstGeom>
+          <a:solidFill>
+            <a:srgbClr val="E8478D"/>
+          </a:solidFill>
+          <a:ln/>
+        </p:spPr>
+      </p:sp>
+      <p:sp>
+        <p:nvSpPr>
+          <p:cNvPr id="26" name="Text 24"/>
+          <p:cNvSpPr/>
+          <p:nvPr/>
+        </p:nvSpPr>
+        <p:spPr>
+          <a:xfrm>
+            <a:off x="2624328" y="2962656"/>
+            <a:ext cx="1700784" cy="987552"/>
+          </a:xfrm>
+          <a:prstGeom prst="rect">
+            <a:avLst/>
+          </a:prstGeom>
+          <a:noFill/>
+          <a:ln/>
+        </p:spPr>
+        <p:txBody>
+          <a:bodyPr wrap="square" lIns="0" tIns="0" rIns="0" bIns="0" rtlCol="0" anchor="t"/>
+          <a:lstStyle/>
+          <a:p>
+            <a:pPr indent="0" marL="0">
+              <a:buNone/>
+            </a:pPr>
+            <a:r>
               <a:rPr lang="en-US" sz="950" b="1" dirty="0">
                 <a:solidFill>
                   <a:srgbClr val="FFFFFF"/>
@@ -3306,8 +3308,211 @@
                 <a:ea typeface="Arial" pitchFamily="34" charset="-122"/>
                 <a:cs typeface="Arial" pitchFamily="34" charset="-120"/>
               </a:rPr>
-              <a:t>Demand.  </a:t>
-            </a:r>
+              <a:t>Wheels.  </a:t>
+            </a:r>
+            <a:endParaRPr lang="en-US" sz="950" dirty="0"/>
+          </a:p>
+          <a:p>
+            <a:pPr indent="0" marL="0">
+              <a:buNone/>
+            </a:pPr>
+            <a:r>
+              <a:rPr lang="en-US" sz="800" dirty="0">
+                <a:solidFill>
+                  <a:srgbClr val="C9C9CE"/>
+                </a:solidFill>
+                <a:latin typeface="Arial" pitchFamily="34" charset="0"/>
+                <a:ea typeface="Arial" pitchFamily="34" charset="-122"/>
+                <a:cs typeface="Arial" pitchFamily="34" charset="-120"/>
+              </a:rPr>
+              <a:t>Robotaxis are inference on wheels — per-mile token economics.</a:t>
+            </a:r>
+            <a:endParaRPr lang="en-US" sz="950" dirty="0"/>
+          </a:p>
+        </p:txBody>
+      </p:sp>
+      <p:sp>
+        <p:nvSpPr>
+          <p:cNvPr id="27" name="Shape 25"/>
+          <p:cNvSpPr/>
+          <p:nvPr/>
+        </p:nvSpPr>
+        <p:spPr>
+          <a:xfrm>
+            <a:off x="4572000" y="1554480"/>
+            <a:ext cx="1920240" cy="1234440"/>
+          </a:xfrm>
+          <a:prstGeom prst="rect">
+            <a:avLst/>
+          </a:prstGeom>
+          <a:solidFill>
+            <a:srgbClr val="1E1E24"/>
+          </a:solidFill>
+          <a:ln w="12700">
+            <a:solidFill>
+              <a:srgbClr val="2A2A30"/>
+            </a:solidFill>
+            <a:prstDash val="dash"/>
+          </a:ln>
+        </p:spPr>
+      </p:sp>
+      <p:sp>
+        <p:nvSpPr>
+          <p:cNvPr id="28" name="Shape 26"/>
+          <p:cNvSpPr/>
+          <p:nvPr/>
+        </p:nvSpPr>
+        <p:spPr>
+          <a:xfrm>
+            <a:off x="4572000" y="1554480"/>
+            <a:ext cx="310896" cy="36576"/>
+          </a:xfrm>
+          <a:prstGeom prst="rect">
+            <a:avLst/>
+          </a:prstGeom>
+          <a:solidFill>
+            <a:srgbClr val="E8478D"/>
+          </a:solidFill>
+          <a:ln/>
+        </p:spPr>
+      </p:sp>
+      <p:sp>
+        <p:nvSpPr>
+          <p:cNvPr id="29" name="Shape 27"/>
+          <p:cNvSpPr/>
+          <p:nvPr/>
+        </p:nvSpPr>
+        <p:spPr>
+          <a:xfrm>
+            <a:off x="4572000" y="1554480"/>
+            <a:ext cx="36576" cy="310896"/>
+          </a:xfrm>
+          <a:prstGeom prst="rect">
+            <a:avLst/>
+          </a:prstGeom>
+          <a:solidFill>
+            <a:srgbClr val="E8478D"/>
+          </a:solidFill>
+          <a:ln/>
+        </p:spPr>
+      </p:sp>
+      <p:sp>
+        <p:nvSpPr>
+          <p:cNvPr id="30" name="Shape 28"/>
+          <p:cNvSpPr/>
+          <p:nvPr/>
+        </p:nvSpPr>
+        <p:spPr>
+          <a:xfrm>
+            <a:off x="6181344" y="2752344"/>
+            <a:ext cx="310896" cy="36576"/>
+          </a:xfrm>
+          <a:prstGeom prst="rect">
+            <a:avLst/>
+          </a:prstGeom>
+          <a:solidFill>
+            <a:srgbClr val="E8478D"/>
+          </a:solidFill>
+          <a:ln/>
+        </p:spPr>
+      </p:sp>
+      <p:sp>
+        <p:nvSpPr>
+          <p:cNvPr id="31" name="Shape 29"/>
+          <p:cNvSpPr/>
+          <p:nvPr/>
+        </p:nvSpPr>
+        <p:spPr>
+          <a:xfrm>
+            <a:off x="6455664" y="2478024"/>
+            <a:ext cx="36576" cy="310896"/>
+          </a:xfrm>
+          <a:prstGeom prst="rect">
+            <a:avLst/>
+          </a:prstGeom>
+          <a:solidFill>
+            <a:srgbClr val="E8478D"/>
+          </a:solidFill>
+          <a:ln/>
+        </p:spPr>
+      </p:sp>
+      <p:sp>
+        <p:nvSpPr>
+          <p:cNvPr id="32" name="Text 30"/>
+          <p:cNvSpPr/>
+          <p:nvPr/>
+        </p:nvSpPr>
+        <p:spPr>
+          <a:xfrm>
+            <a:off x="4754880" y="1700784"/>
+            <a:ext cx="1554480" cy="219456"/>
+          </a:xfrm>
+          <a:prstGeom prst="rect">
+            <a:avLst/>
+          </a:prstGeom>
+          <a:noFill/>
+          <a:ln/>
+        </p:spPr>
+        <p:txBody>
+          <a:bodyPr wrap="square" lIns="0" tIns="0" rIns="0" bIns="0" rtlCol="0" anchor="ctr"/>
+          <a:lstStyle/>
+          <a:p>
+            <a:pPr indent="0" marL="0">
+              <a:buNone/>
+            </a:pPr>
+            <a:r>
+              <a:rPr lang="en-US" sz="900" b="1" spc="200" kern="0" dirty="0">
+                <a:solidFill>
+                  <a:srgbClr val="E8478D"/>
+                </a:solidFill>
+                <a:latin typeface="Arial" pitchFamily="34" charset="0"/>
+                <a:ea typeface="Arial" pitchFamily="34" charset="-122"/>
+                <a:cs typeface="Arial" pitchFamily="34" charset="-120"/>
+              </a:rPr>
+              <a:t>IMAGE  ·  orbit</a:t>
+            </a:r>
+            <a:endParaRPr lang="en-US" sz="900" dirty="0"/>
+          </a:p>
+        </p:txBody>
+      </p:sp>
+      <p:sp>
+        <p:nvSpPr>
+          <p:cNvPr id="33" name="Text 31"/>
+          <p:cNvSpPr/>
+          <p:nvPr/>
+        </p:nvSpPr>
+        <p:spPr>
+          <a:xfrm>
+            <a:off x="4754880" y="1975104"/>
+            <a:ext cx="1554480" cy="630936"/>
+          </a:xfrm>
+          <a:prstGeom prst="rect">
+            <a:avLst/>
+          </a:prstGeom>
+          <a:noFill/>
+          <a:ln/>
+        </p:spPr>
+        <p:txBody>
+          <a:bodyPr wrap="square" lIns="0" tIns="0" rIns="0" bIns="0" rtlCol="0" anchor="t"/>
+          <a:lstStyle/>
+          <a:p>
+            <a:pPr indent="0" marL="0">
+              <a:buNone/>
+            </a:pPr>
+            <a:r>
+              <a:rPr lang="en-US" sz="700" i="1" dirty="0">
+                <a:solidFill>
+                  <a:srgbClr val="8A8A90"/>
+                </a:solidFill>
+                <a:latin typeface="Arial" pitchFamily="34" charset="0"/>
+                <a:ea typeface="Arial" pitchFamily="34" charset="-122"/>
+                <a:cs typeface="Arial" pitchFamily="34" charset="-120"/>
+              </a:rPr>
+              <a:t>IMAGE PROMPT → save as frontier-orbit.png</a:t>
+            </a:r>
+            <a:endParaRPr lang="en-US" sz="700" dirty="0"/>
+          </a:p>
+          <a:p>
             <a:pPr indent="0" marL="0">
               <a:buNone/>
             </a:pPr>
@@ -3320,42 +3525,262 @@
                 <a:ea typeface="Arial" pitchFamily="34" charset="-122"/>
                 <a:cs typeface="Arial" pitchFamily="34" charset="-120"/>
               </a:rPr>
-              <a:t>Capex guidance + enterprise token budgets — the new same-store sales.</a:t>
+              <a:t>Clean flat infographic illustration, data-visualization aesthetic, modern and informational: a simple ring/torus shape in magenta-pink (#E8478D) with small rectangular modules around its rim, floating above a gentle curved line representing Earth’s horizon in muted gray; small solar-panel wing shapes extend from the ring; abstract and diagrammatic. Deep near-black (#111114) background; clean vector-style shapes with soft gradients; muted institutional palette with selective bright accents; generous whitespace; organized layout with clear visual hierarchy; no photorealism, no dramatic lighting, no 3D renders; no text, no words, no logos, no watermark.</a:t>
+            </a:r>
+            <a:endParaRPr lang="en-US" sz="700" dirty="0"/>
+          </a:p>
+        </p:txBody>
+      </p:sp>
+      <p:sp>
+        <p:nvSpPr>
+          <p:cNvPr id="34" name="Shape 32"/>
+          <p:cNvSpPr/>
+          <p:nvPr/>
+        </p:nvSpPr>
+        <p:spPr>
+          <a:xfrm>
+            <a:off x="4572000" y="2852928"/>
+            <a:ext cx="1920240" cy="1170432"/>
+          </a:xfrm>
+          <a:prstGeom prst="rect">
+            <a:avLst/>
+          </a:prstGeom>
+          <a:solidFill>
+            <a:srgbClr val="1C1C20"/>
+          </a:solidFill>
+          <a:ln/>
+        </p:spPr>
+      </p:sp>
+      <p:sp>
+        <p:nvSpPr>
+          <p:cNvPr id="35" name="Shape 33"/>
+          <p:cNvSpPr/>
+          <p:nvPr/>
+        </p:nvSpPr>
+        <p:spPr>
+          <a:xfrm>
+            <a:off x="4572000" y="2852928"/>
+            <a:ext cx="1920240" cy="36576"/>
+          </a:xfrm>
+          <a:prstGeom prst="rect">
+            <a:avLst/>
+          </a:prstGeom>
+          <a:solidFill>
+            <a:srgbClr val="E8478D"/>
+          </a:solidFill>
+          <a:ln/>
+        </p:spPr>
+      </p:sp>
+      <p:sp>
+        <p:nvSpPr>
+          <p:cNvPr id="36" name="Text 34"/>
+          <p:cNvSpPr/>
+          <p:nvPr/>
+        </p:nvSpPr>
+        <p:spPr>
+          <a:xfrm>
+            <a:off x="4681728" y="2962656"/>
+            <a:ext cx="1700784" cy="987552"/>
+          </a:xfrm>
+          <a:prstGeom prst="rect">
+            <a:avLst/>
+          </a:prstGeom>
+          <a:noFill/>
+          <a:ln/>
+        </p:spPr>
+        <p:txBody>
+          <a:bodyPr wrap="square" lIns="0" tIns="0" rIns="0" bIns="0" rtlCol="0" anchor="t"/>
+          <a:lstStyle/>
+          <a:p>
+            <a:pPr indent="0" marL="0">
+              <a:buNone/>
+            </a:pPr>
+            <a:r>
+              <a:rPr lang="en-US" sz="950" b="1" dirty="0">
+                <a:solidFill>
+                  <a:srgbClr val="FFFFFF"/>
+                </a:solidFill>
+                <a:latin typeface="Arial" pitchFamily="34" charset="0"/>
+                <a:ea typeface="Arial" pitchFamily="34" charset="-122"/>
+                <a:cs typeface="Arial" pitchFamily="34" charset="-120"/>
+              </a:rPr>
+              <a:t>Orbit.  </a:t>
             </a:r>
             <a:endParaRPr lang="en-US" sz="950" dirty="0"/>
           </a:p>
-        </p:txBody>
-      </p:sp>
-      <p:sp>
-        <p:nvSpPr>
-          <p:cNvPr id="15" name="Shape 12"/>
-          <p:cNvSpPr/>
-          <p:nvPr/>
-        </p:nvSpPr>
-        <p:spPr>
-          <a:xfrm>
-            <a:off x="4389120" y="2450592"/>
-            <a:ext cx="64008" cy="493776"/>
-          </a:xfrm>
-          <a:prstGeom prst="rect">
-            <a:avLst/>
-          </a:prstGeom>
-          <a:solidFill>
-            <a:srgbClr val="F6693D"/>
-          </a:solidFill>
-          <a:ln/>
-        </p:spPr>
-      </p:sp>
-      <p:sp>
-        <p:nvSpPr>
-          <p:cNvPr id="16" name="Text 13"/>
-          <p:cNvSpPr/>
-          <p:nvPr/>
-        </p:nvSpPr>
-        <p:spPr>
-          <a:xfrm>
-            <a:off x="4544568" y="2450592"/>
-            <a:ext cx="4142232" cy="530352"/>
+          <a:p>
+            <a:pPr indent="0" marL="0">
+              <a:buNone/>
+            </a:pPr>
+            <a:r>
+              <a:rPr lang="en-US" sz="800" dirty="0">
+                <a:solidFill>
+                  <a:srgbClr val="C9C9CE"/>
+                </a:solidFill>
+                <a:latin typeface="Arial" pitchFamily="34" charset="0"/>
+                <a:ea typeface="Arial" pitchFamily="34" charset="-122"/>
+                <a:cs typeface="Arial" pitchFamily="34" charset="-120"/>
+              </a:rPr>
+              <a:t>Orbital compute escapes the grid constraint behind token rationing.</a:t>
+            </a:r>
+            <a:endParaRPr lang="en-US" sz="950" dirty="0"/>
+          </a:p>
+        </p:txBody>
+      </p:sp>
+      <p:sp>
+        <p:nvSpPr>
+          <p:cNvPr id="37" name="Shape 35"/>
+          <p:cNvSpPr/>
+          <p:nvPr/>
+        </p:nvSpPr>
+        <p:spPr>
+          <a:xfrm>
+            <a:off x="6629400" y="1554480"/>
+            <a:ext cx="1920240" cy="1234440"/>
+          </a:xfrm>
+          <a:prstGeom prst="rect">
+            <a:avLst/>
+          </a:prstGeom>
+          <a:solidFill>
+            <a:srgbClr val="1E1E24"/>
+          </a:solidFill>
+          <a:ln w="12700">
+            <a:solidFill>
+              <a:srgbClr val="2A2A30"/>
+            </a:solidFill>
+            <a:prstDash val="dash"/>
+          </a:ln>
+        </p:spPr>
+      </p:sp>
+      <p:sp>
+        <p:nvSpPr>
+          <p:cNvPr id="38" name="Shape 36"/>
+          <p:cNvSpPr/>
+          <p:nvPr/>
+        </p:nvSpPr>
+        <p:spPr>
+          <a:xfrm>
+            <a:off x="6629400" y="1554480"/>
+            <a:ext cx="310896" cy="36576"/>
+          </a:xfrm>
+          <a:prstGeom prst="rect">
+            <a:avLst/>
+          </a:prstGeom>
+          <a:solidFill>
+            <a:srgbClr val="E8478D"/>
+          </a:solidFill>
+          <a:ln/>
+        </p:spPr>
+      </p:sp>
+      <p:sp>
+        <p:nvSpPr>
+          <p:cNvPr id="39" name="Shape 37"/>
+          <p:cNvSpPr/>
+          <p:nvPr/>
+        </p:nvSpPr>
+        <p:spPr>
+          <a:xfrm>
+            <a:off x="6629400" y="1554480"/>
+            <a:ext cx="36576" cy="310896"/>
+          </a:xfrm>
+          <a:prstGeom prst="rect">
+            <a:avLst/>
+          </a:prstGeom>
+          <a:solidFill>
+            <a:srgbClr val="E8478D"/>
+          </a:solidFill>
+          <a:ln/>
+        </p:spPr>
+      </p:sp>
+      <p:sp>
+        <p:nvSpPr>
+          <p:cNvPr id="40" name="Shape 38"/>
+          <p:cNvSpPr/>
+          <p:nvPr/>
+        </p:nvSpPr>
+        <p:spPr>
+          <a:xfrm>
+            <a:off x="8238744" y="2752344"/>
+            <a:ext cx="310896" cy="36576"/>
+          </a:xfrm>
+          <a:prstGeom prst="rect">
+            <a:avLst/>
+          </a:prstGeom>
+          <a:solidFill>
+            <a:srgbClr val="E8478D"/>
+          </a:solidFill>
+          <a:ln/>
+        </p:spPr>
+      </p:sp>
+      <p:sp>
+        <p:nvSpPr>
+          <p:cNvPr id="41" name="Shape 39"/>
+          <p:cNvSpPr/>
+          <p:nvPr/>
+        </p:nvSpPr>
+        <p:spPr>
+          <a:xfrm>
+            <a:off x="8513064" y="2478024"/>
+            <a:ext cx="36576" cy="310896"/>
+          </a:xfrm>
+          <a:prstGeom prst="rect">
+            <a:avLst/>
+          </a:prstGeom>
+          <a:solidFill>
+            <a:srgbClr val="E8478D"/>
+          </a:solidFill>
+          <a:ln/>
+        </p:spPr>
+      </p:sp>
+      <p:sp>
+        <p:nvSpPr>
+          <p:cNvPr id="42" name="Text 40"/>
+          <p:cNvSpPr/>
+          <p:nvPr/>
+        </p:nvSpPr>
+        <p:spPr>
+          <a:xfrm>
+            <a:off x="6812280" y="1700784"/>
+            <a:ext cx="1554480" cy="219456"/>
+          </a:xfrm>
+          <a:prstGeom prst="rect">
+            <a:avLst/>
+          </a:prstGeom>
+          <a:noFill/>
+          <a:ln/>
+        </p:spPr>
+        <p:txBody>
+          <a:bodyPr wrap="square" lIns="0" tIns="0" rIns="0" bIns="0" rtlCol="0" anchor="ctr"/>
+          <a:lstStyle/>
+          <a:p>
+            <a:pPr indent="0" marL="0">
+              <a:buNone/>
+            </a:pPr>
+            <a:r>
+              <a:rPr lang="en-US" sz="900" b="1" spc="200" kern="0" dirty="0">
+                <a:solidFill>
+                  <a:srgbClr val="E8478D"/>
+                </a:solidFill>
+                <a:latin typeface="Arial" pitchFamily="34" charset="0"/>
+                <a:ea typeface="Arial" pitchFamily="34" charset="-122"/>
+                <a:cs typeface="Arial" pitchFamily="34" charset="-120"/>
+              </a:rPr>
+              <a:t>IMAGE  ·  proteins</a:t>
+            </a:r>
+            <a:endParaRPr lang="en-US" sz="900" dirty="0"/>
+          </a:p>
+        </p:txBody>
+      </p:sp>
+      <p:sp>
+        <p:nvSpPr>
+          <p:cNvPr id="43" name="Text 41"/>
+          <p:cNvSpPr/>
+          <p:nvPr/>
+        </p:nvSpPr>
+        <p:spPr>
+          <a:xfrm>
+            <a:off x="6812280" y="1975104"/>
+            <a:ext cx="1554480" cy="630936"/>
           </a:xfrm>
           <a:prstGeom prst="rect">
             <a:avLst/>
@@ -3371,6 +3796,102 @@
               <a:buNone/>
             </a:pPr>
             <a:r>
+              <a:rPr lang="en-US" sz="700" i="1" dirty="0">
+                <a:solidFill>
+                  <a:srgbClr val="8A8A90"/>
+                </a:solidFill>
+                <a:latin typeface="Arial" pitchFamily="34" charset="0"/>
+                <a:ea typeface="Arial" pitchFamily="34" charset="-122"/>
+                <a:cs typeface="Arial" pitchFamily="34" charset="-120"/>
+              </a:rPr>
+              <a:t>IMAGE PROMPT → save as frontier-proteins.png</a:t>
+            </a:r>
+            <a:endParaRPr lang="en-US" sz="700" dirty="0"/>
+          </a:p>
+          <a:p>
+            <a:pPr indent="0" marL="0">
+              <a:buNone/>
+            </a:pPr>
+            <a:r>
+              <a:rPr lang="en-US" sz="850" dirty="0">
+                <a:solidFill>
+                  <a:srgbClr val="C9C9CE"/>
+                </a:solidFill>
+                <a:latin typeface="Arial" pitchFamily="34" charset="0"/>
+                <a:ea typeface="Arial" pitchFamily="34" charset="-122"/>
+                <a:cs typeface="Arial" pitchFamily="34" charset="-120"/>
+              </a:rPr>
+              <a:t>Clean flat infographic illustration, data-visualization aesthetic, modern and informational: a stylized folded-protein ribbon shape in magenta-pink (#E8478D) and warm orange (#F6693D) with a small DNA helix icon nearby; a subtle connection line leads to a compute/chip icon; clean abstract molecular-diagram aesthetic. Deep near-black (#111114) background; clean vector-style shapes with soft gradients; muted institutional palette with selective bright accents; generous whitespace; organized layout with clear visual hierarchy; no photorealism, no dramatic lighting, no 3D renders; no text, no words, no logos, no watermark.</a:t>
+            </a:r>
+            <a:endParaRPr lang="en-US" sz="700" dirty="0"/>
+          </a:p>
+        </p:txBody>
+      </p:sp>
+      <p:sp>
+        <p:nvSpPr>
+          <p:cNvPr id="44" name="Shape 42"/>
+          <p:cNvSpPr/>
+          <p:nvPr/>
+        </p:nvSpPr>
+        <p:spPr>
+          <a:xfrm>
+            <a:off x="6629400" y="2852928"/>
+            <a:ext cx="1920240" cy="1170432"/>
+          </a:xfrm>
+          <a:prstGeom prst="rect">
+            <a:avLst/>
+          </a:prstGeom>
+          <a:solidFill>
+            <a:srgbClr val="1C1C20"/>
+          </a:solidFill>
+          <a:ln/>
+        </p:spPr>
+      </p:sp>
+      <p:sp>
+        <p:nvSpPr>
+          <p:cNvPr id="45" name="Shape 43"/>
+          <p:cNvSpPr/>
+          <p:nvPr/>
+        </p:nvSpPr>
+        <p:spPr>
+          <a:xfrm>
+            <a:off x="6629400" y="2852928"/>
+            <a:ext cx="1920240" cy="36576"/>
+          </a:xfrm>
+          <a:prstGeom prst="rect">
+            <a:avLst/>
+          </a:prstGeom>
+          <a:solidFill>
+            <a:srgbClr val="E8478D"/>
+          </a:solidFill>
+          <a:ln/>
+        </p:spPr>
+      </p:sp>
+      <p:sp>
+        <p:nvSpPr>
+          <p:cNvPr id="46" name="Text 44"/>
+          <p:cNvSpPr/>
+          <p:nvPr/>
+        </p:nvSpPr>
+        <p:spPr>
+          <a:xfrm>
+            <a:off x="6739128" y="2962656"/>
+            <a:ext cx="1700784" cy="987552"/>
+          </a:xfrm>
+          <a:prstGeom prst="rect">
+            <a:avLst/>
+          </a:prstGeom>
+          <a:noFill/>
+          <a:ln/>
+        </p:spPr>
+        <p:txBody>
+          <a:bodyPr wrap="square" lIns="0" tIns="0" rIns="0" bIns="0" rtlCol="0" anchor="t"/>
+          <a:lstStyle/>
+          <a:p>
+            <a:pPr indent="0" marL="0">
+              <a:buNone/>
+            </a:pPr>
+            <a:r>
               <a:rPr lang="en-US" sz="950" b="1" dirty="0">
                 <a:solidFill>
                   <a:srgbClr val="FFFFFF"/>
@@ -3379,13 +3900,16 @@
                 <a:ea typeface="Arial" pitchFamily="34" charset="-122"/>
                 <a:cs typeface="Arial" pitchFamily="34" charset="-120"/>
               </a:rPr>
-              <a:t>Financing.  </a:t>
-            </a:r>
-            <a:pPr indent="0" marL="0">
-              <a:buNone/>
-            </a:pPr>
-            <a:r>
-              <a:rPr lang="en-US" sz="850" dirty="0">
+              <a:t>Proteins.  </a:t>
+            </a:r>
+            <a:endParaRPr lang="en-US" sz="950" dirty="0"/>
+          </a:p>
+          <a:p>
+            <a:pPr indent="0" marL="0">
+              <a:buNone/>
+            </a:pPr>
+            <a:r>
+              <a:rPr lang="en-US" sz="800" dirty="0">
                 <a:solidFill>
                   <a:srgbClr val="C9C9CE"/>
                 </a:solidFill>
@@ -3393,7 +3917,7 @@
                 <a:ea typeface="Arial" pitchFamily="34" charset="-122"/>
                 <a:cs typeface="Arial" pitchFamily="34" charset="-120"/>
               </a:rPr>
-              <a:t>CDS and new-issue spreads; a failed mega-deal reprices AI equities in days.</a:t>
+              <a:t>AI-designed proteins make discovery compute-bound; R&amp;D looks like capex.</a:t>
             </a:r>
             <a:endParaRPr lang="en-US" sz="950" dirty="0"/>
           </a:p>
@@ -3401,153 +3925,7 @@
       </p:sp>
       <p:sp>
         <p:nvSpPr>
-          <p:cNvPr id="17" name="Shape 14"/>
-          <p:cNvSpPr/>
-          <p:nvPr/>
-        </p:nvSpPr>
-        <p:spPr>
-          <a:xfrm>
-            <a:off x="4389120" y="2999232"/>
-            <a:ext cx="64008" cy="493776"/>
-          </a:xfrm>
-          <a:prstGeom prst="rect">
-            <a:avLst/>
-          </a:prstGeom>
-          <a:solidFill>
-            <a:srgbClr val="FFB800"/>
-          </a:solidFill>
-          <a:ln/>
-        </p:spPr>
-      </p:sp>
-      <p:sp>
-        <p:nvSpPr>
-          <p:cNvPr id="18" name="Text 15"/>
-          <p:cNvSpPr/>
-          <p:nvPr/>
-        </p:nvSpPr>
-        <p:spPr>
-          <a:xfrm>
-            <a:off x="4544568" y="2999232"/>
-            <a:ext cx="4142232" cy="530352"/>
-          </a:xfrm>
-          <a:prstGeom prst="rect">
-            <a:avLst/>
-          </a:prstGeom>
-          <a:noFill/>
-          <a:ln/>
-        </p:spPr>
-        <p:txBody>
-          <a:bodyPr wrap="square" lIns="0" tIns="0" rIns="0" bIns="0" rtlCol="0" anchor="t"/>
-          <a:lstStyle/>
-          <a:p>
-            <a:pPr indent="0" marL="0">
-              <a:buNone/>
-            </a:pPr>
-            <a:r>
-              <a:rPr lang="en-US" sz="950" b="1" dirty="0">
-                <a:solidFill>
-                  <a:srgbClr val="FFFFFF"/>
-                </a:solidFill>
-                <a:latin typeface="Arial" pitchFamily="34" charset="0"/>
-                <a:ea typeface="Arial" pitchFamily="34" charset="-122"/>
-                <a:cs typeface="Arial" pitchFamily="34" charset="-120"/>
-              </a:rPr>
-              <a:t>Rates.  </a:t>
-            </a:r>
-            <a:pPr indent="0" marL="0">
-              <a:buNone/>
-            </a:pPr>
-            <a:r>
-              <a:rPr lang="en-US" sz="850" dirty="0">
-                <a:solidFill>
-                  <a:srgbClr val="C9C9CE"/>
-                </a:solidFill>
-                <a:latin typeface="Arial" pitchFamily="34" charset="0"/>
-                <a:ea typeface="Arial" pitchFamily="34" charset="-122"/>
-                <a:cs typeface="Arial" pitchFamily="34" charset="-120"/>
-              </a:rPr>
-              <a:t>~4.5% 10-yr UST; long-duration cash flows and record supply both lean on it.</a:t>
-            </a:r>
-            <a:endParaRPr lang="en-US" sz="950" dirty="0"/>
-          </a:p>
-        </p:txBody>
-      </p:sp>
-      <p:sp>
-        <p:nvSpPr>
-          <p:cNvPr id="19" name="Shape 16"/>
-          <p:cNvSpPr/>
-          <p:nvPr/>
-        </p:nvSpPr>
-        <p:spPr>
-          <a:xfrm>
-            <a:off x="4389120" y="3547872"/>
-            <a:ext cx="64008" cy="493776"/>
-          </a:xfrm>
-          <a:prstGeom prst="rect">
-            <a:avLst/>
-          </a:prstGeom>
-          <a:solidFill>
-            <a:srgbClr val="9B7BE0"/>
-          </a:solidFill>
-          <a:ln/>
-        </p:spPr>
-      </p:sp>
-      <p:sp>
-        <p:nvSpPr>
-          <p:cNvPr id="20" name="Text 17"/>
-          <p:cNvSpPr/>
-          <p:nvPr/>
-        </p:nvSpPr>
-        <p:spPr>
-          <a:xfrm>
-            <a:off x="4544568" y="3547872"/>
-            <a:ext cx="4142232" cy="530352"/>
-          </a:xfrm>
-          <a:prstGeom prst="rect">
-            <a:avLst/>
-          </a:prstGeom>
-          <a:noFill/>
-          <a:ln/>
-        </p:spPr>
-        <p:txBody>
-          <a:bodyPr wrap="square" lIns="0" tIns="0" rIns="0" bIns="0" rtlCol="0" anchor="t"/>
-          <a:lstStyle/>
-          <a:p>
-            <a:pPr indent="0" marL="0">
-              <a:buNone/>
-            </a:pPr>
-            <a:r>
-              <a:rPr lang="en-US" sz="950" b="1" dirty="0">
-                <a:solidFill>
-                  <a:srgbClr val="FFFFFF"/>
-                </a:solidFill>
-                <a:latin typeface="Arial" pitchFamily="34" charset="0"/>
-                <a:ea typeface="Arial" pitchFamily="34" charset="-122"/>
-                <a:cs typeface="Arial" pitchFamily="34" charset="-120"/>
-              </a:rPr>
-              <a:t>Concentration.  </a:t>
-            </a:r>
-            <a:pPr indent="0" marL="0">
-              <a:buNone/>
-            </a:pPr>
-            <a:r>
-              <a:rPr lang="en-US" sz="850" dirty="0">
-                <a:solidFill>
-                  <a:srgbClr val="C9C9CE"/>
-                </a:solidFill>
-                <a:latin typeface="Arial" pitchFamily="34" charset="0"/>
-                <a:ea typeface="Arial" pitchFamily="34" charset="-122"/>
-                <a:cs typeface="Arial" pitchFamily="34" charset="-120"/>
-              </a:rPr>
-              <a:t>Top-10 share and the equal-weight spread — trade the chain, not the theme.</a:t>
-            </a:r>
-            <a:endParaRPr lang="en-US" sz="950" dirty="0"/>
-          </a:p>
-        </p:txBody>
-      </p:sp>
-      <p:sp>
-        <p:nvSpPr>
-          <p:cNvPr id="21" name="Text 18"/>
+          <p:cNvPr id="47" name="Text 45"/>
           <p:cNvSpPr/>
           <p:nvPr/>
         </p:nvSpPr>
@@ -3570,7 +3948,7 @@
               <a:buNone/>
             </a:pPr>
             <a:r>
-              <a:rPr lang="en-US" sz="1050" b="1" dirty="0">
+              <a:rPr lang="en-US" sz="1000" b="1" dirty="0">
                 <a:solidFill>
                   <a:srgbClr val="FFFFFF"/>
                 </a:solidFill>
@@ -3578,13 +3956,13 @@
                 <a:ea typeface="Arial" pitchFamily="34" charset="-122"/>
                 <a:cs typeface="Arial" pitchFamily="34" charset="-120"/>
               </a:rPr>
-              <a:t>Bottom line: </a:t>
-            </a:r>
-            <a:pPr indent="0" marL="0">
-              <a:buNone/>
-            </a:pPr>
-            <a:r>
-              <a:rPr lang="en-US" sz="1050" dirty="0">
+              <a:t>These are not 2026 revenue items — they are the next decade’s demand curve, extending the early-stage thesis. </a:t>
+            </a:r>
+            <a:pPr indent="0" marL="0">
+              <a:buNone/>
+            </a:pPr>
+            <a:r>
+              <a:rPr lang="en-US" sz="1000" dirty="0">
                 <a:solidFill>
                   <a:srgbClr val="C9C9CE"/>
                 </a:solidFill>
@@ -3592,21 +3970,21 @@
                 <a:ea typeface="Arial" pitchFamily="34" charset="-122"/>
                 <a:cs typeface="Arial" pitchFamily="34" charset="-120"/>
               </a:rPr>
-              <a:t>you don't need a view on AGI; you need to know what your portfolio already believes.</a:t>
-            </a:r>
-            <a:endParaRPr lang="en-US" sz="1050" dirty="0"/>
-          </a:p>
-        </p:txBody>
-      </p:sp>
-      <p:sp>
-        <p:nvSpPr>
-          <p:cNvPr id="22" name="Text 19"/>
-          <p:cNvSpPr/>
-          <p:nvPr/>
-        </p:nvSpPr>
-        <p:spPr>
-          <a:xfrm>
-            <a:off x="457200" y="4352544"/>
+              <a:t>Watch them like markets, not memes: launch cadence, fleet miles, design wins.</a:t>
+            </a:r>
+            <a:endParaRPr lang="en-US" sz="1000" dirty="0"/>
+          </a:p>
+        </p:txBody>
+      </p:sp>
+      <p:sp>
+        <p:nvSpPr>
+          <p:cNvPr id="48" name="Text 46"/>
+          <p:cNvSpPr/>
+          <p:nvPr/>
+        </p:nvSpPr>
+        <p:spPr>
+          <a:xfrm>
+            <a:off x="457200" y="4334256"/>
             <a:ext cx="8229600" cy="384048"/>
           </a:xfrm>
           <a:prstGeom prst="rect">
@@ -3631,7 +4009,7 @@
                 <a:ea typeface="Arial" pitchFamily="34" charset="-122"/>
                 <a:cs typeface="Arial" pitchFamily="34" charset="-120"/>
               </a:rPr>
-              <a:t>Source: Index weights: S&amp;P Dow Jones Indices, slickcharts (Jun 2026); YTD returns: Morningstar (RSP), slickcharts (S&amp;P 500).</a:t>
+              <a:t>Source: Deck analysis building on Internal strategic review, “The 2026 AI Frontier” (Jun 2026). All frontier-watch items are speculative and appear in no company guidance.</a:t>
             </a:r>
             <a:endParaRPr lang="en-US" sz="700" dirty="0"/>
           </a:p>
@@ -3639,7 +4017,7 @@
       </p:sp>
       <p:sp>
         <p:nvSpPr>
-          <p:cNvPr id="23" name="Shape 20"/>
+          <p:cNvPr id="49" name="Shape 47"/>
           <p:cNvSpPr/>
           <p:nvPr/>
         </p:nvSpPr>
@@ -3659,7 +4037,7 @@
       </p:sp>
       <p:sp>
         <p:nvSpPr>
-          <p:cNvPr id="24" name="Shape 21"/>
+          <p:cNvPr id="50" name="Shape 48"/>
           <p:cNvSpPr/>
           <p:nvPr/>
         </p:nvSpPr>
@@ -3682,7 +4060,7 @@
       </p:sp>
       <p:sp>
         <p:nvSpPr>
-          <p:cNvPr id="25" name="Text 22"/>
+          <p:cNvPr id="51" name="Text 49"/>
           <p:cNvSpPr/>
           <p:nvPr/>
         </p:nvSpPr>
@@ -3721,7 +4099,7 @@
       </p:sp>
       <p:sp>
         <p:nvSpPr>
-          <p:cNvPr id="26" name="Text 23"/>
+          <p:cNvPr id="52" name="Text 50"/>
           <p:cNvSpPr/>
           <p:nvPr/>
         </p:nvSpPr>
@@ -3792,111 +4170,13 @@
       </p:grpSpPr>
       <p:sp>
         <p:nvSpPr>
-          <p:cNvPr id="2" name="Shape 0"/>
-          <p:cNvSpPr/>
-          <p:nvPr/>
-        </p:nvSpPr>
-        <p:spPr>
-          <a:xfrm>
-            <a:off x="457200" y="274320"/>
-            <a:ext cx="274320" cy="45720"/>
-          </a:xfrm>
-          <a:prstGeom prst="rect">
-            <a:avLst/>
-          </a:prstGeom>
-          <a:solidFill>
-            <a:srgbClr val="E8478D"/>
-          </a:solidFill>
-          <a:ln/>
-        </p:spPr>
-      </p:sp>
-      <p:sp>
-        <p:nvSpPr>
-          <p:cNvPr id="3" name="Text 1"/>
-          <p:cNvSpPr/>
-          <p:nvPr/>
-        </p:nvSpPr>
-        <p:spPr>
-          <a:xfrm>
-            <a:off x="841248" y="155448"/>
-            <a:ext cx="3931920" cy="274320"/>
-          </a:xfrm>
-          <a:prstGeom prst="rect">
-            <a:avLst/>
-          </a:prstGeom>
-          <a:noFill/>
-          <a:ln/>
-        </p:spPr>
-        <p:txBody>
-          <a:bodyPr wrap="square" lIns="0" tIns="0" rIns="0" bIns="0" rtlCol="0" anchor="ctr"/>
-          <a:lstStyle/>
-          <a:p>
-            <a:pPr indent="0" marL="0">
-              <a:buNone/>
-            </a:pPr>
-            <a:r>
-              <a:rPr lang="en-US" sz="900" b="1" spc="300" kern="0" dirty="0">
-                <a:solidFill>
-                  <a:srgbClr val="E8478D"/>
-                </a:solidFill>
-                <a:latin typeface="Arial" pitchFamily="34" charset="0"/>
-                <a:ea typeface="Arial" pitchFamily="34" charset="-122"/>
-                <a:cs typeface="Arial" pitchFamily="34" charset="-120"/>
-              </a:rPr>
-              <a:t>02  ·  MARKET IMPACT  ·  THE FRONTIER</a:t>
-            </a:r>
-            <a:endParaRPr lang="en-US" sz="900" dirty="0"/>
-          </a:p>
-        </p:txBody>
-      </p:sp>
-      <p:sp>
-        <p:nvSpPr>
-          <p:cNvPr id="4" name="Text 2"/>
-          <p:cNvSpPr/>
-          <p:nvPr/>
-        </p:nvSpPr>
-        <p:spPr>
-          <a:xfrm>
-            <a:off x="4937760" y="155448"/>
-            <a:ext cx="3749040" cy="274320"/>
-          </a:xfrm>
-          <a:prstGeom prst="rect">
-            <a:avLst/>
-          </a:prstGeom>
-          <a:noFill/>
-          <a:ln/>
-        </p:spPr>
-        <p:txBody>
-          <a:bodyPr wrap="square" lIns="0" tIns="0" rIns="0" bIns="0" rtlCol="0" anchor="ctr"/>
-          <a:lstStyle/>
-          <a:p>
-            <a:pPr algn="r" indent="0" marL="0">
-              <a:buNone/>
-            </a:pPr>
-            <a:r>
-              <a:rPr lang="en-US" sz="800" b="1" spc="200" kern="0" dirty="0">
-                <a:solidFill>
-                  <a:srgbClr val="9A9AA0"/>
-                </a:solidFill>
-                <a:latin typeface="Arial" pitchFamily="34" charset="0"/>
-                <a:ea typeface="Arial" pitchFamily="34" charset="-122"/>
-                <a:cs typeface="Arial" pitchFamily="34" charset="-120"/>
-              </a:rPr>
-              <a:t>FRONTIER WATCH · SPECULATIVE</a:t>
-            </a:r>
-            <a:endParaRPr lang="en-US" sz="800" dirty="0"/>
-          </a:p>
-        </p:txBody>
-      </p:sp>
-      <p:sp>
-        <p:nvSpPr>
-          <p:cNvPr id="5" name="Text 3"/>
-          <p:cNvSpPr/>
-          <p:nvPr/>
-        </p:nvSpPr>
-        <p:spPr>
-          <a:xfrm>
-            <a:off x="457200" y="438912"/>
+          <p:cNvPr id="2" name="Text 0"/>
+          <p:cNvSpPr/>
+          <p:nvPr/>
+        </p:nvSpPr>
+        <p:spPr>
+          <a:xfrm>
+            <a:off x="457200" y="320040"/>
             <a:ext cx="8229600" cy="640080"/>
           </a:xfrm>
           <a:prstGeom prst="rect">
@@ -3913,7 +4193,7 @@
               <a:buNone/>
             </a:pPr>
             <a:r>
-              <a:rPr lang="en-US" sz="2400" b="1" dirty="0">
+              <a:rPr lang="en-US" sz="2200" b="1" dirty="0">
                 <a:solidFill>
                   <a:srgbClr val="FFFFFF"/>
                 </a:solidFill>
@@ -3921,22 +4201,179 @@
                 <a:ea typeface="Arial Black" pitchFamily="34" charset="-122"/>
                 <a:cs typeface="Arial Black" pitchFamily="34" charset="-120"/>
               </a:rPr>
-              <a:t>The loop gets hands, wheels, wings, and proteins</a:t>
-            </a:r>
-            <a:endParaRPr lang="en-US" sz="2400" dirty="0"/>
-          </a:p>
-        </p:txBody>
-      </p:sp>
-      <p:sp>
-        <p:nvSpPr>
-          <p:cNvPr id="6" name="Text 4"/>
-          <p:cNvSpPr/>
-          <p:nvPr/>
-        </p:nvSpPr>
-        <p:spPr>
-          <a:xfrm>
-            <a:off x="457200" y="1078992"/>
-            <a:ext cx="8229600" cy="457200"/>
+              <a:t>Sources &amp; methodology</a:t>
+            </a:r>
+            <a:endParaRPr lang="en-US" sz="2200" dirty="0"/>
+          </a:p>
+        </p:txBody>
+      </p:sp>
+      <p:sp>
+        <p:nvSpPr>
+          <p:cNvPr id="3" name="Shape 1"/>
+          <p:cNvSpPr/>
+          <p:nvPr/>
+        </p:nvSpPr>
+        <p:spPr>
+          <a:xfrm>
+            <a:off x="457200" y="896112"/>
+            <a:ext cx="2377440" cy="347472"/>
+          </a:xfrm>
+          <a:prstGeom prst="rect">
+            <a:avLst/>
+          </a:prstGeom>
+          <a:solidFill>
+            <a:srgbClr val="F6693D"/>
+          </a:solidFill>
+          <a:ln/>
+        </p:spPr>
+      </p:sp>
+      <p:sp>
+        <p:nvSpPr>
+          <p:cNvPr id="4" name="Text 2"/>
+          <p:cNvSpPr/>
+          <p:nvPr/>
+        </p:nvSpPr>
+        <p:spPr>
+          <a:xfrm>
+            <a:off x="457200" y="896112"/>
+            <a:ext cx="2377440" cy="347472"/>
+          </a:xfrm>
+          <a:prstGeom prst="rect">
+            <a:avLst/>
+          </a:prstGeom>
+          <a:noFill/>
+          <a:ln/>
+        </p:spPr>
+        <p:txBody>
+          <a:bodyPr wrap="square" lIns="0" tIns="0" rIns="0" bIns="0" rtlCol="0" anchor="ctr"/>
+          <a:lstStyle/>
+          <a:p>
+            <a:pPr algn="ctr" indent="0" marL="0">
+              <a:buNone/>
+            </a:pPr>
+            <a:r>
+              <a:rPr lang="en-US" sz="1050" b="1" spc="100" kern="0" dirty="0">
+                <a:solidFill>
+                  <a:srgbClr val="000000"/>
+                </a:solidFill>
+                <a:latin typeface="Arial" pitchFamily="34" charset="0"/>
+                <a:ea typeface="Arial" pitchFamily="34" charset="-122"/>
+                <a:cs typeface="Arial" pitchFamily="34" charset="-120"/>
+              </a:rPr>
+              <a:t>DATA AS OF JUNE 2026</a:t>
+            </a:r>
+            <a:endParaRPr lang="en-US" sz="1050" dirty="0"/>
+          </a:p>
+        </p:txBody>
+      </p:sp>
+      <p:sp>
+        <p:nvSpPr>
+          <p:cNvPr id="5" name="Text 3"/>
+          <p:cNvSpPr/>
+          <p:nvPr/>
+        </p:nvSpPr>
+        <p:spPr>
+          <a:xfrm>
+            <a:off x="3017520" y="896112"/>
+            <a:ext cx="5669280" cy="384048"/>
+          </a:xfrm>
+          <a:prstGeom prst="rect">
+            <a:avLst/>
+          </a:prstGeom>
+          <a:noFill/>
+          <a:ln/>
+        </p:spPr>
+        <p:txBody>
+          <a:bodyPr wrap="square" lIns="0" tIns="0" rIns="0" bIns="0" rtlCol="0" anchor="ctr"/>
+          <a:lstStyle/>
+          <a:p>
+            <a:pPr indent="0" marL="0">
+              <a:buNone/>
+            </a:pPr>
+            <a:r>
+              <a:rPr lang="en-US" sz="850" dirty="0">
+                <a:solidFill>
+                  <a:srgbClr val="9A9AA0"/>
+                </a:solidFill>
+                <a:latin typeface="Arial" pitchFamily="34" charset="0"/>
+                <a:ea typeface="Arial" pitchFamily="34" charset="-122"/>
+                <a:cs typeface="Arial" pitchFamily="34" charset="-120"/>
+              </a:rPr>
+              <a:t>All return figures are YTD total returns through the most recent available close (Jun 5–9, 2026, unless noted). Index and market-cap figures as of early June 2026.</a:t>
+            </a:r>
+            <a:endParaRPr lang="en-US" sz="850" dirty="0"/>
+          </a:p>
+        </p:txBody>
+      </p:sp>
+      <p:sp>
+        <p:nvSpPr>
+          <p:cNvPr id="6" name="Shape 4"/>
+          <p:cNvSpPr/>
+          <p:nvPr/>
+        </p:nvSpPr>
+        <p:spPr>
+          <a:xfrm>
+            <a:off x="457200" y="1444752"/>
+            <a:ext cx="2057400" cy="219456"/>
+          </a:xfrm>
+          <a:prstGeom prst="rect">
+            <a:avLst/>
+          </a:prstGeom>
+          <a:solidFill>
+            <a:srgbClr val="FFB800"/>
+          </a:solidFill>
+          <a:ln/>
+        </p:spPr>
+      </p:sp>
+      <p:sp>
+        <p:nvSpPr>
+          <p:cNvPr id="7" name="Text 5"/>
+          <p:cNvSpPr/>
+          <p:nvPr/>
+        </p:nvSpPr>
+        <p:spPr>
+          <a:xfrm>
+            <a:off x="457200" y="1444752"/>
+            <a:ext cx="2057400" cy="219456"/>
+          </a:xfrm>
+          <a:prstGeom prst="rect">
+            <a:avLst/>
+          </a:prstGeom>
+          <a:noFill/>
+          <a:ln/>
+        </p:spPr>
+        <p:txBody>
+          <a:bodyPr wrap="square" lIns="0" tIns="0" rIns="0" bIns="0" rtlCol="0" anchor="ctr"/>
+          <a:lstStyle/>
+          <a:p>
+            <a:pPr algn="ctr" indent="0" marL="0">
+              <a:buNone/>
+            </a:pPr>
+            <a:r>
+              <a:rPr lang="en-US" sz="750" b="1" spc="100" kern="0" dirty="0">
+                <a:solidFill>
+                  <a:srgbClr val="000000"/>
+                </a:solidFill>
+                <a:latin typeface="Arial" pitchFamily="34" charset="0"/>
+                <a:ea typeface="Arial" pitchFamily="34" charset="-122"/>
+                <a:cs typeface="Arial" pitchFamily="34" charset="-120"/>
+              </a:rPr>
+              <a:t>MARKET DATA</a:t>
+            </a:r>
+            <a:endParaRPr lang="en-US" sz="750" dirty="0"/>
+          </a:p>
+        </p:txBody>
+      </p:sp>
+      <p:sp>
+        <p:nvSpPr>
+          <p:cNvPr id="8" name="Text 6"/>
+          <p:cNvSpPr/>
+          <p:nvPr/>
+        </p:nvSpPr>
+        <p:spPr>
+          <a:xfrm>
+            <a:off x="493776" y="1737360"/>
+            <a:ext cx="1993392" cy="2194560"/>
           </a:xfrm>
           <a:prstGeom prst="rect">
             <a:avLst/>
@@ -3948,68 +4385,90 @@
           <a:bodyPr wrap="square" lIns="0" tIns="0" rIns="0" bIns="0" rtlCol="0" anchor="t"/>
           <a:lstStyle/>
           <a:p>
-            <a:pPr indent="0" marL="0">
-              <a:buNone/>
-            </a:pPr>
-            <a:r>
-              <a:rPr lang="en-US" sz="1300" dirty="0">
-                <a:solidFill>
-                  <a:srgbClr val="9A9AA0"/>
-                </a:solidFill>
-                <a:latin typeface="Arial" pitchFamily="34" charset="0"/>
-                <a:ea typeface="Arial" pitchFamily="34" charset="-122"/>
-                <a:cs typeface="Arial" pitchFamily="34" charset="-120"/>
-              </a:rPr>
-              <a:t>None of this is in 2026 guidance — all of it extends the Jevons demand curve by another decade.</a:t>
-            </a:r>
-            <a:endParaRPr lang="en-US" sz="1300" dirty="0"/>
-          </a:p>
-        </p:txBody>
-      </p:sp>
-      <p:sp>
-        <p:nvSpPr>
-          <p:cNvPr id="7" name="Shape 5"/>
-          <p:cNvSpPr/>
-          <p:nvPr/>
-        </p:nvSpPr>
-        <p:spPr>
-          <a:xfrm>
-            <a:off x="457200" y="1554480"/>
-            <a:ext cx="2011680" cy="1234440"/>
-          </a:xfrm>
-          <a:prstGeom prst="rect">
-            <a:avLst/>
-          </a:prstGeom>
-          <a:solidFill>
-            <a:srgbClr val="1E1E24"/>
-          </a:solidFill>
-          <a:ln w="12700">
-            <a:solidFill>
-              <a:srgbClr val="2A2A30"/>
-            </a:solidFill>
-            <a:prstDash val="dash"/>
-          </a:ln>
-        </p:spPr>
-      </p:sp>
-      <p:sp>
-        <p:nvSpPr>
-          <p:cNvPr id="8" name="Shape 6"/>
-          <p:cNvSpPr/>
-          <p:nvPr/>
-        </p:nvSpPr>
-        <p:spPr>
-          <a:xfrm>
-            <a:off x="457200" y="1554480"/>
-            <a:ext cx="310896" cy="36576"/>
-          </a:xfrm>
-          <a:prstGeom prst="rect">
-            <a:avLst/>
-          </a:prstGeom>
-          <a:solidFill>
-            <a:srgbClr val="E8478D"/>
-          </a:solidFill>
-          <a:ln/>
-        </p:spPr>
+            <a:pPr marL="88900" indent="-88900">
+              <a:spcAft>
+                <a:spcPts val="400"/>
+              </a:spcAft>
+              <a:buSzPct val="100000"/>
+              <a:buChar char="•"/>
+            </a:pPr>
+            <a:r>
+              <a:rPr lang="en-US" sz="720" dirty="0">
+                <a:solidFill>
+                  <a:srgbClr val="C9C9CE"/>
+                </a:solidFill>
+                <a:latin typeface="Arial" pitchFamily="34" charset="0"/>
+                <a:ea typeface="Arial" pitchFamily="34" charset="-122"/>
+                <a:cs typeface="Arial" pitchFamily="34" charset="-120"/>
+              </a:rPr>
+              <a:t>ETF returns &amp; stats: stockanalysis.com (SOXX, IGV); Morningstar / Yahoo Finance (RSP, MAGS)</a:t>
+            </a:r>
+            <a:endParaRPr lang="en-US" sz="720" dirty="0"/>
+          </a:p>
+          <a:p>
+            <a:pPr marL="88900" indent="-88900">
+              <a:spcAft>
+                <a:spcPts val="400"/>
+              </a:spcAft>
+              <a:buSzPct val="100000"/>
+              <a:buChar char="•"/>
+            </a:pPr>
+            <a:r>
+              <a:rPr lang="en-US" sz="720" dirty="0">
+                <a:solidFill>
+                  <a:srgbClr val="C9C9CE"/>
+                </a:solidFill>
+                <a:latin typeface="Arial" pitchFamily="34" charset="0"/>
+                <a:ea typeface="Arial" pitchFamily="34" charset="-122"/>
+                <a:cs typeface="Arial" pitchFamily="34" charset="-120"/>
+              </a:rPr>
+              <a:t>Index returns &amp; weights: slickcharts.com; S&amp;P Dow Jones Indices; MacroMicro</a:t>
+            </a:r>
+            <a:endParaRPr lang="en-US" sz="720" dirty="0"/>
+          </a:p>
+          <a:p>
+            <a:pPr marL="88900" indent="-88900">
+              <a:spcAft>
+                <a:spcPts val="400"/>
+              </a:spcAft>
+              <a:buSzPct val="100000"/>
+              <a:buChar char="•"/>
+            </a:pPr>
+            <a:r>
+              <a:rPr lang="en-US" sz="720" dirty="0">
+                <a:solidFill>
+                  <a:srgbClr val="C9C9CE"/>
+                </a:solidFill>
+                <a:latin typeface="Arial" pitchFamily="34" charset="0"/>
+                <a:ea typeface="Arial" pitchFamily="34" charset="-122"/>
+                <a:cs typeface="Arial" pitchFamily="34" charset="-120"/>
+              </a:rPr>
+              <a:t>Market caps: companiesmarketcap.com; Motley Fool research (Jun 2026)</a:t>
+            </a:r>
+            <a:endParaRPr lang="en-US" sz="720" dirty="0"/>
+          </a:p>
+          <a:p>
+            <a:pPr marL="88900" indent="-88900">
+              <a:spcAft>
+                <a:spcPts val="400"/>
+              </a:spcAft>
+              <a:buSzPct val="100000"/>
+              <a:buChar char="•"/>
+            </a:pPr>
+            <a:r>
+              <a:rPr lang="en-US" sz="720" dirty="0">
+                <a:solidFill>
+                  <a:srgbClr val="C9C9CE"/>
+                </a:solidFill>
+                <a:latin typeface="Arial" pitchFamily="34" charset="0"/>
+                <a:ea typeface="Arial" pitchFamily="34" charset="-122"/>
+                <a:cs typeface="Arial" pitchFamily="34" charset="-120"/>
+              </a:rPr>
+              <a:t>Valuations: FactSet Earnings Insight; rates: US Treasury / FRED; CNBC (Jun 5, 2026)</a:t>
+            </a:r>
+            <a:endParaRPr lang="en-US" sz="720" dirty="0"/>
+          </a:p>
+        </p:txBody>
       </p:sp>
       <p:sp>
         <p:nvSpPr>
@@ -4019,68 +4478,28 @@
         </p:nvSpPr>
         <p:spPr>
           <a:xfrm>
-            <a:off x="457200" y="1554480"/>
-            <a:ext cx="36576" cy="310896"/>
-          </a:xfrm>
-          <a:prstGeom prst="rect">
-            <a:avLst/>
-          </a:prstGeom>
-          <a:solidFill>
-            <a:srgbClr val="E8478D"/>
-          </a:solidFill>
-          <a:ln/>
-        </p:spPr>
-      </p:sp>
-      <p:sp>
-        <p:nvSpPr>
-          <p:cNvPr id="10" name="Shape 8"/>
-          <p:cNvSpPr/>
-          <p:nvPr/>
-        </p:nvSpPr>
-        <p:spPr>
-          <a:xfrm>
-            <a:off x="2157984" y="2752344"/>
-            <a:ext cx="310896" cy="36576"/>
-          </a:xfrm>
-          <a:prstGeom prst="rect">
-            <a:avLst/>
-          </a:prstGeom>
-          <a:solidFill>
-            <a:srgbClr val="E8478D"/>
-          </a:solidFill>
-          <a:ln/>
-        </p:spPr>
-      </p:sp>
-      <p:sp>
-        <p:nvSpPr>
-          <p:cNvPr id="11" name="Shape 9"/>
-          <p:cNvSpPr/>
-          <p:nvPr/>
-        </p:nvSpPr>
-        <p:spPr>
-          <a:xfrm>
-            <a:off x="2432304" y="2478024"/>
-            <a:ext cx="36576" cy="310896"/>
-          </a:xfrm>
-          <a:prstGeom prst="rect">
-            <a:avLst/>
-          </a:prstGeom>
-          <a:solidFill>
-            <a:srgbClr val="E8478D"/>
-          </a:solidFill>
-          <a:ln/>
-        </p:spPr>
-      </p:sp>
-      <p:sp>
-        <p:nvSpPr>
-          <p:cNvPr id="12" name="Text 10"/>
-          <p:cNvSpPr/>
-          <p:nvPr/>
-        </p:nvSpPr>
-        <p:spPr>
-          <a:xfrm>
-            <a:off x="640080" y="1700784"/>
-            <a:ext cx="1645920" cy="219456"/>
+            <a:off x="2583180" y="1444752"/>
+            <a:ext cx="2057400" cy="219456"/>
+          </a:xfrm>
+          <a:prstGeom prst="rect">
+            <a:avLst/>
+          </a:prstGeom>
+          <a:solidFill>
+            <a:srgbClr val="F6693D"/>
+          </a:solidFill>
+          <a:ln/>
+        </p:spPr>
+      </p:sp>
+      <p:sp>
+        <p:nvSpPr>
+          <p:cNvPr id="10" name="Text 8"/>
+          <p:cNvSpPr/>
+          <p:nvPr/>
+        </p:nvSpPr>
+        <p:spPr>
+          <a:xfrm>
+            <a:off x="2583180" y="1444752"/>
+            <a:ext cx="2057400" cy="219456"/>
           </a:xfrm>
           <a:prstGeom prst="rect">
             <a:avLst/>
@@ -4092,23 +4511,149 @@
           <a:bodyPr wrap="square" lIns="0" tIns="0" rIns="0" bIns="0" rtlCol="0" anchor="ctr"/>
           <a:lstStyle/>
           <a:p>
-            <a:pPr indent="0" marL="0">
-              <a:buNone/>
-            </a:pPr>
-            <a:r>
-              <a:rPr lang="en-US" sz="900" b="1" spc="200" kern="0" dirty="0">
-                <a:solidFill>
-                  <a:srgbClr val="E8478D"/>
-                </a:solidFill>
-                <a:latin typeface="Arial" pitchFamily="34" charset="0"/>
-                <a:ea typeface="Arial" pitchFamily="34" charset="-122"/>
-                <a:cs typeface="Arial" pitchFamily="34" charset="-120"/>
-              </a:rPr>
-              <a:t>IMAGE  ·  embodiment</a:t>
-            </a:r>
-            <a:endParaRPr lang="en-US" sz="900" dirty="0"/>
-          </a:p>
-        </p:txBody>
+            <a:pPr algn="ctr" indent="0" marL="0">
+              <a:buNone/>
+            </a:pPr>
+            <a:r>
+              <a:rPr lang="en-US" sz="750" b="1" spc="100" kern="0" dirty="0">
+                <a:solidFill>
+                  <a:srgbClr val="000000"/>
+                </a:solidFill>
+                <a:latin typeface="Arial" pitchFamily="34" charset="0"/>
+                <a:ea typeface="Arial" pitchFamily="34" charset="-122"/>
+                <a:cs typeface="Arial" pitchFamily="34" charset="-120"/>
+              </a:rPr>
+              <a:t>CAPEX &amp; FINANCING</a:t>
+            </a:r>
+            <a:endParaRPr lang="en-US" sz="750" dirty="0"/>
+          </a:p>
+        </p:txBody>
+      </p:sp>
+      <p:sp>
+        <p:nvSpPr>
+          <p:cNvPr id="11" name="Text 9"/>
+          <p:cNvSpPr/>
+          <p:nvPr/>
+        </p:nvSpPr>
+        <p:spPr>
+          <a:xfrm>
+            <a:off x="2619756" y="1737360"/>
+            <a:ext cx="1993392" cy="2194560"/>
+          </a:xfrm>
+          <a:prstGeom prst="rect">
+            <a:avLst/>
+          </a:prstGeom>
+          <a:noFill/>
+          <a:ln/>
+        </p:spPr>
+        <p:txBody>
+          <a:bodyPr wrap="square" lIns="0" tIns="0" rIns="0" bIns="0" rtlCol="0" anchor="t"/>
+          <a:lstStyle/>
+          <a:p>
+            <a:pPr marL="88900" indent="-88900">
+              <a:spcAft>
+                <a:spcPts val="400"/>
+              </a:spcAft>
+              <a:buSzPct val="100000"/>
+              <a:buChar char="•"/>
+            </a:pPr>
+            <a:r>
+              <a:rPr lang="en-US" sz="720" dirty="0">
+                <a:solidFill>
+                  <a:srgbClr val="C9C9CE"/>
+                </a:solidFill>
+                <a:latin typeface="Arial" pitchFamily="34" charset="0"/>
+                <a:ea typeface="Arial" pitchFamily="34" charset="-122"/>
+                <a:cs typeface="Arial" pitchFamily="34" charset="-120"/>
+              </a:rPr>
+              <a:t>Capex guidance: company reports via CNBC (Feb 6, 2026); Tom’s Hardware; Statista (midpoints)</a:t>
+            </a:r>
+            <a:endParaRPr lang="en-US" sz="720" dirty="0"/>
+          </a:p>
+          <a:p>
+            <a:pPr marL="88900" indent="-88900">
+              <a:spcAft>
+                <a:spcPts val="400"/>
+              </a:spcAft>
+              <a:buSzPct val="100000"/>
+              <a:buChar char="•"/>
+            </a:pPr>
+            <a:r>
+              <a:rPr lang="en-US" sz="720" dirty="0">
+                <a:solidFill>
+                  <a:srgbClr val="C9C9CE"/>
+                </a:solidFill>
+                <a:latin typeface="Arial" pitchFamily="34" charset="0"/>
+                <a:ea typeface="Arial" pitchFamily="34" charset="-122"/>
+                <a:cs typeface="Arial" pitchFamily="34" charset="-120"/>
+              </a:rPr>
+              <a:t>Cash-flow math: BofA via Breckinridge; CNBC; techtimes / beincrypto FCF estimates</a:t>
+            </a:r>
+            <a:endParaRPr lang="en-US" sz="720" dirty="0"/>
+          </a:p>
+          <a:p>
+            <a:pPr marL="88900" indent="-88900">
+              <a:spcAft>
+                <a:spcPts val="400"/>
+              </a:spcAft>
+              <a:buSzPct val="100000"/>
+              <a:buChar char="•"/>
+            </a:pPr>
+            <a:r>
+              <a:rPr lang="en-US" sz="720" dirty="0">
+                <a:solidFill>
+                  <a:srgbClr val="C9C9CE"/>
+                </a:solidFill>
+                <a:latin typeface="Arial" pitchFamily="34" charset="0"/>
+                <a:ea typeface="Arial" pitchFamily="34" charset="-122"/>
+                <a:cs typeface="Arial" pitchFamily="34" charset="-120"/>
+              </a:rPr>
+              <a:t>Bond issuance: Mawer; M&amp;G Investments; Fortune (Mar 2026); CNBC (Feb 2026)</a:t>
+            </a:r>
+            <a:endParaRPr lang="en-US" sz="720" dirty="0"/>
+          </a:p>
+          <a:p>
+            <a:pPr marL="88900" indent="-88900">
+              <a:spcAft>
+                <a:spcPts val="400"/>
+              </a:spcAft>
+              <a:buSzPct val="100000"/>
+              <a:buChar char="•"/>
+            </a:pPr>
+            <a:r>
+              <a:rPr lang="en-US" sz="720" dirty="0">
+                <a:solidFill>
+                  <a:srgbClr val="C9C9CE"/>
+                </a:solidFill>
+                <a:latin typeface="Arial" pitchFamily="34" charset="0"/>
+                <a:ea typeface="Arial" pitchFamily="34" charset="-122"/>
+                <a:cs typeface="Arial" pitchFamily="34" charset="-120"/>
+              </a:rPr>
+              <a:t>Supply forecasts: UBS &amp; Barclays via Reuters (Jan 2026); credit signals: MUFG CDS via CNBC</a:t>
+            </a:r>
+            <a:endParaRPr lang="en-US" sz="720" dirty="0"/>
+          </a:p>
+        </p:txBody>
+      </p:sp>
+      <p:sp>
+        <p:nvSpPr>
+          <p:cNvPr id="12" name="Shape 10"/>
+          <p:cNvSpPr/>
+          <p:nvPr/>
+        </p:nvSpPr>
+        <p:spPr>
+          <a:xfrm>
+            <a:off x="4709160" y="1444752"/>
+            <a:ext cx="2057400" cy="219456"/>
+          </a:xfrm>
+          <a:prstGeom prst="rect">
+            <a:avLst/>
+          </a:prstGeom>
+          <a:solidFill>
+            <a:srgbClr val="2BC4C4"/>
+          </a:solidFill>
+          <a:ln/>
+        </p:spPr>
       </p:sp>
       <p:sp>
         <p:nvSpPr>
@@ -4118,8 +4663,47 @@
         </p:nvSpPr>
         <p:spPr>
           <a:xfrm>
-            <a:off x="640080" y="1975104"/>
-            <a:ext cx="1645920" cy="630936"/>
+            <a:off x="4709160" y="1444752"/>
+            <a:ext cx="2057400" cy="219456"/>
+          </a:xfrm>
+          <a:prstGeom prst="rect">
+            <a:avLst/>
+          </a:prstGeom>
+          <a:noFill/>
+          <a:ln/>
+        </p:spPr>
+        <p:txBody>
+          <a:bodyPr wrap="square" lIns="0" tIns="0" rIns="0" bIns="0" rtlCol="0" anchor="ctr"/>
+          <a:lstStyle/>
+          <a:p>
+            <a:pPr algn="ctr" indent="0" marL="0">
+              <a:buNone/>
+            </a:pPr>
+            <a:r>
+              <a:rPr lang="en-US" sz="750" b="1" spc="100" kern="0" dirty="0">
+                <a:solidFill>
+                  <a:srgbClr val="000000"/>
+                </a:solidFill>
+                <a:latin typeface="Arial" pitchFamily="34" charset="0"/>
+                <a:ea typeface="Arial" pitchFamily="34" charset="-122"/>
+                <a:cs typeface="Arial" pitchFamily="34" charset="-120"/>
+              </a:rPr>
+              <a:t>LABOR &amp; POLICY</a:t>
+            </a:r>
+            <a:endParaRPr lang="en-US" sz="750" dirty="0"/>
+          </a:p>
+        </p:txBody>
+      </p:sp>
+      <p:sp>
+        <p:nvSpPr>
+          <p:cNvPr id="14" name="Text 12"/>
+          <p:cNvSpPr/>
+          <p:nvPr/>
+        </p:nvSpPr>
+        <p:spPr>
+          <a:xfrm>
+            <a:off x="4745736" y="1737360"/>
+            <a:ext cx="1993392" cy="2194560"/>
           </a:xfrm>
           <a:prstGeom prst="rect">
             <a:avLst/>
@@ -4131,11 +4715,282 @@
           <a:bodyPr wrap="square" lIns="0" tIns="0" rIns="0" bIns="0" rtlCol="0" anchor="t"/>
           <a:lstStyle/>
           <a:p>
-            <a:pPr indent="0" marL="0">
-              <a:buNone/>
-            </a:pPr>
-            <a:r>
-              <a:rPr lang="en-US" sz="700" i="1" dirty="0">
+            <a:pPr marL="88900" indent="-88900">
+              <a:spcAft>
+                <a:spcPts val="400"/>
+              </a:spcAft>
+              <a:buSzPct val="100000"/>
+              <a:buChar char="•"/>
+            </a:pPr>
+            <a:r>
+              <a:rPr lang="en-US" sz="720" dirty="0">
+                <a:solidFill>
+                  <a:srgbClr val="C9C9CE"/>
+                </a:solidFill>
+                <a:latin typeface="Arial" pitchFamily="34" charset="0"/>
+                <a:ea typeface="Arial" pitchFamily="34" charset="-122"/>
+                <a:cs typeface="Arial" pitchFamily="34" charset="-120"/>
+              </a:rPr>
+              <a:t>Layoffs: Challenger, Gray &amp; Christmas via CNBC (Jun 5, 2026) &amp; CBS News; AI cited in ~40% of May cuts</a:t>
+            </a:r>
+            <a:endParaRPr lang="en-US" sz="720" dirty="0"/>
+          </a:p>
+          <a:p>
+            <a:pPr marL="88900" indent="-88900">
+              <a:spcAft>
+                <a:spcPts val="400"/>
+              </a:spcAft>
+              <a:buSzPct val="100000"/>
+              <a:buChar char="•"/>
+            </a:pPr>
+            <a:r>
+              <a:rPr lang="en-US" sz="720" dirty="0">
+                <a:solidFill>
+                  <a:srgbClr val="C9C9CE"/>
+                </a:solidFill>
+                <a:latin typeface="Arial" pitchFamily="34" charset="0"/>
+                <a:ea typeface="Arial" pitchFamily="34" charset="-122"/>
+                <a:cs typeface="Arial" pitchFamily="34" charset="-120"/>
+              </a:rPr>
+              <a:t>Graduate unemployment: NY Fed recent-grad series (5.6% vs 4.2% overall) via CNBC</a:t>
+            </a:r>
+            <a:endParaRPr lang="en-US" sz="720" dirty="0"/>
+          </a:p>
+          <a:p>
+            <a:pPr marL="88900" indent="-88900">
+              <a:spcAft>
+                <a:spcPts val="400"/>
+              </a:spcAft>
+              <a:buSzPct val="100000"/>
+              <a:buChar char="•"/>
+            </a:pPr>
+            <a:r>
+              <a:rPr lang="en-US" sz="720" dirty="0">
+                <a:solidFill>
+                  <a:srgbClr val="C9C9CE"/>
+                </a:solidFill>
+                <a:latin typeface="Arial" pitchFamily="34" charset="0"/>
+                <a:ea typeface="Arial" pitchFamily="34" charset="-122"/>
+                <a:cs typeface="Arial" pitchFamily="34" charset="-120"/>
+              </a:rPr>
+              <a:t>Entry-level payrolls: academic working papers on AI-exposed occupations (22–25 cohort)</a:t>
+            </a:r>
+            <a:endParaRPr lang="en-US" sz="720" dirty="0"/>
+          </a:p>
+          <a:p>
+            <a:pPr marL="88900" indent="-88900">
+              <a:spcAft>
+                <a:spcPts val="400"/>
+              </a:spcAft>
+              <a:buSzPct val="100000"/>
+              <a:buChar char="•"/>
+            </a:pPr>
+            <a:r>
+              <a:rPr lang="en-US" sz="720" dirty="0">
+                <a:solidFill>
+                  <a:srgbClr val="C9C9CE"/>
+                </a:solidFill>
+                <a:latin typeface="Arial" pitchFamily="34" charset="0"/>
+                <a:ea typeface="Arial" pitchFamily="34" charset="-122"/>
+                <a:cs typeface="Arial" pitchFamily="34" charset="-120"/>
+              </a:rPr>
+              <a:t>Policy: Executive Order provisions, sovereign-wealth-fund proposals, Sacks critique</a:t>
+            </a:r>
+            <a:endParaRPr lang="en-US" sz="720" dirty="0"/>
+          </a:p>
+        </p:txBody>
+      </p:sp>
+      <p:sp>
+        <p:nvSpPr>
+          <p:cNvPr id="15" name="Shape 13"/>
+          <p:cNvSpPr/>
+          <p:nvPr/>
+        </p:nvSpPr>
+        <p:spPr>
+          <a:xfrm>
+            <a:off x="6835140" y="1444752"/>
+            <a:ext cx="2057400" cy="219456"/>
+          </a:xfrm>
+          <a:prstGeom prst="rect">
+            <a:avLst/>
+          </a:prstGeom>
+          <a:solidFill>
+            <a:srgbClr val="9B7BE0"/>
+          </a:solidFill>
+          <a:ln/>
+        </p:spPr>
+      </p:sp>
+      <p:sp>
+        <p:nvSpPr>
+          <p:cNvPr id="16" name="Text 14"/>
+          <p:cNvSpPr/>
+          <p:nvPr/>
+        </p:nvSpPr>
+        <p:spPr>
+          <a:xfrm>
+            <a:off x="6835140" y="1444752"/>
+            <a:ext cx="2057400" cy="219456"/>
+          </a:xfrm>
+          <a:prstGeom prst="rect">
+            <a:avLst/>
+          </a:prstGeom>
+          <a:noFill/>
+          <a:ln/>
+        </p:spPr>
+        <p:txBody>
+          <a:bodyPr wrap="square" lIns="0" tIns="0" rIns="0" bIns="0" rtlCol="0" anchor="ctr"/>
+          <a:lstStyle/>
+          <a:p>
+            <a:pPr algn="ctr" indent="0" marL="0">
+              <a:buNone/>
+            </a:pPr>
+            <a:r>
+              <a:rPr lang="en-US" sz="750" b="1" spc="100" kern="0" dirty="0">
+                <a:solidFill>
+                  <a:srgbClr val="000000"/>
+                </a:solidFill>
+                <a:latin typeface="Arial" pitchFamily="34" charset="0"/>
+                <a:ea typeface="Arial" pitchFamily="34" charset="-122"/>
+                <a:cs typeface="Arial" pitchFamily="34" charset="-120"/>
+              </a:rPr>
+              <a:t>AI FRONTIER REVIEW</a:t>
+            </a:r>
+            <a:endParaRPr lang="en-US" sz="750" dirty="0"/>
+          </a:p>
+        </p:txBody>
+      </p:sp>
+      <p:sp>
+        <p:nvSpPr>
+          <p:cNvPr id="17" name="Text 15"/>
+          <p:cNvSpPr/>
+          <p:nvPr/>
+        </p:nvSpPr>
+        <p:spPr>
+          <a:xfrm>
+            <a:off x="6871716" y="1737360"/>
+            <a:ext cx="1993392" cy="2194560"/>
+          </a:xfrm>
+          <a:prstGeom prst="rect">
+            <a:avLst/>
+          </a:prstGeom>
+          <a:noFill/>
+          <a:ln/>
+        </p:spPr>
+        <p:txBody>
+          <a:bodyPr wrap="square" lIns="0" tIns="0" rIns="0" bIns="0" rtlCol="0" anchor="t"/>
+          <a:lstStyle/>
+          <a:p>
+            <a:pPr marL="88900" indent="-88900">
+              <a:spcAft>
+                <a:spcPts val="400"/>
+              </a:spcAft>
+              <a:buSzPct val="100000"/>
+              <a:buChar char="•"/>
+            </a:pPr>
+            <a:r>
+              <a:rPr lang="en-US" sz="720" dirty="0">
+                <a:solidFill>
+                  <a:srgbClr val="C9C9CE"/>
+                </a:solidFill>
+                <a:latin typeface="Arial" pitchFamily="34" charset="0"/>
+                <a:ea typeface="Arial" pitchFamily="34" charset="-122"/>
+                <a:cs typeface="Arial" pitchFamily="34" charset="-120"/>
+              </a:rPr>
+              <a:t>Internal strategic review: “The 2026 AI Frontier” (Jun 2026)</a:t>
+            </a:r>
+            <a:endParaRPr lang="en-US" sz="720" dirty="0"/>
+          </a:p>
+          <a:p>
+            <a:pPr marL="88900" indent="-88900">
+              <a:spcAft>
+                <a:spcPts val="400"/>
+              </a:spcAft>
+              <a:buSzPct val="100000"/>
+              <a:buChar char="•"/>
+            </a:pPr>
+            <a:r>
+              <a:rPr lang="en-US" sz="720" dirty="0">
+                <a:solidFill>
+                  <a:srgbClr val="C9C9CE"/>
+                </a:solidFill>
+                <a:latin typeface="Arial" pitchFamily="34" charset="0"/>
+                <a:ea typeface="Arial" pitchFamily="34" charset="-122"/>
+                <a:cs typeface="Arial" pitchFamily="34" charset="-120"/>
+              </a:rPr>
+              <a:t>Agentic loops &amp; token economics; enterprise caps (Uber, Walmart); Karpathy &amp; Cherny commentary</a:t>
+            </a:r>
+            <a:endParaRPr lang="en-US" sz="720" dirty="0"/>
+          </a:p>
+          <a:p>
+            <a:pPr marL="88900" indent="-88900">
+              <a:spcAft>
+                <a:spcPts val="400"/>
+              </a:spcAft>
+              <a:buSzPct val="100000"/>
+              <a:buChar char="•"/>
+            </a:pPr>
+            <a:r>
+              <a:rPr lang="en-US" sz="720" dirty="0">
+                <a:solidFill>
+                  <a:srgbClr val="C9C9CE"/>
+                </a:solidFill>
+                <a:latin typeface="Arial" pitchFamily="34" charset="0"/>
+                <a:ea typeface="Arial" pitchFamily="34" charset="-122"/>
+                <a:cs typeface="Arial" pitchFamily="34" charset="-120"/>
+              </a:rPr>
+              <a:t>Compute: SK Hynix HBM outlook; SpaceX Colossus; Google GPU rental</a:t>
+            </a:r>
+            <a:endParaRPr lang="en-US" sz="720" dirty="0"/>
+          </a:p>
+          <a:p>
+            <a:pPr marL="88900" indent="-88900">
+              <a:spcAft>
+                <a:spcPts val="400"/>
+              </a:spcAft>
+              <a:buSzPct val="100000"/>
+              <a:buChar char="•"/>
+            </a:pPr>
+            <a:r>
+              <a:rPr lang="en-US" sz="720" dirty="0">
+                <a:solidFill>
+                  <a:srgbClr val="C9C9CE"/>
+                </a:solidFill>
+                <a:latin typeface="Arial" pitchFamily="34" charset="0"/>
+                <a:ea typeface="Arial" pitchFamily="34" charset="-122"/>
+                <a:cs typeface="Arial" pitchFamily="34" charset="-120"/>
+              </a:rPr>
+              <a:t>Frontier watch: embodiment, orbital compute, robotaxis, AI biology; speculative</a:t>
+            </a:r>
+            <a:endParaRPr lang="en-US" sz="720" dirty="0"/>
+          </a:p>
+        </p:txBody>
+      </p:sp>
+      <p:sp>
+        <p:nvSpPr>
+          <p:cNvPr id="18" name="Text 16"/>
+          <p:cNvSpPr/>
+          <p:nvPr/>
+        </p:nvSpPr>
+        <p:spPr>
+          <a:xfrm>
+            <a:off x="457200" y="3968496"/>
+            <a:ext cx="8229600" cy="512064"/>
+          </a:xfrm>
+          <a:prstGeom prst="rect">
+            <a:avLst/>
+          </a:prstGeom>
+          <a:noFill/>
+          <a:ln/>
+        </p:spPr>
+        <p:txBody>
+          <a:bodyPr wrap="square" lIns="0" tIns="0" rIns="0" bIns="0" rtlCol="0" anchor="ctr"/>
+          <a:lstStyle/>
+          <a:p>
+            <a:pPr indent="0" marL="0">
+              <a:buNone/>
+            </a:pPr>
+            <a:r>
+              <a:rPr lang="en-US" sz="750" i="1" dirty="0">
                 <a:solidFill>
                   <a:srgbClr val="8A8A90"/>
                 </a:solidFill>
@@ -4143,1108 +4998,15 @@
                 <a:ea typeface="Arial" pitchFamily="34" charset="-122"/>
                 <a:cs typeface="Arial" pitchFamily="34" charset="-120"/>
               </a:rPr>
-              <a:t>IMAGE PROMPT → save as frontier-embodiment.png</a:t>
-            </a:r>
-            <a:endParaRPr lang="en-US" sz="700" dirty="0"/>
-          </a:p>
-          <a:p>
-            <a:pPr indent="0" marL="0">
-              <a:buNone/>
-            </a:pPr>
-            <a:r>
-              <a:rPr lang="en-US" sz="850" dirty="0">
-                <a:solidFill>
-                  <a:srgbClr val="C9C9CE"/>
-                </a:solidFill>
-                <a:latin typeface="Arial" pitchFamily="34" charset="0"/>
-                <a:ea typeface="Arial" pitchFamily="34" charset="-122"/>
-                <a:cs typeface="Arial" pitchFamily="34" charset="-120"/>
-              </a:rPr>
-              <a:t>Detailed modern editorial 3D illustration, slight three-quarter camera angle, polished semi-realistic render, clean and bright: a friendly, sleek white-and-silver humanoid robot walking upright down a bright, well-lit numbered warehouse aisle, carrying a labeled tote, neat shelving on either side; magenta-pink (#E8478D) and warm orange accents. Deep near-black (#111114) studio background; brushed-silver and white materials; clean, bright, optimistic BlackRock-style institutional palette, never dark or ominous; soft even lighting, crisp focus, premium financial-tech mood; single hero subject with generous negative space; no text, no words, no logos, no watermark.</a:t>
-            </a:r>
-            <a:endParaRPr lang="en-US" sz="700" dirty="0"/>
-          </a:p>
-        </p:txBody>
-      </p:sp>
-      <p:sp>
-        <p:nvSpPr>
-          <p:cNvPr id="14" name="Shape 12"/>
-          <p:cNvSpPr/>
-          <p:nvPr/>
-        </p:nvSpPr>
-        <p:spPr>
-          <a:xfrm>
-            <a:off x="457200" y="2852928"/>
-            <a:ext cx="2011680" cy="1170432"/>
-          </a:xfrm>
-          <a:prstGeom prst="rect">
-            <a:avLst/>
-          </a:prstGeom>
-          <a:solidFill>
-            <a:srgbClr val="1C1C20"/>
-          </a:solidFill>
-          <a:ln/>
-        </p:spPr>
-      </p:sp>
-      <p:sp>
-        <p:nvSpPr>
-          <p:cNvPr id="15" name="Shape 13"/>
-          <p:cNvSpPr/>
-          <p:nvPr/>
-        </p:nvSpPr>
-        <p:spPr>
-          <a:xfrm>
-            <a:off x="457200" y="2852928"/>
-            <a:ext cx="2011680" cy="36576"/>
-          </a:xfrm>
-          <a:prstGeom prst="rect">
-            <a:avLst/>
-          </a:prstGeom>
-          <a:solidFill>
-            <a:srgbClr val="E8478D"/>
-          </a:solidFill>
-          <a:ln/>
-        </p:spPr>
-      </p:sp>
-      <p:sp>
-        <p:nvSpPr>
-          <p:cNvPr id="16" name="Text 14"/>
-          <p:cNvSpPr/>
-          <p:nvPr/>
-        </p:nvSpPr>
-        <p:spPr>
-          <a:xfrm>
-            <a:off x="566928" y="2962656"/>
-            <a:ext cx="1792224" cy="987552"/>
-          </a:xfrm>
-          <a:prstGeom prst="rect">
-            <a:avLst/>
-          </a:prstGeom>
-          <a:noFill/>
-          <a:ln/>
-        </p:spPr>
-        <p:txBody>
-          <a:bodyPr wrap="square" lIns="0" tIns="0" rIns="0" bIns="0" rtlCol="0" anchor="t"/>
-          <a:lstStyle/>
-          <a:p>
-            <a:pPr indent="0" marL="0">
-              <a:buNone/>
-            </a:pPr>
-            <a:r>
-              <a:rPr lang="en-US" sz="950" b="1" dirty="0">
-                <a:solidFill>
-                  <a:srgbClr val="FFFFFF"/>
-                </a:solidFill>
-                <a:latin typeface="Arial" pitchFamily="34" charset="0"/>
-                <a:ea typeface="Arial" pitchFamily="34" charset="-122"/>
-                <a:cs typeface="Arial" pitchFamily="34" charset="-120"/>
-              </a:rPr>
-              <a:t>Embodiment.  </a:t>
-            </a:r>
-            <a:endParaRPr lang="en-US" sz="950" dirty="0"/>
-          </a:p>
-          <a:p>
-            <a:pPr indent="0" marL="0">
-              <a:buNone/>
-            </a:pPr>
-            <a:r>
-              <a:rPr lang="en-US" sz="800" dirty="0">
-                <a:solidFill>
-                  <a:srgbClr val="C9C9CE"/>
-                </a:solidFill>
-                <a:latin typeface="Arial" pitchFamily="34" charset="0"/>
-                <a:ea typeface="Arial" pitchFamily="34" charset="-122"/>
-                <a:cs typeface="Arial" pitchFamily="34" charset="-120"/>
-              </a:rPr>
-              <a:t>Agentic loops in a body — physical labor enters the token economy.</a:t>
-            </a:r>
-            <a:endParaRPr lang="en-US" sz="950" dirty="0"/>
-          </a:p>
-        </p:txBody>
-      </p:sp>
-      <p:sp>
-        <p:nvSpPr>
-          <p:cNvPr id="17" name="Shape 15"/>
-          <p:cNvSpPr/>
-          <p:nvPr/>
-        </p:nvSpPr>
-        <p:spPr>
-          <a:xfrm>
-            <a:off x="2560320" y="1554480"/>
-            <a:ext cx="2011680" cy="1234440"/>
-          </a:xfrm>
-          <a:prstGeom prst="rect">
-            <a:avLst/>
-          </a:prstGeom>
-          <a:solidFill>
-            <a:srgbClr val="1E1E24"/>
-          </a:solidFill>
-          <a:ln w="12700">
-            <a:solidFill>
-              <a:srgbClr val="2A2A30"/>
-            </a:solidFill>
-            <a:prstDash val="dash"/>
-          </a:ln>
-        </p:spPr>
-      </p:sp>
-      <p:sp>
-        <p:nvSpPr>
-          <p:cNvPr id="18" name="Shape 16"/>
-          <p:cNvSpPr/>
-          <p:nvPr/>
-        </p:nvSpPr>
-        <p:spPr>
-          <a:xfrm>
-            <a:off x="2560320" y="1554480"/>
-            <a:ext cx="310896" cy="36576"/>
-          </a:xfrm>
-          <a:prstGeom prst="rect">
-            <a:avLst/>
-          </a:prstGeom>
-          <a:solidFill>
-            <a:srgbClr val="E8478D"/>
-          </a:solidFill>
-          <a:ln/>
-        </p:spPr>
+              <a:t>Methodology: figures verified against at least one primary or institutional source; where sources disagreed, the more conservative figure was used. The Jevons relationship (slide 4) is illustrative, not measured data. Layoff attributions to AI are self-reported by employers (Challenger) and may overstate causation. Frontier items (slide 10) are speculative and appear in no company guidance. End of deck.</a:t>
+            </a:r>
+            <a:endParaRPr lang="en-US" sz="750" dirty="0"/>
+          </a:p>
+        </p:txBody>
       </p:sp>
       <p:sp>
         <p:nvSpPr>
           <p:cNvPr id="19" name="Shape 17"/>
-          <p:cNvSpPr/>
-          <p:nvPr/>
-        </p:nvSpPr>
-        <p:spPr>
-          <a:xfrm>
-            <a:off x="2560320" y="1554480"/>
-            <a:ext cx="36576" cy="310896"/>
-          </a:xfrm>
-          <a:prstGeom prst="rect">
-            <a:avLst/>
-          </a:prstGeom>
-          <a:solidFill>
-            <a:srgbClr val="E8478D"/>
-          </a:solidFill>
-          <a:ln/>
-        </p:spPr>
-      </p:sp>
-      <p:sp>
-        <p:nvSpPr>
-          <p:cNvPr id="20" name="Shape 18"/>
-          <p:cNvSpPr/>
-          <p:nvPr/>
-        </p:nvSpPr>
-        <p:spPr>
-          <a:xfrm>
-            <a:off x="4261104" y="2752344"/>
-            <a:ext cx="310896" cy="36576"/>
-          </a:xfrm>
-          <a:prstGeom prst="rect">
-            <a:avLst/>
-          </a:prstGeom>
-          <a:solidFill>
-            <a:srgbClr val="E8478D"/>
-          </a:solidFill>
-          <a:ln/>
-        </p:spPr>
-      </p:sp>
-      <p:sp>
-        <p:nvSpPr>
-          <p:cNvPr id="21" name="Shape 19"/>
-          <p:cNvSpPr/>
-          <p:nvPr/>
-        </p:nvSpPr>
-        <p:spPr>
-          <a:xfrm>
-            <a:off x="4535424" y="2478024"/>
-            <a:ext cx="36576" cy="310896"/>
-          </a:xfrm>
-          <a:prstGeom prst="rect">
-            <a:avLst/>
-          </a:prstGeom>
-          <a:solidFill>
-            <a:srgbClr val="E8478D"/>
-          </a:solidFill>
-          <a:ln/>
-        </p:spPr>
-      </p:sp>
-      <p:sp>
-        <p:nvSpPr>
-          <p:cNvPr id="22" name="Text 20"/>
-          <p:cNvSpPr/>
-          <p:nvPr/>
-        </p:nvSpPr>
-        <p:spPr>
-          <a:xfrm>
-            <a:off x="2743200" y="1700784"/>
-            <a:ext cx="1645920" cy="219456"/>
-          </a:xfrm>
-          <a:prstGeom prst="rect">
-            <a:avLst/>
-          </a:prstGeom>
-          <a:noFill/>
-          <a:ln/>
-        </p:spPr>
-        <p:txBody>
-          <a:bodyPr wrap="square" lIns="0" tIns="0" rIns="0" bIns="0" rtlCol="0" anchor="ctr"/>
-          <a:lstStyle/>
-          <a:p>
-            <a:pPr indent="0" marL="0">
-              <a:buNone/>
-            </a:pPr>
-            <a:r>
-              <a:rPr lang="en-US" sz="900" b="1" spc="200" kern="0" dirty="0">
-                <a:solidFill>
-                  <a:srgbClr val="E8478D"/>
-                </a:solidFill>
-                <a:latin typeface="Arial" pitchFamily="34" charset="0"/>
-                <a:ea typeface="Arial" pitchFamily="34" charset="-122"/>
-                <a:cs typeface="Arial" pitchFamily="34" charset="-120"/>
-              </a:rPr>
-              <a:t>IMAGE  ·  wheels</a:t>
-            </a:r>
-            <a:endParaRPr lang="en-US" sz="900" dirty="0"/>
-          </a:p>
-        </p:txBody>
-      </p:sp>
-      <p:sp>
-        <p:nvSpPr>
-          <p:cNvPr id="23" name="Text 21"/>
-          <p:cNvSpPr/>
-          <p:nvPr/>
-        </p:nvSpPr>
-        <p:spPr>
-          <a:xfrm>
-            <a:off x="2743200" y="1975104"/>
-            <a:ext cx="1645920" cy="630936"/>
-          </a:xfrm>
-          <a:prstGeom prst="rect">
-            <a:avLst/>
-          </a:prstGeom>
-          <a:noFill/>
-          <a:ln/>
-        </p:spPr>
-        <p:txBody>
-          <a:bodyPr wrap="square" lIns="0" tIns="0" rIns="0" bIns="0" rtlCol="0" anchor="t"/>
-          <a:lstStyle/>
-          <a:p>
-            <a:pPr indent="0" marL="0">
-              <a:buNone/>
-            </a:pPr>
-            <a:r>
-              <a:rPr lang="en-US" sz="700" i="1" dirty="0">
-                <a:solidFill>
-                  <a:srgbClr val="8A8A90"/>
-                </a:solidFill>
-                <a:latin typeface="Arial" pitchFamily="34" charset="0"/>
-                <a:ea typeface="Arial" pitchFamily="34" charset="-122"/>
-                <a:cs typeface="Arial" pitchFamily="34" charset="-120"/>
-              </a:rPr>
-              <a:t>IMAGE PROMPT → save as frontier-wheels.png</a:t>
-            </a:r>
-            <a:endParaRPr lang="en-US" sz="700" dirty="0"/>
-          </a:p>
-          <a:p>
-            <a:pPr indent="0" marL="0">
-              <a:buNone/>
-            </a:pPr>
-            <a:r>
-              <a:rPr lang="en-US" sz="850" dirty="0">
-                <a:solidFill>
-                  <a:srgbClr val="C9C9CE"/>
-                </a:solidFill>
-                <a:latin typeface="Arial" pitchFamily="34" charset="0"/>
-                <a:ea typeface="Arial" pitchFamily="34" charset="-122"/>
-                <a:cs typeface="Arial" pitchFamily="34" charset="-120"/>
-              </a:rPr>
-              <a:t>Detailed modern editorial 3D illustration, slight three-quarter camera angle, polished semi-realistic render, clean and bright: a sleek driverless robotaxi with a spinning lidar turret and soft glowing sensor cones, stopped at a clean, bright city intersection with a traffic light and crosswalk; magenta-pink (#E8478D) and warm orange accents. Deep near-black (#111114) studio background; brushed-silver and white materials; clean, bright, optimistic BlackRock-style institutional palette, never dark or ominous; soft even lighting, crisp focus, premium financial-tech mood; single hero subject with generous negative space; no text, no words, no logos, no watermark.</a:t>
-            </a:r>
-            <a:endParaRPr lang="en-US" sz="700" dirty="0"/>
-          </a:p>
-        </p:txBody>
-      </p:sp>
-      <p:sp>
-        <p:nvSpPr>
-          <p:cNvPr id="24" name="Shape 22"/>
-          <p:cNvSpPr/>
-          <p:nvPr/>
-        </p:nvSpPr>
-        <p:spPr>
-          <a:xfrm>
-            <a:off x="2560320" y="2852928"/>
-            <a:ext cx="2011680" cy="1170432"/>
-          </a:xfrm>
-          <a:prstGeom prst="rect">
-            <a:avLst/>
-          </a:prstGeom>
-          <a:solidFill>
-            <a:srgbClr val="1C1C20"/>
-          </a:solidFill>
-          <a:ln/>
-        </p:spPr>
-      </p:sp>
-      <p:sp>
-        <p:nvSpPr>
-          <p:cNvPr id="25" name="Shape 23"/>
-          <p:cNvSpPr/>
-          <p:nvPr/>
-        </p:nvSpPr>
-        <p:spPr>
-          <a:xfrm>
-            <a:off x="2560320" y="2852928"/>
-            <a:ext cx="2011680" cy="36576"/>
-          </a:xfrm>
-          <a:prstGeom prst="rect">
-            <a:avLst/>
-          </a:prstGeom>
-          <a:solidFill>
-            <a:srgbClr val="E8478D"/>
-          </a:solidFill>
-          <a:ln/>
-        </p:spPr>
-      </p:sp>
-      <p:sp>
-        <p:nvSpPr>
-          <p:cNvPr id="26" name="Text 24"/>
-          <p:cNvSpPr/>
-          <p:nvPr/>
-        </p:nvSpPr>
-        <p:spPr>
-          <a:xfrm>
-            <a:off x="2670048" y="2962656"/>
-            <a:ext cx="1792224" cy="987552"/>
-          </a:xfrm>
-          <a:prstGeom prst="rect">
-            <a:avLst/>
-          </a:prstGeom>
-          <a:noFill/>
-          <a:ln/>
-        </p:spPr>
-        <p:txBody>
-          <a:bodyPr wrap="square" lIns="0" tIns="0" rIns="0" bIns="0" rtlCol="0" anchor="t"/>
-          <a:lstStyle/>
-          <a:p>
-            <a:pPr indent="0" marL="0">
-              <a:buNone/>
-            </a:pPr>
-            <a:r>
-              <a:rPr lang="en-US" sz="950" b="1" dirty="0">
-                <a:solidFill>
-                  <a:srgbClr val="FFFFFF"/>
-                </a:solidFill>
-                <a:latin typeface="Arial" pitchFamily="34" charset="0"/>
-                <a:ea typeface="Arial" pitchFamily="34" charset="-122"/>
-                <a:cs typeface="Arial" pitchFamily="34" charset="-120"/>
-              </a:rPr>
-              <a:t>Wheels.  </a:t>
-            </a:r>
-            <a:endParaRPr lang="en-US" sz="950" dirty="0"/>
-          </a:p>
-          <a:p>
-            <a:pPr indent="0" marL="0">
-              <a:buNone/>
-            </a:pPr>
-            <a:r>
-              <a:rPr lang="en-US" sz="800" dirty="0">
-                <a:solidFill>
-                  <a:srgbClr val="C9C9CE"/>
-                </a:solidFill>
-                <a:latin typeface="Arial" pitchFamily="34" charset="0"/>
-                <a:ea typeface="Arial" pitchFamily="34" charset="-122"/>
-                <a:cs typeface="Arial" pitchFamily="34" charset="-120"/>
-              </a:rPr>
-              <a:t>Robotaxis are inference on wheels — per-mile token economics.</a:t>
-            </a:r>
-            <a:endParaRPr lang="en-US" sz="950" dirty="0"/>
-          </a:p>
-        </p:txBody>
-      </p:sp>
-      <p:sp>
-        <p:nvSpPr>
-          <p:cNvPr id="27" name="Shape 25"/>
-          <p:cNvSpPr/>
-          <p:nvPr/>
-        </p:nvSpPr>
-        <p:spPr>
-          <a:xfrm>
-            <a:off x="4663440" y="1554480"/>
-            <a:ext cx="2011680" cy="1234440"/>
-          </a:xfrm>
-          <a:prstGeom prst="rect">
-            <a:avLst/>
-          </a:prstGeom>
-          <a:solidFill>
-            <a:srgbClr val="1E1E24"/>
-          </a:solidFill>
-          <a:ln w="12700">
-            <a:solidFill>
-              <a:srgbClr val="2A2A30"/>
-            </a:solidFill>
-            <a:prstDash val="dash"/>
-          </a:ln>
-        </p:spPr>
-      </p:sp>
-      <p:sp>
-        <p:nvSpPr>
-          <p:cNvPr id="28" name="Shape 26"/>
-          <p:cNvSpPr/>
-          <p:nvPr/>
-        </p:nvSpPr>
-        <p:spPr>
-          <a:xfrm>
-            <a:off x="4663440" y="1554480"/>
-            <a:ext cx="310896" cy="36576"/>
-          </a:xfrm>
-          <a:prstGeom prst="rect">
-            <a:avLst/>
-          </a:prstGeom>
-          <a:solidFill>
-            <a:srgbClr val="E8478D"/>
-          </a:solidFill>
-          <a:ln/>
-        </p:spPr>
-      </p:sp>
-      <p:sp>
-        <p:nvSpPr>
-          <p:cNvPr id="29" name="Shape 27"/>
-          <p:cNvSpPr/>
-          <p:nvPr/>
-        </p:nvSpPr>
-        <p:spPr>
-          <a:xfrm>
-            <a:off x="4663440" y="1554480"/>
-            <a:ext cx="36576" cy="310896"/>
-          </a:xfrm>
-          <a:prstGeom prst="rect">
-            <a:avLst/>
-          </a:prstGeom>
-          <a:solidFill>
-            <a:srgbClr val="E8478D"/>
-          </a:solidFill>
-          <a:ln/>
-        </p:spPr>
-      </p:sp>
-      <p:sp>
-        <p:nvSpPr>
-          <p:cNvPr id="30" name="Shape 28"/>
-          <p:cNvSpPr/>
-          <p:nvPr/>
-        </p:nvSpPr>
-        <p:spPr>
-          <a:xfrm>
-            <a:off x="6364224" y="2752344"/>
-            <a:ext cx="310896" cy="36576"/>
-          </a:xfrm>
-          <a:prstGeom prst="rect">
-            <a:avLst/>
-          </a:prstGeom>
-          <a:solidFill>
-            <a:srgbClr val="E8478D"/>
-          </a:solidFill>
-          <a:ln/>
-        </p:spPr>
-      </p:sp>
-      <p:sp>
-        <p:nvSpPr>
-          <p:cNvPr id="31" name="Shape 29"/>
-          <p:cNvSpPr/>
-          <p:nvPr/>
-        </p:nvSpPr>
-        <p:spPr>
-          <a:xfrm>
-            <a:off x="6638544" y="2478024"/>
-            <a:ext cx="36576" cy="310896"/>
-          </a:xfrm>
-          <a:prstGeom prst="rect">
-            <a:avLst/>
-          </a:prstGeom>
-          <a:solidFill>
-            <a:srgbClr val="E8478D"/>
-          </a:solidFill>
-          <a:ln/>
-        </p:spPr>
-      </p:sp>
-      <p:sp>
-        <p:nvSpPr>
-          <p:cNvPr id="32" name="Text 30"/>
-          <p:cNvSpPr/>
-          <p:nvPr/>
-        </p:nvSpPr>
-        <p:spPr>
-          <a:xfrm>
-            <a:off x="4846320" y="1700784"/>
-            <a:ext cx="1645920" cy="219456"/>
-          </a:xfrm>
-          <a:prstGeom prst="rect">
-            <a:avLst/>
-          </a:prstGeom>
-          <a:noFill/>
-          <a:ln/>
-        </p:spPr>
-        <p:txBody>
-          <a:bodyPr wrap="square" lIns="0" tIns="0" rIns="0" bIns="0" rtlCol="0" anchor="ctr"/>
-          <a:lstStyle/>
-          <a:p>
-            <a:pPr indent="0" marL="0">
-              <a:buNone/>
-            </a:pPr>
-            <a:r>
-              <a:rPr lang="en-US" sz="900" b="1" spc="200" kern="0" dirty="0">
-                <a:solidFill>
-                  <a:srgbClr val="E8478D"/>
-                </a:solidFill>
-                <a:latin typeface="Arial" pitchFamily="34" charset="0"/>
-                <a:ea typeface="Arial" pitchFamily="34" charset="-122"/>
-                <a:cs typeface="Arial" pitchFamily="34" charset="-120"/>
-              </a:rPr>
-              <a:t>IMAGE  ·  orbit</a:t>
-            </a:r>
-            <a:endParaRPr lang="en-US" sz="900" dirty="0"/>
-          </a:p>
-        </p:txBody>
-      </p:sp>
-      <p:sp>
-        <p:nvSpPr>
-          <p:cNvPr id="33" name="Text 31"/>
-          <p:cNvSpPr/>
-          <p:nvPr/>
-        </p:nvSpPr>
-        <p:spPr>
-          <a:xfrm>
-            <a:off x="4846320" y="1975104"/>
-            <a:ext cx="1645920" cy="630936"/>
-          </a:xfrm>
-          <a:prstGeom prst="rect">
-            <a:avLst/>
-          </a:prstGeom>
-          <a:noFill/>
-          <a:ln/>
-        </p:spPr>
-        <p:txBody>
-          <a:bodyPr wrap="square" lIns="0" tIns="0" rIns="0" bIns="0" rtlCol="0" anchor="t"/>
-          <a:lstStyle/>
-          <a:p>
-            <a:pPr indent="0" marL="0">
-              <a:buNone/>
-            </a:pPr>
-            <a:r>
-              <a:rPr lang="en-US" sz="700" i="1" dirty="0">
-                <a:solidFill>
-                  <a:srgbClr val="8A8A90"/>
-                </a:solidFill>
-                <a:latin typeface="Arial" pitchFamily="34" charset="0"/>
-                <a:ea typeface="Arial" pitchFamily="34" charset="-122"/>
-                <a:cs typeface="Arial" pitchFamily="34" charset="-120"/>
-              </a:rPr>
-              <a:t>IMAGE PROMPT → save as frontier-orbit.png</a:t>
-            </a:r>
-            <a:endParaRPr lang="en-US" sz="700" dirty="0"/>
-          </a:p>
-          <a:p>
-            <a:pPr indent="0" marL="0">
-              <a:buNone/>
-            </a:pPr>
-            <a:r>
-              <a:rPr lang="en-US" sz="850" dirty="0">
-                <a:solidFill>
-                  <a:srgbClr val="C9C9CE"/>
-                </a:solidFill>
-                <a:latin typeface="Arial" pitchFamily="34" charset="0"/>
-                <a:ea typeface="Arial" pitchFamily="34" charset="-122"/>
-                <a:cs typeface="Arial" pitchFamily="34" charset="-120"/>
-              </a:rPr>
-              <a:t>Detailed modern editorial 3D illustration, slight three-quarter camera angle, polished semi-realistic render, clean and bright: a ring-shaped orbital data-center with unfolded solar-panel wings and server modules, sunlit above the bright curved horizon of Earth; magenta-pink (#E8478D) and warm orange accents. Deep near-black (#111114) studio background; brushed-silver and white materials; clean, bright, optimistic BlackRock-style institutional palette, never dark or ominous; soft even lighting, crisp focus, premium financial-tech mood; single hero subject with generous negative space; no text, no words, no logos, no watermark.</a:t>
-            </a:r>
-            <a:endParaRPr lang="en-US" sz="700" dirty="0"/>
-          </a:p>
-        </p:txBody>
-      </p:sp>
-      <p:sp>
-        <p:nvSpPr>
-          <p:cNvPr id="34" name="Shape 32"/>
-          <p:cNvSpPr/>
-          <p:nvPr/>
-        </p:nvSpPr>
-        <p:spPr>
-          <a:xfrm>
-            <a:off x="4663440" y="2852928"/>
-            <a:ext cx="2011680" cy="1170432"/>
-          </a:xfrm>
-          <a:prstGeom prst="rect">
-            <a:avLst/>
-          </a:prstGeom>
-          <a:solidFill>
-            <a:srgbClr val="1C1C20"/>
-          </a:solidFill>
-          <a:ln/>
-        </p:spPr>
-      </p:sp>
-      <p:sp>
-        <p:nvSpPr>
-          <p:cNvPr id="35" name="Shape 33"/>
-          <p:cNvSpPr/>
-          <p:nvPr/>
-        </p:nvSpPr>
-        <p:spPr>
-          <a:xfrm>
-            <a:off x="4663440" y="2852928"/>
-            <a:ext cx="2011680" cy="36576"/>
-          </a:xfrm>
-          <a:prstGeom prst="rect">
-            <a:avLst/>
-          </a:prstGeom>
-          <a:solidFill>
-            <a:srgbClr val="E8478D"/>
-          </a:solidFill>
-          <a:ln/>
-        </p:spPr>
-      </p:sp>
-      <p:sp>
-        <p:nvSpPr>
-          <p:cNvPr id="36" name="Text 34"/>
-          <p:cNvSpPr/>
-          <p:nvPr/>
-        </p:nvSpPr>
-        <p:spPr>
-          <a:xfrm>
-            <a:off x="4773168" y="2962656"/>
-            <a:ext cx="1792224" cy="987552"/>
-          </a:xfrm>
-          <a:prstGeom prst="rect">
-            <a:avLst/>
-          </a:prstGeom>
-          <a:noFill/>
-          <a:ln/>
-        </p:spPr>
-        <p:txBody>
-          <a:bodyPr wrap="square" lIns="0" tIns="0" rIns="0" bIns="0" rtlCol="0" anchor="t"/>
-          <a:lstStyle/>
-          <a:p>
-            <a:pPr indent="0" marL="0">
-              <a:buNone/>
-            </a:pPr>
-            <a:r>
-              <a:rPr lang="en-US" sz="950" b="1" dirty="0">
-                <a:solidFill>
-                  <a:srgbClr val="FFFFFF"/>
-                </a:solidFill>
-                <a:latin typeface="Arial" pitchFamily="34" charset="0"/>
-                <a:ea typeface="Arial" pitchFamily="34" charset="-122"/>
-                <a:cs typeface="Arial" pitchFamily="34" charset="-120"/>
-              </a:rPr>
-              <a:t>Orbit.  </a:t>
-            </a:r>
-            <a:endParaRPr lang="en-US" sz="950" dirty="0"/>
-          </a:p>
-          <a:p>
-            <a:pPr indent="0" marL="0">
-              <a:buNone/>
-            </a:pPr>
-            <a:r>
-              <a:rPr lang="en-US" sz="800" dirty="0">
-                <a:solidFill>
-                  <a:srgbClr val="C9C9CE"/>
-                </a:solidFill>
-                <a:latin typeface="Arial" pitchFamily="34" charset="0"/>
-                <a:ea typeface="Arial" pitchFamily="34" charset="-122"/>
-                <a:cs typeface="Arial" pitchFamily="34" charset="-120"/>
-              </a:rPr>
-              <a:t>Orbital compute escapes the grid constraint behind token rationing.</a:t>
-            </a:r>
-            <a:endParaRPr lang="en-US" sz="950" dirty="0"/>
-          </a:p>
-        </p:txBody>
-      </p:sp>
-      <p:sp>
-        <p:nvSpPr>
-          <p:cNvPr id="37" name="Shape 35"/>
-          <p:cNvSpPr/>
-          <p:nvPr/>
-        </p:nvSpPr>
-        <p:spPr>
-          <a:xfrm>
-            <a:off x="6766560" y="1554480"/>
-            <a:ext cx="2011680" cy="1234440"/>
-          </a:xfrm>
-          <a:prstGeom prst="rect">
-            <a:avLst/>
-          </a:prstGeom>
-          <a:solidFill>
-            <a:srgbClr val="1E1E24"/>
-          </a:solidFill>
-          <a:ln w="12700">
-            <a:solidFill>
-              <a:srgbClr val="2A2A30"/>
-            </a:solidFill>
-            <a:prstDash val="dash"/>
-          </a:ln>
-        </p:spPr>
-      </p:sp>
-      <p:sp>
-        <p:nvSpPr>
-          <p:cNvPr id="38" name="Shape 36"/>
-          <p:cNvSpPr/>
-          <p:nvPr/>
-        </p:nvSpPr>
-        <p:spPr>
-          <a:xfrm>
-            <a:off x="6766560" y="1554480"/>
-            <a:ext cx="310896" cy="36576"/>
-          </a:xfrm>
-          <a:prstGeom prst="rect">
-            <a:avLst/>
-          </a:prstGeom>
-          <a:solidFill>
-            <a:srgbClr val="E8478D"/>
-          </a:solidFill>
-          <a:ln/>
-        </p:spPr>
-      </p:sp>
-      <p:sp>
-        <p:nvSpPr>
-          <p:cNvPr id="39" name="Shape 37"/>
-          <p:cNvSpPr/>
-          <p:nvPr/>
-        </p:nvSpPr>
-        <p:spPr>
-          <a:xfrm>
-            <a:off x="6766560" y="1554480"/>
-            <a:ext cx="36576" cy="310896"/>
-          </a:xfrm>
-          <a:prstGeom prst="rect">
-            <a:avLst/>
-          </a:prstGeom>
-          <a:solidFill>
-            <a:srgbClr val="E8478D"/>
-          </a:solidFill>
-          <a:ln/>
-        </p:spPr>
-      </p:sp>
-      <p:sp>
-        <p:nvSpPr>
-          <p:cNvPr id="40" name="Shape 38"/>
-          <p:cNvSpPr/>
-          <p:nvPr/>
-        </p:nvSpPr>
-        <p:spPr>
-          <a:xfrm>
-            <a:off x="8467344" y="2752344"/>
-            <a:ext cx="310896" cy="36576"/>
-          </a:xfrm>
-          <a:prstGeom prst="rect">
-            <a:avLst/>
-          </a:prstGeom>
-          <a:solidFill>
-            <a:srgbClr val="E8478D"/>
-          </a:solidFill>
-          <a:ln/>
-        </p:spPr>
-      </p:sp>
-      <p:sp>
-        <p:nvSpPr>
-          <p:cNvPr id="41" name="Shape 39"/>
-          <p:cNvSpPr/>
-          <p:nvPr/>
-        </p:nvSpPr>
-        <p:spPr>
-          <a:xfrm>
-            <a:off x="8741664" y="2478024"/>
-            <a:ext cx="36576" cy="310896"/>
-          </a:xfrm>
-          <a:prstGeom prst="rect">
-            <a:avLst/>
-          </a:prstGeom>
-          <a:solidFill>
-            <a:srgbClr val="E8478D"/>
-          </a:solidFill>
-          <a:ln/>
-        </p:spPr>
-      </p:sp>
-      <p:sp>
-        <p:nvSpPr>
-          <p:cNvPr id="42" name="Text 40"/>
-          <p:cNvSpPr/>
-          <p:nvPr/>
-        </p:nvSpPr>
-        <p:spPr>
-          <a:xfrm>
-            <a:off x="6949440" y="1700784"/>
-            <a:ext cx="1645920" cy="219456"/>
-          </a:xfrm>
-          <a:prstGeom prst="rect">
-            <a:avLst/>
-          </a:prstGeom>
-          <a:noFill/>
-          <a:ln/>
-        </p:spPr>
-        <p:txBody>
-          <a:bodyPr wrap="square" lIns="0" tIns="0" rIns="0" bIns="0" rtlCol="0" anchor="ctr"/>
-          <a:lstStyle/>
-          <a:p>
-            <a:pPr indent="0" marL="0">
-              <a:buNone/>
-            </a:pPr>
-            <a:r>
-              <a:rPr lang="en-US" sz="900" b="1" spc="200" kern="0" dirty="0">
-                <a:solidFill>
-                  <a:srgbClr val="E8478D"/>
-                </a:solidFill>
-                <a:latin typeface="Arial" pitchFamily="34" charset="0"/>
-                <a:ea typeface="Arial" pitchFamily="34" charset="-122"/>
-                <a:cs typeface="Arial" pitchFamily="34" charset="-120"/>
-              </a:rPr>
-              <a:t>IMAGE  ·  proteins</a:t>
-            </a:r>
-            <a:endParaRPr lang="en-US" sz="900" dirty="0"/>
-          </a:p>
-        </p:txBody>
-      </p:sp>
-      <p:sp>
-        <p:nvSpPr>
-          <p:cNvPr id="43" name="Text 41"/>
-          <p:cNvSpPr/>
-          <p:nvPr/>
-        </p:nvSpPr>
-        <p:spPr>
-          <a:xfrm>
-            <a:off x="6949440" y="1975104"/>
-            <a:ext cx="1645920" cy="630936"/>
-          </a:xfrm>
-          <a:prstGeom prst="rect">
-            <a:avLst/>
-          </a:prstGeom>
-          <a:noFill/>
-          <a:ln/>
-        </p:spPr>
-        <p:txBody>
-          <a:bodyPr wrap="square" lIns="0" tIns="0" rIns="0" bIns="0" rtlCol="0" anchor="t"/>
-          <a:lstStyle/>
-          <a:p>
-            <a:pPr indent="0" marL="0">
-              <a:buNone/>
-            </a:pPr>
-            <a:r>
-              <a:rPr lang="en-US" sz="700" i="1" dirty="0">
-                <a:solidFill>
-                  <a:srgbClr val="8A8A90"/>
-                </a:solidFill>
-                <a:latin typeface="Arial" pitchFamily="34" charset="0"/>
-                <a:ea typeface="Arial" pitchFamily="34" charset="-122"/>
-                <a:cs typeface="Arial" pitchFamily="34" charset="-120"/>
-              </a:rPr>
-              <a:t>IMAGE PROMPT → save as frontier-proteins.png</a:t>
-            </a:r>
-            <a:endParaRPr lang="en-US" sz="700" dirty="0"/>
-          </a:p>
-          <a:p>
-            <a:pPr indent="0" marL="0">
-              <a:buNone/>
-            </a:pPr>
-            <a:r>
-              <a:rPr lang="en-US" sz="850" dirty="0">
-                <a:solidFill>
-                  <a:srgbClr val="C9C9CE"/>
-                </a:solidFill>
-                <a:latin typeface="Arial" pitchFamily="34" charset="0"/>
-                <a:ea typeface="Arial" pitchFamily="34" charset="-122"/>
-                <a:cs typeface="Arial" pitchFamily="34" charset="-120"/>
-              </a:rPr>
-              <a:t>Detailed modern editorial 3D illustration, slight three-quarter camera angle, polished semi-realistic render, clean and bright: a precise robotic lab arm assembling a glowing folded-protein ribbon and DNA double-helix on a bright, clean sample platform with small glass vials around it; magenta-pink (#E8478D) and warm orange accents. Deep near-black (#111114) studio background; brushed-silver and white materials; clean, bright, optimistic BlackRock-style institutional palette, never dark or ominous; soft even lighting, crisp focus, premium financial-tech mood; single hero subject with generous negative space; no text, no words, no logos, no watermark.</a:t>
-            </a:r>
-            <a:endParaRPr lang="en-US" sz="700" dirty="0"/>
-          </a:p>
-        </p:txBody>
-      </p:sp>
-      <p:sp>
-        <p:nvSpPr>
-          <p:cNvPr id="44" name="Shape 42"/>
-          <p:cNvSpPr/>
-          <p:nvPr/>
-        </p:nvSpPr>
-        <p:spPr>
-          <a:xfrm>
-            <a:off x="6766560" y="2852928"/>
-            <a:ext cx="2011680" cy="1170432"/>
-          </a:xfrm>
-          <a:prstGeom prst="rect">
-            <a:avLst/>
-          </a:prstGeom>
-          <a:solidFill>
-            <a:srgbClr val="1C1C20"/>
-          </a:solidFill>
-          <a:ln/>
-        </p:spPr>
-      </p:sp>
-      <p:sp>
-        <p:nvSpPr>
-          <p:cNvPr id="45" name="Shape 43"/>
-          <p:cNvSpPr/>
-          <p:nvPr/>
-        </p:nvSpPr>
-        <p:spPr>
-          <a:xfrm>
-            <a:off x="6766560" y="2852928"/>
-            <a:ext cx="2011680" cy="36576"/>
-          </a:xfrm>
-          <a:prstGeom prst="rect">
-            <a:avLst/>
-          </a:prstGeom>
-          <a:solidFill>
-            <a:srgbClr val="E8478D"/>
-          </a:solidFill>
-          <a:ln/>
-        </p:spPr>
-      </p:sp>
-      <p:sp>
-        <p:nvSpPr>
-          <p:cNvPr id="46" name="Text 44"/>
-          <p:cNvSpPr/>
-          <p:nvPr/>
-        </p:nvSpPr>
-        <p:spPr>
-          <a:xfrm>
-            <a:off x="6876288" y="2962656"/>
-            <a:ext cx="1792224" cy="987552"/>
-          </a:xfrm>
-          <a:prstGeom prst="rect">
-            <a:avLst/>
-          </a:prstGeom>
-          <a:noFill/>
-          <a:ln/>
-        </p:spPr>
-        <p:txBody>
-          <a:bodyPr wrap="square" lIns="0" tIns="0" rIns="0" bIns="0" rtlCol="0" anchor="t"/>
-          <a:lstStyle/>
-          <a:p>
-            <a:pPr indent="0" marL="0">
-              <a:buNone/>
-            </a:pPr>
-            <a:r>
-              <a:rPr lang="en-US" sz="950" b="1" dirty="0">
-                <a:solidFill>
-                  <a:srgbClr val="FFFFFF"/>
-                </a:solidFill>
-                <a:latin typeface="Arial" pitchFamily="34" charset="0"/>
-                <a:ea typeface="Arial" pitchFamily="34" charset="-122"/>
-                <a:cs typeface="Arial" pitchFamily="34" charset="-120"/>
-              </a:rPr>
-              <a:t>Proteins.  </a:t>
-            </a:r>
-            <a:endParaRPr lang="en-US" sz="950" dirty="0"/>
-          </a:p>
-          <a:p>
-            <a:pPr indent="0" marL="0">
-              <a:buNone/>
-            </a:pPr>
-            <a:r>
-              <a:rPr lang="en-US" sz="800" dirty="0">
-                <a:solidFill>
-                  <a:srgbClr val="C9C9CE"/>
-                </a:solidFill>
-                <a:latin typeface="Arial" pitchFamily="34" charset="0"/>
-                <a:ea typeface="Arial" pitchFamily="34" charset="-122"/>
-                <a:cs typeface="Arial" pitchFamily="34" charset="-120"/>
-              </a:rPr>
-              <a:t>AI-designed proteins make discovery compute-bound; R&amp;D looks like capex.</a:t>
-            </a:r>
-            <a:endParaRPr lang="en-US" sz="950" dirty="0"/>
-          </a:p>
-        </p:txBody>
-      </p:sp>
-      <p:sp>
-        <p:nvSpPr>
-          <p:cNvPr id="47" name="Text 45"/>
-          <p:cNvSpPr/>
-          <p:nvPr/>
-        </p:nvSpPr>
-        <p:spPr>
-          <a:xfrm>
-            <a:off x="457200" y="4114800"/>
-            <a:ext cx="8229600" cy="237744"/>
-          </a:xfrm>
-          <a:prstGeom prst="rect">
-            <a:avLst/>
-          </a:prstGeom>
-          <a:noFill/>
-          <a:ln/>
-        </p:spPr>
-        <p:txBody>
-          <a:bodyPr wrap="square" lIns="0" tIns="0" rIns="0" bIns="0" rtlCol="0" anchor="ctr"/>
-          <a:lstStyle/>
-          <a:p>
-            <a:pPr indent="0" marL="0">
-              <a:buNone/>
-            </a:pPr>
-            <a:r>
-              <a:rPr lang="en-US" sz="1000" b="1" dirty="0">
-                <a:solidFill>
-                  <a:srgbClr val="FFFFFF"/>
-                </a:solidFill>
-                <a:latin typeface="Arial" pitchFamily="34" charset="0"/>
-                <a:ea typeface="Arial" pitchFamily="34" charset="-122"/>
-                <a:cs typeface="Arial" pitchFamily="34" charset="-120"/>
-              </a:rPr>
-              <a:t>Watch these like markets, not memes: </a:t>
-            </a:r>
-            <a:pPr indent="0" marL="0">
-              <a:buNone/>
-            </a:pPr>
-            <a:r>
-              <a:rPr lang="en-US" sz="1000" dirty="0">
-                <a:solidFill>
-                  <a:srgbClr val="C9C9CE"/>
-                </a:solidFill>
-                <a:latin typeface="Arial" pitchFamily="34" charset="0"/>
-                <a:ea typeface="Arial" pitchFamily="34" charset="-122"/>
-                <a:cs typeface="Arial" pitchFamily="34" charset="-120"/>
-              </a:rPr>
-              <a:t>launch cadence, fleet miles, design wins — gauges, not guidance.</a:t>
-            </a:r>
-            <a:endParaRPr lang="en-US" sz="1000" dirty="0"/>
-          </a:p>
-        </p:txBody>
-      </p:sp>
-      <p:sp>
-        <p:nvSpPr>
-          <p:cNvPr id="48" name="Text 46"/>
-          <p:cNvSpPr/>
-          <p:nvPr/>
-        </p:nvSpPr>
-        <p:spPr>
-          <a:xfrm>
-            <a:off x="457200" y="4334256"/>
-            <a:ext cx="8229600" cy="384048"/>
-          </a:xfrm>
-          <a:prstGeom prst="rect">
-            <a:avLst/>
-          </a:prstGeom>
-          <a:noFill/>
-          <a:ln/>
-        </p:spPr>
-        <p:txBody>
-          <a:bodyPr wrap="square" lIns="0" tIns="0" rIns="0" bIns="0" rtlCol="0" anchor="t"/>
-          <a:lstStyle/>
-          <a:p>
-            <a:pPr indent="0" marL="0">
-              <a:buNone/>
-            </a:pPr>
-            <a:r>
-              <a:rPr lang="en-US" sz="700" dirty="0">
-                <a:solidFill>
-                  <a:srgbClr val="8A8A90"/>
-                </a:solidFill>
-                <a:latin typeface="Arial" pitchFamily="34" charset="0"/>
-                <a:ea typeface="Arial" pitchFamily="34" charset="-122"/>
-                <a:cs typeface="Arial" pitchFamily="34" charset="-120"/>
-              </a:rPr>
-              <a:t>Source: Deck analysis building on Internal strategic review, “The 2026 AI Frontier” (Jun 2026). All frontier-watch items are speculative and appear in no company guidance.</a:t>
-            </a:r>
-            <a:endParaRPr lang="en-US" sz="700" dirty="0"/>
-          </a:p>
-        </p:txBody>
-      </p:sp>
-      <p:sp>
-        <p:nvSpPr>
-          <p:cNvPr id="49" name="Shape 47"/>
           <p:cNvSpPr/>
           <p:nvPr/>
         </p:nvSpPr>
@@ -5264,7 +5026,7 @@
       </p:sp>
       <p:sp>
         <p:nvSpPr>
-          <p:cNvPr id="50" name="Shape 48"/>
+          <p:cNvPr id="20" name="Shape 18"/>
           <p:cNvSpPr/>
           <p:nvPr/>
         </p:nvSpPr>
@@ -5287,7 +5049,7 @@
       </p:sp>
       <p:sp>
         <p:nvSpPr>
-          <p:cNvPr id="51" name="Text 49"/>
+          <p:cNvPr id="21" name="Text 19"/>
           <p:cNvSpPr/>
           <p:nvPr/>
         </p:nvSpPr>
@@ -5326,7 +5088,7 @@
       </p:sp>
       <p:sp>
         <p:nvSpPr>
-          <p:cNvPr id="52" name="Text 50"/>
+          <p:cNvPr id="22" name="Text 20"/>
           <p:cNvSpPr/>
           <p:nvPr/>
         </p:nvSpPr>
@@ -5358,995 +5120,6 @@
                 <a:cs typeface="Arial" pitchFamily="34" charset="-120"/>
               </a:rPr>
               <a:t>11</a:t>
-            </a:r>
-            <a:endParaRPr lang="en-US" sz="900" dirty="0"/>
-          </a:p>
-        </p:txBody>
-      </p:sp>
-    </p:spTree>
-  </p:cSld>
-  <p:clrMapOvr>
-    <a:masterClrMapping/>
-  </p:clrMapOvr>
-</p:sld>
-</file>
-
-<file path=ppt/slides/slide12.xml><?xml version="1.0" encoding="utf-8"?>
-<p:sld xmlns:a="http://schemas.openxmlformats.org/drawingml/2006/main" xmlns:r="http://schemas.openxmlformats.org/officeDocument/2006/relationships" xmlns:p="http://schemas.openxmlformats.org/presentationml/2006/main">
-  <p:cSld name="Slide 12">
-    <p:bg>
-      <p:bgPr>
-        <a:solidFill>
-          <a:srgbClr val="111114"/>
-        </a:solidFill>
-      </p:bgPr>
-    </p:bg>
-    <p:spTree>
-      <p:nvGrpSpPr>
-        <p:cNvPr id="1" name=""/>
-        <p:cNvGrpSpPr/>
-        <p:nvPr/>
-      </p:nvGrpSpPr>
-      <p:grpSpPr>
-        <a:xfrm>
-          <a:off x="0" y="0"/>
-          <a:ext cx="0" cy="0"/>
-          <a:chOff x="0" y="0"/>
-          <a:chExt cx="0" cy="0"/>
-        </a:xfrm>
-      </p:grpSpPr>
-      <p:sp>
-        <p:nvSpPr>
-          <p:cNvPr id="2" name="Text 0"/>
-          <p:cNvSpPr/>
-          <p:nvPr/>
-        </p:nvSpPr>
-        <p:spPr>
-          <a:xfrm>
-            <a:off x="457200" y="320040"/>
-            <a:ext cx="8229600" cy="640080"/>
-          </a:xfrm>
-          <a:prstGeom prst="rect">
-            <a:avLst/>
-          </a:prstGeom>
-          <a:noFill/>
-          <a:ln/>
-        </p:spPr>
-        <p:txBody>
-          <a:bodyPr wrap="square" lIns="0" tIns="0" rIns="0" bIns="0" rtlCol="0" anchor="t"/>
-          <a:lstStyle/>
-          <a:p>
-            <a:pPr indent="0" marL="0">
-              <a:buNone/>
-            </a:pPr>
-            <a:r>
-              <a:rPr lang="en-US" sz="2200" b="1" dirty="0">
-                <a:solidFill>
-                  <a:srgbClr val="FFFFFF"/>
-                </a:solidFill>
-                <a:latin typeface="Arial Black" pitchFamily="34" charset="0"/>
-                <a:ea typeface="Arial Black" pitchFamily="34" charset="-122"/>
-                <a:cs typeface="Arial Black" pitchFamily="34" charset="-120"/>
-              </a:rPr>
-              <a:t>Sources &amp; methodology</a:t>
-            </a:r>
-            <a:endParaRPr lang="en-US" sz="2200" dirty="0"/>
-          </a:p>
-        </p:txBody>
-      </p:sp>
-      <p:sp>
-        <p:nvSpPr>
-          <p:cNvPr id="3" name="Shape 1"/>
-          <p:cNvSpPr/>
-          <p:nvPr/>
-        </p:nvSpPr>
-        <p:spPr>
-          <a:xfrm>
-            <a:off x="457200" y="896112"/>
-            <a:ext cx="2377440" cy="347472"/>
-          </a:xfrm>
-          <a:prstGeom prst="rect">
-            <a:avLst/>
-          </a:prstGeom>
-          <a:solidFill>
-            <a:srgbClr val="F6693D"/>
-          </a:solidFill>
-          <a:ln/>
-        </p:spPr>
-      </p:sp>
-      <p:sp>
-        <p:nvSpPr>
-          <p:cNvPr id="4" name="Text 2"/>
-          <p:cNvSpPr/>
-          <p:nvPr/>
-        </p:nvSpPr>
-        <p:spPr>
-          <a:xfrm>
-            <a:off x="457200" y="896112"/>
-            <a:ext cx="2377440" cy="347472"/>
-          </a:xfrm>
-          <a:prstGeom prst="rect">
-            <a:avLst/>
-          </a:prstGeom>
-          <a:noFill/>
-          <a:ln/>
-        </p:spPr>
-        <p:txBody>
-          <a:bodyPr wrap="square" lIns="0" tIns="0" rIns="0" bIns="0" rtlCol="0" anchor="ctr"/>
-          <a:lstStyle/>
-          <a:p>
-            <a:pPr algn="ctr" indent="0" marL="0">
-              <a:buNone/>
-            </a:pPr>
-            <a:r>
-              <a:rPr lang="en-US" sz="1050" b="1" spc="100" kern="0" dirty="0">
-                <a:solidFill>
-                  <a:srgbClr val="000000"/>
-                </a:solidFill>
-                <a:latin typeface="Arial" pitchFamily="34" charset="0"/>
-                <a:ea typeface="Arial" pitchFamily="34" charset="-122"/>
-                <a:cs typeface="Arial" pitchFamily="34" charset="-120"/>
-              </a:rPr>
-              <a:t>DATA AS OF JUNE 2026</a:t>
-            </a:r>
-            <a:endParaRPr lang="en-US" sz="1050" dirty="0"/>
-          </a:p>
-        </p:txBody>
-      </p:sp>
-      <p:sp>
-        <p:nvSpPr>
-          <p:cNvPr id="5" name="Text 3"/>
-          <p:cNvSpPr/>
-          <p:nvPr/>
-        </p:nvSpPr>
-        <p:spPr>
-          <a:xfrm>
-            <a:off x="3017520" y="896112"/>
-            <a:ext cx="5669280" cy="384048"/>
-          </a:xfrm>
-          <a:prstGeom prst="rect">
-            <a:avLst/>
-          </a:prstGeom>
-          <a:noFill/>
-          <a:ln/>
-        </p:spPr>
-        <p:txBody>
-          <a:bodyPr wrap="square" lIns="0" tIns="0" rIns="0" bIns="0" rtlCol="0" anchor="ctr"/>
-          <a:lstStyle/>
-          <a:p>
-            <a:pPr indent="0" marL="0">
-              <a:buNone/>
-            </a:pPr>
-            <a:r>
-              <a:rPr lang="en-US" sz="850" dirty="0">
-                <a:solidFill>
-                  <a:srgbClr val="9A9AA0"/>
-                </a:solidFill>
-                <a:latin typeface="Arial" pitchFamily="34" charset="0"/>
-                <a:ea typeface="Arial" pitchFamily="34" charset="-122"/>
-                <a:cs typeface="Arial" pitchFamily="34" charset="-120"/>
-              </a:rPr>
-              <a:t>All return figures are YTD total returns through the most recent available close (Jun 5–9, 2026, unless noted). Index and market-cap figures as of early June 2026.</a:t>
-            </a:r>
-            <a:endParaRPr lang="en-US" sz="850" dirty="0"/>
-          </a:p>
-        </p:txBody>
-      </p:sp>
-      <p:sp>
-        <p:nvSpPr>
-          <p:cNvPr id="6" name="Shape 4"/>
-          <p:cNvSpPr/>
-          <p:nvPr/>
-        </p:nvSpPr>
-        <p:spPr>
-          <a:xfrm>
-            <a:off x="457200" y="1444752"/>
-            <a:ext cx="2057400" cy="219456"/>
-          </a:xfrm>
-          <a:prstGeom prst="rect">
-            <a:avLst/>
-          </a:prstGeom>
-          <a:solidFill>
-            <a:srgbClr val="FFB800"/>
-          </a:solidFill>
-          <a:ln/>
-        </p:spPr>
-      </p:sp>
-      <p:sp>
-        <p:nvSpPr>
-          <p:cNvPr id="7" name="Text 5"/>
-          <p:cNvSpPr/>
-          <p:nvPr/>
-        </p:nvSpPr>
-        <p:spPr>
-          <a:xfrm>
-            <a:off x="457200" y="1444752"/>
-            <a:ext cx="2057400" cy="219456"/>
-          </a:xfrm>
-          <a:prstGeom prst="rect">
-            <a:avLst/>
-          </a:prstGeom>
-          <a:noFill/>
-          <a:ln/>
-        </p:spPr>
-        <p:txBody>
-          <a:bodyPr wrap="square" lIns="0" tIns="0" rIns="0" bIns="0" rtlCol="0" anchor="ctr"/>
-          <a:lstStyle/>
-          <a:p>
-            <a:pPr algn="ctr" indent="0" marL="0">
-              <a:buNone/>
-            </a:pPr>
-            <a:r>
-              <a:rPr lang="en-US" sz="750" b="1" spc="100" kern="0" dirty="0">
-                <a:solidFill>
-                  <a:srgbClr val="000000"/>
-                </a:solidFill>
-                <a:latin typeface="Arial" pitchFamily="34" charset="0"/>
-                <a:ea typeface="Arial" pitchFamily="34" charset="-122"/>
-                <a:cs typeface="Arial" pitchFamily="34" charset="-120"/>
-              </a:rPr>
-              <a:t>MARKET DATA</a:t>
-            </a:r>
-            <a:endParaRPr lang="en-US" sz="750" dirty="0"/>
-          </a:p>
-        </p:txBody>
-      </p:sp>
-      <p:sp>
-        <p:nvSpPr>
-          <p:cNvPr id="8" name="Text 6"/>
-          <p:cNvSpPr/>
-          <p:nvPr/>
-        </p:nvSpPr>
-        <p:spPr>
-          <a:xfrm>
-            <a:off x="493776" y="1737360"/>
-            <a:ext cx="1993392" cy="2194560"/>
-          </a:xfrm>
-          <a:prstGeom prst="rect">
-            <a:avLst/>
-          </a:prstGeom>
-          <a:noFill/>
-          <a:ln/>
-        </p:spPr>
-        <p:txBody>
-          <a:bodyPr wrap="square" lIns="0" tIns="0" rIns="0" bIns="0" rtlCol="0" anchor="t"/>
-          <a:lstStyle/>
-          <a:p>
-            <a:pPr marL="88900" indent="-88900">
-              <a:spcAft>
-                <a:spcPts val="400"/>
-              </a:spcAft>
-              <a:buSzPct val="100000"/>
-              <a:buChar char="•"/>
-            </a:pPr>
-            <a:r>
-              <a:rPr lang="en-US" sz="720" dirty="0">
-                <a:solidFill>
-                  <a:srgbClr val="C9C9CE"/>
-                </a:solidFill>
-                <a:latin typeface="Arial" pitchFamily="34" charset="0"/>
-                <a:ea typeface="Arial" pitchFamily="34" charset="-122"/>
-                <a:cs typeface="Arial" pitchFamily="34" charset="-120"/>
-              </a:rPr>
-              <a:t>ETF returns &amp; stats: stockanalysis.com (SOXX, IGV); Morningstar / Yahoo Finance (RSP, MAGS)</a:t>
-            </a:r>
-            <a:endParaRPr lang="en-US" sz="720" dirty="0"/>
-          </a:p>
-          <a:p>
-            <a:pPr marL="88900" indent="-88900">
-              <a:spcAft>
-                <a:spcPts val="400"/>
-              </a:spcAft>
-              <a:buSzPct val="100000"/>
-              <a:buChar char="•"/>
-            </a:pPr>
-            <a:r>
-              <a:rPr lang="en-US" sz="720" dirty="0">
-                <a:solidFill>
-                  <a:srgbClr val="C9C9CE"/>
-                </a:solidFill>
-                <a:latin typeface="Arial" pitchFamily="34" charset="0"/>
-                <a:ea typeface="Arial" pitchFamily="34" charset="-122"/>
-                <a:cs typeface="Arial" pitchFamily="34" charset="-120"/>
-              </a:rPr>
-              <a:t>Index returns &amp; weights: slickcharts.com; S&amp;P Dow Jones Indices; MacroMicro</a:t>
-            </a:r>
-            <a:endParaRPr lang="en-US" sz="720" dirty="0"/>
-          </a:p>
-          <a:p>
-            <a:pPr marL="88900" indent="-88900">
-              <a:spcAft>
-                <a:spcPts val="400"/>
-              </a:spcAft>
-              <a:buSzPct val="100000"/>
-              <a:buChar char="•"/>
-            </a:pPr>
-            <a:r>
-              <a:rPr lang="en-US" sz="720" dirty="0">
-                <a:solidFill>
-                  <a:srgbClr val="C9C9CE"/>
-                </a:solidFill>
-                <a:latin typeface="Arial" pitchFamily="34" charset="0"/>
-                <a:ea typeface="Arial" pitchFamily="34" charset="-122"/>
-                <a:cs typeface="Arial" pitchFamily="34" charset="-120"/>
-              </a:rPr>
-              <a:t>Market caps: companiesmarketcap.com; Motley Fool research (Jun 2026)</a:t>
-            </a:r>
-            <a:endParaRPr lang="en-US" sz="720" dirty="0"/>
-          </a:p>
-          <a:p>
-            <a:pPr marL="88900" indent="-88900">
-              <a:spcAft>
-                <a:spcPts val="400"/>
-              </a:spcAft>
-              <a:buSzPct val="100000"/>
-              <a:buChar char="•"/>
-            </a:pPr>
-            <a:r>
-              <a:rPr lang="en-US" sz="720" dirty="0">
-                <a:solidFill>
-                  <a:srgbClr val="C9C9CE"/>
-                </a:solidFill>
-                <a:latin typeface="Arial" pitchFamily="34" charset="0"/>
-                <a:ea typeface="Arial" pitchFamily="34" charset="-122"/>
-                <a:cs typeface="Arial" pitchFamily="34" charset="-120"/>
-              </a:rPr>
-              <a:t>Valuations: FactSet Earnings Insight; rates: US Treasury / FRED; CNBC (Jun 5, 2026)</a:t>
-            </a:r>
-            <a:endParaRPr lang="en-US" sz="720" dirty="0"/>
-          </a:p>
-        </p:txBody>
-      </p:sp>
-      <p:sp>
-        <p:nvSpPr>
-          <p:cNvPr id="9" name="Shape 7"/>
-          <p:cNvSpPr/>
-          <p:nvPr/>
-        </p:nvSpPr>
-        <p:spPr>
-          <a:xfrm>
-            <a:off x="2583180" y="1444752"/>
-            <a:ext cx="2057400" cy="219456"/>
-          </a:xfrm>
-          <a:prstGeom prst="rect">
-            <a:avLst/>
-          </a:prstGeom>
-          <a:solidFill>
-            <a:srgbClr val="F6693D"/>
-          </a:solidFill>
-          <a:ln/>
-        </p:spPr>
-      </p:sp>
-      <p:sp>
-        <p:nvSpPr>
-          <p:cNvPr id="10" name="Text 8"/>
-          <p:cNvSpPr/>
-          <p:nvPr/>
-        </p:nvSpPr>
-        <p:spPr>
-          <a:xfrm>
-            <a:off x="2583180" y="1444752"/>
-            <a:ext cx="2057400" cy="219456"/>
-          </a:xfrm>
-          <a:prstGeom prst="rect">
-            <a:avLst/>
-          </a:prstGeom>
-          <a:noFill/>
-          <a:ln/>
-        </p:spPr>
-        <p:txBody>
-          <a:bodyPr wrap="square" lIns="0" tIns="0" rIns="0" bIns="0" rtlCol="0" anchor="ctr"/>
-          <a:lstStyle/>
-          <a:p>
-            <a:pPr algn="ctr" indent="0" marL="0">
-              <a:buNone/>
-            </a:pPr>
-            <a:r>
-              <a:rPr lang="en-US" sz="750" b="1" spc="100" kern="0" dirty="0">
-                <a:solidFill>
-                  <a:srgbClr val="000000"/>
-                </a:solidFill>
-                <a:latin typeface="Arial" pitchFamily="34" charset="0"/>
-                <a:ea typeface="Arial" pitchFamily="34" charset="-122"/>
-                <a:cs typeface="Arial" pitchFamily="34" charset="-120"/>
-              </a:rPr>
-              <a:t>CAPEX &amp; FINANCING</a:t>
-            </a:r>
-            <a:endParaRPr lang="en-US" sz="750" dirty="0"/>
-          </a:p>
-        </p:txBody>
-      </p:sp>
-      <p:sp>
-        <p:nvSpPr>
-          <p:cNvPr id="11" name="Text 9"/>
-          <p:cNvSpPr/>
-          <p:nvPr/>
-        </p:nvSpPr>
-        <p:spPr>
-          <a:xfrm>
-            <a:off x="2619756" y="1737360"/>
-            <a:ext cx="1993392" cy="2194560"/>
-          </a:xfrm>
-          <a:prstGeom prst="rect">
-            <a:avLst/>
-          </a:prstGeom>
-          <a:noFill/>
-          <a:ln/>
-        </p:spPr>
-        <p:txBody>
-          <a:bodyPr wrap="square" lIns="0" tIns="0" rIns="0" bIns="0" rtlCol="0" anchor="t"/>
-          <a:lstStyle/>
-          <a:p>
-            <a:pPr marL="88900" indent="-88900">
-              <a:spcAft>
-                <a:spcPts val="400"/>
-              </a:spcAft>
-              <a:buSzPct val="100000"/>
-              <a:buChar char="•"/>
-            </a:pPr>
-            <a:r>
-              <a:rPr lang="en-US" sz="720" dirty="0">
-                <a:solidFill>
-                  <a:srgbClr val="C9C9CE"/>
-                </a:solidFill>
-                <a:latin typeface="Arial" pitchFamily="34" charset="0"/>
-                <a:ea typeface="Arial" pitchFamily="34" charset="-122"/>
-                <a:cs typeface="Arial" pitchFamily="34" charset="-120"/>
-              </a:rPr>
-              <a:t>Capex guidance: company reports via CNBC (Feb 6, 2026); Tom's Hardware; Statista (midpoints)</a:t>
-            </a:r>
-            <a:endParaRPr lang="en-US" sz="720" dirty="0"/>
-          </a:p>
-          <a:p>
-            <a:pPr marL="88900" indent="-88900">
-              <a:spcAft>
-                <a:spcPts val="400"/>
-              </a:spcAft>
-              <a:buSzPct val="100000"/>
-              <a:buChar char="•"/>
-            </a:pPr>
-            <a:r>
-              <a:rPr lang="en-US" sz="720" dirty="0">
-                <a:solidFill>
-                  <a:srgbClr val="C9C9CE"/>
-                </a:solidFill>
-                <a:latin typeface="Arial" pitchFamily="34" charset="0"/>
-                <a:ea typeface="Arial" pitchFamily="34" charset="-122"/>
-                <a:cs typeface="Arial" pitchFamily="34" charset="-120"/>
-              </a:rPr>
-              <a:t>Cash-flow math: BofA via Breckinridge; CNBC; techtimes / beincrypto FCF estimates</a:t>
-            </a:r>
-            <a:endParaRPr lang="en-US" sz="720" dirty="0"/>
-          </a:p>
-          <a:p>
-            <a:pPr marL="88900" indent="-88900">
-              <a:spcAft>
-                <a:spcPts val="400"/>
-              </a:spcAft>
-              <a:buSzPct val="100000"/>
-              <a:buChar char="•"/>
-            </a:pPr>
-            <a:r>
-              <a:rPr lang="en-US" sz="720" dirty="0">
-                <a:solidFill>
-                  <a:srgbClr val="C9C9CE"/>
-                </a:solidFill>
-                <a:latin typeface="Arial" pitchFamily="34" charset="0"/>
-                <a:ea typeface="Arial" pitchFamily="34" charset="-122"/>
-                <a:cs typeface="Arial" pitchFamily="34" charset="-120"/>
-              </a:rPr>
-              <a:t>Bond issuance: Mawer; M&amp;G Investments; Fortune (Mar 2026); CNBC (Feb 2026)</a:t>
-            </a:r>
-            <a:endParaRPr lang="en-US" sz="720" dirty="0"/>
-          </a:p>
-          <a:p>
-            <a:pPr marL="88900" indent="-88900">
-              <a:spcAft>
-                <a:spcPts val="400"/>
-              </a:spcAft>
-              <a:buSzPct val="100000"/>
-              <a:buChar char="•"/>
-            </a:pPr>
-            <a:r>
-              <a:rPr lang="en-US" sz="720" dirty="0">
-                <a:solidFill>
-                  <a:srgbClr val="C9C9CE"/>
-                </a:solidFill>
-                <a:latin typeface="Arial" pitchFamily="34" charset="0"/>
-                <a:ea typeface="Arial" pitchFamily="34" charset="-122"/>
-                <a:cs typeface="Arial" pitchFamily="34" charset="-120"/>
-              </a:rPr>
-              <a:t>Supply forecasts: UBS &amp; Barclays via Reuters (Jan 2026); credit signals: MUFG CDS via CNBC</a:t>
-            </a:r>
-            <a:endParaRPr lang="en-US" sz="720" dirty="0"/>
-          </a:p>
-        </p:txBody>
-      </p:sp>
-      <p:sp>
-        <p:nvSpPr>
-          <p:cNvPr id="12" name="Shape 10"/>
-          <p:cNvSpPr/>
-          <p:nvPr/>
-        </p:nvSpPr>
-        <p:spPr>
-          <a:xfrm>
-            <a:off x="4709160" y="1444752"/>
-            <a:ext cx="2057400" cy="219456"/>
-          </a:xfrm>
-          <a:prstGeom prst="rect">
-            <a:avLst/>
-          </a:prstGeom>
-          <a:solidFill>
-            <a:srgbClr val="2BC4C4"/>
-          </a:solidFill>
-          <a:ln/>
-        </p:spPr>
-      </p:sp>
-      <p:sp>
-        <p:nvSpPr>
-          <p:cNvPr id="13" name="Text 11"/>
-          <p:cNvSpPr/>
-          <p:nvPr/>
-        </p:nvSpPr>
-        <p:spPr>
-          <a:xfrm>
-            <a:off x="4709160" y="1444752"/>
-            <a:ext cx="2057400" cy="219456"/>
-          </a:xfrm>
-          <a:prstGeom prst="rect">
-            <a:avLst/>
-          </a:prstGeom>
-          <a:noFill/>
-          <a:ln/>
-        </p:spPr>
-        <p:txBody>
-          <a:bodyPr wrap="square" lIns="0" tIns="0" rIns="0" bIns="0" rtlCol="0" anchor="ctr"/>
-          <a:lstStyle/>
-          <a:p>
-            <a:pPr algn="ctr" indent="0" marL="0">
-              <a:buNone/>
-            </a:pPr>
-            <a:r>
-              <a:rPr lang="en-US" sz="750" b="1" spc="100" kern="0" dirty="0">
-                <a:solidFill>
-                  <a:srgbClr val="000000"/>
-                </a:solidFill>
-                <a:latin typeface="Arial" pitchFamily="34" charset="0"/>
-                <a:ea typeface="Arial" pitchFamily="34" charset="-122"/>
-                <a:cs typeface="Arial" pitchFamily="34" charset="-120"/>
-              </a:rPr>
-              <a:t>LABOR &amp; POLICY</a:t>
-            </a:r>
-            <a:endParaRPr lang="en-US" sz="750" dirty="0"/>
-          </a:p>
-        </p:txBody>
-      </p:sp>
-      <p:sp>
-        <p:nvSpPr>
-          <p:cNvPr id="14" name="Text 12"/>
-          <p:cNvSpPr/>
-          <p:nvPr/>
-        </p:nvSpPr>
-        <p:spPr>
-          <a:xfrm>
-            <a:off x="4745736" y="1737360"/>
-            <a:ext cx="1993392" cy="2194560"/>
-          </a:xfrm>
-          <a:prstGeom prst="rect">
-            <a:avLst/>
-          </a:prstGeom>
-          <a:noFill/>
-          <a:ln/>
-        </p:spPr>
-        <p:txBody>
-          <a:bodyPr wrap="square" lIns="0" tIns="0" rIns="0" bIns="0" rtlCol="0" anchor="t"/>
-          <a:lstStyle/>
-          <a:p>
-            <a:pPr marL="88900" indent="-88900">
-              <a:spcAft>
-                <a:spcPts val="400"/>
-              </a:spcAft>
-              <a:buSzPct val="100000"/>
-              <a:buChar char="•"/>
-            </a:pPr>
-            <a:r>
-              <a:rPr lang="en-US" sz="720" dirty="0">
-                <a:solidFill>
-                  <a:srgbClr val="C9C9CE"/>
-                </a:solidFill>
-                <a:latin typeface="Arial" pitchFamily="34" charset="0"/>
-                <a:ea typeface="Arial" pitchFamily="34" charset="-122"/>
-                <a:cs typeface="Arial" pitchFamily="34" charset="-120"/>
-              </a:rPr>
-              <a:t>Layoffs: Challenger, Gray &amp; Christmas via CNBC (Jun 5, 2026) &amp; CBS News; AI cited in ~40% of May cuts</a:t>
-            </a:r>
-            <a:endParaRPr lang="en-US" sz="720" dirty="0"/>
-          </a:p>
-          <a:p>
-            <a:pPr marL="88900" indent="-88900">
-              <a:spcAft>
-                <a:spcPts val="400"/>
-              </a:spcAft>
-              <a:buSzPct val="100000"/>
-              <a:buChar char="•"/>
-            </a:pPr>
-            <a:r>
-              <a:rPr lang="en-US" sz="720" dirty="0">
-                <a:solidFill>
-                  <a:srgbClr val="C9C9CE"/>
-                </a:solidFill>
-                <a:latin typeface="Arial" pitchFamily="34" charset="0"/>
-                <a:ea typeface="Arial" pitchFamily="34" charset="-122"/>
-                <a:cs typeface="Arial" pitchFamily="34" charset="-120"/>
-              </a:rPr>
-              <a:t>Graduate unemployment: NY Fed recent-grad series (5.6% vs 4.2% overall) via CNBC</a:t>
-            </a:r>
-            <a:endParaRPr lang="en-US" sz="720" dirty="0"/>
-          </a:p>
-          <a:p>
-            <a:pPr marL="88900" indent="-88900">
-              <a:spcAft>
-                <a:spcPts val="400"/>
-              </a:spcAft>
-              <a:buSzPct val="100000"/>
-              <a:buChar char="•"/>
-            </a:pPr>
-            <a:r>
-              <a:rPr lang="en-US" sz="720" dirty="0">
-                <a:solidFill>
-                  <a:srgbClr val="C9C9CE"/>
-                </a:solidFill>
-                <a:latin typeface="Arial" pitchFamily="34" charset="0"/>
-                <a:ea typeface="Arial" pitchFamily="34" charset="-122"/>
-                <a:cs typeface="Arial" pitchFamily="34" charset="-120"/>
-              </a:rPr>
-              <a:t>Entry-level payrolls: academic working papers on AI-exposed occupations (22–25 cohort)</a:t>
-            </a:r>
-            <a:endParaRPr lang="en-US" sz="720" dirty="0"/>
-          </a:p>
-          <a:p>
-            <a:pPr marL="88900" indent="-88900">
-              <a:spcAft>
-                <a:spcPts val="400"/>
-              </a:spcAft>
-              <a:buSzPct val="100000"/>
-              <a:buChar char="•"/>
-            </a:pPr>
-            <a:r>
-              <a:rPr lang="en-US" sz="720" dirty="0">
-                <a:solidFill>
-                  <a:srgbClr val="C9C9CE"/>
-                </a:solidFill>
-                <a:latin typeface="Arial" pitchFamily="34" charset="0"/>
-                <a:ea typeface="Arial" pitchFamily="34" charset="-122"/>
-                <a:cs typeface="Arial" pitchFamily="34" charset="-120"/>
-              </a:rPr>
-              <a:t>Policy: Executive Order provisions, sovereign-wealth-fund proposals, Sacks critique</a:t>
-            </a:r>
-            <a:endParaRPr lang="en-US" sz="720" dirty="0"/>
-          </a:p>
-        </p:txBody>
-      </p:sp>
-      <p:sp>
-        <p:nvSpPr>
-          <p:cNvPr id="15" name="Shape 13"/>
-          <p:cNvSpPr/>
-          <p:nvPr/>
-        </p:nvSpPr>
-        <p:spPr>
-          <a:xfrm>
-            <a:off x="6835140" y="1444752"/>
-            <a:ext cx="2057400" cy="219456"/>
-          </a:xfrm>
-          <a:prstGeom prst="rect">
-            <a:avLst/>
-          </a:prstGeom>
-          <a:solidFill>
-            <a:srgbClr val="9B7BE0"/>
-          </a:solidFill>
-          <a:ln/>
-        </p:spPr>
-      </p:sp>
-      <p:sp>
-        <p:nvSpPr>
-          <p:cNvPr id="16" name="Text 14"/>
-          <p:cNvSpPr/>
-          <p:nvPr/>
-        </p:nvSpPr>
-        <p:spPr>
-          <a:xfrm>
-            <a:off x="6835140" y="1444752"/>
-            <a:ext cx="2057400" cy="219456"/>
-          </a:xfrm>
-          <a:prstGeom prst="rect">
-            <a:avLst/>
-          </a:prstGeom>
-          <a:noFill/>
-          <a:ln/>
-        </p:spPr>
-        <p:txBody>
-          <a:bodyPr wrap="square" lIns="0" tIns="0" rIns="0" bIns="0" rtlCol="0" anchor="ctr"/>
-          <a:lstStyle/>
-          <a:p>
-            <a:pPr algn="ctr" indent="0" marL="0">
-              <a:buNone/>
-            </a:pPr>
-            <a:r>
-              <a:rPr lang="en-US" sz="750" b="1" spc="100" kern="0" dirty="0">
-                <a:solidFill>
-                  <a:srgbClr val="000000"/>
-                </a:solidFill>
-                <a:latin typeface="Arial" pitchFamily="34" charset="0"/>
-                <a:ea typeface="Arial" pitchFamily="34" charset="-122"/>
-                <a:cs typeface="Arial" pitchFamily="34" charset="-120"/>
-              </a:rPr>
-              <a:t>AI FRONTIER REVIEW</a:t>
-            </a:r>
-            <a:endParaRPr lang="en-US" sz="750" dirty="0"/>
-          </a:p>
-        </p:txBody>
-      </p:sp>
-      <p:sp>
-        <p:nvSpPr>
-          <p:cNvPr id="17" name="Text 15"/>
-          <p:cNvSpPr/>
-          <p:nvPr/>
-        </p:nvSpPr>
-        <p:spPr>
-          <a:xfrm>
-            <a:off x="6871716" y="1737360"/>
-            <a:ext cx="1993392" cy="2194560"/>
-          </a:xfrm>
-          <a:prstGeom prst="rect">
-            <a:avLst/>
-          </a:prstGeom>
-          <a:noFill/>
-          <a:ln/>
-        </p:spPr>
-        <p:txBody>
-          <a:bodyPr wrap="square" lIns="0" tIns="0" rIns="0" bIns="0" rtlCol="0" anchor="t"/>
-          <a:lstStyle/>
-          <a:p>
-            <a:pPr marL="88900" indent="-88900">
-              <a:spcAft>
-                <a:spcPts val="400"/>
-              </a:spcAft>
-              <a:buSzPct val="100000"/>
-              <a:buChar char="•"/>
-            </a:pPr>
-            <a:r>
-              <a:rPr lang="en-US" sz="720" dirty="0">
-                <a:solidFill>
-                  <a:srgbClr val="C9C9CE"/>
-                </a:solidFill>
-                <a:latin typeface="Arial" pitchFamily="34" charset="0"/>
-                <a:ea typeface="Arial" pitchFamily="34" charset="-122"/>
-                <a:cs typeface="Arial" pitchFamily="34" charset="-120"/>
-              </a:rPr>
-              <a:t>Internal strategic review: “The 2026 AI Frontier” (Jun 2026)</a:t>
-            </a:r>
-            <a:endParaRPr lang="en-US" sz="720" dirty="0"/>
-          </a:p>
-          <a:p>
-            <a:pPr marL="88900" indent="-88900">
-              <a:spcAft>
-                <a:spcPts val="400"/>
-              </a:spcAft>
-              <a:buSzPct val="100000"/>
-              <a:buChar char="•"/>
-            </a:pPr>
-            <a:r>
-              <a:rPr lang="en-US" sz="720" dirty="0">
-                <a:solidFill>
-                  <a:srgbClr val="C9C9CE"/>
-                </a:solidFill>
-                <a:latin typeface="Arial" pitchFamily="34" charset="0"/>
-                <a:ea typeface="Arial" pitchFamily="34" charset="-122"/>
-                <a:cs typeface="Arial" pitchFamily="34" charset="-120"/>
-              </a:rPr>
-              <a:t>Agentic loops &amp; token economics; enterprise caps (Uber, Walmart); Karpathy &amp; Cherny commentary</a:t>
-            </a:r>
-            <a:endParaRPr lang="en-US" sz="720" dirty="0"/>
-          </a:p>
-          <a:p>
-            <a:pPr marL="88900" indent="-88900">
-              <a:spcAft>
-                <a:spcPts val="400"/>
-              </a:spcAft>
-              <a:buSzPct val="100000"/>
-              <a:buChar char="•"/>
-            </a:pPr>
-            <a:r>
-              <a:rPr lang="en-US" sz="720" dirty="0">
-                <a:solidFill>
-                  <a:srgbClr val="C9C9CE"/>
-                </a:solidFill>
-                <a:latin typeface="Arial" pitchFamily="34" charset="0"/>
-                <a:ea typeface="Arial" pitchFamily="34" charset="-122"/>
-                <a:cs typeface="Arial" pitchFamily="34" charset="-120"/>
-              </a:rPr>
-              <a:t>Compute: SK Hynix HBM outlook; SpaceX Colossus; Google GPU rental</a:t>
-            </a:r>
-            <a:endParaRPr lang="en-US" sz="720" dirty="0"/>
-          </a:p>
-          <a:p>
-            <a:pPr marL="88900" indent="-88900">
-              <a:spcAft>
-                <a:spcPts val="400"/>
-              </a:spcAft>
-              <a:buSzPct val="100000"/>
-              <a:buChar char="•"/>
-            </a:pPr>
-            <a:r>
-              <a:rPr lang="en-US" sz="720" dirty="0">
-                <a:solidFill>
-                  <a:srgbClr val="C9C9CE"/>
-                </a:solidFill>
-                <a:latin typeface="Arial" pitchFamily="34" charset="0"/>
-                <a:ea typeface="Arial" pitchFamily="34" charset="-122"/>
-                <a:cs typeface="Arial" pitchFamily="34" charset="-120"/>
-              </a:rPr>
-              <a:t>Frontier watch: embodiment, orbital compute, robotaxis, AI biology; speculative</a:t>
-            </a:r>
-            <a:endParaRPr lang="en-US" sz="720" dirty="0"/>
-          </a:p>
-        </p:txBody>
-      </p:sp>
-      <p:sp>
-        <p:nvSpPr>
-          <p:cNvPr id="18" name="Text 16"/>
-          <p:cNvSpPr/>
-          <p:nvPr/>
-        </p:nvSpPr>
-        <p:spPr>
-          <a:xfrm>
-            <a:off x="457200" y="3968496"/>
-            <a:ext cx="8229600" cy="512064"/>
-          </a:xfrm>
-          <a:prstGeom prst="rect">
-            <a:avLst/>
-          </a:prstGeom>
-          <a:noFill/>
-          <a:ln/>
-        </p:spPr>
-        <p:txBody>
-          <a:bodyPr wrap="square" lIns="0" tIns="0" rIns="0" bIns="0" rtlCol="0" anchor="ctr"/>
-          <a:lstStyle/>
-          <a:p>
-            <a:pPr indent="0" marL="0">
-              <a:buNone/>
-            </a:pPr>
-            <a:r>
-              <a:rPr lang="en-US" sz="750" i="1" dirty="0">
-                <a:solidFill>
-                  <a:srgbClr val="8A8A90"/>
-                </a:solidFill>
-                <a:latin typeface="Arial" pitchFamily="34" charset="0"/>
-                <a:ea typeface="Arial" pitchFamily="34" charset="-122"/>
-                <a:cs typeface="Arial" pitchFamily="34" charset="-120"/>
-              </a:rPr>
-              <a:t>Methodology: figures verified against at least one primary or institutional source; where sources disagreed, the more conservative figure was used. The Jevons relationship (slide 4) is illustrative, not measured data. Layoff attributions to AI are self-reported by employers (Challenger) and may overstate causation. Frontier items (slide 11) are speculative and appear in no company guidance. End of deck.</a:t>
-            </a:r>
-            <a:endParaRPr lang="en-US" sz="750" dirty="0"/>
-          </a:p>
-        </p:txBody>
-      </p:sp>
-      <p:sp>
-        <p:nvSpPr>
-          <p:cNvPr id="19" name="Shape 17"/>
-          <p:cNvSpPr/>
-          <p:nvPr/>
-        </p:nvSpPr>
-        <p:spPr>
-          <a:xfrm>
-            <a:off x="0" y="4526280"/>
-            <a:ext cx="9144000" cy="617220"/>
-          </a:xfrm>
-          <a:prstGeom prst="rect">
-            <a:avLst/>
-          </a:prstGeom>
-          <a:solidFill>
-            <a:srgbClr val="000000"/>
-          </a:solidFill>
-          <a:ln/>
-        </p:spPr>
-      </p:sp>
-      <p:sp>
-        <p:nvSpPr>
-          <p:cNvPr id="20" name="Shape 18"/>
-          <p:cNvSpPr/>
-          <p:nvPr/>
-        </p:nvSpPr>
-        <p:spPr>
-          <a:xfrm>
-            <a:off x="0" y="4526280"/>
-            <a:ext cx="9144000" cy="0"/>
-          </a:xfrm>
-          <a:prstGeom prst="line">
-            <a:avLst/>
-          </a:prstGeom>
-          <a:noFill/>
-          <a:ln w="6350">
-            <a:solidFill>
-              <a:srgbClr val="2A2A30"/>
-            </a:solidFill>
-            <a:prstDash val="solid"/>
-          </a:ln>
-        </p:spPr>
-      </p:sp>
-      <p:sp>
-        <p:nvSpPr>
-          <p:cNvPr id="21" name="Text 19"/>
-          <p:cNvSpPr/>
-          <p:nvPr/>
-        </p:nvSpPr>
-        <p:spPr>
-          <a:xfrm>
-            <a:off x="1371600" y="4572000"/>
-            <a:ext cx="6583680" cy="502920"/>
-          </a:xfrm>
-          <a:prstGeom prst="rect">
-            <a:avLst/>
-          </a:prstGeom>
-          <a:noFill/>
-          <a:ln/>
-        </p:spPr>
-        <p:txBody>
-          <a:bodyPr wrap="square" rtlCol="0" anchor="ctr"/>
-          <a:lstStyle/>
-          <a:p>
-            <a:pPr algn="ctr" indent="0" marL="0">
-              <a:buNone/>
-            </a:pPr>
-            <a:r>
-              <a:rPr lang="en-US" sz="650" b="1" dirty="0">
-                <a:solidFill>
-                  <a:srgbClr val="9A9AA0"/>
-                </a:solidFill>
-                <a:latin typeface="Arial" pitchFamily="34" charset="0"/>
-                <a:ea typeface="Arial" pitchFamily="34" charset="-122"/>
-                <a:cs typeface="Arial" pitchFamily="34" charset="-120"/>
-              </a:rPr>
-              <a:t>FOR INFORMATIONAL PURPOSES ONLY. NOT INVESTMENT ADVICE. PAST PERFORMANCE IS NOT INDICATIVE OF FUTURE RESULTS.</a:t>
-            </a:r>
-            <a:endParaRPr lang="en-US" sz="650" dirty="0"/>
-          </a:p>
-        </p:txBody>
-      </p:sp>
-      <p:sp>
-        <p:nvSpPr>
-          <p:cNvPr id="22" name="Text 20"/>
-          <p:cNvSpPr/>
-          <p:nvPr/>
-        </p:nvSpPr>
-        <p:spPr>
-          <a:xfrm>
-            <a:off x="8503920" y="4645152"/>
-            <a:ext cx="457200" cy="320040"/>
-          </a:xfrm>
-          <a:prstGeom prst="rect">
-            <a:avLst/>
-          </a:prstGeom>
-          <a:noFill/>
-          <a:ln/>
-        </p:spPr>
-        <p:txBody>
-          <a:bodyPr wrap="square" lIns="0" tIns="0" rIns="0" bIns="0" rtlCol="0" anchor="ctr"/>
-          <a:lstStyle/>
-          <a:p>
-            <a:pPr algn="r" indent="0" marL="0">
-              <a:buNone/>
-            </a:pPr>
-            <a:r>
-              <a:rPr lang="en-US" sz="900" dirty="0">
-                <a:solidFill>
-                  <a:srgbClr val="9A9AA0"/>
-                </a:solidFill>
-                <a:latin typeface="Arial" pitchFamily="34" charset="0"/>
-                <a:ea typeface="Arial" pitchFamily="34" charset="-122"/>
-                <a:cs typeface="Arial" pitchFamily="34" charset="-120"/>
-              </a:rPr>
-              <a:t>12</a:t>
             </a:r>
             <a:endParaRPr lang="en-US" sz="900" dirty="0"/>
           </a:p>
@@ -6456,7 +5229,7 @@
                 <a:ea typeface="Arial" pitchFamily="34" charset="-122"/>
                 <a:cs typeface="Arial" pitchFamily="34" charset="-120"/>
               </a:rPr>
-              <a:t>Capability, economics, and policy are all moving at once — the reason this isn't 2023's hype cycle.</a:t>
+              <a:t>Capability, economics, and policy are all moving at once — the reason this isn’t 2023’s hype cycle.</a:t>
             </a:r>
             <a:endParaRPr lang="en-US" sz="1300" dirty="0"/>
           </a:p>
@@ -6471,91 +5244,10 @@
         <p:spPr>
           <a:xfrm>
             <a:off x="457200" y="1481328"/>
-            <a:ext cx="2697480" cy="2395728"/>
-          </a:xfrm>
-          <a:prstGeom prst="rect">
-            <a:avLst/>
-          </a:prstGeom>
-          <a:solidFill>
-            <a:srgbClr val="1C1C20"/>
-          </a:solidFill>
-          <a:ln/>
-        </p:spPr>
-      </p:sp>
-      <p:sp>
-        <p:nvSpPr>
-          <p:cNvPr id="5" name="Shape 3"/>
-          <p:cNvSpPr/>
-          <p:nvPr/>
-        </p:nvSpPr>
-        <p:spPr>
-          <a:xfrm>
-            <a:off x="457200" y="1481328"/>
-            <a:ext cx="2697480" cy="45720"/>
-          </a:xfrm>
-          <a:prstGeom prst="rect">
-            <a:avLst/>
-          </a:prstGeom>
-          <a:solidFill>
-            <a:srgbClr val="2BC4C4"/>
-          </a:solidFill>
-          <a:ln/>
-        </p:spPr>
-      </p:sp>
-      <p:sp>
-        <p:nvSpPr>
-          <p:cNvPr id="6" name="Text 4"/>
-          <p:cNvSpPr/>
-          <p:nvPr/>
-        </p:nvSpPr>
-        <p:spPr>
-          <a:xfrm>
-            <a:off x="457200" y="1627632"/>
-            <a:ext cx="2697480" cy="182880"/>
-          </a:xfrm>
-          <a:prstGeom prst="rect">
-            <a:avLst/>
-          </a:prstGeom>
-          <a:noFill/>
-          <a:ln/>
-        </p:spPr>
-        <p:txBody>
-          <a:bodyPr wrap="square" lIns="0" tIns="0" rIns="0" bIns="0" rtlCol="0" anchor="ctr"/>
-          <a:lstStyle/>
-          <a:p>
-            <a:pPr algn="ctr" indent="0" marL="0">
-              <a:buNone/>
-            </a:pPr>
-            <a:r>
-              <a:rPr lang="en-US" sz="800" b="1" spc="200" kern="0" dirty="0">
-                <a:solidFill>
-                  <a:srgbClr val="2BC4C4"/>
-                </a:solidFill>
-                <a:latin typeface="Arial" pitchFamily="34" charset="0"/>
-                <a:ea typeface="Arial" pitchFamily="34" charset="-122"/>
-                <a:cs typeface="Arial" pitchFamily="34" charset="-120"/>
-              </a:rPr>
-              <a:t>CAPABILITY</a:t>
-            </a:r>
-            <a:endParaRPr lang="en-US" sz="800" dirty="0"/>
-          </a:p>
-        </p:txBody>
-      </p:sp>
-      <p:sp>
-        <p:nvSpPr>
-          <p:cNvPr id="7" name="Shape 5"/>
-          <p:cNvSpPr/>
-          <p:nvPr/>
-        </p:nvSpPr>
-        <p:spPr>
-          <a:xfrm>
-            <a:off x="868680" y="1938528"/>
-            <a:ext cx="1874520" cy="384048"/>
-          </a:xfrm>
-          <a:prstGeom prst="roundRect">
-            <a:avLst>
-              <a:gd name="adj" fmla="val 11905"/>
-            </a:avLst>
+            <a:ext cx="8229600" cy="2468880"/>
+          </a:xfrm>
+          <a:prstGeom prst="rect">
+            <a:avLst/>
           </a:prstGeom>
           <a:solidFill>
             <a:srgbClr val="1E1E24"/>
@@ -6564,20 +5256,100 @@
             <a:solidFill>
               <a:srgbClr val="2A2A30"/>
             </a:solidFill>
-            <a:prstDash val="solid"/>
+            <a:prstDash val="dash"/>
           </a:ln>
         </p:spPr>
       </p:sp>
       <p:sp>
         <p:nvSpPr>
-          <p:cNvPr id="8" name="Text 6"/>
-          <p:cNvSpPr/>
-          <p:nvPr/>
-        </p:nvSpPr>
-        <p:spPr>
-          <a:xfrm>
-            <a:off x="868680" y="1938528"/>
-            <a:ext cx="1874520" cy="384048"/>
+          <p:cNvPr id="5" name="Shape 3"/>
+          <p:cNvSpPr/>
+          <p:nvPr/>
+        </p:nvSpPr>
+        <p:spPr>
+          <a:xfrm>
+            <a:off x="457200" y="1481328"/>
+            <a:ext cx="310896" cy="36576"/>
+          </a:xfrm>
+          <a:prstGeom prst="rect">
+            <a:avLst/>
+          </a:prstGeom>
+          <a:solidFill>
+            <a:srgbClr val="FFD100"/>
+          </a:solidFill>
+          <a:ln/>
+        </p:spPr>
+      </p:sp>
+      <p:sp>
+        <p:nvSpPr>
+          <p:cNvPr id="6" name="Shape 4"/>
+          <p:cNvSpPr/>
+          <p:nvPr/>
+        </p:nvSpPr>
+        <p:spPr>
+          <a:xfrm>
+            <a:off x="457200" y="1481328"/>
+            <a:ext cx="36576" cy="310896"/>
+          </a:xfrm>
+          <a:prstGeom prst="rect">
+            <a:avLst/>
+          </a:prstGeom>
+          <a:solidFill>
+            <a:srgbClr val="FFD100"/>
+          </a:solidFill>
+          <a:ln/>
+        </p:spPr>
+      </p:sp>
+      <p:sp>
+        <p:nvSpPr>
+          <p:cNvPr id="7" name="Shape 5"/>
+          <p:cNvSpPr/>
+          <p:nvPr/>
+        </p:nvSpPr>
+        <p:spPr>
+          <a:xfrm>
+            <a:off x="8375904" y="3913632"/>
+            <a:ext cx="310896" cy="36576"/>
+          </a:xfrm>
+          <a:prstGeom prst="rect">
+            <a:avLst/>
+          </a:prstGeom>
+          <a:solidFill>
+            <a:srgbClr val="FFD100"/>
+          </a:solidFill>
+          <a:ln/>
+        </p:spPr>
+      </p:sp>
+      <p:sp>
+        <p:nvSpPr>
+          <p:cNvPr id="8" name="Shape 6"/>
+          <p:cNvSpPr/>
+          <p:nvPr/>
+        </p:nvSpPr>
+        <p:spPr>
+          <a:xfrm>
+            <a:off x="8650224" y="3639312"/>
+            <a:ext cx="36576" cy="310896"/>
+          </a:xfrm>
+          <a:prstGeom prst="rect">
+            <a:avLst/>
+          </a:prstGeom>
+          <a:solidFill>
+            <a:srgbClr val="FFD100"/>
+          </a:solidFill>
+          <a:ln/>
+        </p:spPr>
+      </p:sp>
+      <p:sp>
+        <p:nvSpPr>
+          <p:cNvPr id="9" name="Text 7"/>
+          <p:cNvSpPr/>
+          <p:nvPr/>
+        </p:nvSpPr>
+        <p:spPr>
+          <a:xfrm>
+            <a:off x="640080" y="1627632"/>
+            <a:ext cx="7863840" cy="219456"/>
           </a:xfrm>
           <a:prstGeom prst="rect">
             <a:avLst/>
@@ -6589,124 +5361,34 @@
           <a:bodyPr wrap="square" lIns="0" tIns="0" rIns="0" bIns="0" rtlCol="0" anchor="ctr"/>
           <a:lstStyle/>
           <a:p>
-            <a:pPr algn="ctr" indent="0" marL="0">
-              <a:buNone/>
-            </a:pPr>
-            <a:r>
-              <a:rPr lang="en-US" sz="950" dirty="0">
-                <a:solidFill>
-                  <a:srgbClr val="9A9AA0"/>
-                </a:solidFill>
-                <a:latin typeface="Arial" pitchFamily="34" charset="0"/>
-                <a:ea typeface="Arial" pitchFamily="34" charset="-122"/>
-                <a:cs typeface="Arial" pitchFamily="34" charset="-120"/>
-              </a:rPr>
-              <a:t>Linear chat</a:t>
-            </a:r>
-            <a:endParaRPr lang="en-US" sz="950" dirty="0"/>
-          </a:p>
-        </p:txBody>
-      </p:sp>
-      <p:sp>
-        <p:nvSpPr>
-          <p:cNvPr id="9" name="Shape 7"/>
-          <p:cNvSpPr/>
-          <p:nvPr/>
-        </p:nvSpPr>
-        <p:spPr>
-          <a:xfrm>
-            <a:off x="1805940" y="2359152"/>
-            <a:ext cx="0" cy="237744"/>
-          </a:xfrm>
-          <a:prstGeom prst="line">
-            <a:avLst/>
-          </a:prstGeom>
-          <a:noFill/>
-          <a:ln w="25400">
-            <a:solidFill>
-              <a:srgbClr val="2BC4C4"/>
-            </a:solidFill>
-            <a:prstDash val="solid"/>
-            <a:tailEnd type="triangle"/>
-          </a:ln>
-        </p:spPr>
-      </p:sp>
-      <p:sp>
-        <p:nvSpPr>
-          <p:cNvPr id="10" name="Shape 8"/>
-          <p:cNvSpPr/>
-          <p:nvPr/>
-        </p:nvSpPr>
-        <p:spPr>
-          <a:xfrm>
-            <a:off x="868680" y="2633472"/>
-            <a:ext cx="1874520" cy="384048"/>
-          </a:xfrm>
-          <a:prstGeom prst="roundRect">
-            <a:avLst>
-              <a:gd name="adj" fmla="val 11905"/>
-            </a:avLst>
-          </a:prstGeom>
-          <a:solidFill>
-            <a:srgbClr val="1C1C20"/>
-          </a:solidFill>
-          <a:ln w="19050">
-            <a:solidFill>
-              <a:srgbClr val="2BC4C4"/>
-            </a:solidFill>
-            <a:prstDash val="solid"/>
-          </a:ln>
-        </p:spPr>
-      </p:sp>
-      <p:sp>
-        <p:nvSpPr>
-          <p:cNvPr id="11" name="Text 9"/>
-          <p:cNvSpPr/>
-          <p:nvPr/>
-        </p:nvSpPr>
-        <p:spPr>
-          <a:xfrm>
-            <a:off x="868680" y="2633472"/>
-            <a:ext cx="1874520" cy="384048"/>
-          </a:xfrm>
-          <a:prstGeom prst="rect">
-            <a:avLst/>
-          </a:prstGeom>
-          <a:noFill/>
-          <a:ln/>
-        </p:spPr>
-        <p:txBody>
-          <a:bodyPr wrap="square" lIns="0" tIns="0" rIns="0" bIns="0" rtlCol="0" anchor="ctr"/>
-          <a:lstStyle/>
-          <a:p>
-            <a:pPr algn="ctr" indent="0" marL="0">
-              <a:buNone/>
-            </a:pPr>
-            <a:r>
-              <a:rPr lang="en-US" sz="950" b="1" dirty="0">
-                <a:solidFill>
-                  <a:srgbClr val="FFFFFF"/>
-                </a:solidFill>
-                <a:latin typeface="Arial" pitchFamily="34" charset="0"/>
-                <a:ea typeface="Arial" pitchFamily="34" charset="-122"/>
-                <a:cs typeface="Arial" pitchFamily="34" charset="-120"/>
-              </a:rPr>
-              <a:t>Autonomous loops</a:t>
-            </a:r>
-            <a:endParaRPr lang="en-US" sz="950" dirty="0"/>
-          </a:p>
-        </p:txBody>
-      </p:sp>
-      <p:sp>
-        <p:nvSpPr>
-          <p:cNvPr id="12" name="Text 10"/>
-          <p:cNvSpPr/>
-          <p:nvPr/>
-        </p:nvSpPr>
-        <p:spPr>
-          <a:xfrm>
-            <a:off x="621792" y="3163824"/>
-            <a:ext cx="2368296" cy="658368"/>
+            <a:pPr indent="0" marL="0">
+              <a:buNone/>
+            </a:pPr>
+            <a:r>
+              <a:rPr lang="en-US" sz="900" b="1" spc="200" kern="0" dirty="0">
+                <a:solidFill>
+                  <a:srgbClr val="FFD100"/>
+                </a:solidFill>
+                <a:latin typeface="Arial" pitchFamily="34" charset="0"/>
+                <a:ea typeface="Arial" pitchFamily="34" charset="-122"/>
+                <a:cs typeface="Arial" pitchFamily="34" charset="-120"/>
+              </a:rPr>
+              <a:t>IMAGE  ·  three shifts</a:t>
+            </a:r>
+            <a:endParaRPr lang="en-US" sz="900" dirty="0"/>
+          </a:p>
+        </p:txBody>
+      </p:sp>
+      <p:sp>
+        <p:nvSpPr>
+          <p:cNvPr id="10" name="Text 8"/>
+          <p:cNvSpPr/>
+          <p:nvPr/>
+        </p:nvSpPr>
+        <p:spPr>
+          <a:xfrm>
+            <a:off x="640080" y="1901952"/>
+            <a:ext cx="7863840" cy="1865376"/>
           </a:xfrm>
           <a:prstGeom prst="rect">
             <a:avLst/>
@@ -6718,575 +5400,44 @@
           <a:bodyPr wrap="square" lIns="0" tIns="0" rIns="0" bIns="0" rtlCol="0" anchor="t"/>
           <a:lstStyle/>
           <a:p>
-            <a:pPr algn="ctr" indent="0" marL="0">
+            <a:pPr indent="0" marL="0">
+              <a:buNone/>
+            </a:pPr>
+            <a:r>
+              <a:rPr lang="en-US" sz="700" i="1" dirty="0">
+                <a:solidFill>
+                  <a:srgbClr val="8A8A90"/>
+                </a:solidFill>
+                <a:latin typeface="Arial" pitchFamily="34" charset="0"/>
+                <a:ea typeface="Arial" pitchFamily="34" charset="-122"/>
+                <a:cs typeface="Arial" pitchFamily="34" charset="-120"/>
+              </a:rPr>
+              <a:t>IMAGE PROMPT → save as three-shifts.png</a:t>
+            </a:r>
+            <a:endParaRPr lang="en-US" sz="700" dirty="0"/>
+          </a:p>
+          <a:p>
+            <a:pPr indent="0" marL="0">
               <a:buNone/>
             </a:pPr>
             <a:r>
               <a:rPr lang="en-US" sz="850" dirty="0">
                 <a:solidFill>
-                  <a:srgbClr val="9A9AA0"/>
-                </a:solidFill>
-                <a:latin typeface="Arial" pitchFamily="34" charset="0"/>
-                <a:ea typeface="Arial" pitchFamily="34" charset="-122"/>
-                <a:cs typeface="Arial" pitchFamily="34" charset="-120"/>
-              </a:rPr>
-              <a:t>Models became self-correcting agents that run until the task is done.</a:t>
-            </a:r>
-            <a:endParaRPr lang="en-US" sz="850" dirty="0"/>
-          </a:p>
-        </p:txBody>
-      </p:sp>
-      <p:sp>
-        <p:nvSpPr>
-          <p:cNvPr id="13" name="Shape 11"/>
-          <p:cNvSpPr/>
-          <p:nvPr/>
-        </p:nvSpPr>
-        <p:spPr>
-          <a:xfrm>
-            <a:off x="3264408" y="1481328"/>
-            <a:ext cx="2697480" cy="2395728"/>
-          </a:xfrm>
-          <a:prstGeom prst="rect">
-            <a:avLst/>
-          </a:prstGeom>
-          <a:solidFill>
-            <a:srgbClr val="1C1C20"/>
-          </a:solidFill>
-          <a:ln/>
-        </p:spPr>
-      </p:sp>
-      <p:sp>
-        <p:nvSpPr>
-          <p:cNvPr id="14" name="Shape 12"/>
-          <p:cNvSpPr/>
-          <p:nvPr/>
-        </p:nvSpPr>
-        <p:spPr>
-          <a:xfrm>
-            <a:off x="3264408" y="1481328"/>
-            <a:ext cx="2697480" cy="45720"/>
-          </a:xfrm>
-          <a:prstGeom prst="rect">
-            <a:avLst/>
-          </a:prstGeom>
-          <a:solidFill>
-            <a:srgbClr val="F6693D"/>
-          </a:solidFill>
-          <a:ln/>
-        </p:spPr>
-      </p:sp>
-      <p:sp>
-        <p:nvSpPr>
-          <p:cNvPr id="15" name="Text 13"/>
-          <p:cNvSpPr/>
-          <p:nvPr/>
-        </p:nvSpPr>
-        <p:spPr>
-          <a:xfrm>
-            <a:off x="3264408" y="1627632"/>
-            <a:ext cx="2697480" cy="182880"/>
-          </a:xfrm>
-          <a:prstGeom prst="rect">
-            <a:avLst/>
-          </a:prstGeom>
-          <a:noFill/>
-          <a:ln/>
-        </p:spPr>
-        <p:txBody>
-          <a:bodyPr wrap="square" lIns="0" tIns="0" rIns="0" bIns="0" rtlCol="0" anchor="ctr"/>
-          <a:lstStyle/>
-          <a:p>
-            <a:pPr algn="ctr" indent="0" marL="0">
-              <a:buNone/>
-            </a:pPr>
-            <a:r>
-              <a:rPr lang="en-US" sz="800" b="1" spc="200" kern="0" dirty="0">
-                <a:solidFill>
-                  <a:srgbClr val="F6693D"/>
-                </a:solidFill>
-                <a:latin typeface="Arial" pitchFamily="34" charset="0"/>
-                <a:ea typeface="Arial" pitchFamily="34" charset="-122"/>
-                <a:cs typeface="Arial" pitchFamily="34" charset="-120"/>
-              </a:rPr>
-              <a:t>ECONOMICS</a:t>
-            </a:r>
-            <a:endParaRPr lang="en-US" sz="800" dirty="0"/>
-          </a:p>
-        </p:txBody>
-      </p:sp>
-      <p:sp>
-        <p:nvSpPr>
-          <p:cNvPr id="16" name="Shape 14"/>
-          <p:cNvSpPr/>
-          <p:nvPr/>
-        </p:nvSpPr>
-        <p:spPr>
-          <a:xfrm>
-            <a:off x="3675888" y="1938528"/>
-            <a:ext cx="1874520" cy="384048"/>
-          </a:xfrm>
-          <a:prstGeom prst="roundRect">
-            <a:avLst>
-              <a:gd name="adj" fmla="val 11905"/>
-            </a:avLst>
-          </a:prstGeom>
-          <a:solidFill>
-            <a:srgbClr val="1E1E24"/>
-          </a:solidFill>
-          <a:ln w="12700">
-            <a:solidFill>
-              <a:srgbClr val="2A2A30"/>
-            </a:solidFill>
-            <a:prstDash val="solid"/>
-          </a:ln>
-        </p:spPr>
-      </p:sp>
-      <p:sp>
-        <p:nvSpPr>
-          <p:cNvPr id="17" name="Text 15"/>
-          <p:cNvSpPr/>
-          <p:nvPr/>
-        </p:nvSpPr>
-        <p:spPr>
-          <a:xfrm>
-            <a:off x="3675888" y="1938528"/>
-            <a:ext cx="1874520" cy="384048"/>
-          </a:xfrm>
-          <a:prstGeom prst="rect">
-            <a:avLst/>
-          </a:prstGeom>
-          <a:noFill/>
-          <a:ln/>
-        </p:spPr>
-        <p:txBody>
-          <a:bodyPr wrap="square" lIns="0" tIns="0" rIns="0" bIns="0" rtlCol="0" anchor="ctr"/>
-          <a:lstStyle/>
-          <a:p>
-            <a:pPr algn="ctr" indent="0" marL="0">
-              <a:buNone/>
-            </a:pPr>
-            <a:r>
-              <a:rPr lang="en-US" sz="950" dirty="0">
-                <a:solidFill>
-                  <a:srgbClr val="9A9AA0"/>
-                </a:solidFill>
-                <a:latin typeface="Arial" pitchFamily="34" charset="0"/>
-                <a:ea typeface="Arial" pitchFamily="34" charset="-122"/>
-                <a:cs typeface="Arial" pitchFamily="34" charset="-120"/>
-              </a:rPr>
-              <a:t>Token subsidy</a:t>
-            </a:r>
-            <a:endParaRPr lang="en-US" sz="950" dirty="0"/>
-          </a:p>
-        </p:txBody>
-      </p:sp>
-      <p:sp>
-        <p:nvSpPr>
-          <p:cNvPr id="18" name="Shape 16"/>
-          <p:cNvSpPr/>
-          <p:nvPr/>
-        </p:nvSpPr>
-        <p:spPr>
-          <a:xfrm>
-            <a:off x="4613148" y="2359152"/>
-            <a:ext cx="0" cy="237744"/>
-          </a:xfrm>
-          <a:prstGeom prst="line">
-            <a:avLst/>
-          </a:prstGeom>
-          <a:noFill/>
-          <a:ln w="25400">
-            <a:solidFill>
-              <a:srgbClr val="F6693D"/>
-            </a:solidFill>
-            <a:prstDash val="solid"/>
-            <a:tailEnd type="triangle"/>
-          </a:ln>
-        </p:spPr>
-      </p:sp>
-      <p:sp>
-        <p:nvSpPr>
-          <p:cNvPr id="19" name="Shape 17"/>
-          <p:cNvSpPr/>
-          <p:nvPr/>
-        </p:nvSpPr>
-        <p:spPr>
-          <a:xfrm>
-            <a:off x="3675888" y="2633472"/>
-            <a:ext cx="1874520" cy="384048"/>
-          </a:xfrm>
-          <a:prstGeom prst="roundRect">
-            <a:avLst>
-              <a:gd name="adj" fmla="val 11905"/>
-            </a:avLst>
-          </a:prstGeom>
-          <a:solidFill>
-            <a:srgbClr val="1C1C20"/>
-          </a:solidFill>
-          <a:ln w="19050">
-            <a:solidFill>
-              <a:srgbClr val="F6693D"/>
-            </a:solidFill>
-            <a:prstDash val="solid"/>
-          </a:ln>
-        </p:spPr>
-      </p:sp>
-      <p:sp>
-        <p:nvSpPr>
-          <p:cNvPr id="20" name="Text 18"/>
-          <p:cNvSpPr/>
-          <p:nvPr/>
-        </p:nvSpPr>
-        <p:spPr>
-          <a:xfrm>
-            <a:off x="3675888" y="2633472"/>
-            <a:ext cx="1874520" cy="384048"/>
-          </a:xfrm>
-          <a:prstGeom prst="rect">
-            <a:avLst/>
-          </a:prstGeom>
-          <a:noFill/>
-          <a:ln/>
-        </p:spPr>
-        <p:txBody>
-          <a:bodyPr wrap="square" lIns="0" tIns="0" rIns="0" bIns="0" rtlCol="0" anchor="ctr"/>
-          <a:lstStyle/>
-          <a:p>
-            <a:pPr algn="ctr" indent="0" marL="0">
-              <a:buNone/>
-            </a:pPr>
-            <a:r>
-              <a:rPr lang="en-US" sz="950" b="1" dirty="0">
-                <a:solidFill>
-                  <a:srgbClr val="FFFFFF"/>
-                </a:solidFill>
-                <a:latin typeface="Arial" pitchFamily="34" charset="0"/>
-                <a:ea typeface="Arial" pitchFamily="34" charset="-122"/>
-                <a:cs typeface="Arial" pitchFamily="34" charset="-120"/>
-              </a:rPr>
-              <a:t>Token scarcity</a:t>
-            </a:r>
-            <a:endParaRPr lang="en-US" sz="950" dirty="0"/>
-          </a:p>
-        </p:txBody>
-      </p:sp>
-      <p:sp>
-        <p:nvSpPr>
-          <p:cNvPr id="21" name="Text 19"/>
-          <p:cNvSpPr/>
-          <p:nvPr/>
-        </p:nvSpPr>
-        <p:spPr>
-          <a:xfrm>
-            <a:off x="3429000" y="3163824"/>
-            <a:ext cx="2368296" cy="658368"/>
-          </a:xfrm>
-          <a:prstGeom prst="rect">
-            <a:avLst/>
-          </a:prstGeom>
-          <a:noFill/>
-          <a:ln/>
-        </p:spPr>
-        <p:txBody>
-          <a:bodyPr wrap="square" lIns="0" tIns="0" rIns="0" bIns="0" rtlCol="0" anchor="t"/>
-          <a:lstStyle/>
-          <a:p>
-            <a:pPr algn="ctr" indent="0" marL="0">
-              <a:buNone/>
-            </a:pPr>
-            <a:r>
-              <a:rPr lang="en-US" sz="850" dirty="0">
-                <a:solidFill>
-                  <a:srgbClr val="9A9AA0"/>
-                </a:solidFill>
-                <a:latin typeface="Arial" pitchFamily="34" charset="0"/>
-                <a:ea typeface="Arial" pitchFamily="34" charset="-122"/>
-                <a:cs typeface="Arial" pitchFamily="34" charset="-120"/>
-              </a:rPr>
-              <a:t>Labs stopped subsidizing tokens; enterprises now ration them like a commodity.</a:t>
-            </a:r>
-            <a:endParaRPr lang="en-US" sz="850" dirty="0"/>
-          </a:p>
-        </p:txBody>
-      </p:sp>
-      <p:sp>
-        <p:nvSpPr>
-          <p:cNvPr id="22" name="Shape 20"/>
-          <p:cNvSpPr/>
-          <p:nvPr/>
-        </p:nvSpPr>
-        <p:spPr>
-          <a:xfrm>
-            <a:off x="6071616" y="1481328"/>
-            <a:ext cx="2697480" cy="2395728"/>
-          </a:xfrm>
-          <a:prstGeom prst="rect">
-            <a:avLst/>
-          </a:prstGeom>
-          <a:solidFill>
-            <a:srgbClr val="1C1C20"/>
-          </a:solidFill>
-          <a:ln/>
-        </p:spPr>
-      </p:sp>
-      <p:sp>
-        <p:nvSpPr>
-          <p:cNvPr id="23" name="Shape 21"/>
-          <p:cNvSpPr/>
-          <p:nvPr/>
-        </p:nvSpPr>
-        <p:spPr>
-          <a:xfrm>
-            <a:off x="6071616" y="1481328"/>
-            <a:ext cx="2697480" cy="45720"/>
-          </a:xfrm>
-          <a:prstGeom prst="rect">
-            <a:avLst/>
-          </a:prstGeom>
-          <a:solidFill>
-            <a:srgbClr val="9B7BE0"/>
-          </a:solidFill>
-          <a:ln/>
-        </p:spPr>
-      </p:sp>
-      <p:sp>
-        <p:nvSpPr>
-          <p:cNvPr id="24" name="Text 22"/>
-          <p:cNvSpPr/>
-          <p:nvPr/>
-        </p:nvSpPr>
-        <p:spPr>
-          <a:xfrm>
-            <a:off x="6071616" y="1627632"/>
-            <a:ext cx="2697480" cy="182880"/>
-          </a:xfrm>
-          <a:prstGeom prst="rect">
-            <a:avLst/>
-          </a:prstGeom>
-          <a:noFill/>
-          <a:ln/>
-        </p:spPr>
-        <p:txBody>
-          <a:bodyPr wrap="square" lIns="0" tIns="0" rIns="0" bIns="0" rtlCol="0" anchor="ctr"/>
-          <a:lstStyle/>
-          <a:p>
-            <a:pPr algn="ctr" indent="0" marL="0">
-              <a:buNone/>
-            </a:pPr>
-            <a:r>
-              <a:rPr lang="en-US" sz="800" b="1" spc="200" kern="0" dirty="0">
-                <a:solidFill>
-                  <a:srgbClr val="9B7BE0"/>
-                </a:solidFill>
-                <a:latin typeface="Arial" pitchFamily="34" charset="0"/>
-                <a:ea typeface="Arial" pitchFamily="34" charset="-122"/>
-                <a:cs typeface="Arial" pitchFamily="34" charset="-120"/>
-              </a:rPr>
-              <a:t>POLICY</a:t>
-            </a:r>
-            <a:endParaRPr lang="en-US" sz="800" dirty="0"/>
-          </a:p>
-        </p:txBody>
-      </p:sp>
-      <p:sp>
-        <p:nvSpPr>
-          <p:cNvPr id="25" name="Shape 23"/>
-          <p:cNvSpPr/>
-          <p:nvPr/>
-        </p:nvSpPr>
-        <p:spPr>
-          <a:xfrm>
-            <a:off x="6483096" y="1938528"/>
-            <a:ext cx="1874520" cy="384048"/>
-          </a:xfrm>
-          <a:prstGeom prst="roundRect">
-            <a:avLst>
-              <a:gd name="adj" fmla="val 11905"/>
-            </a:avLst>
-          </a:prstGeom>
-          <a:solidFill>
-            <a:srgbClr val="1E1E24"/>
-          </a:solidFill>
-          <a:ln w="12700">
-            <a:solidFill>
-              <a:srgbClr val="2A2A30"/>
-            </a:solidFill>
-            <a:prstDash val="solid"/>
-          </a:ln>
-        </p:spPr>
-      </p:sp>
-      <p:sp>
-        <p:nvSpPr>
-          <p:cNvPr id="26" name="Text 24"/>
-          <p:cNvSpPr/>
-          <p:nvPr/>
-        </p:nvSpPr>
-        <p:spPr>
-          <a:xfrm>
-            <a:off x="6483096" y="1938528"/>
-            <a:ext cx="1874520" cy="384048"/>
-          </a:xfrm>
-          <a:prstGeom prst="rect">
-            <a:avLst/>
-          </a:prstGeom>
-          <a:noFill/>
-          <a:ln/>
-        </p:spPr>
-        <p:txBody>
-          <a:bodyPr wrap="square" lIns="0" tIns="0" rIns="0" bIns="0" rtlCol="0" anchor="ctr"/>
-          <a:lstStyle/>
-          <a:p>
-            <a:pPr algn="ctr" indent="0" marL="0">
-              <a:buNone/>
-            </a:pPr>
-            <a:r>
-              <a:rPr lang="en-US" sz="950" dirty="0">
-                <a:solidFill>
-                  <a:srgbClr val="9A9AA0"/>
-                </a:solidFill>
-                <a:latin typeface="Arial" pitchFamily="34" charset="0"/>
-                <a:ea typeface="Arial" pitchFamily="34" charset="-122"/>
-                <a:cs typeface="Arial" pitchFamily="34" charset="-120"/>
-              </a:rPr>
-              <a:t>Private tech</a:t>
-            </a:r>
-            <a:endParaRPr lang="en-US" sz="950" dirty="0"/>
-          </a:p>
-        </p:txBody>
-      </p:sp>
-      <p:sp>
-        <p:nvSpPr>
-          <p:cNvPr id="27" name="Shape 25"/>
-          <p:cNvSpPr/>
-          <p:nvPr/>
-        </p:nvSpPr>
-        <p:spPr>
-          <a:xfrm>
-            <a:off x="7420356" y="2359152"/>
-            <a:ext cx="0" cy="237744"/>
-          </a:xfrm>
-          <a:prstGeom prst="line">
-            <a:avLst/>
-          </a:prstGeom>
-          <a:noFill/>
-          <a:ln w="25400">
-            <a:solidFill>
-              <a:srgbClr val="9B7BE0"/>
-            </a:solidFill>
-            <a:prstDash val="solid"/>
-            <a:tailEnd type="triangle"/>
-          </a:ln>
-        </p:spPr>
-      </p:sp>
-      <p:sp>
-        <p:nvSpPr>
-          <p:cNvPr id="28" name="Shape 26"/>
-          <p:cNvSpPr/>
-          <p:nvPr/>
-        </p:nvSpPr>
-        <p:spPr>
-          <a:xfrm>
-            <a:off x="6483096" y="2633472"/>
-            <a:ext cx="1874520" cy="384048"/>
-          </a:xfrm>
-          <a:prstGeom prst="roundRect">
-            <a:avLst>
-              <a:gd name="adj" fmla="val 11905"/>
-            </a:avLst>
-          </a:prstGeom>
-          <a:solidFill>
-            <a:srgbClr val="1C1C20"/>
-          </a:solidFill>
-          <a:ln w="19050">
-            <a:solidFill>
-              <a:srgbClr val="9B7BE0"/>
-            </a:solidFill>
-            <a:prstDash val="solid"/>
-          </a:ln>
-        </p:spPr>
-      </p:sp>
-      <p:sp>
-        <p:nvSpPr>
-          <p:cNvPr id="29" name="Text 27"/>
-          <p:cNvSpPr/>
-          <p:nvPr/>
-        </p:nvSpPr>
-        <p:spPr>
-          <a:xfrm>
-            <a:off x="6483096" y="2633472"/>
-            <a:ext cx="1874520" cy="384048"/>
-          </a:xfrm>
-          <a:prstGeom prst="rect">
-            <a:avLst/>
-          </a:prstGeom>
-          <a:noFill/>
-          <a:ln/>
-        </p:spPr>
-        <p:txBody>
-          <a:bodyPr wrap="square" lIns="0" tIns="0" rIns="0" bIns="0" rtlCol="0" anchor="ctr"/>
-          <a:lstStyle/>
-          <a:p>
-            <a:pPr algn="ctr" indent="0" marL="0">
-              <a:buNone/>
-            </a:pPr>
-            <a:r>
-              <a:rPr lang="en-US" sz="950" b="1" dirty="0">
-                <a:solidFill>
-                  <a:srgbClr val="FFFFFF"/>
-                </a:solidFill>
-                <a:latin typeface="Arial" pitchFamily="34" charset="0"/>
-                <a:ea typeface="Arial" pitchFamily="34" charset="-122"/>
-                <a:cs typeface="Arial" pitchFamily="34" charset="-120"/>
-              </a:rPr>
-              <a:t>Sovereign asset</a:t>
-            </a:r>
-            <a:endParaRPr lang="en-US" sz="950" dirty="0"/>
-          </a:p>
-        </p:txBody>
-      </p:sp>
-      <p:sp>
-        <p:nvSpPr>
-          <p:cNvPr id="30" name="Text 28"/>
-          <p:cNvSpPr/>
-          <p:nvPr/>
-        </p:nvSpPr>
-        <p:spPr>
-          <a:xfrm>
-            <a:off x="6236208" y="3163824"/>
-            <a:ext cx="2368296" cy="658368"/>
-          </a:xfrm>
-          <a:prstGeom prst="rect">
-            <a:avLst/>
-          </a:prstGeom>
-          <a:noFill/>
-          <a:ln/>
-        </p:spPr>
-        <p:txBody>
-          <a:bodyPr wrap="square" lIns="0" tIns="0" rIns="0" bIns="0" rtlCol="0" anchor="t"/>
-          <a:lstStyle/>
-          <a:p>
-            <a:pPr algn="ctr" indent="0" marL="0">
-              <a:buNone/>
-            </a:pPr>
-            <a:r>
-              <a:rPr lang="en-US" sz="850" dirty="0">
-                <a:solidFill>
-                  <a:srgbClr val="9A9AA0"/>
-                </a:solidFill>
-                <a:latin typeface="Arial" pitchFamily="34" charset="0"/>
-                <a:ea typeface="Arial" pitchFamily="34" charset="-122"/>
-                <a:cs typeface="Arial" pitchFamily="34" charset="-120"/>
-              </a:rPr>
-              <a:t>Governments now debate owning a piece of the labs, not just regulating them.</a:t>
-            </a:r>
-            <a:endParaRPr lang="en-US" sz="850" dirty="0"/>
-          </a:p>
-        </p:txBody>
-      </p:sp>
-      <p:sp>
-        <p:nvSpPr>
-          <p:cNvPr id="31" name="Shape 29"/>
+                  <a:srgbClr val="C9C9CE"/>
+                </a:solidFill>
+                <a:latin typeface="Arial" pitchFamily="34" charset="0"/>
+                <a:ea typeface="Arial" pitchFamily="34" charset="-122"/>
+                <a:cs typeface="Arial" pitchFamily="34" charset="-120"/>
+              </a:rPr>
+              <a:t>Clean flat infographic illustration, data-visualization aesthetic, modern and informational: three equal vertical columns arranged horizontally, each showing a transformation. LEFT COLUMN (teal #2BC4C4 accent): a chat-bubble icon at top in muted gray, a downward arrow in teal, a circular loop/cycle icon at bottom in bright teal. CENTER COLUMN (orange #F6693D accent): a coin/token icon with infinity symbol at top in muted gray, a downward arrow in orange, a metered gauge showing limited supply at bottom in bright orange. RIGHT COLUMN (gold #FFB800 accent): a small building/company icon at top in muted gray, a downward arrow in gold, a government dome + shield icon at bottom in bright gold. Thin vertical divider lines (#2A2A30) separate the columns; each column has a subtle rounded-rectangle background panel (#1C1C20); generous spacing. Deep near-black (#111114) background; clean vector-style shapes with soft gradients; muted institutional palette with selective bright accents; generous whitespace; organized layout with clear visual hierarchy; no photorealism, no dramatic lighting, no 3D renders; no text, no words, no logos, no watermark.</a:t>
+            </a:r>
+            <a:endParaRPr lang="en-US" sz="700" dirty="0"/>
+          </a:p>
+        </p:txBody>
+      </p:sp>
+      <p:sp>
+        <p:nvSpPr>
+          <p:cNvPr id="11" name="Shape 9"/>
           <p:cNvSpPr/>
           <p:nvPr/>
         </p:nvSpPr>
@@ -7306,7 +5457,7 @@
       </p:sp>
       <p:sp>
         <p:nvSpPr>
-          <p:cNvPr id="32" name="Shape 30"/>
+          <p:cNvPr id="12" name="Shape 10"/>
           <p:cNvSpPr/>
           <p:nvPr/>
         </p:nvSpPr>
@@ -7326,7 +5477,7 @@
       </p:sp>
       <p:sp>
         <p:nvSpPr>
-          <p:cNvPr id="33" name="Text 31"/>
+          <p:cNvPr id="13" name="Text 11"/>
           <p:cNvSpPr/>
           <p:nvPr/>
         </p:nvSpPr>
@@ -7357,7 +5508,7 @@
                 <a:ea typeface="Arial" pitchFamily="34" charset="-122"/>
                 <a:cs typeface="Arial" pitchFamily="34" charset="-120"/>
               </a:rPr>
-              <a:t>The chatbot's economics are exhausted. The stack is reorganizing around token-burning agentic loops — and markets are repricing around it.</a:t>
+              <a:t>The chatbot’s economics are exhausted. The stack is reorganizing around token-burning agentic loops — and the repricing has only begun.</a:t>
             </a:r>
             <a:endParaRPr lang="en-US" sz="1100" dirty="0"/>
           </a:p>
@@ -7365,7 +5516,7 @@
       </p:sp>
       <p:sp>
         <p:nvSpPr>
-          <p:cNvPr id="34" name="Shape 32"/>
+          <p:cNvPr id="14" name="Shape 12"/>
           <p:cNvSpPr/>
           <p:nvPr/>
         </p:nvSpPr>
@@ -7385,7 +5536,7 @@
       </p:sp>
       <p:sp>
         <p:nvSpPr>
-          <p:cNvPr id="35" name="Shape 33"/>
+          <p:cNvPr id="15" name="Shape 13"/>
           <p:cNvSpPr/>
           <p:nvPr/>
         </p:nvSpPr>
@@ -7408,7 +5559,7 @@
       </p:sp>
       <p:sp>
         <p:nvSpPr>
-          <p:cNvPr id="36" name="Text 34"/>
+          <p:cNvPr id="16" name="Text 14"/>
           <p:cNvSpPr/>
           <p:nvPr/>
         </p:nvSpPr>
@@ -7447,7 +5598,7 @@
       </p:sp>
       <p:sp>
         <p:nvSpPr>
-          <p:cNvPr id="37" name="Text 35"/>
+          <p:cNvPr id="17" name="Text 15"/>
           <p:cNvSpPr/>
           <p:nvPr/>
         </p:nvSpPr>
@@ -7569,7 +5720,7 @@
                 <a:ea typeface="Arial" pitchFamily="34" charset="-122"/>
                 <a:cs typeface="Arial" pitchFamily="34" charset="-120"/>
               </a:rPr>
-              <a:t>01  ·  WHAT'S HAPPENING  ·  DIAGNOSTIC MATRIX</a:t>
+              <a:t>01  ·  THE SHIFT SO FAR  ·  DIAGNOSTIC MATRIX</a:t>
             </a:r>
             <a:endParaRPr lang="en-US" sz="900" dirty="0"/>
           </a:p>
@@ -7647,7 +5798,7 @@
                 <a:ea typeface="Arial" pitchFamily="34" charset="-122"/>
                 <a:cs typeface="Arial" pitchFamily="34" charset="-120"/>
               </a:rPr>
-              <a:t>Four dimensions where the shift from assisted to agentic shows up — each reprices differently.</a:t>
+              <a:t>Four dimensions where the shift from assisted to agentic shows up — most enterprises are still between columns.</a:t>
             </a:r>
             <a:endParaRPr lang="en-US" sz="1300" dirty="0"/>
           </a:p>
@@ -7711,7 +5862,7 @@
                 <a:ea typeface="Arial" pitchFamily="34" charset="-122"/>
                 <a:cs typeface="Arial" pitchFamily="34" charset="-120"/>
               </a:rPr>
-              <a:t>The Assisted Era</a:t>
+              <a:t>The Assisted Era (fading)</a:t>
             </a:r>
             <a:endParaRPr lang="en-US" sz="1200" dirty="0"/>
           </a:p>
@@ -7775,7 +5926,7 @@
                 <a:ea typeface="Arial" pitchFamily="34" charset="-122"/>
                 <a:cs typeface="Arial" pitchFamily="34" charset="-120"/>
               </a:rPr>
-              <a:t>The Agentic Era</a:t>
+              <a:t>The Agentic Era (emerging)</a:t>
             </a:r>
             <a:endParaRPr lang="en-US" sz="1200" dirty="0"/>
           </a:p>
@@ -8845,7 +6996,7 @@
                 <a:ea typeface="Arial" pitchFamily="34" charset="-122"/>
                 <a:cs typeface="Arial" pitchFamily="34" charset="-120"/>
               </a:rPr>
-              <a:t>01  ·  WHAT'S HAPPENING  ·  AGENTIC LOOPS</a:t>
+              <a:t>01  ·  THE SHIFT SO FAR  ·  AGENTIC LOOPS</a:t>
             </a:r>
             <a:endParaRPr lang="en-US" sz="900" dirty="0"/>
           </a:p>
@@ -8931,14 +7082,119 @@
       </p:sp>
       <p:sp>
         <p:nvSpPr>
-          <p:cNvPr id="6" name="Text 4"/>
-          <p:cNvSpPr/>
-          <p:nvPr/>
-        </p:nvSpPr>
-        <p:spPr>
-          <a:xfrm>
-            <a:off x="457200" y="1664208"/>
-            <a:ext cx="3931920" cy="182880"/>
+          <p:cNvPr id="6" name="Shape 4"/>
+          <p:cNvSpPr/>
+          <p:nvPr/>
+        </p:nvSpPr>
+        <p:spPr>
+          <a:xfrm>
+            <a:off x="457200" y="1508760"/>
+            <a:ext cx="5029200" cy="2514600"/>
+          </a:xfrm>
+          <a:prstGeom prst="rect">
+            <a:avLst/>
+          </a:prstGeom>
+          <a:solidFill>
+            <a:srgbClr val="1E1E24"/>
+          </a:solidFill>
+          <a:ln w="12700">
+            <a:solidFill>
+              <a:srgbClr val="2A2A30"/>
+            </a:solidFill>
+            <a:prstDash val="dash"/>
+          </a:ln>
+        </p:spPr>
+      </p:sp>
+      <p:sp>
+        <p:nvSpPr>
+          <p:cNvPr id="7" name="Shape 5"/>
+          <p:cNvSpPr/>
+          <p:nvPr/>
+        </p:nvSpPr>
+        <p:spPr>
+          <a:xfrm>
+            <a:off x="457200" y="1508760"/>
+            <a:ext cx="310896" cy="36576"/>
+          </a:xfrm>
+          <a:prstGeom prst="rect">
+            <a:avLst/>
+          </a:prstGeom>
+          <a:solidFill>
+            <a:srgbClr val="2BC4C4"/>
+          </a:solidFill>
+          <a:ln/>
+        </p:spPr>
+      </p:sp>
+      <p:sp>
+        <p:nvSpPr>
+          <p:cNvPr id="8" name="Shape 6"/>
+          <p:cNvSpPr/>
+          <p:nvPr/>
+        </p:nvSpPr>
+        <p:spPr>
+          <a:xfrm>
+            <a:off x="457200" y="1508760"/>
+            <a:ext cx="36576" cy="310896"/>
+          </a:xfrm>
+          <a:prstGeom prst="rect">
+            <a:avLst/>
+          </a:prstGeom>
+          <a:solidFill>
+            <a:srgbClr val="2BC4C4"/>
+          </a:solidFill>
+          <a:ln/>
+        </p:spPr>
+      </p:sp>
+      <p:sp>
+        <p:nvSpPr>
+          <p:cNvPr id="9" name="Shape 7"/>
+          <p:cNvSpPr/>
+          <p:nvPr/>
+        </p:nvSpPr>
+        <p:spPr>
+          <a:xfrm>
+            <a:off x="5175504" y="3986784"/>
+            <a:ext cx="310896" cy="36576"/>
+          </a:xfrm>
+          <a:prstGeom prst="rect">
+            <a:avLst/>
+          </a:prstGeom>
+          <a:solidFill>
+            <a:srgbClr val="2BC4C4"/>
+          </a:solidFill>
+          <a:ln/>
+        </p:spPr>
+      </p:sp>
+      <p:sp>
+        <p:nvSpPr>
+          <p:cNvPr id="10" name="Shape 8"/>
+          <p:cNvSpPr/>
+          <p:nvPr/>
+        </p:nvSpPr>
+        <p:spPr>
+          <a:xfrm>
+            <a:off x="5449824" y="3712464"/>
+            <a:ext cx="36576" cy="310896"/>
+          </a:xfrm>
+          <a:prstGeom prst="rect">
+            <a:avLst/>
+          </a:prstGeom>
+          <a:solidFill>
+            <a:srgbClr val="2BC4C4"/>
+          </a:solidFill>
+          <a:ln/>
+        </p:spPr>
+      </p:sp>
+      <p:sp>
+        <p:nvSpPr>
+          <p:cNvPr id="11" name="Text 9"/>
+          <p:cNvSpPr/>
+          <p:nvPr/>
+        </p:nvSpPr>
+        <p:spPr>
+          <a:xfrm>
+            <a:off x="640080" y="1655064"/>
+            <a:ext cx="4663440" cy="219456"/>
           </a:xfrm>
           <a:prstGeom prst="rect">
             <a:avLst/>
@@ -8962,7 +7218,7 @@
                 <a:ea typeface="Arial" pitchFamily="34" charset="-122"/>
                 <a:cs typeface="Arial" pitchFamily="34" charset="-120"/>
               </a:rPr>
-              <a:t>THE AGENTIC LOOP</a:t>
+              <a:t>IMAGE  ·  agentic loop + jevons</a:t>
             </a:r>
             <a:endParaRPr lang="en-US" sz="900" dirty="0"/>
           </a:p>
@@ -8970,415 +7226,55 @@
       </p:sp>
       <p:sp>
         <p:nvSpPr>
-          <p:cNvPr id="7" name="Shape 5"/>
-          <p:cNvSpPr/>
-          <p:nvPr/>
-        </p:nvSpPr>
-        <p:spPr>
-          <a:xfrm>
-            <a:off x="868680" y="2011680"/>
-            <a:ext cx="1097280" cy="457200"/>
-          </a:xfrm>
-          <a:prstGeom prst="roundRect">
-            <a:avLst>
-              <a:gd name="adj" fmla="val 12000"/>
-            </a:avLst>
-          </a:prstGeom>
-          <a:solidFill>
-            <a:srgbClr val="1C1C20"/>
-          </a:solidFill>
-          <a:ln w="19050">
-            <a:solidFill>
-              <a:srgbClr val="2BC4C4"/>
-            </a:solidFill>
-            <a:prstDash val="solid"/>
-          </a:ln>
-        </p:spPr>
-      </p:sp>
-      <p:sp>
-        <p:nvSpPr>
-          <p:cNvPr id="8" name="Text 6"/>
-          <p:cNvSpPr/>
-          <p:nvPr/>
-        </p:nvSpPr>
-        <p:spPr>
-          <a:xfrm>
-            <a:off x="868680" y="2011680"/>
-            <a:ext cx="1097280" cy="457200"/>
-          </a:xfrm>
-          <a:prstGeom prst="rect">
-            <a:avLst/>
-          </a:prstGeom>
-          <a:noFill/>
-          <a:ln/>
-        </p:spPr>
-        <p:txBody>
-          <a:bodyPr wrap="square" lIns="0" tIns="0" rIns="0" bIns="0" rtlCol="0" anchor="ctr"/>
-          <a:lstStyle/>
-          <a:p>
-            <a:pPr algn="ctr" indent="0" marL="0">
-              <a:buNone/>
-            </a:pPr>
-            <a:r>
-              <a:rPr lang="en-US" sz="1000" b="1" dirty="0">
-                <a:solidFill>
-                  <a:srgbClr val="2BC4C4"/>
-                </a:solidFill>
-                <a:latin typeface="Arial" pitchFamily="34" charset="0"/>
-                <a:ea typeface="Arial" pitchFamily="34" charset="-122"/>
-                <a:cs typeface="Arial" pitchFamily="34" charset="-120"/>
-              </a:rPr>
-              <a:t>TRY</a:t>
-            </a:r>
-            <a:endParaRPr lang="en-US" sz="1000" dirty="0"/>
-          </a:p>
-        </p:txBody>
-      </p:sp>
-      <p:sp>
-        <p:nvSpPr>
-          <p:cNvPr id="9" name="Shape 7"/>
-          <p:cNvSpPr/>
-          <p:nvPr/>
-        </p:nvSpPr>
-        <p:spPr>
-          <a:xfrm>
-            <a:off x="2514600" y="2011680"/>
-            <a:ext cx="1097280" cy="457200"/>
-          </a:xfrm>
-          <a:prstGeom prst="roundRect">
-            <a:avLst>
-              <a:gd name="adj" fmla="val 12000"/>
-            </a:avLst>
-          </a:prstGeom>
-          <a:solidFill>
-            <a:srgbClr val="1C1C20"/>
-          </a:solidFill>
-          <a:ln w="19050">
-            <a:solidFill>
-              <a:srgbClr val="2BC4C4"/>
-            </a:solidFill>
-            <a:prstDash val="solid"/>
-          </a:ln>
-        </p:spPr>
-      </p:sp>
-      <p:sp>
-        <p:nvSpPr>
-          <p:cNvPr id="10" name="Text 8"/>
-          <p:cNvSpPr/>
-          <p:nvPr/>
-        </p:nvSpPr>
-        <p:spPr>
-          <a:xfrm>
-            <a:off x="2514600" y="2011680"/>
-            <a:ext cx="1097280" cy="457200"/>
-          </a:xfrm>
-          <a:prstGeom prst="rect">
-            <a:avLst/>
-          </a:prstGeom>
-          <a:noFill/>
-          <a:ln/>
-        </p:spPr>
-        <p:txBody>
-          <a:bodyPr wrap="square" lIns="0" tIns="0" rIns="0" bIns="0" rtlCol="0" anchor="ctr"/>
-          <a:lstStyle/>
-          <a:p>
-            <a:pPr algn="ctr" indent="0" marL="0">
-              <a:buNone/>
-            </a:pPr>
-            <a:r>
-              <a:rPr lang="en-US" sz="1000" b="1" dirty="0">
-                <a:solidFill>
-                  <a:srgbClr val="2BC4C4"/>
-                </a:solidFill>
-                <a:latin typeface="Arial" pitchFamily="34" charset="0"/>
-                <a:ea typeface="Arial" pitchFamily="34" charset="-122"/>
-                <a:cs typeface="Arial" pitchFamily="34" charset="-120"/>
-              </a:rPr>
-              <a:t>FAIL</a:t>
-            </a:r>
-            <a:endParaRPr lang="en-US" sz="1000" dirty="0"/>
-          </a:p>
-        </p:txBody>
-      </p:sp>
-      <p:sp>
-        <p:nvSpPr>
-          <p:cNvPr id="11" name="Shape 9"/>
-          <p:cNvSpPr/>
-          <p:nvPr/>
-        </p:nvSpPr>
-        <p:spPr>
-          <a:xfrm>
-            <a:off x="2514600" y="2880360"/>
-            <a:ext cx="1097280" cy="457200"/>
-          </a:xfrm>
-          <a:prstGeom prst="roundRect">
-            <a:avLst>
-              <a:gd name="adj" fmla="val 12000"/>
-            </a:avLst>
-          </a:prstGeom>
-          <a:solidFill>
-            <a:srgbClr val="1C1C20"/>
-          </a:solidFill>
-          <a:ln w="19050">
-            <a:solidFill>
-              <a:srgbClr val="2BC4C4"/>
-            </a:solidFill>
-            <a:prstDash val="solid"/>
-          </a:ln>
-        </p:spPr>
-      </p:sp>
-      <p:sp>
-        <p:nvSpPr>
           <p:cNvPr id="12" name="Text 10"/>
           <p:cNvSpPr/>
           <p:nvPr/>
         </p:nvSpPr>
         <p:spPr>
           <a:xfrm>
-            <a:off x="2514600" y="2880360"/>
-            <a:ext cx="1097280" cy="457200"/>
-          </a:xfrm>
-          <a:prstGeom prst="rect">
-            <a:avLst/>
-          </a:prstGeom>
-          <a:noFill/>
-          <a:ln/>
-        </p:spPr>
-        <p:txBody>
-          <a:bodyPr wrap="square" lIns="0" tIns="0" rIns="0" bIns="0" rtlCol="0" anchor="ctr"/>
-          <a:lstStyle/>
-          <a:p>
-            <a:pPr algn="ctr" indent="0" marL="0">
-              <a:buNone/>
-            </a:pPr>
-            <a:r>
-              <a:rPr lang="en-US" sz="1000" b="1" dirty="0">
-                <a:solidFill>
-                  <a:srgbClr val="2BC4C4"/>
-                </a:solidFill>
-                <a:latin typeface="Arial" pitchFamily="34" charset="0"/>
-                <a:ea typeface="Arial" pitchFamily="34" charset="-122"/>
-                <a:cs typeface="Arial" pitchFamily="34" charset="-120"/>
-              </a:rPr>
-              <a:t>FIX</a:t>
-            </a:r>
-            <a:endParaRPr lang="en-US" sz="1000" dirty="0"/>
-          </a:p>
-        </p:txBody>
-      </p:sp>
-      <p:sp>
-        <p:nvSpPr>
-          <p:cNvPr id="13" name="Shape 11"/>
-          <p:cNvSpPr/>
-          <p:nvPr/>
-        </p:nvSpPr>
-        <p:spPr>
-          <a:xfrm>
-            <a:off x="868680" y="2880360"/>
-            <a:ext cx="1097280" cy="457200"/>
-          </a:xfrm>
-          <a:prstGeom prst="roundRect">
-            <a:avLst>
-              <a:gd name="adj" fmla="val 12000"/>
-            </a:avLst>
-          </a:prstGeom>
-          <a:solidFill>
-            <a:srgbClr val="1C1C20"/>
-          </a:solidFill>
-          <a:ln w="19050">
-            <a:solidFill>
-              <a:srgbClr val="2BC4C4"/>
-            </a:solidFill>
-            <a:prstDash val="solid"/>
-          </a:ln>
-        </p:spPr>
-      </p:sp>
-      <p:sp>
-        <p:nvSpPr>
-          <p:cNvPr id="14" name="Text 12"/>
-          <p:cNvSpPr/>
-          <p:nvPr/>
-        </p:nvSpPr>
-        <p:spPr>
-          <a:xfrm>
-            <a:off x="868680" y="2880360"/>
-            <a:ext cx="1097280" cy="457200"/>
-          </a:xfrm>
-          <a:prstGeom prst="rect">
-            <a:avLst/>
-          </a:prstGeom>
-          <a:noFill/>
-          <a:ln/>
-        </p:spPr>
-        <p:txBody>
-          <a:bodyPr wrap="square" lIns="0" tIns="0" rIns="0" bIns="0" rtlCol="0" anchor="ctr"/>
-          <a:lstStyle/>
-          <a:p>
-            <a:pPr algn="ctr" indent="0" marL="0">
-              <a:buNone/>
-            </a:pPr>
-            <a:r>
-              <a:rPr lang="en-US" sz="1000" b="1" dirty="0">
-                <a:solidFill>
-                  <a:srgbClr val="2BC4C4"/>
-                </a:solidFill>
-                <a:latin typeface="Arial" pitchFamily="34" charset="0"/>
-                <a:ea typeface="Arial" pitchFamily="34" charset="-122"/>
-                <a:cs typeface="Arial" pitchFamily="34" charset="-120"/>
-              </a:rPr>
-              <a:t>SHIP</a:t>
-            </a:r>
-            <a:endParaRPr lang="en-US" sz="1000" dirty="0"/>
-          </a:p>
-        </p:txBody>
-      </p:sp>
-      <p:sp>
-        <p:nvSpPr>
-          <p:cNvPr id="15" name="Shape 13"/>
-          <p:cNvSpPr/>
-          <p:nvPr/>
-        </p:nvSpPr>
-        <p:spPr>
-          <a:xfrm>
-            <a:off x="1993392" y="2240280"/>
-            <a:ext cx="493776" cy="0"/>
-          </a:xfrm>
-          <a:prstGeom prst="line">
-            <a:avLst/>
-          </a:prstGeom>
-          <a:noFill/>
-          <a:ln w="22225">
-            <a:solidFill>
-              <a:srgbClr val="2BC4C4"/>
-            </a:solidFill>
-            <a:prstDash val="solid"/>
-            <a:tailEnd type="triangle"/>
-          </a:ln>
-        </p:spPr>
-      </p:sp>
-      <p:sp>
-        <p:nvSpPr>
-          <p:cNvPr id="16" name="Shape 14"/>
-          <p:cNvSpPr/>
-          <p:nvPr/>
-        </p:nvSpPr>
-        <p:spPr>
-          <a:xfrm>
-            <a:off x="3063240" y="2496312"/>
-            <a:ext cx="0" cy="365760"/>
-          </a:xfrm>
-          <a:prstGeom prst="line">
-            <a:avLst/>
-          </a:prstGeom>
-          <a:noFill/>
-          <a:ln w="22225">
-            <a:solidFill>
-              <a:srgbClr val="2BC4C4"/>
-            </a:solidFill>
-            <a:prstDash val="solid"/>
-            <a:tailEnd type="triangle"/>
-          </a:ln>
-        </p:spPr>
-      </p:sp>
-      <p:sp>
-        <p:nvSpPr>
-          <p:cNvPr id="17" name="Shape 15"/>
-          <p:cNvSpPr/>
-          <p:nvPr/>
-        </p:nvSpPr>
-        <p:spPr>
-          <a:xfrm flipH="1">
-            <a:off x="1993392" y="3108960"/>
-            <a:ext cx="493776" cy="0"/>
-          </a:xfrm>
-          <a:prstGeom prst="line">
-            <a:avLst/>
-          </a:prstGeom>
-          <a:noFill/>
-          <a:ln w="22225">
-            <a:solidFill>
-              <a:srgbClr val="2BC4C4"/>
-            </a:solidFill>
-            <a:prstDash val="solid"/>
-            <a:tailEnd type="triangle"/>
-          </a:ln>
-        </p:spPr>
-      </p:sp>
-      <p:sp>
-        <p:nvSpPr>
-          <p:cNvPr id="18" name="Shape 16"/>
-          <p:cNvSpPr/>
-          <p:nvPr/>
-        </p:nvSpPr>
-        <p:spPr>
-          <a:xfrm flipV="1">
-            <a:off x="1417320" y="2496312"/>
-            <a:ext cx="0" cy="365760"/>
-          </a:xfrm>
-          <a:prstGeom prst="line">
-            <a:avLst/>
-          </a:prstGeom>
-          <a:noFill/>
-          <a:ln w="22225">
-            <a:solidFill>
-              <a:srgbClr val="2BC4C4"/>
-            </a:solidFill>
-            <a:prstDash val="solid"/>
-            <a:tailEnd type="triangle"/>
-          </a:ln>
-        </p:spPr>
-      </p:sp>
-      <p:sp>
-        <p:nvSpPr>
-          <p:cNvPr id="19" name="Text 17"/>
-          <p:cNvSpPr/>
-          <p:nvPr/>
-        </p:nvSpPr>
-        <p:spPr>
-          <a:xfrm>
-            <a:off x="1764792" y="2542032"/>
-            <a:ext cx="813816" cy="320040"/>
-          </a:xfrm>
-          <a:prstGeom prst="rect">
-            <a:avLst/>
-          </a:prstGeom>
-          <a:noFill/>
-          <a:ln/>
-        </p:spPr>
-        <p:txBody>
-          <a:bodyPr wrap="square" lIns="0" tIns="0" rIns="0" bIns="0" rtlCol="0" anchor="ctr"/>
-          <a:lstStyle/>
-          <a:p>
-            <a:pPr algn="ctr" indent="0" marL="0">
+            <a:off x="640080" y="1929384"/>
+            <a:ext cx="4663440" cy="1911096"/>
+          </a:xfrm>
+          <a:prstGeom prst="rect">
+            <a:avLst/>
+          </a:prstGeom>
+          <a:noFill/>
+          <a:ln/>
+        </p:spPr>
+        <p:txBody>
+          <a:bodyPr wrap="square" lIns="0" tIns="0" rIns="0" bIns="0" rtlCol="0" anchor="t"/>
+          <a:lstStyle/>
+          <a:p>
+            <a:pPr indent="0" marL="0">
               <a:buNone/>
             </a:pPr>
             <a:r>
               <a:rPr lang="en-US" sz="700" i="1" dirty="0">
                 <a:solidFill>
-                  <a:srgbClr val="9A9AA0"/>
-                </a:solidFill>
-                <a:latin typeface="Arial" pitchFamily="34" charset="0"/>
-                <a:ea typeface="Arial" pitchFamily="34" charset="-122"/>
-                <a:cs typeface="Arial" pitchFamily="34" charset="-120"/>
-              </a:rPr>
-              <a:t>runs until</a:t>
+                  <a:srgbClr val="8A8A90"/>
+                </a:solidFill>
+                <a:latin typeface="Arial" pitchFamily="34" charset="0"/>
+                <a:ea typeface="Arial" pitchFamily="34" charset="-122"/>
+                <a:cs typeface="Arial" pitchFamily="34" charset="-120"/>
+              </a:rPr>
+              <a:t>IMAGE PROMPT → save as agentic-loops.png</a:t>
             </a:r>
             <a:endParaRPr lang="en-US" sz="700" dirty="0"/>
           </a:p>
           <a:p>
-            <a:pPr algn="ctr" indent="0" marL="0">
-              <a:buNone/>
-            </a:pPr>
-            <a:r>
-              <a:rPr lang="en-US" sz="700" i="1" dirty="0">
-                <a:solidFill>
-                  <a:srgbClr val="9A9AA0"/>
-                </a:solidFill>
-                <a:latin typeface="Arial" pitchFamily="34" charset="0"/>
-                <a:ea typeface="Arial" pitchFamily="34" charset="-122"/>
-                <a:cs typeface="Arial" pitchFamily="34" charset="-120"/>
-              </a:rPr>
-              <a:t>done</a:t>
+            <a:pPr indent="0" marL="0">
+              <a:buNone/>
+            </a:pPr>
+            <a:r>
+              <a:rPr lang="en-US" sz="850" dirty="0">
+                <a:solidFill>
+                  <a:srgbClr val="C9C9CE"/>
+                </a:solidFill>
+                <a:latin typeface="Arial" pitchFamily="34" charset="0"/>
+                <a:ea typeface="Arial" pitchFamily="34" charset="-122"/>
+                <a:cs typeface="Arial" pitchFamily="34" charset="-120"/>
+              </a:rPr>
+              <a:t>Clean flat infographic illustration, data-visualization aesthetic, modern and informational: split into two panels side by side. LEFT PANEL: a circular workflow loop with four nodes arranged clockwise, each a clean rounded icon — a play-button icon (try), an X-mark icon (fail), a wrench icon (fix), a rocket icon (ship); smooth curved arrows in bright teal (#2BC4C4) connect them clockwise; a small infinity symbol at the center. RIGHT PANEL: four ascending bars forming a staircase from left to right, each taller than the last, in progressively brighter shades of teal from dark (#1C1C20) to bright (#2BC4C4); an upward-curving arrow in teal traces the top. A thin vertical divider line (#2A2A30) separates the panels; generous whitespace. Deep near-black (#111114) background; clean vector-style shapes with soft gradients; muted institutional palette with selective bright accents; generous whitespace; organized layout with clear visual hierarchy; no photorealism, no dramatic lighting, no 3D renders; no text, no words, no logos, no watermark.</a:t>
             </a:r>
             <a:endParaRPr lang="en-US" sz="700" dirty="0"/>
           </a:p>
@@ -9386,14 +7282,14 @@
       </p:sp>
       <p:sp>
         <p:nvSpPr>
-          <p:cNvPr id="20" name="Text 18"/>
-          <p:cNvSpPr/>
-          <p:nvPr/>
-        </p:nvSpPr>
-        <p:spPr>
-          <a:xfrm>
-            <a:off x="457200" y="3584448"/>
-            <a:ext cx="3931920" cy="292608"/>
+          <p:cNvPr id="13" name="Text 11"/>
+          <p:cNvSpPr/>
+          <p:nvPr/>
+        </p:nvSpPr>
+        <p:spPr>
+          <a:xfrm>
+            <a:off x="5760720" y="1828800"/>
+            <a:ext cx="2926080" cy="292608"/>
           </a:xfrm>
           <a:prstGeom prst="rect">
             <a:avLst/>
@@ -9425,14 +7321,14 @@
       </p:sp>
       <p:sp>
         <p:nvSpPr>
-          <p:cNvPr id="21" name="Text 19"/>
-          <p:cNvSpPr/>
-          <p:nvPr/>
-        </p:nvSpPr>
-        <p:spPr>
-          <a:xfrm>
-            <a:off x="457200" y="3886200"/>
-            <a:ext cx="3931920" cy="182880"/>
+          <p:cNvPr id="14" name="Text 12"/>
+          <p:cNvSpPr/>
+          <p:nvPr/>
+        </p:nvSpPr>
+        <p:spPr>
+          <a:xfrm>
+            <a:off x="5760720" y="2148840"/>
+            <a:ext cx="2926080" cy="182880"/>
           </a:xfrm>
           <a:prstGeom prst="rect">
             <a:avLst/>
@@ -9464,30 +7360,70 @@
       </p:sp>
       <p:sp>
         <p:nvSpPr>
-          <p:cNvPr id="22" name="Text 20"/>
-          <p:cNvSpPr/>
-          <p:nvPr/>
-        </p:nvSpPr>
-        <p:spPr>
-          <a:xfrm>
-            <a:off x="4663440" y="1664208"/>
-            <a:ext cx="4023360" cy="182880"/>
-          </a:xfrm>
-          <a:prstGeom prst="rect">
-            <a:avLst/>
-          </a:prstGeom>
-          <a:noFill/>
-          <a:ln/>
-        </p:spPr>
-        <p:txBody>
-          <a:bodyPr wrap="square" lIns="0" tIns="0" rIns="0" bIns="0" rtlCol="0" anchor="ctr"/>
-          <a:lstStyle/>
-          <a:p>
-            <a:pPr indent="0" marL="0">
-              <a:buNone/>
-            </a:pPr>
-            <a:r>
-              <a:rPr lang="en-US" sz="900" b="1" spc="150" kern="0" dirty="0">
+          <p:cNvPr id="15" name="Shape 13"/>
+          <p:cNvSpPr/>
+          <p:nvPr/>
+        </p:nvSpPr>
+        <p:spPr>
+          <a:xfrm>
+            <a:off x="5760720" y="2514600"/>
+            <a:ext cx="2926080" cy="1371600"/>
+          </a:xfrm>
+          <a:prstGeom prst="rect">
+            <a:avLst/>
+          </a:prstGeom>
+          <a:solidFill>
+            <a:srgbClr val="1C1C20"/>
+          </a:solidFill>
+          <a:ln/>
+        </p:spPr>
+      </p:sp>
+      <p:sp>
+        <p:nvSpPr>
+          <p:cNvPr id="16" name="Shape 14"/>
+          <p:cNvSpPr/>
+          <p:nvPr/>
+        </p:nvSpPr>
+        <p:spPr>
+          <a:xfrm>
+            <a:off x="5760720" y="2514600"/>
+            <a:ext cx="64008" cy="1371600"/>
+          </a:xfrm>
+          <a:prstGeom prst="rect">
+            <a:avLst/>
+          </a:prstGeom>
+          <a:solidFill>
+            <a:srgbClr val="2BC4C4"/>
+          </a:solidFill>
+          <a:ln/>
+        </p:spPr>
+      </p:sp>
+      <p:sp>
+        <p:nvSpPr>
+          <p:cNvPr id="17" name="Text 15"/>
+          <p:cNvSpPr/>
+          <p:nvPr/>
+        </p:nvSpPr>
+        <p:spPr>
+          <a:xfrm>
+            <a:off x="5925312" y="2606040"/>
+            <a:ext cx="2670048" cy="1188720"/>
+          </a:xfrm>
+          <a:prstGeom prst="rect">
+            <a:avLst/>
+          </a:prstGeom>
+          <a:noFill/>
+          <a:ln/>
+        </p:spPr>
+        <p:txBody>
+          <a:bodyPr wrap="square" lIns="0" tIns="0" rIns="0" bIns="0" rtlCol="0" anchor="t"/>
+          <a:lstStyle/>
+          <a:p>
+            <a:pPr indent="0" marL="0">
+              <a:buNone/>
+            </a:pPr>
+            <a:r>
+              <a:rPr lang="en-US" sz="800" b="1" dirty="0">
                 <a:solidFill>
                   <a:srgbClr val="2BC4C4"/>
                 </a:solidFill>
@@ -9495,382 +7431,32 @@
                 <a:ea typeface="Arial" pitchFamily="34" charset="-122"/>
                 <a:cs typeface="Arial" pitchFamily="34" charset="-120"/>
               </a:rPr>
-              <a:t>AS FRICTION FALLS, MORE GETS BUILT</a:t>
-            </a:r>
-            <a:endParaRPr lang="en-US" sz="900" dirty="0"/>
-          </a:p>
-        </p:txBody>
-      </p:sp>
-      <p:sp>
-        <p:nvSpPr>
-          <p:cNvPr id="23" name="Text 21"/>
-          <p:cNvSpPr/>
-          <p:nvPr/>
-        </p:nvSpPr>
-        <p:spPr>
-          <a:xfrm>
-            <a:off x="4663440" y="1883664"/>
-            <a:ext cx="4023360" cy="164592"/>
-          </a:xfrm>
-          <a:prstGeom prst="rect">
-            <a:avLst/>
-          </a:prstGeom>
-          <a:noFill/>
-          <a:ln/>
-        </p:spPr>
-        <p:txBody>
-          <a:bodyPr wrap="square" lIns="0" tIns="0" rIns="0" bIns="0" rtlCol="0" anchor="ctr"/>
-          <a:lstStyle/>
-          <a:p>
-            <a:pPr algn="r" indent="0" marL="0">
-              <a:buNone/>
-            </a:pPr>
-            <a:r>
-              <a:rPr lang="en-US" sz="750" i="1" dirty="0">
-                <a:solidFill>
-                  <a:srgbClr val="9A9AA0"/>
-                </a:solidFill>
-                <a:latin typeface="Arial" pitchFamily="34" charset="0"/>
-                <a:ea typeface="Arial" pitchFamily="34" charset="-122"/>
-                <a:cs typeface="Arial" pitchFamily="34" charset="-120"/>
-              </a:rPr>
-              <a:t>compute demanded ↑</a:t>
-            </a:r>
-            <a:endParaRPr lang="en-US" sz="750" dirty="0"/>
-          </a:p>
-        </p:txBody>
-      </p:sp>
-      <p:sp>
-        <p:nvSpPr>
-          <p:cNvPr id="24" name="Shape 22"/>
-          <p:cNvSpPr/>
-          <p:nvPr/>
-        </p:nvSpPr>
-        <p:spPr>
-          <a:xfrm>
-            <a:off x="4892040" y="3200400"/>
-            <a:ext cx="777240" cy="411480"/>
-          </a:xfrm>
-          <a:prstGeom prst="rect">
-            <a:avLst/>
-          </a:prstGeom>
-          <a:solidFill>
-            <a:srgbClr val="3E3E46"/>
-          </a:solidFill>
-          <a:ln/>
-        </p:spPr>
-      </p:sp>
-      <p:sp>
-        <p:nvSpPr>
-          <p:cNvPr id="25" name="Text 23"/>
-          <p:cNvSpPr/>
-          <p:nvPr/>
-        </p:nvSpPr>
-        <p:spPr>
-          <a:xfrm>
-            <a:off x="4782312" y="3657600"/>
-            <a:ext cx="996696" cy="384048"/>
-          </a:xfrm>
-          <a:prstGeom prst="rect">
-            <a:avLst/>
-          </a:prstGeom>
-          <a:noFill/>
-          <a:ln/>
-        </p:spPr>
-        <p:txBody>
-          <a:bodyPr wrap="square" lIns="0" tIns="0" rIns="0" bIns="0" rtlCol="0" anchor="t"/>
-          <a:lstStyle/>
-          <a:p>
-            <a:pPr algn="ctr" indent="0" marL="0">
-              <a:buNone/>
-            </a:pPr>
-            <a:r>
-              <a:rPr lang="en-US" sz="680" dirty="0">
-                <a:solidFill>
-                  <a:srgbClr val="9A9AA0"/>
-                </a:solidFill>
-                <a:latin typeface="Arial" pitchFamily="34" charset="0"/>
-                <a:ea typeface="Arial" pitchFamily="34" charset="-122"/>
-                <a:cs typeface="Arial" pitchFamily="34" charset="-120"/>
-              </a:rPr>
-              <a:t>Internal</a:t>
-            </a:r>
-            <a:endParaRPr lang="en-US" sz="680" dirty="0"/>
-          </a:p>
-          <a:p>
-            <a:pPr algn="ctr" indent="0" marL="0">
-              <a:buNone/>
-            </a:pPr>
-            <a:r>
-              <a:rPr lang="en-US" sz="680" dirty="0">
-                <a:solidFill>
-                  <a:srgbClr val="9A9AA0"/>
-                </a:solidFill>
-                <a:latin typeface="Arial" pitchFamily="34" charset="0"/>
-                <a:ea typeface="Arial" pitchFamily="34" charset="-122"/>
-                <a:cs typeface="Arial" pitchFamily="34" charset="-120"/>
-              </a:rPr>
-              <a:t>PDF summaries</a:t>
-            </a:r>
-            <a:endParaRPr lang="en-US" sz="680" dirty="0"/>
-          </a:p>
-        </p:txBody>
-      </p:sp>
-      <p:sp>
-        <p:nvSpPr>
-          <p:cNvPr id="26" name="Shape 24"/>
-          <p:cNvSpPr/>
-          <p:nvPr/>
-        </p:nvSpPr>
-        <p:spPr>
-          <a:xfrm>
-            <a:off x="5852160" y="2834640"/>
-            <a:ext cx="777240" cy="777240"/>
-          </a:xfrm>
-          <a:prstGeom prst="rect">
-            <a:avLst/>
-          </a:prstGeom>
-          <a:solidFill>
-            <a:srgbClr val="3E3E46"/>
-          </a:solidFill>
-          <a:ln/>
-        </p:spPr>
-      </p:sp>
-      <p:sp>
-        <p:nvSpPr>
-          <p:cNvPr id="27" name="Text 25"/>
-          <p:cNvSpPr/>
-          <p:nvPr/>
-        </p:nvSpPr>
-        <p:spPr>
-          <a:xfrm>
-            <a:off x="5742432" y="3657600"/>
-            <a:ext cx="996696" cy="384048"/>
-          </a:xfrm>
-          <a:prstGeom prst="rect">
-            <a:avLst/>
-          </a:prstGeom>
-          <a:noFill/>
-          <a:ln/>
-        </p:spPr>
-        <p:txBody>
-          <a:bodyPr wrap="square" lIns="0" tIns="0" rIns="0" bIns="0" rtlCol="0" anchor="t"/>
-          <a:lstStyle/>
-          <a:p>
-            <a:pPr algn="ctr" indent="0" marL="0">
-              <a:buNone/>
-            </a:pPr>
-            <a:r>
-              <a:rPr lang="en-US" sz="680" dirty="0">
-                <a:solidFill>
-                  <a:srgbClr val="9A9AA0"/>
-                </a:solidFill>
-                <a:latin typeface="Arial" pitchFamily="34" charset="0"/>
-                <a:ea typeface="Arial" pitchFamily="34" charset="-122"/>
-                <a:cs typeface="Arial" pitchFamily="34" charset="-120"/>
-              </a:rPr>
-              <a:t>Custom</a:t>
-            </a:r>
-            <a:endParaRPr lang="en-US" sz="680" dirty="0"/>
-          </a:p>
-          <a:p>
-            <a:pPr algn="ctr" indent="0" marL="0">
-              <a:buNone/>
-            </a:pPr>
-            <a:r>
-              <a:rPr lang="en-US" sz="680" dirty="0">
-                <a:solidFill>
-                  <a:srgbClr val="9A9AA0"/>
-                </a:solidFill>
-                <a:latin typeface="Arial" pitchFamily="34" charset="0"/>
-                <a:ea typeface="Arial" pitchFamily="34" charset="-122"/>
-                <a:cs typeface="Arial" pitchFamily="34" charset="-120"/>
-              </a:rPr>
-              <a:t>dashboards</a:t>
-            </a:r>
-            <a:endParaRPr lang="en-US" sz="680" dirty="0"/>
-          </a:p>
-        </p:txBody>
-      </p:sp>
-      <p:sp>
-        <p:nvSpPr>
-          <p:cNvPr id="28" name="Shape 26"/>
-          <p:cNvSpPr/>
-          <p:nvPr/>
-        </p:nvSpPr>
-        <p:spPr>
-          <a:xfrm>
-            <a:off x="6812280" y="2468880"/>
-            <a:ext cx="777240" cy="1143000"/>
-          </a:xfrm>
-          <a:prstGeom prst="rect">
-            <a:avLst/>
-          </a:prstGeom>
-          <a:solidFill>
-            <a:srgbClr val="2BC4C4"/>
-          </a:solidFill>
-          <a:ln/>
-        </p:spPr>
-      </p:sp>
-      <p:sp>
-        <p:nvSpPr>
-          <p:cNvPr id="29" name="Text 27"/>
-          <p:cNvSpPr/>
-          <p:nvPr/>
-        </p:nvSpPr>
-        <p:spPr>
-          <a:xfrm>
-            <a:off x="6702552" y="3657600"/>
-            <a:ext cx="996696" cy="384048"/>
-          </a:xfrm>
-          <a:prstGeom prst="rect">
-            <a:avLst/>
-          </a:prstGeom>
-          <a:noFill/>
-          <a:ln/>
-        </p:spPr>
-        <p:txBody>
-          <a:bodyPr wrap="square" lIns="0" tIns="0" rIns="0" bIns="0" rtlCol="0" anchor="t"/>
-          <a:lstStyle/>
-          <a:p>
-            <a:pPr algn="ctr" indent="0" marL="0">
-              <a:buNone/>
-            </a:pPr>
-            <a:r>
-              <a:rPr lang="en-US" sz="680" b="1" dirty="0">
-                <a:solidFill>
-                  <a:srgbClr val="FFFFFF"/>
-                </a:solidFill>
-                <a:latin typeface="Arial" pitchFamily="34" charset="0"/>
-                <a:ea typeface="Arial" pitchFamily="34" charset="-122"/>
-                <a:cs typeface="Arial" pitchFamily="34" charset="-120"/>
-              </a:rPr>
-              <a:t>Disposable</a:t>
-            </a:r>
-            <a:endParaRPr lang="en-US" sz="680" dirty="0"/>
-          </a:p>
-          <a:p>
-            <a:pPr algn="ctr" indent="0" marL="0">
-              <a:buNone/>
-            </a:pPr>
-            <a:r>
-              <a:rPr lang="en-US" sz="680" b="1" dirty="0">
-                <a:solidFill>
-                  <a:srgbClr val="FFFFFF"/>
-                </a:solidFill>
-                <a:latin typeface="Arial" pitchFamily="34" charset="0"/>
-                <a:ea typeface="Arial" pitchFamily="34" charset="-122"/>
-                <a:cs typeface="Arial" pitchFamily="34" charset="-120"/>
-              </a:rPr>
-              <a:t>web apps</a:t>
-            </a:r>
-            <a:endParaRPr lang="en-US" sz="680" dirty="0"/>
-          </a:p>
-        </p:txBody>
-      </p:sp>
-      <p:sp>
-        <p:nvSpPr>
-          <p:cNvPr id="30" name="Shape 28"/>
-          <p:cNvSpPr/>
-          <p:nvPr/>
-        </p:nvSpPr>
-        <p:spPr>
-          <a:xfrm>
-            <a:off x="7772400" y="2148840"/>
-            <a:ext cx="777240" cy="1463040"/>
-          </a:xfrm>
-          <a:prstGeom prst="rect">
-            <a:avLst/>
-          </a:prstGeom>
-          <a:solidFill>
-            <a:srgbClr val="2BC4C4"/>
-          </a:solidFill>
-          <a:ln/>
-        </p:spPr>
-      </p:sp>
-      <p:sp>
-        <p:nvSpPr>
-          <p:cNvPr id="31" name="Text 29"/>
-          <p:cNvSpPr/>
-          <p:nvPr/>
-        </p:nvSpPr>
-        <p:spPr>
-          <a:xfrm>
-            <a:off x="7662672" y="3657600"/>
-            <a:ext cx="996696" cy="384048"/>
-          </a:xfrm>
-          <a:prstGeom prst="rect">
-            <a:avLst/>
-          </a:prstGeom>
-          <a:noFill/>
-          <a:ln/>
-        </p:spPr>
-        <p:txBody>
-          <a:bodyPr wrap="square" lIns="0" tIns="0" rIns="0" bIns="0" rtlCol="0" anchor="t"/>
-          <a:lstStyle/>
-          <a:p>
-            <a:pPr algn="ctr" indent="0" marL="0">
-              <a:buNone/>
-            </a:pPr>
-            <a:r>
-              <a:rPr lang="en-US" sz="680" b="1" dirty="0">
-                <a:solidFill>
-                  <a:srgbClr val="FFFFFF"/>
-                </a:solidFill>
-                <a:latin typeface="Arial" pitchFamily="34" charset="0"/>
-                <a:ea typeface="Arial" pitchFamily="34" charset="-122"/>
-                <a:cs typeface="Arial" pitchFamily="34" charset="-120"/>
-              </a:rPr>
-              <a:t>Giant research</a:t>
-            </a:r>
-            <a:endParaRPr lang="en-US" sz="680" dirty="0"/>
-          </a:p>
-          <a:p>
-            <a:pPr algn="ctr" indent="0" marL="0">
-              <a:buNone/>
-            </a:pPr>
-            <a:r>
-              <a:rPr lang="en-US" sz="680" b="1" dirty="0">
-                <a:solidFill>
-                  <a:srgbClr val="FFFFFF"/>
-                </a:solidFill>
-                <a:latin typeface="Arial" pitchFamily="34" charset="0"/>
-                <a:ea typeface="Arial" pitchFamily="34" charset="-122"/>
-                <a:cs typeface="Arial" pitchFamily="34" charset="-120"/>
-              </a:rPr>
-              <a:t>projects</a:t>
-            </a:r>
-            <a:endParaRPr lang="en-US" sz="680" dirty="0"/>
-          </a:p>
-        </p:txBody>
-      </p:sp>
-      <p:sp>
-        <p:nvSpPr>
-          <p:cNvPr id="32" name="Shape 30"/>
-          <p:cNvSpPr/>
-          <p:nvPr/>
-        </p:nvSpPr>
-        <p:spPr>
-          <a:xfrm flipV="1">
-            <a:off x="5029200" y="2103120"/>
-            <a:ext cx="3200400" cy="1097280"/>
-          </a:xfrm>
-          <a:prstGeom prst="line">
-            <a:avLst/>
-          </a:prstGeom>
-          <a:noFill/>
-          <a:ln w="25400">
-            <a:solidFill>
-              <a:srgbClr val="2BC4C4"/>
-            </a:solidFill>
-            <a:prstDash val="solid"/>
-            <a:tailEnd type="triangle"/>
-          </a:ln>
-        </p:spPr>
-      </p:sp>
-      <p:sp>
-        <p:nvSpPr>
-          <p:cNvPr id="33" name="Text 31"/>
+              <a:t>JEVONS PARADOX</a:t>
+            </a:r>
+            <a:endParaRPr lang="en-US" sz="800" dirty="0"/>
+          </a:p>
+          <a:p>
+            <a:pPr indent="0" marL="0">
+              <a:buNone/>
+            </a:pPr>
+            <a:r>
+              <a:rPr lang="en-US" sz="900" dirty="0">
+                <a:solidFill>
+                  <a:srgbClr val="C9C9CE"/>
+                </a:solidFill>
+                <a:latin typeface="Arial" pitchFamily="34" charset="0"/>
+                <a:ea typeface="Arial" pitchFamily="34" charset="-122"/>
+                <a:cs typeface="Arial" pitchFamily="34" charset="-120"/>
+              </a:rPr>
+              <a:t>As agents make software free to produce, we don’t write the same software cheaper — we write categorically more of it. Efficiency expands compute demand, it doesn’t cap it.</a:t>
+            </a:r>
+            <a:endParaRPr lang="en-US" sz="800" dirty="0"/>
+          </a:p>
+        </p:txBody>
+      </p:sp>
+      <p:sp>
+        <p:nvSpPr>
+          <p:cNvPr id="18" name="Text 16"/>
           <p:cNvSpPr/>
           <p:nvPr/>
         </p:nvSpPr>
@@ -9909,7 +7495,7 @@
       </p:sp>
       <p:sp>
         <p:nvSpPr>
-          <p:cNvPr id="34" name="Shape 32"/>
+          <p:cNvPr id="19" name="Shape 17"/>
           <p:cNvSpPr/>
           <p:nvPr/>
         </p:nvSpPr>
@@ -9929,7 +7515,7 @@
       </p:sp>
       <p:sp>
         <p:nvSpPr>
-          <p:cNvPr id="35" name="Shape 33"/>
+          <p:cNvPr id="20" name="Shape 18"/>
           <p:cNvSpPr/>
           <p:nvPr/>
         </p:nvSpPr>
@@ -9952,7 +7538,7 @@
       </p:sp>
       <p:sp>
         <p:nvSpPr>
-          <p:cNvPr id="36" name="Text 34"/>
+          <p:cNvPr id="21" name="Text 19"/>
           <p:cNvSpPr/>
           <p:nvPr/>
         </p:nvSpPr>
@@ -9991,7 +7577,7 @@
       </p:sp>
       <p:sp>
         <p:nvSpPr>
-          <p:cNvPr id="37" name="Text 35"/>
+          <p:cNvPr id="22" name="Text 20"/>
           <p:cNvSpPr/>
           <p:nvPr/>
         </p:nvSpPr>
@@ -10113,7 +7699,7 @@
                 <a:ea typeface="Arial" pitchFamily="34" charset="-122"/>
                 <a:cs typeface="Arial" pitchFamily="34" charset="-120"/>
               </a:rPr>
-              <a:t>01  ·  WHAT'S HAPPENING  ·  TOKEN RATIONING</a:t>
+              <a:t>01  ·  THE SHIFT SO FAR  ·  TOKEN RATIONING</a:t>
             </a:r>
             <a:endParaRPr lang="en-US" sz="900" dirty="0"/>
           </a:p>
@@ -10197,12 +7783,19 @@
           </a:p>
         </p:txBody>
       </p:sp>
-      <p:sp>
-        <p:nvSpPr>
-          <p:cNvPr id="6" name="Shape 4"/>
-          <p:cNvSpPr/>
-          <p:nvPr/>
-        </p:nvSpPr>
+      <p:pic>
+        <p:nvPicPr>
+          <p:cNvPr id="6" name="Image 0" descr="slides-images\web\token-budget.png">    </p:cNvPr>
+          <p:cNvPicPr>
+            <a:picLocks noChangeAspect="1"/>
+          </p:cNvPicPr>
+          <p:nvPr/>
+        </p:nvPicPr>
+        <p:blipFill>
+          <a:blip r:embed="rId1"/>
+          <a:srcRect l="0" r="0" t="0" b="0"/>
+          <a:stretch/>
+        </p:blipFill>
         <p:spPr>
           <a:xfrm>
             <a:off x="4846320" y="1600200"/>
@@ -10211,27 +7804,18 @@
           <a:prstGeom prst="rect">
             <a:avLst/>
           </a:prstGeom>
-          <a:solidFill>
-            <a:srgbClr val="1E1E24"/>
-          </a:solidFill>
-          <a:ln w="12700">
-            <a:solidFill>
-              <a:srgbClr val="2A2A30"/>
-            </a:solidFill>
-            <a:prstDash val="dash"/>
-          </a:ln>
-        </p:spPr>
-      </p:sp>
-      <p:sp>
-        <p:nvSpPr>
-          <p:cNvPr id="7" name="Shape 5"/>
+        </p:spPr>
+      </p:pic>
+      <p:sp>
+        <p:nvSpPr>
+          <p:cNvPr id="7" name="Shape 4"/>
           <p:cNvSpPr/>
           <p:nvPr/>
         </p:nvSpPr>
         <p:spPr>
           <a:xfrm>
             <a:off x="4846320" y="1600200"/>
-            <a:ext cx="310896" cy="36576"/>
+            <a:ext cx="3840480" cy="41148"/>
           </a:xfrm>
           <a:prstGeom prst="rect">
             <a:avLst/>
@@ -10244,162 +7828,7 @@
       </p:sp>
       <p:sp>
         <p:nvSpPr>
-          <p:cNvPr id="8" name="Shape 6"/>
-          <p:cNvSpPr/>
-          <p:nvPr/>
-        </p:nvSpPr>
-        <p:spPr>
-          <a:xfrm>
-            <a:off x="4846320" y="1600200"/>
-            <a:ext cx="36576" cy="310896"/>
-          </a:xfrm>
-          <a:prstGeom prst="rect">
-            <a:avLst/>
-          </a:prstGeom>
-          <a:solidFill>
-            <a:srgbClr val="F6693D"/>
-          </a:solidFill>
-          <a:ln/>
-        </p:spPr>
-      </p:sp>
-      <p:sp>
-        <p:nvSpPr>
-          <p:cNvPr id="9" name="Shape 7"/>
-          <p:cNvSpPr/>
-          <p:nvPr/>
-        </p:nvSpPr>
-        <p:spPr>
-          <a:xfrm>
-            <a:off x="8375904" y="3986784"/>
-            <a:ext cx="310896" cy="36576"/>
-          </a:xfrm>
-          <a:prstGeom prst="rect">
-            <a:avLst/>
-          </a:prstGeom>
-          <a:solidFill>
-            <a:srgbClr val="F6693D"/>
-          </a:solidFill>
-          <a:ln/>
-        </p:spPr>
-      </p:sp>
-      <p:sp>
-        <p:nvSpPr>
-          <p:cNvPr id="10" name="Shape 8"/>
-          <p:cNvSpPr/>
-          <p:nvPr/>
-        </p:nvSpPr>
-        <p:spPr>
-          <a:xfrm>
-            <a:off x="8650224" y="3712464"/>
-            <a:ext cx="36576" cy="310896"/>
-          </a:xfrm>
-          <a:prstGeom prst="rect">
-            <a:avLst/>
-          </a:prstGeom>
-          <a:solidFill>
-            <a:srgbClr val="F6693D"/>
-          </a:solidFill>
-          <a:ln/>
-        </p:spPr>
-      </p:sp>
-      <p:sp>
-        <p:nvSpPr>
-          <p:cNvPr id="11" name="Text 9"/>
-          <p:cNvSpPr/>
-          <p:nvPr/>
-        </p:nvSpPr>
-        <p:spPr>
-          <a:xfrm>
-            <a:off x="5029200" y="1746504"/>
-            <a:ext cx="3474720" cy="219456"/>
-          </a:xfrm>
-          <a:prstGeom prst="rect">
-            <a:avLst/>
-          </a:prstGeom>
-          <a:noFill/>
-          <a:ln/>
-        </p:spPr>
-        <p:txBody>
-          <a:bodyPr wrap="square" lIns="0" tIns="0" rIns="0" bIns="0" rtlCol="0" anchor="ctr"/>
-          <a:lstStyle/>
-          <a:p>
-            <a:pPr indent="0" marL="0">
-              <a:buNone/>
-            </a:pPr>
-            <a:r>
-              <a:rPr lang="en-US" sz="900" b="1" spc="200" kern="0" dirty="0">
-                <a:solidFill>
-                  <a:srgbClr val="F6693D"/>
-                </a:solidFill>
-                <a:latin typeface="Arial" pitchFamily="34" charset="0"/>
-                <a:ea typeface="Arial" pitchFamily="34" charset="-122"/>
-                <a:cs typeface="Arial" pitchFamily="34" charset="-120"/>
-              </a:rPr>
-              <a:t>IMAGE  ·  metered compute</a:t>
-            </a:r>
-            <a:endParaRPr lang="en-US" sz="900" dirty="0"/>
-          </a:p>
-        </p:txBody>
-      </p:sp>
-      <p:sp>
-        <p:nvSpPr>
-          <p:cNvPr id="12" name="Text 10"/>
-          <p:cNvSpPr/>
-          <p:nvPr/>
-        </p:nvSpPr>
-        <p:spPr>
-          <a:xfrm>
-            <a:off x="5029200" y="2020824"/>
-            <a:ext cx="3474720" cy="1819656"/>
-          </a:xfrm>
-          <a:prstGeom prst="rect">
-            <a:avLst/>
-          </a:prstGeom>
-          <a:noFill/>
-          <a:ln/>
-        </p:spPr>
-        <p:txBody>
-          <a:bodyPr wrap="square" lIns="0" tIns="0" rIns="0" bIns="0" rtlCol="0" anchor="t"/>
-          <a:lstStyle/>
-          <a:p>
-            <a:pPr indent="0" marL="0">
-              <a:buNone/>
-            </a:pPr>
-            <a:r>
-              <a:rPr lang="en-US" sz="700" i="1" dirty="0">
-                <a:solidFill>
-                  <a:srgbClr val="8A8A90"/>
-                </a:solidFill>
-                <a:latin typeface="Arial" pitchFamily="34" charset="0"/>
-                <a:ea typeface="Arial" pitchFamily="34" charset="-122"/>
-                <a:cs typeface="Arial" pitchFamily="34" charset="-120"/>
-              </a:rPr>
-              <a:t>IMAGE PROMPT → save as token-budget.png</a:t>
-            </a:r>
-            <a:endParaRPr lang="en-US" sz="700" dirty="0"/>
-          </a:p>
-          <a:p>
-            <a:pPr indent="0" marL="0">
-              <a:buNone/>
-            </a:pPr>
-            <a:r>
-              <a:rPr lang="en-US" sz="850" dirty="0">
-                <a:solidFill>
-                  <a:srgbClr val="C9C9CE"/>
-                </a:solidFill>
-                <a:latin typeface="Arial" pitchFamily="34" charset="0"/>
-                <a:ea typeface="Arial" pitchFamily="34" charset="-122"/>
-                <a:cs typeface="Arial" pitchFamily="34" charset="-120"/>
-              </a:rPr>
-              <a:t>Detailed modern editorial 3D illustration, slight three-quarter camera angle, polished semi-realistic render, clean and bright: a clean, orderly allocation station that dispenses a measured handful of glowing tokens onto a conveyor feeding a row of laptops, a clear dial set to a budget limit, managed and modern (not grim); orange (#F6693D) and gold (#FFB800) accents. Deep near-black (#111114) studio background; brushed-silver and white materials; clean, bright, optimistic BlackRock-style institutional palette, never dark or ominous; soft even lighting, crisp focus, premium financial-tech mood; single hero subject with generous negative space; no text, no words, no logos, no watermark.</a:t>
-            </a:r>
-            <a:endParaRPr lang="en-US" sz="700" dirty="0"/>
-          </a:p>
-        </p:txBody>
-      </p:sp>
-      <p:sp>
-        <p:nvSpPr>
-          <p:cNvPr id="13" name="Shape 11"/>
+          <p:cNvPr id="8" name="Shape 5"/>
           <p:cNvSpPr/>
           <p:nvPr/>
         </p:nvSpPr>
@@ -10419,7 +7848,7 @@
       </p:sp>
       <p:sp>
         <p:nvSpPr>
-          <p:cNvPr id="14" name="Text 12"/>
+          <p:cNvPr id="9" name="Text 6"/>
           <p:cNvSpPr/>
           <p:nvPr/>
         </p:nvSpPr>
@@ -10475,7 +7904,7 @@
       </p:sp>
       <p:sp>
         <p:nvSpPr>
-          <p:cNvPr id="15" name="Shape 13"/>
+          <p:cNvPr id="10" name="Shape 7"/>
           <p:cNvSpPr/>
           <p:nvPr/>
         </p:nvSpPr>
@@ -10495,7 +7924,7 @@
       </p:sp>
       <p:sp>
         <p:nvSpPr>
-          <p:cNvPr id="16" name="Text 14"/>
+          <p:cNvPr id="11" name="Text 8"/>
           <p:cNvSpPr/>
           <p:nvPr/>
         </p:nvSpPr>
@@ -10551,7 +7980,7 @@
       </p:sp>
       <p:sp>
         <p:nvSpPr>
-          <p:cNvPr id="17" name="Shape 15"/>
+          <p:cNvPr id="12" name="Shape 9"/>
           <p:cNvSpPr/>
           <p:nvPr/>
         </p:nvSpPr>
@@ -10571,7 +8000,7 @@
       </p:sp>
       <p:sp>
         <p:nvSpPr>
-          <p:cNvPr id="18" name="Text 16"/>
+          <p:cNvPr id="13" name="Text 10"/>
           <p:cNvSpPr/>
           <p:nvPr/>
         </p:nvSpPr>
@@ -10619,7 +8048,7 @@
                 <a:ea typeface="Arial" pitchFamily="34" charset="-122"/>
                 <a:cs typeface="Arial" pitchFamily="34" charset="-120"/>
               </a:rPr>
-              <a:t>SK Hynix sees no HBM relief before ~2030; Google rents 110k GPUs at $920M/mo.</a:t>
+              <a:t>SK Hynix: no HBM relief before ~2030; Google rents GPUs at $920M/mo.</a:t>
             </a:r>
             <a:endParaRPr lang="en-US" sz="900" dirty="0"/>
           </a:p>
@@ -10627,7 +8056,7 @@
       </p:sp>
       <p:sp>
         <p:nvSpPr>
-          <p:cNvPr id="19" name="Shape 17"/>
+          <p:cNvPr id="14" name="Shape 11"/>
           <p:cNvSpPr/>
           <p:nvPr/>
         </p:nvSpPr>
@@ -10652,7 +8081,7 @@
       </p:sp>
       <p:sp>
         <p:nvSpPr>
-          <p:cNvPr id="20" name="Text 18"/>
+          <p:cNvPr id="15" name="Text 12"/>
           <p:cNvSpPr/>
           <p:nvPr/>
         </p:nvSpPr>
@@ -10691,7 +8120,7 @@
       </p:sp>
       <p:sp>
         <p:nvSpPr>
-          <p:cNvPr id="21" name="Text 19"/>
+          <p:cNvPr id="16" name="Text 13"/>
           <p:cNvSpPr/>
           <p:nvPr/>
         </p:nvSpPr>
@@ -10722,7 +8151,7 @@
                 <a:ea typeface="Arial" pitchFamily="34" charset="-122"/>
                 <a:cs typeface="Arial" pitchFamily="34" charset="-120"/>
               </a:rPr>
-              <a:t>Token caps are demand evidence, not retreat.</a:t>
+              <a:t>Token rationing is the first real demand signal.</a:t>
             </a:r>
             <a:endParaRPr lang="en-US" sz="1000" dirty="0"/>
           </a:p>
@@ -10739,7 +8168,7 @@
                 <a:ea typeface="Arial" pitchFamily="34" charset="-122"/>
                 <a:cs typeface="Arial" pitchFamily="34" charset="-120"/>
               </a:rPr>
-              <a:t>Watch token budgets the way retail analysts watch same-store sales.</a:t>
+              <a:t>Enterprise adoption is still in the early innings — watch token budgets the way retail analysts watch same-store sales.</a:t>
             </a:r>
             <a:endParaRPr lang="en-US" sz="1000" dirty="0"/>
           </a:p>
@@ -10747,7 +8176,7 @@
       </p:sp>
       <p:sp>
         <p:nvSpPr>
-          <p:cNvPr id="22" name="Text 20"/>
+          <p:cNvPr id="17" name="Text 14"/>
           <p:cNvSpPr/>
           <p:nvPr/>
         </p:nvSpPr>
@@ -10786,7 +8215,7 @@
       </p:sp>
       <p:sp>
         <p:nvSpPr>
-          <p:cNvPr id="23" name="Shape 21"/>
+          <p:cNvPr id="18" name="Shape 15"/>
           <p:cNvSpPr/>
           <p:nvPr/>
         </p:nvSpPr>
@@ -10806,7 +8235,7 @@
       </p:sp>
       <p:sp>
         <p:nvSpPr>
-          <p:cNvPr id="24" name="Shape 22"/>
+          <p:cNvPr id="19" name="Shape 16"/>
           <p:cNvSpPr/>
           <p:nvPr/>
         </p:nvSpPr>
@@ -10829,7 +8258,7 @@
       </p:sp>
       <p:sp>
         <p:nvSpPr>
-          <p:cNvPr id="25" name="Text 23"/>
+          <p:cNvPr id="20" name="Text 17"/>
           <p:cNvSpPr/>
           <p:nvPr/>
         </p:nvSpPr>
@@ -10868,7 +8297,7 @@
       </p:sp>
       <p:sp>
         <p:nvSpPr>
-          <p:cNvPr id="26" name="Text 24"/>
+          <p:cNvPr id="21" name="Text 18"/>
           <p:cNvSpPr/>
           <p:nvPr/>
         </p:nvSpPr>
@@ -10990,7 +8419,7 @@
                 <a:ea typeface="Arial" pitchFamily="34" charset="-122"/>
                 <a:cs typeface="Arial" pitchFamily="34" charset="-120"/>
               </a:rPr>
-              <a:t>01  ·  WHAT'S HAPPENING  ·  POLICY</a:t>
+              <a:t>01  ·  THE SHIFT SO FAR  ·  POLICY</a:t>
             </a:r>
             <a:endParaRPr lang="en-US" sz="900" dirty="0"/>
           </a:p>
@@ -11074,12 +8503,19 @@
           </a:p>
         </p:txBody>
       </p:sp>
-      <p:sp>
-        <p:nvSpPr>
-          <p:cNvPr id="6" name="Shape 4"/>
-          <p:cNvSpPr/>
-          <p:nvPr/>
-        </p:nvSpPr>
+      <p:pic>
+        <p:nvPicPr>
+          <p:cNvPr id="6" name="Image 0" descr="slides-images\web\gov-stake.png">    </p:cNvPr>
+          <p:cNvPicPr>
+            <a:picLocks noChangeAspect="1"/>
+          </p:cNvPicPr>
+          <p:nvPr/>
+        </p:nvPicPr>
+        <p:blipFill>
+          <a:blip r:embed="rId1"/>
+          <a:srcRect l="0" r="0" t="0" b="0"/>
+          <a:stretch/>
+        </p:blipFill>
         <p:spPr>
           <a:xfrm>
             <a:off x="4846320" y="1600200"/>
@@ -11088,27 +8524,18 @@
           <a:prstGeom prst="rect">
             <a:avLst/>
           </a:prstGeom>
-          <a:solidFill>
-            <a:srgbClr val="1E1E24"/>
-          </a:solidFill>
-          <a:ln w="12700">
-            <a:solidFill>
-              <a:srgbClr val="2A2A30"/>
-            </a:solidFill>
-            <a:prstDash val="dash"/>
-          </a:ln>
-        </p:spPr>
-      </p:sp>
-      <p:sp>
-        <p:nvSpPr>
-          <p:cNvPr id="7" name="Shape 5"/>
+        </p:spPr>
+      </p:pic>
+      <p:sp>
+        <p:nvSpPr>
+          <p:cNvPr id="7" name="Shape 4"/>
           <p:cNvSpPr/>
           <p:nvPr/>
         </p:nvSpPr>
         <p:spPr>
           <a:xfrm>
             <a:off x="4846320" y="1600200"/>
-            <a:ext cx="310896" cy="36576"/>
+            <a:ext cx="3840480" cy="41148"/>
           </a:xfrm>
           <a:prstGeom prst="rect">
             <a:avLst/>
@@ -11121,14 +8548,14 @@
       </p:sp>
       <p:sp>
         <p:nvSpPr>
-          <p:cNvPr id="8" name="Shape 6"/>
-          <p:cNvSpPr/>
-          <p:nvPr/>
-        </p:nvSpPr>
-        <p:spPr>
-          <a:xfrm>
-            <a:off x="4846320" y="1600200"/>
-            <a:ext cx="36576" cy="310896"/>
+          <p:cNvPr id="8" name="Shape 5"/>
+          <p:cNvSpPr/>
+          <p:nvPr/>
+        </p:nvSpPr>
+        <p:spPr>
+          <a:xfrm>
+            <a:off x="457200" y="1627632"/>
+            <a:ext cx="64008" cy="749808"/>
           </a:xfrm>
           <a:prstGeom prst="rect">
             <a:avLst/>
@@ -11141,70 +8568,30 @@
       </p:sp>
       <p:sp>
         <p:nvSpPr>
-          <p:cNvPr id="9" name="Shape 7"/>
-          <p:cNvSpPr/>
-          <p:nvPr/>
-        </p:nvSpPr>
-        <p:spPr>
-          <a:xfrm>
-            <a:off x="8375904" y="3986784"/>
-            <a:ext cx="310896" cy="36576"/>
-          </a:xfrm>
-          <a:prstGeom prst="rect">
-            <a:avLst/>
-          </a:prstGeom>
-          <a:solidFill>
-            <a:srgbClr val="9B7BE0"/>
-          </a:solidFill>
-          <a:ln/>
-        </p:spPr>
-      </p:sp>
-      <p:sp>
-        <p:nvSpPr>
-          <p:cNvPr id="10" name="Shape 8"/>
-          <p:cNvSpPr/>
-          <p:nvPr/>
-        </p:nvSpPr>
-        <p:spPr>
-          <a:xfrm>
-            <a:off x="8650224" y="3712464"/>
-            <a:ext cx="36576" cy="310896"/>
-          </a:xfrm>
-          <a:prstGeom prst="rect">
-            <a:avLst/>
-          </a:prstGeom>
-          <a:solidFill>
-            <a:srgbClr val="9B7BE0"/>
-          </a:solidFill>
-          <a:ln/>
-        </p:spPr>
-      </p:sp>
-      <p:sp>
-        <p:nvSpPr>
-          <p:cNvPr id="11" name="Text 9"/>
-          <p:cNvSpPr/>
-          <p:nvPr/>
-        </p:nvSpPr>
-        <p:spPr>
-          <a:xfrm>
-            <a:off x="5029200" y="1746504"/>
-            <a:ext cx="3474720" cy="219456"/>
-          </a:xfrm>
-          <a:prstGeom prst="rect">
-            <a:avLst/>
-          </a:prstGeom>
-          <a:noFill/>
-          <a:ln/>
-        </p:spPr>
-        <p:txBody>
-          <a:bodyPr wrap="square" lIns="0" tIns="0" rIns="0" bIns="0" rtlCol="0" anchor="ctr"/>
-          <a:lstStyle/>
-          <a:p>
-            <a:pPr indent="0" marL="0">
-              <a:buNone/>
-            </a:pPr>
-            <a:r>
-              <a:rPr lang="en-US" sz="900" b="1" spc="200" kern="0" dirty="0">
+          <p:cNvPr id="9" name="Text 6"/>
+          <p:cNvSpPr/>
+          <p:nvPr/>
+        </p:nvSpPr>
+        <p:spPr>
+          <a:xfrm>
+            <a:off x="612648" y="1627632"/>
+            <a:ext cx="4023360" cy="749808"/>
+          </a:xfrm>
+          <a:prstGeom prst="rect">
+            <a:avLst/>
+          </a:prstGeom>
+          <a:noFill/>
+          <a:ln/>
+        </p:spPr>
+        <p:txBody>
+          <a:bodyPr wrap="square" lIns="0" tIns="0" rIns="0" bIns="0" rtlCol="0" anchor="t"/>
+          <a:lstStyle/>
+          <a:p>
+            <a:pPr indent="0" marL="0">
+              <a:buNone/>
+            </a:pPr>
+            <a:r>
+              <a:rPr lang="en-US" sz="850" b="1" dirty="0">
                 <a:solidFill>
                   <a:srgbClr val="9B7BE0"/>
                 </a:solidFill>
@@ -11212,22 +8599,59 @@
                 <a:ea typeface="Arial" pitchFamily="34" charset="-122"/>
                 <a:cs typeface="Arial" pitchFamily="34" charset="-120"/>
               </a:rPr>
-              <a:t>IMAGE  ·  sovereign stake</a:t>
-            </a:r>
-            <a:endParaRPr lang="en-US" sz="900" dirty="0"/>
-          </a:p>
-        </p:txBody>
-      </p:sp>
-      <p:sp>
-        <p:nvSpPr>
-          <p:cNvPr id="12" name="Text 10"/>
-          <p:cNvSpPr/>
-          <p:nvPr/>
-        </p:nvSpPr>
-        <p:spPr>
-          <a:xfrm>
-            <a:off x="5029200" y="2020824"/>
-            <a:ext cx="3474720" cy="1819656"/>
+              <a:t>UNITED STATES   </a:t>
+            </a:r>
+            <a:endParaRPr lang="en-US" sz="850" dirty="0"/>
+          </a:p>
+          <a:p>
+            <a:pPr indent="0" marL="0">
+              <a:buNone/>
+            </a:pPr>
+            <a:r>
+              <a:rPr lang="en-US" sz="900" dirty="0">
+                <a:solidFill>
+                  <a:srgbClr val="C9C9CE"/>
+                </a:solidFill>
+                <a:latin typeface="Arial" pitchFamily="34" charset="0"/>
+                <a:ea typeface="Arial" pitchFamily="34" charset="-122"/>
+                <a:cs typeface="Arial" pitchFamily="34" charset="-120"/>
+              </a:rPr>
+              <a:t>Voluntary 30-day NSA pre-release review, plus a floated 50% tax on AI-lab equity to seed a public “AI Dividends” fund.</a:t>
+            </a:r>
+            <a:endParaRPr lang="en-US" sz="850" dirty="0"/>
+          </a:p>
+        </p:txBody>
+      </p:sp>
+      <p:sp>
+        <p:nvSpPr>
+          <p:cNvPr id="10" name="Shape 7"/>
+          <p:cNvSpPr/>
+          <p:nvPr/>
+        </p:nvSpPr>
+        <p:spPr>
+          <a:xfrm>
+            <a:off x="457200" y="2414016"/>
+            <a:ext cx="64008" cy="749808"/>
+          </a:xfrm>
+          <a:prstGeom prst="rect">
+            <a:avLst/>
+          </a:prstGeom>
+          <a:solidFill>
+            <a:srgbClr val="2BC4C4"/>
+          </a:solidFill>
+          <a:ln/>
+        </p:spPr>
+      </p:sp>
+      <p:sp>
+        <p:nvSpPr>
+          <p:cNvPr id="11" name="Text 8"/>
+          <p:cNvSpPr/>
+          <p:nvPr/>
+        </p:nvSpPr>
+        <p:spPr>
+          <a:xfrm>
+            <a:off x="612648" y="2414016"/>
+            <a:ext cx="4023360" cy="749808"/>
           </a:xfrm>
           <a:prstGeom prst="rect">
             <a:avLst/>
@@ -11243,7 +8667,192 @@
               <a:buNone/>
             </a:pPr>
             <a:r>
-              <a:rPr lang="en-US" sz="700" i="1" dirty="0">
+              <a:rPr lang="en-US" sz="850" b="1" dirty="0">
+                <a:solidFill>
+                  <a:srgbClr val="2BC4C4"/>
+                </a:solidFill>
+                <a:latin typeface="Arial" pitchFamily="34" charset="0"/>
+                <a:ea typeface="Arial" pitchFamily="34" charset="-122"/>
+                <a:cs typeface="Arial" pitchFamily="34" charset="-120"/>
+              </a:rPr>
+              <a:t>SOUTH KOREA   </a:t>
+            </a:r>
+            <a:endParaRPr lang="en-US" sz="850" dirty="0"/>
+          </a:p>
+          <a:p>
+            <a:pPr indent="0" marL="0">
+              <a:buNone/>
+            </a:pPr>
+            <a:r>
+              <a:rPr lang="en-US" sz="900" dirty="0">
+                <a:solidFill>
+                  <a:srgbClr val="C9C9CE"/>
+                </a:solidFill>
+                <a:latin typeface="Arial" pitchFamily="34" charset="0"/>
+                <a:ea typeface="Arial" pitchFamily="34" charset="-122"/>
+                <a:cs typeface="Arial" pitchFamily="34" charset="-120"/>
+              </a:rPr>
+              <a:t>Presidential adviser floated an AI “citizen dividend”; Samsung’s union demanded 15% of chip-division profit.</a:t>
+            </a:r>
+            <a:endParaRPr lang="en-US" sz="850" dirty="0"/>
+          </a:p>
+        </p:txBody>
+      </p:sp>
+      <p:sp>
+        <p:nvSpPr>
+          <p:cNvPr id="12" name="Shape 9"/>
+          <p:cNvSpPr/>
+          <p:nvPr/>
+        </p:nvSpPr>
+        <p:spPr>
+          <a:xfrm>
+            <a:off x="457200" y="3200400"/>
+            <a:ext cx="64008" cy="749808"/>
+          </a:xfrm>
+          <a:prstGeom prst="rect">
+            <a:avLst/>
+          </a:prstGeom>
+          <a:solidFill>
+            <a:srgbClr val="E5484D"/>
+          </a:solidFill>
+          <a:ln/>
+        </p:spPr>
+      </p:sp>
+      <p:sp>
+        <p:nvSpPr>
+          <p:cNvPr id="13" name="Text 10"/>
+          <p:cNvSpPr/>
+          <p:nvPr/>
+        </p:nvSpPr>
+        <p:spPr>
+          <a:xfrm>
+            <a:off x="612648" y="3200400"/>
+            <a:ext cx="4023360" cy="749808"/>
+          </a:xfrm>
+          <a:prstGeom prst="rect">
+            <a:avLst/>
+          </a:prstGeom>
+          <a:noFill/>
+          <a:ln/>
+        </p:spPr>
+        <p:txBody>
+          <a:bodyPr wrap="square" lIns="0" tIns="0" rIns="0" bIns="0" rtlCol="0" anchor="t"/>
+          <a:lstStyle/>
+          <a:p>
+            <a:pPr indent="0" marL="0">
+              <a:buNone/>
+            </a:pPr>
+            <a:r>
+              <a:rPr lang="en-US" sz="850" b="1" dirty="0">
+                <a:solidFill>
+                  <a:srgbClr val="E5484D"/>
+                </a:solidFill>
+                <a:latin typeface="Arial" pitchFamily="34" charset="0"/>
+                <a:ea typeface="Arial" pitchFamily="34" charset="-122"/>
+                <a:cs typeface="Arial" pitchFamily="34" charset="-120"/>
+              </a:rPr>
+              <a:t>THE CRITIQUE   </a:t>
+            </a:r>
+            <a:endParaRPr lang="en-US" sz="850" dirty="0"/>
+          </a:p>
+          <a:p>
+            <a:pPr indent="0" marL="0">
+              <a:buNone/>
+            </a:pPr>
+            <a:r>
+              <a:rPr lang="en-US" sz="900" dirty="0">
+                <a:solidFill>
+                  <a:srgbClr val="C9C9CE"/>
+                </a:solidFill>
+                <a:latin typeface="Arial" pitchFamily="34" charset="0"/>
+                <a:ea typeface="Arial" pitchFamily="34" charset="-122"/>
+                <a:cs typeface="Arial" pitchFamily="34" charset="-120"/>
+              </a:rPr>
+              <a:t>Sacks: government equity risks “corporate-government fusion.” The debate is now ownership, not regulation.</a:t>
+            </a:r>
+            <a:endParaRPr lang="en-US" sz="850" dirty="0"/>
+          </a:p>
+        </p:txBody>
+      </p:sp>
+      <p:sp>
+        <p:nvSpPr>
+          <p:cNvPr id="14" name="Text 11"/>
+          <p:cNvSpPr/>
+          <p:nvPr/>
+        </p:nvSpPr>
+        <p:spPr>
+          <a:xfrm>
+            <a:off x="457200" y="4005072"/>
+            <a:ext cx="4206240" cy="329184"/>
+          </a:xfrm>
+          <a:prstGeom prst="rect">
+            <a:avLst/>
+          </a:prstGeom>
+          <a:noFill/>
+          <a:ln/>
+        </p:spPr>
+        <p:txBody>
+          <a:bodyPr wrap="square" lIns="0" tIns="0" rIns="0" bIns="0" rtlCol="0" anchor="t"/>
+          <a:lstStyle/>
+          <a:p>
+            <a:pPr indent="0" marL="0">
+              <a:buNone/>
+            </a:pPr>
+            <a:r>
+              <a:rPr lang="en-US" sz="950" b="1" dirty="0">
+                <a:solidFill>
+                  <a:srgbClr val="FFFFFF"/>
+                </a:solidFill>
+                <a:latin typeface="Arial" pitchFamily="34" charset="0"/>
+                <a:ea typeface="Arial" pitchFamily="34" charset="-122"/>
+                <a:cs typeface="Arial" pitchFamily="34" charset="-120"/>
+              </a:rPr>
+              <a:t>Investor read: </a:t>
+            </a:r>
+            <a:pPr indent="0" marL="0">
+              <a:buNone/>
+            </a:pPr>
+            <a:r>
+              <a:rPr lang="en-US" sz="950" dirty="0">
+                <a:solidFill>
+                  <a:srgbClr val="C9C9CE"/>
+                </a:solidFill>
+                <a:latin typeface="Arial" pitchFamily="34" charset="0"/>
+                <a:ea typeface="Arial" pitchFamily="34" charset="-122"/>
+                <a:cs typeface="Arial" pitchFamily="34" charset="-120"/>
+              </a:rPr>
+              <a:t>public-ownership is a dilution tail risk no equity model currently carries.</a:t>
+            </a:r>
+            <a:endParaRPr lang="en-US" sz="950" dirty="0"/>
+          </a:p>
+        </p:txBody>
+      </p:sp>
+      <p:sp>
+        <p:nvSpPr>
+          <p:cNvPr id="15" name="Text 12"/>
+          <p:cNvSpPr/>
+          <p:nvPr/>
+        </p:nvSpPr>
+        <p:spPr>
+          <a:xfrm>
+            <a:off x="457200" y="4315968"/>
+            <a:ext cx="8229600" cy="384048"/>
+          </a:xfrm>
+          <a:prstGeom prst="rect">
+            <a:avLst/>
+          </a:prstGeom>
+          <a:noFill/>
+          <a:ln/>
+        </p:spPr>
+        <p:txBody>
+          <a:bodyPr wrap="square" lIns="0" tIns="0" rIns="0" bIns="0" rtlCol="0" anchor="t"/>
+          <a:lstStyle/>
+          <a:p>
+            <a:pPr indent="0" marL="0">
+              <a:buNone/>
+            </a:pPr>
+            <a:r>
+              <a:rPr lang="en-US" sz="700" dirty="0">
                 <a:solidFill>
                   <a:srgbClr val="8A8A90"/>
                 </a:solidFill>
@@ -11251,352 +8860,15 @@
                 <a:ea typeface="Arial" pitchFamily="34" charset="-122"/>
                 <a:cs typeface="Arial" pitchFamily="34" charset="-120"/>
               </a:rPr>
-              <a:t>IMAGE PROMPT → save as gov-stake.png</a:t>
+              <a:t>Source: Internal strategic review, “The 2026 AI Frontier” (Jun 2026); Korea Herald, Bloomberg, Nikkei Asia (May 2026); Executive Order provisions; Sacks critique.</a:t>
             </a:r>
             <a:endParaRPr lang="en-US" sz="700" dirty="0"/>
           </a:p>
-          <a:p>
-            <a:pPr indent="0" marL="0">
-              <a:buNone/>
-            </a:pPr>
-            <a:r>
-              <a:rPr lang="en-US" sz="850" dirty="0">
-                <a:solidFill>
-                  <a:srgbClr val="C9C9CE"/>
-                </a:solidFill>
-                <a:latin typeface="Arial" pitchFamily="34" charset="0"/>
-                <a:ea typeface="Arial" pitchFamily="34" charset="-122"/>
-                <a:cs typeface="Arial" pitchFamily="34" charset="-120"/>
-              </a:rPr>
-              <a:t>Detailed modern editorial 3D illustration, slight three-quarter camera angle, polished semi-realistic render, clean and bright: a classical domed government building and a modern data-center tower standing side by side on a clean plaza, linked by a bright walkway along which glowing 'dividend' coins travel toward a tidy row of friendly homes — an optimistic public-private partnership; orange (#F6693D) and gold (#FFB800) accents. Deep near-black (#111114) studio background; brushed-silver and white materials; clean, bright, optimistic BlackRock-style institutional palette, never dark or ominous; soft even lighting, crisp focus, premium financial-tech mood; single hero subject with generous negative space; no text, no words, no logos, no watermark.</a:t>
-            </a:r>
-            <a:endParaRPr lang="en-US" sz="700" dirty="0"/>
-          </a:p>
-        </p:txBody>
-      </p:sp>
-      <p:sp>
-        <p:nvSpPr>
-          <p:cNvPr id="13" name="Shape 11"/>
-          <p:cNvSpPr/>
-          <p:nvPr/>
-        </p:nvSpPr>
-        <p:spPr>
-          <a:xfrm>
-            <a:off x="457200" y="1627632"/>
-            <a:ext cx="64008" cy="676656"/>
-          </a:xfrm>
-          <a:prstGeom prst="rect">
-            <a:avLst/>
-          </a:prstGeom>
-          <a:solidFill>
-            <a:srgbClr val="9B7BE0"/>
-          </a:solidFill>
-          <a:ln/>
-        </p:spPr>
-      </p:sp>
-      <p:sp>
-        <p:nvSpPr>
-          <p:cNvPr id="14" name="Text 12"/>
-          <p:cNvSpPr/>
-          <p:nvPr/>
-        </p:nvSpPr>
-        <p:spPr>
-          <a:xfrm>
-            <a:off x="612648" y="1627632"/>
-            <a:ext cx="4023360" cy="713232"/>
-          </a:xfrm>
-          <a:prstGeom prst="rect">
-            <a:avLst/>
-          </a:prstGeom>
-          <a:noFill/>
-          <a:ln/>
-        </p:spPr>
-        <p:txBody>
-          <a:bodyPr wrap="square" lIns="0" tIns="0" rIns="0" bIns="0" rtlCol="0" anchor="t"/>
-          <a:lstStyle/>
-          <a:p>
-            <a:pPr indent="0" marL="0">
-              <a:buNone/>
-            </a:pPr>
-            <a:r>
-              <a:rPr lang="en-US" sz="850" b="1" dirty="0">
-                <a:solidFill>
-                  <a:srgbClr val="9B7BE0"/>
-                </a:solidFill>
-                <a:latin typeface="Arial" pitchFamily="34" charset="0"/>
-                <a:ea typeface="Arial" pitchFamily="34" charset="-122"/>
-                <a:cs typeface="Arial" pitchFamily="34" charset="-120"/>
-              </a:rPr>
-              <a:t>UNITED STATES   </a:t>
-            </a:r>
-            <a:endParaRPr lang="en-US" sz="850" dirty="0"/>
-          </a:p>
-          <a:p>
-            <a:pPr indent="0" marL="0">
-              <a:buNone/>
-            </a:pPr>
-            <a:r>
-              <a:rPr lang="en-US" sz="900" dirty="0">
-                <a:solidFill>
-                  <a:srgbClr val="C9C9CE"/>
-                </a:solidFill>
-                <a:latin typeface="Arial" pitchFamily="34" charset="0"/>
-                <a:ea typeface="Arial" pitchFamily="34" charset="-122"/>
-                <a:cs typeface="Arial" pitchFamily="34" charset="-120"/>
-              </a:rPr>
-              <a:t>A 30-day NSA pre-release review (voluntary), plus a floated one-time 50% tax on AI-lab equity to seed a public “AI Dividends” fund — Sanders proposed, Trump echoed.</a:t>
-            </a:r>
-            <a:endParaRPr lang="en-US" sz="850" dirty="0"/>
-          </a:p>
-        </p:txBody>
-      </p:sp>
-      <p:sp>
-        <p:nvSpPr>
-          <p:cNvPr id="15" name="Shape 13"/>
-          <p:cNvSpPr/>
-          <p:nvPr/>
-        </p:nvSpPr>
-        <p:spPr>
-          <a:xfrm>
-            <a:off x="457200" y="2377440"/>
-            <a:ext cx="64008" cy="676656"/>
-          </a:xfrm>
-          <a:prstGeom prst="rect">
-            <a:avLst/>
-          </a:prstGeom>
-          <a:solidFill>
-            <a:srgbClr val="2BC4C4"/>
-          </a:solidFill>
-          <a:ln/>
-        </p:spPr>
-      </p:sp>
-      <p:sp>
-        <p:nvSpPr>
-          <p:cNvPr id="16" name="Text 14"/>
-          <p:cNvSpPr/>
-          <p:nvPr/>
-        </p:nvSpPr>
-        <p:spPr>
-          <a:xfrm>
-            <a:off x="612648" y="2377440"/>
-            <a:ext cx="4023360" cy="713232"/>
-          </a:xfrm>
-          <a:prstGeom prst="rect">
-            <a:avLst/>
-          </a:prstGeom>
-          <a:noFill/>
-          <a:ln/>
-        </p:spPr>
-        <p:txBody>
-          <a:bodyPr wrap="square" lIns="0" tIns="0" rIns="0" bIns="0" rtlCol="0" anchor="t"/>
-          <a:lstStyle/>
-          <a:p>
-            <a:pPr indent="0" marL="0">
-              <a:buNone/>
-            </a:pPr>
-            <a:r>
-              <a:rPr lang="en-US" sz="850" b="1" dirty="0">
-                <a:solidFill>
-                  <a:srgbClr val="2BC4C4"/>
-                </a:solidFill>
-                <a:latin typeface="Arial" pitchFamily="34" charset="0"/>
-                <a:ea typeface="Arial" pitchFamily="34" charset="-122"/>
-                <a:cs typeface="Arial" pitchFamily="34" charset="-120"/>
-              </a:rPr>
-              <a:t>SOUTH KOREA   </a:t>
-            </a:r>
-            <a:endParaRPr lang="en-US" sz="850" dirty="0"/>
-          </a:p>
-          <a:p>
-            <a:pPr indent="0" marL="0">
-              <a:buNone/>
-            </a:pPr>
-            <a:r>
-              <a:rPr lang="en-US" sz="900" dirty="0">
-                <a:solidFill>
-                  <a:srgbClr val="C9C9CE"/>
-                </a:solidFill>
-                <a:latin typeface="Arial" pitchFamily="34" charset="0"/>
-                <a:ea typeface="Arial" pitchFamily="34" charset="-122"/>
-                <a:cs typeface="Arial" pitchFamily="34" charset="-120"/>
-              </a:rPr>
-              <a:t>A presidential adviser floated a “citizen dividend” from AI/chip tax windfalls; Samsung's union demanded 15% of chip-division profit.</a:t>
-            </a:r>
-            <a:endParaRPr lang="en-US" sz="850" dirty="0"/>
-          </a:p>
-        </p:txBody>
-      </p:sp>
-      <p:sp>
-        <p:nvSpPr>
-          <p:cNvPr id="17" name="Shape 15"/>
-          <p:cNvSpPr/>
-          <p:nvPr/>
-        </p:nvSpPr>
-        <p:spPr>
-          <a:xfrm>
-            <a:off x="457200" y="3127248"/>
-            <a:ext cx="64008" cy="676656"/>
-          </a:xfrm>
-          <a:prstGeom prst="rect">
-            <a:avLst/>
-          </a:prstGeom>
-          <a:solidFill>
-            <a:srgbClr val="E5484D"/>
-          </a:solidFill>
-          <a:ln/>
-        </p:spPr>
-      </p:sp>
-      <p:sp>
-        <p:nvSpPr>
-          <p:cNvPr id="18" name="Text 16"/>
-          <p:cNvSpPr/>
-          <p:nvPr/>
-        </p:nvSpPr>
-        <p:spPr>
-          <a:xfrm>
-            <a:off x="612648" y="3127248"/>
-            <a:ext cx="4023360" cy="713232"/>
-          </a:xfrm>
-          <a:prstGeom prst="rect">
-            <a:avLst/>
-          </a:prstGeom>
-          <a:noFill/>
-          <a:ln/>
-        </p:spPr>
-        <p:txBody>
-          <a:bodyPr wrap="square" lIns="0" tIns="0" rIns="0" bIns="0" rtlCol="0" anchor="t"/>
-          <a:lstStyle/>
-          <a:p>
-            <a:pPr indent="0" marL="0">
-              <a:buNone/>
-            </a:pPr>
-            <a:r>
-              <a:rPr lang="en-US" sz="850" b="1" dirty="0">
-                <a:solidFill>
-                  <a:srgbClr val="E5484D"/>
-                </a:solidFill>
-                <a:latin typeface="Arial" pitchFamily="34" charset="0"/>
-                <a:ea typeface="Arial" pitchFamily="34" charset="-122"/>
-                <a:cs typeface="Arial" pitchFamily="34" charset="-120"/>
-              </a:rPr>
-              <a:t>THE CRITIQUE   </a:t>
-            </a:r>
-            <a:endParaRPr lang="en-US" sz="850" dirty="0"/>
-          </a:p>
-          <a:p>
-            <a:pPr indent="0" marL="0">
-              <a:buNone/>
-            </a:pPr>
-            <a:r>
-              <a:rPr lang="en-US" sz="900" dirty="0">
-                <a:solidFill>
-                  <a:srgbClr val="C9C9CE"/>
-                </a:solidFill>
-                <a:latin typeface="Arial" pitchFamily="34" charset="0"/>
-                <a:ea typeface="Arial" pitchFamily="34" charset="-122"/>
-                <a:cs typeface="Arial" pitchFamily="34" charset="-120"/>
-              </a:rPr>
-              <a:t>Sacks: government equity risks “corporate-government fusion.” The debate is now ownership, not regulation.</a:t>
-            </a:r>
-            <a:endParaRPr lang="en-US" sz="850" dirty="0"/>
-          </a:p>
-        </p:txBody>
-      </p:sp>
-      <p:sp>
-        <p:nvSpPr>
-          <p:cNvPr id="19" name="Text 17"/>
-          <p:cNvSpPr/>
-          <p:nvPr/>
-        </p:nvSpPr>
-        <p:spPr>
-          <a:xfrm>
-            <a:off x="457200" y="3913632"/>
-            <a:ext cx="4206240" cy="329184"/>
-          </a:xfrm>
-          <a:prstGeom prst="rect">
-            <a:avLst/>
-          </a:prstGeom>
-          <a:noFill/>
-          <a:ln/>
-        </p:spPr>
-        <p:txBody>
-          <a:bodyPr wrap="square" lIns="0" tIns="0" rIns="0" bIns="0" rtlCol="0" anchor="t"/>
-          <a:lstStyle/>
-          <a:p>
-            <a:pPr indent="0" marL="0">
-              <a:buNone/>
-            </a:pPr>
-            <a:r>
-              <a:rPr lang="en-US" sz="950" b="1" dirty="0">
-                <a:solidFill>
-                  <a:srgbClr val="FFFFFF"/>
-                </a:solidFill>
-                <a:latin typeface="Arial" pitchFamily="34" charset="0"/>
-                <a:ea typeface="Arial" pitchFamily="34" charset="-122"/>
-                <a:cs typeface="Arial" pitchFamily="34" charset="-120"/>
-              </a:rPr>
-              <a:t>Investor read: </a:t>
-            </a:r>
-            <a:pPr indent="0" marL="0">
-              <a:buNone/>
-            </a:pPr>
-            <a:r>
-              <a:rPr lang="en-US" sz="950" dirty="0">
-                <a:solidFill>
-                  <a:srgbClr val="C9C9CE"/>
-                </a:solidFill>
-                <a:latin typeface="Arial" pitchFamily="34" charset="0"/>
-                <a:ea typeface="Arial" pitchFamily="34" charset="-122"/>
-                <a:cs typeface="Arial" pitchFamily="34" charset="-120"/>
-              </a:rPr>
-              <a:t>public-ownership is a dilution tail risk no equity model currently carries.</a:t>
-            </a:r>
-            <a:endParaRPr lang="en-US" sz="950" dirty="0"/>
-          </a:p>
-        </p:txBody>
-      </p:sp>
-      <p:sp>
-        <p:nvSpPr>
-          <p:cNvPr id="20" name="Text 18"/>
-          <p:cNvSpPr/>
-          <p:nvPr/>
-        </p:nvSpPr>
-        <p:spPr>
-          <a:xfrm>
-            <a:off x="457200" y="4261104"/>
-            <a:ext cx="8229600" cy="384048"/>
-          </a:xfrm>
-          <a:prstGeom prst="rect">
-            <a:avLst/>
-          </a:prstGeom>
-          <a:noFill/>
-          <a:ln/>
-        </p:spPr>
-        <p:txBody>
-          <a:bodyPr wrap="square" lIns="0" tIns="0" rIns="0" bIns="0" rtlCol="0" anchor="t"/>
-          <a:lstStyle/>
-          <a:p>
-            <a:pPr indent="0" marL="0">
-              <a:buNone/>
-            </a:pPr>
-            <a:r>
-              <a:rPr lang="en-US" sz="700" dirty="0">
-                <a:solidFill>
-                  <a:srgbClr val="8A8A90"/>
-                </a:solidFill>
-                <a:latin typeface="Arial" pitchFamily="34" charset="0"/>
-                <a:ea typeface="Arial" pitchFamily="34" charset="-122"/>
-                <a:cs typeface="Arial" pitchFamily="34" charset="-120"/>
-              </a:rPr>
-              <a:t>Source: Internal strategic review, “The 2026 AI Frontier” (Jun 2026); Korea Herald, Bloomberg, Nikkei Asia (May 2026); Executive Order provisions; Sacks critique.</a:t>
-            </a:r>
-            <a:endParaRPr lang="en-US" sz="700" dirty="0"/>
-          </a:p>
-        </p:txBody>
-      </p:sp>
-      <p:sp>
-        <p:nvSpPr>
-          <p:cNvPr id="21" name="Shape 19"/>
+        </p:txBody>
+      </p:sp>
+      <p:sp>
+        <p:nvSpPr>
+          <p:cNvPr id="16" name="Shape 13"/>
           <p:cNvSpPr/>
           <p:nvPr/>
         </p:nvSpPr>
@@ -11616,7 +8888,7 @@
       </p:sp>
       <p:sp>
         <p:nvSpPr>
-          <p:cNvPr id="22" name="Shape 20"/>
+          <p:cNvPr id="17" name="Shape 14"/>
           <p:cNvSpPr/>
           <p:nvPr/>
         </p:nvSpPr>
@@ -11639,7 +8911,7 @@
       </p:sp>
       <p:sp>
         <p:nvSpPr>
-          <p:cNvPr id="23" name="Text 21"/>
+          <p:cNvPr id="18" name="Text 15"/>
           <p:cNvSpPr/>
           <p:nvPr/>
         </p:nvSpPr>
@@ -11678,7 +8950,7 @@
       </p:sp>
       <p:sp>
         <p:nvSpPr>
-          <p:cNvPr id="24" name="Text 22"/>
+          <p:cNvPr id="19" name="Text 16"/>
           <p:cNvSpPr/>
           <p:nvPr/>
         </p:nvSpPr>
@@ -11800,7 +9072,7 @@
                 <a:ea typeface="Arial" pitchFamily="34" charset="-122"/>
                 <a:cs typeface="Arial" pitchFamily="34" charset="-120"/>
               </a:rPr>
-              <a:t>02  ·  MARKET IMPACT  ·  EQUITIES</a:t>
+              <a:t>02  ·  EARLY MARKET SIGNALS  ·  EQUITIES</a:t>
             </a:r>
             <a:endParaRPr lang="en-US" sz="900" dirty="0"/>
           </a:p>
@@ -12151,7 +9423,7 @@
                 <a:ea typeface="Arial" pitchFamily="34" charset="-122"/>
                 <a:cs typeface="Arial" pitchFamily="34" charset="-120"/>
               </a:rPr>
-              <a:t>Leadership migrated from the platforms to their suppliers. </a:t>
+              <a:t>Leadership is migrating from the platforms to their suppliers — and the reallocation is still underway. </a:t>
             </a:r>
             <a:pPr indent="0" marL="0">
               <a:buNone/>
@@ -12416,7 +9688,7 @@
                 <a:ea typeface="Arial" pitchFamily="34" charset="-122"/>
                 <a:cs typeface="Arial" pitchFamily="34" charset="-120"/>
               </a:rPr>
-              <a:t>02  ·  MARKET IMPACT  ·  LABOR</a:t>
+              <a:t>02  ·  EARLY MARKET SIGNALS  ·  LABOR</a:t>
             </a:r>
             <a:endParaRPr lang="en-US" sz="900" dirty="0"/>
           </a:p>
@@ -12502,170 +9774,107 @@
       </p:sp>
       <p:sp>
         <p:nvSpPr>
-          <p:cNvPr id="6" name="Text 4"/>
-          <p:cNvSpPr/>
-          <p:nvPr/>
-        </p:nvSpPr>
-        <p:spPr>
-          